--- a/output/submission/Route2Zero_Concept_Deck_20_Slides.pptx
+++ b/output/submission/Route2Zero_Concept_Deck_20_Slides.pptx
@@ -2,32 +2,32 @@
 <file path=ppt/presentation.xml><?xml version="1.0" encoding="utf-8"?>
 <p:presentation xmlns:p="http://schemas.openxmlformats.org/presentationml/2006/main">
   <p:sldMasterIdLst>
-    <p:sldMasterId xmlns:r="http://schemas.openxmlformats.org/officeDocument/2006/relationships" id="2147483648" r:id="R3b603a73aca24bff"/>
+    <p:sldMasterId xmlns:r="http://schemas.openxmlformats.org/officeDocument/2006/relationships" id="2147483648" r:id="R9d51720c422b4aca"/>
   </p:sldMasterIdLst>
   <p:notesMasterIdLst>
-    <p:notesMasterId xmlns:r="http://schemas.openxmlformats.org/officeDocument/2006/relationships" r:id="R5ecbac2de1744179"/>
+    <p:notesMasterId xmlns:r="http://schemas.openxmlformats.org/officeDocument/2006/relationships" r:id="R8400621c1dcc452c"/>
   </p:notesMasterIdLst>
   <p:sldIdLst>
-    <p:sldId xmlns:r="http://schemas.openxmlformats.org/officeDocument/2006/relationships" id="256" r:id="Ra8d8aaf7a694427a"/>
-    <p:sldId xmlns:r="http://schemas.openxmlformats.org/officeDocument/2006/relationships" id="257" r:id="Rdfef8bf8ba284f29"/>
-    <p:sldId xmlns:r="http://schemas.openxmlformats.org/officeDocument/2006/relationships" id="258" r:id="R6ce4b53efdd64361"/>
-    <p:sldId xmlns:r="http://schemas.openxmlformats.org/officeDocument/2006/relationships" id="259" r:id="Reba6dee370274edc"/>
-    <p:sldId xmlns:r="http://schemas.openxmlformats.org/officeDocument/2006/relationships" id="260" r:id="R5feb7fc0b8ba4661"/>
-    <p:sldId xmlns:r="http://schemas.openxmlformats.org/officeDocument/2006/relationships" id="261" r:id="R48d6784f72f84fdc"/>
-    <p:sldId xmlns:r="http://schemas.openxmlformats.org/officeDocument/2006/relationships" id="262" r:id="Red576174bc394194"/>
-    <p:sldId xmlns:r="http://schemas.openxmlformats.org/officeDocument/2006/relationships" id="263" r:id="Rcf1f7cfdcb1a4e5c"/>
-    <p:sldId xmlns:r="http://schemas.openxmlformats.org/officeDocument/2006/relationships" id="264" r:id="R570779ec0e084653"/>
-    <p:sldId xmlns:r="http://schemas.openxmlformats.org/officeDocument/2006/relationships" id="265" r:id="R2fa89455657b4ea2"/>
-    <p:sldId xmlns:r="http://schemas.openxmlformats.org/officeDocument/2006/relationships" id="266" r:id="R0249d13d9b564208"/>
-    <p:sldId xmlns:r="http://schemas.openxmlformats.org/officeDocument/2006/relationships" id="267" r:id="Rabda085095104c45"/>
-    <p:sldId xmlns:r="http://schemas.openxmlformats.org/officeDocument/2006/relationships" id="268" r:id="R5f27e3a8733c4deb"/>
-    <p:sldId xmlns:r="http://schemas.openxmlformats.org/officeDocument/2006/relationships" id="269" r:id="R588246aba9544ae9"/>
-    <p:sldId xmlns:r="http://schemas.openxmlformats.org/officeDocument/2006/relationships" id="270" r:id="R1e53fd6923d44f9d"/>
-    <p:sldId xmlns:r="http://schemas.openxmlformats.org/officeDocument/2006/relationships" id="271" r:id="R3f29f8ce24d145c2"/>
-    <p:sldId xmlns:r="http://schemas.openxmlformats.org/officeDocument/2006/relationships" id="272" r:id="Rd37deba1382641e6"/>
-    <p:sldId xmlns:r="http://schemas.openxmlformats.org/officeDocument/2006/relationships" id="273" r:id="R7f6d14951adf4ebc"/>
-    <p:sldId xmlns:r="http://schemas.openxmlformats.org/officeDocument/2006/relationships" id="274" r:id="Ra2a341c42bec4091"/>
-    <p:sldId xmlns:r="http://schemas.openxmlformats.org/officeDocument/2006/relationships" id="275" r:id="Rf762dd5412f74551"/>
+    <p:sldId xmlns:r="http://schemas.openxmlformats.org/officeDocument/2006/relationships" id="256" r:id="R37328b997f104366"/>
+    <p:sldId xmlns:r="http://schemas.openxmlformats.org/officeDocument/2006/relationships" id="257" r:id="Ra754cd39fbab4066"/>
+    <p:sldId xmlns:r="http://schemas.openxmlformats.org/officeDocument/2006/relationships" id="258" r:id="R84a5cf74388245f7"/>
+    <p:sldId xmlns:r="http://schemas.openxmlformats.org/officeDocument/2006/relationships" id="259" r:id="R3e9288a594a844b9"/>
+    <p:sldId xmlns:r="http://schemas.openxmlformats.org/officeDocument/2006/relationships" id="260" r:id="Rbc96a8d27b8a4302"/>
+    <p:sldId xmlns:r="http://schemas.openxmlformats.org/officeDocument/2006/relationships" id="261" r:id="R84f3fac8812f4f7c"/>
+    <p:sldId xmlns:r="http://schemas.openxmlformats.org/officeDocument/2006/relationships" id="262" r:id="R4d84563451d1471c"/>
+    <p:sldId xmlns:r="http://schemas.openxmlformats.org/officeDocument/2006/relationships" id="263" r:id="R6a426ec3192e4fd7"/>
+    <p:sldId xmlns:r="http://schemas.openxmlformats.org/officeDocument/2006/relationships" id="264" r:id="Rcfe3fe1a09c6453f"/>
+    <p:sldId xmlns:r="http://schemas.openxmlformats.org/officeDocument/2006/relationships" id="265" r:id="R4f6bee92eb9d47f4"/>
+    <p:sldId xmlns:r="http://schemas.openxmlformats.org/officeDocument/2006/relationships" id="266" r:id="Re7fd9a8fbcd94e82"/>
+    <p:sldId xmlns:r="http://schemas.openxmlformats.org/officeDocument/2006/relationships" id="267" r:id="Rf747abfc4b804be3"/>
+    <p:sldId xmlns:r="http://schemas.openxmlformats.org/officeDocument/2006/relationships" id="268" r:id="Rdcf3da53dfc64ce5"/>
+    <p:sldId xmlns:r="http://schemas.openxmlformats.org/officeDocument/2006/relationships" id="269" r:id="R29dfd9d043534552"/>
+    <p:sldId xmlns:r="http://schemas.openxmlformats.org/officeDocument/2006/relationships" id="270" r:id="R9f8c45448adb4d8c"/>
+    <p:sldId xmlns:r="http://schemas.openxmlformats.org/officeDocument/2006/relationships" id="271" r:id="Rf1ad94c36f6e4683"/>
+    <p:sldId xmlns:r="http://schemas.openxmlformats.org/officeDocument/2006/relationships" id="272" r:id="Rc7ed42e4eb964d23"/>
+    <p:sldId xmlns:r="http://schemas.openxmlformats.org/officeDocument/2006/relationships" id="273" r:id="R70bc3292e85e4aa3"/>
+    <p:sldId xmlns:r="http://schemas.openxmlformats.org/officeDocument/2006/relationships" id="274" r:id="R393ea02a913342cf"/>
+    <p:sldId xmlns:r="http://schemas.openxmlformats.org/officeDocument/2006/relationships" id="275" r:id="R124c1d3e930943ff"/>
   </p:sldIdLst>
   <p:sldSz cx="12192000" cy="6858000"/>
   <p:notesSz cx="6858000" cy="9144000"/>
@@ -2054,7 +2054,7 @@
   </p:cSld>
   <p:clrMap bg1="lt1" tx1="dk1" bg2="lt2" tx2="dk2" accent1="accent1" accent2="accent2" accent3="accent3" accent4="accent4" accent5="accent5" accent6="accent6" hlink="hlink" folHlink="folHlink"/>
   <p:sldLayoutIdLst>
-    <p:sldLayoutId xmlns:r="http://schemas.openxmlformats.org/officeDocument/2006/relationships" id="2147483649" r:id="R560d8015b6034d28"/>
+    <p:sldLayoutId xmlns:r="http://schemas.openxmlformats.org/officeDocument/2006/relationships" id="2147483649" r:id="R0f59af58fe854404"/>
   </p:sldLayoutIdLst>
   <p:txStyles>
     <p:titleStyle>
@@ -3202,8 +3202,8 @@
           <p:nvPr/>
         </p:nvPicPr>
         <p:blipFill>
-          <a:blip xmlns:r="http://schemas.openxmlformats.org/officeDocument/2006/relationships" xmlns:a="http://schemas.openxmlformats.org/drawingml/2006/main" r:embed="Rb100dea47bd442a1"/>
-          <a:srcRect xmlns:a="http://schemas.openxmlformats.org/drawingml/2006/main" l="22756" t="0" r="22756" b="0"/>
+          <a:blip xmlns:r="http://schemas.openxmlformats.org/officeDocument/2006/relationships" xmlns:a="http://schemas.openxmlformats.org/drawingml/2006/main" r:embed="R60eab6d35297441e"/>
+          <a:srcRect xmlns:a="http://schemas.openxmlformats.org/drawingml/2006/main" l="22750" t="0" r="22750" b="0"/>
           <a:stretch xmlns:a="http://schemas.openxmlformats.org/drawingml/2006/main">
             <a:fillRect l="0" t="0" r="0" b="0"/>
           </a:stretch>
@@ -3223,7 +3223,7 @@
           <p:cNvPr id="2" name="">
             <a:extLst xmlns:a="http://schemas.openxmlformats.org/drawingml/2006/main">
               <a:ext uri="{FF2B5EF4-FFF2-40B4-BE49-F238E27FC236}">
-                <a16:creationId xmlns:a16="http://schemas.microsoft.com/office/drawing/2014/main" id="{8A194112-D6C4-47F7-AD21-B1E28FDA713C}"/>
+                <a16:creationId xmlns:a16="http://schemas.microsoft.com/office/drawing/2014/main" id="{8FB0304A-D557-44E3-BF84-16D155016C0D}"/>
               </a:ext>
             </a:extLst>
           </p:cNvPr>
@@ -3269,7 +3269,7 @@
           <p:cNvPr id="3" name="">
             <a:extLst xmlns:a="http://schemas.openxmlformats.org/drawingml/2006/main">
               <a:ext uri="{FF2B5EF4-FFF2-40B4-BE49-F238E27FC236}">
-                <a16:creationId xmlns:a16="http://schemas.microsoft.com/office/drawing/2014/main" id="{8E23B32C-808A-41BE-97E2-1CDFD878187C}"/>
+                <a16:creationId xmlns:a16="http://schemas.microsoft.com/office/drawing/2014/main" id="{7BD55893-D84D-49A9-8526-57C1567DDFB5}"/>
               </a:ext>
             </a:extLst>
           </p:cNvPr>
@@ -3331,7 +3331,7 @@
                 <a:latin typeface="Arial"/>
                 <a:ea typeface="Arial"/>
                 <a:cs typeface="Arial"/>
-                <a:hlinkClick xmlns:r="http://schemas.openxmlformats.org/officeDocument/2006/relationships" r:id="R2cd968774c734bce"/>
+                <a:hlinkClick xmlns:r="http://schemas.openxmlformats.org/officeDocument/2006/relationships" r:id="R04be7f3db49b4b93"/>
               </a:rPr>
               <a:t>https://github.com/qjmre23/Route2Zero</a:t>
             </a:r>
@@ -3354,7 +3354,7 @@
                 <a:latin typeface="Arial"/>
                 <a:ea typeface="Arial"/>
                 <a:cs typeface="Arial"/>
-                <a:hlinkClick xmlns:r="http://schemas.openxmlformats.org/officeDocument/2006/relationships" r:id="Rabbac0e9a2094278"/>
+                <a:hlinkClick xmlns:r="http://schemas.openxmlformats.org/officeDocument/2006/relationships" r:id="Re04dbe2b2b0e4c2b"/>
               </a:rPr>
               <a:t>https://route2zero.netlify.app/</a:t>
             </a:r>
@@ -3366,7 +3366,7 @@
           <p:cNvPr id="4" name="">
             <a:extLst xmlns:a="http://schemas.openxmlformats.org/drawingml/2006/main">
               <a:ext uri="{FF2B5EF4-FFF2-40B4-BE49-F238E27FC236}">
-                <a16:creationId xmlns:a16="http://schemas.microsoft.com/office/drawing/2014/main" id="{F1C3624F-A16B-4A29-A5D2-8FEC29416182}"/>
+                <a16:creationId xmlns:a16="http://schemas.microsoft.com/office/drawing/2014/main" id="{632A2545-30B4-46FC-A4CF-EF8E44570BC0}"/>
               </a:ext>
             </a:extLst>
           </p:cNvPr>
@@ -3428,7 +3428,7 @@
           <p:cNvPr id="5" name="">
             <a:extLst xmlns:a="http://schemas.openxmlformats.org/drawingml/2006/main">
               <a:ext uri="{FF2B5EF4-FFF2-40B4-BE49-F238E27FC236}">
-                <a16:creationId xmlns:a16="http://schemas.microsoft.com/office/drawing/2014/main" id="{A38BC87E-275A-4A37-B245-BB299CF74F36}"/>
+                <a16:creationId xmlns:a16="http://schemas.microsoft.com/office/drawing/2014/main" id="{4F16D514-035D-46D1-896D-3F2CA82AEC29}"/>
               </a:ext>
             </a:extLst>
           </p:cNvPr>
@@ -3490,7 +3490,7 @@
           <p:cNvPr id="6" name="">
             <a:extLst xmlns:a="http://schemas.openxmlformats.org/drawingml/2006/main">
               <a:ext uri="{FF2B5EF4-FFF2-40B4-BE49-F238E27FC236}">
-                <a16:creationId xmlns:a16="http://schemas.microsoft.com/office/drawing/2014/main" id="{F44F6BF7-F0BA-434F-A621-61FC5665449E}"/>
+                <a16:creationId xmlns:a16="http://schemas.microsoft.com/office/drawing/2014/main" id="{F9C61742-0072-4A88-A951-C66CF3E29C7E}"/>
               </a:ext>
             </a:extLst>
           </p:cNvPr>
@@ -3552,7 +3552,7 @@
           <p:cNvPr id="7" name="">
             <a:extLst xmlns:a="http://schemas.openxmlformats.org/drawingml/2006/main">
               <a:ext uri="{FF2B5EF4-FFF2-40B4-BE49-F238E27FC236}">
-                <a16:creationId xmlns:a16="http://schemas.microsoft.com/office/drawing/2014/main" id="{E8EC3974-18BE-4BD5-A343-991E9787A632}"/>
+                <a16:creationId xmlns:a16="http://schemas.microsoft.com/office/drawing/2014/main" id="{E0A188DD-FBBA-4D8E-8744-DCE2700DEB4C}"/>
               </a:ext>
             </a:extLst>
           </p:cNvPr>
@@ -3614,7 +3614,7 @@
           <p:cNvPr id="8" name="">
             <a:extLst xmlns:a="http://schemas.openxmlformats.org/drawingml/2006/main">
               <a:ext uri="{FF2B5EF4-FFF2-40B4-BE49-F238E27FC236}">
-                <a16:creationId xmlns:a16="http://schemas.microsoft.com/office/drawing/2014/main" id="{A0FD808C-D882-471E-9198-82A770686134}"/>
+                <a16:creationId xmlns:a16="http://schemas.microsoft.com/office/drawing/2014/main" id="{E07F0C92-3826-4B1A-9E36-1DFEC29933ED}"/>
               </a:ext>
             </a:extLst>
           </p:cNvPr>
@@ -3676,7 +3676,7 @@
           <p:cNvPr id="9" name="">
             <a:extLst xmlns:a="http://schemas.openxmlformats.org/drawingml/2006/main">
               <a:ext uri="{FF2B5EF4-FFF2-40B4-BE49-F238E27FC236}">
-                <a16:creationId xmlns:a16="http://schemas.microsoft.com/office/drawing/2014/main" id="{8F5FA814-79FA-428B-95A9-BCA976EEFC95}"/>
+                <a16:creationId xmlns:a16="http://schemas.microsoft.com/office/drawing/2014/main" id="{3BCE7992-E52F-4E87-A475-6423A0006332}"/>
               </a:ext>
             </a:extLst>
           </p:cNvPr>
@@ -3738,7 +3738,7 @@
           <p:cNvPr id="10" name="">
             <a:extLst xmlns:a="http://schemas.openxmlformats.org/drawingml/2006/main">
               <a:ext uri="{FF2B5EF4-FFF2-40B4-BE49-F238E27FC236}">
-                <a16:creationId xmlns:a16="http://schemas.microsoft.com/office/drawing/2014/main" id="{25E0C598-E8B0-4102-8C3B-51FF62AF1081}"/>
+                <a16:creationId xmlns:a16="http://schemas.microsoft.com/office/drawing/2014/main" id="{3A77E719-591C-4A4C-BC28-2EC0EA25A102}"/>
               </a:ext>
             </a:extLst>
           </p:cNvPr>
@@ -3800,7 +3800,7 @@
           <p:cNvPr id="11" name="">
             <a:extLst xmlns:a="http://schemas.openxmlformats.org/drawingml/2006/main">
               <a:ext uri="{FF2B5EF4-FFF2-40B4-BE49-F238E27FC236}">
-                <a16:creationId xmlns:a16="http://schemas.microsoft.com/office/drawing/2014/main" id="{14BCA38B-A03F-461E-B37A-5D211C3D746B}"/>
+                <a16:creationId xmlns:a16="http://schemas.microsoft.com/office/drawing/2014/main" id="{E61955B2-50C8-4310-B1C0-305C4709CB33}"/>
               </a:ext>
             </a:extLst>
           </p:cNvPr>
@@ -3862,7 +3862,7 @@
           <p:cNvPr id="12" name="">
             <a:extLst xmlns:a="http://schemas.openxmlformats.org/drawingml/2006/main">
               <a:ext uri="{FF2B5EF4-FFF2-40B4-BE49-F238E27FC236}">
-                <a16:creationId xmlns:a16="http://schemas.microsoft.com/office/drawing/2014/main" id="{07CFEB92-E5BB-48A4-B7AA-487AA76C04D5}"/>
+                <a16:creationId xmlns:a16="http://schemas.microsoft.com/office/drawing/2014/main" id="{7FEE7DE6-48D4-4C77-AC14-026FE25A9281}"/>
               </a:ext>
             </a:extLst>
           </p:cNvPr>
@@ -3924,7 +3924,7 @@
           <p:cNvPr id="13" name="">
             <a:extLst xmlns:a="http://schemas.openxmlformats.org/drawingml/2006/main">
               <a:ext uri="{FF2B5EF4-FFF2-40B4-BE49-F238E27FC236}">
-                <a16:creationId xmlns:a16="http://schemas.microsoft.com/office/drawing/2014/main" id="{72CC7758-32EA-471C-81B0-82BD543ED496}"/>
+                <a16:creationId xmlns:a16="http://schemas.microsoft.com/office/drawing/2014/main" id="{A2032D75-33AE-457B-8CC6-01419F05EB09}"/>
               </a:ext>
             </a:extLst>
           </p:cNvPr>
@@ -3986,7 +3986,7 @@
           <p:cNvPr id="14" name="">
             <a:extLst xmlns:a="http://schemas.openxmlformats.org/drawingml/2006/main">
               <a:ext uri="{FF2B5EF4-FFF2-40B4-BE49-F238E27FC236}">
-                <a16:creationId xmlns:a16="http://schemas.microsoft.com/office/drawing/2014/main" id="{5358A512-D6DA-4737-83FE-FD7ABB1A772A}"/>
+                <a16:creationId xmlns:a16="http://schemas.microsoft.com/office/drawing/2014/main" id="{63259D81-0291-43A6-9B4A-81D6C5F43CE3}"/>
               </a:ext>
             </a:extLst>
           </p:cNvPr>
@@ -4017,7 +4017,7 @@
           <p:cNvPr id="15" name="">
             <a:extLst xmlns:a="http://schemas.openxmlformats.org/drawingml/2006/main">
               <a:ext uri="{FF2B5EF4-FFF2-40B4-BE49-F238E27FC236}">
-                <a16:creationId xmlns:a16="http://schemas.microsoft.com/office/drawing/2014/main" id="{361E76E2-2D07-4C56-A69D-8BAEA5679F2A}"/>
+                <a16:creationId xmlns:a16="http://schemas.microsoft.com/office/drawing/2014/main" id="{F1F79F5D-BAE1-465D-BC91-DE96FD649E87}"/>
               </a:ext>
             </a:extLst>
           </p:cNvPr>
@@ -4069,7 +4069,7 @@
                 <a:ea typeface="Arial"/>
                 <a:cs typeface="Arial"/>
               </a:rPr>
-              <a:t>r2z-16690ccbe328 · scn-c46e1d86c1</a:t>
+              <a:t>r2z-45c4ba076af9 · scn-e0f12f397e</a:t>
             </a:r>
           </a:p>
         </p:txBody>
@@ -4079,7 +4079,7 @@
           <p:cNvPr id="16" name="">
             <a:extLst xmlns:a="http://schemas.openxmlformats.org/drawingml/2006/main">
               <a:ext uri="{FF2B5EF4-FFF2-40B4-BE49-F238E27FC236}">
-                <a16:creationId xmlns:a16="http://schemas.microsoft.com/office/drawing/2014/main" id="{AEF03E3C-CD5E-4254-B446-340720D868B0}"/>
+                <a16:creationId xmlns:a16="http://schemas.microsoft.com/office/drawing/2014/main" id="{DC468937-4989-4DA0-8224-CD6F448FCCFB}"/>
               </a:ext>
             </a:extLst>
           </p:cNvPr>
@@ -4139,7 +4139,7 @@
     </p:spTree>
     <p:extLst>
       <p:ext uri="{BB962C8B-B14F-4D97-AF65-F5344CB8AC3E}">
-        <p14:creationId xmlns:p14="http://schemas.microsoft.com/office/powerpoint/2010/main" val="1267478281"/>
+        <p14:creationId xmlns:p14="http://schemas.microsoft.com/office/powerpoint/2010/main" val="1089876524"/>
       </p:ext>
     </p:extLst>
   </p:cSld>
@@ -4170,7 +4170,7 @@
           <p:cNvPr id="14" name="">
             <a:extLst xmlns:a="http://schemas.openxmlformats.org/drawingml/2006/main">
               <a:ext uri="{FF2B5EF4-FFF2-40B4-BE49-F238E27FC236}">
-                <a16:creationId xmlns:a16="http://schemas.microsoft.com/office/drawing/2014/main" id="{6F0606E8-B710-475D-ABA6-6625FB47FB6E}"/>
+                <a16:creationId xmlns:a16="http://schemas.microsoft.com/office/drawing/2014/main" id="{A0D79C56-9AF8-4F5E-9E6F-687AC734D47E}"/>
               </a:ext>
             </a:extLst>
           </p:cNvPr>
@@ -4232,7 +4232,7 @@
                 <a:latin typeface="Arial"/>
                 <a:ea typeface="Arial"/>
                 <a:cs typeface="Arial"/>
-                <a:hlinkClick xmlns:r="http://schemas.openxmlformats.org/officeDocument/2006/relationships" r:id="R40c49b5beb80411a"/>
+                <a:hlinkClick xmlns:r="http://schemas.openxmlformats.org/officeDocument/2006/relationships" r:id="R08e89a2d857f41c9"/>
               </a:rPr>
               <a:t>https://github.com/qjmre23/Route2Zero</a:t>
             </a:r>
@@ -4255,7 +4255,7 @@
                 <a:latin typeface="Arial"/>
                 <a:ea typeface="Arial"/>
                 <a:cs typeface="Arial"/>
-                <a:hlinkClick xmlns:r="http://schemas.openxmlformats.org/officeDocument/2006/relationships" r:id="R477c4cb7da6b4bb4"/>
+                <a:hlinkClick xmlns:r="http://schemas.openxmlformats.org/officeDocument/2006/relationships" r:id="Rb84cb92e7cee4677"/>
               </a:rPr>
               <a:t>https://route2zero.netlify.app/</a:t>
             </a:r>
@@ -4267,7 +4267,7 @@
           <p:cNvPr id="2" name="">
             <a:extLst xmlns:a="http://schemas.openxmlformats.org/drawingml/2006/main">
               <a:ext uri="{FF2B5EF4-FFF2-40B4-BE49-F238E27FC236}">
-                <a16:creationId xmlns:a16="http://schemas.microsoft.com/office/drawing/2014/main" id="{C4F56B4E-B498-440A-9E45-893B51B4B433}"/>
+                <a16:creationId xmlns:a16="http://schemas.microsoft.com/office/drawing/2014/main" id="{CEAE0A47-4B80-4515-B200-836E5ABDF881}"/>
               </a:ext>
             </a:extLst>
           </p:cNvPr>
@@ -4329,7 +4329,7 @@
           <p:cNvPr id="3" name="">
             <a:extLst xmlns:a="http://schemas.openxmlformats.org/drawingml/2006/main">
               <a:ext uri="{FF2B5EF4-FFF2-40B4-BE49-F238E27FC236}">
-                <a16:creationId xmlns:a16="http://schemas.microsoft.com/office/drawing/2014/main" id="{0BA4FF05-3628-40CA-B32F-5F1D0A4BBE50}"/>
+                <a16:creationId xmlns:a16="http://schemas.microsoft.com/office/drawing/2014/main" id="{077346B6-F116-415C-9137-2416C84FD142}"/>
               </a:ext>
             </a:extLst>
           </p:cNvPr>
@@ -4395,8 +4395,8 @@
           <p:nvPr/>
         </p:nvPicPr>
         <p:blipFill>
-          <a:blip xmlns:r="http://schemas.openxmlformats.org/officeDocument/2006/relationships" xmlns:a="http://schemas.openxmlformats.org/drawingml/2006/main" r:embed="Rf689e20c976e4ab8"/>
-          <a:srcRect xmlns:a="http://schemas.openxmlformats.org/drawingml/2006/main" l="0" t="180" r="0" b="180"/>
+          <a:blip xmlns:r="http://schemas.openxmlformats.org/officeDocument/2006/relationships" xmlns:a="http://schemas.openxmlformats.org/drawingml/2006/main" r:embed="R55f297f961064b7b"/>
+          <a:srcRect xmlns:a="http://schemas.openxmlformats.org/drawingml/2006/main" l="0" t="189" r="0" b="189"/>
           <a:stretch xmlns:a="http://schemas.openxmlformats.org/drawingml/2006/main">
             <a:fillRect l="0" t="0" r="0" b="0"/>
           </a:stretch>
@@ -4418,7 +4418,7 @@
           <p:cNvPr id="5" name="">
             <a:extLst xmlns:a="http://schemas.openxmlformats.org/drawingml/2006/main">
               <a:ext uri="{FF2B5EF4-FFF2-40B4-BE49-F238E27FC236}">
-                <a16:creationId xmlns:a16="http://schemas.microsoft.com/office/drawing/2014/main" id="{506A9C0A-A821-4118-98EE-0B4B6167A0A7}"/>
+                <a16:creationId xmlns:a16="http://schemas.microsoft.com/office/drawing/2014/main" id="{1CBE3B82-4784-41CD-86F2-1404F4E780CE}"/>
               </a:ext>
             </a:extLst>
           </p:cNvPr>
@@ -4458,7 +4458,7 @@
         </p:xfrm>
         <a:graphic xmlns:a="http://schemas.openxmlformats.org/drawingml/2006/main">
           <a:graphicData uri="http://schemas.openxmlformats.org/drawingml/2006/chart">
-            <c:chart xmlns:r="http://schemas.openxmlformats.org/officeDocument/2006/relationships" xmlns:c="http://schemas.openxmlformats.org/drawingml/2006/chart" r:id="R3c91b70822194459"/>
+            <c:chart xmlns:r="http://schemas.openxmlformats.org/officeDocument/2006/relationships" xmlns:c="http://schemas.openxmlformats.org/drawingml/2006/chart" r:id="R010a3ceea9f4455f"/>
           </a:graphicData>
         </a:graphic>
       </p:graphicFrame>
@@ -4467,7 +4467,7 @@
           <p:cNvPr id="7" name="">
             <a:extLst xmlns:a="http://schemas.openxmlformats.org/drawingml/2006/main">
               <a:ext uri="{FF2B5EF4-FFF2-40B4-BE49-F238E27FC236}">
-                <a16:creationId xmlns:a16="http://schemas.microsoft.com/office/drawing/2014/main" id="{BFD17067-3019-4DB5-B1A7-A01A965F41AC}"/>
+                <a16:creationId xmlns:a16="http://schemas.microsoft.com/office/drawing/2014/main" id="{84AAFF79-0A17-4FF0-B9C2-4C38CD3B09C4}"/>
               </a:ext>
             </a:extLst>
           </p:cNvPr>
@@ -4500,7 +4500,7 @@
           <p:cNvPr id="8" name="">
             <a:extLst xmlns:a="http://schemas.openxmlformats.org/drawingml/2006/main">
               <a:ext uri="{FF2B5EF4-FFF2-40B4-BE49-F238E27FC236}">
-                <a16:creationId xmlns:a16="http://schemas.microsoft.com/office/drawing/2014/main" id="{183C7D01-1DA0-4AEA-B51B-C69294A5BB4B}"/>
+                <a16:creationId xmlns:a16="http://schemas.microsoft.com/office/drawing/2014/main" id="{9F7362C2-792F-4931-A0FF-CEA29BAECE97}"/>
               </a:ext>
             </a:extLst>
           </p:cNvPr>
@@ -4562,7 +4562,7 @@
           <p:cNvPr id="9" name="">
             <a:extLst xmlns:a="http://schemas.openxmlformats.org/drawingml/2006/main">
               <a:ext uri="{FF2B5EF4-FFF2-40B4-BE49-F238E27FC236}">
-                <a16:creationId xmlns:a16="http://schemas.microsoft.com/office/drawing/2014/main" id="{EAC7B4C3-5AE5-4039-BFC3-A882DD52D0FF}"/>
+                <a16:creationId xmlns:a16="http://schemas.microsoft.com/office/drawing/2014/main" id="{11A77056-A951-4CD5-8992-A8E989CE7561}"/>
               </a:ext>
             </a:extLst>
           </p:cNvPr>
@@ -4624,7 +4624,7 @@
           <p:cNvPr id="10" name="">
             <a:extLst xmlns:a="http://schemas.openxmlformats.org/drawingml/2006/main">
               <a:ext uri="{FF2B5EF4-FFF2-40B4-BE49-F238E27FC236}">
-                <a16:creationId xmlns:a16="http://schemas.microsoft.com/office/drawing/2014/main" id="{0941CEAF-BA8B-4D87-A4A2-16DD8556A937}"/>
+                <a16:creationId xmlns:a16="http://schemas.microsoft.com/office/drawing/2014/main" id="{2DF102E5-D859-4E0E-945D-D330E394EFA2}"/>
               </a:ext>
             </a:extLst>
           </p:cNvPr>
@@ -4713,7 +4713,7 @@
           <p:cNvPr id="11" name="">
             <a:extLst xmlns:a="http://schemas.openxmlformats.org/drawingml/2006/main">
               <a:ext uri="{FF2B5EF4-FFF2-40B4-BE49-F238E27FC236}">
-                <a16:creationId xmlns:a16="http://schemas.microsoft.com/office/drawing/2014/main" id="{6E639590-07A9-4FF8-BE21-21EB35F0610D}"/>
+                <a16:creationId xmlns:a16="http://schemas.microsoft.com/office/drawing/2014/main" id="{3D6CD040-FA24-41B0-B8E2-C2DC78FB22C4}"/>
               </a:ext>
             </a:extLst>
           </p:cNvPr>
@@ -4744,7 +4744,7 @@
           <p:cNvPr id="12" name="">
             <a:extLst xmlns:a="http://schemas.openxmlformats.org/drawingml/2006/main">
               <a:ext uri="{FF2B5EF4-FFF2-40B4-BE49-F238E27FC236}">
-                <a16:creationId xmlns:a16="http://schemas.microsoft.com/office/drawing/2014/main" id="{01AF6BE7-306D-4B3C-8C9C-92C405DD9274}"/>
+                <a16:creationId xmlns:a16="http://schemas.microsoft.com/office/drawing/2014/main" id="{F800BFA3-1508-42B2-8179-93ED4EAECA61}"/>
               </a:ext>
             </a:extLst>
           </p:cNvPr>
@@ -4796,7 +4796,7 @@
                 <a:ea typeface="Arial"/>
                 <a:cs typeface="Arial"/>
               </a:rPr>
-              <a:t>r2z-16690ccbe328 · scn-c46e1d86c1</a:t>
+              <a:t>r2z-45c4ba076af9 · scn-e0f12f397e</a:t>
             </a:r>
           </a:p>
         </p:txBody>
@@ -4806,7 +4806,7 @@
           <p:cNvPr id="13" name="">
             <a:extLst xmlns:a="http://schemas.openxmlformats.org/drawingml/2006/main">
               <a:ext uri="{FF2B5EF4-FFF2-40B4-BE49-F238E27FC236}">
-                <a16:creationId xmlns:a16="http://schemas.microsoft.com/office/drawing/2014/main" id="{704E6A1F-624E-4E63-838A-7DBA68F7E4DC}"/>
+                <a16:creationId xmlns:a16="http://schemas.microsoft.com/office/drawing/2014/main" id="{F430C176-F2A8-4224-814C-71CED39F2351}"/>
               </a:ext>
             </a:extLst>
           </p:cNvPr>
@@ -4866,7 +4866,7 @@
     </p:spTree>
     <p:extLst>
       <p:ext uri="{BB962C8B-B14F-4D97-AF65-F5344CB8AC3E}">
-        <p14:creationId xmlns:p14="http://schemas.microsoft.com/office/powerpoint/2010/main" val="377772240"/>
+        <p14:creationId xmlns:p14="http://schemas.microsoft.com/office/powerpoint/2010/main" val="1144350433"/>
       </p:ext>
     </p:extLst>
   </p:cSld>
@@ -4897,7 +4897,7 @@
           <p:cNvPr id="23" name="">
             <a:extLst xmlns:a="http://schemas.openxmlformats.org/drawingml/2006/main">
               <a:ext uri="{FF2B5EF4-FFF2-40B4-BE49-F238E27FC236}">
-                <a16:creationId xmlns:a16="http://schemas.microsoft.com/office/drawing/2014/main" id="{053611A3-763A-4498-BA41-D88B5F0A6328}"/>
+                <a16:creationId xmlns:a16="http://schemas.microsoft.com/office/drawing/2014/main" id="{16EE8225-8428-4A86-9F42-642AA7C4B934}"/>
               </a:ext>
             </a:extLst>
           </p:cNvPr>
@@ -4959,7 +4959,7 @@
                 <a:latin typeface="Arial"/>
                 <a:ea typeface="Arial"/>
                 <a:cs typeface="Arial"/>
-                <a:hlinkClick xmlns:r="http://schemas.openxmlformats.org/officeDocument/2006/relationships" r:id="Rfe170a0b9590496d"/>
+                <a:hlinkClick xmlns:r="http://schemas.openxmlformats.org/officeDocument/2006/relationships" r:id="R041f9b03ff25455f"/>
               </a:rPr>
               <a:t>https://github.com/qjmre23/Route2Zero</a:t>
             </a:r>
@@ -4982,7 +4982,7 @@
                 <a:latin typeface="Arial"/>
                 <a:ea typeface="Arial"/>
                 <a:cs typeface="Arial"/>
-                <a:hlinkClick xmlns:r="http://schemas.openxmlformats.org/officeDocument/2006/relationships" r:id="R366951ead70341b6"/>
+                <a:hlinkClick xmlns:r="http://schemas.openxmlformats.org/officeDocument/2006/relationships" r:id="R4c8ddd86f23840c6"/>
               </a:rPr>
               <a:t>https://route2zero.netlify.app/</a:t>
             </a:r>
@@ -4994,7 +4994,7 @@
           <p:cNvPr id="2" name="">
             <a:extLst xmlns:a="http://schemas.openxmlformats.org/drawingml/2006/main">
               <a:ext uri="{FF2B5EF4-FFF2-40B4-BE49-F238E27FC236}">
-                <a16:creationId xmlns:a16="http://schemas.microsoft.com/office/drawing/2014/main" id="{D25EE7CA-EB3C-473C-B47C-266C5D6AE5BA}"/>
+                <a16:creationId xmlns:a16="http://schemas.microsoft.com/office/drawing/2014/main" id="{DE4DA1B8-B132-4B1A-B5AB-883D4106A5C8}"/>
               </a:ext>
             </a:extLst>
           </p:cNvPr>
@@ -5056,7 +5056,7 @@
           <p:cNvPr id="3" name="">
             <a:extLst xmlns:a="http://schemas.openxmlformats.org/drawingml/2006/main">
               <a:ext uri="{FF2B5EF4-FFF2-40B4-BE49-F238E27FC236}">
-                <a16:creationId xmlns:a16="http://schemas.microsoft.com/office/drawing/2014/main" id="{94E0D4AE-1BD3-489C-83B5-0B6FD22B1E5C}"/>
+                <a16:creationId xmlns:a16="http://schemas.microsoft.com/office/drawing/2014/main" id="{A0E707BF-503B-4D42-9AB6-7803B51850D9}"/>
               </a:ext>
             </a:extLst>
           </p:cNvPr>
@@ -5118,7 +5118,7 @@
           <p:cNvPr id="4" name="">
             <a:extLst xmlns:a="http://schemas.openxmlformats.org/drawingml/2006/main">
               <a:ext uri="{FF2B5EF4-FFF2-40B4-BE49-F238E27FC236}">
-                <a16:creationId xmlns:a16="http://schemas.microsoft.com/office/drawing/2014/main" id="{22B3D4D7-7F00-4EAE-BCA5-30E68F674958}"/>
+                <a16:creationId xmlns:a16="http://schemas.microsoft.com/office/drawing/2014/main" id="{D7CB1FD0-457F-4D20-9EC4-59D593AA83EC}"/>
               </a:ext>
             </a:extLst>
           </p:cNvPr>
@@ -5180,7 +5180,7 @@
           <p:cNvPr id="5" name="">
             <a:extLst xmlns:a="http://schemas.openxmlformats.org/drawingml/2006/main">
               <a:ext uri="{FF2B5EF4-FFF2-40B4-BE49-F238E27FC236}">
-                <a16:creationId xmlns:a16="http://schemas.microsoft.com/office/drawing/2014/main" id="{A052A352-B329-49D4-B390-A8ADE3DB162C}"/>
+                <a16:creationId xmlns:a16="http://schemas.microsoft.com/office/drawing/2014/main" id="{FED25C33-6DCB-47BE-9B64-B67F36AFCEB7}"/>
               </a:ext>
             </a:extLst>
           </p:cNvPr>
@@ -5242,7 +5242,7 @@
           <p:cNvPr id="6" name="">
             <a:extLst xmlns:a="http://schemas.openxmlformats.org/drawingml/2006/main">
               <a:ext uri="{FF2B5EF4-FFF2-40B4-BE49-F238E27FC236}">
-                <a16:creationId xmlns:a16="http://schemas.microsoft.com/office/drawing/2014/main" id="{22887B37-47BA-47D9-AAB7-C30F03CF1248}"/>
+                <a16:creationId xmlns:a16="http://schemas.microsoft.com/office/drawing/2014/main" id="{DB033C55-AA4F-44E8-A3C6-06D81FACCA41}"/>
               </a:ext>
             </a:extLst>
           </p:cNvPr>
@@ -5304,7 +5304,7 @@
           <p:cNvPr id="7" name="">
             <a:extLst xmlns:a="http://schemas.openxmlformats.org/drawingml/2006/main">
               <a:ext uri="{FF2B5EF4-FFF2-40B4-BE49-F238E27FC236}">
-                <a16:creationId xmlns:a16="http://schemas.microsoft.com/office/drawing/2014/main" id="{4C0930B7-F907-474D-9AD4-CBA3D01AEC6C}"/>
+                <a16:creationId xmlns:a16="http://schemas.microsoft.com/office/drawing/2014/main" id="{CC2CDFAD-EE78-41F1-856B-7539E7765C25}"/>
               </a:ext>
             </a:extLst>
           </p:cNvPr>
@@ -5366,7 +5366,7 @@
           <p:cNvPr id="8" name="">
             <a:extLst xmlns:a="http://schemas.openxmlformats.org/drawingml/2006/main">
               <a:ext uri="{FF2B5EF4-FFF2-40B4-BE49-F238E27FC236}">
-                <a16:creationId xmlns:a16="http://schemas.microsoft.com/office/drawing/2014/main" id="{1DC77909-B288-497D-8E3C-EDE9D969C45D}"/>
+                <a16:creationId xmlns:a16="http://schemas.microsoft.com/office/drawing/2014/main" id="{AB6A2977-55EA-4DBC-B3FF-3EE0F6D563D2}"/>
               </a:ext>
             </a:extLst>
           </p:cNvPr>
@@ -5428,7 +5428,7 @@
           <p:cNvPr id="9" name="">
             <a:extLst xmlns:a="http://schemas.openxmlformats.org/drawingml/2006/main">
               <a:ext uri="{FF2B5EF4-FFF2-40B4-BE49-F238E27FC236}">
-                <a16:creationId xmlns:a16="http://schemas.microsoft.com/office/drawing/2014/main" id="{2200C1DD-7B4F-40B3-92C9-C3B17B38B6BF}"/>
+                <a16:creationId xmlns:a16="http://schemas.microsoft.com/office/drawing/2014/main" id="{53AAF705-9181-4368-8D34-163CA1433381}"/>
               </a:ext>
             </a:extLst>
           </p:cNvPr>
@@ -5490,7 +5490,7 @@
           <p:cNvPr id="10" name="">
             <a:extLst xmlns:a="http://schemas.openxmlformats.org/drawingml/2006/main">
               <a:ext uri="{FF2B5EF4-FFF2-40B4-BE49-F238E27FC236}">
-                <a16:creationId xmlns:a16="http://schemas.microsoft.com/office/drawing/2014/main" id="{EFE1C792-5C04-45E4-9CC1-FFC03A9F161A}"/>
+                <a16:creationId xmlns:a16="http://schemas.microsoft.com/office/drawing/2014/main" id="{A5913230-9489-4F93-B2B5-D2D49BD16F5B}"/>
               </a:ext>
             </a:extLst>
           </p:cNvPr>
@@ -5552,7 +5552,7 @@
           <p:cNvPr id="11" name="">
             <a:extLst xmlns:a="http://schemas.openxmlformats.org/drawingml/2006/main">
               <a:ext uri="{FF2B5EF4-FFF2-40B4-BE49-F238E27FC236}">
-                <a16:creationId xmlns:a16="http://schemas.microsoft.com/office/drawing/2014/main" id="{5F668E5A-5C66-4F63-AA1E-36C88ED7F33C}"/>
+                <a16:creationId xmlns:a16="http://schemas.microsoft.com/office/drawing/2014/main" id="{351B39EC-3858-432E-86FC-61F6153B4D92}"/>
               </a:ext>
             </a:extLst>
           </p:cNvPr>
@@ -5614,7 +5614,7 @@
           <p:cNvPr id="12" name="">
             <a:extLst xmlns:a="http://schemas.openxmlformats.org/drawingml/2006/main">
               <a:ext uri="{FF2B5EF4-FFF2-40B4-BE49-F238E27FC236}">
-                <a16:creationId xmlns:a16="http://schemas.microsoft.com/office/drawing/2014/main" id="{41EE457A-A499-4E1C-9BD9-59C6E226055E}"/>
+                <a16:creationId xmlns:a16="http://schemas.microsoft.com/office/drawing/2014/main" id="{6B437FD8-5371-4760-A026-882DD0D8203D}"/>
               </a:ext>
             </a:extLst>
           </p:cNvPr>
@@ -5676,7 +5676,7 @@
           <p:cNvPr id="13" name="">
             <a:extLst xmlns:a="http://schemas.openxmlformats.org/drawingml/2006/main">
               <a:ext uri="{FF2B5EF4-FFF2-40B4-BE49-F238E27FC236}">
-                <a16:creationId xmlns:a16="http://schemas.microsoft.com/office/drawing/2014/main" id="{06881D4E-D014-4E94-9790-DECCD3AB97BE}"/>
+                <a16:creationId xmlns:a16="http://schemas.microsoft.com/office/drawing/2014/main" id="{FAD39A06-E4A4-43FA-B0BC-93F813E235C7}"/>
               </a:ext>
             </a:extLst>
           </p:cNvPr>
@@ -5738,7 +5738,7 @@
           <p:cNvPr id="14" name="">
             <a:extLst xmlns:a="http://schemas.openxmlformats.org/drawingml/2006/main">
               <a:ext uri="{FF2B5EF4-FFF2-40B4-BE49-F238E27FC236}">
-                <a16:creationId xmlns:a16="http://schemas.microsoft.com/office/drawing/2014/main" id="{51D8521B-8FEA-4B9A-8241-119A8AB01C24}"/>
+                <a16:creationId xmlns:a16="http://schemas.microsoft.com/office/drawing/2014/main" id="{70D8995D-AD50-4E01-9A7E-2A8CD384ED8F}"/>
               </a:ext>
             </a:extLst>
           </p:cNvPr>
@@ -5807,7 +5807,7 @@
         </p:xfrm>
         <a:graphic xmlns:a="http://schemas.openxmlformats.org/drawingml/2006/main">
           <a:graphicData uri="http://schemas.openxmlformats.org/drawingml/2006/chart">
-            <c:chart xmlns:r="http://schemas.openxmlformats.org/officeDocument/2006/relationships" xmlns:c="http://schemas.openxmlformats.org/drawingml/2006/chart" r:id="R485c195059014b0a"/>
+            <c:chart xmlns:r="http://schemas.openxmlformats.org/officeDocument/2006/relationships" xmlns:c="http://schemas.openxmlformats.org/drawingml/2006/chart" r:id="Rde1d33a56b914fe8"/>
           </a:graphicData>
         </a:graphic>
       </p:graphicFrame>
@@ -5816,7 +5816,7 @@
           <p:cNvPr id="16" name="">
             <a:extLst xmlns:a="http://schemas.openxmlformats.org/drawingml/2006/main">
               <a:ext uri="{FF2B5EF4-FFF2-40B4-BE49-F238E27FC236}">
-                <a16:creationId xmlns:a16="http://schemas.microsoft.com/office/drawing/2014/main" id="{FC0DD9B2-C510-47CD-BE77-5A324C043BD5}"/>
+                <a16:creationId xmlns:a16="http://schemas.microsoft.com/office/drawing/2014/main" id="{FFB443ED-0E81-4E8E-9F65-C61BD0D81E72}"/>
               </a:ext>
             </a:extLst>
           </p:cNvPr>
@@ -5849,7 +5849,7 @@
           <p:cNvPr id="17" name="">
             <a:extLst xmlns:a="http://schemas.openxmlformats.org/drawingml/2006/main">
               <a:ext uri="{FF2B5EF4-FFF2-40B4-BE49-F238E27FC236}">
-                <a16:creationId xmlns:a16="http://schemas.microsoft.com/office/drawing/2014/main" id="{CB80D165-AB6B-4D62-8DB2-C3C9D923C1C1}"/>
+                <a16:creationId xmlns:a16="http://schemas.microsoft.com/office/drawing/2014/main" id="{11EBE880-A347-4F5A-A6BA-DDDB94CA5056}"/>
               </a:ext>
             </a:extLst>
           </p:cNvPr>
@@ -5911,7 +5911,7 @@
           <p:cNvPr id="18" name="">
             <a:extLst xmlns:a="http://schemas.openxmlformats.org/drawingml/2006/main">
               <a:ext uri="{FF2B5EF4-FFF2-40B4-BE49-F238E27FC236}">
-                <a16:creationId xmlns:a16="http://schemas.microsoft.com/office/drawing/2014/main" id="{320B4AD4-8289-4699-9D90-A8C7ED851BF6}"/>
+                <a16:creationId xmlns:a16="http://schemas.microsoft.com/office/drawing/2014/main" id="{B064F426-1FF7-42CC-99AD-E29DF3ABB04A}"/>
               </a:ext>
             </a:extLst>
           </p:cNvPr>
@@ -6066,7 +6066,7 @@
           <p:cNvPr id="19" name="">
             <a:extLst xmlns:a="http://schemas.openxmlformats.org/drawingml/2006/main">
               <a:ext uri="{FF2B5EF4-FFF2-40B4-BE49-F238E27FC236}">
-                <a16:creationId xmlns:a16="http://schemas.microsoft.com/office/drawing/2014/main" id="{8816FA5D-B21C-41B0-8F1D-FD33BD9D32D3}"/>
+                <a16:creationId xmlns:a16="http://schemas.microsoft.com/office/drawing/2014/main" id="{2A8AC672-6EAD-415A-95BC-133905FEDD2B}"/>
               </a:ext>
             </a:extLst>
           </p:cNvPr>
@@ -6128,7 +6128,7 @@
           <p:cNvPr id="20" name="">
             <a:extLst xmlns:a="http://schemas.openxmlformats.org/drawingml/2006/main">
               <a:ext uri="{FF2B5EF4-FFF2-40B4-BE49-F238E27FC236}">
-                <a16:creationId xmlns:a16="http://schemas.microsoft.com/office/drawing/2014/main" id="{27E63521-F16C-45C6-8BFC-34B7D5403AE7}"/>
+                <a16:creationId xmlns:a16="http://schemas.microsoft.com/office/drawing/2014/main" id="{AF2F4407-4604-410A-B709-84EB8BC11357}"/>
               </a:ext>
             </a:extLst>
           </p:cNvPr>
@@ -6159,7 +6159,7 @@
           <p:cNvPr id="21" name="">
             <a:extLst xmlns:a="http://schemas.openxmlformats.org/drawingml/2006/main">
               <a:ext uri="{FF2B5EF4-FFF2-40B4-BE49-F238E27FC236}">
-                <a16:creationId xmlns:a16="http://schemas.microsoft.com/office/drawing/2014/main" id="{F8D3E428-45F4-4D66-9533-E7EFA9E77CEE}"/>
+                <a16:creationId xmlns:a16="http://schemas.microsoft.com/office/drawing/2014/main" id="{9ED20354-7E80-482F-9869-EA24B778739A}"/>
               </a:ext>
             </a:extLst>
           </p:cNvPr>
@@ -6211,7 +6211,7 @@
                 <a:ea typeface="Arial"/>
                 <a:cs typeface="Arial"/>
               </a:rPr>
-              <a:t>r2z-16690ccbe328 · scn-c46e1d86c1</a:t>
+              <a:t>r2z-45c4ba076af9 · scn-e0f12f397e</a:t>
             </a:r>
           </a:p>
         </p:txBody>
@@ -6221,7 +6221,7 @@
           <p:cNvPr id="22" name="">
             <a:extLst xmlns:a="http://schemas.openxmlformats.org/drawingml/2006/main">
               <a:ext uri="{FF2B5EF4-FFF2-40B4-BE49-F238E27FC236}">
-                <a16:creationId xmlns:a16="http://schemas.microsoft.com/office/drawing/2014/main" id="{29A96ABC-14DE-4084-A5AA-F97BB62D400E}"/>
+                <a16:creationId xmlns:a16="http://schemas.microsoft.com/office/drawing/2014/main" id="{786FAF09-4787-43F0-BA7E-6ADC8A52ECFA}"/>
               </a:ext>
             </a:extLst>
           </p:cNvPr>
@@ -6281,7 +6281,7 @@
     </p:spTree>
     <p:extLst>
       <p:ext uri="{BB962C8B-B14F-4D97-AF65-F5344CB8AC3E}">
-        <p14:creationId xmlns:p14="http://schemas.microsoft.com/office/powerpoint/2010/main" val="2112142020"/>
+        <p14:creationId xmlns:p14="http://schemas.microsoft.com/office/powerpoint/2010/main" val="1731988923"/>
       </p:ext>
     </p:extLst>
   </p:cSld>
@@ -6312,7 +6312,7 @@
           <p:cNvPr id="20" name="">
             <a:extLst xmlns:a="http://schemas.openxmlformats.org/drawingml/2006/main">
               <a:ext uri="{FF2B5EF4-FFF2-40B4-BE49-F238E27FC236}">
-                <a16:creationId xmlns:a16="http://schemas.microsoft.com/office/drawing/2014/main" id="{85214E18-04D4-409A-B981-945FAE66471D}"/>
+                <a16:creationId xmlns:a16="http://schemas.microsoft.com/office/drawing/2014/main" id="{ED1516DB-4AAA-4901-951F-57A063B94460}"/>
               </a:ext>
             </a:extLst>
           </p:cNvPr>
@@ -6374,7 +6374,7 @@
                 <a:latin typeface="Arial"/>
                 <a:ea typeface="Arial"/>
                 <a:cs typeface="Arial"/>
-                <a:hlinkClick xmlns:r="http://schemas.openxmlformats.org/officeDocument/2006/relationships" r:id="R4156039ddb3749c4"/>
+                <a:hlinkClick xmlns:r="http://schemas.openxmlformats.org/officeDocument/2006/relationships" r:id="R90d0be01904b4a27"/>
               </a:rPr>
               <a:t>https://github.com/qjmre23/Route2Zero</a:t>
             </a:r>
@@ -6397,7 +6397,7 @@
                 <a:latin typeface="Arial"/>
                 <a:ea typeface="Arial"/>
                 <a:cs typeface="Arial"/>
-                <a:hlinkClick xmlns:r="http://schemas.openxmlformats.org/officeDocument/2006/relationships" r:id="R1519534d809a4c49"/>
+                <a:hlinkClick xmlns:r="http://schemas.openxmlformats.org/officeDocument/2006/relationships" r:id="R9a77724f4d74474d"/>
               </a:rPr>
               <a:t>https://route2zero.netlify.app/</a:t>
             </a:r>
@@ -6409,7 +6409,7 @@
           <p:cNvPr id="2" name="">
             <a:extLst xmlns:a="http://schemas.openxmlformats.org/drawingml/2006/main">
               <a:ext uri="{FF2B5EF4-FFF2-40B4-BE49-F238E27FC236}">
-                <a16:creationId xmlns:a16="http://schemas.microsoft.com/office/drawing/2014/main" id="{A449D040-B7F7-4E7C-8E9D-8D96EA7963F6}"/>
+                <a16:creationId xmlns:a16="http://schemas.microsoft.com/office/drawing/2014/main" id="{3A392827-B26E-480D-88EE-9D653F003FBB}"/>
               </a:ext>
             </a:extLst>
           </p:cNvPr>
@@ -6471,7 +6471,7 @@
           <p:cNvPr id="3" name="">
             <a:extLst xmlns:a="http://schemas.openxmlformats.org/drawingml/2006/main">
               <a:ext uri="{FF2B5EF4-FFF2-40B4-BE49-F238E27FC236}">
-                <a16:creationId xmlns:a16="http://schemas.microsoft.com/office/drawing/2014/main" id="{8CE5111E-4A0C-49EB-91EA-83EE178D185A}"/>
+                <a16:creationId xmlns:a16="http://schemas.microsoft.com/office/drawing/2014/main" id="{AA2EFC44-FE4B-4987-B386-42B72D8D28F8}"/>
               </a:ext>
             </a:extLst>
           </p:cNvPr>
@@ -6533,7 +6533,7 @@
           <p:cNvPr id="4" name="">
             <a:extLst xmlns:a="http://schemas.openxmlformats.org/drawingml/2006/main">
               <a:ext uri="{FF2B5EF4-FFF2-40B4-BE49-F238E27FC236}">
-                <a16:creationId xmlns:a16="http://schemas.microsoft.com/office/drawing/2014/main" id="{5AD0A24A-1E64-494A-9848-AC6197EDFCB8}"/>
+                <a16:creationId xmlns:a16="http://schemas.microsoft.com/office/drawing/2014/main" id="{28AB98BF-1E86-4834-8192-FCC69391F040}"/>
               </a:ext>
             </a:extLst>
           </p:cNvPr>
@@ -6595,7 +6595,7 @@
           <p:cNvPr id="5" name="">
             <a:extLst xmlns:a="http://schemas.openxmlformats.org/drawingml/2006/main">
               <a:ext uri="{FF2B5EF4-FFF2-40B4-BE49-F238E27FC236}">
-                <a16:creationId xmlns:a16="http://schemas.microsoft.com/office/drawing/2014/main" id="{033074A1-B96B-4FAF-BF86-4E7FB3A4211C}"/>
+                <a16:creationId xmlns:a16="http://schemas.microsoft.com/office/drawing/2014/main" id="{C974602C-A75A-477E-831F-A82DD4617326}"/>
               </a:ext>
             </a:extLst>
           </p:cNvPr>
@@ -6657,7 +6657,7 @@
           <p:cNvPr id="6" name="">
             <a:extLst xmlns:a="http://schemas.openxmlformats.org/drawingml/2006/main">
               <a:ext uri="{FF2B5EF4-FFF2-40B4-BE49-F238E27FC236}">
-                <a16:creationId xmlns:a16="http://schemas.microsoft.com/office/drawing/2014/main" id="{DF774E3C-064D-47E7-AFA7-B48D48406D0D}"/>
+                <a16:creationId xmlns:a16="http://schemas.microsoft.com/office/drawing/2014/main" id="{10A67E5A-A249-4FFC-B7E4-8500C0DB9A38}"/>
               </a:ext>
             </a:extLst>
           </p:cNvPr>
@@ -6719,7 +6719,7 @@
           <p:cNvPr id="7" name="">
             <a:extLst xmlns:a="http://schemas.openxmlformats.org/drawingml/2006/main">
               <a:ext uri="{FF2B5EF4-FFF2-40B4-BE49-F238E27FC236}">
-                <a16:creationId xmlns:a16="http://schemas.microsoft.com/office/drawing/2014/main" id="{BC6A9289-C224-45AB-A13D-D35CBBAD2EA8}"/>
+                <a16:creationId xmlns:a16="http://schemas.microsoft.com/office/drawing/2014/main" id="{1CDD667E-B97B-4168-B2A6-92B891D422BD}"/>
               </a:ext>
             </a:extLst>
           </p:cNvPr>
@@ -6781,7 +6781,7 @@
           <p:cNvPr id="8" name="">
             <a:extLst xmlns:a="http://schemas.openxmlformats.org/drawingml/2006/main">
               <a:ext uri="{FF2B5EF4-FFF2-40B4-BE49-F238E27FC236}">
-                <a16:creationId xmlns:a16="http://schemas.microsoft.com/office/drawing/2014/main" id="{61C53172-BF98-4220-9D82-22E0130FAB20}"/>
+                <a16:creationId xmlns:a16="http://schemas.microsoft.com/office/drawing/2014/main" id="{D3F712D0-12A3-48CF-AAB5-C45D5786C337}"/>
               </a:ext>
             </a:extLst>
           </p:cNvPr>
@@ -6843,7 +6843,7 @@
           <p:cNvPr id="9" name="">
             <a:extLst xmlns:a="http://schemas.openxmlformats.org/drawingml/2006/main">
               <a:ext uri="{FF2B5EF4-FFF2-40B4-BE49-F238E27FC236}">
-                <a16:creationId xmlns:a16="http://schemas.microsoft.com/office/drawing/2014/main" id="{6B3D7657-30DB-49DB-BA59-FEB00378BAD2}"/>
+                <a16:creationId xmlns:a16="http://schemas.microsoft.com/office/drawing/2014/main" id="{3D46B7EA-990F-49E7-99AD-49D1193962F1}"/>
               </a:ext>
             </a:extLst>
           </p:cNvPr>
@@ -6905,7 +6905,7 @@
           <p:cNvPr id="10" name="">
             <a:extLst xmlns:a="http://schemas.openxmlformats.org/drawingml/2006/main">
               <a:ext uri="{FF2B5EF4-FFF2-40B4-BE49-F238E27FC236}">
-                <a16:creationId xmlns:a16="http://schemas.microsoft.com/office/drawing/2014/main" id="{DA67B17B-DD71-4A81-9AE7-8A5DD96A925F}"/>
+                <a16:creationId xmlns:a16="http://schemas.microsoft.com/office/drawing/2014/main" id="{CB6D86C4-817D-4A1F-9FFB-C0201881D406}"/>
               </a:ext>
             </a:extLst>
           </p:cNvPr>
@@ -6936,7 +6936,7 @@
           <p:cNvPr id="11" name="">
             <a:extLst xmlns:a="http://schemas.openxmlformats.org/drawingml/2006/main">
               <a:ext uri="{FF2B5EF4-FFF2-40B4-BE49-F238E27FC236}">
-                <a16:creationId xmlns:a16="http://schemas.microsoft.com/office/drawing/2014/main" id="{A205B073-5AB8-4036-8FC6-5CEC1093922F}"/>
+                <a16:creationId xmlns:a16="http://schemas.microsoft.com/office/drawing/2014/main" id="{6D9552C2-C1F7-45F7-9B39-57C542559648}"/>
               </a:ext>
             </a:extLst>
           </p:cNvPr>
@@ -6998,7 +6998,7 @@
           <p:cNvPr id="12" name="">
             <a:extLst xmlns:a="http://schemas.openxmlformats.org/drawingml/2006/main">
               <a:ext uri="{FF2B5EF4-FFF2-40B4-BE49-F238E27FC236}">
-                <a16:creationId xmlns:a16="http://schemas.microsoft.com/office/drawing/2014/main" id="{DB9766BC-62E6-49E8-920F-4B200EFAD86F}"/>
+                <a16:creationId xmlns:a16="http://schemas.microsoft.com/office/drawing/2014/main" id="{EEF2DAC3-F05A-4302-92BD-968975800C24}"/>
               </a:ext>
             </a:extLst>
           </p:cNvPr>
@@ -7123,7 +7123,7 @@
           <p:cNvPr id="13" name="">
             <a:extLst xmlns:a="http://schemas.openxmlformats.org/drawingml/2006/main">
               <a:ext uri="{FF2B5EF4-FFF2-40B4-BE49-F238E27FC236}">
-                <a16:creationId xmlns:a16="http://schemas.microsoft.com/office/drawing/2014/main" id="{D542DD9D-3D47-4E52-A69B-6DB49C3E9953}"/>
+                <a16:creationId xmlns:a16="http://schemas.microsoft.com/office/drawing/2014/main" id="{A879AA29-744E-4771-B646-68BB2ED40686}"/>
               </a:ext>
             </a:extLst>
           </p:cNvPr>
@@ -7185,7 +7185,7 @@
           <p:cNvPr id="14" name="">
             <a:extLst xmlns:a="http://schemas.openxmlformats.org/drawingml/2006/main">
               <a:ext uri="{FF2B5EF4-FFF2-40B4-BE49-F238E27FC236}">
-                <a16:creationId xmlns:a16="http://schemas.microsoft.com/office/drawing/2014/main" id="{9828D6B5-E8D0-44A5-9D20-D94A24FA09E6}"/>
+                <a16:creationId xmlns:a16="http://schemas.microsoft.com/office/drawing/2014/main" id="{EBA4F720-3FB3-4B88-9D54-CCFA5DD64F95}"/>
               </a:ext>
             </a:extLst>
           </p:cNvPr>
@@ -7310,7 +7310,7 @@
           <p:cNvPr id="15" name="">
             <a:extLst xmlns:a="http://schemas.openxmlformats.org/drawingml/2006/main">
               <a:ext uri="{FF2B5EF4-FFF2-40B4-BE49-F238E27FC236}">
-                <a16:creationId xmlns:a16="http://schemas.microsoft.com/office/drawing/2014/main" id="{5A762FEE-8C43-4E07-933E-56E726494461}"/>
+                <a16:creationId xmlns:a16="http://schemas.microsoft.com/office/drawing/2014/main" id="{FDF23A4B-FF72-42CA-936B-9DE58C53B19F}"/>
               </a:ext>
             </a:extLst>
           </p:cNvPr>
@@ -7343,7 +7343,7 @@
           <p:cNvPr id="16" name="">
             <a:extLst xmlns:a="http://schemas.openxmlformats.org/drawingml/2006/main">
               <a:ext uri="{FF2B5EF4-FFF2-40B4-BE49-F238E27FC236}">
-                <a16:creationId xmlns:a16="http://schemas.microsoft.com/office/drawing/2014/main" id="{23BBA281-E9B2-42DF-BF3E-B01C91271B2B}"/>
+                <a16:creationId xmlns:a16="http://schemas.microsoft.com/office/drawing/2014/main" id="{4447B7B2-AACA-49DE-B63C-6F0E9888F3AB}"/>
               </a:ext>
             </a:extLst>
           </p:cNvPr>
@@ -7405,7 +7405,7 @@
           <p:cNvPr id="17" name="">
             <a:extLst xmlns:a="http://schemas.openxmlformats.org/drawingml/2006/main">
               <a:ext uri="{FF2B5EF4-FFF2-40B4-BE49-F238E27FC236}">
-                <a16:creationId xmlns:a16="http://schemas.microsoft.com/office/drawing/2014/main" id="{C5BA8E09-45EF-481F-9C2C-A6899081DB95}"/>
+                <a16:creationId xmlns:a16="http://schemas.microsoft.com/office/drawing/2014/main" id="{E1BAE4D6-64FE-4241-B02C-CFFBFC36D7C4}"/>
               </a:ext>
             </a:extLst>
           </p:cNvPr>
@@ -7436,7 +7436,7 @@
           <p:cNvPr id="18" name="">
             <a:extLst xmlns:a="http://schemas.openxmlformats.org/drawingml/2006/main">
               <a:ext uri="{FF2B5EF4-FFF2-40B4-BE49-F238E27FC236}">
-                <a16:creationId xmlns:a16="http://schemas.microsoft.com/office/drawing/2014/main" id="{8C81A084-2B51-4D83-9960-650DF151CE2B}"/>
+                <a16:creationId xmlns:a16="http://schemas.microsoft.com/office/drawing/2014/main" id="{ADCB1E2D-0CDC-4BBF-A047-A88BB6E8DC04}"/>
               </a:ext>
             </a:extLst>
           </p:cNvPr>
@@ -7488,7 +7488,7 @@
                 <a:ea typeface="Arial"/>
                 <a:cs typeface="Arial"/>
               </a:rPr>
-              <a:t>r2z-16690ccbe328 · scn-c46e1d86c1</a:t>
+              <a:t>r2z-45c4ba076af9 · scn-e0f12f397e</a:t>
             </a:r>
           </a:p>
         </p:txBody>
@@ -7498,7 +7498,7 @@
           <p:cNvPr id="19" name="">
             <a:extLst xmlns:a="http://schemas.openxmlformats.org/drawingml/2006/main">
               <a:ext uri="{FF2B5EF4-FFF2-40B4-BE49-F238E27FC236}">
-                <a16:creationId xmlns:a16="http://schemas.microsoft.com/office/drawing/2014/main" id="{ECC53032-E20C-405C-A9B8-6A40E82955DF}"/>
+                <a16:creationId xmlns:a16="http://schemas.microsoft.com/office/drawing/2014/main" id="{B6932AE0-D6AA-4DED-9558-0B2978612171}"/>
               </a:ext>
             </a:extLst>
           </p:cNvPr>
@@ -7558,7 +7558,7 @@
     </p:spTree>
     <p:extLst>
       <p:ext uri="{BB962C8B-B14F-4D97-AF65-F5344CB8AC3E}">
-        <p14:creationId xmlns:p14="http://schemas.microsoft.com/office/powerpoint/2010/main" val="539827862"/>
+        <p14:creationId xmlns:p14="http://schemas.microsoft.com/office/powerpoint/2010/main" val="1515674866"/>
       </p:ext>
     </p:extLst>
   </p:cSld>
@@ -7589,7 +7589,7 @@
           <p:cNvPr id="33" name="">
             <a:extLst xmlns:a="http://schemas.openxmlformats.org/drawingml/2006/main">
               <a:ext uri="{FF2B5EF4-FFF2-40B4-BE49-F238E27FC236}">
-                <a16:creationId xmlns:a16="http://schemas.microsoft.com/office/drawing/2014/main" id="{5D7911CA-3A50-45BD-B127-0231EF743248}"/>
+                <a16:creationId xmlns:a16="http://schemas.microsoft.com/office/drawing/2014/main" id="{8B00E50F-61BE-48B2-AABE-2426F870EB8D}"/>
               </a:ext>
             </a:extLst>
           </p:cNvPr>
@@ -7651,7 +7651,7 @@
                 <a:latin typeface="Arial"/>
                 <a:ea typeface="Arial"/>
                 <a:cs typeface="Arial"/>
-                <a:hlinkClick xmlns:r="http://schemas.openxmlformats.org/officeDocument/2006/relationships" r:id="Rcf4e86fd32ba4326"/>
+                <a:hlinkClick xmlns:r="http://schemas.openxmlformats.org/officeDocument/2006/relationships" r:id="R8d2e72a000564afb"/>
               </a:rPr>
               <a:t>https://github.com/qjmre23/Route2Zero</a:t>
             </a:r>
@@ -7674,7 +7674,7 @@
                 <a:latin typeface="Arial"/>
                 <a:ea typeface="Arial"/>
                 <a:cs typeface="Arial"/>
-                <a:hlinkClick xmlns:r="http://schemas.openxmlformats.org/officeDocument/2006/relationships" r:id="R6643b0f3a0f44ba6"/>
+                <a:hlinkClick xmlns:r="http://schemas.openxmlformats.org/officeDocument/2006/relationships" r:id="R31f89c8cc97b4c3e"/>
               </a:rPr>
               <a:t>https://route2zero.netlify.app/</a:t>
             </a:r>
@@ -7686,7 +7686,7 @@
           <p:cNvPr id="2" name="">
             <a:extLst xmlns:a="http://schemas.openxmlformats.org/drawingml/2006/main">
               <a:ext uri="{FF2B5EF4-FFF2-40B4-BE49-F238E27FC236}">
-                <a16:creationId xmlns:a16="http://schemas.microsoft.com/office/drawing/2014/main" id="{6DF15C56-44FD-4D8C-B8E0-A80D1E6F2A0C}"/>
+                <a16:creationId xmlns:a16="http://schemas.microsoft.com/office/drawing/2014/main" id="{721B7F33-0B9B-4E62-9616-4BB84BDE35D6}"/>
               </a:ext>
             </a:extLst>
           </p:cNvPr>
@@ -7748,7 +7748,7 @@
           <p:cNvPr id="3" name="">
             <a:extLst xmlns:a="http://schemas.openxmlformats.org/drawingml/2006/main">
               <a:ext uri="{FF2B5EF4-FFF2-40B4-BE49-F238E27FC236}">
-                <a16:creationId xmlns:a16="http://schemas.microsoft.com/office/drawing/2014/main" id="{57506783-6E8A-434B-B019-19FF5A7971F4}"/>
+                <a16:creationId xmlns:a16="http://schemas.microsoft.com/office/drawing/2014/main" id="{0F0EF690-D76B-4E5A-9E4A-FB78A46E582D}"/>
               </a:ext>
             </a:extLst>
           </p:cNvPr>
@@ -7810,7 +7810,7 @@
           <p:cNvPr id="4" name="">
             <a:extLst xmlns:a="http://schemas.openxmlformats.org/drawingml/2006/main">
               <a:ext uri="{FF2B5EF4-FFF2-40B4-BE49-F238E27FC236}">
-                <a16:creationId xmlns:a16="http://schemas.microsoft.com/office/drawing/2014/main" id="{6C2DDF55-9337-4846-B064-CB5851E91203}"/>
+                <a16:creationId xmlns:a16="http://schemas.microsoft.com/office/drawing/2014/main" id="{F9706AF7-197A-4939-ADDA-223729D4FAC2}"/>
               </a:ext>
             </a:extLst>
           </p:cNvPr>
@@ -7843,7 +7843,7 @@
           <p:cNvPr id="5" name="">
             <a:extLst xmlns:a="http://schemas.openxmlformats.org/drawingml/2006/main">
               <a:ext uri="{FF2B5EF4-FFF2-40B4-BE49-F238E27FC236}">
-                <a16:creationId xmlns:a16="http://schemas.microsoft.com/office/drawing/2014/main" id="{B2E33C95-8ADD-417E-8581-11EB3132596E}"/>
+                <a16:creationId xmlns:a16="http://schemas.microsoft.com/office/drawing/2014/main" id="{260FA906-9C9E-4512-8184-132CC15DC628}"/>
               </a:ext>
             </a:extLst>
           </p:cNvPr>
@@ -7905,7 +7905,7 @@
           <p:cNvPr id="6" name="">
             <a:extLst xmlns:a="http://schemas.openxmlformats.org/drawingml/2006/main">
               <a:ext uri="{FF2B5EF4-FFF2-40B4-BE49-F238E27FC236}">
-                <a16:creationId xmlns:a16="http://schemas.microsoft.com/office/drawing/2014/main" id="{CE5C637E-63FF-4AB5-9C26-66C7FC2B0404}"/>
+                <a16:creationId xmlns:a16="http://schemas.microsoft.com/office/drawing/2014/main" id="{05FE0542-15FB-44F0-A8BE-FC1599917BD6}"/>
               </a:ext>
             </a:extLst>
           </p:cNvPr>
@@ -7957,7 +7957,7 @@
                 <a:ea typeface="Arial"/>
                 <a:cs typeface="Arial"/>
               </a:rPr>
-              <a:t>66.45</a:t>
+              <a:t>60.45</a:t>
             </a:r>
           </a:p>
         </p:txBody>
@@ -7967,7 +7967,7 @@
           <p:cNvPr id="7" name="">
             <a:extLst xmlns:a="http://schemas.openxmlformats.org/drawingml/2006/main">
               <a:ext uri="{FF2B5EF4-FFF2-40B4-BE49-F238E27FC236}">
-                <a16:creationId xmlns:a16="http://schemas.microsoft.com/office/drawing/2014/main" id="{F0CEC412-B524-4EDA-A53B-FA02E8397851}"/>
+                <a16:creationId xmlns:a16="http://schemas.microsoft.com/office/drawing/2014/main" id="{ECEB680B-6516-4326-BA90-5DA4ACD0CF80}"/>
               </a:ext>
             </a:extLst>
           </p:cNvPr>
@@ -8029,7 +8029,7 @@
           <p:cNvPr id="8" name="">
             <a:extLst xmlns:a="http://schemas.openxmlformats.org/drawingml/2006/main">
               <a:ext uri="{FF2B5EF4-FFF2-40B4-BE49-F238E27FC236}">
-                <a16:creationId xmlns:a16="http://schemas.microsoft.com/office/drawing/2014/main" id="{EFEAAEF1-E082-4BF5-930B-A25B3ED74E12}"/>
+                <a16:creationId xmlns:a16="http://schemas.microsoft.com/office/drawing/2014/main" id="{9DD16304-98AC-4A19-981B-F512E7CD28CA}"/>
               </a:ext>
             </a:extLst>
           </p:cNvPr>
@@ -8091,7 +8091,7 @@
           <p:cNvPr id="9" name="">
             <a:extLst xmlns:a="http://schemas.openxmlformats.org/drawingml/2006/main">
               <a:ext uri="{FF2B5EF4-FFF2-40B4-BE49-F238E27FC236}">
-                <a16:creationId xmlns:a16="http://schemas.microsoft.com/office/drawing/2014/main" id="{C16D23B5-3DF4-40F7-AF3A-92EB55337982}"/>
+                <a16:creationId xmlns:a16="http://schemas.microsoft.com/office/drawing/2014/main" id="{B4B72583-77CC-4782-B924-352475E22167}"/>
               </a:ext>
             </a:extLst>
           </p:cNvPr>
@@ -8153,7 +8153,7 @@
           <p:cNvPr id="10" name="">
             <a:extLst xmlns:a="http://schemas.openxmlformats.org/drawingml/2006/main">
               <a:ext uri="{FF2B5EF4-FFF2-40B4-BE49-F238E27FC236}">
-                <a16:creationId xmlns:a16="http://schemas.microsoft.com/office/drawing/2014/main" id="{D27210A5-5B56-4905-B713-C4EB2738C3AB}"/>
+                <a16:creationId xmlns:a16="http://schemas.microsoft.com/office/drawing/2014/main" id="{566D0F98-0253-4819-A48B-141584C3E395}"/>
               </a:ext>
             </a:extLst>
           </p:cNvPr>
@@ -8215,7 +8215,7 @@
           <p:cNvPr id="11" name="">
             <a:extLst xmlns:a="http://schemas.openxmlformats.org/drawingml/2006/main">
               <a:ext uri="{FF2B5EF4-FFF2-40B4-BE49-F238E27FC236}">
-                <a16:creationId xmlns:a16="http://schemas.microsoft.com/office/drawing/2014/main" id="{CE449526-A62F-4E3E-AB8C-95B94F9B2326}"/>
+                <a16:creationId xmlns:a16="http://schemas.microsoft.com/office/drawing/2014/main" id="{B7C203EE-5427-463A-9F99-4C185381BF88}"/>
               </a:ext>
             </a:extLst>
           </p:cNvPr>
@@ -8277,7 +8277,7 @@
           <p:cNvPr id="12" name="">
             <a:extLst xmlns:a="http://schemas.openxmlformats.org/drawingml/2006/main">
               <a:ext uri="{FF2B5EF4-FFF2-40B4-BE49-F238E27FC236}">
-                <a16:creationId xmlns:a16="http://schemas.microsoft.com/office/drawing/2014/main" id="{CEFCA583-2673-4BB2-8766-FCB4D272522C}"/>
+                <a16:creationId xmlns:a16="http://schemas.microsoft.com/office/drawing/2014/main" id="{B0C676DB-F350-4F91-B2CA-FAF545351664}"/>
               </a:ext>
             </a:extLst>
           </p:cNvPr>
@@ -8339,7 +8339,7 @@
           <p:cNvPr id="13" name="">
             <a:extLst xmlns:a="http://schemas.openxmlformats.org/drawingml/2006/main">
               <a:ext uri="{FF2B5EF4-FFF2-40B4-BE49-F238E27FC236}">
-                <a16:creationId xmlns:a16="http://schemas.microsoft.com/office/drawing/2014/main" id="{373C364A-AC77-4CC1-8CA6-BF5E99888ECD}"/>
+                <a16:creationId xmlns:a16="http://schemas.microsoft.com/office/drawing/2014/main" id="{58F5D14E-9DEB-4101-8069-B1100F4F76C5}"/>
               </a:ext>
             </a:extLst>
           </p:cNvPr>
@@ -8401,7 +8401,7 @@
           <p:cNvPr id="14" name="">
             <a:extLst xmlns:a="http://schemas.openxmlformats.org/drawingml/2006/main">
               <a:ext uri="{FF2B5EF4-FFF2-40B4-BE49-F238E27FC236}">
-                <a16:creationId xmlns:a16="http://schemas.microsoft.com/office/drawing/2014/main" id="{C5F4ABB9-72A7-432F-82D3-E3840C602841}"/>
+                <a16:creationId xmlns:a16="http://schemas.microsoft.com/office/drawing/2014/main" id="{636F9262-9DFA-4CC0-85A5-07CA8BD4BFC3}"/>
               </a:ext>
             </a:extLst>
           </p:cNvPr>
@@ -8463,7 +8463,7 @@
           <p:cNvPr id="15" name="">
             <a:extLst xmlns:a="http://schemas.openxmlformats.org/drawingml/2006/main">
               <a:ext uri="{FF2B5EF4-FFF2-40B4-BE49-F238E27FC236}">
-                <a16:creationId xmlns:a16="http://schemas.microsoft.com/office/drawing/2014/main" id="{0F1AC05D-79BE-4503-9CCC-323C0FBD29D2}"/>
+                <a16:creationId xmlns:a16="http://schemas.microsoft.com/office/drawing/2014/main" id="{897A386E-64EC-4938-9197-DD205DE9A38B}"/>
               </a:ext>
             </a:extLst>
           </p:cNvPr>
@@ -8525,7 +8525,7 @@
           <p:cNvPr id="16" name="">
             <a:extLst xmlns:a="http://schemas.openxmlformats.org/drawingml/2006/main">
               <a:ext uri="{FF2B5EF4-FFF2-40B4-BE49-F238E27FC236}">
-                <a16:creationId xmlns:a16="http://schemas.microsoft.com/office/drawing/2014/main" id="{1F2CF835-7779-4034-80E1-AE719A9029F3}"/>
+                <a16:creationId xmlns:a16="http://schemas.microsoft.com/office/drawing/2014/main" id="{EDC61DAA-99D3-4D83-8C59-7ECC7B5BDCF9}"/>
               </a:ext>
             </a:extLst>
           </p:cNvPr>
@@ -8558,7 +8558,7 @@
           <p:cNvPr id="17" name="">
             <a:extLst xmlns:a="http://schemas.openxmlformats.org/drawingml/2006/main">
               <a:ext uri="{FF2B5EF4-FFF2-40B4-BE49-F238E27FC236}">
-                <a16:creationId xmlns:a16="http://schemas.microsoft.com/office/drawing/2014/main" id="{5B018B31-D0D5-4338-9BE8-C6C299CDA6E2}"/>
+                <a16:creationId xmlns:a16="http://schemas.microsoft.com/office/drawing/2014/main" id="{63272E8A-79D1-4F14-B2F3-5EDFCF00BDC7}"/>
               </a:ext>
             </a:extLst>
           </p:cNvPr>
@@ -8620,7 +8620,7 @@
           <p:cNvPr id="18" name="">
             <a:extLst xmlns:a="http://schemas.openxmlformats.org/drawingml/2006/main">
               <a:ext uri="{FF2B5EF4-FFF2-40B4-BE49-F238E27FC236}">
-                <a16:creationId xmlns:a16="http://schemas.microsoft.com/office/drawing/2014/main" id="{3E7B8531-FDB5-4E08-BF07-CA741DE7D93F}"/>
+                <a16:creationId xmlns:a16="http://schemas.microsoft.com/office/drawing/2014/main" id="{22E7F129-7539-4F18-83F6-BB08DA4B3571}"/>
               </a:ext>
             </a:extLst>
           </p:cNvPr>
@@ -8682,7 +8682,7 @@
           <p:cNvPr id="19" name="">
             <a:extLst xmlns:a="http://schemas.openxmlformats.org/drawingml/2006/main">
               <a:ext uri="{FF2B5EF4-FFF2-40B4-BE49-F238E27FC236}">
-                <a16:creationId xmlns:a16="http://schemas.microsoft.com/office/drawing/2014/main" id="{AAF62BD7-8DEC-42E9-8B4F-355F59124F06}"/>
+                <a16:creationId xmlns:a16="http://schemas.microsoft.com/office/drawing/2014/main" id="{208C9673-EAFA-4859-A9A8-44A12C45B5D8}"/>
               </a:ext>
             </a:extLst>
           </p:cNvPr>
@@ -8744,7 +8744,7 @@
           <p:cNvPr id="20" name="">
             <a:extLst xmlns:a="http://schemas.openxmlformats.org/drawingml/2006/main">
               <a:ext uri="{FF2B5EF4-FFF2-40B4-BE49-F238E27FC236}">
-                <a16:creationId xmlns:a16="http://schemas.microsoft.com/office/drawing/2014/main" id="{DC27A251-6765-4756-917C-D968090AE6A5}"/>
+                <a16:creationId xmlns:a16="http://schemas.microsoft.com/office/drawing/2014/main" id="{4E9575FE-B84E-4257-92B5-02C158539D17}"/>
               </a:ext>
             </a:extLst>
           </p:cNvPr>
@@ -8806,7 +8806,7 @@
           <p:cNvPr id="21" name="">
             <a:extLst xmlns:a="http://schemas.openxmlformats.org/drawingml/2006/main">
               <a:ext uri="{FF2B5EF4-FFF2-40B4-BE49-F238E27FC236}">
-                <a16:creationId xmlns:a16="http://schemas.microsoft.com/office/drawing/2014/main" id="{99B95594-D1F7-4BE1-8B77-A0CB05C4F34B}"/>
+                <a16:creationId xmlns:a16="http://schemas.microsoft.com/office/drawing/2014/main" id="{2BBD8CD0-2B48-4925-B1E2-C4B6B007C273}"/>
               </a:ext>
             </a:extLst>
           </p:cNvPr>
@@ -8868,7 +8868,7 @@
           <p:cNvPr id="22" name="">
             <a:extLst xmlns:a="http://schemas.openxmlformats.org/drawingml/2006/main">
               <a:ext uri="{FF2B5EF4-FFF2-40B4-BE49-F238E27FC236}">
-                <a16:creationId xmlns:a16="http://schemas.microsoft.com/office/drawing/2014/main" id="{38B23046-5DB5-4D39-A723-F670883806AC}"/>
+                <a16:creationId xmlns:a16="http://schemas.microsoft.com/office/drawing/2014/main" id="{38DBF09A-5685-41D9-93B5-03AEDD28F167}"/>
               </a:ext>
             </a:extLst>
           </p:cNvPr>
@@ -8930,7 +8930,7 @@
           <p:cNvPr id="23" name="">
             <a:extLst xmlns:a="http://schemas.openxmlformats.org/drawingml/2006/main">
               <a:ext uri="{FF2B5EF4-FFF2-40B4-BE49-F238E27FC236}">
-                <a16:creationId xmlns:a16="http://schemas.microsoft.com/office/drawing/2014/main" id="{8BAC8431-6716-4B29-81C1-B39AD7BAD805}"/>
+                <a16:creationId xmlns:a16="http://schemas.microsoft.com/office/drawing/2014/main" id="{B8A53C1A-7848-4F08-815D-52391EDD39A3}"/>
               </a:ext>
             </a:extLst>
           </p:cNvPr>
@@ -8992,7 +8992,7 @@
           <p:cNvPr id="24" name="">
             <a:extLst xmlns:a="http://schemas.openxmlformats.org/drawingml/2006/main">
               <a:ext uri="{FF2B5EF4-FFF2-40B4-BE49-F238E27FC236}">
-                <a16:creationId xmlns:a16="http://schemas.microsoft.com/office/drawing/2014/main" id="{1BB89B39-A7D7-44F9-AFDC-4EE142502067}"/>
+                <a16:creationId xmlns:a16="http://schemas.microsoft.com/office/drawing/2014/main" id="{083ECF27-FFB2-4B65-98E3-35860F7B4EBC}"/>
               </a:ext>
             </a:extLst>
           </p:cNvPr>
@@ -9054,7 +9054,7 @@
           <p:cNvPr id="25" name="">
             <a:extLst xmlns:a="http://schemas.openxmlformats.org/drawingml/2006/main">
               <a:ext uri="{FF2B5EF4-FFF2-40B4-BE49-F238E27FC236}">
-                <a16:creationId xmlns:a16="http://schemas.microsoft.com/office/drawing/2014/main" id="{022EBFFA-CA4F-4F50-B85D-C4DB89DD1FF6}"/>
+                <a16:creationId xmlns:a16="http://schemas.microsoft.com/office/drawing/2014/main" id="{E5B6B81D-38D8-4917-923B-6F128990A0F6}"/>
               </a:ext>
             </a:extLst>
           </p:cNvPr>
@@ -9116,7 +9116,7 @@
           <p:cNvPr id="26" name="">
             <a:extLst xmlns:a="http://schemas.openxmlformats.org/drawingml/2006/main">
               <a:ext uri="{FF2B5EF4-FFF2-40B4-BE49-F238E27FC236}">
-                <a16:creationId xmlns:a16="http://schemas.microsoft.com/office/drawing/2014/main" id="{04F96B33-97DE-42C8-A354-1A18B304D9D5}"/>
+                <a16:creationId xmlns:a16="http://schemas.microsoft.com/office/drawing/2014/main" id="{F29AB287-D6DF-40E5-BDEB-833CF11BBA63}"/>
               </a:ext>
             </a:extLst>
           </p:cNvPr>
@@ -9178,7 +9178,7 @@
           <p:cNvPr id="27" name="">
             <a:extLst xmlns:a="http://schemas.openxmlformats.org/drawingml/2006/main">
               <a:ext uri="{FF2B5EF4-FFF2-40B4-BE49-F238E27FC236}">
-                <a16:creationId xmlns:a16="http://schemas.microsoft.com/office/drawing/2014/main" id="{803743F6-AEC7-495F-AE9F-999526273D36}"/>
+                <a16:creationId xmlns:a16="http://schemas.microsoft.com/office/drawing/2014/main" id="{6545F63D-AC27-4341-B3CD-1812731C9192}"/>
               </a:ext>
             </a:extLst>
           </p:cNvPr>
@@ -9240,7 +9240,7 @@
           <p:cNvPr id="28" name="">
             <a:extLst xmlns:a="http://schemas.openxmlformats.org/drawingml/2006/main">
               <a:ext uri="{FF2B5EF4-FFF2-40B4-BE49-F238E27FC236}">
-                <a16:creationId xmlns:a16="http://schemas.microsoft.com/office/drawing/2014/main" id="{6EEA2476-BFA7-4A35-9A88-49D92188E702}"/>
+                <a16:creationId xmlns:a16="http://schemas.microsoft.com/office/drawing/2014/main" id="{B65C1501-5619-42F3-B9F3-D9618C6E9551}"/>
               </a:ext>
             </a:extLst>
           </p:cNvPr>
@@ -9273,7 +9273,7 @@
           <p:cNvPr id="29" name="">
             <a:extLst xmlns:a="http://schemas.openxmlformats.org/drawingml/2006/main">
               <a:ext uri="{FF2B5EF4-FFF2-40B4-BE49-F238E27FC236}">
-                <a16:creationId xmlns:a16="http://schemas.microsoft.com/office/drawing/2014/main" id="{303DE9AC-78E9-4E83-8969-CB5C0A696CF0}"/>
+                <a16:creationId xmlns:a16="http://schemas.microsoft.com/office/drawing/2014/main" id="{A05C72CC-DEE4-4EB1-9216-3FFABFADF76E}"/>
               </a:ext>
             </a:extLst>
           </p:cNvPr>
@@ -9335,7 +9335,7 @@
           <p:cNvPr id="30" name="">
             <a:extLst xmlns:a="http://schemas.openxmlformats.org/drawingml/2006/main">
               <a:ext uri="{FF2B5EF4-FFF2-40B4-BE49-F238E27FC236}">
-                <a16:creationId xmlns:a16="http://schemas.microsoft.com/office/drawing/2014/main" id="{9761EB89-922D-4F47-AB20-C5400B131F13}"/>
+                <a16:creationId xmlns:a16="http://schemas.microsoft.com/office/drawing/2014/main" id="{38EFE0E6-53C0-4B09-9CA3-6BC16F74DFF0}"/>
               </a:ext>
             </a:extLst>
           </p:cNvPr>
@@ -9366,7 +9366,7 @@
           <p:cNvPr id="31" name="">
             <a:extLst xmlns:a="http://schemas.openxmlformats.org/drawingml/2006/main">
               <a:ext uri="{FF2B5EF4-FFF2-40B4-BE49-F238E27FC236}">
-                <a16:creationId xmlns:a16="http://schemas.microsoft.com/office/drawing/2014/main" id="{60C27DEB-AFFF-41B4-A04F-5EA78B0A79BC}"/>
+                <a16:creationId xmlns:a16="http://schemas.microsoft.com/office/drawing/2014/main" id="{E28C49E9-3C4C-4F4A-9555-56923EB12220}"/>
               </a:ext>
             </a:extLst>
           </p:cNvPr>
@@ -9418,7 +9418,7 @@
                 <a:ea typeface="Arial"/>
                 <a:cs typeface="Arial"/>
               </a:rPr>
-              <a:t>r2z-16690ccbe328 · scn-c46e1d86c1</a:t>
+              <a:t>r2z-45c4ba076af9 · scn-e0f12f397e</a:t>
             </a:r>
           </a:p>
         </p:txBody>
@@ -9428,7 +9428,7 @@
           <p:cNvPr id="32" name="">
             <a:extLst xmlns:a="http://schemas.openxmlformats.org/drawingml/2006/main">
               <a:ext uri="{FF2B5EF4-FFF2-40B4-BE49-F238E27FC236}">
-                <a16:creationId xmlns:a16="http://schemas.microsoft.com/office/drawing/2014/main" id="{146617C7-5657-4DDE-ADD1-05D803BCB937}"/>
+                <a16:creationId xmlns:a16="http://schemas.microsoft.com/office/drawing/2014/main" id="{12F2C0BC-06B5-49D7-BF1C-B402C8488BE6}"/>
               </a:ext>
             </a:extLst>
           </p:cNvPr>
@@ -9488,7 +9488,7 @@
     </p:spTree>
     <p:extLst>
       <p:ext uri="{BB962C8B-B14F-4D97-AF65-F5344CB8AC3E}">
-        <p14:creationId xmlns:p14="http://schemas.microsoft.com/office/powerpoint/2010/main" val="586419454"/>
+        <p14:creationId xmlns:p14="http://schemas.microsoft.com/office/powerpoint/2010/main" val="2063709067"/>
       </p:ext>
     </p:extLst>
   </p:cSld>
@@ -9519,7 +9519,7 @@
           <p:cNvPr id="32" name="">
             <a:extLst xmlns:a="http://schemas.openxmlformats.org/drawingml/2006/main">
               <a:ext uri="{FF2B5EF4-FFF2-40B4-BE49-F238E27FC236}">
-                <a16:creationId xmlns:a16="http://schemas.microsoft.com/office/drawing/2014/main" id="{D71C0DD0-4E2D-4358-8BE7-93D7784CCAB3}"/>
+                <a16:creationId xmlns:a16="http://schemas.microsoft.com/office/drawing/2014/main" id="{8A369B82-6E03-4A5E-ADB4-B6BDB4892B12}"/>
               </a:ext>
             </a:extLst>
           </p:cNvPr>
@@ -9581,7 +9581,7 @@
                 <a:latin typeface="Arial"/>
                 <a:ea typeface="Arial"/>
                 <a:cs typeface="Arial"/>
-                <a:hlinkClick xmlns:r="http://schemas.openxmlformats.org/officeDocument/2006/relationships" r:id="R6d5eff797b634230"/>
+                <a:hlinkClick xmlns:r="http://schemas.openxmlformats.org/officeDocument/2006/relationships" r:id="Ra71a82c1757745c5"/>
               </a:rPr>
               <a:t>https://github.com/qjmre23/Route2Zero</a:t>
             </a:r>
@@ -9604,7 +9604,7 @@
                 <a:latin typeface="Arial"/>
                 <a:ea typeface="Arial"/>
                 <a:cs typeface="Arial"/>
-                <a:hlinkClick xmlns:r="http://schemas.openxmlformats.org/officeDocument/2006/relationships" r:id="Rac2dbbf815234f77"/>
+                <a:hlinkClick xmlns:r="http://schemas.openxmlformats.org/officeDocument/2006/relationships" r:id="R4cfe024bdf5b47dc"/>
               </a:rPr>
               <a:t>https://route2zero.netlify.app/</a:t>
             </a:r>
@@ -9616,7 +9616,7 @@
           <p:cNvPr id="2" name="">
             <a:extLst xmlns:a="http://schemas.openxmlformats.org/drawingml/2006/main">
               <a:ext uri="{FF2B5EF4-FFF2-40B4-BE49-F238E27FC236}">
-                <a16:creationId xmlns:a16="http://schemas.microsoft.com/office/drawing/2014/main" id="{9CFE7251-5FF6-4A95-9CD0-15AF5CB68023}"/>
+                <a16:creationId xmlns:a16="http://schemas.microsoft.com/office/drawing/2014/main" id="{D1AA964F-0991-4DE4-A209-F161280051BE}"/>
               </a:ext>
             </a:extLst>
           </p:cNvPr>
@@ -9678,7 +9678,7 @@
           <p:cNvPr id="3" name="">
             <a:extLst xmlns:a="http://schemas.openxmlformats.org/drawingml/2006/main">
               <a:ext uri="{FF2B5EF4-FFF2-40B4-BE49-F238E27FC236}">
-                <a16:creationId xmlns:a16="http://schemas.microsoft.com/office/drawing/2014/main" id="{F4AF92C9-2267-4E77-8510-B966903C9A1A}"/>
+                <a16:creationId xmlns:a16="http://schemas.microsoft.com/office/drawing/2014/main" id="{AA4EA021-C39B-4C40-9507-3EEA38DC2E4C}"/>
               </a:ext>
             </a:extLst>
           </p:cNvPr>
@@ -9740,7 +9740,7 @@
           <p:cNvPr id="4" name="">
             <a:extLst xmlns:a="http://schemas.openxmlformats.org/drawingml/2006/main">
               <a:ext uri="{FF2B5EF4-FFF2-40B4-BE49-F238E27FC236}">
-                <a16:creationId xmlns:a16="http://schemas.microsoft.com/office/drawing/2014/main" id="{1BFE758D-C7EC-41F4-857C-A48123E6E611}"/>
+                <a16:creationId xmlns:a16="http://schemas.microsoft.com/office/drawing/2014/main" id="{A23DA40B-0B45-4644-8E35-2DDB27CB9BAE}"/>
               </a:ext>
             </a:extLst>
           </p:cNvPr>
@@ -9802,7 +9802,7 @@
           <p:cNvPr id="5" name="">
             <a:extLst xmlns:a="http://schemas.openxmlformats.org/drawingml/2006/main">
               <a:ext uri="{FF2B5EF4-FFF2-40B4-BE49-F238E27FC236}">
-                <a16:creationId xmlns:a16="http://schemas.microsoft.com/office/drawing/2014/main" id="{B7B5617C-F2C6-449D-A89E-461765D56CE2}"/>
+                <a16:creationId xmlns:a16="http://schemas.microsoft.com/office/drawing/2014/main" id="{3941F8DD-2F43-436A-A0EB-A1B21411645D}"/>
               </a:ext>
             </a:extLst>
           </p:cNvPr>
@@ -9835,7 +9835,7 @@
           <p:cNvPr id="6" name="">
             <a:extLst xmlns:a="http://schemas.openxmlformats.org/drawingml/2006/main">
               <a:ext uri="{FF2B5EF4-FFF2-40B4-BE49-F238E27FC236}">
-                <a16:creationId xmlns:a16="http://schemas.microsoft.com/office/drawing/2014/main" id="{BB40A93C-F74C-4041-9530-9D0EED10EF87}"/>
+                <a16:creationId xmlns:a16="http://schemas.microsoft.com/office/drawing/2014/main" id="{2093083E-2094-44CB-9DC4-BACB47BD4E67}"/>
               </a:ext>
             </a:extLst>
           </p:cNvPr>
@@ -9868,7 +9868,7 @@
           <p:cNvPr id="7" name="">
             <a:extLst xmlns:a="http://schemas.openxmlformats.org/drawingml/2006/main">
               <a:ext uri="{FF2B5EF4-FFF2-40B4-BE49-F238E27FC236}">
-                <a16:creationId xmlns:a16="http://schemas.microsoft.com/office/drawing/2014/main" id="{A2A8C213-0016-431C-9C30-953E7A91AAC8}"/>
+                <a16:creationId xmlns:a16="http://schemas.microsoft.com/office/drawing/2014/main" id="{0809D1F9-B752-4690-8235-E3F35F91332B}"/>
               </a:ext>
             </a:extLst>
           </p:cNvPr>
@@ -9930,7 +9930,7 @@
           <p:cNvPr id="8" name="">
             <a:extLst xmlns:a="http://schemas.openxmlformats.org/drawingml/2006/main">
               <a:ext uri="{FF2B5EF4-FFF2-40B4-BE49-F238E27FC236}">
-                <a16:creationId xmlns:a16="http://schemas.microsoft.com/office/drawing/2014/main" id="{EB4FCCAA-0A49-4B3D-A192-249C60F4390A}"/>
+                <a16:creationId xmlns:a16="http://schemas.microsoft.com/office/drawing/2014/main" id="{24EE9837-A68C-45C8-84C2-581DB78E3D3E}"/>
               </a:ext>
             </a:extLst>
           </p:cNvPr>
@@ -9992,7 +9992,7 @@
           <p:cNvPr id="9" name="">
             <a:extLst xmlns:a="http://schemas.openxmlformats.org/drawingml/2006/main">
               <a:ext uri="{FF2B5EF4-FFF2-40B4-BE49-F238E27FC236}">
-                <a16:creationId xmlns:a16="http://schemas.microsoft.com/office/drawing/2014/main" id="{A312929D-745E-41D7-8DEC-53A2078FF2B5}"/>
+                <a16:creationId xmlns:a16="http://schemas.microsoft.com/office/drawing/2014/main" id="{7D6C7BD7-E168-4B34-B113-35478BE02228}"/>
               </a:ext>
             </a:extLst>
           </p:cNvPr>
@@ -10025,7 +10025,7 @@
           <p:cNvPr id="10" name="">
             <a:extLst xmlns:a="http://schemas.openxmlformats.org/drawingml/2006/main">
               <a:ext uri="{FF2B5EF4-FFF2-40B4-BE49-F238E27FC236}">
-                <a16:creationId xmlns:a16="http://schemas.microsoft.com/office/drawing/2014/main" id="{CF4EA63D-4A9F-4084-B59B-00FDBF3AECD1}"/>
+                <a16:creationId xmlns:a16="http://schemas.microsoft.com/office/drawing/2014/main" id="{E2C60DB2-64C4-4B22-8F58-D2E7F79788AF}"/>
               </a:ext>
             </a:extLst>
           </p:cNvPr>
@@ -10058,7 +10058,7 @@
           <p:cNvPr id="11" name="">
             <a:extLst xmlns:a="http://schemas.openxmlformats.org/drawingml/2006/main">
               <a:ext uri="{FF2B5EF4-FFF2-40B4-BE49-F238E27FC236}">
-                <a16:creationId xmlns:a16="http://schemas.microsoft.com/office/drawing/2014/main" id="{3FCB4E69-C0D4-49DD-923E-28E61D85B4FD}"/>
+                <a16:creationId xmlns:a16="http://schemas.microsoft.com/office/drawing/2014/main" id="{D96F374E-3B7E-4CAD-9890-E76FF440EC98}"/>
               </a:ext>
             </a:extLst>
           </p:cNvPr>
@@ -10120,7 +10120,7 @@
           <p:cNvPr id="12" name="">
             <a:extLst xmlns:a="http://schemas.openxmlformats.org/drawingml/2006/main">
               <a:ext uri="{FF2B5EF4-FFF2-40B4-BE49-F238E27FC236}">
-                <a16:creationId xmlns:a16="http://schemas.microsoft.com/office/drawing/2014/main" id="{4D0AF7A6-A14D-4CAC-B733-741FA833988B}"/>
+                <a16:creationId xmlns:a16="http://schemas.microsoft.com/office/drawing/2014/main" id="{69BCCE61-D561-4002-B862-5BBC97224BFE}"/>
               </a:ext>
             </a:extLst>
           </p:cNvPr>
@@ -10182,7 +10182,7 @@
           <p:cNvPr id="13" name="">
             <a:extLst xmlns:a="http://schemas.openxmlformats.org/drawingml/2006/main">
               <a:ext uri="{FF2B5EF4-FFF2-40B4-BE49-F238E27FC236}">
-                <a16:creationId xmlns:a16="http://schemas.microsoft.com/office/drawing/2014/main" id="{617059A1-F6CA-4341-B21A-ABE98BFAC852}"/>
+                <a16:creationId xmlns:a16="http://schemas.microsoft.com/office/drawing/2014/main" id="{31F75C1A-90B8-40F3-BD25-8EFE6899ADFC}"/>
               </a:ext>
             </a:extLst>
           </p:cNvPr>
@@ -10215,7 +10215,7 @@
           <p:cNvPr id="14" name="">
             <a:extLst xmlns:a="http://schemas.openxmlformats.org/drawingml/2006/main">
               <a:ext uri="{FF2B5EF4-FFF2-40B4-BE49-F238E27FC236}">
-                <a16:creationId xmlns:a16="http://schemas.microsoft.com/office/drawing/2014/main" id="{0A2CAA98-F43C-4D0F-9923-F9A022A78BE5}"/>
+                <a16:creationId xmlns:a16="http://schemas.microsoft.com/office/drawing/2014/main" id="{DEDF3975-EED8-40C8-BA75-814342C01D2A}"/>
               </a:ext>
             </a:extLst>
           </p:cNvPr>
@@ -10248,7 +10248,7 @@
           <p:cNvPr id="15" name="">
             <a:extLst xmlns:a="http://schemas.openxmlformats.org/drawingml/2006/main">
               <a:ext uri="{FF2B5EF4-FFF2-40B4-BE49-F238E27FC236}">
-                <a16:creationId xmlns:a16="http://schemas.microsoft.com/office/drawing/2014/main" id="{075CFE10-9396-48DC-B939-66CCE48BB6CF}"/>
+                <a16:creationId xmlns:a16="http://schemas.microsoft.com/office/drawing/2014/main" id="{5FF316A8-A6D6-4D0F-A468-87FAD0D162DE}"/>
               </a:ext>
             </a:extLst>
           </p:cNvPr>
@@ -10310,7 +10310,7 @@
           <p:cNvPr id="16" name="">
             <a:extLst xmlns:a="http://schemas.openxmlformats.org/drawingml/2006/main">
               <a:ext uri="{FF2B5EF4-FFF2-40B4-BE49-F238E27FC236}">
-                <a16:creationId xmlns:a16="http://schemas.microsoft.com/office/drawing/2014/main" id="{D1CCF049-5CC7-4A70-BF5D-B4D305FEEA92}"/>
+                <a16:creationId xmlns:a16="http://schemas.microsoft.com/office/drawing/2014/main" id="{86C8E84F-1C75-447E-AB05-23EFA2FD96AB}"/>
               </a:ext>
             </a:extLst>
           </p:cNvPr>
@@ -10372,7 +10372,7 @@
           <p:cNvPr id="17" name="">
             <a:extLst xmlns:a="http://schemas.openxmlformats.org/drawingml/2006/main">
               <a:ext uri="{FF2B5EF4-FFF2-40B4-BE49-F238E27FC236}">
-                <a16:creationId xmlns:a16="http://schemas.microsoft.com/office/drawing/2014/main" id="{7F9A05E1-9F8F-4437-B534-F3009D754CAB}"/>
+                <a16:creationId xmlns:a16="http://schemas.microsoft.com/office/drawing/2014/main" id="{21D0F9F4-0B26-4C8F-996E-AB5A0E3EF09D}"/>
               </a:ext>
             </a:extLst>
           </p:cNvPr>
@@ -10405,7 +10405,7 @@
           <p:cNvPr id="18" name="">
             <a:extLst xmlns:a="http://schemas.openxmlformats.org/drawingml/2006/main">
               <a:ext uri="{FF2B5EF4-FFF2-40B4-BE49-F238E27FC236}">
-                <a16:creationId xmlns:a16="http://schemas.microsoft.com/office/drawing/2014/main" id="{857E4B1D-66FF-4474-A245-B44F6096AE71}"/>
+                <a16:creationId xmlns:a16="http://schemas.microsoft.com/office/drawing/2014/main" id="{2596D1C3-9F48-4F96-9F2F-5E3FB42217A7}"/>
               </a:ext>
             </a:extLst>
           </p:cNvPr>
@@ -10438,7 +10438,7 @@
           <p:cNvPr id="19" name="">
             <a:extLst xmlns:a="http://schemas.openxmlformats.org/drawingml/2006/main">
               <a:ext uri="{FF2B5EF4-FFF2-40B4-BE49-F238E27FC236}">
-                <a16:creationId xmlns:a16="http://schemas.microsoft.com/office/drawing/2014/main" id="{A95F1416-FD0A-44B9-A55C-12B5E1D1EFEB}"/>
+                <a16:creationId xmlns:a16="http://schemas.microsoft.com/office/drawing/2014/main" id="{F3E69DA2-3EB9-457D-9066-E3EECA3E01BA}"/>
               </a:ext>
             </a:extLst>
           </p:cNvPr>
@@ -10500,7 +10500,7 @@
           <p:cNvPr id="20" name="">
             <a:extLst xmlns:a="http://schemas.openxmlformats.org/drawingml/2006/main">
               <a:ext uri="{FF2B5EF4-FFF2-40B4-BE49-F238E27FC236}">
-                <a16:creationId xmlns:a16="http://schemas.microsoft.com/office/drawing/2014/main" id="{3E3D457A-9CFC-4E51-BC94-B24E76527E8E}"/>
+                <a16:creationId xmlns:a16="http://schemas.microsoft.com/office/drawing/2014/main" id="{58044146-2B61-461B-A1C7-6F70EBC4CE94}"/>
               </a:ext>
             </a:extLst>
           </p:cNvPr>
@@ -10535,7 +10535,7 @@
           <p:cNvPr id="21" name="">
             <a:extLst xmlns:a="http://schemas.openxmlformats.org/drawingml/2006/main">
               <a:ext uri="{FF2B5EF4-FFF2-40B4-BE49-F238E27FC236}">
-                <a16:creationId xmlns:a16="http://schemas.microsoft.com/office/drawing/2014/main" id="{83F6A9FE-5879-4BA4-8C6B-DAFEC7EF5020}"/>
+                <a16:creationId xmlns:a16="http://schemas.microsoft.com/office/drawing/2014/main" id="{E2FC7179-BB20-43CA-B230-62D949D26417}"/>
               </a:ext>
             </a:extLst>
           </p:cNvPr>
@@ -10568,7 +10568,7 @@
           <p:cNvPr id="22" name="">
             <a:extLst xmlns:a="http://schemas.openxmlformats.org/drawingml/2006/main">
               <a:ext uri="{FF2B5EF4-FFF2-40B4-BE49-F238E27FC236}">
-                <a16:creationId xmlns:a16="http://schemas.microsoft.com/office/drawing/2014/main" id="{6D955410-23E2-4793-9FFC-CD9E9C79DA98}"/>
+                <a16:creationId xmlns:a16="http://schemas.microsoft.com/office/drawing/2014/main" id="{7787089E-CB96-4E38-AFFE-6ED981C9BC1D}"/>
               </a:ext>
             </a:extLst>
           </p:cNvPr>
@@ -10630,7 +10630,7 @@
           <p:cNvPr id="23" name="">
             <a:extLst xmlns:a="http://schemas.openxmlformats.org/drawingml/2006/main">
               <a:ext uri="{FF2B5EF4-FFF2-40B4-BE49-F238E27FC236}">
-                <a16:creationId xmlns:a16="http://schemas.microsoft.com/office/drawing/2014/main" id="{DB5A77E7-1A03-4EED-91AD-379CD294FB09}"/>
+                <a16:creationId xmlns:a16="http://schemas.microsoft.com/office/drawing/2014/main" id="{7649BBE2-BFBB-4670-89A4-697E5AD85A10}"/>
               </a:ext>
             </a:extLst>
           </p:cNvPr>
@@ -10692,7 +10692,7 @@
           <p:cNvPr id="24" name="">
             <a:extLst xmlns:a="http://schemas.openxmlformats.org/drawingml/2006/main">
               <a:ext uri="{FF2B5EF4-FFF2-40B4-BE49-F238E27FC236}">
-                <a16:creationId xmlns:a16="http://schemas.microsoft.com/office/drawing/2014/main" id="{31765A85-1EA0-44C7-9604-97A951E81EBC}"/>
+                <a16:creationId xmlns:a16="http://schemas.microsoft.com/office/drawing/2014/main" id="{CC054E23-52F1-4F17-ABB1-848F0A62D1C9}"/>
               </a:ext>
             </a:extLst>
           </p:cNvPr>
@@ -10744,7 +10744,7 @@
                 <a:ea typeface="Arial"/>
                 <a:cs typeface="Arial"/>
               </a:rPr>
-              <a:t>scn-c46e1d86c1</a:t>
+              <a:t>scn-e0f12f397e</a:t>
             </a:r>
           </a:p>
         </p:txBody>
@@ -10754,7 +10754,7 @@
           <p:cNvPr id="25" name="">
             <a:extLst xmlns:a="http://schemas.openxmlformats.org/drawingml/2006/main">
               <a:ext uri="{FF2B5EF4-FFF2-40B4-BE49-F238E27FC236}">
-                <a16:creationId xmlns:a16="http://schemas.microsoft.com/office/drawing/2014/main" id="{32306117-3CBD-47BC-8B74-A7343CC033FD}"/>
+                <a16:creationId xmlns:a16="http://schemas.microsoft.com/office/drawing/2014/main" id="{9AF9B1B5-0110-4707-B6FD-E901904E026B}"/>
               </a:ext>
             </a:extLst>
           </p:cNvPr>
@@ -10785,7 +10785,7 @@
           <p:cNvPr id="26" name="">
             <a:extLst xmlns:a="http://schemas.openxmlformats.org/drawingml/2006/main">
               <a:ext uri="{FF2B5EF4-FFF2-40B4-BE49-F238E27FC236}">
-                <a16:creationId xmlns:a16="http://schemas.microsoft.com/office/drawing/2014/main" id="{C4E79009-8FE9-405A-9938-15E3CD4A29EB}"/>
+                <a16:creationId xmlns:a16="http://schemas.microsoft.com/office/drawing/2014/main" id="{AF4542F2-C299-4A0A-856E-B5F9491432CB}"/>
               </a:ext>
             </a:extLst>
           </p:cNvPr>
@@ -10847,7 +10847,7 @@
           <p:cNvPr id="27" name="">
             <a:extLst xmlns:a="http://schemas.openxmlformats.org/drawingml/2006/main">
               <a:ext uri="{FF2B5EF4-FFF2-40B4-BE49-F238E27FC236}">
-                <a16:creationId xmlns:a16="http://schemas.microsoft.com/office/drawing/2014/main" id="{DB04803D-39A3-4C61-9A85-D4B50F5F8B7E}"/>
+                <a16:creationId xmlns:a16="http://schemas.microsoft.com/office/drawing/2014/main" id="{8AAD9303-D5F4-4A03-A5C4-7BC69CD3A312}"/>
               </a:ext>
             </a:extLst>
           </p:cNvPr>
@@ -10942,7 +10942,7 @@
           <p:cNvPr id="28" name="">
             <a:extLst xmlns:a="http://schemas.openxmlformats.org/drawingml/2006/main">
               <a:ext uri="{FF2B5EF4-FFF2-40B4-BE49-F238E27FC236}">
-                <a16:creationId xmlns:a16="http://schemas.microsoft.com/office/drawing/2014/main" id="{BA9F6AAD-77B7-423F-BE75-C3235D73B53F}"/>
+                <a16:creationId xmlns:a16="http://schemas.microsoft.com/office/drawing/2014/main" id="{3CE92B79-F06D-4FD5-A70C-4EEB6BEDABAD}"/>
               </a:ext>
             </a:extLst>
           </p:cNvPr>
@@ -11004,7 +11004,7 @@
           <p:cNvPr id="29" name="">
             <a:extLst xmlns:a="http://schemas.openxmlformats.org/drawingml/2006/main">
               <a:ext uri="{FF2B5EF4-FFF2-40B4-BE49-F238E27FC236}">
-                <a16:creationId xmlns:a16="http://schemas.microsoft.com/office/drawing/2014/main" id="{32B74ABF-2F08-413D-BA61-7CFA1B3D3023}"/>
+                <a16:creationId xmlns:a16="http://schemas.microsoft.com/office/drawing/2014/main" id="{2E60D159-FF82-4E64-8536-87C8427F23EB}"/>
               </a:ext>
             </a:extLst>
           </p:cNvPr>
@@ -11035,7 +11035,7 @@
           <p:cNvPr id="30" name="">
             <a:extLst xmlns:a="http://schemas.openxmlformats.org/drawingml/2006/main">
               <a:ext uri="{FF2B5EF4-FFF2-40B4-BE49-F238E27FC236}">
-                <a16:creationId xmlns:a16="http://schemas.microsoft.com/office/drawing/2014/main" id="{9E11E37F-8998-42F5-9F79-A8FD7432FC0A}"/>
+                <a16:creationId xmlns:a16="http://schemas.microsoft.com/office/drawing/2014/main" id="{411C6B11-2948-4B88-B109-87060F976CA5}"/>
               </a:ext>
             </a:extLst>
           </p:cNvPr>
@@ -11087,7 +11087,7 @@
                 <a:ea typeface="Arial"/>
                 <a:cs typeface="Arial"/>
               </a:rPr>
-              <a:t>r2z-16690ccbe328 · scn-c46e1d86c1</a:t>
+              <a:t>r2z-45c4ba076af9 · scn-e0f12f397e</a:t>
             </a:r>
           </a:p>
         </p:txBody>
@@ -11097,7 +11097,7 @@
           <p:cNvPr id="31" name="">
             <a:extLst xmlns:a="http://schemas.openxmlformats.org/drawingml/2006/main">
               <a:ext uri="{FF2B5EF4-FFF2-40B4-BE49-F238E27FC236}">
-                <a16:creationId xmlns:a16="http://schemas.microsoft.com/office/drawing/2014/main" id="{1BE94EEE-B58A-40EE-8842-2D354787BD86}"/>
+                <a16:creationId xmlns:a16="http://schemas.microsoft.com/office/drawing/2014/main" id="{40B4B70B-88A7-4BD6-A7D1-2888BEA5FF53}"/>
               </a:ext>
             </a:extLst>
           </p:cNvPr>
@@ -11157,7 +11157,7 @@
     </p:spTree>
     <p:extLst>
       <p:ext uri="{BB962C8B-B14F-4D97-AF65-F5344CB8AC3E}">
-        <p14:creationId xmlns:p14="http://schemas.microsoft.com/office/powerpoint/2010/main" val="1737866953"/>
+        <p14:creationId xmlns:p14="http://schemas.microsoft.com/office/powerpoint/2010/main" val="791093532"/>
       </p:ext>
     </p:extLst>
   </p:cSld>
@@ -11188,7 +11188,7 @@
           <p:cNvPr id="27" name="">
             <a:extLst xmlns:a="http://schemas.openxmlformats.org/drawingml/2006/main">
               <a:ext uri="{FF2B5EF4-FFF2-40B4-BE49-F238E27FC236}">
-                <a16:creationId xmlns:a16="http://schemas.microsoft.com/office/drawing/2014/main" id="{33C6F3A4-3011-4029-8451-FF1D2EA80338}"/>
+                <a16:creationId xmlns:a16="http://schemas.microsoft.com/office/drawing/2014/main" id="{D28A1D1E-9780-4484-AE19-ADB9DF829BB1}"/>
               </a:ext>
             </a:extLst>
           </p:cNvPr>
@@ -11250,7 +11250,7 @@
                 <a:latin typeface="Arial"/>
                 <a:ea typeface="Arial"/>
                 <a:cs typeface="Arial"/>
-                <a:hlinkClick xmlns:r="http://schemas.openxmlformats.org/officeDocument/2006/relationships" r:id="Rcd81b9cd12d04a1e"/>
+                <a:hlinkClick xmlns:r="http://schemas.openxmlformats.org/officeDocument/2006/relationships" r:id="Rb3dbe1815f384ef0"/>
               </a:rPr>
               <a:t>https://github.com/qjmre23/Route2Zero</a:t>
             </a:r>
@@ -11273,7 +11273,7 @@
                 <a:latin typeface="Arial"/>
                 <a:ea typeface="Arial"/>
                 <a:cs typeface="Arial"/>
-                <a:hlinkClick xmlns:r="http://schemas.openxmlformats.org/officeDocument/2006/relationships" r:id="R830d8e3e32224e72"/>
+                <a:hlinkClick xmlns:r="http://schemas.openxmlformats.org/officeDocument/2006/relationships" r:id="R1f30ee8ae47544b8"/>
               </a:rPr>
               <a:t>https://route2zero.netlify.app/</a:t>
             </a:r>
@@ -11285,7 +11285,7 @@
           <p:cNvPr id="2" name="">
             <a:extLst xmlns:a="http://schemas.openxmlformats.org/drawingml/2006/main">
               <a:ext uri="{FF2B5EF4-FFF2-40B4-BE49-F238E27FC236}">
-                <a16:creationId xmlns:a16="http://schemas.microsoft.com/office/drawing/2014/main" id="{310485A1-1584-4D4E-ABE1-B84134EDA017}"/>
+                <a16:creationId xmlns:a16="http://schemas.microsoft.com/office/drawing/2014/main" id="{1F45A6AD-5083-40B3-BC28-29020DCE0877}"/>
               </a:ext>
             </a:extLst>
           </p:cNvPr>
@@ -11347,7 +11347,7 @@
           <p:cNvPr id="3" name="">
             <a:extLst xmlns:a="http://schemas.openxmlformats.org/drawingml/2006/main">
               <a:ext uri="{FF2B5EF4-FFF2-40B4-BE49-F238E27FC236}">
-                <a16:creationId xmlns:a16="http://schemas.microsoft.com/office/drawing/2014/main" id="{AECE67EE-A9A5-4FF5-B8A1-FD06DD76520A}"/>
+                <a16:creationId xmlns:a16="http://schemas.microsoft.com/office/drawing/2014/main" id="{5A7EC52D-4E27-46DF-8F00-57AF7EA39350}"/>
               </a:ext>
             </a:extLst>
           </p:cNvPr>
@@ -11409,7 +11409,7 @@
           <p:cNvPr id="4" name="">
             <a:extLst xmlns:a="http://schemas.openxmlformats.org/drawingml/2006/main">
               <a:ext uri="{FF2B5EF4-FFF2-40B4-BE49-F238E27FC236}">
-                <a16:creationId xmlns:a16="http://schemas.microsoft.com/office/drawing/2014/main" id="{EF88FECF-E0DC-435E-B788-0ED53AB177E1}"/>
+                <a16:creationId xmlns:a16="http://schemas.microsoft.com/office/drawing/2014/main" id="{97732702-9410-4FA4-951D-1936E130EE29}"/>
               </a:ext>
             </a:extLst>
           </p:cNvPr>
@@ -11471,7 +11471,7 @@
           <p:cNvPr id="5" name="">
             <a:extLst xmlns:a="http://schemas.openxmlformats.org/drawingml/2006/main">
               <a:ext uri="{FF2B5EF4-FFF2-40B4-BE49-F238E27FC236}">
-                <a16:creationId xmlns:a16="http://schemas.microsoft.com/office/drawing/2014/main" id="{99E1F260-3FFD-4FAF-AB9F-2AD2F0A68411}"/>
+                <a16:creationId xmlns:a16="http://schemas.microsoft.com/office/drawing/2014/main" id="{20A7C2B1-535A-48B6-9636-666C56C20AE7}"/>
               </a:ext>
             </a:extLst>
           </p:cNvPr>
@@ -11533,7 +11533,7 @@
           <p:cNvPr id="6" name="">
             <a:extLst xmlns:a="http://schemas.openxmlformats.org/drawingml/2006/main">
               <a:ext uri="{FF2B5EF4-FFF2-40B4-BE49-F238E27FC236}">
-                <a16:creationId xmlns:a16="http://schemas.microsoft.com/office/drawing/2014/main" id="{A9ABDC8E-0EF3-44F3-B572-C475532A21CC}"/>
+                <a16:creationId xmlns:a16="http://schemas.microsoft.com/office/drawing/2014/main" id="{51DF5452-E64B-400B-9E52-5931F7C8EC1E}"/>
               </a:ext>
             </a:extLst>
           </p:cNvPr>
@@ -11595,7 +11595,7 @@
           <p:cNvPr id="7" name="">
             <a:extLst xmlns:a="http://schemas.openxmlformats.org/drawingml/2006/main">
               <a:ext uri="{FF2B5EF4-FFF2-40B4-BE49-F238E27FC236}">
-                <a16:creationId xmlns:a16="http://schemas.microsoft.com/office/drawing/2014/main" id="{5D80811F-47C7-499D-BA35-CFECA0B3D525}"/>
+                <a16:creationId xmlns:a16="http://schemas.microsoft.com/office/drawing/2014/main" id="{92BBE17C-1066-481A-B20A-68C57B7D7832}"/>
               </a:ext>
             </a:extLst>
           </p:cNvPr>
@@ -11657,7 +11657,7 @@
           <p:cNvPr id="8" name="">
             <a:extLst xmlns:a="http://schemas.openxmlformats.org/drawingml/2006/main">
               <a:ext uri="{FF2B5EF4-FFF2-40B4-BE49-F238E27FC236}">
-                <a16:creationId xmlns:a16="http://schemas.microsoft.com/office/drawing/2014/main" id="{8BBCA93A-F078-4EBF-B87A-4610BD01A038}"/>
+                <a16:creationId xmlns:a16="http://schemas.microsoft.com/office/drawing/2014/main" id="{6E922EB1-787E-4E83-8F39-03F2BB1C6F0E}"/>
               </a:ext>
             </a:extLst>
           </p:cNvPr>
@@ -11688,7 +11688,7 @@
           <p:cNvPr id="9" name="">
             <a:extLst xmlns:a="http://schemas.openxmlformats.org/drawingml/2006/main">
               <a:ext uri="{FF2B5EF4-FFF2-40B4-BE49-F238E27FC236}">
-                <a16:creationId xmlns:a16="http://schemas.microsoft.com/office/drawing/2014/main" id="{1DDE858B-6EDA-4C34-84FF-D1E5E09F4AB4}"/>
+                <a16:creationId xmlns:a16="http://schemas.microsoft.com/office/drawing/2014/main" id="{DB6B17EB-94D7-4F95-9DAF-6C99B4594578}"/>
               </a:ext>
             </a:extLst>
           </p:cNvPr>
@@ -11721,7 +11721,7 @@
           <p:cNvPr id="10" name="">
             <a:extLst xmlns:a="http://schemas.openxmlformats.org/drawingml/2006/main">
               <a:ext uri="{FF2B5EF4-FFF2-40B4-BE49-F238E27FC236}">
-                <a16:creationId xmlns:a16="http://schemas.microsoft.com/office/drawing/2014/main" id="{9829F0A9-A501-43FE-B316-B191E7852049}"/>
+                <a16:creationId xmlns:a16="http://schemas.microsoft.com/office/drawing/2014/main" id="{7C1E1E10-22E1-4D0F-85AB-2F916456C157}"/>
               </a:ext>
             </a:extLst>
           </p:cNvPr>
@@ -11783,7 +11783,7 @@
           <p:cNvPr id="11" name="">
             <a:extLst xmlns:a="http://schemas.openxmlformats.org/drawingml/2006/main">
               <a:ext uri="{FF2B5EF4-FFF2-40B4-BE49-F238E27FC236}">
-                <a16:creationId xmlns:a16="http://schemas.microsoft.com/office/drawing/2014/main" id="{394511D0-834C-4946-A2B3-78EE986FA632}"/>
+                <a16:creationId xmlns:a16="http://schemas.microsoft.com/office/drawing/2014/main" id="{27CD88AB-1683-4636-89F5-13940F448739}"/>
               </a:ext>
             </a:extLst>
           </p:cNvPr>
@@ -11845,7 +11845,7 @@
           <p:cNvPr id="12" name="">
             <a:extLst xmlns:a="http://schemas.openxmlformats.org/drawingml/2006/main">
               <a:ext uri="{FF2B5EF4-FFF2-40B4-BE49-F238E27FC236}">
-                <a16:creationId xmlns:a16="http://schemas.microsoft.com/office/drawing/2014/main" id="{702B821B-A89B-4A35-8CFA-72CF31FD423A}"/>
+                <a16:creationId xmlns:a16="http://schemas.microsoft.com/office/drawing/2014/main" id="{F48565B6-4632-40E4-9377-CF65EAC96A72}"/>
               </a:ext>
             </a:extLst>
           </p:cNvPr>
@@ -11880,7 +11880,7 @@
           <p:cNvPr id="13" name="">
             <a:extLst xmlns:a="http://schemas.openxmlformats.org/drawingml/2006/main">
               <a:ext uri="{FF2B5EF4-FFF2-40B4-BE49-F238E27FC236}">
-                <a16:creationId xmlns:a16="http://schemas.microsoft.com/office/drawing/2014/main" id="{82A3BD81-21E7-448D-87ED-D741B9E92B20}"/>
+                <a16:creationId xmlns:a16="http://schemas.microsoft.com/office/drawing/2014/main" id="{D85E65EA-8FB2-4C15-9CFC-35096F9741EE}"/>
               </a:ext>
             </a:extLst>
           </p:cNvPr>
@@ -11942,7 +11942,7 @@
           <p:cNvPr id="14" name="">
             <a:extLst xmlns:a="http://schemas.openxmlformats.org/drawingml/2006/main">
               <a:ext uri="{FF2B5EF4-FFF2-40B4-BE49-F238E27FC236}">
-                <a16:creationId xmlns:a16="http://schemas.microsoft.com/office/drawing/2014/main" id="{AFA86602-66DA-4A88-B984-673B1869A631}"/>
+                <a16:creationId xmlns:a16="http://schemas.microsoft.com/office/drawing/2014/main" id="{A509ECF1-EC39-47B8-8E55-CEEB7380AA99}"/>
               </a:ext>
             </a:extLst>
           </p:cNvPr>
@@ -12004,7 +12004,7 @@
           <p:cNvPr id="15" name="">
             <a:extLst xmlns:a="http://schemas.openxmlformats.org/drawingml/2006/main">
               <a:ext uri="{FF2B5EF4-FFF2-40B4-BE49-F238E27FC236}">
-                <a16:creationId xmlns:a16="http://schemas.microsoft.com/office/drawing/2014/main" id="{DFCCA093-9049-4FF1-9931-D2C2852C663A}"/>
+                <a16:creationId xmlns:a16="http://schemas.microsoft.com/office/drawing/2014/main" id="{7FB27270-B1F5-48E7-995B-6C1263D290A6}"/>
               </a:ext>
             </a:extLst>
           </p:cNvPr>
@@ -12066,7 +12066,7 @@
           <p:cNvPr id="16" name="">
             <a:extLst xmlns:a="http://schemas.openxmlformats.org/drawingml/2006/main">
               <a:ext uri="{FF2B5EF4-FFF2-40B4-BE49-F238E27FC236}">
-                <a16:creationId xmlns:a16="http://schemas.microsoft.com/office/drawing/2014/main" id="{CCF9796A-365E-4DD6-B900-FC0780E3C3D6}"/>
+                <a16:creationId xmlns:a16="http://schemas.microsoft.com/office/drawing/2014/main" id="{9B742223-3FB3-43A2-AD19-7B4B9FC417C3}"/>
               </a:ext>
             </a:extLst>
           </p:cNvPr>
@@ -12097,7 +12097,7 @@
           <p:cNvPr id="17" name="">
             <a:extLst xmlns:a="http://schemas.openxmlformats.org/drawingml/2006/main">
               <a:ext uri="{FF2B5EF4-FFF2-40B4-BE49-F238E27FC236}">
-                <a16:creationId xmlns:a16="http://schemas.microsoft.com/office/drawing/2014/main" id="{F7E4F7CC-E768-41AD-851D-8A511A481755}"/>
+                <a16:creationId xmlns:a16="http://schemas.microsoft.com/office/drawing/2014/main" id="{662A0D99-29AB-4E8C-99D5-BBEBFFEC8A0B}"/>
               </a:ext>
             </a:extLst>
           </p:cNvPr>
@@ -12130,7 +12130,7 @@
           <p:cNvPr id="18" name="">
             <a:extLst xmlns:a="http://schemas.openxmlformats.org/drawingml/2006/main">
               <a:ext uri="{FF2B5EF4-FFF2-40B4-BE49-F238E27FC236}">
-                <a16:creationId xmlns:a16="http://schemas.microsoft.com/office/drawing/2014/main" id="{E427B3F1-2812-4B83-B4B3-8AE405C76298}"/>
+                <a16:creationId xmlns:a16="http://schemas.microsoft.com/office/drawing/2014/main" id="{5028AD84-A400-4EA4-97D0-EE07EFBB9813}"/>
               </a:ext>
             </a:extLst>
           </p:cNvPr>
@@ -12192,7 +12192,7 @@
           <p:cNvPr id="19" name="">
             <a:extLst xmlns:a="http://schemas.openxmlformats.org/drawingml/2006/main">
               <a:ext uri="{FF2B5EF4-FFF2-40B4-BE49-F238E27FC236}">
-                <a16:creationId xmlns:a16="http://schemas.microsoft.com/office/drawing/2014/main" id="{1A297103-6D0E-4268-803B-2A8688B44263}"/>
+                <a16:creationId xmlns:a16="http://schemas.microsoft.com/office/drawing/2014/main" id="{85AE9AC1-2B6B-44BA-9AFF-C4B52E3A8522}"/>
               </a:ext>
             </a:extLst>
           </p:cNvPr>
@@ -12254,7 +12254,7 @@
           <p:cNvPr id="20" name="">
             <a:extLst xmlns:a="http://schemas.openxmlformats.org/drawingml/2006/main">
               <a:ext uri="{FF2B5EF4-FFF2-40B4-BE49-F238E27FC236}">
-                <a16:creationId xmlns:a16="http://schemas.microsoft.com/office/drawing/2014/main" id="{09EF8130-28C3-4182-BB0B-A1FA16A0F9B1}"/>
+                <a16:creationId xmlns:a16="http://schemas.microsoft.com/office/drawing/2014/main" id="{00E0BA8F-85E0-4AEB-8974-5315E1B1D822}"/>
               </a:ext>
             </a:extLst>
           </p:cNvPr>
@@ -12289,7 +12289,7 @@
           <p:cNvPr id="21" name="">
             <a:extLst xmlns:a="http://schemas.openxmlformats.org/drawingml/2006/main">
               <a:ext uri="{FF2B5EF4-FFF2-40B4-BE49-F238E27FC236}">
-                <a16:creationId xmlns:a16="http://schemas.microsoft.com/office/drawing/2014/main" id="{0567A654-71B3-4849-86C3-5ACFF0542B17}"/>
+                <a16:creationId xmlns:a16="http://schemas.microsoft.com/office/drawing/2014/main" id="{866CB4F2-1E23-4EAD-9ECD-3E1069073735}"/>
               </a:ext>
             </a:extLst>
           </p:cNvPr>
@@ -12351,7 +12351,7 @@
           <p:cNvPr id="22" name="">
             <a:extLst xmlns:a="http://schemas.openxmlformats.org/drawingml/2006/main">
               <a:ext uri="{FF2B5EF4-FFF2-40B4-BE49-F238E27FC236}">
-                <a16:creationId xmlns:a16="http://schemas.microsoft.com/office/drawing/2014/main" id="{B3FF990B-67B1-4CCA-AF34-4AAE8460B8FF}"/>
+                <a16:creationId xmlns:a16="http://schemas.microsoft.com/office/drawing/2014/main" id="{79D0B2D7-8F76-4F27-AF53-2EED10A76D48}"/>
               </a:ext>
             </a:extLst>
           </p:cNvPr>
@@ -12384,7 +12384,7 @@
           <p:cNvPr id="23" name="">
             <a:extLst xmlns:a="http://schemas.openxmlformats.org/drawingml/2006/main">
               <a:ext uri="{FF2B5EF4-FFF2-40B4-BE49-F238E27FC236}">
-                <a16:creationId xmlns:a16="http://schemas.microsoft.com/office/drawing/2014/main" id="{1F918ACB-0F8A-4AEA-94B9-080688BD7423}"/>
+                <a16:creationId xmlns:a16="http://schemas.microsoft.com/office/drawing/2014/main" id="{FEDCF6D8-DAAC-4EED-95FA-72A2AE8EAFBA}"/>
               </a:ext>
             </a:extLst>
           </p:cNvPr>
@@ -12446,7 +12446,7 @@
           <p:cNvPr id="24" name="">
             <a:extLst xmlns:a="http://schemas.openxmlformats.org/drawingml/2006/main">
               <a:ext uri="{FF2B5EF4-FFF2-40B4-BE49-F238E27FC236}">
-                <a16:creationId xmlns:a16="http://schemas.microsoft.com/office/drawing/2014/main" id="{FF86406E-DD4F-481E-B5B2-42978210AD54}"/>
+                <a16:creationId xmlns:a16="http://schemas.microsoft.com/office/drawing/2014/main" id="{9CDD6315-A44C-4903-8B98-E1D27EE8B6D9}"/>
               </a:ext>
             </a:extLst>
           </p:cNvPr>
@@ -12477,7 +12477,7 @@
           <p:cNvPr id="25" name="">
             <a:extLst xmlns:a="http://schemas.openxmlformats.org/drawingml/2006/main">
               <a:ext uri="{FF2B5EF4-FFF2-40B4-BE49-F238E27FC236}">
-                <a16:creationId xmlns:a16="http://schemas.microsoft.com/office/drawing/2014/main" id="{5E22643C-32A2-4604-82A2-864C3CCE5B2D}"/>
+                <a16:creationId xmlns:a16="http://schemas.microsoft.com/office/drawing/2014/main" id="{A54C7E28-94DB-4A0C-8DD7-050394965191}"/>
               </a:ext>
             </a:extLst>
           </p:cNvPr>
@@ -12529,7 +12529,7 @@
                 <a:ea typeface="Arial"/>
                 <a:cs typeface="Arial"/>
               </a:rPr>
-              <a:t>r2z-16690ccbe328 · scn-c46e1d86c1</a:t>
+              <a:t>r2z-45c4ba076af9 · scn-e0f12f397e</a:t>
             </a:r>
           </a:p>
         </p:txBody>
@@ -12539,7 +12539,7 @@
           <p:cNvPr id="26" name="">
             <a:extLst xmlns:a="http://schemas.openxmlformats.org/drawingml/2006/main">
               <a:ext uri="{FF2B5EF4-FFF2-40B4-BE49-F238E27FC236}">
-                <a16:creationId xmlns:a16="http://schemas.microsoft.com/office/drawing/2014/main" id="{3380652A-0654-4537-9B8F-5AC38DCC8562}"/>
+                <a16:creationId xmlns:a16="http://schemas.microsoft.com/office/drawing/2014/main" id="{3BE2B98A-45FB-48D1-80ED-C321ABB831E3}"/>
               </a:ext>
             </a:extLst>
           </p:cNvPr>
@@ -12599,7 +12599,7 @@
     </p:spTree>
     <p:extLst>
       <p:ext uri="{BB962C8B-B14F-4D97-AF65-F5344CB8AC3E}">
-        <p14:creationId xmlns:p14="http://schemas.microsoft.com/office/powerpoint/2010/main" val="490834864"/>
+        <p14:creationId xmlns:p14="http://schemas.microsoft.com/office/powerpoint/2010/main" val="1322056757"/>
       </p:ext>
     </p:extLst>
   </p:cSld>
@@ -12630,7 +12630,7 @@
           <p:cNvPr id="25" name="">
             <a:extLst xmlns:a="http://schemas.openxmlformats.org/drawingml/2006/main">
               <a:ext uri="{FF2B5EF4-FFF2-40B4-BE49-F238E27FC236}">
-                <a16:creationId xmlns:a16="http://schemas.microsoft.com/office/drawing/2014/main" id="{EE572CDB-95D2-47EA-BE3C-AC415E04EA94}"/>
+                <a16:creationId xmlns:a16="http://schemas.microsoft.com/office/drawing/2014/main" id="{271D7220-0DC0-46D6-BB88-E04BA1E7B3DE}"/>
               </a:ext>
             </a:extLst>
           </p:cNvPr>
@@ -12692,7 +12692,7 @@
                 <a:latin typeface="Arial"/>
                 <a:ea typeface="Arial"/>
                 <a:cs typeface="Arial"/>
-                <a:hlinkClick xmlns:r="http://schemas.openxmlformats.org/officeDocument/2006/relationships" r:id="R79ffd29800d544a8"/>
+                <a:hlinkClick xmlns:r="http://schemas.openxmlformats.org/officeDocument/2006/relationships" r:id="R71110b307ec645e8"/>
               </a:rPr>
               <a:t>https://github.com/qjmre23/Route2Zero</a:t>
             </a:r>
@@ -12715,7 +12715,7 @@
                 <a:latin typeface="Arial"/>
                 <a:ea typeface="Arial"/>
                 <a:cs typeface="Arial"/>
-                <a:hlinkClick xmlns:r="http://schemas.openxmlformats.org/officeDocument/2006/relationships" r:id="Re2560bcf28b64c68"/>
+                <a:hlinkClick xmlns:r="http://schemas.openxmlformats.org/officeDocument/2006/relationships" r:id="Rcd8c25b5e20f447c"/>
               </a:rPr>
               <a:t>https://route2zero.netlify.app/</a:t>
             </a:r>
@@ -12727,7 +12727,7 @@
           <p:cNvPr id="2" name="">
             <a:extLst xmlns:a="http://schemas.openxmlformats.org/drawingml/2006/main">
               <a:ext uri="{FF2B5EF4-FFF2-40B4-BE49-F238E27FC236}">
-                <a16:creationId xmlns:a16="http://schemas.microsoft.com/office/drawing/2014/main" id="{2436B275-78A8-4FAF-81CC-53D7CD72C53C}"/>
+                <a16:creationId xmlns:a16="http://schemas.microsoft.com/office/drawing/2014/main" id="{A202DCAB-3A36-4ED8-ABE4-29FD6553C810}"/>
               </a:ext>
             </a:extLst>
           </p:cNvPr>
@@ -12789,7 +12789,7 @@
           <p:cNvPr id="3" name="">
             <a:extLst xmlns:a="http://schemas.openxmlformats.org/drawingml/2006/main">
               <a:ext uri="{FF2B5EF4-FFF2-40B4-BE49-F238E27FC236}">
-                <a16:creationId xmlns:a16="http://schemas.microsoft.com/office/drawing/2014/main" id="{F1CA7414-D2E8-42DF-A914-49BF10D50852}"/>
+                <a16:creationId xmlns:a16="http://schemas.microsoft.com/office/drawing/2014/main" id="{8281D565-307C-4E79-836B-BD40CC124688}"/>
               </a:ext>
             </a:extLst>
           </p:cNvPr>
@@ -12851,7 +12851,7 @@
           <p:cNvPr id="4" name="">
             <a:extLst xmlns:a="http://schemas.openxmlformats.org/drawingml/2006/main">
               <a:ext uri="{FF2B5EF4-FFF2-40B4-BE49-F238E27FC236}">
-                <a16:creationId xmlns:a16="http://schemas.microsoft.com/office/drawing/2014/main" id="{C7AF217C-411D-4C47-B185-A80D828F5FB4}"/>
+                <a16:creationId xmlns:a16="http://schemas.microsoft.com/office/drawing/2014/main" id="{FD25B64B-D280-46A0-9A5F-2144423E08F6}"/>
               </a:ext>
             </a:extLst>
           </p:cNvPr>
@@ -12913,7 +12913,7 @@
           <p:cNvPr id="5" name="">
             <a:extLst xmlns:a="http://schemas.openxmlformats.org/drawingml/2006/main">
               <a:ext uri="{FF2B5EF4-FFF2-40B4-BE49-F238E27FC236}">
-                <a16:creationId xmlns:a16="http://schemas.microsoft.com/office/drawing/2014/main" id="{90166EAF-191E-4442-A0EC-1787CBFA2B72}"/>
+                <a16:creationId xmlns:a16="http://schemas.microsoft.com/office/drawing/2014/main" id="{A6D8CC49-23D5-4C23-A16C-46489DE1FEF3}"/>
               </a:ext>
             </a:extLst>
           </p:cNvPr>
@@ -12975,7 +12975,7 @@
           <p:cNvPr id="6" name="">
             <a:extLst xmlns:a="http://schemas.openxmlformats.org/drawingml/2006/main">
               <a:ext uri="{FF2B5EF4-FFF2-40B4-BE49-F238E27FC236}">
-                <a16:creationId xmlns:a16="http://schemas.microsoft.com/office/drawing/2014/main" id="{2D48B352-6062-4A45-ABB3-55E811D70418}"/>
+                <a16:creationId xmlns:a16="http://schemas.microsoft.com/office/drawing/2014/main" id="{3E911A7C-B73E-478A-9EA7-703C9C78A6AB}"/>
               </a:ext>
             </a:extLst>
           </p:cNvPr>
@@ -13037,7 +13037,7 @@
           <p:cNvPr id="7" name="">
             <a:extLst xmlns:a="http://schemas.openxmlformats.org/drawingml/2006/main">
               <a:ext uri="{FF2B5EF4-FFF2-40B4-BE49-F238E27FC236}">
-                <a16:creationId xmlns:a16="http://schemas.microsoft.com/office/drawing/2014/main" id="{275D05E3-3B13-40B5-8B90-56451A0B0564}"/>
+                <a16:creationId xmlns:a16="http://schemas.microsoft.com/office/drawing/2014/main" id="{FC5B8013-46B2-4025-8F91-E5D8A72DAD31}"/>
               </a:ext>
             </a:extLst>
           </p:cNvPr>
@@ -13068,7 +13068,7 @@
           <p:cNvPr id="8" name="">
             <a:extLst xmlns:a="http://schemas.openxmlformats.org/drawingml/2006/main">
               <a:ext uri="{FF2B5EF4-FFF2-40B4-BE49-F238E27FC236}">
-                <a16:creationId xmlns:a16="http://schemas.microsoft.com/office/drawing/2014/main" id="{10E831C0-6EE9-466C-ABAF-9C9DC556D75F}"/>
+                <a16:creationId xmlns:a16="http://schemas.microsoft.com/office/drawing/2014/main" id="{D408A671-0FF8-4EDA-9E19-3FFAB5C996FE}"/>
               </a:ext>
             </a:extLst>
           </p:cNvPr>
@@ -13130,7 +13130,7 @@
           <p:cNvPr id="9" name="">
             <a:extLst xmlns:a="http://schemas.openxmlformats.org/drawingml/2006/main">
               <a:ext uri="{FF2B5EF4-FFF2-40B4-BE49-F238E27FC236}">
-                <a16:creationId xmlns:a16="http://schemas.microsoft.com/office/drawing/2014/main" id="{6EACC9E4-0CAA-4E2A-A301-0E35AD3E0790}"/>
+                <a16:creationId xmlns:a16="http://schemas.microsoft.com/office/drawing/2014/main" id="{D04B6800-BFEF-471B-8C73-D8D2BE4BC0CF}"/>
               </a:ext>
             </a:extLst>
           </p:cNvPr>
@@ -13192,7 +13192,7 @@
           <p:cNvPr id="10" name="">
             <a:extLst xmlns:a="http://schemas.openxmlformats.org/drawingml/2006/main">
               <a:ext uri="{FF2B5EF4-FFF2-40B4-BE49-F238E27FC236}">
-                <a16:creationId xmlns:a16="http://schemas.microsoft.com/office/drawing/2014/main" id="{59594AF3-300D-41AB-8560-56D4D5AACAE6}"/>
+                <a16:creationId xmlns:a16="http://schemas.microsoft.com/office/drawing/2014/main" id="{4EA3CB20-99CA-4CB8-9844-C188981A3CBC}"/>
               </a:ext>
             </a:extLst>
           </p:cNvPr>
@@ -13254,7 +13254,7 @@
           <p:cNvPr id="11" name="">
             <a:extLst xmlns:a="http://schemas.openxmlformats.org/drawingml/2006/main">
               <a:ext uri="{FF2B5EF4-FFF2-40B4-BE49-F238E27FC236}">
-                <a16:creationId xmlns:a16="http://schemas.microsoft.com/office/drawing/2014/main" id="{BDEB675C-3B57-45E3-9E18-5B9AF358DFEF}"/>
+                <a16:creationId xmlns:a16="http://schemas.microsoft.com/office/drawing/2014/main" id="{B9470C5A-DA27-4268-8D44-BAA2D3493FCA}"/>
               </a:ext>
             </a:extLst>
           </p:cNvPr>
@@ -13285,7 +13285,7 @@
           <p:cNvPr id="12" name="">
             <a:extLst xmlns:a="http://schemas.openxmlformats.org/drawingml/2006/main">
               <a:ext uri="{FF2B5EF4-FFF2-40B4-BE49-F238E27FC236}">
-                <a16:creationId xmlns:a16="http://schemas.microsoft.com/office/drawing/2014/main" id="{30C72255-B374-429B-941B-2D5BBD312079}"/>
+                <a16:creationId xmlns:a16="http://schemas.microsoft.com/office/drawing/2014/main" id="{584C96DD-F2A0-4EC4-AEBE-84FC9C335BAF}"/>
               </a:ext>
             </a:extLst>
           </p:cNvPr>
@@ -13347,7 +13347,7 @@
           <p:cNvPr id="13" name="">
             <a:extLst xmlns:a="http://schemas.openxmlformats.org/drawingml/2006/main">
               <a:ext uri="{FF2B5EF4-FFF2-40B4-BE49-F238E27FC236}">
-                <a16:creationId xmlns:a16="http://schemas.microsoft.com/office/drawing/2014/main" id="{0B67BB6F-CB1C-46FB-B43E-A8D68DD487C6}"/>
+                <a16:creationId xmlns:a16="http://schemas.microsoft.com/office/drawing/2014/main" id="{5A740842-3EDE-43E2-989D-AD3438FCE8A8}"/>
               </a:ext>
             </a:extLst>
           </p:cNvPr>
@@ -13409,7 +13409,7 @@
           <p:cNvPr id="14" name="">
             <a:extLst xmlns:a="http://schemas.openxmlformats.org/drawingml/2006/main">
               <a:ext uri="{FF2B5EF4-FFF2-40B4-BE49-F238E27FC236}">
-                <a16:creationId xmlns:a16="http://schemas.microsoft.com/office/drawing/2014/main" id="{8D7B201F-35D7-4990-AC6D-20137B79BCD7}"/>
+                <a16:creationId xmlns:a16="http://schemas.microsoft.com/office/drawing/2014/main" id="{2B836702-77B7-4390-9431-96C3F0B39907}"/>
               </a:ext>
             </a:extLst>
           </p:cNvPr>
@@ -13471,7 +13471,7 @@
           <p:cNvPr id="15" name="">
             <a:extLst xmlns:a="http://schemas.openxmlformats.org/drawingml/2006/main">
               <a:ext uri="{FF2B5EF4-FFF2-40B4-BE49-F238E27FC236}">
-                <a16:creationId xmlns:a16="http://schemas.microsoft.com/office/drawing/2014/main" id="{35445045-8476-4C07-8F59-E41D531C4916}"/>
+                <a16:creationId xmlns:a16="http://schemas.microsoft.com/office/drawing/2014/main" id="{68651972-16D3-402A-AC48-CB7616D07889}"/>
               </a:ext>
             </a:extLst>
           </p:cNvPr>
@@ -13502,7 +13502,7 @@
           <p:cNvPr id="16" name="">
             <a:extLst xmlns:a="http://schemas.openxmlformats.org/drawingml/2006/main">
               <a:ext uri="{FF2B5EF4-FFF2-40B4-BE49-F238E27FC236}">
-                <a16:creationId xmlns:a16="http://schemas.microsoft.com/office/drawing/2014/main" id="{2BF1CED1-A85E-46A3-8DD7-1B5148716170}"/>
+                <a16:creationId xmlns:a16="http://schemas.microsoft.com/office/drawing/2014/main" id="{F672AF03-1606-4C74-8AFD-B3F6D1880FEF}"/>
               </a:ext>
             </a:extLst>
           </p:cNvPr>
@@ -13564,7 +13564,7 @@
           <p:cNvPr id="17" name="">
             <a:extLst xmlns:a="http://schemas.openxmlformats.org/drawingml/2006/main">
               <a:ext uri="{FF2B5EF4-FFF2-40B4-BE49-F238E27FC236}">
-                <a16:creationId xmlns:a16="http://schemas.microsoft.com/office/drawing/2014/main" id="{D15287C7-6E08-41CB-AE68-CD8BEF17B132}"/>
+                <a16:creationId xmlns:a16="http://schemas.microsoft.com/office/drawing/2014/main" id="{BA76EC90-EA2F-469E-BCED-FB999BD37F39}"/>
               </a:ext>
             </a:extLst>
           </p:cNvPr>
@@ -13626,7 +13626,7 @@
           <p:cNvPr id="18" name="">
             <a:extLst xmlns:a="http://schemas.openxmlformats.org/drawingml/2006/main">
               <a:ext uri="{FF2B5EF4-FFF2-40B4-BE49-F238E27FC236}">
-                <a16:creationId xmlns:a16="http://schemas.microsoft.com/office/drawing/2014/main" id="{808F27A0-23FC-4F68-87CB-AB46F4A3133F}"/>
+                <a16:creationId xmlns:a16="http://schemas.microsoft.com/office/drawing/2014/main" id="{31AFBE8F-81F9-4206-A51A-2639D849C0C3}"/>
               </a:ext>
             </a:extLst>
           </p:cNvPr>
@@ -13688,7 +13688,7 @@
           <p:cNvPr id="19" name="">
             <a:extLst xmlns:a="http://schemas.openxmlformats.org/drawingml/2006/main">
               <a:ext uri="{FF2B5EF4-FFF2-40B4-BE49-F238E27FC236}">
-                <a16:creationId xmlns:a16="http://schemas.microsoft.com/office/drawing/2014/main" id="{2AD2C58E-5505-41DB-A8FF-02151A5F25EB}"/>
+                <a16:creationId xmlns:a16="http://schemas.microsoft.com/office/drawing/2014/main" id="{FDD1267D-24CA-4677-839E-47286DEC1634}"/>
               </a:ext>
             </a:extLst>
           </p:cNvPr>
@@ -13719,7 +13719,7 @@
           <p:cNvPr id="20" name="">
             <a:extLst xmlns:a="http://schemas.openxmlformats.org/drawingml/2006/main">
               <a:ext uri="{FF2B5EF4-FFF2-40B4-BE49-F238E27FC236}">
-                <a16:creationId xmlns:a16="http://schemas.microsoft.com/office/drawing/2014/main" id="{CCBB2E68-9578-4A38-AD96-4C9F06C26E53}"/>
+                <a16:creationId xmlns:a16="http://schemas.microsoft.com/office/drawing/2014/main" id="{8EC0EF4D-D31B-4475-AEDF-6278CE8EF12F}"/>
               </a:ext>
             </a:extLst>
           </p:cNvPr>
@@ -13752,7 +13752,7 @@
           <p:cNvPr id="21" name="">
             <a:extLst xmlns:a="http://schemas.openxmlformats.org/drawingml/2006/main">
               <a:ext uri="{FF2B5EF4-FFF2-40B4-BE49-F238E27FC236}">
-                <a16:creationId xmlns:a16="http://schemas.microsoft.com/office/drawing/2014/main" id="{D7220BCE-4D53-4198-9B50-D6910DB71BD1}"/>
+                <a16:creationId xmlns:a16="http://schemas.microsoft.com/office/drawing/2014/main" id="{5ECCDC8C-2ACA-4DB8-9502-4E67DB3A660B}"/>
               </a:ext>
             </a:extLst>
           </p:cNvPr>
@@ -13814,7 +13814,7 @@
           <p:cNvPr id="22" name="">
             <a:extLst xmlns:a="http://schemas.openxmlformats.org/drawingml/2006/main">
               <a:ext uri="{FF2B5EF4-FFF2-40B4-BE49-F238E27FC236}">
-                <a16:creationId xmlns:a16="http://schemas.microsoft.com/office/drawing/2014/main" id="{CC92AEC6-1FA2-43FB-A1E1-270EA3244D17}"/>
+                <a16:creationId xmlns:a16="http://schemas.microsoft.com/office/drawing/2014/main" id="{7130AA82-89C4-4DD5-9053-6F4F0D04D85F}"/>
               </a:ext>
             </a:extLst>
           </p:cNvPr>
@@ -13845,7 +13845,7 @@
           <p:cNvPr id="23" name="">
             <a:extLst xmlns:a="http://schemas.openxmlformats.org/drawingml/2006/main">
               <a:ext uri="{FF2B5EF4-FFF2-40B4-BE49-F238E27FC236}">
-                <a16:creationId xmlns:a16="http://schemas.microsoft.com/office/drawing/2014/main" id="{A105496D-1474-4B5A-81C9-BCE30DF941BB}"/>
+                <a16:creationId xmlns:a16="http://schemas.microsoft.com/office/drawing/2014/main" id="{BB818810-EF28-438B-8638-3665C9181CDF}"/>
               </a:ext>
             </a:extLst>
           </p:cNvPr>
@@ -13897,7 +13897,7 @@
                 <a:ea typeface="Arial"/>
                 <a:cs typeface="Arial"/>
               </a:rPr>
-              <a:t>r2z-16690ccbe328 · scn-c46e1d86c1</a:t>
+              <a:t>r2z-45c4ba076af9 · scn-e0f12f397e</a:t>
             </a:r>
           </a:p>
         </p:txBody>
@@ -13907,7 +13907,7 @@
           <p:cNvPr id="24" name="">
             <a:extLst xmlns:a="http://schemas.openxmlformats.org/drawingml/2006/main">
               <a:ext uri="{FF2B5EF4-FFF2-40B4-BE49-F238E27FC236}">
-                <a16:creationId xmlns:a16="http://schemas.microsoft.com/office/drawing/2014/main" id="{6BE14CEA-2595-4221-BAFE-45D2D0298522}"/>
+                <a16:creationId xmlns:a16="http://schemas.microsoft.com/office/drawing/2014/main" id="{CE9EC94A-6DE7-4444-ABDC-00F58C862B9D}"/>
               </a:ext>
             </a:extLst>
           </p:cNvPr>
@@ -13967,7 +13967,7 @@
     </p:spTree>
     <p:extLst>
       <p:ext uri="{BB962C8B-B14F-4D97-AF65-F5344CB8AC3E}">
-        <p14:creationId xmlns:p14="http://schemas.microsoft.com/office/powerpoint/2010/main" val="1212104027"/>
+        <p14:creationId xmlns:p14="http://schemas.microsoft.com/office/powerpoint/2010/main" val="1767889624"/>
       </p:ext>
     </p:extLst>
   </p:cSld>
@@ -13998,7 +13998,7 @@
           <p:cNvPr id="40" name="">
             <a:extLst xmlns:a="http://schemas.openxmlformats.org/drawingml/2006/main">
               <a:ext uri="{FF2B5EF4-FFF2-40B4-BE49-F238E27FC236}">
-                <a16:creationId xmlns:a16="http://schemas.microsoft.com/office/drawing/2014/main" id="{B4008529-5C36-4CC1-9176-602894E8B359}"/>
+                <a16:creationId xmlns:a16="http://schemas.microsoft.com/office/drawing/2014/main" id="{42A7C217-AA41-446F-8246-28F2389E931F}"/>
               </a:ext>
             </a:extLst>
           </p:cNvPr>
@@ -14060,7 +14060,7 @@
                 <a:latin typeface="Arial"/>
                 <a:ea typeface="Arial"/>
                 <a:cs typeface="Arial"/>
-                <a:hlinkClick xmlns:r="http://schemas.openxmlformats.org/officeDocument/2006/relationships" r:id="R40f775a2cdca46ae"/>
+                <a:hlinkClick xmlns:r="http://schemas.openxmlformats.org/officeDocument/2006/relationships" r:id="R315632ef25db4d40"/>
               </a:rPr>
               <a:t>https://github.com/qjmre23/Route2Zero</a:t>
             </a:r>
@@ -14083,7 +14083,7 @@
                 <a:latin typeface="Arial"/>
                 <a:ea typeface="Arial"/>
                 <a:cs typeface="Arial"/>
-                <a:hlinkClick xmlns:r="http://schemas.openxmlformats.org/officeDocument/2006/relationships" r:id="Rf3f7bef649ef496c"/>
+                <a:hlinkClick xmlns:r="http://schemas.openxmlformats.org/officeDocument/2006/relationships" r:id="R12a3773f5ff94f0a"/>
               </a:rPr>
               <a:t>https://route2zero.netlify.app/</a:t>
             </a:r>
@@ -14095,7 +14095,7 @@
           <p:cNvPr id="2" name="">
             <a:extLst xmlns:a="http://schemas.openxmlformats.org/drawingml/2006/main">
               <a:ext uri="{FF2B5EF4-FFF2-40B4-BE49-F238E27FC236}">
-                <a16:creationId xmlns:a16="http://schemas.microsoft.com/office/drawing/2014/main" id="{F7D2282F-8692-4825-8D0F-4C8E984D6075}"/>
+                <a16:creationId xmlns:a16="http://schemas.microsoft.com/office/drawing/2014/main" id="{4005AC72-C8D0-4423-ADA7-7EF725F35084}"/>
               </a:ext>
             </a:extLst>
           </p:cNvPr>
@@ -14157,7 +14157,7 @@
           <p:cNvPr id="3" name="">
             <a:extLst xmlns:a="http://schemas.openxmlformats.org/drawingml/2006/main">
               <a:ext uri="{FF2B5EF4-FFF2-40B4-BE49-F238E27FC236}">
-                <a16:creationId xmlns:a16="http://schemas.microsoft.com/office/drawing/2014/main" id="{ED78F92D-BB6E-494E-AF9F-878E95C60FF4}"/>
+                <a16:creationId xmlns:a16="http://schemas.microsoft.com/office/drawing/2014/main" id="{B36BF2C0-47C1-42E3-B933-5913979F0ADF}"/>
               </a:ext>
             </a:extLst>
           </p:cNvPr>
@@ -14219,7 +14219,7 @@
           <p:cNvPr id="4" name="">
             <a:extLst xmlns:a="http://schemas.openxmlformats.org/drawingml/2006/main">
               <a:ext uri="{FF2B5EF4-FFF2-40B4-BE49-F238E27FC236}">
-                <a16:creationId xmlns:a16="http://schemas.microsoft.com/office/drawing/2014/main" id="{8112DACA-FDFE-4E12-AB4A-B1153EFBBC45}"/>
+                <a16:creationId xmlns:a16="http://schemas.microsoft.com/office/drawing/2014/main" id="{7A51CC0F-7E1D-42DD-B895-5C6E7458E39E}"/>
               </a:ext>
             </a:extLst>
           </p:cNvPr>
@@ -14281,7 +14281,7 @@
           <p:cNvPr id="5" name="">
             <a:extLst xmlns:a="http://schemas.openxmlformats.org/drawingml/2006/main">
               <a:ext uri="{FF2B5EF4-FFF2-40B4-BE49-F238E27FC236}">
-                <a16:creationId xmlns:a16="http://schemas.microsoft.com/office/drawing/2014/main" id="{C820E0F2-3CA2-4259-ABDA-750C5C87FD9D}"/>
+                <a16:creationId xmlns:a16="http://schemas.microsoft.com/office/drawing/2014/main" id="{8DE471E8-AA2C-4F6F-99B2-5CA07A388079}"/>
               </a:ext>
             </a:extLst>
           </p:cNvPr>
@@ -14343,7 +14343,7 @@
           <p:cNvPr id="6" name="">
             <a:extLst xmlns:a="http://schemas.openxmlformats.org/drawingml/2006/main">
               <a:ext uri="{FF2B5EF4-FFF2-40B4-BE49-F238E27FC236}">
-                <a16:creationId xmlns:a16="http://schemas.microsoft.com/office/drawing/2014/main" id="{DC433FBD-6F57-4F8A-99FB-9804B3B213C7}"/>
+                <a16:creationId xmlns:a16="http://schemas.microsoft.com/office/drawing/2014/main" id="{3E892D16-60E7-4230-B652-1FE5049C342B}"/>
               </a:ext>
             </a:extLst>
           </p:cNvPr>
@@ -14376,7 +14376,7 @@
           <p:cNvPr id="7" name="">
             <a:extLst xmlns:a="http://schemas.openxmlformats.org/drawingml/2006/main">
               <a:ext uri="{FF2B5EF4-FFF2-40B4-BE49-F238E27FC236}">
-                <a16:creationId xmlns:a16="http://schemas.microsoft.com/office/drawing/2014/main" id="{20E35735-EBF5-49A2-9350-BD02B2833F7E}"/>
+                <a16:creationId xmlns:a16="http://schemas.microsoft.com/office/drawing/2014/main" id="{EC574234-8DD0-4D60-BC6A-7EDE5B10275C}"/>
               </a:ext>
             </a:extLst>
           </p:cNvPr>
@@ -14438,7 +14438,7 @@
           <p:cNvPr id="8" name="">
             <a:extLst xmlns:a="http://schemas.openxmlformats.org/drawingml/2006/main">
               <a:ext uri="{FF2B5EF4-FFF2-40B4-BE49-F238E27FC236}">
-                <a16:creationId xmlns:a16="http://schemas.microsoft.com/office/drawing/2014/main" id="{82AC04F5-E5F7-4D5C-B8ED-ABEE490EEB24}"/>
+                <a16:creationId xmlns:a16="http://schemas.microsoft.com/office/drawing/2014/main" id="{E23ADF77-D075-438B-8ECA-7CD00CFD9334}"/>
               </a:ext>
             </a:extLst>
           </p:cNvPr>
@@ -14471,7 +14471,7 @@
           <p:cNvPr id="9" name="">
             <a:extLst xmlns:a="http://schemas.openxmlformats.org/drawingml/2006/main">
               <a:ext uri="{FF2B5EF4-FFF2-40B4-BE49-F238E27FC236}">
-                <a16:creationId xmlns:a16="http://schemas.microsoft.com/office/drawing/2014/main" id="{BD3DFC53-B236-4D6E-BCFB-893312F5617C}"/>
+                <a16:creationId xmlns:a16="http://schemas.microsoft.com/office/drawing/2014/main" id="{B4DE2C8A-D8C1-4F67-B1A3-BB74E6915B62}"/>
               </a:ext>
             </a:extLst>
           </p:cNvPr>
@@ -14533,7 +14533,7 @@
           <p:cNvPr id="10" name="">
             <a:extLst xmlns:a="http://schemas.openxmlformats.org/drawingml/2006/main">
               <a:ext uri="{FF2B5EF4-FFF2-40B4-BE49-F238E27FC236}">
-                <a16:creationId xmlns:a16="http://schemas.microsoft.com/office/drawing/2014/main" id="{5B110EF5-DC2C-4254-B8D5-EFB75286F0D7}"/>
+                <a16:creationId xmlns:a16="http://schemas.microsoft.com/office/drawing/2014/main" id="{D8B0C0B5-BD35-4AAC-98C3-FB562F0864B3}"/>
               </a:ext>
             </a:extLst>
           </p:cNvPr>
@@ -14566,7 +14566,7 @@
           <p:cNvPr id="11" name="">
             <a:extLst xmlns:a="http://schemas.openxmlformats.org/drawingml/2006/main">
               <a:ext uri="{FF2B5EF4-FFF2-40B4-BE49-F238E27FC236}">
-                <a16:creationId xmlns:a16="http://schemas.microsoft.com/office/drawing/2014/main" id="{5465292C-F197-40C7-8F8E-460368FF1CFF}"/>
+                <a16:creationId xmlns:a16="http://schemas.microsoft.com/office/drawing/2014/main" id="{8BC63C24-26FA-4895-A7EA-66ED6E3D72D2}"/>
               </a:ext>
             </a:extLst>
           </p:cNvPr>
@@ -14628,7 +14628,7 @@
           <p:cNvPr id="12" name="">
             <a:extLst xmlns:a="http://schemas.openxmlformats.org/drawingml/2006/main">
               <a:ext uri="{FF2B5EF4-FFF2-40B4-BE49-F238E27FC236}">
-                <a16:creationId xmlns:a16="http://schemas.microsoft.com/office/drawing/2014/main" id="{974135A6-677F-4667-8B30-5A8F555A15F1}"/>
+                <a16:creationId xmlns:a16="http://schemas.microsoft.com/office/drawing/2014/main" id="{462FADC4-E2D9-4B1B-ADD7-437A762D5D4E}"/>
               </a:ext>
             </a:extLst>
           </p:cNvPr>
@@ -14661,7 +14661,7 @@
           <p:cNvPr id="13" name="">
             <a:extLst xmlns:a="http://schemas.openxmlformats.org/drawingml/2006/main">
               <a:ext uri="{FF2B5EF4-FFF2-40B4-BE49-F238E27FC236}">
-                <a16:creationId xmlns:a16="http://schemas.microsoft.com/office/drawing/2014/main" id="{6B966D03-54AB-4A59-96E3-D32C74589B2F}"/>
+                <a16:creationId xmlns:a16="http://schemas.microsoft.com/office/drawing/2014/main" id="{85886A8E-90FF-408E-9A8E-0C4DDD5EAC0C}"/>
               </a:ext>
             </a:extLst>
           </p:cNvPr>
@@ -14723,7 +14723,7 @@
           <p:cNvPr id="14" name="">
             <a:extLst xmlns:a="http://schemas.openxmlformats.org/drawingml/2006/main">
               <a:ext uri="{FF2B5EF4-FFF2-40B4-BE49-F238E27FC236}">
-                <a16:creationId xmlns:a16="http://schemas.microsoft.com/office/drawing/2014/main" id="{10C4F649-98D7-4355-B46A-D37354034E25}"/>
+                <a16:creationId xmlns:a16="http://schemas.microsoft.com/office/drawing/2014/main" id="{B35C4C06-3C36-44D6-9F5D-22EFA452F96E}"/>
               </a:ext>
             </a:extLst>
           </p:cNvPr>
@@ -14756,7 +14756,7 @@
           <p:cNvPr id="15" name="">
             <a:extLst xmlns:a="http://schemas.openxmlformats.org/drawingml/2006/main">
               <a:ext uri="{FF2B5EF4-FFF2-40B4-BE49-F238E27FC236}">
-                <a16:creationId xmlns:a16="http://schemas.microsoft.com/office/drawing/2014/main" id="{7EB31E30-DFA9-4091-9B8F-FE8C4495E07C}"/>
+                <a16:creationId xmlns:a16="http://schemas.microsoft.com/office/drawing/2014/main" id="{77F74B37-93C3-40A5-B159-600B2D3CC6EE}"/>
               </a:ext>
             </a:extLst>
           </p:cNvPr>
@@ -14818,7 +14818,7 @@
           <p:cNvPr id="16" name="">
             <a:extLst xmlns:a="http://schemas.openxmlformats.org/drawingml/2006/main">
               <a:ext uri="{FF2B5EF4-FFF2-40B4-BE49-F238E27FC236}">
-                <a16:creationId xmlns:a16="http://schemas.microsoft.com/office/drawing/2014/main" id="{206B3E04-1B52-4C4E-B7F9-0B884239B86E}"/>
+                <a16:creationId xmlns:a16="http://schemas.microsoft.com/office/drawing/2014/main" id="{256EEAC9-D0B8-4E20-8615-3553D1CA18A5}"/>
               </a:ext>
             </a:extLst>
           </p:cNvPr>
@@ -14851,7 +14851,7 @@
           <p:cNvPr id="17" name="">
             <a:extLst xmlns:a="http://schemas.openxmlformats.org/drawingml/2006/main">
               <a:ext uri="{FF2B5EF4-FFF2-40B4-BE49-F238E27FC236}">
-                <a16:creationId xmlns:a16="http://schemas.microsoft.com/office/drawing/2014/main" id="{AB32D115-07F6-4F72-93F9-E7D4123AB0CD}"/>
+                <a16:creationId xmlns:a16="http://schemas.microsoft.com/office/drawing/2014/main" id="{3C98BF04-980B-46A1-941D-4CD862A03CAC}"/>
               </a:ext>
             </a:extLst>
           </p:cNvPr>
@@ -14913,7 +14913,7 @@
           <p:cNvPr id="18" name="">
             <a:extLst xmlns:a="http://schemas.openxmlformats.org/drawingml/2006/main">
               <a:ext uri="{FF2B5EF4-FFF2-40B4-BE49-F238E27FC236}">
-                <a16:creationId xmlns:a16="http://schemas.microsoft.com/office/drawing/2014/main" id="{152FA3BC-A323-456B-803B-236CD80C3B3E}"/>
+                <a16:creationId xmlns:a16="http://schemas.microsoft.com/office/drawing/2014/main" id="{6D45C15C-19AE-4F98-873F-26C36A62B6C6}"/>
               </a:ext>
             </a:extLst>
           </p:cNvPr>
@@ -14946,7 +14946,7 @@
           <p:cNvPr id="19" name="">
             <a:extLst xmlns:a="http://schemas.openxmlformats.org/drawingml/2006/main">
               <a:ext uri="{FF2B5EF4-FFF2-40B4-BE49-F238E27FC236}">
-                <a16:creationId xmlns:a16="http://schemas.microsoft.com/office/drawing/2014/main" id="{E8A2DD5B-0113-4024-B139-512DFE4CF245}"/>
+                <a16:creationId xmlns:a16="http://schemas.microsoft.com/office/drawing/2014/main" id="{46CEDE38-EF25-4A84-ABD7-A2A5F02E3FFB}"/>
               </a:ext>
             </a:extLst>
           </p:cNvPr>
@@ -15008,7 +15008,7 @@
           <p:cNvPr id="20" name="">
             <a:extLst xmlns:a="http://schemas.openxmlformats.org/drawingml/2006/main">
               <a:ext uri="{FF2B5EF4-FFF2-40B4-BE49-F238E27FC236}">
-                <a16:creationId xmlns:a16="http://schemas.microsoft.com/office/drawing/2014/main" id="{F9B80A28-AACF-4CF4-9F06-A5338B261B91}"/>
+                <a16:creationId xmlns:a16="http://schemas.microsoft.com/office/drawing/2014/main" id="{B024E3D2-1295-425A-9CC1-CCABAD6193EC}"/>
               </a:ext>
             </a:extLst>
           </p:cNvPr>
@@ -15041,7 +15041,7 @@
           <p:cNvPr id="21" name="">
             <a:extLst xmlns:a="http://schemas.openxmlformats.org/drawingml/2006/main">
               <a:ext uri="{FF2B5EF4-FFF2-40B4-BE49-F238E27FC236}">
-                <a16:creationId xmlns:a16="http://schemas.microsoft.com/office/drawing/2014/main" id="{F3582DDB-C855-4F2E-B9CE-E847F88628E6}"/>
+                <a16:creationId xmlns:a16="http://schemas.microsoft.com/office/drawing/2014/main" id="{F2670D7F-D9B5-4531-A9CE-FC812F1F401F}"/>
               </a:ext>
             </a:extLst>
           </p:cNvPr>
@@ -15103,7 +15103,7 @@
           <p:cNvPr id="22" name="">
             <a:extLst xmlns:a="http://schemas.openxmlformats.org/drawingml/2006/main">
               <a:ext uri="{FF2B5EF4-FFF2-40B4-BE49-F238E27FC236}">
-                <a16:creationId xmlns:a16="http://schemas.microsoft.com/office/drawing/2014/main" id="{C90145E5-C541-4FD5-8A09-17B35C309096}"/>
+                <a16:creationId xmlns:a16="http://schemas.microsoft.com/office/drawing/2014/main" id="{BB675AE9-7E09-493A-B019-1F8373430B04}"/>
               </a:ext>
             </a:extLst>
           </p:cNvPr>
@@ -15165,7 +15165,7 @@
           <p:cNvPr id="23" name="">
             <a:extLst xmlns:a="http://schemas.openxmlformats.org/drawingml/2006/main">
               <a:ext uri="{FF2B5EF4-FFF2-40B4-BE49-F238E27FC236}">
-                <a16:creationId xmlns:a16="http://schemas.microsoft.com/office/drawing/2014/main" id="{70084E4D-3BE5-4773-B7D4-7F5A91D7B5B0}"/>
+                <a16:creationId xmlns:a16="http://schemas.microsoft.com/office/drawing/2014/main" id="{32A60A98-7E8E-4D2B-B883-EB3323AE4A24}"/>
               </a:ext>
             </a:extLst>
           </p:cNvPr>
@@ -15198,7 +15198,7 @@
           <p:cNvPr id="24" name="">
             <a:extLst xmlns:a="http://schemas.openxmlformats.org/drawingml/2006/main">
               <a:ext uri="{FF2B5EF4-FFF2-40B4-BE49-F238E27FC236}">
-                <a16:creationId xmlns:a16="http://schemas.microsoft.com/office/drawing/2014/main" id="{27510762-589C-4830-A95C-0A26A7E7FF85}"/>
+                <a16:creationId xmlns:a16="http://schemas.microsoft.com/office/drawing/2014/main" id="{B019FE30-5EB4-4091-8AF5-5A0F9675EAA2}"/>
               </a:ext>
             </a:extLst>
           </p:cNvPr>
@@ -15260,7 +15260,7 @@
           <p:cNvPr id="25" name="">
             <a:extLst xmlns:a="http://schemas.openxmlformats.org/drawingml/2006/main">
               <a:ext uri="{FF2B5EF4-FFF2-40B4-BE49-F238E27FC236}">
-                <a16:creationId xmlns:a16="http://schemas.microsoft.com/office/drawing/2014/main" id="{8A0AB1D4-FFE3-434A-B32D-0C1D7421D344}"/>
+                <a16:creationId xmlns:a16="http://schemas.microsoft.com/office/drawing/2014/main" id="{AEB34B4D-1670-4310-9A2E-4B51E86B8CF5}"/>
               </a:ext>
             </a:extLst>
           </p:cNvPr>
@@ -15293,7 +15293,7 @@
           <p:cNvPr id="26" name="">
             <a:extLst xmlns:a="http://schemas.openxmlformats.org/drawingml/2006/main">
               <a:ext uri="{FF2B5EF4-FFF2-40B4-BE49-F238E27FC236}">
-                <a16:creationId xmlns:a16="http://schemas.microsoft.com/office/drawing/2014/main" id="{F0B85ABF-54D1-4259-9A0C-5FFE60B4BE6A}"/>
+                <a16:creationId xmlns:a16="http://schemas.microsoft.com/office/drawing/2014/main" id="{ED93297F-8D77-416C-B6BA-F489F023EDF5}"/>
               </a:ext>
             </a:extLst>
           </p:cNvPr>
@@ -15355,7 +15355,7 @@
           <p:cNvPr id="27" name="">
             <a:extLst xmlns:a="http://schemas.openxmlformats.org/drawingml/2006/main">
               <a:ext uri="{FF2B5EF4-FFF2-40B4-BE49-F238E27FC236}">
-                <a16:creationId xmlns:a16="http://schemas.microsoft.com/office/drawing/2014/main" id="{8B2CF9C7-3C89-4B62-9B55-4E4ABA08DA30}"/>
+                <a16:creationId xmlns:a16="http://schemas.microsoft.com/office/drawing/2014/main" id="{0BCD84A5-B463-4554-9161-34287DEA9F8E}"/>
               </a:ext>
             </a:extLst>
           </p:cNvPr>
@@ -15388,7 +15388,7 @@
           <p:cNvPr id="28" name="">
             <a:extLst xmlns:a="http://schemas.openxmlformats.org/drawingml/2006/main">
               <a:ext uri="{FF2B5EF4-FFF2-40B4-BE49-F238E27FC236}">
-                <a16:creationId xmlns:a16="http://schemas.microsoft.com/office/drawing/2014/main" id="{A4C10EB3-B14F-441D-9E46-3CE27A9325FF}"/>
+                <a16:creationId xmlns:a16="http://schemas.microsoft.com/office/drawing/2014/main" id="{6AAC3287-E02F-4035-9CBD-D5E762D8C2D2}"/>
               </a:ext>
             </a:extLst>
           </p:cNvPr>
@@ -15450,7 +15450,7 @@
           <p:cNvPr id="29" name="">
             <a:extLst xmlns:a="http://schemas.openxmlformats.org/drawingml/2006/main">
               <a:ext uri="{FF2B5EF4-FFF2-40B4-BE49-F238E27FC236}">
-                <a16:creationId xmlns:a16="http://schemas.microsoft.com/office/drawing/2014/main" id="{15077195-509C-4B41-9968-BE8845E784A5}"/>
+                <a16:creationId xmlns:a16="http://schemas.microsoft.com/office/drawing/2014/main" id="{54EB6BF1-03C4-4FCB-A331-BFD6EEC02E89}"/>
               </a:ext>
             </a:extLst>
           </p:cNvPr>
@@ -15483,7 +15483,7 @@
           <p:cNvPr id="30" name="">
             <a:extLst xmlns:a="http://schemas.openxmlformats.org/drawingml/2006/main">
               <a:ext uri="{FF2B5EF4-FFF2-40B4-BE49-F238E27FC236}">
-                <a16:creationId xmlns:a16="http://schemas.microsoft.com/office/drawing/2014/main" id="{AEC9EADB-3FAE-4FEE-9510-B3F27638A29E}"/>
+                <a16:creationId xmlns:a16="http://schemas.microsoft.com/office/drawing/2014/main" id="{AE85D692-EA58-460D-8596-AF508F585E72}"/>
               </a:ext>
             </a:extLst>
           </p:cNvPr>
@@ -15545,7 +15545,7 @@
           <p:cNvPr id="31" name="">
             <a:extLst xmlns:a="http://schemas.openxmlformats.org/drawingml/2006/main">
               <a:ext uri="{FF2B5EF4-FFF2-40B4-BE49-F238E27FC236}">
-                <a16:creationId xmlns:a16="http://schemas.microsoft.com/office/drawing/2014/main" id="{5D278D90-3973-4488-BF9A-4797517677F9}"/>
+                <a16:creationId xmlns:a16="http://schemas.microsoft.com/office/drawing/2014/main" id="{CBE9A711-8D0F-4A1A-858F-3B050699B111}"/>
               </a:ext>
             </a:extLst>
           </p:cNvPr>
@@ -15578,7 +15578,7 @@
           <p:cNvPr id="32" name="">
             <a:extLst xmlns:a="http://schemas.openxmlformats.org/drawingml/2006/main">
               <a:ext uri="{FF2B5EF4-FFF2-40B4-BE49-F238E27FC236}">
-                <a16:creationId xmlns:a16="http://schemas.microsoft.com/office/drawing/2014/main" id="{5D9A1CD4-EFE7-4327-837A-411CD0DA188F}"/>
+                <a16:creationId xmlns:a16="http://schemas.microsoft.com/office/drawing/2014/main" id="{8CA36C55-9832-40A0-916B-869D325BC0D0}"/>
               </a:ext>
             </a:extLst>
           </p:cNvPr>
@@ -15640,7 +15640,7 @@
           <p:cNvPr id="33" name="">
             <a:extLst xmlns:a="http://schemas.openxmlformats.org/drawingml/2006/main">
               <a:ext uri="{FF2B5EF4-FFF2-40B4-BE49-F238E27FC236}">
-                <a16:creationId xmlns:a16="http://schemas.microsoft.com/office/drawing/2014/main" id="{2CF0884E-CD91-4E3A-B14F-E969D1747152}"/>
+                <a16:creationId xmlns:a16="http://schemas.microsoft.com/office/drawing/2014/main" id="{5079478E-F35E-4CDE-9BA8-1E7187E645C7}"/>
               </a:ext>
             </a:extLst>
           </p:cNvPr>
@@ -15673,7 +15673,7 @@
           <p:cNvPr id="34" name="">
             <a:extLst xmlns:a="http://schemas.openxmlformats.org/drawingml/2006/main">
               <a:ext uri="{FF2B5EF4-FFF2-40B4-BE49-F238E27FC236}">
-                <a16:creationId xmlns:a16="http://schemas.microsoft.com/office/drawing/2014/main" id="{E625D401-B604-4681-9D3D-1CB9AA55BACB}"/>
+                <a16:creationId xmlns:a16="http://schemas.microsoft.com/office/drawing/2014/main" id="{B2A61CA6-AA30-4003-83D9-E61C776CF31B}"/>
               </a:ext>
             </a:extLst>
           </p:cNvPr>
@@ -15735,7 +15735,7 @@
           <p:cNvPr id="35" name="">
             <a:extLst xmlns:a="http://schemas.openxmlformats.org/drawingml/2006/main">
               <a:ext uri="{FF2B5EF4-FFF2-40B4-BE49-F238E27FC236}">
-                <a16:creationId xmlns:a16="http://schemas.microsoft.com/office/drawing/2014/main" id="{1C78EDB0-A3AE-4F3E-98D0-25F1D1CDBFAA}"/>
+                <a16:creationId xmlns:a16="http://schemas.microsoft.com/office/drawing/2014/main" id="{8702C81F-9F2A-4EB8-B2E0-4783B8294214}"/>
               </a:ext>
             </a:extLst>
           </p:cNvPr>
@@ -15797,7 +15797,7 @@
           <p:cNvPr id="36" name="">
             <a:extLst xmlns:a="http://schemas.openxmlformats.org/drawingml/2006/main">
               <a:ext uri="{FF2B5EF4-FFF2-40B4-BE49-F238E27FC236}">
-                <a16:creationId xmlns:a16="http://schemas.microsoft.com/office/drawing/2014/main" id="{C279F8F8-8598-4595-972B-6BB6914BE735}"/>
+                <a16:creationId xmlns:a16="http://schemas.microsoft.com/office/drawing/2014/main" id="{F738C1A8-620A-4997-854B-09096D90858C}"/>
               </a:ext>
             </a:extLst>
           </p:cNvPr>
@@ -15859,7 +15859,7 @@
           <p:cNvPr id="37" name="">
             <a:extLst xmlns:a="http://schemas.openxmlformats.org/drawingml/2006/main">
               <a:ext uri="{FF2B5EF4-FFF2-40B4-BE49-F238E27FC236}">
-                <a16:creationId xmlns:a16="http://schemas.microsoft.com/office/drawing/2014/main" id="{E5DAF41A-90CA-48BF-BFB8-A3DBBAA71EE1}"/>
+                <a16:creationId xmlns:a16="http://schemas.microsoft.com/office/drawing/2014/main" id="{BD44D8B4-30EE-49B6-94A8-300A919B17EB}"/>
               </a:ext>
             </a:extLst>
           </p:cNvPr>
@@ -15890,7 +15890,7 @@
           <p:cNvPr id="38" name="">
             <a:extLst xmlns:a="http://schemas.openxmlformats.org/drawingml/2006/main">
               <a:ext uri="{FF2B5EF4-FFF2-40B4-BE49-F238E27FC236}">
-                <a16:creationId xmlns:a16="http://schemas.microsoft.com/office/drawing/2014/main" id="{819E07B9-3D1E-4A6C-A25F-751C832E9E57}"/>
+                <a16:creationId xmlns:a16="http://schemas.microsoft.com/office/drawing/2014/main" id="{E3B16774-4D83-4AFA-AB96-FF50FFE2BF7E}"/>
               </a:ext>
             </a:extLst>
           </p:cNvPr>
@@ -15942,7 +15942,7 @@
                 <a:ea typeface="Arial"/>
                 <a:cs typeface="Arial"/>
               </a:rPr>
-              <a:t>r2z-16690ccbe328 · prt-b73fa05705</a:t>
+              <a:t>r2z-45c4ba076af9 · prt-fd6de9d793</a:t>
             </a:r>
           </a:p>
         </p:txBody>
@@ -15952,7 +15952,7 @@
           <p:cNvPr id="39" name="">
             <a:extLst xmlns:a="http://schemas.openxmlformats.org/drawingml/2006/main">
               <a:ext uri="{FF2B5EF4-FFF2-40B4-BE49-F238E27FC236}">
-                <a16:creationId xmlns:a16="http://schemas.microsoft.com/office/drawing/2014/main" id="{E217F5B2-2DC6-4DCE-B23F-0A2191F2D668}"/>
+                <a16:creationId xmlns:a16="http://schemas.microsoft.com/office/drawing/2014/main" id="{642F0A8C-E846-4A4E-A8E9-A4D79A79A125}"/>
               </a:ext>
             </a:extLst>
           </p:cNvPr>
@@ -16012,7 +16012,7 @@
     </p:spTree>
     <p:extLst>
       <p:ext uri="{BB962C8B-B14F-4D97-AF65-F5344CB8AC3E}">
-        <p14:creationId xmlns:p14="http://schemas.microsoft.com/office/powerpoint/2010/main" val="2046418731"/>
+        <p14:creationId xmlns:p14="http://schemas.microsoft.com/office/powerpoint/2010/main" val="187269834"/>
       </p:ext>
     </p:extLst>
   </p:cSld>
@@ -16043,7 +16043,7 @@
           <p:cNvPr id="35" name="">
             <a:extLst xmlns:a="http://schemas.openxmlformats.org/drawingml/2006/main">
               <a:ext uri="{FF2B5EF4-FFF2-40B4-BE49-F238E27FC236}">
-                <a16:creationId xmlns:a16="http://schemas.microsoft.com/office/drawing/2014/main" id="{00825D18-2192-4BEC-92AF-5E907AA9BF03}"/>
+                <a16:creationId xmlns:a16="http://schemas.microsoft.com/office/drawing/2014/main" id="{FDC5CCC0-206A-4CEB-B661-78AD32F4D543}"/>
               </a:ext>
             </a:extLst>
           </p:cNvPr>
@@ -16105,7 +16105,7 @@
                 <a:latin typeface="Arial"/>
                 <a:ea typeface="Arial"/>
                 <a:cs typeface="Arial"/>
-                <a:hlinkClick xmlns:r="http://schemas.openxmlformats.org/officeDocument/2006/relationships" r:id="R8ba5bfe15e1d4909"/>
+                <a:hlinkClick xmlns:r="http://schemas.openxmlformats.org/officeDocument/2006/relationships" r:id="R3e9e6a7a409a4f27"/>
               </a:rPr>
               <a:t>https://github.com/qjmre23/Route2Zero</a:t>
             </a:r>
@@ -16128,7 +16128,7 @@
                 <a:latin typeface="Arial"/>
                 <a:ea typeface="Arial"/>
                 <a:cs typeface="Arial"/>
-                <a:hlinkClick xmlns:r="http://schemas.openxmlformats.org/officeDocument/2006/relationships" r:id="R3803812aea0a417e"/>
+                <a:hlinkClick xmlns:r="http://schemas.openxmlformats.org/officeDocument/2006/relationships" r:id="R1389ccd0708f46f7"/>
               </a:rPr>
               <a:t>https://route2zero.netlify.app/</a:t>
             </a:r>
@@ -16140,7 +16140,7 @@
           <p:cNvPr id="2" name="">
             <a:extLst xmlns:a="http://schemas.openxmlformats.org/drawingml/2006/main">
               <a:ext uri="{FF2B5EF4-FFF2-40B4-BE49-F238E27FC236}">
-                <a16:creationId xmlns:a16="http://schemas.microsoft.com/office/drawing/2014/main" id="{D78EC321-FF85-4C2E-8E77-DC9946EDC7A2}"/>
+                <a16:creationId xmlns:a16="http://schemas.microsoft.com/office/drawing/2014/main" id="{0C9DA37A-F1B5-4D33-8680-ADD507033D94}"/>
               </a:ext>
             </a:extLst>
           </p:cNvPr>
@@ -16202,7 +16202,7 @@
           <p:cNvPr id="3" name="">
             <a:extLst xmlns:a="http://schemas.openxmlformats.org/drawingml/2006/main">
               <a:ext uri="{FF2B5EF4-FFF2-40B4-BE49-F238E27FC236}">
-                <a16:creationId xmlns:a16="http://schemas.microsoft.com/office/drawing/2014/main" id="{54E59B81-A84C-4092-9A13-76DBABF6F670}"/>
+                <a16:creationId xmlns:a16="http://schemas.microsoft.com/office/drawing/2014/main" id="{7197E75D-EE82-449B-A94A-D2FDA5CED190}"/>
               </a:ext>
             </a:extLst>
           </p:cNvPr>
@@ -16268,8 +16268,8 @@
           <p:nvPr/>
         </p:nvPicPr>
         <p:blipFill>
-          <a:blip xmlns:r="http://schemas.openxmlformats.org/officeDocument/2006/relationships" xmlns:a="http://schemas.openxmlformats.org/drawingml/2006/main" r:embed="R2b2ca73285a44f6e"/>
-          <a:srcRect xmlns:a="http://schemas.openxmlformats.org/drawingml/2006/main" l="2472" t="0" r="2472" b="0"/>
+          <a:blip xmlns:r="http://schemas.openxmlformats.org/officeDocument/2006/relationships" xmlns:a="http://schemas.openxmlformats.org/drawingml/2006/main" r:embed="R81d3a9d4c37f4d6f"/>
+          <a:srcRect xmlns:a="http://schemas.openxmlformats.org/drawingml/2006/main" l="2463" t="0" r="2463" b="0"/>
           <a:stretch xmlns:a="http://schemas.openxmlformats.org/drawingml/2006/main">
             <a:fillRect l="0" t="0" r="0" b="0"/>
           </a:stretch>
@@ -16291,7 +16291,7 @@
           <p:cNvPr id="5" name="">
             <a:extLst xmlns:a="http://schemas.openxmlformats.org/drawingml/2006/main">
               <a:ext uri="{FF2B5EF4-FFF2-40B4-BE49-F238E27FC236}">
-                <a16:creationId xmlns:a16="http://schemas.microsoft.com/office/drawing/2014/main" id="{888E7116-3492-420F-AE14-56F5377D0B96}"/>
+                <a16:creationId xmlns:a16="http://schemas.microsoft.com/office/drawing/2014/main" id="{B4342CEC-13C5-4EDA-822F-FA5AE9B78E83}"/>
               </a:ext>
             </a:extLst>
           </p:cNvPr>
@@ -16324,7 +16324,7 @@
           <p:cNvPr id="6" name="">
             <a:extLst xmlns:a="http://schemas.openxmlformats.org/drawingml/2006/main">
               <a:ext uri="{FF2B5EF4-FFF2-40B4-BE49-F238E27FC236}">
-                <a16:creationId xmlns:a16="http://schemas.microsoft.com/office/drawing/2014/main" id="{EC3F6784-31F4-4FF7-B2A2-FBC5AEF78B5F}"/>
+                <a16:creationId xmlns:a16="http://schemas.microsoft.com/office/drawing/2014/main" id="{29A8DD88-6D43-49B8-9C57-21789F8A88FB}"/>
               </a:ext>
             </a:extLst>
           </p:cNvPr>
@@ -16386,7 +16386,7 @@
           <p:cNvPr id="7" name="">
             <a:extLst xmlns:a="http://schemas.openxmlformats.org/drawingml/2006/main">
               <a:ext uri="{FF2B5EF4-FFF2-40B4-BE49-F238E27FC236}">
-                <a16:creationId xmlns:a16="http://schemas.microsoft.com/office/drawing/2014/main" id="{3ECD08F0-0F56-4FA8-816D-F477B29B3E3F}"/>
+                <a16:creationId xmlns:a16="http://schemas.microsoft.com/office/drawing/2014/main" id="{44EC7F77-E4ED-4CE3-9E1B-49CFF75D0062}"/>
               </a:ext>
             </a:extLst>
           </p:cNvPr>
@@ -16438,7 +16438,7 @@
                 <a:ea typeface="Arial"/>
                 <a:cs typeface="Arial"/>
               </a:rPr>
-              <a:t>1 / 79.97</a:t>
+              <a:t>1 / 79.07</a:t>
             </a:r>
           </a:p>
         </p:txBody>
@@ -16448,7 +16448,7 @@
           <p:cNvPr id="8" name="">
             <a:extLst xmlns:a="http://schemas.openxmlformats.org/drawingml/2006/main">
               <a:ext uri="{FF2B5EF4-FFF2-40B4-BE49-F238E27FC236}">
-                <a16:creationId xmlns:a16="http://schemas.microsoft.com/office/drawing/2014/main" id="{2D34070F-EC93-4C62-BCA4-238E83B76203}"/>
+                <a16:creationId xmlns:a16="http://schemas.microsoft.com/office/drawing/2014/main" id="{59B52ED4-836B-4D6B-B339-3FED17E87B78}"/>
               </a:ext>
             </a:extLst>
           </p:cNvPr>
@@ -16479,7 +16479,7 @@
           <p:cNvPr id="9" name="">
             <a:extLst xmlns:a="http://schemas.openxmlformats.org/drawingml/2006/main">
               <a:ext uri="{FF2B5EF4-FFF2-40B4-BE49-F238E27FC236}">
-                <a16:creationId xmlns:a16="http://schemas.microsoft.com/office/drawing/2014/main" id="{8F327B5B-62FB-4B6A-BD29-A23EACF836D8}"/>
+                <a16:creationId xmlns:a16="http://schemas.microsoft.com/office/drawing/2014/main" id="{3EDDCDF5-60A8-4754-92A5-262B2CAEFC53}"/>
               </a:ext>
             </a:extLst>
           </p:cNvPr>
@@ -16541,7 +16541,7 @@
           <p:cNvPr id="10" name="">
             <a:extLst xmlns:a="http://schemas.openxmlformats.org/drawingml/2006/main">
               <a:ext uri="{FF2B5EF4-FFF2-40B4-BE49-F238E27FC236}">
-                <a16:creationId xmlns:a16="http://schemas.microsoft.com/office/drawing/2014/main" id="{1C8CF50B-D687-425A-BACC-04D38DF59808}"/>
+                <a16:creationId xmlns:a16="http://schemas.microsoft.com/office/drawing/2014/main" id="{50286AFE-D55E-4B66-B345-9358DE22A100}"/>
               </a:ext>
             </a:extLst>
           </p:cNvPr>
@@ -16603,7 +16603,7 @@
           <p:cNvPr id="11" name="">
             <a:extLst xmlns:a="http://schemas.openxmlformats.org/drawingml/2006/main">
               <a:ext uri="{FF2B5EF4-FFF2-40B4-BE49-F238E27FC236}">
-                <a16:creationId xmlns:a16="http://schemas.microsoft.com/office/drawing/2014/main" id="{62697755-24A4-444D-B9A9-3D5E9DE7F202}"/>
+                <a16:creationId xmlns:a16="http://schemas.microsoft.com/office/drawing/2014/main" id="{E8FED7A0-9319-40B0-AF17-53D66CB509FD}"/>
               </a:ext>
             </a:extLst>
           </p:cNvPr>
@@ -16634,7 +16634,7 @@
           <p:cNvPr id="12" name="">
             <a:extLst xmlns:a="http://schemas.openxmlformats.org/drawingml/2006/main">
               <a:ext uri="{FF2B5EF4-FFF2-40B4-BE49-F238E27FC236}">
-                <a16:creationId xmlns:a16="http://schemas.microsoft.com/office/drawing/2014/main" id="{7EF54075-55C3-4644-AF99-35E966DA26E1}"/>
+                <a16:creationId xmlns:a16="http://schemas.microsoft.com/office/drawing/2014/main" id="{F17DFB14-7878-436C-A672-39C805D7E0DE}"/>
               </a:ext>
             </a:extLst>
           </p:cNvPr>
@@ -16696,7 +16696,7 @@
           <p:cNvPr id="13" name="">
             <a:extLst xmlns:a="http://schemas.openxmlformats.org/drawingml/2006/main">
               <a:ext uri="{FF2B5EF4-FFF2-40B4-BE49-F238E27FC236}">
-                <a16:creationId xmlns:a16="http://schemas.microsoft.com/office/drawing/2014/main" id="{F74F2A23-6EAD-499F-BF3F-EFAB6BBE4998}"/>
+                <a16:creationId xmlns:a16="http://schemas.microsoft.com/office/drawing/2014/main" id="{4E287C0A-DDA9-4538-9BC5-65F5FD1BB4B4}"/>
               </a:ext>
             </a:extLst>
           </p:cNvPr>
@@ -16758,7 +16758,7 @@
           <p:cNvPr id="14" name="">
             <a:extLst xmlns:a="http://schemas.openxmlformats.org/drawingml/2006/main">
               <a:ext uri="{FF2B5EF4-FFF2-40B4-BE49-F238E27FC236}">
-                <a16:creationId xmlns:a16="http://schemas.microsoft.com/office/drawing/2014/main" id="{245D1024-00E9-4D8A-876E-0C27CBEA5617}"/>
+                <a16:creationId xmlns:a16="http://schemas.microsoft.com/office/drawing/2014/main" id="{AA476358-357B-41C4-967E-E3BA2362EAB5}"/>
               </a:ext>
             </a:extLst>
           </p:cNvPr>
@@ -16789,7 +16789,7 @@
           <p:cNvPr id="15" name="">
             <a:extLst xmlns:a="http://schemas.openxmlformats.org/drawingml/2006/main">
               <a:ext uri="{FF2B5EF4-FFF2-40B4-BE49-F238E27FC236}">
-                <a16:creationId xmlns:a16="http://schemas.microsoft.com/office/drawing/2014/main" id="{2800B012-16D0-4979-8028-35C433DDE534}"/>
+                <a16:creationId xmlns:a16="http://schemas.microsoft.com/office/drawing/2014/main" id="{490510DC-B560-464D-B86F-AC83D6606A1C}"/>
               </a:ext>
             </a:extLst>
           </p:cNvPr>
@@ -16851,7 +16851,7 @@
           <p:cNvPr id="16" name="">
             <a:extLst xmlns:a="http://schemas.openxmlformats.org/drawingml/2006/main">
               <a:ext uri="{FF2B5EF4-FFF2-40B4-BE49-F238E27FC236}">
-                <a16:creationId xmlns:a16="http://schemas.microsoft.com/office/drawing/2014/main" id="{3842B638-DF39-4512-A47F-CAB770318764}"/>
+                <a16:creationId xmlns:a16="http://schemas.microsoft.com/office/drawing/2014/main" id="{293FB499-ABDB-4D80-B0A4-DA12E6A54C4C}"/>
               </a:ext>
             </a:extLst>
           </p:cNvPr>
@@ -16913,7 +16913,7 @@
           <p:cNvPr id="17" name="">
             <a:extLst xmlns:a="http://schemas.openxmlformats.org/drawingml/2006/main">
               <a:ext uri="{FF2B5EF4-FFF2-40B4-BE49-F238E27FC236}">
-                <a16:creationId xmlns:a16="http://schemas.microsoft.com/office/drawing/2014/main" id="{980300B1-E9D8-47E4-BD63-3EA07405AB77}"/>
+                <a16:creationId xmlns:a16="http://schemas.microsoft.com/office/drawing/2014/main" id="{E9CF9056-6829-4484-822F-8969A2F742C2}"/>
               </a:ext>
             </a:extLst>
           </p:cNvPr>
@@ -16944,7 +16944,7 @@
           <p:cNvPr id="18" name="">
             <a:extLst xmlns:a="http://schemas.openxmlformats.org/drawingml/2006/main">
               <a:ext uri="{FF2B5EF4-FFF2-40B4-BE49-F238E27FC236}">
-                <a16:creationId xmlns:a16="http://schemas.microsoft.com/office/drawing/2014/main" id="{3C98ED83-EEC1-4140-A870-4C0BE6B2738C}"/>
+                <a16:creationId xmlns:a16="http://schemas.microsoft.com/office/drawing/2014/main" id="{145FE9B4-EDE5-4857-8439-8D2312853283}"/>
               </a:ext>
             </a:extLst>
           </p:cNvPr>
@@ -17006,7 +17006,7 @@
           <p:cNvPr id="19" name="">
             <a:extLst xmlns:a="http://schemas.openxmlformats.org/drawingml/2006/main">
               <a:ext uri="{FF2B5EF4-FFF2-40B4-BE49-F238E27FC236}">
-                <a16:creationId xmlns:a16="http://schemas.microsoft.com/office/drawing/2014/main" id="{37F55A60-71FE-4E9A-89BB-C46637FBF372}"/>
+                <a16:creationId xmlns:a16="http://schemas.microsoft.com/office/drawing/2014/main" id="{E31B82AC-5ADB-492E-AEEF-9C0A0B36DCDB}"/>
               </a:ext>
             </a:extLst>
           </p:cNvPr>
@@ -17058,7 +17058,7 @@
                 <a:ea typeface="Arial"/>
                 <a:cs typeface="Arial"/>
               </a:rPr>
-              <a:t>66.45 · capacity unverified</a:t>
+              <a:t>60.45 · capacity unverified</a:t>
             </a:r>
           </a:p>
         </p:txBody>
@@ -17068,7 +17068,7 @@
           <p:cNvPr id="20" name="">
             <a:extLst xmlns:a="http://schemas.openxmlformats.org/drawingml/2006/main">
               <a:ext uri="{FF2B5EF4-FFF2-40B4-BE49-F238E27FC236}">
-                <a16:creationId xmlns:a16="http://schemas.microsoft.com/office/drawing/2014/main" id="{F44769F5-7750-4986-B54F-2151EDC4EE41}"/>
+                <a16:creationId xmlns:a16="http://schemas.microsoft.com/office/drawing/2014/main" id="{90BB83AC-88B8-476D-B538-E2658441D760}"/>
               </a:ext>
             </a:extLst>
           </p:cNvPr>
@@ -17099,7 +17099,7 @@
           <p:cNvPr id="21" name="">
             <a:extLst xmlns:a="http://schemas.openxmlformats.org/drawingml/2006/main">
               <a:ext uri="{FF2B5EF4-FFF2-40B4-BE49-F238E27FC236}">
-                <a16:creationId xmlns:a16="http://schemas.microsoft.com/office/drawing/2014/main" id="{8C25666F-8797-44A8-B40F-ECA724E3069A}"/>
+                <a16:creationId xmlns:a16="http://schemas.microsoft.com/office/drawing/2014/main" id="{BE0638E9-C314-49D5-9802-AA676BE1152C}"/>
               </a:ext>
             </a:extLst>
           </p:cNvPr>
@@ -17161,7 +17161,7 @@
           <p:cNvPr id="22" name="">
             <a:extLst xmlns:a="http://schemas.openxmlformats.org/drawingml/2006/main">
               <a:ext uri="{FF2B5EF4-FFF2-40B4-BE49-F238E27FC236}">
-                <a16:creationId xmlns:a16="http://schemas.microsoft.com/office/drawing/2014/main" id="{0A48E755-6DA6-4AA4-A97C-3BA8D27FCF88}"/>
+                <a16:creationId xmlns:a16="http://schemas.microsoft.com/office/drawing/2014/main" id="{A87F47FD-4C00-4404-84A5-41F133808BC3}"/>
               </a:ext>
             </a:extLst>
           </p:cNvPr>
@@ -17223,7 +17223,7 @@
           <p:cNvPr id="23" name="">
             <a:extLst xmlns:a="http://schemas.openxmlformats.org/drawingml/2006/main">
               <a:ext uri="{FF2B5EF4-FFF2-40B4-BE49-F238E27FC236}">
-                <a16:creationId xmlns:a16="http://schemas.microsoft.com/office/drawing/2014/main" id="{F3F4A65A-5E97-4B6F-9B9D-9753B304ED32}"/>
+                <a16:creationId xmlns:a16="http://schemas.microsoft.com/office/drawing/2014/main" id="{AA86CAF9-68DF-4FDC-BD8C-27919D94B142}"/>
               </a:ext>
             </a:extLst>
           </p:cNvPr>
@@ -17254,7 +17254,7 @@
           <p:cNvPr id="24" name="">
             <a:extLst xmlns:a="http://schemas.openxmlformats.org/drawingml/2006/main">
               <a:ext uri="{FF2B5EF4-FFF2-40B4-BE49-F238E27FC236}">
-                <a16:creationId xmlns:a16="http://schemas.microsoft.com/office/drawing/2014/main" id="{5C137AB4-3753-433D-BE9C-77B95392814F}"/>
+                <a16:creationId xmlns:a16="http://schemas.microsoft.com/office/drawing/2014/main" id="{2363BC96-8380-4F8C-B368-C8C5D3EAFE50}"/>
               </a:ext>
             </a:extLst>
           </p:cNvPr>
@@ -17316,7 +17316,7 @@
           <p:cNvPr id="25" name="">
             <a:extLst xmlns:a="http://schemas.openxmlformats.org/drawingml/2006/main">
               <a:ext uri="{FF2B5EF4-FFF2-40B4-BE49-F238E27FC236}">
-                <a16:creationId xmlns:a16="http://schemas.microsoft.com/office/drawing/2014/main" id="{9F4F3C7C-0964-4048-807C-C20BE64B7151}"/>
+                <a16:creationId xmlns:a16="http://schemas.microsoft.com/office/drawing/2014/main" id="{E395B887-EA2B-4B13-93C8-CC8EF48E7C5A}"/>
               </a:ext>
             </a:extLst>
           </p:cNvPr>
@@ -17378,7 +17378,7 @@
           <p:cNvPr id="26" name="">
             <a:extLst xmlns:a="http://schemas.openxmlformats.org/drawingml/2006/main">
               <a:ext uri="{FF2B5EF4-FFF2-40B4-BE49-F238E27FC236}">
-                <a16:creationId xmlns:a16="http://schemas.microsoft.com/office/drawing/2014/main" id="{39BCE337-4681-4AAE-86BA-A32C76470A86}"/>
+                <a16:creationId xmlns:a16="http://schemas.microsoft.com/office/drawing/2014/main" id="{BD44E24C-64D9-4358-813C-9DBD8A577187}"/>
               </a:ext>
             </a:extLst>
           </p:cNvPr>
@@ -17409,7 +17409,7 @@
           <p:cNvPr id="27" name="">
             <a:extLst xmlns:a="http://schemas.openxmlformats.org/drawingml/2006/main">
               <a:ext uri="{FF2B5EF4-FFF2-40B4-BE49-F238E27FC236}">
-                <a16:creationId xmlns:a16="http://schemas.microsoft.com/office/drawing/2014/main" id="{8355672B-E81B-4D09-9A0A-C79392F94B8F}"/>
+                <a16:creationId xmlns:a16="http://schemas.microsoft.com/office/drawing/2014/main" id="{2649DE6A-F70B-4220-8FFC-2B94352C2EAA}"/>
               </a:ext>
             </a:extLst>
           </p:cNvPr>
@@ -17471,7 +17471,7 @@
           <p:cNvPr id="28" name="">
             <a:extLst xmlns:a="http://schemas.openxmlformats.org/drawingml/2006/main">
               <a:ext uri="{FF2B5EF4-FFF2-40B4-BE49-F238E27FC236}">
-                <a16:creationId xmlns:a16="http://schemas.microsoft.com/office/drawing/2014/main" id="{836DB71B-80BD-44F6-ADD5-D9CBCB66CFD0}"/>
+                <a16:creationId xmlns:a16="http://schemas.microsoft.com/office/drawing/2014/main" id="{65E1F6D8-09B0-4F63-A82A-4942266D9613}"/>
               </a:ext>
             </a:extLst>
           </p:cNvPr>
@@ -17533,7 +17533,7 @@
           <p:cNvPr id="29" name="">
             <a:extLst xmlns:a="http://schemas.openxmlformats.org/drawingml/2006/main">
               <a:ext uri="{FF2B5EF4-FFF2-40B4-BE49-F238E27FC236}">
-                <a16:creationId xmlns:a16="http://schemas.microsoft.com/office/drawing/2014/main" id="{B823E7FD-2C76-4A67-A57C-A40076E5B808}"/>
+                <a16:creationId xmlns:a16="http://schemas.microsoft.com/office/drawing/2014/main" id="{5B618866-C729-4B1F-9536-1157D177FA54}"/>
               </a:ext>
             </a:extLst>
           </p:cNvPr>
@@ -17564,7 +17564,7 @@
           <p:cNvPr id="30" name="">
             <a:extLst xmlns:a="http://schemas.openxmlformats.org/drawingml/2006/main">
               <a:ext uri="{FF2B5EF4-FFF2-40B4-BE49-F238E27FC236}">
-                <a16:creationId xmlns:a16="http://schemas.microsoft.com/office/drawing/2014/main" id="{D74A9268-0E26-48DF-88B2-CB3B43529766}"/>
+                <a16:creationId xmlns:a16="http://schemas.microsoft.com/office/drawing/2014/main" id="{3865EF28-D45E-441C-AD6B-00BB4807FE0F}"/>
               </a:ext>
             </a:extLst>
           </p:cNvPr>
@@ -17597,7 +17597,7 @@
           <p:cNvPr id="31" name="">
             <a:extLst xmlns:a="http://schemas.openxmlformats.org/drawingml/2006/main">
               <a:ext uri="{FF2B5EF4-FFF2-40B4-BE49-F238E27FC236}">
-                <a16:creationId xmlns:a16="http://schemas.microsoft.com/office/drawing/2014/main" id="{74726AA8-18B4-4789-A98E-DAA17CA155B5}"/>
+                <a16:creationId xmlns:a16="http://schemas.microsoft.com/office/drawing/2014/main" id="{8DE31941-818E-4C5D-B37D-DC7851924BA4}"/>
               </a:ext>
             </a:extLst>
           </p:cNvPr>
@@ -17659,7 +17659,7 @@
           <p:cNvPr id="32" name="">
             <a:extLst xmlns:a="http://schemas.openxmlformats.org/drawingml/2006/main">
               <a:ext uri="{FF2B5EF4-FFF2-40B4-BE49-F238E27FC236}">
-                <a16:creationId xmlns:a16="http://schemas.microsoft.com/office/drawing/2014/main" id="{2D06E0E0-0A35-4510-9484-D9E3F1DF1B64}"/>
+                <a16:creationId xmlns:a16="http://schemas.microsoft.com/office/drawing/2014/main" id="{55D8B159-5025-4AC0-8162-4920B90FC799}"/>
               </a:ext>
             </a:extLst>
           </p:cNvPr>
@@ -17690,7 +17690,7 @@
           <p:cNvPr id="33" name="">
             <a:extLst xmlns:a="http://schemas.openxmlformats.org/drawingml/2006/main">
               <a:ext uri="{FF2B5EF4-FFF2-40B4-BE49-F238E27FC236}">
-                <a16:creationId xmlns:a16="http://schemas.microsoft.com/office/drawing/2014/main" id="{7EE48C4F-EBA6-4BE0-8F5C-56D99A8BD980}"/>
+                <a16:creationId xmlns:a16="http://schemas.microsoft.com/office/drawing/2014/main" id="{D2B94BAF-BEBD-46B4-B725-F42AD4DD6283}"/>
               </a:ext>
             </a:extLst>
           </p:cNvPr>
@@ -17742,7 +17742,7 @@
                 <a:ea typeface="Arial"/>
                 <a:cs typeface="Arial"/>
               </a:rPr>
-              <a:t>r2z-16690ccbe328 · scn-c46e1d86c1</a:t>
+              <a:t>r2z-45c4ba076af9 · scn-e0f12f397e</a:t>
             </a:r>
           </a:p>
         </p:txBody>
@@ -17752,7 +17752,7 @@
           <p:cNvPr id="34" name="">
             <a:extLst xmlns:a="http://schemas.openxmlformats.org/drawingml/2006/main">
               <a:ext uri="{FF2B5EF4-FFF2-40B4-BE49-F238E27FC236}">
-                <a16:creationId xmlns:a16="http://schemas.microsoft.com/office/drawing/2014/main" id="{DB427159-9AB4-481A-8B29-9A1EBBE01977}"/>
+                <a16:creationId xmlns:a16="http://schemas.microsoft.com/office/drawing/2014/main" id="{8D939DDF-6774-4EEF-BC0A-2395FCFF1E91}"/>
               </a:ext>
             </a:extLst>
           </p:cNvPr>
@@ -17812,7 +17812,7 @@
     </p:spTree>
     <p:extLst>
       <p:ext uri="{BB962C8B-B14F-4D97-AF65-F5344CB8AC3E}">
-        <p14:creationId xmlns:p14="http://schemas.microsoft.com/office/powerpoint/2010/main" val="1101811936"/>
+        <p14:creationId xmlns:p14="http://schemas.microsoft.com/office/powerpoint/2010/main" val="21352134"/>
       </p:ext>
     </p:extLst>
   </p:cSld>
@@ -17843,7 +17843,7 @@
           <p:cNvPr id="43" name="">
             <a:extLst xmlns:a="http://schemas.openxmlformats.org/drawingml/2006/main">
               <a:ext uri="{FF2B5EF4-FFF2-40B4-BE49-F238E27FC236}">
-                <a16:creationId xmlns:a16="http://schemas.microsoft.com/office/drawing/2014/main" id="{159F29FD-2A9A-411A-960B-1CFF001C5292}"/>
+                <a16:creationId xmlns:a16="http://schemas.microsoft.com/office/drawing/2014/main" id="{1E801C57-32D7-4E95-A9DB-C9D3EE04A26F}"/>
               </a:ext>
             </a:extLst>
           </p:cNvPr>
@@ -17905,7 +17905,7 @@
                 <a:latin typeface="Arial"/>
                 <a:ea typeface="Arial"/>
                 <a:cs typeface="Arial"/>
-                <a:hlinkClick xmlns:r="http://schemas.openxmlformats.org/officeDocument/2006/relationships" r:id="Rd13fccd6fa624e34"/>
+                <a:hlinkClick xmlns:r="http://schemas.openxmlformats.org/officeDocument/2006/relationships" r:id="Rb452b0d9409f41ed"/>
               </a:rPr>
               <a:t>https://github.com/qjmre23/Route2Zero</a:t>
             </a:r>
@@ -17928,7 +17928,7 @@
                 <a:latin typeface="Arial"/>
                 <a:ea typeface="Arial"/>
                 <a:cs typeface="Arial"/>
-                <a:hlinkClick xmlns:r="http://schemas.openxmlformats.org/officeDocument/2006/relationships" r:id="R143dff75f4994ef3"/>
+                <a:hlinkClick xmlns:r="http://schemas.openxmlformats.org/officeDocument/2006/relationships" r:id="R27d3f332e0ae4ef8"/>
               </a:rPr>
               <a:t>https://route2zero.netlify.app/</a:t>
             </a:r>
@@ -17940,7 +17940,7 @@
           <p:cNvPr id="2" name="">
             <a:extLst xmlns:a="http://schemas.openxmlformats.org/drawingml/2006/main">
               <a:ext uri="{FF2B5EF4-FFF2-40B4-BE49-F238E27FC236}">
-                <a16:creationId xmlns:a16="http://schemas.microsoft.com/office/drawing/2014/main" id="{9520F977-7439-4EAA-AE53-3A49D8646F93}"/>
+                <a16:creationId xmlns:a16="http://schemas.microsoft.com/office/drawing/2014/main" id="{A2BDFFF6-CB5C-4440-BFDD-87A14491D962}"/>
               </a:ext>
             </a:extLst>
           </p:cNvPr>
@@ -18002,7 +18002,7 @@
           <p:cNvPr id="3" name="">
             <a:extLst xmlns:a="http://schemas.openxmlformats.org/drawingml/2006/main">
               <a:ext uri="{FF2B5EF4-FFF2-40B4-BE49-F238E27FC236}">
-                <a16:creationId xmlns:a16="http://schemas.microsoft.com/office/drawing/2014/main" id="{1DCAE500-7DC2-4576-A567-9AF1C7AC9BA2}"/>
+                <a16:creationId xmlns:a16="http://schemas.microsoft.com/office/drawing/2014/main" id="{5BEBFF52-FB57-455D-A358-D74D55A4C0A7}"/>
               </a:ext>
             </a:extLst>
           </p:cNvPr>
@@ -18064,7 +18064,7 @@
           <p:cNvPr id="4" name="">
             <a:extLst xmlns:a="http://schemas.openxmlformats.org/drawingml/2006/main">
               <a:ext uri="{FF2B5EF4-FFF2-40B4-BE49-F238E27FC236}">
-                <a16:creationId xmlns:a16="http://schemas.microsoft.com/office/drawing/2014/main" id="{994310AD-3F2D-422A-8224-F586859B0BB6}"/>
+                <a16:creationId xmlns:a16="http://schemas.microsoft.com/office/drawing/2014/main" id="{C9DC0A2A-6626-4BF4-BF5C-4D9FD7061C74}"/>
               </a:ext>
             </a:extLst>
           </p:cNvPr>
@@ -18095,7 +18095,7 @@
           <p:cNvPr id="5" name="">
             <a:extLst xmlns:a="http://schemas.openxmlformats.org/drawingml/2006/main">
               <a:ext uri="{FF2B5EF4-FFF2-40B4-BE49-F238E27FC236}">
-                <a16:creationId xmlns:a16="http://schemas.microsoft.com/office/drawing/2014/main" id="{A1297AFE-AED7-430C-983E-2AB7FB26C5E8}"/>
+                <a16:creationId xmlns:a16="http://schemas.microsoft.com/office/drawing/2014/main" id="{3A7B298A-0286-498A-AF65-BD2B93313136}"/>
               </a:ext>
             </a:extLst>
           </p:cNvPr>
@@ -18157,7 +18157,7 @@
           <p:cNvPr id="6" name="">
             <a:extLst xmlns:a="http://schemas.openxmlformats.org/drawingml/2006/main">
               <a:ext uri="{FF2B5EF4-FFF2-40B4-BE49-F238E27FC236}">
-                <a16:creationId xmlns:a16="http://schemas.microsoft.com/office/drawing/2014/main" id="{B3A99991-7191-43C1-8BD2-53B2DAC38066}"/>
+                <a16:creationId xmlns:a16="http://schemas.microsoft.com/office/drawing/2014/main" id="{DF31F4D8-732E-4919-A4ED-75007863FD81}"/>
               </a:ext>
             </a:extLst>
           </p:cNvPr>
@@ -18188,7 +18188,7 @@
           <p:cNvPr id="7" name="">
             <a:extLst xmlns:a="http://schemas.openxmlformats.org/drawingml/2006/main">
               <a:ext uri="{FF2B5EF4-FFF2-40B4-BE49-F238E27FC236}">
-                <a16:creationId xmlns:a16="http://schemas.microsoft.com/office/drawing/2014/main" id="{637C704E-4609-4BA1-87C5-A823BD283FF5}"/>
+                <a16:creationId xmlns:a16="http://schemas.microsoft.com/office/drawing/2014/main" id="{30DBA223-558F-46C2-97F4-B26C75295FF9}"/>
               </a:ext>
             </a:extLst>
           </p:cNvPr>
@@ -18250,7 +18250,7 @@
           <p:cNvPr id="8" name="">
             <a:extLst xmlns:a="http://schemas.openxmlformats.org/drawingml/2006/main">
               <a:ext uri="{FF2B5EF4-FFF2-40B4-BE49-F238E27FC236}">
-                <a16:creationId xmlns:a16="http://schemas.microsoft.com/office/drawing/2014/main" id="{AF10262E-3298-4AA2-85BB-DE38FE5C0894}"/>
+                <a16:creationId xmlns:a16="http://schemas.microsoft.com/office/drawing/2014/main" id="{C7713ECC-6745-4ACA-BDBA-502CC7AB5DF8}"/>
               </a:ext>
             </a:extLst>
           </p:cNvPr>
@@ -18281,7 +18281,7 @@
           <p:cNvPr id="9" name="">
             <a:extLst xmlns:a="http://schemas.openxmlformats.org/drawingml/2006/main">
               <a:ext uri="{FF2B5EF4-FFF2-40B4-BE49-F238E27FC236}">
-                <a16:creationId xmlns:a16="http://schemas.microsoft.com/office/drawing/2014/main" id="{D80DAB27-E32E-475C-ACDB-A61631E69524}"/>
+                <a16:creationId xmlns:a16="http://schemas.microsoft.com/office/drawing/2014/main" id="{8E220A45-D674-472A-83F1-5CC233C158C0}"/>
               </a:ext>
             </a:extLst>
           </p:cNvPr>
@@ -18343,7 +18343,7 @@
           <p:cNvPr id="10" name="">
             <a:extLst xmlns:a="http://schemas.openxmlformats.org/drawingml/2006/main">
               <a:ext uri="{FF2B5EF4-FFF2-40B4-BE49-F238E27FC236}">
-                <a16:creationId xmlns:a16="http://schemas.microsoft.com/office/drawing/2014/main" id="{D62648B8-4B00-4E51-9E79-75336E6601D2}"/>
+                <a16:creationId xmlns:a16="http://schemas.microsoft.com/office/drawing/2014/main" id="{B370C46E-2FF7-4D42-8527-FF68CAA09887}"/>
               </a:ext>
             </a:extLst>
           </p:cNvPr>
@@ -18374,7 +18374,7 @@
           <p:cNvPr id="11" name="">
             <a:extLst xmlns:a="http://schemas.openxmlformats.org/drawingml/2006/main">
               <a:ext uri="{FF2B5EF4-FFF2-40B4-BE49-F238E27FC236}">
-                <a16:creationId xmlns:a16="http://schemas.microsoft.com/office/drawing/2014/main" id="{F36F5A18-002B-4B84-AE03-7ADD7B522E2E}"/>
+                <a16:creationId xmlns:a16="http://schemas.microsoft.com/office/drawing/2014/main" id="{2064A1C1-1410-4F00-8D19-450F4A940BA2}"/>
               </a:ext>
             </a:extLst>
           </p:cNvPr>
@@ -18436,7 +18436,7 @@
           <p:cNvPr id="12" name="">
             <a:extLst xmlns:a="http://schemas.openxmlformats.org/drawingml/2006/main">
               <a:ext uri="{FF2B5EF4-FFF2-40B4-BE49-F238E27FC236}">
-                <a16:creationId xmlns:a16="http://schemas.microsoft.com/office/drawing/2014/main" id="{FFE17149-1AB2-45E8-8EC0-5D0E6585B177}"/>
+                <a16:creationId xmlns:a16="http://schemas.microsoft.com/office/drawing/2014/main" id="{8C5DD9D5-2AD5-4DDF-BD0A-E9C7F71F71DD}"/>
               </a:ext>
             </a:extLst>
           </p:cNvPr>
@@ -18467,7 +18467,7 @@
           <p:cNvPr id="13" name="">
             <a:extLst xmlns:a="http://schemas.openxmlformats.org/drawingml/2006/main">
               <a:ext uri="{FF2B5EF4-FFF2-40B4-BE49-F238E27FC236}">
-                <a16:creationId xmlns:a16="http://schemas.microsoft.com/office/drawing/2014/main" id="{F989096D-DED6-4AD0-811F-516625BA9CEB}"/>
+                <a16:creationId xmlns:a16="http://schemas.microsoft.com/office/drawing/2014/main" id="{A0745650-7901-4241-93EC-1BDA9730FC4C}"/>
               </a:ext>
             </a:extLst>
           </p:cNvPr>
@@ -18529,7 +18529,7 @@
           <p:cNvPr id="14" name="">
             <a:extLst xmlns:a="http://schemas.openxmlformats.org/drawingml/2006/main">
               <a:ext uri="{FF2B5EF4-FFF2-40B4-BE49-F238E27FC236}">
-                <a16:creationId xmlns:a16="http://schemas.microsoft.com/office/drawing/2014/main" id="{0ACCCE97-BC41-4545-887C-8DA21CC53441}"/>
+                <a16:creationId xmlns:a16="http://schemas.microsoft.com/office/drawing/2014/main" id="{3E788656-0CEA-4AB7-B633-38DAE5D93138}"/>
               </a:ext>
             </a:extLst>
           </p:cNvPr>
@@ -18560,7 +18560,7 @@
           <p:cNvPr id="15" name="">
             <a:extLst xmlns:a="http://schemas.openxmlformats.org/drawingml/2006/main">
               <a:ext uri="{FF2B5EF4-FFF2-40B4-BE49-F238E27FC236}">
-                <a16:creationId xmlns:a16="http://schemas.microsoft.com/office/drawing/2014/main" id="{A77B85B6-E7D9-4AC1-A701-F12975666F62}"/>
+                <a16:creationId xmlns:a16="http://schemas.microsoft.com/office/drawing/2014/main" id="{4C0A643E-DC63-494D-A79E-D35DB6B7BCF8}"/>
               </a:ext>
             </a:extLst>
           </p:cNvPr>
@@ -18622,7 +18622,7 @@
           <p:cNvPr id="16" name="">
             <a:extLst xmlns:a="http://schemas.openxmlformats.org/drawingml/2006/main">
               <a:ext uri="{FF2B5EF4-FFF2-40B4-BE49-F238E27FC236}">
-                <a16:creationId xmlns:a16="http://schemas.microsoft.com/office/drawing/2014/main" id="{ACCC42E3-B42D-4D89-9965-961C1FAA0876}"/>
+                <a16:creationId xmlns:a16="http://schemas.microsoft.com/office/drawing/2014/main" id="{B2BB761D-D3AB-4546-A050-6A15C55E1A74}"/>
               </a:ext>
             </a:extLst>
           </p:cNvPr>
@@ -18653,7 +18653,7 @@
           <p:cNvPr id="17" name="">
             <a:extLst xmlns:a="http://schemas.openxmlformats.org/drawingml/2006/main">
               <a:ext uri="{FF2B5EF4-FFF2-40B4-BE49-F238E27FC236}">
-                <a16:creationId xmlns:a16="http://schemas.microsoft.com/office/drawing/2014/main" id="{D852B39D-86AF-4D75-A004-8E832F3B3B4A}"/>
+                <a16:creationId xmlns:a16="http://schemas.microsoft.com/office/drawing/2014/main" id="{DF61FEEA-6FB4-46B9-B24D-87A3F81B9D1E}"/>
               </a:ext>
             </a:extLst>
           </p:cNvPr>
@@ -18715,7 +18715,7 @@
           <p:cNvPr id="18" name="">
             <a:extLst xmlns:a="http://schemas.openxmlformats.org/drawingml/2006/main">
               <a:ext uri="{FF2B5EF4-FFF2-40B4-BE49-F238E27FC236}">
-                <a16:creationId xmlns:a16="http://schemas.microsoft.com/office/drawing/2014/main" id="{259BF60C-9068-4E31-9173-A86CC39A8C5A}"/>
+                <a16:creationId xmlns:a16="http://schemas.microsoft.com/office/drawing/2014/main" id="{DCDF5A1E-CF0C-44D7-99DE-0F96848A98FC}"/>
               </a:ext>
             </a:extLst>
           </p:cNvPr>
@@ -18746,7 +18746,7 @@
           <p:cNvPr id="19" name="">
             <a:extLst xmlns:a="http://schemas.openxmlformats.org/drawingml/2006/main">
               <a:ext uri="{FF2B5EF4-FFF2-40B4-BE49-F238E27FC236}">
-                <a16:creationId xmlns:a16="http://schemas.microsoft.com/office/drawing/2014/main" id="{C5BB0C15-031E-43F0-A035-C17E0EA1385B}"/>
+                <a16:creationId xmlns:a16="http://schemas.microsoft.com/office/drawing/2014/main" id="{B3470949-909C-42D5-ADC0-CD97E6321CB4}"/>
               </a:ext>
             </a:extLst>
           </p:cNvPr>
@@ -18808,7 +18808,7 @@
           <p:cNvPr id="20" name="">
             <a:extLst xmlns:a="http://schemas.openxmlformats.org/drawingml/2006/main">
               <a:ext uri="{FF2B5EF4-FFF2-40B4-BE49-F238E27FC236}">
-                <a16:creationId xmlns:a16="http://schemas.microsoft.com/office/drawing/2014/main" id="{41AA15B8-727D-465D-A427-A7E49BFAFDD5}"/>
+                <a16:creationId xmlns:a16="http://schemas.microsoft.com/office/drawing/2014/main" id="{1441150E-0DBD-428A-87DC-2A8032079785}"/>
               </a:ext>
             </a:extLst>
           </p:cNvPr>
@@ -18839,7 +18839,7 @@
           <p:cNvPr id="21" name="">
             <a:extLst xmlns:a="http://schemas.openxmlformats.org/drawingml/2006/main">
               <a:ext uri="{FF2B5EF4-FFF2-40B4-BE49-F238E27FC236}">
-                <a16:creationId xmlns:a16="http://schemas.microsoft.com/office/drawing/2014/main" id="{48028509-9A2C-4431-9159-0D276C701DCE}"/>
+                <a16:creationId xmlns:a16="http://schemas.microsoft.com/office/drawing/2014/main" id="{DCF2AFFE-F77C-41F5-9A25-CF7CD476D80C}"/>
               </a:ext>
             </a:extLst>
           </p:cNvPr>
@@ -18901,7 +18901,7 @@
           <p:cNvPr id="22" name="">
             <a:extLst xmlns:a="http://schemas.openxmlformats.org/drawingml/2006/main">
               <a:ext uri="{FF2B5EF4-FFF2-40B4-BE49-F238E27FC236}">
-                <a16:creationId xmlns:a16="http://schemas.microsoft.com/office/drawing/2014/main" id="{91EBF96B-48D4-4BC0-B6ED-4B0E5B9A4BB3}"/>
+                <a16:creationId xmlns:a16="http://schemas.microsoft.com/office/drawing/2014/main" id="{FBCBEE70-DE33-478B-8BF9-EA3215B02D54}"/>
               </a:ext>
             </a:extLst>
           </p:cNvPr>
@@ -18932,7 +18932,7 @@
           <p:cNvPr id="23" name="">
             <a:extLst xmlns:a="http://schemas.openxmlformats.org/drawingml/2006/main">
               <a:ext uri="{FF2B5EF4-FFF2-40B4-BE49-F238E27FC236}">
-                <a16:creationId xmlns:a16="http://schemas.microsoft.com/office/drawing/2014/main" id="{0F06E84C-D61B-44D8-835C-1688AB217E03}"/>
+                <a16:creationId xmlns:a16="http://schemas.microsoft.com/office/drawing/2014/main" id="{6BABC1C5-9DAE-4945-85F0-4D51234C7D92}"/>
               </a:ext>
             </a:extLst>
           </p:cNvPr>
@@ -18994,7 +18994,7 @@
           <p:cNvPr id="24" name="">
             <a:extLst xmlns:a="http://schemas.openxmlformats.org/drawingml/2006/main">
               <a:ext uri="{FF2B5EF4-FFF2-40B4-BE49-F238E27FC236}">
-                <a16:creationId xmlns:a16="http://schemas.microsoft.com/office/drawing/2014/main" id="{EE88549F-3638-4C41-9F8E-504326F627BE}"/>
+                <a16:creationId xmlns:a16="http://schemas.microsoft.com/office/drawing/2014/main" id="{E2EFBA5D-6CB6-4589-A93B-1A4077F52C5C}"/>
               </a:ext>
             </a:extLst>
           </p:cNvPr>
@@ -19025,7 +19025,7 @@
           <p:cNvPr id="25" name="">
             <a:extLst xmlns:a="http://schemas.openxmlformats.org/drawingml/2006/main">
               <a:ext uri="{FF2B5EF4-FFF2-40B4-BE49-F238E27FC236}">
-                <a16:creationId xmlns:a16="http://schemas.microsoft.com/office/drawing/2014/main" id="{66176BA2-A02D-4470-BFC0-9D0CBA20DCC4}"/>
+                <a16:creationId xmlns:a16="http://schemas.microsoft.com/office/drawing/2014/main" id="{D05D0F99-4B85-41F5-8032-75399EA27391}"/>
               </a:ext>
             </a:extLst>
           </p:cNvPr>
@@ -19087,7 +19087,7 @@
           <p:cNvPr id="26" name="">
             <a:extLst xmlns:a="http://schemas.openxmlformats.org/drawingml/2006/main">
               <a:ext uri="{FF2B5EF4-FFF2-40B4-BE49-F238E27FC236}">
-                <a16:creationId xmlns:a16="http://schemas.microsoft.com/office/drawing/2014/main" id="{970196B7-B342-4841-818A-FF5217EA3685}"/>
+                <a16:creationId xmlns:a16="http://schemas.microsoft.com/office/drawing/2014/main" id="{0C1C1797-377D-4DD8-A600-D7CF77581DF8}"/>
               </a:ext>
             </a:extLst>
           </p:cNvPr>
@@ -19149,7 +19149,7 @@
           <p:cNvPr id="27" name="">
             <a:extLst xmlns:a="http://schemas.openxmlformats.org/drawingml/2006/main">
               <a:ext uri="{FF2B5EF4-FFF2-40B4-BE49-F238E27FC236}">
-                <a16:creationId xmlns:a16="http://schemas.microsoft.com/office/drawing/2014/main" id="{8CA459B1-7A5F-46A1-A9FA-1ABA6E33E82B}"/>
+                <a16:creationId xmlns:a16="http://schemas.microsoft.com/office/drawing/2014/main" id="{5D252F7B-EE6A-4E62-AB04-4E77F53EA5BA}"/>
               </a:ext>
             </a:extLst>
           </p:cNvPr>
@@ -19184,7 +19184,7 @@
           <p:cNvPr id="28" name="">
             <a:extLst xmlns:a="http://schemas.openxmlformats.org/drawingml/2006/main">
               <a:ext uri="{FF2B5EF4-FFF2-40B4-BE49-F238E27FC236}">
-                <a16:creationId xmlns:a16="http://schemas.microsoft.com/office/drawing/2014/main" id="{267C3004-A08E-4370-A8FA-694B2E99EC22}"/>
+                <a16:creationId xmlns:a16="http://schemas.microsoft.com/office/drawing/2014/main" id="{2E12F35E-254C-493B-B1DA-015F920FFABB}"/>
               </a:ext>
             </a:extLst>
           </p:cNvPr>
@@ -19246,7 +19246,7 @@
           <p:cNvPr id="29" name="">
             <a:extLst xmlns:a="http://schemas.openxmlformats.org/drawingml/2006/main">
               <a:ext uri="{FF2B5EF4-FFF2-40B4-BE49-F238E27FC236}">
-                <a16:creationId xmlns:a16="http://schemas.microsoft.com/office/drawing/2014/main" id="{A3A786B3-CA55-4629-BB07-8F627A9FAE56}"/>
+                <a16:creationId xmlns:a16="http://schemas.microsoft.com/office/drawing/2014/main" id="{F4EBCBA2-F5DB-4B66-975A-DD8A0F3DD153}"/>
               </a:ext>
             </a:extLst>
           </p:cNvPr>
@@ -19308,7 +19308,7 @@
           <p:cNvPr id="30" name="">
             <a:extLst xmlns:a="http://schemas.openxmlformats.org/drawingml/2006/main">
               <a:ext uri="{FF2B5EF4-FFF2-40B4-BE49-F238E27FC236}">
-                <a16:creationId xmlns:a16="http://schemas.microsoft.com/office/drawing/2014/main" id="{C4DC605E-FD5B-401F-96D8-CA8036C55566}"/>
+                <a16:creationId xmlns:a16="http://schemas.microsoft.com/office/drawing/2014/main" id="{FAE8BFA9-29F4-4E5B-8487-70D8DC0A8A12}"/>
               </a:ext>
             </a:extLst>
           </p:cNvPr>
@@ -19343,7 +19343,7 @@
           <p:cNvPr id="31" name="">
             <a:extLst xmlns:a="http://schemas.openxmlformats.org/drawingml/2006/main">
               <a:ext uri="{FF2B5EF4-FFF2-40B4-BE49-F238E27FC236}">
-                <a16:creationId xmlns:a16="http://schemas.microsoft.com/office/drawing/2014/main" id="{AD5B1432-6437-4B89-86DD-73CB505330CB}"/>
+                <a16:creationId xmlns:a16="http://schemas.microsoft.com/office/drawing/2014/main" id="{0A16C4CB-9B3F-4462-8E27-4C698D5CD191}"/>
               </a:ext>
             </a:extLst>
           </p:cNvPr>
@@ -19405,7 +19405,7 @@
           <p:cNvPr id="32" name="">
             <a:extLst xmlns:a="http://schemas.openxmlformats.org/drawingml/2006/main">
               <a:ext uri="{FF2B5EF4-FFF2-40B4-BE49-F238E27FC236}">
-                <a16:creationId xmlns:a16="http://schemas.microsoft.com/office/drawing/2014/main" id="{D39FB32D-09F3-475B-ACA0-7748826D22EE}"/>
+                <a16:creationId xmlns:a16="http://schemas.microsoft.com/office/drawing/2014/main" id="{A79F8474-8D00-4113-8370-06D2DA6E6959}"/>
               </a:ext>
             </a:extLst>
           </p:cNvPr>
@@ -19467,7 +19467,7 @@
           <p:cNvPr id="33" name="">
             <a:extLst xmlns:a="http://schemas.openxmlformats.org/drawingml/2006/main">
               <a:ext uri="{FF2B5EF4-FFF2-40B4-BE49-F238E27FC236}">
-                <a16:creationId xmlns:a16="http://schemas.microsoft.com/office/drawing/2014/main" id="{FD83991C-ADAA-4350-8B24-61EDF1A25804}"/>
+                <a16:creationId xmlns:a16="http://schemas.microsoft.com/office/drawing/2014/main" id="{394D9FCD-6ABC-4451-AD46-782761BDD749}"/>
               </a:ext>
             </a:extLst>
           </p:cNvPr>
@@ -19502,7 +19502,7 @@
           <p:cNvPr id="34" name="">
             <a:extLst xmlns:a="http://schemas.openxmlformats.org/drawingml/2006/main">
               <a:ext uri="{FF2B5EF4-FFF2-40B4-BE49-F238E27FC236}">
-                <a16:creationId xmlns:a16="http://schemas.microsoft.com/office/drawing/2014/main" id="{7B29908E-D232-4552-B457-F38ABCAC298D}"/>
+                <a16:creationId xmlns:a16="http://schemas.microsoft.com/office/drawing/2014/main" id="{6C3CEE9A-2F0A-4872-8362-4377C89436CF}"/>
               </a:ext>
             </a:extLst>
           </p:cNvPr>
@@ -19564,7 +19564,7 @@
           <p:cNvPr id="35" name="">
             <a:extLst xmlns:a="http://schemas.openxmlformats.org/drawingml/2006/main">
               <a:ext uri="{FF2B5EF4-FFF2-40B4-BE49-F238E27FC236}">
-                <a16:creationId xmlns:a16="http://schemas.microsoft.com/office/drawing/2014/main" id="{40A59E1E-496F-4B16-B7BA-BF8BA3C2262D}"/>
+                <a16:creationId xmlns:a16="http://schemas.microsoft.com/office/drawing/2014/main" id="{168140ED-F9C7-422E-B202-C76985B5390B}"/>
               </a:ext>
             </a:extLst>
           </p:cNvPr>
@@ -19626,7 +19626,7 @@
           <p:cNvPr id="36" name="">
             <a:extLst xmlns:a="http://schemas.openxmlformats.org/drawingml/2006/main">
               <a:ext uri="{FF2B5EF4-FFF2-40B4-BE49-F238E27FC236}">
-                <a16:creationId xmlns:a16="http://schemas.microsoft.com/office/drawing/2014/main" id="{2F340011-1907-4612-A077-959E68B0685B}"/>
+                <a16:creationId xmlns:a16="http://schemas.microsoft.com/office/drawing/2014/main" id="{45026552-C76B-421A-9E1D-EA4A025CF3F5}"/>
               </a:ext>
             </a:extLst>
           </p:cNvPr>
@@ -19688,7 +19688,7 @@
           <p:cNvPr id="37" name="">
             <a:extLst xmlns:a="http://schemas.openxmlformats.org/drawingml/2006/main">
               <a:ext uri="{FF2B5EF4-FFF2-40B4-BE49-F238E27FC236}">
-                <a16:creationId xmlns:a16="http://schemas.microsoft.com/office/drawing/2014/main" id="{D477CAFB-B3DA-4CEF-90C4-B00B2E37A125}"/>
+                <a16:creationId xmlns:a16="http://schemas.microsoft.com/office/drawing/2014/main" id="{6B21E302-9F2E-4183-940F-63FAC4AA9BA2}"/>
               </a:ext>
             </a:extLst>
           </p:cNvPr>
@@ -19750,7 +19750,7 @@
           <p:cNvPr id="38" name="">
             <a:extLst xmlns:a="http://schemas.openxmlformats.org/drawingml/2006/main">
               <a:ext uri="{FF2B5EF4-FFF2-40B4-BE49-F238E27FC236}">
-                <a16:creationId xmlns:a16="http://schemas.microsoft.com/office/drawing/2014/main" id="{5546842E-F16A-4B80-A57E-4454B589C16F}"/>
+                <a16:creationId xmlns:a16="http://schemas.microsoft.com/office/drawing/2014/main" id="{37618261-D7AD-40E1-BFDE-726292538BC4}"/>
               </a:ext>
             </a:extLst>
           </p:cNvPr>
@@ -19783,7 +19783,7 @@
           <p:cNvPr id="39" name="">
             <a:extLst xmlns:a="http://schemas.openxmlformats.org/drawingml/2006/main">
               <a:ext uri="{FF2B5EF4-FFF2-40B4-BE49-F238E27FC236}">
-                <a16:creationId xmlns:a16="http://schemas.microsoft.com/office/drawing/2014/main" id="{7637B254-FE36-4BD2-9CF2-14CE776BDB56}"/>
+                <a16:creationId xmlns:a16="http://schemas.microsoft.com/office/drawing/2014/main" id="{BACC0E00-06F0-45B5-9AA5-E00A49CCA26E}"/>
               </a:ext>
             </a:extLst>
           </p:cNvPr>
@@ -19845,7 +19845,7 @@
           <p:cNvPr id="40" name="">
             <a:extLst xmlns:a="http://schemas.openxmlformats.org/drawingml/2006/main">
               <a:ext uri="{FF2B5EF4-FFF2-40B4-BE49-F238E27FC236}">
-                <a16:creationId xmlns:a16="http://schemas.microsoft.com/office/drawing/2014/main" id="{29C4C1FE-0812-48E3-9423-11A87313C0F9}"/>
+                <a16:creationId xmlns:a16="http://schemas.microsoft.com/office/drawing/2014/main" id="{2DFA28D5-40F1-4216-B3F2-32DC3A4252E7}"/>
               </a:ext>
             </a:extLst>
           </p:cNvPr>
@@ -19876,7 +19876,7 @@
           <p:cNvPr id="41" name="">
             <a:extLst xmlns:a="http://schemas.openxmlformats.org/drawingml/2006/main">
               <a:ext uri="{FF2B5EF4-FFF2-40B4-BE49-F238E27FC236}">
-                <a16:creationId xmlns:a16="http://schemas.microsoft.com/office/drawing/2014/main" id="{A9D2507F-BA79-40B9-8921-78F00EB81797}"/>
+                <a16:creationId xmlns:a16="http://schemas.microsoft.com/office/drawing/2014/main" id="{773E0DE9-92A7-4530-8848-4B46C8AE7808}"/>
               </a:ext>
             </a:extLst>
           </p:cNvPr>
@@ -19928,7 +19928,7 @@
                 <a:ea typeface="Arial"/>
                 <a:cs typeface="Arial"/>
               </a:rPr>
-              <a:t>r2z-16690ccbe328 · scn-c46e1d86c1</a:t>
+              <a:t>r2z-45c4ba076af9 · scn-e0f12f397e</a:t>
             </a:r>
           </a:p>
         </p:txBody>
@@ -19938,7 +19938,7 @@
           <p:cNvPr id="42" name="">
             <a:extLst xmlns:a="http://schemas.openxmlformats.org/drawingml/2006/main">
               <a:ext uri="{FF2B5EF4-FFF2-40B4-BE49-F238E27FC236}">
-                <a16:creationId xmlns:a16="http://schemas.microsoft.com/office/drawing/2014/main" id="{DD263662-0D60-4FD3-9207-22C49B115B77}"/>
+                <a16:creationId xmlns:a16="http://schemas.microsoft.com/office/drawing/2014/main" id="{CD218C0E-64C4-4375-8C8F-CF2A1237C0FE}"/>
               </a:ext>
             </a:extLst>
           </p:cNvPr>
@@ -19998,7 +19998,7 @@
     </p:spTree>
     <p:extLst>
       <p:ext uri="{BB962C8B-B14F-4D97-AF65-F5344CB8AC3E}">
-        <p14:creationId xmlns:p14="http://schemas.microsoft.com/office/powerpoint/2010/main" val="1675071926"/>
+        <p14:creationId xmlns:p14="http://schemas.microsoft.com/office/powerpoint/2010/main" val="2006243835"/>
       </p:ext>
     </p:extLst>
   </p:cSld>
@@ -20029,7 +20029,7 @@
           <p:cNvPr id="20" name="">
             <a:extLst xmlns:a="http://schemas.openxmlformats.org/drawingml/2006/main">
               <a:ext uri="{FF2B5EF4-FFF2-40B4-BE49-F238E27FC236}">
-                <a16:creationId xmlns:a16="http://schemas.microsoft.com/office/drawing/2014/main" id="{C6F66986-81D1-493D-B0C8-D29B0F0C020A}"/>
+                <a16:creationId xmlns:a16="http://schemas.microsoft.com/office/drawing/2014/main" id="{DDB7ED46-AD74-44A6-BE48-0436B4A34267}"/>
               </a:ext>
             </a:extLst>
           </p:cNvPr>
@@ -20091,7 +20091,7 @@
                 <a:latin typeface="Arial"/>
                 <a:ea typeface="Arial"/>
                 <a:cs typeface="Arial"/>
-                <a:hlinkClick xmlns:r="http://schemas.openxmlformats.org/officeDocument/2006/relationships" r:id="Ref21c7fca03f415e"/>
+                <a:hlinkClick xmlns:r="http://schemas.openxmlformats.org/officeDocument/2006/relationships" r:id="Re9a3c4ddbede4d0d"/>
               </a:rPr>
               <a:t>https://github.com/qjmre23/Route2Zero</a:t>
             </a:r>
@@ -20114,7 +20114,7 @@
                 <a:latin typeface="Arial"/>
                 <a:ea typeface="Arial"/>
                 <a:cs typeface="Arial"/>
-                <a:hlinkClick xmlns:r="http://schemas.openxmlformats.org/officeDocument/2006/relationships" r:id="Rf42113dc68964a83"/>
+                <a:hlinkClick xmlns:r="http://schemas.openxmlformats.org/officeDocument/2006/relationships" r:id="Rd15af28690d646e5"/>
               </a:rPr>
               <a:t>https://route2zero.netlify.app/</a:t>
             </a:r>
@@ -20126,7 +20126,7 @@
           <p:cNvPr id="2" name="">
             <a:extLst xmlns:a="http://schemas.openxmlformats.org/drawingml/2006/main">
               <a:ext uri="{FF2B5EF4-FFF2-40B4-BE49-F238E27FC236}">
-                <a16:creationId xmlns:a16="http://schemas.microsoft.com/office/drawing/2014/main" id="{F3B9BD24-7B62-4D51-868B-3E92C99B155C}"/>
+                <a16:creationId xmlns:a16="http://schemas.microsoft.com/office/drawing/2014/main" id="{5D91503E-49AA-411B-961C-C141E4073C5B}"/>
               </a:ext>
             </a:extLst>
           </p:cNvPr>
@@ -20188,7 +20188,7 @@
           <p:cNvPr id="3" name="">
             <a:extLst xmlns:a="http://schemas.openxmlformats.org/drawingml/2006/main">
               <a:ext uri="{FF2B5EF4-FFF2-40B4-BE49-F238E27FC236}">
-                <a16:creationId xmlns:a16="http://schemas.microsoft.com/office/drawing/2014/main" id="{905637BD-B794-4716-8837-D2B0225CB311}"/>
+                <a16:creationId xmlns:a16="http://schemas.microsoft.com/office/drawing/2014/main" id="{0BD4F6AB-8C0D-4A9B-AB68-C9BE4A4A0636}"/>
               </a:ext>
             </a:extLst>
           </p:cNvPr>
@@ -20250,7 +20250,7 @@
           <p:cNvPr id="4" name="">
             <a:extLst xmlns:a="http://schemas.openxmlformats.org/drawingml/2006/main">
               <a:ext uri="{FF2B5EF4-FFF2-40B4-BE49-F238E27FC236}">
-                <a16:creationId xmlns:a16="http://schemas.microsoft.com/office/drawing/2014/main" id="{8700A1A3-7983-4935-8876-CDD0AB9B8AAD}"/>
+                <a16:creationId xmlns:a16="http://schemas.microsoft.com/office/drawing/2014/main" id="{12E49189-058A-476B-AE91-07E47170BC3F}"/>
               </a:ext>
             </a:extLst>
           </p:cNvPr>
@@ -20312,7 +20312,7 @@
           <p:cNvPr id="5" name="">
             <a:extLst xmlns:a="http://schemas.openxmlformats.org/drawingml/2006/main">
               <a:ext uri="{FF2B5EF4-FFF2-40B4-BE49-F238E27FC236}">
-                <a16:creationId xmlns:a16="http://schemas.microsoft.com/office/drawing/2014/main" id="{04AB425E-EA7F-4F83-9AD4-11B505A74BE2}"/>
+                <a16:creationId xmlns:a16="http://schemas.microsoft.com/office/drawing/2014/main" id="{2C1C482B-C3FA-4CF7-B859-8C1DFCFAE665}"/>
               </a:ext>
             </a:extLst>
           </p:cNvPr>
@@ -20374,7 +20374,7 @@
           <p:cNvPr id="6" name="">
             <a:extLst xmlns:a="http://schemas.openxmlformats.org/drawingml/2006/main">
               <a:ext uri="{FF2B5EF4-FFF2-40B4-BE49-F238E27FC236}">
-                <a16:creationId xmlns:a16="http://schemas.microsoft.com/office/drawing/2014/main" id="{897A73E1-4324-4111-A5EA-FE193CAC071A}"/>
+                <a16:creationId xmlns:a16="http://schemas.microsoft.com/office/drawing/2014/main" id="{66991878-D929-4544-AD6B-38B9E86B7DCC}"/>
               </a:ext>
             </a:extLst>
           </p:cNvPr>
@@ -20436,7 +20436,7 @@
           <p:cNvPr id="7" name="">
             <a:extLst xmlns:a="http://schemas.openxmlformats.org/drawingml/2006/main">
               <a:ext uri="{FF2B5EF4-FFF2-40B4-BE49-F238E27FC236}">
-                <a16:creationId xmlns:a16="http://schemas.microsoft.com/office/drawing/2014/main" id="{87118BA1-12D8-4624-894C-8650935C8066}"/>
+                <a16:creationId xmlns:a16="http://schemas.microsoft.com/office/drawing/2014/main" id="{45F00233-869F-44AA-8B80-443E2A8F7985}"/>
               </a:ext>
             </a:extLst>
           </p:cNvPr>
@@ -20498,7 +20498,7 @@
           <p:cNvPr id="8" name="">
             <a:extLst xmlns:a="http://schemas.openxmlformats.org/drawingml/2006/main">
               <a:ext uri="{FF2B5EF4-FFF2-40B4-BE49-F238E27FC236}">
-                <a16:creationId xmlns:a16="http://schemas.microsoft.com/office/drawing/2014/main" id="{47190BD1-D9BD-4255-BB01-DFA4105E0A00}"/>
+                <a16:creationId xmlns:a16="http://schemas.microsoft.com/office/drawing/2014/main" id="{53BC1922-7B49-4400-A84F-46DB83D7861A}"/>
               </a:ext>
             </a:extLst>
           </p:cNvPr>
@@ -20529,7 +20529,7 @@
           <p:cNvPr id="9" name="">
             <a:extLst xmlns:a="http://schemas.openxmlformats.org/drawingml/2006/main">
               <a:ext uri="{FF2B5EF4-FFF2-40B4-BE49-F238E27FC236}">
-                <a16:creationId xmlns:a16="http://schemas.microsoft.com/office/drawing/2014/main" id="{61770CE0-18B1-49F9-BBDD-A602DB5CE2E6}"/>
+                <a16:creationId xmlns:a16="http://schemas.microsoft.com/office/drawing/2014/main" id="{FB225D26-EFF1-4FDF-B5E4-5F44A4A389CD}"/>
               </a:ext>
             </a:extLst>
           </p:cNvPr>
@@ -20562,7 +20562,7 @@
           <p:cNvPr id="10" name="">
             <a:extLst xmlns:a="http://schemas.openxmlformats.org/drawingml/2006/main">
               <a:ext uri="{FF2B5EF4-FFF2-40B4-BE49-F238E27FC236}">
-                <a16:creationId xmlns:a16="http://schemas.microsoft.com/office/drawing/2014/main" id="{63E2742B-0E14-4F50-BA41-087627506464}"/>
+                <a16:creationId xmlns:a16="http://schemas.microsoft.com/office/drawing/2014/main" id="{5BDD45BA-3A41-4988-B3FF-1ACC92224E5E}"/>
               </a:ext>
             </a:extLst>
           </p:cNvPr>
@@ -20624,7 +20624,7 @@
           <p:cNvPr id="11" name="">
             <a:extLst xmlns:a="http://schemas.openxmlformats.org/drawingml/2006/main">
               <a:ext uri="{FF2B5EF4-FFF2-40B4-BE49-F238E27FC236}">
-                <a16:creationId xmlns:a16="http://schemas.microsoft.com/office/drawing/2014/main" id="{801EFAC9-7BD8-41BA-8D2C-0A9B04B29068}"/>
+                <a16:creationId xmlns:a16="http://schemas.microsoft.com/office/drawing/2014/main" id="{F644CA14-4DF8-4F17-AD9C-05D17EB572A5}"/>
               </a:ext>
             </a:extLst>
           </p:cNvPr>
@@ -20686,7 +20686,7 @@
           <p:cNvPr id="12" name="">
             <a:extLst xmlns:a="http://schemas.openxmlformats.org/drawingml/2006/main">
               <a:ext uri="{FF2B5EF4-FFF2-40B4-BE49-F238E27FC236}">
-                <a16:creationId xmlns:a16="http://schemas.microsoft.com/office/drawing/2014/main" id="{88E32509-7333-4C98-9601-F834C2B07D06}"/>
+                <a16:creationId xmlns:a16="http://schemas.microsoft.com/office/drawing/2014/main" id="{339D793F-A9FE-4BB1-AA2F-A259C0630604}"/>
               </a:ext>
             </a:extLst>
           </p:cNvPr>
@@ -20748,7 +20748,7 @@
           <p:cNvPr id="13" name="">
             <a:extLst xmlns:a="http://schemas.openxmlformats.org/drawingml/2006/main">
               <a:ext uri="{FF2B5EF4-FFF2-40B4-BE49-F238E27FC236}">
-                <a16:creationId xmlns:a16="http://schemas.microsoft.com/office/drawing/2014/main" id="{162A3FFF-A11F-4DE4-870D-352CAE32549B}"/>
+                <a16:creationId xmlns:a16="http://schemas.microsoft.com/office/drawing/2014/main" id="{16844B3C-CB23-41BB-9D5B-E8AF7F3BFE53}"/>
               </a:ext>
             </a:extLst>
           </p:cNvPr>
@@ -20810,7 +20810,7 @@
           <p:cNvPr id="14" name="">
             <a:extLst xmlns:a="http://schemas.openxmlformats.org/drawingml/2006/main">
               <a:ext uri="{FF2B5EF4-FFF2-40B4-BE49-F238E27FC236}">
-                <a16:creationId xmlns:a16="http://schemas.microsoft.com/office/drawing/2014/main" id="{2CCC15D9-AA41-4435-AF41-5390119FB1D9}"/>
+                <a16:creationId xmlns:a16="http://schemas.microsoft.com/office/drawing/2014/main" id="{C625FA58-C29B-4B92-BD40-B543B159B8E4}"/>
               </a:ext>
             </a:extLst>
           </p:cNvPr>
@@ -20843,7 +20843,7 @@
           <p:cNvPr id="15" name="">
             <a:extLst xmlns:a="http://schemas.openxmlformats.org/drawingml/2006/main">
               <a:ext uri="{FF2B5EF4-FFF2-40B4-BE49-F238E27FC236}">
-                <a16:creationId xmlns:a16="http://schemas.microsoft.com/office/drawing/2014/main" id="{FCA3CBD2-C40C-4BC6-BE4C-4E578F5E8C35}"/>
+                <a16:creationId xmlns:a16="http://schemas.microsoft.com/office/drawing/2014/main" id="{D3B72BDE-3C02-4A31-9E34-6FEF8F5FDC32}"/>
               </a:ext>
             </a:extLst>
           </p:cNvPr>
@@ -20905,7 +20905,7 @@
           <p:cNvPr id="16" name="">
             <a:extLst xmlns:a="http://schemas.openxmlformats.org/drawingml/2006/main">
               <a:ext uri="{FF2B5EF4-FFF2-40B4-BE49-F238E27FC236}">
-                <a16:creationId xmlns:a16="http://schemas.microsoft.com/office/drawing/2014/main" id="{03FC09CB-1E96-49B7-A20C-B93C875F4B6D}"/>
+                <a16:creationId xmlns:a16="http://schemas.microsoft.com/office/drawing/2014/main" id="{A50176E5-6217-4C32-88FF-405F279BB42B}"/>
               </a:ext>
             </a:extLst>
           </p:cNvPr>
@@ -20967,7 +20967,7 @@
           <p:cNvPr id="17" name="">
             <a:extLst xmlns:a="http://schemas.openxmlformats.org/drawingml/2006/main">
               <a:ext uri="{FF2B5EF4-FFF2-40B4-BE49-F238E27FC236}">
-                <a16:creationId xmlns:a16="http://schemas.microsoft.com/office/drawing/2014/main" id="{88BDBAD2-C9D0-4A1E-88F0-6B0C7DA942C5}"/>
+                <a16:creationId xmlns:a16="http://schemas.microsoft.com/office/drawing/2014/main" id="{03B1F940-6D3F-4395-B4D0-D3335F076275}"/>
               </a:ext>
             </a:extLst>
           </p:cNvPr>
@@ -20998,7 +20998,7 @@
           <p:cNvPr id="18" name="">
             <a:extLst xmlns:a="http://schemas.openxmlformats.org/drawingml/2006/main">
               <a:ext uri="{FF2B5EF4-FFF2-40B4-BE49-F238E27FC236}">
-                <a16:creationId xmlns:a16="http://schemas.microsoft.com/office/drawing/2014/main" id="{228E2147-FD39-4C2E-8556-4FB5318BD959}"/>
+                <a16:creationId xmlns:a16="http://schemas.microsoft.com/office/drawing/2014/main" id="{1E2F9645-A985-4617-81BA-30A576D2C467}"/>
               </a:ext>
             </a:extLst>
           </p:cNvPr>
@@ -21050,7 +21050,7 @@
                 <a:ea typeface="Arial"/>
                 <a:cs typeface="Arial"/>
               </a:rPr>
-              <a:t>r2z-16690ccbe328 · scn-c46e1d86c1</a:t>
+              <a:t>r2z-45c4ba076af9 · scn-e0f12f397e</a:t>
             </a:r>
           </a:p>
         </p:txBody>
@@ -21060,7 +21060,7 @@
           <p:cNvPr id="19" name="">
             <a:extLst xmlns:a="http://schemas.openxmlformats.org/drawingml/2006/main">
               <a:ext uri="{FF2B5EF4-FFF2-40B4-BE49-F238E27FC236}">
-                <a16:creationId xmlns:a16="http://schemas.microsoft.com/office/drawing/2014/main" id="{8153A8FE-7F50-4728-B0D3-9D6563E0CD79}"/>
+                <a16:creationId xmlns:a16="http://schemas.microsoft.com/office/drawing/2014/main" id="{40CA4F05-B618-468F-A19A-A97BA55704DC}"/>
               </a:ext>
             </a:extLst>
           </p:cNvPr>
@@ -21120,7 +21120,7 @@
     </p:spTree>
     <p:extLst>
       <p:ext uri="{BB962C8B-B14F-4D97-AF65-F5344CB8AC3E}">
-        <p14:creationId xmlns:p14="http://schemas.microsoft.com/office/powerpoint/2010/main" val="228740194"/>
+        <p14:creationId xmlns:p14="http://schemas.microsoft.com/office/powerpoint/2010/main" val="1885759565"/>
       </p:ext>
     </p:extLst>
   </p:cSld>
@@ -21148,10 +21148,10 @@
       </p:grpSpPr>
       <p:sp>
         <p:nvSpPr>
-          <p:cNvPr id="17" name="">
-            <a:extLst xmlns:a="http://schemas.openxmlformats.org/drawingml/2006/main">
-              <a:ext uri="{FF2B5EF4-FFF2-40B4-BE49-F238E27FC236}">
-                <a16:creationId xmlns:a16="http://schemas.microsoft.com/office/drawing/2014/main" id="{F57E9CE4-080D-4585-9D72-12D2DF9A0E9C}"/>
+          <p:cNvPr id="18" name="">
+            <a:extLst xmlns:a="http://schemas.openxmlformats.org/drawingml/2006/main">
+              <a:ext uri="{FF2B5EF4-FFF2-40B4-BE49-F238E27FC236}">
+                <a16:creationId xmlns:a16="http://schemas.microsoft.com/office/drawing/2014/main" id="{42999BFA-EA12-49CD-807A-FE07AFF3065E}"/>
               </a:ext>
             </a:extLst>
           </p:cNvPr>
@@ -21213,7 +21213,7 @@
                 <a:latin typeface="Arial"/>
                 <a:ea typeface="Arial"/>
                 <a:cs typeface="Arial"/>
-                <a:hlinkClick xmlns:r="http://schemas.openxmlformats.org/officeDocument/2006/relationships" r:id="Re60909e9156c41ea"/>
+                <a:hlinkClick xmlns:r="http://schemas.openxmlformats.org/officeDocument/2006/relationships" r:id="Rac8c3608ea6c4aef"/>
               </a:rPr>
               <a:t>https://github.com/qjmre23/Route2Zero</a:t>
             </a:r>
@@ -21236,7 +21236,7 @@
                 <a:latin typeface="Arial"/>
                 <a:ea typeface="Arial"/>
                 <a:cs typeface="Arial"/>
-                <a:hlinkClick xmlns:r="http://schemas.openxmlformats.org/officeDocument/2006/relationships" r:id="R51b06dfbdc88422f"/>
+                <a:hlinkClick xmlns:r="http://schemas.openxmlformats.org/officeDocument/2006/relationships" r:id="R0f44adfc91244047"/>
               </a:rPr>
               <a:t>https://route2zero.netlify.app/</a:t>
             </a:r>
@@ -21248,7 +21248,7 @@
           <p:cNvPr id="2" name="">
             <a:extLst xmlns:a="http://schemas.openxmlformats.org/drawingml/2006/main">
               <a:ext uri="{FF2B5EF4-FFF2-40B4-BE49-F238E27FC236}">
-                <a16:creationId xmlns:a16="http://schemas.microsoft.com/office/drawing/2014/main" id="{744BBC82-CAC2-445D-B676-ED7018990F68}"/>
+                <a16:creationId xmlns:a16="http://schemas.microsoft.com/office/drawing/2014/main" id="{5D00F789-6955-4447-9101-7979A69F840B}"/>
               </a:ext>
             </a:extLst>
           </p:cNvPr>
@@ -21310,7 +21310,7 @@
           <p:cNvPr id="3" name="">
             <a:extLst xmlns:a="http://schemas.openxmlformats.org/drawingml/2006/main">
               <a:ext uri="{FF2B5EF4-FFF2-40B4-BE49-F238E27FC236}">
-                <a16:creationId xmlns:a16="http://schemas.microsoft.com/office/drawing/2014/main" id="{848F4A4A-E483-4AFC-BA3A-53A14098D13E}"/>
+                <a16:creationId xmlns:a16="http://schemas.microsoft.com/office/drawing/2014/main" id="{C2127918-767E-414C-A589-A97259089718}"/>
               </a:ext>
             </a:extLst>
           </p:cNvPr>
@@ -21372,7 +21372,7 @@
           <p:cNvPr id="4" name="">
             <a:extLst xmlns:a="http://schemas.openxmlformats.org/drawingml/2006/main">
               <a:ext uri="{FF2B5EF4-FFF2-40B4-BE49-F238E27FC236}">
-                <a16:creationId xmlns:a16="http://schemas.microsoft.com/office/drawing/2014/main" id="{645AEBE6-5353-45B2-912A-36B9B2B797F8}"/>
+                <a16:creationId xmlns:a16="http://schemas.microsoft.com/office/drawing/2014/main" id="{9FBABF82-DB63-4475-AD9B-BE2C1C6DD500}"/>
               </a:ext>
             </a:extLst>
           </p:cNvPr>
@@ -21434,7 +21434,7 @@
           <p:cNvPr id="5" name="">
             <a:extLst xmlns:a="http://schemas.openxmlformats.org/drawingml/2006/main">
               <a:ext uri="{FF2B5EF4-FFF2-40B4-BE49-F238E27FC236}">
-                <a16:creationId xmlns:a16="http://schemas.microsoft.com/office/drawing/2014/main" id="{CE5BBAB6-3475-40CB-8B3E-E554CA608186}"/>
+                <a16:creationId xmlns:a16="http://schemas.microsoft.com/office/drawing/2014/main" id="{B194C069-163B-4DF7-9805-3A9198A0725A}"/>
               </a:ext>
             </a:extLst>
           </p:cNvPr>
@@ -21496,7 +21496,7 @@
           <p:cNvPr id="6" name="">
             <a:extLst xmlns:a="http://schemas.openxmlformats.org/drawingml/2006/main">
               <a:ext uri="{FF2B5EF4-FFF2-40B4-BE49-F238E27FC236}">
-                <a16:creationId xmlns:a16="http://schemas.microsoft.com/office/drawing/2014/main" id="{2C0290C5-297E-481E-80A7-725B29D044CF}"/>
+                <a16:creationId xmlns:a16="http://schemas.microsoft.com/office/drawing/2014/main" id="{9CCB763A-C76E-4D37-BB20-54BC8089C30D}"/>
               </a:ext>
             </a:extLst>
           </p:cNvPr>
@@ -21558,7 +21558,7 @@
           <p:cNvPr id="7" name="">
             <a:extLst xmlns:a="http://schemas.openxmlformats.org/drawingml/2006/main">
               <a:ext uri="{FF2B5EF4-FFF2-40B4-BE49-F238E27FC236}">
-                <a16:creationId xmlns:a16="http://schemas.microsoft.com/office/drawing/2014/main" id="{547DC6B3-6292-41C7-AEAD-5D723FA7C6C5}"/>
+                <a16:creationId xmlns:a16="http://schemas.microsoft.com/office/drawing/2014/main" id="{6E924611-671D-4CBB-AF4B-1292ED805F7D}"/>
               </a:ext>
             </a:extLst>
           </p:cNvPr>
@@ -21683,7 +21683,7 @@
           <p:cNvPr id="8" name="">
             <a:extLst xmlns:a="http://schemas.openxmlformats.org/drawingml/2006/main">
               <a:ext uri="{FF2B5EF4-FFF2-40B4-BE49-F238E27FC236}">
-                <a16:creationId xmlns:a16="http://schemas.microsoft.com/office/drawing/2014/main" id="{69E9872D-2BA4-49A8-97BB-41C90AF67B4A}"/>
+                <a16:creationId xmlns:a16="http://schemas.microsoft.com/office/drawing/2014/main" id="{39DF6533-24D3-49F9-A1EA-E1E5DF2C4181}"/>
               </a:ext>
             </a:extLst>
           </p:cNvPr>
@@ -21808,7 +21808,7 @@
           <p:cNvPr id="9" name="">
             <a:extLst xmlns:a="http://schemas.openxmlformats.org/drawingml/2006/main">
               <a:ext uri="{FF2B5EF4-FFF2-40B4-BE49-F238E27FC236}">
-                <a16:creationId xmlns:a16="http://schemas.microsoft.com/office/drawing/2014/main" id="{F3072853-AB9B-4F1B-8644-1098025717FD}"/>
+                <a16:creationId xmlns:a16="http://schemas.microsoft.com/office/drawing/2014/main" id="{8ED07054-4D26-4FAF-8FB0-729F11366B3E}"/>
               </a:ext>
             </a:extLst>
           </p:cNvPr>
@@ -21933,7 +21933,7 @@
           <p:cNvPr id="10" name="">
             <a:extLst xmlns:a="http://schemas.openxmlformats.org/drawingml/2006/main">
               <a:ext uri="{FF2B5EF4-FFF2-40B4-BE49-F238E27FC236}">
-                <a16:creationId xmlns:a16="http://schemas.microsoft.com/office/drawing/2014/main" id="{E5456C7A-472B-4D9F-BFC3-16F4D2BFEF0A}"/>
+                <a16:creationId xmlns:a16="http://schemas.microsoft.com/office/drawing/2014/main" id="{C0807DE1-E6D7-4B78-A6D8-01557300397A}"/>
               </a:ext>
             </a:extLst>
           </p:cNvPr>
@@ -21964,7 +21964,7 @@
           <p:cNvPr id="11" name="">
             <a:extLst xmlns:a="http://schemas.openxmlformats.org/drawingml/2006/main">
               <a:ext uri="{FF2B5EF4-FFF2-40B4-BE49-F238E27FC236}">
-                <a16:creationId xmlns:a16="http://schemas.microsoft.com/office/drawing/2014/main" id="{DD8AFC49-7270-4EDA-A8E4-7EA9307FD794}"/>
+                <a16:creationId xmlns:a16="http://schemas.microsoft.com/office/drawing/2014/main" id="{78BAFA4A-18C7-462E-AA46-8CE447013280}"/>
               </a:ext>
             </a:extLst>
           </p:cNvPr>
@@ -22026,18 +22026,18 @@
           <p:cNvPr id="12" name="">
             <a:extLst xmlns:a="http://schemas.openxmlformats.org/drawingml/2006/main">
               <a:ext uri="{FF2B5EF4-FFF2-40B4-BE49-F238E27FC236}">
-                <a16:creationId xmlns:a16="http://schemas.microsoft.com/office/drawing/2014/main" id="{5F29F909-4F07-4A73-81D2-BA8573ACB84D}"/>
-              </a:ext>
-            </a:extLst>
-          </p:cNvPr>
-          <p:cNvSpPr>
-            <a:spLocks xmlns:a="http://schemas.openxmlformats.org/drawingml/2006/main" noGrp="1"/>
-          </p:cNvSpPr>
-          <p:nvPr/>
-        </p:nvSpPr>
-        <p:spPr>
-          <a:xfrm xmlns:a="http://schemas.openxmlformats.org/drawingml/2006/main">
-            <a:off x="685800" y="5905500"/>
+                <a16:creationId xmlns:a16="http://schemas.microsoft.com/office/drawing/2014/main" id="{DCF52A72-F6A3-426F-85B0-98798E57DF20}"/>
+              </a:ext>
+            </a:extLst>
+          </p:cNvPr>
+          <p:cNvSpPr>
+            <a:spLocks xmlns:a="http://schemas.openxmlformats.org/drawingml/2006/main" noGrp="1"/>
+          </p:cNvSpPr>
+          <p:nvPr/>
+        </p:nvSpPr>
+        <p:spPr>
+          <a:xfrm xmlns:a="http://schemas.openxmlformats.org/drawingml/2006/main">
+            <a:off x="685800" y="5791200"/>
             <a:ext cx="10382250" cy="247650"/>
           </a:xfrm>
           <a:prstGeom xmlns:a="http://schemas.openxmlformats.org/drawingml/2006/main" prst="rect">
@@ -22088,19 +22088,19 @@
           <p:cNvPr id="13" name="">
             <a:extLst xmlns:a="http://schemas.openxmlformats.org/drawingml/2006/main">
               <a:ext uri="{FF2B5EF4-FFF2-40B4-BE49-F238E27FC236}">
-                <a16:creationId xmlns:a16="http://schemas.microsoft.com/office/drawing/2014/main" id="{BA1896AD-0807-4F12-9B5F-B253CFA0D2A8}"/>
-              </a:ext>
-            </a:extLst>
-          </p:cNvPr>
-          <p:cNvSpPr>
-            <a:spLocks xmlns:a="http://schemas.openxmlformats.org/drawingml/2006/main" noGrp="1"/>
-          </p:cNvSpPr>
-          <p:nvPr/>
-        </p:nvSpPr>
-        <p:spPr>
-          <a:xfrm xmlns:a="http://schemas.openxmlformats.org/drawingml/2006/main">
-            <a:off x="685800" y="6200775"/>
-            <a:ext cx="10382250" cy="171450"/>
+                <a16:creationId xmlns:a16="http://schemas.microsoft.com/office/drawing/2014/main" id="{0B412D00-9DAE-431D-9EDD-5EF8B154A218}"/>
+              </a:ext>
+            </a:extLst>
+          </p:cNvPr>
+          <p:cNvSpPr>
+            <a:spLocks xmlns:a="http://schemas.openxmlformats.org/drawingml/2006/main" noGrp="1"/>
+          </p:cNvSpPr>
+          <p:nvPr/>
+        </p:nvSpPr>
+        <p:spPr>
+          <a:xfrm xmlns:a="http://schemas.openxmlformats.org/drawingml/2006/main">
+            <a:off x="685800" y="6086475"/>
+            <a:ext cx="10382250" cy="142875"/>
           </a:xfrm>
           <a:prstGeom xmlns:a="http://schemas.openxmlformats.org/drawingml/2006/main" prst="rect">
             <a:avLst/>
@@ -22122,7 +22122,7 @@
                 <a:spcPct val="100000"/>
               </a:lnSpc>
               <a:buNone/>
-              <a:defRPr sz="713" b="0" i="0">
+              <a:defRPr sz="660" b="0" i="0">
                 <a:solidFill>
                   <a:srgbClr val="9FB4CE"/>
                 </a:solidFill>
@@ -22132,7 +22132,7 @@
               </a:defRPr>
             </a:pPr>
             <a:r>
-              <a:rPr sz="713" b="0" i="0">
+              <a:rPr sz="660" b="0" i="0">
                 <a:solidFill>
                   <a:srgbClr val="9FB4CE"/>
                 </a:solidFill>
@@ -22140,7 +22140,7 @@
                 <a:ea typeface="Arial"/>
                 <a:cs typeface="Arial"/>
               </a:rPr>
-              <a:t>Team Larpers · John Marwin Ebona · Prince Marl · Joaquin Sarmiento · Isaac Marcus · Andrei Dela Cruz · Russel Mendez · Tj Moreno · JM Palaganas</a:t>
+              <a:t>Team Larpers · John Marwin Ebona · Isaac Marcus · Andrei Dela Cruz · Russel Mendez</a:t>
             </a:r>
           </a:p>
         </p:txBody>
@@ -22150,7 +22150,69 @@
           <p:cNvPr id="14" name="">
             <a:extLst xmlns:a="http://schemas.openxmlformats.org/drawingml/2006/main">
               <a:ext uri="{FF2B5EF4-FFF2-40B4-BE49-F238E27FC236}">
-                <a16:creationId xmlns:a16="http://schemas.microsoft.com/office/drawing/2014/main" id="{4A2C673C-8E57-4754-A803-2DA1B083D130}"/>
+                <a16:creationId xmlns:a16="http://schemas.microsoft.com/office/drawing/2014/main" id="{9330B815-9CB9-4327-BF96-ABE2FA6A7C20}"/>
+              </a:ext>
+            </a:extLst>
+          </p:cNvPr>
+          <p:cNvSpPr>
+            <a:spLocks xmlns:a="http://schemas.openxmlformats.org/drawingml/2006/main" noGrp="1"/>
+          </p:cNvSpPr>
+          <p:nvPr/>
+        </p:nvSpPr>
+        <p:spPr>
+          <a:xfrm xmlns:a="http://schemas.openxmlformats.org/drawingml/2006/main">
+            <a:off x="685800" y="6257925"/>
+            <a:ext cx="10382250" cy="142875"/>
+          </a:xfrm>
+          <a:prstGeom xmlns:a="http://schemas.openxmlformats.org/drawingml/2006/main" prst="rect">
+            <a:avLst/>
+          </a:prstGeom>
+          <a:noFill xmlns:a="http://schemas.openxmlformats.org/drawingml/2006/main"/>
+          <a:ln xmlns:a="http://schemas.openxmlformats.org/drawingml/2006/main" w="0">
+            <a:noFill/>
+            <a:prstDash val="solid"/>
+          </a:ln>
+        </p:spPr>
+        <p:txBody>
+          <a:bodyPr xmlns:a="http://schemas.openxmlformats.org/drawingml/2006/main" lIns="0" tIns="0" rIns="0" bIns="0" anchor="t">
+            <a:normAutofit fontScale="100000"/>
+          </a:bodyPr>
+          <a:lstStyle xmlns:a="http://schemas.openxmlformats.org/drawingml/2006/main"/>
+          <a:p xmlns:a="http://schemas.openxmlformats.org/drawingml/2006/main">
+            <a:pPr algn="ctr">
+              <a:lnSpc>
+                <a:spcPct val="100000"/>
+              </a:lnSpc>
+              <a:buNone/>
+              <a:defRPr sz="660" b="0" i="0">
+                <a:solidFill>
+                  <a:srgbClr val="9FB4CE"/>
+                </a:solidFill>
+                <a:latin typeface="Arial"/>
+                <a:ea typeface="Arial"/>
+                <a:cs typeface="Arial"/>
+              </a:defRPr>
+            </a:pPr>
+            <a:r>
+              <a:rPr sz="660" b="0" i="0">
+                <a:solidFill>
+                  <a:srgbClr val="9FB4CE"/>
+                </a:solidFill>
+                <a:latin typeface="Arial"/>
+                <a:ea typeface="Arial"/>
+                <a:cs typeface="Arial"/>
+              </a:rPr>
+              <a:t>TRISTIAN JAMES CABALAR · JOHN MICHAEL PALAGANAS · Carl Nueva · JOSEPH CLARENCE PARAYAOAN</a:t>
+            </a:r>
+          </a:p>
+        </p:txBody>
+      </p:sp>
+      <p:sp>
+        <p:nvSpPr>
+          <p:cNvPr id="15" name="">
+            <a:extLst xmlns:a="http://schemas.openxmlformats.org/drawingml/2006/main">
+              <a:ext uri="{FF2B5EF4-FFF2-40B4-BE49-F238E27FC236}">
+                <a16:creationId xmlns:a16="http://schemas.microsoft.com/office/drawing/2014/main" id="{B666A779-627F-4398-AEFB-669506508161}"/>
               </a:ext>
             </a:extLst>
           </p:cNvPr>
@@ -22178,10 +22240,10 @@
       </p:sp>
       <p:sp>
         <p:nvSpPr>
-          <p:cNvPr id="15" name="">
-            <a:extLst xmlns:a="http://schemas.openxmlformats.org/drawingml/2006/main">
-              <a:ext uri="{FF2B5EF4-FFF2-40B4-BE49-F238E27FC236}">
-                <a16:creationId xmlns:a16="http://schemas.microsoft.com/office/drawing/2014/main" id="{B4C588D2-D2DD-4CAA-A25D-5FD0CDA64446}"/>
+          <p:cNvPr id="16" name="">
+            <a:extLst xmlns:a="http://schemas.openxmlformats.org/drawingml/2006/main">
+              <a:ext uri="{FF2B5EF4-FFF2-40B4-BE49-F238E27FC236}">
+                <a16:creationId xmlns:a16="http://schemas.microsoft.com/office/drawing/2014/main" id="{B2D03E5A-56E7-4430-BDAD-D865E9951A69}"/>
               </a:ext>
             </a:extLst>
           </p:cNvPr>
@@ -22233,17 +22295,17 @@
                 <a:ea typeface="Arial"/>
                 <a:cs typeface="Arial"/>
               </a:rPr>
-              <a:t>r2z-16690ccbe328 · scn-c46e1d86c1</a:t>
-            </a:r>
-          </a:p>
-        </p:txBody>
-      </p:sp>
-      <p:sp>
-        <p:nvSpPr>
-          <p:cNvPr id="16" name="">
-            <a:extLst xmlns:a="http://schemas.openxmlformats.org/drawingml/2006/main">
-              <a:ext uri="{FF2B5EF4-FFF2-40B4-BE49-F238E27FC236}">
-                <a16:creationId xmlns:a16="http://schemas.microsoft.com/office/drawing/2014/main" id="{4CD4005F-828B-49D6-9070-145FE1EB98E5}"/>
+              <a:t>r2z-45c4ba076af9 · scn-e0f12f397e</a:t>
+            </a:r>
+          </a:p>
+        </p:txBody>
+      </p:sp>
+      <p:sp>
+        <p:nvSpPr>
+          <p:cNvPr id="17" name="">
+            <a:extLst xmlns:a="http://schemas.openxmlformats.org/drawingml/2006/main">
+              <a:ext uri="{FF2B5EF4-FFF2-40B4-BE49-F238E27FC236}">
+                <a16:creationId xmlns:a16="http://schemas.microsoft.com/office/drawing/2014/main" id="{F47EDD08-7B9C-49E9-ACAE-32B36E2B07AF}"/>
               </a:ext>
             </a:extLst>
           </p:cNvPr>
@@ -22303,7 +22365,7 @@
     </p:spTree>
     <p:extLst>
       <p:ext uri="{BB962C8B-B14F-4D97-AF65-F5344CB8AC3E}">
-        <p14:creationId xmlns:p14="http://schemas.microsoft.com/office/powerpoint/2010/main" val="1281332955"/>
+        <p14:creationId xmlns:p14="http://schemas.microsoft.com/office/powerpoint/2010/main" val="1207218785"/>
       </p:ext>
     </p:extLst>
   </p:cSld>
@@ -22334,7 +22396,7 @@
           <p:cNvPr id="29" name="">
             <a:extLst xmlns:a="http://schemas.openxmlformats.org/drawingml/2006/main">
               <a:ext uri="{FF2B5EF4-FFF2-40B4-BE49-F238E27FC236}">
-                <a16:creationId xmlns:a16="http://schemas.microsoft.com/office/drawing/2014/main" id="{9CEFA867-A620-4288-9846-1CEC4AA4BC6D}"/>
+                <a16:creationId xmlns:a16="http://schemas.microsoft.com/office/drawing/2014/main" id="{24A3B4B5-FABC-4B35-A35A-1C2DBC4584B9}"/>
               </a:ext>
             </a:extLst>
           </p:cNvPr>
@@ -22396,7 +22458,7 @@
                 <a:latin typeface="Arial"/>
                 <a:ea typeface="Arial"/>
                 <a:cs typeface="Arial"/>
-                <a:hlinkClick xmlns:r="http://schemas.openxmlformats.org/officeDocument/2006/relationships" r:id="Rf10870eef9c34a2b"/>
+                <a:hlinkClick xmlns:r="http://schemas.openxmlformats.org/officeDocument/2006/relationships" r:id="R9bd14b289ba746bd"/>
               </a:rPr>
               <a:t>https://github.com/qjmre23/Route2Zero</a:t>
             </a:r>
@@ -22419,7 +22481,7 @@
                 <a:latin typeface="Arial"/>
                 <a:ea typeface="Arial"/>
                 <a:cs typeface="Arial"/>
-                <a:hlinkClick xmlns:r="http://schemas.openxmlformats.org/officeDocument/2006/relationships" r:id="Rfd289d3c0cfe47ec"/>
+                <a:hlinkClick xmlns:r="http://schemas.openxmlformats.org/officeDocument/2006/relationships" r:id="R438e4cc55e67483d"/>
               </a:rPr>
               <a:t>https://route2zero.netlify.app/</a:t>
             </a:r>
@@ -22431,7 +22493,7 @@
           <p:cNvPr id="2" name="">
             <a:extLst xmlns:a="http://schemas.openxmlformats.org/drawingml/2006/main">
               <a:ext uri="{FF2B5EF4-FFF2-40B4-BE49-F238E27FC236}">
-                <a16:creationId xmlns:a16="http://schemas.microsoft.com/office/drawing/2014/main" id="{701CB5C7-2808-487F-B4CC-F0EBC11CD862}"/>
+                <a16:creationId xmlns:a16="http://schemas.microsoft.com/office/drawing/2014/main" id="{D507524F-7350-4187-B774-251CDBF4CFA6}"/>
               </a:ext>
             </a:extLst>
           </p:cNvPr>
@@ -22493,7 +22555,7 @@
           <p:cNvPr id="3" name="">
             <a:extLst xmlns:a="http://schemas.openxmlformats.org/drawingml/2006/main">
               <a:ext uri="{FF2B5EF4-FFF2-40B4-BE49-F238E27FC236}">
-                <a16:creationId xmlns:a16="http://schemas.microsoft.com/office/drawing/2014/main" id="{99B3F877-D343-46B6-B16A-B7D4C874FFBE}"/>
+                <a16:creationId xmlns:a16="http://schemas.microsoft.com/office/drawing/2014/main" id="{440F0C86-EEC8-4539-9864-226BFEF6AB5E}"/>
               </a:ext>
             </a:extLst>
           </p:cNvPr>
@@ -22555,7 +22617,7 @@
           <p:cNvPr id="4" name="">
             <a:extLst xmlns:a="http://schemas.openxmlformats.org/drawingml/2006/main">
               <a:ext uri="{FF2B5EF4-FFF2-40B4-BE49-F238E27FC236}">
-                <a16:creationId xmlns:a16="http://schemas.microsoft.com/office/drawing/2014/main" id="{55E552B8-91AD-40B5-A264-B1319D19D209}"/>
+                <a16:creationId xmlns:a16="http://schemas.microsoft.com/office/drawing/2014/main" id="{9B8CE0E0-6ED2-4C04-AF49-0B78785343FB}"/>
               </a:ext>
             </a:extLst>
           </p:cNvPr>
@@ -22617,7 +22679,7 @@
           <p:cNvPr id="5" name="">
             <a:extLst xmlns:a="http://schemas.openxmlformats.org/drawingml/2006/main">
               <a:ext uri="{FF2B5EF4-FFF2-40B4-BE49-F238E27FC236}">
-                <a16:creationId xmlns:a16="http://schemas.microsoft.com/office/drawing/2014/main" id="{4BAF819B-C7EE-42C5-8672-2A7606144AE4}"/>
+                <a16:creationId xmlns:a16="http://schemas.microsoft.com/office/drawing/2014/main" id="{1AEDEA3B-78F5-42FB-A216-BC88F782FA5F}"/>
               </a:ext>
             </a:extLst>
           </p:cNvPr>
@@ -22679,7 +22741,7 @@
           <p:cNvPr id="6" name="">
             <a:extLst xmlns:a="http://schemas.openxmlformats.org/drawingml/2006/main">
               <a:ext uri="{FF2B5EF4-FFF2-40B4-BE49-F238E27FC236}">
-                <a16:creationId xmlns:a16="http://schemas.microsoft.com/office/drawing/2014/main" id="{A5004D13-F5E4-4304-B20B-F6C5E9CC58FE}"/>
+                <a16:creationId xmlns:a16="http://schemas.microsoft.com/office/drawing/2014/main" id="{FA8CD061-723C-440C-B505-B627F98DDE3F}"/>
               </a:ext>
             </a:extLst>
           </p:cNvPr>
@@ -22710,7 +22772,7 @@
           <p:cNvPr id="7" name="">
             <a:extLst xmlns:a="http://schemas.openxmlformats.org/drawingml/2006/main">
               <a:ext uri="{FF2B5EF4-FFF2-40B4-BE49-F238E27FC236}">
-                <a16:creationId xmlns:a16="http://schemas.microsoft.com/office/drawing/2014/main" id="{A457EF7E-0317-46E0-9DC4-72E9CBA996FB}"/>
+                <a16:creationId xmlns:a16="http://schemas.microsoft.com/office/drawing/2014/main" id="{62010C63-FD71-432C-AF62-1FCD7C6C06CE}"/>
               </a:ext>
             </a:extLst>
           </p:cNvPr>
@@ -22772,7 +22834,7 @@
           <p:cNvPr id="8" name="">
             <a:extLst xmlns:a="http://schemas.openxmlformats.org/drawingml/2006/main">
               <a:ext uri="{FF2B5EF4-FFF2-40B4-BE49-F238E27FC236}">
-                <a16:creationId xmlns:a16="http://schemas.microsoft.com/office/drawing/2014/main" id="{DA0D3165-06C4-4EA8-B161-65394B79B08A}"/>
+                <a16:creationId xmlns:a16="http://schemas.microsoft.com/office/drawing/2014/main" id="{74A70659-C9A5-4F22-96BC-0738FD72F2B3}"/>
               </a:ext>
             </a:extLst>
           </p:cNvPr>
@@ -22834,7 +22896,7 @@
           <p:cNvPr id="9" name="">
             <a:extLst xmlns:a="http://schemas.openxmlformats.org/drawingml/2006/main">
               <a:ext uri="{FF2B5EF4-FFF2-40B4-BE49-F238E27FC236}">
-                <a16:creationId xmlns:a16="http://schemas.microsoft.com/office/drawing/2014/main" id="{1A7B418D-EA18-4B30-B36E-E0FD7C5074D6}"/>
+                <a16:creationId xmlns:a16="http://schemas.microsoft.com/office/drawing/2014/main" id="{8D89A6DD-2D7D-4F9D-BF63-054396443856}"/>
               </a:ext>
             </a:extLst>
           </p:cNvPr>
@@ -22865,7 +22927,7 @@
           <p:cNvPr id="10" name="">
             <a:extLst xmlns:a="http://schemas.openxmlformats.org/drawingml/2006/main">
               <a:ext uri="{FF2B5EF4-FFF2-40B4-BE49-F238E27FC236}">
-                <a16:creationId xmlns:a16="http://schemas.microsoft.com/office/drawing/2014/main" id="{9E3AF6A7-5DBD-4DAC-B1A9-35978FCBC1AA}"/>
+                <a16:creationId xmlns:a16="http://schemas.microsoft.com/office/drawing/2014/main" id="{894CF8B0-BDA4-4B22-B6F6-1587E1754D64}"/>
               </a:ext>
             </a:extLst>
           </p:cNvPr>
@@ -22927,7 +22989,7 @@
           <p:cNvPr id="11" name="">
             <a:extLst xmlns:a="http://schemas.openxmlformats.org/drawingml/2006/main">
               <a:ext uri="{FF2B5EF4-FFF2-40B4-BE49-F238E27FC236}">
-                <a16:creationId xmlns:a16="http://schemas.microsoft.com/office/drawing/2014/main" id="{1FD62B9C-7D5E-44BD-8984-25ED8D9CA131}"/>
+                <a16:creationId xmlns:a16="http://schemas.microsoft.com/office/drawing/2014/main" id="{5AF88900-1C4F-4AC1-BE45-61B90FF45755}"/>
               </a:ext>
             </a:extLst>
           </p:cNvPr>
@@ -22989,7 +23051,7 @@
           <p:cNvPr id="12" name="">
             <a:extLst xmlns:a="http://schemas.openxmlformats.org/drawingml/2006/main">
               <a:ext uri="{FF2B5EF4-FFF2-40B4-BE49-F238E27FC236}">
-                <a16:creationId xmlns:a16="http://schemas.microsoft.com/office/drawing/2014/main" id="{3D791F07-6CC7-4DD1-85C4-E79119A670A8}"/>
+                <a16:creationId xmlns:a16="http://schemas.microsoft.com/office/drawing/2014/main" id="{71E8795A-4083-4DAE-9F73-8A4C182F56FE}"/>
               </a:ext>
             </a:extLst>
           </p:cNvPr>
@@ -23020,7 +23082,7 @@
           <p:cNvPr id="13" name="">
             <a:extLst xmlns:a="http://schemas.openxmlformats.org/drawingml/2006/main">
               <a:ext uri="{FF2B5EF4-FFF2-40B4-BE49-F238E27FC236}">
-                <a16:creationId xmlns:a16="http://schemas.microsoft.com/office/drawing/2014/main" id="{3E9A6383-719C-4832-BA50-4ABC88767992}"/>
+                <a16:creationId xmlns:a16="http://schemas.microsoft.com/office/drawing/2014/main" id="{56C1EAB2-5C7F-44BC-BD6D-0BE3941340D5}"/>
               </a:ext>
             </a:extLst>
           </p:cNvPr>
@@ -23082,7 +23144,7 @@
           <p:cNvPr id="14" name="">
             <a:extLst xmlns:a="http://schemas.openxmlformats.org/drawingml/2006/main">
               <a:ext uri="{FF2B5EF4-FFF2-40B4-BE49-F238E27FC236}">
-                <a16:creationId xmlns:a16="http://schemas.microsoft.com/office/drawing/2014/main" id="{0B61F843-4BF1-456E-91F9-722E3D89C687}"/>
+                <a16:creationId xmlns:a16="http://schemas.microsoft.com/office/drawing/2014/main" id="{D08B747F-C8EF-467A-989C-DB377FDAF022}"/>
               </a:ext>
             </a:extLst>
           </p:cNvPr>
@@ -23144,7 +23206,7 @@
           <p:cNvPr id="15" name="">
             <a:extLst xmlns:a="http://schemas.openxmlformats.org/drawingml/2006/main">
               <a:ext uri="{FF2B5EF4-FFF2-40B4-BE49-F238E27FC236}">
-                <a16:creationId xmlns:a16="http://schemas.microsoft.com/office/drawing/2014/main" id="{02340FB7-D347-4109-A823-A960058B5A5B}"/>
+                <a16:creationId xmlns:a16="http://schemas.microsoft.com/office/drawing/2014/main" id="{FA800B4C-641A-4D34-ABC4-571C1867998D}"/>
               </a:ext>
             </a:extLst>
           </p:cNvPr>
@@ -23175,7 +23237,7 @@
           <p:cNvPr id="16" name="">
             <a:extLst xmlns:a="http://schemas.openxmlformats.org/drawingml/2006/main">
               <a:ext uri="{FF2B5EF4-FFF2-40B4-BE49-F238E27FC236}">
-                <a16:creationId xmlns:a16="http://schemas.microsoft.com/office/drawing/2014/main" id="{A307386B-8F14-4B84-B059-AFB91A43100C}"/>
+                <a16:creationId xmlns:a16="http://schemas.microsoft.com/office/drawing/2014/main" id="{E67D256F-632F-45E9-ACDA-2563A204A420}"/>
               </a:ext>
             </a:extLst>
           </p:cNvPr>
@@ -23237,7 +23299,7 @@
           <p:cNvPr id="17" name="">
             <a:extLst xmlns:a="http://schemas.openxmlformats.org/drawingml/2006/main">
               <a:ext uri="{FF2B5EF4-FFF2-40B4-BE49-F238E27FC236}">
-                <a16:creationId xmlns:a16="http://schemas.microsoft.com/office/drawing/2014/main" id="{08A7D615-FCF5-4012-8C51-DE4CFAAC8AD4}"/>
+                <a16:creationId xmlns:a16="http://schemas.microsoft.com/office/drawing/2014/main" id="{B9EEA113-FD9C-4BDA-A072-1DDD18544430}"/>
               </a:ext>
             </a:extLst>
           </p:cNvPr>
@@ -23299,7 +23361,7 @@
           <p:cNvPr id="18" name="">
             <a:extLst xmlns:a="http://schemas.openxmlformats.org/drawingml/2006/main">
               <a:ext uri="{FF2B5EF4-FFF2-40B4-BE49-F238E27FC236}">
-                <a16:creationId xmlns:a16="http://schemas.microsoft.com/office/drawing/2014/main" id="{4BB863C3-639F-4E2C-B08D-DBB7241A5DB9}"/>
+                <a16:creationId xmlns:a16="http://schemas.microsoft.com/office/drawing/2014/main" id="{420367F8-2965-4BE4-AF5C-50634F3CEFF1}"/>
               </a:ext>
             </a:extLst>
           </p:cNvPr>
@@ -23330,7 +23392,7 @@
           <p:cNvPr id="19" name="">
             <a:extLst xmlns:a="http://schemas.openxmlformats.org/drawingml/2006/main">
               <a:ext uri="{FF2B5EF4-FFF2-40B4-BE49-F238E27FC236}">
-                <a16:creationId xmlns:a16="http://schemas.microsoft.com/office/drawing/2014/main" id="{8037ADAC-8FEE-4C53-9326-E55EC77F8329}"/>
+                <a16:creationId xmlns:a16="http://schemas.microsoft.com/office/drawing/2014/main" id="{87C0F425-B47E-4D44-99AE-DFA9CC1CA72B}"/>
               </a:ext>
             </a:extLst>
           </p:cNvPr>
@@ -23392,7 +23454,7 @@
           <p:cNvPr id="20" name="">
             <a:extLst xmlns:a="http://schemas.openxmlformats.org/drawingml/2006/main">
               <a:ext uri="{FF2B5EF4-FFF2-40B4-BE49-F238E27FC236}">
-                <a16:creationId xmlns:a16="http://schemas.microsoft.com/office/drawing/2014/main" id="{8A1CA6B0-D252-4FD3-B5C7-CBF8F9191A79}"/>
+                <a16:creationId xmlns:a16="http://schemas.microsoft.com/office/drawing/2014/main" id="{CD3B1FDC-04E1-43E3-B920-75AEB2793EC1}"/>
               </a:ext>
             </a:extLst>
           </p:cNvPr>
@@ -23454,7 +23516,7 @@
           <p:cNvPr id="21" name="">
             <a:extLst xmlns:a="http://schemas.openxmlformats.org/drawingml/2006/main">
               <a:ext uri="{FF2B5EF4-FFF2-40B4-BE49-F238E27FC236}">
-                <a16:creationId xmlns:a16="http://schemas.microsoft.com/office/drawing/2014/main" id="{45F44C49-708E-4CE7-A83E-65EB135E196D}"/>
+                <a16:creationId xmlns:a16="http://schemas.microsoft.com/office/drawing/2014/main" id="{9C018E0D-2EF5-4D47-AFCB-1687349CB21F}"/>
               </a:ext>
             </a:extLst>
           </p:cNvPr>
@@ -23485,7 +23547,7 @@
           <p:cNvPr id="22" name="">
             <a:extLst xmlns:a="http://schemas.openxmlformats.org/drawingml/2006/main">
               <a:ext uri="{FF2B5EF4-FFF2-40B4-BE49-F238E27FC236}">
-                <a16:creationId xmlns:a16="http://schemas.microsoft.com/office/drawing/2014/main" id="{514157B9-4A3B-4B1A-AEC8-4BF380BC520A}"/>
+                <a16:creationId xmlns:a16="http://schemas.microsoft.com/office/drawing/2014/main" id="{3CF2B1C4-8573-49AA-BACD-AC5970C6BDF3}"/>
               </a:ext>
             </a:extLst>
           </p:cNvPr>
@@ -23518,7 +23580,7 @@
           <p:cNvPr id="23" name="">
             <a:extLst xmlns:a="http://schemas.openxmlformats.org/drawingml/2006/main">
               <a:ext uri="{FF2B5EF4-FFF2-40B4-BE49-F238E27FC236}">
-                <a16:creationId xmlns:a16="http://schemas.microsoft.com/office/drawing/2014/main" id="{AF2689B2-DE98-4705-979D-1600D32F7EBC}"/>
+                <a16:creationId xmlns:a16="http://schemas.microsoft.com/office/drawing/2014/main" id="{EA381C7E-874D-4E44-8D87-97AEEF6211D0}"/>
               </a:ext>
             </a:extLst>
           </p:cNvPr>
@@ -23580,7 +23642,7 @@
           <p:cNvPr id="24" name="">
             <a:extLst xmlns:a="http://schemas.openxmlformats.org/drawingml/2006/main">
               <a:ext uri="{FF2B5EF4-FFF2-40B4-BE49-F238E27FC236}">
-                <a16:creationId xmlns:a16="http://schemas.microsoft.com/office/drawing/2014/main" id="{7AB1268A-9AAC-4088-8939-09FC2A357079}"/>
+                <a16:creationId xmlns:a16="http://schemas.microsoft.com/office/drawing/2014/main" id="{CB9F2F04-E3A3-4359-849F-638A63896B52}"/>
               </a:ext>
             </a:extLst>
           </p:cNvPr>
@@ -23705,7 +23767,7 @@
           <p:cNvPr id="25" name="">
             <a:extLst xmlns:a="http://schemas.openxmlformats.org/drawingml/2006/main">
               <a:ext uri="{FF2B5EF4-FFF2-40B4-BE49-F238E27FC236}">
-                <a16:creationId xmlns:a16="http://schemas.microsoft.com/office/drawing/2014/main" id="{C37CCFDC-1274-4B8F-BB73-AF1F18AE4E6F}"/>
+                <a16:creationId xmlns:a16="http://schemas.microsoft.com/office/drawing/2014/main" id="{23B21DFC-4234-40A4-A182-CA696B2F3CE8}"/>
               </a:ext>
             </a:extLst>
           </p:cNvPr>
@@ -23767,7 +23829,7 @@
           <p:cNvPr id="26" name="">
             <a:extLst xmlns:a="http://schemas.openxmlformats.org/drawingml/2006/main">
               <a:ext uri="{FF2B5EF4-FFF2-40B4-BE49-F238E27FC236}">
-                <a16:creationId xmlns:a16="http://schemas.microsoft.com/office/drawing/2014/main" id="{091FB140-DD63-436B-8010-266A6649D0A8}"/>
+                <a16:creationId xmlns:a16="http://schemas.microsoft.com/office/drawing/2014/main" id="{DC20CBAF-FE04-45B5-B73E-B076867C125D}"/>
               </a:ext>
             </a:extLst>
           </p:cNvPr>
@@ -23798,7 +23860,7 @@
           <p:cNvPr id="27" name="">
             <a:extLst xmlns:a="http://schemas.openxmlformats.org/drawingml/2006/main">
               <a:ext uri="{FF2B5EF4-FFF2-40B4-BE49-F238E27FC236}">
-                <a16:creationId xmlns:a16="http://schemas.microsoft.com/office/drawing/2014/main" id="{98934313-F1E4-4A78-91AA-21D6CF166ED5}"/>
+                <a16:creationId xmlns:a16="http://schemas.microsoft.com/office/drawing/2014/main" id="{61ACF8ED-5AD5-4FA3-9525-BE5D3BF1316F}"/>
               </a:ext>
             </a:extLst>
           </p:cNvPr>
@@ -23850,7 +23912,7 @@
                 <a:ea typeface="Arial"/>
                 <a:cs typeface="Arial"/>
               </a:rPr>
-              <a:t>r2z-16690ccbe328 · scn-c46e1d86c1</a:t>
+              <a:t>r2z-45c4ba076af9 · scn-e0f12f397e</a:t>
             </a:r>
           </a:p>
         </p:txBody>
@@ -23860,7 +23922,7 @@
           <p:cNvPr id="28" name="">
             <a:extLst xmlns:a="http://schemas.openxmlformats.org/drawingml/2006/main">
               <a:ext uri="{FF2B5EF4-FFF2-40B4-BE49-F238E27FC236}">
-                <a16:creationId xmlns:a16="http://schemas.microsoft.com/office/drawing/2014/main" id="{C76B5410-F151-47B0-A588-C4EB7DD4A022}"/>
+                <a16:creationId xmlns:a16="http://schemas.microsoft.com/office/drawing/2014/main" id="{8601C1D9-286D-40F5-9A66-4E7517E475DC}"/>
               </a:ext>
             </a:extLst>
           </p:cNvPr>
@@ -23920,7 +23982,7 @@
     </p:spTree>
     <p:extLst>
       <p:ext uri="{BB962C8B-B14F-4D97-AF65-F5344CB8AC3E}">
-        <p14:creationId xmlns:p14="http://schemas.microsoft.com/office/powerpoint/2010/main" val="966692094"/>
+        <p14:creationId xmlns:p14="http://schemas.microsoft.com/office/powerpoint/2010/main" val="411913040"/>
       </p:ext>
     </p:extLst>
   </p:cSld>
@@ -23951,7 +24013,7 @@
           <p:cNvPr id="17" name="">
             <a:extLst xmlns:a="http://schemas.openxmlformats.org/drawingml/2006/main">
               <a:ext uri="{FF2B5EF4-FFF2-40B4-BE49-F238E27FC236}">
-                <a16:creationId xmlns:a16="http://schemas.microsoft.com/office/drawing/2014/main" id="{FD12CB10-1D0B-4619-88E7-6CF360063277}"/>
+                <a16:creationId xmlns:a16="http://schemas.microsoft.com/office/drawing/2014/main" id="{1A11770A-C0BA-4FF6-9B83-EB3660687985}"/>
               </a:ext>
             </a:extLst>
           </p:cNvPr>
@@ -24013,7 +24075,7 @@
                 <a:latin typeface="Arial"/>
                 <a:ea typeface="Arial"/>
                 <a:cs typeface="Arial"/>
-                <a:hlinkClick xmlns:r="http://schemas.openxmlformats.org/officeDocument/2006/relationships" r:id="R6f1d3597060e499c"/>
+                <a:hlinkClick xmlns:r="http://schemas.openxmlformats.org/officeDocument/2006/relationships" r:id="R5d4dcab6b09a4f6a"/>
               </a:rPr>
               <a:t>https://github.com/qjmre23/Route2Zero</a:t>
             </a:r>
@@ -24036,7 +24098,7 @@
                 <a:latin typeface="Arial"/>
                 <a:ea typeface="Arial"/>
                 <a:cs typeface="Arial"/>
-                <a:hlinkClick xmlns:r="http://schemas.openxmlformats.org/officeDocument/2006/relationships" r:id="R6ee324dccc6243f4"/>
+                <a:hlinkClick xmlns:r="http://schemas.openxmlformats.org/officeDocument/2006/relationships" r:id="R656c224dc5cb4304"/>
               </a:rPr>
               <a:t>https://route2zero.netlify.app/</a:t>
             </a:r>
@@ -24048,7 +24110,7 @@
           <p:cNvPr id="2" name="">
             <a:extLst xmlns:a="http://schemas.openxmlformats.org/drawingml/2006/main">
               <a:ext uri="{FF2B5EF4-FFF2-40B4-BE49-F238E27FC236}">
-                <a16:creationId xmlns:a16="http://schemas.microsoft.com/office/drawing/2014/main" id="{C02C19C3-D507-40F9-BC2E-2C42ADD4B398}"/>
+                <a16:creationId xmlns:a16="http://schemas.microsoft.com/office/drawing/2014/main" id="{D9F37920-14D9-431A-B275-2290DF30E6C6}"/>
               </a:ext>
             </a:extLst>
           </p:cNvPr>
@@ -24110,7 +24172,7 @@
           <p:cNvPr id="3" name="">
             <a:extLst xmlns:a="http://schemas.openxmlformats.org/drawingml/2006/main">
               <a:ext uri="{FF2B5EF4-FFF2-40B4-BE49-F238E27FC236}">
-                <a16:creationId xmlns:a16="http://schemas.microsoft.com/office/drawing/2014/main" id="{1AD8AC91-3526-47D0-8F5C-9DFBBB29D7BF}"/>
+                <a16:creationId xmlns:a16="http://schemas.microsoft.com/office/drawing/2014/main" id="{5BA8A1CD-5A68-459A-B4A7-05F09832C421}"/>
               </a:ext>
             </a:extLst>
           </p:cNvPr>
@@ -24172,7 +24234,7 @@
           <p:cNvPr id="4" name="">
             <a:extLst xmlns:a="http://schemas.openxmlformats.org/drawingml/2006/main">
               <a:ext uri="{FF2B5EF4-FFF2-40B4-BE49-F238E27FC236}">
-                <a16:creationId xmlns:a16="http://schemas.microsoft.com/office/drawing/2014/main" id="{B7D62890-F193-4407-926B-5A62E978A7CC}"/>
+                <a16:creationId xmlns:a16="http://schemas.microsoft.com/office/drawing/2014/main" id="{072375B8-7B3C-468D-A0C3-D95038EB1BDF}"/>
               </a:ext>
             </a:extLst>
           </p:cNvPr>
@@ -24234,7 +24296,7 @@
           <p:cNvPr id="5" name="">
             <a:extLst xmlns:a="http://schemas.openxmlformats.org/drawingml/2006/main">
               <a:ext uri="{FF2B5EF4-FFF2-40B4-BE49-F238E27FC236}">
-                <a16:creationId xmlns:a16="http://schemas.microsoft.com/office/drawing/2014/main" id="{DB00C4A5-1984-461B-9448-DF3412BB0BE2}"/>
+                <a16:creationId xmlns:a16="http://schemas.microsoft.com/office/drawing/2014/main" id="{D3AEE785-167D-49A2-9DAD-E2F4A8989CD8}"/>
               </a:ext>
             </a:extLst>
           </p:cNvPr>
@@ -24265,7 +24327,7 @@
           <p:cNvPr id="6" name="">
             <a:extLst xmlns:a="http://schemas.openxmlformats.org/drawingml/2006/main">
               <a:ext uri="{FF2B5EF4-FFF2-40B4-BE49-F238E27FC236}">
-                <a16:creationId xmlns:a16="http://schemas.microsoft.com/office/drawing/2014/main" id="{A7A50CC7-3379-4DAF-AAAA-C524FCA4FCF9}"/>
+                <a16:creationId xmlns:a16="http://schemas.microsoft.com/office/drawing/2014/main" id="{409E0CAE-D365-48B0-A05A-42F9F2F0C622}"/>
               </a:ext>
             </a:extLst>
           </p:cNvPr>
@@ -24327,7 +24389,7 @@
           <p:cNvPr id="7" name="">
             <a:extLst xmlns:a="http://schemas.openxmlformats.org/drawingml/2006/main">
               <a:ext uri="{FF2B5EF4-FFF2-40B4-BE49-F238E27FC236}">
-                <a16:creationId xmlns:a16="http://schemas.microsoft.com/office/drawing/2014/main" id="{92483D18-4A97-4151-898E-09991A5852F7}"/>
+                <a16:creationId xmlns:a16="http://schemas.microsoft.com/office/drawing/2014/main" id="{296464C4-C688-4C3F-B9A5-AC0D68D1118C}"/>
               </a:ext>
             </a:extLst>
           </p:cNvPr>
@@ -24358,7 +24420,7 @@
           <p:cNvPr id="8" name="">
             <a:extLst xmlns:a="http://schemas.openxmlformats.org/drawingml/2006/main">
               <a:ext uri="{FF2B5EF4-FFF2-40B4-BE49-F238E27FC236}">
-                <a16:creationId xmlns:a16="http://schemas.microsoft.com/office/drawing/2014/main" id="{419A6DE2-F36C-4976-93E8-34A4A7174795}"/>
+                <a16:creationId xmlns:a16="http://schemas.microsoft.com/office/drawing/2014/main" id="{702C2968-BC42-4301-8AAC-E4D2F2FE6230}"/>
               </a:ext>
             </a:extLst>
           </p:cNvPr>
@@ -24420,7 +24482,7 @@
           <p:cNvPr id="9" name="">
             <a:extLst xmlns:a="http://schemas.openxmlformats.org/drawingml/2006/main">
               <a:ext uri="{FF2B5EF4-FFF2-40B4-BE49-F238E27FC236}">
-                <a16:creationId xmlns:a16="http://schemas.microsoft.com/office/drawing/2014/main" id="{93F01AFE-88AB-4254-94C7-52C385C4A295}"/>
+                <a16:creationId xmlns:a16="http://schemas.microsoft.com/office/drawing/2014/main" id="{9435F231-55F5-4DF9-887A-CFEE287EE99C}"/>
               </a:ext>
             </a:extLst>
           </p:cNvPr>
@@ -24451,7 +24513,7 @@
           <p:cNvPr id="10" name="">
             <a:extLst xmlns:a="http://schemas.openxmlformats.org/drawingml/2006/main">
               <a:ext uri="{FF2B5EF4-FFF2-40B4-BE49-F238E27FC236}">
-                <a16:creationId xmlns:a16="http://schemas.microsoft.com/office/drawing/2014/main" id="{F1290C8D-9847-41D2-9616-3584A814949A}"/>
+                <a16:creationId xmlns:a16="http://schemas.microsoft.com/office/drawing/2014/main" id="{B81130C6-9992-446B-848A-962A6EA5B599}"/>
               </a:ext>
             </a:extLst>
           </p:cNvPr>
@@ -24513,7 +24575,7 @@
           <p:cNvPr id="11" name="">
             <a:extLst xmlns:a="http://schemas.openxmlformats.org/drawingml/2006/main">
               <a:ext uri="{FF2B5EF4-FFF2-40B4-BE49-F238E27FC236}">
-                <a16:creationId xmlns:a16="http://schemas.microsoft.com/office/drawing/2014/main" id="{8967647B-F170-49F2-9688-DCB3C1540DA5}"/>
+                <a16:creationId xmlns:a16="http://schemas.microsoft.com/office/drawing/2014/main" id="{53432E16-FED7-4C73-8CE4-99ECD3DC61A6}"/>
               </a:ext>
             </a:extLst>
           </p:cNvPr>
@@ -24544,7 +24606,7 @@
           <p:cNvPr id="12" name="">
             <a:extLst xmlns:a="http://schemas.openxmlformats.org/drawingml/2006/main">
               <a:ext uri="{FF2B5EF4-FFF2-40B4-BE49-F238E27FC236}">
-                <a16:creationId xmlns:a16="http://schemas.microsoft.com/office/drawing/2014/main" id="{8F837FCB-557A-4113-8066-2C04A2E5EB9D}"/>
+                <a16:creationId xmlns:a16="http://schemas.microsoft.com/office/drawing/2014/main" id="{4A696A0A-CA16-4ADD-9E0A-A76D01297203}"/>
               </a:ext>
             </a:extLst>
           </p:cNvPr>
@@ -24606,7 +24668,7 @@
           <p:cNvPr id="13" name="">
             <a:extLst xmlns:a="http://schemas.openxmlformats.org/drawingml/2006/main">
               <a:ext uri="{FF2B5EF4-FFF2-40B4-BE49-F238E27FC236}">
-                <a16:creationId xmlns:a16="http://schemas.microsoft.com/office/drawing/2014/main" id="{E876AC96-D1A1-4636-8227-56E1322F9332}"/>
+                <a16:creationId xmlns:a16="http://schemas.microsoft.com/office/drawing/2014/main" id="{C9BB6C44-473B-4915-BAF4-1CC0D907EBE3}"/>
               </a:ext>
             </a:extLst>
           </p:cNvPr>
@@ -24668,7 +24730,7 @@
           <p:cNvPr id="14" name="">
             <a:extLst xmlns:a="http://schemas.openxmlformats.org/drawingml/2006/main">
               <a:ext uri="{FF2B5EF4-FFF2-40B4-BE49-F238E27FC236}">
-                <a16:creationId xmlns:a16="http://schemas.microsoft.com/office/drawing/2014/main" id="{BDA6D547-E39B-4255-BE37-3B4195D1ED56}"/>
+                <a16:creationId xmlns:a16="http://schemas.microsoft.com/office/drawing/2014/main" id="{0300830C-5B65-4FDF-9FD1-48C068D8A48B}"/>
               </a:ext>
             </a:extLst>
           </p:cNvPr>
@@ -24699,7 +24761,7 @@
           <p:cNvPr id="15" name="">
             <a:extLst xmlns:a="http://schemas.openxmlformats.org/drawingml/2006/main">
               <a:ext uri="{FF2B5EF4-FFF2-40B4-BE49-F238E27FC236}">
-                <a16:creationId xmlns:a16="http://schemas.microsoft.com/office/drawing/2014/main" id="{15691476-8B46-4F4F-94F4-BD1A3961CA60}"/>
+                <a16:creationId xmlns:a16="http://schemas.microsoft.com/office/drawing/2014/main" id="{70C7C212-BAC7-4EDC-AC8B-7B95E22D5931}"/>
               </a:ext>
             </a:extLst>
           </p:cNvPr>
@@ -24751,7 +24813,7 @@
                 <a:ea typeface="Arial"/>
                 <a:cs typeface="Arial"/>
               </a:rPr>
-              <a:t>r2z-16690ccbe328 · scn-c46e1d86c1</a:t>
+              <a:t>r2z-45c4ba076af9 · scn-e0f12f397e</a:t>
             </a:r>
           </a:p>
         </p:txBody>
@@ -24761,7 +24823,7 @@
           <p:cNvPr id="16" name="">
             <a:extLst xmlns:a="http://schemas.openxmlformats.org/drawingml/2006/main">
               <a:ext uri="{FF2B5EF4-FFF2-40B4-BE49-F238E27FC236}">
-                <a16:creationId xmlns:a16="http://schemas.microsoft.com/office/drawing/2014/main" id="{9EA76E56-2F10-4EF1-8700-9E561186FF27}"/>
+                <a16:creationId xmlns:a16="http://schemas.microsoft.com/office/drawing/2014/main" id="{E4E400A9-7C95-4678-B34D-1B4797F76C61}"/>
               </a:ext>
             </a:extLst>
           </p:cNvPr>
@@ -24821,7 +24883,7 @@
     </p:spTree>
     <p:extLst>
       <p:ext uri="{BB962C8B-B14F-4D97-AF65-F5344CB8AC3E}">
-        <p14:creationId xmlns:p14="http://schemas.microsoft.com/office/powerpoint/2010/main" val="137417080"/>
+        <p14:creationId xmlns:p14="http://schemas.microsoft.com/office/powerpoint/2010/main" val="372312829"/>
       </p:ext>
     </p:extLst>
   </p:cSld>
@@ -24852,7 +24914,7 @@
           <p:cNvPr id="28" name="">
             <a:extLst xmlns:a="http://schemas.openxmlformats.org/drawingml/2006/main">
               <a:ext uri="{FF2B5EF4-FFF2-40B4-BE49-F238E27FC236}">
-                <a16:creationId xmlns:a16="http://schemas.microsoft.com/office/drawing/2014/main" id="{5F140C8F-099F-42C0-AC32-286F9A5430A6}"/>
+                <a16:creationId xmlns:a16="http://schemas.microsoft.com/office/drawing/2014/main" id="{BD5193CC-96A8-49F6-9799-18220117F12E}"/>
               </a:ext>
             </a:extLst>
           </p:cNvPr>
@@ -24914,7 +24976,7 @@
                 <a:latin typeface="Arial"/>
                 <a:ea typeface="Arial"/>
                 <a:cs typeface="Arial"/>
-                <a:hlinkClick xmlns:r="http://schemas.openxmlformats.org/officeDocument/2006/relationships" r:id="Rd90959c72af04ff7"/>
+                <a:hlinkClick xmlns:r="http://schemas.openxmlformats.org/officeDocument/2006/relationships" r:id="R520c5c2d52984100"/>
               </a:rPr>
               <a:t>https://github.com/qjmre23/Route2Zero</a:t>
             </a:r>
@@ -24937,7 +24999,7 @@
                 <a:latin typeface="Arial"/>
                 <a:ea typeface="Arial"/>
                 <a:cs typeface="Arial"/>
-                <a:hlinkClick xmlns:r="http://schemas.openxmlformats.org/officeDocument/2006/relationships" r:id="Rda4d75b4ebf24f05"/>
+                <a:hlinkClick xmlns:r="http://schemas.openxmlformats.org/officeDocument/2006/relationships" r:id="Ra69f6859a52049d4"/>
               </a:rPr>
               <a:t>https://route2zero.netlify.app/</a:t>
             </a:r>
@@ -24949,7 +25011,7 @@
           <p:cNvPr id="2" name="">
             <a:extLst xmlns:a="http://schemas.openxmlformats.org/drawingml/2006/main">
               <a:ext uri="{FF2B5EF4-FFF2-40B4-BE49-F238E27FC236}">
-                <a16:creationId xmlns:a16="http://schemas.microsoft.com/office/drawing/2014/main" id="{76412D61-B4CA-4977-916C-EA0311B10EB3}"/>
+                <a16:creationId xmlns:a16="http://schemas.microsoft.com/office/drawing/2014/main" id="{5AC56F35-AFA4-4FDE-BFD5-41C45A06E856}"/>
               </a:ext>
             </a:extLst>
           </p:cNvPr>
@@ -25011,7 +25073,7 @@
           <p:cNvPr id="3" name="">
             <a:extLst xmlns:a="http://schemas.openxmlformats.org/drawingml/2006/main">
               <a:ext uri="{FF2B5EF4-FFF2-40B4-BE49-F238E27FC236}">
-                <a16:creationId xmlns:a16="http://schemas.microsoft.com/office/drawing/2014/main" id="{F181687E-867E-43E5-9CF8-38A90742FC3B}"/>
+                <a16:creationId xmlns:a16="http://schemas.microsoft.com/office/drawing/2014/main" id="{2CFF6513-D304-43B0-A969-F408DA4226EB}"/>
               </a:ext>
             </a:extLst>
           </p:cNvPr>
@@ -25073,7 +25135,7 @@
           <p:cNvPr id="4" name="">
             <a:extLst xmlns:a="http://schemas.openxmlformats.org/drawingml/2006/main">
               <a:ext uri="{FF2B5EF4-FFF2-40B4-BE49-F238E27FC236}">
-                <a16:creationId xmlns:a16="http://schemas.microsoft.com/office/drawing/2014/main" id="{6A9731E4-32A3-42EB-84AD-70312AFBCF0F}"/>
+                <a16:creationId xmlns:a16="http://schemas.microsoft.com/office/drawing/2014/main" id="{D7E7E9B3-43BE-4A9F-A7B1-9D054E838325}"/>
               </a:ext>
             </a:extLst>
           </p:cNvPr>
@@ -25106,7 +25168,7 @@
           <p:cNvPr id="5" name="">
             <a:extLst xmlns:a="http://schemas.openxmlformats.org/drawingml/2006/main">
               <a:ext uri="{FF2B5EF4-FFF2-40B4-BE49-F238E27FC236}">
-                <a16:creationId xmlns:a16="http://schemas.microsoft.com/office/drawing/2014/main" id="{3B183966-C427-4C02-9DF7-FCE57630A79E}"/>
+                <a16:creationId xmlns:a16="http://schemas.microsoft.com/office/drawing/2014/main" id="{EAE10767-53CD-4CE3-884D-61F31BE2C1BB}"/>
               </a:ext>
             </a:extLst>
           </p:cNvPr>
@@ -25195,7 +25257,7 @@
           <p:cNvPr id="6" name="">
             <a:extLst xmlns:a="http://schemas.openxmlformats.org/drawingml/2006/main">
               <a:ext uri="{FF2B5EF4-FFF2-40B4-BE49-F238E27FC236}">
-                <a16:creationId xmlns:a16="http://schemas.microsoft.com/office/drawing/2014/main" id="{54BE4CC7-D86F-447C-9199-3B6F916F86D1}"/>
+                <a16:creationId xmlns:a16="http://schemas.microsoft.com/office/drawing/2014/main" id="{91273E2C-EE97-47C6-AAEA-3833AD135F52}"/>
               </a:ext>
             </a:extLst>
           </p:cNvPr>
@@ -25226,7 +25288,7 @@
           <p:cNvPr id="7" name="">
             <a:extLst xmlns:a="http://schemas.openxmlformats.org/drawingml/2006/main">
               <a:ext uri="{FF2B5EF4-FFF2-40B4-BE49-F238E27FC236}">
-                <a16:creationId xmlns:a16="http://schemas.microsoft.com/office/drawing/2014/main" id="{40FBE0FD-172F-45E1-8702-749DE647A9C7}"/>
+                <a16:creationId xmlns:a16="http://schemas.microsoft.com/office/drawing/2014/main" id="{E714BB44-C238-488B-9620-191ED80DE992}"/>
               </a:ext>
             </a:extLst>
           </p:cNvPr>
@@ -25257,7 +25319,7 @@
           <p:cNvPr id="8" name="">
             <a:extLst xmlns:a="http://schemas.openxmlformats.org/drawingml/2006/main">
               <a:ext uri="{FF2B5EF4-FFF2-40B4-BE49-F238E27FC236}">
-                <a16:creationId xmlns:a16="http://schemas.microsoft.com/office/drawing/2014/main" id="{41F6CBC0-965F-4631-AA3A-EA2F21B45E12}"/>
+                <a16:creationId xmlns:a16="http://schemas.microsoft.com/office/drawing/2014/main" id="{3A00FD16-3133-40F6-B0AE-982D7CA6B3F8}"/>
               </a:ext>
             </a:extLst>
           </p:cNvPr>
@@ -25319,7 +25381,7 @@
           <p:cNvPr id="9" name="">
             <a:extLst xmlns:a="http://schemas.openxmlformats.org/drawingml/2006/main">
               <a:ext uri="{FF2B5EF4-FFF2-40B4-BE49-F238E27FC236}">
-                <a16:creationId xmlns:a16="http://schemas.microsoft.com/office/drawing/2014/main" id="{1DAD45D1-8F7D-41CA-8BDE-9AE924F14C50}"/>
+                <a16:creationId xmlns:a16="http://schemas.microsoft.com/office/drawing/2014/main" id="{5AFA627D-8F8F-4A5E-BE0A-74589AC93C05}"/>
               </a:ext>
             </a:extLst>
           </p:cNvPr>
@@ -25350,7 +25412,7 @@
           <p:cNvPr id="10" name="">
             <a:extLst xmlns:a="http://schemas.openxmlformats.org/drawingml/2006/main">
               <a:ext uri="{FF2B5EF4-FFF2-40B4-BE49-F238E27FC236}">
-                <a16:creationId xmlns:a16="http://schemas.microsoft.com/office/drawing/2014/main" id="{A217977F-F859-4AEA-8A20-1E5DACEBBB95}"/>
+                <a16:creationId xmlns:a16="http://schemas.microsoft.com/office/drawing/2014/main" id="{CE305189-D223-4140-8DBB-78C0B44AD335}"/>
               </a:ext>
             </a:extLst>
           </p:cNvPr>
@@ -25381,7 +25443,7 @@
           <p:cNvPr id="11" name="">
             <a:extLst xmlns:a="http://schemas.openxmlformats.org/drawingml/2006/main">
               <a:ext uri="{FF2B5EF4-FFF2-40B4-BE49-F238E27FC236}">
-                <a16:creationId xmlns:a16="http://schemas.microsoft.com/office/drawing/2014/main" id="{6320B915-2D43-4F4C-8751-A5D5D4DF0C00}"/>
+                <a16:creationId xmlns:a16="http://schemas.microsoft.com/office/drawing/2014/main" id="{FE7F73D5-0A05-44B7-A727-F224371917CF}"/>
               </a:ext>
             </a:extLst>
           </p:cNvPr>
@@ -25443,7 +25505,7 @@
           <p:cNvPr id="12" name="">
             <a:extLst xmlns:a="http://schemas.openxmlformats.org/drawingml/2006/main">
               <a:ext uri="{FF2B5EF4-FFF2-40B4-BE49-F238E27FC236}">
-                <a16:creationId xmlns:a16="http://schemas.microsoft.com/office/drawing/2014/main" id="{6F68D560-9D9B-460C-8D8B-10561E91104A}"/>
+                <a16:creationId xmlns:a16="http://schemas.microsoft.com/office/drawing/2014/main" id="{F2F8A421-3CDE-4ED1-B029-546C9BFC54E7}"/>
               </a:ext>
             </a:extLst>
           </p:cNvPr>
@@ -25474,7 +25536,7 @@
           <p:cNvPr id="13" name="">
             <a:extLst xmlns:a="http://schemas.openxmlformats.org/drawingml/2006/main">
               <a:ext uri="{FF2B5EF4-FFF2-40B4-BE49-F238E27FC236}">
-                <a16:creationId xmlns:a16="http://schemas.microsoft.com/office/drawing/2014/main" id="{761C87FD-94AA-4D19-84AE-8C6DD42CBFF5}"/>
+                <a16:creationId xmlns:a16="http://schemas.microsoft.com/office/drawing/2014/main" id="{CCED4ED8-FB0C-4BCA-B240-61510BDC7BD4}"/>
               </a:ext>
             </a:extLst>
           </p:cNvPr>
@@ -25505,7 +25567,7 @@
           <p:cNvPr id="14" name="">
             <a:extLst xmlns:a="http://schemas.openxmlformats.org/drawingml/2006/main">
               <a:ext uri="{FF2B5EF4-FFF2-40B4-BE49-F238E27FC236}">
-                <a16:creationId xmlns:a16="http://schemas.microsoft.com/office/drawing/2014/main" id="{E3921532-995F-4F1E-8B05-B4F3657D75BE}"/>
+                <a16:creationId xmlns:a16="http://schemas.microsoft.com/office/drawing/2014/main" id="{060A3DF7-D203-42F0-A59D-CCD495BDF560}"/>
               </a:ext>
             </a:extLst>
           </p:cNvPr>
@@ -25567,7 +25629,7 @@
           <p:cNvPr id="15" name="">
             <a:extLst xmlns:a="http://schemas.openxmlformats.org/drawingml/2006/main">
               <a:ext uri="{FF2B5EF4-FFF2-40B4-BE49-F238E27FC236}">
-                <a16:creationId xmlns:a16="http://schemas.microsoft.com/office/drawing/2014/main" id="{A212364C-AAF8-47A1-AD07-381D4174E8F7}"/>
+                <a16:creationId xmlns:a16="http://schemas.microsoft.com/office/drawing/2014/main" id="{8E0E00FE-9215-4E98-9347-97621267145E}"/>
               </a:ext>
             </a:extLst>
           </p:cNvPr>
@@ -25598,7 +25660,7 @@
           <p:cNvPr id="16" name="">
             <a:extLst xmlns:a="http://schemas.openxmlformats.org/drawingml/2006/main">
               <a:ext uri="{FF2B5EF4-FFF2-40B4-BE49-F238E27FC236}">
-                <a16:creationId xmlns:a16="http://schemas.microsoft.com/office/drawing/2014/main" id="{B1C0A665-FDEF-46B4-8B2A-4B47457A3ED9}"/>
+                <a16:creationId xmlns:a16="http://schemas.microsoft.com/office/drawing/2014/main" id="{05E9C105-B07E-419D-AFFA-A94EF87FCD68}"/>
               </a:ext>
             </a:extLst>
           </p:cNvPr>
@@ -25629,7 +25691,7 @@
           <p:cNvPr id="17" name="">
             <a:extLst xmlns:a="http://schemas.openxmlformats.org/drawingml/2006/main">
               <a:ext uri="{FF2B5EF4-FFF2-40B4-BE49-F238E27FC236}">
-                <a16:creationId xmlns:a16="http://schemas.microsoft.com/office/drawing/2014/main" id="{00462747-48C6-4EC9-86CE-591105E37B8D}"/>
+                <a16:creationId xmlns:a16="http://schemas.microsoft.com/office/drawing/2014/main" id="{908D8DB8-2359-4BFB-BBB3-124C1DE73504}"/>
               </a:ext>
             </a:extLst>
           </p:cNvPr>
@@ -25691,7 +25753,7 @@
           <p:cNvPr id="18" name="">
             <a:extLst xmlns:a="http://schemas.openxmlformats.org/drawingml/2006/main">
               <a:ext uri="{FF2B5EF4-FFF2-40B4-BE49-F238E27FC236}">
-                <a16:creationId xmlns:a16="http://schemas.microsoft.com/office/drawing/2014/main" id="{F1A55277-F77C-4856-9C3A-9A88DC45E767}"/>
+                <a16:creationId xmlns:a16="http://schemas.microsoft.com/office/drawing/2014/main" id="{D8A91F37-A197-4F69-ADA0-BCE2BE89436C}"/>
               </a:ext>
             </a:extLst>
           </p:cNvPr>
@@ -25722,7 +25784,7 @@
           <p:cNvPr id="19" name="">
             <a:extLst xmlns:a="http://schemas.openxmlformats.org/drawingml/2006/main">
               <a:ext uri="{FF2B5EF4-FFF2-40B4-BE49-F238E27FC236}">
-                <a16:creationId xmlns:a16="http://schemas.microsoft.com/office/drawing/2014/main" id="{5B64638A-FA16-41FD-A718-7F96FAA6A0AA}"/>
+                <a16:creationId xmlns:a16="http://schemas.microsoft.com/office/drawing/2014/main" id="{CB43032D-5FCD-43A2-B116-C4DAE5C215B8}"/>
               </a:ext>
             </a:extLst>
           </p:cNvPr>
@@ -25753,7 +25815,7 @@
           <p:cNvPr id="20" name="">
             <a:extLst xmlns:a="http://schemas.openxmlformats.org/drawingml/2006/main">
               <a:ext uri="{FF2B5EF4-FFF2-40B4-BE49-F238E27FC236}">
-                <a16:creationId xmlns:a16="http://schemas.microsoft.com/office/drawing/2014/main" id="{5AEB8AF1-74E3-4AD0-BB1F-EFA2E52CA9EE}"/>
+                <a16:creationId xmlns:a16="http://schemas.microsoft.com/office/drawing/2014/main" id="{57D5D6AA-69A2-45C4-A827-E9A726DBDA4F}"/>
               </a:ext>
             </a:extLst>
           </p:cNvPr>
@@ -25815,7 +25877,7 @@
           <p:cNvPr id="21" name="">
             <a:extLst xmlns:a="http://schemas.openxmlformats.org/drawingml/2006/main">
               <a:ext uri="{FF2B5EF4-FFF2-40B4-BE49-F238E27FC236}">
-                <a16:creationId xmlns:a16="http://schemas.microsoft.com/office/drawing/2014/main" id="{452F807E-3318-4AB6-8E0B-EC314071849B}"/>
+                <a16:creationId xmlns:a16="http://schemas.microsoft.com/office/drawing/2014/main" id="{2FD37917-E631-4873-B083-0D0B8A074818}"/>
               </a:ext>
             </a:extLst>
           </p:cNvPr>
@@ -25846,7 +25908,7 @@
           <p:cNvPr id="22" name="">
             <a:extLst xmlns:a="http://schemas.openxmlformats.org/drawingml/2006/main">
               <a:ext uri="{FF2B5EF4-FFF2-40B4-BE49-F238E27FC236}">
-                <a16:creationId xmlns:a16="http://schemas.microsoft.com/office/drawing/2014/main" id="{843C5F0D-F70C-42B4-8B8C-E24D8277F00C}"/>
+                <a16:creationId xmlns:a16="http://schemas.microsoft.com/office/drawing/2014/main" id="{F2BEA268-9843-4D13-94FE-E70986A8B659}"/>
               </a:ext>
             </a:extLst>
           </p:cNvPr>
@@ -25877,7 +25939,7 @@
           <p:cNvPr id="23" name="">
             <a:extLst xmlns:a="http://schemas.openxmlformats.org/drawingml/2006/main">
               <a:ext uri="{FF2B5EF4-FFF2-40B4-BE49-F238E27FC236}">
-                <a16:creationId xmlns:a16="http://schemas.microsoft.com/office/drawing/2014/main" id="{E1003BA7-588D-43C7-9086-7E407896BAED}"/>
+                <a16:creationId xmlns:a16="http://schemas.microsoft.com/office/drawing/2014/main" id="{94D86A6D-12DA-4E57-9A16-1CB653F7D65B}"/>
               </a:ext>
             </a:extLst>
           </p:cNvPr>
@@ -25939,7 +26001,7 @@
           <p:cNvPr id="24" name="">
             <a:extLst xmlns:a="http://schemas.openxmlformats.org/drawingml/2006/main">
               <a:ext uri="{FF2B5EF4-FFF2-40B4-BE49-F238E27FC236}">
-                <a16:creationId xmlns:a16="http://schemas.microsoft.com/office/drawing/2014/main" id="{D21090A3-E66D-46D0-AC12-EB33F157D95F}"/>
+                <a16:creationId xmlns:a16="http://schemas.microsoft.com/office/drawing/2014/main" id="{E496DFB0-14D1-4C45-AA91-12CB55CF2CC1}"/>
               </a:ext>
             </a:extLst>
           </p:cNvPr>
@@ -26001,7 +26063,7 @@
           <p:cNvPr id="25" name="">
             <a:extLst xmlns:a="http://schemas.openxmlformats.org/drawingml/2006/main">
               <a:ext uri="{FF2B5EF4-FFF2-40B4-BE49-F238E27FC236}">
-                <a16:creationId xmlns:a16="http://schemas.microsoft.com/office/drawing/2014/main" id="{4FEBA26E-69A1-49E7-B7FD-A598C197E4F5}"/>
+                <a16:creationId xmlns:a16="http://schemas.microsoft.com/office/drawing/2014/main" id="{34B2A7D6-18CF-4642-9D75-049BD8B06856}"/>
               </a:ext>
             </a:extLst>
           </p:cNvPr>
@@ -26032,7 +26094,7 @@
           <p:cNvPr id="26" name="">
             <a:extLst xmlns:a="http://schemas.openxmlformats.org/drawingml/2006/main">
               <a:ext uri="{FF2B5EF4-FFF2-40B4-BE49-F238E27FC236}">
-                <a16:creationId xmlns:a16="http://schemas.microsoft.com/office/drawing/2014/main" id="{7C2A6B12-75D3-4364-8DD1-CF7DE499910F}"/>
+                <a16:creationId xmlns:a16="http://schemas.microsoft.com/office/drawing/2014/main" id="{E69DAA6B-A8FF-4FAE-A7D6-C4B1921AEEA1}"/>
               </a:ext>
             </a:extLst>
           </p:cNvPr>
@@ -26084,7 +26146,7 @@
                 <a:ea typeface="Arial"/>
                 <a:cs typeface="Arial"/>
               </a:rPr>
-              <a:t>r2z-16690ccbe328 · scn-c46e1d86c1</a:t>
+              <a:t>r2z-45c4ba076af9 · scn-e0f12f397e</a:t>
             </a:r>
           </a:p>
         </p:txBody>
@@ -26094,7 +26156,7 @@
           <p:cNvPr id="27" name="">
             <a:extLst xmlns:a="http://schemas.openxmlformats.org/drawingml/2006/main">
               <a:ext uri="{FF2B5EF4-FFF2-40B4-BE49-F238E27FC236}">
-                <a16:creationId xmlns:a16="http://schemas.microsoft.com/office/drawing/2014/main" id="{46F35F81-718B-46D2-8D82-D7D2B4929604}"/>
+                <a16:creationId xmlns:a16="http://schemas.microsoft.com/office/drawing/2014/main" id="{AE5B5430-F9A6-4D48-87AA-AC899754AF98}"/>
               </a:ext>
             </a:extLst>
           </p:cNvPr>
@@ -26154,7 +26216,7 @@
     </p:spTree>
     <p:extLst>
       <p:ext uri="{BB962C8B-B14F-4D97-AF65-F5344CB8AC3E}">
-        <p14:creationId xmlns:p14="http://schemas.microsoft.com/office/powerpoint/2010/main" val="2130971804"/>
+        <p14:creationId xmlns:p14="http://schemas.microsoft.com/office/powerpoint/2010/main" val="1709453013"/>
       </p:ext>
     </p:extLst>
   </p:cSld>
@@ -26185,7 +26247,7 @@
           <p:cNvPr id="36" name="">
             <a:extLst xmlns:a="http://schemas.openxmlformats.org/drawingml/2006/main">
               <a:ext uri="{FF2B5EF4-FFF2-40B4-BE49-F238E27FC236}">
-                <a16:creationId xmlns:a16="http://schemas.microsoft.com/office/drawing/2014/main" id="{A87593F6-27BE-41AE-80C7-F16BE0B40462}"/>
+                <a16:creationId xmlns:a16="http://schemas.microsoft.com/office/drawing/2014/main" id="{72459F43-3685-41EB-A8C5-CB7E2B882EAD}"/>
               </a:ext>
             </a:extLst>
           </p:cNvPr>
@@ -26247,7 +26309,7 @@
                 <a:latin typeface="Arial"/>
                 <a:ea typeface="Arial"/>
                 <a:cs typeface="Arial"/>
-                <a:hlinkClick xmlns:r="http://schemas.openxmlformats.org/officeDocument/2006/relationships" r:id="Rde7c3cf1804b441f"/>
+                <a:hlinkClick xmlns:r="http://schemas.openxmlformats.org/officeDocument/2006/relationships" r:id="R5e9a560e6b0d40a2"/>
               </a:rPr>
               <a:t>https://github.com/qjmre23/Route2Zero</a:t>
             </a:r>
@@ -26270,7 +26332,7 @@
                 <a:latin typeface="Arial"/>
                 <a:ea typeface="Arial"/>
                 <a:cs typeface="Arial"/>
-                <a:hlinkClick xmlns:r="http://schemas.openxmlformats.org/officeDocument/2006/relationships" r:id="Rc16a8dd64c0b4db1"/>
+                <a:hlinkClick xmlns:r="http://schemas.openxmlformats.org/officeDocument/2006/relationships" r:id="R1f7cd0ec241f4318"/>
               </a:rPr>
               <a:t>https://route2zero.netlify.app/</a:t>
             </a:r>
@@ -26282,7 +26344,7 @@
           <p:cNvPr id="2" name="">
             <a:extLst xmlns:a="http://schemas.openxmlformats.org/drawingml/2006/main">
               <a:ext uri="{FF2B5EF4-FFF2-40B4-BE49-F238E27FC236}">
-                <a16:creationId xmlns:a16="http://schemas.microsoft.com/office/drawing/2014/main" id="{35A3118D-0EF9-4E38-9F9D-E32BF37487AD}"/>
+                <a16:creationId xmlns:a16="http://schemas.microsoft.com/office/drawing/2014/main" id="{DCF0223A-47AF-4902-A0EC-CE110E0B3540}"/>
               </a:ext>
             </a:extLst>
           </p:cNvPr>
@@ -26344,7 +26406,7 @@
           <p:cNvPr id="3" name="">
             <a:extLst xmlns:a="http://schemas.openxmlformats.org/drawingml/2006/main">
               <a:ext uri="{FF2B5EF4-FFF2-40B4-BE49-F238E27FC236}">
-                <a16:creationId xmlns:a16="http://schemas.microsoft.com/office/drawing/2014/main" id="{2FF217A1-E7BB-424F-A50F-8E035163A1BE}"/>
+                <a16:creationId xmlns:a16="http://schemas.microsoft.com/office/drawing/2014/main" id="{DE2AE43C-5E0E-433A-8D80-8DE3261D70EF}"/>
               </a:ext>
             </a:extLst>
           </p:cNvPr>
@@ -26406,7 +26468,7 @@
           <p:cNvPr id="4" name="">
             <a:extLst xmlns:a="http://schemas.openxmlformats.org/drawingml/2006/main">
               <a:ext uri="{FF2B5EF4-FFF2-40B4-BE49-F238E27FC236}">
-                <a16:creationId xmlns:a16="http://schemas.microsoft.com/office/drawing/2014/main" id="{F68AE40F-AC40-4FD3-ABD6-10786ED7F5A7}"/>
+                <a16:creationId xmlns:a16="http://schemas.microsoft.com/office/drawing/2014/main" id="{77260F58-FDFA-4110-9205-5834C5403D61}"/>
               </a:ext>
             </a:extLst>
           </p:cNvPr>
@@ -26468,7 +26530,7 @@
           <p:cNvPr id="5" name="">
             <a:extLst xmlns:a="http://schemas.openxmlformats.org/drawingml/2006/main">
               <a:ext uri="{FF2B5EF4-FFF2-40B4-BE49-F238E27FC236}">
-                <a16:creationId xmlns:a16="http://schemas.microsoft.com/office/drawing/2014/main" id="{EBFF5C87-BCE9-418C-96A1-51BBCD0B2DF7}"/>
+                <a16:creationId xmlns:a16="http://schemas.microsoft.com/office/drawing/2014/main" id="{824362DE-0D86-4369-ACF8-D64E15822768}"/>
               </a:ext>
             </a:extLst>
           </p:cNvPr>
@@ -26499,7 +26561,7 @@
           <p:cNvPr id="6" name="">
             <a:extLst xmlns:a="http://schemas.openxmlformats.org/drawingml/2006/main">
               <a:ext uri="{FF2B5EF4-FFF2-40B4-BE49-F238E27FC236}">
-                <a16:creationId xmlns:a16="http://schemas.microsoft.com/office/drawing/2014/main" id="{CD26A7DA-D38F-49AF-84EF-E8E402666B19}"/>
+                <a16:creationId xmlns:a16="http://schemas.microsoft.com/office/drawing/2014/main" id="{CAEC69A5-E012-4DC0-A8DE-E2085B93C60B}"/>
               </a:ext>
             </a:extLst>
           </p:cNvPr>
@@ -26561,7 +26623,7 @@
           <p:cNvPr id="7" name="">
             <a:extLst xmlns:a="http://schemas.openxmlformats.org/drawingml/2006/main">
               <a:ext uri="{FF2B5EF4-FFF2-40B4-BE49-F238E27FC236}">
-                <a16:creationId xmlns:a16="http://schemas.microsoft.com/office/drawing/2014/main" id="{6E247AA8-02FB-4565-914C-128A9BCFCEE5}"/>
+                <a16:creationId xmlns:a16="http://schemas.microsoft.com/office/drawing/2014/main" id="{9454B9E5-904B-42AB-A4AF-0A4D9F050F6D}"/>
               </a:ext>
             </a:extLst>
           </p:cNvPr>
@@ -26623,7 +26685,7 @@
           <p:cNvPr id="8" name="">
             <a:extLst xmlns:a="http://schemas.openxmlformats.org/drawingml/2006/main">
               <a:ext uri="{FF2B5EF4-FFF2-40B4-BE49-F238E27FC236}">
-                <a16:creationId xmlns:a16="http://schemas.microsoft.com/office/drawing/2014/main" id="{ABF20384-76E1-4FFC-B5F1-CBE506C99DFE}"/>
+                <a16:creationId xmlns:a16="http://schemas.microsoft.com/office/drawing/2014/main" id="{9FC08138-B69B-4AF9-B2D2-B690D18683C1}"/>
               </a:ext>
             </a:extLst>
           </p:cNvPr>
@@ -26685,7 +26747,7 @@
           <p:cNvPr id="9" name="">
             <a:extLst xmlns:a="http://schemas.openxmlformats.org/drawingml/2006/main">
               <a:ext uri="{FF2B5EF4-FFF2-40B4-BE49-F238E27FC236}">
-                <a16:creationId xmlns:a16="http://schemas.microsoft.com/office/drawing/2014/main" id="{6A48AAD6-8520-4DCC-96B7-F9813EC06F64}"/>
+                <a16:creationId xmlns:a16="http://schemas.microsoft.com/office/drawing/2014/main" id="{EA1E0603-D360-4DD2-A38F-2FD1D2CC5306}"/>
               </a:ext>
             </a:extLst>
           </p:cNvPr>
@@ -26716,7 +26778,7 @@
           <p:cNvPr id="10" name="">
             <a:extLst xmlns:a="http://schemas.openxmlformats.org/drawingml/2006/main">
               <a:ext uri="{FF2B5EF4-FFF2-40B4-BE49-F238E27FC236}">
-                <a16:creationId xmlns:a16="http://schemas.microsoft.com/office/drawing/2014/main" id="{FEF6347A-FA16-4665-A3C0-EBED8100016F}"/>
+                <a16:creationId xmlns:a16="http://schemas.microsoft.com/office/drawing/2014/main" id="{90C63534-0C41-4535-B5BB-979565A50815}"/>
               </a:ext>
             </a:extLst>
           </p:cNvPr>
@@ -26778,7 +26840,7 @@
           <p:cNvPr id="11" name="">
             <a:extLst xmlns:a="http://schemas.openxmlformats.org/drawingml/2006/main">
               <a:ext uri="{FF2B5EF4-FFF2-40B4-BE49-F238E27FC236}">
-                <a16:creationId xmlns:a16="http://schemas.microsoft.com/office/drawing/2014/main" id="{0264A394-F96F-46BE-91A6-573A394F6CD0}"/>
+                <a16:creationId xmlns:a16="http://schemas.microsoft.com/office/drawing/2014/main" id="{30230275-3A69-48D0-8DFC-4C66E20A4C04}"/>
               </a:ext>
             </a:extLst>
           </p:cNvPr>
@@ -26840,7 +26902,7 @@
           <p:cNvPr id="12" name="">
             <a:extLst xmlns:a="http://schemas.openxmlformats.org/drawingml/2006/main">
               <a:ext uri="{FF2B5EF4-FFF2-40B4-BE49-F238E27FC236}">
-                <a16:creationId xmlns:a16="http://schemas.microsoft.com/office/drawing/2014/main" id="{00CABA55-5534-469D-8388-E7019B2B50A1}"/>
+                <a16:creationId xmlns:a16="http://schemas.microsoft.com/office/drawing/2014/main" id="{6E083AC5-0579-48DA-8615-40CE3BDDBBCC}"/>
               </a:ext>
             </a:extLst>
           </p:cNvPr>
@@ -26902,7 +26964,7 @@
           <p:cNvPr id="13" name="">
             <a:extLst xmlns:a="http://schemas.openxmlformats.org/drawingml/2006/main">
               <a:ext uri="{FF2B5EF4-FFF2-40B4-BE49-F238E27FC236}">
-                <a16:creationId xmlns:a16="http://schemas.microsoft.com/office/drawing/2014/main" id="{0DCDAB1B-0738-4A66-896D-FB9842041F05}"/>
+                <a16:creationId xmlns:a16="http://schemas.microsoft.com/office/drawing/2014/main" id="{CC729C68-AF4D-4A95-A13B-38D3535C342D}"/>
               </a:ext>
             </a:extLst>
           </p:cNvPr>
@@ -26933,7 +26995,7 @@
           <p:cNvPr id="14" name="">
             <a:extLst xmlns:a="http://schemas.openxmlformats.org/drawingml/2006/main">
               <a:ext uri="{FF2B5EF4-FFF2-40B4-BE49-F238E27FC236}">
-                <a16:creationId xmlns:a16="http://schemas.microsoft.com/office/drawing/2014/main" id="{60F5E8B3-3972-4AF1-9FA6-73792F4BF8DD}"/>
+                <a16:creationId xmlns:a16="http://schemas.microsoft.com/office/drawing/2014/main" id="{07BCF65A-09EE-4396-B7CC-CDDBD80774A0}"/>
               </a:ext>
             </a:extLst>
           </p:cNvPr>
@@ -26995,7 +27057,7 @@
           <p:cNvPr id="15" name="">
             <a:extLst xmlns:a="http://schemas.openxmlformats.org/drawingml/2006/main">
               <a:ext uri="{FF2B5EF4-FFF2-40B4-BE49-F238E27FC236}">
-                <a16:creationId xmlns:a16="http://schemas.microsoft.com/office/drawing/2014/main" id="{45C2BB66-B67B-4F5A-BA67-F03DE31DF9EB}"/>
+                <a16:creationId xmlns:a16="http://schemas.microsoft.com/office/drawing/2014/main" id="{52BEF447-8D3E-4FE2-AC1F-E95AA1147B1D}"/>
               </a:ext>
             </a:extLst>
           </p:cNvPr>
@@ -27057,7 +27119,7 @@
           <p:cNvPr id="16" name="">
             <a:extLst xmlns:a="http://schemas.openxmlformats.org/drawingml/2006/main">
               <a:ext uri="{FF2B5EF4-FFF2-40B4-BE49-F238E27FC236}">
-                <a16:creationId xmlns:a16="http://schemas.microsoft.com/office/drawing/2014/main" id="{8AFE70C3-6CC6-41B4-B391-CDC960114F69}"/>
+                <a16:creationId xmlns:a16="http://schemas.microsoft.com/office/drawing/2014/main" id="{C6D5D5B5-1F1E-4FB8-80DF-78437930436D}"/>
               </a:ext>
             </a:extLst>
           </p:cNvPr>
@@ -27119,7 +27181,7 @@
           <p:cNvPr id="17" name="">
             <a:extLst xmlns:a="http://schemas.openxmlformats.org/drawingml/2006/main">
               <a:ext uri="{FF2B5EF4-FFF2-40B4-BE49-F238E27FC236}">
-                <a16:creationId xmlns:a16="http://schemas.microsoft.com/office/drawing/2014/main" id="{BE214481-5DF7-4BCA-9CD6-ABC855E63F1F}"/>
+                <a16:creationId xmlns:a16="http://schemas.microsoft.com/office/drawing/2014/main" id="{9B299740-A11F-47E2-8064-B49C50C3C8B6}"/>
               </a:ext>
             </a:extLst>
           </p:cNvPr>
@@ -27150,7 +27212,7 @@
           <p:cNvPr id="18" name="">
             <a:extLst xmlns:a="http://schemas.openxmlformats.org/drawingml/2006/main">
               <a:ext uri="{FF2B5EF4-FFF2-40B4-BE49-F238E27FC236}">
-                <a16:creationId xmlns:a16="http://schemas.microsoft.com/office/drawing/2014/main" id="{73A781B4-5CEE-496E-8194-ACCEC635AC8B}"/>
+                <a16:creationId xmlns:a16="http://schemas.microsoft.com/office/drawing/2014/main" id="{BD7D87DD-D648-4D8D-9AB9-03941884B702}"/>
               </a:ext>
             </a:extLst>
           </p:cNvPr>
@@ -27212,7 +27274,7 @@
           <p:cNvPr id="19" name="">
             <a:extLst xmlns:a="http://schemas.openxmlformats.org/drawingml/2006/main">
               <a:ext uri="{FF2B5EF4-FFF2-40B4-BE49-F238E27FC236}">
-                <a16:creationId xmlns:a16="http://schemas.microsoft.com/office/drawing/2014/main" id="{00CBF33D-8D62-468E-9D21-B8A41F7FAF9B}"/>
+                <a16:creationId xmlns:a16="http://schemas.microsoft.com/office/drawing/2014/main" id="{DAD0274E-9073-400E-A41C-1661DC82246F}"/>
               </a:ext>
             </a:extLst>
           </p:cNvPr>
@@ -27274,7 +27336,7 @@
           <p:cNvPr id="20" name="">
             <a:extLst xmlns:a="http://schemas.openxmlformats.org/drawingml/2006/main">
               <a:ext uri="{FF2B5EF4-FFF2-40B4-BE49-F238E27FC236}">
-                <a16:creationId xmlns:a16="http://schemas.microsoft.com/office/drawing/2014/main" id="{A5903DBE-FC03-40A9-B91F-20CCB393A279}"/>
+                <a16:creationId xmlns:a16="http://schemas.microsoft.com/office/drawing/2014/main" id="{27A5D214-3A14-491A-B616-7317911724DB}"/>
               </a:ext>
             </a:extLst>
           </p:cNvPr>
@@ -27336,7 +27398,7 @@
           <p:cNvPr id="21" name="">
             <a:extLst xmlns:a="http://schemas.openxmlformats.org/drawingml/2006/main">
               <a:ext uri="{FF2B5EF4-FFF2-40B4-BE49-F238E27FC236}">
-                <a16:creationId xmlns:a16="http://schemas.microsoft.com/office/drawing/2014/main" id="{9D32218A-A25E-4D5F-AE6C-862A8BDA7286}"/>
+                <a16:creationId xmlns:a16="http://schemas.microsoft.com/office/drawing/2014/main" id="{B2D03924-8A1B-4328-B1F1-DCCE0B93533E}"/>
               </a:ext>
             </a:extLst>
           </p:cNvPr>
@@ -27367,7 +27429,7 @@
           <p:cNvPr id="22" name="">
             <a:extLst xmlns:a="http://schemas.openxmlformats.org/drawingml/2006/main">
               <a:ext uri="{FF2B5EF4-FFF2-40B4-BE49-F238E27FC236}">
-                <a16:creationId xmlns:a16="http://schemas.microsoft.com/office/drawing/2014/main" id="{E889E72A-2F92-4720-8643-63D814F53E21}"/>
+                <a16:creationId xmlns:a16="http://schemas.microsoft.com/office/drawing/2014/main" id="{B5411C56-C065-4FF6-B3C7-3B62C2722DF5}"/>
               </a:ext>
             </a:extLst>
           </p:cNvPr>
@@ -27429,7 +27491,7 @@
           <p:cNvPr id="23" name="">
             <a:extLst xmlns:a="http://schemas.openxmlformats.org/drawingml/2006/main">
               <a:ext uri="{FF2B5EF4-FFF2-40B4-BE49-F238E27FC236}">
-                <a16:creationId xmlns:a16="http://schemas.microsoft.com/office/drawing/2014/main" id="{B844AAAE-5C58-4D25-BEAE-C2A7C6DD29CC}"/>
+                <a16:creationId xmlns:a16="http://schemas.microsoft.com/office/drawing/2014/main" id="{BE55D720-B00D-45F2-A188-6B867BECCE74}"/>
               </a:ext>
             </a:extLst>
           </p:cNvPr>
@@ -27491,7 +27553,7 @@
           <p:cNvPr id="24" name="">
             <a:extLst xmlns:a="http://schemas.openxmlformats.org/drawingml/2006/main">
               <a:ext uri="{FF2B5EF4-FFF2-40B4-BE49-F238E27FC236}">
-                <a16:creationId xmlns:a16="http://schemas.microsoft.com/office/drawing/2014/main" id="{0A754285-1FA8-4812-9711-63AF04399398}"/>
+                <a16:creationId xmlns:a16="http://schemas.microsoft.com/office/drawing/2014/main" id="{8744902E-1352-46F0-AAD7-3F77F02AE12D}"/>
               </a:ext>
             </a:extLst>
           </p:cNvPr>
@@ -27553,7 +27615,7 @@
           <p:cNvPr id="25" name="">
             <a:extLst xmlns:a="http://schemas.openxmlformats.org/drawingml/2006/main">
               <a:ext uri="{FF2B5EF4-FFF2-40B4-BE49-F238E27FC236}">
-                <a16:creationId xmlns:a16="http://schemas.microsoft.com/office/drawing/2014/main" id="{3EFEAEE5-4B1F-40E5-AF7D-171F97DCEF8D}"/>
+                <a16:creationId xmlns:a16="http://schemas.microsoft.com/office/drawing/2014/main" id="{9547C8FA-3266-493B-A3EA-9DBFA952C7C0}"/>
               </a:ext>
             </a:extLst>
           </p:cNvPr>
@@ -27584,7 +27646,7 @@
           <p:cNvPr id="26" name="">
             <a:extLst xmlns:a="http://schemas.openxmlformats.org/drawingml/2006/main">
               <a:ext uri="{FF2B5EF4-FFF2-40B4-BE49-F238E27FC236}">
-                <a16:creationId xmlns:a16="http://schemas.microsoft.com/office/drawing/2014/main" id="{28EE43DB-5638-4C0B-9176-8BC9EC2F6CA8}"/>
+                <a16:creationId xmlns:a16="http://schemas.microsoft.com/office/drawing/2014/main" id="{3F4B8E6A-7424-4EC6-9EF0-59E4C8BFCD25}"/>
               </a:ext>
             </a:extLst>
           </p:cNvPr>
@@ -27646,7 +27708,7 @@
           <p:cNvPr id="27" name="">
             <a:extLst xmlns:a="http://schemas.openxmlformats.org/drawingml/2006/main">
               <a:ext uri="{FF2B5EF4-FFF2-40B4-BE49-F238E27FC236}">
-                <a16:creationId xmlns:a16="http://schemas.microsoft.com/office/drawing/2014/main" id="{E0097C96-2B7E-429C-AAEF-0F93E59BDE47}"/>
+                <a16:creationId xmlns:a16="http://schemas.microsoft.com/office/drawing/2014/main" id="{4D560A9F-319B-4CB7-BF18-2C9E8CCF82B7}"/>
               </a:ext>
             </a:extLst>
           </p:cNvPr>
@@ -27708,7 +27770,7 @@
           <p:cNvPr id="28" name="">
             <a:extLst xmlns:a="http://schemas.openxmlformats.org/drawingml/2006/main">
               <a:ext uri="{FF2B5EF4-FFF2-40B4-BE49-F238E27FC236}">
-                <a16:creationId xmlns:a16="http://schemas.microsoft.com/office/drawing/2014/main" id="{3E084B37-4AB8-41B7-A8C3-56F283C176AB}"/>
+                <a16:creationId xmlns:a16="http://schemas.microsoft.com/office/drawing/2014/main" id="{ECA28BA4-DC74-4E16-B5A3-0E4C4F71F30E}"/>
               </a:ext>
             </a:extLst>
           </p:cNvPr>
@@ -27739,7 +27801,7 @@
           <p:cNvPr id="29" name="">
             <a:extLst xmlns:a="http://schemas.openxmlformats.org/drawingml/2006/main">
               <a:ext uri="{FF2B5EF4-FFF2-40B4-BE49-F238E27FC236}">
-                <a16:creationId xmlns:a16="http://schemas.microsoft.com/office/drawing/2014/main" id="{78A6B1FD-818F-4D94-9AE6-254B128352F3}"/>
+                <a16:creationId xmlns:a16="http://schemas.microsoft.com/office/drawing/2014/main" id="{4EA7DCC8-F0AE-40AF-A3A5-06F35D90BC95}"/>
               </a:ext>
             </a:extLst>
           </p:cNvPr>
@@ -27801,7 +27863,7 @@
           <p:cNvPr id="30" name="">
             <a:extLst xmlns:a="http://schemas.openxmlformats.org/drawingml/2006/main">
               <a:ext uri="{FF2B5EF4-FFF2-40B4-BE49-F238E27FC236}">
-                <a16:creationId xmlns:a16="http://schemas.microsoft.com/office/drawing/2014/main" id="{271D0079-1F02-4D27-BF0B-E21607CF2148}"/>
+                <a16:creationId xmlns:a16="http://schemas.microsoft.com/office/drawing/2014/main" id="{7B568178-F094-40DF-9E0D-B72973538388}"/>
               </a:ext>
             </a:extLst>
           </p:cNvPr>
@@ -27863,7 +27925,7 @@
           <p:cNvPr id="31" name="">
             <a:extLst xmlns:a="http://schemas.openxmlformats.org/drawingml/2006/main">
               <a:ext uri="{FF2B5EF4-FFF2-40B4-BE49-F238E27FC236}">
-                <a16:creationId xmlns:a16="http://schemas.microsoft.com/office/drawing/2014/main" id="{8A47D230-A97F-4201-8EA6-E5303819F8A7}"/>
+                <a16:creationId xmlns:a16="http://schemas.microsoft.com/office/drawing/2014/main" id="{FDE7D8AA-1B5E-4679-AC18-DEFF149E75B6}"/>
               </a:ext>
             </a:extLst>
           </p:cNvPr>
@@ -27925,7 +27987,7 @@
           <p:cNvPr id="32" name="">
             <a:extLst xmlns:a="http://schemas.openxmlformats.org/drawingml/2006/main">
               <a:ext uri="{FF2B5EF4-FFF2-40B4-BE49-F238E27FC236}">
-                <a16:creationId xmlns:a16="http://schemas.microsoft.com/office/drawing/2014/main" id="{075D19CF-442C-48DC-9004-61082899A81E}"/>
+                <a16:creationId xmlns:a16="http://schemas.microsoft.com/office/drawing/2014/main" id="{A29688F4-41EC-4B4D-B5D5-4B2221547BDD}"/>
               </a:ext>
             </a:extLst>
           </p:cNvPr>
@@ -27987,7 +28049,7 @@
           <p:cNvPr id="33" name="">
             <a:extLst xmlns:a="http://schemas.openxmlformats.org/drawingml/2006/main">
               <a:ext uri="{FF2B5EF4-FFF2-40B4-BE49-F238E27FC236}">
-                <a16:creationId xmlns:a16="http://schemas.microsoft.com/office/drawing/2014/main" id="{1632D50C-9801-4A1F-BB5A-C58C95A65C7D}"/>
+                <a16:creationId xmlns:a16="http://schemas.microsoft.com/office/drawing/2014/main" id="{88BD7279-5FD8-40FE-8B73-5C2FA06AAFAE}"/>
               </a:ext>
             </a:extLst>
           </p:cNvPr>
@@ -28018,7 +28080,7 @@
           <p:cNvPr id="34" name="">
             <a:extLst xmlns:a="http://schemas.openxmlformats.org/drawingml/2006/main">
               <a:ext uri="{FF2B5EF4-FFF2-40B4-BE49-F238E27FC236}">
-                <a16:creationId xmlns:a16="http://schemas.microsoft.com/office/drawing/2014/main" id="{5EED6334-CC7C-404E-9A57-7F19FF46FCB9}"/>
+                <a16:creationId xmlns:a16="http://schemas.microsoft.com/office/drawing/2014/main" id="{CD689413-9716-4BA5-B61F-7A497D2020BA}"/>
               </a:ext>
             </a:extLst>
           </p:cNvPr>
@@ -28070,7 +28132,7 @@
                 <a:ea typeface="Arial"/>
                 <a:cs typeface="Arial"/>
               </a:rPr>
-              <a:t>r2z-16690ccbe328 · scn-c46e1d86c1</a:t>
+              <a:t>r2z-45c4ba076af9 · scn-e0f12f397e</a:t>
             </a:r>
           </a:p>
         </p:txBody>
@@ -28080,7 +28142,7 @@
           <p:cNvPr id="35" name="">
             <a:extLst xmlns:a="http://schemas.openxmlformats.org/drawingml/2006/main">
               <a:ext uri="{FF2B5EF4-FFF2-40B4-BE49-F238E27FC236}">
-                <a16:creationId xmlns:a16="http://schemas.microsoft.com/office/drawing/2014/main" id="{1CA9087D-B3C1-4B9C-9201-9860D9A8501F}"/>
+                <a16:creationId xmlns:a16="http://schemas.microsoft.com/office/drawing/2014/main" id="{94D606CC-88F6-464D-910E-70866CFB8B11}"/>
               </a:ext>
             </a:extLst>
           </p:cNvPr>
@@ -28140,7 +28202,7 @@
     </p:spTree>
     <p:extLst>
       <p:ext uri="{BB962C8B-B14F-4D97-AF65-F5344CB8AC3E}">
-        <p14:creationId xmlns:p14="http://schemas.microsoft.com/office/powerpoint/2010/main" val="203079158"/>
+        <p14:creationId xmlns:p14="http://schemas.microsoft.com/office/powerpoint/2010/main" val="887946126"/>
       </p:ext>
     </p:extLst>
   </p:cSld>
@@ -28171,7 +28233,7 @@
           <p:cNvPr id="19" name="">
             <a:extLst xmlns:a="http://schemas.openxmlformats.org/drawingml/2006/main">
               <a:ext uri="{FF2B5EF4-FFF2-40B4-BE49-F238E27FC236}">
-                <a16:creationId xmlns:a16="http://schemas.microsoft.com/office/drawing/2014/main" id="{D7C4FD63-7F2F-46EB-BFA3-B9DA19F861FB}"/>
+                <a16:creationId xmlns:a16="http://schemas.microsoft.com/office/drawing/2014/main" id="{FE0E8578-AD6A-4E6D-B77D-B909CEF65C13}"/>
               </a:ext>
             </a:extLst>
           </p:cNvPr>
@@ -28233,7 +28295,7 @@
                 <a:latin typeface="Arial"/>
                 <a:ea typeface="Arial"/>
                 <a:cs typeface="Arial"/>
-                <a:hlinkClick xmlns:r="http://schemas.openxmlformats.org/officeDocument/2006/relationships" r:id="R2a52d134f4a24611"/>
+                <a:hlinkClick xmlns:r="http://schemas.openxmlformats.org/officeDocument/2006/relationships" r:id="Redad30dd30b34513"/>
               </a:rPr>
               <a:t>https://github.com/qjmre23/Route2Zero</a:t>
             </a:r>
@@ -28256,7 +28318,7 @@
                 <a:latin typeface="Arial"/>
                 <a:ea typeface="Arial"/>
                 <a:cs typeface="Arial"/>
-                <a:hlinkClick xmlns:r="http://schemas.openxmlformats.org/officeDocument/2006/relationships" r:id="R2a48d25be757462e"/>
+                <a:hlinkClick xmlns:r="http://schemas.openxmlformats.org/officeDocument/2006/relationships" r:id="R997ac9f2ccc54836"/>
               </a:rPr>
               <a:t>https://route2zero.netlify.app/</a:t>
             </a:r>
@@ -28268,7 +28330,7 @@
           <p:cNvPr id="2" name="">
             <a:extLst xmlns:a="http://schemas.openxmlformats.org/drawingml/2006/main">
               <a:ext uri="{FF2B5EF4-FFF2-40B4-BE49-F238E27FC236}">
-                <a16:creationId xmlns:a16="http://schemas.microsoft.com/office/drawing/2014/main" id="{F02F767E-835F-4124-B05F-39584FDD379E}"/>
+                <a16:creationId xmlns:a16="http://schemas.microsoft.com/office/drawing/2014/main" id="{D3E9A091-3436-41C2-AEA7-E0442B682326}"/>
               </a:ext>
             </a:extLst>
           </p:cNvPr>
@@ -28330,7 +28392,7 @@
           <p:cNvPr id="3" name="">
             <a:extLst xmlns:a="http://schemas.openxmlformats.org/drawingml/2006/main">
               <a:ext uri="{FF2B5EF4-FFF2-40B4-BE49-F238E27FC236}">
-                <a16:creationId xmlns:a16="http://schemas.microsoft.com/office/drawing/2014/main" id="{A93F2FAD-A912-4045-9600-C868D08733B7}"/>
+                <a16:creationId xmlns:a16="http://schemas.microsoft.com/office/drawing/2014/main" id="{1C830C2F-2862-457F-8B9C-A6F9654EC1FC}"/>
               </a:ext>
             </a:extLst>
           </p:cNvPr>
@@ -28392,7 +28454,7 @@
           <p:cNvPr id="4" name="">
             <a:extLst xmlns:a="http://schemas.openxmlformats.org/drawingml/2006/main">
               <a:ext uri="{FF2B5EF4-FFF2-40B4-BE49-F238E27FC236}">
-                <a16:creationId xmlns:a16="http://schemas.microsoft.com/office/drawing/2014/main" id="{277494FB-CC4E-4292-A6D6-9C80D635DB36}"/>
+                <a16:creationId xmlns:a16="http://schemas.microsoft.com/office/drawing/2014/main" id="{F5481501-DD52-4EB6-8809-109CBD6ADA38}"/>
               </a:ext>
             </a:extLst>
           </p:cNvPr>
@@ -28454,7 +28516,7 @@
           <p:cNvPr id="5" name="">
             <a:extLst xmlns:a="http://schemas.openxmlformats.org/drawingml/2006/main">
               <a:ext uri="{FF2B5EF4-FFF2-40B4-BE49-F238E27FC236}">
-                <a16:creationId xmlns:a16="http://schemas.microsoft.com/office/drawing/2014/main" id="{8AF1B06C-34F2-4699-9A87-0FE5FA1BA7C6}"/>
+                <a16:creationId xmlns:a16="http://schemas.microsoft.com/office/drawing/2014/main" id="{40038494-9DE3-4AB3-9004-674C5747B12C}"/>
               </a:ext>
             </a:extLst>
           </p:cNvPr>
@@ -28485,7 +28547,7 @@
           <p:cNvPr id="6" name="">
             <a:extLst xmlns:a="http://schemas.openxmlformats.org/drawingml/2006/main">
               <a:ext uri="{FF2B5EF4-FFF2-40B4-BE49-F238E27FC236}">
-                <a16:creationId xmlns:a16="http://schemas.microsoft.com/office/drawing/2014/main" id="{E82D9A14-DBC8-484E-9055-E9AB268437FD}"/>
+                <a16:creationId xmlns:a16="http://schemas.microsoft.com/office/drawing/2014/main" id="{B81A7481-E0AE-49E2-9EF9-C062A0A04CFC}"/>
               </a:ext>
             </a:extLst>
           </p:cNvPr>
@@ -28610,7 +28672,7 @@
           <p:cNvPr id="7" name="">
             <a:extLst xmlns:a="http://schemas.openxmlformats.org/drawingml/2006/main">
               <a:ext uri="{FF2B5EF4-FFF2-40B4-BE49-F238E27FC236}">
-                <a16:creationId xmlns:a16="http://schemas.microsoft.com/office/drawing/2014/main" id="{B4C73D7E-E97C-4940-ADB5-A8B3D2D375DB}"/>
+                <a16:creationId xmlns:a16="http://schemas.microsoft.com/office/drawing/2014/main" id="{677A90AB-3519-4636-A661-BDE64AF4E66D}"/>
               </a:ext>
             </a:extLst>
           </p:cNvPr>
@@ -28672,7 +28734,7 @@
           <p:cNvPr id="8" name="">
             <a:extLst xmlns:a="http://schemas.openxmlformats.org/drawingml/2006/main">
               <a:ext uri="{FF2B5EF4-FFF2-40B4-BE49-F238E27FC236}">
-                <a16:creationId xmlns:a16="http://schemas.microsoft.com/office/drawing/2014/main" id="{8784FA14-AAAA-42FA-97A3-EBDFDFF2A095}"/>
+                <a16:creationId xmlns:a16="http://schemas.microsoft.com/office/drawing/2014/main" id="{221CD14C-6173-4C17-8080-CCA5770947CC}"/>
               </a:ext>
             </a:extLst>
           </p:cNvPr>
@@ -28703,7 +28765,7 @@
           <p:cNvPr id="9" name="">
             <a:extLst xmlns:a="http://schemas.openxmlformats.org/drawingml/2006/main">
               <a:ext uri="{FF2B5EF4-FFF2-40B4-BE49-F238E27FC236}">
-                <a16:creationId xmlns:a16="http://schemas.microsoft.com/office/drawing/2014/main" id="{BD7FE031-0248-47F6-BA69-28716E19491C}"/>
+                <a16:creationId xmlns:a16="http://schemas.microsoft.com/office/drawing/2014/main" id="{08B6D2EF-854A-4F6E-9F05-110881EA5D53}"/>
               </a:ext>
             </a:extLst>
           </p:cNvPr>
@@ -28828,7 +28890,7 @@
           <p:cNvPr id="10" name="">
             <a:extLst xmlns:a="http://schemas.openxmlformats.org/drawingml/2006/main">
               <a:ext uri="{FF2B5EF4-FFF2-40B4-BE49-F238E27FC236}">
-                <a16:creationId xmlns:a16="http://schemas.microsoft.com/office/drawing/2014/main" id="{71D365B1-EBA1-4B48-9EAE-7BA12298B711}"/>
+                <a16:creationId xmlns:a16="http://schemas.microsoft.com/office/drawing/2014/main" id="{3981438F-A585-4D0B-8B3D-D13C583584D8}"/>
               </a:ext>
             </a:extLst>
           </p:cNvPr>
@@ -28890,7 +28952,7 @@
           <p:cNvPr id="11" name="">
             <a:extLst xmlns:a="http://schemas.openxmlformats.org/drawingml/2006/main">
               <a:ext uri="{FF2B5EF4-FFF2-40B4-BE49-F238E27FC236}">
-                <a16:creationId xmlns:a16="http://schemas.microsoft.com/office/drawing/2014/main" id="{60FE15FE-D3FB-4080-9561-563DB0C1559A}"/>
+                <a16:creationId xmlns:a16="http://schemas.microsoft.com/office/drawing/2014/main" id="{1FC0A6BE-305D-45B7-9A23-421FBBADC45B}"/>
               </a:ext>
             </a:extLst>
           </p:cNvPr>
@@ -28921,7 +28983,7 @@
           <p:cNvPr id="12" name="">
             <a:extLst xmlns:a="http://schemas.openxmlformats.org/drawingml/2006/main">
               <a:ext uri="{FF2B5EF4-FFF2-40B4-BE49-F238E27FC236}">
-                <a16:creationId xmlns:a16="http://schemas.microsoft.com/office/drawing/2014/main" id="{F301E8A2-69E9-4EEF-A675-F407BE586EA9}"/>
+                <a16:creationId xmlns:a16="http://schemas.microsoft.com/office/drawing/2014/main" id="{9D1841B5-F4D3-4C15-9631-253B9A85966A}"/>
               </a:ext>
             </a:extLst>
           </p:cNvPr>
@@ -29046,7 +29108,7 @@
           <p:cNvPr id="13" name="">
             <a:extLst xmlns:a="http://schemas.openxmlformats.org/drawingml/2006/main">
               <a:ext uri="{FF2B5EF4-FFF2-40B4-BE49-F238E27FC236}">
-                <a16:creationId xmlns:a16="http://schemas.microsoft.com/office/drawing/2014/main" id="{BC6BBE4B-81A3-4AA5-BE4B-12A9E02C07B5}"/>
+                <a16:creationId xmlns:a16="http://schemas.microsoft.com/office/drawing/2014/main" id="{CB81B30F-59EE-4D45-9BA6-32EE19783EFF}"/>
               </a:ext>
             </a:extLst>
           </p:cNvPr>
@@ -29079,7 +29141,7 @@
           <p:cNvPr id="14" name="">
             <a:extLst xmlns:a="http://schemas.openxmlformats.org/drawingml/2006/main">
               <a:ext uri="{FF2B5EF4-FFF2-40B4-BE49-F238E27FC236}">
-                <a16:creationId xmlns:a16="http://schemas.microsoft.com/office/drawing/2014/main" id="{0B2DF6BE-7B8B-4D4F-AD28-CB20CD95BF6B}"/>
+                <a16:creationId xmlns:a16="http://schemas.microsoft.com/office/drawing/2014/main" id="{24103DBA-F5A7-4D11-92A0-AC0BFAF0280F}"/>
               </a:ext>
             </a:extLst>
           </p:cNvPr>
@@ -29141,7 +29203,7 @@
           <p:cNvPr id="15" name="">
             <a:extLst xmlns:a="http://schemas.openxmlformats.org/drawingml/2006/main">
               <a:ext uri="{FF2B5EF4-FFF2-40B4-BE49-F238E27FC236}">
-                <a16:creationId xmlns:a16="http://schemas.microsoft.com/office/drawing/2014/main" id="{93B37175-E78E-42EF-A01B-DFD529664C89}"/>
+                <a16:creationId xmlns:a16="http://schemas.microsoft.com/office/drawing/2014/main" id="{3DB712D8-0B22-48C5-9AA3-C68DA23CE5E1}"/>
               </a:ext>
             </a:extLst>
           </p:cNvPr>
@@ -29203,7 +29265,7 @@
           <p:cNvPr id="16" name="">
             <a:extLst xmlns:a="http://schemas.openxmlformats.org/drawingml/2006/main">
               <a:ext uri="{FF2B5EF4-FFF2-40B4-BE49-F238E27FC236}">
-                <a16:creationId xmlns:a16="http://schemas.microsoft.com/office/drawing/2014/main" id="{D6D417B9-7B5E-47FB-8994-9ED930C4FD7B}"/>
+                <a16:creationId xmlns:a16="http://schemas.microsoft.com/office/drawing/2014/main" id="{BDC7F60F-1358-4D64-B419-AC0929A5E12F}"/>
               </a:ext>
             </a:extLst>
           </p:cNvPr>
@@ -29234,7 +29296,7 @@
           <p:cNvPr id="17" name="">
             <a:extLst xmlns:a="http://schemas.openxmlformats.org/drawingml/2006/main">
               <a:ext uri="{FF2B5EF4-FFF2-40B4-BE49-F238E27FC236}">
-                <a16:creationId xmlns:a16="http://schemas.microsoft.com/office/drawing/2014/main" id="{3FDEEA8D-F09F-40F3-BBC1-3259BE5A5E5C}"/>
+                <a16:creationId xmlns:a16="http://schemas.microsoft.com/office/drawing/2014/main" id="{7173E6AA-B320-4409-B837-6A7A61EBC142}"/>
               </a:ext>
             </a:extLst>
           </p:cNvPr>
@@ -29286,7 +29348,7 @@
                 <a:ea typeface="Arial"/>
                 <a:cs typeface="Arial"/>
               </a:rPr>
-              <a:t>r2z-16690ccbe328 · scn-c46e1d86c1</a:t>
+              <a:t>r2z-45c4ba076af9 · scn-e0f12f397e</a:t>
             </a:r>
           </a:p>
         </p:txBody>
@@ -29296,7 +29358,7 @@
           <p:cNvPr id="18" name="">
             <a:extLst xmlns:a="http://schemas.openxmlformats.org/drawingml/2006/main">
               <a:ext uri="{FF2B5EF4-FFF2-40B4-BE49-F238E27FC236}">
-                <a16:creationId xmlns:a16="http://schemas.microsoft.com/office/drawing/2014/main" id="{785C9BA9-0339-495A-9BDD-AA34962F530D}"/>
+                <a16:creationId xmlns:a16="http://schemas.microsoft.com/office/drawing/2014/main" id="{03FD87BF-5E4B-4B74-8EDC-B996A5891C58}"/>
               </a:ext>
             </a:extLst>
           </p:cNvPr>
@@ -29356,7 +29418,7 @@
     </p:spTree>
     <p:extLst>
       <p:ext uri="{BB962C8B-B14F-4D97-AF65-F5344CB8AC3E}">
-        <p14:creationId xmlns:p14="http://schemas.microsoft.com/office/powerpoint/2010/main" val="441578706"/>
+        <p14:creationId xmlns:p14="http://schemas.microsoft.com/office/powerpoint/2010/main" val="184383671"/>
       </p:ext>
     </p:extLst>
   </p:cSld>
@@ -29387,7 +29449,7 @@
           <p:cNvPr id="44" name="">
             <a:extLst xmlns:a="http://schemas.openxmlformats.org/drawingml/2006/main">
               <a:ext uri="{FF2B5EF4-FFF2-40B4-BE49-F238E27FC236}">
-                <a16:creationId xmlns:a16="http://schemas.microsoft.com/office/drawing/2014/main" id="{3C8757FD-F5AC-4570-83CF-F44F3F64CCE3}"/>
+                <a16:creationId xmlns:a16="http://schemas.microsoft.com/office/drawing/2014/main" id="{330C18D7-9024-41C1-A6F1-DB7C9877B21A}"/>
               </a:ext>
             </a:extLst>
           </p:cNvPr>
@@ -29449,7 +29511,7 @@
                 <a:latin typeface="Arial"/>
                 <a:ea typeface="Arial"/>
                 <a:cs typeface="Arial"/>
-                <a:hlinkClick xmlns:r="http://schemas.openxmlformats.org/officeDocument/2006/relationships" r:id="Rc86f1cdb4a2b4d0f"/>
+                <a:hlinkClick xmlns:r="http://schemas.openxmlformats.org/officeDocument/2006/relationships" r:id="R769fbdb87856464f"/>
               </a:rPr>
               <a:t>https://github.com/qjmre23/Route2Zero</a:t>
             </a:r>
@@ -29472,7 +29534,7 @@
                 <a:latin typeface="Arial"/>
                 <a:ea typeface="Arial"/>
                 <a:cs typeface="Arial"/>
-                <a:hlinkClick xmlns:r="http://schemas.openxmlformats.org/officeDocument/2006/relationships" r:id="R17c95418fc2245e9"/>
+                <a:hlinkClick xmlns:r="http://schemas.openxmlformats.org/officeDocument/2006/relationships" r:id="R905cf07dba4843bb"/>
               </a:rPr>
               <a:t>https://route2zero.netlify.app/</a:t>
             </a:r>
@@ -29484,7 +29546,7 @@
           <p:cNvPr id="2" name="">
             <a:extLst xmlns:a="http://schemas.openxmlformats.org/drawingml/2006/main">
               <a:ext uri="{FF2B5EF4-FFF2-40B4-BE49-F238E27FC236}">
-                <a16:creationId xmlns:a16="http://schemas.microsoft.com/office/drawing/2014/main" id="{CB88042D-E0A5-4C98-B6AA-EF1EE4979F90}"/>
+                <a16:creationId xmlns:a16="http://schemas.microsoft.com/office/drawing/2014/main" id="{8FDAC262-5339-4973-A56C-DC18982BF225}"/>
               </a:ext>
             </a:extLst>
           </p:cNvPr>
@@ -29546,7 +29608,7 @@
           <p:cNvPr id="3" name="">
             <a:extLst xmlns:a="http://schemas.openxmlformats.org/drawingml/2006/main">
               <a:ext uri="{FF2B5EF4-FFF2-40B4-BE49-F238E27FC236}">
-                <a16:creationId xmlns:a16="http://schemas.microsoft.com/office/drawing/2014/main" id="{BEEA3728-55E0-4B97-83A8-C5ABE5F4651F}"/>
+                <a16:creationId xmlns:a16="http://schemas.microsoft.com/office/drawing/2014/main" id="{5B6D2DE2-4419-407A-AE3C-A456252BDE7E}"/>
               </a:ext>
             </a:extLst>
           </p:cNvPr>
@@ -29608,7 +29670,7 @@
           <p:cNvPr id="4" name="">
             <a:extLst xmlns:a="http://schemas.openxmlformats.org/drawingml/2006/main">
               <a:ext uri="{FF2B5EF4-FFF2-40B4-BE49-F238E27FC236}">
-                <a16:creationId xmlns:a16="http://schemas.microsoft.com/office/drawing/2014/main" id="{EE378309-ACB1-46D3-9E97-2C9192735B67}"/>
+                <a16:creationId xmlns:a16="http://schemas.microsoft.com/office/drawing/2014/main" id="{E07E3533-8BD4-4141-B680-BAE0105740E6}"/>
               </a:ext>
             </a:extLst>
           </p:cNvPr>
@@ -29670,7 +29732,7 @@
           <p:cNvPr id="5" name="">
             <a:extLst xmlns:a="http://schemas.openxmlformats.org/drawingml/2006/main">
               <a:ext uri="{FF2B5EF4-FFF2-40B4-BE49-F238E27FC236}">
-                <a16:creationId xmlns:a16="http://schemas.microsoft.com/office/drawing/2014/main" id="{82BFB1D8-8DBE-4844-9870-A81DAB18778D}"/>
+                <a16:creationId xmlns:a16="http://schemas.microsoft.com/office/drawing/2014/main" id="{F9CD9C80-C3D5-4700-ABD6-F31EDC2CB46B}"/>
               </a:ext>
             </a:extLst>
           </p:cNvPr>
@@ -29701,7 +29763,7 @@
           <p:cNvPr id="6" name="">
             <a:extLst xmlns:a="http://schemas.openxmlformats.org/drawingml/2006/main">
               <a:ext uri="{FF2B5EF4-FFF2-40B4-BE49-F238E27FC236}">
-                <a16:creationId xmlns:a16="http://schemas.microsoft.com/office/drawing/2014/main" id="{F8ACA879-7ED2-425F-85EE-0913422576D1}"/>
+                <a16:creationId xmlns:a16="http://schemas.microsoft.com/office/drawing/2014/main" id="{A56E4172-FF69-485A-8443-010E6904FBF2}"/>
               </a:ext>
             </a:extLst>
           </p:cNvPr>
@@ -29763,7 +29825,7 @@
           <p:cNvPr id="7" name="">
             <a:extLst xmlns:a="http://schemas.openxmlformats.org/drawingml/2006/main">
               <a:ext uri="{FF2B5EF4-FFF2-40B4-BE49-F238E27FC236}">
-                <a16:creationId xmlns:a16="http://schemas.microsoft.com/office/drawing/2014/main" id="{0A32F351-21F4-49AE-BD96-390E297E334C}"/>
+                <a16:creationId xmlns:a16="http://schemas.microsoft.com/office/drawing/2014/main" id="{ED36E7B6-24BC-4116-A21B-3386F1A7261D}"/>
               </a:ext>
             </a:extLst>
           </p:cNvPr>
@@ -29794,7 +29856,7 @@
           <p:cNvPr id="8" name="">
             <a:extLst xmlns:a="http://schemas.openxmlformats.org/drawingml/2006/main">
               <a:ext uri="{FF2B5EF4-FFF2-40B4-BE49-F238E27FC236}">
-                <a16:creationId xmlns:a16="http://schemas.microsoft.com/office/drawing/2014/main" id="{052219E2-3BAA-42C9-83F5-0777202008F4}"/>
+                <a16:creationId xmlns:a16="http://schemas.microsoft.com/office/drawing/2014/main" id="{42548348-FEFE-4E97-BD4F-330329CCB29A}"/>
               </a:ext>
             </a:extLst>
           </p:cNvPr>
@@ -29856,7 +29918,7 @@
           <p:cNvPr id="9" name="">
             <a:extLst xmlns:a="http://schemas.openxmlformats.org/drawingml/2006/main">
               <a:ext uri="{FF2B5EF4-FFF2-40B4-BE49-F238E27FC236}">
-                <a16:creationId xmlns:a16="http://schemas.microsoft.com/office/drawing/2014/main" id="{CF1AF1F3-27FE-44F1-A3F1-BB83F1CE3585}"/>
+                <a16:creationId xmlns:a16="http://schemas.microsoft.com/office/drawing/2014/main" id="{8381DA67-2E26-4EA6-BA55-1D78239A94FC}"/>
               </a:ext>
             </a:extLst>
           </p:cNvPr>
@@ -29887,7 +29949,7 @@
           <p:cNvPr id="10" name="">
             <a:extLst xmlns:a="http://schemas.openxmlformats.org/drawingml/2006/main">
               <a:ext uri="{FF2B5EF4-FFF2-40B4-BE49-F238E27FC236}">
-                <a16:creationId xmlns:a16="http://schemas.microsoft.com/office/drawing/2014/main" id="{2AF04768-A241-40D8-8003-8ED424FAE561}"/>
+                <a16:creationId xmlns:a16="http://schemas.microsoft.com/office/drawing/2014/main" id="{B43B245D-8068-4A8F-859A-C2F094215358}"/>
               </a:ext>
             </a:extLst>
           </p:cNvPr>
@@ -29949,7 +30011,7 @@
           <p:cNvPr id="11" name="">
             <a:extLst xmlns:a="http://schemas.openxmlformats.org/drawingml/2006/main">
               <a:ext uri="{FF2B5EF4-FFF2-40B4-BE49-F238E27FC236}">
-                <a16:creationId xmlns:a16="http://schemas.microsoft.com/office/drawing/2014/main" id="{949A2521-D11B-4770-BEB3-31CBF030F2B8}"/>
+                <a16:creationId xmlns:a16="http://schemas.microsoft.com/office/drawing/2014/main" id="{A99EBA4E-A10D-4C4A-9FD5-58D8C9D0506A}"/>
               </a:ext>
             </a:extLst>
           </p:cNvPr>
@@ -29980,7 +30042,7 @@
           <p:cNvPr id="12" name="">
             <a:extLst xmlns:a="http://schemas.openxmlformats.org/drawingml/2006/main">
               <a:ext uri="{FF2B5EF4-FFF2-40B4-BE49-F238E27FC236}">
-                <a16:creationId xmlns:a16="http://schemas.microsoft.com/office/drawing/2014/main" id="{B7162A8D-552A-406A-96CC-CE6065EE91F0}"/>
+                <a16:creationId xmlns:a16="http://schemas.microsoft.com/office/drawing/2014/main" id="{41E50DD9-99DB-434A-8CBD-ADEA2DB131B1}"/>
               </a:ext>
             </a:extLst>
           </p:cNvPr>
@@ -30042,7 +30104,7 @@
           <p:cNvPr id="13" name="">
             <a:extLst xmlns:a="http://schemas.openxmlformats.org/drawingml/2006/main">
               <a:ext uri="{FF2B5EF4-FFF2-40B4-BE49-F238E27FC236}">
-                <a16:creationId xmlns:a16="http://schemas.microsoft.com/office/drawing/2014/main" id="{0B480640-0EC9-423A-A0D8-B7696C803A8B}"/>
+                <a16:creationId xmlns:a16="http://schemas.microsoft.com/office/drawing/2014/main" id="{BB870920-A176-4DF4-9A86-6449FA587554}"/>
               </a:ext>
             </a:extLst>
           </p:cNvPr>
@@ -30073,7 +30135,7 @@
           <p:cNvPr id="14" name="">
             <a:extLst xmlns:a="http://schemas.openxmlformats.org/drawingml/2006/main">
               <a:ext uri="{FF2B5EF4-FFF2-40B4-BE49-F238E27FC236}">
-                <a16:creationId xmlns:a16="http://schemas.microsoft.com/office/drawing/2014/main" id="{D5805382-E9F5-4B05-AF89-DF3F941BE8AD}"/>
+                <a16:creationId xmlns:a16="http://schemas.microsoft.com/office/drawing/2014/main" id="{82886D69-CBE1-47FA-9B4F-0A9847169305}"/>
               </a:ext>
             </a:extLst>
           </p:cNvPr>
@@ -30135,7 +30197,7 @@
           <p:cNvPr id="15" name="">
             <a:extLst xmlns:a="http://schemas.openxmlformats.org/drawingml/2006/main">
               <a:ext uri="{FF2B5EF4-FFF2-40B4-BE49-F238E27FC236}">
-                <a16:creationId xmlns:a16="http://schemas.microsoft.com/office/drawing/2014/main" id="{5B7EBBB8-4EF7-4AA8-85ED-2706276DCCD0}"/>
+                <a16:creationId xmlns:a16="http://schemas.microsoft.com/office/drawing/2014/main" id="{28CA4EF8-018D-4986-837C-FAE8F10EA218}"/>
               </a:ext>
             </a:extLst>
           </p:cNvPr>
@@ -30166,7 +30228,7 @@
           <p:cNvPr id="16" name="">
             <a:extLst xmlns:a="http://schemas.openxmlformats.org/drawingml/2006/main">
               <a:ext uri="{FF2B5EF4-FFF2-40B4-BE49-F238E27FC236}">
-                <a16:creationId xmlns:a16="http://schemas.microsoft.com/office/drawing/2014/main" id="{E0B70E45-F3ED-4A5C-9A9B-1098080C532C}"/>
+                <a16:creationId xmlns:a16="http://schemas.microsoft.com/office/drawing/2014/main" id="{30350E5C-9127-4584-BC90-0182FDFFC65F}"/>
               </a:ext>
             </a:extLst>
           </p:cNvPr>
@@ -30228,7 +30290,7 @@
           <p:cNvPr id="17" name="">
             <a:extLst xmlns:a="http://schemas.openxmlformats.org/drawingml/2006/main">
               <a:ext uri="{FF2B5EF4-FFF2-40B4-BE49-F238E27FC236}">
-                <a16:creationId xmlns:a16="http://schemas.microsoft.com/office/drawing/2014/main" id="{B7DDEF7B-CB6D-429F-B47B-14E9A6971279}"/>
+                <a16:creationId xmlns:a16="http://schemas.microsoft.com/office/drawing/2014/main" id="{6711CB70-7C7E-4819-89DA-F2D5A83A3E2C}"/>
               </a:ext>
             </a:extLst>
           </p:cNvPr>
@@ -30259,7 +30321,7 @@
           <p:cNvPr id="18" name="">
             <a:extLst xmlns:a="http://schemas.openxmlformats.org/drawingml/2006/main">
               <a:ext uri="{FF2B5EF4-FFF2-40B4-BE49-F238E27FC236}">
-                <a16:creationId xmlns:a16="http://schemas.microsoft.com/office/drawing/2014/main" id="{72636EF6-F980-4680-9292-B971ED6EEFAC}"/>
+                <a16:creationId xmlns:a16="http://schemas.microsoft.com/office/drawing/2014/main" id="{B9763F9E-2245-4A44-B7D5-B6A710F7DD4E}"/>
               </a:ext>
             </a:extLst>
           </p:cNvPr>
@@ -30321,7 +30383,7 @@
           <p:cNvPr id="19" name="">
             <a:extLst xmlns:a="http://schemas.openxmlformats.org/drawingml/2006/main">
               <a:ext uri="{FF2B5EF4-FFF2-40B4-BE49-F238E27FC236}">
-                <a16:creationId xmlns:a16="http://schemas.microsoft.com/office/drawing/2014/main" id="{46AC56D9-F454-4A89-8700-3F13A803327B}"/>
+                <a16:creationId xmlns:a16="http://schemas.microsoft.com/office/drawing/2014/main" id="{B050E5D2-3D7B-422D-AD14-3375D261D09A}"/>
               </a:ext>
             </a:extLst>
           </p:cNvPr>
@@ -30356,7 +30418,7 @@
           <p:cNvPr id="20" name="">
             <a:extLst xmlns:a="http://schemas.openxmlformats.org/drawingml/2006/main">
               <a:ext uri="{FF2B5EF4-FFF2-40B4-BE49-F238E27FC236}">
-                <a16:creationId xmlns:a16="http://schemas.microsoft.com/office/drawing/2014/main" id="{B130C221-A12A-4BB1-9026-516163BD265B}"/>
+                <a16:creationId xmlns:a16="http://schemas.microsoft.com/office/drawing/2014/main" id="{92003E88-C8DA-4BE6-8CE6-3A15D218A963}"/>
               </a:ext>
             </a:extLst>
           </p:cNvPr>
@@ -30418,7 +30480,7 @@
           <p:cNvPr id="21" name="">
             <a:extLst xmlns:a="http://schemas.openxmlformats.org/drawingml/2006/main">
               <a:ext uri="{FF2B5EF4-FFF2-40B4-BE49-F238E27FC236}">
-                <a16:creationId xmlns:a16="http://schemas.microsoft.com/office/drawing/2014/main" id="{91B13FFC-F445-479A-B29F-2342F679F5D3}"/>
+                <a16:creationId xmlns:a16="http://schemas.microsoft.com/office/drawing/2014/main" id="{E224BAC6-5012-44EF-A23E-CB6E0B5DD281}"/>
               </a:ext>
             </a:extLst>
           </p:cNvPr>
@@ -30453,7 +30515,7 @@
           <p:cNvPr id="22" name="">
             <a:extLst xmlns:a="http://schemas.openxmlformats.org/drawingml/2006/main">
               <a:ext uri="{FF2B5EF4-FFF2-40B4-BE49-F238E27FC236}">
-                <a16:creationId xmlns:a16="http://schemas.microsoft.com/office/drawing/2014/main" id="{E9920084-3867-4C94-AB1C-ACEBD7B1D6B3}"/>
+                <a16:creationId xmlns:a16="http://schemas.microsoft.com/office/drawing/2014/main" id="{A2FBE094-F2F2-4B98-8D54-3E719CB084E5}"/>
               </a:ext>
             </a:extLst>
           </p:cNvPr>
@@ -30515,7 +30577,7 @@
           <p:cNvPr id="23" name="">
             <a:extLst xmlns:a="http://schemas.openxmlformats.org/drawingml/2006/main">
               <a:ext uri="{FF2B5EF4-FFF2-40B4-BE49-F238E27FC236}">
-                <a16:creationId xmlns:a16="http://schemas.microsoft.com/office/drawing/2014/main" id="{F10397FE-49B9-48A7-B279-178BAE761C9C}"/>
+                <a16:creationId xmlns:a16="http://schemas.microsoft.com/office/drawing/2014/main" id="{040A113F-2B5B-4EF9-8BF9-0432D130CD06}"/>
               </a:ext>
             </a:extLst>
           </p:cNvPr>
@@ -30550,7 +30612,7 @@
           <p:cNvPr id="24" name="">
             <a:extLst xmlns:a="http://schemas.openxmlformats.org/drawingml/2006/main">
               <a:ext uri="{FF2B5EF4-FFF2-40B4-BE49-F238E27FC236}">
-                <a16:creationId xmlns:a16="http://schemas.microsoft.com/office/drawing/2014/main" id="{88D99C3B-D2D6-4877-B31D-747F5895CB79}"/>
+                <a16:creationId xmlns:a16="http://schemas.microsoft.com/office/drawing/2014/main" id="{B6E93D5F-4679-4530-8484-89A91F546EF3}"/>
               </a:ext>
             </a:extLst>
           </p:cNvPr>
@@ -30612,7 +30674,7 @@
           <p:cNvPr id="25" name="">
             <a:extLst xmlns:a="http://schemas.openxmlformats.org/drawingml/2006/main">
               <a:ext uri="{FF2B5EF4-FFF2-40B4-BE49-F238E27FC236}">
-                <a16:creationId xmlns:a16="http://schemas.microsoft.com/office/drawing/2014/main" id="{2B91100E-1B38-4294-AE45-E1149B07CF82}"/>
+                <a16:creationId xmlns:a16="http://schemas.microsoft.com/office/drawing/2014/main" id="{E7D9ACA8-E4DC-4D94-8AAD-353214062D45}"/>
               </a:ext>
             </a:extLst>
           </p:cNvPr>
@@ -30647,7 +30709,7 @@
           <p:cNvPr id="26" name="">
             <a:extLst xmlns:a="http://schemas.openxmlformats.org/drawingml/2006/main">
               <a:ext uri="{FF2B5EF4-FFF2-40B4-BE49-F238E27FC236}">
-                <a16:creationId xmlns:a16="http://schemas.microsoft.com/office/drawing/2014/main" id="{E7FABB7A-B539-4B8B-97DD-6634E1CECD50}"/>
+                <a16:creationId xmlns:a16="http://schemas.microsoft.com/office/drawing/2014/main" id="{39E6B97F-A633-46F2-8F31-4EBFD2F830CE}"/>
               </a:ext>
             </a:extLst>
           </p:cNvPr>
@@ -30709,7 +30771,7 @@
           <p:cNvPr id="27" name="">
             <a:extLst xmlns:a="http://schemas.openxmlformats.org/drawingml/2006/main">
               <a:ext uri="{FF2B5EF4-FFF2-40B4-BE49-F238E27FC236}">
-                <a16:creationId xmlns:a16="http://schemas.microsoft.com/office/drawing/2014/main" id="{F458D6FF-8131-4B89-B8EE-FB9968D44858}"/>
+                <a16:creationId xmlns:a16="http://schemas.microsoft.com/office/drawing/2014/main" id="{9E1089F1-5BB2-42F3-B39F-0961DEDBB5AC}"/>
               </a:ext>
             </a:extLst>
           </p:cNvPr>
@@ -30744,7 +30806,7 @@
           <p:cNvPr id="28" name="">
             <a:extLst xmlns:a="http://schemas.openxmlformats.org/drawingml/2006/main">
               <a:ext uri="{FF2B5EF4-FFF2-40B4-BE49-F238E27FC236}">
-                <a16:creationId xmlns:a16="http://schemas.microsoft.com/office/drawing/2014/main" id="{D55AB75B-4C96-414F-9B05-8D0A33561CF4}"/>
+                <a16:creationId xmlns:a16="http://schemas.microsoft.com/office/drawing/2014/main" id="{FB33DAD5-7D5B-49DC-BF19-783045712770}"/>
               </a:ext>
             </a:extLst>
           </p:cNvPr>
@@ -30806,7 +30868,7 @@
           <p:cNvPr id="29" name="">
             <a:extLst xmlns:a="http://schemas.openxmlformats.org/drawingml/2006/main">
               <a:ext uri="{FF2B5EF4-FFF2-40B4-BE49-F238E27FC236}">
-                <a16:creationId xmlns:a16="http://schemas.microsoft.com/office/drawing/2014/main" id="{901EF368-A090-45CA-94C0-30DDF213A686}"/>
+                <a16:creationId xmlns:a16="http://schemas.microsoft.com/office/drawing/2014/main" id="{EFA3E2EE-1CE5-4CA4-A600-EA05893FDA5B}"/>
               </a:ext>
             </a:extLst>
           </p:cNvPr>
@@ -30841,7 +30903,7 @@
           <p:cNvPr id="30" name="">
             <a:extLst xmlns:a="http://schemas.openxmlformats.org/drawingml/2006/main">
               <a:ext uri="{FF2B5EF4-FFF2-40B4-BE49-F238E27FC236}">
-                <a16:creationId xmlns:a16="http://schemas.microsoft.com/office/drawing/2014/main" id="{46BA239F-1AA8-4A94-93E4-8C24D8B644C3}"/>
+                <a16:creationId xmlns:a16="http://schemas.microsoft.com/office/drawing/2014/main" id="{55F7E0CE-FD48-4663-9964-4BE94F742EA7}"/>
               </a:ext>
             </a:extLst>
           </p:cNvPr>
@@ -30903,7 +30965,7 @@
           <p:cNvPr id="31" name="">
             <a:extLst xmlns:a="http://schemas.openxmlformats.org/drawingml/2006/main">
               <a:ext uri="{FF2B5EF4-FFF2-40B4-BE49-F238E27FC236}">
-                <a16:creationId xmlns:a16="http://schemas.microsoft.com/office/drawing/2014/main" id="{46A9B1A0-8C9A-48DB-8D96-59065D620800}"/>
+                <a16:creationId xmlns:a16="http://schemas.microsoft.com/office/drawing/2014/main" id="{E3BB4E42-C340-4162-9B4B-184ACFF61D58}"/>
               </a:ext>
             </a:extLst>
           </p:cNvPr>
@@ -30938,7 +31000,7 @@
           <p:cNvPr id="32" name="">
             <a:extLst xmlns:a="http://schemas.openxmlformats.org/drawingml/2006/main">
               <a:ext uri="{FF2B5EF4-FFF2-40B4-BE49-F238E27FC236}">
-                <a16:creationId xmlns:a16="http://schemas.microsoft.com/office/drawing/2014/main" id="{DB3B340E-F93C-4954-AEBF-F8A8FF3FA8CE}"/>
+                <a16:creationId xmlns:a16="http://schemas.microsoft.com/office/drawing/2014/main" id="{88F64313-BF2A-41F7-BBCA-3B576B380F43}"/>
               </a:ext>
             </a:extLst>
           </p:cNvPr>
@@ -31000,7 +31062,7 @@
           <p:cNvPr id="33" name="">
             <a:extLst xmlns:a="http://schemas.openxmlformats.org/drawingml/2006/main">
               <a:ext uri="{FF2B5EF4-FFF2-40B4-BE49-F238E27FC236}">
-                <a16:creationId xmlns:a16="http://schemas.microsoft.com/office/drawing/2014/main" id="{02DA50B4-C101-4E7A-870C-0B8FDE8EF202}"/>
+                <a16:creationId xmlns:a16="http://schemas.microsoft.com/office/drawing/2014/main" id="{FE5D7B71-4EBE-4548-9229-00039DC882FA}"/>
               </a:ext>
             </a:extLst>
           </p:cNvPr>
@@ -31035,7 +31097,7 @@
           <p:cNvPr id="34" name="">
             <a:extLst xmlns:a="http://schemas.openxmlformats.org/drawingml/2006/main">
               <a:ext uri="{FF2B5EF4-FFF2-40B4-BE49-F238E27FC236}">
-                <a16:creationId xmlns:a16="http://schemas.microsoft.com/office/drawing/2014/main" id="{32CE908E-F3B8-48BB-A9E5-721B77CF57A1}"/>
+                <a16:creationId xmlns:a16="http://schemas.microsoft.com/office/drawing/2014/main" id="{BB23EAE6-F2DA-4DCB-865E-D615469AA930}"/>
               </a:ext>
             </a:extLst>
           </p:cNvPr>
@@ -31097,7 +31159,7 @@
           <p:cNvPr id="35" name="">
             <a:extLst xmlns:a="http://schemas.openxmlformats.org/drawingml/2006/main">
               <a:ext uri="{FF2B5EF4-FFF2-40B4-BE49-F238E27FC236}">
-                <a16:creationId xmlns:a16="http://schemas.microsoft.com/office/drawing/2014/main" id="{77509192-52C2-416F-BCA7-8D7F34D67F11}"/>
+                <a16:creationId xmlns:a16="http://schemas.microsoft.com/office/drawing/2014/main" id="{ECDAD92F-8B23-4606-A2D9-B77C357EF616}"/>
               </a:ext>
             </a:extLst>
           </p:cNvPr>
@@ -31159,7 +31221,7 @@
           <p:cNvPr id="36" name="">
             <a:extLst xmlns:a="http://schemas.openxmlformats.org/drawingml/2006/main">
               <a:ext uri="{FF2B5EF4-FFF2-40B4-BE49-F238E27FC236}">
-                <a16:creationId xmlns:a16="http://schemas.microsoft.com/office/drawing/2014/main" id="{5E23F122-B4FD-4107-A8BF-872626737954}"/>
+                <a16:creationId xmlns:a16="http://schemas.microsoft.com/office/drawing/2014/main" id="{C78731DC-C38A-4D26-A0EB-97C8DFD5B7B9}"/>
               </a:ext>
             </a:extLst>
           </p:cNvPr>
@@ -31221,7 +31283,7 @@
           <p:cNvPr id="37" name="">
             <a:extLst xmlns:a="http://schemas.openxmlformats.org/drawingml/2006/main">
               <a:ext uri="{FF2B5EF4-FFF2-40B4-BE49-F238E27FC236}">
-                <a16:creationId xmlns:a16="http://schemas.microsoft.com/office/drawing/2014/main" id="{12C36EFD-0368-4C12-BE6A-A7FB5A27EA7B}"/>
+                <a16:creationId xmlns:a16="http://schemas.microsoft.com/office/drawing/2014/main" id="{AEFD0D03-CA8C-4AB6-A058-40B43E6EE813}"/>
               </a:ext>
             </a:extLst>
           </p:cNvPr>
@@ -31283,7 +31345,7 @@
           <p:cNvPr id="38" name="">
             <a:extLst xmlns:a="http://schemas.openxmlformats.org/drawingml/2006/main">
               <a:ext uri="{FF2B5EF4-FFF2-40B4-BE49-F238E27FC236}">
-                <a16:creationId xmlns:a16="http://schemas.microsoft.com/office/drawing/2014/main" id="{87D77036-591C-4B12-95FD-372A0AF8A0BD}"/>
+                <a16:creationId xmlns:a16="http://schemas.microsoft.com/office/drawing/2014/main" id="{B171655C-1497-4678-AC0D-74E273C1C699}"/>
               </a:ext>
             </a:extLst>
           </p:cNvPr>
@@ -31345,7 +31407,7 @@
           <p:cNvPr id="39" name="">
             <a:extLst xmlns:a="http://schemas.openxmlformats.org/drawingml/2006/main">
               <a:ext uri="{FF2B5EF4-FFF2-40B4-BE49-F238E27FC236}">
-                <a16:creationId xmlns:a16="http://schemas.microsoft.com/office/drawing/2014/main" id="{922832B1-715E-4F78-AB83-52D444033D2B}"/>
+                <a16:creationId xmlns:a16="http://schemas.microsoft.com/office/drawing/2014/main" id="{7833E8C4-0545-4063-94F7-C0ACABB929DF}"/>
               </a:ext>
             </a:extLst>
           </p:cNvPr>
@@ -31407,7 +31469,7 @@
           <p:cNvPr id="40" name="">
             <a:extLst xmlns:a="http://schemas.openxmlformats.org/drawingml/2006/main">
               <a:ext uri="{FF2B5EF4-FFF2-40B4-BE49-F238E27FC236}">
-                <a16:creationId xmlns:a16="http://schemas.microsoft.com/office/drawing/2014/main" id="{CC838ADC-6DFD-48E7-A306-7F57D0149043}"/>
+                <a16:creationId xmlns:a16="http://schemas.microsoft.com/office/drawing/2014/main" id="{09DBB9AE-EB21-44B7-A2E6-0688893D06DE}"/>
               </a:ext>
             </a:extLst>
           </p:cNvPr>
@@ -31459,7 +31521,7 @@
                 <a:ea typeface="Arial"/>
                 <a:cs typeface="Arial"/>
               </a:rPr>
-              <a:t>Build r2z-16690ccbe328 · generated 20 Aug 2026 · model service-v1-266e0b1d</a:t>
+              <a:t>Build r2z-45c4ba076af9 · generated 20 Aug 2026 · 06:25 UTC · model service-v1-266e0b1d</a:t>
             </a:r>
           </a:p>
         </p:txBody>
@@ -31469,7 +31531,7 @@
           <p:cNvPr id="41" name="">
             <a:extLst xmlns:a="http://schemas.openxmlformats.org/drawingml/2006/main">
               <a:ext uri="{FF2B5EF4-FFF2-40B4-BE49-F238E27FC236}">
-                <a16:creationId xmlns:a16="http://schemas.microsoft.com/office/drawing/2014/main" id="{FA9B3BED-2166-4179-87B4-BDB6E7F42A91}"/>
+                <a16:creationId xmlns:a16="http://schemas.microsoft.com/office/drawing/2014/main" id="{14701842-86D6-43C2-A382-42FF762D978C}"/>
               </a:ext>
             </a:extLst>
           </p:cNvPr>
@@ -31500,7 +31562,7 @@
           <p:cNvPr id="42" name="">
             <a:extLst xmlns:a="http://schemas.openxmlformats.org/drawingml/2006/main">
               <a:ext uri="{FF2B5EF4-FFF2-40B4-BE49-F238E27FC236}">
-                <a16:creationId xmlns:a16="http://schemas.microsoft.com/office/drawing/2014/main" id="{D623265D-882B-4165-808B-C17BB51D827C}"/>
+                <a16:creationId xmlns:a16="http://schemas.microsoft.com/office/drawing/2014/main" id="{19E28D1B-596D-462B-966E-510E238E61CF}"/>
               </a:ext>
             </a:extLst>
           </p:cNvPr>
@@ -31552,7 +31614,7 @@
                 <a:ea typeface="Arial"/>
                 <a:cs typeface="Arial"/>
               </a:rPr>
-              <a:t>r2z-16690ccbe328 · scn-c46e1d86c1</a:t>
+              <a:t>r2z-45c4ba076af9 · scn-e0f12f397e</a:t>
             </a:r>
           </a:p>
         </p:txBody>
@@ -31562,7 +31624,7 @@
           <p:cNvPr id="43" name="">
             <a:extLst xmlns:a="http://schemas.openxmlformats.org/drawingml/2006/main">
               <a:ext uri="{FF2B5EF4-FFF2-40B4-BE49-F238E27FC236}">
-                <a16:creationId xmlns:a16="http://schemas.microsoft.com/office/drawing/2014/main" id="{076F7AF1-45B2-4E3A-9AE6-175914BDC47A}"/>
+                <a16:creationId xmlns:a16="http://schemas.microsoft.com/office/drawing/2014/main" id="{7934E377-DB3E-4261-8BE1-6C28A716DB4B}"/>
               </a:ext>
             </a:extLst>
           </p:cNvPr>
@@ -31622,7 +31684,7 @@
     </p:spTree>
     <p:extLst>
       <p:ext uri="{BB962C8B-B14F-4D97-AF65-F5344CB8AC3E}">
-        <p14:creationId xmlns:p14="http://schemas.microsoft.com/office/powerpoint/2010/main" val="2009340610"/>
+        <p14:creationId xmlns:p14="http://schemas.microsoft.com/office/powerpoint/2010/main" val="1239244015"/>
       </p:ext>
     </p:extLst>
   </p:cSld>
@@ -31653,7 +31715,7 @@
           <p:cNvPr id="22" name="">
             <a:extLst xmlns:a="http://schemas.openxmlformats.org/drawingml/2006/main">
               <a:ext uri="{FF2B5EF4-FFF2-40B4-BE49-F238E27FC236}">
-                <a16:creationId xmlns:a16="http://schemas.microsoft.com/office/drawing/2014/main" id="{1014B106-8554-4AB1-BE7D-58E7F598D364}"/>
+                <a16:creationId xmlns:a16="http://schemas.microsoft.com/office/drawing/2014/main" id="{136880BE-635B-46CE-84E0-7173C2435400}"/>
               </a:ext>
             </a:extLst>
           </p:cNvPr>
@@ -31715,7 +31777,7 @@
                 <a:latin typeface="Arial"/>
                 <a:ea typeface="Arial"/>
                 <a:cs typeface="Arial"/>
-                <a:hlinkClick xmlns:r="http://schemas.openxmlformats.org/officeDocument/2006/relationships" r:id="R576d4f5ddc604ab5"/>
+                <a:hlinkClick xmlns:r="http://schemas.openxmlformats.org/officeDocument/2006/relationships" r:id="Ree6d049b12b348a5"/>
               </a:rPr>
               <a:t>https://github.com/qjmre23/Route2Zero</a:t>
             </a:r>
@@ -31738,7 +31800,7 @@
                 <a:latin typeface="Arial"/>
                 <a:ea typeface="Arial"/>
                 <a:cs typeface="Arial"/>
-                <a:hlinkClick xmlns:r="http://schemas.openxmlformats.org/officeDocument/2006/relationships" r:id="R2fd722bc4100452e"/>
+                <a:hlinkClick xmlns:r="http://schemas.openxmlformats.org/officeDocument/2006/relationships" r:id="R9b8c3c7c4b794ecc"/>
               </a:rPr>
               <a:t>https://route2zero.netlify.app/</a:t>
             </a:r>
@@ -31750,7 +31812,7 @@
           <p:cNvPr id="2" name="">
             <a:extLst xmlns:a="http://schemas.openxmlformats.org/drawingml/2006/main">
               <a:ext uri="{FF2B5EF4-FFF2-40B4-BE49-F238E27FC236}">
-                <a16:creationId xmlns:a16="http://schemas.microsoft.com/office/drawing/2014/main" id="{B21998B7-0120-404F-9CAB-43C3427B02CF}"/>
+                <a16:creationId xmlns:a16="http://schemas.microsoft.com/office/drawing/2014/main" id="{85F5BFC2-EDE5-4FCE-AED0-AC93621FBAE8}"/>
               </a:ext>
             </a:extLst>
           </p:cNvPr>
@@ -31812,7 +31874,7 @@
           <p:cNvPr id="3" name="">
             <a:extLst xmlns:a="http://schemas.openxmlformats.org/drawingml/2006/main">
               <a:ext uri="{FF2B5EF4-FFF2-40B4-BE49-F238E27FC236}">
-                <a16:creationId xmlns:a16="http://schemas.microsoft.com/office/drawing/2014/main" id="{A4DEF76D-6EDD-4A53-A172-BD30E4799A42}"/>
+                <a16:creationId xmlns:a16="http://schemas.microsoft.com/office/drawing/2014/main" id="{A47A01C9-D3D8-4F9D-9ACC-4AB0336A3E4C}"/>
               </a:ext>
             </a:extLst>
           </p:cNvPr>
@@ -31881,7 +31943,7 @@
         </p:xfrm>
         <a:graphic xmlns:a="http://schemas.openxmlformats.org/drawingml/2006/main">
           <a:graphicData uri="http://schemas.openxmlformats.org/drawingml/2006/chart">
-            <c:chart xmlns:r="http://schemas.openxmlformats.org/officeDocument/2006/relationships" xmlns:c="http://schemas.openxmlformats.org/drawingml/2006/chart" r:id="Rf29390c9ed694041"/>
+            <c:chart xmlns:r="http://schemas.openxmlformats.org/officeDocument/2006/relationships" xmlns:c="http://schemas.openxmlformats.org/drawingml/2006/chart" r:id="Rfb6b44fbac93473b"/>
           </a:graphicData>
         </a:graphic>
       </p:graphicFrame>
@@ -31890,7 +31952,7 @@
           <p:cNvPr id="5" name="">
             <a:extLst xmlns:a="http://schemas.openxmlformats.org/drawingml/2006/main">
               <a:ext uri="{FF2B5EF4-FFF2-40B4-BE49-F238E27FC236}">
-                <a16:creationId xmlns:a16="http://schemas.microsoft.com/office/drawing/2014/main" id="{43FD6C54-F524-4863-9618-DA151B119D30}"/>
+                <a16:creationId xmlns:a16="http://schemas.microsoft.com/office/drawing/2014/main" id="{8389A2CB-C799-41E3-A41D-D188914F70AA}"/>
               </a:ext>
             </a:extLst>
           </p:cNvPr>
@@ -31952,7 +32014,7 @@
           <p:cNvPr id="6" name="">
             <a:extLst xmlns:a="http://schemas.openxmlformats.org/drawingml/2006/main">
               <a:ext uri="{FF2B5EF4-FFF2-40B4-BE49-F238E27FC236}">
-                <a16:creationId xmlns:a16="http://schemas.microsoft.com/office/drawing/2014/main" id="{F309AD6F-649D-4703-8844-6C9F25B7FF34}"/>
+                <a16:creationId xmlns:a16="http://schemas.microsoft.com/office/drawing/2014/main" id="{DC775BE5-69FE-4B95-B599-AE6D9209A506}"/>
               </a:ext>
             </a:extLst>
           </p:cNvPr>
@@ -32014,7 +32076,7 @@
           <p:cNvPr id="7" name="">
             <a:extLst xmlns:a="http://schemas.openxmlformats.org/drawingml/2006/main">
               <a:ext uri="{FF2B5EF4-FFF2-40B4-BE49-F238E27FC236}">
-                <a16:creationId xmlns:a16="http://schemas.microsoft.com/office/drawing/2014/main" id="{77E0E497-EEC4-41F1-950D-FD944AD249D9}"/>
+                <a16:creationId xmlns:a16="http://schemas.microsoft.com/office/drawing/2014/main" id="{649D5BEF-0082-40E2-AE85-791EB798606A}"/>
               </a:ext>
             </a:extLst>
           </p:cNvPr>
@@ -32076,7 +32138,7 @@
           <p:cNvPr id="8" name="">
             <a:extLst xmlns:a="http://schemas.openxmlformats.org/drawingml/2006/main">
               <a:ext uri="{FF2B5EF4-FFF2-40B4-BE49-F238E27FC236}">
-                <a16:creationId xmlns:a16="http://schemas.microsoft.com/office/drawing/2014/main" id="{E69D3661-EDC8-4079-B5D2-F37264B714B9}"/>
+                <a16:creationId xmlns:a16="http://schemas.microsoft.com/office/drawing/2014/main" id="{D9F221C3-0F37-4900-9A5C-82CB31E09E96}"/>
               </a:ext>
             </a:extLst>
           </p:cNvPr>
@@ -32138,7 +32200,7 @@
           <p:cNvPr id="9" name="">
             <a:extLst xmlns:a="http://schemas.openxmlformats.org/drawingml/2006/main">
               <a:ext uri="{FF2B5EF4-FFF2-40B4-BE49-F238E27FC236}">
-                <a16:creationId xmlns:a16="http://schemas.microsoft.com/office/drawing/2014/main" id="{F0986E51-7695-411A-A208-356BE8CDBE19}"/>
+                <a16:creationId xmlns:a16="http://schemas.microsoft.com/office/drawing/2014/main" id="{5A2E13C3-F9D4-47A2-910D-0A8DCE914B9A}"/>
               </a:ext>
             </a:extLst>
           </p:cNvPr>
@@ -32200,7 +32262,7 @@
           <p:cNvPr id="10" name="">
             <a:extLst xmlns:a="http://schemas.openxmlformats.org/drawingml/2006/main">
               <a:ext uri="{FF2B5EF4-FFF2-40B4-BE49-F238E27FC236}">
-                <a16:creationId xmlns:a16="http://schemas.microsoft.com/office/drawing/2014/main" id="{38CDC42A-CC5D-477B-B65E-01F38734CB3E}"/>
+                <a16:creationId xmlns:a16="http://schemas.microsoft.com/office/drawing/2014/main" id="{23F3DB0E-A26C-4631-BC29-86D970490D8E}"/>
               </a:ext>
             </a:extLst>
           </p:cNvPr>
@@ -32262,7 +32324,7 @@
           <p:cNvPr id="11" name="">
             <a:extLst xmlns:a="http://schemas.openxmlformats.org/drawingml/2006/main">
               <a:ext uri="{FF2B5EF4-FFF2-40B4-BE49-F238E27FC236}">
-                <a16:creationId xmlns:a16="http://schemas.microsoft.com/office/drawing/2014/main" id="{10B86939-12C8-4999-A997-3DD488B7EF93}"/>
+                <a16:creationId xmlns:a16="http://schemas.microsoft.com/office/drawing/2014/main" id="{854CE71A-BC6F-4808-BF26-EA027F33354E}"/>
               </a:ext>
             </a:extLst>
           </p:cNvPr>
@@ -32324,7 +32386,7 @@
           <p:cNvPr id="12" name="">
             <a:extLst xmlns:a="http://schemas.openxmlformats.org/drawingml/2006/main">
               <a:ext uri="{FF2B5EF4-FFF2-40B4-BE49-F238E27FC236}">
-                <a16:creationId xmlns:a16="http://schemas.microsoft.com/office/drawing/2014/main" id="{F53D7FDD-99BE-4291-AFBE-1F2943C4A71E}"/>
+                <a16:creationId xmlns:a16="http://schemas.microsoft.com/office/drawing/2014/main" id="{C728A00C-275E-49BC-9140-CBD7BE9D68A8}"/>
               </a:ext>
             </a:extLst>
           </p:cNvPr>
@@ -32386,7 +32448,7 @@
           <p:cNvPr id="13" name="">
             <a:extLst xmlns:a="http://schemas.openxmlformats.org/drawingml/2006/main">
               <a:ext uri="{FF2B5EF4-FFF2-40B4-BE49-F238E27FC236}">
-                <a16:creationId xmlns:a16="http://schemas.microsoft.com/office/drawing/2014/main" id="{08471B09-5B46-450E-AA58-9B30FF2D7B9C}"/>
+                <a16:creationId xmlns:a16="http://schemas.microsoft.com/office/drawing/2014/main" id="{825E10A3-9A1A-4AE2-AB7A-DB3CDBC895D7}"/>
               </a:ext>
             </a:extLst>
           </p:cNvPr>
@@ -32448,7 +32510,7 @@
           <p:cNvPr id="14" name="">
             <a:extLst xmlns:a="http://schemas.openxmlformats.org/drawingml/2006/main">
               <a:ext uri="{FF2B5EF4-FFF2-40B4-BE49-F238E27FC236}">
-                <a16:creationId xmlns:a16="http://schemas.microsoft.com/office/drawing/2014/main" id="{A143807F-EB03-492F-A0B4-3E900B5D0C74}"/>
+                <a16:creationId xmlns:a16="http://schemas.microsoft.com/office/drawing/2014/main" id="{12F7EE6B-FB68-43B0-895F-2E87EBA68C94}"/>
               </a:ext>
             </a:extLst>
           </p:cNvPr>
@@ -32510,7 +32572,7 @@
           <p:cNvPr id="15" name="">
             <a:extLst xmlns:a="http://schemas.openxmlformats.org/drawingml/2006/main">
               <a:ext uri="{FF2B5EF4-FFF2-40B4-BE49-F238E27FC236}">
-                <a16:creationId xmlns:a16="http://schemas.microsoft.com/office/drawing/2014/main" id="{6B1F6E50-140B-449B-8B04-BD64BCF28434}"/>
+                <a16:creationId xmlns:a16="http://schemas.microsoft.com/office/drawing/2014/main" id="{826E44E4-B755-4502-BCA2-010C80DC2803}"/>
               </a:ext>
             </a:extLst>
           </p:cNvPr>
@@ -32572,7 +32634,7 @@
           <p:cNvPr id="16" name="">
             <a:extLst xmlns:a="http://schemas.openxmlformats.org/drawingml/2006/main">
               <a:ext uri="{FF2B5EF4-FFF2-40B4-BE49-F238E27FC236}">
-                <a16:creationId xmlns:a16="http://schemas.microsoft.com/office/drawing/2014/main" id="{AAC2CADC-95CA-4B28-BE77-AAA79AD90FE1}"/>
+                <a16:creationId xmlns:a16="http://schemas.microsoft.com/office/drawing/2014/main" id="{A2A8E4C4-E992-4CD5-BD05-454B0D726B83}"/>
               </a:ext>
             </a:extLst>
           </p:cNvPr>
@@ -32605,7 +32667,7 @@
           <p:cNvPr id="17" name="">
             <a:extLst xmlns:a="http://schemas.openxmlformats.org/drawingml/2006/main">
               <a:ext uri="{FF2B5EF4-FFF2-40B4-BE49-F238E27FC236}">
-                <a16:creationId xmlns:a16="http://schemas.microsoft.com/office/drawing/2014/main" id="{2F04F7A7-9710-425C-8E71-2549822DA3EE}"/>
+                <a16:creationId xmlns:a16="http://schemas.microsoft.com/office/drawing/2014/main" id="{89CC74B7-5452-4158-BFE2-009A948379DA}"/>
               </a:ext>
             </a:extLst>
           </p:cNvPr>
@@ -32667,7 +32729,7 @@
           <p:cNvPr id="18" name="">
             <a:extLst xmlns:a="http://schemas.openxmlformats.org/drawingml/2006/main">
               <a:ext uri="{FF2B5EF4-FFF2-40B4-BE49-F238E27FC236}">
-                <a16:creationId xmlns:a16="http://schemas.microsoft.com/office/drawing/2014/main" id="{F6888F74-9269-4858-ADA5-2069C14F6970}"/>
+                <a16:creationId xmlns:a16="http://schemas.microsoft.com/office/drawing/2014/main" id="{F4FCC6E7-4E8A-4BA3-BB6F-6F05511AE2D0}"/>
               </a:ext>
             </a:extLst>
           </p:cNvPr>
@@ -32729,7 +32791,7 @@
           <p:cNvPr id="19" name="">
             <a:extLst xmlns:a="http://schemas.openxmlformats.org/drawingml/2006/main">
               <a:ext uri="{FF2B5EF4-FFF2-40B4-BE49-F238E27FC236}">
-                <a16:creationId xmlns:a16="http://schemas.microsoft.com/office/drawing/2014/main" id="{9DEB32C7-37B0-440E-9600-2F8ED9DE2A3F}"/>
+                <a16:creationId xmlns:a16="http://schemas.microsoft.com/office/drawing/2014/main" id="{DA5318F5-4F9E-4F9B-8F47-738CA2844F21}"/>
               </a:ext>
             </a:extLst>
           </p:cNvPr>
@@ -32760,7 +32822,7 @@
           <p:cNvPr id="20" name="">
             <a:extLst xmlns:a="http://schemas.openxmlformats.org/drawingml/2006/main">
               <a:ext uri="{FF2B5EF4-FFF2-40B4-BE49-F238E27FC236}">
-                <a16:creationId xmlns:a16="http://schemas.microsoft.com/office/drawing/2014/main" id="{5F143C79-9933-49D5-B6DB-FF07010E230F}"/>
+                <a16:creationId xmlns:a16="http://schemas.microsoft.com/office/drawing/2014/main" id="{D6E10939-9787-44A1-BEC3-F9DBA902BD46}"/>
               </a:ext>
             </a:extLst>
           </p:cNvPr>
@@ -32812,7 +32874,7 @@
                 <a:ea typeface="Arial"/>
                 <a:cs typeface="Arial"/>
               </a:rPr>
-              <a:t>r2z-16690ccbe328 · scn-c46e1d86c1</a:t>
+              <a:t>r2z-45c4ba076af9 · scn-e0f12f397e</a:t>
             </a:r>
           </a:p>
         </p:txBody>
@@ -32822,7 +32884,7 @@
           <p:cNvPr id="21" name="">
             <a:extLst xmlns:a="http://schemas.openxmlformats.org/drawingml/2006/main">
               <a:ext uri="{FF2B5EF4-FFF2-40B4-BE49-F238E27FC236}">
-                <a16:creationId xmlns:a16="http://schemas.microsoft.com/office/drawing/2014/main" id="{BE80E030-2EEC-4C76-9EAA-C5B016CBFF90}"/>
+                <a16:creationId xmlns:a16="http://schemas.microsoft.com/office/drawing/2014/main" id="{2A1B3554-EADE-42AA-99BA-8DA7281B57BC}"/>
               </a:ext>
             </a:extLst>
           </p:cNvPr>
@@ -32882,7 +32944,7 @@
     </p:spTree>
     <p:extLst>
       <p:ext uri="{BB962C8B-B14F-4D97-AF65-F5344CB8AC3E}">
-        <p14:creationId xmlns:p14="http://schemas.microsoft.com/office/powerpoint/2010/main" val="164753096"/>
+        <p14:creationId xmlns:p14="http://schemas.microsoft.com/office/powerpoint/2010/main" val="2100485499"/>
       </p:ext>
     </p:extLst>
   </p:cSld>

--- a/output/submission/Route2Zero_Concept_Deck_20_Slides.pptx
+++ b/output/submission/Route2Zero_Concept_Deck_20_Slides.pptx
@@ -2,32 +2,32 @@
 <file path=ppt/presentation.xml><?xml version="1.0" encoding="utf-8"?>
 <p:presentation xmlns:p="http://schemas.openxmlformats.org/presentationml/2006/main">
   <p:sldMasterIdLst>
-    <p:sldMasterId xmlns:r="http://schemas.openxmlformats.org/officeDocument/2006/relationships" id="2147483648" r:id="R9d51720c422b4aca"/>
+    <p:sldMasterId xmlns:r="http://schemas.openxmlformats.org/officeDocument/2006/relationships" id="2147483648" r:id="R6f40c9b330414ae8"/>
   </p:sldMasterIdLst>
   <p:notesMasterIdLst>
-    <p:notesMasterId xmlns:r="http://schemas.openxmlformats.org/officeDocument/2006/relationships" r:id="R8400621c1dcc452c"/>
+    <p:notesMasterId xmlns:r="http://schemas.openxmlformats.org/officeDocument/2006/relationships" r:id="R12879fff0cac4545"/>
   </p:notesMasterIdLst>
   <p:sldIdLst>
-    <p:sldId xmlns:r="http://schemas.openxmlformats.org/officeDocument/2006/relationships" id="256" r:id="R37328b997f104366"/>
-    <p:sldId xmlns:r="http://schemas.openxmlformats.org/officeDocument/2006/relationships" id="257" r:id="Ra754cd39fbab4066"/>
-    <p:sldId xmlns:r="http://schemas.openxmlformats.org/officeDocument/2006/relationships" id="258" r:id="R84a5cf74388245f7"/>
-    <p:sldId xmlns:r="http://schemas.openxmlformats.org/officeDocument/2006/relationships" id="259" r:id="R3e9288a594a844b9"/>
-    <p:sldId xmlns:r="http://schemas.openxmlformats.org/officeDocument/2006/relationships" id="260" r:id="Rbc96a8d27b8a4302"/>
-    <p:sldId xmlns:r="http://schemas.openxmlformats.org/officeDocument/2006/relationships" id="261" r:id="R84f3fac8812f4f7c"/>
-    <p:sldId xmlns:r="http://schemas.openxmlformats.org/officeDocument/2006/relationships" id="262" r:id="R4d84563451d1471c"/>
-    <p:sldId xmlns:r="http://schemas.openxmlformats.org/officeDocument/2006/relationships" id="263" r:id="R6a426ec3192e4fd7"/>
-    <p:sldId xmlns:r="http://schemas.openxmlformats.org/officeDocument/2006/relationships" id="264" r:id="Rcfe3fe1a09c6453f"/>
-    <p:sldId xmlns:r="http://schemas.openxmlformats.org/officeDocument/2006/relationships" id="265" r:id="R4f6bee92eb9d47f4"/>
-    <p:sldId xmlns:r="http://schemas.openxmlformats.org/officeDocument/2006/relationships" id="266" r:id="Re7fd9a8fbcd94e82"/>
-    <p:sldId xmlns:r="http://schemas.openxmlformats.org/officeDocument/2006/relationships" id="267" r:id="Rf747abfc4b804be3"/>
-    <p:sldId xmlns:r="http://schemas.openxmlformats.org/officeDocument/2006/relationships" id="268" r:id="Rdcf3da53dfc64ce5"/>
-    <p:sldId xmlns:r="http://schemas.openxmlformats.org/officeDocument/2006/relationships" id="269" r:id="R29dfd9d043534552"/>
-    <p:sldId xmlns:r="http://schemas.openxmlformats.org/officeDocument/2006/relationships" id="270" r:id="R9f8c45448adb4d8c"/>
-    <p:sldId xmlns:r="http://schemas.openxmlformats.org/officeDocument/2006/relationships" id="271" r:id="Rf1ad94c36f6e4683"/>
-    <p:sldId xmlns:r="http://schemas.openxmlformats.org/officeDocument/2006/relationships" id="272" r:id="Rc7ed42e4eb964d23"/>
-    <p:sldId xmlns:r="http://schemas.openxmlformats.org/officeDocument/2006/relationships" id="273" r:id="R70bc3292e85e4aa3"/>
-    <p:sldId xmlns:r="http://schemas.openxmlformats.org/officeDocument/2006/relationships" id="274" r:id="R393ea02a913342cf"/>
-    <p:sldId xmlns:r="http://schemas.openxmlformats.org/officeDocument/2006/relationships" id="275" r:id="R124c1d3e930943ff"/>
+    <p:sldId xmlns:r="http://schemas.openxmlformats.org/officeDocument/2006/relationships" id="256" r:id="R31bb4d1a19a44f64"/>
+    <p:sldId xmlns:r="http://schemas.openxmlformats.org/officeDocument/2006/relationships" id="257" r:id="R2376cdaa709c4365"/>
+    <p:sldId xmlns:r="http://schemas.openxmlformats.org/officeDocument/2006/relationships" id="258" r:id="R7c7897a0da3a498d"/>
+    <p:sldId xmlns:r="http://schemas.openxmlformats.org/officeDocument/2006/relationships" id="259" r:id="R98218d7f75694fbe"/>
+    <p:sldId xmlns:r="http://schemas.openxmlformats.org/officeDocument/2006/relationships" id="260" r:id="Rf02799c4f38c439d"/>
+    <p:sldId xmlns:r="http://schemas.openxmlformats.org/officeDocument/2006/relationships" id="261" r:id="R283132f00d574faa"/>
+    <p:sldId xmlns:r="http://schemas.openxmlformats.org/officeDocument/2006/relationships" id="262" r:id="R2accf07b0c3744d8"/>
+    <p:sldId xmlns:r="http://schemas.openxmlformats.org/officeDocument/2006/relationships" id="263" r:id="R453180bed6694c26"/>
+    <p:sldId xmlns:r="http://schemas.openxmlformats.org/officeDocument/2006/relationships" id="264" r:id="Rdaf80e864fbf43f7"/>
+    <p:sldId xmlns:r="http://schemas.openxmlformats.org/officeDocument/2006/relationships" id="265" r:id="Rff2f9a099c1746c8"/>
+    <p:sldId xmlns:r="http://schemas.openxmlformats.org/officeDocument/2006/relationships" id="266" r:id="R981b3da178784cb5"/>
+    <p:sldId xmlns:r="http://schemas.openxmlformats.org/officeDocument/2006/relationships" id="267" r:id="R215f6ddb74d24aea"/>
+    <p:sldId xmlns:r="http://schemas.openxmlformats.org/officeDocument/2006/relationships" id="268" r:id="Ra91028f7feb0491f"/>
+    <p:sldId xmlns:r="http://schemas.openxmlformats.org/officeDocument/2006/relationships" id="269" r:id="Rae3a9675c38f43fb"/>
+    <p:sldId xmlns:r="http://schemas.openxmlformats.org/officeDocument/2006/relationships" id="270" r:id="R2936e280edaf44e4"/>
+    <p:sldId xmlns:r="http://schemas.openxmlformats.org/officeDocument/2006/relationships" id="271" r:id="Rac26ba97536241c0"/>
+    <p:sldId xmlns:r="http://schemas.openxmlformats.org/officeDocument/2006/relationships" id="272" r:id="Rdcc4b0f7eeed430f"/>
+    <p:sldId xmlns:r="http://schemas.openxmlformats.org/officeDocument/2006/relationships" id="273" r:id="Ra9deccfc39e2484d"/>
+    <p:sldId xmlns:r="http://schemas.openxmlformats.org/officeDocument/2006/relationships" id="274" r:id="R62b8482ab6154703"/>
+    <p:sldId xmlns:r="http://schemas.openxmlformats.org/officeDocument/2006/relationships" id="275" r:id="Rf373a00fa38e4abe"/>
   </p:sldIdLst>
   <p:sldSz cx="12192000" cy="6858000"/>
   <p:notesSz cx="6858000" cy="9144000"/>
@@ -2054,7 +2054,7 @@
   </p:cSld>
   <p:clrMap bg1="lt1" tx1="dk1" bg2="lt2" tx2="dk2" accent1="accent1" accent2="accent2" accent3="accent3" accent4="accent4" accent5="accent5" accent6="accent6" hlink="hlink" folHlink="folHlink"/>
   <p:sldLayoutIdLst>
-    <p:sldLayoutId xmlns:r="http://schemas.openxmlformats.org/officeDocument/2006/relationships" id="2147483649" r:id="R0f59af58fe854404"/>
+    <p:sldLayoutId xmlns:r="http://schemas.openxmlformats.org/officeDocument/2006/relationships" id="2147483649" r:id="Re90557adb98b4dc5"/>
   </p:sldLayoutIdLst>
   <p:txStyles>
     <p:titleStyle>
@@ -3202,7 +3202,7 @@
           <p:nvPr/>
         </p:nvPicPr>
         <p:blipFill>
-          <a:blip xmlns:r="http://schemas.openxmlformats.org/officeDocument/2006/relationships" xmlns:a="http://schemas.openxmlformats.org/drawingml/2006/main" r:embed="R60eab6d35297441e"/>
+          <a:blip xmlns:r="http://schemas.openxmlformats.org/officeDocument/2006/relationships" xmlns:a="http://schemas.openxmlformats.org/drawingml/2006/main" r:embed="R1f659b967c304e94"/>
           <a:srcRect xmlns:a="http://schemas.openxmlformats.org/drawingml/2006/main" l="22750" t="0" r="22750" b="0"/>
           <a:stretch xmlns:a="http://schemas.openxmlformats.org/drawingml/2006/main">
             <a:fillRect l="0" t="0" r="0" b="0"/>
@@ -3223,7 +3223,7 @@
           <p:cNvPr id="2" name="">
             <a:extLst xmlns:a="http://schemas.openxmlformats.org/drawingml/2006/main">
               <a:ext uri="{FF2B5EF4-FFF2-40B4-BE49-F238E27FC236}">
-                <a16:creationId xmlns:a16="http://schemas.microsoft.com/office/drawing/2014/main" id="{8FB0304A-D557-44E3-BF84-16D155016C0D}"/>
+                <a16:creationId xmlns:a16="http://schemas.microsoft.com/office/drawing/2014/main" id="{060C67A1-BE59-4AD7-A6C2-6AD5B623A1DF}"/>
               </a:ext>
             </a:extLst>
           </p:cNvPr>
@@ -3269,7 +3269,7 @@
           <p:cNvPr id="3" name="">
             <a:extLst xmlns:a="http://schemas.openxmlformats.org/drawingml/2006/main">
               <a:ext uri="{FF2B5EF4-FFF2-40B4-BE49-F238E27FC236}">
-                <a16:creationId xmlns:a16="http://schemas.microsoft.com/office/drawing/2014/main" id="{7BD55893-D84D-49A9-8526-57C1567DDFB5}"/>
+                <a16:creationId xmlns:a16="http://schemas.microsoft.com/office/drawing/2014/main" id="{BA588BA6-EBBA-492E-BD55-73FF84614955}"/>
               </a:ext>
             </a:extLst>
           </p:cNvPr>
@@ -3331,7 +3331,7 @@
                 <a:latin typeface="Arial"/>
                 <a:ea typeface="Arial"/>
                 <a:cs typeface="Arial"/>
-                <a:hlinkClick xmlns:r="http://schemas.openxmlformats.org/officeDocument/2006/relationships" r:id="R04be7f3db49b4b93"/>
+                <a:hlinkClick xmlns:r="http://schemas.openxmlformats.org/officeDocument/2006/relationships" r:id="R7bdd43cf478f4a6e"/>
               </a:rPr>
               <a:t>https://github.com/qjmre23/Route2Zero</a:t>
             </a:r>
@@ -3354,7 +3354,7 @@
                 <a:latin typeface="Arial"/>
                 <a:ea typeface="Arial"/>
                 <a:cs typeface="Arial"/>
-                <a:hlinkClick xmlns:r="http://schemas.openxmlformats.org/officeDocument/2006/relationships" r:id="Re04dbe2b2b0e4c2b"/>
+                <a:hlinkClick xmlns:r="http://schemas.openxmlformats.org/officeDocument/2006/relationships" r:id="R4845979e1ebe4b3a"/>
               </a:rPr>
               <a:t>https://route2zero.netlify.app/</a:t>
             </a:r>
@@ -3366,7 +3366,7 @@
           <p:cNvPr id="4" name="">
             <a:extLst xmlns:a="http://schemas.openxmlformats.org/drawingml/2006/main">
               <a:ext uri="{FF2B5EF4-FFF2-40B4-BE49-F238E27FC236}">
-                <a16:creationId xmlns:a16="http://schemas.microsoft.com/office/drawing/2014/main" id="{632A2545-30B4-46FC-A4CF-EF8E44570BC0}"/>
+                <a16:creationId xmlns:a16="http://schemas.microsoft.com/office/drawing/2014/main" id="{56E112B2-94AD-4ABE-AB4F-C404383B2475}"/>
               </a:ext>
             </a:extLst>
           </p:cNvPr>
@@ -3428,7 +3428,7 @@
           <p:cNvPr id="5" name="">
             <a:extLst xmlns:a="http://schemas.openxmlformats.org/drawingml/2006/main">
               <a:ext uri="{FF2B5EF4-FFF2-40B4-BE49-F238E27FC236}">
-                <a16:creationId xmlns:a16="http://schemas.microsoft.com/office/drawing/2014/main" id="{4F16D514-035D-46D1-896D-3F2CA82AEC29}"/>
+                <a16:creationId xmlns:a16="http://schemas.microsoft.com/office/drawing/2014/main" id="{2A34623C-2C03-4E82-8BCD-A4768A1061B7}"/>
               </a:ext>
             </a:extLst>
           </p:cNvPr>
@@ -3490,7 +3490,7 @@
           <p:cNvPr id="6" name="">
             <a:extLst xmlns:a="http://schemas.openxmlformats.org/drawingml/2006/main">
               <a:ext uri="{FF2B5EF4-FFF2-40B4-BE49-F238E27FC236}">
-                <a16:creationId xmlns:a16="http://schemas.microsoft.com/office/drawing/2014/main" id="{F9C61742-0072-4A88-A951-C66CF3E29C7E}"/>
+                <a16:creationId xmlns:a16="http://schemas.microsoft.com/office/drawing/2014/main" id="{D613787B-43F0-4EB2-89F0-E5568F2246D9}"/>
               </a:ext>
             </a:extLst>
           </p:cNvPr>
@@ -3552,7 +3552,7 @@
           <p:cNvPr id="7" name="">
             <a:extLst xmlns:a="http://schemas.openxmlformats.org/drawingml/2006/main">
               <a:ext uri="{FF2B5EF4-FFF2-40B4-BE49-F238E27FC236}">
-                <a16:creationId xmlns:a16="http://schemas.microsoft.com/office/drawing/2014/main" id="{E0A188DD-FBBA-4D8E-8744-DCE2700DEB4C}"/>
+                <a16:creationId xmlns:a16="http://schemas.microsoft.com/office/drawing/2014/main" id="{3395629C-A757-4BF9-AF51-83C63D7A5F72}"/>
               </a:ext>
             </a:extLst>
           </p:cNvPr>
@@ -3614,7 +3614,7 @@
           <p:cNvPr id="8" name="">
             <a:extLst xmlns:a="http://schemas.openxmlformats.org/drawingml/2006/main">
               <a:ext uri="{FF2B5EF4-FFF2-40B4-BE49-F238E27FC236}">
-                <a16:creationId xmlns:a16="http://schemas.microsoft.com/office/drawing/2014/main" id="{E07F0C92-3826-4B1A-9E36-1DFEC29933ED}"/>
+                <a16:creationId xmlns:a16="http://schemas.microsoft.com/office/drawing/2014/main" id="{69995696-B2FC-4396-91E9-15513382BFB4}"/>
               </a:ext>
             </a:extLst>
           </p:cNvPr>
@@ -3676,7 +3676,7 @@
           <p:cNvPr id="9" name="">
             <a:extLst xmlns:a="http://schemas.openxmlformats.org/drawingml/2006/main">
               <a:ext uri="{FF2B5EF4-FFF2-40B4-BE49-F238E27FC236}">
-                <a16:creationId xmlns:a16="http://schemas.microsoft.com/office/drawing/2014/main" id="{3BCE7992-E52F-4E87-A475-6423A0006332}"/>
+                <a16:creationId xmlns:a16="http://schemas.microsoft.com/office/drawing/2014/main" id="{1634768D-A707-489E-9215-25194A05B027}"/>
               </a:ext>
             </a:extLst>
           </p:cNvPr>
@@ -3738,7 +3738,7 @@
           <p:cNvPr id="10" name="">
             <a:extLst xmlns:a="http://schemas.openxmlformats.org/drawingml/2006/main">
               <a:ext uri="{FF2B5EF4-FFF2-40B4-BE49-F238E27FC236}">
-                <a16:creationId xmlns:a16="http://schemas.microsoft.com/office/drawing/2014/main" id="{3A77E719-591C-4A4C-BC28-2EC0EA25A102}"/>
+                <a16:creationId xmlns:a16="http://schemas.microsoft.com/office/drawing/2014/main" id="{1C0C6F01-1F7B-43AB-A3CB-41E761D91647}"/>
               </a:ext>
             </a:extLst>
           </p:cNvPr>
@@ -3800,7 +3800,7 @@
           <p:cNvPr id="11" name="">
             <a:extLst xmlns:a="http://schemas.openxmlformats.org/drawingml/2006/main">
               <a:ext uri="{FF2B5EF4-FFF2-40B4-BE49-F238E27FC236}">
-                <a16:creationId xmlns:a16="http://schemas.microsoft.com/office/drawing/2014/main" id="{E61955B2-50C8-4310-B1C0-305C4709CB33}"/>
+                <a16:creationId xmlns:a16="http://schemas.microsoft.com/office/drawing/2014/main" id="{C4C826EA-8EB7-4CAC-B79A-8F7B59209A04}"/>
               </a:ext>
             </a:extLst>
           </p:cNvPr>
@@ -3862,7 +3862,7 @@
           <p:cNvPr id="12" name="">
             <a:extLst xmlns:a="http://schemas.openxmlformats.org/drawingml/2006/main">
               <a:ext uri="{FF2B5EF4-FFF2-40B4-BE49-F238E27FC236}">
-                <a16:creationId xmlns:a16="http://schemas.microsoft.com/office/drawing/2014/main" id="{7FEE7DE6-48D4-4C77-AC14-026FE25A9281}"/>
+                <a16:creationId xmlns:a16="http://schemas.microsoft.com/office/drawing/2014/main" id="{1DE82EEB-5988-47BC-899A-7EF4F8C11517}"/>
               </a:ext>
             </a:extLst>
           </p:cNvPr>
@@ -3924,7 +3924,7 @@
           <p:cNvPr id="13" name="">
             <a:extLst xmlns:a="http://schemas.openxmlformats.org/drawingml/2006/main">
               <a:ext uri="{FF2B5EF4-FFF2-40B4-BE49-F238E27FC236}">
-                <a16:creationId xmlns:a16="http://schemas.microsoft.com/office/drawing/2014/main" id="{A2032D75-33AE-457B-8CC6-01419F05EB09}"/>
+                <a16:creationId xmlns:a16="http://schemas.microsoft.com/office/drawing/2014/main" id="{15A778B3-F05D-4D33-B6B7-94B8243C4728}"/>
               </a:ext>
             </a:extLst>
           </p:cNvPr>
@@ -3986,7 +3986,7 @@
           <p:cNvPr id="14" name="">
             <a:extLst xmlns:a="http://schemas.openxmlformats.org/drawingml/2006/main">
               <a:ext uri="{FF2B5EF4-FFF2-40B4-BE49-F238E27FC236}">
-                <a16:creationId xmlns:a16="http://schemas.microsoft.com/office/drawing/2014/main" id="{63259D81-0291-43A6-9B4A-81D6C5F43CE3}"/>
+                <a16:creationId xmlns:a16="http://schemas.microsoft.com/office/drawing/2014/main" id="{CB26E7C5-AD0F-45BC-9CB1-94223B1D60CE}"/>
               </a:ext>
             </a:extLst>
           </p:cNvPr>
@@ -4017,7 +4017,7 @@
           <p:cNvPr id="15" name="">
             <a:extLst xmlns:a="http://schemas.openxmlformats.org/drawingml/2006/main">
               <a:ext uri="{FF2B5EF4-FFF2-40B4-BE49-F238E27FC236}">
-                <a16:creationId xmlns:a16="http://schemas.microsoft.com/office/drawing/2014/main" id="{F1F79F5D-BAE1-465D-BC91-DE96FD649E87}"/>
+                <a16:creationId xmlns:a16="http://schemas.microsoft.com/office/drawing/2014/main" id="{1C60B014-798C-4AA5-8B24-7A348F898AAE}"/>
               </a:ext>
             </a:extLst>
           </p:cNvPr>
@@ -4079,7 +4079,7 @@
           <p:cNvPr id="16" name="">
             <a:extLst xmlns:a="http://schemas.openxmlformats.org/drawingml/2006/main">
               <a:ext uri="{FF2B5EF4-FFF2-40B4-BE49-F238E27FC236}">
-                <a16:creationId xmlns:a16="http://schemas.microsoft.com/office/drawing/2014/main" id="{DC468937-4989-4DA0-8224-CD6F448FCCFB}"/>
+                <a16:creationId xmlns:a16="http://schemas.microsoft.com/office/drawing/2014/main" id="{FB5C1CA6-ECFE-4C99-A1AE-D293C11D332E}"/>
               </a:ext>
             </a:extLst>
           </p:cNvPr>
@@ -4139,7 +4139,7 @@
     </p:spTree>
     <p:extLst>
       <p:ext uri="{BB962C8B-B14F-4D97-AF65-F5344CB8AC3E}">
-        <p14:creationId xmlns:p14="http://schemas.microsoft.com/office/powerpoint/2010/main" val="1089876524"/>
+        <p14:creationId xmlns:p14="http://schemas.microsoft.com/office/powerpoint/2010/main" val="1348465658"/>
       </p:ext>
     </p:extLst>
   </p:cSld>
@@ -4170,7 +4170,7 @@
           <p:cNvPr id="14" name="">
             <a:extLst xmlns:a="http://schemas.openxmlformats.org/drawingml/2006/main">
               <a:ext uri="{FF2B5EF4-FFF2-40B4-BE49-F238E27FC236}">
-                <a16:creationId xmlns:a16="http://schemas.microsoft.com/office/drawing/2014/main" id="{A0D79C56-9AF8-4F5E-9E6F-687AC734D47E}"/>
+                <a16:creationId xmlns:a16="http://schemas.microsoft.com/office/drawing/2014/main" id="{CB615EE7-E5D4-45FB-886B-E6B97CCE475A}"/>
               </a:ext>
             </a:extLst>
           </p:cNvPr>
@@ -4232,7 +4232,7 @@
                 <a:latin typeface="Arial"/>
                 <a:ea typeface="Arial"/>
                 <a:cs typeface="Arial"/>
-                <a:hlinkClick xmlns:r="http://schemas.openxmlformats.org/officeDocument/2006/relationships" r:id="R08e89a2d857f41c9"/>
+                <a:hlinkClick xmlns:r="http://schemas.openxmlformats.org/officeDocument/2006/relationships" r:id="Rb72510315b21471b"/>
               </a:rPr>
               <a:t>https://github.com/qjmre23/Route2Zero</a:t>
             </a:r>
@@ -4255,7 +4255,7 @@
                 <a:latin typeface="Arial"/>
                 <a:ea typeface="Arial"/>
                 <a:cs typeface="Arial"/>
-                <a:hlinkClick xmlns:r="http://schemas.openxmlformats.org/officeDocument/2006/relationships" r:id="Rb84cb92e7cee4677"/>
+                <a:hlinkClick xmlns:r="http://schemas.openxmlformats.org/officeDocument/2006/relationships" r:id="R7c7b20009e064e09"/>
               </a:rPr>
               <a:t>https://route2zero.netlify.app/</a:t>
             </a:r>
@@ -4267,7 +4267,7 @@
           <p:cNvPr id="2" name="">
             <a:extLst xmlns:a="http://schemas.openxmlformats.org/drawingml/2006/main">
               <a:ext uri="{FF2B5EF4-FFF2-40B4-BE49-F238E27FC236}">
-                <a16:creationId xmlns:a16="http://schemas.microsoft.com/office/drawing/2014/main" id="{CEAE0A47-4B80-4515-B200-836E5ABDF881}"/>
+                <a16:creationId xmlns:a16="http://schemas.microsoft.com/office/drawing/2014/main" id="{49D5802E-265F-4E4F-9CD0-AF3641A1947A}"/>
               </a:ext>
             </a:extLst>
           </p:cNvPr>
@@ -4329,7 +4329,7 @@
           <p:cNvPr id="3" name="">
             <a:extLst xmlns:a="http://schemas.openxmlformats.org/drawingml/2006/main">
               <a:ext uri="{FF2B5EF4-FFF2-40B4-BE49-F238E27FC236}">
-                <a16:creationId xmlns:a16="http://schemas.microsoft.com/office/drawing/2014/main" id="{077346B6-F116-415C-9137-2416C84FD142}"/>
+                <a16:creationId xmlns:a16="http://schemas.microsoft.com/office/drawing/2014/main" id="{397FC758-054B-4C1B-BF36-4C2D35E24D78}"/>
               </a:ext>
             </a:extLst>
           </p:cNvPr>
@@ -4395,7 +4395,7 @@
           <p:nvPr/>
         </p:nvPicPr>
         <p:blipFill>
-          <a:blip xmlns:r="http://schemas.openxmlformats.org/officeDocument/2006/relationships" xmlns:a="http://schemas.openxmlformats.org/drawingml/2006/main" r:embed="R55f297f961064b7b"/>
+          <a:blip xmlns:r="http://schemas.openxmlformats.org/officeDocument/2006/relationships" xmlns:a="http://schemas.openxmlformats.org/drawingml/2006/main" r:embed="R3d90a5602a0b49cc"/>
           <a:srcRect xmlns:a="http://schemas.openxmlformats.org/drawingml/2006/main" l="0" t="189" r="0" b="189"/>
           <a:stretch xmlns:a="http://schemas.openxmlformats.org/drawingml/2006/main">
             <a:fillRect l="0" t="0" r="0" b="0"/>
@@ -4418,7 +4418,7 @@
           <p:cNvPr id="5" name="">
             <a:extLst xmlns:a="http://schemas.openxmlformats.org/drawingml/2006/main">
               <a:ext uri="{FF2B5EF4-FFF2-40B4-BE49-F238E27FC236}">
-                <a16:creationId xmlns:a16="http://schemas.microsoft.com/office/drawing/2014/main" id="{1CBE3B82-4784-41CD-86F2-1404F4E780CE}"/>
+                <a16:creationId xmlns:a16="http://schemas.microsoft.com/office/drawing/2014/main" id="{ECA38166-4B2B-4322-8955-CFF72F5EB3E9}"/>
               </a:ext>
             </a:extLst>
           </p:cNvPr>
@@ -4458,7 +4458,7 @@
         </p:xfrm>
         <a:graphic xmlns:a="http://schemas.openxmlformats.org/drawingml/2006/main">
           <a:graphicData uri="http://schemas.openxmlformats.org/drawingml/2006/chart">
-            <c:chart xmlns:r="http://schemas.openxmlformats.org/officeDocument/2006/relationships" xmlns:c="http://schemas.openxmlformats.org/drawingml/2006/chart" r:id="R010a3ceea9f4455f"/>
+            <c:chart xmlns:r="http://schemas.openxmlformats.org/officeDocument/2006/relationships" xmlns:c="http://schemas.openxmlformats.org/drawingml/2006/chart" r:id="R05e24c46505d4db8"/>
           </a:graphicData>
         </a:graphic>
       </p:graphicFrame>
@@ -4467,7 +4467,7 @@
           <p:cNvPr id="7" name="">
             <a:extLst xmlns:a="http://schemas.openxmlformats.org/drawingml/2006/main">
               <a:ext uri="{FF2B5EF4-FFF2-40B4-BE49-F238E27FC236}">
-                <a16:creationId xmlns:a16="http://schemas.microsoft.com/office/drawing/2014/main" id="{84AAFF79-0A17-4FF0-B9C2-4C38CD3B09C4}"/>
+                <a16:creationId xmlns:a16="http://schemas.microsoft.com/office/drawing/2014/main" id="{1242BA56-6394-4C82-A428-2F3E00404181}"/>
               </a:ext>
             </a:extLst>
           </p:cNvPr>
@@ -4500,7 +4500,7 @@
           <p:cNvPr id="8" name="">
             <a:extLst xmlns:a="http://schemas.openxmlformats.org/drawingml/2006/main">
               <a:ext uri="{FF2B5EF4-FFF2-40B4-BE49-F238E27FC236}">
-                <a16:creationId xmlns:a16="http://schemas.microsoft.com/office/drawing/2014/main" id="{9F7362C2-792F-4931-A0FF-CEA29BAECE97}"/>
+                <a16:creationId xmlns:a16="http://schemas.microsoft.com/office/drawing/2014/main" id="{ADBC0812-0B67-4BB8-A005-CA6040FA1CDE}"/>
               </a:ext>
             </a:extLst>
           </p:cNvPr>
@@ -4562,7 +4562,7 @@
           <p:cNvPr id="9" name="">
             <a:extLst xmlns:a="http://schemas.openxmlformats.org/drawingml/2006/main">
               <a:ext uri="{FF2B5EF4-FFF2-40B4-BE49-F238E27FC236}">
-                <a16:creationId xmlns:a16="http://schemas.microsoft.com/office/drawing/2014/main" id="{11A77056-A951-4CD5-8992-A8E989CE7561}"/>
+                <a16:creationId xmlns:a16="http://schemas.microsoft.com/office/drawing/2014/main" id="{3A10AE98-9295-4284-A009-BA813202D4AB}"/>
               </a:ext>
             </a:extLst>
           </p:cNvPr>
@@ -4624,7 +4624,7 @@
           <p:cNvPr id="10" name="">
             <a:extLst xmlns:a="http://schemas.openxmlformats.org/drawingml/2006/main">
               <a:ext uri="{FF2B5EF4-FFF2-40B4-BE49-F238E27FC236}">
-                <a16:creationId xmlns:a16="http://schemas.microsoft.com/office/drawing/2014/main" id="{2DF102E5-D859-4E0E-945D-D330E394EFA2}"/>
+                <a16:creationId xmlns:a16="http://schemas.microsoft.com/office/drawing/2014/main" id="{D1257F22-9EE2-4A8F-8D0F-A9A99D59022E}"/>
               </a:ext>
             </a:extLst>
           </p:cNvPr>
@@ -4713,7 +4713,7 @@
           <p:cNvPr id="11" name="">
             <a:extLst xmlns:a="http://schemas.openxmlformats.org/drawingml/2006/main">
               <a:ext uri="{FF2B5EF4-FFF2-40B4-BE49-F238E27FC236}">
-                <a16:creationId xmlns:a16="http://schemas.microsoft.com/office/drawing/2014/main" id="{3D6CD040-FA24-41B0-B8E2-C2DC78FB22C4}"/>
+                <a16:creationId xmlns:a16="http://schemas.microsoft.com/office/drawing/2014/main" id="{29F51874-68F8-4761-AC25-22BC32C3EABE}"/>
               </a:ext>
             </a:extLst>
           </p:cNvPr>
@@ -4744,7 +4744,7 @@
           <p:cNvPr id="12" name="">
             <a:extLst xmlns:a="http://schemas.openxmlformats.org/drawingml/2006/main">
               <a:ext uri="{FF2B5EF4-FFF2-40B4-BE49-F238E27FC236}">
-                <a16:creationId xmlns:a16="http://schemas.microsoft.com/office/drawing/2014/main" id="{F800BFA3-1508-42B2-8179-93ED4EAECA61}"/>
+                <a16:creationId xmlns:a16="http://schemas.microsoft.com/office/drawing/2014/main" id="{AFD20E09-5E10-4840-A399-80FAA6DB7E96}"/>
               </a:ext>
             </a:extLst>
           </p:cNvPr>
@@ -4806,7 +4806,7 @@
           <p:cNvPr id="13" name="">
             <a:extLst xmlns:a="http://schemas.openxmlformats.org/drawingml/2006/main">
               <a:ext uri="{FF2B5EF4-FFF2-40B4-BE49-F238E27FC236}">
-                <a16:creationId xmlns:a16="http://schemas.microsoft.com/office/drawing/2014/main" id="{F430C176-F2A8-4224-814C-71CED39F2351}"/>
+                <a16:creationId xmlns:a16="http://schemas.microsoft.com/office/drawing/2014/main" id="{22C287A0-CCFE-4923-8951-2CC5C1605908}"/>
               </a:ext>
             </a:extLst>
           </p:cNvPr>
@@ -4866,7 +4866,7 @@
     </p:spTree>
     <p:extLst>
       <p:ext uri="{BB962C8B-B14F-4D97-AF65-F5344CB8AC3E}">
-        <p14:creationId xmlns:p14="http://schemas.microsoft.com/office/powerpoint/2010/main" val="1144350433"/>
+        <p14:creationId xmlns:p14="http://schemas.microsoft.com/office/powerpoint/2010/main" val="1466064694"/>
       </p:ext>
     </p:extLst>
   </p:cSld>
@@ -4897,7 +4897,7 @@
           <p:cNvPr id="23" name="">
             <a:extLst xmlns:a="http://schemas.openxmlformats.org/drawingml/2006/main">
               <a:ext uri="{FF2B5EF4-FFF2-40B4-BE49-F238E27FC236}">
-                <a16:creationId xmlns:a16="http://schemas.microsoft.com/office/drawing/2014/main" id="{16EE8225-8428-4A86-9F42-642AA7C4B934}"/>
+                <a16:creationId xmlns:a16="http://schemas.microsoft.com/office/drawing/2014/main" id="{F0358EFA-4024-4739-B1C2-D87CB0C9DEE2}"/>
               </a:ext>
             </a:extLst>
           </p:cNvPr>
@@ -4959,7 +4959,7 @@
                 <a:latin typeface="Arial"/>
                 <a:ea typeface="Arial"/>
                 <a:cs typeface="Arial"/>
-                <a:hlinkClick xmlns:r="http://schemas.openxmlformats.org/officeDocument/2006/relationships" r:id="R041f9b03ff25455f"/>
+                <a:hlinkClick xmlns:r="http://schemas.openxmlformats.org/officeDocument/2006/relationships" r:id="R59d5654b037e41ec"/>
               </a:rPr>
               <a:t>https://github.com/qjmre23/Route2Zero</a:t>
             </a:r>
@@ -4982,7 +4982,7 @@
                 <a:latin typeface="Arial"/>
                 <a:ea typeface="Arial"/>
                 <a:cs typeface="Arial"/>
-                <a:hlinkClick xmlns:r="http://schemas.openxmlformats.org/officeDocument/2006/relationships" r:id="R4c8ddd86f23840c6"/>
+                <a:hlinkClick xmlns:r="http://schemas.openxmlformats.org/officeDocument/2006/relationships" r:id="R3f495fecfe8943b1"/>
               </a:rPr>
               <a:t>https://route2zero.netlify.app/</a:t>
             </a:r>
@@ -4994,7 +4994,7 @@
           <p:cNvPr id="2" name="">
             <a:extLst xmlns:a="http://schemas.openxmlformats.org/drawingml/2006/main">
               <a:ext uri="{FF2B5EF4-FFF2-40B4-BE49-F238E27FC236}">
-                <a16:creationId xmlns:a16="http://schemas.microsoft.com/office/drawing/2014/main" id="{DE4DA1B8-B132-4B1A-B5AB-883D4106A5C8}"/>
+                <a16:creationId xmlns:a16="http://schemas.microsoft.com/office/drawing/2014/main" id="{97786C39-0290-41C7-8FA7-F0DE8EEA1634}"/>
               </a:ext>
             </a:extLst>
           </p:cNvPr>
@@ -5056,7 +5056,7 @@
           <p:cNvPr id="3" name="">
             <a:extLst xmlns:a="http://schemas.openxmlformats.org/drawingml/2006/main">
               <a:ext uri="{FF2B5EF4-FFF2-40B4-BE49-F238E27FC236}">
-                <a16:creationId xmlns:a16="http://schemas.microsoft.com/office/drawing/2014/main" id="{A0E707BF-503B-4D42-9AB6-7803B51850D9}"/>
+                <a16:creationId xmlns:a16="http://schemas.microsoft.com/office/drawing/2014/main" id="{FA285C86-7348-4697-BE3C-6E87116F6AF7}"/>
               </a:ext>
             </a:extLst>
           </p:cNvPr>
@@ -5118,7 +5118,7 @@
           <p:cNvPr id="4" name="">
             <a:extLst xmlns:a="http://schemas.openxmlformats.org/drawingml/2006/main">
               <a:ext uri="{FF2B5EF4-FFF2-40B4-BE49-F238E27FC236}">
-                <a16:creationId xmlns:a16="http://schemas.microsoft.com/office/drawing/2014/main" id="{D7CB1FD0-457F-4D20-9EC4-59D593AA83EC}"/>
+                <a16:creationId xmlns:a16="http://schemas.microsoft.com/office/drawing/2014/main" id="{A0DC9771-E0E1-426C-9129-9FEF82E54C99}"/>
               </a:ext>
             </a:extLst>
           </p:cNvPr>
@@ -5180,7 +5180,7 @@
           <p:cNvPr id="5" name="">
             <a:extLst xmlns:a="http://schemas.openxmlformats.org/drawingml/2006/main">
               <a:ext uri="{FF2B5EF4-FFF2-40B4-BE49-F238E27FC236}">
-                <a16:creationId xmlns:a16="http://schemas.microsoft.com/office/drawing/2014/main" id="{FED25C33-6DCB-47BE-9B64-B67F36AFCEB7}"/>
+                <a16:creationId xmlns:a16="http://schemas.microsoft.com/office/drawing/2014/main" id="{E7E0A106-BACC-4BD6-B01F-6354DB107E66}"/>
               </a:ext>
             </a:extLst>
           </p:cNvPr>
@@ -5242,7 +5242,7 @@
           <p:cNvPr id="6" name="">
             <a:extLst xmlns:a="http://schemas.openxmlformats.org/drawingml/2006/main">
               <a:ext uri="{FF2B5EF4-FFF2-40B4-BE49-F238E27FC236}">
-                <a16:creationId xmlns:a16="http://schemas.microsoft.com/office/drawing/2014/main" id="{DB033C55-AA4F-44E8-A3C6-06D81FACCA41}"/>
+                <a16:creationId xmlns:a16="http://schemas.microsoft.com/office/drawing/2014/main" id="{5487D20F-559B-4D69-B385-12D10DC032D0}"/>
               </a:ext>
             </a:extLst>
           </p:cNvPr>
@@ -5304,7 +5304,7 @@
           <p:cNvPr id="7" name="">
             <a:extLst xmlns:a="http://schemas.openxmlformats.org/drawingml/2006/main">
               <a:ext uri="{FF2B5EF4-FFF2-40B4-BE49-F238E27FC236}">
-                <a16:creationId xmlns:a16="http://schemas.microsoft.com/office/drawing/2014/main" id="{CC2CDFAD-EE78-41F1-856B-7539E7765C25}"/>
+                <a16:creationId xmlns:a16="http://schemas.microsoft.com/office/drawing/2014/main" id="{F9B457FA-E001-487C-B47E-5D137E64112F}"/>
               </a:ext>
             </a:extLst>
           </p:cNvPr>
@@ -5366,7 +5366,7 @@
           <p:cNvPr id="8" name="">
             <a:extLst xmlns:a="http://schemas.openxmlformats.org/drawingml/2006/main">
               <a:ext uri="{FF2B5EF4-FFF2-40B4-BE49-F238E27FC236}">
-                <a16:creationId xmlns:a16="http://schemas.microsoft.com/office/drawing/2014/main" id="{AB6A2977-55EA-4DBC-B3FF-3EE0F6D563D2}"/>
+                <a16:creationId xmlns:a16="http://schemas.microsoft.com/office/drawing/2014/main" id="{8EDBB008-A281-4D84-AF69-30FDDBEC8CC2}"/>
               </a:ext>
             </a:extLst>
           </p:cNvPr>
@@ -5428,7 +5428,7 @@
           <p:cNvPr id="9" name="">
             <a:extLst xmlns:a="http://schemas.openxmlformats.org/drawingml/2006/main">
               <a:ext uri="{FF2B5EF4-FFF2-40B4-BE49-F238E27FC236}">
-                <a16:creationId xmlns:a16="http://schemas.microsoft.com/office/drawing/2014/main" id="{53AAF705-9181-4368-8D34-163CA1433381}"/>
+                <a16:creationId xmlns:a16="http://schemas.microsoft.com/office/drawing/2014/main" id="{54D8F4F7-9772-4F08-A056-61B5B9B2FCBC}"/>
               </a:ext>
             </a:extLst>
           </p:cNvPr>
@@ -5490,7 +5490,7 @@
           <p:cNvPr id="10" name="">
             <a:extLst xmlns:a="http://schemas.openxmlformats.org/drawingml/2006/main">
               <a:ext uri="{FF2B5EF4-FFF2-40B4-BE49-F238E27FC236}">
-                <a16:creationId xmlns:a16="http://schemas.microsoft.com/office/drawing/2014/main" id="{A5913230-9489-4F93-B2B5-D2D49BD16F5B}"/>
+                <a16:creationId xmlns:a16="http://schemas.microsoft.com/office/drawing/2014/main" id="{3C735F93-D60C-4A14-B70E-7FD3C56EB8CC}"/>
               </a:ext>
             </a:extLst>
           </p:cNvPr>
@@ -5552,7 +5552,7 @@
           <p:cNvPr id="11" name="">
             <a:extLst xmlns:a="http://schemas.openxmlformats.org/drawingml/2006/main">
               <a:ext uri="{FF2B5EF4-FFF2-40B4-BE49-F238E27FC236}">
-                <a16:creationId xmlns:a16="http://schemas.microsoft.com/office/drawing/2014/main" id="{351B39EC-3858-432E-86FC-61F6153B4D92}"/>
+                <a16:creationId xmlns:a16="http://schemas.microsoft.com/office/drawing/2014/main" id="{72E5479C-EB85-4C94-A0C8-ED433B65414F}"/>
               </a:ext>
             </a:extLst>
           </p:cNvPr>
@@ -5614,7 +5614,7 @@
           <p:cNvPr id="12" name="">
             <a:extLst xmlns:a="http://schemas.openxmlformats.org/drawingml/2006/main">
               <a:ext uri="{FF2B5EF4-FFF2-40B4-BE49-F238E27FC236}">
-                <a16:creationId xmlns:a16="http://schemas.microsoft.com/office/drawing/2014/main" id="{6B437FD8-5371-4760-A026-882DD0D8203D}"/>
+                <a16:creationId xmlns:a16="http://schemas.microsoft.com/office/drawing/2014/main" id="{0507F31D-1F2B-48CD-AF99-ABFBC75214A4}"/>
               </a:ext>
             </a:extLst>
           </p:cNvPr>
@@ -5676,7 +5676,7 @@
           <p:cNvPr id="13" name="">
             <a:extLst xmlns:a="http://schemas.openxmlformats.org/drawingml/2006/main">
               <a:ext uri="{FF2B5EF4-FFF2-40B4-BE49-F238E27FC236}">
-                <a16:creationId xmlns:a16="http://schemas.microsoft.com/office/drawing/2014/main" id="{FAD39A06-E4A4-43FA-B0BC-93F813E235C7}"/>
+                <a16:creationId xmlns:a16="http://schemas.microsoft.com/office/drawing/2014/main" id="{3E922FFC-D3E8-440D-8F0F-9A005CA381C1}"/>
               </a:ext>
             </a:extLst>
           </p:cNvPr>
@@ -5738,7 +5738,7 @@
           <p:cNvPr id="14" name="">
             <a:extLst xmlns:a="http://schemas.openxmlformats.org/drawingml/2006/main">
               <a:ext uri="{FF2B5EF4-FFF2-40B4-BE49-F238E27FC236}">
-                <a16:creationId xmlns:a16="http://schemas.microsoft.com/office/drawing/2014/main" id="{70D8995D-AD50-4E01-9A7E-2A8CD384ED8F}"/>
+                <a16:creationId xmlns:a16="http://schemas.microsoft.com/office/drawing/2014/main" id="{D0238EDD-3148-4172-AA16-221DE19A51F8}"/>
               </a:ext>
             </a:extLst>
           </p:cNvPr>
@@ -5807,7 +5807,7 @@
         </p:xfrm>
         <a:graphic xmlns:a="http://schemas.openxmlformats.org/drawingml/2006/main">
           <a:graphicData uri="http://schemas.openxmlformats.org/drawingml/2006/chart">
-            <c:chart xmlns:r="http://schemas.openxmlformats.org/officeDocument/2006/relationships" xmlns:c="http://schemas.openxmlformats.org/drawingml/2006/chart" r:id="Rde1d33a56b914fe8"/>
+            <c:chart xmlns:r="http://schemas.openxmlformats.org/officeDocument/2006/relationships" xmlns:c="http://schemas.openxmlformats.org/drawingml/2006/chart" r:id="R3ceedd64b49a4580"/>
           </a:graphicData>
         </a:graphic>
       </p:graphicFrame>
@@ -5816,7 +5816,7 @@
           <p:cNvPr id="16" name="">
             <a:extLst xmlns:a="http://schemas.openxmlformats.org/drawingml/2006/main">
               <a:ext uri="{FF2B5EF4-FFF2-40B4-BE49-F238E27FC236}">
-                <a16:creationId xmlns:a16="http://schemas.microsoft.com/office/drawing/2014/main" id="{FFB443ED-0E81-4E8E-9F65-C61BD0D81E72}"/>
+                <a16:creationId xmlns:a16="http://schemas.microsoft.com/office/drawing/2014/main" id="{6C1021A9-8571-4FE9-86D9-51B767DF11AD}"/>
               </a:ext>
             </a:extLst>
           </p:cNvPr>
@@ -5849,7 +5849,7 @@
           <p:cNvPr id="17" name="">
             <a:extLst xmlns:a="http://schemas.openxmlformats.org/drawingml/2006/main">
               <a:ext uri="{FF2B5EF4-FFF2-40B4-BE49-F238E27FC236}">
-                <a16:creationId xmlns:a16="http://schemas.microsoft.com/office/drawing/2014/main" id="{11EBE880-A347-4F5A-A6BA-DDDB94CA5056}"/>
+                <a16:creationId xmlns:a16="http://schemas.microsoft.com/office/drawing/2014/main" id="{178357FE-89D0-448A-967A-754D9140B947}"/>
               </a:ext>
             </a:extLst>
           </p:cNvPr>
@@ -5911,7 +5911,7 @@
           <p:cNvPr id="18" name="">
             <a:extLst xmlns:a="http://schemas.openxmlformats.org/drawingml/2006/main">
               <a:ext uri="{FF2B5EF4-FFF2-40B4-BE49-F238E27FC236}">
-                <a16:creationId xmlns:a16="http://schemas.microsoft.com/office/drawing/2014/main" id="{B064F426-1FF7-42CC-99AD-E29DF3ABB04A}"/>
+                <a16:creationId xmlns:a16="http://schemas.microsoft.com/office/drawing/2014/main" id="{AAF95B0E-FF74-41D2-B0E7-B92FDAB7752E}"/>
               </a:ext>
             </a:extLst>
           </p:cNvPr>
@@ -6066,7 +6066,7 @@
           <p:cNvPr id="19" name="">
             <a:extLst xmlns:a="http://schemas.openxmlformats.org/drawingml/2006/main">
               <a:ext uri="{FF2B5EF4-FFF2-40B4-BE49-F238E27FC236}">
-                <a16:creationId xmlns:a16="http://schemas.microsoft.com/office/drawing/2014/main" id="{2A8AC672-6EAD-415A-95BC-133905FEDD2B}"/>
+                <a16:creationId xmlns:a16="http://schemas.microsoft.com/office/drawing/2014/main" id="{FA3666B5-CD24-4173-9AD3-694CA711B145}"/>
               </a:ext>
             </a:extLst>
           </p:cNvPr>
@@ -6128,7 +6128,7 @@
           <p:cNvPr id="20" name="">
             <a:extLst xmlns:a="http://schemas.openxmlformats.org/drawingml/2006/main">
               <a:ext uri="{FF2B5EF4-FFF2-40B4-BE49-F238E27FC236}">
-                <a16:creationId xmlns:a16="http://schemas.microsoft.com/office/drawing/2014/main" id="{AF2F4407-4604-410A-B709-84EB8BC11357}"/>
+                <a16:creationId xmlns:a16="http://schemas.microsoft.com/office/drawing/2014/main" id="{8AF2DC73-4A8A-4405-8CEC-385D0E51062B}"/>
               </a:ext>
             </a:extLst>
           </p:cNvPr>
@@ -6159,7 +6159,7 @@
           <p:cNvPr id="21" name="">
             <a:extLst xmlns:a="http://schemas.openxmlformats.org/drawingml/2006/main">
               <a:ext uri="{FF2B5EF4-FFF2-40B4-BE49-F238E27FC236}">
-                <a16:creationId xmlns:a16="http://schemas.microsoft.com/office/drawing/2014/main" id="{9ED20354-7E80-482F-9869-EA24B778739A}"/>
+                <a16:creationId xmlns:a16="http://schemas.microsoft.com/office/drawing/2014/main" id="{7FF78485-DA1F-4DA2-A3B9-E3CAF874F51A}"/>
               </a:ext>
             </a:extLst>
           </p:cNvPr>
@@ -6221,7 +6221,7 @@
           <p:cNvPr id="22" name="">
             <a:extLst xmlns:a="http://schemas.openxmlformats.org/drawingml/2006/main">
               <a:ext uri="{FF2B5EF4-FFF2-40B4-BE49-F238E27FC236}">
-                <a16:creationId xmlns:a16="http://schemas.microsoft.com/office/drawing/2014/main" id="{786FAF09-4787-43F0-BA7E-6ADC8A52ECFA}"/>
+                <a16:creationId xmlns:a16="http://schemas.microsoft.com/office/drawing/2014/main" id="{C87931C8-5E46-4B7B-9DFC-EAFA152D70C8}"/>
               </a:ext>
             </a:extLst>
           </p:cNvPr>
@@ -6281,7 +6281,7 @@
     </p:spTree>
     <p:extLst>
       <p:ext uri="{BB962C8B-B14F-4D97-AF65-F5344CB8AC3E}">
-        <p14:creationId xmlns:p14="http://schemas.microsoft.com/office/powerpoint/2010/main" val="1731988923"/>
+        <p14:creationId xmlns:p14="http://schemas.microsoft.com/office/powerpoint/2010/main" val="1206104596"/>
       </p:ext>
     </p:extLst>
   </p:cSld>
@@ -6312,7 +6312,7 @@
           <p:cNvPr id="20" name="">
             <a:extLst xmlns:a="http://schemas.openxmlformats.org/drawingml/2006/main">
               <a:ext uri="{FF2B5EF4-FFF2-40B4-BE49-F238E27FC236}">
-                <a16:creationId xmlns:a16="http://schemas.microsoft.com/office/drawing/2014/main" id="{ED1516DB-4AAA-4901-951F-57A063B94460}"/>
+                <a16:creationId xmlns:a16="http://schemas.microsoft.com/office/drawing/2014/main" id="{6EFF887C-A0BA-4CA6-B781-572BF446D104}"/>
               </a:ext>
             </a:extLst>
           </p:cNvPr>
@@ -6374,7 +6374,7 @@
                 <a:latin typeface="Arial"/>
                 <a:ea typeface="Arial"/>
                 <a:cs typeface="Arial"/>
-                <a:hlinkClick xmlns:r="http://schemas.openxmlformats.org/officeDocument/2006/relationships" r:id="R90d0be01904b4a27"/>
+                <a:hlinkClick xmlns:r="http://schemas.openxmlformats.org/officeDocument/2006/relationships" r:id="R648ade7543774389"/>
               </a:rPr>
               <a:t>https://github.com/qjmre23/Route2Zero</a:t>
             </a:r>
@@ -6397,7 +6397,7 @@
                 <a:latin typeface="Arial"/>
                 <a:ea typeface="Arial"/>
                 <a:cs typeface="Arial"/>
-                <a:hlinkClick xmlns:r="http://schemas.openxmlformats.org/officeDocument/2006/relationships" r:id="R9a77724f4d74474d"/>
+                <a:hlinkClick xmlns:r="http://schemas.openxmlformats.org/officeDocument/2006/relationships" r:id="R656c9672e0f24f17"/>
               </a:rPr>
               <a:t>https://route2zero.netlify.app/</a:t>
             </a:r>
@@ -6409,7 +6409,7 @@
           <p:cNvPr id="2" name="">
             <a:extLst xmlns:a="http://schemas.openxmlformats.org/drawingml/2006/main">
               <a:ext uri="{FF2B5EF4-FFF2-40B4-BE49-F238E27FC236}">
-                <a16:creationId xmlns:a16="http://schemas.microsoft.com/office/drawing/2014/main" id="{3A392827-B26E-480D-88EE-9D653F003FBB}"/>
+                <a16:creationId xmlns:a16="http://schemas.microsoft.com/office/drawing/2014/main" id="{1699F579-B33F-44B5-80FB-88D96688E70C}"/>
               </a:ext>
             </a:extLst>
           </p:cNvPr>
@@ -6471,7 +6471,7 @@
           <p:cNvPr id="3" name="">
             <a:extLst xmlns:a="http://schemas.openxmlformats.org/drawingml/2006/main">
               <a:ext uri="{FF2B5EF4-FFF2-40B4-BE49-F238E27FC236}">
-                <a16:creationId xmlns:a16="http://schemas.microsoft.com/office/drawing/2014/main" id="{AA2EFC44-FE4B-4987-B386-42B72D8D28F8}"/>
+                <a16:creationId xmlns:a16="http://schemas.microsoft.com/office/drawing/2014/main" id="{DB9A5E55-3867-4B6B-A404-8CFA05010B92}"/>
               </a:ext>
             </a:extLst>
           </p:cNvPr>
@@ -6533,7 +6533,7 @@
           <p:cNvPr id="4" name="">
             <a:extLst xmlns:a="http://schemas.openxmlformats.org/drawingml/2006/main">
               <a:ext uri="{FF2B5EF4-FFF2-40B4-BE49-F238E27FC236}">
-                <a16:creationId xmlns:a16="http://schemas.microsoft.com/office/drawing/2014/main" id="{28AB98BF-1E86-4834-8192-FCC69391F040}"/>
+                <a16:creationId xmlns:a16="http://schemas.microsoft.com/office/drawing/2014/main" id="{96A34762-BA82-450F-A634-44C96A4572CA}"/>
               </a:ext>
             </a:extLst>
           </p:cNvPr>
@@ -6595,7 +6595,7 @@
           <p:cNvPr id="5" name="">
             <a:extLst xmlns:a="http://schemas.openxmlformats.org/drawingml/2006/main">
               <a:ext uri="{FF2B5EF4-FFF2-40B4-BE49-F238E27FC236}">
-                <a16:creationId xmlns:a16="http://schemas.microsoft.com/office/drawing/2014/main" id="{C974602C-A75A-477E-831F-A82DD4617326}"/>
+                <a16:creationId xmlns:a16="http://schemas.microsoft.com/office/drawing/2014/main" id="{96CC894E-2CF6-4BCE-82DD-00A87FAD12E6}"/>
               </a:ext>
             </a:extLst>
           </p:cNvPr>
@@ -6657,7 +6657,7 @@
           <p:cNvPr id="6" name="">
             <a:extLst xmlns:a="http://schemas.openxmlformats.org/drawingml/2006/main">
               <a:ext uri="{FF2B5EF4-FFF2-40B4-BE49-F238E27FC236}">
-                <a16:creationId xmlns:a16="http://schemas.microsoft.com/office/drawing/2014/main" id="{10A67E5A-A249-4FFC-B7E4-8500C0DB9A38}"/>
+                <a16:creationId xmlns:a16="http://schemas.microsoft.com/office/drawing/2014/main" id="{18394A54-DE9B-4CF7-B5B5-886406FC3107}"/>
               </a:ext>
             </a:extLst>
           </p:cNvPr>
@@ -6719,7 +6719,7 @@
           <p:cNvPr id="7" name="">
             <a:extLst xmlns:a="http://schemas.openxmlformats.org/drawingml/2006/main">
               <a:ext uri="{FF2B5EF4-FFF2-40B4-BE49-F238E27FC236}">
-                <a16:creationId xmlns:a16="http://schemas.microsoft.com/office/drawing/2014/main" id="{1CDD667E-B97B-4168-B2A6-92B891D422BD}"/>
+                <a16:creationId xmlns:a16="http://schemas.microsoft.com/office/drawing/2014/main" id="{DBFCCE6C-B18E-4699-8BEB-5ACEE51EE10B}"/>
               </a:ext>
             </a:extLst>
           </p:cNvPr>
@@ -6781,7 +6781,7 @@
           <p:cNvPr id="8" name="">
             <a:extLst xmlns:a="http://schemas.openxmlformats.org/drawingml/2006/main">
               <a:ext uri="{FF2B5EF4-FFF2-40B4-BE49-F238E27FC236}">
-                <a16:creationId xmlns:a16="http://schemas.microsoft.com/office/drawing/2014/main" id="{D3F712D0-12A3-48CF-AAB5-C45D5786C337}"/>
+                <a16:creationId xmlns:a16="http://schemas.microsoft.com/office/drawing/2014/main" id="{9AA131CF-8269-479E-92BF-B137A395BCC3}"/>
               </a:ext>
             </a:extLst>
           </p:cNvPr>
@@ -6843,7 +6843,7 @@
           <p:cNvPr id="9" name="">
             <a:extLst xmlns:a="http://schemas.openxmlformats.org/drawingml/2006/main">
               <a:ext uri="{FF2B5EF4-FFF2-40B4-BE49-F238E27FC236}">
-                <a16:creationId xmlns:a16="http://schemas.microsoft.com/office/drawing/2014/main" id="{3D46B7EA-990F-49E7-99AD-49D1193962F1}"/>
+                <a16:creationId xmlns:a16="http://schemas.microsoft.com/office/drawing/2014/main" id="{1E2DB8F2-A263-4B41-970D-FC550CD50A01}"/>
               </a:ext>
             </a:extLst>
           </p:cNvPr>
@@ -6905,7 +6905,7 @@
           <p:cNvPr id="10" name="">
             <a:extLst xmlns:a="http://schemas.openxmlformats.org/drawingml/2006/main">
               <a:ext uri="{FF2B5EF4-FFF2-40B4-BE49-F238E27FC236}">
-                <a16:creationId xmlns:a16="http://schemas.microsoft.com/office/drawing/2014/main" id="{CB6D86C4-817D-4A1F-9FFB-C0201881D406}"/>
+                <a16:creationId xmlns:a16="http://schemas.microsoft.com/office/drawing/2014/main" id="{281B8EA1-56DD-4912-BDBB-56A5963755EF}"/>
               </a:ext>
             </a:extLst>
           </p:cNvPr>
@@ -6936,7 +6936,7 @@
           <p:cNvPr id="11" name="">
             <a:extLst xmlns:a="http://schemas.openxmlformats.org/drawingml/2006/main">
               <a:ext uri="{FF2B5EF4-FFF2-40B4-BE49-F238E27FC236}">
-                <a16:creationId xmlns:a16="http://schemas.microsoft.com/office/drawing/2014/main" id="{6D9552C2-C1F7-45F7-9B39-57C542559648}"/>
+                <a16:creationId xmlns:a16="http://schemas.microsoft.com/office/drawing/2014/main" id="{4B4F86FB-F333-48B1-8FD2-A5E6FDE772ED}"/>
               </a:ext>
             </a:extLst>
           </p:cNvPr>
@@ -6998,7 +6998,7 @@
           <p:cNvPr id="12" name="">
             <a:extLst xmlns:a="http://schemas.openxmlformats.org/drawingml/2006/main">
               <a:ext uri="{FF2B5EF4-FFF2-40B4-BE49-F238E27FC236}">
-                <a16:creationId xmlns:a16="http://schemas.microsoft.com/office/drawing/2014/main" id="{EEF2DAC3-F05A-4302-92BD-968975800C24}"/>
+                <a16:creationId xmlns:a16="http://schemas.microsoft.com/office/drawing/2014/main" id="{B34C7151-BA92-4D72-94BB-CA95816CC19C}"/>
               </a:ext>
             </a:extLst>
           </p:cNvPr>
@@ -7123,7 +7123,7 @@
           <p:cNvPr id="13" name="">
             <a:extLst xmlns:a="http://schemas.openxmlformats.org/drawingml/2006/main">
               <a:ext uri="{FF2B5EF4-FFF2-40B4-BE49-F238E27FC236}">
-                <a16:creationId xmlns:a16="http://schemas.microsoft.com/office/drawing/2014/main" id="{A879AA29-744E-4771-B646-68BB2ED40686}"/>
+                <a16:creationId xmlns:a16="http://schemas.microsoft.com/office/drawing/2014/main" id="{756BD4F5-2EE0-45D6-ABC0-295112FDE9F0}"/>
               </a:ext>
             </a:extLst>
           </p:cNvPr>
@@ -7185,7 +7185,7 @@
           <p:cNvPr id="14" name="">
             <a:extLst xmlns:a="http://schemas.openxmlformats.org/drawingml/2006/main">
               <a:ext uri="{FF2B5EF4-FFF2-40B4-BE49-F238E27FC236}">
-                <a16:creationId xmlns:a16="http://schemas.microsoft.com/office/drawing/2014/main" id="{EBA4F720-3FB3-4B88-9D54-CCFA5DD64F95}"/>
+                <a16:creationId xmlns:a16="http://schemas.microsoft.com/office/drawing/2014/main" id="{FC1273E8-B4D2-4863-8D54-CB314D6A2674}"/>
               </a:ext>
             </a:extLst>
           </p:cNvPr>
@@ -7310,7 +7310,7 @@
           <p:cNvPr id="15" name="">
             <a:extLst xmlns:a="http://schemas.openxmlformats.org/drawingml/2006/main">
               <a:ext uri="{FF2B5EF4-FFF2-40B4-BE49-F238E27FC236}">
-                <a16:creationId xmlns:a16="http://schemas.microsoft.com/office/drawing/2014/main" id="{FDF23A4B-FF72-42CA-936B-9DE58C53B19F}"/>
+                <a16:creationId xmlns:a16="http://schemas.microsoft.com/office/drawing/2014/main" id="{89A92F1E-5557-40EA-9467-965959971F45}"/>
               </a:ext>
             </a:extLst>
           </p:cNvPr>
@@ -7343,7 +7343,7 @@
           <p:cNvPr id="16" name="">
             <a:extLst xmlns:a="http://schemas.openxmlformats.org/drawingml/2006/main">
               <a:ext uri="{FF2B5EF4-FFF2-40B4-BE49-F238E27FC236}">
-                <a16:creationId xmlns:a16="http://schemas.microsoft.com/office/drawing/2014/main" id="{4447B7B2-AACA-49DE-B63C-6F0E9888F3AB}"/>
+                <a16:creationId xmlns:a16="http://schemas.microsoft.com/office/drawing/2014/main" id="{1C012CF7-DAA0-437A-9F2C-06E9A5BC3269}"/>
               </a:ext>
             </a:extLst>
           </p:cNvPr>
@@ -7405,7 +7405,7 @@
           <p:cNvPr id="17" name="">
             <a:extLst xmlns:a="http://schemas.openxmlformats.org/drawingml/2006/main">
               <a:ext uri="{FF2B5EF4-FFF2-40B4-BE49-F238E27FC236}">
-                <a16:creationId xmlns:a16="http://schemas.microsoft.com/office/drawing/2014/main" id="{E1BAE4D6-64FE-4241-B02C-CFFBFC36D7C4}"/>
+                <a16:creationId xmlns:a16="http://schemas.microsoft.com/office/drawing/2014/main" id="{9941DCFE-093D-4CDF-95E8-B58E63FAA66B}"/>
               </a:ext>
             </a:extLst>
           </p:cNvPr>
@@ -7436,7 +7436,7 @@
           <p:cNvPr id="18" name="">
             <a:extLst xmlns:a="http://schemas.openxmlformats.org/drawingml/2006/main">
               <a:ext uri="{FF2B5EF4-FFF2-40B4-BE49-F238E27FC236}">
-                <a16:creationId xmlns:a16="http://schemas.microsoft.com/office/drawing/2014/main" id="{ADCB1E2D-0CDC-4BBF-A047-A88BB6E8DC04}"/>
+                <a16:creationId xmlns:a16="http://schemas.microsoft.com/office/drawing/2014/main" id="{F72E9CC2-ABF3-4688-9A3D-D874BAAE0956}"/>
               </a:ext>
             </a:extLst>
           </p:cNvPr>
@@ -7498,7 +7498,7 @@
           <p:cNvPr id="19" name="">
             <a:extLst xmlns:a="http://schemas.openxmlformats.org/drawingml/2006/main">
               <a:ext uri="{FF2B5EF4-FFF2-40B4-BE49-F238E27FC236}">
-                <a16:creationId xmlns:a16="http://schemas.microsoft.com/office/drawing/2014/main" id="{B6932AE0-D6AA-4DED-9558-0B2978612171}"/>
+                <a16:creationId xmlns:a16="http://schemas.microsoft.com/office/drawing/2014/main" id="{7AA19CB7-AB87-4BE1-B58F-92CE6F883BD2}"/>
               </a:ext>
             </a:extLst>
           </p:cNvPr>
@@ -7558,7 +7558,7 @@
     </p:spTree>
     <p:extLst>
       <p:ext uri="{BB962C8B-B14F-4D97-AF65-F5344CB8AC3E}">
-        <p14:creationId xmlns:p14="http://schemas.microsoft.com/office/powerpoint/2010/main" val="1515674866"/>
+        <p14:creationId xmlns:p14="http://schemas.microsoft.com/office/powerpoint/2010/main" val="1218260911"/>
       </p:ext>
     </p:extLst>
   </p:cSld>
@@ -7589,7 +7589,7 @@
           <p:cNvPr id="33" name="">
             <a:extLst xmlns:a="http://schemas.openxmlformats.org/drawingml/2006/main">
               <a:ext uri="{FF2B5EF4-FFF2-40B4-BE49-F238E27FC236}">
-                <a16:creationId xmlns:a16="http://schemas.microsoft.com/office/drawing/2014/main" id="{8B00E50F-61BE-48B2-AABE-2426F870EB8D}"/>
+                <a16:creationId xmlns:a16="http://schemas.microsoft.com/office/drawing/2014/main" id="{0F8D9B20-23C8-4614-929A-28F640EA5A7E}"/>
               </a:ext>
             </a:extLst>
           </p:cNvPr>
@@ -7651,7 +7651,7 @@
                 <a:latin typeface="Arial"/>
                 <a:ea typeface="Arial"/>
                 <a:cs typeface="Arial"/>
-                <a:hlinkClick xmlns:r="http://schemas.openxmlformats.org/officeDocument/2006/relationships" r:id="R8d2e72a000564afb"/>
+                <a:hlinkClick xmlns:r="http://schemas.openxmlformats.org/officeDocument/2006/relationships" r:id="Rc16f1ccbf0be4241"/>
               </a:rPr>
               <a:t>https://github.com/qjmre23/Route2Zero</a:t>
             </a:r>
@@ -7674,7 +7674,7 @@
                 <a:latin typeface="Arial"/>
                 <a:ea typeface="Arial"/>
                 <a:cs typeface="Arial"/>
-                <a:hlinkClick xmlns:r="http://schemas.openxmlformats.org/officeDocument/2006/relationships" r:id="R31f89c8cc97b4c3e"/>
+                <a:hlinkClick xmlns:r="http://schemas.openxmlformats.org/officeDocument/2006/relationships" r:id="R27905369541d4ea1"/>
               </a:rPr>
               <a:t>https://route2zero.netlify.app/</a:t>
             </a:r>
@@ -7686,7 +7686,7 @@
           <p:cNvPr id="2" name="">
             <a:extLst xmlns:a="http://schemas.openxmlformats.org/drawingml/2006/main">
               <a:ext uri="{FF2B5EF4-FFF2-40B4-BE49-F238E27FC236}">
-                <a16:creationId xmlns:a16="http://schemas.microsoft.com/office/drawing/2014/main" id="{721B7F33-0B9B-4E62-9616-4BB84BDE35D6}"/>
+                <a16:creationId xmlns:a16="http://schemas.microsoft.com/office/drawing/2014/main" id="{2DF6522C-5706-423A-95D3-4FAF831D98F5}"/>
               </a:ext>
             </a:extLst>
           </p:cNvPr>
@@ -7748,7 +7748,7 @@
           <p:cNvPr id="3" name="">
             <a:extLst xmlns:a="http://schemas.openxmlformats.org/drawingml/2006/main">
               <a:ext uri="{FF2B5EF4-FFF2-40B4-BE49-F238E27FC236}">
-                <a16:creationId xmlns:a16="http://schemas.microsoft.com/office/drawing/2014/main" id="{0F0EF690-D76B-4E5A-9E4A-FB78A46E582D}"/>
+                <a16:creationId xmlns:a16="http://schemas.microsoft.com/office/drawing/2014/main" id="{805644C7-77E1-4926-80C9-36B849E5C8C1}"/>
               </a:ext>
             </a:extLst>
           </p:cNvPr>
@@ -7810,7 +7810,7 @@
           <p:cNvPr id="4" name="">
             <a:extLst xmlns:a="http://schemas.openxmlformats.org/drawingml/2006/main">
               <a:ext uri="{FF2B5EF4-FFF2-40B4-BE49-F238E27FC236}">
-                <a16:creationId xmlns:a16="http://schemas.microsoft.com/office/drawing/2014/main" id="{F9706AF7-197A-4939-ADDA-223729D4FAC2}"/>
+                <a16:creationId xmlns:a16="http://schemas.microsoft.com/office/drawing/2014/main" id="{9CF74A3D-8629-4C7A-B156-E09B736367F9}"/>
               </a:ext>
             </a:extLst>
           </p:cNvPr>
@@ -7843,7 +7843,7 @@
           <p:cNvPr id="5" name="">
             <a:extLst xmlns:a="http://schemas.openxmlformats.org/drawingml/2006/main">
               <a:ext uri="{FF2B5EF4-FFF2-40B4-BE49-F238E27FC236}">
-                <a16:creationId xmlns:a16="http://schemas.microsoft.com/office/drawing/2014/main" id="{260FA906-9C9E-4512-8184-132CC15DC628}"/>
+                <a16:creationId xmlns:a16="http://schemas.microsoft.com/office/drawing/2014/main" id="{451F71FF-7124-44FB-92E5-0B7634F03752}"/>
               </a:ext>
             </a:extLst>
           </p:cNvPr>
@@ -7905,7 +7905,7 @@
           <p:cNvPr id="6" name="">
             <a:extLst xmlns:a="http://schemas.openxmlformats.org/drawingml/2006/main">
               <a:ext uri="{FF2B5EF4-FFF2-40B4-BE49-F238E27FC236}">
-                <a16:creationId xmlns:a16="http://schemas.microsoft.com/office/drawing/2014/main" id="{05FE0542-15FB-44F0-A8BE-FC1599917BD6}"/>
+                <a16:creationId xmlns:a16="http://schemas.microsoft.com/office/drawing/2014/main" id="{744A1774-0CC2-4EB3-AA3A-D9E6EEFD4F9E}"/>
               </a:ext>
             </a:extLst>
           </p:cNvPr>
@@ -7967,7 +7967,7 @@
           <p:cNvPr id="7" name="">
             <a:extLst xmlns:a="http://schemas.openxmlformats.org/drawingml/2006/main">
               <a:ext uri="{FF2B5EF4-FFF2-40B4-BE49-F238E27FC236}">
-                <a16:creationId xmlns:a16="http://schemas.microsoft.com/office/drawing/2014/main" id="{ECEB680B-6516-4326-BA90-5DA4ACD0CF80}"/>
+                <a16:creationId xmlns:a16="http://schemas.microsoft.com/office/drawing/2014/main" id="{CCF53EE2-9A59-4DA8-A1CA-7964F5ABF8CA}"/>
               </a:ext>
             </a:extLst>
           </p:cNvPr>
@@ -8029,7 +8029,7 @@
           <p:cNvPr id="8" name="">
             <a:extLst xmlns:a="http://schemas.openxmlformats.org/drawingml/2006/main">
               <a:ext uri="{FF2B5EF4-FFF2-40B4-BE49-F238E27FC236}">
-                <a16:creationId xmlns:a16="http://schemas.microsoft.com/office/drawing/2014/main" id="{9DD16304-98AC-4A19-981B-F512E7CD28CA}"/>
+                <a16:creationId xmlns:a16="http://schemas.microsoft.com/office/drawing/2014/main" id="{F87A166E-9DB7-413E-A2E9-716DE8A1E6FF}"/>
               </a:ext>
             </a:extLst>
           </p:cNvPr>
@@ -8091,7 +8091,7 @@
           <p:cNvPr id="9" name="">
             <a:extLst xmlns:a="http://schemas.openxmlformats.org/drawingml/2006/main">
               <a:ext uri="{FF2B5EF4-FFF2-40B4-BE49-F238E27FC236}">
-                <a16:creationId xmlns:a16="http://schemas.microsoft.com/office/drawing/2014/main" id="{B4B72583-77CC-4782-B924-352475E22167}"/>
+                <a16:creationId xmlns:a16="http://schemas.microsoft.com/office/drawing/2014/main" id="{31D5FE4C-2409-415F-A893-BB832BE399E7}"/>
               </a:ext>
             </a:extLst>
           </p:cNvPr>
@@ -8153,7 +8153,7 @@
           <p:cNvPr id="10" name="">
             <a:extLst xmlns:a="http://schemas.openxmlformats.org/drawingml/2006/main">
               <a:ext uri="{FF2B5EF4-FFF2-40B4-BE49-F238E27FC236}">
-                <a16:creationId xmlns:a16="http://schemas.microsoft.com/office/drawing/2014/main" id="{566D0F98-0253-4819-A48B-141584C3E395}"/>
+                <a16:creationId xmlns:a16="http://schemas.microsoft.com/office/drawing/2014/main" id="{BCE60BC3-E3E1-4EF8-ABB7-77834627B393}"/>
               </a:ext>
             </a:extLst>
           </p:cNvPr>
@@ -8215,7 +8215,7 @@
           <p:cNvPr id="11" name="">
             <a:extLst xmlns:a="http://schemas.openxmlformats.org/drawingml/2006/main">
               <a:ext uri="{FF2B5EF4-FFF2-40B4-BE49-F238E27FC236}">
-                <a16:creationId xmlns:a16="http://schemas.microsoft.com/office/drawing/2014/main" id="{B7C203EE-5427-463A-9F99-4C185381BF88}"/>
+                <a16:creationId xmlns:a16="http://schemas.microsoft.com/office/drawing/2014/main" id="{66E1104A-38FD-4D31-8FE2-598AD48CE288}"/>
               </a:ext>
             </a:extLst>
           </p:cNvPr>
@@ -8277,7 +8277,7 @@
           <p:cNvPr id="12" name="">
             <a:extLst xmlns:a="http://schemas.openxmlformats.org/drawingml/2006/main">
               <a:ext uri="{FF2B5EF4-FFF2-40B4-BE49-F238E27FC236}">
-                <a16:creationId xmlns:a16="http://schemas.microsoft.com/office/drawing/2014/main" id="{B0C676DB-F350-4F91-B2CA-FAF545351664}"/>
+                <a16:creationId xmlns:a16="http://schemas.microsoft.com/office/drawing/2014/main" id="{30CAAC73-4645-43DA-B6F7-B32B10E7C3EE}"/>
               </a:ext>
             </a:extLst>
           </p:cNvPr>
@@ -8339,7 +8339,7 @@
           <p:cNvPr id="13" name="">
             <a:extLst xmlns:a="http://schemas.openxmlformats.org/drawingml/2006/main">
               <a:ext uri="{FF2B5EF4-FFF2-40B4-BE49-F238E27FC236}">
-                <a16:creationId xmlns:a16="http://schemas.microsoft.com/office/drawing/2014/main" id="{58F5D14E-9DEB-4101-8069-B1100F4F76C5}"/>
+                <a16:creationId xmlns:a16="http://schemas.microsoft.com/office/drawing/2014/main" id="{2EDF5FA5-3CA2-4C82-A25E-8DCC6172DC9F}"/>
               </a:ext>
             </a:extLst>
           </p:cNvPr>
@@ -8401,7 +8401,7 @@
           <p:cNvPr id="14" name="">
             <a:extLst xmlns:a="http://schemas.openxmlformats.org/drawingml/2006/main">
               <a:ext uri="{FF2B5EF4-FFF2-40B4-BE49-F238E27FC236}">
-                <a16:creationId xmlns:a16="http://schemas.microsoft.com/office/drawing/2014/main" id="{636F9262-9DFA-4CC0-85A5-07CA8BD4BFC3}"/>
+                <a16:creationId xmlns:a16="http://schemas.microsoft.com/office/drawing/2014/main" id="{BCDFEBE9-FAC5-4F9F-923A-71BFE8378459}"/>
               </a:ext>
             </a:extLst>
           </p:cNvPr>
@@ -8463,7 +8463,7 @@
           <p:cNvPr id="15" name="">
             <a:extLst xmlns:a="http://schemas.openxmlformats.org/drawingml/2006/main">
               <a:ext uri="{FF2B5EF4-FFF2-40B4-BE49-F238E27FC236}">
-                <a16:creationId xmlns:a16="http://schemas.microsoft.com/office/drawing/2014/main" id="{897A386E-64EC-4938-9197-DD205DE9A38B}"/>
+                <a16:creationId xmlns:a16="http://schemas.microsoft.com/office/drawing/2014/main" id="{802C9E95-F72B-408C-8976-5AF7A76A4DB4}"/>
               </a:ext>
             </a:extLst>
           </p:cNvPr>
@@ -8525,7 +8525,7 @@
           <p:cNvPr id="16" name="">
             <a:extLst xmlns:a="http://schemas.openxmlformats.org/drawingml/2006/main">
               <a:ext uri="{FF2B5EF4-FFF2-40B4-BE49-F238E27FC236}">
-                <a16:creationId xmlns:a16="http://schemas.microsoft.com/office/drawing/2014/main" id="{EDC61DAA-99D3-4D83-8C59-7ECC7B5BDCF9}"/>
+                <a16:creationId xmlns:a16="http://schemas.microsoft.com/office/drawing/2014/main" id="{ED5677C9-7DD4-44C4-8446-0396B500253E}"/>
               </a:ext>
             </a:extLst>
           </p:cNvPr>
@@ -8558,7 +8558,7 @@
           <p:cNvPr id="17" name="">
             <a:extLst xmlns:a="http://schemas.openxmlformats.org/drawingml/2006/main">
               <a:ext uri="{FF2B5EF4-FFF2-40B4-BE49-F238E27FC236}">
-                <a16:creationId xmlns:a16="http://schemas.microsoft.com/office/drawing/2014/main" id="{63272E8A-79D1-4F14-B2F3-5EDFCF00BDC7}"/>
+                <a16:creationId xmlns:a16="http://schemas.microsoft.com/office/drawing/2014/main" id="{E45A9E9F-B404-48A2-9778-EC5962B17963}"/>
               </a:ext>
             </a:extLst>
           </p:cNvPr>
@@ -8620,7 +8620,7 @@
           <p:cNvPr id="18" name="">
             <a:extLst xmlns:a="http://schemas.openxmlformats.org/drawingml/2006/main">
               <a:ext uri="{FF2B5EF4-FFF2-40B4-BE49-F238E27FC236}">
-                <a16:creationId xmlns:a16="http://schemas.microsoft.com/office/drawing/2014/main" id="{22E7F129-7539-4F18-83F6-BB08DA4B3571}"/>
+                <a16:creationId xmlns:a16="http://schemas.microsoft.com/office/drawing/2014/main" id="{688B5DD1-142C-4583-96FB-31E89A9D4548}"/>
               </a:ext>
             </a:extLst>
           </p:cNvPr>
@@ -8682,7 +8682,7 @@
           <p:cNvPr id="19" name="">
             <a:extLst xmlns:a="http://schemas.openxmlformats.org/drawingml/2006/main">
               <a:ext uri="{FF2B5EF4-FFF2-40B4-BE49-F238E27FC236}">
-                <a16:creationId xmlns:a16="http://schemas.microsoft.com/office/drawing/2014/main" id="{208C9673-EAFA-4859-A9A8-44A12C45B5D8}"/>
+                <a16:creationId xmlns:a16="http://schemas.microsoft.com/office/drawing/2014/main" id="{96BC4F5A-5470-47EB-B52D-DE3161F32108}"/>
               </a:ext>
             </a:extLst>
           </p:cNvPr>
@@ -8744,7 +8744,7 @@
           <p:cNvPr id="20" name="">
             <a:extLst xmlns:a="http://schemas.openxmlformats.org/drawingml/2006/main">
               <a:ext uri="{FF2B5EF4-FFF2-40B4-BE49-F238E27FC236}">
-                <a16:creationId xmlns:a16="http://schemas.microsoft.com/office/drawing/2014/main" id="{4E9575FE-B84E-4257-92B5-02C158539D17}"/>
+                <a16:creationId xmlns:a16="http://schemas.microsoft.com/office/drawing/2014/main" id="{E17E1F58-DE76-4F71-9CAA-91B9243FFDB9}"/>
               </a:ext>
             </a:extLst>
           </p:cNvPr>
@@ -8806,7 +8806,7 @@
           <p:cNvPr id="21" name="">
             <a:extLst xmlns:a="http://schemas.openxmlformats.org/drawingml/2006/main">
               <a:ext uri="{FF2B5EF4-FFF2-40B4-BE49-F238E27FC236}">
-                <a16:creationId xmlns:a16="http://schemas.microsoft.com/office/drawing/2014/main" id="{2BBD8CD0-2B48-4925-B1E2-C4B6B007C273}"/>
+                <a16:creationId xmlns:a16="http://schemas.microsoft.com/office/drawing/2014/main" id="{425EC630-DE31-4528-8EFD-7CF9A88DA36A}"/>
               </a:ext>
             </a:extLst>
           </p:cNvPr>
@@ -8868,7 +8868,7 @@
           <p:cNvPr id="22" name="">
             <a:extLst xmlns:a="http://schemas.openxmlformats.org/drawingml/2006/main">
               <a:ext uri="{FF2B5EF4-FFF2-40B4-BE49-F238E27FC236}">
-                <a16:creationId xmlns:a16="http://schemas.microsoft.com/office/drawing/2014/main" id="{38DBF09A-5685-41D9-93B5-03AEDD28F167}"/>
+                <a16:creationId xmlns:a16="http://schemas.microsoft.com/office/drawing/2014/main" id="{A3071489-096B-4A57-A2D9-F79C7E64DE8C}"/>
               </a:ext>
             </a:extLst>
           </p:cNvPr>
@@ -8930,7 +8930,7 @@
           <p:cNvPr id="23" name="">
             <a:extLst xmlns:a="http://schemas.openxmlformats.org/drawingml/2006/main">
               <a:ext uri="{FF2B5EF4-FFF2-40B4-BE49-F238E27FC236}">
-                <a16:creationId xmlns:a16="http://schemas.microsoft.com/office/drawing/2014/main" id="{B8A53C1A-7848-4F08-815D-52391EDD39A3}"/>
+                <a16:creationId xmlns:a16="http://schemas.microsoft.com/office/drawing/2014/main" id="{F2BB8E46-CC93-4C9F-8D8E-80B794640762}"/>
               </a:ext>
             </a:extLst>
           </p:cNvPr>
@@ -8992,7 +8992,7 @@
           <p:cNvPr id="24" name="">
             <a:extLst xmlns:a="http://schemas.openxmlformats.org/drawingml/2006/main">
               <a:ext uri="{FF2B5EF4-FFF2-40B4-BE49-F238E27FC236}">
-                <a16:creationId xmlns:a16="http://schemas.microsoft.com/office/drawing/2014/main" id="{083ECF27-FFB2-4B65-98E3-35860F7B4EBC}"/>
+                <a16:creationId xmlns:a16="http://schemas.microsoft.com/office/drawing/2014/main" id="{2147EA66-37BB-4ED8-A618-1DBAC176C4B2}"/>
               </a:ext>
             </a:extLst>
           </p:cNvPr>
@@ -9054,7 +9054,7 @@
           <p:cNvPr id="25" name="">
             <a:extLst xmlns:a="http://schemas.openxmlformats.org/drawingml/2006/main">
               <a:ext uri="{FF2B5EF4-FFF2-40B4-BE49-F238E27FC236}">
-                <a16:creationId xmlns:a16="http://schemas.microsoft.com/office/drawing/2014/main" id="{E5B6B81D-38D8-4917-923B-6F128990A0F6}"/>
+                <a16:creationId xmlns:a16="http://schemas.microsoft.com/office/drawing/2014/main" id="{03DFB403-9CDB-4303-9C8D-B63C3532977C}"/>
               </a:ext>
             </a:extLst>
           </p:cNvPr>
@@ -9116,7 +9116,7 @@
           <p:cNvPr id="26" name="">
             <a:extLst xmlns:a="http://schemas.openxmlformats.org/drawingml/2006/main">
               <a:ext uri="{FF2B5EF4-FFF2-40B4-BE49-F238E27FC236}">
-                <a16:creationId xmlns:a16="http://schemas.microsoft.com/office/drawing/2014/main" id="{F29AB287-D6DF-40E5-BDEB-833CF11BBA63}"/>
+                <a16:creationId xmlns:a16="http://schemas.microsoft.com/office/drawing/2014/main" id="{7A479C55-A498-4725-8C88-242166FEDBB3}"/>
               </a:ext>
             </a:extLst>
           </p:cNvPr>
@@ -9178,7 +9178,7 @@
           <p:cNvPr id="27" name="">
             <a:extLst xmlns:a="http://schemas.openxmlformats.org/drawingml/2006/main">
               <a:ext uri="{FF2B5EF4-FFF2-40B4-BE49-F238E27FC236}">
-                <a16:creationId xmlns:a16="http://schemas.microsoft.com/office/drawing/2014/main" id="{6545F63D-AC27-4341-B3CD-1812731C9192}"/>
+                <a16:creationId xmlns:a16="http://schemas.microsoft.com/office/drawing/2014/main" id="{719505E2-45E4-455B-8A00-FD2082FC108A}"/>
               </a:ext>
             </a:extLst>
           </p:cNvPr>
@@ -9240,7 +9240,7 @@
           <p:cNvPr id="28" name="">
             <a:extLst xmlns:a="http://schemas.openxmlformats.org/drawingml/2006/main">
               <a:ext uri="{FF2B5EF4-FFF2-40B4-BE49-F238E27FC236}">
-                <a16:creationId xmlns:a16="http://schemas.microsoft.com/office/drawing/2014/main" id="{B65C1501-5619-42F3-B9F3-D9618C6E9551}"/>
+                <a16:creationId xmlns:a16="http://schemas.microsoft.com/office/drawing/2014/main" id="{B3686284-E4DF-496E-BB18-1A3382F0805C}"/>
               </a:ext>
             </a:extLst>
           </p:cNvPr>
@@ -9273,7 +9273,7 @@
           <p:cNvPr id="29" name="">
             <a:extLst xmlns:a="http://schemas.openxmlformats.org/drawingml/2006/main">
               <a:ext uri="{FF2B5EF4-FFF2-40B4-BE49-F238E27FC236}">
-                <a16:creationId xmlns:a16="http://schemas.microsoft.com/office/drawing/2014/main" id="{A05C72CC-DEE4-4EB1-9216-3FFABFADF76E}"/>
+                <a16:creationId xmlns:a16="http://schemas.microsoft.com/office/drawing/2014/main" id="{6B2CEF31-47C9-4166-992E-4351F99456FB}"/>
               </a:ext>
             </a:extLst>
           </p:cNvPr>
@@ -9335,7 +9335,7 @@
           <p:cNvPr id="30" name="">
             <a:extLst xmlns:a="http://schemas.openxmlformats.org/drawingml/2006/main">
               <a:ext uri="{FF2B5EF4-FFF2-40B4-BE49-F238E27FC236}">
-                <a16:creationId xmlns:a16="http://schemas.microsoft.com/office/drawing/2014/main" id="{38EFE0E6-53C0-4B09-9CA3-6BC16F74DFF0}"/>
+                <a16:creationId xmlns:a16="http://schemas.microsoft.com/office/drawing/2014/main" id="{A0F8A41C-AECB-433C-B3F7-5F11807E4F0D}"/>
               </a:ext>
             </a:extLst>
           </p:cNvPr>
@@ -9366,7 +9366,7 @@
           <p:cNvPr id="31" name="">
             <a:extLst xmlns:a="http://schemas.openxmlformats.org/drawingml/2006/main">
               <a:ext uri="{FF2B5EF4-FFF2-40B4-BE49-F238E27FC236}">
-                <a16:creationId xmlns:a16="http://schemas.microsoft.com/office/drawing/2014/main" id="{E28C49E9-3C4C-4F4A-9555-56923EB12220}"/>
+                <a16:creationId xmlns:a16="http://schemas.microsoft.com/office/drawing/2014/main" id="{5D70F670-1296-417F-9861-31EAD6BE2EB8}"/>
               </a:ext>
             </a:extLst>
           </p:cNvPr>
@@ -9428,7 +9428,7 @@
           <p:cNvPr id="32" name="">
             <a:extLst xmlns:a="http://schemas.openxmlformats.org/drawingml/2006/main">
               <a:ext uri="{FF2B5EF4-FFF2-40B4-BE49-F238E27FC236}">
-                <a16:creationId xmlns:a16="http://schemas.microsoft.com/office/drawing/2014/main" id="{12F2C0BC-06B5-49D7-BF1C-B402C8488BE6}"/>
+                <a16:creationId xmlns:a16="http://schemas.microsoft.com/office/drawing/2014/main" id="{A45A4EAC-AD98-4615-911E-08038AFAF9C5}"/>
               </a:ext>
             </a:extLst>
           </p:cNvPr>
@@ -9488,7 +9488,7 @@
     </p:spTree>
     <p:extLst>
       <p:ext uri="{BB962C8B-B14F-4D97-AF65-F5344CB8AC3E}">
-        <p14:creationId xmlns:p14="http://schemas.microsoft.com/office/powerpoint/2010/main" val="2063709067"/>
+        <p14:creationId xmlns:p14="http://schemas.microsoft.com/office/powerpoint/2010/main" val="276389437"/>
       </p:ext>
     </p:extLst>
   </p:cSld>
@@ -9519,7 +9519,7 @@
           <p:cNvPr id="32" name="">
             <a:extLst xmlns:a="http://schemas.openxmlformats.org/drawingml/2006/main">
               <a:ext uri="{FF2B5EF4-FFF2-40B4-BE49-F238E27FC236}">
-                <a16:creationId xmlns:a16="http://schemas.microsoft.com/office/drawing/2014/main" id="{8A369B82-6E03-4A5E-ADB4-B6BDB4892B12}"/>
+                <a16:creationId xmlns:a16="http://schemas.microsoft.com/office/drawing/2014/main" id="{640ECEEE-B402-4D66-A5FC-7144603F41CB}"/>
               </a:ext>
             </a:extLst>
           </p:cNvPr>
@@ -9581,7 +9581,7 @@
                 <a:latin typeface="Arial"/>
                 <a:ea typeface="Arial"/>
                 <a:cs typeface="Arial"/>
-                <a:hlinkClick xmlns:r="http://schemas.openxmlformats.org/officeDocument/2006/relationships" r:id="Ra71a82c1757745c5"/>
+                <a:hlinkClick xmlns:r="http://schemas.openxmlformats.org/officeDocument/2006/relationships" r:id="Raeef8c1338094232"/>
               </a:rPr>
               <a:t>https://github.com/qjmre23/Route2Zero</a:t>
             </a:r>
@@ -9604,7 +9604,7 @@
                 <a:latin typeface="Arial"/>
                 <a:ea typeface="Arial"/>
                 <a:cs typeface="Arial"/>
-                <a:hlinkClick xmlns:r="http://schemas.openxmlformats.org/officeDocument/2006/relationships" r:id="R4cfe024bdf5b47dc"/>
+                <a:hlinkClick xmlns:r="http://schemas.openxmlformats.org/officeDocument/2006/relationships" r:id="Rbe00ef090d4d42e0"/>
               </a:rPr>
               <a:t>https://route2zero.netlify.app/</a:t>
             </a:r>
@@ -9616,7 +9616,7 @@
           <p:cNvPr id="2" name="">
             <a:extLst xmlns:a="http://schemas.openxmlformats.org/drawingml/2006/main">
               <a:ext uri="{FF2B5EF4-FFF2-40B4-BE49-F238E27FC236}">
-                <a16:creationId xmlns:a16="http://schemas.microsoft.com/office/drawing/2014/main" id="{D1AA964F-0991-4DE4-A209-F161280051BE}"/>
+                <a16:creationId xmlns:a16="http://schemas.microsoft.com/office/drawing/2014/main" id="{E911C03D-10A9-4E01-A3E9-92AA7E99A318}"/>
               </a:ext>
             </a:extLst>
           </p:cNvPr>
@@ -9678,7 +9678,7 @@
           <p:cNvPr id="3" name="">
             <a:extLst xmlns:a="http://schemas.openxmlformats.org/drawingml/2006/main">
               <a:ext uri="{FF2B5EF4-FFF2-40B4-BE49-F238E27FC236}">
-                <a16:creationId xmlns:a16="http://schemas.microsoft.com/office/drawing/2014/main" id="{AA4EA021-C39B-4C40-9507-3EEA38DC2E4C}"/>
+                <a16:creationId xmlns:a16="http://schemas.microsoft.com/office/drawing/2014/main" id="{0B9455DF-4270-4BA8-8FEA-74427D3DAF0A}"/>
               </a:ext>
             </a:extLst>
           </p:cNvPr>
@@ -9740,7 +9740,7 @@
           <p:cNvPr id="4" name="">
             <a:extLst xmlns:a="http://schemas.openxmlformats.org/drawingml/2006/main">
               <a:ext uri="{FF2B5EF4-FFF2-40B4-BE49-F238E27FC236}">
-                <a16:creationId xmlns:a16="http://schemas.microsoft.com/office/drawing/2014/main" id="{A23DA40B-0B45-4644-8E35-2DDB27CB9BAE}"/>
+                <a16:creationId xmlns:a16="http://schemas.microsoft.com/office/drawing/2014/main" id="{DFD95DB4-A75E-489D-9EB1-B5B9D4203140}"/>
               </a:ext>
             </a:extLst>
           </p:cNvPr>
@@ -9802,7 +9802,7 @@
           <p:cNvPr id="5" name="">
             <a:extLst xmlns:a="http://schemas.openxmlformats.org/drawingml/2006/main">
               <a:ext uri="{FF2B5EF4-FFF2-40B4-BE49-F238E27FC236}">
-                <a16:creationId xmlns:a16="http://schemas.microsoft.com/office/drawing/2014/main" id="{3941F8DD-2F43-436A-A0EB-A1B21411645D}"/>
+                <a16:creationId xmlns:a16="http://schemas.microsoft.com/office/drawing/2014/main" id="{85BB4003-067E-42BF-A66B-1BE8D2C8C2FE}"/>
               </a:ext>
             </a:extLst>
           </p:cNvPr>
@@ -9835,7 +9835,7 @@
           <p:cNvPr id="6" name="">
             <a:extLst xmlns:a="http://schemas.openxmlformats.org/drawingml/2006/main">
               <a:ext uri="{FF2B5EF4-FFF2-40B4-BE49-F238E27FC236}">
-                <a16:creationId xmlns:a16="http://schemas.microsoft.com/office/drawing/2014/main" id="{2093083E-2094-44CB-9DC4-BACB47BD4E67}"/>
+                <a16:creationId xmlns:a16="http://schemas.microsoft.com/office/drawing/2014/main" id="{CB32FD9A-AA6F-409D-AC86-DCAF4F8C90CF}"/>
               </a:ext>
             </a:extLst>
           </p:cNvPr>
@@ -9868,7 +9868,7 @@
           <p:cNvPr id="7" name="">
             <a:extLst xmlns:a="http://schemas.openxmlformats.org/drawingml/2006/main">
               <a:ext uri="{FF2B5EF4-FFF2-40B4-BE49-F238E27FC236}">
-                <a16:creationId xmlns:a16="http://schemas.microsoft.com/office/drawing/2014/main" id="{0809D1F9-B752-4690-8235-E3F35F91332B}"/>
+                <a16:creationId xmlns:a16="http://schemas.microsoft.com/office/drawing/2014/main" id="{2EE91D17-025E-4A7D-98AD-DCE553A07A1B}"/>
               </a:ext>
             </a:extLst>
           </p:cNvPr>
@@ -9930,7 +9930,7 @@
           <p:cNvPr id="8" name="">
             <a:extLst xmlns:a="http://schemas.openxmlformats.org/drawingml/2006/main">
               <a:ext uri="{FF2B5EF4-FFF2-40B4-BE49-F238E27FC236}">
-                <a16:creationId xmlns:a16="http://schemas.microsoft.com/office/drawing/2014/main" id="{24EE9837-A68C-45C8-84C2-581DB78E3D3E}"/>
+                <a16:creationId xmlns:a16="http://schemas.microsoft.com/office/drawing/2014/main" id="{1851D545-0D78-4A14-A89C-506D3D34EED1}"/>
               </a:ext>
             </a:extLst>
           </p:cNvPr>
@@ -9992,7 +9992,7 @@
           <p:cNvPr id="9" name="">
             <a:extLst xmlns:a="http://schemas.openxmlformats.org/drawingml/2006/main">
               <a:ext uri="{FF2B5EF4-FFF2-40B4-BE49-F238E27FC236}">
-                <a16:creationId xmlns:a16="http://schemas.microsoft.com/office/drawing/2014/main" id="{7D6C7BD7-E168-4B34-B113-35478BE02228}"/>
+                <a16:creationId xmlns:a16="http://schemas.microsoft.com/office/drawing/2014/main" id="{910117EE-1256-48B9-8E4F-2EBB82A01D1F}"/>
               </a:ext>
             </a:extLst>
           </p:cNvPr>
@@ -10025,7 +10025,7 @@
           <p:cNvPr id="10" name="">
             <a:extLst xmlns:a="http://schemas.openxmlformats.org/drawingml/2006/main">
               <a:ext uri="{FF2B5EF4-FFF2-40B4-BE49-F238E27FC236}">
-                <a16:creationId xmlns:a16="http://schemas.microsoft.com/office/drawing/2014/main" id="{E2C60DB2-64C4-4B22-8F58-D2E7F79788AF}"/>
+                <a16:creationId xmlns:a16="http://schemas.microsoft.com/office/drawing/2014/main" id="{C0507009-2163-4F31-9E7F-193B47E3696C}"/>
               </a:ext>
             </a:extLst>
           </p:cNvPr>
@@ -10058,7 +10058,7 @@
           <p:cNvPr id="11" name="">
             <a:extLst xmlns:a="http://schemas.openxmlformats.org/drawingml/2006/main">
               <a:ext uri="{FF2B5EF4-FFF2-40B4-BE49-F238E27FC236}">
-                <a16:creationId xmlns:a16="http://schemas.microsoft.com/office/drawing/2014/main" id="{D96F374E-3B7E-4CAD-9890-E76FF440EC98}"/>
+                <a16:creationId xmlns:a16="http://schemas.microsoft.com/office/drawing/2014/main" id="{B6AC4A4C-3F53-43D5-843E-7F4C27CACE62}"/>
               </a:ext>
             </a:extLst>
           </p:cNvPr>
@@ -10120,7 +10120,7 @@
           <p:cNvPr id="12" name="">
             <a:extLst xmlns:a="http://schemas.openxmlformats.org/drawingml/2006/main">
               <a:ext uri="{FF2B5EF4-FFF2-40B4-BE49-F238E27FC236}">
-                <a16:creationId xmlns:a16="http://schemas.microsoft.com/office/drawing/2014/main" id="{69BCCE61-D561-4002-B862-5BBC97224BFE}"/>
+                <a16:creationId xmlns:a16="http://schemas.microsoft.com/office/drawing/2014/main" id="{286BEF29-1600-43D9-A643-EF03E5BA2DD8}"/>
               </a:ext>
             </a:extLst>
           </p:cNvPr>
@@ -10182,7 +10182,7 @@
           <p:cNvPr id="13" name="">
             <a:extLst xmlns:a="http://schemas.openxmlformats.org/drawingml/2006/main">
               <a:ext uri="{FF2B5EF4-FFF2-40B4-BE49-F238E27FC236}">
-                <a16:creationId xmlns:a16="http://schemas.microsoft.com/office/drawing/2014/main" id="{31F75C1A-90B8-40F3-BD25-8EFE6899ADFC}"/>
+                <a16:creationId xmlns:a16="http://schemas.microsoft.com/office/drawing/2014/main" id="{DFBDCF8B-0E7F-47E7-B440-1D51DCD06C72}"/>
               </a:ext>
             </a:extLst>
           </p:cNvPr>
@@ -10215,7 +10215,7 @@
           <p:cNvPr id="14" name="">
             <a:extLst xmlns:a="http://schemas.openxmlformats.org/drawingml/2006/main">
               <a:ext uri="{FF2B5EF4-FFF2-40B4-BE49-F238E27FC236}">
-                <a16:creationId xmlns:a16="http://schemas.microsoft.com/office/drawing/2014/main" id="{DEDF3975-EED8-40C8-BA75-814342C01D2A}"/>
+                <a16:creationId xmlns:a16="http://schemas.microsoft.com/office/drawing/2014/main" id="{8293661C-419A-4DB8-B8DB-147D12D8B56C}"/>
               </a:ext>
             </a:extLst>
           </p:cNvPr>
@@ -10248,7 +10248,7 @@
           <p:cNvPr id="15" name="">
             <a:extLst xmlns:a="http://schemas.openxmlformats.org/drawingml/2006/main">
               <a:ext uri="{FF2B5EF4-FFF2-40B4-BE49-F238E27FC236}">
-                <a16:creationId xmlns:a16="http://schemas.microsoft.com/office/drawing/2014/main" id="{5FF316A8-A6D6-4D0F-A468-87FAD0D162DE}"/>
+                <a16:creationId xmlns:a16="http://schemas.microsoft.com/office/drawing/2014/main" id="{4FC2F0BC-BFBB-46D5-8339-57804B958EA2}"/>
               </a:ext>
             </a:extLst>
           </p:cNvPr>
@@ -10310,7 +10310,7 @@
           <p:cNvPr id="16" name="">
             <a:extLst xmlns:a="http://schemas.openxmlformats.org/drawingml/2006/main">
               <a:ext uri="{FF2B5EF4-FFF2-40B4-BE49-F238E27FC236}">
-                <a16:creationId xmlns:a16="http://schemas.microsoft.com/office/drawing/2014/main" id="{86C8E84F-1C75-447E-AB05-23EFA2FD96AB}"/>
+                <a16:creationId xmlns:a16="http://schemas.microsoft.com/office/drawing/2014/main" id="{D69C98D0-BA2C-457D-8B59-2BBC8DEB46D8}"/>
               </a:ext>
             </a:extLst>
           </p:cNvPr>
@@ -10372,7 +10372,7 @@
           <p:cNvPr id="17" name="">
             <a:extLst xmlns:a="http://schemas.openxmlformats.org/drawingml/2006/main">
               <a:ext uri="{FF2B5EF4-FFF2-40B4-BE49-F238E27FC236}">
-                <a16:creationId xmlns:a16="http://schemas.microsoft.com/office/drawing/2014/main" id="{21D0F9F4-0B26-4C8F-996E-AB5A0E3EF09D}"/>
+                <a16:creationId xmlns:a16="http://schemas.microsoft.com/office/drawing/2014/main" id="{AAA6D485-D2CA-4994-B2E0-BB87935C5DE4}"/>
               </a:ext>
             </a:extLst>
           </p:cNvPr>
@@ -10405,7 +10405,7 @@
           <p:cNvPr id="18" name="">
             <a:extLst xmlns:a="http://schemas.openxmlformats.org/drawingml/2006/main">
               <a:ext uri="{FF2B5EF4-FFF2-40B4-BE49-F238E27FC236}">
-                <a16:creationId xmlns:a16="http://schemas.microsoft.com/office/drawing/2014/main" id="{2596D1C3-9F48-4F96-9F2F-5E3FB42217A7}"/>
+                <a16:creationId xmlns:a16="http://schemas.microsoft.com/office/drawing/2014/main" id="{E785A85F-D183-443E-BCE2-306ED9E2BB45}"/>
               </a:ext>
             </a:extLst>
           </p:cNvPr>
@@ -10438,7 +10438,7 @@
           <p:cNvPr id="19" name="">
             <a:extLst xmlns:a="http://schemas.openxmlformats.org/drawingml/2006/main">
               <a:ext uri="{FF2B5EF4-FFF2-40B4-BE49-F238E27FC236}">
-                <a16:creationId xmlns:a16="http://schemas.microsoft.com/office/drawing/2014/main" id="{F3E69DA2-3EB9-457D-9066-E3EECA3E01BA}"/>
+                <a16:creationId xmlns:a16="http://schemas.microsoft.com/office/drawing/2014/main" id="{1F19F371-528B-4D7F-9F1D-7B7302BE05A2}"/>
               </a:ext>
             </a:extLst>
           </p:cNvPr>
@@ -10500,7 +10500,7 @@
           <p:cNvPr id="20" name="">
             <a:extLst xmlns:a="http://schemas.openxmlformats.org/drawingml/2006/main">
               <a:ext uri="{FF2B5EF4-FFF2-40B4-BE49-F238E27FC236}">
-                <a16:creationId xmlns:a16="http://schemas.microsoft.com/office/drawing/2014/main" id="{58044146-2B61-461B-A1C7-6F70EBC4CE94}"/>
+                <a16:creationId xmlns:a16="http://schemas.microsoft.com/office/drawing/2014/main" id="{3AB6B84C-CFB7-49C9-B3C3-EE8AD2F74D06}"/>
               </a:ext>
             </a:extLst>
           </p:cNvPr>
@@ -10535,7 +10535,7 @@
           <p:cNvPr id="21" name="">
             <a:extLst xmlns:a="http://schemas.openxmlformats.org/drawingml/2006/main">
               <a:ext uri="{FF2B5EF4-FFF2-40B4-BE49-F238E27FC236}">
-                <a16:creationId xmlns:a16="http://schemas.microsoft.com/office/drawing/2014/main" id="{E2FC7179-BB20-43CA-B230-62D949D26417}"/>
+                <a16:creationId xmlns:a16="http://schemas.microsoft.com/office/drawing/2014/main" id="{9F5AAEEE-54D8-44F3-88E7-A4D19244CE81}"/>
               </a:ext>
             </a:extLst>
           </p:cNvPr>
@@ -10568,7 +10568,7 @@
           <p:cNvPr id="22" name="">
             <a:extLst xmlns:a="http://schemas.openxmlformats.org/drawingml/2006/main">
               <a:ext uri="{FF2B5EF4-FFF2-40B4-BE49-F238E27FC236}">
-                <a16:creationId xmlns:a16="http://schemas.microsoft.com/office/drawing/2014/main" id="{7787089E-CB96-4E38-AFFE-6ED981C9BC1D}"/>
+                <a16:creationId xmlns:a16="http://schemas.microsoft.com/office/drawing/2014/main" id="{5E29D961-AD6C-4C13-B1FF-0F07D9D4C136}"/>
               </a:ext>
             </a:extLst>
           </p:cNvPr>
@@ -10630,7 +10630,7 @@
           <p:cNvPr id="23" name="">
             <a:extLst xmlns:a="http://schemas.openxmlformats.org/drawingml/2006/main">
               <a:ext uri="{FF2B5EF4-FFF2-40B4-BE49-F238E27FC236}">
-                <a16:creationId xmlns:a16="http://schemas.microsoft.com/office/drawing/2014/main" id="{7649BBE2-BFBB-4670-89A4-697E5AD85A10}"/>
+                <a16:creationId xmlns:a16="http://schemas.microsoft.com/office/drawing/2014/main" id="{0337C75C-C57D-4185-8946-8ABAC7BFBE14}"/>
               </a:ext>
             </a:extLst>
           </p:cNvPr>
@@ -10692,7 +10692,7 @@
           <p:cNvPr id="24" name="">
             <a:extLst xmlns:a="http://schemas.openxmlformats.org/drawingml/2006/main">
               <a:ext uri="{FF2B5EF4-FFF2-40B4-BE49-F238E27FC236}">
-                <a16:creationId xmlns:a16="http://schemas.microsoft.com/office/drawing/2014/main" id="{CC054E23-52F1-4F17-ABB1-848F0A62D1C9}"/>
+                <a16:creationId xmlns:a16="http://schemas.microsoft.com/office/drawing/2014/main" id="{5166C9B6-6730-40BA-8E00-2DA5C914A463}"/>
               </a:ext>
             </a:extLst>
           </p:cNvPr>
@@ -10754,7 +10754,7 @@
           <p:cNvPr id="25" name="">
             <a:extLst xmlns:a="http://schemas.openxmlformats.org/drawingml/2006/main">
               <a:ext uri="{FF2B5EF4-FFF2-40B4-BE49-F238E27FC236}">
-                <a16:creationId xmlns:a16="http://schemas.microsoft.com/office/drawing/2014/main" id="{9AF9B1B5-0110-4707-B6FD-E901904E026B}"/>
+                <a16:creationId xmlns:a16="http://schemas.microsoft.com/office/drawing/2014/main" id="{42D32EA1-8385-47AF-97EE-7A69E8F3D61C}"/>
               </a:ext>
             </a:extLst>
           </p:cNvPr>
@@ -10785,7 +10785,7 @@
           <p:cNvPr id="26" name="">
             <a:extLst xmlns:a="http://schemas.openxmlformats.org/drawingml/2006/main">
               <a:ext uri="{FF2B5EF4-FFF2-40B4-BE49-F238E27FC236}">
-                <a16:creationId xmlns:a16="http://schemas.microsoft.com/office/drawing/2014/main" id="{AF4542F2-C299-4A0A-856E-B5F9491432CB}"/>
+                <a16:creationId xmlns:a16="http://schemas.microsoft.com/office/drawing/2014/main" id="{5D26555A-4F86-49C5-B0E9-79078ABED9AF}"/>
               </a:ext>
             </a:extLst>
           </p:cNvPr>
@@ -10847,7 +10847,7 @@
           <p:cNvPr id="27" name="">
             <a:extLst xmlns:a="http://schemas.openxmlformats.org/drawingml/2006/main">
               <a:ext uri="{FF2B5EF4-FFF2-40B4-BE49-F238E27FC236}">
-                <a16:creationId xmlns:a16="http://schemas.microsoft.com/office/drawing/2014/main" id="{8AAD9303-D5F4-4A03-A5C4-7BC69CD3A312}"/>
+                <a16:creationId xmlns:a16="http://schemas.microsoft.com/office/drawing/2014/main" id="{7443712F-4E21-45EC-B471-0CA318BCB2DC}"/>
               </a:ext>
             </a:extLst>
           </p:cNvPr>
@@ -10942,7 +10942,7 @@
           <p:cNvPr id="28" name="">
             <a:extLst xmlns:a="http://schemas.openxmlformats.org/drawingml/2006/main">
               <a:ext uri="{FF2B5EF4-FFF2-40B4-BE49-F238E27FC236}">
-                <a16:creationId xmlns:a16="http://schemas.microsoft.com/office/drawing/2014/main" id="{3CE92B79-F06D-4FD5-A70C-4EEB6BEDABAD}"/>
+                <a16:creationId xmlns:a16="http://schemas.microsoft.com/office/drawing/2014/main" id="{2A2D5063-3604-43D6-8B38-BA246EE24403}"/>
               </a:ext>
             </a:extLst>
           </p:cNvPr>
@@ -11004,7 +11004,7 @@
           <p:cNvPr id="29" name="">
             <a:extLst xmlns:a="http://schemas.openxmlformats.org/drawingml/2006/main">
               <a:ext uri="{FF2B5EF4-FFF2-40B4-BE49-F238E27FC236}">
-                <a16:creationId xmlns:a16="http://schemas.microsoft.com/office/drawing/2014/main" id="{2E60D159-FF82-4E64-8536-87C8427F23EB}"/>
+                <a16:creationId xmlns:a16="http://schemas.microsoft.com/office/drawing/2014/main" id="{0AF6D52C-D4E3-4CF2-8DD5-03936213C160}"/>
               </a:ext>
             </a:extLst>
           </p:cNvPr>
@@ -11035,7 +11035,7 @@
           <p:cNvPr id="30" name="">
             <a:extLst xmlns:a="http://schemas.openxmlformats.org/drawingml/2006/main">
               <a:ext uri="{FF2B5EF4-FFF2-40B4-BE49-F238E27FC236}">
-                <a16:creationId xmlns:a16="http://schemas.microsoft.com/office/drawing/2014/main" id="{411C6B11-2948-4B88-B109-87060F976CA5}"/>
+                <a16:creationId xmlns:a16="http://schemas.microsoft.com/office/drawing/2014/main" id="{DFB86802-DD35-4DAA-B4FE-E6144F6F3EB5}"/>
               </a:ext>
             </a:extLst>
           </p:cNvPr>
@@ -11097,7 +11097,7 @@
           <p:cNvPr id="31" name="">
             <a:extLst xmlns:a="http://schemas.openxmlformats.org/drawingml/2006/main">
               <a:ext uri="{FF2B5EF4-FFF2-40B4-BE49-F238E27FC236}">
-                <a16:creationId xmlns:a16="http://schemas.microsoft.com/office/drawing/2014/main" id="{40B4B70B-88A7-4BD6-A7D1-2888BEA5FF53}"/>
+                <a16:creationId xmlns:a16="http://schemas.microsoft.com/office/drawing/2014/main" id="{90FDB188-1040-444A-AC96-52C9AB03333E}"/>
               </a:ext>
             </a:extLst>
           </p:cNvPr>
@@ -11157,7 +11157,7 @@
     </p:spTree>
     <p:extLst>
       <p:ext uri="{BB962C8B-B14F-4D97-AF65-F5344CB8AC3E}">
-        <p14:creationId xmlns:p14="http://schemas.microsoft.com/office/powerpoint/2010/main" val="791093532"/>
+        <p14:creationId xmlns:p14="http://schemas.microsoft.com/office/powerpoint/2010/main" val="1033045706"/>
       </p:ext>
     </p:extLst>
   </p:cSld>
@@ -11188,7 +11188,7 @@
           <p:cNvPr id="27" name="">
             <a:extLst xmlns:a="http://schemas.openxmlformats.org/drawingml/2006/main">
               <a:ext uri="{FF2B5EF4-FFF2-40B4-BE49-F238E27FC236}">
-                <a16:creationId xmlns:a16="http://schemas.microsoft.com/office/drawing/2014/main" id="{D28A1D1E-9780-4484-AE19-ADB9DF829BB1}"/>
+                <a16:creationId xmlns:a16="http://schemas.microsoft.com/office/drawing/2014/main" id="{D43D4A88-7D7A-491B-97C6-230455E453B6}"/>
               </a:ext>
             </a:extLst>
           </p:cNvPr>
@@ -11250,7 +11250,7 @@
                 <a:latin typeface="Arial"/>
                 <a:ea typeface="Arial"/>
                 <a:cs typeface="Arial"/>
-                <a:hlinkClick xmlns:r="http://schemas.openxmlformats.org/officeDocument/2006/relationships" r:id="Rb3dbe1815f384ef0"/>
+                <a:hlinkClick xmlns:r="http://schemas.openxmlformats.org/officeDocument/2006/relationships" r:id="Rfedf47a859de4e21"/>
               </a:rPr>
               <a:t>https://github.com/qjmre23/Route2Zero</a:t>
             </a:r>
@@ -11273,7 +11273,7 @@
                 <a:latin typeface="Arial"/>
                 <a:ea typeface="Arial"/>
                 <a:cs typeface="Arial"/>
-                <a:hlinkClick xmlns:r="http://schemas.openxmlformats.org/officeDocument/2006/relationships" r:id="R1f30ee8ae47544b8"/>
+                <a:hlinkClick xmlns:r="http://schemas.openxmlformats.org/officeDocument/2006/relationships" r:id="R9a55a30855b04a39"/>
               </a:rPr>
               <a:t>https://route2zero.netlify.app/</a:t>
             </a:r>
@@ -11285,7 +11285,7 @@
           <p:cNvPr id="2" name="">
             <a:extLst xmlns:a="http://schemas.openxmlformats.org/drawingml/2006/main">
               <a:ext uri="{FF2B5EF4-FFF2-40B4-BE49-F238E27FC236}">
-                <a16:creationId xmlns:a16="http://schemas.microsoft.com/office/drawing/2014/main" id="{1F45A6AD-5083-40B3-BC28-29020DCE0877}"/>
+                <a16:creationId xmlns:a16="http://schemas.microsoft.com/office/drawing/2014/main" id="{10C560D1-5436-49B8-9E96-ED309BDA6658}"/>
               </a:ext>
             </a:extLst>
           </p:cNvPr>
@@ -11347,7 +11347,7 @@
           <p:cNvPr id="3" name="">
             <a:extLst xmlns:a="http://schemas.openxmlformats.org/drawingml/2006/main">
               <a:ext uri="{FF2B5EF4-FFF2-40B4-BE49-F238E27FC236}">
-                <a16:creationId xmlns:a16="http://schemas.microsoft.com/office/drawing/2014/main" id="{5A7EC52D-4E27-46DF-8F00-57AF7EA39350}"/>
+                <a16:creationId xmlns:a16="http://schemas.microsoft.com/office/drawing/2014/main" id="{1D58B03A-06E9-414F-8AAC-C9C296BEF251}"/>
               </a:ext>
             </a:extLst>
           </p:cNvPr>
@@ -11409,7 +11409,7 @@
           <p:cNvPr id="4" name="">
             <a:extLst xmlns:a="http://schemas.openxmlformats.org/drawingml/2006/main">
               <a:ext uri="{FF2B5EF4-FFF2-40B4-BE49-F238E27FC236}">
-                <a16:creationId xmlns:a16="http://schemas.microsoft.com/office/drawing/2014/main" id="{97732702-9410-4FA4-951D-1936E130EE29}"/>
+                <a16:creationId xmlns:a16="http://schemas.microsoft.com/office/drawing/2014/main" id="{F2E0916B-46AB-4FFB-A986-8FFB788682ED}"/>
               </a:ext>
             </a:extLst>
           </p:cNvPr>
@@ -11471,7 +11471,7 @@
           <p:cNvPr id="5" name="">
             <a:extLst xmlns:a="http://schemas.openxmlformats.org/drawingml/2006/main">
               <a:ext uri="{FF2B5EF4-FFF2-40B4-BE49-F238E27FC236}">
-                <a16:creationId xmlns:a16="http://schemas.microsoft.com/office/drawing/2014/main" id="{20A7C2B1-535A-48B6-9636-666C56C20AE7}"/>
+                <a16:creationId xmlns:a16="http://schemas.microsoft.com/office/drawing/2014/main" id="{DFAEE2F6-E47D-4F34-ABD3-F7D599C2C6D4}"/>
               </a:ext>
             </a:extLst>
           </p:cNvPr>
@@ -11533,7 +11533,7 @@
           <p:cNvPr id="6" name="">
             <a:extLst xmlns:a="http://schemas.openxmlformats.org/drawingml/2006/main">
               <a:ext uri="{FF2B5EF4-FFF2-40B4-BE49-F238E27FC236}">
-                <a16:creationId xmlns:a16="http://schemas.microsoft.com/office/drawing/2014/main" id="{51DF5452-E64B-400B-9E52-5931F7C8EC1E}"/>
+                <a16:creationId xmlns:a16="http://schemas.microsoft.com/office/drawing/2014/main" id="{823E9C80-AF05-4E13-A1D5-769A6E5B4EF2}"/>
               </a:ext>
             </a:extLst>
           </p:cNvPr>
@@ -11595,7 +11595,7 @@
           <p:cNvPr id="7" name="">
             <a:extLst xmlns:a="http://schemas.openxmlformats.org/drawingml/2006/main">
               <a:ext uri="{FF2B5EF4-FFF2-40B4-BE49-F238E27FC236}">
-                <a16:creationId xmlns:a16="http://schemas.microsoft.com/office/drawing/2014/main" id="{92BBE17C-1066-481A-B20A-68C57B7D7832}"/>
+                <a16:creationId xmlns:a16="http://schemas.microsoft.com/office/drawing/2014/main" id="{3FBEEE96-CD27-4260-8C2C-C0656652EA32}"/>
               </a:ext>
             </a:extLst>
           </p:cNvPr>
@@ -11657,7 +11657,7 @@
           <p:cNvPr id="8" name="">
             <a:extLst xmlns:a="http://schemas.openxmlformats.org/drawingml/2006/main">
               <a:ext uri="{FF2B5EF4-FFF2-40B4-BE49-F238E27FC236}">
-                <a16:creationId xmlns:a16="http://schemas.microsoft.com/office/drawing/2014/main" id="{6E922EB1-787E-4E83-8F39-03F2BB1C6F0E}"/>
+                <a16:creationId xmlns:a16="http://schemas.microsoft.com/office/drawing/2014/main" id="{AC842F88-FB4A-4F11-8FA8-1517E9E024B9}"/>
               </a:ext>
             </a:extLst>
           </p:cNvPr>
@@ -11688,7 +11688,7 @@
           <p:cNvPr id="9" name="">
             <a:extLst xmlns:a="http://schemas.openxmlformats.org/drawingml/2006/main">
               <a:ext uri="{FF2B5EF4-FFF2-40B4-BE49-F238E27FC236}">
-                <a16:creationId xmlns:a16="http://schemas.microsoft.com/office/drawing/2014/main" id="{DB6B17EB-94D7-4F95-9DAF-6C99B4594578}"/>
+                <a16:creationId xmlns:a16="http://schemas.microsoft.com/office/drawing/2014/main" id="{25B7D892-B5CD-46F5-8018-C9A73706530F}"/>
               </a:ext>
             </a:extLst>
           </p:cNvPr>
@@ -11721,7 +11721,7 @@
           <p:cNvPr id="10" name="">
             <a:extLst xmlns:a="http://schemas.openxmlformats.org/drawingml/2006/main">
               <a:ext uri="{FF2B5EF4-FFF2-40B4-BE49-F238E27FC236}">
-                <a16:creationId xmlns:a16="http://schemas.microsoft.com/office/drawing/2014/main" id="{7C1E1E10-22E1-4D0F-85AB-2F916456C157}"/>
+                <a16:creationId xmlns:a16="http://schemas.microsoft.com/office/drawing/2014/main" id="{6F7990D1-7BB5-4C39-B3BC-2B1D8BB48C99}"/>
               </a:ext>
             </a:extLst>
           </p:cNvPr>
@@ -11783,7 +11783,7 @@
           <p:cNvPr id="11" name="">
             <a:extLst xmlns:a="http://schemas.openxmlformats.org/drawingml/2006/main">
               <a:ext uri="{FF2B5EF4-FFF2-40B4-BE49-F238E27FC236}">
-                <a16:creationId xmlns:a16="http://schemas.microsoft.com/office/drawing/2014/main" id="{27CD88AB-1683-4636-89F5-13940F448739}"/>
+                <a16:creationId xmlns:a16="http://schemas.microsoft.com/office/drawing/2014/main" id="{E3373F33-F417-41F2-AE0F-75BD0BF0413A}"/>
               </a:ext>
             </a:extLst>
           </p:cNvPr>
@@ -11845,7 +11845,7 @@
           <p:cNvPr id="12" name="">
             <a:extLst xmlns:a="http://schemas.openxmlformats.org/drawingml/2006/main">
               <a:ext uri="{FF2B5EF4-FFF2-40B4-BE49-F238E27FC236}">
-                <a16:creationId xmlns:a16="http://schemas.microsoft.com/office/drawing/2014/main" id="{F48565B6-4632-40E4-9377-CF65EAC96A72}"/>
+                <a16:creationId xmlns:a16="http://schemas.microsoft.com/office/drawing/2014/main" id="{73D04967-E516-48A6-A471-D09E2C539690}"/>
               </a:ext>
             </a:extLst>
           </p:cNvPr>
@@ -11880,7 +11880,7 @@
           <p:cNvPr id="13" name="">
             <a:extLst xmlns:a="http://schemas.openxmlformats.org/drawingml/2006/main">
               <a:ext uri="{FF2B5EF4-FFF2-40B4-BE49-F238E27FC236}">
-                <a16:creationId xmlns:a16="http://schemas.microsoft.com/office/drawing/2014/main" id="{D85E65EA-8FB2-4C15-9CFC-35096F9741EE}"/>
+                <a16:creationId xmlns:a16="http://schemas.microsoft.com/office/drawing/2014/main" id="{01943D9D-A332-4EF0-B990-280127198564}"/>
               </a:ext>
             </a:extLst>
           </p:cNvPr>
@@ -11942,7 +11942,7 @@
           <p:cNvPr id="14" name="">
             <a:extLst xmlns:a="http://schemas.openxmlformats.org/drawingml/2006/main">
               <a:ext uri="{FF2B5EF4-FFF2-40B4-BE49-F238E27FC236}">
-                <a16:creationId xmlns:a16="http://schemas.microsoft.com/office/drawing/2014/main" id="{A509ECF1-EC39-47B8-8E55-CEEB7380AA99}"/>
+                <a16:creationId xmlns:a16="http://schemas.microsoft.com/office/drawing/2014/main" id="{9F05C535-A207-42DB-BD91-D9A032484FEF}"/>
               </a:ext>
             </a:extLst>
           </p:cNvPr>
@@ -12004,7 +12004,7 @@
           <p:cNvPr id="15" name="">
             <a:extLst xmlns:a="http://schemas.openxmlformats.org/drawingml/2006/main">
               <a:ext uri="{FF2B5EF4-FFF2-40B4-BE49-F238E27FC236}">
-                <a16:creationId xmlns:a16="http://schemas.microsoft.com/office/drawing/2014/main" id="{7FB27270-B1F5-48E7-995B-6C1263D290A6}"/>
+                <a16:creationId xmlns:a16="http://schemas.microsoft.com/office/drawing/2014/main" id="{68237917-D846-4F4A-A3B5-D754293F40CD}"/>
               </a:ext>
             </a:extLst>
           </p:cNvPr>
@@ -12066,7 +12066,7 @@
           <p:cNvPr id="16" name="">
             <a:extLst xmlns:a="http://schemas.openxmlformats.org/drawingml/2006/main">
               <a:ext uri="{FF2B5EF4-FFF2-40B4-BE49-F238E27FC236}">
-                <a16:creationId xmlns:a16="http://schemas.microsoft.com/office/drawing/2014/main" id="{9B742223-3FB3-43A2-AD19-7B4B9FC417C3}"/>
+                <a16:creationId xmlns:a16="http://schemas.microsoft.com/office/drawing/2014/main" id="{AE645C17-B949-4208-92A4-5AF51864381E}"/>
               </a:ext>
             </a:extLst>
           </p:cNvPr>
@@ -12097,7 +12097,7 @@
           <p:cNvPr id="17" name="">
             <a:extLst xmlns:a="http://schemas.openxmlformats.org/drawingml/2006/main">
               <a:ext uri="{FF2B5EF4-FFF2-40B4-BE49-F238E27FC236}">
-                <a16:creationId xmlns:a16="http://schemas.microsoft.com/office/drawing/2014/main" id="{662A0D99-29AB-4E8C-99D5-BBEBFFEC8A0B}"/>
+                <a16:creationId xmlns:a16="http://schemas.microsoft.com/office/drawing/2014/main" id="{CDCD5936-E43C-44A3-9A87-1D6D01D9B327}"/>
               </a:ext>
             </a:extLst>
           </p:cNvPr>
@@ -12130,7 +12130,7 @@
           <p:cNvPr id="18" name="">
             <a:extLst xmlns:a="http://schemas.openxmlformats.org/drawingml/2006/main">
               <a:ext uri="{FF2B5EF4-FFF2-40B4-BE49-F238E27FC236}">
-                <a16:creationId xmlns:a16="http://schemas.microsoft.com/office/drawing/2014/main" id="{5028AD84-A400-4EA4-97D0-EE07EFBB9813}"/>
+                <a16:creationId xmlns:a16="http://schemas.microsoft.com/office/drawing/2014/main" id="{9AA3A4D3-3701-4083-A9F1-ACB4B4B8253D}"/>
               </a:ext>
             </a:extLst>
           </p:cNvPr>
@@ -12192,7 +12192,7 @@
           <p:cNvPr id="19" name="">
             <a:extLst xmlns:a="http://schemas.openxmlformats.org/drawingml/2006/main">
               <a:ext uri="{FF2B5EF4-FFF2-40B4-BE49-F238E27FC236}">
-                <a16:creationId xmlns:a16="http://schemas.microsoft.com/office/drawing/2014/main" id="{85AE9AC1-2B6B-44BA-9AFF-C4B52E3A8522}"/>
+                <a16:creationId xmlns:a16="http://schemas.microsoft.com/office/drawing/2014/main" id="{7D0EC1CE-C448-4C7D-B184-BEE570B0B157}"/>
               </a:ext>
             </a:extLst>
           </p:cNvPr>
@@ -12254,7 +12254,7 @@
           <p:cNvPr id="20" name="">
             <a:extLst xmlns:a="http://schemas.openxmlformats.org/drawingml/2006/main">
               <a:ext uri="{FF2B5EF4-FFF2-40B4-BE49-F238E27FC236}">
-                <a16:creationId xmlns:a16="http://schemas.microsoft.com/office/drawing/2014/main" id="{00E0BA8F-85E0-4AEB-8974-5315E1B1D822}"/>
+                <a16:creationId xmlns:a16="http://schemas.microsoft.com/office/drawing/2014/main" id="{9BF0D766-8BED-4FDF-B392-5498A9EE1FAE}"/>
               </a:ext>
             </a:extLst>
           </p:cNvPr>
@@ -12289,7 +12289,7 @@
           <p:cNvPr id="21" name="">
             <a:extLst xmlns:a="http://schemas.openxmlformats.org/drawingml/2006/main">
               <a:ext uri="{FF2B5EF4-FFF2-40B4-BE49-F238E27FC236}">
-                <a16:creationId xmlns:a16="http://schemas.microsoft.com/office/drawing/2014/main" id="{866CB4F2-1E23-4EAD-9ECD-3E1069073735}"/>
+                <a16:creationId xmlns:a16="http://schemas.microsoft.com/office/drawing/2014/main" id="{37029660-9175-4BDA-987B-0C446101572A}"/>
               </a:ext>
             </a:extLst>
           </p:cNvPr>
@@ -12351,7 +12351,7 @@
           <p:cNvPr id="22" name="">
             <a:extLst xmlns:a="http://schemas.openxmlformats.org/drawingml/2006/main">
               <a:ext uri="{FF2B5EF4-FFF2-40B4-BE49-F238E27FC236}">
-                <a16:creationId xmlns:a16="http://schemas.microsoft.com/office/drawing/2014/main" id="{79D0B2D7-8F76-4F27-AF53-2EED10A76D48}"/>
+                <a16:creationId xmlns:a16="http://schemas.microsoft.com/office/drawing/2014/main" id="{35B6F1B0-9788-480B-8206-544D8B07DAA7}"/>
               </a:ext>
             </a:extLst>
           </p:cNvPr>
@@ -12384,7 +12384,7 @@
           <p:cNvPr id="23" name="">
             <a:extLst xmlns:a="http://schemas.openxmlformats.org/drawingml/2006/main">
               <a:ext uri="{FF2B5EF4-FFF2-40B4-BE49-F238E27FC236}">
-                <a16:creationId xmlns:a16="http://schemas.microsoft.com/office/drawing/2014/main" id="{FEDCF6D8-DAAC-4EED-95FA-72A2AE8EAFBA}"/>
+                <a16:creationId xmlns:a16="http://schemas.microsoft.com/office/drawing/2014/main" id="{4E3EC698-EBB7-4613-9A7E-AD9ED3E155F6}"/>
               </a:ext>
             </a:extLst>
           </p:cNvPr>
@@ -12446,7 +12446,7 @@
           <p:cNvPr id="24" name="">
             <a:extLst xmlns:a="http://schemas.openxmlformats.org/drawingml/2006/main">
               <a:ext uri="{FF2B5EF4-FFF2-40B4-BE49-F238E27FC236}">
-                <a16:creationId xmlns:a16="http://schemas.microsoft.com/office/drawing/2014/main" id="{9CDD6315-A44C-4903-8B98-E1D27EE8B6D9}"/>
+                <a16:creationId xmlns:a16="http://schemas.microsoft.com/office/drawing/2014/main" id="{C7720668-7440-4D40-8B57-EB24263F9BAD}"/>
               </a:ext>
             </a:extLst>
           </p:cNvPr>
@@ -12477,7 +12477,7 @@
           <p:cNvPr id="25" name="">
             <a:extLst xmlns:a="http://schemas.openxmlformats.org/drawingml/2006/main">
               <a:ext uri="{FF2B5EF4-FFF2-40B4-BE49-F238E27FC236}">
-                <a16:creationId xmlns:a16="http://schemas.microsoft.com/office/drawing/2014/main" id="{A54C7E28-94DB-4A0C-8DD7-050394965191}"/>
+                <a16:creationId xmlns:a16="http://schemas.microsoft.com/office/drawing/2014/main" id="{6AA14447-080F-41F8-A0A1-603F1F5AFBEE}"/>
               </a:ext>
             </a:extLst>
           </p:cNvPr>
@@ -12539,7 +12539,7 @@
           <p:cNvPr id="26" name="">
             <a:extLst xmlns:a="http://schemas.openxmlformats.org/drawingml/2006/main">
               <a:ext uri="{FF2B5EF4-FFF2-40B4-BE49-F238E27FC236}">
-                <a16:creationId xmlns:a16="http://schemas.microsoft.com/office/drawing/2014/main" id="{3BE2B98A-45FB-48D1-80ED-C321ABB831E3}"/>
+                <a16:creationId xmlns:a16="http://schemas.microsoft.com/office/drawing/2014/main" id="{996663AB-AFFE-40AE-ADDD-929451CFAB5D}"/>
               </a:ext>
             </a:extLst>
           </p:cNvPr>
@@ -12599,7 +12599,7 @@
     </p:spTree>
     <p:extLst>
       <p:ext uri="{BB962C8B-B14F-4D97-AF65-F5344CB8AC3E}">
-        <p14:creationId xmlns:p14="http://schemas.microsoft.com/office/powerpoint/2010/main" val="1322056757"/>
+        <p14:creationId xmlns:p14="http://schemas.microsoft.com/office/powerpoint/2010/main" val="272388731"/>
       </p:ext>
     </p:extLst>
   </p:cSld>
@@ -12630,7 +12630,7 @@
           <p:cNvPr id="25" name="">
             <a:extLst xmlns:a="http://schemas.openxmlformats.org/drawingml/2006/main">
               <a:ext uri="{FF2B5EF4-FFF2-40B4-BE49-F238E27FC236}">
-                <a16:creationId xmlns:a16="http://schemas.microsoft.com/office/drawing/2014/main" id="{271D7220-0DC0-46D6-BB88-E04BA1E7B3DE}"/>
+                <a16:creationId xmlns:a16="http://schemas.microsoft.com/office/drawing/2014/main" id="{95F87653-AA9E-4468-847C-CB33D7B8254C}"/>
               </a:ext>
             </a:extLst>
           </p:cNvPr>
@@ -12692,7 +12692,7 @@
                 <a:latin typeface="Arial"/>
                 <a:ea typeface="Arial"/>
                 <a:cs typeface="Arial"/>
-                <a:hlinkClick xmlns:r="http://schemas.openxmlformats.org/officeDocument/2006/relationships" r:id="R71110b307ec645e8"/>
+                <a:hlinkClick xmlns:r="http://schemas.openxmlformats.org/officeDocument/2006/relationships" r:id="R78eb558e22a9444a"/>
               </a:rPr>
               <a:t>https://github.com/qjmre23/Route2Zero</a:t>
             </a:r>
@@ -12715,7 +12715,7 @@
                 <a:latin typeface="Arial"/>
                 <a:ea typeface="Arial"/>
                 <a:cs typeface="Arial"/>
-                <a:hlinkClick xmlns:r="http://schemas.openxmlformats.org/officeDocument/2006/relationships" r:id="Rcd8c25b5e20f447c"/>
+                <a:hlinkClick xmlns:r="http://schemas.openxmlformats.org/officeDocument/2006/relationships" r:id="R895ec500b6894424"/>
               </a:rPr>
               <a:t>https://route2zero.netlify.app/</a:t>
             </a:r>
@@ -12727,7 +12727,7 @@
           <p:cNvPr id="2" name="">
             <a:extLst xmlns:a="http://schemas.openxmlformats.org/drawingml/2006/main">
               <a:ext uri="{FF2B5EF4-FFF2-40B4-BE49-F238E27FC236}">
-                <a16:creationId xmlns:a16="http://schemas.microsoft.com/office/drawing/2014/main" id="{A202DCAB-3A36-4ED8-ABE4-29FD6553C810}"/>
+                <a16:creationId xmlns:a16="http://schemas.microsoft.com/office/drawing/2014/main" id="{1BBEED64-6BAD-4786-84BC-7E37701A70ED}"/>
               </a:ext>
             </a:extLst>
           </p:cNvPr>
@@ -12789,7 +12789,7 @@
           <p:cNvPr id="3" name="">
             <a:extLst xmlns:a="http://schemas.openxmlformats.org/drawingml/2006/main">
               <a:ext uri="{FF2B5EF4-FFF2-40B4-BE49-F238E27FC236}">
-                <a16:creationId xmlns:a16="http://schemas.microsoft.com/office/drawing/2014/main" id="{8281D565-307C-4E79-836B-BD40CC124688}"/>
+                <a16:creationId xmlns:a16="http://schemas.microsoft.com/office/drawing/2014/main" id="{D9079D12-55BF-4A31-A64F-A18C0AB8D077}"/>
               </a:ext>
             </a:extLst>
           </p:cNvPr>
@@ -12851,7 +12851,7 @@
           <p:cNvPr id="4" name="">
             <a:extLst xmlns:a="http://schemas.openxmlformats.org/drawingml/2006/main">
               <a:ext uri="{FF2B5EF4-FFF2-40B4-BE49-F238E27FC236}">
-                <a16:creationId xmlns:a16="http://schemas.microsoft.com/office/drawing/2014/main" id="{FD25B64B-D280-46A0-9A5F-2144423E08F6}"/>
+                <a16:creationId xmlns:a16="http://schemas.microsoft.com/office/drawing/2014/main" id="{5DB81B13-B28A-4D08-92E0-C0A61807EC6B}"/>
               </a:ext>
             </a:extLst>
           </p:cNvPr>
@@ -12913,7 +12913,7 @@
           <p:cNvPr id="5" name="">
             <a:extLst xmlns:a="http://schemas.openxmlformats.org/drawingml/2006/main">
               <a:ext uri="{FF2B5EF4-FFF2-40B4-BE49-F238E27FC236}">
-                <a16:creationId xmlns:a16="http://schemas.microsoft.com/office/drawing/2014/main" id="{A6D8CC49-23D5-4C23-A16C-46489DE1FEF3}"/>
+                <a16:creationId xmlns:a16="http://schemas.microsoft.com/office/drawing/2014/main" id="{91058CF0-E898-4E40-B1C8-00B8763DDC50}"/>
               </a:ext>
             </a:extLst>
           </p:cNvPr>
@@ -12975,7 +12975,7 @@
           <p:cNvPr id="6" name="">
             <a:extLst xmlns:a="http://schemas.openxmlformats.org/drawingml/2006/main">
               <a:ext uri="{FF2B5EF4-FFF2-40B4-BE49-F238E27FC236}">
-                <a16:creationId xmlns:a16="http://schemas.microsoft.com/office/drawing/2014/main" id="{3E911A7C-B73E-478A-9EA7-703C9C78A6AB}"/>
+                <a16:creationId xmlns:a16="http://schemas.microsoft.com/office/drawing/2014/main" id="{8A1A2612-ECF5-4135-98DF-7CCC8CD02032}"/>
               </a:ext>
             </a:extLst>
           </p:cNvPr>
@@ -13037,7 +13037,7 @@
           <p:cNvPr id="7" name="">
             <a:extLst xmlns:a="http://schemas.openxmlformats.org/drawingml/2006/main">
               <a:ext uri="{FF2B5EF4-FFF2-40B4-BE49-F238E27FC236}">
-                <a16:creationId xmlns:a16="http://schemas.microsoft.com/office/drawing/2014/main" id="{FC5B8013-46B2-4025-8F91-E5D8A72DAD31}"/>
+                <a16:creationId xmlns:a16="http://schemas.microsoft.com/office/drawing/2014/main" id="{0DC88832-016F-4859-8B9E-818CD0B022EF}"/>
               </a:ext>
             </a:extLst>
           </p:cNvPr>
@@ -13068,7 +13068,7 @@
           <p:cNvPr id="8" name="">
             <a:extLst xmlns:a="http://schemas.openxmlformats.org/drawingml/2006/main">
               <a:ext uri="{FF2B5EF4-FFF2-40B4-BE49-F238E27FC236}">
-                <a16:creationId xmlns:a16="http://schemas.microsoft.com/office/drawing/2014/main" id="{D408A671-0FF8-4EDA-9E19-3FFAB5C996FE}"/>
+                <a16:creationId xmlns:a16="http://schemas.microsoft.com/office/drawing/2014/main" id="{DF7D8BB7-62AC-49AB-8742-F22B24FF4B62}"/>
               </a:ext>
             </a:extLst>
           </p:cNvPr>
@@ -13130,7 +13130,7 @@
           <p:cNvPr id="9" name="">
             <a:extLst xmlns:a="http://schemas.openxmlformats.org/drawingml/2006/main">
               <a:ext uri="{FF2B5EF4-FFF2-40B4-BE49-F238E27FC236}">
-                <a16:creationId xmlns:a16="http://schemas.microsoft.com/office/drawing/2014/main" id="{D04B6800-BFEF-471B-8C73-D8D2BE4BC0CF}"/>
+                <a16:creationId xmlns:a16="http://schemas.microsoft.com/office/drawing/2014/main" id="{90D16683-D503-4C16-A733-41F1B4CB67F6}"/>
               </a:ext>
             </a:extLst>
           </p:cNvPr>
@@ -13192,7 +13192,7 @@
           <p:cNvPr id="10" name="">
             <a:extLst xmlns:a="http://schemas.openxmlformats.org/drawingml/2006/main">
               <a:ext uri="{FF2B5EF4-FFF2-40B4-BE49-F238E27FC236}">
-                <a16:creationId xmlns:a16="http://schemas.microsoft.com/office/drawing/2014/main" id="{4EA3CB20-99CA-4CB8-9844-C188981A3CBC}"/>
+                <a16:creationId xmlns:a16="http://schemas.microsoft.com/office/drawing/2014/main" id="{E6E6E4D9-B8B4-402D-96AA-1EA78F75B39E}"/>
               </a:ext>
             </a:extLst>
           </p:cNvPr>
@@ -13254,7 +13254,7 @@
           <p:cNvPr id="11" name="">
             <a:extLst xmlns:a="http://schemas.openxmlformats.org/drawingml/2006/main">
               <a:ext uri="{FF2B5EF4-FFF2-40B4-BE49-F238E27FC236}">
-                <a16:creationId xmlns:a16="http://schemas.microsoft.com/office/drawing/2014/main" id="{B9470C5A-DA27-4268-8D44-BAA2D3493FCA}"/>
+                <a16:creationId xmlns:a16="http://schemas.microsoft.com/office/drawing/2014/main" id="{B07B130A-9CFB-4489-A006-99B86F3A3DE5}"/>
               </a:ext>
             </a:extLst>
           </p:cNvPr>
@@ -13285,7 +13285,7 @@
           <p:cNvPr id="12" name="">
             <a:extLst xmlns:a="http://schemas.openxmlformats.org/drawingml/2006/main">
               <a:ext uri="{FF2B5EF4-FFF2-40B4-BE49-F238E27FC236}">
-                <a16:creationId xmlns:a16="http://schemas.microsoft.com/office/drawing/2014/main" id="{584C96DD-F2A0-4EC4-AEBE-84FC9C335BAF}"/>
+                <a16:creationId xmlns:a16="http://schemas.microsoft.com/office/drawing/2014/main" id="{26F357C2-0A25-4D8B-8286-78AC86D79E44}"/>
               </a:ext>
             </a:extLst>
           </p:cNvPr>
@@ -13347,7 +13347,7 @@
           <p:cNvPr id="13" name="">
             <a:extLst xmlns:a="http://schemas.openxmlformats.org/drawingml/2006/main">
               <a:ext uri="{FF2B5EF4-FFF2-40B4-BE49-F238E27FC236}">
-                <a16:creationId xmlns:a16="http://schemas.microsoft.com/office/drawing/2014/main" id="{5A740842-3EDE-43E2-989D-AD3438FCE8A8}"/>
+                <a16:creationId xmlns:a16="http://schemas.microsoft.com/office/drawing/2014/main" id="{E4DBF3DA-D735-479F-8907-3667E2491529}"/>
               </a:ext>
             </a:extLst>
           </p:cNvPr>
@@ -13409,7 +13409,7 @@
           <p:cNvPr id="14" name="">
             <a:extLst xmlns:a="http://schemas.openxmlformats.org/drawingml/2006/main">
               <a:ext uri="{FF2B5EF4-FFF2-40B4-BE49-F238E27FC236}">
-                <a16:creationId xmlns:a16="http://schemas.microsoft.com/office/drawing/2014/main" id="{2B836702-77B7-4390-9431-96C3F0B39907}"/>
+                <a16:creationId xmlns:a16="http://schemas.microsoft.com/office/drawing/2014/main" id="{16A4D0D5-C961-42C4-8344-D8C89776AFFC}"/>
               </a:ext>
             </a:extLst>
           </p:cNvPr>
@@ -13471,7 +13471,7 @@
           <p:cNvPr id="15" name="">
             <a:extLst xmlns:a="http://schemas.openxmlformats.org/drawingml/2006/main">
               <a:ext uri="{FF2B5EF4-FFF2-40B4-BE49-F238E27FC236}">
-                <a16:creationId xmlns:a16="http://schemas.microsoft.com/office/drawing/2014/main" id="{68651972-16D3-402A-AC48-CB7616D07889}"/>
+                <a16:creationId xmlns:a16="http://schemas.microsoft.com/office/drawing/2014/main" id="{42E9B0D5-B40B-4337-AF11-EBB8E79187FD}"/>
               </a:ext>
             </a:extLst>
           </p:cNvPr>
@@ -13502,7 +13502,7 @@
           <p:cNvPr id="16" name="">
             <a:extLst xmlns:a="http://schemas.openxmlformats.org/drawingml/2006/main">
               <a:ext uri="{FF2B5EF4-FFF2-40B4-BE49-F238E27FC236}">
-                <a16:creationId xmlns:a16="http://schemas.microsoft.com/office/drawing/2014/main" id="{F672AF03-1606-4C74-8AFD-B3F6D1880FEF}"/>
+                <a16:creationId xmlns:a16="http://schemas.microsoft.com/office/drawing/2014/main" id="{4E4CEE04-4E6C-4FE6-ABDA-F558ED17A0A9}"/>
               </a:ext>
             </a:extLst>
           </p:cNvPr>
@@ -13564,7 +13564,7 @@
           <p:cNvPr id="17" name="">
             <a:extLst xmlns:a="http://schemas.openxmlformats.org/drawingml/2006/main">
               <a:ext uri="{FF2B5EF4-FFF2-40B4-BE49-F238E27FC236}">
-                <a16:creationId xmlns:a16="http://schemas.microsoft.com/office/drawing/2014/main" id="{BA76EC90-EA2F-469E-BCED-FB999BD37F39}"/>
+                <a16:creationId xmlns:a16="http://schemas.microsoft.com/office/drawing/2014/main" id="{94C33BED-0ECD-4546-B9AE-4418434721CC}"/>
               </a:ext>
             </a:extLst>
           </p:cNvPr>
@@ -13626,7 +13626,7 @@
           <p:cNvPr id="18" name="">
             <a:extLst xmlns:a="http://schemas.openxmlformats.org/drawingml/2006/main">
               <a:ext uri="{FF2B5EF4-FFF2-40B4-BE49-F238E27FC236}">
-                <a16:creationId xmlns:a16="http://schemas.microsoft.com/office/drawing/2014/main" id="{31AFBE8F-81F9-4206-A51A-2639D849C0C3}"/>
+                <a16:creationId xmlns:a16="http://schemas.microsoft.com/office/drawing/2014/main" id="{CE542CC5-F825-4B6D-91CB-CEC29A904EA4}"/>
               </a:ext>
             </a:extLst>
           </p:cNvPr>
@@ -13688,7 +13688,7 @@
           <p:cNvPr id="19" name="">
             <a:extLst xmlns:a="http://schemas.openxmlformats.org/drawingml/2006/main">
               <a:ext uri="{FF2B5EF4-FFF2-40B4-BE49-F238E27FC236}">
-                <a16:creationId xmlns:a16="http://schemas.microsoft.com/office/drawing/2014/main" id="{FDD1267D-24CA-4677-839E-47286DEC1634}"/>
+                <a16:creationId xmlns:a16="http://schemas.microsoft.com/office/drawing/2014/main" id="{46096E2D-16FD-480E-B7AD-E12B50359260}"/>
               </a:ext>
             </a:extLst>
           </p:cNvPr>
@@ -13719,7 +13719,7 @@
           <p:cNvPr id="20" name="">
             <a:extLst xmlns:a="http://schemas.openxmlformats.org/drawingml/2006/main">
               <a:ext uri="{FF2B5EF4-FFF2-40B4-BE49-F238E27FC236}">
-                <a16:creationId xmlns:a16="http://schemas.microsoft.com/office/drawing/2014/main" id="{8EC0EF4D-D31B-4475-AEDF-6278CE8EF12F}"/>
+                <a16:creationId xmlns:a16="http://schemas.microsoft.com/office/drawing/2014/main" id="{30B8FA2A-A89D-458D-BF8E-5FD1984B550E}"/>
               </a:ext>
             </a:extLst>
           </p:cNvPr>
@@ -13752,7 +13752,7 @@
           <p:cNvPr id="21" name="">
             <a:extLst xmlns:a="http://schemas.openxmlformats.org/drawingml/2006/main">
               <a:ext uri="{FF2B5EF4-FFF2-40B4-BE49-F238E27FC236}">
-                <a16:creationId xmlns:a16="http://schemas.microsoft.com/office/drawing/2014/main" id="{5ECCDC8C-2ACA-4DB8-9502-4E67DB3A660B}"/>
+                <a16:creationId xmlns:a16="http://schemas.microsoft.com/office/drawing/2014/main" id="{D75FD77C-1D91-4BAA-B3D1-C24388BE6343}"/>
               </a:ext>
             </a:extLst>
           </p:cNvPr>
@@ -13814,7 +13814,7 @@
           <p:cNvPr id="22" name="">
             <a:extLst xmlns:a="http://schemas.openxmlformats.org/drawingml/2006/main">
               <a:ext uri="{FF2B5EF4-FFF2-40B4-BE49-F238E27FC236}">
-                <a16:creationId xmlns:a16="http://schemas.microsoft.com/office/drawing/2014/main" id="{7130AA82-89C4-4DD5-9053-6F4F0D04D85F}"/>
+                <a16:creationId xmlns:a16="http://schemas.microsoft.com/office/drawing/2014/main" id="{588A02C0-A86A-4298-AC8E-DC2076A7786A}"/>
               </a:ext>
             </a:extLst>
           </p:cNvPr>
@@ -13845,7 +13845,7 @@
           <p:cNvPr id="23" name="">
             <a:extLst xmlns:a="http://schemas.openxmlformats.org/drawingml/2006/main">
               <a:ext uri="{FF2B5EF4-FFF2-40B4-BE49-F238E27FC236}">
-                <a16:creationId xmlns:a16="http://schemas.microsoft.com/office/drawing/2014/main" id="{BB818810-EF28-438B-8638-3665C9181CDF}"/>
+                <a16:creationId xmlns:a16="http://schemas.microsoft.com/office/drawing/2014/main" id="{44E1BFA6-2942-4F9F-9BE8-4C5F5CB35ABD}"/>
               </a:ext>
             </a:extLst>
           </p:cNvPr>
@@ -13907,7 +13907,7 @@
           <p:cNvPr id="24" name="">
             <a:extLst xmlns:a="http://schemas.openxmlformats.org/drawingml/2006/main">
               <a:ext uri="{FF2B5EF4-FFF2-40B4-BE49-F238E27FC236}">
-                <a16:creationId xmlns:a16="http://schemas.microsoft.com/office/drawing/2014/main" id="{CE9EC94A-6DE7-4444-ABDC-00F58C862B9D}"/>
+                <a16:creationId xmlns:a16="http://schemas.microsoft.com/office/drawing/2014/main" id="{0D6C6E57-062A-4135-B8A8-5EEB195A3CC5}"/>
               </a:ext>
             </a:extLst>
           </p:cNvPr>
@@ -13967,7 +13967,7 @@
     </p:spTree>
     <p:extLst>
       <p:ext uri="{BB962C8B-B14F-4D97-AF65-F5344CB8AC3E}">
-        <p14:creationId xmlns:p14="http://schemas.microsoft.com/office/powerpoint/2010/main" val="1767889624"/>
+        <p14:creationId xmlns:p14="http://schemas.microsoft.com/office/powerpoint/2010/main" val="1852322607"/>
       </p:ext>
     </p:extLst>
   </p:cSld>
@@ -13998,7 +13998,7 @@
           <p:cNvPr id="40" name="">
             <a:extLst xmlns:a="http://schemas.openxmlformats.org/drawingml/2006/main">
               <a:ext uri="{FF2B5EF4-FFF2-40B4-BE49-F238E27FC236}">
-                <a16:creationId xmlns:a16="http://schemas.microsoft.com/office/drawing/2014/main" id="{42A7C217-AA41-446F-8246-28F2389E931F}"/>
+                <a16:creationId xmlns:a16="http://schemas.microsoft.com/office/drawing/2014/main" id="{8C09935E-BB51-4956-8D00-78F01AE5B00B}"/>
               </a:ext>
             </a:extLst>
           </p:cNvPr>
@@ -14060,7 +14060,7 @@
                 <a:latin typeface="Arial"/>
                 <a:ea typeface="Arial"/>
                 <a:cs typeface="Arial"/>
-                <a:hlinkClick xmlns:r="http://schemas.openxmlformats.org/officeDocument/2006/relationships" r:id="R315632ef25db4d40"/>
+                <a:hlinkClick xmlns:r="http://schemas.openxmlformats.org/officeDocument/2006/relationships" r:id="R8052c170873941d2"/>
               </a:rPr>
               <a:t>https://github.com/qjmre23/Route2Zero</a:t>
             </a:r>
@@ -14083,7 +14083,7 @@
                 <a:latin typeface="Arial"/>
                 <a:ea typeface="Arial"/>
                 <a:cs typeface="Arial"/>
-                <a:hlinkClick xmlns:r="http://schemas.openxmlformats.org/officeDocument/2006/relationships" r:id="R12a3773f5ff94f0a"/>
+                <a:hlinkClick xmlns:r="http://schemas.openxmlformats.org/officeDocument/2006/relationships" r:id="R3811b9caddbb489d"/>
               </a:rPr>
               <a:t>https://route2zero.netlify.app/</a:t>
             </a:r>
@@ -14095,7 +14095,7 @@
           <p:cNvPr id="2" name="">
             <a:extLst xmlns:a="http://schemas.openxmlformats.org/drawingml/2006/main">
               <a:ext uri="{FF2B5EF4-FFF2-40B4-BE49-F238E27FC236}">
-                <a16:creationId xmlns:a16="http://schemas.microsoft.com/office/drawing/2014/main" id="{4005AC72-C8D0-4423-ADA7-7EF725F35084}"/>
+                <a16:creationId xmlns:a16="http://schemas.microsoft.com/office/drawing/2014/main" id="{5AC83BA6-4EE4-4840-928C-BE1E6D963E0B}"/>
               </a:ext>
             </a:extLst>
           </p:cNvPr>
@@ -14157,7 +14157,7 @@
           <p:cNvPr id="3" name="">
             <a:extLst xmlns:a="http://schemas.openxmlformats.org/drawingml/2006/main">
               <a:ext uri="{FF2B5EF4-FFF2-40B4-BE49-F238E27FC236}">
-                <a16:creationId xmlns:a16="http://schemas.microsoft.com/office/drawing/2014/main" id="{B36BF2C0-47C1-42E3-B933-5913979F0ADF}"/>
+                <a16:creationId xmlns:a16="http://schemas.microsoft.com/office/drawing/2014/main" id="{4CB2146A-397F-4904-ACF4-513BB3E5173A}"/>
               </a:ext>
             </a:extLst>
           </p:cNvPr>
@@ -14219,7 +14219,7 @@
           <p:cNvPr id="4" name="">
             <a:extLst xmlns:a="http://schemas.openxmlformats.org/drawingml/2006/main">
               <a:ext uri="{FF2B5EF4-FFF2-40B4-BE49-F238E27FC236}">
-                <a16:creationId xmlns:a16="http://schemas.microsoft.com/office/drawing/2014/main" id="{7A51CC0F-7E1D-42DD-B895-5C6E7458E39E}"/>
+                <a16:creationId xmlns:a16="http://schemas.microsoft.com/office/drawing/2014/main" id="{96DBD172-DE60-4FC3-9136-25B028729B3D}"/>
               </a:ext>
             </a:extLst>
           </p:cNvPr>
@@ -14281,7 +14281,7 @@
           <p:cNvPr id="5" name="">
             <a:extLst xmlns:a="http://schemas.openxmlformats.org/drawingml/2006/main">
               <a:ext uri="{FF2B5EF4-FFF2-40B4-BE49-F238E27FC236}">
-                <a16:creationId xmlns:a16="http://schemas.microsoft.com/office/drawing/2014/main" id="{8DE471E8-AA2C-4F6F-99B2-5CA07A388079}"/>
+                <a16:creationId xmlns:a16="http://schemas.microsoft.com/office/drawing/2014/main" id="{48D6B08F-1ABC-4C0C-B56D-FC91DFAAA311}"/>
               </a:ext>
             </a:extLst>
           </p:cNvPr>
@@ -14343,7 +14343,7 @@
           <p:cNvPr id="6" name="">
             <a:extLst xmlns:a="http://schemas.openxmlformats.org/drawingml/2006/main">
               <a:ext uri="{FF2B5EF4-FFF2-40B4-BE49-F238E27FC236}">
-                <a16:creationId xmlns:a16="http://schemas.microsoft.com/office/drawing/2014/main" id="{3E892D16-60E7-4230-B652-1FE5049C342B}"/>
+                <a16:creationId xmlns:a16="http://schemas.microsoft.com/office/drawing/2014/main" id="{92E343FB-7357-483F-A3E2-0B5CF915705B}"/>
               </a:ext>
             </a:extLst>
           </p:cNvPr>
@@ -14376,7 +14376,7 @@
           <p:cNvPr id="7" name="">
             <a:extLst xmlns:a="http://schemas.openxmlformats.org/drawingml/2006/main">
               <a:ext uri="{FF2B5EF4-FFF2-40B4-BE49-F238E27FC236}">
-                <a16:creationId xmlns:a16="http://schemas.microsoft.com/office/drawing/2014/main" id="{EC574234-8DD0-4D60-BC6A-7EDE5B10275C}"/>
+                <a16:creationId xmlns:a16="http://schemas.microsoft.com/office/drawing/2014/main" id="{122CF799-8811-4038-B0DE-C925943EDF5B}"/>
               </a:ext>
             </a:extLst>
           </p:cNvPr>
@@ -14438,7 +14438,7 @@
           <p:cNvPr id="8" name="">
             <a:extLst xmlns:a="http://schemas.openxmlformats.org/drawingml/2006/main">
               <a:ext uri="{FF2B5EF4-FFF2-40B4-BE49-F238E27FC236}">
-                <a16:creationId xmlns:a16="http://schemas.microsoft.com/office/drawing/2014/main" id="{E23ADF77-D075-438B-8ECA-7CD00CFD9334}"/>
+                <a16:creationId xmlns:a16="http://schemas.microsoft.com/office/drawing/2014/main" id="{3A528051-259D-412B-82C5-88E28FB8042D}"/>
               </a:ext>
             </a:extLst>
           </p:cNvPr>
@@ -14471,7 +14471,7 @@
           <p:cNvPr id="9" name="">
             <a:extLst xmlns:a="http://schemas.openxmlformats.org/drawingml/2006/main">
               <a:ext uri="{FF2B5EF4-FFF2-40B4-BE49-F238E27FC236}">
-                <a16:creationId xmlns:a16="http://schemas.microsoft.com/office/drawing/2014/main" id="{B4DE2C8A-D8C1-4F67-B1A3-BB74E6915B62}"/>
+                <a16:creationId xmlns:a16="http://schemas.microsoft.com/office/drawing/2014/main" id="{0D9A7A70-FF47-403E-8D21-5F87ADD60679}"/>
               </a:ext>
             </a:extLst>
           </p:cNvPr>
@@ -14533,7 +14533,7 @@
           <p:cNvPr id="10" name="">
             <a:extLst xmlns:a="http://schemas.openxmlformats.org/drawingml/2006/main">
               <a:ext uri="{FF2B5EF4-FFF2-40B4-BE49-F238E27FC236}">
-                <a16:creationId xmlns:a16="http://schemas.microsoft.com/office/drawing/2014/main" id="{D8B0C0B5-BD35-4AAC-98C3-FB562F0864B3}"/>
+                <a16:creationId xmlns:a16="http://schemas.microsoft.com/office/drawing/2014/main" id="{3C69B7DA-9B30-473D-ABF4-F1146CB940A4}"/>
               </a:ext>
             </a:extLst>
           </p:cNvPr>
@@ -14566,7 +14566,7 @@
           <p:cNvPr id="11" name="">
             <a:extLst xmlns:a="http://schemas.openxmlformats.org/drawingml/2006/main">
               <a:ext uri="{FF2B5EF4-FFF2-40B4-BE49-F238E27FC236}">
-                <a16:creationId xmlns:a16="http://schemas.microsoft.com/office/drawing/2014/main" id="{8BC63C24-26FA-4895-A7EA-66ED6E3D72D2}"/>
+                <a16:creationId xmlns:a16="http://schemas.microsoft.com/office/drawing/2014/main" id="{06972F98-1528-48C3-8B08-D89DC7C666A4}"/>
               </a:ext>
             </a:extLst>
           </p:cNvPr>
@@ -14628,7 +14628,7 @@
           <p:cNvPr id="12" name="">
             <a:extLst xmlns:a="http://schemas.openxmlformats.org/drawingml/2006/main">
               <a:ext uri="{FF2B5EF4-FFF2-40B4-BE49-F238E27FC236}">
-                <a16:creationId xmlns:a16="http://schemas.microsoft.com/office/drawing/2014/main" id="{462FADC4-E2D9-4B1B-ADD7-437A762D5D4E}"/>
+                <a16:creationId xmlns:a16="http://schemas.microsoft.com/office/drawing/2014/main" id="{BE4DD9B6-9ECB-4386-8668-4924126CA7A0}"/>
               </a:ext>
             </a:extLst>
           </p:cNvPr>
@@ -14661,7 +14661,7 @@
           <p:cNvPr id="13" name="">
             <a:extLst xmlns:a="http://schemas.openxmlformats.org/drawingml/2006/main">
               <a:ext uri="{FF2B5EF4-FFF2-40B4-BE49-F238E27FC236}">
-                <a16:creationId xmlns:a16="http://schemas.microsoft.com/office/drawing/2014/main" id="{85886A8E-90FF-408E-9A8E-0C4DDD5EAC0C}"/>
+                <a16:creationId xmlns:a16="http://schemas.microsoft.com/office/drawing/2014/main" id="{72A170FE-458E-46C6-918F-5B35A50B0711}"/>
               </a:ext>
             </a:extLst>
           </p:cNvPr>
@@ -14723,7 +14723,7 @@
           <p:cNvPr id="14" name="">
             <a:extLst xmlns:a="http://schemas.openxmlformats.org/drawingml/2006/main">
               <a:ext uri="{FF2B5EF4-FFF2-40B4-BE49-F238E27FC236}">
-                <a16:creationId xmlns:a16="http://schemas.microsoft.com/office/drawing/2014/main" id="{B35C4C06-3C36-44D6-9F5D-22EFA452F96E}"/>
+                <a16:creationId xmlns:a16="http://schemas.microsoft.com/office/drawing/2014/main" id="{DC88F633-AA4B-4FD6-AAB0-1CBCC47C56E0}"/>
               </a:ext>
             </a:extLst>
           </p:cNvPr>
@@ -14756,7 +14756,7 @@
           <p:cNvPr id="15" name="">
             <a:extLst xmlns:a="http://schemas.openxmlformats.org/drawingml/2006/main">
               <a:ext uri="{FF2B5EF4-FFF2-40B4-BE49-F238E27FC236}">
-                <a16:creationId xmlns:a16="http://schemas.microsoft.com/office/drawing/2014/main" id="{77F74B37-93C3-40A5-B159-600B2D3CC6EE}"/>
+                <a16:creationId xmlns:a16="http://schemas.microsoft.com/office/drawing/2014/main" id="{D6123FDA-E047-4343-8A55-FB14ADBB6315}"/>
               </a:ext>
             </a:extLst>
           </p:cNvPr>
@@ -14818,7 +14818,7 @@
           <p:cNvPr id="16" name="">
             <a:extLst xmlns:a="http://schemas.openxmlformats.org/drawingml/2006/main">
               <a:ext uri="{FF2B5EF4-FFF2-40B4-BE49-F238E27FC236}">
-                <a16:creationId xmlns:a16="http://schemas.microsoft.com/office/drawing/2014/main" id="{256EEAC9-D0B8-4E20-8615-3553D1CA18A5}"/>
+                <a16:creationId xmlns:a16="http://schemas.microsoft.com/office/drawing/2014/main" id="{841A5E57-7EE0-4181-98E8-B11A99FD8E34}"/>
               </a:ext>
             </a:extLst>
           </p:cNvPr>
@@ -14851,7 +14851,7 @@
           <p:cNvPr id="17" name="">
             <a:extLst xmlns:a="http://schemas.openxmlformats.org/drawingml/2006/main">
               <a:ext uri="{FF2B5EF4-FFF2-40B4-BE49-F238E27FC236}">
-                <a16:creationId xmlns:a16="http://schemas.microsoft.com/office/drawing/2014/main" id="{3C98BF04-980B-46A1-941D-4CD862A03CAC}"/>
+                <a16:creationId xmlns:a16="http://schemas.microsoft.com/office/drawing/2014/main" id="{6845D779-8D84-491C-A0CB-1AF6E26C705B}"/>
               </a:ext>
             </a:extLst>
           </p:cNvPr>
@@ -14913,7 +14913,7 @@
           <p:cNvPr id="18" name="">
             <a:extLst xmlns:a="http://schemas.openxmlformats.org/drawingml/2006/main">
               <a:ext uri="{FF2B5EF4-FFF2-40B4-BE49-F238E27FC236}">
-                <a16:creationId xmlns:a16="http://schemas.microsoft.com/office/drawing/2014/main" id="{6D45C15C-19AE-4F98-873F-26C36A62B6C6}"/>
+                <a16:creationId xmlns:a16="http://schemas.microsoft.com/office/drawing/2014/main" id="{C409331C-1F06-4D2A-8FFA-DF9E1F4B9AB2}"/>
               </a:ext>
             </a:extLst>
           </p:cNvPr>
@@ -14946,7 +14946,7 @@
           <p:cNvPr id="19" name="">
             <a:extLst xmlns:a="http://schemas.openxmlformats.org/drawingml/2006/main">
               <a:ext uri="{FF2B5EF4-FFF2-40B4-BE49-F238E27FC236}">
-                <a16:creationId xmlns:a16="http://schemas.microsoft.com/office/drawing/2014/main" id="{46CEDE38-EF25-4A84-ABD7-A2A5F02E3FFB}"/>
+                <a16:creationId xmlns:a16="http://schemas.microsoft.com/office/drawing/2014/main" id="{B232D4A4-FF28-4AE3-8380-009EAF8254C8}"/>
               </a:ext>
             </a:extLst>
           </p:cNvPr>
@@ -15008,7 +15008,7 @@
           <p:cNvPr id="20" name="">
             <a:extLst xmlns:a="http://schemas.openxmlformats.org/drawingml/2006/main">
               <a:ext uri="{FF2B5EF4-FFF2-40B4-BE49-F238E27FC236}">
-                <a16:creationId xmlns:a16="http://schemas.microsoft.com/office/drawing/2014/main" id="{B024E3D2-1295-425A-9CC1-CCABAD6193EC}"/>
+                <a16:creationId xmlns:a16="http://schemas.microsoft.com/office/drawing/2014/main" id="{B5821983-DD18-4699-BC28-2D35DDBDE698}"/>
               </a:ext>
             </a:extLst>
           </p:cNvPr>
@@ -15041,7 +15041,7 @@
           <p:cNvPr id="21" name="">
             <a:extLst xmlns:a="http://schemas.openxmlformats.org/drawingml/2006/main">
               <a:ext uri="{FF2B5EF4-FFF2-40B4-BE49-F238E27FC236}">
-                <a16:creationId xmlns:a16="http://schemas.microsoft.com/office/drawing/2014/main" id="{F2670D7F-D9B5-4531-A9CE-FC812F1F401F}"/>
+                <a16:creationId xmlns:a16="http://schemas.microsoft.com/office/drawing/2014/main" id="{9BE66122-2508-4607-BDBE-17754DC786CB}"/>
               </a:ext>
             </a:extLst>
           </p:cNvPr>
@@ -15103,7 +15103,7 @@
           <p:cNvPr id="22" name="">
             <a:extLst xmlns:a="http://schemas.openxmlformats.org/drawingml/2006/main">
               <a:ext uri="{FF2B5EF4-FFF2-40B4-BE49-F238E27FC236}">
-                <a16:creationId xmlns:a16="http://schemas.microsoft.com/office/drawing/2014/main" id="{BB675AE9-7E09-493A-B019-1F8373430B04}"/>
+                <a16:creationId xmlns:a16="http://schemas.microsoft.com/office/drawing/2014/main" id="{7BA606D2-662E-452B-98F1-0ACF6D044258}"/>
               </a:ext>
             </a:extLst>
           </p:cNvPr>
@@ -15165,7 +15165,7 @@
           <p:cNvPr id="23" name="">
             <a:extLst xmlns:a="http://schemas.openxmlformats.org/drawingml/2006/main">
               <a:ext uri="{FF2B5EF4-FFF2-40B4-BE49-F238E27FC236}">
-                <a16:creationId xmlns:a16="http://schemas.microsoft.com/office/drawing/2014/main" id="{32A60A98-7E8E-4D2B-B883-EB3323AE4A24}"/>
+                <a16:creationId xmlns:a16="http://schemas.microsoft.com/office/drawing/2014/main" id="{151FA22B-2DB1-4B99-A0B5-B64ED37FA202}"/>
               </a:ext>
             </a:extLst>
           </p:cNvPr>
@@ -15198,7 +15198,7 @@
           <p:cNvPr id="24" name="">
             <a:extLst xmlns:a="http://schemas.openxmlformats.org/drawingml/2006/main">
               <a:ext uri="{FF2B5EF4-FFF2-40B4-BE49-F238E27FC236}">
-                <a16:creationId xmlns:a16="http://schemas.microsoft.com/office/drawing/2014/main" id="{B019FE30-5EB4-4091-8AF5-5A0F9675EAA2}"/>
+                <a16:creationId xmlns:a16="http://schemas.microsoft.com/office/drawing/2014/main" id="{5BF63723-B379-4D21-B95D-32D7F65B38B4}"/>
               </a:ext>
             </a:extLst>
           </p:cNvPr>
@@ -15260,7 +15260,7 @@
           <p:cNvPr id="25" name="">
             <a:extLst xmlns:a="http://schemas.openxmlformats.org/drawingml/2006/main">
               <a:ext uri="{FF2B5EF4-FFF2-40B4-BE49-F238E27FC236}">
-                <a16:creationId xmlns:a16="http://schemas.microsoft.com/office/drawing/2014/main" id="{AEB34B4D-1670-4310-9A2E-4B51E86B8CF5}"/>
+                <a16:creationId xmlns:a16="http://schemas.microsoft.com/office/drawing/2014/main" id="{64D2CC73-1B51-476B-8669-608188433107}"/>
               </a:ext>
             </a:extLst>
           </p:cNvPr>
@@ -15293,7 +15293,7 @@
           <p:cNvPr id="26" name="">
             <a:extLst xmlns:a="http://schemas.openxmlformats.org/drawingml/2006/main">
               <a:ext uri="{FF2B5EF4-FFF2-40B4-BE49-F238E27FC236}">
-                <a16:creationId xmlns:a16="http://schemas.microsoft.com/office/drawing/2014/main" id="{ED93297F-8D77-416C-B6BA-F489F023EDF5}"/>
+                <a16:creationId xmlns:a16="http://schemas.microsoft.com/office/drawing/2014/main" id="{2FC6FB3B-9520-44EC-8D0D-618F5ABCAD23}"/>
               </a:ext>
             </a:extLst>
           </p:cNvPr>
@@ -15355,7 +15355,7 @@
           <p:cNvPr id="27" name="">
             <a:extLst xmlns:a="http://schemas.openxmlformats.org/drawingml/2006/main">
               <a:ext uri="{FF2B5EF4-FFF2-40B4-BE49-F238E27FC236}">
-                <a16:creationId xmlns:a16="http://schemas.microsoft.com/office/drawing/2014/main" id="{0BCD84A5-B463-4554-9161-34287DEA9F8E}"/>
+                <a16:creationId xmlns:a16="http://schemas.microsoft.com/office/drawing/2014/main" id="{7F9EFAE3-BF20-4012-B044-25B5FF841985}"/>
               </a:ext>
             </a:extLst>
           </p:cNvPr>
@@ -15388,7 +15388,7 @@
           <p:cNvPr id="28" name="">
             <a:extLst xmlns:a="http://schemas.openxmlformats.org/drawingml/2006/main">
               <a:ext uri="{FF2B5EF4-FFF2-40B4-BE49-F238E27FC236}">
-                <a16:creationId xmlns:a16="http://schemas.microsoft.com/office/drawing/2014/main" id="{6AAC3287-E02F-4035-9CBD-D5E762D8C2D2}"/>
+                <a16:creationId xmlns:a16="http://schemas.microsoft.com/office/drawing/2014/main" id="{DBF8D8BD-2CD1-49F9-93C3-85E7CCB97B18}"/>
               </a:ext>
             </a:extLst>
           </p:cNvPr>
@@ -15450,7 +15450,7 @@
           <p:cNvPr id="29" name="">
             <a:extLst xmlns:a="http://schemas.openxmlformats.org/drawingml/2006/main">
               <a:ext uri="{FF2B5EF4-FFF2-40B4-BE49-F238E27FC236}">
-                <a16:creationId xmlns:a16="http://schemas.microsoft.com/office/drawing/2014/main" id="{54EB6BF1-03C4-4FCB-A331-BFD6EEC02E89}"/>
+                <a16:creationId xmlns:a16="http://schemas.microsoft.com/office/drawing/2014/main" id="{9FFB8AA7-611A-45F7-BA44-5D179223B906}"/>
               </a:ext>
             </a:extLst>
           </p:cNvPr>
@@ -15483,7 +15483,7 @@
           <p:cNvPr id="30" name="">
             <a:extLst xmlns:a="http://schemas.openxmlformats.org/drawingml/2006/main">
               <a:ext uri="{FF2B5EF4-FFF2-40B4-BE49-F238E27FC236}">
-                <a16:creationId xmlns:a16="http://schemas.microsoft.com/office/drawing/2014/main" id="{AE85D692-EA58-460D-8596-AF508F585E72}"/>
+                <a16:creationId xmlns:a16="http://schemas.microsoft.com/office/drawing/2014/main" id="{DFD21D7F-AEF3-422B-A87B-CBB70BB56C5C}"/>
               </a:ext>
             </a:extLst>
           </p:cNvPr>
@@ -15545,7 +15545,7 @@
           <p:cNvPr id="31" name="">
             <a:extLst xmlns:a="http://schemas.openxmlformats.org/drawingml/2006/main">
               <a:ext uri="{FF2B5EF4-FFF2-40B4-BE49-F238E27FC236}">
-                <a16:creationId xmlns:a16="http://schemas.microsoft.com/office/drawing/2014/main" id="{CBE9A711-8D0F-4A1A-858F-3B050699B111}"/>
+                <a16:creationId xmlns:a16="http://schemas.microsoft.com/office/drawing/2014/main" id="{6E408B5C-FA57-4EC9-AB9F-1FBF02A88405}"/>
               </a:ext>
             </a:extLst>
           </p:cNvPr>
@@ -15578,7 +15578,7 @@
           <p:cNvPr id="32" name="">
             <a:extLst xmlns:a="http://schemas.openxmlformats.org/drawingml/2006/main">
               <a:ext uri="{FF2B5EF4-FFF2-40B4-BE49-F238E27FC236}">
-                <a16:creationId xmlns:a16="http://schemas.microsoft.com/office/drawing/2014/main" id="{8CA36C55-9832-40A0-916B-869D325BC0D0}"/>
+                <a16:creationId xmlns:a16="http://schemas.microsoft.com/office/drawing/2014/main" id="{6E32331E-D782-4E99-89A7-8777E37DF754}"/>
               </a:ext>
             </a:extLst>
           </p:cNvPr>
@@ -15640,7 +15640,7 @@
           <p:cNvPr id="33" name="">
             <a:extLst xmlns:a="http://schemas.openxmlformats.org/drawingml/2006/main">
               <a:ext uri="{FF2B5EF4-FFF2-40B4-BE49-F238E27FC236}">
-                <a16:creationId xmlns:a16="http://schemas.microsoft.com/office/drawing/2014/main" id="{5079478E-F35E-4CDE-9BA8-1E7187E645C7}"/>
+                <a16:creationId xmlns:a16="http://schemas.microsoft.com/office/drawing/2014/main" id="{FE9DD46D-D3A7-4528-A26B-C2B4D6247E3B}"/>
               </a:ext>
             </a:extLst>
           </p:cNvPr>
@@ -15673,7 +15673,7 @@
           <p:cNvPr id="34" name="">
             <a:extLst xmlns:a="http://schemas.openxmlformats.org/drawingml/2006/main">
               <a:ext uri="{FF2B5EF4-FFF2-40B4-BE49-F238E27FC236}">
-                <a16:creationId xmlns:a16="http://schemas.microsoft.com/office/drawing/2014/main" id="{B2A61CA6-AA30-4003-83D9-E61C776CF31B}"/>
+                <a16:creationId xmlns:a16="http://schemas.microsoft.com/office/drawing/2014/main" id="{8ADED9BD-1E2A-4194-AF15-E0762A059992}"/>
               </a:ext>
             </a:extLst>
           </p:cNvPr>
@@ -15735,7 +15735,7 @@
           <p:cNvPr id="35" name="">
             <a:extLst xmlns:a="http://schemas.openxmlformats.org/drawingml/2006/main">
               <a:ext uri="{FF2B5EF4-FFF2-40B4-BE49-F238E27FC236}">
-                <a16:creationId xmlns:a16="http://schemas.microsoft.com/office/drawing/2014/main" id="{8702C81F-9F2A-4EB8-B2E0-4783B8294214}"/>
+                <a16:creationId xmlns:a16="http://schemas.microsoft.com/office/drawing/2014/main" id="{4C23D3D1-D1D9-4917-BAFD-58B8D8BBBAE1}"/>
               </a:ext>
             </a:extLst>
           </p:cNvPr>
@@ -15797,7 +15797,7 @@
           <p:cNvPr id="36" name="">
             <a:extLst xmlns:a="http://schemas.openxmlformats.org/drawingml/2006/main">
               <a:ext uri="{FF2B5EF4-FFF2-40B4-BE49-F238E27FC236}">
-                <a16:creationId xmlns:a16="http://schemas.microsoft.com/office/drawing/2014/main" id="{F738C1A8-620A-4997-854B-09096D90858C}"/>
+                <a16:creationId xmlns:a16="http://schemas.microsoft.com/office/drawing/2014/main" id="{859A6797-0A35-463E-973C-EBCF73E74BB1}"/>
               </a:ext>
             </a:extLst>
           </p:cNvPr>
@@ -15859,7 +15859,7 @@
           <p:cNvPr id="37" name="">
             <a:extLst xmlns:a="http://schemas.openxmlformats.org/drawingml/2006/main">
               <a:ext uri="{FF2B5EF4-FFF2-40B4-BE49-F238E27FC236}">
-                <a16:creationId xmlns:a16="http://schemas.microsoft.com/office/drawing/2014/main" id="{BD44D8B4-30EE-49B6-94A8-300A919B17EB}"/>
+                <a16:creationId xmlns:a16="http://schemas.microsoft.com/office/drawing/2014/main" id="{25F4AC81-9E3E-4668-8C83-1DF9197C09CF}"/>
               </a:ext>
             </a:extLst>
           </p:cNvPr>
@@ -15890,7 +15890,7 @@
           <p:cNvPr id="38" name="">
             <a:extLst xmlns:a="http://schemas.openxmlformats.org/drawingml/2006/main">
               <a:ext uri="{FF2B5EF4-FFF2-40B4-BE49-F238E27FC236}">
-                <a16:creationId xmlns:a16="http://schemas.microsoft.com/office/drawing/2014/main" id="{E3B16774-4D83-4AFA-AB96-FF50FFE2BF7E}"/>
+                <a16:creationId xmlns:a16="http://schemas.microsoft.com/office/drawing/2014/main" id="{657D453E-CB04-46B5-9289-FC8DAB98617A}"/>
               </a:ext>
             </a:extLst>
           </p:cNvPr>
@@ -15952,7 +15952,7 @@
           <p:cNvPr id="39" name="">
             <a:extLst xmlns:a="http://schemas.openxmlformats.org/drawingml/2006/main">
               <a:ext uri="{FF2B5EF4-FFF2-40B4-BE49-F238E27FC236}">
-                <a16:creationId xmlns:a16="http://schemas.microsoft.com/office/drawing/2014/main" id="{642F0A8C-E846-4A4E-A8E9-A4D79A79A125}"/>
+                <a16:creationId xmlns:a16="http://schemas.microsoft.com/office/drawing/2014/main" id="{D3239267-DA55-4C0E-90F9-A3E2FF7E77AF}"/>
               </a:ext>
             </a:extLst>
           </p:cNvPr>
@@ -16012,7 +16012,7 @@
     </p:spTree>
     <p:extLst>
       <p:ext uri="{BB962C8B-B14F-4D97-AF65-F5344CB8AC3E}">
-        <p14:creationId xmlns:p14="http://schemas.microsoft.com/office/powerpoint/2010/main" val="187269834"/>
+        <p14:creationId xmlns:p14="http://schemas.microsoft.com/office/powerpoint/2010/main" val="1901241636"/>
       </p:ext>
     </p:extLst>
   </p:cSld>
@@ -16043,7 +16043,7 @@
           <p:cNvPr id="35" name="">
             <a:extLst xmlns:a="http://schemas.openxmlformats.org/drawingml/2006/main">
               <a:ext uri="{FF2B5EF4-FFF2-40B4-BE49-F238E27FC236}">
-                <a16:creationId xmlns:a16="http://schemas.microsoft.com/office/drawing/2014/main" id="{FDC5CCC0-206A-4CEB-B661-78AD32F4D543}"/>
+                <a16:creationId xmlns:a16="http://schemas.microsoft.com/office/drawing/2014/main" id="{99C55A67-51A8-4D0C-89F3-6A40EF9DC102}"/>
               </a:ext>
             </a:extLst>
           </p:cNvPr>
@@ -16105,7 +16105,7 @@
                 <a:latin typeface="Arial"/>
                 <a:ea typeface="Arial"/>
                 <a:cs typeface="Arial"/>
-                <a:hlinkClick xmlns:r="http://schemas.openxmlformats.org/officeDocument/2006/relationships" r:id="R3e9e6a7a409a4f27"/>
+                <a:hlinkClick xmlns:r="http://schemas.openxmlformats.org/officeDocument/2006/relationships" r:id="Rc9afea8f6c114850"/>
               </a:rPr>
               <a:t>https://github.com/qjmre23/Route2Zero</a:t>
             </a:r>
@@ -16128,7 +16128,7 @@
                 <a:latin typeface="Arial"/>
                 <a:ea typeface="Arial"/>
                 <a:cs typeface="Arial"/>
-                <a:hlinkClick xmlns:r="http://schemas.openxmlformats.org/officeDocument/2006/relationships" r:id="R1389ccd0708f46f7"/>
+                <a:hlinkClick xmlns:r="http://schemas.openxmlformats.org/officeDocument/2006/relationships" r:id="Ra853cfbc0cd24922"/>
               </a:rPr>
               <a:t>https://route2zero.netlify.app/</a:t>
             </a:r>
@@ -16140,7 +16140,7 @@
           <p:cNvPr id="2" name="">
             <a:extLst xmlns:a="http://schemas.openxmlformats.org/drawingml/2006/main">
               <a:ext uri="{FF2B5EF4-FFF2-40B4-BE49-F238E27FC236}">
-                <a16:creationId xmlns:a16="http://schemas.microsoft.com/office/drawing/2014/main" id="{0C9DA37A-F1B5-4D33-8680-ADD507033D94}"/>
+                <a16:creationId xmlns:a16="http://schemas.microsoft.com/office/drawing/2014/main" id="{EC320D21-D44C-430F-BC19-B78385B46B97}"/>
               </a:ext>
             </a:extLst>
           </p:cNvPr>
@@ -16202,7 +16202,7 @@
           <p:cNvPr id="3" name="">
             <a:extLst xmlns:a="http://schemas.openxmlformats.org/drawingml/2006/main">
               <a:ext uri="{FF2B5EF4-FFF2-40B4-BE49-F238E27FC236}">
-                <a16:creationId xmlns:a16="http://schemas.microsoft.com/office/drawing/2014/main" id="{7197E75D-EE82-449B-A94A-D2FDA5CED190}"/>
+                <a16:creationId xmlns:a16="http://schemas.microsoft.com/office/drawing/2014/main" id="{09A11203-BF35-4B7C-B915-5183FA06482C}"/>
               </a:ext>
             </a:extLst>
           </p:cNvPr>
@@ -16268,7 +16268,7 @@
           <p:nvPr/>
         </p:nvPicPr>
         <p:blipFill>
-          <a:blip xmlns:r="http://schemas.openxmlformats.org/officeDocument/2006/relationships" xmlns:a="http://schemas.openxmlformats.org/drawingml/2006/main" r:embed="R81d3a9d4c37f4d6f"/>
+          <a:blip xmlns:r="http://schemas.openxmlformats.org/officeDocument/2006/relationships" xmlns:a="http://schemas.openxmlformats.org/drawingml/2006/main" r:embed="Rc261a80205c54f39"/>
           <a:srcRect xmlns:a="http://schemas.openxmlformats.org/drawingml/2006/main" l="2463" t="0" r="2463" b="0"/>
           <a:stretch xmlns:a="http://schemas.openxmlformats.org/drawingml/2006/main">
             <a:fillRect l="0" t="0" r="0" b="0"/>
@@ -16291,7 +16291,7 @@
           <p:cNvPr id="5" name="">
             <a:extLst xmlns:a="http://schemas.openxmlformats.org/drawingml/2006/main">
               <a:ext uri="{FF2B5EF4-FFF2-40B4-BE49-F238E27FC236}">
-                <a16:creationId xmlns:a16="http://schemas.microsoft.com/office/drawing/2014/main" id="{B4342CEC-13C5-4EDA-822F-FA5AE9B78E83}"/>
+                <a16:creationId xmlns:a16="http://schemas.microsoft.com/office/drawing/2014/main" id="{6D59DCEC-A327-4F69-AB8C-B94CD0E0D826}"/>
               </a:ext>
             </a:extLst>
           </p:cNvPr>
@@ -16324,7 +16324,7 @@
           <p:cNvPr id="6" name="">
             <a:extLst xmlns:a="http://schemas.openxmlformats.org/drawingml/2006/main">
               <a:ext uri="{FF2B5EF4-FFF2-40B4-BE49-F238E27FC236}">
-                <a16:creationId xmlns:a16="http://schemas.microsoft.com/office/drawing/2014/main" id="{29A8DD88-6D43-49B8-9C57-21789F8A88FB}"/>
+                <a16:creationId xmlns:a16="http://schemas.microsoft.com/office/drawing/2014/main" id="{A3C702A4-04EB-4BC7-9EA2-D8E83E333767}"/>
               </a:ext>
             </a:extLst>
           </p:cNvPr>
@@ -16386,7 +16386,7 @@
           <p:cNvPr id="7" name="">
             <a:extLst xmlns:a="http://schemas.openxmlformats.org/drawingml/2006/main">
               <a:ext uri="{FF2B5EF4-FFF2-40B4-BE49-F238E27FC236}">
-                <a16:creationId xmlns:a16="http://schemas.microsoft.com/office/drawing/2014/main" id="{44EC7F77-E4ED-4CE3-9E1B-49CFF75D0062}"/>
+                <a16:creationId xmlns:a16="http://schemas.microsoft.com/office/drawing/2014/main" id="{27C363E2-9F93-4D2A-89DF-92B11BD8590F}"/>
               </a:ext>
             </a:extLst>
           </p:cNvPr>
@@ -16448,7 +16448,7 @@
           <p:cNvPr id="8" name="">
             <a:extLst xmlns:a="http://schemas.openxmlformats.org/drawingml/2006/main">
               <a:ext uri="{FF2B5EF4-FFF2-40B4-BE49-F238E27FC236}">
-                <a16:creationId xmlns:a16="http://schemas.microsoft.com/office/drawing/2014/main" id="{59B52ED4-836B-4D6B-B339-3FED17E87B78}"/>
+                <a16:creationId xmlns:a16="http://schemas.microsoft.com/office/drawing/2014/main" id="{96F7C8B9-F7DA-4E8B-BDCF-7524D7640D7E}"/>
               </a:ext>
             </a:extLst>
           </p:cNvPr>
@@ -16479,7 +16479,7 @@
           <p:cNvPr id="9" name="">
             <a:extLst xmlns:a="http://schemas.openxmlformats.org/drawingml/2006/main">
               <a:ext uri="{FF2B5EF4-FFF2-40B4-BE49-F238E27FC236}">
-                <a16:creationId xmlns:a16="http://schemas.microsoft.com/office/drawing/2014/main" id="{3EDDCDF5-60A8-4754-92A5-262B2CAEFC53}"/>
+                <a16:creationId xmlns:a16="http://schemas.microsoft.com/office/drawing/2014/main" id="{B653B18D-4D41-442A-9E41-DAD9651244A9}"/>
               </a:ext>
             </a:extLst>
           </p:cNvPr>
@@ -16541,7 +16541,7 @@
           <p:cNvPr id="10" name="">
             <a:extLst xmlns:a="http://schemas.openxmlformats.org/drawingml/2006/main">
               <a:ext uri="{FF2B5EF4-FFF2-40B4-BE49-F238E27FC236}">
-                <a16:creationId xmlns:a16="http://schemas.microsoft.com/office/drawing/2014/main" id="{50286AFE-D55E-4B66-B345-9358DE22A100}"/>
+                <a16:creationId xmlns:a16="http://schemas.microsoft.com/office/drawing/2014/main" id="{3AEAC6B3-A249-4F7D-8D24-397E100550E2}"/>
               </a:ext>
             </a:extLst>
           </p:cNvPr>
@@ -16603,7 +16603,7 @@
           <p:cNvPr id="11" name="">
             <a:extLst xmlns:a="http://schemas.openxmlformats.org/drawingml/2006/main">
               <a:ext uri="{FF2B5EF4-FFF2-40B4-BE49-F238E27FC236}">
-                <a16:creationId xmlns:a16="http://schemas.microsoft.com/office/drawing/2014/main" id="{E8FED7A0-9319-40B0-AF17-53D66CB509FD}"/>
+                <a16:creationId xmlns:a16="http://schemas.microsoft.com/office/drawing/2014/main" id="{AFF30207-99BA-4D4E-8374-FF5ADC7D8C3A}"/>
               </a:ext>
             </a:extLst>
           </p:cNvPr>
@@ -16634,7 +16634,7 @@
           <p:cNvPr id="12" name="">
             <a:extLst xmlns:a="http://schemas.openxmlformats.org/drawingml/2006/main">
               <a:ext uri="{FF2B5EF4-FFF2-40B4-BE49-F238E27FC236}">
-                <a16:creationId xmlns:a16="http://schemas.microsoft.com/office/drawing/2014/main" id="{F17DFB14-7878-436C-A672-39C805D7E0DE}"/>
+                <a16:creationId xmlns:a16="http://schemas.microsoft.com/office/drawing/2014/main" id="{63DC0B58-3DBE-488D-9B03-0F4188626851}"/>
               </a:ext>
             </a:extLst>
           </p:cNvPr>
@@ -16696,7 +16696,7 @@
           <p:cNvPr id="13" name="">
             <a:extLst xmlns:a="http://schemas.openxmlformats.org/drawingml/2006/main">
               <a:ext uri="{FF2B5EF4-FFF2-40B4-BE49-F238E27FC236}">
-                <a16:creationId xmlns:a16="http://schemas.microsoft.com/office/drawing/2014/main" id="{4E287C0A-DDA9-4538-9BC5-65F5FD1BB4B4}"/>
+                <a16:creationId xmlns:a16="http://schemas.microsoft.com/office/drawing/2014/main" id="{29AE29CB-002D-43C6-9C15-372A4DC54714}"/>
               </a:ext>
             </a:extLst>
           </p:cNvPr>
@@ -16758,7 +16758,7 @@
           <p:cNvPr id="14" name="">
             <a:extLst xmlns:a="http://schemas.openxmlformats.org/drawingml/2006/main">
               <a:ext uri="{FF2B5EF4-FFF2-40B4-BE49-F238E27FC236}">
-                <a16:creationId xmlns:a16="http://schemas.microsoft.com/office/drawing/2014/main" id="{AA476358-357B-41C4-967E-E3BA2362EAB5}"/>
+                <a16:creationId xmlns:a16="http://schemas.microsoft.com/office/drawing/2014/main" id="{403424E6-0A24-41DB-A466-F921E93E2721}"/>
               </a:ext>
             </a:extLst>
           </p:cNvPr>
@@ -16789,7 +16789,7 @@
           <p:cNvPr id="15" name="">
             <a:extLst xmlns:a="http://schemas.openxmlformats.org/drawingml/2006/main">
               <a:ext uri="{FF2B5EF4-FFF2-40B4-BE49-F238E27FC236}">
-                <a16:creationId xmlns:a16="http://schemas.microsoft.com/office/drawing/2014/main" id="{490510DC-B560-464D-B86F-AC83D6606A1C}"/>
+                <a16:creationId xmlns:a16="http://schemas.microsoft.com/office/drawing/2014/main" id="{23EF95FD-131C-4B43-8205-68477C0C3887}"/>
               </a:ext>
             </a:extLst>
           </p:cNvPr>
@@ -16851,7 +16851,7 @@
           <p:cNvPr id="16" name="">
             <a:extLst xmlns:a="http://schemas.openxmlformats.org/drawingml/2006/main">
               <a:ext uri="{FF2B5EF4-FFF2-40B4-BE49-F238E27FC236}">
-                <a16:creationId xmlns:a16="http://schemas.microsoft.com/office/drawing/2014/main" id="{293FB499-ABDB-4D80-B0A4-DA12E6A54C4C}"/>
+                <a16:creationId xmlns:a16="http://schemas.microsoft.com/office/drawing/2014/main" id="{A0E3F086-B18A-4A0D-A13E-6891A7430297}"/>
               </a:ext>
             </a:extLst>
           </p:cNvPr>
@@ -16913,7 +16913,7 @@
           <p:cNvPr id="17" name="">
             <a:extLst xmlns:a="http://schemas.openxmlformats.org/drawingml/2006/main">
               <a:ext uri="{FF2B5EF4-FFF2-40B4-BE49-F238E27FC236}">
-                <a16:creationId xmlns:a16="http://schemas.microsoft.com/office/drawing/2014/main" id="{E9CF9056-6829-4484-822F-8969A2F742C2}"/>
+                <a16:creationId xmlns:a16="http://schemas.microsoft.com/office/drawing/2014/main" id="{F7B38C4A-CBBC-4F9E-86CB-61CC9DED3873}"/>
               </a:ext>
             </a:extLst>
           </p:cNvPr>
@@ -16944,7 +16944,7 @@
           <p:cNvPr id="18" name="">
             <a:extLst xmlns:a="http://schemas.openxmlformats.org/drawingml/2006/main">
               <a:ext uri="{FF2B5EF4-FFF2-40B4-BE49-F238E27FC236}">
-                <a16:creationId xmlns:a16="http://schemas.microsoft.com/office/drawing/2014/main" id="{145FE9B4-EDE5-4857-8439-8D2312853283}"/>
+                <a16:creationId xmlns:a16="http://schemas.microsoft.com/office/drawing/2014/main" id="{DE6BB5EF-90FF-4B35-8442-F0ADD032973C}"/>
               </a:ext>
             </a:extLst>
           </p:cNvPr>
@@ -17006,7 +17006,7 @@
           <p:cNvPr id="19" name="">
             <a:extLst xmlns:a="http://schemas.openxmlformats.org/drawingml/2006/main">
               <a:ext uri="{FF2B5EF4-FFF2-40B4-BE49-F238E27FC236}">
-                <a16:creationId xmlns:a16="http://schemas.microsoft.com/office/drawing/2014/main" id="{E31B82AC-5ADB-492E-AEEF-9C0A0B36DCDB}"/>
+                <a16:creationId xmlns:a16="http://schemas.microsoft.com/office/drawing/2014/main" id="{831AA31A-C70B-4C36-AD9E-2BA03DD96817}"/>
               </a:ext>
             </a:extLst>
           </p:cNvPr>
@@ -17068,7 +17068,7 @@
           <p:cNvPr id="20" name="">
             <a:extLst xmlns:a="http://schemas.openxmlformats.org/drawingml/2006/main">
               <a:ext uri="{FF2B5EF4-FFF2-40B4-BE49-F238E27FC236}">
-                <a16:creationId xmlns:a16="http://schemas.microsoft.com/office/drawing/2014/main" id="{90BB83AC-88B8-476D-B538-E2658441D760}"/>
+                <a16:creationId xmlns:a16="http://schemas.microsoft.com/office/drawing/2014/main" id="{0E8BD070-F28A-4A1B-9679-6C9BC5CF1523}"/>
               </a:ext>
             </a:extLst>
           </p:cNvPr>
@@ -17099,7 +17099,7 @@
           <p:cNvPr id="21" name="">
             <a:extLst xmlns:a="http://schemas.openxmlformats.org/drawingml/2006/main">
               <a:ext uri="{FF2B5EF4-FFF2-40B4-BE49-F238E27FC236}">
-                <a16:creationId xmlns:a16="http://schemas.microsoft.com/office/drawing/2014/main" id="{BE0638E9-C314-49D5-9802-AA676BE1152C}"/>
+                <a16:creationId xmlns:a16="http://schemas.microsoft.com/office/drawing/2014/main" id="{90811795-3658-4F05-8745-1BD3C44947D5}"/>
               </a:ext>
             </a:extLst>
           </p:cNvPr>
@@ -17161,7 +17161,7 @@
           <p:cNvPr id="22" name="">
             <a:extLst xmlns:a="http://schemas.openxmlformats.org/drawingml/2006/main">
               <a:ext uri="{FF2B5EF4-FFF2-40B4-BE49-F238E27FC236}">
-                <a16:creationId xmlns:a16="http://schemas.microsoft.com/office/drawing/2014/main" id="{A87F47FD-4C00-4404-84A5-41F133808BC3}"/>
+                <a16:creationId xmlns:a16="http://schemas.microsoft.com/office/drawing/2014/main" id="{934C68E4-77F8-4762-A1D2-DC19B7F74D18}"/>
               </a:ext>
             </a:extLst>
           </p:cNvPr>
@@ -17223,7 +17223,7 @@
           <p:cNvPr id="23" name="">
             <a:extLst xmlns:a="http://schemas.openxmlformats.org/drawingml/2006/main">
               <a:ext uri="{FF2B5EF4-FFF2-40B4-BE49-F238E27FC236}">
-                <a16:creationId xmlns:a16="http://schemas.microsoft.com/office/drawing/2014/main" id="{AA86CAF9-68DF-4FDC-BD8C-27919D94B142}"/>
+                <a16:creationId xmlns:a16="http://schemas.microsoft.com/office/drawing/2014/main" id="{0F7514DF-AA9D-45C1-8BE6-D5A1031EF59D}"/>
               </a:ext>
             </a:extLst>
           </p:cNvPr>
@@ -17254,7 +17254,7 @@
           <p:cNvPr id="24" name="">
             <a:extLst xmlns:a="http://schemas.openxmlformats.org/drawingml/2006/main">
               <a:ext uri="{FF2B5EF4-FFF2-40B4-BE49-F238E27FC236}">
-                <a16:creationId xmlns:a16="http://schemas.microsoft.com/office/drawing/2014/main" id="{2363BC96-8380-4F8C-B368-C8C5D3EAFE50}"/>
+                <a16:creationId xmlns:a16="http://schemas.microsoft.com/office/drawing/2014/main" id="{09419424-86C4-4CF5-801C-553590002CCD}"/>
               </a:ext>
             </a:extLst>
           </p:cNvPr>
@@ -17316,7 +17316,7 @@
           <p:cNvPr id="25" name="">
             <a:extLst xmlns:a="http://schemas.openxmlformats.org/drawingml/2006/main">
               <a:ext uri="{FF2B5EF4-FFF2-40B4-BE49-F238E27FC236}">
-                <a16:creationId xmlns:a16="http://schemas.microsoft.com/office/drawing/2014/main" id="{E395B887-EA2B-4B13-93C8-CC8EF48E7C5A}"/>
+                <a16:creationId xmlns:a16="http://schemas.microsoft.com/office/drawing/2014/main" id="{7753277F-CBC0-4156-8714-C9BF913A6598}"/>
               </a:ext>
             </a:extLst>
           </p:cNvPr>
@@ -17378,7 +17378,7 @@
           <p:cNvPr id="26" name="">
             <a:extLst xmlns:a="http://schemas.openxmlformats.org/drawingml/2006/main">
               <a:ext uri="{FF2B5EF4-FFF2-40B4-BE49-F238E27FC236}">
-                <a16:creationId xmlns:a16="http://schemas.microsoft.com/office/drawing/2014/main" id="{BD44E24C-64D9-4358-813C-9DBD8A577187}"/>
+                <a16:creationId xmlns:a16="http://schemas.microsoft.com/office/drawing/2014/main" id="{C5ABD1F3-D208-4F9D-B108-F8BEB0496532}"/>
               </a:ext>
             </a:extLst>
           </p:cNvPr>
@@ -17409,7 +17409,7 @@
           <p:cNvPr id="27" name="">
             <a:extLst xmlns:a="http://schemas.openxmlformats.org/drawingml/2006/main">
               <a:ext uri="{FF2B5EF4-FFF2-40B4-BE49-F238E27FC236}">
-                <a16:creationId xmlns:a16="http://schemas.microsoft.com/office/drawing/2014/main" id="{2649DE6A-F70B-4220-8FFC-2B94352C2EAA}"/>
+                <a16:creationId xmlns:a16="http://schemas.microsoft.com/office/drawing/2014/main" id="{62C989AE-4D01-4DB4-8367-E7354FD45BE9}"/>
               </a:ext>
             </a:extLst>
           </p:cNvPr>
@@ -17471,7 +17471,7 @@
           <p:cNvPr id="28" name="">
             <a:extLst xmlns:a="http://schemas.openxmlformats.org/drawingml/2006/main">
               <a:ext uri="{FF2B5EF4-FFF2-40B4-BE49-F238E27FC236}">
-                <a16:creationId xmlns:a16="http://schemas.microsoft.com/office/drawing/2014/main" id="{65E1F6D8-09B0-4F63-A82A-4942266D9613}"/>
+                <a16:creationId xmlns:a16="http://schemas.microsoft.com/office/drawing/2014/main" id="{EA601BA2-A8FE-426A-AD54-4087D93896DA}"/>
               </a:ext>
             </a:extLst>
           </p:cNvPr>
@@ -17533,7 +17533,7 @@
           <p:cNvPr id="29" name="">
             <a:extLst xmlns:a="http://schemas.openxmlformats.org/drawingml/2006/main">
               <a:ext uri="{FF2B5EF4-FFF2-40B4-BE49-F238E27FC236}">
-                <a16:creationId xmlns:a16="http://schemas.microsoft.com/office/drawing/2014/main" id="{5B618866-C729-4B1F-9536-1157D177FA54}"/>
+                <a16:creationId xmlns:a16="http://schemas.microsoft.com/office/drawing/2014/main" id="{22B71AB3-7980-4ED2-81D4-3E34BA9AA3DE}"/>
               </a:ext>
             </a:extLst>
           </p:cNvPr>
@@ -17564,7 +17564,7 @@
           <p:cNvPr id="30" name="">
             <a:extLst xmlns:a="http://schemas.openxmlformats.org/drawingml/2006/main">
               <a:ext uri="{FF2B5EF4-FFF2-40B4-BE49-F238E27FC236}">
-                <a16:creationId xmlns:a16="http://schemas.microsoft.com/office/drawing/2014/main" id="{3865EF28-D45E-441C-AD6B-00BB4807FE0F}"/>
+                <a16:creationId xmlns:a16="http://schemas.microsoft.com/office/drawing/2014/main" id="{B2F0901B-A56B-448A-8B8E-A50E5BF27109}"/>
               </a:ext>
             </a:extLst>
           </p:cNvPr>
@@ -17597,7 +17597,7 @@
           <p:cNvPr id="31" name="">
             <a:extLst xmlns:a="http://schemas.openxmlformats.org/drawingml/2006/main">
               <a:ext uri="{FF2B5EF4-FFF2-40B4-BE49-F238E27FC236}">
-                <a16:creationId xmlns:a16="http://schemas.microsoft.com/office/drawing/2014/main" id="{8DE31941-818E-4C5D-B37D-DC7851924BA4}"/>
+                <a16:creationId xmlns:a16="http://schemas.microsoft.com/office/drawing/2014/main" id="{E1C54267-FF94-4009-B362-6A6878B22BFB}"/>
               </a:ext>
             </a:extLst>
           </p:cNvPr>
@@ -17659,7 +17659,7 @@
           <p:cNvPr id="32" name="">
             <a:extLst xmlns:a="http://schemas.openxmlformats.org/drawingml/2006/main">
               <a:ext uri="{FF2B5EF4-FFF2-40B4-BE49-F238E27FC236}">
-                <a16:creationId xmlns:a16="http://schemas.microsoft.com/office/drawing/2014/main" id="{55D8B159-5025-4AC0-8162-4920B90FC799}"/>
+                <a16:creationId xmlns:a16="http://schemas.microsoft.com/office/drawing/2014/main" id="{6A7A89BF-18F5-4C7B-AE4E-0C8D32D7F4FA}"/>
               </a:ext>
             </a:extLst>
           </p:cNvPr>
@@ -17690,7 +17690,7 @@
           <p:cNvPr id="33" name="">
             <a:extLst xmlns:a="http://schemas.openxmlformats.org/drawingml/2006/main">
               <a:ext uri="{FF2B5EF4-FFF2-40B4-BE49-F238E27FC236}">
-                <a16:creationId xmlns:a16="http://schemas.microsoft.com/office/drawing/2014/main" id="{D2B94BAF-BEBD-46B4-B725-F42AD4DD6283}"/>
+                <a16:creationId xmlns:a16="http://schemas.microsoft.com/office/drawing/2014/main" id="{D052B1A1-76F5-4B62-9CE8-FA3417031C94}"/>
               </a:ext>
             </a:extLst>
           </p:cNvPr>
@@ -17752,7 +17752,7 @@
           <p:cNvPr id="34" name="">
             <a:extLst xmlns:a="http://schemas.openxmlformats.org/drawingml/2006/main">
               <a:ext uri="{FF2B5EF4-FFF2-40B4-BE49-F238E27FC236}">
-                <a16:creationId xmlns:a16="http://schemas.microsoft.com/office/drawing/2014/main" id="{8D939DDF-6774-4EEF-BC0A-2395FCFF1E91}"/>
+                <a16:creationId xmlns:a16="http://schemas.microsoft.com/office/drawing/2014/main" id="{241D275A-5709-4783-A1AD-0A4E98231357}"/>
               </a:ext>
             </a:extLst>
           </p:cNvPr>
@@ -17812,7 +17812,7 @@
     </p:spTree>
     <p:extLst>
       <p:ext uri="{BB962C8B-B14F-4D97-AF65-F5344CB8AC3E}">
-        <p14:creationId xmlns:p14="http://schemas.microsoft.com/office/powerpoint/2010/main" val="21352134"/>
+        <p14:creationId xmlns:p14="http://schemas.microsoft.com/office/powerpoint/2010/main" val="1781751785"/>
       </p:ext>
     </p:extLst>
   </p:cSld>
@@ -17843,7 +17843,7 @@
           <p:cNvPr id="43" name="">
             <a:extLst xmlns:a="http://schemas.openxmlformats.org/drawingml/2006/main">
               <a:ext uri="{FF2B5EF4-FFF2-40B4-BE49-F238E27FC236}">
-                <a16:creationId xmlns:a16="http://schemas.microsoft.com/office/drawing/2014/main" id="{1E801C57-32D7-4E95-A9DB-C9D3EE04A26F}"/>
+                <a16:creationId xmlns:a16="http://schemas.microsoft.com/office/drawing/2014/main" id="{1C8390EF-E993-4996-B37A-C8EA582199D8}"/>
               </a:ext>
             </a:extLst>
           </p:cNvPr>
@@ -17905,7 +17905,7 @@
                 <a:latin typeface="Arial"/>
                 <a:ea typeface="Arial"/>
                 <a:cs typeface="Arial"/>
-                <a:hlinkClick xmlns:r="http://schemas.openxmlformats.org/officeDocument/2006/relationships" r:id="Rb452b0d9409f41ed"/>
+                <a:hlinkClick xmlns:r="http://schemas.openxmlformats.org/officeDocument/2006/relationships" r:id="R0d6d129f3fee4500"/>
               </a:rPr>
               <a:t>https://github.com/qjmre23/Route2Zero</a:t>
             </a:r>
@@ -17928,7 +17928,7 @@
                 <a:latin typeface="Arial"/>
                 <a:ea typeface="Arial"/>
                 <a:cs typeface="Arial"/>
-                <a:hlinkClick xmlns:r="http://schemas.openxmlformats.org/officeDocument/2006/relationships" r:id="R27d3f332e0ae4ef8"/>
+                <a:hlinkClick xmlns:r="http://schemas.openxmlformats.org/officeDocument/2006/relationships" r:id="Re20741a4100d4ad9"/>
               </a:rPr>
               <a:t>https://route2zero.netlify.app/</a:t>
             </a:r>
@@ -17940,7 +17940,7 @@
           <p:cNvPr id="2" name="">
             <a:extLst xmlns:a="http://schemas.openxmlformats.org/drawingml/2006/main">
               <a:ext uri="{FF2B5EF4-FFF2-40B4-BE49-F238E27FC236}">
-                <a16:creationId xmlns:a16="http://schemas.microsoft.com/office/drawing/2014/main" id="{A2BDFFF6-CB5C-4440-BFDD-87A14491D962}"/>
+                <a16:creationId xmlns:a16="http://schemas.microsoft.com/office/drawing/2014/main" id="{1BA4796C-400C-47C9-99CE-D2F44E49700D}"/>
               </a:ext>
             </a:extLst>
           </p:cNvPr>
@@ -18002,7 +18002,7 @@
           <p:cNvPr id="3" name="">
             <a:extLst xmlns:a="http://schemas.openxmlformats.org/drawingml/2006/main">
               <a:ext uri="{FF2B5EF4-FFF2-40B4-BE49-F238E27FC236}">
-                <a16:creationId xmlns:a16="http://schemas.microsoft.com/office/drawing/2014/main" id="{5BEBFF52-FB57-455D-A358-D74D55A4C0A7}"/>
+                <a16:creationId xmlns:a16="http://schemas.microsoft.com/office/drawing/2014/main" id="{FE17F237-0783-4680-A2F2-8C5FC70C1DCB}"/>
               </a:ext>
             </a:extLst>
           </p:cNvPr>
@@ -18064,7 +18064,7 @@
           <p:cNvPr id="4" name="">
             <a:extLst xmlns:a="http://schemas.openxmlformats.org/drawingml/2006/main">
               <a:ext uri="{FF2B5EF4-FFF2-40B4-BE49-F238E27FC236}">
-                <a16:creationId xmlns:a16="http://schemas.microsoft.com/office/drawing/2014/main" id="{C9DC0A2A-6626-4BF4-BF5C-4D9FD7061C74}"/>
+                <a16:creationId xmlns:a16="http://schemas.microsoft.com/office/drawing/2014/main" id="{AEEDD916-92B9-4F03-AC6E-16D9DF181F8C}"/>
               </a:ext>
             </a:extLst>
           </p:cNvPr>
@@ -18095,7 +18095,7 @@
           <p:cNvPr id="5" name="">
             <a:extLst xmlns:a="http://schemas.openxmlformats.org/drawingml/2006/main">
               <a:ext uri="{FF2B5EF4-FFF2-40B4-BE49-F238E27FC236}">
-                <a16:creationId xmlns:a16="http://schemas.microsoft.com/office/drawing/2014/main" id="{3A7B298A-0286-498A-AF65-BD2B93313136}"/>
+                <a16:creationId xmlns:a16="http://schemas.microsoft.com/office/drawing/2014/main" id="{D286AA66-4CA3-46BB-AC4A-7F0F1F4626D2}"/>
               </a:ext>
             </a:extLst>
           </p:cNvPr>
@@ -18157,7 +18157,7 @@
           <p:cNvPr id="6" name="">
             <a:extLst xmlns:a="http://schemas.openxmlformats.org/drawingml/2006/main">
               <a:ext uri="{FF2B5EF4-FFF2-40B4-BE49-F238E27FC236}">
-                <a16:creationId xmlns:a16="http://schemas.microsoft.com/office/drawing/2014/main" id="{DF31F4D8-732E-4919-A4ED-75007863FD81}"/>
+                <a16:creationId xmlns:a16="http://schemas.microsoft.com/office/drawing/2014/main" id="{385DF883-57D4-415D-8192-0BEA6AC9EEF4}"/>
               </a:ext>
             </a:extLst>
           </p:cNvPr>
@@ -18188,7 +18188,7 @@
           <p:cNvPr id="7" name="">
             <a:extLst xmlns:a="http://schemas.openxmlformats.org/drawingml/2006/main">
               <a:ext uri="{FF2B5EF4-FFF2-40B4-BE49-F238E27FC236}">
-                <a16:creationId xmlns:a16="http://schemas.microsoft.com/office/drawing/2014/main" id="{30DBA223-558F-46C2-97F4-B26C75295FF9}"/>
+                <a16:creationId xmlns:a16="http://schemas.microsoft.com/office/drawing/2014/main" id="{6BB62233-0022-4837-9ABA-976F61DE817C}"/>
               </a:ext>
             </a:extLst>
           </p:cNvPr>
@@ -18250,7 +18250,7 @@
           <p:cNvPr id="8" name="">
             <a:extLst xmlns:a="http://schemas.openxmlformats.org/drawingml/2006/main">
               <a:ext uri="{FF2B5EF4-FFF2-40B4-BE49-F238E27FC236}">
-                <a16:creationId xmlns:a16="http://schemas.microsoft.com/office/drawing/2014/main" id="{C7713ECC-6745-4ACA-BDBA-502CC7AB5DF8}"/>
+                <a16:creationId xmlns:a16="http://schemas.microsoft.com/office/drawing/2014/main" id="{0F8444C3-F6AE-4464-AACC-E53260AFAD37}"/>
               </a:ext>
             </a:extLst>
           </p:cNvPr>
@@ -18281,7 +18281,7 @@
           <p:cNvPr id="9" name="">
             <a:extLst xmlns:a="http://schemas.openxmlformats.org/drawingml/2006/main">
               <a:ext uri="{FF2B5EF4-FFF2-40B4-BE49-F238E27FC236}">
-                <a16:creationId xmlns:a16="http://schemas.microsoft.com/office/drawing/2014/main" id="{8E220A45-D674-472A-83F1-5CC233C158C0}"/>
+                <a16:creationId xmlns:a16="http://schemas.microsoft.com/office/drawing/2014/main" id="{4012DF07-55DA-4902-B2E8-9AF43E85D752}"/>
               </a:ext>
             </a:extLst>
           </p:cNvPr>
@@ -18343,7 +18343,7 @@
           <p:cNvPr id="10" name="">
             <a:extLst xmlns:a="http://schemas.openxmlformats.org/drawingml/2006/main">
               <a:ext uri="{FF2B5EF4-FFF2-40B4-BE49-F238E27FC236}">
-                <a16:creationId xmlns:a16="http://schemas.microsoft.com/office/drawing/2014/main" id="{B370C46E-2FF7-4D42-8527-FF68CAA09887}"/>
+                <a16:creationId xmlns:a16="http://schemas.microsoft.com/office/drawing/2014/main" id="{0BA60233-8714-4FF8-9386-8B490454F5FB}"/>
               </a:ext>
             </a:extLst>
           </p:cNvPr>
@@ -18374,7 +18374,7 @@
           <p:cNvPr id="11" name="">
             <a:extLst xmlns:a="http://schemas.openxmlformats.org/drawingml/2006/main">
               <a:ext uri="{FF2B5EF4-FFF2-40B4-BE49-F238E27FC236}">
-                <a16:creationId xmlns:a16="http://schemas.microsoft.com/office/drawing/2014/main" id="{2064A1C1-1410-4F00-8D19-450F4A940BA2}"/>
+                <a16:creationId xmlns:a16="http://schemas.microsoft.com/office/drawing/2014/main" id="{9140F386-D3E1-4B27-8891-EBF2659ACA97}"/>
               </a:ext>
             </a:extLst>
           </p:cNvPr>
@@ -18436,7 +18436,7 @@
           <p:cNvPr id="12" name="">
             <a:extLst xmlns:a="http://schemas.openxmlformats.org/drawingml/2006/main">
               <a:ext uri="{FF2B5EF4-FFF2-40B4-BE49-F238E27FC236}">
-                <a16:creationId xmlns:a16="http://schemas.microsoft.com/office/drawing/2014/main" id="{8C5DD9D5-2AD5-4DDF-BD0A-E9C7F71F71DD}"/>
+                <a16:creationId xmlns:a16="http://schemas.microsoft.com/office/drawing/2014/main" id="{1B8CC804-3E5F-4E67-AEDC-1862D8A537C3}"/>
               </a:ext>
             </a:extLst>
           </p:cNvPr>
@@ -18467,7 +18467,7 @@
           <p:cNvPr id="13" name="">
             <a:extLst xmlns:a="http://schemas.openxmlformats.org/drawingml/2006/main">
               <a:ext uri="{FF2B5EF4-FFF2-40B4-BE49-F238E27FC236}">
-                <a16:creationId xmlns:a16="http://schemas.microsoft.com/office/drawing/2014/main" id="{A0745650-7901-4241-93EC-1BDA9730FC4C}"/>
+                <a16:creationId xmlns:a16="http://schemas.microsoft.com/office/drawing/2014/main" id="{1B2FB643-2DDA-464A-89BF-88596C4B3F28}"/>
               </a:ext>
             </a:extLst>
           </p:cNvPr>
@@ -18529,7 +18529,7 @@
           <p:cNvPr id="14" name="">
             <a:extLst xmlns:a="http://schemas.openxmlformats.org/drawingml/2006/main">
               <a:ext uri="{FF2B5EF4-FFF2-40B4-BE49-F238E27FC236}">
-                <a16:creationId xmlns:a16="http://schemas.microsoft.com/office/drawing/2014/main" id="{3E788656-0CEA-4AB7-B633-38DAE5D93138}"/>
+                <a16:creationId xmlns:a16="http://schemas.microsoft.com/office/drawing/2014/main" id="{3226FF29-E847-4931-B1C6-D3222F9EA00A}"/>
               </a:ext>
             </a:extLst>
           </p:cNvPr>
@@ -18560,7 +18560,7 @@
           <p:cNvPr id="15" name="">
             <a:extLst xmlns:a="http://schemas.openxmlformats.org/drawingml/2006/main">
               <a:ext uri="{FF2B5EF4-FFF2-40B4-BE49-F238E27FC236}">
-                <a16:creationId xmlns:a16="http://schemas.microsoft.com/office/drawing/2014/main" id="{4C0A643E-DC63-494D-A79E-D35DB6B7BCF8}"/>
+                <a16:creationId xmlns:a16="http://schemas.microsoft.com/office/drawing/2014/main" id="{514379AA-06DF-46AB-AB6B-7B63D4678BE7}"/>
               </a:ext>
             </a:extLst>
           </p:cNvPr>
@@ -18622,7 +18622,7 @@
           <p:cNvPr id="16" name="">
             <a:extLst xmlns:a="http://schemas.openxmlformats.org/drawingml/2006/main">
               <a:ext uri="{FF2B5EF4-FFF2-40B4-BE49-F238E27FC236}">
-                <a16:creationId xmlns:a16="http://schemas.microsoft.com/office/drawing/2014/main" id="{B2BB761D-D3AB-4546-A050-6A15C55E1A74}"/>
+                <a16:creationId xmlns:a16="http://schemas.microsoft.com/office/drawing/2014/main" id="{68101BA0-A4F1-4EDF-987F-FB0B16A45B8C}"/>
               </a:ext>
             </a:extLst>
           </p:cNvPr>
@@ -18653,7 +18653,7 @@
           <p:cNvPr id="17" name="">
             <a:extLst xmlns:a="http://schemas.openxmlformats.org/drawingml/2006/main">
               <a:ext uri="{FF2B5EF4-FFF2-40B4-BE49-F238E27FC236}">
-                <a16:creationId xmlns:a16="http://schemas.microsoft.com/office/drawing/2014/main" id="{DF61FEEA-6FB4-46B9-B24D-87A3F81B9D1E}"/>
+                <a16:creationId xmlns:a16="http://schemas.microsoft.com/office/drawing/2014/main" id="{5E296ACA-0C1B-46A9-8E1B-DF8797123270}"/>
               </a:ext>
             </a:extLst>
           </p:cNvPr>
@@ -18715,7 +18715,7 @@
           <p:cNvPr id="18" name="">
             <a:extLst xmlns:a="http://schemas.openxmlformats.org/drawingml/2006/main">
               <a:ext uri="{FF2B5EF4-FFF2-40B4-BE49-F238E27FC236}">
-                <a16:creationId xmlns:a16="http://schemas.microsoft.com/office/drawing/2014/main" id="{DCDF5A1E-CF0C-44D7-99DE-0F96848A98FC}"/>
+                <a16:creationId xmlns:a16="http://schemas.microsoft.com/office/drawing/2014/main" id="{52B9E6A9-F7F1-4CED-BF8E-232F1B4A5105}"/>
               </a:ext>
             </a:extLst>
           </p:cNvPr>
@@ -18746,7 +18746,7 @@
           <p:cNvPr id="19" name="">
             <a:extLst xmlns:a="http://schemas.openxmlformats.org/drawingml/2006/main">
               <a:ext uri="{FF2B5EF4-FFF2-40B4-BE49-F238E27FC236}">
-                <a16:creationId xmlns:a16="http://schemas.microsoft.com/office/drawing/2014/main" id="{B3470949-909C-42D5-ADC0-CD97E6321CB4}"/>
+                <a16:creationId xmlns:a16="http://schemas.microsoft.com/office/drawing/2014/main" id="{40F3A316-7DE1-4D49-9172-882F99208189}"/>
               </a:ext>
             </a:extLst>
           </p:cNvPr>
@@ -18808,7 +18808,7 @@
           <p:cNvPr id="20" name="">
             <a:extLst xmlns:a="http://schemas.openxmlformats.org/drawingml/2006/main">
               <a:ext uri="{FF2B5EF4-FFF2-40B4-BE49-F238E27FC236}">
-                <a16:creationId xmlns:a16="http://schemas.microsoft.com/office/drawing/2014/main" id="{1441150E-0DBD-428A-87DC-2A8032079785}"/>
+                <a16:creationId xmlns:a16="http://schemas.microsoft.com/office/drawing/2014/main" id="{283E6096-A312-4EC1-B81A-D0BFD80498EC}"/>
               </a:ext>
             </a:extLst>
           </p:cNvPr>
@@ -18839,7 +18839,7 @@
           <p:cNvPr id="21" name="">
             <a:extLst xmlns:a="http://schemas.openxmlformats.org/drawingml/2006/main">
               <a:ext uri="{FF2B5EF4-FFF2-40B4-BE49-F238E27FC236}">
-                <a16:creationId xmlns:a16="http://schemas.microsoft.com/office/drawing/2014/main" id="{DCF2AFFE-F77C-41F5-9A25-CF7CD476D80C}"/>
+                <a16:creationId xmlns:a16="http://schemas.microsoft.com/office/drawing/2014/main" id="{A9A8E7C7-141B-493E-AD5C-2F84F23528AB}"/>
               </a:ext>
             </a:extLst>
           </p:cNvPr>
@@ -18901,7 +18901,7 @@
           <p:cNvPr id="22" name="">
             <a:extLst xmlns:a="http://schemas.openxmlformats.org/drawingml/2006/main">
               <a:ext uri="{FF2B5EF4-FFF2-40B4-BE49-F238E27FC236}">
-                <a16:creationId xmlns:a16="http://schemas.microsoft.com/office/drawing/2014/main" id="{FBCBEE70-DE33-478B-8BF9-EA3215B02D54}"/>
+                <a16:creationId xmlns:a16="http://schemas.microsoft.com/office/drawing/2014/main" id="{C6029DAE-515B-4416-9698-70840216595C}"/>
               </a:ext>
             </a:extLst>
           </p:cNvPr>
@@ -18932,7 +18932,7 @@
           <p:cNvPr id="23" name="">
             <a:extLst xmlns:a="http://schemas.openxmlformats.org/drawingml/2006/main">
               <a:ext uri="{FF2B5EF4-FFF2-40B4-BE49-F238E27FC236}">
-                <a16:creationId xmlns:a16="http://schemas.microsoft.com/office/drawing/2014/main" id="{6BABC1C5-9DAE-4945-85F0-4D51234C7D92}"/>
+                <a16:creationId xmlns:a16="http://schemas.microsoft.com/office/drawing/2014/main" id="{2E206AAF-1102-423E-851F-DFE754496B5E}"/>
               </a:ext>
             </a:extLst>
           </p:cNvPr>
@@ -18994,7 +18994,7 @@
           <p:cNvPr id="24" name="">
             <a:extLst xmlns:a="http://schemas.openxmlformats.org/drawingml/2006/main">
               <a:ext uri="{FF2B5EF4-FFF2-40B4-BE49-F238E27FC236}">
-                <a16:creationId xmlns:a16="http://schemas.microsoft.com/office/drawing/2014/main" id="{E2EFBA5D-6CB6-4589-A93B-1A4077F52C5C}"/>
+                <a16:creationId xmlns:a16="http://schemas.microsoft.com/office/drawing/2014/main" id="{0920DF97-7B7B-4DB1-8EAF-3F94B086109D}"/>
               </a:ext>
             </a:extLst>
           </p:cNvPr>
@@ -19025,7 +19025,7 @@
           <p:cNvPr id="25" name="">
             <a:extLst xmlns:a="http://schemas.openxmlformats.org/drawingml/2006/main">
               <a:ext uri="{FF2B5EF4-FFF2-40B4-BE49-F238E27FC236}">
-                <a16:creationId xmlns:a16="http://schemas.microsoft.com/office/drawing/2014/main" id="{D05D0F99-4B85-41F5-8032-75399EA27391}"/>
+                <a16:creationId xmlns:a16="http://schemas.microsoft.com/office/drawing/2014/main" id="{1A26C13D-4316-4A13-805D-555739672D13}"/>
               </a:ext>
             </a:extLst>
           </p:cNvPr>
@@ -19087,7 +19087,7 @@
           <p:cNvPr id="26" name="">
             <a:extLst xmlns:a="http://schemas.openxmlformats.org/drawingml/2006/main">
               <a:ext uri="{FF2B5EF4-FFF2-40B4-BE49-F238E27FC236}">
-                <a16:creationId xmlns:a16="http://schemas.microsoft.com/office/drawing/2014/main" id="{0C1C1797-377D-4DD8-A600-D7CF77581DF8}"/>
+                <a16:creationId xmlns:a16="http://schemas.microsoft.com/office/drawing/2014/main" id="{813B055D-0852-47B5-A254-D9963A057671}"/>
               </a:ext>
             </a:extLst>
           </p:cNvPr>
@@ -19149,7 +19149,7 @@
           <p:cNvPr id="27" name="">
             <a:extLst xmlns:a="http://schemas.openxmlformats.org/drawingml/2006/main">
               <a:ext uri="{FF2B5EF4-FFF2-40B4-BE49-F238E27FC236}">
-                <a16:creationId xmlns:a16="http://schemas.microsoft.com/office/drawing/2014/main" id="{5D252F7B-EE6A-4E62-AB04-4E77F53EA5BA}"/>
+                <a16:creationId xmlns:a16="http://schemas.microsoft.com/office/drawing/2014/main" id="{0C272F0A-DB4F-459F-A661-95B52F0A57FD}"/>
               </a:ext>
             </a:extLst>
           </p:cNvPr>
@@ -19184,7 +19184,7 @@
           <p:cNvPr id="28" name="">
             <a:extLst xmlns:a="http://schemas.openxmlformats.org/drawingml/2006/main">
               <a:ext uri="{FF2B5EF4-FFF2-40B4-BE49-F238E27FC236}">
-                <a16:creationId xmlns:a16="http://schemas.microsoft.com/office/drawing/2014/main" id="{2E12F35E-254C-493B-B1DA-015F920FFABB}"/>
+                <a16:creationId xmlns:a16="http://schemas.microsoft.com/office/drawing/2014/main" id="{DB24DF7A-9F79-4646-BE93-84444B034968}"/>
               </a:ext>
             </a:extLst>
           </p:cNvPr>
@@ -19246,7 +19246,7 @@
           <p:cNvPr id="29" name="">
             <a:extLst xmlns:a="http://schemas.openxmlformats.org/drawingml/2006/main">
               <a:ext uri="{FF2B5EF4-FFF2-40B4-BE49-F238E27FC236}">
-                <a16:creationId xmlns:a16="http://schemas.microsoft.com/office/drawing/2014/main" id="{F4EBCBA2-F5DB-4B66-975A-DD8A0F3DD153}"/>
+                <a16:creationId xmlns:a16="http://schemas.microsoft.com/office/drawing/2014/main" id="{6DFA7D56-D135-4E76-A280-77D6A8A7D72A}"/>
               </a:ext>
             </a:extLst>
           </p:cNvPr>
@@ -19308,7 +19308,7 @@
           <p:cNvPr id="30" name="">
             <a:extLst xmlns:a="http://schemas.openxmlformats.org/drawingml/2006/main">
               <a:ext uri="{FF2B5EF4-FFF2-40B4-BE49-F238E27FC236}">
-                <a16:creationId xmlns:a16="http://schemas.microsoft.com/office/drawing/2014/main" id="{FAE8BFA9-29F4-4E5B-8487-70D8DC0A8A12}"/>
+                <a16:creationId xmlns:a16="http://schemas.microsoft.com/office/drawing/2014/main" id="{1F25A4B6-0DC9-483B-A907-D5573BF8140D}"/>
               </a:ext>
             </a:extLst>
           </p:cNvPr>
@@ -19343,7 +19343,7 @@
           <p:cNvPr id="31" name="">
             <a:extLst xmlns:a="http://schemas.openxmlformats.org/drawingml/2006/main">
               <a:ext uri="{FF2B5EF4-FFF2-40B4-BE49-F238E27FC236}">
-                <a16:creationId xmlns:a16="http://schemas.microsoft.com/office/drawing/2014/main" id="{0A16C4CB-9B3F-4462-8E27-4C698D5CD191}"/>
+                <a16:creationId xmlns:a16="http://schemas.microsoft.com/office/drawing/2014/main" id="{0C139786-4F73-4149-B003-0067D1360CE0}"/>
               </a:ext>
             </a:extLst>
           </p:cNvPr>
@@ -19405,7 +19405,7 @@
           <p:cNvPr id="32" name="">
             <a:extLst xmlns:a="http://schemas.openxmlformats.org/drawingml/2006/main">
               <a:ext uri="{FF2B5EF4-FFF2-40B4-BE49-F238E27FC236}">
-                <a16:creationId xmlns:a16="http://schemas.microsoft.com/office/drawing/2014/main" id="{A79F8474-8D00-4113-8370-06D2DA6E6959}"/>
+                <a16:creationId xmlns:a16="http://schemas.microsoft.com/office/drawing/2014/main" id="{FF22DE03-5266-4288-8BC9-B9A060CA6310}"/>
               </a:ext>
             </a:extLst>
           </p:cNvPr>
@@ -19467,7 +19467,7 @@
           <p:cNvPr id="33" name="">
             <a:extLst xmlns:a="http://schemas.openxmlformats.org/drawingml/2006/main">
               <a:ext uri="{FF2B5EF4-FFF2-40B4-BE49-F238E27FC236}">
-                <a16:creationId xmlns:a16="http://schemas.microsoft.com/office/drawing/2014/main" id="{394D9FCD-6ABC-4451-AD46-782761BDD749}"/>
+                <a16:creationId xmlns:a16="http://schemas.microsoft.com/office/drawing/2014/main" id="{CAC5206B-804A-429F-AFB5-FDB3AB9A91D8}"/>
               </a:ext>
             </a:extLst>
           </p:cNvPr>
@@ -19502,7 +19502,7 @@
           <p:cNvPr id="34" name="">
             <a:extLst xmlns:a="http://schemas.openxmlformats.org/drawingml/2006/main">
               <a:ext uri="{FF2B5EF4-FFF2-40B4-BE49-F238E27FC236}">
-                <a16:creationId xmlns:a16="http://schemas.microsoft.com/office/drawing/2014/main" id="{6C3CEE9A-2F0A-4872-8362-4377C89436CF}"/>
+                <a16:creationId xmlns:a16="http://schemas.microsoft.com/office/drawing/2014/main" id="{2C6A99F0-6D1F-43F4-A622-6FF41C5ED5C8}"/>
               </a:ext>
             </a:extLst>
           </p:cNvPr>
@@ -19564,7 +19564,7 @@
           <p:cNvPr id="35" name="">
             <a:extLst xmlns:a="http://schemas.openxmlformats.org/drawingml/2006/main">
               <a:ext uri="{FF2B5EF4-FFF2-40B4-BE49-F238E27FC236}">
-                <a16:creationId xmlns:a16="http://schemas.microsoft.com/office/drawing/2014/main" id="{168140ED-F9C7-422E-B202-C76985B5390B}"/>
+                <a16:creationId xmlns:a16="http://schemas.microsoft.com/office/drawing/2014/main" id="{DD2B2E33-7202-440E-9E11-300969574141}"/>
               </a:ext>
             </a:extLst>
           </p:cNvPr>
@@ -19626,7 +19626,7 @@
           <p:cNvPr id="36" name="">
             <a:extLst xmlns:a="http://schemas.openxmlformats.org/drawingml/2006/main">
               <a:ext uri="{FF2B5EF4-FFF2-40B4-BE49-F238E27FC236}">
-                <a16:creationId xmlns:a16="http://schemas.microsoft.com/office/drawing/2014/main" id="{45026552-C76B-421A-9E1D-EA4A025CF3F5}"/>
+                <a16:creationId xmlns:a16="http://schemas.microsoft.com/office/drawing/2014/main" id="{597B2A01-4189-4D5B-A72E-855F36FAEFB4}"/>
               </a:ext>
             </a:extLst>
           </p:cNvPr>
@@ -19688,7 +19688,7 @@
           <p:cNvPr id="37" name="">
             <a:extLst xmlns:a="http://schemas.openxmlformats.org/drawingml/2006/main">
               <a:ext uri="{FF2B5EF4-FFF2-40B4-BE49-F238E27FC236}">
-                <a16:creationId xmlns:a16="http://schemas.microsoft.com/office/drawing/2014/main" id="{6B21E302-9F2E-4183-940F-63FAC4AA9BA2}"/>
+                <a16:creationId xmlns:a16="http://schemas.microsoft.com/office/drawing/2014/main" id="{486CC6E3-7003-4F3B-84F4-8F5CD231F623}"/>
               </a:ext>
             </a:extLst>
           </p:cNvPr>
@@ -19750,7 +19750,7 @@
           <p:cNvPr id="38" name="">
             <a:extLst xmlns:a="http://schemas.openxmlformats.org/drawingml/2006/main">
               <a:ext uri="{FF2B5EF4-FFF2-40B4-BE49-F238E27FC236}">
-                <a16:creationId xmlns:a16="http://schemas.microsoft.com/office/drawing/2014/main" id="{37618261-D7AD-40E1-BFDE-726292538BC4}"/>
+                <a16:creationId xmlns:a16="http://schemas.microsoft.com/office/drawing/2014/main" id="{9CF4B688-8480-4E91-AFB1-26C7EFA906B8}"/>
               </a:ext>
             </a:extLst>
           </p:cNvPr>
@@ -19783,7 +19783,7 @@
           <p:cNvPr id="39" name="">
             <a:extLst xmlns:a="http://schemas.openxmlformats.org/drawingml/2006/main">
               <a:ext uri="{FF2B5EF4-FFF2-40B4-BE49-F238E27FC236}">
-                <a16:creationId xmlns:a16="http://schemas.microsoft.com/office/drawing/2014/main" id="{BACC0E00-06F0-45B5-9AA5-E00A49CCA26E}"/>
+                <a16:creationId xmlns:a16="http://schemas.microsoft.com/office/drawing/2014/main" id="{5537C940-E26D-47EF-A027-353F421AA027}"/>
               </a:ext>
             </a:extLst>
           </p:cNvPr>
@@ -19845,7 +19845,7 @@
           <p:cNvPr id="40" name="">
             <a:extLst xmlns:a="http://schemas.openxmlformats.org/drawingml/2006/main">
               <a:ext uri="{FF2B5EF4-FFF2-40B4-BE49-F238E27FC236}">
-                <a16:creationId xmlns:a16="http://schemas.microsoft.com/office/drawing/2014/main" id="{2DFA28D5-40F1-4216-B3F2-32DC3A4252E7}"/>
+                <a16:creationId xmlns:a16="http://schemas.microsoft.com/office/drawing/2014/main" id="{A568ED2B-ECF7-4F6E-82DE-D33BFF0B508A}"/>
               </a:ext>
             </a:extLst>
           </p:cNvPr>
@@ -19876,7 +19876,7 @@
           <p:cNvPr id="41" name="">
             <a:extLst xmlns:a="http://schemas.openxmlformats.org/drawingml/2006/main">
               <a:ext uri="{FF2B5EF4-FFF2-40B4-BE49-F238E27FC236}">
-                <a16:creationId xmlns:a16="http://schemas.microsoft.com/office/drawing/2014/main" id="{773E0DE9-92A7-4530-8848-4B46C8AE7808}"/>
+                <a16:creationId xmlns:a16="http://schemas.microsoft.com/office/drawing/2014/main" id="{3E48FA9B-B0A5-4CAD-BA23-396153EC95B2}"/>
               </a:ext>
             </a:extLst>
           </p:cNvPr>
@@ -19938,7 +19938,7 @@
           <p:cNvPr id="42" name="">
             <a:extLst xmlns:a="http://schemas.openxmlformats.org/drawingml/2006/main">
               <a:ext uri="{FF2B5EF4-FFF2-40B4-BE49-F238E27FC236}">
-                <a16:creationId xmlns:a16="http://schemas.microsoft.com/office/drawing/2014/main" id="{CD218C0E-64C4-4375-8C8F-CF2A1237C0FE}"/>
+                <a16:creationId xmlns:a16="http://schemas.microsoft.com/office/drawing/2014/main" id="{08297CF2-3204-4AB7-933C-623ECA972AF7}"/>
               </a:ext>
             </a:extLst>
           </p:cNvPr>
@@ -19998,7 +19998,7 @@
     </p:spTree>
     <p:extLst>
       <p:ext uri="{BB962C8B-B14F-4D97-AF65-F5344CB8AC3E}">
-        <p14:creationId xmlns:p14="http://schemas.microsoft.com/office/powerpoint/2010/main" val="2006243835"/>
+        <p14:creationId xmlns:p14="http://schemas.microsoft.com/office/powerpoint/2010/main" val="1323309738"/>
       </p:ext>
     </p:extLst>
   </p:cSld>
@@ -20029,7 +20029,7 @@
           <p:cNvPr id="20" name="">
             <a:extLst xmlns:a="http://schemas.openxmlformats.org/drawingml/2006/main">
               <a:ext uri="{FF2B5EF4-FFF2-40B4-BE49-F238E27FC236}">
-                <a16:creationId xmlns:a16="http://schemas.microsoft.com/office/drawing/2014/main" id="{DDB7ED46-AD74-44A6-BE48-0436B4A34267}"/>
+                <a16:creationId xmlns:a16="http://schemas.microsoft.com/office/drawing/2014/main" id="{6EDC4022-CE32-4C16-988A-F48DE5B22232}"/>
               </a:ext>
             </a:extLst>
           </p:cNvPr>
@@ -20091,7 +20091,7 @@
                 <a:latin typeface="Arial"/>
                 <a:ea typeface="Arial"/>
                 <a:cs typeface="Arial"/>
-                <a:hlinkClick xmlns:r="http://schemas.openxmlformats.org/officeDocument/2006/relationships" r:id="Re9a3c4ddbede4d0d"/>
+                <a:hlinkClick xmlns:r="http://schemas.openxmlformats.org/officeDocument/2006/relationships" r:id="Rcba0b4a87e3b43a0"/>
               </a:rPr>
               <a:t>https://github.com/qjmre23/Route2Zero</a:t>
             </a:r>
@@ -20114,7 +20114,7 @@
                 <a:latin typeface="Arial"/>
                 <a:ea typeface="Arial"/>
                 <a:cs typeface="Arial"/>
-                <a:hlinkClick xmlns:r="http://schemas.openxmlformats.org/officeDocument/2006/relationships" r:id="Rd15af28690d646e5"/>
+                <a:hlinkClick xmlns:r="http://schemas.openxmlformats.org/officeDocument/2006/relationships" r:id="R301c5fc8b6964dd4"/>
               </a:rPr>
               <a:t>https://route2zero.netlify.app/</a:t>
             </a:r>
@@ -20126,7 +20126,7 @@
           <p:cNvPr id="2" name="">
             <a:extLst xmlns:a="http://schemas.openxmlformats.org/drawingml/2006/main">
               <a:ext uri="{FF2B5EF4-FFF2-40B4-BE49-F238E27FC236}">
-                <a16:creationId xmlns:a16="http://schemas.microsoft.com/office/drawing/2014/main" id="{5D91503E-49AA-411B-961C-C141E4073C5B}"/>
+                <a16:creationId xmlns:a16="http://schemas.microsoft.com/office/drawing/2014/main" id="{763433C0-BC3B-4383-95CD-26A4F041C09C}"/>
               </a:ext>
             </a:extLst>
           </p:cNvPr>
@@ -20188,7 +20188,7 @@
           <p:cNvPr id="3" name="">
             <a:extLst xmlns:a="http://schemas.openxmlformats.org/drawingml/2006/main">
               <a:ext uri="{FF2B5EF4-FFF2-40B4-BE49-F238E27FC236}">
-                <a16:creationId xmlns:a16="http://schemas.microsoft.com/office/drawing/2014/main" id="{0BD4F6AB-8C0D-4A9B-AB68-C9BE4A4A0636}"/>
+                <a16:creationId xmlns:a16="http://schemas.microsoft.com/office/drawing/2014/main" id="{873142E0-644D-47E0-B74D-6C3956895439}"/>
               </a:ext>
             </a:extLst>
           </p:cNvPr>
@@ -20250,7 +20250,7 @@
           <p:cNvPr id="4" name="">
             <a:extLst xmlns:a="http://schemas.openxmlformats.org/drawingml/2006/main">
               <a:ext uri="{FF2B5EF4-FFF2-40B4-BE49-F238E27FC236}">
-                <a16:creationId xmlns:a16="http://schemas.microsoft.com/office/drawing/2014/main" id="{12E49189-058A-476B-AE91-07E47170BC3F}"/>
+                <a16:creationId xmlns:a16="http://schemas.microsoft.com/office/drawing/2014/main" id="{B23EF13D-8C97-489F-8765-E2B2EACAD906}"/>
               </a:ext>
             </a:extLst>
           </p:cNvPr>
@@ -20312,7 +20312,7 @@
           <p:cNvPr id="5" name="">
             <a:extLst xmlns:a="http://schemas.openxmlformats.org/drawingml/2006/main">
               <a:ext uri="{FF2B5EF4-FFF2-40B4-BE49-F238E27FC236}">
-                <a16:creationId xmlns:a16="http://schemas.microsoft.com/office/drawing/2014/main" id="{2C1C482B-C3FA-4CF7-B859-8C1DFCFAE665}"/>
+                <a16:creationId xmlns:a16="http://schemas.microsoft.com/office/drawing/2014/main" id="{04A94AFA-96E4-4E41-AD7C-85A25D5271AD}"/>
               </a:ext>
             </a:extLst>
           </p:cNvPr>
@@ -20374,7 +20374,7 @@
           <p:cNvPr id="6" name="">
             <a:extLst xmlns:a="http://schemas.openxmlformats.org/drawingml/2006/main">
               <a:ext uri="{FF2B5EF4-FFF2-40B4-BE49-F238E27FC236}">
-                <a16:creationId xmlns:a16="http://schemas.microsoft.com/office/drawing/2014/main" id="{66991878-D929-4544-AD6B-38B9E86B7DCC}"/>
+                <a16:creationId xmlns:a16="http://schemas.microsoft.com/office/drawing/2014/main" id="{A2A0306D-78BB-4A7E-9A75-678C007F7DE6}"/>
               </a:ext>
             </a:extLst>
           </p:cNvPr>
@@ -20436,7 +20436,7 @@
           <p:cNvPr id="7" name="">
             <a:extLst xmlns:a="http://schemas.openxmlformats.org/drawingml/2006/main">
               <a:ext uri="{FF2B5EF4-FFF2-40B4-BE49-F238E27FC236}">
-                <a16:creationId xmlns:a16="http://schemas.microsoft.com/office/drawing/2014/main" id="{45F00233-869F-44AA-8B80-443E2A8F7985}"/>
+                <a16:creationId xmlns:a16="http://schemas.microsoft.com/office/drawing/2014/main" id="{EF3DA108-A2D4-44A9-952E-2B709D1B8C02}"/>
               </a:ext>
             </a:extLst>
           </p:cNvPr>
@@ -20498,7 +20498,7 @@
           <p:cNvPr id="8" name="">
             <a:extLst xmlns:a="http://schemas.openxmlformats.org/drawingml/2006/main">
               <a:ext uri="{FF2B5EF4-FFF2-40B4-BE49-F238E27FC236}">
-                <a16:creationId xmlns:a16="http://schemas.microsoft.com/office/drawing/2014/main" id="{53BC1922-7B49-4400-A84F-46DB83D7861A}"/>
+                <a16:creationId xmlns:a16="http://schemas.microsoft.com/office/drawing/2014/main" id="{A43400C1-6916-4171-9839-091DEFC65B97}"/>
               </a:ext>
             </a:extLst>
           </p:cNvPr>
@@ -20529,7 +20529,7 @@
           <p:cNvPr id="9" name="">
             <a:extLst xmlns:a="http://schemas.openxmlformats.org/drawingml/2006/main">
               <a:ext uri="{FF2B5EF4-FFF2-40B4-BE49-F238E27FC236}">
-                <a16:creationId xmlns:a16="http://schemas.microsoft.com/office/drawing/2014/main" id="{FB225D26-EFF1-4FDF-B5E4-5F44A4A389CD}"/>
+                <a16:creationId xmlns:a16="http://schemas.microsoft.com/office/drawing/2014/main" id="{AB1577D5-75B7-4197-BFE0-D405D4175A4F}"/>
               </a:ext>
             </a:extLst>
           </p:cNvPr>
@@ -20562,7 +20562,7 @@
           <p:cNvPr id="10" name="">
             <a:extLst xmlns:a="http://schemas.openxmlformats.org/drawingml/2006/main">
               <a:ext uri="{FF2B5EF4-FFF2-40B4-BE49-F238E27FC236}">
-                <a16:creationId xmlns:a16="http://schemas.microsoft.com/office/drawing/2014/main" id="{5BDD45BA-3A41-4988-B3FF-1ACC92224E5E}"/>
+                <a16:creationId xmlns:a16="http://schemas.microsoft.com/office/drawing/2014/main" id="{F85E1E13-E643-44CC-ADD5-46445421E21E}"/>
               </a:ext>
             </a:extLst>
           </p:cNvPr>
@@ -20624,7 +20624,7 @@
           <p:cNvPr id="11" name="">
             <a:extLst xmlns:a="http://schemas.openxmlformats.org/drawingml/2006/main">
               <a:ext uri="{FF2B5EF4-FFF2-40B4-BE49-F238E27FC236}">
-                <a16:creationId xmlns:a16="http://schemas.microsoft.com/office/drawing/2014/main" id="{F644CA14-4DF8-4F17-AD9C-05D17EB572A5}"/>
+                <a16:creationId xmlns:a16="http://schemas.microsoft.com/office/drawing/2014/main" id="{F9E3AFA8-905D-49F8-904E-A1EF8827F425}"/>
               </a:ext>
             </a:extLst>
           </p:cNvPr>
@@ -20686,7 +20686,7 @@
           <p:cNvPr id="12" name="">
             <a:extLst xmlns:a="http://schemas.openxmlformats.org/drawingml/2006/main">
               <a:ext uri="{FF2B5EF4-FFF2-40B4-BE49-F238E27FC236}">
-                <a16:creationId xmlns:a16="http://schemas.microsoft.com/office/drawing/2014/main" id="{339D793F-A9FE-4BB1-AA2F-A259C0630604}"/>
+                <a16:creationId xmlns:a16="http://schemas.microsoft.com/office/drawing/2014/main" id="{CE2FFF78-A49C-4D81-BD24-710183F494C7}"/>
               </a:ext>
             </a:extLst>
           </p:cNvPr>
@@ -20748,7 +20748,7 @@
           <p:cNvPr id="13" name="">
             <a:extLst xmlns:a="http://schemas.openxmlformats.org/drawingml/2006/main">
               <a:ext uri="{FF2B5EF4-FFF2-40B4-BE49-F238E27FC236}">
-                <a16:creationId xmlns:a16="http://schemas.microsoft.com/office/drawing/2014/main" id="{16844B3C-CB23-41BB-9D5B-E8AF7F3BFE53}"/>
+                <a16:creationId xmlns:a16="http://schemas.microsoft.com/office/drawing/2014/main" id="{371D58DC-BD56-42CA-8857-5368B3933F68}"/>
               </a:ext>
             </a:extLst>
           </p:cNvPr>
@@ -20810,7 +20810,7 @@
           <p:cNvPr id="14" name="">
             <a:extLst xmlns:a="http://schemas.openxmlformats.org/drawingml/2006/main">
               <a:ext uri="{FF2B5EF4-FFF2-40B4-BE49-F238E27FC236}">
-                <a16:creationId xmlns:a16="http://schemas.microsoft.com/office/drawing/2014/main" id="{C625FA58-C29B-4B92-BD40-B543B159B8E4}"/>
+                <a16:creationId xmlns:a16="http://schemas.microsoft.com/office/drawing/2014/main" id="{ACE8DE67-4734-434E-8381-D9179F52EE3B}"/>
               </a:ext>
             </a:extLst>
           </p:cNvPr>
@@ -20843,7 +20843,7 @@
           <p:cNvPr id="15" name="">
             <a:extLst xmlns:a="http://schemas.openxmlformats.org/drawingml/2006/main">
               <a:ext uri="{FF2B5EF4-FFF2-40B4-BE49-F238E27FC236}">
-                <a16:creationId xmlns:a16="http://schemas.microsoft.com/office/drawing/2014/main" id="{D3B72BDE-3C02-4A31-9E34-6FEF8F5FDC32}"/>
+                <a16:creationId xmlns:a16="http://schemas.microsoft.com/office/drawing/2014/main" id="{0ECFE2F3-2657-4C0C-9D99-BCD5C4C5B31B}"/>
               </a:ext>
             </a:extLst>
           </p:cNvPr>
@@ -20905,7 +20905,7 @@
           <p:cNvPr id="16" name="">
             <a:extLst xmlns:a="http://schemas.openxmlformats.org/drawingml/2006/main">
               <a:ext uri="{FF2B5EF4-FFF2-40B4-BE49-F238E27FC236}">
-                <a16:creationId xmlns:a16="http://schemas.microsoft.com/office/drawing/2014/main" id="{A50176E5-6217-4C32-88FF-405F279BB42B}"/>
+                <a16:creationId xmlns:a16="http://schemas.microsoft.com/office/drawing/2014/main" id="{0230B63F-7FF1-4DFD-8CBF-8A2B7C6931EC}"/>
               </a:ext>
             </a:extLst>
           </p:cNvPr>
@@ -20967,7 +20967,7 @@
           <p:cNvPr id="17" name="">
             <a:extLst xmlns:a="http://schemas.openxmlformats.org/drawingml/2006/main">
               <a:ext uri="{FF2B5EF4-FFF2-40B4-BE49-F238E27FC236}">
-                <a16:creationId xmlns:a16="http://schemas.microsoft.com/office/drawing/2014/main" id="{03B1F940-6D3F-4395-B4D0-D3335F076275}"/>
+                <a16:creationId xmlns:a16="http://schemas.microsoft.com/office/drawing/2014/main" id="{A1C66901-33DA-4FFF-985E-29FAB8F57E65}"/>
               </a:ext>
             </a:extLst>
           </p:cNvPr>
@@ -20998,7 +20998,7 @@
           <p:cNvPr id="18" name="">
             <a:extLst xmlns:a="http://schemas.openxmlformats.org/drawingml/2006/main">
               <a:ext uri="{FF2B5EF4-FFF2-40B4-BE49-F238E27FC236}">
-                <a16:creationId xmlns:a16="http://schemas.microsoft.com/office/drawing/2014/main" id="{1E2F9645-A985-4617-81BA-30A576D2C467}"/>
+                <a16:creationId xmlns:a16="http://schemas.microsoft.com/office/drawing/2014/main" id="{F0057570-2D12-47BB-8C11-DD2FF3DFB952}"/>
               </a:ext>
             </a:extLst>
           </p:cNvPr>
@@ -21060,7 +21060,7 @@
           <p:cNvPr id="19" name="">
             <a:extLst xmlns:a="http://schemas.openxmlformats.org/drawingml/2006/main">
               <a:ext uri="{FF2B5EF4-FFF2-40B4-BE49-F238E27FC236}">
-                <a16:creationId xmlns:a16="http://schemas.microsoft.com/office/drawing/2014/main" id="{40CA4F05-B618-468F-A19A-A97BA55704DC}"/>
+                <a16:creationId xmlns:a16="http://schemas.microsoft.com/office/drawing/2014/main" id="{B0E61F0D-214B-4835-9955-508E0D3881FD}"/>
               </a:ext>
             </a:extLst>
           </p:cNvPr>
@@ -21120,7 +21120,7 @@
     </p:spTree>
     <p:extLst>
       <p:ext uri="{BB962C8B-B14F-4D97-AF65-F5344CB8AC3E}">
-        <p14:creationId xmlns:p14="http://schemas.microsoft.com/office/powerpoint/2010/main" val="1885759565"/>
+        <p14:creationId xmlns:p14="http://schemas.microsoft.com/office/powerpoint/2010/main" val="1556269168"/>
       </p:ext>
     </p:extLst>
   </p:cSld>
@@ -21151,7 +21151,7 @@
           <p:cNvPr id="18" name="">
             <a:extLst xmlns:a="http://schemas.openxmlformats.org/drawingml/2006/main">
               <a:ext uri="{FF2B5EF4-FFF2-40B4-BE49-F238E27FC236}">
-                <a16:creationId xmlns:a16="http://schemas.microsoft.com/office/drawing/2014/main" id="{42999BFA-EA12-49CD-807A-FE07AFF3065E}"/>
+                <a16:creationId xmlns:a16="http://schemas.microsoft.com/office/drawing/2014/main" id="{5B00D5C9-3CD2-4D64-8FC2-D85FCC8B9739}"/>
               </a:ext>
             </a:extLst>
           </p:cNvPr>
@@ -21213,7 +21213,7 @@
                 <a:latin typeface="Arial"/>
                 <a:ea typeface="Arial"/>
                 <a:cs typeface="Arial"/>
-                <a:hlinkClick xmlns:r="http://schemas.openxmlformats.org/officeDocument/2006/relationships" r:id="Rac8c3608ea6c4aef"/>
+                <a:hlinkClick xmlns:r="http://schemas.openxmlformats.org/officeDocument/2006/relationships" r:id="Ra553680ed2754317"/>
               </a:rPr>
               <a:t>https://github.com/qjmre23/Route2Zero</a:t>
             </a:r>
@@ -21236,7 +21236,7 @@
                 <a:latin typeface="Arial"/>
                 <a:ea typeface="Arial"/>
                 <a:cs typeface="Arial"/>
-                <a:hlinkClick xmlns:r="http://schemas.openxmlformats.org/officeDocument/2006/relationships" r:id="R0f44adfc91244047"/>
+                <a:hlinkClick xmlns:r="http://schemas.openxmlformats.org/officeDocument/2006/relationships" r:id="Rf2a270c8d372422c"/>
               </a:rPr>
               <a:t>https://route2zero.netlify.app/</a:t>
             </a:r>
@@ -21248,7 +21248,7 @@
           <p:cNvPr id="2" name="">
             <a:extLst xmlns:a="http://schemas.openxmlformats.org/drawingml/2006/main">
               <a:ext uri="{FF2B5EF4-FFF2-40B4-BE49-F238E27FC236}">
-                <a16:creationId xmlns:a16="http://schemas.microsoft.com/office/drawing/2014/main" id="{5D00F789-6955-4447-9101-7979A69F840B}"/>
+                <a16:creationId xmlns:a16="http://schemas.microsoft.com/office/drawing/2014/main" id="{4B1866C3-EEDD-4B64-9EDE-D58B8FB259DF}"/>
               </a:ext>
             </a:extLst>
           </p:cNvPr>
@@ -21310,7 +21310,7 @@
           <p:cNvPr id="3" name="">
             <a:extLst xmlns:a="http://schemas.openxmlformats.org/drawingml/2006/main">
               <a:ext uri="{FF2B5EF4-FFF2-40B4-BE49-F238E27FC236}">
-                <a16:creationId xmlns:a16="http://schemas.microsoft.com/office/drawing/2014/main" id="{C2127918-767E-414C-A589-A97259089718}"/>
+                <a16:creationId xmlns:a16="http://schemas.microsoft.com/office/drawing/2014/main" id="{34803BA5-118A-4FC8-9A07-B02D697D4877}"/>
               </a:ext>
             </a:extLst>
           </p:cNvPr>
@@ -21372,7 +21372,7 @@
           <p:cNvPr id="4" name="">
             <a:extLst xmlns:a="http://schemas.openxmlformats.org/drawingml/2006/main">
               <a:ext uri="{FF2B5EF4-FFF2-40B4-BE49-F238E27FC236}">
-                <a16:creationId xmlns:a16="http://schemas.microsoft.com/office/drawing/2014/main" id="{9FBABF82-DB63-4475-AD9B-BE2C1C6DD500}"/>
+                <a16:creationId xmlns:a16="http://schemas.microsoft.com/office/drawing/2014/main" id="{B5DD14BC-D7BC-40DC-973E-82FD9A1509D3}"/>
               </a:ext>
             </a:extLst>
           </p:cNvPr>
@@ -21434,7 +21434,7 @@
           <p:cNvPr id="5" name="">
             <a:extLst xmlns:a="http://schemas.openxmlformats.org/drawingml/2006/main">
               <a:ext uri="{FF2B5EF4-FFF2-40B4-BE49-F238E27FC236}">
-                <a16:creationId xmlns:a16="http://schemas.microsoft.com/office/drawing/2014/main" id="{B194C069-163B-4DF7-9805-3A9198A0725A}"/>
+                <a16:creationId xmlns:a16="http://schemas.microsoft.com/office/drawing/2014/main" id="{E12DA86F-4A8F-4805-90F0-D349A588346B}"/>
               </a:ext>
             </a:extLst>
           </p:cNvPr>
@@ -21496,7 +21496,7 @@
           <p:cNvPr id="6" name="">
             <a:extLst xmlns:a="http://schemas.openxmlformats.org/drawingml/2006/main">
               <a:ext uri="{FF2B5EF4-FFF2-40B4-BE49-F238E27FC236}">
-                <a16:creationId xmlns:a16="http://schemas.microsoft.com/office/drawing/2014/main" id="{9CCB763A-C76E-4D37-BB20-54BC8089C30D}"/>
+                <a16:creationId xmlns:a16="http://schemas.microsoft.com/office/drawing/2014/main" id="{3706098D-F2BB-4212-9E13-FA729210BDE1}"/>
               </a:ext>
             </a:extLst>
           </p:cNvPr>
@@ -21558,7 +21558,7 @@
           <p:cNvPr id="7" name="">
             <a:extLst xmlns:a="http://schemas.openxmlformats.org/drawingml/2006/main">
               <a:ext uri="{FF2B5EF4-FFF2-40B4-BE49-F238E27FC236}">
-                <a16:creationId xmlns:a16="http://schemas.microsoft.com/office/drawing/2014/main" id="{6E924611-671D-4CBB-AF4B-1292ED805F7D}"/>
+                <a16:creationId xmlns:a16="http://schemas.microsoft.com/office/drawing/2014/main" id="{FE5C4210-6C7F-4ECC-A7E7-9BAD2C303238}"/>
               </a:ext>
             </a:extLst>
           </p:cNvPr>
@@ -21683,7 +21683,7 @@
           <p:cNvPr id="8" name="">
             <a:extLst xmlns:a="http://schemas.openxmlformats.org/drawingml/2006/main">
               <a:ext uri="{FF2B5EF4-FFF2-40B4-BE49-F238E27FC236}">
-                <a16:creationId xmlns:a16="http://schemas.microsoft.com/office/drawing/2014/main" id="{39DF6533-24D3-49F9-A1EA-E1E5DF2C4181}"/>
+                <a16:creationId xmlns:a16="http://schemas.microsoft.com/office/drawing/2014/main" id="{AD69B28D-028D-4FFF-8C69-FF186FA6570B}"/>
               </a:ext>
             </a:extLst>
           </p:cNvPr>
@@ -21808,7 +21808,7 @@
           <p:cNvPr id="9" name="">
             <a:extLst xmlns:a="http://schemas.openxmlformats.org/drawingml/2006/main">
               <a:ext uri="{FF2B5EF4-FFF2-40B4-BE49-F238E27FC236}">
-                <a16:creationId xmlns:a16="http://schemas.microsoft.com/office/drawing/2014/main" id="{8ED07054-4D26-4FAF-8FB0-729F11366B3E}"/>
+                <a16:creationId xmlns:a16="http://schemas.microsoft.com/office/drawing/2014/main" id="{9884A6D2-F3DE-4BB2-A172-E2E3917270CF}"/>
               </a:ext>
             </a:extLst>
           </p:cNvPr>
@@ -21933,7 +21933,7 @@
           <p:cNvPr id="10" name="">
             <a:extLst xmlns:a="http://schemas.openxmlformats.org/drawingml/2006/main">
               <a:ext uri="{FF2B5EF4-FFF2-40B4-BE49-F238E27FC236}">
-                <a16:creationId xmlns:a16="http://schemas.microsoft.com/office/drawing/2014/main" id="{C0807DE1-E6D7-4B78-A6D8-01557300397A}"/>
+                <a16:creationId xmlns:a16="http://schemas.microsoft.com/office/drawing/2014/main" id="{C530BF84-D4E9-4137-9370-A46920D62AED}"/>
               </a:ext>
             </a:extLst>
           </p:cNvPr>
@@ -21964,7 +21964,7 @@
           <p:cNvPr id="11" name="">
             <a:extLst xmlns:a="http://schemas.openxmlformats.org/drawingml/2006/main">
               <a:ext uri="{FF2B5EF4-FFF2-40B4-BE49-F238E27FC236}">
-                <a16:creationId xmlns:a16="http://schemas.microsoft.com/office/drawing/2014/main" id="{78BAFA4A-18C7-462E-AA46-8CE447013280}"/>
+                <a16:creationId xmlns:a16="http://schemas.microsoft.com/office/drawing/2014/main" id="{AB4FCEC5-363D-494C-B616-A68664F6D20C}"/>
               </a:ext>
             </a:extLst>
           </p:cNvPr>
@@ -22026,7 +22026,7 @@
           <p:cNvPr id="12" name="">
             <a:extLst xmlns:a="http://schemas.openxmlformats.org/drawingml/2006/main">
               <a:ext uri="{FF2B5EF4-FFF2-40B4-BE49-F238E27FC236}">
-                <a16:creationId xmlns:a16="http://schemas.microsoft.com/office/drawing/2014/main" id="{DCF52A72-F6A3-426F-85B0-98798E57DF20}"/>
+                <a16:creationId xmlns:a16="http://schemas.microsoft.com/office/drawing/2014/main" id="{2E394A36-8E8B-422E-8F5C-FCA43D02C734}"/>
               </a:ext>
             </a:extLst>
           </p:cNvPr>
@@ -22088,7 +22088,7 @@
           <p:cNvPr id="13" name="">
             <a:extLst xmlns:a="http://schemas.openxmlformats.org/drawingml/2006/main">
               <a:ext uri="{FF2B5EF4-FFF2-40B4-BE49-F238E27FC236}">
-                <a16:creationId xmlns:a16="http://schemas.microsoft.com/office/drawing/2014/main" id="{0B412D00-9DAE-431D-9EDD-5EF8B154A218}"/>
+                <a16:creationId xmlns:a16="http://schemas.microsoft.com/office/drawing/2014/main" id="{76FEB4DC-3C3C-49A1-A647-1B845A67D72A}"/>
               </a:ext>
             </a:extLst>
           </p:cNvPr>
@@ -22150,7 +22150,7 @@
           <p:cNvPr id="14" name="">
             <a:extLst xmlns:a="http://schemas.openxmlformats.org/drawingml/2006/main">
               <a:ext uri="{FF2B5EF4-FFF2-40B4-BE49-F238E27FC236}">
-                <a16:creationId xmlns:a16="http://schemas.microsoft.com/office/drawing/2014/main" id="{9330B815-9CB9-4327-BF96-ABE2FA6A7C20}"/>
+                <a16:creationId xmlns:a16="http://schemas.microsoft.com/office/drawing/2014/main" id="{D87112E7-97A6-4399-9EBF-06C8834BED1F}"/>
               </a:ext>
             </a:extLst>
           </p:cNvPr>
@@ -22212,7 +22212,7 @@
           <p:cNvPr id="15" name="">
             <a:extLst xmlns:a="http://schemas.openxmlformats.org/drawingml/2006/main">
               <a:ext uri="{FF2B5EF4-FFF2-40B4-BE49-F238E27FC236}">
-                <a16:creationId xmlns:a16="http://schemas.microsoft.com/office/drawing/2014/main" id="{B666A779-627F-4398-AEFB-669506508161}"/>
+                <a16:creationId xmlns:a16="http://schemas.microsoft.com/office/drawing/2014/main" id="{5A74912C-6962-4D5B-A4B4-CE3DB35778FC}"/>
               </a:ext>
             </a:extLst>
           </p:cNvPr>
@@ -22243,7 +22243,7 @@
           <p:cNvPr id="16" name="">
             <a:extLst xmlns:a="http://schemas.openxmlformats.org/drawingml/2006/main">
               <a:ext uri="{FF2B5EF4-FFF2-40B4-BE49-F238E27FC236}">
-                <a16:creationId xmlns:a16="http://schemas.microsoft.com/office/drawing/2014/main" id="{B2D03E5A-56E7-4430-BDAD-D865E9951A69}"/>
+                <a16:creationId xmlns:a16="http://schemas.microsoft.com/office/drawing/2014/main" id="{B54158C7-9A0E-4513-A8B2-8C63586B9C07}"/>
               </a:ext>
             </a:extLst>
           </p:cNvPr>
@@ -22305,7 +22305,7 @@
           <p:cNvPr id="17" name="">
             <a:extLst xmlns:a="http://schemas.openxmlformats.org/drawingml/2006/main">
               <a:ext uri="{FF2B5EF4-FFF2-40B4-BE49-F238E27FC236}">
-                <a16:creationId xmlns:a16="http://schemas.microsoft.com/office/drawing/2014/main" id="{F47EDD08-7B9C-49E9-ACAE-32B36E2B07AF}"/>
+                <a16:creationId xmlns:a16="http://schemas.microsoft.com/office/drawing/2014/main" id="{0BB68753-91E4-4B8A-AF63-15F333EA66C9}"/>
               </a:ext>
             </a:extLst>
           </p:cNvPr>
@@ -22365,7 +22365,7 @@
     </p:spTree>
     <p:extLst>
       <p:ext uri="{BB962C8B-B14F-4D97-AF65-F5344CB8AC3E}">
-        <p14:creationId xmlns:p14="http://schemas.microsoft.com/office/powerpoint/2010/main" val="1207218785"/>
+        <p14:creationId xmlns:p14="http://schemas.microsoft.com/office/powerpoint/2010/main" val="609964288"/>
       </p:ext>
     </p:extLst>
   </p:cSld>
@@ -22396,7 +22396,7 @@
           <p:cNvPr id="29" name="">
             <a:extLst xmlns:a="http://schemas.openxmlformats.org/drawingml/2006/main">
               <a:ext uri="{FF2B5EF4-FFF2-40B4-BE49-F238E27FC236}">
-                <a16:creationId xmlns:a16="http://schemas.microsoft.com/office/drawing/2014/main" id="{24A3B4B5-FABC-4B35-A35A-1C2DBC4584B9}"/>
+                <a16:creationId xmlns:a16="http://schemas.microsoft.com/office/drawing/2014/main" id="{8CB761FB-B721-448C-BC1B-E69C0BBCA684}"/>
               </a:ext>
             </a:extLst>
           </p:cNvPr>
@@ -22458,7 +22458,7 @@
                 <a:latin typeface="Arial"/>
                 <a:ea typeface="Arial"/>
                 <a:cs typeface="Arial"/>
-                <a:hlinkClick xmlns:r="http://schemas.openxmlformats.org/officeDocument/2006/relationships" r:id="R9bd14b289ba746bd"/>
+                <a:hlinkClick xmlns:r="http://schemas.openxmlformats.org/officeDocument/2006/relationships" r:id="Rf6d7bdfabe8f424d"/>
               </a:rPr>
               <a:t>https://github.com/qjmre23/Route2Zero</a:t>
             </a:r>
@@ -22481,7 +22481,7 @@
                 <a:latin typeface="Arial"/>
                 <a:ea typeface="Arial"/>
                 <a:cs typeface="Arial"/>
-                <a:hlinkClick xmlns:r="http://schemas.openxmlformats.org/officeDocument/2006/relationships" r:id="R438e4cc55e67483d"/>
+                <a:hlinkClick xmlns:r="http://schemas.openxmlformats.org/officeDocument/2006/relationships" r:id="R582d07dfacc3485f"/>
               </a:rPr>
               <a:t>https://route2zero.netlify.app/</a:t>
             </a:r>
@@ -22493,7 +22493,7 @@
           <p:cNvPr id="2" name="">
             <a:extLst xmlns:a="http://schemas.openxmlformats.org/drawingml/2006/main">
               <a:ext uri="{FF2B5EF4-FFF2-40B4-BE49-F238E27FC236}">
-                <a16:creationId xmlns:a16="http://schemas.microsoft.com/office/drawing/2014/main" id="{D507524F-7350-4187-B774-251CDBF4CFA6}"/>
+                <a16:creationId xmlns:a16="http://schemas.microsoft.com/office/drawing/2014/main" id="{D72C7794-2ED4-4D4B-8DEC-A1E80B3E8C58}"/>
               </a:ext>
             </a:extLst>
           </p:cNvPr>
@@ -22555,7 +22555,7 @@
           <p:cNvPr id="3" name="">
             <a:extLst xmlns:a="http://schemas.openxmlformats.org/drawingml/2006/main">
               <a:ext uri="{FF2B5EF4-FFF2-40B4-BE49-F238E27FC236}">
-                <a16:creationId xmlns:a16="http://schemas.microsoft.com/office/drawing/2014/main" id="{440F0C86-EEC8-4539-9864-226BFEF6AB5E}"/>
+                <a16:creationId xmlns:a16="http://schemas.microsoft.com/office/drawing/2014/main" id="{F27F6270-59E5-4C50-9C70-3EB433D77333}"/>
               </a:ext>
             </a:extLst>
           </p:cNvPr>
@@ -22617,7 +22617,7 @@
           <p:cNvPr id="4" name="">
             <a:extLst xmlns:a="http://schemas.openxmlformats.org/drawingml/2006/main">
               <a:ext uri="{FF2B5EF4-FFF2-40B4-BE49-F238E27FC236}">
-                <a16:creationId xmlns:a16="http://schemas.microsoft.com/office/drawing/2014/main" id="{9B8CE0E0-6ED2-4C04-AF49-0B78785343FB}"/>
+                <a16:creationId xmlns:a16="http://schemas.microsoft.com/office/drawing/2014/main" id="{E63D12D6-CA9F-4EA8-AF07-FB8769624359}"/>
               </a:ext>
             </a:extLst>
           </p:cNvPr>
@@ -22679,7 +22679,7 @@
           <p:cNvPr id="5" name="">
             <a:extLst xmlns:a="http://schemas.openxmlformats.org/drawingml/2006/main">
               <a:ext uri="{FF2B5EF4-FFF2-40B4-BE49-F238E27FC236}">
-                <a16:creationId xmlns:a16="http://schemas.microsoft.com/office/drawing/2014/main" id="{1AEDEA3B-78F5-42FB-A216-BC88F782FA5F}"/>
+                <a16:creationId xmlns:a16="http://schemas.microsoft.com/office/drawing/2014/main" id="{3BD4EB4A-E2F6-4082-B40E-2D9D8E9DE7B4}"/>
               </a:ext>
             </a:extLst>
           </p:cNvPr>
@@ -22741,7 +22741,7 @@
           <p:cNvPr id="6" name="">
             <a:extLst xmlns:a="http://schemas.openxmlformats.org/drawingml/2006/main">
               <a:ext uri="{FF2B5EF4-FFF2-40B4-BE49-F238E27FC236}">
-                <a16:creationId xmlns:a16="http://schemas.microsoft.com/office/drawing/2014/main" id="{FA8CD061-723C-440C-B505-B627F98DDE3F}"/>
+                <a16:creationId xmlns:a16="http://schemas.microsoft.com/office/drawing/2014/main" id="{1BFDB3A0-B8E1-4741-82FE-79C6C5CAD17D}"/>
               </a:ext>
             </a:extLst>
           </p:cNvPr>
@@ -22772,7 +22772,7 @@
           <p:cNvPr id="7" name="">
             <a:extLst xmlns:a="http://schemas.openxmlformats.org/drawingml/2006/main">
               <a:ext uri="{FF2B5EF4-FFF2-40B4-BE49-F238E27FC236}">
-                <a16:creationId xmlns:a16="http://schemas.microsoft.com/office/drawing/2014/main" id="{62010C63-FD71-432C-AF62-1FCD7C6C06CE}"/>
+                <a16:creationId xmlns:a16="http://schemas.microsoft.com/office/drawing/2014/main" id="{3C3E1B23-0C38-4187-987D-3A435C777466}"/>
               </a:ext>
             </a:extLst>
           </p:cNvPr>
@@ -22834,7 +22834,7 @@
           <p:cNvPr id="8" name="">
             <a:extLst xmlns:a="http://schemas.openxmlformats.org/drawingml/2006/main">
               <a:ext uri="{FF2B5EF4-FFF2-40B4-BE49-F238E27FC236}">
-                <a16:creationId xmlns:a16="http://schemas.microsoft.com/office/drawing/2014/main" id="{74A70659-C9A5-4F22-96BC-0738FD72F2B3}"/>
+                <a16:creationId xmlns:a16="http://schemas.microsoft.com/office/drawing/2014/main" id="{DED61F7B-2E8C-474A-A49A-8F7DCF1C08B9}"/>
               </a:ext>
             </a:extLst>
           </p:cNvPr>
@@ -22896,7 +22896,7 @@
           <p:cNvPr id="9" name="">
             <a:extLst xmlns:a="http://schemas.openxmlformats.org/drawingml/2006/main">
               <a:ext uri="{FF2B5EF4-FFF2-40B4-BE49-F238E27FC236}">
-                <a16:creationId xmlns:a16="http://schemas.microsoft.com/office/drawing/2014/main" id="{8D89A6DD-2D7D-4F9D-BF63-054396443856}"/>
+                <a16:creationId xmlns:a16="http://schemas.microsoft.com/office/drawing/2014/main" id="{10A5775B-E083-45A4-9F6D-B94D1AE7C321}"/>
               </a:ext>
             </a:extLst>
           </p:cNvPr>
@@ -22927,7 +22927,7 @@
           <p:cNvPr id="10" name="">
             <a:extLst xmlns:a="http://schemas.openxmlformats.org/drawingml/2006/main">
               <a:ext uri="{FF2B5EF4-FFF2-40B4-BE49-F238E27FC236}">
-                <a16:creationId xmlns:a16="http://schemas.microsoft.com/office/drawing/2014/main" id="{894CF8B0-BDA4-4B22-B6F6-1587E1754D64}"/>
+                <a16:creationId xmlns:a16="http://schemas.microsoft.com/office/drawing/2014/main" id="{597889E3-358A-4363-9EC1-55A59B1FADE9}"/>
               </a:ext>
             </a:extLst>
           </p:cNvPr>
@@ -22989,7 +22989,7 @@
           <p:cNvPr id="11" name="">
             <a:extLst xmlns:a="http://schemas.openxmlformats.org/drawingml/2006/main">
               <a:ext uri="{FF2B5EF4-FFF2-40B4-BE49-F238E27FC236}">
-                <a16:creationId xmlns:a16="http://schemas.microsoft.com/office/drawing/2014/main" id="{5AF88900-1C4F-4AC1-BE45-61B90FF45755}"/>
+                <a16:creationId xmlns:a16="http://schemas.microsoft.com/office/drawing/2014/main" id="{02E14EF8-0253-4BD3-8F4C-CECF1E1CC25F}"/>
               </a:ext>
             </a:extLst>
           </p:cNvPr>
@@ -23051,7 +23051,7 @@
           <p:cNvPr id="12" name="">
             <a:extLst xmlns:a="http://schemas.openxmlformats.org/drawingml/2006/main">
               <a:ext uri="{FF2B5EF4-FFF2-40B4-BE49-F238E27FC236}">
-                <a16:creationId xmlns:a16="http://schemas.microsoft.com/office/drawing/2014/main" id="{71E8795A-4083-4DAE-9F73-8A4C182F56FE}"/>
+                <a16:creationId xmlns:a16="http://schemas.microsoft.com/office/drawing/2014/main" id="{2B3955E8-4186-44C6-B0E7-55D7FA6DB91E}"/>
               </a:ext>
             </a:extLst>
           </p:cNvPr>
@@ -23082,7 +23082,7 @@
           <p:cNvPr id="13" name="">
             <a:extLst xmlns:a="http://schemas.openxmlformats.org/drawingml/2006/main">
               <a:ext uri="{FF2B5EF4-FFF2-40B4-BE49-F238E27FC236}">
-                <a16:creationId xmlns:a16="http://schemas.microsoft.com/office/drawing/2014/main" id="{56C1EAB2-5C7F-44BC-BD6D-0BE3941340D5}"/>
+                <a16:creationId xmlns:a16="http://schemas.microsoft.com/office/drawing/2014/main" id="{D9E6953E-F0CB-4564-998E-5E74327E4B5F}"/>
               </a:ext>
             </a:extLst>
           </p:cNvPr>
@@ -23144,7 +23144,7 @@
           <p:cNvPr id="14" name="">
             <a:extLst xmlns:a="http://schemas.openxmlformats.org/drawingml/2006/main">
               <a:ext uri="{FF2B5EF4-FFF2-40B4-BE49-F238E27FC236}">
-                <a16:creationId xmlns:a16="http://schemas.microsoft.com/office/drawing/2014/main" id="{D08B747F-C8EF-467A-989C-DB377FDAF022}"/>
+                <a16:creationId xmlns:a16="http://schemas.microsoft.com/office/drawing/2014/main" id="{A749B06C-163C-4478-B166-1D5A8ED955B9}"/>
               </a:ext>
             </a:extLst>
           </p:cNvPr>
@@ -23206,7 +23206,7 @@
           <p:cNvPr id="15" name="">
             <a:extLst xmlns:a="http://schemas.openxmlformats.org/drawingml/2006/main">
               <a:ext uri="{FF2B5EF4-FFF2-40B4-BE49-F238E27FC236}">
-                <a16:creationId xmlns:a16="http://schemas.microsoft.com/office/drawing/2014/main" id="{FA800B4C-641A-4D34-ABC4-571C1867998D}"/>
+                <a16:creationId xmlns:a16="http://schemas.microsoft.com/office/drawing/2014/main" id="{D03B1B54-FBA0-4F9E-A72A-B2054E46B6CA}"/>
               </a:ext>
             </a:extLst>
           </p:cNvPr>
@@ -23237,7 +23237,7 @@
           <p:cNvPr id="16" name="">
             <a:extLst xmlns:a="http://schemas.openxmlformats.org/drawingml/2006/main">
               <a:ext uri="{FF2B5EF4-FFF2-40B4-BE49-F238E27FC236}">
-                <a16:creationId xmlns:a16="http://schemas.microsoft.com/office/drawing/2014/main" id="{E67D256F-632F-45E9-ACDA-2563A204A420}"/>
+                <a16:creationId xmlns:a16="http://schemas.microsoft.com/office/drawing/2014/main" id="{F654A605-B7EC-4D63-8DA7-D5C3B83BB523}"/>
               </a:ext>
             </a:extLst>
           </p:cNvPr>
@@ -23299,7 +23299,7 @@
           <p:cNvPr id="17" name="">
             <a:extLst xmlns:a="http://schemas.openxmlformats.org/drawingml/2006/main">
               <a:ext uri="{FF2B5EF4-FFF2-40B4-BE49-F238E27FC236}">
-                <a16:creationId xmlns:a16="http://schemas.microsoft.com/office/drawing/2014/main" id="{B9EEA113-FD9C-4BDA-A072-1DDD18544430}"/>
+                <a16:creationId xmlns:a16="http://schemas.microsoft.com/office/drawing/2014/main" id="{C3099F0E-BA79-45F2-AAAC-340428FE7D01}"/>
               </a:ext>
             </a:extLst>
           </p:cNvPr>
@@ -23361,7 +23361,7 @@
           <p:cNvPr id="18" name="">
             <a:extLst xmlns:a="http://schemas.openxmlformats.org/drawingml/2006/main">
               <a:ext uri="{FF2B5EF4-FFF2-40B4-BE49-F238E27FC236}">
-                <a16:creationId xmlns:a16="http://schemas.microsoft.com/office/drawing/2014/main" id="{420367F8-2965-4BE4-AF5C-50634F3CEFF1}"/>
+                <a16:creationId xmlns:a16="http://schemas.microsoft.com/office/drawing/2014/main" id="{A679C875-E2B6-4032-A6D7-0F9E5A21CFEA}"/>
               </a:ext>
             </a:extLst>
           </p:cNvPr>
@@ -23392,7 +23392,7 @@
           <p:cNvPr id="19" name="">
             <a:extLst xmlns:a="http://schemas.openxmlformats.org/drawingml/2006/main">
               <a:ext uri="{FF2B5EF4-FFF2-40B4-BE49-F238E27FC236}">
-                <a16:creationId xmlns:a16="http://schemas.microsoft.com/office/drawing/2014/main" id="{87C0F425-B47E-4D44-99AE-DFA9CC1CA72B}"/>
+                <a16:creationId xmlns:a16="http://schemas.microsoft.com/office/drawing/2014/main" id="{3DEA6E10-5B34-42CE-859A-A710F450B153}"/>
               </a:ext>
             </a:extLst>
           </p:cNvPr>
@@ -23454,7 +23454,7 @@
           <p:cNvPr id="20" name="">
             <a:extLst xmlns:a="http://schemas.openxmlformats.org/drawingml/2006/main">
               <a:ext uri="{FF2B5EF4-FFF2-40B4-BE49-F238E27FC236}">
-                <a16:creationId xmlns:a16="http://schemas.microsoft.com/office/drawing/2014/main" id="{CD3B1FDC-04E1-43E3-B920-75AEB2793EC1}"/>
+                <a16:creationId xmlns:a16="http://schemas.microsoft.com/office/drawing/2014/main" id="{D9FBE1FE-59BA-416F-9B65-F4C2328DB110}"/>
               </a:ext>
             </a:extLst>
           </p:cNvPr>
@@ -23516,7 +23516,7 @@
           <p:cNvPr id="21" name="">
             <a:extLst xmlns:a="http://schemas.openxmlformats.org/drawingml/2006/main">
               <a:ext uri="{FF2B5EF4-FFF2-40B4-BE49-F238E27FC236}">
-                <a16:creationId xmlns:a16="http://schemas.microsoft.com/office/drawing/2014/main" id="{9C018E0D-2EF5-4D47-AFCB-1687349CB21F}"/>
+                <a16:creationId xmlns:a16="http://schemas.microsoft.com/office/drawing/2014/main" id="{20D836B6-5186-4C38-AC48-1B52082AEE56}"/>
               </a:ext>
             </a:extLst>
           </p:cNvPr>
@@ -23547,7 +23547,7 @@
           <p:cNvPr id="22" name="">
             <a:extLst xmlns:a="http://schemas.openxmlformats.org/drawingml/2006/main">
               <a:ext uri="{FF2B5EF4-FFF2-40B4-BE49-F238E27FC236}">
-                <a16:creationId xmlns:a16="http://schemas.microsoft.com/office/drawing/2014/main" id="{3CF2B1C4-8573-49AA-BACD-AC5970C6BDF3}"/>
+                <a16:creationId xmlns:a16="http://schemas.microsoft.com/office/drawing/2014/main" id="{D9DB6D05-C69E-46D3-A04D-90C9D4C31FC0}"/>
               </a:ext>
             </a:extLst>
           </p:cNvPr>
@@ -23580,7 +23580,7 @@
           <p:cNvPr id="23" name="">
             <a:extLst xmlns:a="http://schemas.openxmlformats.org/drawingml/2006/main">
               <a:ext uri="{FF2B5EF4-FFF2-40B4-BE49-F238E27FC236}">
-                <a16:creationId xmlns:a16="http://schemas.microsoft.com/office/drawing/2014/main" id="{EA381C7E-874D-4E44-8D87-97AEEF6211D0}"/>
+                <a16:creationId xmlns:a16="http://schemas.microsoft.com/office/drawing/2014/main" id="{D8E52A2B-FE04-4A08-B93B-080C9AF2F721}"/>
               </a:ext>
             </a:extLst>
           </p:cNvPr>
@@ -23642,7 +23642,7 @@
           <p:cNvPr id="24" name="">
             <a:extLst xmlns:a="http://schemas.openxmlformats.org/drawingml/2006/main">
               <a:ext uri="{FF2B5EF4-FFF2-40B4-BE49-F238E27FC236}">
-                <a16:creationId xmlns:a16="http://schemas.microsoft.com/office/drawing/2014/main" id="{CB9F2F04-E3A3-4359-849F-638A63896B52}"/>
+                <a16:creationId xmlns:a16="http://schemas.microsoft.com/office/drawing/2014/main" id="{B2ABCB6F-E445-465D-8D1E-009E30791F42}"/>
               </a:ext>
             </a:extLst>
           </p:cNvPr>
@@ -23767,7 +23767,7 @@
           <p:cNvPr id="25" name="">
             <a:extLst xmlns:a="http://schemas.openxmlformats.org/drawingml/2006/main">
               <a:ext uri="{FF2B5EF4-FFF2-40B4-BE49-F238E27FC236}">
-                <a16:creationId xmlns:a16="http://schemas.microsoft.com/office/drawing/2014/main" id="{23B21DFC-4234-40A4-A182-CA696B2F3CE8}"/>
+                <a16:creationId xmlns:a16="http://schemas.microsoft.com/office/drawing/2014/main" id="{B6ED1E94-E32B-42C0-A691-7F785071E392}"/>
               </a:ext>
             </a:extLst>
           </p:cNvPr>
@@ -23829,7 +23829,7 @@
           <p:cNvPr id="26" name="">
             <a:extLst xmlns:a="http://schemas.openxmlformats.org/drawingml/2006/main">
               <a:ext uri="{FF2B5EF4-FFF2-40B4-BE49-F238E27FC236}">
-                <a16:creationId xmlns:a16="http://schemas.microsoft.com/office/drawing/2014/main" id="{DC20CBAF-FE04-45B5-B73E-B076867C125D}"/>
+                <a16:creationId xmlns:a16="http://schemas.microsoft.com/office/drawing/2014/main" id="{E8D55F16-CF49-44B2-9A74-457BE77C6BC2}"/>
               </a:ext>
             </a:extLst>
           </p:cNvPr>
@@ -23860,7 +23860,7 @@
           <p:cNvPr id="27" name="">
             <a:extLst xmlns:a="http://schemas.openxmlformats.org/drawingml/2006/main">
               <a:ext uri="{FF2B5EF4-FFF2-40B4-BE49-F238E27FC236}">
-                <a16:creationId xmlns:a16="http://schemas.microsoft.com/office/drawing/2014/main" id="{61ACF8ED-5AD5-4FA3-9525-BE5D3BF1316F}"/>
+                <a16:creationId xmlns:a16="http://schemas.microsoft.com/office/drawing/2014/main" id="{3648BA77-E2B2-4253-A865-53CB693AA485}"/>
               </a:ext>
             </a:extLst>
           </p:cNvPr>
@@ -23922,7 +23922,7 @@
           <p:cNvPr id="28" name="">
             <a:extLst xmlns:a="http://schemas.openxmlformats.org/drawingml/2006/main">
               <a:ext uri="{FF2B5EF4-FFF2-40B4-BE49-F238E27FC236}">
-                <a16:creationId xmlns:a16="http://schemas.microsoft.com/office/drawing/2014/main" id="{8601C1D9-286D-40F5-9A66-4E7517E475DC}"/>
+                <a16:creationId xmlns:a16="http://schemas.microsoft.com/office/drawing/2014/main" id="{DE02F114-4F2D-4949-91E6-7DBEE6428C6A}"/>
               </a:ext>
             </a:extLst>
           </p:cNvPr>
@@ -23982,7 +23982,7 @@
     </p:spTree>
     <p:extLst>
       <p:ext uri="{BB962C8B-B14F-4D97-AF65-F5344CB8AC3E}">
-        <p14:creationId xmlns:p14="http://schemas.microsoft.com/office/powerpoint/2010/main" val="411913040"/>
+        <p14:creationId xmlns:p14="http://schemas.microsoft.com/office/powerpoint/2010/main" val="44300060"/>
       </p:ext>
     </p:extLst>
   </p:cSld>
@@ -24013,7 +24013,7 @@
           <p:cNvPr id="17" name="">
             <a:extLst xmlns:a="http://schemas.openxmlformats.org/drawingml/2006/main">
               <a:ext uri="{FF2B5EF4-FFF2-40B4-BE49-F238E27FC236}">
-                <a16:creationId xmlns:a16="http://schemas.microsoft.com/office/drawing/2014/main" id="{1A11770A-C0BA-4FF6-9B83-EB3660687985}"/>
+                <a16:creationId xmlns:a16="http://schemas.microsoft.com/office/drawing/2014/main" id="{E20811FF-504C-4BD0-AD69-D9E978D4F57B}"/>
               </a:ext>
             </a:extLst>
           </p:cNvPr>
@@ -24075,7 +24075,7 @@
                 <a:latin typeface="Arial"/>
                 <a:ea typeface="Arial"/>
                 <a:cs typeface="Arial"/>
-                <a:hlinkClick xmlns:r="http://schemas.openxmlformats.org/officeDocument/2006/relationships" r:id="R5d4dcab6b09a4f6a"/>
+                <a:hlinkClick xmlns:r="http://schemas.openxmlformats.org/officeDocument/2006/relationships" r:id="Rda1033c71c204209"/>
               </a:rPr>
               <a:t>https://github.com/qjmre23/Route2Zero</a:t>
             </a:r>
@@ -24098,7 +24098,7 @@
                 <a:latin typeface="Arial"/>
                 <a:ea typeface="Arial"/>
                 <a:cs typeface="Arial"/>
-                <a:hlinkClick xmlns:r="http://schemas.openxmlformats.org/officeDocument/2006/relationships" r:id="R656c224dc5cb4304"/>
+                <a:hlinkClick xmlns:r="http://schemas.openxmlformats.org/officeDocument/2006/relationships" r:id="R1e7d14dbff5d449a"/>
               </a:rPr>
               <a:t>https://route2zero.netlify.app/</a:t>
             </a:r>
@@ -24110,7 +24110,7 @@
           <p:cNvPr id="2" name="">
             <a:extLst xmlns:a="http://schemas.openxmlformats.org/drawingml/2006/main">
               <a:ext uri="{FF2B5EF4-FFF2-40B4-BE49-F238E27FC236}">
-                <a16:creationId xmlns:a16="http://schemas.microsoft.com/office/drawing/2014/main" id="{D9F37920-14D9-431A-B275-2290DF30E6C6}"/>
+                <a16:creationId xmlns:a16="http://schemas.microsoft.com/office/drawing/2014/main" id="{C6274180-FDD6-4B44-9519-1CED4139A86F}"/>
               </a:ext>
             </a:extLst>
           </p:cNvPr>
@@ -24172,7 +24172,7 @@
           <p:cNvPr id="3" name="">
             <a:extLst xmlns:a="http://schemas.openxmlformats.org/drawingml/2006/main">
               <a:ext uri="{FF2B5EF4-FFF2-40B4-BE49-F238E27FC236}">
-                <a16:creationId xmlns:a16="http://schemas.microsoft.com/office/drawing/2014/main" id="{5BA8A1CD-5A68-459A-B4A7-05F09832C421}"/>
+                <a16:creationId xmlns:a16="http://schemas.microsoft.com/office/drawing/2014/main" id="{077631CE-A9C1-4BBB-B59D-34B700922ED6}"/>
               </a:ext>
             </a:extLst>
           </p:cNvPr>
@@ -24234,7 +24234,7 @@
           <p:cNvPr id="4" name="">
             <a:extLst xmlns:a="http://schemas.openxmlformats.org/drawingml/2006/main">
               <a:ext uri="{FF2B5EF4-FFF2-40B4-BE49-F238E27FC236}">
-                <a16:creationId xmlns:a16="http://schemas.microsoft.com/office/drawing/2014/main" id="{072375B8-7B3C-468D-A0C3-D95038EB1BDF}"/>
+                <a16:creationId xmlns:a16="http://schemas.microsoft.com/office/drawing/2014/main" id="{96F5C706-D409-46C4-81DF-CCB510FA46B4}"/>
               </a:ext>
             </a:extLst>
           </p:cNvPr>
@@ -24296,7 +24296,7 @@
           <p:cNvPr id="5" name="">
             <a:extLst xmlns:a="http://schemas.openxmlformats.org/drawingml/2006/main">
               <a:ext uri="{FF2B5EF4-FFF2-40B4-BE49-F238E27FC236}">
-                <a16:creationId xmlns:a16="http://schemas.microsoft.com/office/drawing/2014/main" id="{D3AEE785-167D-49A2-9DAD-E2F4A8989CD8}"/>
+                <a16:creationId xmlns:a16="http://schemas.microsoft.com/office/drawing/2014/main" id="{8FF828B3-C7D9-4B8B-AC7E-131A54EDD3C7}"/>
               </a:ext>
             </a:extLst>
           </p:cNvPr>
@@ -24327,7 +24327,7 @@
           <p:cNvPr id="6" name="">
             <a:extLst xmlns:a="http://schemas.openxmlformats.org/drawingml/2006/main">
               <a:ext uri="{FF2B5EF4-FFF2-40B4-BE49-F238E27FC236}">
-                <a16:creationId xmlns:a16="http://schemas.microsoft.com/office/drawing/2014/main" id="{409E0CAE-D365-48B0-A05A-42F9F2F0C622}"/>
+                <a16:creationId xmlns:a16="http://schemas.microsoft.com/office/drawing/2014/main" id="{D8315487-437A-4BF6-BAC6-85448E5D39CD}"/>
               </a:ext>
             </a:extLst>
           </p:cNvPr>
@@ -24389,7 +24389,7 @@
           <p:cNvPr id="7" name="">
             <a:extLst xmlns:a="http://schemas.openxmlformats.org/drawingml/2006/main">
               <a:ext uri="{FF2B5EF4-FFF2-40B4-BE49-F238E27FC236}">
-                <a16:creationId xmlns:a16="http://schemas.microsoft.com/office/drawing/2014/main" id="{296464C4-C688-4C3F-B9A5-AC0D68D1118C}"/>
+                <a16:creationId xmlns:a16="http://schemas.microsoft.com/office/drawing/2014/main" id="{05AAF1B2-2BC9-4D1A-AB23-AC093A5311FA}"/>
               </a:ext>
             </a:extLst>
           </p:cNvPr>
@@ -24420,7 +24420,7 @@
           <p:cNvPr id="8" name="">
             <a:extLst xmlns:a="http://schemas.openxmlformats.org/drawingml/2006/main">
               <a:ext uri="{FF2B5EF4-FFF2-40B4-BE49-F238E27FC236}">
-                <a16:creationId xmlns:a16="http://schemas.microsoft.com/office/drawing/2014/main" id="{702C2968-BC42-4301-8AAC-E4D2F2FE6230}"/>
+                <a16:creationId xmlns:a16="http://schemas.microsoft.com/office/drawing/2014/main" id="{BBA51D70-AE52-45BA-8DD5-9DB852B70658}"/>
               </a:ext>
             </a:extLst>
           </p:cNvPr>
@@ -24482,7 +24482,7 @@
           <p:cNvPr id="9" name="">
             <a:extLst xmlns:a="http://schemas.openxmlformats.org/drawingml/2006/main">
               <a:ext uri="{FF2B5EF4-FFF2-40B4-BE49-F238E27FC236}">
-                <a16:creationId xmlns:a16="http://schemas.microsoft.com/office/drawing/2014/main" id="{9435F231-55F5-4DF9-887A-CFEE287EE99C}"/>
+                <a16:creationId xmlns:a16="http://schemas.microsoft.com/office/drawing/2014/main" id="{71ED01AB-2857-480F-B3E2-19B8A43AB433}"/>
               </a:ext>
             </a:extLst>
           </p:cNvPr>
@@ -24513,7 +24513,7 @@
           <p:cNvPr id="10" name="">
             <a:extLst xmlns:a="http://schemas.openxmlformats.org/drawingml/2006/main">
               <a:ext uri="{FF2B5EF4-FFF2-40B4-BE49-F238E27FC236}">
-                <a16:creationId xmlns:a16="http://schemas.microsoft.com/office/drawing/2014/main" id="{B81130C6-9992-446B-848A-962A6EA5B599}"/>
+                <a16:creationId xmlns:a16="http://schemas.microsoft.com/office/drawing/2014/main" id="{DB6DD2D4-F033-4047-A841-7629759B0270}"/>
               </a:ext>
             </a:extLst>
           </p:cNvPr>
@@ -24575,7 +24575,7 @@
           <p:cNvPr id="11" name="">
             <a:extLst xmlns:a="http://schemas.openxmlformats.org/drawingml/2006/main">
               <a:ext uri="{FF2B5EF4-FFF2-40B4-BE49-F238E27FC236}">
-                <a16:creationId xmlns:a16="http://schemas.microsoft.com/office/drawing/2014/main" id="{53432E16-FED7-4C73-8CE4-99ECD3DC61A6}"/>
+                <a16:creationId xmlns:a16="http://schemas.microsoft.com/office/drawing/2014/main" id="{A9F5C00F-BD78-40A7-B1F3-BC460FDE425C}"/>
               </a:ext>
             </a:extLst>
           </p:cNvPr>
@@ -24606,7 +24606,7 @@
           <p:cNvPr id="12" name="">
             <a:extLst xmlns:a="http://schemas.openxmlformats.org/drawingml/2006/main">
               <a:ext uri="{FF2B5EF4-FFF2-40B4-BE49-F238E27FC236}">
-                <a16:creationId xmlns:a16="http://schemas.microsoft.com/office/drawing/2014/main" id="{4A696A0A-CA16-4ADD-9E0A-A76D01297203}"/>
+                <a16:creationId xmlns:a16="http://schemas.microsoft.com/office/drawing/2014/main" id="{0565D27C-BEBF-4C7C-BF8B-F9E2E6475A56}"/>
               </a:ext>
             </a:extLst>
           </p:cNvPr>
@@ -24668,7 +24668,7 @@
           <p:cNvPr id="13" name="">
             <a:extLst xmlns:a="http://schemas.openxmlformats.org/drawingml/2006/main">
               <a:ext uri="{FF2B5EF4-FFF2-40B4-BE49-F238E27FC236}">
-                <a16:creationId xmlns:a16="http://schemas.microsoft.com/office/drawing/2014/main" id="{C9BB6C44-473B-4915-BAF4-1CC0D907EBE3}"/>
+                <a16:creationId xmlns:a16="http://schemas.microsoft.com/office/drawing/2014/main" id="{0293069B-F963-45D1-8421-13C2D6028B76}"/>
               </a:ext>
             </a:extLst>
           </p:cNvPr>
@@ -24730,7 +24730,7 @@
           <p:cNvPr id="14" name="">
             <a:extLst xmlns:a="http://schemas.openxmlformats.org/drawingml/2006/main">
               <a:ext uri="{FF2B5EF4-FFF2-40B4-BE49-F238E27FC236}">
-                <a16:creationId xmlns:a16="http://schemas.microsoft.com/office/drawing/2014/main" id="{0300830C-5B65-4FDF-9FD1-48C068D8A48B}"/>
+                <a16:creationId xmlns:a16="http://schemas.microsoft.com/office/drawing/2014/main" id="{AA2D03D0-CD69-4202-A4D4-4BD70D9402D7}"/>
               </a:ext>
             </a:extLst>
           </p:cNvPr>
@@ -24761,7 +24761,7 @@
           <p:cNvPr id="15" name="">
             <a:extLst xmlns:a="http://schemas.openxmlformats.org/drawingml/2006/main">
               <a:ext uri="{FF2B5EF4-FFF2-40B4-BE49-F238E27FC236}">
-                <a16:creationId xmlns:a16="http://schemas.microsoft.com/office/drawing/2014/main" id="{70C7C212-BAC7-4EDC-AC8B-7B95E22D5931}"/>
+                <a16:creationId xmlns:a16="http://schemas.microsoft.com/office/drawing/2014/main" id="{453AD620-5483-4AD9-B5B0-E114DF213964}"/>
               </a:ext>
             </a:extLst>
           </p:cNvPr>
@@ -24823,7 +24823,7 @@
           <p:cNvPr id="16" name="">
             <a:extLst xmlns:a="http://schemas.openxmlformats.org/drawingml/2006/main">
               <a:ext uri="{FF2B5EF4-FFF2-40B4-BE49-F238E27FC236}">
-                <a16:creationId xmlns:a16="http://schemas.microsoft.com/office/drawing/2014/main" id="{E4E400A9-7C95-4678-B34D-1B4797F76C61}"/>
+                <a16:creationId xmlns:a16="http://schemas.microsoft.com/office/drawing/2014/main" id="{3C2E7DB1-5B91-4A69-94E7-C4DC394B3EB7}"/>
               </a:ext>
             </a:extLst>
           </p:cNvPr>
@@ -24883,7 +24883,7 @@
     </p:spTree>
     <p:extLst>
       <p:ext uri="{BB962C8B-B14F-4D97-AF65-F5344CB8AC3E}">
-        <p14:creationId xmlns:p14="http://schemas.microsoft.com/office/powerpoint/2010/main" val="372312829"/>
+        <p14:creationId xmlns:p14="http://schemas.microsoft.com/office/powerpoint/2010/main" val="793143777"/>
       </p:ext>
     </p:extLst>
   </p:cSld>
@@ -24914,7 +24914,7 @@
           <p:cNvPr id="28" name="">
             <a:extLst xmlns:a="http://schemas.openxmlformats.org/drawingml/2006/main">
               <a:ext uri="{FF2B5EF4-FFF2-40B4-BE49-F238E27FC236}">
-                <a16:creationId xmlns:a16="http://schemas.microsoft.com/office/drawing/2014/main" id="{BD5193CC-96A8-49F6-9799-18220117F12E}"/>
+                <a16:creationId xmlns:a16="http://schemas.microsoft.com/office/drawing/2014/main" id="{D353D203-14A8-40D3-87BC-31D91854E79C}"/>
               </a:ext>
             </a:extLst>
           </p:cNvPr>
@@ -24976,7 +24976,7 @@
                 <a:latin typeface="Arial"/>
                 <a:ea typeface="Arial"/>
                 <a:cs typeface="Arial"/>
-                <a:hlinkClick xmlns:r="http://schemas.openxmlformats.org/officeDocument/2006/relationships" r:id="R520c5c2d52984100"/>
+                <a:hlinkClick xmlns:r="http://schemas.openxmlformats.org/officeDocument/2006/relationships" r:id="Rc52a78326f8a476d"/>
               </a:rPr>
               <a:t>https://github.com/qjmre23/Route2Zero</a:t>
             </a:r>
@@ -24999,7 +24999,7 @@
                 <a:latin typeface="Arial"/>
                 <a:ea typeface="Arial"/>
                 <a:cs typeface="Arial"/>
-                <a:hlinkClick xmlns:r="http://schemas.openxmlformats.org/officeDocument/2006/relationships" r:id="Ra69f6859a52049d4"/>
+                <a:hlinkClick xmlns:r="http://schemas.openxmlformats.org/officeDocument/2006/relationships" r:id="Rfec9fefa75fc4c0f"/>
               </a:rPr>
               <a:t>https://route2zero.netlify.app/</a:t>
             </a:r>
@@ -25011,7 +25011,7 @@
           <p:cNvPr id="2" name="">
             <a:extLst xmlns:a="http://schemas.openxmlformats.org/drawingml/2006/main">
               <a:ext uri="{FF2B5EF4-FFF2-40B4-BE49-F238E27FC236}">
-                <a16:creationId xmlns:a16="http://schemas.microsoft.com/office/drawing/2014/main" id="{5AC56F35-AFA4-4FDE-BFD5-41C45A06E856}"/>
+                <a16:creationId xmlns:a16="http://schemas.microsoft.com/office/drawing/2014/main" id="{FD9274FF-2D48-4EF8-AF65-90F694C83F27}"/>
               </a:ext>
             </a:extLst>
           </p:cNvPr>
@@ -25073,7 +25073,7 @@
           <p:cNvPr id="3" name="">
             <a:extLst xmlns:a="http://schemas.openxmlformats.org/drawingml/2006/main">
               <a:ext uri="{FF2B5EF4-FFF2-40B4-BE49-F238E27FC236}">
-                <a16:creationId xmlns:a16="http://schemas.microsoft.com/office/drawing/2014/main" id="{2CFF6513-D304-43B0-A969-F408DA4226EB}"/>
+                <a16:creationId xmlns:a16="http://schemas.microsoft.com/office/drawing/2014/main" id="{FED245C9-09FF-4114-B712-B218A305F342}"/>
               </a:ext>
             </a:extLst>
           </p:cNvPr>
@@ -25135,7 +25135,7 @@
           <p:cNvPr id="4" name="">
             <a:extLst xmlns:a="http://schemas.openxmlformats.org/drawingml/2006/main">
               <a:ext uri="{FF2B5EF4-FFF2-40B4-BE49-F238E27FC236}">
-                <a16:creationId xmlns:a16="http://schemas.microsoft.com/office/drawing/2014/main" id="{D7E7E9B3-43BE-4A9F-A7B1-9D054E838325}"/>
+                <a16:creationId xmlns:a16="http://schemas.microsoft.com/office/drawing/2014/main" id="{FC36E804-E5DA-4BED-BB25-6EC8BA434D94}"/>
               </a:ext>
             </a:extLst>
           </p:cNvPr>
@@ -25168,7 +25168,7 @@
           <p:cNvPr id="5" name="">
             <a:extLst xmlns:a="http://schemas.openxmlformats.org/drawingml/2006/main">
               <a:ext uri="{FF2B5EF4-FFF2-40B4-BE49-F238E27FC236}">
-                <a16:creationId xmlns:a16="http://schemas.microsoft.com/office/drawing/2014/main" id="{EAE10767-53CD-4CE3-884D-61F31BE2C1BB}"/>
+                <a16:creationId xmlns:a16="http://schemas.microsoft.com/office/drawing/2014/main" id="{EF026C7C-98D2-41EB-A08D-D40BF3DE22DC}"/>
               </a:ext>
             </a:extLst>
           </p:cNvPr>
@@ -25257,7 +25257,7 @@
           <p:cNvPr id="6" name="">
             <a:extLst xmlns:a="http://schemas.openxmlformats.org/drawingml/2006/main">
               <a:ext uri="{FF2B5EF4-FFF2-40B4-BE49-F238E27FC236}">
-                <a16:creationId xmlns:a16="http://schemas.microsoft.com/office/drawing/2014/main" id="{91273E2C-EE97-47C6-AAEA-3833AD135F52}"/>
+                <a16:creationId xmlns:a16="http://schemas.microsoft.com/office/drawing/2014/main" id="{ACAECB76-7B72-424B-BC69-DA85C80BB8AB}"/>
               </a:ext>
             </a:extLst>
           </p:cNvPr>
@@ -25288,7 +25288,7 @@
           <p:cNvPr id="7" name="">
             <a:extLst xmlns:a="http://schemas.openxmlformats.org/drawingml/2006/main">
               <a:ext uri="{FF2B5EF4-FFF2-40B4-BE49-F238E27FC236}">
-                <a16:creationId xmlns:a16="http://schemas.microsoft.com/office/drawing/2014/main" id="{E714BB44-C238-488B-9620-191ED80DE992}"/>
+                <a16:creationId xmlns:a16="http://schemas.microsoft.com/office/drawing/2014/main" id="{049B5CC3-FDF3-411A-AC2F-0B7E2F521E9F}"/>
               </a:ext>
             </a:extLst>
           </p:cNvPr>
@@ -25319,7 +25319,7 @@
           <p:cNvPr id="8" name="">
             <a:extLst xmlns:a="http://schemas.openxmlformats.org/drawingml/2006/main">
               <a:ext uri="{FF2B5EF4-FFF2-40B4-BE49-F238E27FC236}">
-                <a16:creationId xmlns:a16="http://schemas.microsoft.com/office/drawing/2014/main" id="{3A00FD16-3133-40F6-B0AE-982D7CA6B3F8}"/>
+                <a16:creationId xmlns:a16="http://schemas.microsoft.com/office/drawing/2014/main" id="{FCD825EA-ECEB-473E-B985-792FF32DBD11}"/>
               </a:ext>
             </a:extLst>
           </p:cNvPr>
@@ -25381,7 +25381,7 @@
           <p:cNvPr id="9" name="">
             <a:extLst xmlns:a="http://schemas.openxmlformats.org/drawingml/2006/main">
               <a:ext uri="{FF2B5EF4-FFF2-40B4-BE49-F238E27FC236}">
-                <a16:creationId xmlns:a16="http://schemas.microsoft.com/office/drawing/2014/main" id="{5AFA627D-8F8F-4A5E-BE0A-74589AC93C05}"/>
+                <a16:creationId xmlns:a16="http://schemas.microsoft.com/office/drawing/2014/main" id="{5E2B8538-252D-4960-874F-8151B41E288E}"/>
               </a:ext>
             </a:extLst>
           </p:cNvPr>
@@ -25412,7 +25412,7 @@
           <p:cNvPr id="10" name="">
             <a:extLst xmlns:a="http://schemas.openxmlformats.org/drawingml/2006/main">
               <a:ext uri="{FF2B5EF4-FFF2-40B4-BE49-F238E27FC236}">
-                <a16:creationId xmlns:a16="http://schemas.microsoft.com/office/drawing/2014/main" id="{CE305189-D223-4140-8DBB-78C0B44AD335}"/>
+                <a16:creationId xmlns:a16="http://schemas.microsoft.com/office/drawing/2014/main" id="{AADF87B9-FBF4-409A-8497-792D8F648F68}"/>
               </a:ext>
             </a:extLst>
           </p:cNvPr>
@@ -25443,7 +25443,7 @@
           <p:cNvPr id="11" name="">
             <a:extLst xmlns:a="http://schemas.openxmlformats.org/drawingml/2006/main">
               <a:ext uri="{FF2B5EF4-FFF2-40B4-BE49-F238E27FC236}">
-                <a16:creationId xmlns:a16="http://schemas.microsoft.com/office/drawing/2014/main" id="{FE7F73D5-0A05-44B7-A727-F224371917CF}"/>
+                <a16:creationId xmlns:a16="http://schemas.microsoft.com/office/drawing/2014/main" id="{08079575-E5E4-49D5-AE54-311DD3C9EE4F}"/>
               </a:ext>
             </a:extLst>
           </p:cNvPr>
@@ -25505,7 +25505,7 @@
           <p:cNvPr id="12" name="">
             <a:extLst xmlns:a="http://schemas.openxmlformats.org/drawingml/2006/main">
               <a:ext uri="{FF2B5EF4-FFF2-40B4-BE49-F238E27FC236}">
-                <a16:creationId xmlns:a16="http://schemas.microsoft.com/office/drawing/2014/main" id="{F2F8A421-3CDE-4ED1-B029-546C9BFC54E7}"/>
+                <a16:creationId xmlns:a16="http://schemas.microsoft.com/office/drawing/2014/main" id="{24D81092-41DF-4866-9E3F-8F4A0B4512E6}"/>
               </a:ext>
             </a:extLst>
           </p:cNvPr>
@@ -25536,7 +25536,7 @@
           <p:cNvPr id="13" name="">
             <a:extLst xmlns:a="http://schemas.openxmlformats.org/drawingml/2006/main">
               <a:ext uri="{FF2B5EF4-FFF2-40B4-BE49-F238E27FC236}">
-                <a16:creationId xmlns:a16="http://schemas.microsoft.com/office/drawing/2014/main" id="{CCED4ED8-FB0C-4BCA-B240-61510BDC7BD4}"/>
+                <a16:creationId xmlns:a16="http://schemas.microsoft.com/office/drawing/2014/main" id="{509CE271-BADB-4BF3-B77D-BF605EFC1FFA}"/>
               </a:ext>
             </a:extLst>
           </p:cNvPr>
@@ -25567,7 +25567,7 @@
           <p:cNvPr id="14" name="">
             <a:extLst xmlns:a="http://schemas.openxmlformats.org/drawingml/2006/main">
               <a:ext uri="{FF2B5EF4-FFF2-40B4-BE49-F238E27FC236}">
-                <a16:creationId xmlns:a16="http://schemas.microsoft.com/office/drawing/2014/main" id="{060A3DF7-D203-42F0-A59D-CCD495BDF560}"/>
+                <a16:creationId xmlns:a16="http://schemas.microsoft.com/office/drawing/2014/main" id="{EC25C214-8C11-4D95-938D-7F64139A76A5}"/>
               </a:ext>
             </a:extLst>
           </p:cNvPr>
@@ -25629,7 +25629,7 @@
           <p:cNvPr id="15" name="">
             <a:extLst xmlns:a="http://schemas.openxmlformats.org/drawingml/2006/main">
               <a:ext uri="{FF2B5EF4-FFF2-40B4-BE49-F238E27FC236}">
-                <a16:creationId xmlns:a16="http://schemas.microsoft.com/office/drawing/2014/main" id="{8E0E00FE-9215-4E98-9347-97621267145E}"/>
+                <a16:creationId xmlns:a16="http://schemas.microsoft.com/office/drawing/2014/main" id="{94DB0026-9500-4CE4-B204-9282ECB3BBA9}"/>
               </a:ext>
             </a:extLst>
           </p:cNvPr>
@@ -25660,7 +25660,7 @@
           <p:cNvPr id="16" name="">
             <a:extLst xmlns:a="http://schemas.openxmlformats.org/drawingml/2006/main">
               <a:ext uri="{FF2B5EF4-FFF2-40B4-BE49-F238E27FC236}">
-                <a16:creationId xmlns:a16="http://schemas.microsoft.com/office/drawing/2014/main" id="{05E9C105-B07E-419D-AFFA-A94EF87FCD68}"/>
+                <a16:creationId xmlns:a16="http://schemas.microsoft.com/office/drawing/2014/main" id="{BC592DF1-48B7-4939-8C8B-6933B32F94DC}"/>
               </a:ext>
             </a:extLst>
           </p:cNvPr>
@@ -25691,7 +25691,7 @@
           <p:cNvPr id="17" name="">
             <a:extLst xmlns:a="http://schemas.openxmlformats.org/drawingml/2006/main">
               <a:ext uri="{FF2B5EF4-FFF2-40B4-BE49-F238E27FC236}">
-                <a16:creationId xmlns:a16="http://schemas.microsoft.com/office/drawing/2014/main" id="{908D8DB8-2359-4BFB-BBB3-124C1DE73504}"/>
+                <a16:creationId xmlns:a16="http://schemas.microsoft.com/office/drawing/2014/main" id="{1C506FA5-64FD-4333-8636-DD2649ABC303}"/>
               </a:ext>
             </a:extLst>
           </p:cNvPr>
@@ -25753,7 +25753,7 @@
           <p:cNvPr id="18" name="">
             <a:extLst xmlns:a="http://schemas.openxmlformats.org/drawingml/2006/main">
               <a:ext uri="{FF2B5EF4-FFF2-40B4-BE49-F238E27FC236}">
-                <a16:creationId xmlns:a16="http://schemas.microsoft.com/office/drawing/2014/main" id="{D8A91F37-A197-4F69-ADA0-BCE2BE89436C}"/>
+                <a16:creationId xmlns:a16="http://schemas.microsoft.com/office/drawing/2014/main" id="{4F337456-D4F4-41C8-9C1A-A8ED09692835}"/>
               </a:ext>
             </a:extLst>
           </p:cNvPr>
@@ -25784,7 +25784,7 @@
           <p:cNvPr id="19" name="">
             <a:extLst xmlns:a="http://schemas.openxmlformats.org/drawingml/2006/main">
               <a:ext uri="{FF2B5EF4-FFF2-40B4-BE49-F238E27FC236}">
-                <a16:creationId xmlns:a16="http://schemas.microsoft.com/office/drawing/2014/main" id="{CB43032D-5FCD-43A2-B116-C4DAE5C215B8}"/>
+                <a16:creationId xmlns:a16="http://schemas.microsoft.com/office/drawing/2014/main" id="{E4D5F826-CA02-45E2-ADDB-45A638B16899}"/>
               </a:ext>
             </a:extLst>
           </p:cNvPr>
@@ -25815,7 +25815,7 @@
           <p:cNvPr id="20" name="">
             <a:extLst xmlns:a="http://schemas.openxmlformats.org/drawingml/2006/main">
               <a:ext uri="{FF2B5EF4-FFF2-40B4-BE49-F238E27FC236}">
-                <a16:creationId xmlns:a16="http://schemas.microsoft.com/office/drawing/2014/main" id="{57D5D6AA-69A2-45C4-A827-E9A726DBDA4F}"/>
+                <a16:creationId xmlns:a16="http://schemas.microsoft.com/office/drawing/2014/main" id="{5C72F885-BDAB-455A-A548-1EE6D6D0E0C6}"/>
               </a:ext>
             </a:extLst>
           </p:cNvPr>
@@ -25877,7 +25877,7 @@
           <p:cNvPr id="21" name="">
             <a:extLst xmlns:a="http://schemas.openxmlformats.org/drawingml/2006/main">
               <a:ext uri="{FF2B5EF4-FFF2-40B4-BE49-F238E27FC236}">
-                <a16:creationId xmlns:a16="http://schemas.microsoft.com/office/drawing/2014/main" id="{2FD37917-E631-4873-B083-0D0B8A074818}"/>
+                <a16:creationId xmlns:a16="http://schemas.microsoft.com/office/drawing/2014/main" id="{6EFB8162-F794-4F00-B417-8DF2F6F7321A}"/>
               </a:ext>
             </a:extLst>
           </p:cNvPr>
@@ -25908,7 +25908,7 @@
           <p:cNvPr id="22" name="">
             <a:extLst xmlns:a="http://schemas.openxmlformats.org/drawingml/2006/main">
               <a:ext uri="{FF2B5EF4-FFF2-40B4-BE49-F238E27FC236}">
-                <a16:creationId xmlns:a16="http://schemas.microsoft.com/office/drawing/2014/main" id="{F2BEA268-9843-4D13-94FE-E70986A8B659}"/>
+                <a16:creationId xmlns:a16="http://schemas.microsoft.com/office/drawing/2014/main" id="{C12F2183-BF5E-444D-923B-499C6E923612}"/>
               </a:ext>
             </a:extLst>
           </p:cNvPr>
@@ -25939,7 +25939,7 @@
           <p:cNvPr id="23" name="">
             <a:extLst xmlns:a="http://schemas.openxmlformats.org/drawingml/2006/main">
               <a:ext uri="{FF2B5EF4-FFF2-40B4-BE49-F238E27FC236}">
-                <a16:creationId xmlns:a16="http://schemas.microsoft.com/office/drawing/2014/main" id="{94D86A6D-12DA-4E57-9A16-1CB653F7D65B}"/>
+                <a16:creationId xmlns:a16="http://schemas.microsoft.com/office/drawing/2014/main" id="{15F089EF-B3A3-48E0-A805-27CF6D1B013C}"/>
               </a:ext>
             </a:extLst>
           </p:cNvPr>
@@ -26001,7 +26001,7 @@
           <p:cNvPr id="24" name="">
             <a:extLst xmlns:a="http://schemas.openxmlformats.org/drawingml/2006/main">
               <a:ext uri="{FF2B5EF4-FFF2-40B4-BE49-F238E27FC236}">
-                <a16:creationId xmlns:a16="http://schemas.microsoft.com/office/drawing/2014/main" id="{E496DFB0-14D1-4C45-AA91-12CB55CF2CC1}"/>
+                <a16:creationId xmlns:a16="http://schemas.microsoft.com/office/drawing/2014/main" id="{B26E96A2-84D0-4E85-8C0F-D48B56CE3281}"/>
               </a:ext>
             </a:extLst>
           </p:cNvPr>
@@ -26063,7 +26063,7 @@
           <p:cNvPr id="25" name="">
             <a:extLst xmlns:a="http://schemas.openxmlformats.org/drawingml/2006/main">
               <a:ext uri="{FF2B5EF4-FFF2-40B4-BE49-F238E27FC236}">
-                <a16:creationId xmlns:a16="http://schemas.microsoft.com/office/drawing/2014/main" id="{34B2A7D6-18CF-4642-9D75-049BD8B06856}"/>
+                <a16:creationId xmlns:a16="http://schemas.microsoft.com/office/drawing/2014/main" id="{E124BB12-600D-4B44-8A13-4DB37C1E18FA}"/>
               </a:ext>
             </a:extLst>
           </p:cNvPr>
@@ -26094,7 +26094,7 @@
           <p:cNvPr id="26" name="">
             <a:extLst xmlns:a="http://schemas.openxmlformats.org/drawingml/2006/main">
               <a:ext uri="{FF2B5EF4-FFF2-40B4-BE49-F238E27FC236}">
-                <a16:creationId xmlns:a16="http://schemas.microsoft.com/office/drawing/2014/main" id="{E69DAA6B-A8FF-4FAE-A7D6-C4B1921AEEA1}"/>
+                <a16:creationId xmlns:a16="http://schemas.microsoft.com/office/drawing/2014/main" id="{4A7DA1EC-8A88-4CDC-A7F3-0AF19F99EE6F}"/>
               </a:ext>
             </a:extLst>
           </p:cNvPr>
@@ -26156,7 +26156,7 @@
           <p:cNvPr id="27" name="">
             <a:extLst xmlns:a="http://schemas.openxmlformats.org/drawingml/2006/main">
               <a:ext uri="{FF2B5EF4-FFF2-40B4-BE49-F238E27FC236}">
-                <a16:creationId xmlns:a16="http://schemas.microsoft.com/office/drawing/2014/main" id="{AE5B5430-F9A6-4D48-87AA-AC899754AF98}"/>
+                <a16:creationId xmlns:a16="http://schemas.microsoft.com/office/drawing/2014/main" id="{B5F6294F-2699-471B-B01C-2F4A829409EA}"/>
               </a:ext>
             </a:extLst>
           </p:cNvPr>
@@ -26216,7 +26216,7 @@
     </p:spTree>
     <p:extLst>
       <p:ext uri="{BB962C8B-B14F-4D97-AF65-F5344CB8AC3E}">
-        <p14:creationId xmlns:p14="http://schemas.microsoft.com/office/powerpoint/2010/main" val="1709453013"/>
+        <p14:creationId xmlns:p14="http://schemas.microsoft.com/office/powerpoint/2010/main" val="1828624257"/>
       </p:ext>
     </p:extLst>
   </p:cSld>
@@ -26247,7 +26247,7 @@
           <p:cNvPr id="36" name="">
             <a:extLst xmlns:a="http://schemas.openxmlformats.org/drawingml/2006/main">
               <a:ext uri="{FF2B5EF4-FFF2-40B4-BE49-F238E27FC236}">
-                <a16:creationId xmlns:a16="http://schemas.microsoft.com/office/drawing/2014/main" id="{72459F43-3685-41EB-A8C5-CB7E2B882EAD}"/>
+                <a16:creationId xmlns:a16="http://schemas.microsoft.com/office/drawing/2014/main" id="{0857C4CC-B2FF-4E40-8C60-5FA59DBBBC58}"/>
               </a:ext>
             </a:extLst>
           </p:cNvPr>
@@ -26309,7 +26309,7 @@
                 <a:latin typeface="Arial"/>
                 <a:ea typeface="Arial"/>
                 <a:cs typeface="Arial"/>
-                <a:hlinkClick xmlns:r="http://schemas.openxmlformats.org/officeDocument/2006/relationships" r:id="R5e9a560e6b0d40a2"/>
+                <a:hlinkClick xmlns:r="http://schemas.openxmlformats.org/officeDocument/2006/relationships" r:id="R519f88d39a6d4589"/>
               </a:rPr>
               <a:t>https://github.com/qjmre23/Route2Zero</a:t>
             </a:r>
@@ -26332,7 +26332,7 @@
                 <a:latin typeface="Arial"/>
                 <a:ea typeface="Arial"/>
                 <a:cs typeface="Arial"/>
-                <a:hlinkClick xmlns:r="http://schemas.openxmlformats.org/officeDocument/2006/relationships" r:id="R1f7cd0ec241f4318"/>
+                <a:hlinkClick xmlns:r="http://schemas.openxmlformats.org/officeDocument/2006/relationships" r:id="R616fdedeec9c4d62"/>
               </a:rPr>
               <a:t>https://route2zero.netlify.app/</a:t>
             </a:r>
@@ -26344,7 +26344,7 @@
           <p:cNvPr id="2" name="">
             <a:extLst xmlns:a="http://schemas.openxmlformats.org/drawingml/2006/main">
               <a:ext uri="{FF2B5EF4-FFF2-40B4-BE49-F238E27FC236}">
-                <a16:creationId xmlns:a16="http://schemas.microsoft.com/office/drawing/2014/main" id="{DCF0223A-47AF-4902-A0EC-CE110E0B3540}"/>
+                <a16:creationId xmlns:a16="http://schemas.microsoft.com/office/drawing/2014/main" id="{AC12DE41-2245-40A0-96EF-B758C8BCB541}"/>
               </a:ext>
             </a:extLst>
           </p:cNvPr>
@@ -26406,7 +26406,7 @@
           <p:cNvPr id="3" name="">
             <a:extLst xmlns:a="http://schemas.openxmlformats.org/drawingml/2006/main">
               <a:ext uri="{FF2B5EF4-FFF2-40B4-BE49-F238E27FC236}">
-                <a16:creationId xmlns:a16="http://schemas.microsoft.com/office/drawing/2014/main" id="{DE2AE43C-5E0E-433A-8D80-8DE3261D70EF}"/>
+                <a16:creationId xmlns:a16="http://schemas.microsoft.com/office/drawing/2014/main" id="{8B924FC4-4594-49CD-A00E-3246AE73EFD0}"/>
               </a:ext>
             </a:extLst>
           </p:cNvPr>
@@ -26468,7 +26468,7 @@
           <p:cNvPr id="4" name="">
             <a:extLst xmlns:a="http://schemas.openxmlformats.org/drawingml/2006/main">
               <a:ext uri="{FF2B5EF4-FFF2-40B4-BE49-F238E27FC236}">
-                <a16:creationId xmlns:a16="http://schemas.microsoft.com/office/drawing/2014/main" id="{77260F58-FDFA-4110-9205-5834C5403D61}"/>
+                <a16:creationId xmlns:a16="http://schemas.microsoft.com/office/drawing/2014/main" id="{25415E27-0069-4BA4-943C-EEDBAF93C73E}"/>
               </a:ext>
             </a:extLst>
           </p:cNvPr>
@@ -26530,7 +26530,7 @@
           <p:cNvPr id="5" name="">
             <a:extLst xmlns:a="http://schemas.openxmlformats.org/drawingml/2006/main">
               <a:ext uri="{FF2B5EF4-FFF2-40B4-BE49-F238E27FC236}">
-                <a16:creationId xmlns:a16="http://schemas.microsoft.com/office/drawing/2014/main" id="{824362DE-0D86-4369-ACF8-D64E15822768}"/>
+                <a16:creationId xmlns:a16="http://schemas.microsoft.com/office/drawing/2014/main" id="{DE3F2089-6D32-4C4B-8BF2-199219A8AF71}"/>
               </a:ext>
             </a:extLst>
           </p:cNvPr>
@@ -26561,7 +26561,7 @@
           <p:cNvPr id="6" name="">
             <a:extLst xmlns:a="http://schemas.openxmlformats.org/drawingml/2006/main">
               <a:ext uri="{FF2B5EF4-FFF2-40B4-BE49-F238E27FC236}">
-                <a16:creationId xmlns:a16="http://schemas.microsoft.com/office/drawing/2014/main" id="{CAEC69A5-E012-4DC0-A8DE-E2085B93C60B}"/>
+                <a16:creationId xmlns:a16="http://schemas.microsoft.com/office/drawing/2014/main" id="{4D6ACDFF-FC51-441A-8DAF-F5DD06F5E488}"/>
               </a:ext>
             </a:extLst>
           </p:cNvPr>
@@ -26623,7 +26623,7 @@
           <p:cNvPr id="7" name="">
             <a:extLst xmlns:a="http://schemas.openxmlformats.org/drawingml/2006/main">
               <a:ext uri="{FF2B5EF4-FFF2-40B4-BE49-F238E27FC236}">
-                <a16:creationId xmlns:a16="http://schemas.microsoft.com/office/drawing/2014/main" id="{9454B9E5-904B-42AB-A4AF-0A4D9F050F6D}"/>
+                <a16:creationId xmlns:a16="http://schemas.microsoft.com/office/drawing/2014/main" id="{4245D221-75F7-4320-B4B2-843D667181B4}"/>
               </a:ext>
             </a:extLst>
           </p:cNvPr>
@@ -26685,7 +26685,7 @@
           <p:cNvPr id="8" name="">
             <a:extLst xmlns:a="http://schemas.openxmlformats.org/drawingml/2006/main">
               <a:ext uri="{FF2B5EF4-FFF2-40B4-BE49-F238E27FC236}">
-                <a16:creationId xmlns:a16="http://schemas.microsoft.com/office/drawing/2014/main" id="{9FC08138-B69B-4AF9-B2D2-B690D18683C1}"/>
+                <a16:creationId xmlns:a16="http://schemas.microsoft.com/office/drawing/2014/main" id="{94A34A39-EEF2-4BFE-93B1-5CABA1298030}"/>
               </a:ext>
             </a:extLst>
           </p:cNvPr>
@@ -26747,7 +26747,7 @@
           <p:cNvPr id="9" name="">
             <a:extLst xmlns:a="http://schemas.openxmlformats.org/drawingml/2006/main">
               <a:ext uri="{FF2B5EF4-FFF2-40B4-BE49-F238E27FC236}">
-                <a16:creationId xmlns:a16="http://schemas.microsoft.com/office/drawing/2014/main" id="{EA1E0603-D360-4DD2-A38F-2FD1D2CC5306}"/>
+                <a16:creationId xmlns:a16="http://schemas.microsoft.com/office/drawing/2014/main" id="{8E5203F2-4231-4CAA-AE97-0507198BDFD9}"/>
               </a:ext>
             </a:extLst>
           </p:cNvPr>
@@ -26778,7 +26778,7 @@
           <p:cNvPr id="10" name="">
             <a:extLst xmlns:a="http://schemas.openxmlformats.org/drawingml/2006/main">
               <a:ext uri="{FF2B5EF4-FFF2-40B4-BE49-F238E27FC236}">
-                <a16:creationId xmlns:a16="http://schemas.microsoft.com/office/drawing/2014/main" id="{90C63534-0C41-4535-B5BB-979565A50815}"/>
+                <a16:creationId xmlns:a16="http://schemas.microsoft.com/office/drawing/2014/main" id="{FD561C29-71F8-4F9E-9E4C-8231EA82A4E0}"/>
               </a:ext>
             </a:extLst>
           </p:cNvPr>
@@ -26840,7 +26840,7 @@
           <p:cNvPr id="11" name="">
             <a:extLst xmlns:a="http://schemas.openxmlformats.org/drawingml/2006/main">
               <a:ext uri="{FF2B5EF4-FFF2-40B4-BE49-F238E27FC236}">
-                <a16:creationId xmlns:a16="http://schemas.microsoft.com/office/drawing/2014/main" id="{30230275-3A69-48D0-8DFC-4C66E20A4C04}"/>
+                <a16:creationId xmlns:a16="http://schemas.microsoft.com/office/drawing/2014/main" id="{7956FF01-0D32-4B2E-A142-2104986CA02F}"/>
               </a:ext>
             </a:extLst>
           </p:cNvPr>
@@ -26902,7 +26902,7 @@
           <p:cNvPr id="12" name="">
             <a:extLst xmlns:a="http://schemas.openxmlformats.org/drawingml/2006/main">
               <a:ext uri="{FF2B5EF4-FFF2-40B4-BE49-F238E27FC236}">
-                <a16:creationId xmlns:a16="http://schemas.microsoft.com/office/drawing/2014/main" id="{6E083AC5-0579-48DA-8615-40CE3BDDBBCC}"/>
+                <a16:creationId xmlns:a16="http://schemas.microsoft.com/office/drawing/2014/main" id="{A0B52810-0856-4ECC-9CCE-5AD9FEBA00A4}"/>
               </a:ext>
             </a:extLst>
           </p:cNvPr>
@@ -26964,7 +26964,7 @@
           <p:cNvPr id="13" name="">
             <a:extLst xmlns:a="http://schemas.openxmlformats.org/drawingml/2006/main">
               <a:ext uri="{FF2B5EF4-FFF2-40B4-BE49-F238E27FC236}">
-                <a16:creationId xmlns:a16="http://schemas.microsoft.com/office/drawing/2014/main" id="{CC729C68-AF4D-4A95-A13B-38D3535C342D}"/>
+                <a16:creationId xmlns:a16="http://schemas.microsoft.com/office/drawing/2014/main" id="{B5CA0B26-452F-4539-884B-009E7042B23D}"/>
               </a:ext>
             </a:extLst>
           </p:cNvPr>
@@ -26995,7 +26995,7 @@
           <p:cNvPr id="14" name="">
             <a:extLst xmlns:a="http://schemas.openxmlformats.org/drawingml/2006/main">
               <a:ext uri="{FF2B5EF4-FFF2-40B4-BE49-F238E27FC236}">
-                <a16:creationId xmlns:a16="http://schemas.microsoft.com/office/drawing/2014/main" id="{07BCF65A-09EE-4396-B7CC-CDDBD80774A0}"/>
+                <a16:creationId xmlns:a16="http://schemas.microsoft.com/office/drawing/2014/main" id="{744C5ABD-E53D-460E-AB1B-8CFAA0291A5A}"/>
               </a:ext>
             </a:extLst>
           </p:cNvPr>
@@ -27057,7 +27057,7 @@
           <p:cNvPr id="15" name="">
             <a:extLst xmlns:a="http://schemas.openxmlformats.org/drawingml/2006/main">
               <a:ext uri="{FF2B5EF4-FFF2-40B4-BE49-F238E27FC236}">
-                <a16:creationId xmlns:a16="http://schemas.microsoft.com/office/drawing/2014/main" id="{52BEF447-8D3E-4FE2-AC1F-E95AA1147B1D}"/>
+                <a16:creationId xmlns:a16="http://schemas.microsoft.com/office/drawing/2014/main" id="{49702476-5A03-415D-BDFF-0DDC21D4F48B}"/>
               </a:ext>
             </a:extLst>
           </p:cNvPr>
@@ -27119,7 +27119,7 @@
           <p:cNvPr id="16" name="">
             <a:extLst xmlns:a="http://schemas.openxmlformats.org/drawingml/2006/main">
               <a:ext uri="{FF2B5EF4-FFF2-40B4-BE49-F238E27FC236}">
-                <a16:creationId xmlns:a16="http://schemas.microsoft.com/office/drawing/2014/main" id="{C6D5D5B5-1F1E-4FB8-80DF-78437930436D}"/>
+                <a16:creationId xmlns:a16="http://schemas.microsoft.com/office/drawing/2014/main" id="{7DEFA643-C17C-45FF-ACCC-376A8AC83EB1}"/>
               </a:ext>
             </a:extLst>
           </p:cNvPr>
@@ -27181,7 +27181,7 @@
           <p:cNvPr id="17" name="">
             <a:extLst xmlns:a="http://schemas.openxmlformats.org/drawingml/2006/main">
               <a:ext uri="{FF2B5EF4-FFF2-40B4-BE49-F238E27FC236}">
-                <a16:creationId xmlns:a16="http://schemas.microsoft.com/office/drawing/2014/main" id="{9B299740-A11F-47E2-8064-B49C50C3C8B6}"/>
+                <a16:creationId xmlns:a16="http://schemas.microsoft.com/office/drawing/2014/main" id="{1FF3BB0B-7022-4C6E-92BE-55076C310852}"/>
               </a:ext>
             </a:extLst>
           </p:cNvPr>
@@ -27212,7 +27212,7 @@
           <p:cNvPr id="18" name="">
             <a:extLst xmlns:a="http://schemas.openxmlformats.org/drawingml/2006/main">
               <a:ext uri="{FF2B5EF4-FFF2-40B4-BE49-F238E27FC236}">
-                <a16:creationId xmlns:a16="http://schemas.microsoft.com/office/drawing/2014/main" id="{BD7D87DD-D648-4D8D-9AB9-03941884B702}"/>
+                <a16:creationId xmlns:a16="http://schemas.microsoft.com/office/drawing/2014/main" id="{ED4C9622-9C01-4BD4-82FE-285061502516}"/>
               </a:ext>
             </a:extLst>
           </p:cNvPr>
@@ -27274,7 +27274,7 @@
           <p:cNvPr id="19" name="">
             <a:extLst xmlns:a="http://schemas.openxmlformats.org/drawingml/2006/main">
               <a:ext uri="{FF2B5EF4-FFF2-40B4-BE49-F238E27FC236}">
-                <a16:creationId xmlns:a16="http://schemas.microsoft.com/office/drawing/2014/main" id="{DAD0274E-9073-400E-A41C-1661DC82246F}"/>
+                <a16:creationId xmlns:a16="http://schemas.microsoft.com/office/drawing/2014/main" id="{D83C1869-2902-4226-ADED-8DC9A1B90F62}"/>
               </a:ext>
             </a:extLst>
           </p:cNvPr>
@@ -27336,7 +27336,7 @@
           <p:cNvPr id="20" name="">
             <a:extLst xmlns:a="http://schemas.openxmlformats.org/drawingml/2006/main">
               <a:ext uri="{FF2B5EF4-FFF2-40B4-BE49-F238E27FC236}">
-                <a16:creationId xmlns:a16="http://schemas.microsoft.com/office/drawing/2014/main" id="{27A5D214-3A14-491A-B616-7317911724DB}"/>
+                <a16:creationId xmlns:a16="http://schemas.microsoft.com/office/drawing/2014/main" id="{C2CEC929-80FE-40F6-A272-5613A363173F}"/>
               </a:ext>
             </a:extLst>
           </p:cNvPr>
@@ -27398,7 +27398,7 @@
           <p:cNvPr id="21" name="">
             <a:extLst xmlns:a="http://schemas.openxmlformats.org/drawingml/2006/main">
               <a:ext uri="{FF2B5EF4-FFF2-40B4-BE49-F238E27FC236}">
-                <a16:creationId xmlns:a16="http://schemas.microsoft.com/office/drawing/2014/main" id="{B2D03924-8A1B-4328-B1F1-DCCE0B93533E}"/>
+                <a16:creationId xmlns:a16="http://schemas.microsoft.com/office/drawing/2014/main" id="{1E1A9911-5BC1-4944-8852-8948B56AF904}"/>
               </a:ext>
             </a:extLst>
           </p:cNvPr>
@@ -27429,7 +27429,7 @@
           <p:cNvPr id="22" name="">
             <a:extLst xmlns:a="http://schemas.openxmlformats.org/drawingml/2006/main">
               <a:ext uri="{FF2B5EF4-FFF2-40B4-BE49-F238E27FC236}">
-                <a16:creationId xmlns:a16="http://schemas.microsoft.com/office/drawing/2014/main" id="{B5411C56-C065-4FF6-B3C7-3B62C2722DF5}"/>
+                <a16:creationId xmlns:a16="http://schemas.microsoft.com/office/drawing/2014/main" id="{C93DFE63-52CF-458C-A644-2D845C7583FD}"/>
               </a:ext>
             </a:extLst>
           </p:cNvPr>
@@ -27491,7 +27491,7 @@
           <p:cNvPr id="23" name="">
             <a:extLst xmlns:a="http://schemas.openxmlformats.org/drawingml/2006/main">
               <a:ext uri="{FF2B5EF4-FFF2-40B4-BE49-F238E27FC236}">
-                <a16:creationId xmlns:a16="http://schemas.microsoft.com/office/drawing/2014/main" id="{BE55D720-B00D-45F2-A188-6B867BECCE74}"/>
+                <a16:creationId xmlns:a16="http://schemas.microsoft.com/office/drawing/2014/main" id="{5B1BA873-EB5A-4709-9EFF-2AF247BC2250}"/>
               </a:ext>
             </a:extLst>
           </p:cNvPr>
@@ -27553,7 +27553,7 @@
           <p:cNvPr id="24" name="">
             <a:extLst xmlns:a="http://schemas.openxmlformats.org/drawingml/2006/main">
               <a:ext uri="{FF2B5EF4-FFF2-40B4-BE49-F238E27FC236}">
-                <a16:creationId xmlns:a16="http://schemas.microsoft.com/office/drawing/2014/main" id="{8744902E-1352-46F0-AAD7-3F77F02AE12D}"/>
+                <a16:creationId xmlns:a16="http://schemas.microsoft.com/office/drawing/2014/main" id="{1D210B9B-5559-4AD4-BFC2-130A3F098A64}"/>
               </a:ext>
             </a:extLst>
           </p:cNvPr>
@@ -27615,7 +27615,7 @@
           <p:cNvPr id="25" name="">
             <a:extLst xmlns:a="http://schemas.openxmlformats.org/drawingml/2006/main">
               <a:ext uri="{FF2B5EF4-FFF2-40B4-BE49-F238E27FC236}">
-                <a16:creationId xmlns:a16="http://schemas.microsoft.com/office/drawing/2014/main" id="{9547C8FA-3266-493B-A3EA-9DBFA952C7C0}"/>
+                <a16:creationId xmlns:a16="http://schemas.microsoft.com/office/drawing/2014/main" id="{E5D669A6-3C39-4AE7-9969-AA3172F24EF6}"/>
               </a:ext>
             </a:extLst>
           </p:cNvPr>
@@ -27646,7 +27646,7 @@
           <p:cNvPr id="26" name="">
             <a:extLst xmlns:a="http://schemas.openxmlformats.org/drawingml/2006/main">
               <a:ext uri="{FF2B5EF4-FFF2-40B4-BE49-F238E27FC236}">
-                <a16:creationId xmlns:a16="http://schemas.microsoft.com/office/drawing/2014/main" id="{3F4B8E6A-7424-4EC6-9EF0-59E4C8BFCD25}"/>
+                <a16:creationId xmlns:a16="http://schemas.microsoft.com/office/drawing/2014/main" id="{60ED4968-DAB6-409E-920A-998109D063E8}"/>
               </a:ext>
             </a:extLst>
           </p:cNvPr>
@@ -27708,7 +27708,7 @@
           <p:cNvPr id="27" name="">
             <a:extLst xmlns:a="http://schemas.openxmlformats.org/drawingml/2006/main">
               <a:ext uri="{FF2B5EF4-FFF2-40B4-BE49-F238E27FC236}">
-                <a16:creationId xmlns:a16="http://schemas.microsoft.com/office/drawing/2014/main" id="{4D560A9F-319B-4CB7-BF18-2C9E8CCF82B7}"/>
+                <a16:creationId xmlns:a16="http://schemas.microsoft.com/office/drawing/2014/main" id="{EF0E8E8F-943B-4C1D-8EF5-61D377C03969}"/>
               </a:ext>
             </a:extLst>
           </p:cNvPr>
@@ -27770,7 +27770,7 @@
           <p:cNvPr id="28" name="">
             <a:extLst xmlns:a="http://schemas.openxmlformats.org/drawingml/2006/main">
               <a:ext uri="{FF2B5EF4-FFF2-40B4-BE49-F238E27FC236}">
-                <a16:creationId xmlns:a16="http://schemas.microsoft.com/office/drawing/2014/main" id="{ECA28BA4-DC74-4E16-B5A3-0E4C4F71F30E}"/>
+                <a16:creationId xmlns:a16="http://schemas.microsoft.com/office/drawing/2014/main" id="{24A78F2E-4736-4962-99EA-ABAC9F3511BD}"/>
               </a:ext>
             </a:extLst>
           </p:cNvPr>
@@ -27801,7 +27801,7 @@
           <p:cNvPr id="29" name="">
             <a:extLst xmlns:a="http://schemas.openxmlformats.org/drawingml/2006/main">
               <a:ext uri="{FF2B5EF4-FFF2-40B4-BE49-F238E27FC236}">
-                <a16:creationId xmlns:a16="http://schemas.microsoft.com/office/drawing/2014/main" id="{4EA7DCC8-F0AE-40AF-A3A5-06F35D90BC95}"/>
+                <a16:creationId xmlns:a16="http://schemas.microsoft.com/office/drawing/2014/main" id="{3DCA0F73-1354-4C45-98FA-46A792CFC24F}"/>
               </a:ext>
             </a:extLst>
           </p:cNvPr>
@@ -27863,7 +27863,7 @@
           <p:cNvPr id="30" name="">
             <a:extLst xmlns:a="http://schemas.openxmlformats.org/drawingml/2006/main">
               <a:ext uri="{FF2B5EF4-FFF2-40B4-BE49-F238E27FC236}">
-                <a16:creationId xmlns:a16="http://schemas.microsoft.com/office/drawing/2014/main" id="{7B568178-F094-40DF-9E0D-B72973538388}"/>
+                <a16:creationId xmlns:a16="http://schemas.microsoft.com/office/drawing/2014/main" id="{E9350C94-1F4A-4104-A75D-6421E330EB19}"/>
               </a:ext>
             </a:extLst>
           </p:cNvPr>
@@ -27925,7 +27925,7 @@
           <p:cNvPr id="31" name="">
             <a:extLst xmlns:a="http://schemas.openxmlformats.org/drawingml/2006/main">
               <a:ext uri="{FF2B5EF4-FFF2-40B4-BE49-F238E27FC236}">
-                <a16:creationId xmlns:a16="http://schemas.microsoft.com/office/drawing/2014/main" id="{FDE7D8AA-1B5E-4679-AC18-DEFF149E75B6}"/>
+                <a16:creationId xmlns:a16="http://schemas.microsoft.com/office/drawing/2014/main" id="{7AC1C3FB-EACB-4CD3-86D6-51E7F31F0CB2}"/>
               </a:ext>
             </a:extLst>
           </p:cNvPr>
@@ -27987,7 +27987,7 @@
           <p:cNvPr id="32" name="">
             <a:extLst xmlns:a="http://schemas.openxmlformats.org/drawingml/2006/main">
               <a:ext uri="{FF2B5EF4-FFF2-40B4-BE49-F238E27FC236}">
-                <a16:creationId xmlns:a16="http://schemas.microsoft.com/office/drawing/2014/main" id="{A29688F4-41EC-4B4D-B5D5-4B2221547BDD}"/>
+                <a16:creationId xmlns:a16="http://schemas.microsoft.com/office/drawing/2014/main" id="{358FA6DA-A91A-4F95-9DAE-064B7E5772D1}"/>
               </a:ext>
             </a:extLst>
           </p:cNvPr>
@@ -28049,7 +28049,7 @@
           <p:cNvPr id="33" name="">
             <a:extLst xmlns:a="http://schemas.openxmlformats.org/drawingml/2006/main">
               <a:ext uri="{FF2B5EF4-FFF2-40B4-BE49-F238E27FC236}">
-                <a16:creationId xmlns:a16="http://schemas.microsoft.com/office/drawing/2014/main" id="{88BD7279-5FD8-40FE-8B73-5C2FA06AAFAE}"/>
+                <a16:creationId xmlns:a16="http://schemas.microsoft.com/office/drawing/2014/main" id="{36431484-73B5-4034-A727-68C4245E20C5}"/>
               </a:ext>
             </a:extLst>
           </p:cNvPr>
@@ -28080,7 +28080,7 @@
           <p:cNvPr id="34" name="">
             <a:extLst xmlns:a="http://schemas.openxmlformats.org/drawingml/2006/main">
               <a:ext uri="{FF2B5EF4-FFF2-40B4-BE49-F238E27FC236}">
-                <a16:creationId xmlns:a16="http://schemas.microsoft.com/office/drawing/2014/main" id="{CD689413-9716-4BA5-B61F-7A497D2020BA}"/>
+                <a16:creationId xmlns:a16="http://schemas.microsoft.com/office/drawing/2014/main" id="{F3EBC9DF-B3F8-4137-9ABB-E1AD718623EE}"/>
               </a:ext>
             </a:extLst>
           </p:cNvPr>
@@ -28142,7 +28142,7 @@
           <p:cNvPr id="35" name="">
             <a:extLst xmlns:a="http://schemas.openxmlformats.org/drawingml/2006/main">
               <a:ext uri="{FF2B5EF4-FFF2-40B4-BE49-F238E27FC236}">
-                <a16:creationId xmlns:a16="http://schemas.microsoft.com/office/drawing/2014/main" id="{94D606CC-88F6-464D-910E-70866CFB8B11}"/>
+                <a16:creationId xmlns:a16="http://schemas.microsoft.com/office/drawing/2014/main" id="{37DFC31A-9F4E-44F5-B9F8-40FA52B19670}"/>
               </a:ext>
             </a:extLst>
           </p:cNvPr>
@@ -28202,7 +28202,7 @@
     </p:spTree>
     <p:extLst>
       <p:ext uri="{BB962C8B-B14F-4D97-AF65-F5344CB8AC3E}">
-        <p14:creationId xmlns:p14="http://schemas.microsoft.com/office/powerpoint/2010/main" val="887946126"/>
+        <p14:creationId xmlns:p14="http://schemas.microsoft.com/office/powerpoint/2010/main" val="284140198"/>
       </p:ext>
     </p:extLst>
   </p:cSld>
@@ -28233,7 +28233,7 @@
           <p:cNvPr id="19" name="">
             <a:extLst xmlns:a="http://schemas.openxmlformats.org/drawingml/2006/main">
               <a:ext uri="{FF2B5EF4-FFF2-40B4-BE49-F238E27FC236}">
-                <a16:creationId xmlns:a16="http://schemas.microsoft.com/office/drawing/2014/main" id="{FE0E8578-AD6A-4E6D-B77D-B909CEF65C13}"/>
+                <a16:creationId xmlns:a16="http://schemas.microsoft.com/office/drawing/2014/main" id="{7ACCC0E8-F524-4786-8A26-E5A160314AF5}"/>
               </a:ext>
             </a:extLst>
           </p:cNvPr>
@@ -28295,7 +28295,7 @@
                 <a:latin typeface="Arial"/>
                 <a:ea typeface="Arial"/>
                 <a:cs typeface="Arial"/>
-                <a:hlinkClick xmlns:r="http://schemas.openxmlformats.org/officeDocument/2006/relationships" r:id="Redad30dd30b34513"/>
+                <a:hlinkClick xmlns:r="http://schemas.openxmlformats.org/officeDocument/2006/relationships" r:id="Rd37bc313bf1f439c"/>
               </a:rPr>
               <a:t>https://github.com/qjmre23/Route2Zero</a:t>
             </a:r>
@@ -28318,7 +28318,7 @@
                 <a:latin typeface="Arial"/>
                 <a:ea typeface="Arial"/>
                 <a:cs typeface="Arial"/>
-                <a:hlinkClick xmlns:r="http://schemas.openxmlformats.org/officeDocument/2006/relationships" r:id="R997ac9f2ccc54836"/>
+                <a:hlinkClick xmlns:r="http://schemas.openxmlformats.org/officeDocument/2006/relationships" r:id="Rbcdeb5553cb14dac"/>
               </a:rPr>
               <a:t>https://route2zero.netlify.app/</a:t>
             </a:r>
@@ -28330,7 +28330,7 @@
           <p:cNvPr id="2" name="">
             <a:extLst xmlns:a="http://schemas.openxmlformats.org/drawingml/2006/main">
               <a:ext uri="{FF2B5EF4-FFF2-40B4-BE49-F238E27FC236}">
-                <a16:creationId xmlns:a16="http://schemas.microsoft.com/office/drawing/2014/main" id="{D3E9A091-3436-41C2-AEA7-E0442B682326}"/>
+                <a16:creationId xmlns:a16="http://schemas.microsoft.com/office/drawing/2014/main" id="{BB742B84-9AC5-4D78-A82C-0A2AB6886391}"/>
               </a:ext>
             </a:extLst>
           </p:cNvPr>
@@ -28392,7 +28392,7 @@
           <p:cNvPr id="3" name="">
             <a:extLst xmlns:a="http://schemas.openxmlformats.org/drawingml/2006/main">
               <a:ext uri="{FF2B5EF4-FFF2-40B4-BE49-F238E27FC236}">
-                <a16:creationId xmlns:a16="http://schemas.microsoft.com/office/drawing/2014/main" id="{1C830C2F-2862-457F-8B9C-A6F9654EC1FC}"/>
+                <a16:creationId xmlns:a16="http://schemas.microsoft.com/office/drawing/2014/main" id="{E237FCF7-F363-40C2-8413-E967BCF89D3B}"/>
               </a:ext>
             </a:extLst>
           </p:cNvPr>
@@ -28454,7 +28454,7 @@
           <p:cNvPr id="4" name="">
             <a:extLst xmlns:a="http://schemas.openxmlformats.org/drawingml/2006/main">
               <a:ext uri="{FF2B5EF4-FFF2-40B4-BE49-F238E27FC236}">
-                <a16:creationId xmlns:a16="http://schemas.microsoft.com/office/drawing/2014/main" id="{F5481501-DD52-4EB6-8809-109CBD6ADA38}"/>
+                <a16:creationId xmlns:a16="http://schemas.microsoft.com/office/drawing/2014/main" id="{7AC067E6-9903-4ADF-B3B5-4230FD7A9666}"/>
               </a:ext>
             </a:extLst>
           </p:cNvPr>
@@ -28516,7 +28516,7 @@
           <p:cNvPr id="5" name="">
             <a:extLst xmlns:a="http://schemas.openxmlformats.org/drawingml/2006/main">
               <a:ext uri="{FF2B5EF4-FFF2-40B4-BE49-F238E27FC236}">
-                <a16:creationId xmlns:a16="http://schemas.microsoft.com/office/drawing/2014/main" id="{40038494-9DE3-4AB3-9004-674C5747B12C}"/>
+                <a16:creationId xmlns:a16="http://schemas.microsoft.com/office/drawing/2014/main" id="{25C7239A-BA4A-42A7-816E-161BEF2B8CDF}"/>
               </a:ext>
             </a:extLst>
           </p:cNvPr>
@@ -28547,7 +28547,7 @@
           <p:cNvPr id="6" name="">
             <a:extLst xmlns:a="http://schemas.openxmlformats.org/drawingml/2006/main">
               <a:ext uri="{FF2B5EF4-FFF2-40B4-BE49-F238E27FC236}">
-                <a16:creationId xmlns:a16="http://schemas.microsoft.com/office/drawing/2014/main" id="{B81A7481-E0AE-49E2-9EF9-C062A0A04CFC}"/>
+                <a16:creationId xmlns:a16="http://schemas.microsoft.com/office/drawing/2014/main" id="{312F3164-958C-4145-8655-6D1A27676D04}"/>
               </a:ext>
             </a:extLst>
           </p:cNvPr>
@@ -28672,7 +28672,7 @@
           <p:cNvPr id="7" name="">
             <a:extLst xmlns:a="http://schemas.openxmlformats.org/drawingml/2006/main">
               <a:ext uri="{FF2B5EF4-FFF2-40B4-BE49-F238E27FC236}">
-                <a16:creationId xmlns:a16="http://schemas.microsoft.com/office/drawing/2014/main" id="{677A90AB-3519-4636-A661-BDE64AF4E66D}"/>
+                <a16:creationId xmlns:a16="http://schemas.microsoft.com/office/drawing/2014/main" id="{6F91147E-1504-4852-8B1C-DA5D04B6D536}"/>
               </a:ext>
             </a:extLst>
           </p:cNvPr>
@@ -28734,7 +28734,7 @@
           <p:cNvPr id="8" name="">
             <a:extLst xmlns:a="http://schemas.openxmlformats.org/drawingml/2006/main">
               <a:ext uri="{FF2B5EF4-FFF2-40B4-BE49-F238E27FC236}">
-                <a16:creationId xmlns:a16="http://schemas.microsoft.com/office/drawing/2014/main" id="{221CD14C-6173-4C17-8080-CCA5770947CC}"/>
+                <a16:creationId xmlns:a16="http://schemas.microsoft.com/office/drawing/2014/main" id="{3E2371BB-2248-49A8-93BB-4D1060BFC633}"/>
               </a:ext>
             </a:extLst>
           </p:cNvPr>
@@ -28765,7 +28765,7 @@
           <p:cNvPr id="9" name="">
             <a:extLst xmlns:a="http://schemas.openxmlformats.org/drawingml/2006/main">
               <a:ext uri="{FF2B5EF4-FFF2-40B4-BE49-F238E27FC236}">
-                <a16:creationId xmlns:a16="http://schemas.microsoft.com/office/drawing/2014/main" id="{08B6D2EF-854A-4F6E-9F05-110881EA5D53}"/>
+                <a16:creationId xmlns:a16="http://schemas.microsoft.com/office/drawing/2014/main" id="{1B574CB8-761D-46EE-8DD5-B099510F8E11}"/>
               </a:ext>
             </a:extLst>
           </p:cNvPr>
@@ -28890,7 +28890,7 @@
           <p:cNvPr id="10" name="">
             <a:extLst xmlns:a="http://schemas.openxmlformats.org/drawingml/2006/main">
               <a:ext uri="{FF2B5EF4-FFF2-40B4-BE49-F238E27FC236}">
-                <a16:creationId xmlns:a16="http://schemas.microsoft.com/office/drawing/2014/main" id="{3981438F-A585-4D0B-8B3D-D13C583584D8}"/>
+                <a16:creationId xmlns:a16="http://schemas.microsoft.com/office/drawing/2014/main" id="{4F8856B2-4CBB-4DEB-809D-877EA190CD69}"/>
               </a:ext>
             </a:extLst>
           </p:cNvPr>
@@ -28952,7 +28952,7 @@
           <p:cNvPr id="11" name="">
             <a:extLst xmlns:a="http://schemas.openxmlformats.org/drawingml/2006/main">
               <a:ext uri="{FF2B5EF4-FFF2-40B4-BE49-F238E27FC236}">
-                <a16:creationId xmlns:a16="http://schemas.microsoft.com/office/drawing/2014/main" id="{1FC0A6BE-305D-45B7-9A23-421FBBADC45B}"/>
+                <a16:creationId xmlns:a16="http://schemas.microsoft.com/office/drawing/2014/main" id="{F8A35D3B-B4A4-4FB7-8DCB-7F7D80C4E12D}"/>
               </a:ext>
             </a:extLst>
           </p:cNvPr>
@@ -28983,7 +28983,7 @@
           <p:cNvPr id="12" name="">
             <a:extLst xmlns:a="http://schemas.openxmlformats.org/drawingml/2006/main">
               <a:ext uri="{FF2B5EF4-FFF2-40B4-BE49-F238E27FC236}">
-                <a16:creationId xmlns:a16="http://schemas.microsoft.com/office/drawing/2014/main" id="{9D1841B5-F4D3-4C15-9631-253B9A85966A}"/>
+                <a16:creationId xmlns:a16="http://schemas.microsoft.com/office/drawing/2014/main" id="{9B2BC6A2-D55C-4E7C-A5AB-84C118A631DA}"/>
               </a:ext>
             </a:extLst>
           </p:cNvPr>
@@ -29108,7 +29108,7 @@
           <p:cNvPr id="13" name="">
             <a:extLst xmlns:a="http://schemas.openxmlformats.org/drawingml/2006/main">
               <a:ext uri="{FF2B5EF4-FFF2-40B4-BE49-F238E27FC236}">
-                <a16:creationId xmlns:a16="http://schemas.microsoft.com/office/drawing/2014/main" id="{CB81B30F-59EE-4D45-9BA6-32EE19783EFF}"/>
+                <a16:creationId xmlns:a16="http://schemas.microsoft.com/office/drawing/2014/main" id="{17C4C5F3-4471-4990-A424-CEE7E95B4C37}"/>
               </a:ext>
             </a:extLst>
           </p:cNvPr>
@@ -29141,7 +29141,7 @@
           <p:cNvPr id="14" name="">
             <a:extLst xmlns:a="http://schemas.openxmlformats.org/drawingml/2006/main">
               <a:ext uri="{FF2B5EF4-FFF2-40B4-BE49-F238E27FC236}">
-                <a16:creationId xmlns:a16="http://schemas.microsoft.com/office/drawing/2014/main" id="{24103DBA-F5A7-4D11-92A0-AC0BFAF0280F}"/>
+                <a16:creationId xmlns:a16="http://schemas.microsoft.com/office/drawing/2014/main" id="{C08B9600-9112-430F-8351-EBD077F5D961}"/>
               </a:ext>
             </a:extLst>
           </p:cNvPr>
@@ -29203,7 +29203,7 @@
           <p:cNvPr id="15" name="">
             <a:extLst xmlns:a="http://schemas.openxmlformats.org/drawingml/2006/main">
               <a:ext uri="{FF2B5EF4-FFF2-40B4-BE49-F238E27FC236}">
-                <a16:creationId xmlns:a16="http://schemas.microsoft.com/office/drawing/2014/main" id="{3DB712D8-0B22-48C5-9AA3-C68DA23CE5E1}"/>
+                <a16:creationId xmlns:a16="http://schemas.microsoft.com/office/drawing/2014/main" id="{662F245E-3633-4AD6-B00D-0AA7CC27E00F}"/>
               </a:ext>
             </a:extLst>
           </p:cNvPr>
@@ -29265,7 +29265,7 @@
           <p:cNvPr id="16" name="">
             <a:extLst xmlns:a="http://schemas.openxmlformats.org/drawingml/2006/main">
               <a:ext uri="{FF2B5EF4-FFF2-40B4-BE49-F238E27FC236}">
-                <a16:creationId xmlns:a16="http://schemas.microsoft.com/office/drawing/2014/main" id="{BDC7F60F-1358-4D64-B419-AC0929A5E12F}"/>
+                <a16:creationId xmlns:a16="http://schemas.microsoft.com/office/drawing/2014/main" id="{4388A1D8-57CD-4167-A41A-FB78EC6E1F4E}"/>
               </a:ext>
             </a:extLst>
           </p:cNvPr>
@@ -29296,7 +29296,7 @@
           <p:cNvPr id="17" name="">
             <a:extLst xmlns:a="http://schemas.openxmlformats.org/drawingml/2006/main">
               <a:ext uri="{FF2B5EF4-FFF2-40B4-BE49-F238E27FC236}">
-                <a16:creationId xmlns:a16="http://schemas.microsoft.com/office/drawing/2014/main" id="{7173E6AA-B320-4409-B837-6A7A61EBC142}"/>
+                <a16:creationId xmlns:a16="http://schemas.microsoft.com/office/drawing/2014/main" id="{7EA7CDD9-34C9-4004-839A-E8ADFFAEDDCF}"/>
               </a:ext>
             </a:extLst>
           </p:cNvPr>
@@ -29358,7 +29358,7 @@
           <p:cNvPr id="18" name="">
             <a:extLst xmlns:a="http://schemas.openxmlformats.org/drawingml/2006/main">
               <a:ext uri="{FF2B5EF4-FFF2-40B4-BE49-F238E27FC236}">
-                <a16:creationId xmlns:a16="http://schemas.microsoft.com/office/drawing/2014/main" id="{03FD87BF-5E4B-4B74-8EDC-B996A5891C58}"/>
+                <a16:creationId xmlns:a16="http://schemas.microsoft.com/office/drawing/2014/main" id="{E7E0C8DB-969D-4A57-8B3D-FB2535506D59}"/>
               </a:ext>
             </a:extLst>
           </p:cNvPr>
@@ -29418,7 +29418,7 @@
     </p:spTree>
     <p:extLst>
       <p:ext uri="{BB962C8B-B14F-4D97-AF65-F5344CB8AC3E}">
-        <p14:creationId xmlns:p14="http://schemas.microsoft.com/office/powerpoint/2010/main" val="184383671"/>
+        <p14:creationId xmlns:p14="http://schemas.microsoft.com/office/powerpoint/2010/main" val="83154929"/>
       </p:ext>
     </p:extLst>
   </p:cSld>
@@ -29449,7 +29449,7 @@
           <p:cNvPr id="44" name="">
             <a:extLst xmlns:a="http://schemas.openxmlformats.org/drawingml/2006/main">
               <a:ext uri="{FF2B5EF4-FFF2-40B4-BE49-F238E27FC236}">
-                <a16:creationId xmlns:a16="http://schemas.microsoft.com/office/drawing/2014/main" id="{330C18D7-9024-41C1-A6F1-DB7C9877B21A}"/>
+                <a16:creationId xmlns:a16="http://schemas.microsoft.com/office/drawing/2014/main" id="{C3E6B79C-4BB7-46B9-B47E-3400812DF714}"/>
               </a:ext>
             </a:extLst>
           </p:cNvPr>
@@ -29511,7 +29511,7 @@
                 <a:latin typeface="Arial"/>
                 <a:ea typeface="Arial"/>
                 <a:cs typeface="Arial"/>
-                <a:hlinkClick xmlns:r="http://schemas.openxmlformats.org/officeDocument/2006/relationships" r:id="R769fbdb87856464f"/>
+                <a:hlinkClick xmlns:r="http://schemas.openxmlformats.org/officeDocument/2006/relationships" r:id="R3d562fc7c6b64dda"/>
               </a:rPr>
               <a:t>https://github.com/qjmre23/Route2Zero</a:t>
             </a:r>
@@ -29534,7 +29534,7 @@
                 <a:latin typeface="Arial"/>
                 <a:ea typeface="Arial"/>
                 <a:cs typeface="Arial"/>
-                <a:hlinkClick xmlns:r="http://schemas.openxmlformats.org/officeDocument/2006/relationships" r:id="R905cf07dba4843bb"/>
+                <a:hlinkClick xmlns:r="http://schemas.openxmlformats.org/officeDocument/2006/relationships" r:id="R5d13480d52a14f96"/>
               </a:rPr>
               <a:t>https://route2zero.netlify.app/</a:t>
             </a:r>
@@ -29546,7 +29546,7 @@
           <p:cNvPr id="2" name="">
             <a:extLst xmlns:a="http://schemas.openxmlformats.org/drawingml/2006/main">
               <a:ext uri="{FF2B5EF4-FFF2-40B4-BE49-F238E27FC236}">
-                <a16:creationId xmlns:a16="http://schemas.microsoft.com/office/drawing/2014/main" id="{8FDAC262-5339-4973-A56C-DC18982BF225}"/>
+                <a16:creationId xmlns:a16="http://schemas.microsoft.com/office/drawing/2014/main" id="{815C092F-27C1-4FE8-BEED-DF3C8A179BEB}"/>
               </a:ext>
             </a:extLst>
           </p:cNvPr>
@@ -29608,7 +29608,7 @@
           <p:cNvPr id="3" name="">
             <a:extLst xmlns:a="http://schemas.openxmlformats.org/drawingml/2006/main">
               <a:ext uri="{FF2B5EF4-FFF2-40B4-BE49-F238E27FC236}">
-                <a16:creationId xmlns:a16="http://schemas.microsoft.com/office/drawing/2014/main" id="{5B6D2DE2-4419-407A-AE3C-A456252BDE7E}"/>
+                <a16:creationId xmlns:a16="http://schemas.microsoft.com/office/drawing/2014/main" id="{E709F6D6-F007-4309-9044-6A8866199128}"/>
               </a:ext>
             </a:extLst>
           </p:cNvPr>
@@ -29670,7 +29670,7 @@
           <p:cNvPr id="4" name="">
             <a:extLst xmlns:a="http://schemas.openxmlformats.org/drawingml/2006/main">
               <a:ext uri="{FF2B5EF4-FFF2-40B4-BE49-F238E27FC236}">
-                <a16:creationId xmlns:a16="http://schemas.microsoft.com/office/drawing/2014/main" id="{E07E3533-8BD4-4141-B680-BAE0105740E6}"/>
+                <a16:creationId xmlns:a16="http://schemas.microsoft.com/office/drawing/2014/main" id="{37C2A3C0-491B-4BC2-8D73-A2AB88DA1622}"/>
               </a:ext>
             </a:extLst>
           </p:cNvPr>
@@ -29732,7 +29732,7 @@
           <p:cNvPr id="5" name="">
             <a:extLst xmlns:a="http://schemas.openxmlformats.org/drawingml/2006/main">
               <a:ext uri="{FF2B5EF4-FFF2-40B4-BE49-F238E27FC236}">
-                <a16:creationId xmlns:a16="http://schemas.microsoft.com/office/drawing/2014/main" id="{F9CD9C80-C3D5-4700-ABD6-F31EDC2CB46B}"/>
+                <a16:creationId xmlns:a16="http://schemas.microsoft.com/office/drawing/2014/main" id="{BE57130A-55BA-403C-8611-4BA2EBC4971D}"/>
               </a:ext>
             </a:extLst>
           </p:cNvPr>
@@ -29763,7 +29763,7 @@
           <p:cNvPr id="6" name="">
             <a:extLst xmlns:a="http://schemas.openxmlformats.org/drawingml/2006/main">
               <a:ext uri="{FF2B5EF4-FFF2-40B4-BE49-F238E27FC236}">
-                <a16:creationId xmlns:a16="http://schemas.microsoft.com/office/drawing/2014/main" id="{A56E4172-FF69-485A-8443-010E6904FBF2}"/>
+                <a16:creationId xmlns:a16="http://schemas.microsoft.com/office/drawing/2014/main" id="{110FEDF6-59A4-455B-91F4-C7E6EF0819F0}"/>
               </a:ext>
             </a:extLst>
           </p:cNvPr>
@@ -29825,7 +29825,7 @@
           <p:cNvPr id="7" name="">
             <a:extLst xmlns:a="http://schemas.openxmlformats.org/drawingml/2006/main">
               <a:ext uri="{FF2B5EF4-FFF2-40B4-BE49-F238E27FC236}">
-                <a16:creationId xmlns:a16="http://schemas.microsoft.com/office/drawing/2014/main" id="{ED36E7B6-24BC-4116-A21B-3386F1A7261D}"/>
+                <a16:creationId xmlns:a16="http://schemas.microsoft.com/office/drawing/2014/main" id="{767DB289-7F6B-42D6-9955-BE2520575EC2}"/>
               </a:ext>
             </a:extLst>
           </p:cNvPr>
@@ -29856,7 +29856,7 @@
           <p:cNvPr id="8" name="">
             <a:extLst xmlns:a="http://schemas.openxmlformats.org/drawingml/2006/main">
               <a:ext uri="{FF2B5EF4-FFF2-40B4-BE49-F238E27FC236}">
-                <a16:creationId xmlns:a16="http://schemas.microsoft.com/office/drawing/2014/main" id="{42548348-FEFE-4E97-BD4F-330329CCB29A}"/>
+                <a16:creationId xmlns:a16="http://schemas.microsoft.com/office/drawing/2014/main" id="{387706D7-E0C7-4879-A745-69267B42D961}"/>
               </a:ext>
             </a:extLst>
           </p:cNvPr>
@@ -29918,7 +29918,7 @@
           <p:cNvPr id="9" name="">
             <a:extLst xmlns:a="http://schemas.openxmlformats.org/drawingml/2006/main">
               <a:ext uri="{FF2B5EF4-FFF2-40B4-BE49-F238E27FC236}">
-                <a16:creationId xmlns:a16="http://schemas.microsoft.com/office/drawing/2014/main" id="{8381DA67-2E26-4EA6-BA55-1D78239A94FC}"/>
+                <a16:creationId xmlns:a16="http://schemas.microsoft.com/office/drawing/2014/main" id="{74B1E5FD-4F35-4C3F-957E-813CB4F8188E}"/>
               </a:ext>
             </a:extLst>
           </p:cNvPr>
@@ -29949,7 +29949,7 @@
           <p:cNvPr id="10" name="">
             <a:extLst xmlns:a="http://schemas.openxmlformats.org/drawingml/2006/main">
               <a:ext uri="{FF2B5EF4-FFF2-40B4-BE49-F238E27FC236}">
-                <a16:creationId xmlns:a16="http://schemas.microsoft.com/office/drawing/2014/main" id="{B43B245D-8068-4A8F-859A-C2F094215358}"/>
+                <a16:creationId xmlns:a16="http://schemas.microsoft.com/office/drawing/2014/main" id="{56F7FE88-A3DC-423E-9E8F-AE9B3A1273A5}"/>
               </a:ext>
             </a:extLst>
           </p:cNvPr>
@@ -30011,7 +30011,7 @@
           <p:cNvPr id="11" name="">
             <a:extLst xmlns:a="http://schemas.openxmlformats.org/drawingml/2006/main">
               <a:ext uri="{FF2B5EF4-FFF2-40B4-BE49-F238E27FC236}">
-                <a16:creationId xmlns:a16="http://schemas.microsoft.com/office/drawing/2014/main" id="{A99EBA4E-A10D-4C4A-9FD5-58D8C9D0506A}"/>
+                <a16:creationId xmlns:a16="http://schemas.microsoft.com/office/drawing/2014/main" id="{9F78A4C5-C546-4834-8F6B-47797A910A02}"/>
               </a:ext>
             </a:extLst>
           </p:cNvPr>
@@ -30042,7 +30042,7 @@
           <p:cNvPr id="12" name="">
             <a:extLst xmlns:a="http://schemas.openxmlformats.org/drawingml/2006/main">
               <a:ext uri="{FF2B5EF4-FFF2-40B4-BE49-F238E27FC236}">
-                <a16:creationId xmlns:a16="http://schemas.microsoft.com/office/drawing/2014/main" id="{41E50DD9-99DB-434A-8CBD-ADEA2DB131B1}"/>
+                <a16:creationId xmlns:a16="http://schemas.microsoft.com/office/drawing/2014/main" id="{E08842B1-2605-44D5-B182-42CFE1B2DA2F}"/>
               </a:ext>
             </a:extLst>
           </p:cNvPr>
@@ -30104,7 +30104,7 @@
           <p:cNvPr id="13" name="">
             <a:extLst xmlns:a="http://schemas.openxmlformats.org/drawingml/2006/main">
               <a:ext uri="{FF2B5EF4-FFF2-40B4-BE49-F238E27FC236}">
-                <a16:creationId xmlns:a16="http://schemas.microsoft.com/office/drawing/2014/main" id="{BB870920-A176-4DF4-9A86-6449FA587554}"/>
+                <a16:creationId xmlns:a16="http://schemas.microsoft.com/office/drawing/2014/main" id="{E01094CB-A1E6-4C98-8015-D21F98C66368}"/>
               </a:ext>
             </a:extLst>
           </p:cNvPr>
@@ -30135,7 +30135,7 @@
           <p:cNvPr id="14" name="">
             <a:extLst xmlns:a="http://schemas.openxmlformats.org/drawingml/2006/main">
               <a:ext uri="{FF2B5EF4-FFF2-40B4-BE49-F238E27FC236}">
-                <a16:creationId xmlns:a16="http://schemas.microsoft.com/office/drawing/2014/main" id="{82886D69-CBE1-47FA-9B4F-0A9847169305}"/>
+                <a16:creationId xmlns:a16="http://schemas.microsoft.com/office/drawing/2014/main" id="{C1E571E8-B431-4506-BF23-965613CD8A33}"/>
               </a:ext>
             </a:extLst>
           </p:cNvPr>
@@ -30197,7 +30197,7 @@
           <p:cNvPr id="15" name="">
             <a:extLst xmlns:a="http://schemas.openxmlformats.org/drawingml/2006/main">
               <a:ext uri="{FF2B5EF4-FFF2-40B4-BE49-F238E27FC236}">
-                <a16:creationId xmlns:a16="http://schemas.microsoft.com/office/drawing/2014/main" id="{28CA4EF8-018D-4986-837C-FAE8F10EA218}"/>
+                <a16:creationId xmlns:a16="http://schemas.microsoft.com/office/drawing/2014/main" id="{C2AD5902-D43D-4375-943B-B5648C5D61A0}"/>
               </a:ext>
             </a:extLst>
           </p:cNvPr>
@@ -30228,7 +30228,7 @@
           <p:cNvPr id="16" name="">
             <a:extLst xmlns:a="http://schemas.openxmlformats.org/drawingml/2006/main">
               <a:ext uri="{FF2B5EF4-FFF2-40B4-BE49-F238E27FC236}">
-                <a16:creationId xmlns:a16="http://schemas.microsoft.com/office/drawing/2014/main" id="{30350E5C-9127-4584-BC90-0182FDFFC65F}"/>
+                <a16:creationId xmlns:a16="http://schemas.microsoft.com/office/drawing/2014/main" id="{7F3D6A6A-5268-4437-A5CA-343F6C738E79}"/>
               </a:ext>
             </a:extLst>
           </p:cNvPr>
@@ -30290,7 +30290,7 @@
           <p:cNvPr id="17" name="">
             <a:extLst xmlns:a="http://schemas.openxmlformats.org/drawingml/2006/main">
               <a:ext uri="{FF2B5EF4-FFF2-40B4-BE49-F238E27FC236}">
-                <a16:creationId xmlns:a16="http://schemas.microsoft.com/office/drawing/2014/main" id="{6711CB70-7C7E-4819-89DA-F2D5A83A3E2C}"/>
+                <a16:creationId xmlns:a16="http://schemas.microsoft.com/office/drawing/2014/main" id="{AFC73085-89E9-494B-A885-A2AC452FE91C}"/>
               </a:ext>
             </a:extLst>
           </p:cNvPr>
@@ -30321,7 +30321,7 @@
           <p:cNvPr id="18" name="">
             <a:extLst xmlns:a="http://schemas.openxmlformats.org/drawingml/2006/main">
               <a:ext uri="{FF2B5EF4-FFF2-40B4-BE49-F238E27FC236}">
-                <a16:creationId xmlns:a16="http://schemas.microsoft.com/office/drawing/2014/main" id="{B9763F9E-2245-4A44-B7D5-B6A710F7DD4E}"/>
+                <a16:creationId xmlns:a16="http://schemas.microsoft.com/office/drawing/2014/main" id="{03C1E972-5B5E-482C-9407-B37384B220A4}"/>
               </a:ext>
             </a:extLst>
           </p:cNvPr>
@@ -30383,7 +30383,7 @@
           <p:cNvPr id="19" name="">
             <a:extLst xmlns:a="http://schemas.openxmlformats.org/drawingml/2006/main">
               <a:ext uri="{FF2B5EF4-FFF2-40B4-BE49-F238E27FC236}">
-                <a16:creationId xmlns:a16="http://schemas.microsoft.com/office/drawing/2014/main" id="{B050E5D2-3D7B-422D-AD14-3375D261D09A}"/>
+                <a16:creationId xmlns:a16="http://schemas.microsoft.com/office/drawing/2014/main" id="{17E64FE1-90DA-4FBE-82D5-15D3F80A27D3}"/>
               </a:ext>
             </a:extLst>
           </p:cNvPr>
@@ -30418,7 +30418,7 @@
           <p:cNvPr id="20" name="">
             <a:extLst xmlns:a="http://schemas.openxmlformats.org/drawingml/2006/main">
               <a:ext uri="{FF2B5EF4-FFF2-40B4-BE49-F238E27FC236}">
-                <a16:creationId xmlns:a16="http://schemas.microsoft.com/office/drawing/2014/main" id="{92003E88-C8DA-4BE6-8CE6-3A15D218A963}"/>
+                <a16:creationId xmlns:a16="http://schemas.microsoft.com/office/drawing/2014/main" id="{E97C660F-3618-457D-8925-6CB6DC5A218C}"/>
               </a:ext>
             </a:extLst>
           </p:cNvPr>
@@ -30480,7 +30480,7 @@
           <p:cNvPr id="21" name="">
             <a:extLst xmlns:a="http://schemas.openxmlformats.org/drawingml/2006/main">
               <a:ext uri="{FF2B5EF4-FFF2-40B4-BE49-F238E27FC236}">
-                <a16:creationId xmlns:a16="http://schemas.microsoft.com/office/drawing/2014/main" id="{E224BAC6-5012-44EF-A23E-CB6E0B5DD281}"/>
+                <a16:creationId xmlns:a16="http://schemas.microsoft.com/office/drawing/2014/main" id="{C6B1DFE8-0E9D-418F-9371-F67F4F548ABE}"/>
               </a:ext>
             </a:extLst>
           </p:cNvPr>
@@ -30515,7 +30515,7 @@
           <p:cNvPr id="22" name="">
             <a:extLst xmlns:a="http://schemas.openxmlformats.org/drawingml/2006/main">
               <a:ext uri="{FF2B5EF4-FFF2-40B4-BE49-F238E27FC236}">
-                <a16:creationId xmlns:a16="http://schemas.microsoft.com/office/drawing/2014/main" id="{A2FBE094-F2F2-4B98-8D54-3E719CB084E5}"/>
+                <a16:creationId xmlns:a16="http://schemas.microsoft.com/office/drawing/2014/main" id="{B8BFA872-66C9-4C27-BCC8-A103200B24DF}"/>
               </a:ext>
             </a:extLst>
           </p:cNvPr>
@@ -30577,7 +30577,7 @@
           <p:cNvPr id="23" name="">
             <a:extLst xmlns:a="http://schemas.openxmlformats.org/drawingml/2006/main">
               <a:ext uri="{FF2B5EF4-FFF2-40B4-BE49-F238E27FC236}">
-                <a16:creationId xmlns:a16="http://schemas.microsoft.com/office/drawing/2014/main" id="{040A113F-2B5B-4EF9-8BF9-0432D130CD06}"/>
+                <a16:creationId xmlns:a16="http://schemas.microsoft.com/office/drawing/2014/main" id="{1ADEC1AA-01A1-4EAB-A73F-5198222DFD4B}"/>
               </a:ext>
             </a:extLst>
           </p:cNvPr>
@@ -30612,7 +30612,7 @@
           <p:cNvPr id="24" name="">
             <a:extLst xmlns:a="http://schemas.openxmlformats.org/drawingml/2006/main">
               <a:ext uri="{FF2B5EF4-FFF2-40B4-BE49-F238E27FC236}">
-                <a16:creationId xmlns:a16="http://schemas.microsoft.com/office/drawing/2014/main" id="{B6E93D5F-4679-4530-8484-89A91F546EF3}"/>
+                <a16:creationId xmlns:a16="http://schemas.microsoft.com/office/drawing/2014/main" id="{0EA9546E-0B1F-452B-8D95-3E170787C5A0}"/>
               </a:ext>
             </a:extLst>
           </p:cNvPr>
@@ -30674,7 +30674,7 @@
           <p:cNvPr id="25" name="">
             <a:extLst xmlns:a="http://schemas.openxmlformats.org/drawingml/2006/main">
               <a:ext uri="{FF2B5EF4-FFF2-40B4-BE49-F238E27FC236}">
-                <a16:creationId xmlns:a16="http://schemas.microsoft.com/office/drawing/2014/main" id="{E7D9ACA8-E4DC-4D94-8AAD-353214062D45}"/>
+                <a16:creationId xmlns:a16="http://schemas.microsoft.com/office/drawing/2014/main" id="{01F0352E-4EA8-4124-ADDF-0A74731E160A}"/>
               </a:ext>
             </a:extLst>
           </p:cNvPr>
@@ -30709,7 +30709,7 @@
           <p:cNvPr id="26" name="">
             <a:extLst xmlns:a="http://schemas.openxmlformats.org/drawingml/2006/main">
               <a:ext uri="{FF2B5EF4-FFF2-40B4-BE49-F238E27FC236}">
-                <a16:creationId xmlns:a16="http://schemas.microsoft.com/office/drawing/2014/main" id="{39E6B97F-A633-46F2-8F31-4EBFD2F830CE}"/>
+                <a16:creationId xmlns:a16="http://schemas.microsoft.com/office/drawing/2014/main" id="{D60EEA96-1F7A-4EC6-838F-3628BE60B9ED}"/>
               </a:ext>
             </a:extLst>
           </p:cNvPr>
@@ -30771,7 +30771,7 @@
           <p:cNvPr id="27" name="">
             <a:extLst xmlns:a="http://schemas.openxmlformats.org/drawingml/2006/main">
               <a:ext uri="{FF2B5EF4-FFF2-40B4-BE49-F238E27FC236}">
-                <a16:creationId xmlns:a16="http://schemas.microsoft.com/office/drawing/2014/main" id="{9E1089F1-5BB2-42F3-B39F-0961DEDBB5AC}"/>
+                <a16:creationId xmlns:a16="http://schemas.microsoft.com/office/drawing/2014/main" id="{0AD7438F-351D-4410-B452-D41C0E4B0A5B}"/>
               </a:ext>
             </a:extLst>
           </p:cNvPr>
@@ -30806,7 +30806,7 @@
           <p:cNvPr id="28" name="">
             <a:extLst xmlns:a="http://schemas.openxmlformats.org/drawingml/2006/main">
               <a:ext uri="{FF2B5EF4-FFF2-40B4-BE49-F238E27FC236}">
-                <a16:creationId xmlns:a16="http://schemas.microsoft.com/office/drawing/2014/main" id="{FB33DAD5-7D5B-49DC-BF19-783045712770}"/>
+                <a16:creationId xmlns:a16="http://schemas.microsoft.com/office/drawing/2014/main" id="{B43C7680-A124-4AE4-8FC6-4212352D0E8F}"/>
               </a:ext>
             </a:extLst>
           </p:cNvPr>
@@ -30868,7 +30868,7 @@
           <p:cNvPr id="29" name="">
             <a:extLst xmlns:a="http://schemas.openxmlformats.org/drawingml/2006/main">
               <a:ext uri="{FF2B5EF4-FFF2-40B4-BE49-F238E27FC236}">
-                <a16:creationId xmlns:a16="http://schemas.microsoft.com/office/drawing/2014/main" id="{EFA3E2EE-1CE5-4CA4-A600-EA05893FDA5B}"/>
+                <a16:creationId xmlns:a16="http://schemas.microsoft.com/office/drawing/2014/main" id="{C959BDF2-A203-4646-A76A-54CFBD3F15C8}"/>
               </a:ext>
             </a:extLst>
           </p:cNvPr>
@@ -30903,7 +30903,7 @@
           <p:cNvPr id="30" name="">
             <a:extLst xmlns:a="http://schemas.openxmlformats.org/drawingml/2006/main">
               <a:ext uri="{FF2B5EF4-FFF2-40B4-BE49-F238E27FC236}">
-                <a16:creationId xmlns:a16="http://schemas.microsoft.com/office/drawing/2014/main" id="{55F7E0CE-FD48-4663-9964-4BE94F742EA7}"/>
+                <a16:creationId xmlns:a16="http://schemas.microsoft.com/office/drawing/2014/main" id="{9497A196-ADF3-4E81-8BEE-8D1C3960F414}"/>
               </a:ext>
             </a:extLst>
           </p:cNvPr>
@@ -30965,7 +30965,7 @@
           <p:cNvPr id="31" name="">
             <a:extLst xmlns:a="http://schemas.openxmlformats.org/drawingml/2006/main">
               <a:ext uri="{FF2B5EF4-FFF2-40B4-BE49-F238E27FC236}">
-                <a16:creationId xmlns:a16="http://schemas.microsoft.com/office/drawing/2014/main" id="{E3BB4E42-C340-4162-9B4B-184ACFF61D58}"/>
+                <a16:creationId xmlns:a16="http://schemas.microsoft.com/office/drawing/2014/main" id="{9356DA9D-AC47-424E-B8F1-E1C73DB9042D}"/>
               </a:ext>
             </a:extLst>
           </p:cNvPr>
@@ -31000,7 +31000,7 @@
           <p:cNvPr id="32" name="">
             <a:extLst xmlns:a="http://schemas.openxmlformats.org/drawingml/2006/main">
               <a:ext uri="{FF2B5EF4-FFF2-40B4-BE49-F238E27FC236}">
-                <a16:creationId xmlns:a16="http://schemas.microsoft.com/office/drawing/2014/main" id="{88F64313-BF2A-41F7-BBCA-3B576B380F43}"/>
+                <a16:creationId xmlns:a16="http://schemas.microsoft.com/office/drawing/2014/main" id="{0619406E-630A-473E-B5EB-3A52FC880796}"/>
               </a:ext>
             </a:extLst>
           </p:cNvPr>
@@ -31062,7 +31062,7 @@
           <p:cNvPr id="33" name="">
             <a:extLst xmlns:a="http://schemas.openxmlformats.org/drawingml/2006/main">
               <a:ext uri="{FF2B5EF4-FFF2-40B4-BE49-F238E27FC236}">
-                <a16:creationId xmlns:a16="http://schemas.microsoft.com/office/drawing/2014/main" id="{FE5D7B71-4EBE-4548-9229-00039DC882FA}"/>
+                <a16:creationId xmlns:a16="http://schemas.microsoft.com/office/drawing/2014/main" id="{AB3FC1E3-4188-4CBB-A697-DCE57BEC73D9}"/>
               </a:ext>
             </a:extLst>
           </p:cNvPr>
@@ -31097,7 +31097,7 @@
           <p:cNvPr id="34" name="">
             <a:extLst xmlns:a="http://schemas.openxmlformats.org/drawingml/2006/main">
               <a:ext uri="{FF2B5EF4-FFF2-40B4-BE49-F238E27FC236}">
-                <a16:creationId xmlns:a16="http://schemas.microsoft.com/office/drawing/2014/main" id="{BB23EAE6-F2DA-4DCB-865E-D615469AA930}"/>
+                <a16:creationId xmlns:a16="http://schemas.microsoft.com/office/drawing/2014/main" id="{C073DD21-171B-4290-8529-36D6E8BE1CC8}"/>
               </a:ext>
             </a:extLst>
           </p:cNvPr>
@@ -31159,7 +31159,7 @@
           <p:cNvPr id="35" name="">
             <a:extLst xmlns:a="http://schemas.openxmlformats.org/drawingml/2006/main">
               <a:ext uri="{FF2B5EF4-FFF2-40B4-BE49-F238E27FC236}">
-                <a16:creationId xmlns:a16="http://schemas.microsoft.com/office/drawing/2014/main" id="{ECDAD92F-8B23-4606-A2D9-B77C357EF616}"/>
+                <a16:creationId xmlns:a16="http://schemas.microsoft.com/office/drawing/2014/main" id="{4226E0A1-31E4-43A8-B320-324C1994D381}"/>
               </a:ext>
             </a:extLst>
           </p:cNvPr>
@@ -31221,7 +31221,7 @@
           <p:cNvPr id="36" name="">
             <a:extLst xmlns:a="http://schemas.openxmlformats.org/drawingml/2006/main">
               <a:ext uri="{FF2B5EF4-FFF2-40B4-BE49-F238E27FC236}">
-                <a16:creationId xmlns:a16="http://schemas.microsoft.com/office/drawing/2014/main" id="{C78731DC-C38A-4D26-A0EB-97C8DFD5B7B9}"/>
+                <a16:creationId xmlns:a16="http://schemas.microsoft.com/office/drawing/2014/main" id="{7FD7885C-734C-4AC4-95F6-B333D6EBD27D}"/>
               </a:ext>
             </a:extLst>
           </p:cNvPr>
@@ -31283,7 +31283,7 @@
           <p:cNvPr id="37" name="">
             <a:extLst xmlns:a="http://schemas.openxmlformats.org/drawingml/2006/main">
               <a:ext uri="{FF2B5EF4-FFF2-40B4-BE49-F238E27FC236}">
-                <a16:creationId xmlns:a16="http://schemas.microsoft.com/office/drawing/2014/main" id="{AEFD0D03-CA8C-4AB6-A058-40B43E6EE813}"/>
+                <a16:creationId xmlns:a16="http://schemas.microsoft.com/office/drawing/2014/main" id="{57BDB0EB-7E0D-412B-835E-DAB891BA6FC8}"/>
               </a:ext>
             </a:extLst>
           </p:cNvPr>
@@ -31345,7 +31345,7 @@
           <p:cNvPr id="38" name="">
             <a:extLst xmlns:a="http://schemas.openxmlformats.org/drawingml/2006/main">
               <a:ext uri="{FF2B5EF4-FFF2-40B4-BE49-F238E27FC236}">
-                <a16:creationId xmlns:a16="http://schemas.microsoft.com/office/drawing/2014/main" id="{B171655C-1497-4678-AC0D-74E273C1C699}"/>
+                <a16:creationId xmlns:a16="http://schemas.microsoft.com/office/drawing/2014/main" id="{4B99F7AC-C34D-4B53-9F7F-CC76953DDB95}"/>
               </a:ext>
             </a:extLst>
           </p:cNvPr>
@@ -31407,7 +31407,7 @@
           <p:cNvPr id="39" name="">
             <a:extLst xmlns:a="http://schemas.openxmlformats.org/drawingml/2006/main">
               <a:ext uri="{FF2B5EF4-FFF2-40B4-BE49-F238E27FC236}">
-                <a16:creationId xmlns:a16="http://schemas.microsoft.com/office/drawing/2014/main" id="{7833E8C4-0545-4063-94F7-C0ACABB929DF}"/>
+                <a16:creationId xmlns:a16="http://schemas.microsoft.com/office/drawing/2014/main" id="{6E759CBD-CF0C-4924-A9A4-B59E02A9BECC}"/>
               </a:ext>
             </a:extLst>
           </p:cNvPr>
@@ -31469,7 +31469,7 @@
           <p:cNvPr id="40" name="">
             <a:extLst xmlns:a="http://schemas.openxmlformats.org/drawingml/2006/main">
               <a:ext uri="{FF2B5EF4-FFF2-40B4-BE49-F238E27FC236}">
-                <a16:creationId xmlns:a16="http://schemas.microsoft.com/office/drawing/2014/main" id="{09DBB9AE-EB21-44B7-A2E6-0688893D06DE}"/>
+                <a16:creationId xmlns:a16="http://schemas.microsoft.com/office/drawing/2014/main" id="{51C10676-AD79-45D0-9009-B57E5F2AFFCC}"/>
               </a:ext>
             </a:extLst>
           </p:cNvPr>
@@ -31521,7 +31521,7 @@
                 <a:ea typeface="Arial"/>
                 <a:cs typeface="Arial"/>
               </a:rPr>
-              <a:t>Build r2z-45c4ba076af9 · generated 20 Aug 2026 · 06:25 UTC · model service-v1-266e0b1d</a:t>
+              <a:t>Build r2z-45c4ba076af9 · generated 20 Aug 2026 · 06:49 UTC · model service-v1-266e0b1d</a:t>
             </a:r>
           </a:p>
         </p:txBody>
@@ -31531,7 +31531,7 @@
           <p:cNvPr id="41" name="">
             <a:extLst xmlns:a="http://schemas.openxmlformats.org/drawingml/2006/main">
               <a:ext uri="{FF2B5EF4-FFF2-40B4-BE49-F238E27FC236}">
-                <a16:creationId xmlns:a16="http://schemas.microsoft.com/office/drawing/2014/main" id="{14701842-86D6-43C2-A382-42FF762D978C}"/>
+                <a16:creationId xmlns:a16="http://schemas.microsoft.com/office/drawing/2014/main" id="{FE6257D9-ABA8-4565-84F1-0B5B66AFD10E}"/>
               </a:ext>
             </a:extLst>
           </p:cNvPr>
@@ -31562,7 +31562,7 @@
           <p:cNvPr id="42" name="">
             <a:extLst xmlns:a="http://schemas.openxmlformats.org/drawingml/2006/main">
               <a:ext uri="{FF2B5EF4-FFF2-40B4-BE49-F238E27FC236}">
-                <a16:creationId xmlns:a16="http://schemas.microsoft.com/office/drawing/2014/main" id="{19E28D1B-596D-462B-966E-510E238E61CF}"/>
+                <a16:creationId xmlns:a16="http://schemas.microsoft.com/office/drawing/2014/main" id="{B0FCA7DD-8D27-4EAE-A945-A921B9E2F98C}"/>
               </a:ext>
             </a:extLst>
           </p:cNvPr>
@@ -31624,7 +31624,7 @@
           <p:cNvPr id="43" name="">
             <a:extLst xmlns:a="http://schemas.openxmlformats.org/drawingml/2006/main">
               <a:ext uri="{FF2B5EF4-FFF2-40B4-BE49-F238E27FC236}">
-                <a16:creationId xmlns:a16="http://schemas.microsoft.com/office/drawing/2014/main" id="{7934E377-DB3E-4261-8BE1-6C28A716DB4B}"/>
+                <a16:creationId xmlns:a16="http://schemas.microsoft.com/office/drawing/2014/main" id="{933D6E7A-AD88-4DFB-AC0B-8F2308B8A1E2}"/>
               </a:ext>
             </a:extLst>
           </p:cNvPr>
@@ -31684,7 +31684,7 @@
     </p:spTree>
     <p:extLst>
       <p:ext uri="{BB962C8B-B14F-4D97-AF65-F5344CB8AC3E}">
-        <p14:creationId xmlns:p14="http://schemas.microsoft.com/office/powerpoint/2010/main" val="1239244015"/>
+        <p14:creationId xmlns:p14="http://schemas.microsoft.com/office/powerpoint/2010/main" val="1446703747"/>
       </p:ext>
     </p:extLst>
   </p:cSld>
@@ -31715,7 +31715,7 @@
           <p:cNvPr id="22" name="">
             <a:extLst xmlns:a="http://schemas.openxmlformats.org/drawingml/2006/main">
               <a:ext uri="{FF2B5EF4-FFF2-40B4-BE49-F238E27FC236}">
-                <a16:creationId xmlns:a16="http://schemas.microsoft.com/office/drawing/2014/main" id="{136880BE-635B-46CE-84E0-7173C2435400}"/>
+                <a16:creationId xmlns:a16="http://schemas.microsoft.com/office/drawing/2014/main" id="{3AE13138-0652-46E0-B769-7B3A7E903DB8}"/>
               </a:ext>
             </a:extLst>
           </p:cNvPr>
@@ -31777,7 +31777,7 @@
                 <a:latin typeface="Arial"/>
                 <a:ea typeface="Arial"/>
                 <a:cs typeface="Arial"/>
-                <a:hlinkClick xmlns:r="http://schemas.openxmlformats.org/officeDocument/2006/relationships" r:id="Ree6d049b12b348a5"/>
+                <a:hlinkClick xmlns:r="http://schemas.openxmlformats.org/officeDocument/2006/relationships" r:id="R9e03ad481d1c4500"/>
               </a:rPr>
               <a:t>https://github.com/qjmre23/Route2Zero</a:t>
             </a:r>
@@ -31800,7 +31800,7 @@
                 <a:latin typeface="Arial"/>
                 <a:ea typeface="Arial"/>
                 <a:cs typeface="Arial"/>
-                <a:hlinkClick xmlns:r="http://schemas.openxmlformats.org/officeDocument/2006/relationships" r:id="R9b8c3c7c4b794ecc"/>
+                <a:hlinkClick xmlns:r="http://schemas.openxmlformats.org/officeDocument/2006/relationships" r:id="R2b40487121b5495a"/>
               </a:rPr>
               <a:t>https://route2zero.netlify.app/</a:t>
             </a:r>
@@ -31812,7 +31812,7 @@
           <p:cNvPr id="2" name="">
             <a:extLst xmlns:a="http://schemas.openxmlformats.org/drawingml/2006/main">
               <a:ext uri="{FF2B5EF4-FFF2-40B4-BE49-F238E27FC236}">
-                <a16:creationId xmlns:a16="http://schemas.microsoft.com/office/drawing/2014/main" id="{85F5BFC2-EDE5-4FCE-AED0-AC93621FBAE8}"/>
+                <a16:creationId xmlns:a16="http://schemas.microsoft.com/office/drawing/2014/main" id="{73717ED9-956F-4440-BA30-7B336D818985}"/>
               </a:ext>
             </a:extLst>
           </p:cNvPr>
@@ -31874,7 +31874,7 @@
           <p:cNvPr id="3" name="">
             <a:extLst xmlns:a="http://schemas.openxmlformats.org/drawingml/2006/main">
               <a:ext uri="{FF2B5EF4-FFF2-40B4-BE49-F238E27FC236}">
-                <a16:creationId xmlns:a16="http://schemas.microsoft.com/office/drawing/2014/main" id="{A47A01C9-D3D8-4F9D-9ACC-4AB0336A3E4C}"/>
+                <a16:creationId xmlns:a16="http://schemas.microsoft.com/office/drawing/2014/main" id="{3FC81FC2-38B2-4A15-91B5-396E8FEB968D}"/>
               </a:ext>
             </a:extLst>
           </p:cNvPr>
@@ -31943,7 +31943,7 @@
         </p:xfrm>
         <a:graphic xmlns:a="http://schemas.openxmlformats.org/drawingml/2006/main">
           <a:graphicData uri="http://schemas.openxmlformats.org/drawingml/2006/chart">
-            <c:chart xmlns:r="http://schemas.openxmlformats.org/officeDocument/2006/relationships" xmlns:c="http://schemas.openxmlformats.org/drawingml/2006/chart" r:id="Rfb6b44fbac93473b"/>
+            <c:chart xmlns:r="http://schemas.openxmlformats.org/officeDocument/2006/relationships" xmlns:c="http://schemas.openxmlformats.org/drawingml/2006/chart" r:id="R95d7d2cabb03405d"/>
           </a:graphicData>
         </a:graphic>
       </p:graphicFrame>
@@ -31952,7 +31952,7 @@
           <p:cNvPr id="5" name="">
             <a:extLst xmlns:a="http://schemas.openxmlformats.org/drawingml/2006/main">
               <a:ext uri="{FF2B5EF4-FFF2-40B4-BE49-F238E27FC236}">
-                <a16:creationId xmlns:a16="http://schemas.microsoft.com/office/drawing/2014/main" id="{8389A2CB-C799-41E3-A41D-D188914F70AA}"/>
+                <a16:creationId xmlns:a16="http://schemas.microsoft.com/office/drawing/2014/main" id="{1394694A-7147-4A4B-8A34-E8C31B76E49F}"/>
               </a:ext>
             </a:extLst>
           </p:cNvPr>
@@ -32014,7 +32014,7 @@
           <p:cNvPr id="6" name="">
             <a:extLst xmlns:a="http://schemas.openxmlformats.org/drawingml/2006/main">
               <a:ext uri="{FF2B5EF4-FFF2-40B4-BE49-F238E27FC236}">
-                <a16:creationId xmlns:a16="http://schemas.microsoft.com/office/drawing/2014/main" id="{DC775BE5-69FE-4B95-B599-AE6D9209A506}"/>
+                <a16:creationId xmlns:a16="http://schemas.microsoft.com/office/drawing/2014/main" id="{4A8A2F52-0279-45A4-93D0-772889E6C137}"/>
               </a:ext>
             </a:extLst>
           </p:cNvPr>
@@ -32076,7 +32076,7 @@
           <p:cNvPr id="7" name="">
             <a:extLst xmlns:a="http://schemas.openxmlformats.org/drawingml/2006/main">
               <a:ext uri="{FF2B5EF4-FFF2-40B4-BE49-F238E27FC236}">
-                <a16:creationId xmlns:a16="http://schemas.microsoft.com/office/drawing/2014/main" id="{649D5BEF-0082-40E2-AE85-791EB798606A}"/>
+                <a16:creationId xmlns:a16="http://schemas.microsoft.com/office/drawing/2014/main" id="{4CA11FCB-CC6B-4CF9-A8A8-01574D7337BA}"/>
               </a:ext>
             </a:extLst>
           </p:cNvPr>
@@ -32138,7 +32138,7 @@
           <p:cNvPr id="8" name="">
             <a:extLst xmlns:a="http://schemas.openxmlformats.org/drawingml/2006/main">
               <a:ext uri="{FF2B5EF4-FFF2-40B4-BE49-F238E27FC236}">
-                <a16:creationId xmlns:a16="http://schemas.microsoft.com/office/drawing/2014/main" id="{D9F221C3-0F37-4900-9A5C-82CB31E09E96}"/>
+                <a16:creationId xmlns:a16="http://schemas.microsoft.com/office/drawing/2014/main" id="{D37EEF5E-F386-4D07-A6C7-99BA8FBBC2E5}"/>
               </a:ext>
             </a:extLst>
           </p:cNvPr>
@@ -32200,7 +32200,7 @@
           <p:cNvPr id="9" name="">
             <a:extLst xmlns:a="http://schemas.openxmlformats.org/drawingml/2006/main">
               <a:ext uri="{FF2B5EF4-FFF2-40B4-BE49-F238E27FC236}">
-                <a16:creationId xmlns:a16="http://schemas.microsoft.com/office/drawing/2014/main" id="{5A2E13C3-F9D4-47A2-910D-0A8DCE914B9A}"/>
+                <a16:creationId xmlns:a16="http://schemas.microsoft.com/office/drawing/2014/main" id="{A9637489-86D9-4165-99C5-B9B004C755C0}"/>
               </a:ext>
             </a:extLst>
           </p:cNvPr>
@@ -32262,7 +32262,7 @@
           <p:cNvPr id="10" name="">
             <a:extLst xmlns:a="http://schemas.openxmlformats.org/drawingml/2006/main">
               <a:ext uri="{FF2B5EF4-FFF2-40B4-BE49-F238E27FC236}">
-                <a16:creationId xmlns:a16="http://schemas.microsoft.com/office/drawing/2014/main" id="{23F3DB0E-A26C-4631-BC29-86D970490D8E}"/>
+                <a16:creationId xmlns:a16="http://schemas.microsoft.com/office/drawing/2014/main" id="{CFE5EB80-816A-404D-9F83-51965671536B}"/>
               </a:ext>
             </a:extLst>
           </p:cNvPr>
@@ -32324,7 +32324,7 @@
           <p:cNvPr id="11" name="">
             <a:extLst xmlns:a="http://schemas.openxmlformats.org/drawingml/2006/main">
               <a:ext uri="{FF2B5EF4-FFF2-40B4-BE49-F238E27FC236}">
-                <a16:creationId xmlns:a16="http://schemas.microsoft.com/office/drawing/2014/main" id="{854CE71A-BC6F-4808-BF26-EA027F33354E}"/>
+                <a16:creationId xmlns:a16="http://schemas.microsoft.com/office/drawing/2014/main" id="{3BC47ACD-9637-4D5A-9F68-2DEC9A874F8C}"/>
               </a:ext>
             </a:extLst>
           </p:cNvPr>
@@ -32386,7 +32386,7 @@
           <p:cNvPr id="12" name="">
             <a:extLst xmlns:a="http://schemas.openxmlformats.org/drawingml/2006/main">
               <a:ext uri="{FF2B5EF4-FFF2-40B4-BE49-F238E27FC236}">
-                <a16:creationId xmlns:a16="http://schemas.microsoft.com/office/drawing/2014/main" id="{C728A00C-275E-49BC-9140-CBD7BE9D68A8}"/>
+                <a16:creationId xmlns:a16="http://schemas.microsoft.com/office/drawing/2014/main" id="{362B27D4-2883-49DA-8AB3-DF0F3496183B}"/>
               </a:ext>
             </a:extLst>
           </p:cNvPr>
@@ -32448,7 +32448,7 @@
           <p:cNvPr id="13" name="">
             <a:extLst xmlns:a="http://schemas.openxmlformats.org/drawingml/2006/main">
               <a:ext uri="{FF2B5EF4-FFF2-40B4-BE49-F238E27FC236}">
-                <a16:creationId xmlns:a16="http://schemas.microsoft.com/office/drawing/2014/main" id="{825E10A3-9A1A-4AE2-AB7A-DB3CDBC895D7}"/>
+                <a16:creationId xmlns:a16="http://schemas.microsoft.com/office/drawing/2014/main" id="{9B564A84-75AC-4797-8663-37F9E8719604}"/>
               </a:ext>
             </a:extLst>
           </p:cNvPr>
@@ -32510,7 +32510,7 @@
           <p:cNvPr id="14" name="">
             <a:extLst xmlns:a="http://schemas.openxmlformats.org/drawingml/2006/main">
               <a:ext uri="{FF2B5EF4-FFF2-40B4-BE49-F238E27FC236}">
-                <a16:creationId xmlns:a16="http://schemas.microsoft.com/office/drawing/2014/main" id="{12F7EE6B-FB68-43B0-895F-2E87EBA68C94}"/>
+                <a16:creationId xmlns:a16="http://schemas.microsoft.com/office/drawing/2014/main" id="{24CF297C-B9B3-4968-A9CD-03CB59102072}"/>
               </a:ext>
             </a:extLst>
           </p:cNvPr>
@@ -32572,7 +32572,7 @@
           <p:cNvPr id="15" name="">
             <a:extLst xmlns:a="http://schemas.openxmlformats.org/drawingml/2006/main">
               <a:ext uri="{FF2B5EF4-FFF2-40B4-BE49-F238E27FC236}">
-                <a16:creationId xmlns:a16="http://schemas.microsoft.com/office/drawing/2014/main" id="{826E44E4-B755-4502-BCA2-010C80DC2803}"/>
+                <a16:creationId xmlns:a16="http://schemas.microsoft.com/office/drawing/2014/main" id="{5B8D48C4-3824-4D5A-97BE-99D7B95D435B}"/>
               </a:ext>
             </a:extLst>
           </p:cNvPr>
@@ -32634,7 +32634,7 @@
           <p:cNvPr id="16" name="">
             <a:extLst xmlns:a="http://schemas.openxmlformats.org/drawingml/2006/main">
               <a:ext uri="{FF2B5EF4-FFF2-40B4-BE49-F238E27FC236}">
-                <a16:creationId xmlns:a16="http://schemas.microsoft.com/office/drawing/2014/main" id="{A2A8E4C4-E992-4CD5-BD05-454B0D726B83}"/>
+                <a16:creationId xmlns:a16="http://schemas.microsoft.com/office/drawing/2014/main" id="{AE5C572B-33E4-4903-B261-89A211D783FC}"/>
               </a:ext>
             </a:extLst>
           </p:cNvPr>
@@ -32667,7 +32667,7 @@
           <p:cNvPr id="17" name="">
             <a:extLst xmlns:a="http://schemas.openxmlformats.org/drawingml/2006/main">
               <a:ext uri="{FF2B5EF4-FFF2-40B4-BE49-F238E27FC236}">
-                <a16:creationId xmlns:a16="http://schemas.microsoft.com/office/drawing/2014/main" id="{89CC74B7-5452-4158-BFE2-009A948379DA}"/>
+                <a16:creationId xmlns:a16="http://schemas.microsoft.com/office/drawing/2014/main" id="{51B9F427-9161-4C78-B311-600D227885B6}"/>
               </a:ext>
             </a:extLst>
           </p:cNvPr>
@@ -32729,7 +32729,7 @@
           <p:cNvPr id="18" name="">
             <a:extLst xmlns:a="http://schemas.openxmlformats.org/drawingml/2006/main">
               <a:ext uri="{FF2B5EF4-FFF2-40B4-BE49-F238E27FC236}">
-                <a16:creationId xmlns:a16="http://schemas.microsoft.com/office/drawing/2014/main" id="{F4FCC6E7-4E8A-4BA3-BB6F-6F05511AE2D0}"/>
+                <a16:creationId xmlns:a16="http://schemas.microsoft.com/office/drawing/2014/main" id="{22C7652B-D3A5-4678-8008-BB6A76B46022}"/>
               </a:ext>
             </a:extLst>
           </p:cNvPr>
@@ -32791,7 +32791,7 @@
           <p:cNvPr id="19" name="">
             <a:extLst xmlns:a="http://schemas.openxmlformats.org/drawingml/2006/main">
               <a:ext uri="{FF2B5EF4-FFF2-40B4-BE49-F238E27FC236}">
-                <a16:creationId xmlns:a16="http://schemas.microsoft.com/office/drawing/2014/main" id="{DA5318F5-4F9E-4F9B-8F47-738CA2844F21}"/>
+                <a16:creationId xmlns:a16="http://schemas.microsoft.com/office/drawing/2014/main" id="{A09F541F-914B-4F09-B4DC-4A4CF66D19A7}"/>
               </a:ext>
             </a:extLst>
           </p:cNvPr>
@@ -32822,7 +32822,7 @@
           <p:cNvPr id="20" name="">
             <a:extLst xmlns:a="http://schemas.openxmlformats.org/drawingml/2006/main">
               <a:ext uri="{FF2B5EF4-FFF2-40B4-BE49-F238E27FC236}">
-                <a16:creationId xmlns:a16="http://schemas.microsoft.com/office/drawing/2014/main" id="{D6E10939-9787-44A1-BEC3-F9DBA902BD46}"/>
+                <a16:creationId xmlns:a16="http://schemas.microsoft.com/office/drawing/2014/main" id="{3716796A-F2B7-4195-8361-B560CC31EF8D}"/>
               </a:ext>
             </a:extLst>
           </p:cNvPr>
@@ -32884,7 +32884,7 @@
           <p:cNvPr id="21" name="">
             <a:extLst xmlns:a="http://schemas.openxmlformats.org/drawingml/2006/main">
               <a:ext uri="{FF2B5EF4-FFF2-40B4-BE49-F238E27FC236}">
-                <a16:creationId xmlns:a16="http://schemas.microsoft.com/office/drawing/2014/main" id="{2A1B3554-EADE-42AA-99BA-8DA7281B57BC}"/>
+                <a16:creationId xmlns:a16="http://schemas.microsoft.com/office/drawing/2014/main" id="{8CA96B5D-64A2-4602-8A3C-1EF6EE1883E5}"/>
               </a:ext>
             </a:extLst>
           </p:cNvPr>
@@ -32944,7 +32944,7 @@
     </p:spTree>
     <p:extLst>
       <p:ext uri="{BB962C8B-B14F-4D97-AF65-F5344CB8AC3E}">
-        <p14:creationId xmlns:p14="http://schemas.microsoft.com/office/powerpoint/2010/main" val="2100485499"/>
+        <p14:creationId xmlns:p14="http://schemas.microsoft.com/office/powerpoint/2010/main" val="439181969"/>
       </p:ext>
     </p:extLst>
   </p:cSld>

--- a/output/submission/Route2Zero_Concept_Deck_20_Slides.pptx
+++ b/output/submission/Route2Zero_Concept_Deck_20_Slides.pptx
@@ -166,7 +166,7 @@
             </c:spPr>
             <c:extLst>
               <c:ext xmlns:c16="http://schemas.microsoft.com/office/drawing/2014/chart" uri="{C3380CC4-5D6E-409C-BE32-E72D297353CC}">
-                <c16:uniqueId val="{00000001-E5FC-49F4-9562-D2E463FD32C4}"/>
+                <c16:uniqueId val="{00000001-F998-4382-A9E0-7B276FE3039A}"/>
               </c:ext>
             </c:extLst>
           </c:dPt>
@@ -240,7 +240,7 @@
               </c14:invertSolidFillFmt>
             </c:ext>
             <c:ext xmlns:c16="http://schemas.microsoft.com/office/drawing/2014/chart" uri="{C3380CC4-5D6E-409C-BE32-E72D297353CC}">
-              <c16:uniqueId val="{00000002-E5FC-49F4-9562-D2E463FD32C4}"/>
+              <c16:uniqueId val="{00000002-F998-4382-A9E0-7B276FE3039A}"/>
             </c:ext>
           </c:extLst>
         </c:ser>
@@ -417,7 +417,7 @@
             </c:spPr>
             <c:extLst>
               <c:ext xmlns:c16="http://schemas.microsoft.com/office/drawing/2014/chart" uri="{C3380CC4-5D6E-409C-BE32-E72D297353CC}">
-                <c16:uniqueId val="{00000001-60EB-4AFF-9D16-D75E8B2999D4}"/>
+                <c16:uniqueId val="{00000001-46B5-48F0-9E4D-6A424713A949}"/>
               </c:ext>
             </c:extLst>
           </c:dPt>
@@ -432,7 +432,7 @@
             </c:spPr>
             <c:extLst>
               <c:ext xmlns:c16="http://schemas.microsoft.com/office/drawing/2014/chart" uri="{C3380CC4-5D6E-409C-BE32-E72D297353CC}">
-                <c16:uniqueId val="{00000003-60EB-4AFF-9D16-D75E8B2999D4}"/>
+                <c16:uniqueId val="{00000003-46B5-48F0-9E4D-6A424713A949}"/>
               </c:ext>
             </c:extLst>
           </c:dPt>
@@ -512,7 +512,7 @@
               </c14:invertSolidFillFmt>
             </c:ext>
             <c:ext xmlns:c16="http://schemas.microsoft.com/office/drawing/2014/chart" uri="{C3380CC4-5D6E-409C-BE32-E72D297353CC}">
-              <c16:uniqueId val="{00000004-60EB-4AFF-9D16-D75E8B2999D4}"/>
+              <c16:uniqueId val="{00000004-46B5-48F0-9E4D-6A424713A949}"/>
             </c:ext>
           </c:extLst>
         </c:ser>
@@ -663,7 +663,7 @@
             </c:spPr>
             <c:extLst>
               <c:ext xmlns:c16="http://schemas.microsoft.com/office/drawing/2014/chart" uri="{C3380CC4-5D6E-409C-BE32-E72D297353CC}">
-                <c16:uniqueId val="{00000001-F8DB-4EA6-9FF7-6320371DCA7F}"/>
+                <c16:uniqueId val="{00000001-5442-4F73-9F3B-60DAF2984FC0}"/>
               </c:ext>
             </c:extLst>
           </c:dPt>
@@ -678,7 +678,7 @@
             </c:spPr>
             <c:extLst>
               <c:ext xmlns:c16="http://schemas.microsoft.com/office/drawing/2014/chart" uri="{C3380CC4-5D6E-409C-BE32-E72D297353CC}">
-                <c16:uniqueId val="{00000003-F8DB-4EA6-9FF7-6320371DCA7F}"/>
+                <c16:uniqueId val="{00000003-5442-4F73-9F3B-60DAF2984FC0}"/>
               </c:ext>
             </c:extLst>
           </c:dPt>
@@ -749,7 +749,7 @@
           </c:val>
           <c:extLst>
             <c:ext xmlns:c16="http://schemas.microsoft.com/office/drawing/2014/chart" uri="{C3380CC4-5D6E-409C-BE32-E72D297353CC}">
-              <c16:uniqueId val="{00000004-F8DB-4EA6-9FF7-6320371DCA7F}"/>
+              <c16:uniqueId val="{00000004-5442-4F73-9F3B-60DAF2984FC0}"/>
             </c:ext>
           </c:extLst>
         </c:ser>
@@ -1197,7 +1197,7 @@
           <a:lstStyle/>
           <a:p>
             <a:r>
-              <a:t>The flagship is a Dense Urban Trunk and is an outlier within that cluster. Typology never infers vulnerability or settlement status.</a:t>
+              <a:t>A silhouette of 0.373 indicates overlapping structural groups. The flagship is a Dense Urban Trunk and an outlier within that cluster. Typology never predicts outcomes or infers vulnerability or settlement status.</a:t>
             </a:r>
           </a:p>
           <a:p>
@@ -2706,7 +2706,7 @@
           <a:lstStyle/>
           <a:p>
             <a:r>
-              <a:t>A current external route record supports the route and geometry claim. It does not certify active operations or franchise authority.</a:t>
+              <a:t>A dated external map record supports the route and geometry claim. It does not certify active operations or franchise authority.</a:t>
             </a:r>
           </a:p>
           <a:p>
@@ -3233,7 +3233,7 @@
           <p:cNvPr id="2" name="Rectangle 1">
             <a:extLst>
               <a:ext uri="{FF2B5EF4-FFF2-40B4-BE49-F238E27FC236}">
-                <a16:creationId xmlns:a16="http://schemas.microsoft.com/office/drawing/2014/main" id="{61FC02CC-73AC-4647-ADA4-4893DE4F0DE8}"/>
+                <a16:creationId xmlns:a16="http://schemas.microsoft.com/office/drawing/2014/main" id="{4CB4559E-8686-4F39-80E6-A1C57661077E}"/>
               </a:ext>
             </a:extLst>
           </p:cNvPr>
@@ -3280,7 +3280,7 @@
             <a:hlinkClick r:id="rId4"/>
             <a:extLst>
               <a:ext uri="{FF2B5EF4-FFF2-40B4-BE49-F238E27FC236}">
-                <a16:creationId xmlns:a16="http://schemas.microsoft.com/office/drawing/2014/main" id="{413B9C54-9471-40C3-8C9F-9D1F1FF989DA}"/>
+                <a16:creationId xmlns:a16="http://schemas.microsoft.com/office/drawing/2014/main" id="{78916333-4482-475F-8197-8E53533F6AE6}"/>
               </a:ext>
             </a:extLst>
           </p:cNvPr>
@@ -3355,7 +3355,7 @@
             <a:hlinkClick r:id="rId5"/>
             <a:extLst>
               <a:ext uri="{FF2B5EF4-FFF2-40B4-BE49-F238E27FC236}">
-                <a16:creationId xmlns:a16="http://schemas.microsoft.com/office/drawing/2014/main" id="{B5FC6E5A-6C8A-4E58-87F5-E333A8CF3CF5}"/>
+                <a16:creationId xmlns:a16="http://schemas.microsoft.com/office/drawing/2014/main" id="{D05C7C54-D140-4C5A-BA72-C3BFEED2886C}"/>
               </a:ext>
             </a:extLst>
           </p:cNvPr>
@@ -3429,7 +3429,7 @@
           <p:cNvPr id="5" name="Rectangle 4">
             <a:extLst>
               <a:ext uri="{FF2B5EF4-FFF2-40B4-BE49-F238E27FC236}">
-                <a16:creationId xmlns:a16="http://schemas.microsoft.com/office/drawing/2014/main" id="{1563484D-8250-46A6-A96F-BAF39FB967E1}"/>
+                <a16:creationId xmlns:a16="http://schemas.microsoft.com/office/drawing/2014/main" id="{C12C6B80-B0F9-4669-A2A4-D69D43421C9E}"/>
               </a:ext>
             </a:extLst>
           </p:cNvPr>
@@ -3491,7 +3491,7 @@
           <p:cNvPr id="6" name="Rectangle 5">
             <a:extLst>
               <a:ext uri="{FF2B5EF4-FFF2-40B4-BE49-F238E27FC236}">
-                <a16:creationId xmlns:a16="http://schemas.microsoft.com/office/drawing/2014/main" id="{0A287574-3EFC-48B7-AEF9-B114CDAEBED0}"/>
+                <a16:creationId xmlns:a16="http://schemas.microsoft.com/office/drawing/2014/main" id="{D1C191FC-6053-49DF-927F-631E14C8F83E}"/>
               </a:ext>
             </a:extLst>
           </p:cNvPr>
@@ -3553,7 +3553,7 @@
           <p:cNvPr id="7" name="Rectangle 6">
             <a:extLst>
               <a:ext uri="{FF2B5EF4-FFF2-40B4-BE49-F238E27FC236}">
-                <a16:creationId xmlns:a16="http://schemas.microsoft.com/office/drawing/2014/main" id="{51E47EEB-C010-4F6A-A420-3A13EFFD4B15}"/>
+                <a16:creationId xmlns:a16="http://schemas.microsoft.com/office/drawing/2014/main" id="{CABBB3B9-BAB2-45ED-8721-2D0F5B185C53}"/>
               </a:ext>
             </a:extLst>
           </p:cNvPr>
@@ -3605,7 +3605,7 @@
                 <a:ea typeface="Arial"/>
                 <a:cs typeface="Arial"/>
               </a:rPr>
-              <a:t>Which Metro Manila corridors should be validated and prioritized first — and how robust is that decision?</a:t>
+              <a:t>Screens 1,522 historic corridor records into 9 priorities for field validation — then shows what the city must verify before spending.</a:t>
             </a:r>
           </a:p>
         </p:txBody>
@@ -3615,7 +3615,7 @@
           <p:cNvPr id="8" name="Rectangle 7">
             <a:extLst>
               <a:ext uri="{FF2B5EF4-FFF2-40B4-BE49-F238E27FC236}">
-                <a16:creationId xmlns:a16="http://schemas.microsoft.com/office/drawing/2014/main" id="{95B1A419-C625-409F-A4AE-6339FE7223CD}"/>
+                <a16:creationId xmlns:a16="http://schemas.microsoft.com/office/drawing/2014/main" id="{48752438-5FD3-4FC8-B7E0-7B4993FA63C5}"/>
               </a:ext>
             </a:extLst>
           </p:cNvPr>
@@ -3677,7 +3677,7 @@
           <p:cNvPr id="9" name="Rectangle 8">
             <a:extLst>
               <a:ext uri="{FF2B5EF4-FFF2-40B4-BE49-F238E27FC236}">
-                <a16:creationId xmlns:a16="http://schemas.microsoft.com/office/drawing/2014/main" id="{8BA209BB-F45D-4EBD-AFDA-9CA1759E254C}"/>
+                <a16:creationId xmlns:a16="http://schemas.microsoft.com/office/drawing/2014/main" id="{2789612A-BFC9-42B0-AE8F-C6E05E723A1B}"/>
               </a:ext>
             </a:extLst>
           </p:cNvPr>
@@ -3739,7 +3739,7 @@
           <p:cNvPr id="10" name="Rectangle 9">
             <a:extLst>
               <a:ext uri="{FF2B5EF4-FFF2-40B4-BE49-F238E27FC236}">
-                <a16:creationId xmlns:a16="http://schemas.microsoft.com/office/drawing/2014/main" id="{25858B5C-9954-4EB1-95FF-8126B1622170}"/>
+                <a16:creationId xmlns:a16="http://schemas.microsoft.com/office/drawing/2014/main" id="{3B2F9F56-A691-43C3-854B-62D69215291A}"/>
               </a:ext>
             </a:extLst>
           </p:cNvPr>
@@ -3801,7 +3801,7 @@
           <p:cNvPr id="11" name="Rectangle 10">
             <a:extLst>
               <a:ext uri="{FF2B5EF4-FFF2-40B4-BE49-F238E27FC236}">
-                <a16:creationId xmlns:a16="http://schemas.microsoft.com/office/drawing/2014/main" id="{723BE8FC-5056-4DEB-9B40-4E83341FF1A5}"/>
+                <a16:creationId xmlns:a16="http://schemas.microsoft.com/office/drawing/2014/main" id="{12F57DDB-9DBB-42B0-9CFE-A08AD7776066}"/>
               </a:ext>
             </a:extLst>
           </p:cNvPr>
@@ -3863,7 +3863,7 @@
           <p:cNvPr id="12" name="Rectangle 11">
             <a:extLst>
               <a:ext uri="{FF2B5EF4-FFF2-40B4-BE49-F238E27FC236}">
-                <a16:creationId xmlns:a16="http://schemas.microsoft.com/office/drawing/2014/main" id="{BCD449DA-211A-4FED-8A98-1FB085C79EB9}"/>
+                <a16:creationId xmlns:a16="http://schemas.microsoft.com/office/drawing/2014/main" id="{EE055D6F-7ACA-4433-8C53-3A09D836AE8A}"/>
               </a:ext>
             </a:extLst>
           </p:cNvPr>
@@ -3925,7 +3925,7 @@
           <p:cNvPr id="13" name="Rectangle 12">
             <a:extLst>
               <a:ext uri="{FF2B5EF4-FFF2-40B4-BE49-F238E27FC236}">
-                <a16:creationId xmlns:a16="http://schemas.microsoft.com/office/drawing/2014/main" id="{8554E0D0-B614-4BD2-9A16-2662FAB20620}"/>
+                <a16:creationId xmlns:a16="http://schemas.microsoft.com/office/drawing/2014/main" id="{BFAA87CA-BCDC-4C2C-BABF-0B8FD6853F31}"/>
               </a:ext>
             </a:extLst>
           </p:cNvPr>
@@ -3977,7 +3977,7 @@
                 <a:ea typeface="Arial"/>
                 <a:cs typeface="Arial"/>
               </a:rPr>
-              <a:t>dated OSM validations</a:t>
+              <a:t>dated OSM map records</a:t>
             </a:r>
           </a:p>
         </p:txBody>
@@ -3987,7 +3987,7 @@
           <p:cNvPr id="14" name="Rectangle 13">
             <a:extLst>
               <a:ext uri="{FF2B5EF4-FFF2-40B4-BE49-F238E27FC236}">
-                <a16:creationId xmlns:a16="http://schemas.microsoft.com/office/drawing/2014/main" id="{BA9B43B4-E76C-44E3-A22F-49DEBDC118B4}"/>
+                <a16:creationId xmlns:a16="http://schemas.microsoft.com/office/drawing/2014/main" id="{CDB0ED0C-D971-40EB-81BC-AD1EA5BCE0BD}"/>
               </a:ext>
             </a:extLst>
           </p:cNvPr>
@@ -4049,7 +4049,7 @@
           <p:cNvPr id="15" name="Rectangle 14">
             <a:extLst>
               <a:ext uri="{FF2B5EF4-FFF2-40B4-BE49-F238E27FC236}">
-                <a16:creationId xmlns:a16="http://schemas.microsoft.com/office/drawing/2014/main" id="{AE56D675-782C-4DCB-AD44-9EFEE3971D2A}"/>
+                <a16:creationId xmlns:a16="http://schemas.microsoft.com/office/drawing/2014/main" id="{61A447AA-741F-4CE2-9D38-2AE388EC3AF4}"/>
               </a:ext>
             </a:extLst>
           </p:cNvPr>
@@ -4080,7 +4080,7 @@
           <p:cNvPr id="16" name="Rectangle 15">
             <a:extLst>
               <a:ext uri="{FF2B5EF4-FFF2-40B4-BE49-F238E27FC236}">
-                <a16:creationId xmlns:a16="http://schemas.microsoft.com/office/drawing/2014/main" id="{01FA3A17-CDB3-4980-939D-825D3613A35E}"/>
+                <a16:creationId xmlns:a16="http://schemas.microsoft.com/office/drawing/2014/main" id="{281D9249-18D7-4914-84A2-76C07440EF33}"/>
               </a:ext>
             </a:extLst>
           </p:cNvPr>
@@ -4142,7 +4142,7 @@
           <p:cNvPr id="17" name="Rectangle 16">
             <a:extLst>
               <a:ext uri="{FF2B5EF4-FFF2-40B4-BE49-F238E27FC236}">
-                <a16:creationId xmlns:a16="http://schemas.microsoft.com/office/drawing/2014/main" id="{949E4120-93C8-4B2F-8823-2B370B00747B}"/>
+                <a16:creationId xmlns:a16="http://schemas.microsoft.com/office/drawing/2014/main" id="{AA32B304-3BE2-4856-8458-D3EADFB73BE3}"/>
               </a:ext>
             </a:extLst>
           </p:cNvPr>
@@ -4202,7 +4202,7 @@
     </p:spTree>
     <p:extLst>
       <p:ext uri="{BB962C8B-B14F-4D97-AF65-F5344CB8AC3E}">
-        <p14:creationId xmlns:p14="http://schemas.microsoft.com/office/powerpoint/2010/main" val="683186913"/>
+        <p14:creationId xmlns:p14="http://schemas.microsoft.com/office/powerpoint/2010/main" val="2113323437"/>
       </p:ext>
     </p:extLst>
   </p:cSld>
@@ -4243,7 +4243,7 @@
             <a:hlinkClick r:id="rId3"/>
             <a:extLst>
               <a:ext uri="{FF2B5EF4-FFF2-40B4-BE49-F238E27FC236}">
-                <a16:creationId xmlns:a16="http://schemas.microsoft.com/office/drawing/2014/main" id="{3EF9274D-2DAA-4E06-BF60-D792E798568C}"/>
+                <a16:creationId xmlns:a16="http://schemas.microsoft.com/office/drawing/2014/main" id="{8C340137-D671-469A-9981-39A32042A304}"/>
               </a:ext>
             </a:extLst>
           </p:cNvPr>
@@ -4318,7 +4318,7 @@
             <a:hlinkClick r:id="rId4"/>
             <a:extLst>
               <a:ext uri="{FF2B5EF4-FFF2-40B4-BE49-F238E27FC236}">
-                <a16:creationId xmlns:a16="http://schemas.microsoft.com/office/drawing/2014/main" id="{6FDB1E79-6D15-40CA-A60B-083D165D76C6}"/>
+                <a16:creationId xmlns:a16="http://schemas.microsoft.com/office/drawing/2014/main" id="{8AA59A3E-2E7C-4CD5-B0DE-A9EAD9E81457}"/>
               </a:ext>
             </a:extLst>
           </p:cNvPr>
@@ -4392,7 +4392,7 @@
           <p:cNvPr id="3" name="Rectangle 2">
             <a:extLst>
               <a:ext uri="{FF2B5EF4-FFF2-40B4-BE49-F238E27FC236}">
-                <a16:creationId xmlns:a16="http://schemas.microsoft.com/office/drawing/2014/main" id="{5496F876-61E6-43DA-8B0A-49A521790762}"/>
+                <a16:creationId xmlns:a16="http://schemas.microsoft.com/office/drawing/2014/main" id="{1B2992DE-E6BC-410D-89C4-7E1220A22374}"/>
               </a:ext>
             </a:extLst>
           </p:cNvPr>
@@ -4454,7 +4454,7 @@
           <p:cNvPr id="4" name="Rectangle 3">
             <a:extLst>
               <a:ext uri="{FF2B5EF4-FFF2-40B4-BE49-F238E27FC236}">
-                <a16:creationId xmlns:a16="http://schemas.microsoft.com/office/drawing/2014/main" id="{C245E6CC-811A-48F6-8817-8139B11D70AB}"/>
+                <a16:creationId xmlns:a16="http://schemas.microsoft.com/office/drawing/2014/main" id="{673BA736-EA60-485E-A264-AEDDECADD309}"/>
               </a:ext>
             </a:extLst>
           </p:cNvPr>
@@ -4506,7 +4506,7 @@
                 <a:ea typeface="Arial"/>
                 <a:cs typeface="Arial"/>
               </a:rPr>
-              <a:t>Route2Zero compares like with like.</a:t>
+              <a:t>Typology is descriptive, not predictive.</a:t>
             </a:r>
           </a:p>
         </p:txBody>
@@ -4543,7 +4543,7 @@
           <p:cNvPr id="6" name="Rectangle: Rounded Corners 5">
             <a:extLst>
               <a:ext uri="{FF2B5EF4-FFF2-40B4-BE49-F238E27FC236}">
-                <a16:creationId xmlns:a16="http://schemas.microsoft.com/office/drawing/2014/main" id="{2891D689-D5C1-42C8-B96D-489D361D2909}"/>
+                <a16:creationId xmlns:a16="http://schemas.microsoft.com/office/drawing/2014/main" id="{A642C799-63A2-44FC-9C8C-FB722BE27CA2}"/>
               </a:ext>
             </a:extLst>
           </p:cNvPr>
@@ -4592,7 +4592,7 @@
           <p:cNvPr id="8" name="Rectangle: Rounded Corners 7">
             <a:extLst>
               <a:ext uri="{FF2B5EF4-FFF2-40B4-BE49-F238E27FC236}">
-                <a16:creationId xmlns:a16="http://schemas.microsoft.com/office/drawing/2014/main" id="{4719BDCE-0824-476F-BFEA-5E6A3129C37E}"/>
+                <a16:creationId xmlns:a16="http://schemas.microsoft.com/office/drawing/2014/main" id="{F0E209D2-9989-4C81-80EF-D2904E9BED73}"/>
               </a:ext>
             </a:extLst>
           </p:cNvPr>
@@ -4625,7 +4625,7 @@
           <p:cNvPr id="9" name="Rectangle 8">
             <a:extLst>
               <a:ext uri="{FF2B5EF4-FFF2-40B4-BE49-F238E27FC236}">
-                <a16:creationId xmlns:a16="http://schemas.microsoft.com/office/drawing/2014/main" id="{D332F53E-840E-47B7-B781-507266017662}"/>
+                <a16:creationId xmlns:a16="http://schemas.microsoft.com/office/drawing/2014/main" id="{893D033F-19DE-4696-B7E7-43E9155A0A74}"/>
               </a:ext>
             </a:extLst>
           </p:cNvPr>
@@ -4687,7 +4687,7 @@
           <p:cNvPr id="10" name="Rectangle 9">
             <a:extLst>
               <a:ext uri="{FF2B5EF4-FFF2-40B4-BE49-F238E27FC236}">
-                <a16:creationId xmlns:a16="http://schemas.microsoft.com/office/drawing/2014/main" id="{A9CB8B1B-8F75-4207-8F53-88738E616D70}"/>
+                <a16:creationId xmlns:a16="http://schemas.microsoft.com/office/drawing/2014/main" id="{CBB8E0A8-218E-4CE3-82DD-487D734A1D35}"/>
               </a:ext>
             </a:extLst>
           </p:cNvPr>
@@ -4749,7 +4749,7 @@
           <p:cNvPr id="11" name="Rectangle 10">
             <a:extLst>
               <a:ext uri="{FF2B5EF4-FFF2-40B4-BE49-F238E27FC236}">
-                <a16:creationId xmlns:a16="http://schemas.microsoft.com/office/drawing/2014/main" id="{6AAC29CA-3CD5-44DF-84B0-C10EF80F3AC1}"/>
+                <a16:creationId xmlns:a16="http://schemas.microsoft.com/office/drawing/2014/main" id="{4010A92D-8FB7-4A3A-A8B5-39D865A9216E}"/>
               </a:ext>
             </a:extLst>
           </p:cNvPr>
@@ -4828,7 +4828,7 @@
                 <a:ea typeface="Arial"/>
                 <a:cs typeface="Arial"/>
               </a:rPr>
-              <a:t>Typology informs comparison, not policy score.</a:t>
+              <a:t>Modest separation · comparison aid only · no policy points.</a:t>
             </a:r>
           </a:p>
         </p:txBody>
@@ -4838,7 +4838,7 @@
           <p:cNvPr id="12" name="Rectangle 11">
             <a:extLst>
               <a:ext uri="{FF2B5EF4-FFF2-40B4-BE49-F238E27FC236}">
-                <a16:creationId xmlns:a16="http://schemas.microsoft.com/office/drawing/2014/main" id="{13BC634E-92AC-4167-95F6-FFA63E54801E}"/>
+                <a16:creationId xmlns:a16="http://schemas.microsoft.com/office/drawing/2014/main" id="{A616C92F-2331-4E8C-BC94-3030839A0FFC}"/>
               </a:ext>
             </a:extLst>
           </p:cNvPr>
@@ -4869,7 +4869,7 @@
           <p:cNvPr id="13" name="Rectangle 12">
             <a:extLst>
               <a:ext uri="{FF2B5EF4-FFF2-40B4-BE49-F238E27FC236}">
-                <a16:creationId xmlns:a16="http://schemas.microsoft.com/office/drawing/2014/main" id="{1D8E2B67-AD59-45A5-B616-A2EB37C5901E}"/>
+                <a16:creationId xmlns:a16="http://schemas.microsoft.com/office/drawing/2014/main" id="{B2C0D08B-8611-4188-A5AE-C4D6FCA99E0B}"/>
               </a:ext>
             </a:extLst>
           </p:cNvPr>
@@ -4931,7 +4931,7 @@
           <p:cNvPr id="14" name="Rectangle 13">
             <a:extLst>
               <a:ext uri="{FF2B5EF4-FFF2-40B4-BE49-F238E27FC236}">
-                <a16:creationId xmlns:a16="http://schemas.microsoft.com/office/drawing/2014/main" id="{2FE89FD4-969A-4B00-B491-EEEF079BD261}"/>
+                <a16:creationId xmlns:a16="http://schemas.microsoft.com/office/drawing/2014/main" id="{82677E67-95C8-444F-AAC6-1BC255732B6B}"/>
               </a:ext>
             </a:extLst>
           </p:cNvPr>
@@ -4991,7 +4991,7 @@
     </p:spTree>
     <p:extLst>
       <p:ext uri="{BB962C8B-B14F-4D97-AF65-F5344CB8AC3E}">
-        <p14:creationId xmlns:p14="http://schemas.microsoft.com/office/powerpoint/2010/main" val="2137815325"/>
+        <p14:creationId xmlns:p14="http://schemas.microsoft.com/office/powerpoint/2010/main" val="438195140"/>
       </p:ext>
     </p:extLst>
   </p:cSld>
@@ -5032,7 +5032,7 @@
             <a:hlinkClick r:id="rId3"/>
             <a:extLst>
               <a:ext uri="{FF2B5EF4-FFF2-40B4-BE49-F238E27FC236}">
-                <a16:creationId xmlns:a16="http://schemas.microsoft.com/office/drawing/2014/main" id="{E9FBEC63-02B5-46CC-ABDF-84D3D15AF6E6}"/>
+                <a16:creationId xmlns:a16="http://schemas.microsoft.com/office/drawing/2014/main" id="{4E3603E8-0C78-4202-BD79-6F1C432BB2F4}"/>
               </a:ext>
             </a:extLst>
           </p:cNvPr>
@@ -5107,7 +5107,7 @@
             <a:hlinkClick r:id="rId4"/>
             <a:extLst>
               <a:ext uri="{FF2B5EF4-FFF2-40B4-BE49-F238E27FC236}">
-                <a16:creationId xmlns:a16="http://schemas.microsoft.com/office/drawing/2014/main" id="{4AB647E4-96C2-4A32-BA1C-C862585BDC2A}"/>
+                <a16:creationId xmlns:a16="http://schemas.microsoft.com/office/drawing/2014/main" id="{67476C5D-EB73-452E-99A4-DD871E55EE5A}"/>
               </a:ext>
             </a:extLst>
           </p:cNvPr>
@@ -5181,7 +5181,7 @@
           <p:cNvPr id="3" name="Rectangle 2">
             <a:extLst>
               <a:ext uri="{FF2B5EF4-FFF2-40B4-BE49-F238E27FC236}">
-                <a16:creationId xmlns:a16="http://schemas.microsoft.com/office/drawing/2014/main" id="{ED59CEEC-50C5-419A-8F9A-A33A64AB9409}"/>
+                <a16:creationId xmlns:a16="http://schemas.microsoft.com/office/drawing/2014/main" id="{C244D301-B2C7-404F-8569-6CE0EA4B56B6}"/>
               </a:ext>
             </a:extLst>
           </p:cNvPr>
@@ -5243,7 +5243,7 @@
           <p:cNvPr id="4" name="Rectangle 3">
             <a:extLst>
               <a:ext uri="{FF2B5EF4-FFF2-40B4-BE49-F238E27FC236}">
-                <a16:creationId xmlns:a16="http://schemas.microsoft.com/office/drawing/2014/main" id="{B00F518A-124E-4220-A18F-08F47BCED929}"/>
+                <a16:creationId xmlns:a16="http://schemas.microsoft.com/office/drawing/2014/main" id="{1A5F6290-1304-4C27-BCF5-B81A89D8CB3B}"/>
               </a:ext>
             </a:extLst>
           </p:cNvPr>
@@ -5305,7 +5305,7 @@
           <p:cNvPr id="5" name="Rectangle 4">
             <a:extLst>
               <a:ext uri="{FF2B5EF4-FFF2-40B4-BE49-F238E27FC236}">
-                <a16:creationId xmlns:a16="http://schemas.microsoft.com/office/drawing/2014/main" id="{263CD2BC-33D0-4ACB-B46A-8CCAF953D068}"/>
+                <a16:creationId xmlns:a16="http://schemas.microsoft.com/office/drawing/2014/main" id="{34C843AA-FAD1-4012-8E4C-6CB5B0589475}"/>
               </a:ext>
             </a:extLst>
           </p:cNvPr>
@@ -5367,7 +5367,7 @@
           <p:cNvPr id="6" name="Rectangle 5">
             <a:extLst>
               <a:ext uri="{FF2B5EF4-FFF2-40B4-BE49-F238E27FC236}">
-                <a16:creationId xmlns:a16="http://schemas.microsoft.com/office/drawing/2014/main" id="{8B28AB23-6785-4012-B501-F9DF1605BA15}"/>
+                <a16:creationId xmlns:a16="http://schemas.microsoft.com/office/drawing/2014/main" id="{57D911D1-8C0A-404A-A52B-41104699401E}"/>
               </a:ext>
             </a:extLst>
           </p:cNvPr>
@@ -5429,7 +5429,7 @@
           <p:cNvPr id="7" name="Rectangle 6">
             <a:extLst>
               <a:ext uri="{FF2B5EF4-FFF2-40B4-BE49-F238E27FC236}">
-                <a16:creationId xmlns:a16="http://schemas.microsoft.com/office/drawing/2014/main" id="{A739A034-D850-4901-BDE7-89EF861318E2}"/>
+                <a16:creationId xmlns:a16="http://schemas.microsoft.com/office/drawing/2014/main" id="{C6489CA4-7A65-4820-88D5-38CB05C639A5}"/>
               </a:ext>
             </a:extLst>
           </p:cNvPr>
@@ -5491,7 +5491,7 @@
           <p:cNvPr id="8" name="Rectangle 7">
             <a:extLst>
               <a:ext uri="{FF2B5EF4-FFF2-40B4-BE49-F238E27FC236}">
-                <a16:creationId xmlns:a16="http://schemas.microsoft.com/office/drawing/2014/main" id="{C224D67F-65B3-431D-98E2-4B07A8A1272B}"/>
+                <a16:creationId xmlns:a16="http://schemas.microsoft.com/office/drawing/2014/main" id="{217C1F7E-A35C-415F-9FD9-D0C1E333C2FD}"/>
               </a:ext>
             </a:extLst>
           </p:cNvPr>
@@ -5553,7 +5553,7 @@
           <p:cNvPr id="9" name="Rectangle 8">
             <a:extLst>
               <a:ext uri="{FF2B5EF4-FFF2-40B4-BE49-F238E27FC236}">
-                <a16:creationId xmlns:a16="http://schemas.microsoft.com/office/drawing/2014/main" id="{2DDA87CD-6DD9-4C6E-B0F4-3715155ED0EB}"/>
+                <a16:creationId xmlns:a16="http://schemas.microsoft.com/office/drawing/2014/main" id="{F96D99C5-D93D-4183-A5D7-8A2B46B9E620}"/>
               </a:ext>
             </a:extLst>
           </p:cNvPr>
@@ -5615,7 +5615,7 @@
           <p:cNvPr id="10" name="Rectangle 9">
             <a:extLst>
               <a:ext uri="{FF2B5EF4-FFF2-40B4-BE49-F238E27FC236}">
-                <a16:creationId xmlns:a16="http://schemas.microsoft.com/office/drawing/2014/main" id="{F694AE31-FD15-4A38-9F3E-BC506E1D7990}"/>
+                <a16:creationId xmlns:a16="http://schemas.microsoft.com/office/drawing/2014/main" id="{BF62D1C4-9A9D-46EF-ADE1-12D368BFFD8D}"/>
               </a:ext>
             </a:extLst>
           </p:cNvPr>
@@ -5677,7 +5677,7 @@
           <p:cNvPr id="11" name="Rectangle 10">
             <a:extLst>
               <a:ext uri="{FF2B5EF4-FFF2-40B4-BE49-F238E27FC236}">
-                <a16:creationId xmlns:a16="http://schemas.microsoft.com/office/drawing/2014/main" id="{B2F80448-8225-472E-B02F-7D2B72FB0AFB}"/>
+                <a16:creationId xmlns:a16="http://schemas.microsoft.com/office/drawing/2014/main" id="{213B0453-A6DE-495F-9372-795842205A66}"/>
               </a:ext>
             </a:extLst>
           </p:cNvPr>
@@ -5739,7 +5739,7 @@
           <p:cNvPr id="12" name="Rectangle 11">
             <a:extLst>
               <a:ext uri="{FF2B5EF4-FFF2-40B4-BE49-F238E27FC236}">
-                <a16:creationId xmlns:a16="http://schemas.microsoft.com/office/drawing/2014/main" id="{8C9961F8-8AA5-4671-8E88-7BCC68486229}"/>
+                <a16:creationId xmlns:a16="http://schemas.microsoft.com/office/drawing/2014/main" id="{F9DFC96E-DFCE-40AA-A293-0F55BACB1E9E}"/>
               </a:ext>
             </a:extLst>
           </p:cNvPr>
@@ -5801,7 +5801,7 @@
           <p:cNvPr id="13" name="Rectangle 12">
             <a:extLst>
               <a:ext uri="{FF2B5EF4-FFF2-40B4-BE49-F238E27FC236}">
-                <a16:creationId xmlns:a16="http://schemas.microsoft.com/office/drawing/2014/main" id="{E0C80D69-B30F-46E4-A2FB-3D8087B88930}"/>
+                <a16:creationId xmlns:a16="http://schemas.microsoft.com/office/drawing/2014/main" id="{8CC908E6-31E4-4FAE-9D8C-AFB7105621C1}"/>
               </a:ext>
             </a:extLst>
           </p:cNvPr>
@@ -5863,7 +5863,7 @@
           <p:cNvPr id="14" name="Rectangle 13">
             <a:extLst>
               <a:ext uri="{FF2B5EF4-FFF2-40B4-BE49-F238E27FC236}">
-                <a16:creationId xmlns:a16="http://schemas.microsoft.com/office/drawing/2014/main" id="{E81EA4FE-E350-49C5-B31D-50A1879929B1}"/>
+                <a16:creationId xmlns:a16="http://schemas.microsoft.com/office/drawing/2014/main" id="{3A915359-BF87-4745-8EF7-828F8D916E43}"/>
               </a:ext>
             </a:extLst>
           </p:cNvPr>
@@ -5925,7 +5925,7 @@
           <p:cNvPr id="15" name="Rectangle 14">
             <a:extLst>
               <a:ext uri="{FF2B5EF4-FFF2-40B4-BE49-F238E27FC236}">
-                <a16:creationId xmlns:a16="http://schemas.microsoft.com/office/drawing/2014/main" id="{EBEE6E5C-0C14-4C6A-88DE-37307EC3FD71}"/>
+                <a16:creationId xmlns:a16="http://schemas.microsoft.com/office/drawing/2014/main" id="{A6330775-C000-41E2-AA27-CAE8E9F34874}"/>
               </a:ext>
             </a:extLst>
           </p:cNvPr>
@@ -5977,7 +5977,7 @@
                 <a:ea typeface="Arial"/>
                 <a:cs typeface="Arial"/>
               </a:rPr>
-              <a:t>bounded range</a:t>
+              <a:t>scenario range · not a CI</a:t>
             </a:r>
           </a:p>
         </p:txBody>
@@ -6003,7 +6003,7 @@
           <p:cNvPr id="17" name="Rectangle: Rounded Corners 16">
             <a:extLst>
               <a:ext uri="{FF2B5EF4-FFF2-40B4-BE49-F238E27FC236}">
-                <a16:creationId xmlns:a16="http://schemas.microsoft.com/office/drawing/2014/main" id="{7F3C15A4-19DC-4920-88FE-1F10B9409B41}"/>
+                <a16:creationId xmlns:a16="http://schemas.microsoft.com/office/drawing/2014/main" id="{69CAB06A-1BDD-42DA-BFEE-647D7DFB9942}"/>
               </a:ext>
             </a:extLst>
           </p:cNvPr>
@@ -6036,7 +6036,7 @@
           <p:cNvPr id="18" name="Rectangle 17">
             <a:extLst>
               <a:ext uri="{FF2B5EF4-FFF2-40B4-BE49-F238E27FC236}">
-                <a16:creationId xmlns:a16="http://schemas.microsoft.com/office/drawing/2014/main" id="{AE9E0266-4030-4AB4-B381-7B282D77A348}"/>
+                <a16:creationId xmlns:a16="http://schemas.microsoft.com/office/drawing/2014/main" id="{93B7BAC7-BE63-46D3-84D1-D2C52AA92D92}"/>
               </a:ext>
             </a:extLst>
           </p:cNvPr>
@@ -6098,7 +6098,7 @@
           <p:cNvPr id="19" name="Rectangle 18">
             <a:extLst>
               <a:ext uri="{FF2B5EF4-FFF2-40B4-BE49-F238E27FC236}">
-                <a16:creationId xmlns:a16="http://schemas.microsoft.com/office/drawing/2014/main" id="{A88805FB-BBB7-4FC7-BAF1-D6427F3438BA}"/>
+                <a16:creationId xmlns:a16="http://schemas.microsoft.com/office/drawing/2014/main" id="{5BD1656C-2A69-4134-979D-A738C2E6F79E}"/>
               </a:ext>
             </a:extLst>
           </p:cNvPr>
@@ -6160,7 +6160,7 @@
           <p:cNvPr id="20" name="Rectangle 19">
             <a:extLst>
               <a:ext uri="{FF2B5EF4-FFF2-40B4-BE49-F238E27FC236}">
-                <a16:creationId xmlns:a16="http://schemas.microsoft.com/office/drawing/2014/main" id="{24887CA1-9E08-441D-A0CF-8C87F0ACAF70}"/>
+                <a16:creationId xmlns:a16="http://schemas.microsoft.com/office/drawing/2014/main" id="{4CB8B45D-BA69-4743-86E5-CA0E051422C9}"/>
               </a:ext>
             </a:extLst>
           </p:cNvPr>
@@ -6222,7 +6222,7 @@
           <p:cNvPr id="21" name="Rectangle 20">
             <a:extLst>
               <a:ext uri="{FF2B5EF4-FFF2-40B4-BE49-F238E27FC236}">
-                <a16:creationId xmlns:a16="http://schemas.microsoft.com/office/drawing/2014/main" id="{494665EE-040F-4E44-90BC-300F204064E7}"/>
+                <a16:creationId xmlns:a16="http://schemas.microsoft.com/office/drawing/2014/main" id="{7B4A9A34-29B0-4E4E-9A88-6FB3EAA349CA}"/>
               </a:ext>
             </a:extLst>
           </p:cNvPr>
@@ -6284,7 +6284,7 @@
           <p:cNvPr id="22" name="Rectangle 21">
             <a:extLst>
               <a:ext uri="{FF2B5EF4-FFF2-40B4-BE49-F238E27FC236}">
-                <a16:creationId xmlns:a16="http://schemas.microsoft.com/office/drawing/2014/main" id="{95DEF5A8-E49E-4A51-AE3A-F1171FC145D1}"/>
+                <a16:creationId xmlns:a16="http://schemas.microsoft.com/office/drawing/2014/main" id="{EF882C8A-6A1D-4F3E-9EDB-6CDE2021124D}"/>
               </a:ext>
             </a:extLst>
           </p:cNvPr>
@@ -6315,7 +6315,7 @@
           <p:cNvPr id="23" name="Rectangle 22">
             <a:extLst>
               <a:ext uri="{FF2B5EF4-FFF2-40B4-BE49-F238E27FC236}">
-                <a16:creationId xmlns:a16="http://schemas.microsoft.com/office/drawing/2014/main" id="{153B6A5E-ABCF-43B4-B7E8-27237A411CDD}"/>
+                <a16:creationId xmlns:a16="http://schemas.microsoft.com/office/drawing/2014/main" id="{77448B46-98DB-4571-AC75-EBBCA7CF9F23}"/>
               </a:ext>
             </a:extLst>
           </p:cNvPr>
@@ -6377,7 +6377,7 @@
           <p:cNvPr id="24" name="Rectangle 23">
             <a:extLst>
               <a:ext uri="{FF2B5EF4-FFF2-40B4-BE49-F238E27FC236}">
-                <a16:creationId xmlns:a16="http://schemas.microsoft.com/office/drawing/2014/main" id="{CA77E92F-F758-48F2-BCB1-5BCDBD7DAF6C}"/>
+                <a16:creationId xmlns:a16="http://schemas.microsoft.com/office/drawing/2014/main" id="{C5AE49AE-CFE5-4DBA-8DBE-F9DBFFED2DB2}"/>
               </a:ext>
             </a:extLst>
           </p:cNvPr>
@@ -6437,7 +6437,7 @@
     </p:spTree>
     <p:extLst>
       <p:ext uri="{BB962C8B-B14F-4D97-AF65-F5344CB8AC3E}">
-        <p14:creationId xmlns:p14="http://schemas.microsoft.com/office/powerpoint/2010/main" val="798712733"/>
+        <p14:creationId xmlns:p14="http://schemas.microsoft.com/office/powerpoint/2010/main" val="389254417"/>
       </p:ext>
     </p:extLst>
   </p:cSld>
@@ -6478,7 +6478,7 @@
             <a:hlinkClick r:id="rId3"/>
             <a:extLst>
               <a:ext uri="{FF2B5EF4-FFF2-40B4-BE49-F238E27FC236}">
-                <a16:creationId xmlns:a16="http://schemas.microsoft.com/office/drawing/2014/main" id="{0842A1A0-0120-42B9-9795-D2598BFDBC0B}"/>
+                <a16:creationId xmlns:a16="http://schemas.microsoft.com/office/drawing/2014/main" id="{4A225B7F-7A97-4DC6-B140-5D17BEB1BB58}"/>
               </a:ext>
             </a:extLst>
           </p:cNvPr>
@@ -6553,7 +6553,7 @@
             <a:hlinkClick r:id="rId4"/>
             <a:extLst>
               <a:ext uri="{FF2B5EF4-FFF2-40B4-BE49-F238E27FC236}">
-                <a16:creationId xmlns:a16="http://schemas.microsoft.com/office/drawing/2014/main" id="{63997133-37BC-4528-AD5A-9514470F4294}"/>
+                <a16:creationId xmlns:a16="http://schemas.microsoft.com/office/drawing/2014/main" id="{D379F63F-AC3D-46A0-98B5-C0EC486D9A34}"/>
               </a:ext>
             </a:extLst>
           </p:cNvPr>
@@ -6627,7 +6627,7 @@
           <p:cNvPr id="3" name="Rectangle 2">
             <a:extLst>
               <a:ext uri="{FF2B5EF4-FFF2-40B4-BE49-F238E27FC236}">
-                <a16:creationId xmlns:a16="http://schemas.microsoft.com/office/drawing/2014/main" id="{FDEB0B2C-788E-4F03-ACE4-E0C42343F117}"/>
+                <a16:creationId xmlns:a16="http://schemas.microsoft.com/office/drawing/2014/main" id="{7545824D-A7F2-4217-B71A-95DD66B0E02D}"/>
               </a:ext>
             </a:extLst>
           </p:cNvPr>
@@ -6689,7 +6689,7 @@
           <p:cNvPr id="4" name="Rectangle 3">
             <a:extLst>
               <a:ext uri="{FF2B5EF4-FFF2-40B4-BE49-F238E27FC236}">
-                <a16:creationId xmlns:a16="http://schemas.microsoft.com/office/drawing/2014/main" id="{CC6C486C-F01D-4CD5-8CB4-322E11380491}"/>
+                <a16:creationId xmlns:a16="http://schemas.microsoft.com/office/drawing/2014/main" id="{05574A5B-D452-467B-AE97-3D22CB32C875}"/>
               </a:ext>
             </a:extLst>
           </p:cNvPr>
@@ -6751,7 +6751,7 @@
           <p:cNvPr id="5" name="Rectangle 4">
             <a:extLst>
               <a:ext uri="{FF2B5EF4-FFF2-40B4-BE49-F238E27FC236}">
-                <a16:creationId xmlns:a16="http://schemas.microsoft.com/office/drawing/2014/main" id="{85F79B59-A167-4D5F-8C6A-C5AD7F7581A6}"/>
+                <a16:creationId xmlns:a16="http://schemas.microsoft.com/office/drawing/2014/main" id="{9E7AC441-F9C1-4960-A16D-57637DBDEB20}"/>
               </a:ext>
             </a:extLst>
           </p:cNvPr>
@@ -6813,7 +6813,7 @@
           <p:cNvPr id="6" name="Rectangle 5">
             <a:extLst>
               <a:ext uri="{FF2B5EF4-FFF2-40B4-BE49-F238E27FC236}">
-                <a16:creationId xmlns:a16="http://schemas.microsoft.com/office/drawing/2014/main" id="{41787E77-6016-4299-8C1E-A9F97459F9B0}"/>
+                <a16:creationId xmlns:a16="http://schemas.microsoft.com/office/drawing/2014/main" id="{DC4572C7-DDE5-4FBE-9259-B21D6A05E432}"/>
               </a:ext>
             </a:extLst>
           </p:cNvPr>
@@ -6875,7 +6875,7 @@
           <p:cNvPr id="7" name="Rectangle 6">
             <a:extLst>
               <a:ext uri="{FF2B5EF4-FFF2-40B4-BE49-F238E27FC236}">
-                <a16:creationId xmlns:a16="http://schemas.microsoft.com/office/drawing/2014/main" id="{04586BDC-81C2-42D5-90FC-B6B231A4A56D}"/>
+                <a16:creationId xmlns:a16="http://schemas.microsoft.com/office/drawing/2014/main" id="{6D219918-CA67-4939-A016-A300D8A5E8D7}"/>
               </a:ext>
             </a:extLst>
           </p:cNvPr>
@@ -6937,7 +6937,7 @@
           <p:cNvPr id="8" name="Rectangle 7">
             <a:extLst>
               <a:ext uri="{FF2B5EF4-FFF2-40B4-BE49-F238E27FC236}">
-                <a16:creationId xmlns:a16="http://schemas.microsoft.com/office/drawing/2014/main" id="{6D9616BE-A860-4691-B716-EB86E888673A}"/>
+                <a16:creationId xmlns:a16="http://schemas.microsoft.com/office/drawing/2014/main" id="{148E0632-4C65-46D6-ADE9-EBEA77B01105}"/>
               </a:ext>
             </a:extLst>
           </p:cNvPr>
@@ -6999,7 +6999,7 @@
           <p:cNvPr id="9" name="Rectangle 8">
             <a:extLst>
               <a:ext uri="{FF2B5EF4-FFF2-40B4-BE49-F238E27FC236}">
-                <a16:creationId xmlns:a16="http://schemas.microsoft.com/office/drawing/2014/main" id="{DC4FA545-E045-449A-9D5E-C2A8C4DACE1A}"/>
+                <a16:creationId xmlns:a16="http://schemas.microsoft.com/office/drawing/2014/main" id="{295A16F4-9AAB-4B11-8162-B224AE0181A8}"/>
               </a:ext>
             </a:extLst>
           </p:cNvPr>
@@ -7061,7 +7061,7 @@
           <p:cNvPr id="10" name="Rectangle 9">
             <a:extLst>
               <a:ext uri="{FF2B5EF4-FFF2-40B4-BE49-F238E27FC236}">
-                <a16:creationId xmlns:a16="http://schemas.microsoft.com/office/drawing/2014/main" id="{C8D4CC47-8B48-4E24-810F-8925D09160DA}"/>
+                <a16:creationId xmlns:a16="http://schemas.microsoft.com/office/drawing/2014/main" id="{764C0DA9-235C-46FF-8B37-7EC6E4FBDB90}"/>
               </a:ext>
             </a:extLst>
           </p:cNvPr>
@@ -7123,7 +7123,7 @@
           <p:cNvPr id="11" name="Rectangle 10">
             <a:extLst>
               <a:ext uri="{FF2B5EF4-FFF2-40B4-BE49-F238E27FC236}">
-                <a16:creationId xmlns:a16="http://schemas.microsoft.com/office/drawing/2014/main" id="{FA93BF55-80DF-49AA-916D-B726AA3C7436}"/>
+                <a16:creationId xmlns:a16="http://schemas.microsoft.com/office/drawing/2014/main" id="{3EE57096-8FA1-4635-94B6-1ED62D7381A4}"/>
               </a:ext>
             </a:extLst>
           </p:cNvPr>
@@ -7154,7 +7154,7 @@
           <p:cNvPr id="12" name="Rectangle 11">
             <a:extLst>
               <a:ext uri="{FF2B5EF4-FFF2-40B4-BE49-F238E27FC236}">
-                <a16:creationId xmlns:a16="http://schemas.microsoft.com/office/drawing/2014/main" id="{DA9C0D4E-9B33-4410-B905-CDD560FE562D}"/>
+                <a16:creationId xmlns:a16="http://schemas.microsoft.com/office/drawing/2014/main" id="{E05FA632-D19F-4E60-BA4E-B6D68B9D8133}"/>
               </a:ext>
             </a:extLst>
           </p:cNvPr>
@@ -7216,7 +7216,7 @@
           <p:cNvPr id="13" name="Rectangle 12">
             <a:extLst>
               <a:ext uri="{FF2B5EF4-FFF2-40B4-BE49-F238E27FC236}">
-                <a16:creationId xmlns:a16="http://schemas.microsoft.com/office/drawing/2014/main" id="{E42E3798-2BEA-49F4-8EB7-F893140322E8}"/>
+                <a16:creationId xmlns:a16="http://schemas.microsoft.com/office/drawing/2014/main" id="{64DEDE8B-C17A-49B3-8473-8ECDE3972A74}"/>
               </a:ext>
             </a:extLst>
           </p:cNvPr>
@@ -7341,7 +7341,7 @@
           <p:cNvPr id="14" name="Rectangle 13">
             <a:extLst>
               <a:ext uri="{FF2B5EF4-FFF2-40B4-BE49-F238E27FC236}">
-                <a16:creationId xmlns:a16="http://schemas.microsoft.com/office/drawing/2014/main" id="{F07CADD9-9723-48A6-8A5D-1764D2A7DB51}"/>
+                <a16:creationId xmlns:a16="http://schemas.microsoft.com/office/drawing/2014/main" id="{DDD45305-F8D6-4622-99A7-77E06B329755}"/>
               </a:ext>
             </a:extLst>
           </p:cNvPr>
@@ -7403,7 +7403,7 @@
           <p:cNvPr id="15" name="Rectangle 14">
             <a:extLst>
               <a:ext uri="{FF2B5EF4-FFF2-40B4-BE49-F238E27FC236}">
-                <a16:creationId xmlns:a16="http://schemas.microsoft.com/office/drawing/2014/main" id="{6931223C-4CC5-441A-A7EE-E6D6357EE70B}"/>
+                <a16:creationId xmlns:a16="http://schemas.microsoft.com/office/drawing/2014/main" id="{939035B7-1342-4867-AA3C-1DBBD99D547F}"/>
               </a:ext>
             </a:extLst>
           </p:cNvPr>
@@ -7528,7 +7528,7 @@
           <p:cNvPr id="16" name="Rectangle: Rounded Corners 15">
             <a:extLst>
               <a:ext uri="{FF2B5EF4-FFF2-40B4-BE49-F238E27FC236}">
-                <a16:creationId xmlns:a16="http://schemas.microsoft.com/office/drawing/2014/main" id="{6809D060-3E16-477F-A721-9C16936C882F}"/>
+                <a16:creationId xmlns:a16="http://schemas.microsoft.com/office/drawing/2014/main" id="{27262A12-82E4-4DEE-A9CB-382CB6B27E2C}"/>
               </a:ext>
             </a:extLst>
           </p:cNvPr>
@@ -7561,7 +7561,7 @@
           <p:cNvPr id="17" name="Rectangle 16">
             <a:extLst>
               <a:ext uri="{FF2B5EF4-FFF2-40B4-BE49-F238E27FC236}">
-                <a16:creationId xmlns:a16="http://schemas.microsoft.com/office/drawing/2014/main" id="{D7DD85F9-4937-4615-AE5E-43EC96DED82E}"/>
+                <a16:creationId xmlns:a16="http://schemas.microsoft.com/office/drawing/2014/main" id="{F9319CED-7964-4008-ADBA-E224AE652339}"/>
               </a:ext>
             </a:extLst>
           </p:cNvPr>
@@ -7623,7 +7623,7 @@
           <p:cNvPr id="18" name="Rectangle 17">
             <a:extLst>
               <a:ext uri="{FF2B5EF4-FFF2-40B4-BE49-F238E27FC236}">
-                <a16:creationId xmlns:a16="http://schemas.microsoft.com/office/drawing/2014/main" id="{119C0882-06CF-4D89-B1CA-0728924809EC}"/>
+                <a16:creationId xmlns:a16="http://schemas.microsoft.com/office/drawing/2014/main" id="{1A40DFD5-FD28-4DAA-8781-9FD25D8D5CE4}"/>
               </a:ext>
             </a:extLst>
           </p:cNvPr>
@@ -7654,7 +7654,7 @@
           <p:cNvPr id="19" name="Rectangle 18">
             <a:extLst>
               <a:ext uri="{FF2B5EF4-FFF2-40B4-BE49-F238E27FC236}">
-                <a16:creationId xmlns:a16="http://schemas.microsoft.com/office/drawing/2014/main" id="{14310C25-14ED-41FD-AACF-7E409AAF9E3A}"/>
+                <a16:creationId xmlns:a16="http://schemas.microsoft.com/office/drawing/2014/main" id="{22AEDAAC-6C2C-4A59-A4AC-507C4FFAFB55}"/>
               </a:ext>
             </a:extLst>
           </p:cNvPr>
@@ -7716,7 +7716,7 @@
           <p:cNvPr id="20" name="Rectangle 19">
             <a:extLst>
               <a:ext uri="{FF2B5EF4-FFF2-40B4-BE49-F238E27FC236}">
-                <a16:creationId xmlns:a16="http://schemas.microsoft.com/office/drawing/2014/main" id="{778821BB-EDBE-4E68-A107-B1906A4A0E04}"/>
+                <a16:creationId xmlns:a16="http://schemas.microsoft.com/office/drawing/2014/main" id="{F89604B7-B701-48AA-851F-650E55DF9AFE}"/>
               </a:ext>
             </a:extLst>
           </p:cNvPr>
@@ -7776,7 +7776,7 @@
     </p:spTree>
     <p:extLst>
       <p:ext uri="{BB962C8B-B14F-4D97-AF65-F5344CB8AC3E}">
-        <p14:creationId xmlns:p14="http://schemas.microsoft.com/office/powerpoint/2010/main" val="708224245"/>
+        <p14:creationId xmlns:p14="http://schemas.microsoft.com/office/powerpoint/2010/main" val="1470035380"/>
       </p:ext>
     </p:extLst>
   </p:cSld>
@@ -7817,7 +7817,7 @@
             <a:hlinkClick r:id="rId3"/>
             <a:extLst>
               <a:ext uri="{FF2B5EF4-FFF2-40B4-BE49-F238E27FC236}">
-                <a16:creationId xmlns:a16="http://schemas.microsoft.com/office/drawing/2014/main" id="{721D4C15-0C44-4BA3-B20C-7D781A77CB32}"/>
+                <a16:creationId xmlns:a16="http://schemas.microsoft.com/office/drawing/2014/main" id="{C4EF6089-B836-4C6A-8CAA-7AF565766F10}"/>
               </a:ext>
             </a:extLst>
           </p:cNvPr>
@@ -7892,7 +7892,7 @@
             <a:hlinkClick r:id="rId4"/>
             <a:extLst>
               <a:ext uri="{FF2B5EF4-FFF2-40B4-BE49-F238E27FC236}">
-                <a16:creationId xmlns:a16="http://schemas.microsoft.com/office/drawing/2014/main" id="{1C954954-0743-4B4A-8DCF-B6E81DE469E9}"/>
+                <a16:creationId xmlns:a16="http://schemas.microsoft.com/office/drawing/2014/main" id="{B658AF49-86A8-4B90-99CE-D1364E5C2204}"/>
               </a:ext>
             </a:extLst>
           </p:cNvPr>
@@ -7966,7 +7966,7 @@
           <p:cNvPr id="3" name="Rectangle 2">
             <a:extLst>
               <a:ext uri="{FF2B5EF4-FFF2-40B4-BE49-F238E27FC236}">
-                <a16:creationId xmlns:a16="http://schemas.microsoft.com/office/drawing/2014/main" id="{8B52EADB-5F4A-4664-B17F-831CB36879C3}"/>
+                <a16:creationId xmlns:a16="http://schemas.microsoft.com/office/drawing/2014/main" id="{A00B3F0E-E3B1-4716-A53F-324CFF3FB5FB}"/>
               </a:ext>
             </a:extLst>
           </p:cNvPr>
@@ -8028,7 +8028,7 @@
           <p:cNvPr id="4" name="Rectangle 3">
             <a:extLst>
               <a:ext uri="{FF2B5EF4-FFF2-40B4-BE49-F238E27FC236}">
-                <a16:creationId xmlns:a16="http://schemas.microsoft.com/office/drawing/2014/main" id="{D7AA10FE-E578-4F6F-BEA1-4FB9E1F6F9EE}"/>
+                <a16:creationId xmlns:a16="http://schemas.microsoft.com/office/drawing/2014/main" id="{FF322064-E689-4535-BD23-3609D042A448}"/>
               </a:ext>
             </a:extLst>
           </p:cNvPr>
@@ -8090,7 +8090,7 @@
           <p:cNvPr id="5" name="Rectangle: Rounded Corners 4">
             <a:extLst>
               <a:ext uri="{FF2B5EF4-FFF2-40B4-BE49-F238E27FC236}">
-                <a16:creationId xmlns:a16="http://schemas.microsoft.com/office/drawing/2014/main" id="{888DBE92-7CD6-4F65-95D1-99142BFFFDD8}"/>
+                <a16:creationId xmlns:a16="http://schemas.microsoft.com/office/drawing/2014/main" id="{5621A821-14DF-42F1-B240-F3EFDFBE8551}"/>
               </a:ext>
             </a:extLst>
           </p:cNvPr>
@@ -8123,7 +8123,7 @@
           <p:cNvPr id="6" name="Rectangle 5">
             <a:extLst>
               <a:ext uri="{FF2B5EF4-FFF2-40B4-BE49-F238E27FC236}">
-                <a16:creationId xmlns:a16="http://schemas.microsoft.com/office/drawing/2014/main" id="{82F2E796-D4B9-44FC-9F5C-FD2EE070765B}"/>
+                <a16:creationId xmlns:a16="http://schemas.microsoft.com/office/drawing/2014/main" id="{3131A480-0DCF-4B26-95A3-15484EE7EB28}"/>
               </a:ext>
             </a:extLst>
           </p:cNvPr>
@@ -8185,7 +8185,7 @@
           <p:cNvPr id="7" name="Rectangle 6">
             <a:extLst>
               <a:ext uri="{FF2B5EF4-FFF2-40B4-BE49-F238E27FC236}">
-                <a16:creationId xmlns:a16="http://schemas.microsoft.com/office/drawing/2014/main" id="{1BE0EF64-18F9-446D-9C95-690D8A516498}"/>
+                <a16:creationId xmlns:a16="http://schemas.microsoft.com/office/drawing/2014/main" id="{7D66A3C0-6C10-40B2-AD2B-12E33BEFF4F7}"/>
               </a:ext>
             </a:extLst>
           </p:cNvPr>
@@ -8247,7 +8247,7 @@
           <p:cNvPr id="8" name="Rectangle 7">
             <a:extLst>
               <a:ext uri="{FF2B5EF4-FFF2-40B4-BE49-F238E27FC236}">
-                <a16:creationId xmlns:a16="http://schemas.microsoft.com/office/drawing/2014/main" id="{5BA9592D-CC5A-4E81-9288-5FC6790C9328}"/>
+                <a16:creationId xmlns:a16="http://schemas.microsoft.com/office/drawing/2014/main" id="{D8156849-968A-457F-A64A-44DEB31FCEED}"/>
               </a:ext>
             </a:extLst>
           </p:cNvPr>
@@ -8309,7 +8309,7 @@
           <p:cNvPr id="9" name="Rectangle 8">
             <a:extLst>
               <a:ext uri="{FF2B5EF4-FFF2-40B4-BE49-F238E27FC236}">
-                <a16:creationId xmlns:a16="http://schemas.microsoft.com/office/drawing/2014/main" id="{3BD0C9A6-161A-4BEF-AA68-A2BF6CBFDEF6}"/>
+                <a16:creationId xmlns:a16="http://schemas.microsoft.com/office/drawing/2014/main" id="{D8209A3E-562C-47D8-BEC4-DDBBF5D5F013}"/>
               </a:ext>
             </a:extLst>
           </p:cNvPr>
@@ -8371,7 +8371,7 @@
           <p:cNvPr id="10" name="Rectangle 9">
             <a:extLst>
               <a:ext uri="{FF2B5EF4-FFF2-40B4-BE49-F238E27FC236}">
-                <a16:creationId xmlns:a16="http://schemas.microsoft.com/office/drawing/2014/main" id="{8CED3FF4-3E74-43F3-A9E7-814DEE25244C}"/>
+                <a16:creationId xmlns:a16="http://schemas.microsoft.com/office/drawing/2014/main" id="{876017E8-7764-420A-8024-4066233E4826}"/>
               </a:ext>
             </a:extLst>
           </p:cNvPr>
@@ -8433,7 +8433,7 @@
           <p:cNvPr id="11" name="Rectangle 10">
             <a:extLst>
               <a:ext uri="{FF2B5EF4-FFF2-40B4-BE49-F238E27FC236}">
-                <a16:creationId xmlns:a16="http://schemas.microsoft.com/office/drawing/2014/main" id="{96610B3F-05D9-449C-B19A-566A3BA06B9B}"/>
+                <a16:creationId xmlns:a16="http://schemas.microsoft.com/office/drawing/2014/main" id="{59C7C0E9-8D66-4BC8-98E2-4D19EFD9C062}"/>
               </a:ext>
             </a:extLst>
           </p:cNvPr>
@@ -8495,7 +8495,7 @@
           <p:cNvPr id="12" name="Rectangle 11">
             <a:extLst>
               <a:ext uri="{FF2B5EF4-FFF2-40B4-BE49-F238E27FC236}">
-                <a16:creationId xmlns:a16="http://schemas.microsoft.com/office/drawing/2014/main" id="{7159504A-D1AA-464E-80DB-C562FBA375B4}"/>
+                <a16:creationId xmlns:a16="http://schemas.microsoft.com/office/drawing/2014/main" id="{2E944B10-0B10-4EE6-9188-8AAEA9C60892}"/>
               </a:ext>
             </a:extLst>
           </p:cNvPr>
@@ -8557,7 +8557,7 @@
           <p:cNvPr id="13" name="Rectangle 12">
             <a:extLst>
               <a:ext uri="{FF2B5EF4-FFF2-40B4-BE49-F238E27FC236}">
-                <a16:creationId xmlns:a16="http://schemas.microsoft.com/office/drawing/2014/main" id="{0E794067-D33B-4885-B82E-63F07F5E0E04}"/>
+                <a16:creationId xmlns:a16="http://schemas.microsoft.com/office/drawing/2014/main" id="{F3059AF3-92A2-48CC-A4B2-3145E168CDEB}"/>
               </a:ext>
             </a:extLst>
           </p:cNvPr>
@@ -8619,7 +8619,7 @@
           <p:cNvPr id="14" name="Rectangle 13">
             <a:extLst>
               <a:ext uri="{FF2B5EF4-FFF2-40B4-BE49-F238E27FC236}">
-                <a16:creationId xmlns:a16="http://schemas.microsoft.com/office/drawing/2014/main" id="{96DCE339-1E17-4377-AD1A-71B3993E2FE0}"/>
+                <a16:creationId xmlns:a16="http://schemas.microsoft.com/office/drawing/2014/main" id="{8DFE8C44-727E-463A-AD45-A18E9F94C329}"/>
               </a:ext>
             </a:extLst>
           </p:cNvPr>
@@ -8681,7 +8681,7 @@
           <p:cNvPr id="15" name="Rectangle 14">
             <a:extLst>
               <a:ext uri="{FF2B5EF4-FFF2-40B4-BE49-F238E27FC236}">
-                <a16:creationId xmlns:a16="http://schemas.microsoft.com/office/drawing/2014/main" id="{ABB66E00-47DC-49B9-9CBF-865977B01B0A}"/>
+                <a16:creationId xmlns:a16="http://schemas.microsoft.com/office/drawing/2014/main" id="{8A6909BF-552F-4EA8-803C-9938E16B20A1}"/>
               </a:ext>
             </a:extLst>
           </p:cNvPr>
@@ -8743,7 +8743,7 @@
           <p:cNvPr id="16" name="Rectangle 15">
             <a:extLst>
               <a:ext uri="{FF2B5EF4-FFF2-40B4-BE49-F238E27FC236}">
-                <a16:creationId xmlns:a16="http://schemas.microsoft.com/office/drawing/2014/main" id="{04A40995-11AD-4193-9D20-A45963E647E7}"/>
+                <a16:creationId xmlns:a16="http://schemas.microsoft.com/office/drawing/2014/main" id="{2A4FD559-5ABB-4F91-BAD7-19C6817D94A3}"/>
               </a:ext>
             </a:extLst>
           </p:cNvPr>
@@ -8805,7 +8805,7 @@
           <p:cNvPr id="17" name="Rectangle: Rounded Corners 16">
             <a:extLst>
               <a:ext uri="{FF2B5EF4-FFF2-40B4-BE49-F238E27FC236}">
-                <a16:creationId xmlns:a16="http://schemas.microsoft.com/office/drawing/2014/main" id="{38BB9B30-F96E-45F4-817E-17070D54D84E}"/>
+                <a16:creationId xmlns:a16="http://schemas.microsoft.com/office/drawing/2014/main" id="{C9C69911-8F36-4A86-8688-C0AF37B81D90}"/>
               </a:ext>
             </a:extLst>
           </p:cNvPr>
@@ -8838,7 +8838,7 @@
           <p:cNvPr id="18" name="Rectangle 17">
             <a:extLst>
               <a:ext uri="{FF2B5EF4-FFF2-40B4-BE49-F238E27FC236}">
-                <a16:creationId xmlns:a16="http://schemas.microsoft.com/office/drawing/2014/main" id="{CBBB941F-AB89-4B45-BA08-A56879B3E179}"/>
+                <a16:creationId xmlns:a16="http://schemas.microsoft.com/office/drawing/2014/main" id="{48D98497-2307-4201-8762-871C47079F40}"/>
               </a:ext>
             </a:extLst>
           </p:cNvPr>
@@ -8900,7 +8900,7 @@
           <p:cNvPr id="19" name="Rectangle 18">
             <a:extLst>
               <a:ext uri="{FF2B5EF4-FFF2-40B4-BE49-F238E27FC236}">
-                <a16:creationId xmlns:a16="http://schemas.microsoft.com/office/drawing/2014/main" id="{44DDB698-4CF2-4D9C-AD22-F571B3C66186}"/>
+                <a16:creationId xmlns:a16="http://schemas.microsoft.com/office/drawing/2014/main" id="{67A0F926-0BF7-45E4-B1C1-A4FD838452E2}"/>
               </a:ext>
             </a:extLst>
           </p:cNvPr>
@@ -8962,7 +8962,7 @@
           <p:cNvPr id="20" name="Rectangle 19">
             <a:extLst>
               <a:ext uri="{FF2B5EF4-FFF2-40B4-BE49-F238E27FC236}">
-                <a16:creationId xmlns:a16="http://schemas.microsoft.com/office/drawing/2014/main" id="{66A717E4-71EF-47FB-8B2B-0DB054EF71B2}"/>
+                <a16:creationId xmlns:a16="http://schemas.microsoft.com/office/drawing/2014/main" id="{8BD7221A-BA07-4F3F-8567-1551BCDD99F8}"/>
               </a:ext>
             </a:extLst>
           </p:cNvPr>
@@ -9024,7 +9024,7 @@
           <p:cNvPr id="21" name="Rectangle 20">
             <a:extLst>
               <a:ext uri="{FF2B5EF4-FFF2-40B4-BE49-F238E27FC236}">
-                <a16:creationId xmlns:a16="http://schemas.microsoft.com/office/drawing/2014/main" id="{2139E231-26FF-4403-8ADF-B10752370810}"/>
+                <a16:creationId xmlns:a16="http://schemas.microsoft.com/office/drawing/2014/main" id="{630FFC6C-6D0C-4337-89BB-E58245798633}"/>
               </a:ext>
             </a:extLst>
           </p:cNvPr>
@@ -9086,7 +9086,7 @@
           <p:cNvPr id="22" name="Rectangle 21">
             <a:extLst>
               <a:ext uri="{FF2B5EF4-FFF2-40B4-BE49-F238E27FC236}">
-                <a16:creationId xmlns:a16="http://schemas.microsoft.com/office/drawing/2014/main" id="{7D0E8472-9DA5-44AE-8755-CA5B12468D71}"/>
+                <a16:creationId xmlns:a16="http://schemas.microsoft.com/office/drawing/2014/main" id="{7F981B56-49A1-45E6-88F4-D6171A04070D}"/>
               </a:ext>
             </a:extLst>
           </p:cNvPr>
@@ -9148,7 +9148,7 @@
           <p:cNvPr id="23" name="Rectangle 22">
             <a:extLst>
               <a:ext uri="{FF2B5EF4-FFF2-40B4-BE49-F238E27FC236}">
-                <a16:creationId xmlns:a16="http://schemas.microsoft.com/office/drawing/2014/main" id="{35375653-E182-4D75-A2ED-5BF1CEAC8572}"/>
+                <a16:creationId xmlns:a16="http://schemas.microsoft.com/office/drawing/2014/main" id="{7235A99F-7449-4E79-A841-C6AD99925D0C}"/>
               </a:ext>
             </a:extLst>
           </p:cNvPr>
@@ -9210,7 +9210,7 @@
           <p:cNvPr id="24" name="Rectangle 23">
             <a:extLst>
               <a:ext uri="{FF2B5EF4-FFF2-40B4-BE49-F238E27FC236}">
-                <a16:creationId xmlns:a16="http://schemas.microsoft.com/office/drawing/2014/main" id="{D414F5AE-6D96-4B13-B3A3-5750F3D5F7FE}"/>
+                <a16:creationId xmlns:a16="http://schemas.microsoft.com/office/drawing/2014/main" id="{DBAEB11B-F363-4C87-96D6-03B10CDEB091}"/>
               </a:ext>
             </a:extLst>
           </p:cNvPr>
@@ -9272,7 +9272,7 @@
           <p:cNvPr id="25" name="Rectangle 24">
             <a:extLst>
               <a:ext uri="{FF2B5EF4-FFF2-40B4-BE49-F238E27FC236}">
-                <a16:creationId xmlns:a16="http://schemas.microsoft.com/office/drawing/2014/main" id="{A8A97F28-676D-4059-8C5F-7040C348D120}"/>
+                <a16:creationId xmlns:a16="http://schemas.microsoft.com/office/drawing/2014/main" id="{D4FCC7EE-4581-410A-B655-82E05D450820}"/>
               </a:ext>
             </a:extLst>
           </p:cNvPr>
@@ -9334,7 +9334,7 @@
           <p:cNvPr id="26" name="Rectangle 25">
             <a:extLst>
               <a:ext uri="{FF2B5EF4-FFF2-40B4-BE49-F238E27FC236}">
-                <a16:creationId xmlns:a16="http://schemas.microsoft.com/office/drawing/2014/main" id="{FF6B7675-3FFA-4F41-BAAD-846356C5BB8A}"/>
+                <a16:creationId xmlns:a16="http://schemas.microsoft.com/office/drawing/2014/main" id="{22C85DB7-4930-412E-A52A-8A82A7252B11}"/>
               </a:ext>
             </a:extLst>
           </p:cNvPr>
@@ -9396,7 +9396,7 @@
           <p:cNvPr id="27" name="Rectangle 26">
             <a:extLst>
               <a:ext uri="{FF2B5EF4-FFF2-40B4-BE49-F238E27FC236}">
-                <a16:creationId xmlns:a16="http://schemas.microsoft.com/office/drawing/2014/main" id="{5E1AEE21-E201-4C21-BE9A-D8E3BAEBAE11}"/>
+                <a16:creationId xmlns:a16="http://schemas.microsoft.com/office/drawing/2014/main" id="{42CE0FA3-9C5C-4262-9E7B-7F033347D69F}"/>
               </a:ext>
             </a:extLst>
           </p:cNvPr>
@@ -9458,7 +9458,7 @@
           <p:cNvPr id="28" name="Rectangle 27">
             <a:extLst>
               <a:ext uri="{FF2B5EF4-FFF2-40B4-BE49-F238E27FC236}">
-                <a16:creationId xmlns:a16="http://schemas.microsoft.com/office/drawing/2014/main" id="{1509ECEB-0045-44D1-B101-EBF7E7074138}"/>
+                <a16:creationId xmlns:a16="http://schemas.microsoft.com/office/drawing/2014/main" id="{7A36658C-A062-4A45-B214-061546CF1E01}"/>
               </a:ext>
             </a:extLst>
           </p:cNvPr>
@@ -9520,7 +9520,7 @@
           <p:cNvPr id="29" name="Rectangle: Rounded Corners 28">
             <a:extLst>
               <a:ext uri="{FF2B5EF4-FFF2-40B4-BE49-F238E27FC236}">
-                <a16:creationId xmlns:a16="http://schemas.microsoft.com/office/drawing/2014/main" id="{53239251-8059-42B3-AAAF-81DF4C7D8833}"/>
+                <a16:creationId xmlns:a16="http://schemas.microsoft.com/office/drawing/2014/main" id="{A32E838D-20A7-4E61-BA59-2CBCC81B5FE1}"/>
               </a:ext>
             </a:extLst>
           </p:cNvPr>
@@ -9553,7 +9553,7 @@
           <p:cNvPr id="30" name="Rectangle 29">
             <a:extLst>
               <a:ext uri="{FF2B5EF4-FFF2-40B4-BE49-F238E27FC236}">
-                <a16:creationId xmlns:a16="http://schemas.microsoft.com/office/drawing/2014/main" id="{D3FB8FB5-A454-4110-9C08-5317DB033DE5}"/>
+                <a16:creationId xmlns:a16="http://schemas.microsoft.com/office/drawing/2014/main" id="{A84EF773-070F-497C-96EF-21A05AFFC75B}"/>
               </a:ext>
             </a:extLst>
           </p:cNvPr>
@@ -9615,7 +9615,7 @@
           <p:cNvPr id="31" name="Rectangle 30">
             <a:extLst>
               <a:ext uri="{FF2B5EF4-FFF2-40B4-BE49-F238E27FC236}">
-                <a16:creationId xmlns:a16="http://schemas.microsoft.com/office/drawing/2014/main" id="{E5D4F7D8-6C38-4D38-8C4F-BEB1038EB6E7}"/>
+                <a16:creationId xmlns:a16="http://schemas.microsoft.com/office/drawing/2014/main" id="{DF9A60DE-C2C2-4164-93AC-D6EE5EAD649C}"/>
               </a:ext>
             </a:extLst>
           </p:cNvPr>
@@ -9646,7 +9646,7 @@
           <p:cNvPr id="32" name="Rectangle 31">
             <a:extLst>
               <a:ext uri="{FF2B5EF4-FFF2-40B4-BE49-F238E27FC236}">
-                <a16:creationId xmlns:a16="http://schemas.microsoft.com/office/drawing/2014/main" id="{365D8FA0-41D9-43FD-BE81-BC2B161AB833}"/>
+                <a16:creationId xmlns:a16="http://schemas.microsoft.com/office/drawing/2014/main" id="{154A2F07-D761-4266-AB81-ED6D9982D4DC}"/>
               </a:ext>
             </a:extLst>
           </p:cNvPr>
@@ -9708,7 +9708,7 @@
           <p:cNvPr id="33" name="Rectangle 32">
             <a:extLst>
               <a:ext uri="{FF2B5EF4-FFF2-40B4-BE49-F238E27FC236}">
-                <a16:creationId xmlns:a16="http://schemas.microsoft.com/office/drawing/2014/main" id="{D182B3FA-27B5-4219-B19E-7FF161922482}"/>
+                <a16:creationId xmlns:a16="http://schemas.microsoft.com/office/drawing/2014/main" id="{618C80D8-B308-4E7A-BE46-1A5189D8391C}"/>
               </a:ext>
             </a:extLst>
           </p:cNvPr>
@@ -9768,7 +9768,7 @@
     </p:spTree>
     <p:extLst>
       <p:ext uri="{BB962C8B-B14F-4D97-AF65-F5344CB8AC3E}">
-        <p14:creationId xmlns:p14="http://schemas.microsoft.com/office/powerpoint/2010/main" val="444945726"/>
+        <p14:creationId xmlns:p14="http://schemas.microsoft.com/office/powerpoint/2010/main" val="710031829"/>
       </p:ext>
     </p:extLst>
   </p:cSld>
@@ -9809,7 +9809,7 @@
             <a:hlinkClick r:id="rId3"/>
             <a:extLst>
               <a:ext uri="{FF2B5EF4-FFF2-40B4-BE49-F238E27FC236}">
-                <a16:creationId xmlns:a16="http://schemas.microsoft.com/office/drawing/2014/main" id="{576D0473-BD8E-464B-A760-E8BDFDCACD46}"/>
+                <a16:creationId xmlns:a16="http://schemas.microsoft.com/office/drawing/2014/main" id="{D75311E7-596D-4714-A2DF-39EA651E06D5}"/>
               </a:ext>
             </a:extLst>
           </p:cNvPr>
@@ -9884,7 +9884,7 @@
             <a:hlinkClick r:id="rId4"/>
             <a:extLst>
               <a:ext uri="{FF2B5EF4-FFF2-40B4-BE49-F238E27FC236}">
-                <a16:creationId xmlns:a16="http://schemas.microsoft.com/office/drawing/2014/main" id="{4D60BF83-886A-4874-9EE3-192B973EBFAE}"/>
+                <a16:creationId xmlns:a16="http://schemas.microsoft.com/office/drawing/2014/main" id="{C1D8CD39-FADB-4B2D-AA77-074961EA2D1F}"/>
               </a:ext>
             </a:extLst>
           </p:cNvPr>
@@ -9958,7 +9958,7 @@
           <p:cNvPr id="3" name="Rectangle 2">
             <a:extLst>
               <a:ext uri="{FF2B5EF4-FFF2-40B4-BE49-F238E27FC236}">
-                <a16:creationId xmlns:a16="http://schemas.microsoft.com/office/drawing/2014/main" id="{C21FCFFC-1B8B-43BC-9488-F6E39B740138}"/>
+                <a16:creationId xmlns:a16="http://schemas.microsoft.com/office/drawing/2014/main" id="{D3A33A94-057F-4564-AB3F-259D0B46C220}"/>
               </a:ext>
             </a:extLst>
           </p:cNvPr>
@@ -10020,7 +10020,7 @@
           <p:cNvPr id="4" name="Rectangle 3">
             <a:extLst>
               <a:ext uri="{FF2B5EF4-FFF2-40B4-BE49-F238E27FC236}">
-                <a16:creationId xmlns:a16="http://schemas.microsoft.com/office/drawing/2014/main" id="{9A0C450F-F9A8-4C37-99A0-931D91773B00}"/>
+                <a16:creationId xmlns:a16="http://schemas.microsoft.com/office/drawing/2014/main" id="{94833F52-4169-4CE1-B11D-7D7213FCE6FA}"/>
               </a:ext>
             </a:extLst>
           </p:cNvPr>
@@ -10091,8 +10091,8 @@
         </p:blipFill>
         <p:spPr>
           <a:xfrm>
-            <a:off x="685800" y="1926931"/>
-            <a:ext cx="6000750" cy="2756488"/>
+            <a:off x="685800" y="1924095"/>
+            <a:ext cx="6000750" cy="2762160"/>
           </a:xfrm>
           <a:prstGeom prst="roundRect">
             <a:avLst>
@@ -10106,7 +10106,7 @@
           <p:cNvPr id="6" name="Rectangle: Rounded Corners 5">
             <a:extLst>
               <a:ext uri="{FF2B5EF4-FFF2-40B4-BE49-F238E27FC236}">
-                <a16:creationId xmlns:a16="http://schemas.microsoft.com/office/drawing/2014/main" id="{87207EC0-3D0F-439A-9B3B-BF7E744482AD}"/>
+                <a16:creationId xmlns:a16="http://schemas.microsoft.com/office/drawing/2014/main" id="{A592ADBD-0FC9-4529-B83D-011CB2925D84}"/>
               </a:ext>
             </a:extLst>
           </p:cNvPr>
@@ -10139,7 +10139,7 @@
           <p:cNvPr id="7" name="Rectangle 6">
             <a:extLst>
               <a:ext uri="{FF2B5EF4-FFF2-40B4-BE49-F238E27FC236}">
-                <a16:creationId xmlns:a16="http://schemas.microsoft.com/office/drawing/2014/main" id="{A713592C-2088-4718-A054-0CA11E5260B5}"/>
+                <a16:creationId xmlns:a16="http://schemas.microsoft.com/office/drawing/2014/main" id="{10C8377A-13F7-44A0-8C4F-F395332F0CD2}"/>
               </a:ext>
             </a:extLst>
           </p:cNvPr>
@@ -10201,7 +10201,7 @@
           <p:cNvPr id="8" name="Rectangle 7">
             <a:extLst>
               <a:ext uri="{FF2B5EF4-FFF2-40B4-BE49-F238E27FC236}">
-                <a16:creationId xmlns:a16="http://schemas.microsoft.com/office/drawing/2014/main" id="{CF00D54B-4767-4702-99F7-185C8BFDBBB6}"/>
+                <a16:creationId xmlns:a16="http://schemas.microsoft.com/office/drawing/2014/main" id="{757F8748-3038-4B4C-82FF-677E32B12795}"/>
               </a:ext>
             </a:extLst>
           </p:cNvPr>
@@ -10263,7 +10263,7 @@
           <p:cNvPr id="9" name="Rectangle 8">
             <a:extLst>
               <a:ext uri="{FF2B5EF4-FFF2-40B4-BE49-F238E27FC236}">
-                <a16:creationId xmlns:a16="http://schemas.microsoft.com/office/drawing/2014/main" id="{6C92DC12-26A9-42D5-A90A-C97CBCD9EA60}"/>
+                <a16:creationId xmlns:a16="http://schemas.microsoft.com/office/drawing/2014/main" id="{6711AC03-2829-44B4-B44D-292F9FA76C73}"/>
               </a:ext>
             </a:extLst>
           </p:cNvPr>
@@ -10325,7 +10325,7 @@
           <p:cNvPr id="10" name="Rectangle 9">
             <a:extLst>
               <a:ext uri="{FF2B5EF4-FFF2-40B4-BE49-F238E27FC236}">
-                <a16:creationId xmlns:a16="http://schemas.microsoft.com/office/drawing/2014/main" id="{7182A043-9A46-45A1-B0CF-977C8F470E3A}"/>
+                <a16:creationId xmlns:a16="http://schemas.microsoft.com/office/drawing/2014/main" id="{E9D16609-F58F-4467-9CE6-E4A18B5E0F4B}"/>
               </a:ext>
             </a:extLst>
           </p:cNvPr>
@@ -10387,7 +10387,7 @@
           <p:cNvPr id="11" name="Rectangle 10">
             <a:extLst>
               <a:ext uri="{FF2B5EF4-FFF2-40B4-BE49-F238E27FC236}">
-                <a16:creationId xmlns:a16="http://schemas.microsoft.com/office/drawing/2014/main" id="{3A50948D-B3C6-4F92-8A2F-6208776BE1FF}"/>
+                <a16:creationId xmlns:a16="http://schemas.microsoft.com/office/drawing/2014/main" id="{DA84AF4B-2C29-4088-8BD8-ADCD684BE60F}"/>
               </a:ext>
             </a:extLst>
           </p:cNvPr>
@@ -10449,7 +10449,7 @@
           <p:cNvPr id="12" name="Rectangle 11">
             <a:extLst>
               <a:ext uri="{FF2B5EF4-FFF2-40B4-BE49-F238E27FC236}">
-                <a16:creationId xmlns:a16="http://schemas.microsoft.com/office/drawing/2014/main" id="{F6602319-0B0C-4158-8724-052B54A7E760}"/>
+                <a16:creationId xmlns:a16="http://schemas.microsoft.com/office/drawing/2014/main" id="{2A845F93-D822-44B4-A604-7E360497D836}"/>
               </a:ext>
             </a:extLst>
           </p:cNvPr>
@@ -10511,7 +10511,7 @@
           <p:cNvPr id="13" name="Rectangle 12">
             <a:extLst>
               <a:ext uri="{FF2B5EF4-FFF2-40B4-BE49-F238E27FC236}">
-                <a16:creationId xmlns:a16="http://schemas.microsoft.com/office/drawing/2014/main" id="{A87E6081-E7EA-4F5A-A005-E649B68D4D47}"/>
+                <a16:creationId xmlns:a16="http://schemas.microsoft.com/office/drawing/2014/main" id="{B843B491-1681-43E1-83AC-CE0311E83600}"/>
               </a:ext>
             </a:extLst>
           </p:cNvPr>
@@ -10573,7 +10573,7 @@
           <p:cNvPr id="14" name="Rectangle 13">
             <a:extLst>
               <a:ext uri="{FF2B5EF4-FFF2-40B4-BE49-F238E27FC236}">
-                <a16:creationId xmlns:a16="http://schemas.microsoft.com/office/drawing/2014/main" id="{0AC7EF04-7599-4306-938D-74EB7A87997B}"/>
+                <a16:creationId xmlns:a16="http://schemas.microsoft.com/office/drawing/2014/main" id="{EF6C0151-B837-41A2-AC7F-14352F8499F3}"/>
               </a:ext>
             </a:extLst>
           </p:cNvPr>
@@ -10635,7 +10635,7 @@
           <p:cNvPr id="15" name="Rectangle 14">
             <a:extLst>
               <a:ext uri="{FF2B5EF4-FFF2-40B4-BE49-F238E27FC236}">
-                <a16:creationId xmlns:a16="http://schemas.microsoft.com/office/drawing/2014/main" id="{ADDA6A53-FB09-4D63-9E7E-4FBA77B67805}"/>
+                <a16:creationId xmlns:a16="http://schemas.microsoft.com/office/drawing/2014/main" id="{171AA00F-A78B-4E06-8CAC-6E6B11913F07}"/>
               </a:ext>
             </a:extLst>
           </p:cNvPr>
@@ -10666,7 +10666,7 @@
           <p:cNvPr id="16" name="Rectangle 15">
             <a:extLst>
               <a:ext uri="{FF2B5EF4-FFF2-40B4-BE49-F238E27FC236}">
-                <a16:creationId xmlns:a16="http://schemas.microsoft.com/office/drawing/2014/main" id="{C6CE90F9-62D2-4D48-9619-621415B928D3}"/>
+                <a16:creationId xmlns:a16="http://schemas.microsoft.com/office/drawing/2014/main" id="{B3365FA0-60E1-43F1-AB48-E45562E5C647}"/>
               </a:ext>
             </a:extLst>
           </p:cNvPr>
@@ -10728,7 +10728,7 @@
           <p:cNvPr id="17" name="Rectangle 16">
             <a:extLst>
               <a:ext uri="{FF2B5EF4-FFF2-40B4-BE49-F238E27FC236}">
-                <a16:creationId xmlns:a16="http://schemas.microsoft.com/office/drawing/2014/main" id="{3F32FCCE-4C00-4021-A496-A81B993A778C}"/>
+                <a16:creationId xmlns:a16="http://schemas.microsoft.com/office/drawing/2014/main" id="{5E03B973-0A88-4786-AA5B-704D427DD7E3}"/>
               </a:ext>
             </a:extLst>
           </p:cNvPr>
@@ -10790,7 +10790,7 @@
           <p:cNvPr id="18" name="Rectangle: Rounded Corners 17">
             <a:extLst>
               <a:ext uri="{FF2B5EF4-FFF2-40B4-BE49-F238E27FC236}">
-                <a16:creationId xmlns:a16="http://schemas.microsoft.com/office/drawing/2014/main" id="{E79AE7B3-5A37-4EA2-8863-5DDF6D8B305E}"/>
+                <a16:creationId xmlns:a16="http://schemas.microsoft.com/office/drawing/2014/main" id="{06DBD26B-BDB2-410E-8F3B-4C4D21AF4277}"/>
               </a:ext>
             </a:extLst>
           </p:cNvPr>
@@ -10823,7 +10823,7 @@
           <p:cNvPr id="19" name="Rectangle 18">
             <a:extLst>
               <a:ext uri="{FF2B5EF4-FFF2-40B4-BE49-F238E27FC236}">
-                <a16:creationId xmlns:a16="http://schemas.microsoft.com/office/drawing/2014/main" id="{8C45D70F-9390-4EA7-A734-98E873A836E3}"/>
+                <a16:creationId xmlns:a16="http://schemas.microsoft.com/office/drawing/2014/main" id="{3F2689D2-1E6E-4540-AF0C-26269708D1BC}"/>
               </a:ext>
             </a:extLst>
           </p:cNvPr>
@@ -10885,7 +10885,7 @@
           <p:cNvPr id="20" name="Rectangle 19">
             <a:extLst>
               <a:ext uri="{FF2B5EF4-FFF2-40B4-BE49-F238E27FC236}">
-                <a16:creationId xmlns:a16="http://schemas.microsoft.com/office/drawing/2014/main" id="{3ABECFC2-7A7B-4484-9308-ADD12A1C0AD5}"/>
+                <a16:creationId xmlns:a16="http://schemas.microsoft.com/office/drawing/2014/main" id="{6C4AD392-E1E4-49D8-A686-0FBB88024456}"/>
               </a:ext>
             </a:extLst>
           </p:cNvPr>
@@ -10916,7 +10916,7 @@
           <p:cNvPr id="21" name="Rectangle 20">
             <a:extLst>
               <a:ext uri="{FF2B5EF4-FFF2-40B4-BE49-F238E27FC236}">
-                <a16:creationId xmlns:a16="http://schemas.microsoft.com/office/drawing/2014/main" id="{121BC5F4-6265-421D-82A5-EB570E9DF182}"/>
+                <a16:creationId xmlns:a16="http://schemas.microsoft.com/office/drawing/2014/main" id="{EF901880-41F6-4FF1-93E1-E56E9A975123}"/>
               </a:ext>
             </a:extLst>
           </p:cNvPr>
@@ -10978,7 +10978,7 @@
           <p:cNvPr id="22" name="Rectangle 21">
             <a:extLst>
               <a:ext uri="{FF2B5EF4-FFF2-40B4-BE49-F238E27FC236}">
-                <a16:creationId xmlns:a16="http://schemas.microsoft.com/office/drawing/2014/main" id="{B3846F25-7E9C-4FD3-9682-23DAE3054D74}"/>
+                <a16:creationId xmlns:a16="http://schemas.microsoft.com/office/drawing/2014/main" id="{21627C5B-8E85-429C-84FF-2E8DDA21B15B}"/>
               </a:ext>
             </a:extLst>
           </p:cNvPr>
@@ -11038,7 +11038,7 @@
     </p:spTree>
     <p:extLst>
       <p:ext uri="{BB962C8B-B14F-4D97-AF65-F5344CB8AC3E}">
-        <p14:creationId xmlns:p14="http://schemas.microsoft.com/office/powerpoint/2010/main" val="2147188893"/>
+        <p14:creationId xmlns:p14="http://schemas.microsoft.com/office/powerpoint/2010/main" val="1218992746"/>
       </p:ext>
     </p:extLst>
   </p:cSld>
@@ -11079,7 +11079,7 @@
             <a:hlinkClick r:id="rId3"/>
             <a:extLst>
               <a:ext uri="{FF2B5EF4-FFF2-40B4-BE49-F238E27FC236}">
-                <a16:creationId xmlns:a16="http://schemas.microsoft.com/office/drawing/2014/main" id="{99282B17-1E16-4D31-8EA5-5146D8A99CC3}"/>
+                <a16:creationId xmlns:a16="http://schemas.microsoft.com/office/drawing/2014/main" id="{E4A26F34-CF83-4F8C-A92B-77357492ADDB}"/>
               </a:ext>
             </a:extLst>
           </p:cNvPr>
@@ -11154,7 +11154,7 @@
             <a:hlinkClick r:id="rId4"/>
             <a:extLst>
               <a:ext uri="{FF2B5EF4-FFF2-40B4-BE49-F238E27FC236}">
-                <a16:creationId xmlns:a16="http://schemas.microsoft.com/office/drawing/2014/main" id="{A81B1868-DFB8-40AF-9C3E-A5D306C9748D}"/>
+                <a16:creationId xmlns:a16="http://schemas.microsoft.com/office/drawing/2014/main" id="{7B507C45-D309-4C23-9567-2C366B81BE3C}"/>
               </a:ext>
             </a:extLst>
           </p:cNvPr>
@@ -11228,7 +11228,7 @@
           <p:cNvPr id="3" name="Rectangle 2">
             <a:extLst>
               <a:ext uri="{FF2B5EF4-FFF2-40B4-BE49-F238E27FC236}">
-                <a16:creationId xmlns:a16="http://schemas.microsoft.com/office/drawing/2014/main" id="{FB4290EC-1CA0-4FE0-8206-95E7CC87B751}"/>
+                <a16:creationId xmlns:a16="http://schemas.microsoft.com/office/drawing/2014/main" id="{CFE924EA-F748-48DC-8A71-E97AAC5519E1}"/>
               </a:ext>
             </a:extLst>
           </p:cNvPr>
@@ -11290,7 +11290,7 @@
           <p:cNvPr id="4" name="Rectangle 3">
             <a:extLst>
               <a:ext uri="{FF2B5EF4-FFF2-40B4-BE49-F238E27FC236}">
-                <a16:creationId xmlns:a16="http://schemas.microsoft.com/office/drawing/2014/main" id="{166D5E86-F2C1-49D5-81E6-45436AA71B2D}"/>
+                <a16:creationId xmlns:a16="http://schemas.microsoft.com/office/drawing/2014/main" id="{2740D231-E6A7-41F0-9713-CBA63AA6276C}"/>
               </a:ext>
             </a:extLst>
           </p:cNvPr>
@@ -11352,7 +11352,7 @@
           <p:cNvPr id="5" name="Rectangle 4">
             <a:extLst>
               <a:ext uri="{FF2B5EF4-FFF2-40B4-BE49-F238E27FC236}">
-                <a16:creationId xmlns:a16="http://schemas.microsoft.com/office/drawing/2014/main" id="{2C60092F-6CA5-4B3A-9993-D8EB6627243A}"/>
+                <a16:creationId xmlns:a16="http://schemas.microsoft.com/office/drawing/2014/main" id="{3CCB52D2-F429-4DC1-B4E1-6FB40063D3DE}"/>
               </a:ext>
             </a:extLst>
           </p:cNvPr>
@@ -11414,7 +11414,7 @@
           <p:cNvPr id="6" name="Rectangle: Rounded Corners 5">
             <a:extLst>
               <a:ext uri="{FF2B5EF4-FFF2-40B4-BE49-F238E27FC236}">
-                <a16:creationId xmlns:a16="http://schemas.microsoft.com/office/drawing/2014/main" id="{14BE41EB-2887-4ACF-B9C3-EF220A4F100F}"/>
+                <a16:creationId xmlns:a16="http://schemas.microsoft.com/office/drawing/2014/main" id="{934E3C26-91EF-472C-BF4F-8C54D4CEF22B}"/>
               </a:ext>
             </a:extLst>
           </p:cNvPr>
@@ -11447,7 +11447,7 @@
           <p:cNvPr id="7" name="Rectangle: Rounded Corners 6">
             <a:extLst>
               <a:ext uri="{FF2B5EF4-FFF2-40B4-BE49-F238E27FC236}">
-                <a16:creationId xmlns:a16="http://schemas.microsoft.com/office/drawing/2014/main" id="{3062B8FE-6BED-4237-95C5-673F9F6D10A9}"/>
+                <a16:creationId xmlns:a16="http://schemas.microsoft.com/office/drawing/2014/main" id="{A9BE9801-3143-4892-9C4E-0EE582B18B2C}"/>
               </a:ext>
             </a:extLst>
           </p:cNvPr>
@@ -11480,7 +11480,7 @@
           <p:cNvPr id="8" name="Rectangle 7">
             <a:extLst>
               <a:ext uri="{FF2B5EF4-FFF2-40B4-BE49-F238E27FC236}">
-                <a16:creationId xmlns:a16="http://schemas.microsoft.com/office/drawing/2014/main" id="{A8FF490D-FCB8-4BD9-93A8-F6A6BC93BA87}"/>
+                <a16:creationId xmlns:a16="http://schemas.microsoft.com/office/drawing/2014/main" id="{0426CFFB-2E14-40D7-BE5C-CD1CEB983F75}"/>
               </a:ext>
             </a:extLst>
           </p:cNvPr>
@@ -11542,7 +11542,7 @@
           <p:cNvPr id="9" name="Rectangle 8">
             <a:extLst>
               <a:ext uri="{FF2B5EF4-FFF2-40B4-BE49-F238E27FC236}">
-                <a16:creationId xmlns:a16="http://schemas.microsoft.com/office/drawing/2014/main" id="{2CB03275-2BB6-4F26-BB3F-E2D275A8FF68}"/>
+                <a16:creationId xmlns:a16="http://schemas.microsoft.com/office/drawing/2014/main" id="{8AE122D5-9290-49C8-8355-2D044DD74C1B}"/>
               </a:ext>
             </a:extLst>
           </p:cNvPr>
@@ -11604,7 +11604,7 @@
           <p:cNvPr id="10" name="Rectangle: Rounded Corners 9">
             <a:extLst>
               <a:ext uri="{FF2B5EF4-FFF2-40B4-BE49-F238E27FC236}">
-                <a16:creationId xmlns:a16="http://schemas.microsoft.com/office/drawing/2014/main" id="{D01F7B47-32DE-4E68-B77B-9A8BC346C33F}"/>
+                <a16:creationId xmlns:a16="http://schemas.microsoft.com/office/drawing/2014/main" id="{44D792C6-7B2D-499A-99BB-FF10D6BF5D3F}"/>
               </a:ext>
             </a:extLst>
           </p:cNvPr>
@@ -11637,7 +11637,7 @@
           <p:cNvPr id="11" name="Rectangle: Rounded Corners 10">
             <a:extLst>
               <a:ext uri="{FF2B5EF4-FFF2-40B4-BE49-F238E27FC236}">
-                <a16:creationId xmlns:a16="http://schemas.microsoft.com/office/drawing/2014/main" id="{E4631632-0248-4DEF-AEC8-BD9F3A460496}"/>
+                <a16:creationId xmlns:a16="http://schemas.microsoft.com/office/drawing/2014/main" id="{7182A5E3-E2A4-48DD-9804-A1A8F36C7A46}"/>
               </a:ext>
             </a:extLst>
           </p:cNvPr>
@@ -11670,7 +11670,7 @@
           <p:cNvPr id="12" name="Rectangle 11">
             <a:extLst>
               <a:ext uri="{FF2B5EF4-FFF2-40B4-BE49-F238E27FC236}">
-                <a16:creationId xmlns:a16="http://schemas.microsoft.com/office/drawing/2014/main" id="{139EC44D-B8CF-485A-A020-5578C00FE449}"/>
+                <a16:creationId xmlns:a16="http://schemas.microsoft.com/office/drawing/2014/main" id="{647907F6-7383-465D-B95F-D81801EB5681}"/>
               </a:ext>
             </a:extLst>
           </p:cNvPr>
@@ -11732,7 +11732,7 @@
           <p:cNvPr id="13" name="Rectangle 12">
             <a:extLst>
               <a:ext uri="{FF2B5EF4-FFF2-40B4-BE49-F238E27FC236}">
-                <a16:creationId xmlns:a16="http://schemas.microsoft.com/office/drawing/2014/main" id="{B2F6C239-E539-4A45-8C34-0201BE059B0D}"/>
+                <a16:creationId xmlns:a16="http://schemas.microsoft.com/office/drawing/2014/main" id="{F89E480A-64B1-4E8D-88E4-8E044F324888}"/>
               </a:ext>
             </a:extLst>
           </p:cNvPr>
@@ -11794,7 +11794,7 @@
           <p:cNvPr id="14" name="Rectangle: Rounded Corners 13">
             <a:extLst>
               <a:ext uri="{FF2B5EF4-FFF2-40B4-BE49-F238E27FC236}">
-                <a16:creationId xmlns:a16="http://schemas.microsoft.com/office/drawing/2014/main" id="{8D7BB2FE-9E5B-4384-AD85-92A32EBF57A4}"/>
+                <a16:creationId xmlns:a16="http://schemas.microsoft.com/office/drawing/2014/main" id="{AC6FB745-243A-4EF4-A5D9-3F680A8E14A1}"/>
               </a:ext>
             </a:extLst>
           </p:cNvPr>
@@ -11827,7 +11827,7 @@
           <p:cNvPr id="15" name="Rectangle: Rounded Corners 14">
             <a:extLst>
               <a:ext uri="{FF2B5EF4-FFF2-40B4-BE49-F238E27FC236}">
-                <a16:creationId xmlns:a16="http://schemas.microsoft.com/office/drawing/2014/main" id="{C037A11C-AEE2-4543-9CCE-84127C683EC5}"/>
+                <a16:creationId xmlns:a16="http://schemas.microsoft.com/office/drawing/2014/main" id="{10FEC83E-DBB5-4F64-9129-F64F1AD6A8F0}"/>
               </a:ext>
             </a:extLst>
           </p:cNvPr>
@@ -11860,7 +11860,7 @@
           <p:cNvPr id="16" name="Rectangle 15">
             <a:extLst>
               <a:ext uri="{FF2B5EF4-FFF2-40B4-BE49-F238E27FC236}">
-                <a16:creationId xmlns:a16="http://schemas.microsoft.com/office/drawing/2014/main" id="{9F29A07F-144E-4100-8C48-82F882F2E46D}"/>
+                <a16:creationId xmlns:a16="http://schemas.microsoft.com/office/drawing/2014/main" id="{B15A6016-921E-48A6-9C8D-728B657058E7}"/>
               </a:ext>
             </a:extLst>
           </p:cNvPr>
@@ -11922,7 +11922,7 @@
           <p:cNvPr id="17" name="Rectangle 16">
             <a:extLst>
               <a:ext uri="{FF2B5EF4-FFF2-40B4-BE49-F238E27FC236}">
-                <a16:creationId xmlns:a16="http://schemas.microsoft.com/office/drawing/2014/main" id="{22A6AA7B-F054-4B20-9EA8-1A6F8E7CB676}"/>
+                <a16:creationId xmlns:a16="http://schemas.microsoft.com/office/drawing/2014/main" id="{D812833B-2B04-42EA-883F-EDCD297A359E}"/>
               </a:ext>
             </a:extLst>
           </p:cNvPr>
@@ -11984,7 +11984,7 @@
           <p:cNvPr id="18" name="Rectangle: Rounded Corners 17">
             <a:extLst>
               <a:ext uri="{FF2B5EF4-FFF2-40B4-BE49-F238E27FC236}">
-                <a16:creationId xmlns:a16="http://schemas.microsoft.com/office/drawing/2014/main" id="{9F947F6B-8D1A-417C-90DC-6B6F7EFDFBF9}"/>
+                <a16:creationId xmlns:a16="http://schemas.microsoft.com/office/drawing/2014/main" id="{41ACFBD5-F5A7-4EFB-91B7-421CF41D077D}"/>
               </a:ext>
             </a:extLst>
           </p:cNvPr>
@@ -12017,7 +12017,7 @@
           <p:cNvPr id="19" name="Rectangle: Rounded Corners 18">
             <a:extLst>
               <a:ext uri="{FF2B5EF4-FFF2-40B4-BE49-F238E27FC236}">
-                <a16:creationId xmlns:a16="http://schemas.microsoft.com/office/drawing/2014/main" id="{0020FBA6-B025-4BBD-A7E5-5A6816398FCB}"/>
+                <a16:creationId xmlns:a16="http://schemas.microsoft.com/office/drawing/2014/main" id="{0ABE22CB-3EF4-472D-9D86-0DF527BEC91F}"/>
               </a:ext>
             </a:extLst>
           </p:cNvPr>
@@ -12050,7 +12050,7 @@
           <p:cNvPr id="20" name="Rectangle 19">
             <a:extLst>
               <a:ext uri="{FF2B5EF4-FFF2-40B4-BE49-F238E27FC236}">
-                <a16:creationId xmlns:a16="http://schemas.microsoft.com/office/drawing/2014/main" id="{FBC9DD23-6454-4E8A-A8F2-47CD45FC6DD0}"/>
+                <a16:creationId xmlns:a16="http://schemas.microsoft.com/office/drawing/2014/main" id="{8ED56DB0-3B36-4DF7-AF8C-2E139AD3ED4F}"/>
               </a:ext>
             </a:extLst>
           </p:cNvPr>
@@ -12112,7 +12112,7 @@
           <p:cNvPr id="21" name="Rectangle: Rounded Corners 20">
             <a:extLst>
               <a:ext uri="{FF2B5EF4-FFF2-40B4-BE49-F238E27FC236}">
-                <a16:creationId xmlns:a16="http://schemas.microsoft.com/office/drawing/2014/main" id="{7727902B-3EA1-4CDA-8B6A-BFD7FCF98EF4}"/>
+                <a16:creationId xmlns:a16="http://schemas.microsoft.com/office/drawing/2014/main" id="{25D038F7-6643-4B50-897D-A6D8F5A906B9}"/>
               </a:ext>
             </a:extLst>
           </p:cNvPr>
@@ -12147,7 +12147,7 @@
           <p:cNvPr id="22" name="Rectangle: Rounded Corners 21">
             <a:extLst>
               <a:ext uri="{FF2B5EF4-FFF2-40B4-BE49-F238E27FC236}">
-                <a16:creationId xmlns:a16="http://schemas.microsoft.com/office/drawing/2014/main" id="{2016FBF9-6A63-42C3-92A8-B90CA1BF957C}"/>
+                <a16:creationId xmlns:a16="http://schemas.microsoft.com/office/drawing/2014/main" id="{5218405F-00EF-409D-A2FD-3EB7906AAF93}"/>
               </a:ext>
             </a:extLst>
           </p:cNvPr>
@@ -12180,7 +12180,7 @@
           <p:cNvPr id="23" name="Rectangle 22">
             <a:extLst>
               <a:ext uri="{FF2B5EF4-FFF2-40B4-BE49-F238E27FC236}">
-                <a16:creationId xmlns:a16="http://schemas.microsoft.com/office/drawing/2014/main" id="{07B250AA-52F0-40C5-A6D8-33ECA5F6EF04}"/>
+                <a16:creationId xmlns:a16="http://schemas.microsoft.com/office/drawing/2014/main" id="{AD916CD2-3920-4D31-8051-7D5362BF682C}"/>
               </a:ext>
             </a:extLst>
           </p:cNvPr>
@@ -12242,7 +12242,7 @@
           <p:cNvPr id="24" name="Rectangle 23">
             <a:extLst>
               <a:ext uri="{FF2B5EF4-FFF2-40B4-BE49-F238E27FC236}">
-                <a16:creationId xmlns:a16="http://schemas.microsoft.com/office/drawing/2014/main" id="{B04E87B5-FCEC-4F68-9ABE-48C8F95DD8DE}"/>
+                <a16:creationId xmlns:a16="http://schemas.microsoft.com/office/drawing/2014/main" id="{A8F829DE-0D9E-4C80-960A-0736FE503394}"/>
               </a:ext>
             </a:extLst>
           </p:cNvPr>
@@ -12304,7 +12304,7 @@
           <p:cNvPr id="25" name="Rectangle 24">
             <a:extLst>
               <a:ext uri="{FF2B5EF4-FFF2-40B4-BE49-F238E27FC236}">
-                <a16:creationId xmlns:a16="http://schemas.microsoft.com/office/drawing/2014/main" id="{14C7D0DA-0068-49CC-A909-4428301E3DB3}"/>
+                <a16:creationId xmlns:a16="http://schemas.microsoft.com/office/drawing/2014/main" id="{0AC68867-491B-40F4-819B-A8AEF170212A}"/>
               </a:ext>
             </a:extLst>
           </p:cNvPr>
@@ -12366,7 +12366,7 @@
           <p:cNvPr id="26" name="Rectangle 25">
             <a:extLst>
               <a:ext uri="{FF2B5EF4-FFF2-40B4-BE49-F238E27FC236}">
-                <a16:creationId xmlns:a16="http://schemas.microsoft.com/office/drawing/2014/main" id="{1E1E05AE-08EF-4697-9F3F-8F3029A843AC}"/>
+                <a16:creationId xmlns:a16="http://schemas.microsoft.com/office/drawing/2014/main" id="{8D0C621B-0F06-4872-8A33-8987F3321401}"/>
               </a:ext>
             </a:extLst>
           </p:cNvPr>
@@ -12397,7 +12397,7 @@
           <p:cNvPr id="27" name="Rectangle 26">
             <a:extLst>
               <a:ext uri="{FF2B5EF4-FFF2-40B4-BE49-F238E27FC236}">
-                <a16:creationId xmlns:a16="http://schemas.microsoft.com/office/drawing/2014/main" id="{E6388B9A-807B-456A-B37C-76222BC18062}"/>
+                <a16:creationId xmlns:a16="http://schemas.microsoft.com/office/drawing/2014/main" id="{FA3787DE-8EFE-4D8D-B520-8F0ED1AF003C}"/>
               </a:ext>
             </a:extLst>
           </p:cNvPr>
@@ -12459,7 +12459,7 @@
           <p:cNvPr id="28" name="Rectangle 27">
             <a:extLst>
               <a:ext uri="{FF2B5EF4-FFF2-40B4-BE49-F238E27FC236}">
-                <a16:creationId xmlns:a16="http://schemas.microsoft.com/office/drawing/2014/main" id="{B7A5E94C-8687-423D-963E-8585086AA41E}"/>
+                <a16:creationId xmlns:a16="http://schemas.microsoft.com/office/drawing/2014/main" id="{0B5CBD22-117E-41FF-A094-441233CAB167}"/>
               </a:ext>
             </a:extLst>
           </p:cNvPr>
@@ -12554,7 +12554,7 @@
           <p:cNvPr id="29" name="Rectangle 28">
             <a:extLst>
               <a:ext uri="{FF2B5EF4-FFF2-40B4-BE49-F238E27FC236}">
-                <a16:creationId xmlns:a16="http://schemas.microsoft.com/office/drawing/2014/main" id="{C93F88FB-0376-4231-A2E4-F1119E36C2C4}"/>
+                <a16:creationId xmlns:a16="http://schemas.microsoft.com/office/drawing/2014/main" id="{08AB1BB1-6AFD-4CEF-84B1-39D75C0D1CDB}"/>
               </a:ext>
             </a:extLst>
           </p:cNvPr>
@@ -12616,7 +12616,7 @@
           <p:cNvPr id="30" name="Rectangle 29">
             <a:extLst>
               <a:ext uri="{FF2B5EF4-FFF2-40B4-BE49-F238E27FC236}">
-                <a16:creationId xmlns:a16="http://schemas.microsoft.com/office/drawing/2014/main" id="{6474234A-4D48-4419-AA7D-293DF701F851}"/>
+                <a16:creationId xmlns:a16="http://schemas.microsoft.com/office/drawing/2014/main" id="{4C753807-30FB-4C8C-A7F5-1F5A0536BBC5}"/>
               </a:ext>
             </a:extLst>
           </p:cNvPr>
@@ -12647,7 +12647,7 @@
           <p:cNvPr id="31" name="Rectangle 30">
             <a:extLst>
               <a:ext uri="{FF2B5EF4-FFF2-40B4-BE49-F238E27FC236}">
-                <a16:creationId xmlns:a16="http://schemas.microsoft.com/office/drawing/2014/main" id="{0F9D8A9B-68C8-49DC-98AF-03D8736EF3CF}"/>
+                <a16:creationId xmlns:a16="http://schemas.microsoft.com/office/drawing/2014/main" id="{736706E7-F066-4877-953B-1DC8FC4CBAEF}"/>
               </a:ext>
             </a:extLst>
           </p:cNvPr>
@@ -12709,7 +12709,7 @@
           <p:cNvPr id="32" name="Rectangle 31">
             <a:extLst>
               <a:ext uri="{FF2B5EF4-FFF2-40B4-BE49-F238E27FC236}">
-                <a16:creationId xmlns:a16="http://schemas.microsoft.com/office/drawing/2014/main" id="{442B7611-3BB2-4036-BFAF-83B68F012EE1}"/>
+                <a16:creationId xmlns:a16="http://schemas.microsoft.com/office/drawing/2014/main" id="{9610DCF7-8D9C-4342-9747-45ADC338C88D}"/>
               </a:ext>
             </a:extLst>
           </p:cNvPr>
@@ -12769,7 +12769,7 @@
     </p:spTree>
     <p:extLst>
       <p:ext uri="{BB962C8B-B14F-4D97-AF65-F5344CB8AC3E}">
-        <p14:creationId xmlns:p14="http://schemas.microsoft.com/office/powerpoint/2010/main" val="622595712"/>
+        <p14:creationId xmlns:p14="http://schemas.microsoft.com/office/powerpoint/2010/main" val="1083360324"/>
       </p:ext>
     </p:extLst>
   </p:cSld>
@@ -12810,7 +12810,7 @@
             <a:hlinkClick r:id="rId3"/>
             <a:extLst>
               <a:ext uri="{FF2B5EF4-FFF2-40B4-BE49-F238E27FC236}">
-                <a16:creationId xmlns:a16="http://schemas.microsoft.com/office/drawing/2014/main" id="{B1F9AC6B-E493-4ED1-8A41-6875471126A1}"/>
+                <a16:creationId xmlns:a16="http://schemas.microsoft.com/office/drawing/2014/main" id="{06B36E67-8F67-42FF-90FD-15F7D99505A9}"/>
               </a:ext>
             </a:extLst>
           </p:cNvPr>
@@ -12885,7 +12885,7 @@
             <a:hlinkClick r:id="rId4"/>
             <a:extLst>
               <a:ext uri="{FF2B5EF4-FFF2-40B4-BE49-F238E27FC236}">
-                <a16:creationId xmlns:a16="http://schemas.microsoft.com/office/drawing/2014/main" id="{A74AF5A4-F0F9-4957-A19D-248202B61942}"/>
+                <a16:creationId xmlns:a16="http://schemas.microsoft.com/office/drawing/2014/main" id="{6C1CEA29-1415-4D4D-BD6F-6156252E3EBE}"/>
               </a:ext>
             </a:extLst>
           </p:cNvPr>
@@ -12959,7 +12959,7 @@
           <p:cNvPr id="3" name="Rectangle 2">
             <a:extLst>
               <a:ext uri="{FF2B5EF4-FFF2-40B4-BE49-F238E27FC236}">
-                <a16:creationId xmlns:a16="http://schemas.microsoft.com/office/drawing/2014/main" id="{DEAEBD0D-CE13-4274-9D4F-90EA87CFD54C}"/>
+                <a16:creationId xmlns:a16="http://schemas.microsoft.com/office/drawing/2014/main" id="{44AB9C43-0111-46E8-8597-9F1CD43C3F43}"/>
               </a:ext>
             </a:extLst>
           </p:cNvPr>
@@ -13021,7 +13021,7 @@
           <p:cNvPr id="4" name="Rectangle 3">
             <a:extLst>
               <a:ext uri="{FF2B5EF4-FFF2-40B4-BE49-F238E27FC236}">
-                <a16:creationId xmlns:a16="http://schemas.microsoft.com/office/drawing/2014/main" id="{D729B9AA-F4F1-4793-B486-56B27DF6DE15}"/>
+                <a16:creationId xmlns:a16="http://schemas.microsoft.com/office/drawing/2014/main" id="{723CDEB7-5100-47EB-9C1C-E22FFCA11D53}"/>
               </a:ext>
             </a:extLst>
           </p:cNvPr>
@@ -13083,7 +13083,7 @@
           <p:cNvPr id="5" name="Rectangle 4">
             <a:extLst>
               <a:ext uri="{FF2B5EF4-FFF2-40B4-BE49-F238E27FC236}">
-                <a16:creationId xmlns:a16="http://schemas.microsoft.com/office/drawing/2014/main" id="{78446CA5-9345-49FF-B5D6-F0F542BB7DF9}"/>
+                <a16:creationId xmlns:a16="http://schemas.microsoft.com/office/drawing/2014/main" id="{02FF1A69-C94B-4FBF-B6EF-91E2DC618333}"/>
               </a:ext>
             </a:extLst>
           </p:cNvPr>
@@ -13145,7 +13145,7 @@
           <p:cNvPr id="6" name="Rectangle 5">
             <a:extLst>
               <a:ext uri="{FF2B5EF4-FFF2-40B4-BE49-F238E27FC236}">
-                <a16:creationId xmlns:a16="http://schemas.microsoft.com/office/drawing/2014/main" id="{B6316712-BCD6-4414-B4DC-D31025088341}"/>
+                <a16:creationId xmlns:a16="http://schemas.microsoft.com/office/drawing/2014/main" id="{F68FB4B6-28FD-4CCE-9115-141E17142C6F}"/>
               </a:ext>
             </a:extLst>
           </p:cNvPr>
@@ -13207,7 +13207,7 @@
           <p:cNvPr id="7" name="Rectangle 6">
             <a:extLst>
               <a:ext uri="{FF2B5EF4-FFF2-40B4-BE49-F238E27FC236}">
-                <a16:creationId xmlns:a16="http://schemas.microsoft.com/office/drawing/2014/main" id="{4F63711D-D7EA-46DD-BB26-C2771430C4D7}"/>
+                <a16:creationId xmlns:a16="http://schemas.microsoft.com/office/drawing/2014/main" id="{AFA8D42F-3F8C-4521-B355-29A51D33AE15}"/>
               </a:ext>
             </a:extLst>
           </p:cNvPr>
@@ -13269,7 +13269,7 @@
           <p:cNvPr id="8" name="Rectangle 7">
             <a:extLst>
               <a:ext uri="{FF2B5EF4-FFF2-40B4-BE49-F238E27FC236}">
-                <a16:creationId xmlns:a16="http://schemas.microsoft.com/office/drawing/2014/main" id="{ABD79E0B-5A84-450C-8B6D-BA9137FD5DCD}"/>
+                <a16:creationId xmlns:a16="http://schemas.microsoft.com/office/drawing/2014/main" id="{F7264D39-62B3-483E-A2B6-28B9D40633A0}"/>
               </a:ext>
             </a:extLst>
           </p:cNvPr>
@@ -13331,7 +13331,7 @@
           <p:cNvPr id="9" name="Rectangle 8">
             <a:extLst>
               <a:ext uri="{FF2B5EF4-FFF2-40B4-BE49-F238E27FC236}">
-                <a16:creationId xmlns:a16="http://schemas.microsoft.com/office/drawing/2014/main" id="{AD071E23-88A4-4A3D-A5E9-A1B85D3ABF36}"/>
+                <a16:creationId xmlns:a16="http://schemas.microsoft.com/office/drawing/2014/main" id="{72AA80C3-257F-4BBF-8C15-866691E3BAAC}"/>
               </a:ext>
             </a:extLst>
           </p:cNvPr>
@@ -13362,7 +13362,7 @@
           <p:cNvPr id="10" name="Rectangle: Rounded Corners 9">
             <a:extLst>
               <a:ext uri="{FF2B5EF4-FFF2-40B4-BE49-F238E27FC236}">
-                <a16:creationId xmlns:a16="http://schemas.microsoft.com/office/drawing/2014/main" id="{B85A9FA7-0C2E-4D9E-AFBA-EEF8A63B3CBA}"/>
+                <a16:creationId xmlns:a16="http://schemas.microsoft.com/office/drawing/2014/main" id="{191325A1-7CEE-43BE-B1A7-0D067E58C732}"/>
               </a:ext>
             </a:extLst>
           </p:cNvPr>
@@ -13395,7 +13395,7 @@
           <p:cNvPr id="11" name="Rectangle 10">
             <a:extLst>
               <a:ext uri="{FF2B5EF4-FFF2-40B4-BE49-F238E27FC236}">
-                <a16:creationId xmlns:a16="http://schemas.microsoft.com/office/drawing/2014/main" id="{F6DC83C5-0F6E-424B-BAA4-B54DF4B016DE}"/>
+                <a16:creationId xmlns:a16="http://schemas.microsoft.com/office/drawing/2014/main" id="{909BB0EB-47A1-41E7-995F-9CFE096F7176}"/>
               </a:ext>
             </a:extLst>
           </p:cNvPr>
@@ -13457,7 +13457,7 @@
           <p:cNvPr id="12" name="Rectangle 11">
             <a:extLst>
               <a:ext uri="{FF2B5EF4-FFF2-40B4-BE49-F238E27FC236}">
-                <a16:creationId xmlns:a16="http://schemas.microsoft.com/office/drawing/2014/main" id="{982B14AA-2C1E-407A-A965-CD0CCC67E799}"/>
+                <a16:creationId xmlns:a16="http://schemas.microsoft.com/office/drawing/2014/main" id="{5AD32056-93BD-4457-9DD2-83F6967B41B8}"/>
               </a:ext>
             </a:extLst>
           </p:cNvPr>
@@ -13519,7 +13519,7 @@
           <p:cNvPr id="13" name="Rectangle: Rounded Corners 12">
             <a:extLst>
               <a:ext uri="{FF2B5EF4-FFF2-40B4-BE49-F238E27FC236}">
-                <a16:creationId xmlns:a16="http://schemas.microsoft.com/office/drawing/2014/main" id="{2E5FB1A7-1AA2-48EE-9552-4531E839E4CC}"/>
+                <a16:creationId xmlns:a16="http://schemas.microsoft.com/office/drawing/2014/main" id="{246E6419-D597-4B09-8CFA-10E5842C7302}"/>
               </a:ext>
             </a:extLst>
           </p:cNvPr>
@@ -13554,7 +13554,7 @@
           <p:cNvPr id="14" name="Rectangle 13">
             <a:extLst>
               <a:ext uri="{FF2B5EF4-FFF2-40B4-BE49-F238E27FC236}">
-                <a16:creationId xmlns:a16="http://schemas.microsoft.com/office/drawing/2014/main" id="{8A8D0521-F150-41B7-85BB-CE5F0CB24EB2}"/>
+                <a16:creationId xmlns:a16="http://schemas.microsoft.com/office/drawing/2014/main" id="{6123B933-4C27-4613-B382-860F263A343A}"/>
               </a:ext>
             </a:extLst>
           </p:cNvPr>
@@ -13616,7 +13616,7 @@
           <p:cNvPr id="15" name="Rectangle 14">
             <a:extLst>
               <a:ext uri="{FF2B5EF4-FFF2-40B4-BE49-F238E27FC236}">
-                <a16:creationId xmlns:a16="http://schemas.microsoft.com/office/drawing/2014/main" id="{78BCCAEC-2C21-427C-88D6-CB45036AFE7C}"/>
+                <a16:creationId xmlns:a16="http://schemas.microsoft.com/office/drawing/2014/main" id="{9B7414B4-8D87-47DE-88ED-666E32A6F4A4}"/>
               </a:ext>
             </a:extLst>
           </p:cNvPr>
@@ -13678,7 +13678,7 @@
           <p:cNvPr id="16" name="Rectangle 15">
             <a:extLst>
               <a:ext uri="{FF2B5EF4-FFF2-40B4-BE49-F238E27FC236}">
-                <a16:creationId xmlns:a16="http://schemas.microsoft.com/office/drawing/2014/main" id="{5B0D4BDB-AB69-4AE3-A1A2-74C5A4E98B28}"/>
+                <a16:creationId xmlns:a16="http://schemas.microsoft.com/office/drawing/2014/main" id="{02EA7418-22CF-4340-8C15-25CDE9F13217}"/>
               </a:ext>
             </a:extLst>
           </p:cNvPr>
@@ -13740,7 +13740,7 @@
           <p:cNvPr id="17" name="Rectangle 16">
             <a:extLst>
               <a:ext uri="{FF2B5EF4-FFF2-40B4-BE49-F238E27FC236}">
-                <a16:creationId xmlns:a16="http://schemas.microsoft.com/office/drawing/2014/main" id="{FFF651EE-1D46-4695-A011-77B992CA5DC7}"/>
+                <a16:creationId xmlns:a16="http://schemas.microsoft.com/office/drawing/2014/main" id="{98B07A38-80CB-4980-8427-4B3A12277A96}"/>
               </a:ext>
             </a:extLst>
           </p:cNvPr>
@@ -13771,7 +13771,7 @@
           <p:cNvPr id="18" name="Rectangle: Rounded Corners 17">
             <a:extLst>
               <a:ext uri="{FF2B5EF4-FFF2-40B4-BE49-F238E27FC236}">
-                <a16:creationId xmlns:a16="http://schemas.microsoft.com/office/drawing/2014/main" id="{C15FAF7B-8DAC-44B3-9B74-E2FB918C8905}"/>
+                <a16:creationId xmlns:a16="http://schemas.microsoft.com/office/drawing/2014/main" id="{6A2C86F5-BDD5-49E3-8AE3-39234E9B4BB7}"/>
               </a:ext>
             </a:extLst>
           </p:cNvPr>
@@ -13804,7 +13804,7 @@
           <p:cNvPr id="19" name="Rectangle 18">
             <a:extLst>
               <a:ext uri="{FF2B5EF4-FFF2-40B4-BE49-F238E27FC236}">
-                <a16:creationId xmlns:a16="http://schemas.microsoft.com/office/drawing/2014/main" id="{20593DB1-2519-4C36-BF56-390CE46FE7FE}"/>
+                <a16:creationId xmlns:a16="http://schemas.microsoft.com/office/drawing/2014/main" id="{6924E1DD-DF08-431E-BE19-6D8098593B90}"/>
               </a:ext>
             </a:extLst>
           </p:cNvPr>
@@ -13866,7 +13866,7 @@
           <p:cNvPr id="20" name="Rectangle 19">
             <a:extLst>
               <a:ext uri="{FF2B5EF4-FFF2-40B4-BE49-F238E27FC236}">
-                <a16:creationId xmlns:a16="http://schemas.microsoft.com/office/drawing/2014/main" id="{1B5F4E48-B43B-4E8C-8DAB-EC9DE86B8C56}"/>
+                <a16:creationId xmlns:a16="http://schemas.microsoft.com/office/drawing/2014/main" id="{F10964FA-A6A1-4CB9-89D0-C27E4039A99C}"/>
               </a:ext>
             </a:extLst>
           </p:cNvPr>
@@ -13928,7 +13928,7 @@
           <p:cNvPr id="21" name="Rectangle: Rounded Corners 20">
             <a:extLst>
               <a:ext uri="{FF2B5EF4-FFF2-40B4-BE49-F238E27FC236}">
-                <a16:creationId xmlns:a16="http://schemas.microsoft.com/office/drawing/2014/main" id="{B2D5904B-B88A-499F-BC5D-A56AB924EC72}"/>
+                <a16:creationId xmlns:a16="http://schemas.microsoft.com/office/drawing/2014/main" id="{515CB0EB-34DB-42CD-8AFD-21EE13240A1D}"/>
               </a:ext>
             </a:extLst>
           </p:cNvPr>
@@ -13963,7 +13963,7 @@
           <p:cNvPr id="22" name="Rectangle 21">
             <a:extLst>
               <a:ext uri="{FF2B5EF4-FFF2-40B4-BE49-F238E27FC236}">
-                <a16:creationId xmlns:a16="http://schemas.microsoft.com/office/drawing/2014/main" id="{8DEB4B34-5BD9-4A9B-B80C-6C16CC43C689}"/>
+                <a16:creationId xmlns:a16="http://schemas.microsoft.com/office/drawing/2014/main" id="{1EBFFD41-6F61-4686-B4AC-A93EC48E1F38}"/>
               </a:ext>
             </a:extLst>
           </p:cNvPr>
@@ -14025,7 +14025,7 @@
           <p:cNvPr id="23" name="Rectangle: Rounded Corners 22">
             <a:extLst>
               <a:ext uri="{FF2B5EF4-FFF2-40B4-BE49-F238E27FC236}">
-                <a16:creationId xmlns:a16="http://schemas.microsoft.com/office/drawing/2014/main" id="{66F92747-94F3-4967-BC44-F2FC0DC9CF27}"/>
+                <a16:creationId xmlns:a16="http://schemas.microsoft.com/office/drawing/2014/main" id="{FB3E5E4C-B835-4E75-9F69-BA5BF77E6D16}"/>
               </a:ext>
             </a:extLst>
           </p:cNvPr>
@@ -14058,7 +14058,7 @@
           <p:cNvPr id="24" name="Rectangle 23">
             <a:extLst>
               <a:ext uri="{FF2B5EF4-FFF2-40B4-BE49-F238E27FC236}">
-                <a16:creationId xmlns:a16="http://schemas.microsoft.com/office/drawing/2014/main" id="{793BBC0F-C6D4-4DDC-A861-335D96F50252}"/>
+                <a16:creationId xmlns:a16="http://schemas.microsoft.com/office/drawing/2014/main" id="{5CECBC12-572B-4941-871E-0304869D834A}"/>
               </a:ext>
             </a:extLst>
           </p:cNvPr>
@@ -14120,7 +14120,7 @@
           <p:cNvPr id="25" name="Rectangle 24">
             <a:extLst>
               <a:ext uri="{FF2B5EF4-FFF2-40B4-BE49-F238E27FC236}">
-                <a16:creationId xmlns:a16="http://schemas.microsoft.com/office/drawing/2014/main" id="{561D1FAD-181D-4F6E-8C46-C5CB9219230C}"/>
+                <a16:creationId xmlns:a16="http://schemas.microsoft.com/office/drawing/2014/main" id="{DD3F2983-473F-43D8-9D89-063538C9623C}"/>
               </a:ext>
             </a:extLst>
           </p:cNvPr>
@@ -14151,7 +14151,7 @@
           <p:cNvPr id="26" name="Rectangle 25">
             <a:extLst>
               <a:ext uri="{FF2B5EF4-FFF2-40B4-BE49-F238E27FC236}">
-                <a16:creationId xmlns:a16="http://schemas.microsoft.com/office/drawing/2014/main" id="{2D906E7E-ACAB-4B88-AD27-4133E9C177D6}"/>
+                <a16:creationId xmlns:a16="http://schemas.microsoft.com/office/drawing/2014/main" id="{BF103B7C-25F7-458F-A9DE-EEBB791EE03C}"/>
               </a:ext>
             </a:extLst>
           </p:cNvPr>
@@ -14213,7 +14213,7 @@
           <p:cNvPr id="27" name="Rectangle 26">
             <a:extLst>
               <a:ext uri="{FF2B5EF4-FFF2-40B4-BE49-F238E27FC236}">
-                <a16:creationId xmlns:a16="http://schemas.microsoft.com/office/drawing/2014/main" id="{B40177EA-7478-4654-A06E-F2E6CA7B39B7}"/>
+                <a16:creationId xmlns:a16="http://schemas.microsoft.com/office/drawing/2014/main" id="{A80DB1BE-60F6-4F5B-AD4F-11A756385177}"/>
               </a:ext>
             </a:extLst>
           </p:cNvPr>
@@ -14273,7 +14273,7 @@
     </p:spTree>
     <p:extLst>
       <p:ext uri="{BB962C8B-B14F-4D97-AF65-F5344CB8AC3E}">
-        <p14:creationId xmlns:p14="http://schemas.microsoft.com/office/powerpoint/2010/main" val="433755207"/>
+        <p14:creationId xmlns:p14="http://schemas.microsoft.com/office/powerpoint/2010/main" val="1736627155"/>
       </p:ext>
     </p:extLst>
   </p:cSld>
@@ -14314,7 +14314,7 @@
             <a:hlinkClick r:id="rId3"/>
             <a:extLst>
               <a:ext uri="{FF2B5EF4-FFF2-40B4-BE49-F238E27FC236}">
-                <a16:creationId xmlns:a16="http://schemas.microsoft.com/office/drawing/2014/main" id="{7D09957C-929E-4C82-9BCE-9693D2B1DCA8}"/>
+                <a16:creationId xmlns:a16="http://schemas.microsoft.com/office/drawing/2014/main" id="{8CB35D20-78BB-4E6F-A8D1-B9A7D99F2121}"/>
               </a:ext>
             </a:extLst>
           </p:cNvPr>
@@ -14389,7 +14389,7 @@
             <a:hlinkClick r:id="rId4"/>
             <a:extLst>
               <a:ext uri="{FF2B5EF4-FFF2-40B4-BE49-F238E27FC236}">
-                <a16:creationId xmlns:a16="http://schemas.microsoft.com/office/drawing/2014/main" id="{E4D573BE-5D1A-4C1F-9A05-B6B1DE7E6D69}"/>
+                <a16:creationId xmlns:a16="http://schemas.microsoft.com/office/drawing/2014/main" id="{73523E36-3952-4D1A-889F-318556A2C493}"/>
               </a:ext>
             </a:extLst>
           </p:cNvPr>
@@ -14463,7 +14463,7 @@
           <p:cNvPr id="3" name="Rectangle 2">
             <a:extLst>
               <a:ext uri="{FF2B5EF4-FFF2-40B4-BE49-F238E27FC236}">
-                <a16:creationId xmlns:a16="http://schemas.microsoft.com/office/drawing/2014/main" id="{DE665020-A50F-490F-9EDF-4640FD777838}"/>
+                <a16:creationId xmlns:a16="http://schemas.microsoft.com/office/drawing/2014/main" id="{1B884355-9E0F-42B3-8707-29AA8D3D4318}"/>
               </a:ext>
             </a:extLst>
           </p:cNvPr>
@@ -14525,7 +14525,7 @@
           <p:cNvPr id="4" name="Rectangle 3">
             <a:extLst>
               <a:ext uri="{FF2B5EF4-FFF2-40B4-BE49-F238E27FC236}">
-                <a16:creationId xmlns:a16="http://schemas.microsoft.com/office/drawing/2014/main" id="{F46264E4-075C-4753-8A18-35AE07F04004}"/>
+                <a16:creationId xmlns:a16="http://schemas.microsoft.com/office/drawing/2014/main" id="{E0D26DB6-94F4-46B5-903E-D79159DABBF9}"/>
               </a:ext>
             </a:extLst>
           </p:cNvPr>
@@ -14587,7 +14587,7 @@
           <p:cNvPr id="5" name="Rectangle 4">
             <a:extLst>
               <a:ext uri="{FF2B5EF4-FFF2-40B4-BE49-F238E27FC236}">
-                <a16:creationId xmlns:a16="http://schemas.microsoft.com/office/drawing/2014/main" id="{9564F7FF-08DB-4013-8BC3-3DCA4E4853F2}"/>
+                <a16:creationId xmlns:a16="http://schemas.microsoft.com/office/drawing/2014/main" id="{6444A0DD-A495-45AA-BE3C-674742D668A2}"/>
               </a:ext>
             </a:extLst>
           </p:cNvPr>
@@ -14649,7 +14649,7 @@
           <p:cNvPr id="6" name="Rectangle 5">
             <a:extLst>
               <a:ext uri="{FF2B5EF4-FFF2-40B4-BE49-F238E27FC236}">
-                <a16:creationId xmlns:a16="http://schemas.microsoft.com/office/drawing/2014/main" id="{D484A92E-1291-4717-B4B3-D59DC197E50F}"/>
+                <a16:creationId xmlns:a16="http://schemas.microsoft.com/office/drawing/2014/main" id="{AB2F3D45-F112-485C-9597-A132F8EBFB84}"/>
               </a:ext>
             </a:extLst>
           </p:cNvPr>
@@ -14711,7 +14711,7 @@
           <p:cNvPr id="7" name="Rectangle 6">
             <a:extLst>
               <a:ext uri="{FF2B5EF4-FFF2-40B4-BE49-F238E27FC236}">
-                <a16:creationId xmlns:a16="http://schemas.microsoft.com/office/drawing/2014/main" id="{9A1FE827-E707-420F-B458-C82766309465}"/>
+                <a16:creationId xmlns:a16="http://schemas.microsoft.com/office/drawing/2014/main" id="{55FCA727-2E67-457A-93CD-5A301619759A}"/>
               </a:ext>
             </a:extLst>
           </p:cNvPr>
@@ -14773,7 +14773,7 @@
           <p:cNvPr id="8" name="Rectangle 7">
             <a:extLst>
               <a:ext uri="{FF2B5EF4-FFF2-40B4-BE49-F238E27FC236}">
-                <a16:creationId xmlns:a16="http://schemas.microsoft.com/office/drawing/2014/main" id="{D55A11B6-1A68-43B3-9618-92B132D97559}"/>
+                <a16:creationId xmlns:a16="http://schemas.microsoft.com/office/drawing/2014/main" id="{AAF51F1D-6393-446F-B74C-392B6010B879}"/>
               </a:ext>
             </a:extLst>
           </p:cNvPr>
@@ -14804,7 +14804,7 @@
           <p:cNvPr id="9" name="Rectangle 8">
             <a:extLst>
               <a:ext uri="{FF2B5EF4-FFF2-40B4-BE49-F238E27FC236}">
-                <a16:creationId xmlns:a16="http://schemas.microsoft.com/office/drawing/2014/main" id="{5E17F755-8244-4917-B33D-60D174D02586}"/>
+                <a16:creationId xmlns:a16="http://schemas.microsoft.com/office/drawing/2014/main" id="{613788E0-B54E-491D-9CBA-277904E3D840}"/>
               </a:ext>
             </a:extLst>
           </p:cNvPr>
@@ -14866,7 +14866,7 @@
           <p:cNvPr id="10" name="Rectangle 9">
             <a:extLst>
               <a:ext uri="{FF2B5EF4-FFF2-40B4-BE49-F238E27FC236}">
-                <a16:creationId xmlns:a16="http://schemas.microsoft.com/office/drawing/2014/main" id="{30E77C4F-4B57-4436-8796-0F5B4D071FC4}"/>
+                <a16:creationId xmlns:a16="http://schemas.microsoft.com/office/drawing/2014/main" id="{EBCDF3AB-4F09-4D09-BA2E-064B4963EBCC}"/>
               </a:ext>
             </a:extLst>
           </p:cNvPr>
@@ -14928,7 +14928,7 @@
           <p:cNvPr id="11" name="Rectangle 10">
             <a:extLst>
               <a:ext uri="{FF2B5EF4-FFF2-40B4-BE49-F238E27FC236}">
-                <a16:creationId xmlns:a16="http://schemas.microsoft.com/office/drawing/2014/main" id="{0A957ECE-554B-42AE-B0CE-0D58C8A00C93}"/>
+                <a16:creationId xmlns:a16="http://schemas.microsoft.com/office/drawing/2014/main" id="{FAD6BBBD-9097-4B02-8CF9-2DAD566914A4}"/>
               </a:ext>
             </a:extLst>
           </p:cNvPr>
@@ -14990,7 +14990,7 @@
           <p:cNvPr id="12" name="Rectangle 11">
             <a:extLst>
               <a:ext uri="{FF2B5EF4-FFF2-40B4-BE49-F238E27FC236}">
-                <a16:creationId xmlns:a16="http://schemas.microsoft.com/office/drawing/2014/main" id="{BA8890BF-4595-43C9-832D-79B82D108F09}"/>
+                <a16:creationId xmlns:a16="http://schemas.microsoft.com/office/drawing/2014/main" id="{E364B9FC-44AF-4080-9D62-1603F20D896F}"/>
               </a:ext>
             </a:extLst>
           </p:cNvPr>
@@ -15021,7 +15021,7 @@
           <p:cNvPr id="13" name="Rectangle 12">
             <a:extLst>
               <a:ext uri="{FF2B5EF4-FFF2-40B4-BE49-F238E27FC236}">
-                <a16:creationId xmlns:a16="http://schemas.microsoft.com/office/drawing/2014/main" id="{4E9701F4-73CB-4AF1-8850-62E7D2026619}"/>
+                <a16:creationId xmlns:a16="http://schemas.microsoft.com/office/drawing/2014/main" id="{0EA72F8C-534C-4046-BF5C-F7C7A344E8F0}"/>
               </a:ext>
             </a:extLst>
           </p:cNvPr>
@@ -15083,7 +15083,7 @@
           <p:cNvPr id="14" name="Rectangle 13">
             <a:extLst>
               <a:ext uri="{FF2B5EF4-FFF2-40B4-BE49-F238E27FC236}">
-                <a16:creationId xmlns:a16="http://schemas.microsoft.com/office/drawing/2014/main" id="{65170FAD-B3F3-490E-82B9-565A581B187F}"/>
+                <a16:creationId xmlns:a16="http://schemas.microsoft.com/office/drawing/2014/main" id="{8AB887FA-C2D6-4D8A-834A-B604649E8DF3}"/>
               </a:ext>
             </a:extLst>
           </p:cNvPr>
@@ -15145,7 +15145,7 @@
           <p:cNvPr id="15" name="Rectangle 14">
             <a:extLst>
               <a:ext uri="{FF2B5EF4-FFF2-40B4-BE49-F238E27FC236}">
-                <a16:creationId xmlns:a16="http://schemas.microsoft.com/office/drawing/2014/main" id="{27FECF62-F33B-4A92-9A26-4481A348E7D3}"/>
+                <a16:creationId xmlns:a16="http://schemas.microsoft.com/office/drawing/2014/main" id="{8F9E4E15-E755-443E-8B24-E0117DFA2A58}"/>
               </a:ext>
             </a:extLst>
           </p:cNvPr>
@@ -15207,7 +15207,7 @@
           <p:cNvPr id="16" name="Rectangle 15">
             <a:extLst>
               <a:ext uri="{FF2B5EF4-FFF2-40B4-BE49-F238E27FC236}">
-                <a16:creationId xmlns:a16="http://schemas.microsoft.com/office/drawing/2014/main" id="{77065132-7D56-4089-A2FF-DB5C3583019B}"/>
+                <a16:creationId xmlns:a16="http://schemas.microsoft.com/office/drawing/2014/main" id="{94E13B64-419F-4D14-984F-620DD3101456}"/>
               </a:ext>
             </a:extLst>
           </p:cNvPr>
@@ -15238,7 +15238,7 @@
           <p:cNvPr id="17" name="Rectangle 16">
             <a:extLst>
               <a:ext uri="{FF2B5EF4-FFF2-40B4-BE49-F238E27FC236}">
-                <a16:creationId xmlns:a16="http://schemas.microsoft.com/office/drawing/2014/main" id="{9BFB0347-E97C-48B6-8090-605ADD67908C}"/>
+                <a16:creationId xmlns:a16="http://schemas.microsoft.com/office/drawing/2014/main" id="{90AD8FF9-1C4B-42A5-BA5E-7390979EA1C3}"/>
               </a:ext>
             </a:extLst>
           </p:cNvPr>
@@ -15300,7 +15300,7 @@
           <p:cNvPr id="18" name="Rectangle 17">
             <a:extLst>
               <a:ext uri="{FF2B5EF4-FFF2-40B4-BE49-F238E27FC236}">
-                <a16:creationId xmlns:a16="http://schemas.microsoft.com/office/drawing/2014/main" id="{5014D6E8-AB4F-4AF6-A9D4-EF5401A1E9DD}"/>
+                <a16:creationId xmlns:a16="http://schemas.microsoft.com/office/drawing/2014/main" id="{A0C39B07-81C3-4D77-AECC-71EF050B60DA}"/>
               </a:ext>
             </a:extLst>
           </p:cNvPr>
@@ -15362,7 +15362,7 @@
           <p:cNvPr id="19" name="Rectangle 18">
             <a:extLst>
               <a:ext uri="{FF2B5EF4-FFF2-40B4-BE49-F238E27FC236}">
-                <a16:creationId xmlns:a16="http://schemas.microsoft.com/office/drawing/2014/main" id="{4CD312A6-4BE9-4CEF-9A9B-228701C4CA0A}"/>
+                <a16:creationId xmlns:a16="http://schemas.microsoft.com/office/drawing/2014/main" id="{BE015EB5-F50A-456F-B7EF-D8959D675BA0}"/>
               </a:ext>
             </a:extLst>
           </p:cNvPr>
@@ -15424,7 +15424,7 @@
           <p:cNvPr id="20" name="Rectangle 19">
             <a:extLst>
               <a:ext uri="{FF2B5EF4-FFF2-40B4-BE49-F238E27FC236}">
-                <a16:creationId xmlns:a16="http://schemas.microsoft.com/office/drawing/2014/main" id="{81BFE08C-8E4D-4305-9240-08074B7F6F56}"/>
+                <a16:creationId xmlns:a16="http://schemas.microsoft.com/office/drawing/2014/main" id="{426E757F-0733-4186-949C-DAFDF312C976}"/>
               </a:ext>
             </a:extLst>
           </p:cNvPr>
@@ -15455,7 +15455,7 @@
           <p:cNvPr id="21" name="Rectangle: Rounded Corners 20">
             <a:extLst>
               <a:ext uri="{FF2B5EF4-FFF2-40B4-BE49-F238E27FC236}">
-                <a16:creationId xmlns:a16="http://schemas.microsoft.com/office/drawing/2014/main" id="{44D190FA-DC26-4520-92B8-E8904ADACF52}"/>
+                <a16:creationId xmlns:a16="http://schemas.microsoft.com/office/drawing/2014/main" id="{C08EB3B6-E96A-486F-92F3-0879D5420BCD}"/>
               </a:ext>
             </a:extLst>
           </p:cNvPr>
@@ -15488,7 +15488,7 @@
           <p:cNvPr id="22" name="Rectangle 21">
             <a:extLst>
               <a:ext uri="{FF2B5EF4-FFF2-40B4-BE49-F238E27FC236}">
-                <a16:creationId xmlns:a16="http://schemas.microsoft.com/office/drawing/2014/main" id="{BEE55412-2461-452B-91C0-2810D70D7195}"/>
+                <a16:creationId xmlns:a16="http://schemas.microsoft.com/office/drawing/2014/main" id="{39216048-1F1B-4A83-A5A0-21C918CDB5B2}"/>
               </a:ext>
             </a:extLst>
           </p:cNvPr>
@@ -15550,7 +15550,7 @@
           <p:cNvPr id="23" name="Rectangle 22">
             <a:extLst>
               <a:ext uri="{FF2B5EF4-FFF2-40B4-BE49-F238E27FC236}">
-                <a16:creationId xmlns:a16="http://schemas.microsoft.com/office/drawing/2014/main" id="{B80F880F-2982-4FF1-9512-44C67B9747B4}"/>
+                <a16:creationId xmlns:a16="http://schemas.microsoft.com/office/drawing/2014/main" id="{7F4C7CAD-2940-413D-A608-83BEB204D7FF}"/>
               </a:ext>
             </a:extLst>
           </p:cNvPr>
@@ -15581,7 +15581,7 @@
           <p:cNvPr id="24" name="Rectangle 23">
             <a:extLst>
               <a:ext uri="{FF2B5EF4-FFF2-40B4-BE49-F238E27FC236}">
-                <a16:creationId xmlns:a16="http://schemas.microsoft.com/office/drawing/2014/main" id="{62B5520A-5A79-4C7B-94CE-4A6D1D17FEF9}"/>
+                <a16:creationId xmlns:a16="http://schemas.microsoft.com/office/drawing/2014/main" id="{E3564FC0-F55B-4DFA-997A-CD288583AC00}"/>
               </a:ext>
             </a:extLst>
           </p:cNvPr>
@@ -15643,7 +15643,7 @@
           <p:cNvPr id="25" name="Rectangle 24">
             <a:extLst>
               <a:ext uri="{FF2B5EF4-FFF2-40B4-BE49-F238E27FC236}">
-                <a16:creationId xmlns:a16="http://schemas.microsoft.com/office/drawing/2014/main" id="{AD38C40F-D0F8-4295-BBB5-2FDCD38BD697}"/>
+                <a16:creationId xmlns:a16="http://schemas.microsoft.com/office/drawing/2014/main" id="{ECEA65CE-21B1-48F4-96A9-FD9626675186}"/>
               </a:ext>
             </a:extLst>
           </p:cNvPr>
@@ -15703,7 +15703,7 @@
     </p:spTree>
     <p:extLst>
       <p:ext uri="{BB962C8B-B14F-4D97-AF65-F5344CB8AC3E}">
-        <p14:creationId xmlns:p14="http://schemas.microsoft.com/office/powerpoint/2010/main" val="874499060"/>
+        <p14:creationId xmlns:p14="http://schemas.microsoft.com/office/powerpoint/2010/main" val="1428903224"/>
       </p:ext>
     </p:extLst>
   </p:cSld>
@@ -15744,7 +15744,7 @@
             <a:hlinkClick r:id="rId3"/>
             <a:extLst>
               <a:ext uri="{FF2B5EF4-FFF2-40B4-BE49-F238E27FC236}">
-                <a16:creationId xmlns:a16="http://schemas.microsoft.com/office/drawing/2014/main" id="{E93B1682-8568-4812-9EAA-5F398E8DA93D}"/>
+                <a16:creationId xmlns:a16="http://schemas.microsoft.com/office/drawing/2014/main" id="{5D16CB62-3FF6-4521-AB2E-D96579F5DBDD}"/>
               </a:ext>
             </a:extLst>
           </p:cNvPr>
@@ -15819,7 +15819,7 @@
             <a:hlinkClick r:id="rId4"/>
             <a:extLst>
               <a:ext uri="{FF2B5EF4-FFF2-40B4-BE49-F238E27FC236}">
-                <a16:creationId xmlns:a16="http://schemas.microsoft.com/office/drawing/2014/main" id="{FCCA22D5-BE93-4FE0-8537-1EAF07F0C7A5}"/>
+                <a16:creationId xmlns:a16="http://schemas.microsoft.com/office/drawing/2014/main" id="{0CBBC2ED-08ED-4494-8181-72A65A254771}"/>
               </a:ext>
             </a:extLst>
           </p:cNvPr>
@@ -15893,7 +15893,7 @@
           <p:cNvPr id="3" name="Rectangle 2">
             <a:extLst>
               <a:ext uri="{FF2B5EF4-FFF2-40B4-BE49-F238E27FC236}">
-                <a16:creationId xmlns:a16="http://schemas.microsoft.com/office/drawing/2014/main" id="{ED7393C2-7E76-4815-888E-6C16DFE78DB6}"/>
+                <a16:creationId xmlns:a16="http://schemas.microsoft.com/office/drawing/2014/main" id="{8EFB5922-17C7-4669-A6CB-3CE4DA068094}"/>
               </a:ext>
             </a:extLst>
           </p:cNvPr>
@@ -15955,7 +15955,7 @@
           <p:cNvPr id="4" name="Rectangle 3">
             <a:extLst>
               <a:ext uri="{FF2B5EF4-FFF2-40B4-BE49-F238E27FC236}">
-                <a16:creationId xmlns:a16="http://schemas.microsoft.com/office/drawing/2014/main" id="{A2FB24AF-720B-4CC2-9501-EA63A3A8B3AB}"/>
+                <a16:creationId xmlns:a16="http://schemas.microsoft.com/office/drawing/2014/main" id="{A1BB1494-4490-4249-B018-5A8CD0781A43}"/>
               </a:ext>
             </a:extLst>
           </p:cNvPr>
@@ -16017,7 +16017,7 @@
           <p:cNvPr id="5" name="Rectangle 4">
             <a:extLst>
               <a:ext uri="{FF2B5EF4-FFF2-40B4-BE49-F238E27FC236}">
-                <a16:creationId xmlns:a16="http://schemas.microsoft.com/office/drawing/2014/main" id="{F90DC839-56B2-40C0-AC68-68A1B6E23255}"/>
+                <a16:creationId xmlns:a16="http://schemas.microsoft.com/office/drawing/2014/main" id="{0B474416-5CBC-4E08-8924-BAC77C3DC39F}"/>
               </a:ext>
             </a:extLst>
           </p:cNvPr>
@@ -16079,7 +16079,7 @@
           <p:cNvPr id="6" name="Rectangle 5">
             <a:extLst>
               <a:ext uri="{FF2B5EF4-FFF2-40B4-BE49-F238E27FC236}">
-                <a16:creationId xmlns:a16="http://schemas.microsoft.com/office/drawing/2014/main" id="{08EA6437-4FFA-4FC2-859A-CA4978739B8A}"/>
+                <a16:creationId xmlns:a16="http://schemas.microsoft.com/office/drawing/2014/main" id="{ADE00740-C669-4EC9-8B7A-B61608F0121D}"/>
               </a:ext>
             </a:extLst>
           </p:cNvPr>
@@ -16141,7 +16141,7 @@
           <p:cNvPr id="7" name="Rectangle: Rounded Corners 6">
             <a:extLst>
               <a:ext uri="{FF2B5EF4-FFF2-40B4-BE49-F238E27FC236}">
-                <a16:creationId xmlns:a16="http://schemas.microsoft.com/office/drawing/2014/main" id="{CFBA94F7-2200-4AE6-8F63-9DAC96BFED82}"/>
+                <a16:creationId xmlns:a16="http://schemas.microsoft.com/office/drawing/2014/main" id="{634B507A-C0C0-4DBF-B783-17F2C66233F9}"/>
               </a:ext>
             </a:extLst>
           </p:cNvPr>
@@ -16174,7 +16174,7 @@
           <p:cNvPr id="8" name="Rectangle 7">
             <a:extLst>
               <a:ext uri="{FF2B5EF4-FFF2-40B4-BE49-F238E27FC236}">
-                <a16:creationId xmlns:a16="http://schemas.microsoft.com/office/drawing/2014/main" id="{3AC4FD12-C09F-4C75-B351-10537AA2ED2B}"/>
+                <a16:creationId xmlns:a16="http://schemas.microsoft.com/office/drawing/2014/main" id="{6CC141F3-1A4B-422D-B880-4DB7573890F7}"/>
               </a:ext>
             </a:extLst>
           </p:cNvPr>
@@ -16236,7 +16236,7 @@
           <p:cNvPr id="9" name="Rectangle: Rounded Corners 8">
             <a:extLst>
               <a:ext uri="{FF2B5EF4-FFF2-40B4-BE49-F238E27FC236}">
-                <a16:creationId xmlns:a16="http://schemas.microsoft.com/office/drawing/2014/main" id="{F898B97B-E11B-4521-AD4E-05B96A010A23}"/>
+                <a16:creationId xmlns:a16="http://schemas.microsoft.com/office/drawing/2014/main" id="{2F675D6F-8827-4CE3-8857-3BF416F4B640}"/>
               </a:ext>
             </a:extLst>
           </p:cNvPr>
@@ -16269,7 +16269,7 @@
           <p:cNvPr id="10" name="Rectangle 9">
             <a:extLst>
               <a:ext uri="{FF2B5EF4-FFF2-40B4-BE49-F238E27FC236}">
-                <a16:creationId xmlns:a16="http://schemas.microsoft.com/office/drawing/2014/main" id="{36B3A9DC-CD9C-4C9F-AE8B-356887427E4B}"/>
+                <a16:creationId xmlns:a16="http://schemas.microsoft.com/office/drawing/2014/main" id="{C2DDF3AB-ACCB-4228-B469-6E19FA609892}"/>
               </a:ext>
             </a:extLst>
           </p:cNvPr>
@@ -16331,7 +16331,7 @@
           <p:cNvPr id="11" name="Rectangle: Rounded Corners 10">
             <a:extLst>
               <a:ext uri="{FF2B5EF4-FFF2-40B4-BE49-F238E27FC236}">
-                <a16:creationId xmlns:a16="http://schemas.microsoft.com/office/drawing/2014/main" id="{C8A165DF-1FC4-4906-A235-F5647C7C7962}"/>
+                <a16:creationId xmlns:a16="http://schemas.microsoft.com/office/drawing/2014/main" id="{778DF06D-689F-4400-8336-C5500FC5D8AC}"/>
               </a:ext>
             </a:extLst>
           </p:cNvPr>
@@ -16364,7 +16364,7 @@
           <p:cNvPr id="12" name="Rectangle 11">
             <a:extLst>
               <a:ext uri="{FF2B5EF4-FFF2-40B4-BE49-F238E27FC236}">
-                <a16:creationId xmlns:a16="http://schemas.microsoft.com/office/drawing/2014/main" id="{08EAEFD8-58DB-404A-9C38-82C5B9B1CFA1}"/>
+                <a16:creationId xmlns:a16="http://schemas.microsoft.com/office/drawing/2014/main" id="{E0F88CEE-82B5-4BB5-95B2-C874B2D5D650}"/>
               </a:ext>
             </a:extLst>
           </p:cNvPr>
@@ -16426,7 +16426,7 @@
           <p:cNvPr id="13" name="Rectangle: Rounded Corners 12">
             <a:extLst>
               <a:ext uri="{FF2B5EF4-FFF2-40B4-BE49-F238E27FC236}">
-                <a16:creationId xmlns:a16="http://schemas.microsoft.com/office/drawing/2014/main" id="{A05E8A55-F275-4D12-AD18-90ACD6655624}"/>
+                <a16:creationId xmlns:a16="http://schemas.microsoft.com/office/drawing/2014/main" id="{15D282FA-7FDF-4F69-A9FA-9B597F1DD765}"/>
               </a:ext>
             </a:extLst>
           </p:cNvPr>
@@ -16459,7 +16459,7 @@
           <p:cNvPr id="14" name="Rectangle 13">
             <a:extLst>
               <a:ext uri="{FF2B5EF4-FFF2-40B4-BE49-F238E27FC236}">
-                <a16:creationId xmlns:a16="http://schemas.microsoft.com/office/drawing/2014/main" id="{55F8963A-419E-4926-8E3B-4892EF6AF124}"/>
+                <a16:creationId xmlns:a16="http://schemas.microsoft.com/office/drawing/2014/main" id="{798E4F83-5A04-4DB6-8673-32B52AA40A9A}"/>
               </a:ext>
             </a:extLst>
           </p:cNvPr>
@@ -16521,7 +16521,7 @@
           <p:cNvPr id="15" name="Rectangle: Rounded Corners 14">
             <a:extLst>
               <a:ext uri="{FF2B5EF4-FFF2-40B4-BE49-F238E27FC236}">
-                <a16:creationId xmlns:a16="http://schemas.microsoft.com/office/drawing/2014/main" id="{30977BB4-25B3-4F22-9ADE-B5D67B6D8EE2}"/>
+                <a16:creationId xmlns:a16="http://schemas.microsoft.com/office/drawing/2014/main" id="{880D8CB2-5804-4C57-9DA8-7E854EF9A5D4}"/>
               </a:ext>
             </a:extLst>
           </p:cNvPr>
@@ -16554,7 +16554,7 @@
           <p:cNvPr id="16" name="Rectangle 15">
             <a:extLst>
               <a:ext uri="{FF2B5EF4-FFF2-40B4-BE49-F238E27FC236}">
-                <a16:creationId xmlns:a16="http://schemas.microsoft.com/office/drawing/2014/main" id="{6EE170DE-EA4C-42CC-BFB8-54A93758F450}"/>
+                <a16:creationId xmlns:a16="http://schemas.microsoft.com/office/drawing/2014/main" id="{8ACA40CC-ADFC-4BC2-A22B-021CC92E4D9E}"/>
               </a:ext>
             </a:extLst>
           </p:cNvPr>
@@ -16616,7 +16616,7 @@
           <p:cNvPr id="17" name="Rectangle: Rounded Corners 16">
             <a:extLst>
               <a:ext uri="{FF2B5EF4-FFF2-40B4-BE49-F238E27FC236}">
-                <a16:creationId xmlns:a16="http://schemas.microsoft.com/office/drawing/2014/main" id="{1B70EDCF-F346-4904-A8B9-DEC2EB840EF2}"/>
+                <a16:creationId xmlns:a16="http://schemas.microsoft.com/office/drawing/2014/main" id="{00FDD11A-EAEB-4ABD-A73E-D6D4404397CE}"/>
               </a:ext>
             </a:extLst>
           </p:cNvPr>
@@ -16649,7 +16649,7 @@
           <p:cNvPr id="18" name="Rectangle 17">
             <a:extLst>
               <a:ext uri="{FF2B5EF4-FFF2-40B4-BE49-F238E27FC236}">
-                <a16:creationId xmlns:a16="http://schemas.microsoft.com/office/drawing/2014/main" id="{CC568F1A-AC1D-4AA6-9231-179FAF4B772F}"/>
+                <a16:creationId xmlns:a16="http://schemas.microsoft.com/office/drawing/2014/main" id="{566AE97F-82E6-4886-BC99-BE4E7CDC374A}"/>
               </a:ext>
             </a:extLst>
           </p:cNvPr>
@@ -16711,7 +16711,7 @@
           <p:cNvPr id="19" name="Rectangle: Rounded Corners 18">
             <a:extLst>
               <a:ext uri="{FF2B5EF4-FFF2-40B4-BE49-F238E27FC236}">
-                <a16:creationId xmlns:a16="http://schemas.microsoft.com/office/drawing/2014/main" id="{342C0EB5-2C02-40E6-9669-D5E7667888C9}"/>
+                <a16:creationId xmlns:a16="http://schemas.microsoft.com/office/drawing/2014/main" id="{8AD86E60-63D5-40F3-B0D1-E357960F0AF9}"/>
               </a:ext>
             </a:extLst>
           </p:cNvPr>
@@ -16744,7 +16744,7 @@
           <p:cNvPr id="20" name="Rectangle 19">
             <a:extLst>
               <a:ext uri="{FF2B5EF4-FFF2-40B4-BE49-F238E27FC236}">
-                <a16:creationId xmlns:a16="http://schemas.microsoft.com/office/drawing/2014/main" id="{A7AADCC4-7453-4188-A9EC-08699A9D6425}"/>
+                <a16:creationId xmlns:a16="http://schemas.microsoft.com/office/drawing/2014/main" id="{49F40EB3-A952-40FF-B495-1B8A4B19983F}"/>
               </a:ext>
             </a:extLst>
           </p:cNvPr>
@@ -16806,7 +16806,7 @@
           <p:cNvPr id="21" name="Rectangle: Rounded Corners 20">
             <a:extLst>
               <a:ext uri="{FF2B5EF4-FFF2-40B4-BE49-F238E27FC236}">
-                <a16:creationId xmlns:a16="http://schemas.microsoft.com/office/drawing/2014/main" id="{7EC33EEA-2371-4CDD-ADD9-5E3E51C750F5}"/>
+                <a16:creationId xmlns:a16="http://schemas.microsoft.com/office/drawing/2014/main" id="{B7EDDF14-8290-4A6B-905A-B009B43AA30F}"/>
               </a:ext>
             </a:extLst>
           </p:cNvPr>
@@ -16839,7 +16839,7 @@
           <p:cNvPr id="22" name="Rectangle 21">
             <a:extLst>
               <a:ext uri="{FF2B5EF4-FFF2-40B4-BE49-F238E27FC236}">
-                <a16:creationId xmlns:a16="http://schemas.microsoft.com/office/drawing/2014/main" id="{8C88BBA1-4540-437D-B684-84D7EF26C67F}"/>
+                <a16:creationId xmlns:a16="http://schemas.microsoft.com/office/drawing/2014/main" id="{4A25ED0D-D0BB-43BF-83ED-C789BE24F3BA}"/>
               </a:ext>
             </a:extLst>
           </p:cNvPr>
@@ -16901,7 +16901,7 @@
           <p:cNvPr id="23" name="Rectangle 22">
             <a:extLst>
               <a:ext uri="{FF2B5EF4-FFF2-40B4-BE49-F238E27FC236}">
-                <a16:creationId xmlns:a16="http://schemas.microsoft.com/office/drawing/2014/main" id="{F5DB7E70-5DFA-4FCC-8D94-233E45507E03}"/>
+                <a16:creationId xmlns:a16="http://schemas.microsoft.com/office/drawing/2014/main" id="{21643438-9D9A-4EE2-B8E9-658F03355428}"/>
               </a:ext>
             </a:extLst>
           </p:cNvPr>
@@ -16963,7 +16963,7 @@
           <p:cNvPr id="24" name="Rectangle: Rounded Corners 23">
             <a:extLst>
               <a:ext uri="{FF2B5EF4-FFF2-40B4-BE49-F238E27FC236}">
-                <a16:creationId xmlns:a16="http://schemas.microsoft.com/office/drawing/2014/main" id="{7E7BF758-2EFA-4971-949F-24FCBB4908EE}"/>
+                <a16:creationId xmlns:a16="http://schemas.microsoft.com/office/drawing/2014/main" id="{1892FED2-97D8-40B5-9CFA-91AEDCCBA941}"/>
               </a:ext>
             </a:extLst>
           </p:cNvPr>
@@ -16996,7 +16996,7 @@
           <p:cNvPr id="25" name="Rectangle 24">
             <a:extLst>
               <a:ext uri="{FF2B5EF4-FFF2-40B4-BE49-F238E27FC236}">
-                <a16:creationId xmlns:a16="http://schemas.microsoft.com/office/drawing/2014/main" id="{51C5C633-E94E-48B8-B133-62BFCB3DD704}"/>
+                <a16:creationId xmlns:a16="http://schemas.microsoft.com/office/drawing/2014/main" id="{02C56699-E57B-482C-B07D-5CEBF50A7C66}"/>
               </a:ext>
             </a:extLst>
           </p:cNvPr>
@@ -17058,7 +17058,7 @@
           <p:cNvPr id="26" name="Rectangle: Rounded Corners 25">
             <a:extLst>
               <a:ext uri="{FF2B5EF4-FFF2-40B4-BE49-F238E27FC236}">
-                <a16:creationId xmlns:a16="http://schemas.microsoft.com/office/drawing/2014/main" id="{8766F6F4-3CCC-4573-A538-C995DD338CEC}"/>
+                <a16:creationId xmlns:a16="http://schemas.microsoft.com/office/drawing/2014/main" id="{BBE99805-582D-4EA6-A0F8-3234985D1A3F}"/>
               </a:ext>
             </a:extLst>
           </p:cNvPr>
@@ -17091,7 +17091,7 @@
           <p:cNvPr id="27" name="Rectangle 26">
             <a:extLst>
               <a:ext uri="{FF2B5EF4-FFF2-40B4-BE49-F238E27FC236}">
-                <a16:creationId xmlns:a16="http://schemas.microsoft.com/office/drawing/2014/main" id="{86DC842B-0911-4B5D-87B2-7FEC0362D4E7}"/>
+                <a16:creationId xmlns:a16="http://schemas.microsoft.com/office/drawing/2014/main" id="{0F4DB4B7-1743-4053-A3A9-1E5B85C4294B}"/>
               </a:ext>
             </a:extLst>
           </p:cNvPr>
@@ -17153,7 +17153,7 @@
           <p:cNvPr id="28" name="Rectangle: Rounded Corners 27">
             <a:extLst>
               <a:ext uri="{FF2B5EF4-FFF2-40B4-BE49-F238E27FC236}">
-                <a16:creationId xmlns:a16="http://schemas.microsoft.com/office/drawing/2014/main" id="{C8132C32-5A0A-4554-9A7B-BAF9C5C7C765}"/>
+                <a16:creationId xmlns:a16="http://schemas.microsoft.com/office/drawing/2014/main" id="{489B04C2-7036-4AE5-8C9E-91B7502BCC37}"/>
               </a:ext>
             </a:extLst>
           </p:cNvPr>
@@ -17186,7 +17186,7 @@
           <p:cNvPr id="29" name="Rectangle 28">
             <a:extLst>
               <a:ext uri="{FF2B5EF4-FFF2-40B4-BE49-F238E27FC236}">
-                <a16:creationId xmlns:a16="http://schemas.microsoft.com/office/drawing/2014/main" id="{5AF72421-EB6E-4D7A-A011-B4320C120B6B}"/>
+                <a16:creationId xmlns:a16="http://schemas.microsoft.com/office/drawing/2014/main" id="{CF4EBF6F-411C-45FB-9C1C-E250C6F5D198}"/>
               </a:ext>
             </a:extLst>
           </p:cNvPr>
@@ -17248,7 +17248,7 @@
           <p:cNvPr id="30" name="Rectangle: Rounded Corners 29">
             <a:extLst>
               <a:ext uri="{FF2B5EF4-FFF2-40B4-BE49-F238E27FC236}">
-                <a16:creationId xmlns:a16="http://schemas.microsoft.com/office/drawing/2014/main" id="{83AA058C-1C06-4169-9BC1-81179FC2F1BB}"/>
+                <a16:creationId xmlns:a16="http://schemas.microsoft.com/office/drawing/2014/main" id="{C968D801-0FFD-4E13-8227-3D030EE084F2}"/>
               </a:ext>
             </a:extLst>
           </p:cNvPr>
@@ -17281,7 +17281,7 @@
           <p:cNvPr id="31" name="Rectangle 30">
             <a:extLst>
               <a:ext uri="{FF2B5EF4-FFF2-40B4-BE49-F238E27FC236}">
-                <a16:creationId xmlns:a16="http://schemas.microsoft.com/office/drawing/2014/main" id="{BEAA30E9-C7D3-493A-8DB6-E68A5361A28C}"/>
+                <a16:creationId xmlns:a16="http://schemas.microsoft.com/office/drawing/2014/main" id="{868704CA-D765-45AE-BE31-0E0991AA46DA}"/>
               </a:ext>
             </a:extLst>
           </p:cNvPr>
@@ -17343,7 +17343,7 @@
           <p:cNvPr id="32" name="Rectangle: Rounded Corners 31">
             <a:extLst>
               <a:ext uri="{FF2B5EF4-FFF2-40B4-BE49-F238E27FC236}">
-                <a16:creationId xmlns:a16="http://schemas.microsoft.com/office/drawing/2014/main" id="{E00C7186-EDE7-424E-860E-59462A784F29}"/>
+                <a16:creationId xmlns:a16="http://schemas.microsoft.com/office/drawing/2014/main" id="{4738C7B5-4517-4445-A2B5-F90DEA87C16E}"/>
               </a:ext>
             </a:extLst>
           </p:cNvPr>
@@ -17376,7 +17376,7 @@
           <p:cNvPr id="33" name="Rectangle 32">
             <a:extLst>
               <a:ext uri="{FF2B5EF4-FFF2-40B4-BE49-F238E27FC236}">
-                <a16:creationId xmlns:a16="http://schemas.microsoft.com/office/drawing/2014/main" id="{F1E32DF3-96FE-4466-A2A1-13FC13D63970}"/>
+                <a16:creationId xmlns:a16="http://schemas.microsoft.com/office/drawing/2014/main" id="{4EAE0A68-55CD-4E81-800E-25045C42F82C}"/>
               </a:ext>
             </a:extLst>
           </p:cNvPr>
@@ -17438,7 +17438,7 @@
           <p:cNvPr id="34" name="Rectangle: Rounded Corners 33">
             <a:extLst>
               <a:ext uri="{FF2B5EF4-FFF2-40B4-BE49-F238E27FC236}">
-                <a16:creationId xmlns:a16="http://schemas.microsoft.com/office/drawing/2014/main" id="{D32C91DA-F9EA-4188-9906-362615138F8B}"/>
+                <a16:creationId xmlns:a16="http://schemas.microsoft.com/office/drawing/2014/main" id="{1CB577B9-A409-4908-8C2C-A89089EBE8DB}"/>
               </a:ext>
             </a:extLst>
           </p:cNvPr>
@@ -17471,7 +17471,7 @@
           <p:cNvPr id="35" name="Rectangle 34">
             <a:extLst>
               <a:ext uri="{FF2B5EF4-FFF2-40B4-BE49-F238E27FC236}">
-                <a16:creationId xmlns:a16="http://schemas.microsoft.com/office/drawing/2014/main" id="{848E2ECA-F045-4CD2-A0FB-50294431F18F}"/>
+                <a16:creationId xmlns:a16="http://schemas.microsoft.com/office/drawing/2014/main" id="{39F3881E-796C-4EEA-886F-45BFDFD5175C}"/>
               </a:ext>
             </a:extLst>
           </p:cNvPr>
@@ -17533,7 +17533,7 @@
           <p:cNvPr id="36" name="Rectangle 35">
             <a:extLst>
               <a:ext uri="{FF2B5EF4-FFF2-40B4-BE49-F238E27FC236}">
-                <a16:creationId xmlns:a16="http://schemas.microsoft.com/office/drawing/2014/main" id="{D6CADC95-6A1F-4E93-A7E5-33CC417A0BEC}"/>
+                <a16:creationId xmlns:a16="http://schemas.microsoft.com/office/drawing/2014/main" id="{FBC08741-2B51-49BC-8613-B6A32A9719B2}"/>
               </a:ext>
             </a:extLst>
           </p:cNvPr>
@@ -17595,7 +17595,7 @@
           <p:cNvPr id="37" name="Rectangle 36">
             <a:extLst>
               <a:ext uri="{FF2B5EF4-FFF2-40B4-BE49-F238E27FC236}">
-                <a16:creationId xmlns:a16="http://schemas.microsoft.com/office/drawing/2014/main" id="{5E565CDF-985C-49BC-A035-7E6CD0BBD888}"/>
+                <a16:creationId xmlns:a16="http://schemas.microsoft.com/office/drawing/2014/main" id="{7B1BFEB9-B738-4837-BA32-B6B51051BD59}"/>
               </a:ext>
             </a:extLst>
           </p:cNvPr>
@@ -17657,7 +17657,7 @@
           <p:cNvPr id="38" name="Rectangle 37">
             <a:extLst>
               <a:ext uri="{FF2B5EF4-FFF2-40B4-BE49-F238E27FC236}">
-                <a16:creationId xmlns:a16="http://schemas.microsoft.com/office/drawing/2014/main" id="{B9BB60B4-0E36-422F-B5B6-14340F328DA3}"/>
+                <a16:creationId xmlns:a16="http://schemas.microsoft.com/office/drawing/2014/main" id="{99D0995F-66F1-422A-9821-1F900B43421B}"/>
               </a:ext>
             </a:extLst>
           </p:cNvPr>
@@ -17688,7 +17688,7 @@
           <p:cNvPr id="39" name="Rectangle 38">
             <a:extLst>
               <a:ext uri="{FF2B5EF4-FFF2-40B4-BE49-F238E27FC236}">
-                <a16:creationId xmlns:a16="http://schemas.microsoft.com/office/drawing/2014/main" id="{7F914E33-0C40-420E-B46E-FC43CD775110}"/>
+                <a16:creationId xmlns:a16="http://schemas.microsoft.com/office/drawing/2014/main" id="{4AC7E5F7-477D-4941-BD5C-2DB207E74C53}"/>
               </a:ext>
             </a:extLst>
           </p:cNvPr>
@@ -17750,7 +17750,7 @@
           <p:cNvPr id="40" name="Rectangle 39">
             <a:extLst>
               <a:ext uri="{FF2B5EF4-FFF2-40B4-BE49-F238E27FC236}">
-                <a16:creationId xmlns:a16="http://schemas.microsoft.com/office/drawing/2014/main" id="{F13A32C5-BBDF-4638-9D14-7B0E483301F0}"/>
+                <a16:creationId xmlns:a16="http://schemas.microsoft.com/office/drawing/2014/main" id="{D566DC48-79F0-47D5-8A99-40E172E9D54F}"/>
               </a:ext>
             </a:extLst>
           </p:cNvPr>
@@ -17810,7 +17810,7 @@
     </p:spTree>
     <p:extLst>
       <p:ext uri="{BB962C8B-B14F-4D97-AF65-F5344CB8AC3E}">
-        <p14:creationId xmlns:p14="http://schemas.microsoft.com/office/powerpoint/2010/main" val="2091128737"/>
+        <p14:creationId xmlns:p14="http://schemas.microsoft.com/office/powerpoint/2010/main" val="493571935"/>
       </p:ext>
     </p:extLst>
   </p:cSld>
@@ -17851,7 +17851,7 @@
             <a:hlinkClick r:id="rId3"/>
             <a:extLst>
               <a:ext uri="{FF2B5EF4-FFF2-40B4-BE49-F238E27FC236}">
-                <a16:creationId xmlns:a16="http://schemas.microsoft.com/office/drawing/2014/main" id="{6118704B-77E4-4B46-B73F-8215424A4D69}"/>
+                <a16:creationId xmlns:a16="http://schemas.microsoft.com/office/drawing/2014/main" id="{628E497C-08E6-44D0-B0CF-81DD197F0488}"/>
               </a:ext>
             </a:extLst>
           </p:cNvPr>
@@ -17926,7 +17926,7 @@
             <a:hlinkClick r:id="rId4"/>
             <a:extLst>
               <a:ext uri="{FF2B5EF4-FFF2-40B4-BE49-F238E27FC236}">
-                <a16:creationId xmlns:a16="http://schemas.microsoft.com/office/drawing/2014/main" id="{D40CDA81-AB0F-4BA9-97F9-5B230D2679ED}"/>
+                <a16:creationId xmlns:a16="http://schemas.microsoft.com/office/drawing/2014/main" id="{D0F4B9C5-4A12-4366-950F-3C3E5D96B49A}"/>
               </a:ext>
             </a:extLst>
           </p:cNvPr>
@@ -18000,7 +18000,7 @@
           <p:cNvPr id="3" name="Rectangle 2">
             <a:extLst>
               <a:ext uri="{FF2B5EF4-FFF2-40B4-BE49-F238E27FC236}">
-                <a16:creationId xmlns:a16="http://schemas.microsoft.com/office/drawing/2014/main" id="{A9CE4071-2F80-426A-9126-690C81286083}"/>
+                <a16:creationId xmlns:a16="http://schemas.microsoft.com/office/drawing/2014/main" id="{D363979F-D9A3-4C55-9D30-5097AF71E361}"/>
               </a:ext>
             </a:extLst>
           </p:cNvPr>
@@ -18062,7 +18062,7 @@
           <p:cNvPr id="4" name="Rectangle 3">
             <a:extLst>
               <a:ext uri="{FF2B5EF4-FFF2-40B4-BE49-F238E27FC236}">
-                <a16:creationId xmlns:a16="http://schemas.microsoft.com/office/drawing/2014/main" id="{C981A99B-0E78-4560-97CD-903A4C28707D}"/>
+                <a16:creationId xmlns:a16="http://schemas.microsoft.com/office/drawing/2014/main" id="{67F1E537-C668-46BD-AA53-9946636E6D91}"/>
               </a:ext>
             </a:extLst>
           </p:cNvPr>
@@ -18129,7 +18129,7 @@
         </p:nvPicPr>
         <p:blipFill>
           <a:blip r:embed="rId5"/>
-          <a:srcRect t="15741" b="15741"/>
+          <a:srcRect l="2595" r="2595"/>
           <a:stretch>
             <a:fillRect/>
           </a:stretch>
@@ -18151,7 +18151,7 @@
           <p:cNvPr id="6" name="Rectangle: Rounded Corners 5">
             <a:extLst>
               <a:ext uri="{FF2B5EF4-FFF2-40B4-BE49-F238E27FC236}">
-                <a16:creationId xmlns:a16="http://schemas.microsoft.com/office/drawing/2014/main" id="{410B4440-F29A-4B93-A145-D1851034B5BA}"/>
+                <a16:creationId xmlns:a16="http://schemas.microsoft.com/office/drawing/2014/main" id="{BC7FF290-72C8-474C-B8A5-2592885B3547}"/>
               </a:ext>
             </a:extLst>
           </p:cNvPr>
@@ -18184,7 +18184,7 @@
           <p:cNvPr id="7" name="Rectangle 6">
             <a:extLst>
               <a:ext uri="{FF2B5EF4-FFF2-40B4-BE49-F238E27FC236}">
-                <a16:creationId xmlns:a16="http://schemas.microsoft.com/office/drawing/2014/main" id="{1EDD0831-B5EA-4EBE-8AB5-4019C98B435B}"/>
+                <a16:creationId xmlns:a16="http://schemas.microsoft.com/office/drawing/2014/main" id="{3317DA2A-981D-42A5-AF28-BB2B2417E048}"/>
               </a:ext>
             </a:extLst>
           </p:cNvPr>
@@ -18246,7 +18246,7 @@
           <p:cNvPr id="8" name="Rectangle 7">
             <a:extLst>
               <a:ext uri="{FF2B5EF4-FFF2-40B4-BE49-F238E27FC236}">
-                <a16:creationId xmlns:a16="http://schemas.microsoft.com/office/drawing/2014/main" id="{D4A15821-93A4-4D5E-A09C-3F6679422538}"/>
+                <a16:creationId xmlns:a16="http://schemas.microsoft.com/office/drawing/2014/main" id="{213647E5-3D4C-42A3-81F6-0B5162F0E732}"/>
               </a:ext>
             </a:extLst>
           </p:cNvPr>
@@ -18308,7 +18308,7 @@
           <p:cNvPr id="9" name="Rectangle 8">
             <a:extLst>
               <a:ext uri="{FF2B5EF4-FFF2-40B4-BE49-F238E27FC236}">
-                <a16:creationId xmlns:a16="http://schemas.microsoft.com/office/drawing/2014/main" id="{B31643AD-C2C8-4478-9DD5-102D3F6B94B9}"/>
+                <a16:creationId xmlns:a16="http://schemas.microsoft.com/office/drawing/2014/main" id="{784C9165-B86F-42ED-80AC-486BD02DB7EA}"/>
               </a:ext>
             </a:extLst>
           </p:cNvPr>
@@ -18339,7 +18339,7 @@
           <p:cNvPr id="10" name="Rectangle 9">
             <a:extLst>
               <a:ext uri="{FF2B5EF4-FFF2-40B4-BE49-F238E27FC236}">
-                <a16:creationId xmlns:a16="http://schemas.microsoft.com/office/drawing/2014/main" id="{C5E4B3C7-048B-4B30-8BB4-739AD64D7A41}"/>
+                <a16:creationId xmlns:a16="http://schemas.microsoft.com/office/drawing/2014/main" id="{E77A73DE-8955-4118-B25F-AD08A03B77F9}"/>
               </a:ext>
             </a:extLst>
           </p:cNvPr>
@@ -18401,7 +18401,7 @@
           <p:cNvPr id="11" name="Rectangle 10">
             <a:extLst>
               <a:ext uri="{FF2B5EF4-FFF2-40B4-BE49-F238E27FC236}">
-                <a16:creationId xmlns:a16="http://schemas.microsoft.com/office/drawing/2014/main" id="{007CA65E-C6CF-40FF-956D-3F2A51C7D632}"/>
+                <a16:creationId xmlns:a16="http://schemas.microsoft.com/office/drawing/2014/main" id="{B7BD4A6E-3320-4443-B28F-03EB00728155}"/>
               </a:ext>
             </a:extLst>
           </p:cNvPr>
@@ -18463,7 +18463,7 @@
           <p:cNvPr id="12" name="Rectangle 11">
             <a:extLst>
               <a:ext uri="{FF2B5EF4-FFF2-40B4-BE49-F238E27FC236}">
-                <a16:creationId xmlns:a16="http://schemas.microsoft.com/office/drawing/2014/main" id="{0593218D-6EA0-4AFA-8BA8-FDD453AE1BE0}"/>
+                <a16:creationId xmlns:a16="http://schemas.microsoft.com/office/drawing/2014/main" id="{2561E651-D908-48FC-A45F-0E4302203981}"/>
               </a:ext>
             </a:extLst>
           </p:cNvPr>
@@ -18494,7 +18494,7 @@
           <p:cNvPr id="13" name="Rectangle 12">
             <a:extLst>
               <a:ext uri="{FF2B5EF4-FFF2-40B4-BE49-F238E27FC236}">
-                <a16:creationId xmlns:a16="http://schemas.microsoft.com/office/drawing/2014/main" id="{E6D75861-382D-498D-9490-3452D67C6FE3}"/>
+                <a16:creationId xmlns:a16="http://schemas.microsoft.com/office/drawing/2014/main" id="{DF1E46EF-FD15-42C8-B83F-762BBFEDD199}"/>
               </a:ext>
             </a:extLst>
           </p:cNvPr>
@@ -18556,7 +18556,7 @@
           <p:cNvPr id="14" name="Rectangle 13">
             <a:extLst>
               <a:ext uri="{FF2B5EF4-FFF2-40B4-BE49-F238E27FC236}">
-                <a16:creationId xmlns:a16="http://schemas.microsoft.com/office/drawing/2014/main" id="{158842C4-7E68-4E21-9736-09AC5597FFB9}"/>
+                <a16:creationId xmlns:a16="http://schemas.microsoft.com/office/drawing/2014/main" id="{05BBFD16-BF4E-4E21-8EA1-CA3EBEC5B4BD}"/>
               </a:ext>
             </a:extLst>
           </p:cNvPr>
@@ -18618,7 +18618,7 @@
           <p:cNvPr id="15" name="Rectangle 14">
             <a:extLst>
               <a:ext uri="{FF2B5EF4-FFF2-40B4-BE49-F238E27FC236}">
-                <a16:creationId xmlns:a16="http://schemas.microsoft.com/office/drawing/2014/main" id="{5D304BB6-53CA-4CF0-A167-E8E3C1404FE5}"/>
+                <a16:creationId xmlns:a16="http://schemas.microsoft.com/office/drawing/2014/main" id="{82245CA4-CCD5-40CC-86D4-BC692A153BF3}"/>
               </a:ext>
             </a:extLst>
           </p:cNvPr>
@@ -18649,7 +18649,7 @@
           <p:cNvPr id="16" name="Rectangle 15">
             <a:extLst>
               <a:ext uri="{FF2B5EF4-FFF2-40B4-BE49-F238E27FC236}">
-                <a16:creationId xmlns:a16="http://schemas.microsoft.com/office/drawing/2014/main" id="{530E3D69-152E-487E-B0C0-7D4F59E6430D}"/>
+                <a16:creationId xmlns:a16="http://schemas.microsoft.com/office/drawing/2014/main" id="{ED7052F4-C282-4418-B283-CC1D6D21A890}"/>
               </a:ext>
             </a:extLst>
           </p:cNvPr>
@@ -18711,7 +18711,7 @@
           <p:cNvPr id="17" name="Rectangle 16">
             <a:extLst>
               <a:ext uri="{FF2B5EF4-FFF2-40B4-BE49-F238E27FC236}">
-                <a16:creationId xmlns:a16="http://schemas.microsoft.com/office/drawing/2014/main" id="{9289F9EA-E9AA-4021-9216-76B06361CB01}"/>
+                <a16:creationId xmlns:a16="http://schemas.microsoft.com/office/drawing/2014/main" id="{46FCECC0-D948-4D98-980C-B4F539A55E3F}"/>
               </a:ext>
             </a:extLst>
           </p:cNvPr>
@@ -18773,7 +18773,7 @@
           <p:cNvPr id="18" name="Rectangle 17">
             <a:extLst>
               <a:ext uri="{FF2B5EF4-FFF2-40B4-BE49-F238E27FC236}">
-                <a16:creationId xmlns:a16="http://schemas.microsoft.com/office/drawing/2014/main" id="{393682CA-5E85-4EAB-B625-AEACD9423ED2}"/>
+                <a16:creationId xmlns:a16="http://schemas.microsoft.com/office/drawing/2014/main" id="{CB179DB3-A8C7-4ECC-B1C8-FD727827F13B}"/>
               </a:ext>
             </a:extLst>
           </p:cNvPr>
@@ -18804,7 +18804,7 @@
           <p:cNvPr id="19" name="Rectangle 18">
             <a:extLst>
               <a:ext uri="{FF2B5EF4-FFF2-40B4-BE49-F238E27FC236}">
-                <a16:creationId xmlns:a16="http://schemas.microsoft.com/office/drawing/2014/main" id="{BDCC49E3-34B0-4AE7-93C7-68734A4EA2E1}"/>
+                <a16:creationId xmlns:a16="http://schemas.microsoft.com/office/drawing/2014/main" id="{D37ED087-61DE-405D-8022-87132FB64944}"/>
               </a:ext>
             </a:extLst>
           </p:cNvPr>
@@ -18866,7 +18866,7 @@
           <p:cNvPr id="20" name="Rectangle 19">
             <a:extLst>
               <a:ext uri="{FF2B5EF4-FFF2-40B4-BE49-F238E27FC236}">
-                <a16:creationId xmlns:a16="http://schemas.microsoft.com/office/drawing/2014/main" id="{1F3EB9C5-C5A9-44AA-9454-C102E25D5F1A}"/>
+                <a16:creationId xmlns:a16="http://schemas.microsoft.com/office/drawing/2014/main" id="{E39A5B11-0050-494D-A821-2C879EEC1A47}"/>
               </a:ext>
             </a:extLst>
           </p:cNvPr>
@@ -18928,7 +18928,7 @@
           <p:cNvPr id="21" name="Rectangle 20">
             <a:extLst>
               <a:ext uri="{FF2B5EF4-FFF2-40B4-BE49-F238E27FC236}">
-                <a16:creationId xmlns:a16="http://schemas.microsoft.com/office/drawing/2014/main" id="{E914C716-C9D6-486D-9088-A4E8765ABDE2}"/>
+                <a16:creationId xmlns:a16="http://schemas.microsoft.com/office/drawing/2014/main" id="{A02A88AD-3086-4B67-83EF-5ED3937799B1}"/>
               </a:ext>
             </a:extLst>
           </p:cNvPr>
@@ -18959,7 +18959,7 @@
           <p:cNvPr id="22" name="Rectangle 21">
             <a:extLst>
               <a:ext uri="{FF2B5EF4-FFF2-40B4-BE49-F238E27FC236}">
-                <a16:creationId xmlns:a16="http://schemas.microsoft.com/office/drawing/2014/main" id="{CE50A8F7-DF90-40DC-A64D-FFCD593B91DB}"/>
+                <a16:creationId xmlns:a16="http://schemas.microsoft.com/office/drawing/2014/main" id="{A49BF8E2-72C7-45CA-9310-834E5484867F}"/>
               </a:ext>
             </a:extLst>
           </p:cNvPr>
@@ -19021,7 +19021,7 @@
           <p:cNvPr id="23" name="Rectangle 22">
             <a:extLst>
               <a:ext uri="{FF2B5EF4-FFF2-40B4-BE49-F238E27FC236}">
-                <a16:creationId xmlns:a16="http://schemas.microsoft.com/office/drawing/2014/main" id="{83B7E168-F7A0-4CC8-9ECD-E608880F483D}"/>
+                <a16:creationId xmlns:a16="http://schemas.microsoft.com/office/drawing/2014/main" id="{4AB52280-F419-46F9-8E68-AA919D20115B}"/>
               </a:ext>
             </a:extLst>
           </p:cNvPr>
@@ -19083,7 +19083,7 @@
           <p:cNvPr id="24" name="Rectangle 23">
             <a:extLst>
               <a:ext uri="{FF2B5EF4-FFF2-40B4-BE49-F238E27FC236}">
-                <a16:creationId xmlns:a16="http://schemas.microsoft.com/office/drawing/2014/main" id="{D688E1AC-86A3-425E-8BAA-3DD3FF41A7FB}"/>
+                <a16:creationId xmlns:a16="http://schemas.microsoft.com/office/drawing/2014/main" id="{E1FF86F5-05B6-481D-8CB8-2FDB02CA6928}"/>
               </a:ext>
             </a:extLst>
           </p:cNvPr>
@@ -19114,7 +19114,7 @@
           <p:cNvPr id="25" name="Rectangle 24">
             <a:extLst>
               <a:ext uri="{FF2B5EF4-FFF2-40B4-BE49-F238E27FC236}">
-                <a16:creationId xmlns:a16="http://schemas.microsoft.com/office/drawing/2014/main" id="{407CDB49-A42A-4795-82AF-C7EE5CE5DE90}"/>
+                <a16:creationId xmlns:a16="http://schemas.microsoft.com/office/drawing/2014/main" id="{1190BCDB-8B31-4AF2-B81E-542A5B48B0A8}"/>
               </a:ext>
             </a:extLst>
           </p:cNvPr>
@@ -19176,7 +19176,7 @@
           <p:cNvPr id="26" name="Rectangle 25">
             <a:extLst>
               <a:ext uri="{FF2B5EF4-FFF2-40B4-BE49-F238E27FC236}">
-                <a16:creationId xmlns:a16="http://schemas.microsoft.com/office/drawing/2014/main" id="{47DDB40F-C9D1-4D70-A8B8-D8B21DFB32CE}"/>
+                <a16:creationId xmlns:a16="http://schemas.microsoft.com/office/drawing/2014/main" id="{3BFC1223-19FE-44A6-B83B-3EE7C548B17C}"/>
               </a:ext>
             </a:extLst>
           </p:cNvPr>
@@ -19238,7 +19238,7 @@
           <p:cNvPr id="27" name="Rectangle 26">
             <a:extLst>
               <a:ext uri="{FF2B5EF4-FFF2-40B4-BE49-F238E27FC236}">
-                <a16:creationId xmlns:a16="http://schemas.microsoft.com/office/drawing/2014/main" id="{DEAA44C8-E221-4D21-8381-77DDE56C251B}"/>
+                <a16:creationId xmlns:a16="http://schemas.microsoft.com/office/drawing/2014/main" id="{04EBA7C9-C978-443F-96C3-57F2A12D1441}"/>
               </a:ext>
             </a:extLst>
           </p:cNvPr>
@@ -19269,7 +19269,7 @@
           <p:cNvPr id="28" name="Rectangle 27">
             <a:extLst>
               <a:ext uri="{FF2B5EF4-FFF2-40B4-BE49-F238E27FC236}">
-                <a16:creationId xmlns:a16="http://schemas.microsoft.com/office/drawing/2014/main" id="{FD8B265D-6E18-42F9-BB5C-9332D707F077}"/>
+                <a16:creationId xmlns:a16="http://schemas.microsoft.com/office/drawing/2014/main" id="{A35EC02F-5E41-4646-A162-C82159F39DC0}"/>
               </a:ext>
             </a:extLst>
           </p:cNvPr>
@@ -19331,7 +19331,7 @@
           <p:cNvPr id="29" name="Rectangle 28">
             <a:extLst>
               <a:ext uri="{FF2B5EF4-FFF2-40B4-BE49-F238E27FC236}">
-                <a16:creationId xmlns:a16="http://schemas.microsoft.com/office/drawing/2014/main" id="{88FE9AC6-C9E7-481D-8349-102C9D49474F}"/>
+                <a16:creationId xmlns:a16="http://schemas.microsoft.com/office/drawing/2014/main" id="{67E57EE9-E246-44B1-81A5-6A0981878E49}"/>
               </a:ext>
             </a:extLst>
           </p:cNvPr>
@@ -19393,7 +19393,7 @@
           <p:cNvPr id="30" name="Rectangle 29">
             <a:extLst>
               <a:ext uri="{FF2B5EF4-FFF2-40B4-BE49-F238E27FC236}">
-                <a16:creationId xmlns:a16="http://schemas.microsoft.com/office/drawing/2014/main" id="{22DD06DB-34A5-4E72-BC5D-CDFEFB67C278}"/>
+                <a16:creationId xmlns:a16="http://schemas.microsoft.com/office/drawing/2014/main" id="{710B4E80-EEB4-4975-9693-59CFC996E25E}"/>
               </a:ext>
             </a:extLst>
           </p:cNvPr>
@@ -19424,7 +19424,7 @@
           <p:cNvPr id="31" name="Rectangle: Rounded Corners 30">
             <a:extLst>
               <a:ext uri="{FF2B5EF4-FFF2-40B4-BE49-F238E27FC236}">
-                <a16:creationId xmlns:a16="http://schemas.microsoft.com/office/drawing/2014/main" id="{D4F111BA-AAA9-4134-85D2-2398EA5CFDA6}"/>
+                <a16:creationId xmlns:a16="http://schemas.microsoft.com/office/drawing/2014/main" id="{D1BFC7DD-91EB-461F-8180-6F2A2462545B}"/>
               </a:ext>
             </a:extLst>
           </p:cNvPr>
@@ -19457,7 +19457,7 @@
           <p:cNvPr id="32" name="Rectangle 31">
             <a:extLst>
               <a:ext uri="{FF2B5EF4-FFF2-40B4-BE49-F238E27FC236}">
-                <a16:creationId xmlns:a16="http://schemas.microsoft.com/office/drawing/2014/main" id="{A7AA4D6F-B744-4C89-A9C6-122A7177B218}"/>
+                <a16:creationId xmlns:a16="http://schemas.microsoft.com/office/drawing/2014/main" id="{8AEB0C8C-2131-4DAB-9C3B-E2BF2B9A2C81}"/>
               </a:ext>
             </a:extLst>
           </p:cNvPr>
@@ -19519,7 +19519,7 @@
           <p:cNvPr id="33" name="Rectangle 32">
             <a:extLst>
               <a:ext uri="{FF2B5EF4-FFF2-40B4-BE49-F238E27FC236}">
-                <a16:creationId xmlns:a16="http://schemas.microsoft.com/office/drawing/2014/main" id="{53469D02-5BFF-4956-B4FD-9E65F8A02588}"/>
+                <a16:creationId xmlns:a16="http://schemas.microsoft.com/office/drawing/2014/main" id="{91CBF904-3981-4020-8849-D3B67BBFC2AB}"/>
               </a:ext>
             </a:extLst>
           </p:cNvPr>
@@ -19550,7 +19550,7 @@
           <p:cNvPr id="34" name="Rectangle 33">
             <a:extLst>
               <a:ext uri="{FF2B5EF4-FFF2-40B4-BE49-F238E27FC236}">
-                <a16:creationId xmlns:a16="http://schemas.microsoft.com/office/drawing/2014/main" id="{B1B0F1FB-4E91-4ECB-98A1-544DAB682305}"/>
+                <a16:creationId xmlns:a16="http://schemas.microsoft.com/office/drawing/2014/main" id="{84BBF2E3-5BD6-440D-93EE-187FC8833488}"/>
               </a:ext>
             </a:extLst>
           </p:cNvPr>
@@ -19612,7 +19612,7 @@
           <p:cNvPr id="35" name="Rectangle 34">
             <a:extLst>
               <a:ext uri="{FF2B5EF4-FFF2-40B4-BE49-F238E27FC236}">
-                <a16:creationId xmlns:a16="http://schemas.microsoft.com/office/drawing/2014/main" id="{4E4E4BD4-1B07-41E0-8FB3-D34918441ACF}"/>
+                <a16:creationId xmlns:a16="http://schemas.microsoft.com/office/drawing/2014/main" id="{353222DE-6F65-411E-A594-65E4238D98F2}"/>
               </a:ext>
             </a:extLst>
           </p:cNvPr>
@@ -19672,7 +19672,7 @@
     </p:spTree>
     <p:extLst>
       <p:ext uri="{BB962C8B-B14F-4D97-AF65-F5344CB8AC3E}">
-        <p14:creationId xmlns:p14="http://schemas.microsoft.com/office/powerpoint/2010/main" val="1003385830"/>
+        <p14:creationId xmlns:p14="http://schemas.microsoft.com/office/powerpoint/2010/main" val="1356196912"/>
       </p:ext>
     </p:extLst>
   </p:cSld>
@@ -19713,7 +19713,7 @@
             <a:hlinkClick r:id="rId3"/>
             <a:extLst>
               <a:ext uri="{FF2B5EF4-FFF2-40B4-BE49-F238E27FC236}">
-                <a16:creationId xmlns:a16="http://schemas.microsoft.com/office/drawing/2014/main" id="{A19C587E-307D-4F89-8DF8-995667795749}"/>
+                <a16:creationId xmlns:a16="http://schemas.microsoft.com/office/drawing/2014/main" id="{90A33213-3254-4C10-9789-0166EAB82CD2}"/>
               </a:ext>
             </a:extLst>
           </p:cNvPr>
@@ -19788,7 +19788,7 @@
             <a:hlinkClick r:id="rId4"/>
             <a:extLst>
               <a:ext uri="{FF2B5EF4-FFF2-40B4-BE49-F238E27FC236}">
-                <a16:creationId xmlns:a16="http://schemas.microsoft.com/office/drawing/2014/main" id="{7FBDD892-24F5-43EB-AA38-0510675ED0B3}"/>
+                <a16:creationId xmlns:a16="http://schemas.microsoft.com/office/drawing/2014/main" id="{3E1BE315-5CEA-4527-B28E-FD6FC72D4381}"/>
               </a:ext>
             </a:extLst>
           </p:cNvPr>
@@ -19862,7 +19862,7 @@
           <p:cNvPr id="3" name="Rectangle 2">
             <a:extLst>
               <a:ext uri="{FF2B5EF4-FFF2-40B4-BE49-F238E27FC236}">
-                <a16:creationId xmlns:a16="http://schemas.microsoft.com/office/drawing/2014/main" id="{780F8CFD-2F06-44DD-9C22-E84BAFB218BD}"/>
+                <a16:creationId xmlns:a16="http://schemas.microsoft.com/office/drawing/2014/main" id="{0F8FB860-1F1A-409A-9262-17EE1689C087}"/>
               </a:ext>
             </a:extLst>
           </p:cNvPr>
@@ -19924,7 +19924,7 @@
           <p:cNvPr id="4" name="Rectangle 3">
             <a:extLst>
               <a:ext uri="{FF2B5EF4-FFF2-40B4-BE49-F238E27FC236}">
-                <a16:creationId xmlns:a16="http://schemas.microsoft.com/office/drawing/2014/main" id="{C2EC8CB5-F669-478B-91A3-08A4945055E1}"/>
+                <a16:creationId xmlns:a16="http://schemas.microsoft.com/office/drawing/2014/main" id="{221222BE-1D91-44B8-A00B-2737970CE551}"/>
               </a:ext>
             </a:extLst>
           </p:cNvPr>
@@ -19986,7 +19986,7 @@
           <p:cNvPr id="5" name="Rectangle 4">
             <a:extLst>
               <a:ext uri="{FF2B5EF4-FFF2-40B4-BE49-F238E27FC236}">
-                <a16:creationId xmlns:a16="http://schemas.microsoft.com/office/drawing/2014/main" id="{86ABD44C-9896-4D1F-B3B2-C10ADCF5DD63}"/>
+                <a16:creationId xmlns:a16="http://schemas.microsoft.com/office/drawing/2014/main" id="{9457AE88-5384-4B72-B654-35C22949FD92}"/>
               </a:ext>
             </a:extLst>
           </p:cNvPr>
@@ -20048,7 +20048,7 @@
           <p:cNvPr id="6" name="Rectangle 5">
             <a:extLst>
               <a:ext uri="{FF2B5EF4-FFF2-40B4-BE49-F238E27FC236}">
-                <a16:creationId xmlns:a16="http://schemas.microsoft.com/office/drawing/2014/main" id="{F8EA96D6-F2CB-4474-9CDE-973F0155692F}"/>
+                <a16:creationId xmlns:a16="http://schemas.microsoft.com/office/drawing/2014/main" id="{DEE57779-DE26-4015-BB48-6673CEA75219}"/>
               </a:ext>
             </a:extLst>
           </p:cNvPr>
@@ -20110,7 +20110,7 @@
           <p:cNvPr id="7" name="Rectangle 6">
             <a:extLst>
               <a:ext uri="{FF2B5EF4-FFF2-40B4-BE49-F238E27FC236}">
-                <a16:creationId xmlns:a16="http://schemas.microsoft.com/office/drawing/2014/main" id="{E5CC0FC2-2196-4491-B539-1855A866730B}"/>
+                <a16:creationId xmlns:a16="http://schemas.microsoft.com/office/drawing/2014/main" id="{A9122501-C899-4F96-A392-AF7C5A794BCC}"/>
               </a:ext>
             </a:extLst>
           </p:cNvPr>
@@ -20172,7 +20172,7 @@
           <p:cNvPr id="8" name="Rectangle 7">
             <a:extLst>
               <a:ext uri="{FF2B5EF4-FFF2-40B4-BE49-F238E27FC236}">
-                <a16:creationId xmlns:a16="http://schemas.microsoft.com/office/drawing/2014/main" id="{B6BE00DF-6CFB-4DAD-A435-B83007F85058}"/>
+                <a16:creationId xmlns:a16="http://schemas.microsoft.com/office/drawing/2014/main" id="{90D3ECA1-004F-400E-A3C6-08651EBB3D14}"/>
               </a:ext>
             </a:extLst>
           </p:cNvPr>
@@ -20234,7 +20234,7 @@
           <p:cNvPr id="9" name="Rectangle 8">
             <a:extLst>
               <a:ext uri="{FF2B5EF4-FFF2-40B4-BE49-F238E27FC236}">
-                <a16:creationId xmlns:a16="http://schemas.microsoft.com/office/drawing/2014/main" id="{C5796ED8-57B1-4430-8B3E-FC8F51F807A6}"/>
+                <a16:creationId xmlns:a16="http://schemas.microsoft.com/office/drawing/2014/main" id="{4F84EAC1-A725-4FD1-885A-7C72860FD090}"/>
               </a:ext>
             </a:extLst>
           </p:cNvPr>
@@ -20265,7 +20265,7 @@
           <p:cNvPr id="10" name="Rectangle: Rounded Corners 9">
             <a:extLst>
               <a:ext uri="{FF2B5EF4-FFF2-40B4-BE49-F238E27FC236}">
-                <a16:creationId xmlns:a16="http://schemas.microsoft.com/office/drawing/2014/main" id="{5E0E63BB-BAD4-4B1B-992D-DC72366DBD78}"/>
+                <a16:creationId xmlns:a16="http://schemas.microsoft.com/office/drawing/2014/main" id="{9522FFE4-87C3-45F8-848C-5301C3F62F43}"/>
               </a:ext>
             </a:extLst>
           </p:cNvPr>
@@ -20298,7 +20298,7 @@
           <p:cNvPr id="11" name="Rectangle 10">
             <a:extLst>
               <a:ext uri="{FF2B5EF4-FFF2-40B4-BE49-F238E27FC236}">
-                <a16:creationId xmlns:a16="http://schemas.microsoft.com/office/drawing/2014/main" id="{EF7AA323-9D5E-49E7-802F-6D00C8643F4B}"/>
+                <a16:creationId xmlns:a16="http://schemas.microsoft.com/office/drawing/2014/main" id="{02035F54-7117-4DF2-8463-10F2C3897528}"/>
               </a:ext>
             </a:extLst>
           </p:cNvPr>
@@ -20360,7 +20360,7 @@
           <p:cNvPr id="12" name="Rectangle 11">
             <a:extLst>
               <a:ext uri="{FF2B5EF4-FFF2-40B4-BE49-F238E27FC236}">
-                <a16:creationId xmlns:a16="http://schemas.microsoft.com/office/drawing/2014/main" id="{3EF0704C-9048-416F-AFB7-FEDF9AB6BEFA}"/>
+                <a16:creationId xmlns:a16="http://schemas.microsoft.com/office/drawing/2014/main" id="{5FA4E21F-0423-4AFD-8E88-930797B4C7CD}"/>
               </a:ext>
             </a:extLst>
           </p:cNvPr>
@@ -20422,7 +20422,7 @@
           <p:cNvPr id="13" name="Rectangle 12">
             <a:extLst>
               <a:ext uri="{FF2B5EF4-FFF2-40B4-BE49-F238E27FC236}">
-                <a16:creationId xmlns:a16="http://schemas.microsoft.com/office/drawing/2014/main" id="{9C8B0BDF-36D8-4E1D-AE92-2E45C8068A4B}"/>
+                <a16:creationId xmlns:a16="http://schemas.microsoft.com/office/drawing/2014/main" id="{4ACDF3E7-8B7D-4DEE-B518-02F64DC9E77F}"/>
               </a:ext>
             </a:extLst>
           </p:cNvPr>
@@ -20484,7 +20484,7 @@
           <p:cNvPr id="14" name="Rectangle 13">
             <a:extLst>
               <a:ext uri="{FF2B5EF4-FFF2-40B4-BE49-F238E27FC236}">
-                <a16:creationId xmlns:a16="http://schemas.microsoft.com/office/drawing/2014/main" id="{0BC8F881-34EB-4D85-83CE-F90698C2F09E}"/>
+                <a16:creationId xmlns:a16="http://schemas.microsoft.com/office/drawing/2014/main" id="{AE8B60F0-2FEC-4267-A579-B5DF6A6F42F2}"/>
               </a:ext>
             </a:extLst>
           </p:cNvPr>
@@ -20546,7 +20546,7 @@
           <p:cNvPr id="15" name="Rectangle: Rounded Corners 14">
             <a:extLst>
               <a:ext uri="{FF2B5EF4-FFF2-40B4-BE49-F238E27FC236}">
-                <a16:creationId xmlns:a16="http://schemas.microsoft.com/office/drawing/2014/main" id="{D1B9034B-28FB-44D0-A609-60605049E265}"/>
+                <a16:creationId xmlns:a16="http://schemas.microsoft.com/office/drawing/2014/main" id="{BF34E236-3F71-4194-899F-2FA60D2E82E5}"/>
               </a:ext>
             </a:extLst>
           </p:cNvPr>
@@ -20579,7 +20579,7 @@
           <p:cNvPr id="16" name="Rectangle 15">
             <a:extLst>
               <a:ext uri="{FF2B5EF4-FFF2-40B4-BE49-F238E27FC236}">
-                <a16:creationId xmlns:a16="http://schemas.microsoft.com/office/drawing/2014/main" id="{6D3F42C6-4979-4F51-AC62-CF54B5F24EE7}"/>
+                <a16:creationId xmlns:a16="http://schemas.microsoft.com/office/drawing/2014/main" id="{CABC084A-9D94-4EDF-AA86-2F1E7C3AB32F}"/>
               </a:ext>
             </a:extLst>
           </p:cNvPr>
@@ -20641,7 +20641,7 @@
           <p:cNvPr id="17" name="Rectangle 16">
             <a:extLst>
               <a:ext uri="{FF2B5EF4-FFF2-40B4-BE49-F238E27FC236}">
-                <a16:creationId xmlns:a16="http://schemas.microsoft.com/office/drawing/2014/main" id="{4ECC5FB5-4DB3-48EA-96BF-B5443EF35C2B}"/>
+                <a16:creationId xmlns:a16="http://schemas.microsoft.com/office/drawing/2014/main" id="{7D25CBA9-420B-4ACE-8A82-976DF39A4F63}"/>
               </a:ext>
             </a:extLst>
           </p:cNvPr>
@@ -20703,7 +20703,7 @@
           <p:cNvPr id="18" name="Rectangle 17">
             <a:extLst>
               <a:ext uri="{FF2B5EF4-FFF2-40B4-BE49-F238E27FC236}">
-                <a16:creationId xmlns:a16="http://schemas.microsoft.com/office/drawing/2014/main" id="{3F8EFDD6-161A-4F48-9A05-75DE2608325B}"/>
+                <a16:creationId xmlns:a16="http://schemas.microsoft.com/office/drawing/2014/main" id="{BE508889-A620-426F-95CF-789D8844B888}"/>
               </a:ext>
             </a:extLst>
           </p:cNvPr>
@@ -20734,7 +20734,7 @@
           <p:cNvPr id="19" name="Rectangle 18">
             <a:extLst>
               <a:ext uri="{FF2B5EF4-FFF2-40B4-BE49-F238E27FC236}">
-                <a16:creationId xmlns:a16="http://schemas.microsoft.com/office/drawing/2014/main" id="{F9C85EF1-0FE6-405D-B298-1F1C9D2D801B}"/>
+                <a16:creationId xmlns:a16="http://schemas.microsoft.com/office/drawing/2014/main" id="{200EC274-8748-42BC-99F6-18342DA35FC7}"/>
               </a:ext>
             </a:extLst>
           </p:cNvPr>
@@ -20796,7 +20796,7 @@
           <p:cNvPr id="20" name="Rectangle 19">
             <a:extLst>
               <a:ext uri="{FF2B5EF4-FFF2-40B4-BE49-F238E27FC236}">
-                <a16:creationId xmlns:a16="http://schemas.microsoft.com/office/drawing/2014/main" id="{B679D7E7-DE4E-424A-9BDC-773B5AE9DF69}"/>
+                <a16:creationId xmlns:a16="http://schemas.microsoft.com/office/drawing/2014/main" id="{51DA89A6-697A-4FD9-A1CD-968EF7EDB3A1}"/>
               </a:ext>
             </a:extLst>
           </p:cNvPr>
@@ -20856,7 +20856,7 @@
     </p:spTree>
     <p:extLst>
       <p:ext uri="{BB962C8B-B14F-4D97-AF65-F5344CB8AC3E}">
-        <p14:creationId xmlns:p14="http://schemas.microsoft.com/office/powerpoint/2010/main" val="667866734"/>
+        <p14:creationId xmlns:p14="http://schemas.microsoft.com/office/powerpoint/2010/main" val="1463705238"/>
       </p:ext>
     </p:extLst>
   </p:cSld>
@@ -20897,7 +20897,7 @@
             <a:hlinkClick r:id="rId3"/>
             <a:extLst>
               <a:ext uri="{FF2B5EF4-FFF2-40B4-BE49-F238E27FC236}">
-                <a16:creationId xmlns:a16="http://schemas.microsoft.com/office/drawing/2014/main" id="{B97CD74E-4D6E-4635-A908-7BC239D8E4E5}"/>
+                <a16:creationId xmlns:a16="http://schemas.microsoft.com/office/drawing/2014/main" id="{26A4F713-7FDC-4B1F-A562-01762B62BA2A}"/>
               </a:ext>
             </a:extLst>
           </p:cNvPr>
@@ -20972,7 +20972,7 @@
             <a:hlinkClick r:id="rId4"/>
             <a:extLst>
               <a:ext uri="{FF2B5EF4-FFF2-40B4-BE49-F238E27FC236}">
-                <a16:creationId xmlns:a16="http://schemas.microsoft.com/office/drawing/2014/main" id="{02C874A2-CDFA-4C47-8CF9-7BBF30E4B48E}"/>
+                <a16:creationId xmlns:a16="http://schemas.microsoft.com/office/drawing/2014/main" id="{7B4B7A1A-E5CD-4AC9-8014-E11259E37EFF}"/>
               </a:ext>
             </a:extLst>
           </p:cNvPr>
@@ -21046,7 +21046,7 @@
           <p:cNvPr id="3" name="Rectangle 2">
             <a:extLst>
               <a:ext uri="{FF2B5EF4-FFF2-40B4-BE49-F238E27FC236}">
-                <a16:creationId xmlns:a16="http://schemas.microsoft.com/office/drawing/2014/main" id="{0C8A654F-540B-4755-A05A-6FD6203CBA58}"/>
+                <a16:creationId xmlns:a16="http://schemas.microsoft.com/office/drawing/2014/main" id="{A128A7CE-9F72-4913-BA66-AA0FA6D1E16E}"/>
               </a:ext>
             </a:extLst>
           </p:cNvPr>
@@ -21108,7 +21108,7 @@
           <p:cNvPr id="4" name="Rectangle 3">
             <a:extLst>
               <a:ext uri="{FF2B5EF4-FFF2-40B4-BE49-F238E27FC236}">
-                <a16:creationId xmlns:a16="http://schemas.microsoft.com/office/drawing/2014/main" id="{C6DCBCBA-65EA-4303-B450-159FE5C80606}"/>
+                <a16:creationId xmlns:a16="http://schemas.microsoft.com/office/drawing/2014/main" id="{B8012679-E98A-4252-AFB2-A31518E83D47}"/>
               </a:ext>
             </a:extLst>
           </p:cNvPr>
@@ -21170,7 +21170,7 @@
           <p:cNvPr id="5" name="Oval 4">
             <a:extLst>
               <a:ext uri="{FF2B5EF4-FFF2-40B4-BE49-F238E27FC236}">
-                <a16:creationId xmlns:a16="http://schemas.microsoft.com/office/drawing/2014/main" id="{FC56B8EE-F806-4D20-A5C3-D538289426B2}"/>
+                <a16:creationId xmlns:a16="http://schemas.microsoft.com/office/drawing/2014/main" id="{70C9D323-FDF2-46C1-B87A-60272FF159B7}"/>
               </a:ext>
             </a:extLst>
           </p:cNvPr>
@@ -21201,7 +21201,7 @@
           <p:cNvPr id="6" name="Rectangle 5">
             <a:extLst>
               <a:ext uri="{FF2B5EF4-FFF2-40B4-BE49-F238E27FC236}">
-                <a16:creationId xmlns:a16="http://schemas.microsoft.com/office/drawing/2014/main" id="{7FAAC9F6-F569-4CC2-94E8-3BC650ACB9F3}"/>
+                <a16:creationId xmlns:a16="http://schemas.microsoft.com/office/drawing/2014/main" id="{2786A7A8-B905-41BB-99D9-7C40DEDCB9F5}"/>
               </a:ext>
             </a:extLst>
           </p:cNvPr>
@@ -21263,7 +21263,7 @@
           <p:cNvPr id="7" name="Rectangle 6">
             <a:extLst>
               <a:ext uri="{FF2B5EF4-FFF2-40B4-BE49-F238E27FC236}">
-                <a16:creationId xmlns:a16="http://schemas.microsoft.com/office/drawing/2014/main" id="{CAC801A7-0916-4B11-BEE8-54607B4DFA09}"/>
+                <a16:creationId xmlns:a16="http://schemas.microsoft.com/office/drawing/2014/main" id="{2FF78C03-9D22-430A-B3D1-898717EDD442}"/>
               </a:ext>
             </a:extLst>
           </p:cNvPr>
@@ -21294,7 +21294,7 @@
           <p:cNvPr id="8" name="Rectangle 7">
             <a:extLst>
               <a:ext uri="{FF2B5EF4-FFF2-40B4-BE49-F238E27FC236}">
-                <a16:creationId xmlns:a16="http://schemas.microsoft.com/office/drawing/2014/main" id="{90B33CFB-5159-4D98-810C-12713ABD6503}"/>
+                <a16:creationId xmlns:a16="http://schemas.microsoft.com/office/drawing/2014/main" id="{618D65AD-A6B9-4F9E-B87E-00153E9A3EBF}"/>
               </a:ext>
             </a:extLst>
           </p:cNvPr>
@@ -21356,7 +21356,7 @@
           <p:cNvPr id="9" name="Oval 8">
             <a:extLst>
               <a:ext uri="{FF2B5EF4-FFF2-40B4-BE49-F238E27FC236}">
-                <a16:creationId xmlns:a16="http://schemas.microsoft.com/office/drawing/2014/main" id="{244248DB-0ECC-4134-814F-7796A2101580}"/>
+                <a16:creationId xmlns:a16="http://schemas.microsoft.com/office/drawing/2014/main" id="{034B9DB9-D51D-4DF8-AB34-0A1EE7389F05}"/>
               </a:ext>
             </a:extLst>
           </p:cNvPr>
@@ -21387,7 +21387,7 @@
           <p:cNvPr id="10" name="Rectangle 9">
             <a:extLst>
               <a:ext uri="{FF2B5EF4-FFF2-40B4-BE49-F238E27FC236}">
-                <a16:creationId xmlns:a16="http://schemas.microsoft.com/office/drawing/2014/main" id="{B6F8777B-AB3E-43CB-8FFE-86E19F6B002A}"/>
+                <a16:creationId xmlns:a16="http://schemas.microsoft.com/office/drawing/2014/main" id="{CAE1BA54-F3EA-45FB-A38D-1362B176BF3E}"/>
               </a:ext>
             </a:extLst>
           </p:cNvPr>
@@ -21449,7 +21449,7 @@
           <p:cNvPr id="11" name="Rectangle 10">
             <a:extLst>
               <a:ext uri="{FF2B5EF4-FFF2-40B4-BE49-F238E27FC236}">
-                <a16:creationId xmlns:a16="http://schemas.microsoft.com/office/drawing/2014/main" id="{38E235FC-0640-456C-B718-D1F347D44AE5}"/>
+                <a16:creationId xmlns:a16="http://schemas.microsoft.com/office/drawing/2014/main" id="{64FE429B-2DBB-40A1-BC5F-0F53BCE029F1}"/>
               </a:ext>
             </a:extLst>
           </p:cNvPr>
@@ -21480,7 +21480,7 @@
           <p:cNvPr id="12" name="Rectangle 11">
             <a:extLst>
               <a:ext uri="{FF2B5EF4-FFF2-40B4-BE49-F238E27FC236}">
-                <a16:creationId xmlns:a16="http://schemas.microsoft.com/office/drawing/2014/main" id="{DE8BFD15-6053-4F10-B656-33C4D64D448F}"/>
+                <a16:creationId xmlns:a16="http://schemas.microsoft.com/office/drawing/2014/main" id="{824A5323-74B7-466D-A798-FF0768047E0A}"/>
               </a:ext>
             </a:extLst>
           </p:cNvPr>
@@ -21542,7 +21542,7 @@
           <p:cNvPr id="13" name="Oval 12">
             <a:extLst>
               <a:ext uri="{FF2B5EF4-FFF2-40B4-BE49-F238E27FC236}">
-                <a16:creationId xmlns:a16="http://schemas.microsoft.com/office/drawing/2014/main" id="{436D2339-BD35-41FE-A46A-D3344B27EF03}"/>
+                <a16:creationId xmlns:a16="http://schemas.microsoft.com/office/drawing/2014/main" id="{6BCB7DC1-DAD7-41A7-8934-6039BCCDD704}"/>
               </a:ext>
             </a:extLst>
           </p:cNvPr>
@@ -21573,7 +21573,7 @@
           <p:cNvPr id="14" name="Rectangle 13">
             <a:extLst>
               <a:ext uri="{FF2B5EF4-FFF2-40B4-BE49-F238E27FC236}">
-                <a16:creationId xmlns:a16="http://schemas.microsoft.com/office/drawing/2014/main" id="{0D7B526E-1092-41AE-A556-C1F11677CC61}"/>
+                <a16:creationId xmlns:a16="http://schemas.microsoft.com/office/drawing/2014/main" id="{F4518D3E-F552-48EC-AA1C-4F79E4AB528B}"/>
               </a:ext>
             </a:extLst>
           </p:cNvPr>
@@ -21635,7 +21635,7 @@
           <p:cNvPr id="15" name="Rectangle 14">
             <a:extLst>
               <a:ext uri="{FF2B5EF4-FFF2-40B4-BE49-F238E27FC236}">
-                <a16:creationId xmlns:a16="http://schemas.microsoft.com/office/drawing/2014/main" id="{664C739A-CF04-44F4-B347-9D13B4377638}"/>
+                <a16:creationId xmlns:a16="http://schemas.microsoft.com/office/drawing/2014/main" id="{2F2A6891-BBE2-41D2-82D0-A921D27B00E5}"/>
               </a:ext>
             </a:extLst>
           </p:cNvPr>
@@ -21666,7 +21666,7 @@
           <p:cNvPr id="16" name="Rectangle 15">
             <a:extLst>
               <a:ext uri="{FF2B5EF4-FFF2-40B4-BE49-F238E27FC236}">
-                <a16:creationId xmlns:a16="http://schemas.microsoft.com/office/drawing/2014/main" id="{D9D5AFFB-242F-4EC6-9920-9E3F9076FD98}"/>
+                <a16:creationId xmlns:a16="http://schemas.microsoft.com/office/drawing/2014/main" id="{BBC05BC4-D6F6-43F4-A65E-70852258906C}"/>
               </a:ext>
             </a:extLst>
           </p:cNvPr>
@@ -21728,7 +21728,7 @@
           <p:cNvPr id="17" name="Oval 16">
             <a:extLst>
               <a:ext uri="{FF2B5EF4-FFF2-40B4-BE49-F238E27FC236}">
-                <a16:creationId xmlns:a16="http://schemas.microsoft.com/office/drawing/2014/main" id="{061BC7C5-2502-418B-80D4-A6BC26A5E23A}"/>
+                <a16:creationId xmlns:a16="http://schemas.microsoft.com/office/drawing/2014/main" id="{3D120761-346B-4D3E-8FD1-6DBA2D939BC9}"/>
               </a:ext>
             </a:extLst>
           </p:cNvPr>
@@ -21759,7 +21759,7 @@
           <p:cNvPr id="18" name="Rectangle 17">
             <a:extLst>
               <a:ext uri="{FF2B5EF4-FFF2-40B4-BE49-F238E27FC236}">
-                <a16:creationId xmlns:a16="http://schemas.microsoft.com/office/drawing/2014/main" id="{CE9BB751-E39A-4C7C-AC5E-642C81E0C5BC}"/>
+                <a16:creationId xmlns:a16="http://schemas.microsoft.com/office/drawing/2014/main" id="{193A59A7-8645-4033-B11F-574695032D9E}"/>
               </a:ext>
             </a:extLst>
           </p:cNvPr>
@@ -21821,7 +21821,7 @@
           <p:cNvPr id="19" name="Rectangle 18">
             <a:extLst>
               <a:ext uri="{FF2B5EF4-FFF2-40B4-BE49-F238E27FC236}">
-                <a16:creationId xmlns:a16="http://schemas.microsoft.com/office/drawing/2014/main" id="{55453443-EC22-4E2A-8A36-9D6CD17F11C3}"/>
+                <a16:creationId xmlns:a16="http://schemas.microsoft.com/office/drawing/2014/main" id="{0602C270-5681-484C-B40D-9380B51BC648}"/>
               </a:ext>
             </a:extLst>
           </p:cNvPr>
@@ -21852,7 +21852,7 @@
           <p:cNvPr id="20" name="Rectangle 19">
             <a:extLst>
               <a:ext uri="{FF2B5EF4-FFF2-40B4-BE49-F238E27FC236}">
-                <a16:creationId xmlns:a16="http://schemas.microsoft.com/office/drawing/2014/main" id="{468FA603-8243-4705-ADBB-05C1C9588FE0}"/>
+                <a16:creationId xmlns:a16="http://schemas.microsoft.com/office/drawing/2014/main" id="{07E2AFE1-716B-4C6D-9CBB-63E2CCA3B499}"/>
               </a:ext>
             </a:extLst>
           </p:cNvPr>
@@ -21914,7 +21914,7 @@
           <p:cNvPr id="21" name="Oval 20">
             <a:extLst>
               <a:ext uri="{FF2B5EF4-FFF2-40B4-BE49-F238E27FC236}">
-                <a16:creationId xmlns:a16="http://schemas.microsoft.com/office/drawing/2014/main" id="{5703EF95-3D0C-4B03-A944-C333FEF8664F}"/>
+                <a16:creationId xmlns:a16="http://schemas.microsoft.com/office/drawing/2014/main" id="{238957F6-93EF-46D1-B3B5-3CD30C1F1F88}"/>
               </a:ext>
             </a:extLst>
           </p:cNvPr>
@@ -21945,7 +21945,7 @@
           <p:cNvPr id="22" name="Rectangle 21">
             <a:extLst>
               <a:ext uri="{FF2B5EF4-FFF2-40B4-BE49-F238E27FC236}">
-                <a16:creationId xmlns:a16="http://schemas.microsoft.com/office/drawing/2014/main" id="{CB6625CF-E1D9-4CD4-972F-63CA2AD1FA65}"/>
+                <a16:creationId xmlns:a16="http://schemas.microsoft.com/office/drawing/2014/main" id="{9F999D54-8A82-4E8D-B098-C46E54D315C7}"/>
               </a:ext>
             </a:extLst>
           </p:cNvPr>
@@ -22007,7 +22007,7 @@
           <p:cNvPr id="23" name="Rectangle 22">
             <a:extLst>
               <a:ext uri="{FF2B5EF4-FFF2-40B4-BE49-F238E27FC236}">
-                <a16:creationId xmlns:a16="http://schemas.microsoft.com/office/drawing/2014/main" id="{D64A296A-BC1E-4AD3-B983-F970ACFF05ED}"/>
+                <a16:creationId xmlns:a16="http://schemas.microsoft.com/office/drawing/2014/main" id="{CE6A05E9-04A4-4B08-BE20-74064F009933}"/>
               </a:ext>
             </a:extLst>
           </p:cNvPr>
@@ -22038,7 +22038,7 @@
           <p:cNvPr id="24" name="Rectangle 23">
             <a:extLst>
               <a:ext uri="{FF2B5EF4-FFF2-40B4-BE49-F238E27FC236}">
-                <a16:creationId xmlns:a16="http://schemas.microsoft.com/office/drawing/2014/main" id="{0DE09B17-3A25-4423-9E36-E0DBB47EE783}"/>
+                <a16:creationId xmlns:a16="http://schemas.microsoft.com/office/drawing/2014/main" id="{7CA1FA99-B17D-480A-B7C6-59C4EB03DCE2}"/>
               </a:ext>
             </a:extLst>
           </p:cNvPr>
@@ -22100,7 +22100,7 @@
           <p:cNvPr id="25" name="Oval 24">
             <a:extLst>
               <a:ext uri="{FF2B5EF4-FFF2-40B4-BE49-F238E27FC236}">
-                <a16:creationId xmlns:a16="http://schemas.microsoft.com/office/drawing/2014/main" id="{756912DC-53AF-408D-A407-A34AF39E4BB5}"/>
+                <a16:creationId xmlns:a16="http://schemas.microsoft.com/office/drawing/2014/main" id="{56AE1A38-3CDA-4CD2-B49A-33080A450964}"/>
               </a:ext>
             </a:extLst>
           </p:cNvPr>
@@ -22131,7 +22131,7 @@
           <p:cNvPr id="26" name="Rectangle 25">
             <a:extLst>
               <a:ext uri="{FF2B5EF4-FFF2-40B4-BE49-F238E27FC236}">
-                <a16:creationId xmlns:a16="http://schemas.microsoft.com/office/drawing/2014/main" id="{D544979F-12A7-46FD-A491-8F418B081FA9}"/>
+                <a16:creationId xmlns:a16="http://schemas.microsoft.com/office/drawing/2014/main" id="{2DB86571-4344-4714-BCCD-9C7AA0BAE917}"/>
               </a:ext>
             </a:extLst>
           </p:cNvPr>
@@ -22193,7 +22193,7 @@
           <p:cNvPr id="27" name="Rectangle 26">
             <a:extLst>
               <a:ext uri="{FF2B5EF4-FFF2-40B4-BE49-F238E27FC236}">
-                <a16:creationId xmlns:a16="http://schemas.microsoft.com/office/drawing/2014/main" id="{7F557A24-D020-48DC-9DCF-11CA3E209F35}"/>
+                <a16:creationId xmlns:a16="http://schemas.microsoft.com/office/drawing/2014/main" id="{7FBC8D1E-3856-4302-B279-B6CED36FEBDB}"/>
               </a:ext>
             </a:extLst>
           </p:cNvPr>
@@ -22255,7 +22255,7 @@
           <p:cNvPr id="28" name="Rectangle 27">
             <a:extLst>
               <a:ext uri="{FF2B5EF4-FFF2-40B4-BE49-F238E27FC236}">
-                <a16:creationId xmlns:a16="http://schemas.microsoft.com/office/drawing/2014/main" id="{6940E1FC-35B2-4773-A235-BE51D9CBD8E3}"/>
+                <a16:creationId xmlns:a16="http://schemas.microsoft.com/office/drawing/2014/main" id="{1F1C4E06-9F76-428C-973B-A56941595218}"/>
               </a:ext>
             </a:extLst>
           </p:cNvPr>
@@ -22317,7 +22317,7 @@
           <p:cNvPr id="29" name="Rectangle 28">
             <a:extLst>
               <a:ext uri="{FF2B5EF4-FFF2-40B4-BE49-F238E27FC236}">
-                <a16:creationId xmlns:a16="http://schemas.microsoft.com/office/drawing/2014/main" id="{1CF547C5-A9DF-4C22-B1D1-A9A57DFE747C}"/>
+                <a16:creationId xmlns:a16="http://schemas.microsoft.com/office/drawing/2014/main" id="{15EB4823-A177-4537-A015-FF550C5AB876}"/>
               </a:ext>
             </a:extLst>
           </p:cNvPr>
@@ -22442,7 +22442,7 @@
           <p:cNvPr id="30" name="Rectangle 29">
             <a:extLst>
               <a:ext uri="{FF2B5EF4-FFF2-40B4-BE49-F238E27FC236}">
-                <a16:creationId xmlns:a16="http://schemas.microsoft.com/office/drawing/2014/main" id="{406A3EDE-381D-4BAE-A17A-E188700B1260}"/>
+                <a16:creationId xmlns:a16="http://schemas.microsoft.com/office/drawing/2014/main" id="{E7AC499A-A03D-4689-B52C-6FED25D66A22}"/>
               </a:ext>
             </a:extLst>
           </p:cNvPr>
@@ -22504,7 +22504,7 @@
           <p:cNvPr id="31" name="Rectangle 30">
             <a:extLst>
               <a:ext uri="{FF2B5EF4-FFF2-40B4-BE49-F238E27FC236}">
-                <a16:creationId xmlns:a16="http://schemas.microsoft.com/office/drawing/2014/main" id="{FC1D5DD0-C375-4F3B-AA4E-982F71F32B40}"/>
+                <a16:creationId xmlns:a16="http://schemas.microsoft.com/office/drawing/2014/main" id="{AC84199E-B2D6-430E-BF94-896C4A3FED3D}"/>
               </a:ext>
             </a:extLst>
           </p:cNvPr>
@@ -22629,7 +22629,7 @@
           <p:cNvPr id="32" name="Rectangle 31">
             <a:extLst>
               <a:ext uri="{FF2B5EF4-FFF2-40B4-BE49-F238E27FC236}">
-                <a16:creationId xmlns:a16="http://schemas.microsoft.com/office/drawing/2014/main" id="{C74409A9-2FE4-4597-B7E8-AA2F14544BC6}"/>
+                <a16:creationId xmlns:a16="http://schemas.microsoft.com/office/drawing/2014/main" id="{89708095-98D7-4B2E-B6A4-7121281D81FA}"/>
               </a:ext>
             </a:extLst>
           </p:cNvPr>
@@ -22691,7 +22691,7 @@
           <p:cNvPr id="33" name="Rectangle 32">
             <a:extLst>
               <a:ext uri="{FF2B5EF4-FFF2-40B4-BE49-F238E27FC236}">
-                <a16:creationId xmlns:a16="http://schemas.microsoft.com/office/drawing/2014/main" id="{069D666B-7BE9-4E6C-9268-6C7256A80BAC}"/>
+                <a16:creationId xmlns:a16="http://schemas.microsoft.com/office/drawing/2014/main" id="{AD3EBBF5-5D61-4461-A718-BF4D34CC5B51}"/>
               </a:ext>
             </a:extLst>
           </p:cNvPr>
@@ -22816,7 +22816,7 @@
           <p:cNvPr id="34" name="Rectangle 33">
             <a:extLst>
               <a:ext uri="{FF2B5EF4-FFF2-40B4-BE49-F238E27FC236}">
-                <a16:creationId xmlns:a16="http://schemas.microsoft.com/office/drawing/2014/main" id="{6838B663-268E-439C-9A73-4B3909D92377}"/>
+                <a16:creationId xmlns:a16="http://schemas.microsoft.com/office/drawing/2014/main" id="{FD36CA88-8F5E-4E42-81D7-8F41F9DE22D4}"/>
               </a:ext>
             </a:extLst>
           </p:cNvPr>
@@ -22847,7 +22847,7 @@
           <p:cNvPr id="35" name="Rectangle 34">
             <a:extLst>
               <a:ext uri="{FF2B5EF4-FFF2-40B4-BE49-F238E27FC236}">
-                <a16:creationId xmlns:a16="http://schemas.microsoft.com/office/drawing/2014/main" id="{7A02DECA-B37E-4712-8FF6-086F8510C694}"/>
+                <a16:creationId xmlns:a16="http://schemas.microsoft.com/office/drawing/2014/main" id="{64D2F9F4-18A9-4338-9D54-6F1F2B9913C5}"/>
               </a:ext>
             </a:extLst>
           </p:cNvPr>
@@ -22909,7 +22909,7 @@
           <p:cNvPr id="36" name="Rectangle 35">
             <a:extLst>
               <a:ext uri="{FF2B5EF4-FFF2-40B4-BE49-F238E27FC236}">
-                <a16:creationId xmlns:a16="http://schemas.microsoft.com/office/drawing/2014/main" id="{B0EB8381-D2CA-4F49-B221-3F7EE5BCA391}"/>
+                <a16:creationId xmlns:a16="http://schemas.microsoft.com/office/drawing/2014/main" id="{736E5E6F-14F5-48F5-B77F-7CE63C932BDE}"/>
               </a:ext>
             </a:extLst>
           </p:cNvPr>
@@ -22971,7 +22971,7 @@
           <p:cNvPr id="37" name="Rectangle 36">
             <a:extLst>
               <a:ext uri="{FF2B5EF4-FFF2-40B4-BE49-F238E27FC236}">
-                <a16:creationId xmlns:a16="http://schemas.microsoft.com/office/drawing/2014/main" id="{1F8E92A4-0495-48C3-901F-673B39919606}"/>
+                <a16:creationId xmlns:a16="http://schemas.microsoft.com/office/drawing/2014/main" id="{10564E0A-BAE3-4001-A21F-DB894F948AD1}"/>
               </a:ext>
             </a:extLst>
           </p:cNvPr>
@@ -23023,7 +23023,7 @@
                 <a:ea typeface="Arial"/>
                 <a:cs typeface="Arial"/>
               </a:rPr>
-              <a:t>TRISTIAN JAMES CABALAR · JOHN MICHAEL PALAGANAS · Carl Nueva · JOSEPH CLARENCE PARAYAOAN</a:t>
+              <a:t>Joaquin Sarmiento · Prince Marl Mirasol · Carl Nueva · JOSEPH CLARENCE PARAYAOAN</a:t>
             </a:r>
           </a:p>
         </p:txBody>
@@ -23033,7 +23033,7 @@
           <p:cNvPr id="38" name="Rectangle: Rounded Corners 37">
             <a:extLst>
               <a:ext uri="{FF2B5EF4-FFF2-40B4-BE49-F238E27FC236}">
-                <a16:creationId xmlns:a16="http://schemas.microsoft.com/office/drawing/2014/main" id="{38B2166F-FFEB-473D-BA52-B7E1DDD78B13}"/>
+                <a16:creationId xmlns:a16="http://schemas.microsoft.com/office/drawing/2014/main" id="{73B3B11A-329D-4B13-9BC2-DD81658CBAF3}"/>
               </a:ext>
             </a:extLst>
           </p:cNvPr>
@@ -23066,7 +23066,7 @@
           <p:cNvPr id="39" name="Rectangle 38">
             <a:extLst>
               <a:ext uri="{FF2B5EF4-FFF2-40B4-BE49-F238E27FC236}">
-                <a16:creationId xmlns:a16="http://schemas.microsoft.com/office/drawing/2014/main" id="{C1BF0D4F-99BB-4A3E-80F1-B70E11B42FDF}"/>
+                <a16:creationId xmlns:a16="http://schemas.microsoft.com/office/drawing/2014/main" id="{8D508BD4-B85A-40C1-9FD9-63389B9DA88C}"/>
               </a:ext>
             </a:extLst>
           </p:cNvPr>
@@ -23128,7 +23128,7 @@
           <p:cNvPr id="40" name="Rectangle 39">
             <a:extLst>
               <a:ext uri="{FF2B5EF4-FFF2-40B4-BE49-F238E27FC236}">
-                <a16:creationId xmlns:a16="http://schemas.microsoft.com/office/drawing/2014/main" id="{3951F5EA-A2A0-405A-8DD7-94A28E95350E}"/>
+                <a16:creationId xmlns:a16="http://schemas.microsoft.com/office/drawing/2014/main" id="{EFA2B7C0-5E8D-4DC8-818D-844F7B473332}"/>
               </a:ext>
             </a:extLst>
           </p:cNvPr>
@@ -23159,7 +23159,7 @@
           <p:cNvPr id="41" name="Rectangle 40">
             <a:extLst>
               <a:ext uri="{FF2B5EF4-FFF2-40B4-BE49-F238E27FC236}">
-                <a16:creationId xmlns:a16="http://schemas.microsoft.com/office/drawing/2014/main" id="{89670F34-A009-46C3-8662-DF366ABF806A}"/>
+                <a16:creationId xmlns:a16="http://schemas.microsoft.com/office/drawing/2014/main" id="{0A5F140F-3BD9-4511-8DEC-7D399513EA13}"/>
               </a:ext>
             </a:extLst>
           </p:cNvPr>
@@ -23221,7 +23221,7 @@
           <p:cNvPr id="42" name="Rectangle 41">
             <a:extLst>
               <a:ext uri="{FF2B5EF4-FFF2-40B4-BE49-F238E27FC236}">
-                <a16:creationId xmlns:a16="http://schemas.microsoft.com/office/drawing/2014/main" id="{F0E40ED3-370D-4D81-BCA3-17ACF83FC656}"/>
+                <a16:creationId xmlns:a16="http://schemas.microsoft.com/office/drawing/2014/main" id="{87525372-5F51-4C74-AAD9-67F05103FD37}"/>
               </a:ext>
             </a:extLst>
           </p:cNvPr>
@@ -23281,7 +23281,7 @@
     </p:spTree>
     <p:extLst>
       <p:ext uri="{BB962C8B-B14F-4D97-AF65-F5344CB8AC3E}">
-        <p14:creationId xmlns:p14="http://schemas.microsoft.com/office/powerpoint/2010/main" val="2147418992"/>
+        <p14:creationId xmlns:p14="http://schemas.microsoft.com/office/powerpoint/2010/main" val="651072470"/>
       </p:ext>
     </p:extLst>
   </p:cSld>
@@ -23322,7 +23322,7 @@
             <a:hlinkClick r:id="rId3"/>
             <a:extLst>
               <a:ext uri="{FF2B5EF4-FFF2-40B4-BE49-F238E27FC236}">
-                <a16:creationId xmlns:a16="http://schemas.microsoft.com/office/drawing/2014/main" id="{9E44C8AF-E56B-4F05-A963-BFC59CAB940C}"/>
+                <a16:creationId xmlns:a16="http://schemas.microsoft.com/office/drawing/2014/main" id="{A7EFC16A-D27B-4968-B4BE-089DE3BB295E}"/>
               </a:ext>
             </a:extLst>
           </p:cNvPr>
@@ -23397,7 +23397,7 @@
             <a:hlinkClick r:id="rId4"/>
             <a:extLst>
               <a:ext uri="{FF2B5EF4-FFF2-40B4-BE49-F238E27FC236}">
-                <a16:creationId xmlns:a16="http://schemas.microsoft.com/office/drawing/2014/main" id="{7BC75D12-CDB4-40D8-976E-2B2DC3BC0DF7}"/>
+                <a16:creationId xmlns:a16="http://schemas.microsoft.com/office/drawing/2014/main" id="{46B618E3-7042-4868-94D5-E4FA4ED04CE5}"/>
               </a:ext>
             </a:extLst>
           </p:cNvPr>
@@ -23471,7 +23471,7 @@
           <p:cNvPr id="3" name="Rectangle 2">
             <a:extLst>
               <a:ext uri="{FF2B5EF4-FFF2-40B4-BE49-F238E27FC236}">
-                <a16:creationId xmlns:a16="http://schemas.microsoft.com/office/drawing/2014/main" id="{B33DF19D-5E82-4376-BFA7-706128C27842}"/>
+                <a16:creationId xmlns:a16="http://schemas.microsoft.com/office/drawing/2014/main" id="{5C6A550F-3AE7-4E00-8188-0F9061547963}"/>
               </a:ext>
             </a:extLst>
           </p:cNvPr>
@@ -23533,7 +23533,7 @@
           <p:cNvPr id="4" name="Rectangle 3">
             <a:extLst>
               <a:ext uri="{FF2B5EF4-FFF2-40B4-BE49-F238E27FC236}">
-                <a16:creationId xmlns:a16="http://schemas.microsoft.com/office/drawing/2014/main" id="{945CC969-66CE-4049-9F93-B68EDD1F472F}"/>
+                <a16:creationId xmlns:a16="http://schemas.microsoft.com/office/drawing/2014/main" id="{D378FA88-6B5A-4C56-B79C-C7065F57288C}"/>
               </a:ext>
             </a:extLst>
           </p:cNvPr>
@@ -23595,7 +23595,7 @@
           <p:cNvPr id="5" name="Rectangle 4">
             <a:extLst>
               <a:ext uri="{FF2B5EF4-FFF2-40B4-BE49-F238E27FC236}">
-                <a16:creationId xmlns:a16="http://schemas.microsoft.com/office/drawing/2014/main" id="{3A03DD1F-FD59-4E31-993F-E69B239A54BE}"/>
+                <a16:creationId xmlns:a16="http://schemas.microsoft.com/office/drawing/2014/main" id="{53A8F567-5E77-411D-B07A-F39B06BBDAE3}"/>
               </a:ext>
             </a:extLst>
           </p:cNvPr>
@@ -23657,7 +23657,7 @@
           <p:cNvPr id="6" name="Rectangle 5">
             <a:extLst>
               <a:ext uri="{FF2B5EF4-FFF2-40B4-BE49-F238E27FC236}">
-                <a16:creationId xmlns:a16="http://schemas.microsoft.com/office/drawing/2014/main" id="{B0E82F31-25DF-412D-9FFE-29208658ECD0}"/>
+                <a16:creationId xmlns:a16="http://schemas.microsoft.com/office/drawing/2014/main" id="{2165483C-A8FD-4CCC-98AA-9D5E8690EE77}"/>
               </a:ext>
             </a:extLst>
           </p:cNvPr>
@@ -23719,7 +23719,7 @@
           <p:cNvPr id="7" name="Rectangle 6">
             <a:extLst>
               <a:ext uri="{FF2B5EF4-FFF2-40B4-BE49-F238E27FC236}">
-                <a16:creationId xmlns:a16="http://schemas.microsoft.com/office/drawing/2014/main" id="{7361F0FD-D34D-424F-A20B-D710CA0CD00D}"/>
+                <a16:creationId xmlns:a16="http://schemas.microsoft.com/office/drawing/2014/main" id="{0282B84E-9F4A-4856-89D8-7002ACF96F2B}"/>
               </a:ext>
             </a:extLst>
           </p:cNvPr>
@@ -23750,7 +23750,7 @@
           <p:cNvPr id="8" name="Rectangle 7">
             <a:extLst>
               <a:ext uri="{FF2B5EF4-FFF2-40B4-BE49-F238E27FC236}">
-                <a16:creationId xmlns:a16="http://schemas.microsoft.com/office/drawing/2014/main" id="{2BD9B519-9B9F-4417-85F1-8EB46E7730C0}"/>
+                <a16:creationId xmlns:a16="http://schemas.microsoft.com/office/drawing/2014/main" id="{B1ED8EAD-69DE-402E-BA43-1A74D96803A5}"/>
               </a:ext>
             </a:extLst>
           </p:cNvPr>
@@ -23812,7 +23812,7 @@
           <p:cNvPr id="9" name="Rectangle 8">
             <a:extLst>
               <a:ext uri="{FF2B5EF4-FFF2-40B4-BE49-F238E27FC236}">
-                <a16:creationId xmlns:a16="http://schemas.microsoft.com/office/drawing/2014/main" id="{DA968E06-19E8-499D-9C19-17A55B350685}"/>
+                <a16:creationId xmlns:a16="http://schemas.microsoft.com/office/drawing/2014/main" id="{F5D541E4-CBBC-4B2A-8534-5AF47D074E8C}"/>
               </a:ext>
             </a:extLst>
           </p:cNvPr>
@@ -23874,7 +23874,7 @@
           <p:cNvPr id="10" name="Rectangle 9">
             <a:extLst>
               <a:ext uri="{FF2B5EF4-FFF2-40B4-BE49-F238E27FC236}">
-                <a16:creationId xmlns:a16="http://schemas.microsoft.com/office/drawing/2014/main" id="{27383EE3-AEF9-4733-98F3-5D0D03912561}"/>
+                <a16:creationId xmlns:a16="http://schemas.microsoft.com/office/drawing/2014/main" id="{26652437-B2DE-4F7B-907C-E45E933F79D3}"/>
               </a:ext>
             </a:extLst>
           </p:cNvPr>
@@ -23905,7 +23905,7 @@
           <p:cNvPr id="11" name="Rectangle 10">
             <a:extLst>
               <a:ext uri="{FF2B5EF4-FFF2-40B4-BE49-F238E27FC236}">
-                <a16:creationId xmlns:a16="http://schemas.microsoft.com/office/drawing/2014/main" id="{B7CD3996-426A-48E9-A745-B2C6E66EE9DA}"/>
+                <a16:creationId xmlns:a16="http://schemas.microsoft.com/office/drawing/2014/main" id="{383E18C4-7F2F-4547-8A0B-3B52E3B91281}"/>
               </a:ext>
             </a:extLst>
           </p:cNvPr>
@@ -23967,7 +23967,7 @@
           <p:cNvPr id="12" name="Rectangle 11">
             <a:extLst>
               <a:ext uri="{FF2B5EF4-FFF2-40B4-BE49-F238E27FC236}">
-                <a16:creationId xmlns:a16="http://schemas.microsoft.com/office/drawing/2014/main" id="{ACE44F75-6746-42F7-91D1-D8E8792E3DA8}"/>
+                <a16:creationId xmlns:a16="http://schemas.microsoft.com/office/drawing/2014/main" id="{6CC01F70-F202-4928-9511-E1430227377A}"/>
               </a:ext>
             </a:extLst>
           </p:cNvPr>
@@ -24029,7 +24029,7 @@
           <p:cNvPr id="13" name="Rectangle 12">
             <a:extLst>
               <a:ext uri="{FF2B5EF4-FFF2-40B4-BE49-F238E27FC236}">
-                <a16:creationId xmlns:a16="http://schemas.microsoft.com/office/drawing/2014/main" id="{7F4DC3C7-E84E-4A0F-B464-86DA5DA9B407}"/>
+                <a16:creationId xmlns:a16="http://schemas.microsoft.com/office/drawing/2014/main" id="{0F17AE13-CA57-490C-AE45-4FF45E16D4D9}"/>
               </a:ext>
             </a:extLst>
           </p:cNvPr>
@@ -24060,7 +24060,7 @@
           <p:cNvPr id="14" name="Rectangle 13">
             <a:extLst>
               <a:ext uri="{FF2B5EF4-FFF2-40B4-BE49-F238E27FC236}">
-                <a16:creationId xmlns:a16="http://schemas.microsoft.com/office/drawing/2014/main" id="{C5478F33-D588-45FF-BAF6-24B0D263F97B}"/>
+                <a16:creationId xmlns:a16="http://schemas.microsoft.com/office/drawing/2014/main" id="{F5A5FFF8-8902-4127-8680-7702E34935F6}"/>
               </a:ext>
             </a:extLst>
           </p:cNvPr>
@@ -24122,7 +24122,7 @@
           <p:cNvPr id="15" name="Rectangle 14">
             <a:extLst>
               <a:ext uri="{FF2B5EF4-FFF2-40B4-BE49-F238E27FC236}">
-                <a16:creationId xmlns:a16="http://schemas.microsoft.com/office/drawing/2014/main" id="{D13FDA10-A183-466A-86B0-C46B901169A3}"/>
+                <a16:creationId xmlns:a16="http://schemas.microsoft.com/office/drawing/2014/main" id="{F42F6820-53D1-48C6-8656-8B34004829DE}"/>
               </a:ext>
             </a:extLst>
           </p:cNvPr>
@@ -24184,7 +24184,7 @@
           <p:cNvPr id="16" name="Rectangle 15">
             <a:extLst>
               <a:ext uri="{FF2B5EF4-FFF2-40B4-BE49-F238E27FC236}">
-                <a16:creationId xmlns:a16="http://schemas.microsoft.com/office/drawing/2014/main" id="{4C9EC27E-B912-4DB9-AA1F-63A310B408ED}"/>
+                <a16:creationId xmlns:a16="http://schemas.microsoft.com/office/drawing/2014/main" id="{AC06FB68-FA1C-4CED-A5AC-848C532107FC}"/>
               </a:ext>
             </a:extLst>
           </p:cNvPr>
@@ -24215,7 +24215,7 @@
           <p:cNvPr id="17" name="Rectangle 16">
             <a:extLst>
               <a:ext uri="{FF2B5EF4-FFF2-40B4-BE49-F238E27FC236}">
-                <a16:creationId xmlns:a16="http://schemas.microsoft.com/office/drawing/2014/main" id="{8263ACA3-A37D-42EE-A363-41A51EAAEF37}"/>
+                <a16:creationId xmlns:a16="http://schemas.microsoft.com/office/drawing/2014/main" id="{552136A1-429A-4C6C-9CFA-88C29EDFF365}"/>
               </a:ext>
             </a:extLst>
           </p:cNvPr>
@@ -24277,7 +24277,7 @@
           <p:cNvPr id="18" name="Rectangle 17">
             <a:extLst>
               <a:ext uri="{FF2B5EF4-FFF2-40B4-BE49-F238E27FC236}">
-                <a16:creationId xmlns:a16="http://schemas.microsoft.com/office/drawing/2014/main" id="{D40D239B-F6E2-45BA-82B1-C9C1C5C145EA}"/>
+                <a16:creationId xmlns:a16="http://schemas.microsoft.com/office/drawing/2014/main" id="{C92A39C4-17E7-43DA-9145-5D1E31877A43}"/>
               </a:ext>
             </a:extLst>
           </p:cNvPr>
@@ -24339,7 +24339,7 @@
           <p:cNvPr id="19" name="Rectangle 18">
             <a:extLst>
               <a:ext uri="{FF2B5EF4-FFF2-40B4-BE49-F238E27FC236}">
-                <a16:creationId xmlns:a16="http://schemas.microsoft.com/office/drawing/2014/main" id="{3AF1B6A2-D4EE-4E10-9990-D374A68F18CC}"/>
+                <a16:creationId xmlns:a16="http://schemas.microsoft.com/office/drawing/2014/main" id="{ECF66008-D03D-4358-8FC9-F6BC7EF212F5}"/>
               </a:ext>
             </a:extLst>
           </p:cNvPr>
@@ -24370,7 +24370,7 @@
           <p:cNvPr id="20" name="Rectangle 19">
             <a:extLst>
               <a:ext uri="{FF2B5EF4-FFF2-40B4-BE49-F238E27FC236}">
-                <a16:creationId xmlns:a16="http://schemas.microsoft.com/office/drawing/2014/main" id="{4397E13C-2CFF-452E-A5E5-78BE4DF2FFDE}"/>
+                <a16:creationId xmlns:a16="http://schemas.microsoft.com/office/drawing/2014/main" id="{B148EF8E-477F-43F6-A6A2-3394BD098316}"/>
               </a:ext>
             </a:extLst>
           </p:cNvPr>
@@ -24432,7 +24432,7 @@
           <p:cNvPr id="21" name="Rectangle 20">
             <a:extLst>
               <a:ext uri="{FF2B5EF4-FFF2-40B4-BE49-F238E27FC236}">
-                <a16:creationId xmlns:a16="http://schemas.microsoft.com/office/drawing/2014/main" id="{3C8D39A4-1528-4964-9A14-9C714F197B43}"/>
+                <a16:creationId xmlns:a16="http://schemas.microsoft.com/office/drawing/2014/main" id="{FFDCCDCF-20FD-4B37-8BA2-924D7DCD2887}"/>
               </a:ext>
             </a:extLst>
           </p:cNvPr>
@@ -24494,7 +24494,7 @@
           <p:cNvPr id="22" name="Rectangle 21">
             <a:extLst>
               <a:ext uri="{FF2B5EF4-FFF2-40B4-BE49-F238E27FC236}">
-                <a16:creationId xmlns:a16="http://schemas.microsoft.com/office/drawing/2014/main" id="{1C26A9A7-763C-4BD6-9DB8-EF3D63758415}"/>
+                <a16:creationId xmlns:a16="http://schemas.microsoft.com/office/drawing/2014/main" id="{7D95C2B0-BB1E-4F45-B1A4-8018FC2A5D20}"/>
               </a:ext>
             </a:extLst>
           </p:cNvPr>
@@ -24525,7 +24525,7 @@
           <p:cNvPr id="23" name="Rectangle: Rounded Corners 22">
             <a:extLst>
               <a:ext uri="{FF2B5EF4-FFF2-40B4-BE49-F238E27FC236}">
-                <a16:creationId xmlns:a16="http://schemas.microsoft.com/office/drawing/2014/main" id="{E9BF598D-8339-4DCE-BD26-EF1D6AD6AB4D}"/>
+                <a16:creationId xmlns:a16="http://schemas.microsoft.com/office/drawing/2014/main" id="{E920F44F-B3F3-47CC-9086-49F48ECAF37C}"/>
               </a:ext>
             </a:extLst>
           </p:cNvPr>
@@ -24558,7 +24558,7 @@
           <p:cNvPr id="24" name="Rectangle 23">
             <a:extLst>
               <a:ext uri="{FF2B5EF4-FFF2-40B4-BE49-F238E27FC236}">
-                <a16:creationId xmlns:a16="http://schemas.microsoft.com/office/drawing/2014/main" id="{5C1FE65D-BAF1-4FEC-85B8-BD8A18EBE493}"/>
+                <a16:creationId xmlns:a16="http://schemas.microsoft.com/office/drawing/2014/main" id="{F646F45F-9F1E-47D4-95EC-21B7D2E1A0DC}"/>
               </a:ext>
             </a:extLst>
           </p:cNvPr>
@@ -24620,7 +24620,7 @@
           <p:cNvPr id="25" name="Rectangle 24">
             <a:extLst>
               <a:ext uri="{FF2B5EF4-FFF2-40B4-BE49-F238E27FC236}">
-                <a16:creationId xmlns:a16="http://schemas.microsoft.com/office/drawing/2014/main" id="{FA07F5F3-3E05-4408-B493-09E6095F064F}"/>
+                <a16:creationId xmlns:a16="http://schemas.microsoft.com/office/drawing/2014/main" id="{22D0DBB9-A66C-4BCC-9A64-BFCB6218C5DE}"/>
               </a:ext>
             </a:extLst>
           </p:cNvPr>
@@ -24745,7 +24745,7 @@
           <p:cNvPr id="26" name="Rectangle 25">
             <a:extLst>
               <a:ext uri="{FF2B5EF4-FFF2-40B4-BE49-F238E27FC236}">
-                <a16:creationId xmlns:a16="http://schemas.microsoft.com/office/drawing/2014/main" id="{87E891BE-96DD-417D-A102-31912EBD5A19}"/>
+                <a16:creationId xmlns:a16="http://schemas.microsoft.com/office/drawing/2014/main" id="{3F676BA6-3CAE-4906-88EC-B279ECE5010A}"/>
               </a:ext>
             </a:extLst>
           </p:cNvPr>
@@ -24807,7 +24807,7 @@
           <p:cNvPr id="27" name="Rectangle 26">
             <a:extLst>
               <a:ext uri="{FF2B5EF4-FFF2-40B4-BE49-F238E27FC236}">
-                <a16:creationId xmlns:a16="http://schemas.microsoft.com/office/drawing/2014/main" id="{3AEB6D63-3BAF-4D5B-8F3C-D6B9B02E435C}"/>
+                <a16:creationId xmlns:a16="http://schemas.microsoft.com/office/drawing/2014/main" id="{ED383CDE-7E66-46A3-BAC9-89B1A293B5BB}"/>
               </a:ext>
             </a:extLst>
           </p:cNvPr>
@@ -24838,7 +24838,7 @@
           <p:cNvPr id="28" name="Rectangle 27">
             <a:extLst>
               <a:ext uri="{FF2B5EF4-FFF2-40B4-BE49-F238E27FC236}">
-                <a16:creationId xmlns:a16="http://schemas.microsoft.com/office/drawing/2014/main" id="{664BEE18-19FF-4102-B34C-4C560C0040B5}"/>
+                <a16:creationId xmlns:a16="http://schemas.microsoft.com/office/drawing/2014/main" id="{3FF66976-DAEE-4D08-80CC-3AA2EF4C9220}"/>
               </a:ext>
             </a:extLst>
           </p:cNvPr>
@@ -24900,7 +24900,7 @@
           <p:cNvPr id="29" name="Rectangle 28">
             <a:extLst>
               <a:ext uri="{FF2B5EF4-FFF2-40B4-BE49-F238E27FC236}">
-                <a16:creationId xmlns:a16="http://schemas.microsoft.com/office/drawing/2014/main" id="{EE3C92F7-52A7-487C-B58F-E994B4DE4B75}"/>
+                <a16:creationId xmlns:a16="http://schemas.microsoft.com/office/drawing/2014/main" id="{A0F9E39B-87F0-4853-8EDC-55C17627774A}"/>
               </a:ext>
             </a:extLst>
           </p:cNvPr>
@@ -24960,7 +24960,7 @@
     </p:spTree>
     <p:extLst>
       <p:ext uri="{BB962C8B-B14F-4D97-AF65-F5344CB8AC3E}">
-        <p14:creationId xmlns:p14="http://schemas.microsoft.com/office/powerpoint/2010/main" val="537517918"/>
+        <p14:creationId xmlns:p14="http://schemas.microsoft.com/office/powerpoint/2010/main" val="965045030"/>
       </p:ext>
     </p:extLst>
   </p:cSld>
@@ -25001,7 +25001,7 @@
             <a:hlinkClick r:id="rId3"/>
             <a:extLst>
               <a:ext uri="{FF2B5EF4-FFF2-40B4-BE49-F238E27FC236}">
-                <a16:creationId xmlns:a16="http://schemas.microsoft.com/office/drawing/2014/main" id="{39D80C4E-264A-43DA-A446-98AAB19988B5}"/>
+                <a16:creationId xmlns:a16="http://schemas.microsoft.com/office/drawing/2014/main" id="{23F8FA29-5DCF-4F25-8C66-42D9DEC27DB4}"/>
               </a:ext>
             </a:extLst>
           </p:cNvPr>
@@ -25076,7 +25076,7 @@
             <a:hlinkClick r:id="rId4"/>
             <a:extLst>
               <a:ext uri="{FF2B5EF4-FFF2-40B4-BE49-F238E27FC236}">
-                <a16:creationId xmlns:a16="http://schemas.microsoft.com/office/drawing/2014/main" id="{98165794-DF67-4090-863B-BED0F2523C06}"/>
+                <a16:creationId xmlns:a16="http://schemas.microsoft.com/office/drawing/2014/main" id="{2900F97A-EA1A-4677-B075-6654ECFFFDEE}"/>
               </a:ext>
             </a:extLst>
           </p:cNvPr>
@@ -25150,7 +25150,7 @@
           <p:cNvPr id="3" name="Rectangle 2">
             <a:extLst>
               <a:ext uri="{FF2B5EF4-FFF2-40B4-BE49-F238E27FC236}">
-                <a16:creationId xmlns:a16="http://schemas.microsoft.com/office/drawing/2014/main" id="{0622FC47-9A08-4AB5-92C5-054A8A1B3CEB}"/>
+                <a16:creationId xmlns:a16="http://schemas.microsoft.com/office/drawing/2014/main" id="{208B059B-8D8E-4572-A92E-838E13FE4EDA}"/>
               </a:ext>
             </a:extLst>
           </p:cNvPr>
@@ -25212,7 +25212,7 @@
           <p:cNvPr id="4" name="Rectangle 3">
             <a:extLst>
               <a:ext uri="{FF2B5EF4-FFF2-40B4-BE49-F238E27FC236}">
-                <a16:creationId xmlns:a16="http://schemas.microsoft.com/office/drawing/2014/main" id="{35BAB562-E618-4B34-9185-3C7763567608}"/>
+                <a16:creationId xmlns:a16="http://schemas.microsoft.com/office/drawing/2014/main" id="{E3834C64-EE77-4606-ABBE-618829591B8E}"/>
               </a:ext>
             </a:extLst>
           </p:cNvPr>
@@ -25274,7 +25274,7 @@
           <p:cNvPr id="5" name="Rectangle 4">
             <a:extLst>
               <a:ext uri="{FF2B5EF4-FFF2-40B4-BE49-F238E27FC236}">
-                <a16:creationId xmlns:a16="http://schemas.microsoft.com/office/drawing/2014/main" id="{3A3BFAA2-54AE-48C5-9E38-0F36709A1985}"/>
+                <a16:creationId xmlns:a16="http://schemas.microsoft.com/office/drawing/2014/main" id="{B4CF20B4-04DD-4DD1-885F-316C00F5123D}"/>
               </a:ext>
             </a:extLst>
           </p:cNvPr>
@@ -25336,7 +25336,7 @@
           <p:cNvPr id="6" name="Oval 5">
             <a:extLst>
               <a:ext uri="{FF2B5EF4-FFF2-40B4-BE49-F238E27FC236}">
-                <a16:creationId xmlns:a16="http://schemas.microsoft.com/office/drawing/2014/main" id="{D48506FB-E8CD-41B8-AB9C-1744E23896CE}"/>
+                <a16:creationId xmlns:a16="http://schemas.microsoft.com/office/drawing/2014/main" id="{A939A56F-C110-46F7-B916-48241113839D}"/>
               </a:ext>
             </a:extLst>
           </p:cNvPr>
@@ -25367,7 +25367,7 @@
           <p:cNvPr id="7" name="Rectangle 6">
             <a:extLst>
               <a:ext uri="{FF2B5EF4-FFF2-40B4-BE49-F238E27FC236}">
-                <a16:creationId xmlns:a16="http://schemas.microsoft.com/office/drawing/2014/main" id="{50D0E5F4-0A2B-4D8D-82E0-5ABF7BE23A57}"/>
+                <a16:creationId xmlns:a16="http://schemas.microsoft.com/office/drawing/2014/main" id="{C333E370-0F0D-408D-920F-081DD2BA93E2}"/>
               </a:ext>
             </a:extLst>
           </p:cNvPr>
@@ -25429,7 +25429,7 @@
           <p:cNvPr id="8" name="Oval 7">
             <a:extLst>
               <a:ext uri="{FF2B5EF4-FFF2-40B4-BE49-F238E27FC236}">
-                <a16:creationId xmlns:a16="http://schemas.microsoft.com/office/drawing/2014/main" id="{62D96880-8EDD-4258-9794-A169EA4DDDAA}"/>
+                <a16:creationId xmlns:a16="http://schemas.microsoft.com/office/drawing/2014/main" id="{CEFB5E78-AE73-48C2-B067-CFF501873126}"/>
               </a:ext>
             </a:extLst>
           </p:cNvPr>
@@ -25460,7 +25460,7 @@
           <p:cNvPr id="9" name="Rectangle 8">
             <a:extLst>
               <a:ext uri="{FF2B5EF4-FFF2-40B4-BE49-F238E27FC236}">
-                <a16:creationId xmlns:a16="http://schemas.microsoft.com/office/drawing/2014/main" id="{A4914AE9-259B-4190-883B-198CBC75E4F8}"/>
+                <a16:creationId xmlns:a16="http://schemas.microsoft.com/office/drawing/2014/main" id="{8A10A105-1513-429A-B50E-3D02C6D9EB5F}"/>
               </a:ext>
             </a:extLst>
           </p:cNvPr>
@@ -25522,7 +25522,7 @@
           <p:cNvPr id="10" name="Oval 9">
             <a:extLst>
               <a:ext uri="{FF2B5EF4-FFF2-40B4-BE49-F238E27FC236}">
-                <a16:creationId xmlns:a16="http://schemas.microsoft.com/office/drawing/2014/main" id="{06DC5757-35A2-46E4-94BF-D98D257BF035}"/>
+                <a16:creationId xmlns:a16="http://schemas.microsoft.com/office/drawing/2014/main" id="{55CE2668-EB7C-4DB0-A347-2E87225AB9C3}"/>
               </a:ext>
             </a:extLst>
           </p:cNvPr>
@@ -25553,7 +25553,7 @@
           <p:cNvPr id="11" name="Rectangle 10">
             <a:extLst>
               <a:ext uri="{FF2B5EF4-FFF2-40B4-BE49-F238E27FC236}">
-                <a16:creationId xmlns:a16="http://schemas.microsoft.com/office/drawing/2014/main" id="{3D8010A1-4FC0-4F4D-B90C-08678F58E170}"/>
+                <a16:creationId xmlns:a16="http://schemas.microsoft.com/office/drawing/2014/main" id="{FD7D0BA7-E216-4334-BBA1-1CE0DB607E9E}"/>
               </a:ext>
             </a:extLst>
           </p:cNvPr>
@@ -25615,7 +25615,7 @@
           <p:cNvPr id="12" name="Oval 11">
             <a:extLst>
               <a:ext uri="{FF2B5EF4-FFF2-40B4-BE49-F238E27FC236}">
-                <a16:creationId xmlns:a16="http://schemas.microsoft.com/office/drawing/2014/main" id="{477132E8-298B-4A08-B926-2F5CCB10F5A9}"/>
+                <a16:creationId xmlns:a16="http://schemas.microsoft.com/office/drawing/2014/main" id="{213429CC-EF2D-42D7-9BE5-FDAC4A6B3E07}"/>
               </a:ext>
             </a:extLst>
           </p:cNvPr>
@@ -25646,7 +25646,7 @@
           <p:cNvPr id="13" name="Rectangle 12">
             <a:extLst>
               <a:ext uri="{FF2B5EF4-FFF2-40B4-BE49-F238E27FC236}">
-                <a16:creationId xmlns:a16="http://schemas.microsoft.com/office/drawing/2014/main" id="{8B76E870-A7DE-4E11-817B-7F75FF990A23}"/>
+                <a16:creationId xmlns:a16="http://schemas.microsoft.com/office/drawing/2014/main" id="{220A74EA-A64C-4A67-AE8F-93359D4E060F}"/>
               </a:ext>
             </a:extLst>
           </p:cNvPr>
@@ -25708,7 +25708,7 @@
           <p:cNvPr id="14" name="Rectangle 13">
             <a:extLst>
               <a:ext uri="{FF2B5EF4-FFF2-40B4-BE49-F238E27FC236}">
-                <a16:creationId xmlns:a16="http://schemas.microsoft.com/office/drawing/2014/main" id="{54508202-DA95-47FC-AE27-8E8856EFB4F7}"/>
+                <a16:creationId xmlns:a16="http://schemas.microsoft.com/office/drawing/2014/main" id="{DB10875D-7AEF-4434-8FA2-6CA22F499547}"/>
               </a:ext>
             </a:extLst>
           </p:cNvPr>
@@ -25770,7 +25770,7 @@
           <p:cNvPr id="15" name="Rectangle 14">
             <a:extLst>
               <a:ext uri="{FF2B5EF4-FFF2-40B4-BE49-F238E27FC236}">
-                <a16:creationId xmlns:a16="http://schemas.microsoft.com/office/drawing/2014/main" id="{E2911DF3-BD6B-47DB-84CD-ED12EBA180E4}"/>
+                <a16:creationId xmlns:a16="http://schemas.microsoft.com/office/drawing/2014/main" id="{C4B8C469-E320-4108-9258-36BB1FDB3023}"/>
               </a:ext>
             </a:extLst>
           </p:cNvPr>
@@ -25832,7 +25832,7 @@
           <p:cNvPr id="16" name="Rectangle 15">
             <a:extLst>
               <a:ext uri="{FF2B5EF4-FFF2-40B4-BE49-F238E27FC236}">
-                <a16:creationId xmlns:a16="http://schemas.microsoft.com/office/drawing/2014/main" id="{F1DF5CE6-BD63-46EC-8E51-6C9266FB4E76}"/>
+                <a16:creationId xmlns:a16="http://schemas.microsoft.com/office/drawing/2014/main" id="{82DD2374-2674-494A-9617-51C6EDD198A9}"/>
               </a:ext>
             </a:extLst>
           </p:cNvPr>
@@ -25863,7 +25863,7 @@
           <p:cNvPr id="17" name="Rectangle 16">
             <a:extLst>
               <a:ext uri="{FF2B5EF4-FFF2-40B4-BE49-F238E27FC236}">
-                <a16:creationId xmlns:a16="http://schemas.microsoft.com/office/drawing/2014/main" id="{DC128ADF-A5D6-4D1C-8A5A-DF9872983D83}"/>
+                <a16:creationId xmlns:a16="http://schemas.microsoft.com/office/drawing/2014/main" id="{7814F908-382A-4CA4-8A95-A9BD53505B26}"/>
               </a:ext>
             </a:extLst>
           </p:cNvPr>
@@ -25925,7 +25925,7 @@
           <p:cNvPr id="18" name="Rectangle 17">
             <a:extLst>
               <a:ext uri="{FF2B5EF4-FFF2-40B4-BE49-F238E27FC236}">
-                <a16:creationId xmlns:a16="http://schemas.microsoft.com/office/drawing/2014/main" id="{28657DA3-9CC4-4E36-81B6-963E6339BD7B}"/>
+                <a16:creationId xmlns:a16="http://schemas.microsoft.com/office/drawing/2014/main" id="{5D23F643-834C-405D-802E-DFDFBAEA7B13}"/>
               </a:ext>
             </a:extLst>
           </p:cNvPr>
@@ -25985,7 +25985,7 @@
     </p:spTree>
     <p:extLst>
       <p:ext uri="{BB962C8B-B14F-4D97-AF65-F5344CB8AC3E}">
-        <p14:creationId xmlns:p14="http://schemas.microsoft.com/office/powerpoint/2010/main" val="768309587"/>
+        <p14:creationId xmlns:p14="http://schemas.microsoft.com/office/powerpoint/2010/main" val="2032291886"/>
       </p:ext>
     </p:extLst>
   </p:cSld>
@@ -26026,7 +26026,7 @@
             <a:hlinkClick r:id="rId3"/>
             <a:extLst>
               <a:ext uri="{FF2B5EF4-FFF2-40B4-BE49-F238E27FC236}">
-                <a16:creationId xmlns:a16="http://schemas.microsoft.com/office/drawing/2014/main" id="{01B475E8-3FE9-4540-AF34-4DD09241A67A}"/>
+                <a16:creationId xmlns:a16="http://schemas.microsoft.com/office/drawing/2014/main" id="{831F4356-109C-4859-8026-1E620E943A61}"/>
               </a:ext>
             </a:extLst>
           </p:cNvPr>
@@ -26101,7 +26101,7 @@
             <a:hlinkClick r:id="rId4"/>
             <a:extLst>
               <a:ext uri="{FF2B5EF4-FFF2-40B4-BE49-F238E27FC236}">
-                <a16:creationId xmlns:a16="http://schemas.microsoft.com/office/drawing/2014/main" id="{5E832D61-AB07-4E41-B8D6-B3FE5E9E1E72}"/>
+                <a16:creationId xmlns:a16="http://schemas.microsoft.com/office/drawing/2014/main" id="{86B011D5-289A-4C87-807F-291B6189D178}"/>
               </a:ext>
             </a:extLst>
           </p:cNvPr>
@@ -26175,7 +26175,7 @@
           <p:cNvPr id="3" name="Rectangle 2">
             <a:extLst>
               <a:ext uri="{FF2B5EF4-FFF2-40B4-BE49-F238E27FC236}">
-                <a16:creationId xmlns:a16="http://schemas.microsoft.com/office/drawing/2014/main" id="{E75876E8-2F10-411A-9025-D81DB028CFEA}"/>
+                <a16:creationId xmlns:a16="http://schemas.microsoft.com/office/drawing/2014/main" id="{18E749A0-71B1-4724-AAC9-509D077D049E}"/>
               </a:ext>
             </a:extLst>
           </p:cNvPr>
@@ -26237,7 +26237,7 @@
           <p:cNvPr id="4" name="Rectangle 3">
             <a:extLst>
               <a:ext uri="{FF2B5EF4-FFF2-40B4-BE49-F238E27FC236}">
-                <a16:creationId xmlns:a16="http://schemas.microsoft.com/office/drawing/2014/main" id="{70B182DE-F2AF-453C-8FA9-C6F565A2C39F}"/>
+                <a16:creationId xmlns:a16="http://schemas.microsoft.com/office/drawing/2014/main" id="{83391B41-A263-40A0-910D-FD722CE898B4}"/>
               </a:ext>
             </a:extLst>
           </p:cNvPr>
@@ -26299,7 +26299,7 @@
           <p:cNvPr id="5" name="Rectangle 4">
             <a:extLst>
               <a:ext uri="{FF2B5EF4-FFF2-40B4-BE49-F238E27FC236}">
-                <a16:creationId xmlns:a16="http://schemas.microsoft.com/office/drawing/2014/main" id="{D428805E-0C3D-44C5-B0C7-F333A5BF88B8}"/>
+                <a16:creationId xmlns:a16="http://schemas.microsoft.com/office/drawing/2014/main" id="{1C712519-B9F6-4969-A698-E27BF30E75F4}"/>
               </a:ext>
             </a:extLst>
           </p:cNvPr>
@@ -26361,7 +26361,7 @@
           <p:cNvPr id="6" name="Rectangle 5">
             <a:extLst>
               <a:ext uri="{FF2B5EF4-FFF2-40B4-BE49-F238E27FC236}">
-                <a16:creationId xmlns:a16="http://schemas.microsoft.com/office/drawing/2014/main" id="{A81F0CDC-AED6-45F9-9B80-E01E66B38F39}"/>
+                <a16:creationId xmlns:a16="http://schemas.microsoft.com/office/drawing/2014/main" id="{AF2AD6FF-9C0E-47C2-9AC0-26199DE53637}"/>
               </a:ext>
             </a:extLst>
           </p:cNvPr>
@@ -26392,7 +26392,7 @@
           <p:cNvPr id="7" name="Rectangle 6">
             <a:extLst>
               <a:ext uri="{FF2B5EF4-FFF2-40B4-BE49-F238E27FC236}">
-                <a16:creationId xmlns:a16="http://schemas.microsoft.com/office/drawing/2014/main" id="{06DB2D35-E1FE-43E5-88AE-CA769281E77E}"/>
+                <a16:creationId xmlns:a16="http://schemas.microsoft.com/office/drawing/2014/main" id="{26A1F517-85C0-4A6E-986B-B34C955C167E}"/>
               </a:ext>
             </a:extLst>
           </p:cNvPr>
@@ -26454,7 +26454,7 @@
           <p:cNvPr id="8" name="Rectangle 7">
             <a:extLst>
               <a:ext uri="{FF2B5EF4-FFF2-40B4-BE49-F238E27FC236}">
-                <a16:creationId xmlns:a16="http://schemas.microsoft.com/office/drawing/2014/main" id="{A160ACF3-E526-4C07-A373-ECE1567F17B8}"/>
+                <a16:creationId xmlns:a16="http://schemas.microsoft.com/office/drawing/2014/main" id="{6E17EC75-2DE9-444D-B282-7417860F8125}"/>
               </a:ext>
             </a:extLst>
           </p:cNvPr>
@@ -26516,7 +26516,7 @@
           <p:cNvPr id="9" name="Rectangle 8">
             <a:extLst>
               <a:ext uri="{FF2B5EF4-FFF2-40B4-BE49-F238E27FC236}">
-                <a16:creationId xmlns:a16="http://schemas.microsoft.com/office/drawing/2014/main" id="{0003CC10-E8A4-433F-9EF0-A247582FC0D6}"/>
+                <a16:creationId xmlns:a16="http://schemas.microsoft.com/office/drawing/2014/main" id="{E1BD21EC-3915-4DE3-B225-C7BDBEE33FD6}"/>
               </a:ext>
             </a:extLst>
           </p:cNvPr>
@@ -26578,7 +26578,7 @@
           <p:cNvPr id="10" name="Rectangle 9">
             <a:extLst>
               <a:ext uri="{FF2B5EF4-FFF2-40B4-BE49-F238E27FC236}">
-                <a16:creationId xmlns:a16="http://schemas.microsoft.com/office/drawing/2014/main" id="{AF22B20B-426E-4D31-B933-B4C3903E63C5}"/>
+                <a16:creationId xmlns:a16="http://schemas.microsoft.com/office/drawing/2014/main" id="{5C6B4889-2171-4A42-AB22-8BF691CA2997}"/>
               </a:ext>
             </a:extLst>
           </p:cNvPr>
@@ -26609,7 +26609,7 @@
           <p:cNvPr id="11" name="Rectangle 10">
             <a:extLst>
               <a:ext uri="{FF2B5EF4-FFF2-40B4-BE49-F238E27FC236}">
-                <a16:creationId xmlns:a16="http://schemas.microsoft.com/office/drawing/2014/main" id="{3D839637-47B1-470C-A4F3-88AA33A3F9E8}"/>
+                <a16:creationId xmlns:a16="http://schemas.microsoft.com/office/drawing/2014/main" id="{6496EC84-E6DD-4E5C-A077-FE7955CEED57}"/>
               </a:ext>
             </a:extLst>
           </p:cNvPr>
@@ -26671,7 +26671,7 @@
           <p:cNvPr id="12" name="Rectangle 11">
             <a:extLst>
               <a:ext uri="{FF2B5EF4-FFF2-40B4-BE49-F238E27FC236}">
-                <a16:creationId xmlns:a16="http://schemas.microsoft.com/office/drawing/2014/main" id="{C4A8656D-B722-459F-B57B-D0AD8E178A0E}"/>
+                <a16:creationId xmlns:a16="http://schemas.microsoft.com/office/drawing/2014/main" id="{46A0FC43-E0CF-48F9-BF02-1E52317AE35F}"/>
               </a:ext>
             </a:extLst>
           </p:cNvPr>
@@ -26733,7 +26733,7 @@
           <p:cNvPr id="13" name="Rectangle 12">
             <a:extLst>
               <a:ext uri="{FF2B5EF4-FFF2-40B4-BE49-F238E27FC236}">
-                <a16:creationId xmlns:a16="http://schemas.microsoft.com/office/drawing/2014/main" id="{754149CD-0DEA-4CE4-B70C-C989AD30D411}"/>
+                <a16:creationId xmlns:a16="http://schemas.microsoft.com/office/drawing/2014/main" id="{9B54F815-12AE-4B1D-A3E5-32E54E4BBB4E}"/>
               </a:ext>
             </a:extLst>
           </p:cNvPr>
@@ -26795,7 +26795,7 @@
           <p:cNvPr id="14" name="Rectangle 13">
             <a:extLst>
               <a:ext uri="{FF2B5EF4-FFF2-40B4-BE49-F238E27FC236}">
-                <a16:creationId xmlns:a16="http://schemas.microsoft.com/office/drawing/2014/main" id="{255CEE89-7B44-4A1A-A9B5-8ECB0EC11FCF}"/>
+                <a16:creationId xmlns:a16="http://schemas.microsoft.com/office/drawing/2014/main" id="{2187FE74-05D0-47DA-907A-002E2F6B3B0A}"/>
               </a:ext>
             </a:extLst>
           </p:cNvPr>
@@ -26826,7 +26826,7 @@
           <p:cNvPr id="15" name="Rectangle 14">
             <a:extLst>
               <a:ext uri="{FF2B5EF4-FFF2-40B4-BE49-F238E27FC236}">
-                <a16:creationId xmlns:a16="http://schemas.microsoft.com/office/drawing/2014/main" id="{91263176-B6F0-43F1-9E76-90129890A6D4}"/>
+                <a16:creationId xmlns:a16="http://schemas.microsoft.com/office/drawing/2014/main" id="{D6EAC255-2C2B-4D1E-8C0D-F459DA59D950}"/>
               </a:ext>
             </a:extLst>
           </p:cNvPr>
@@ -26888,7 +26888,7 @@
           <p:cNvPr id="16" name="Rectangle 15">
             <a:extLst>
               <a:ext uri="{FF2B5EF4-FFF2-40B4-BE49-F238E27FC236}">
-                <a16:creationId xmlns:a16="http://schemas.microsoft.com/office/drawing/2014/main" id="{8BD62777-3C8D-417A-9599-882A4D2F9B92}"/>
+                <a16:creationId xmlns:a16="http://schemas.microsoft.com/office/drawing/2014/main" id="{D3C341B8-5A65-46DD-A05F-22F5DBD122C3}"/>
               </a:ext>
             </a:extLst>
           </p:cNvPr>
@@ -26950,7 +26950,7 @@
           <p:cNvPr id="17" name="Rectangle 16">
             <a:extLst>
               <a:ext uri="{FF2B5EF4-FFF2-40B4-BE49-F238E27FC236}">
-                <a16:creationId xmlns:a16="http://schemas.microsoft.com/office/drawing/2014/main" id="{131AB723-1631-4D31-8F9E-18B8584AEDDC}"/>
+                <a16:creationId xmlns:a16="http://schemas.microsoft.com/office/drawing/2014/main" id="{D4356FE2-EE53-4FB5-B8F2-3D6A4B4539E4}"/>
               </a:ext>
             </a:extLst>
           </p:cNvPr>
@@ -27012,7 +27012,7 @@
           <p:cNvPr id="18" name="Rectangle 17">
             <a:extLst>
               <a:ext uri="{FF2B5EF4-FFF2-40B4-BE49-F238E27FC236}">
-                <a16:creationId xmlns:a16="http://schemas.microsoft.com/office/drawing/2014/main" id="{250BBAED-2401-4D91-83CD-C3690C87096A}"/>
+                <a16:creationId xmlns:a16="http://schemas.microsoft.com/office/drawing/2014/main" id="{D8C44DE6-6E7B-4B56-A7A2-A4C1D611491A}"/>
               </a:ext>
             </a:extLst>
           </p:cNvPr>
@@ -27043,7 +27043,7 @@
           <p:cNvPr id="19" name="Rectangle 18">
             <a:extLst>
               <a:ext uri="{FF2B5EF4-FFF2-40B4-BE49-F238E27FC236}">
-                <a16:creationId xmlns:a16="http://schemas.microsoft.com/office/drawing/2014/main" id="{F622ED34-B3D5-4BC4-BEAE-0C33C91AD5EE}"/>
+                <a16:creationId xmlns:a16="http://schemas.microsoft.com/office/drawing/2014/main" id="{259F68C1-208D-4A4C-B6F8-50689F6AD1F1}"/>
               </a:ext>
             </a:extLst>
           </p:cNvPr>
@@ -27105,7 +27105,7 @@
           <p:cNvPr id="20" name="Rectangle 19">
             <a:extLst>
               <a:ext uri="{FF2B5EF4-FFF2-40B4-BE49-F238E27FC236}">
-                <a16:creationId xmlns:a16="http://schemas.microsoft.com/office/drawing/2014/main" id="{1CBE21E5-86C6-4357-B5D8-27005B3FA903}"/>
+                <a16:creationId xmlns:a16="http://schemas.microsoft.com/office/drawing/2014/main" id="{41EC2E7F-9378-4224-B26C-7E2366E60EA1}"/>
               </a:ext>
             </a:extLst>
           </p:cNvPr>
@@ -27167,7 +27167,7 @@
           <p:cNvPr id="21" name="Rectangle 20">
             <a:extLst>
               <a:ext uri="{FF2B5EF4-FFF2-40B4-BE49-F238E27FC236}">
-                <a16:creationId xmlns:a16="http://schemas.microsoft.com/office/drawing/2014/main" id="{D59C7393-5997-425A-9784-53F254F6A96B}"/>
+                <a16:creationId xmlns:a16="http://schemas.microsoft.com/office/drawing/2014/main" id="{F705D8C7-F7B1-4E58-BF07-E0BBC62843A5}"/>
               </a:ext>
             </a:extLst>
           </p:cNvPr>
@@ -27229,7 +27229,7 @@
           <p:cNvPr id="22" name="Rectangle 21">
             <a:extLst>
               <a:ext uri="{FF2B5EF4-FFF2-40B4-BE49-F238E27FC236}">
-                <a16:creationId xmlns:a16="http://schemas.microsoft.com/office/drawing/2014/main" id="{1B43DAA9-9FC0-44CF-B4EC-5062AFC02D4F}"/>
+                <a16:creationId xmlns:a16="http://schemas.microsoft.com/office/drawing/2014/main" id="{38EF5898-D14C-4919-A51E-5CBFCBD0DCA3}"/>
               </a:ext>
             </a:extLst>
           </p:cNvPr>
@@ -27260,7 +27260,7 @@
           <p:cNvPr id="23" name="Rectangle 22">
             <a:extLst>
               <a:ext uri="{FF2B5EF4-FFF2-40B4-BE49-F238E27FC236}">
-                <a16:creationId xmlns:a16="http://schemas.microsoft.com/office/drawing/2014/main" id="{51638A48-B555-4CAE-BA6F-1CC994F88CDE}"/>
+                <a16:creationId xmlns:a16="http://schemas.microsoft.com/office/drawing/2014/main" id="{FE0F5CAC-A0A2-4D51-A968-D9BF9D550D6A}"/>
               </a:ext>
             </a:extLst>
           </p:cNvPr>
@@ -27322,7 +27322,7 @@
           <p:cNvPr id="24" name="Rectangle 23">
             <a:extLst>
               <a:ext uri="{FF2B5EF4-FFF2-40B4-BE49-F238E27FC236}">
-                <a16:creationId xmlns:a16="http://schemas.microsoft.com/office/drawing/2014/main" id="{78547042-E368-4D9E-A0E0-5B4B393D6D85}"/>
+                <a16:creationId xmlns:a16="http://schemas.microsoft.com/office/drawing/2014/main" id="{5F6D7A31-7949-4444-821F-C2EABFA91A44}"/>
               </a:ext>
             </a:extLst>
           </p:cNvPr>
@@ -27384,7 +27384,7 @@
           <p:cNvPr id="25" name="Rectangle 24">
             <a:extLst>
               <a:ext uri="{FF2B5EF4-FFF2-40B4-BE49-F238E27FC236}">
-                <a16:creationId xmlns:a16="http://schemas.microsoft.com/office/drawing/2014/main" id="{6E5D71E8-13D1-443B-A427-90C4A88FEBB3}"/>
+                <a16:creationId xmlns:a16="http://schemas.microsoft.com/office/drawing/2014/main" id="{60ED9004-6C7D-4711-8620-A7420904E777}"/>
               </a:ext>
             </a:extLst>
           </p:cNvPr>
@@ -27446,7 +27446,7 @@
           <p:cNvPr id="26" name="Rectangle 25">
             <a:extLst>
               <a:ext uri="{FF2B5EF4-FFF2-40B4-BE49-F238E27FC236}">
-                <a16:creationId xmlns:a16="http://schemas.microsoft.com/office/drawing/2014/main" id="{CB9CEA67-2639-46CC-B9DA-739FAFC47172}"/>
+                <a16:creationId xmlns:a16="http://schemas.microsoft.com/office/drawing/2014/main" id="{83D9830A-A6A2-4B0B-9BF5-63086023D3F8}"/>
               </a:ext>
             </a:extLst>
           </p:cNvPr>
@@ -27477,7 +27477,7 @@
           <p:cNvPr id="27" name="Rectangle 26">
             <a:extLst>
               <a:ext uri="{FF2B5EF4-FFF2-40B4-BE49-F238E27FC236}">
-                <a16:creationId xmlns:a16="http://schemas.microsoft.com/office/drawing/2014/main" id="{D046C393-A7DF-4CBA-84F3-F85E19414A4E}"/>
+                <a16:creationId xmlns:a16="http://schemas.microsoft.com/office/drawing/2014/main" id="{110ED88F-4A2D-4239-946D-83CF4B309E47}"/>
               </a:ext>
             </a:extLst>
           </p:cNvPr>
@@ -27539,7 +27539,7 @@
           <p:cNvPr id="28" name="Rectangle 27">
             <a:extLst>
               <a:ext uri="{FF2B5EF4-FFF2-40B4-BE49-F238E27FC236}">
-                <a16:creationId xmlns:a16="http://schemas.microsoft.com/office/drawing/2014/main" id="{9C6F2F0C-0E4B-411C-ABA7-9FBC8DC0E592}"/>
+                <a16:creationId xmlns:a16="http://schemas.microsoft.com/office/drawing/2014/main" id="{E89C31DA-9630-4732-8F9D-4B4E778CD50F}"/>
               </a:ext>
             </a:extLst>
           </p:cNvPr>
@@ -27601,7 +27601,7 @@
           <p:cNvPr id="29" name="Rectangle 28">
             <a:extLst>
               <a:ext uri="{FF2B5EF4-FFF2-40B4-BE49-F238E27FC236}">
-                <a16:creationId xmlns:a16="http://schemas.microsoft.com/office/drawing/2014/main" id="{0B18C54D-A2B7-49B1-AB50-88E454C8136F}"/>
+                <a16:creationId xmlns:a16="http://schemas.microsoft.com/office/drawing/2014/main" id="{EC6E7BAC-7865-49BF-BBA2-315475116A1A}"/>
               </a:ext>
             </a:extLst>
           </p:cNvPr>
@@ -27632,7 +27632,7 @@
           <p:cNvPr id="30" name="Rectangle 29">
             <a:extLst>
               <a:ext uri="{FF2B5EF4-FFF2-40B4-BE49-F238E27FC236}">
-                <a16:creationId xmlns:a16="http://schemas.microsoft.com/office/drawing/2014/main" id="{00693011-6AA0-46CA-B7B3-C663D055E529}"/>
+                <a16:creationId xmlns:a16="http://schemas.microsoft.com/office/drawing/2014/main" id="{5BE4E60E-1EC7-4A29-9D9C-0DB022072030}"/>
               </a:ext>
             </a:extLst>
           </p:cNvPr>
@@ -27694,7 +27694,7 @@
           <p:cNvPr id="31" name="Rectangle 30">
             <a:extLst>
               <a:ext uri="{FF2B5EF4-FFF2-40B4-BE49-F238E27FC236}">
-                <a16:creationId xmlns:a16="http://schemas.microsoft.com/office/drawing/2014/main" id="{7D7A6A7D-DECE-4D2B-96D2-57983CA6E257}"/>
+                <a16:creationId xmlns:a16="http://schemas.microsoft.com/office/drawing/2014/main" id="{667F0F49-44D8-495D-82E9-88D4709EB4A5}"/>
               </a:ext>
             </a:extLst>
           </p:cNvPr>
@@ -27756,7 +27756,7 @@
           <p:cNvPr id="32" name="Rectangle 31">
             <a:extLst>
               <a:ext uri="{FF2B5EF4-FFF2-40B4-BE49-F238E27FC236}">
-                <a16:creationId xmlns:a16="http://schemas.microsoft.com/office/drawing/2014/main" id="{01A2FB78-17EA-418F-A6FC-751720EF4357}"/>
+                <a16:creationId xmlns:a16="http://schemas.microsoft.com/office/drawing/2014/main" id="{C7345F4B-D373-4A15-82D0-6CD47E2C116A}"/>
               </a:ext>
             </a:extLst>
           </p:cNvPr>
@@ -27818,7 +27818,7 @@
           <p:cNvPr id="33" name="Rectangle 32">
             <a:extLst>
               <a:ext uri="{FF2B5EF4-FFF2-40B4-BE49-F238E27FC236}">
-                <a16:creationId xmlns:a16="http://schemas.microsoft.com/office/drawing/2014/main" id="{B664DD56-F193-4ACE-95AA-310CF62E90EF}"/>
+                <a16:creationId xmlns:a16="http://schemas.microsoft.com/office/drawing/2014/main" id="{6AFF1FED-15B2-47B1-805E-A562E80F2624}"/>
               </a:ext>
             </a:extLst>
           </p:cNvPr>
@@ -27880,7 +27880,7 @@
           <p:cNvPr id="34" name="Rectangle 33">
             <a:extLst>
               <a:ext uri="{FF2B5EF4-FFF2-40B4-BE49-F238E27FC236}">
-                <a16:creationId xmlns:a16="http://schemas.microsoft.com/office/drawing/2014/main" id="{08D5BC70-895C-4CC0-BDDD-ED0492CD775D}"/>
+                <a16:creationId xmlns:a16="http://schemas.microsoft.com/office/drawing/2014/main" id="{F437DFE9-0A6F-4DB0-8C9D-3B0A1724BE93}"/>
               </a:ext>
             </a:extLst>
           </p:cNvPr>
@@ -27911,7 +27911,7 @@
           <p:cNvPr id="35" name="Rectangle 34">
             <a:extLst>
               <a:ext uri="{FF2B5EF4-FFF2-40B4-BE49-F238E27FC236}">
-                <a16:creationId xmlns:a16="http://schemas.microsoft.com/office/drawing/2014/main" id="{F08DB455-D920-41E4-94B1-C6E5A79EB57F}"/>
+                <a16:creationId xmlns:a16="http://schemas.microsoft.com/office/drawing/2014/main" id="{452C4ED9-63AF-4A49-AC00-5918D39F0B17}"/>
               </a:ext>
             </a:extLst>
           </p:cNvPr>
@@ -27973,7 +27973,7 @@
           <p:cNvPr id="36" name="Rectangle 35">
             <a:extLst>
               <a:ext uri="{FF2B5EF4-FFF2-40B4-BE49-F238E27FC236}">
-                <a16:creationId xmlns:a16="http://schemas.microsoft.com/office/drawing/2014/main" id="{C5E854D1-06EF-4955-8D7C-A7CB0BBB3A8E}"/>
+                <a16:creationId xmlns:a16="http://schemas.microsoft.com/office/drawing/2014/main" id="{F5CD351F-9A85-4849-9B3F-C86533A234D8}"/>
               </a:ext>
             </a:extLst>
           </p:cNvPr>
@@ -28033,7 +28033,7 @@
     </p:spTree>
     <p:extLst>
       <p:ext uri="{BB962C8B-B14F-4D97-AF65-F5344CB8AC3E}">
-        <p14:creationId xmlns:p14="http://schemas.microsoft.com/office/powerpoint/2010/main" val="103780375"/>
+        <p14:creationId xmlns:p14="http://schemas.microsoft.com/office/powerpoint/2010/main" val="1014756345"/>
       </p:ext>
     </p:extLst>
   </p:cSld>
@@ -28074,7 +28074,7 @@
             <a:hlinkClick r:id="rId3"/>
             <a:extLst>
               <a:ext uri="{FF2B5EF4-FFF2-40B4-BE49-F238E27FC236}">
-                <a16:creationId xmlns:a16="http://schemas.microsoft.com/office/drawing/2014/main" id="{326222BC-EBDA-49EF-8452-E77EF2289FE3}"/>
+                <a16:creationId xmlns:a16="http://schemas.microsoft.com/office/drawing/2014/main" id="{958C3635-1AF3-408C-B29B-BBBEA9B50DE9}"/>
               </a:ext>
             </a:extLst>
           </p:cNvPr>
@@ -28149,7 +28149,7 @@
             <a:hlinkClick r:id="rId4"/>
             <a:extLst>
               <a:ext uri="{FF2B5EF4-FFF2-40B4-BE49-F238E27FC236}">
-                <a16:creationId xmlns:a16="http://schemas.microsoft.com/office/drawing/2014/main" id="{3DF56F45-22C3-43D3-B03C-0FA84BC41E42}"/>
+                <a16:creationId xmlns:a16="http://schemas.microsoft.com/office/drawing/2014/main" id="{84BDB20D-DBDA-4D13-9BA0-E0AC37203A9A}"/>
               </a:ext>
             </a:extLst>
           </p:cNvPr>
@@ -28223,7 +28223,7 @@
           <p:cNvPr id="3" name="Rectangle 2">
             <a:extLst>
               <a:ext uri="{FF2B5EF4-FFF2-40B4-BE49-F238E27FC236}">
-                <a16:creationId xmlns:a16="http://schemas.microsoft.com/office/drawing/2014/main" id="{30B56B15-8244-4BF1-BD07-C9FFFAA5C885}"/>
+                <a16:creationId xmlns:a16="http://schemas.microsoft.com/office/drawing/2014/main" id="{AACA4B0D-D04A-49D1-B3C1-C98518A66883}"/>
               </a:ext>
             </a:extLst>
           </p:cNvPr>
@@ -28285,7 +28285,7 @@
           <p:cNvPr id="4" name="Rectangle 3">
             <a:extLst>
               <a:ext uri="{FF2B5EF4-FFF2-40B4-BE49-F238E27FC236}">
-                <a16:creationId xmlns:a16="http://schemas.microsoft.com/office/drawing/2014/main" id="{000F117A-2E19-4A8A-9B45-52944D4D5684}"/>
+                <a16:creationId xmlns:a16="http://schemas.microsoft.com/office/drawing/2014/main" id="{0DDECB20-0228-4BEE-9363-4CE03DCC7B91}"/>
               </a:ext>
             </a:extLst>
           </p:cNvPr>
@@ -28347,7 +28347,7 @@
           <p:cNvPr id="5" name="Rectangle 4">
             <a:extLst>
               <a:ext uri="{FF2B5EF4-FFF2-40B4-BE49-F238E27FC236}">
-                <a16:creationId xmlns:a16="http://schemas.microsoft.com/office/drawing/2014/main" id="{784B2E2F-0EBF-4892-99CF-9D397AAFD32E}"/>
+                <a16:creationId xmlns:a16="http://schemas.microsoft.com/office/drawing/2014/main" id="{E4B51139-9E2A-447B-8243-60BB0EA3F414}"/>
               </a:ext>
             </a:extLst>
           </p:cNvPr>
@@ -28409,7 +28409,7 @@
           <p:cNvPr id="6" name="Rectangle 5">
             <a:extLst>
               <a:ext uri="{FF2B5EF4-FFF2-40B4-BE49-F238E27FC236}">
-                <a16:creationId xmlns:a16="http://schemas.microsoft.com/office/drawing/2014/main" id="{EE9614FF-19B8-476E-8A5D-7F8FFF5D1F2D}"/>
+                <a16:creationId xmlns:a16="http://schemas.microsoft.com/office/drawing/2014/main" id="{D21C98AF-D5FC-4C6B-B16F-1983605CB579}"/>
               </a:ext>
             </a:extLst>
           </p:cNvPr>
@@ -28440,7 +28440,7 @@
           <p:cNvPr id="7" name="Rectangle 6">
             <a:extLst>
               <a:ext uri="{FF2B5EF4-FFF2-40B4-BE49-F238E27FC236}">
-                <a16:creationId xmlns:a16="http://schemas.microsoft.com/office/drawing/2014/main" id="{BEA5144D-5C10-4890-8B0D-41ADD5EFAEF0}"/>
+                <a16:creationId xmlns:a16="http://schemas.microsoft.com/office/drawing/2014/main" id="{5A30ED82-A090-4612-9B96-AE3133C60247}"/>
               </a:ext>
             </a:extLst>
           </p:cNvPr>
@@ -28565,7 +28565,7 @@
           <p:cNvPr id="8" name="Rectangle 7">
             <a:extLst>
               <a:ext uri="{FF2B5EF4-FFF2-40B4-BE49-F238E27FC236}">
-                <a16:creationId xmlns:a16="http://schemas.microsoft.com/office/drawing/2014/main" id="{03C5873B-82A9-41A0-970A-12D7AC9CAD63}"/>
+                <a16:creationId xmlns:a16="http://schemas.microsoft.com/office/drawing/2014/main" id="{9682F5CD-6BE0-483A-BF06-7268E43B544C}"/>
               </a:ext>
             </a:extLst>
           </p:cNvPr>
@@ -28627,7 +28627,7 @@
           <p:cNvPr id="9" name="Rectangle 8">
             <a:extLst>
               <a:ext uri="{FF2B5EF4-FFF2-40B4-BE49-F238E27FC236}">
-                <a16:creationId xmlns:a16="http://schemas.microsoft.com/office/drawing/2014/main" id="{8E52BED6-4BBE-4F79-8190-CCEF6192320C}"/>
+                <a16:creationId xmlns:a16="http://schemas.microsoft.com/office/drawing/2014/main" id="{03F41AFD-0203-49DB-95A4-789C1E29D62D}"/>
               </a:ext>
             </a:extLst>
           </p:cNvPr>
@@ -28658,7 +28658,7 @@
           <p:cNvPr id="10" name="Rectangle 9">
             <a:extLst>
               <a:ext uri="{FF2B5EF4-FFF2-40B4-BE49-F238E27FC236}">
-                <a16:creationId xmlns:a16="http://schemas.microsoft.com/office/drawing/2014/main" id="{E912A890-DA26-4DDE-9A64-F8F6ECDF1AA0}"/>
+                <a16:creationId xmlns:a16="http://schemas.microsoft.com/office/drawing/2014/main" id="{66F5B083-6E6B-4D7C-BBAA-17D4701559F2}"/>
               </a:ext>
             </a:extLst>
           </p:cNvPr>
@@ -28783,7 +28783,7 @@
           <p:cNvPr id="11" name="Rectangle 10">
             <a:extLst>
               <a:ext uri="{FF2B5EF4-FFF2-40B4-BE49-F238E27FC236}">
-                <a16:creationId xmlns:a16="http://schemas.microsoft.com/office/drawing/2014/main" id="{917AC5F9-ECE0-4C77-AA4D-720D3FB8826E}"/>
+                <a16:creationId xmlns:a16="http://schemas.microsoft.com/office/drawing/2014/main" id="{B8B9B925-E605-4802-A0AE-99B850A316C0}"/>
               </a:ext>
             </a:extLst>
           </p:cNvPr>
@@ -28845,7 +28845,7 @@
           <p:cNvPr id="12" name="Rectangle 11">
             <a:extLst>
               <a:ext uri="{FF2B5EF4-FFF2-40B4-BE49-F238E27FC236}">
-                <a16:creationId xmlns:a16="http://schemas.microsoft.com/office/drawing/2014/main" id="{070A9C1D-2A50-4D9E-ADE9-97AEAA01647E}"/>
+                <a16:creationId xmlns:a16="http://schemas.microsoft.com/office/drawing/2014/main" id="{30E5E13E-5728-4FBA-A5CD-02552EB0C8F8}"/>
               </a:ext>
             </a:extLst>
           </p:cNvPr>
@@ -28876,7 +28876,7 @@
           <p:cNvPr id="13" name="Rectangle 12">
             <a:extLst>
               <a:ext uri="{FF2B5EF4-FFF2-40B4-BE49-F238E27FC236}">
-                <a16:creationId xmlns:a16="http://schemas.microsoft.com/office/drawing/2014/main" id="{E9B2AE7C-1B14-43F5-AC9B-C1DCC9CBBD88}"/>
+                <a16:creationId xmlns:a16="http://schemas.microsoft.com/office/drawing/2014/main" id="{91632B2C-1389-4C8D-A944-870147D7CA34}"/>
               </a:ext>
             </a:extLst>
           </p:cNvPr>
@@ -29001,7 +29001,7 @@
           <p:cNvPr id="14" name="Rectangle: Rounded Corners 13">
             <a:extLst>
               <a:ext uri="{FF2B5EF4-FFF2-40B4-BE49-F238E27FC236}">
-                <a16:creationId xmlns:a16="http://schemas.microsoft.com/office/drawing/2014/main" id="{F7410706-31D8-4D07-9053-67F2F0073DD5}"/>
+                <a16:creationId xmlns:a16="http://schemas.microsoft.com/office/drawing/2014/main" id="{53E478E3-559A-4307-BE00-D6F6DAD79D01}"/>
               </a:ext>
             </a:extLst>
           </p:cNvPr>
@@ -29034,7 +29034,7 @@
           <p:cNvPr id="15" name="Rectangle 14">
             <a:extLst>
               <a:ext uri="{FF2B5EF4-FFF2-40B4-BE49-F238E27FC236}">
-                <a16:creationId xmlns:a16="http://schemas.microsoft.com/office/drawing/2014/main" id="{2D88A121-5708-4EDB-90FF-25C9248AAD87}"/>
+                <a16:creationId xmlns:a16="http://schemas.microsoft.com/office/drawing/2014/main" id="{65C621AC-6880-43F3-946E-0F2B78D8C4F9}"/>
               </a:ext>
             </a:extLst>
           </p:cNvPr>
@@ -29096,7 +29096,7 @@
           <p:cNvPr id="16" name="Rectangle 15">
             <a:extLst>
               <a:ext uri="{FF2B5EF4-FFF2-40B4-BE49-F238E27FC236}">
-                <a16:creationId xmlns:a16="http://schemas.microsoft.com/office/drawing/2014/main" id="{C100248E-C758-48E4-9821-3039339790F5}"/>
+                <a16:creationId xmlns:a16="http://schemas.microsoft.com/office/drawing/2014/main" id="{5A550456-1AB9-4AE2-80AC-A7E77C660CA4}"/>
               </a:ext>
             </a:extLst>
           </p:cNvPr>
@@ -29158,7 +29158,7 @@
           <p:cNvPr id="17" name="Rectangle 16">
             <a:extLst>
               <a:ext uri="{FF2B5EF4-FFF2-40B4-BE49-F238E27FC236}">
-                <a16:creationId xmlns:a16="http://schemas.microsoft.com/office/drawing/2014/main" id="{E77A1DA1-9683-4F9B-8C71-905141F1F342}"/>
+                <a16:creationId xmlns:a16="http://schemas.microsoft.com/office/drawing/2014/main" id="{7F0EAD70-702F-4892-8E7E-511F7898F7E0}"/>
               </a:ext>
             </a:extLst>
           </p:cNvPr>
@@ -29189,7 +29189,7 @@
           <p:cNvPr id="18" name="Rectangle 17">
             <a:extLst>
               <a:ext uri="{FF2B5EF4-FFF2-40B4-BE49-F238E27FC236}">
-                <a16:creationId xmlns:a16="http://schemas.microsoft.com/office/drawing/2014/main" id="{FC3A92F1-B054-4E2D-90AB-1E0B588FC600}"/>
+                <a16:creationId xmlns:a16="http://schemas.microsoft.com/office/drawing/2014/main" id="{FF692724-3CF1-4C41-B9CA-A431BCC2CAD1}"/>
               </a:ext>
             </a:extLst>
           </p:cNvPr>
@@ -29251,7 +29251,7 @@
           <p:cNvPr id="19" name="Rectangle 18">
             <a:extLst>
               <a:ext uri="{FF2B5EF4-FFF2-40B4-BE49-F238E27FC236}">
-                <a16:creationId xmlns:a16="http://schemas.microsoft.com/office/drawing/2014/main" id="{53050D84-4A25-404C-8B3E-F9210B777285}"/>
+                <a16:creationId xmlns:a16="http://schemas.microsoft.com/office/drawing/2014/main" id="{F2DB4FE8-9BFF-4FF8-924B-79E69AE8561E}"/>
               </a:ext>
             </a:extLst>
           </p:cNvPr>
@@ -29311,7 +29311,7 @@
     </p:spTree>
     <p:extLst>
       <p:ext uri="{BB962C8B-B14F-4D97-AF65-F5344CB8AC3E}">
-        <p14:creationId xmlns:p14="http://schemas.microsoft.com/office/powerpoint/2010/main" val="1211285959"/>
+        <p14:creationId xmlns:p14="http://schemas.microsoft.com/office/powerpoint/2010/main" val="1382602797"/>
       </p:ext>
     </p:extLst>
   </p:cSld>
@@ -29352,7 +29352,7 @@
             <a:hlinkClick r:id="rId3"/>
             <a:extLst>
               <a:ext uri="{FF2B5EF4-FFF2-40B4-BE49-F238E27FC236}">
-                <a16:creationId xmlns:a16="http://schemas.microsoft.com/office/drawing/2014/main" id="{202AD5E5-462E-4B6F-9758-6F475305F6A4}"/>
+                <a16:creationId xmlns:a16="http://schemas.microsoft.com/office/drawing/2014/main" id="{09B91755-22C7-4BF0-8256-C251C48852AC}"/>
               </a:ext>
             </a:extLst>
           </p:cNvPr>
@@ -29427,7 +29427,7 @@
             <a:hlinkClick r:id="rId4"/>
             <a:extLst>
               <a:ext uri="{FF2B5EF4-FFF2-40B4-BE49-F238E27FC236}">
-                <a16:creationId xmlns:a16="http://schemas.microsoft.com/office/drawing/2014/main" id="{5501DFFC-09CD-421F-B73E-43A687555992}"/>
+                <a16:creationId xmlns:a16="http://schemas.microsoft.com/office/drawing/2014/main" id="{543CC279-B930-4D81-ABB3-B766095C74E7}"/>
               </a:ext>
             </a:extLst>
           </p:cNvPr>
@@ -29501,7 +29501,7 @@
           <p:cNvPr id="3" name="Rectangle 2">
             <a:extLst>
               <a:ext uri="{FF2B5EF4-FFF2-40B4-BE49-F238E27FC236}">
-                <a16:creationId xmlns:a16="http://schemas.microsoft.com/office/drawing/2014/main" id="{AF69CF0B-F1BE-40EF-AA54-FCAAF29BB25D}"/>
+                <a16:creationId xmlns:a16="http://schemas.microsoft.com/office/drawing/2014/main" id="{13D00D0B-5398-484A-9E02-DFA2FCCD47AC}"/>
               </a:ext>
             </a:extLst>
           </p:cNvPr>
@@ -29563,7 +29563,7 @@
           <p:cNvPr id="4" name="Rectangle 3">
             <a:extLst>
               <a:ext uri="{FF2B5EF4-FFF2-40B4-BE49-F238E27FC236}">
-                <a16:creationId xmlns:a16="http://schemas.microsoft.com/office/drawing/2014/main" id="{A055806A-4DBC-4736-9524-1CC5BA3FDCEE}"/>
+                <a16:creationId xmlns:a16="http://schemas.microsoft.com/office/drawing/2014/main" id="{D280EC43-AD3D-4316-A2E1-44D4C396E0C2}"/>
               </a:ext>
             </a:extLst>
           </p:cNvPr>
@@ -29625,7 +29625,7 @@
           <p:cNvPr id="5" name="Rectangle 4">
             <a:extLst>
               <a:ext uri="{FF2B5EF4-FFF2-40B4-BE49-F238E27FC236}">
-                <a16:creationId xmlns:a16="http://schemas.microsoft.com/office/drawing/2014/main" id="{5CA37510-9909-457E-99E4-8C57B282343D}"/>
+                <a16:creationId xmlns:a16="http://schemas.microsoft.com/office/drawing/2014/main" id="{7E7250E0-53AA-48EA-8BAE-401F7530F78F}"/>
               </a:ext>
             </a:extLst>
           </p:cNvPr>
@@ -29687,7 +29687,7 @@
           <p:cNvPr id="6" name="Oval 5">
             <a:extLst>
               <a:ext uri="{FF2B5EF4-FFF2-40B4-BE49-F238E27FC236}">
-                <a16:creationId xmlns:a16="http://schemas.microsoft.com/office/drawing/2014/main" id="{16F2413E-7AB4-41A4-9A78-50B970B64D94}"/>
+                <a16:creationId xmlns:a16="http://schemas.microsoft.com/office/drawing/2014/main" id="{BD793C2C-0A76-4C81-8EB9-9B96FACEA701}"/>
               </a:ext>
             </a:extLst>
           </p:cNvPr>
@@ -29718,7 +29718,7 @@
           <p:cNvPr id="7" name="Rectangle 6">
             <a:extLst>
               <a:ext uri="{FF2B5EF4-FFF2-40B4-BE49-F238E27FC236}">
-                <a16:creationId xmlns:a16="http://schemas.microsoft.com/office/drawing/2014/main" id="{F8F90865-F57A-4DE3-9F49-836D03C2B70C}"/>
+                <a16:creationId xmlns:a16="http://schemas.microsoft.com/office/drawing/2014/main" id="{D3B962B1-FD2D-45B2-B45D-107C14D1E350}"/>
               </a:ext>
             </a:extLst>
           </p:cNvPr>
@@ -29780,7 +29780,7 @@
           <p:cNvPr id="8" name="Oval 7">
             <a:extLst>
               <a:ext uri="{FF2B5EF4-FFF2-40B4-BE49-F238E27FC236}">
-                <a16:creationId xmlns:a16="http://schemas.microsoft.com/office/drawing/2014/main" id="{F14AFACB-71C2-48AE-B2F9-42D19FEBC9EA}"/>
+                <a16:creationId xmlns:a16="http://schemas.microsoft.com/office/drawing/2014/main" id="{699A5F36-E238-4706-AEE0-455568B04343}"/>
               </a:ext>
             </a:extLst>
           </p:cNvPr>
@@ -29811,7 +29811,7 @@
           <p:cNvPr id="9" name="Rectangle 8">
             <a:extLst>
               <a:ext uri="{FF2B5EF4-FFF2-40B4-BE49-F238E27FC236}">
-                <a16:creationId xmlns:a16="http://schemas.microsoft.com/office/drawing/2014/main" id="{5C658176-B638-4785-B61F-970F6D23A68D}"/>
+                <a16:creationId xmlns:a16="http://schemas.microsoft.com/office/drawing/2014/main" id="{2C3A48AB-D7E8-4E11-A532-A9447A550CF4}"/>
               </a:ext>
             </a:extLst>
           </p:cNvPr>
@@ -29873,7 +29873,7 @@
           <p:cNvPr id="10" name="Oval 9">
             <a:extLst>
               <a:ext uri="{FF2B5EF4-FFF2-40B4-BE49-F238E27FC236}">
-                <a16:creationId xmlns:a16="http://schemas.microsoft.com/office/drawing/2014/main" id="{156F8B8B-D7C3-4BE6-AEDF-3F0F068FCE8D}"/>
+                <a16:creationId xmlns:a16="http://schemas.microsoft.com/office/drawing/2014/main" id="{502A8501-F4E7-41B1-BC07-EFD644FA45BF}"/>
               </a:ext>
             </a:extLst>
           </p:cNvPr>
@@ -29904,7 +29904,7 @@
           <p:cNvPr id="11" name="Rectangle 10">
             <a:extLst>
               <a:ext uri="{FF2B5EF4-FFF2-40B4-BE49-F238E27FC236}">
-                <a16:creationId xmlns:a16="http://schemas.microsoft.com/office/drawing/2014/main" id="{7D5537F6-FF82-4A89-AD6C-4BDC7254BA91}"/>
+                <a16:creationId xmlns:a16="http://schemas.microsoft.com/office/drawing/2014/main" id="{30C6424C-8F7B-40B3-80BB-88F0FAE37C6F}"/>
               </a:ext>
             </a:extLst>
           </p:cNvPr>
@@ -29966,7 +29966,7 @@
           <p:cNvPr id="12" name="Oval 11">
             <a:extLst>
               <a:ext uri="{FF2B5EF4-FFF2-40B4-BE49-F238E27FC236}">
-                <a16:creationId xmlns:a16="http://schemas.microsoft.com/office/drawing/2014/main" id="{591549B0-1BFF-4E72-9C54-2AE38DAD7731}"/>
+                <a16:creationId xmlns:a16="http://schemas.microsoft.com/office/drawing/2014/main" id="{D27E4693-49B2-4473-9951-BC44B81266D5}"/>
               </a:ext>
             </a:extLst>
           </p:cNvPr>
@@ -29997,7 +29997,7 @@
           <p:cNvPr id="13" name="Rectangle 12">
             <a:extLst>
               <a:ext uri="{FF2B5EF4-FFF2-40B4-BE49-F238E27FC236}">
-                <a16:creationId xmlns:a16="http://schemas.microsoft.com/office/drawing/2014/main" id="{84C1E880-C55D-4110-A2A9-4A9FFB60AA6D}"/>
+                <a16:creationId xmlns:a16="http://schemas.microsoft.com/office/drawing/2014/main" id="{098F6D34-E4D5-4667-90F5-0A5548C975E2}"/>
               </a:ext>
             </a:extLst>
           </p:cNvPr>
@@ -30059,7 +30059,7 @@
           <p:cNvPr id="14" name="Oval 13">
             <a:extLst>
               <a:ext uri="{FF2B5EF4-FFF2-40B4-BE49-F238E27FC236}">
-                <a16:creationId xmlns:a16="http://schemas.microsoft.com/office/drawing/2014/main" id="{5A43FE6B-F835-4815-9A1B-F6276686D405}"/>
+                <a16:creationId xmlns:a16="http://schemas.microsoft.com/office/drawing/2014/main" id="{A8DB7A19-5DE4-4C98-8F7C-040FFA61A4B1}"/>
               </a:ext>
             </a:extLst>
           </p:cNvPr>
@@ -30090,7 +30090,7 @@
           <p:cNvPr id="15" name="Rectangle 14">
             <a:extLst>
               <a:ext uri="{FF2B5EF4-FFF2-40B4-BE49-F238E27FC236}">
-                <a16:creationId xmlns:a16="http://schemas.microsoft.com/office/drawing/2014/main" id="{6332BCC2-FDEC-4FBF-8F3E-6E2C4D02BF52}"/>
+                <a16:creationId xmlns:a16="http://schemas.microsoft.com/office/drawing/2014/main" id="{0C3DB567-8212-4A64-9DB4-7CA15DD57ABC}"/>
               </a:ext>
             </a:extLst>
           </p:cNvPr>
@@ -30152,7 +30152,7 @@
           <p:cNvPr id="16" name="Oval 15">
             <a:extLst>
               <a:ext uri="{FF2B5EF4-FFF2-40B4-BE49-F238E27FC236}">
-                <a16:creationId xmlns:a16="http://schemas.microsoft.com/office/drawing/2014/main" id="{294E766F-2F48-4E18-B1BF-A22C7C3312A2}"/>
+                <a16:creationId xmlns:a16="http://schemas.microsoft.com/office/drawing/2014/main" id="{922E220B-E5C6-46F0-9717-5BEF6AAA75D0}"/>
               </a:ext>
             </a:extLst>
           </p:cNvPr>
@@ -30183,7 +30183,7 @@
           <p:cNvPr id="17" name="Rectangle 16">
             <a:extLst>
               <a:ext uri="{FF2B5EF4-FFF2-40B4-BE49-F238E27FC236}">
-                <a16:creationId xmlns:a16="http://schemas.microsoft.com/office/drawing/2014/main" id="{37815C30-0306-494B-BF23-F38106054083}"/>
+                <a16:creationId xmlns:a16="http://schemas.microsoft.com/office/drawing/2014/main" id="{C6321DB7-FA39-44D5-9DBB-3423615E4CB2}"/>
               </a:ext>
             </a:extLst>
           </p:cNvPr>
@@ -30245,7 +30245,7 @@
           <p:cNvPr id="18" name="Oval 17">
             <a:extLst>
               <a:ext uri="{FF2B5EF4-FFF2-40B4-BE49-F238E27FC236}">
-                <a16:creationId xmlns:a16="http://schemas.microsoft.com/office/drawing/2014/main" id="{7839FB60-6C6D-40CF-ABE5-784D0A3F66A9}"/>
+                <a16:creationId xmlns:a16="http://schemas.microsoft.com/office/drawing/2014/main" id="{A93302DA-CE11-47A5-BCF4-7198227BF27D}"/>
               </a:ext>
             </a:extLst>
           </p:cNvPr>
@@ -30276,7 +30276,7 @@
           <p:cNvPr id="19" name="Rectangle 18">
             <a:extLst>
               <a:ext uri="{FF2B5EF4-FFF2-40B4-BE49-F238E27FC236}">
-                <a16:creationId xmlns:a16="http://schemas.microsoft.com/office/drawing/2014/main" id="{549C0F5E-2F6C-4CCC-B42C-CF8EC4C68C01}"/>
+                <a16:creationId xmlns:a16="http://schemas.microsoft.com/office/drawing/2014/main" id="{177B62B7-28DE-45A3-8EB7-33A41DB65DEF}"/>
               </a:ext>
             </a:extLst>
           </p:cNvPr>
@@ -30338,7 +30338,7 @@
           <p:cNvPr id="20" name="Rectangle 19">
             <a:extLst>
               <a:ext uri="{FF2B5EF4-FFF2-40B4-BE49-F238E27FC236}">
-                <a16:creationId xmlns:a16="http://schemas.microsoft.com/office/drawing/2014/main" id="{62E591BC-39A0-473E-AB74-F4BE5CF643C3}"/>
+                <a16:creationId xmlns:a16="http://schemas.microsoft.com/office/drawing/2014/main" id="{36F22C61-FC59-4FD3-BE85-3533530D5E6C}"/>
               </a:ext>
             </a:extLst>
           </p:cNvPr>
@@ -30369,7 +30369,7 @@
           <p:cNvPr id="21" name="Rectangle 20">
             <a:extLst>
               <a:ext uri="{FF2B5EF4-FFF2-40B4-BE49-F238E27FC236}">
-                <a16:creationId xmlns:a16="http://schemas.microsoft.com/office/drawing/2014/main" id="{9C05470B-DF8A-4F29-A0B9-B23FF39BB202}"/>
+                <a16:creationId xmlns:a16="http://schemas.microsoft.com/office/drawing/2014/main" id="{720F729F-E679-44F1-9C0F-9CF2CB2EC670}"/>
               </a:ext>
             </a:extLst>
           </p:cNvPr>
@@ -30431,7 +30431,7 @@
           <p:cNvPr id="22" name="Rectangle: Rounded Corners 21">
             <a:extLst>
               <a:ext uri="{FF2B5EF4-FFF2-40B4-BE49-F238E27FC236}">
-                <a16:creationId xmlns:a16="http://schemas.microsoft.com/office/drawing/2014/main" id="{7702C0C4-E661-4746-852E-B5E0E8C5A422}"/>
+                <a16:creationId xmlns:a16="http://schemas.microsoft.com/office/drawing/2014/main" id="{DC663842-B354-435A-96B2-557A3A7AB31A}"/>
               </a:ext>
             </a:extLst>
           </p:cNvPr>
@@ -30466,7 +30466,7 @@
           <p:cNvPr id="23" name="Rectangle 22">
             <a:extLst>
               <a:ext uri="{FF2B5EF4-FFF2-40B4-BE49-F238E27FC236}">
-                <a16:creationId xmlns:a16="http://schemas.microsoft.com/office/drawing/2014/main" id="{A2FD2A20-152D-4A67-B900-B2DAFE8BAEF0}"/>
+                <a16:creationId xmlns:a16="http://schemas.microsoft.com/office/drawing/2014/main" id="{87CBC13E-2DFB-4566-BDEC-5C265DF8D124}"/>
               </a:ext>
             </a:extLst>
           </p:cNvPr>
@@ -30528,7 +30528,7 @@
           <p:cNvPr id="24" name="Rectangle: Rounded Corners 23">
             <a:extLst>
               <a:ext uri="{FF2B5EF4-FFF2-40B4-BE49-F238E27FC236}">
-                <a16:creationId xmlns:a16="http://schemas.microsoft.com/office/drawing/2014/main" id="{FA80D695-F968-4093-B5A2-D6F7CC259088}"/>
+                <a16:creationId xmlns:a16="http://schemas.microsoft.com/office/drawing/2014/main" id="{BF36039F-6B99-499D-9D4D-C74FB4905082}"/>
               </a:ext>
             </a:extLst>
           </p:cNvPr>
@@ -30563,7 +30563,7 @@
           <p:cNvPr id="25" name="Rectangle 24">
             <a:extLst>
               <a:ext uri="{FF2B5EF4-FFF2-40B4-BE49-F238E27FC236}">
-                <a16:creationId xmlns:a16="http://schemas.microsoft.com/office/drawing/2014/main" id="{1DAECC84-D704-412C-94C6-E92EDB076873}"/>
+                <a16:creationId xmlns:a16="http://schemas.microsoft.com/office/drawing/2014/main" id="{ECEF44B4-7A0F-4099-8C29-18094B2D916B}"/>
               </a:ext>
             </a:extLst>
           </p:cNvPr>
@@ -30625,7 +30625,7 @@
           <p:cNvPr id="26" name="Rectangle: Rounded Corners 25">
             <a:extLst>
               <a:ext uri="{FF2B5EF4-FFF2-40B4-BE49-F238E27FC236}">
-                <a16:creationId xmlns:a16="http://schemas.microsoft.com/office/drawing/2014/main" id="{250AAB59-E4DD-4C21-835C-F1D9740B8D75}"/>
+                <a16:creationId xmlns:a16="http://schemas.microsoft.com/office/drawing/2014/main" id="{40D148AE-F009-481E-BF40-A64D2C572485}"/>
               </a:ext>
             </a:extLst>
           </p:cNvPr>
@@ -30660,7 +30660,7 @@
           <p:cNvPr id="27" name="Rectangle 26">
             <a:extLst>
               <a:ext uri="{FF2B5EF4-FFF2-40B4-BE49-F238E27FC236}">
-                <a16:creationId xmlns:a16="http://schemas.microsoft.com/office/drawing/2014/main" id="{DEA4DC9C-DE93-45E9-B316-94A8D410C7DE}"/>
+                <a16:creationId xmlns:a16="http://schemas.microsoft.com/office/drawing/2014/main" id="{3D28C8B9-75E2-4867-AA8D-6F6513AEE993}"/>
               </a:ext>
             </a:extLst>
           </p:cNvPr>
@@ -30722,7 +30722,7 @@
           <p:cNvPr id="28" name="Rectangle: Rounded Corners 27">
             <a:extLst>
               <a:ext uri="{FF2B5EF4-FFF2-40B4-BE49-F238E27FC236}">
-                <a16:creationId xmlns:a16="http://schemas.microsoft.com/office/drawing/2014/main" id="{9C964927-06C4-4C54-95E4-26E22A7032A1}"/>
+                <a16:creationId xmlns:a16="http://schemas.microsoft.com/office/drawing/2014/main" id="{45481709-A859-4E7F-A0DF-2CBDF923C892}"/>
               </a:ext>
             </a:extLst>
           </p:cNvPr>
@@ -30757,7 +30757,7 @@
           <p:cNvPr id="29" name="Rectangle 28">
             <a:extLst>
               <a:ext uri="{FF2B5EF4-FFF2-40B4-BE49-F238E27FC236}">
-                <a16:creationId xmlns:a16="http://schemas.microsoft.com/office/drawing/2014/main" id="{095E4D9C-FC7D-4D48-8A7E-99534D47870F}"/>
+                <a16:creationId xmlns:a16="http://schemas.microsoft.com/office/drawing/2014/main" id="{B747B652-4E80-4C39-8BB4-80FC7D9D90ED}"/>
               </a:ext>
             </a:extLst>
           </p:cNvPr>
@@ -30819,7 +30819,7 @@
           <p:cNvPr id="30" name="Rectangle: Rounded Corners 29">
             <a:extLst>
               <a:ext uri="{FF2B5EF4-FFF2-40B4-BE49-F238E27FC236}">
-                <a16:creationId xmlns:a16="http://schemas.microsoft.com/office/drawing/2014/main" id="{C7C62AD6-425D-407C-B2E6-ED65109A4978}"/>
+                <a16:creationId xmlns:a16="http://schemas.microsoft.com/office/drawing/2014/main" id="{3E944BDD-8D15-4F26-8F74-99EF6E072C94}"/>
               </a:ext>
             </a:extLst>
           </p:cNvPr>
@@ -30854,7 +30854,7 @@
           <p:cNvPr id="31" name="Rectangle 30">
             <a:extLst>
               <a:ext uri="{FF2B5EF4-FFF2-40B4-BE49-F238E27FC236}">
-                <a16:creationId xmlns:a16="http://schemas.microsoft.com/office/drawing/2014/main" id="{3117DAD7-83DC-4F15-A0DB-2FAF33793683}"/>
+                <a16:creationId xmlns:a16="http://schemas.microsoft.com/office/drawing/2014/main" id="{57BE9E01-94F1-412B-9367-9299C6803171}"/>
               </a:ext>
             </a:extLst>
           </p:cNvPr>
@@ -30916,7 +30916,7 @@
           <p:cNvPr id="32" name="Rectangle: Rounded Corners 31">
             <a:extLst>
               <a:ext uri="{FF2B5EF4-FFF2-40B4-BE49-F238E27FC236}">
-                <a16:creationId xmlns:a16="http://schemas.microsoft.com/office/drawing/2014/main" id="{F4B7BA7E-83F7-4EE7-855A-EBD80100A1D9}"/>
+                <a16:creationId xmlns:a16="http://schemas.microsoft.com/office/drawing/2014/main" id="{28C6CB21-B709-4991-950A-15E493E70717}"/>
               </a:ext>
             </a:extLst>
           </p:cNvPr>
@@ -30951,7 +30951,7 @@
           <p:cNvPr id="33" name="Rectangle 32">
             <a:extLst>
               <a:ext uri="{FF2B5EF4-FFF2-40B4-BE49-F238E27FC236}">
-                <a16:creationId xmlns:a16="http://schemas.microsoft.com/office/drawing/2014/main" id="{6AFFB63A-9051-40DF-90FA-C9F682CAE188}"/>
+                <a16:creationId xmlns:a16="http://schemas.microsoft.com/office/drawing/2014/main" id="{6601FAA4-DD0C-4D93-A4D5-E4BA33E36F60}"/>
               </a:ext>
             </a:extLst>
           </p:cNvPr>
@@ -31013,7 +31013,7 @@
           <p:cNvPr id="34" name="Rectangle: Rounded Corners 33">
             <a:extLst>
               <a:ext uri="{FF2B5EF4-FFF2-40B4-BE49-F238E27FC236}">
-                <a16:creationId xmlns:a16="http://schemas.microsoft.com/office/drawing/2014/main" id="{4B46568F-F5DA-418D-A0B1-F3EA70BC8E6D}"/>
+                <a16:creationId xmlns:a16="http://schemas.microsoft.com/office/drawing/2014/main" id="{B66D0D45-B3A1-435C-8B47-ADCC53551EFC}"/>
               </a:ext>
             </a:extLst>
           </p:cNvPr>
@@ -31048,7 +31048,7 @@
           <p:cNvPr id="35" name="Rectangle 34">
             <a:extLst>
               <a:ext uri="{FF2B5EF4-FFF2-40B4-BE49-F238E27FC236}">
-                <a16:creationId xmlns:a16="http://schemas.microsoft.com/office/drawing/2014/main" id="{CA941537-A516-4359-A8A0-733BF1EA85D7}"/>
+                <a16:creationId xmlns:a16="http://schemas.microsoft.com/office/drawing/2014/main" id="{CE8148AA-E4E9-4B48-9EB9-5E2A2FABA970}"/>
               </a:ext>
             </a:extLst>
           </p:cNvPr>
@@ -31110,7 +31110,7 @@
           <p:cNvPr id="36" name="Rectangle: Rounded Corners 35">
             <a:extLst>
               <a:ext uri="{FF2B5EF4-FFF2-40B4-BE49-F238E27FC236}">
-                <a16:creationId xmlns:a16="http://schemas.microsoft.com/office/drawing/2014/main" id="{B8ED0092-4805-4427-96F2-13380C266FB4}"/>
+                <a16:creationId xmlns:a16="http://schemas.microsoft.com/office/drawing/2014/main" id="{3EBEA6DD-50F3-4BD3-9891-4FCA6A021A01}"/>
               </a:ext>
             </a:extLst>
           </p:cNvPr>
@@ -31145,7 +31145,7 @@
           <p:cNvPr id="37" name="Rectangle 36">
             <a:extLst>
               <a:ext uri="{FF2B5EF4-FFF2-40B4-BE49-F238E27FC236}">
-                <a16:creationId xmlns:a16="http://schemas.microsoft.com/office/drawing/2014/main" id="{1B1353B5-BE80-404D-85D5-20C8E7F1B9D2}"/>
+                <a16:creationId xmlns:a16="http://schemas.microsoft.com/office/drawing/2014/main" id="{4A228634-9843-46B4-A871-1182E6B8B067}"/>
               </a:ext>
             </a:extLst>
           </p:cNvPr>
@@ -31207,7 +31207,7 @@
           <p:cNvPr id="38" name="Rectangle: Rounded Corners 37">
             <a:extLst>
               <a:ext uri="{FF2B5EF4-FFF2-40B4-BE49-F238E27FC236}">
-                <a16:creationId xmlns:a16="http://schemas.microsoft.com/office/drawing/2014/main" id="{CB33F1D2-2684-405D-8874-40553EBE606F}"/>
+                <a16:creationId xmlns:a16="http://schemas.microsoft.com/office/drawing/2014/main" id="{8A5F0678-E7B1-4008-AD16-ABB38B04E104}"/>
               </a:ext>
             </a:extLst>
           </p:cNvPr>
@@ -31242,7 +31242,7 @@
           <p:cNvPr id="39" name="Rectangle 38">
             <a:extLst>
               <a:ext uri="{FF2B5EF4-FFF2-40B4-BE49-F238E27FC236}">
-                <a16:creationId xmlns:a16="http://schemas.microsoft.com/office/drawing/2014/main" id="{CBC47F03-FBC2-4E8B-8CB5-E923EFBBD4D2}"/>
+                <a16:creationId xmlns:a16="http://schemas.microsoft.com/office/drawing/2014/main" id="{523A4797-96B6-450D-8FA7-9332453E043F}"/>
               </a:ext>
             </a:extLst>
           </p:cNvPr>
@@ -31304,7 +31304,7 @@
           <p:cNvPr id="40" name="Rectangle 39">
             <a:extLst>
               <a:ext uri="{FF2B5EF4-FFF2-40B4-BE49-F238E27FC236}">
-                <a16:creationId xmlns:a16="http://schemas.microsoft.com/office/drawing/2014/main" id="{C3B55AB8-AD2E-44BB-8EDB-B0BBA9679EF2}"/>
+                <a16:creationId xmlns:a16="http://schemas.microsoft.com/office/drawing/2014/main" id="{323D1797-70EE-41F4-A60B-9A11577AB864}"/>
               </a:ext>
             </a:extLst>
           </p:cNvPr>
@@ -31366,7 +31366,7 @@
           <p:cNvPr id="41" name="Rectangle 40">
             <a:extLst>
               <a:ext uri="{FF2B5EF4-FFF2-40B4-BE49-F238E27FC236}">
-                <a16:creationId xmlns:a16="http://schemas.microsoft.com/office/drawing/2014/main" id="{456CE531-E69B-4B31-BE45-322403BD92C9}"/>
+                <a16:creationId xmlns:a16="http://schemas.microsoft.com/office/drawing/2014/main" id="{488737AC-813E-4460-B5CE-79A34FFB6C78}"/>
               </a:ext>
             </a:extLst>
           </p:cNvPr>
@@ -31428,7 +31428,7 @@
           <p:cNvPr id="42" name="Rectangle 41">
             <a:extLst>
               <a:ext uri="{FF2B5EF4-FFF2-40B4-BE49-F238E27FC236}">
-                <a16:creationId xmlns:a16="http://schemas.microsoft.com/office/drawing/2014/main" id="{BBE72CC8-8A99-4DE3-81FD-5A8982A18491}"/>
+                <a16:creationId xmlns:a16="http://schemas.microsoft.com/office/drawing/2014/main" id="{E3D44947-6845-4E72-A279-90909D8F81A1}"/>
               </a:ext>
             </a:extLst>
           </p:cNvPr>
@@ -31490,7 +31490,7 @@
           <p:cNvPr id="43" name="Rectangle 42">
             <a:extLst>
               <a:ext uri="{FF2B5EF4-FFF2-40B4-BE49-F238E27FC236}">
-                <a16:creationId xmlns:a16="http://schemas.microsoft.com/office/drawing/2014/main" id="{B00F4370-D905-41D4-9DBC-E08F444BC83C}"/>
+                <a16:creationId xmlns:a16="http://schemas.microsoft.com/office/drawing/2014/main" id="{48771C3B-5694-49FD-838D-E5C033C8DB8F}"/>
               </a:ext>
             </a:extLst>
           </p:cNvPr>
@@ -31552,7 +31552,7 @@
           <p:cNvPr id="44" name="Rectangle 43">
             <a:extLst>
               <a:ext uri="{FF2B5EF4-FFF2-40B4-BE49-F238E27FC236}">
-                <a16:creationId xmlns:a16="http://schemas.microsoft.com/office/drawing/2014/main" id="{6910997E-0DA4-47A8-89B0-FCF6AFDDAF7D}"/>
+                <a16:creationId xmlns:a16="http://schemas.microsoft.com/office/drawing/2014/main" id="{0FC8017F-049B-42FD-8C0A-B47C6EE029A5}"/>
               </a:ext>
             </a:extLst>
           </p:cNvPr>
@@ -31614,7 +31614,7 @@
           <p:cNvPr id="45" name="Rectangle 44">
             <a:extLst>
               <a:ext uri="{FF2B5EF4-FFF2-40B4-BE49-F238E27FC236}">
-                <a16:creationId xmlns:a16="http://schemas.microsoft.com/office/drawing/2014/main" id="{4B663639-BC8C-4C37-811D-D4241BD3AA98}"/>
+                <a16:creationId xmlns:a16="http://schemas.microsoft.com/office/drawing/2014/main" id="{451C0E07-D089-45F7-B7C3-98DFFB7DE3BE}"/>
               </a:ext>
             </a:extLst>
           </p:cNvPr>
@@ -31676,7 +31676,7 @@
           <p:cNvPr id="46" name="Rectangle 45">
             <a:extLst>
               <a:ext uri="{FF2B5EF4-FFF2-40B4-BE49-F238E27FC236}">
-                <a16:creationId xmlns:a16="http://schemas.microsoft.com/office/drawing/2014/main" id="{DEB7AFCB-5736-4916-9A92-9C6A6CCC1CB6}"/>
+                <a16:creationId xmlns:a16="http://schemas.microsoft.com/office/drawing/2014/main" id="{9D1C796F-71F8-4C00-AA95-EFB333842D04}"/>
               </a:ext>
             </a:extLst>
           </p:cNvPr>
@@ -31707,7 +31707,7 @@
           <p:cNvPr id="47" name="Rectangle 46">
             <a:extLst>
               <a:ext uri="{FF2B5EF4-FFF2-40B4-BE49-F238E27FC236}">
-                <a16:creationId xmlns:a16="http://schemas.microsoft.com/office/drawing/2014/main" id="{25CE9C68-FD61-4D80-94A8-2676238808AA}"/>
+                <a16:creationId xmlns:a16="http://schemas.microsoft.com/office/drawing/2014/main" id="{A6F65748-FB5B-4C64-94C1-6B0665512E75}"/>
               </a:ext>
             </a:extLst>
           </p:cNvPr>
@@ -31769,7 +31769,7 @@
           <p:cNvPr id="48" name="Rectangle 47">
             <a:extLst>
               <a:ext uri="{FF2B5EF4-FFF2-40B4-BE49-F238E27FC236}">
-                <a16:creationId xmlns:a16="http://schemas.microsoft.com/office/drawing/2014/main" id="{08A2C584-F4E1-4A81-99CD-4492D7B26522}"/>
+                <a16:creationId xmlns:a16="http://schemas.microsoft.com/office/drawing/2014/main" id="{05106299-D472-41CD-940D-255CB4B1FB20}"/>
               </a:ext>
             </a:extLst>
           </p:cNvPr>
@@ -31829,7 +31829,7 @@
     </p:spTree>
     <p:extLst>
       <p:ext uri="{BB962C8B-B14F-4D97-AF65-F5344CB8AC3E}">
-        <p14:creationId xmlns:p14="http://schemas.microsoft.com/office/powerpoint/2010/main" val="1820119107"/>
+        <p14:creationId xmlns:p14="http://schemas.microsoft.com/office/powerpoint/2010/main" val="587572377"/>
       </p:ext>
     </p:extLst>
   </p:cSld>
@@ -31870,7 +31870,7 @@
             <a:hlinkClick r:id="rId3"/>
             <a:extLst>
               <a:ext uri="{FF2B5EF4-FFF2-40B4-BE49-F238E27FC236}">
-                <a16:creationId xmlns:a16="http://schemas.microsoft.com/office/drawing/2014/main" id="{D9725787-DD13-406F-9F53-9AF14E46D29B}"/>
+                <a16:creationId xmlns:a16="http://schemas.microsoft.com/office/drawing/2014/main" id="{E0F23B77-2EA1-4818-93BE-458E1329FE9E}"/>
               </a:ext>
             </a:extLst>
           </p:cNvPr>
@@ -31945,7 +31945,7 @@
             <a:hlinkClick r:id="rId4"/>
             <a:extLst>
               <a:ext uri="{FF2B5EF4-FFF2-40B4-BE49-F238E27FC236}">
-                <a16:creationId xmlns:a16="http://schemas.microsoft.com/office/drawing/2014/main" id="{9E47DC9F-063B-4A13-B9DA-68F8B9C97B3A}"/>
+                <a16:creationId xmlns:a16="http://schemas.microsoft.com/office/drawing/2014/main" id="{22F2C826-CFF4-4019-82D1-B0DF68585C3D}"/>
               </a:ext>
             </a:extLst>
           </p:cNvPr>
@@ -32019,7 +32019,7 @@
           <p:cNvPr id="3" name="Rectangle 2">
             <a:extLst>
               <a:ext uri="{FF2B5EF4-FFF2-40B4-BE49-F238E27FC236}">
-                <a16:creationId xmlns:a16="http://schemas.microsoft.com/office/drawing/2014/main" id="{24BCFEDE-5D98-4AF6-83E2-EBB01F15A7AA}"/>
+                <a16:creationId xmlns:a16="http://schemas.microsoft.com/office/drawing/2014/main" id="{2B00A8C6-62F4-4FC1-A9CF-8812E62AB923}"/>
               </a:ext>
             </a:extLst>
           </p:cNvPr>
@@ -32071,7 +32071,7 @@
                 <a:ea typeface="Arial"/>
                 <a:cs typeface="Arial"/>
               </a:rPr>
-              <a:t>CURRENT-EVIDENCE VALIDATION LAYER</a:t>
+              <a:t>DATED EXTERNAL MAP RECORDS</a:t>
             </a:r>
           </a:p>
         </p:txBody>
@@ -32081,7 +32081,7 @@
           <p:cNvPr id="4" name="Rectangle 3">
             <a:extLst>
               <a:ext uri="{FF2B5EF4-FFF2-40B4-BE49-F238E27FC236}">
-                <a16:creationId xmlns:a16="http://schemas.microsoft.com/office/drawing/2014/main" id="{D20045F7-6EBC-4DDB-B754-768569A90176}"/>
+                <a16:creationId xmlns:a16="http://schemas.microsoft.com/office/drawing/2014/main" id="{7BB4F3C7-6802-4BB1-B5D5-1A68B081F8A0}"/>
               </a:ext>
             </a:extLst>
           </p:cNvPr>
@@ -32133,7 +32133,7 @@
                 <a:ea typeface="Arial"/>
                 <a:cs typeface="Arial"/>
               </a:rPr>
-              <a:t>A dated external route record now changes the evidence state — without claiming active service.</a:t>
+              <a:t>A dated external map record changes the evidence state — without claiming active service.</a:t>
             </a:r>
           </a:p>
         </p:txBody>
@@ -32148,7 +32148,7 @@
         </p:nvPicPr>
         <p:blipFill>
           <a:blip r:embed="rId5"/>
-          <a:srcRect t="17464" b="17464"/>
+          <a:srcRect t="24340" b="24340"/>
           <a:stretch>
             <a:fillRect/>
           </a:stretch>
@@ -32170,7 +32170,7 @@
           <p:cNvPr id="6" name="Rectangle: Rounded Corners 5">
             <a:extLst>
               <a:ext uri="{FF2B5EF4-FFF2-40B4-BE49-F238E27FC236}">
-                <a16:creationId xmlns:a16="http://schemas.microsoft.com/office/drawing/2014/main" id="{57C9747E-094F-40E2-B06C-28DBCA00FEBF}"/>
+                <a16:creationId xmlns:a16="http://schemas.microsoft.com/office/drawing/2014/main" id="{6016CDBD-3121-479E-9813-3D30E0FCDFAF}"/>
               </a:ext>
             </a:extLst>
           </p:cNvPr>
@@ -32203,7 +32203,7 @@
           <p:cNvPr id="7" name="Rectangle: Rounded Corners 6">
             <a:extLst>
               <a:ext uri="{FF2B5EF4-FFF2-40B4-BE49-F238E27FC236}">
-                <a16:creationId xmlns:a16="http://schemas.microsoft.com/office/drawing/2014/main" id="{5412C434-8B65-452C-A47D-837BD53FCAD2}"/>
+                <a16:creationId xmlns:a16="http://schemas.microsoft.com/office/drawing/2014/main" id="{F3F23E7C-DFAE-406F-BA0A-5FCB25D4807B}"/>
               </a:ext>
             </a:extLst>
           </p:cNvPr>
@@ -32236,7 +32236,7 @@
           <p:cNvPr id="8" name="Rectangle 7">
             <a:extLst>
               <a:ext uri="{FF2B5EF4-FFF2-40B4-BE49-F238E27FC236}">
-                <a16:creationId xmlns:a16="http://schemas.microsoft.com/office/drawing/2014/main" id="{CC2FE419-A685-46C5-9A76-0FEE30460F3D}"/>
+                <a16:creationId xmlns:a16="http://schemas.microsoft.com/office/drawing/2014/main" id="{6DCA006E-1D34-42ED-A678-13CC09C406D1}"/>
               </a:ext>
             </a:extLst>
           </p:cNvPr>
@@ -32298,7 +32298,7 @@
           <p:cNvPr id="9" name="Rectangle 8">
             <a:extLst>
               <a:ext uri="{FF2B5EF4-FFF2-40B4-BE49-F238E27FC236}">
-                <a16:creationId xmlns:a16="http://schemas.microsoft.com/office/drawing/2014/main" id="{476136E4-0135-47D5-801E-57B8E33C06B9}"/>
+                <a16:creationId xmlns:a16="http://schemas.microsoft.com/office/drawing/2014/main" id="{4964A935-EFE4-42E1-B30A-05A1F9D0539D}"/>
               </a:ext>
             </a:extLst>
           </p:cNvPr>
@@ -32360,7 +32360,7 @@
           <p:cNvPr id="10" name="Rectangle 9">
             <a:extLst>
               <a:ext uri="{FF2B5EF4-FFF2-40B4-BE49-F238E27FC236}">
-                <a16:creationId xmlns:a16="http://schemas.microsoft.com/office/drawing/2014/main" id="{52F3815A-328A-4A9E-BC7C-A09D9B9ADA64}"/>
+                <a16:creationId xmlns:a16="http://schemas.microsoft.com/office/drawing/2014/main" id="{B884CEE6-C0D7-4D5C-9A9B-E4C88A6835D3}"/>
               </a:ext>
             </a:extLst>
           </p:cNvPr>
@@ -32422,7 +32422,7 @@
           <p:cNvPr id="11" name="Rectangle: Rounded Corners 10">
             <a:extLst>
               <a:ext uri="{FF2B5EF4-FFF2-40B4-BE49-F238E27FC236}">
-                <a16:creationId xmlns:a16="http://schemas.microsoft.com/office/drawing/2014/main" id="{C1B52FFD-F92D-4435-8EF4-6887911DF766}"/>
+                <a16:creationId xmlns:a16="http://schemas.microsoft.com/office/drawing/2014/main" id="{7E87B19D-8CFC-42DA-8ACF-8996499AD0FF}"/>
               </a:ext>
             </a:extLst>
           </p:cNvPr>
@@ -32455,7 +32455,7 @@
           <p:cNvPr id="12" name="Rectangle 11">
             <a:extLst>
               <a:ext uri="{FF2B5EF4-FFF2-40B4-BE49-F238E27FC236}">
-                <a16:creationId xmlns:a16="http://schemas.microsoft.com/office/drawing/2014/main" id="{C83160BE-53F0-4358-848E-2458D35081A4}"/>
+                <a16:creationId xmlns:a16="http://schemas.microsoft.com/office/drawing/2014/main" id="{53F3523D-DE60-4DD3-92CE-76DFB0A4FFAE}"/>
               </a:ext>
             </a:extLst>
           </p:cNvPr>
@@ -32517,7 +32517,7 @@
           <p:cNvPr id="13" name="Rectangle 12">
             <a:extLst>
               <a:ext uri="{FF2B5EF4-FFF2-40B4-BE49-F238E27FC236}">
-                <a16:creationId xmlns:a16="http://schemas.microsoft.com/office/drawing/2014/main" id="{9A2C7C07-B24C-47D1-A34C-EA9302C2B89F}"/>
+                <a16:creationId xmlns:a16="http://schemas.microsoft.com/office/drawing/2014/main" id="{5F9D3DE4-ECB1-4CE9-AD78-B6B680878BBE}"/>
               </a:ext>
             </a:extLst>
           </p:cNvPr>
@@ -32579,7 +32579,7 @@
           <p:cNvPr id="14" name="Rectangle 13">
             <a:extLst>
               <a:ext uri="{FF2B5EF4-FFF2-40B4-BE49-F238E27FC236}">
-                <a16:creationId xmlns:a16="http://schemas.microsoft.com/office/drawing/2014/main" id="{6726BE7F-A84A-4E94-93EC-36A747B00DBF}"/>
+                <a16:creationId xmlns:a16="http://schemas.microsoft.com/office/drawing/2014/main" id="{BD4769AD-472A-48BE-93B1-6E6C90834D07}"/>
               </a:ext>
             </a:extLst>
           </p:cNvPr>
@@ -32734,7 +32734,7 @@
           <p:cNvPr id="15" name="Rectangle 14">
             <a:extLst>
               <a:ext uri="{FF2B5EF4-FFF2-40B4-BE49-F238E27FC236}">
-                <a16:creationId xmlns:a16="http://schemas.microsoft.com/office/drawing/2014/main" id="{C9886401-5A23-485D-89D5-626B49B4719A}"/>
+                <a16:creationId xmlns:a16="http://schemas.microsoft.com/office/drawing/2014/main" id="{2BE989EF-DB68-4557-8926-CA9CFB2D9AD2}"/>
               </a:ext>
             </a:extLst>
           </p:cNvPr>
@@ -32796,7 +32796,7 @@
           <p:cNvPr id="16" name="Rectangle 15">
             <a:extLst>
               <a:ext uri="{FF2B5EF4-FFF2-40B4-BE49-F238E27FC236}">
-                <a16:creationId xmlns:a16="http://schemas.microsoft.com/office/drawing/2014/main" id="{BF9A5AA7-4427-42FF-84F4-D8DA2892F46D}"/>
+                <a16:creationId xmlns:a16="http://schemas.microsoft.com/office/drawing/2014/main" id="{08D88D9F-96F1-4DD6-BF55-CFE45BB7B54B}"/>
               </a:ext>
             </a:extLst>
           </p:cNvPr>
@@ -32827,7 +32827,7 @@
           <p:cNvPr id="17" name="Rectangle 16">
             <a:extLst>
               <a:ext uri="{FF2B5EF4-FFF2-40B4-BE49-F238E27FC236}">
-                <a16:creationId xmlns:a16="http://schemas.microsoft.com/office/drawing/2014/main" id="{9969024F-F626-4A16-BB78-20E62CE3FB42}"/>
+                <a16:creationId xmlns:a16="http://schemas.microsoft.com/office/drawing/2014/main" id="{5C468E52-C787-4E28-AC08-6CC834DA8E4A}"/>
               </a:ext>
             </a:extLst>
           </p:cNvPr>
@@ -32889,7 +32889,7 @@
           <p:cNvPr id="18" name="Rectangle 17">
             <a:extLst>
               <a:ext uri="{FF2B5EF4-FFF2-40B4-BE49-F238E27FC236}">
-                <a16:creationId xmlns:a16="http://schemas.microsoft.com/office/drawing/2014/main" id="{1DE17387-4EFC-42FF-9E00-7BAA35A8EFD8}"/>
+                <a16:creationId xmlns:a16="http://schemas.microsoft.com/office/drawing/2014/main" id="{E56073AE-B54C-4C2D-8E3E-5A4611A8116F}"/>
               </a:ext>
             </a:extLst>
           </p:cNvPr>
@@ -32949,7 +32949,7 @@
     </p:spTree>
     <p:extLst>
       <p:ext uri="{BB962C8B-B14F-4D97-AF65-F5344CB8AC3E}">
-        <p14:creationId xmlns:p14="http://schemas.microsoft.com/office/powerpoint/2010/main" val="1850584467"/>
+        <p14:creationId xmlns:p14="http://schemas.microsoft.com/office/powerpoint/2010/main" val="2108093208"/>
       </p:ext>
     </p:extLst>
   </p:cSld>
@@ -32990,7 +32990,7 @@
             <a:hlinkClick r:id="rId3"/>
             <a:extLst>
               <a:ext uri="{FF2B5EF4-FFF2-40B4-BE49-F238E27FC236}">
-                <a16:creationId xmlns:a16="http://schemas.microsoft.com/office/drawing/2014/main" id="{351CDEFE-7142-4765-BA25-9E76E8CBAA90}"/>
+                <a16:creationId xmlns:a16="http://schemas.microsoft.com/office/drawing/2014/main" id="{C31C082B-3CBE-4709-A8ED-15B994298E49}"/>
               </a:ext>
             </a:extLst>
           </p:cNvPr>
@@ -33065,7 +33065,7 @@
             <a:hlinkClick r:id="rId4"/>
             <a:extLst>
               <a:ext uri="{FF2B5EF4-FFF2-40B4-BE49-F238E27FC236}">
-                <a16:creationId xmlns:a16="http://schemas.microsoft.com/office/drawing/2014/main" id="{98363885-FD58-41B0-AB29-0B6CE55349F9}"/>
+                <a16:creationId xmlns:a16="http://schemas.microsoft.com/office/drawing/2014/main" id="{4CEFEE70-5477-475E-8C4C-8A99F855B6D3}"/>
               </a:ext>
             </a:extLst>
           </p:cNvPr>
@@ -33139,7 +33139,7 @@
           <p:cNvPr id="3" name="Rectangle 2">
             <a:extLst>
               <a:ext uri="{FF2B5EF4-FFF2-40B4-BE49-F238E27FC236}">
-                <a16:creationId xmlns:a16="http://schemas.microsoft.com/office/drawing/2014/main" id="{87C76E9C-D7F8-481A-ACF7-79E46EAEA1E2}"/>
+                <a16:creationId xmlns:a16="http://schemas.microsoft.com/office/drawing/2014/main" id="{FB498120-31AE-4ABF-BE13-61EABE115AE4}"/>
               </a:ext>
             </a:extLst>
           </p:cNvPr>
@@ -33201,7 +33201,7 @@
           <p:cNvPr id="4" name="Rectangle 3">
             <a:extLst>
               <a:ext uri="{FF2B5EF4-FFF2-40B4-BE49-F238E27FC236}">
-                <a16:creationId xmlns:a16="http://schemas.microsoft.com/office/drawing/2014/main" id="{724D2DB0-D2D1-4E34-A85B-1B58AD6A5310}"/>
+                <a16:creationId xmlns:a16="http://schemas.microsoft.com/office/drawing/2014/main" id="{DA465861-436C-4D6F-804F-CFA3520A9B3E}"/>
               </a:ext>
             </a:extLst>
           </p:cNvPr>
@@ -33279,7 +33279,7 @@
           <p:cNvPr id="6" name="Rectangle 5">
             <a:extLst>
               <a:ext uri="{FF2B5EF4-FFF2-40B4-BE49-F238E27FC236}">
-                <a16:creationId xmlns:a16="http://schemas.microsoft.com/office/drawing/2014/main" id="{EF017E90-003C-4D39-8EA4-3140527DE9FE}"/>
+                <a16:creationId xmlns:a16="http://schemas.microsoft.com/office/drawing/2014/main" id="{85EAEB04-C203-488A-9659-F75547FF3579}"/>
               </a:ext>
             </a:extLst>
           </p:cNvPr>
@@ -33341,7 +33341,7 @@
           <p:cNvPr id="7" name="Rectangle 6">
             <a:extLst>
               <a:ext uri="{FF2B5EF4-FFF2-40B4-BE49-F238E27FC236}">
-                <a16:creationId xmlns:a16="http://schemas.microsoft.com/office/drawing/2014/main" id="{4524E044-2BC5-4A7C-9372-B47AF3550766}"/>
+                <a16:creationId xmlns:a16="http://schemas.microsoft.com/office/drawing/2014/main" id="{8BE822D6-5B09-43F7-95C3-AAF8AD680A2E}"/>
               </a:ext>
             </a:extLst>
           </p:cNvPr>
@@ -33403,7 +33403,7 @@
           <p:cNvPr id="8" name="Rectangle 7">
             <a:extLst>
               <a:ext uri="{FF2B5EF4-FFF2-40B4-BE49-F238E27FC236}">
-                <a16:creationId xmlns:a16="http://schemas.microsoft.com/office/drawing/2014/main" id="{B2DC3E44-6E85-44EF-AF1E-0FC6D0E091FD}"/>
+                <a16:creationId xmlns:a16="http://schemas.microsoft.com/office/drawing/2014/main" id="{F7399E0D-4E46-4233-9C5A-61EC0364E7EF}"/>
               </a:ext>
             </a:extLst>
           </p:cNvPr>
@@ -33465,7 +33465,7 @@
           <p:cNvPr id="9" name="Rectangle 8">
             <a:extLst>
               <a:ext uri="{FF2B5EF4-FFF2-40B4-BE49-F238E27FC236}">
-                <a16:creationId xmlns:a16="http://schemas.microsoft.com/office/drawing/2014/main" id="{F67921CB-F84C-466B-B86D-AA43E3DDC720}"/>
+                <a16:creationId xmlns:a16="http://schemas.microsoft.com/office/drawing/2014/main" id="{442409A1-BEBB-4BCB-98FF-7949471D1CCC}"/>
               </a:ext>
             </a:extLst>
           </p:cNvPr>
@@ -33527,7 +33527,7 @@
           <p:cNvPr id="10" name="Rectangle 9">
             <a:extLst>
               <a:ext uri="{FF2B5EF4-FFF2-40B4-BE49-F238E27FC236}">
-                <a16:creationId xmlns:a16="http://schemas.microsoft.com/office/drawing/2014/main" id="{0F35392D-6878-4736-A0AA-17D741C5577C}"/>
+                <a16:creationId xmlns:a16="http://schemas.microsoft.com/office/drawing/2014/main" id="{772D9369-597C-4DC1-9A94-A7ABD0967B62}"/>
               </a:ext>
             </a:extLst>
           </p:cNvPr>
@@ -33589,7 +33589,7 @@
           <p:cNvPr id="11" name="Rectangle 10">
             <a:extLst>
               <a:ext uri="{FF2B5EF4-FFF2-40B4-BE49-F238E27FC236}">
-                <a16:creationId xmlns:a16="http://schemas.microsoft.com/office/drawing/2014/main" id="{D26BDE96-E3E6-4A74-B90E-96021767A966}"/>
+                <a16:creationId xmlns:a16="http://schemas.microsoft.com/office/drawing/2014/main" id="{6A61E40D-84EE-4B20-9F4A-EE4A0DBE9AF5}"/>
               </a:ext>
             </a:extLst>
           </p:cNvPr>
@@ -33651,7 +33651,7 @@
           <p:cNvPr id="12" name="Rectangle 11">
             <a:extLst>
               <a:ext uri="{FF2B5EF4-FFF2-40B4-BE49-F238E27FC236}">
-                <a16:creationId xmlns:a16="http://schemas.microsoft.com/office/drawing/2014/main" id="{6B09531D-3E17-4335-A12D-F4D3E8F64728}"/>
+                <a16:creationId xmlns:a16="http://schemas.microsoft.com/office/drawing/2014/main" id="{1A61C8F4-250A-470B-A753-53D34FE2D049}"/>
               </a:ext>
             </a:extLst>
           </p:cNvPr>
@@ -33713,7 +33713,7 @@
           <p:cNvPr id="13" name="Rectangle 12">
             <a:extLst>
               <a:ext uri="{FF2B5EF4-FFF2-40B4-BE49-F238E27FC236}">
-                <a16:creationId xmlns:a16="http://schemas.microsoft.com/office/drawing/2014/main" id="{7E495D60-42F8-4BF6-B927-1141DDF0AE61}"/>
+                <a16:creationId xmlns:a16="http://schemas.microsoft.com/office/drawing/2014/main" id="{62978771-1E31-4778-BBE3-7E27E64F6674}"/>
               </a:ext>
             </a:extLst>
           </p:cNvPr>
@@ -33775,7 +33775,7 @@
           <p:cNvPr id="14" name="Rectangle 13">
             <a:extLst>
               <a:ext uri="{FF2B5EF4-FFF2-40B4-BE49-F238E27FC236}">
-                <a16:creationId xmlns:a16="http://schemas.microsoft.com/office/drawing/2014/main" id="{398434F4-5461-4F6C-8252-C14CD63B4538}"/>
+                <a16:creationId xmlns:a16="http://schemas.microsoft.com/office/drawing/2014/main" id="{AA450062-E2A2-4A5C-BAC4-B501C2CC2B8B}"/>
               </a:ext>
             </a:extLst>
           </p:cNvPr>
@@ -33837,7 +33837,7 @@
           <p:cNvPr id="15" name="Rectangle 14">
             <a:extLst>
               <a:ext uri="{FF2B5EF4-FFF2-40B4-BE49-F238E27FC236}">
-                <a16:creationId xmlns:a16="http://schemas.microsoft.com/office/drawing/2014/main" id="{4BB51C66-A741-461B-9AF9-6FC713F986D5}"/>
+                <a16:creationId xmlns:a16="http://schemas.microsoft.com/office/drawing/2014/main" id="{676EAAD4-CD0A-4E3C-A58F-31E2345B923E}"/>
               </a:ext>
             </a:extLst>
           </p:cNvPr>
@@ -33899,7 +33899,7 @@
           <p:cNvPr id="16" name="Rectangle 15">
             <a:extLst>
               <a:ext uri="{FF2B5EF4-FFF2-40B4-BE49-F238E27FC236}">
-                <a16:creationId xmlns:a16="http://schemas.microsoft.com/office/drawing/2014/main" id="{176FA4F2-1BD2-4502-955B-260906C57D4A}"/>
+                <a16:creationId xmlns:a16="http://schemas.microsoft.com/office/drawing/2014/main" id="{8BD64F7A-DF11-4CE7-9D19-5286FA77C353}"/>
               </a:ext>
             </a:extLst>
           </p:cNvPr>
@@ -33961,7 +33961,7 @@
           <p:cNvPr id="17" name="Rectangle: Rounded Corners 16">
             <a:extLst>
               <a:ext uri="{FF2B5EF4-FFF2-40B4-BE49-F238E27FC236}">
-                <a16:creationId xmlns:a16="http://schemas.microsoft.com/office/drawing/2014/main" id="{C6943E76-0F91-483E-89CE-30D3C7201E5E}"/>
+                <a16:creationId xmlns:a16="http://schemas.microsoft.com/office/drawing/2014/main" id="{E140295C-8A89-4A6F-80AC-B45143C73BB8}"/>
               </a:ext>
             </a:extLst>
           </p:cNvPr>
@@ -33994,7 +33994,7 @@
           <p:cNvPr id="18" name="Rectangle 17">
             <a:extLst>
               <a:ext uri="{FF2B5EF4-FFF2-40B4-BE49-F238E27FC236}">
-                <a16:creationId xmlns:a16="http://schemas.microsoft.com/office/drawing/2014/main" id="{A7D28E6E-FED2-4013-8054-A9C47C235942}"/>
+                <a16:creationId xmlns:a16="http://schemas.microsoft.com/office/drawing/2014/main" id="{015C69A2-A8EC-4A55-8143-2A27BCFE9734}"/>
               </a:ext>
             </a:extLst>
           </p:cNvPr>
@@ -34056,7 +34056,7 @@
           <p:cNvPr id="19" name="Rectangle 18">
             <a:extLst>
               <a:ext uri="{FF2B5EF4-FFF2-40B4-BE49-F238E27FC236}">
-                <a16:creationId xmlns:a16="http://schemas.microsoft.com/office/drawing/2014/main" id="{CC871F2B-FE4C-4D17-9B82-D278DEF285D0}"/>
+                <a16:creationId xmlns:a16="http://schemas.microsoft.com/office/drawing/2014/main" id="{124673EE-42FF-4110-BE25-FE395386EB6E}"/>
               </a:ext>
             </a:extLst>
           </p:cNvPr>
@@ -34118,7 +34118,7 @@
           <p:cNvPr id="20" name="Rectangle 19">
             <a:extLst>
               <a:ext uri="{FF2B5EF4-FFF2-40B4-BE49-F238E27FC236}">
-                <a16:creationId xmlns:a16="http://schemas.microsoft.com/office/drawing/2014/main" id="{104C112C-E701-491E-8D9B-F987425DB8EA}"/>
+                <a16:creationId xmlns:a16="http://schemas.microsoft.com/office/drawing/2014/main" id="{A8FB83CA-E056-4019-9A4A-C969418DE447}"/>
               </a:ext>
             </a:extLst>
           </p:cNvPr>
@@ -34149,7 +34149,7 @@
           <p:cNvPr id="21" name="Rectangle 20">
             <a:extLst>
               <a:ext uri="{FF2B5EF4-FFF2-40B4-BE49-F238E27FC236}">
-                <a16:creationId xmlns:a16="http://schemas.microsoft.com/office/drawing/2014/main" id="{0E81CB3D-438E-4AEF-B946-D68311A15EC1}"/>
+                <a16:creationId xmlns:a16="http://schemas.microsoft.com/office/drawing/2014/main" id="{509A2499-F181-4039-8717-8168F53C7955}"/>
               </a:ext>
             </a:extLst>
           </p:cNvPr>
@@ -34211,7 +34211,7 @@
           <p:cNvPr id="22" name="Rectangle 21">
             <a:extLst>
               <a:ext uri="{FF2B5EF4-FFF2-40B4-BE49-F238E27FC236}">
-                <a16:creationId xmlns:a16="http://schemas.microsoft.com/office/drawing/2014/main" id="{E1B61DBF-EDAE-4761-BEB9-44BB44D06B28}"/>
+                <a16:creationId xmlns:a16="http://schemas.microsoft.com/office/drawing/2014/main" id="{4107FE00-D7B0-46CC-A962-6BA1182A9354}"/>
               </a:ext>
             </a:extLst>
           </p:cNvPr>
@@ -34271,7 +34271,7 @@
     </p:spTree>
     <p:extLst>
       <p:ext uri="{BB962C8B-B14F-4D97-AF65-F5344CB8AC3E}">
-        <p14:creationId xmlns:p14="http://schemas.microsoft.com/office/powerpoint/2010/main" val="505279800"/>
+        <p14:creationId xmlns:p14="http://schemas.microsoft.com/office/powerpoint/2010/main" val="98155190"/>
       </p:ext>
     </p:extLst>
   </p:cSld>

--- a/output/submission/Route2Zero_Concept_Deck_20_Slides.pptx
+++ b/output/submission/Route2Zero_Concept_Deck_20_Slides.pptx
@@ -166,7 +166,7 @@
             </c:spPr>
             <c:extLst>
               <c:ext xmlns:c16="http://schemas.microsoft.com/office/drawing/2014/chart" uri="{C3380CC4-5D6E-409C-BE32-E72D297353CC}">
-                <c16:uniqueId val="{00000001-F998-4382-A9E0-7B276FE3039A}"/>
+                <c16:uniqueId val="{00000001-A636-4053-B07F-0BE91ADD95A9}"/>
               </c:ext>
             </c:extLst>
           </c:dPt>
@@ -240,7 +240,7 @@
               </c14:invertSolidFillFmt>
             </c:ext>
             <c:ext xmlns:c16="http://schemas.microsoft.com/office/drawing/2014/chart" uri="{C3380CC4-5D6E-409C-BE32-E72D297353CC}">
-              <c16:uniqueId val="{00000002-F998-4382-A9E0-7B276FE3039A}"/>
+              <c16:uniqueId val="{00000002-A636-4053-B07F-0BE91ADD95A9}"/>
             </c:ext>
           </c:extLst>
         </c:ser>
@@ -417,7 +417,7 @@
             </c:spPr>
             <c:extLst>
               <c:ext xmlns:c16="http://schemas.microsoft.com/office/drawing/2014/chart" uri="{C3380CC4-5D6E-409C-BE32-E72D297353CC}">
-                <c16:uniqueId val="{00000001-46B5-48F0-9E4D-6A424713A949}"/>
+                <c16:uniqueId val="{00000001-A41A-436B-80DE-F2BE44E21E00}"/>
               </c:ext>
             </c:extLst>
           </c:dPt>
@@ -432,7 +432,7 @@
             </c:spPr>
             <c:extLst>
               <c:ext xmlns:c16="http://schemas.microsoft.com/office/drawing/2014/chart" uri="{C3380CC4-5D6E-409C-BE32-E72D297353CC}">
-                <c16:uniqueId val="{00000003-46B5-48F0-9E4D-6A424713A949}"/>
+                <c16:uniqueId val="{00000003-A41A-436B-80DE-F2BE44E21E00}"/>
               </c:ext>
             </c:extLst>
           </c:dPt>
@@ -512,7 +512,7 @@
               </c14:invertSolidFillFmt>
             </c:ext>
             <c:ext xmlns:c16="http://schemas.microsoft.com/office/drawing/2014/chart" uri="{C3380CC4-5D6E-409C-BE32-E72D297353CC}">
-              <c16:uniqueId val="{00000004-46B5-48F0-9E4D-6A424713A949}"/>
+              <c16:uniqueId val="{00000004-A41A-436B-80DE-F2BE44E21E00}"/>
             </c:ext>
           </c:extLst>
         </c:ser>
@@ -663,7 +663,7 @@
             </c:spPr>
             <c:extLst>
               <c:ext xmlns:c16="http://schemas.microsoft.com/office/drawing/2014/chart" uri="{C3380CC4-5D6E-409C-BE32-E72D297353CC}">
-                <c16:uniqueId val="{00000001-5442-4F73-9F3B-60DAF2984FC0}"/>
+                <c16:uniqueId val="{00000001-D277-4A54-9B35-AB064B70BA2C}"/>
               </c:ext>
             </c:extLst>
           </c:dPt>
@@ -678,7 +678,7 @@
             </c:spPr>
             <c:extLst>
               <c:ext xmlns:c16="http://schemas.microsoft.com/office/drawing/2014/chart" uri="{C3380CC4-5D6E-409C-BE32-E72D297353CC}">
-                <c16:uniqueId val="{00000003-5442-4F73-9F3B-60DAF2984FC0}"/>
+                <c16:uniqueId val="{00000003-D277-4A54-9B35-AB064B70BA2C}"/>
               </c:ext>
             </c:extLst>
           </c:dPt>
@@ -749,7 +749,7 @@
           </c:val>
           <c:extLst>
             <c:ext xmlns:c16="http://schemas.microsoft.com/office/drawing/2014/chart" uri="{C3380CC4-5D6E-409C-BE32-E72D297353CC}">
-              <c16:uniqueId val="{00000004-5442-4F73-9F3B-60DAF2984FC0}"/>
+              <c16:uniqueId val="{00000004-D277-4A54-9B35-AB064B70BA2C}"/>
             </c:ext>
           </c:extLst>
         </c:ser>
@@ -3233,7 +3233,7 @@
           <p:cNvPr id="2" name="Rectangle 1">
             <a:extLst>
               <a:ext uri="{FF2B5EF4-FFF2-40B4-BE49-F238E27FC236}">
-                <a16:creationId xmlns:a16="http://schemas.microsoft.com/office/drawing/2014/main" id="{4CB4559E-8686-4F39-80E6-A1C57661077E}"/>
+                <a16:creationId xmlns:a16="http://schemas.microsoft.com/office/drawing/2014/main" id="{5E9B943E-CB6B-40C4-B9D7-F3C16C75B442}"/>
               </a:ext>
             </a:extLst>
           </p:cNvPr>
@@ -3280,7 +3280,7 @@
             <a:hlinkClick r:id="rId4"/>
             <a:extLst>
               <a:ext uri="{FF2B5EF4-FFF2-40B4-BE49-F238E27FC236}">
-                <a16:creationId xmlns:a16="http://schemas.microsoft.com/office/drawing/2014/main" id="{78916333-4482-475F-8197-8E53533F6AE6}"/>
+                <a16:creationId xmlns:a16="http://schemas.microsoft.com/office/drawing/2014/main" id="{FE8596F9-46BA-46F1-87E0-CEF96AB58203}"/>
               </a:ext>
             </a:extLst>
           </p:cNvPr>
@@ -3355,7 +3355,7 @@
             <a:hlinkClick r:id="rId5"/>
             <a:extLst>
               <a:ext uri="{FF2B5EF4-FFF2-40B4-BE49-F238E27FC236}">
-                <a16:creationId xmlns:a16="http://schemas.microsoft.com/office/drawing/2014/main" id="{D05C7C54-D140-4C5A-BA72-C3BFEED2886C}"/>
+                <a16:creationId xmlns:a16="http://schemas.microsoft.com/office/drawing/2014/main" id="{B7046D22-11DE-4483-95F9-4DE3AA06AD2D}"/>
               </a:ext>
             </a:extLst>
           </p:cNvPr>
@@ -3429,7 +3429,7 @@
           <p:cNvPr id="5" name="Rectangle 4">
             <a:extLst>
               <a:ext uri="{FF2B5EF4-FFF2-40B4-BE49-F238E27FC236}">
-                <a16:creationId xmlns:a16="http://schemas.microsoft.com/office/drawing/2014/main" id="{C12C6B80-B0F9-4669-A2A4-D69D43421C9E}"/>
+                <a16:creationId xmlns:a16="http://schemas.microsoft.com/office/drawing/2014/main" id="{D1A3F372-CE4C-4F95-9068-6F38A6F41777}"/>
               </a:ext>
             </a:extLst>
           </p:cNvPr>
@@ -3491,7 +3491,7 @@
           <p:cNvPr id="6" name="Rectangle 5">
             <a:extLst>
               <a:ext uri="{FF2B5EF4-FFF2-40B4-BE49-F238E27FC236}">
-                <a16:creationId xmlns:a16="http://schemas.microsoft.com/office/drawing/2014/main" id="{D1C191FC-6053-49DF-927F-631E14C8F83E}"/>
+                <a16:creationId xmlns:a16="http://schemas.microsoft.com/office/drawing/2014/main" id="{295138A1-27D2-4995-927F-06C55D949493}"/>
               </a:ext>
             </a:extLst>
           </p:cNvPr>
@@ -3553,7 +3553,7 @@
           <p:cNvPr id="7" name="Rectangle 6">
             <a:extLst>
               <a:ext uri="{FF2B5EF4-FFF2-40B4-BE49-F238E27FC236}">
-                <a16:creationId xmlns:a16="http://schemas.microsoft.com/office/drawing/2014/main" id="{CABBB3B9-BAB2-45ED-8721-2D0F5B185C53}"/>
+                <a16:creationId xmlns:a16="http://schemas.microsoft.com/office/drawing/2014/main" id="{AE7A79EB-7C7E-4E56-9F49-A419353E3BE6}"/>
               </a:ext>
             </a:extLst>
           </p:cNvPr>
@@ -3615,7 +3615,7 @@
           <p:cNvPr id="8" name="Rectangle 7">
             <a:extLst>
               <a:ext uri="{FF2B5EF4-FFF2-40B4-BE49-F238E27FC236}">
-                <a16:creationId xmlns:a16="http://schemas.microsoft.com/office/drawing/2014/main" id="{48752438-5FD3-4FC8-B7E0-7B4993FA63C5}"/>
+                <a16:creationId xmlns:a16="http://schemas.microsoft.com/office/drawing/2014/main" id="{C6958C8E-A069-4189-A823-47D35E1EA3C0}"/>
               </a:ext>
             </a:extLst>
           </p:cNvPr>
@@ -3677,7 +3677,7 @@
           <p:cNvPr id="9" name="Rectangle 8">
             <a:extLst>
               <a:ext uri="{FF2B5EF4-FFF2-40B4-BE49-F238E27FC236}">
-                <a16:creationId xmlns:a16="http://schemas.microsoft.com/office/drawing/2014/main" id="{2789612A-BFC9-42B0-AE8F-C6E05E723A1B}"/>
+                <a16:creationId xmlns:a16="http://schemas.microsoft.com/office/drawing/2014/main" id="{9EB79944-8ADC-49F2-83B0-3662B6830335}"/>
               </a:ext>
             </a:extLst>
           </p:cNvPr>
@@ -3739,7 +3739,7 @@
           <p:cNvPr id="10" name="Rectangle 9">
             <a:extLst>
               <a:ext uri="{FF2B5EF4-FFF2-40B4-BE49-F238E27FC236}">
-                <a16:creationId xmlns:a16="http://schemas.microsoft.com/office/drawing/2014/main" id="{3B2F9F56-A691-43C3-854B-62D69215291A}"/>
+                <a16:creationId xmlns:a16="http://schemas.microsoft.com/office/drawing/2014/main" id="{30D65B98-A7F0-4BC7-8733-B322CB70CBEA}"/>
               </a:ext>
             </a:extLst>
           </p:cNvPr>
@@ -3801,7 +3801,7 @@
           <p:cNvPr id="11" name="Rectangle 10">
             <a:extLst>
               <a:ext uri="{FF2B5EF4-FFF2-40B4-BE49-F238E27FC236}">
-                <a16:creationId xmlns:a16="http://schemas.microsoft.com/office/drawing/2014/main" id="{12F57DDB-9DBB-42B0-9CFE-A08AD7776066}"/>
+                <a16:creationId xmlns:a16="http://schemas.microsoft.com/office/drawing/2014/main" id="{8775F58C-8ECB-4A16-9F5B-B16E69AE2C03}"/>
               </a:ext>
             </a:extLst>
           </p:cNvPr>
@@ -3863,7 +3863,7 @@
           <p:cNvPr id="12" name="Rectangle 11">
             <a:extLst>
               <a:ext uri="{FF2B5EF4-FFF2-40B4-BE49-F238E27FC236}">
-                <a16:creationId xmlns:a16="http://schemas.microsoft.com/office/drawing/2014/main" id="{EE055D6F-7ACA-4433-8C53-3A09D836AE8A}"/>
+                <a16:creationId xmlns:a16="http://schemas.microsoft.com/office/drawing/2014/main" id="{8D759590-82EE-46C4-BCC1-7C4B4CC3C739}"/>
               </a:ext>
             </a:extLst>
           </p:cNvPr>
@@ -3925,7 +3925,7 @@
           <p:cNvPr id="13" name="Rectangle 12">
             <a:extLst>
               <a:ext uri="{FF2B5EF4-FFF2-40B4-BE49-F238E27FC236}">
-                <a16:creationId xmlns:a16="http://schemas.microsoft.com/office/drawing/2014/main" id="{BFAA87CA-BCDC-4C2C-BABF-0B8FD6853F31}"/>
+                <a16:creationId xmlns:a16="http://schemas.microsoft.com/office/drawing/2014/main" id="{45B23F56-047A-4E74-8C88-422B58840701}"/>
               </a:ext>
             </a:extLst>
           </p:cNvPr>
@@ -3987,7 +3987,7 @@
           <p:cNvPr id="14" name="Rectangle 13">
             <a:extLst>
               <a:ext uri="{FF2B5EF4-FFF2-40B4-BE49-F238E27FC236}">
-                <a16:creationId xmlns:a16="http://schemas.microsoft.com/office/drawing/2014/main" id="{CDB0ED0C-D971-40EB-81BC-AD1EA5BCE0BD}"/>
+                <a16:creationId xmlns:a16="http://schemas.microsoft.com/office/drawing/2014/main" id="{90DE8524-9AD7-4088-B173-43CE03CBE71E}"/>
               </a:ext>
             </a:extLst>
           </p:cNvPr>
@@ -4049,7 +4049,7 @@
           <p:cNvPr id="15" name="Rectangle 14">
             <a:extLst>
               <a:ext uri="{FF2B5EF4-FFF2-40B4-BE49-F238E27FC236}">
-                <a16:creationId xmlns:a16="http://schemas.microsoft.com/office/drawing/2014/main" id="{61A447AA-741F-4CE2-9D38-2AE388EC3AF4}"/>
+                <a16:creationId xmlns:a16="http://schemas.microsoft.com/office/drawing/2014/main" id="{94930F2D-E5D9-448A-91AC-659B68940D45}"/>
               </a:ext>
             </a:extLst>
           </p:cNvPr>
@@ -4080,7 +4080,7 @@
           <p:cNvPr id="16" name="Rectangle 15">
             <a:extLst>
               <a:ext uri="{FF2B5EF4-FFF2-40B4-BE49-F238E27FC236}">
-                <a16:creationId xmlns:a16="http://schemas.microsoft.com/office/drawing/2014/main" id="{281D9249-18D7-4914-84A2-76C07440EF33}"/>
+                <a16:creationId xmlns:a16="http://schemas.microsoft.com/office/drawing/2014/main" id="{C59DD900-96D3-4F49-9905-B5672138783A}"/>
               </a:ext>
             </a:extLst>
           </p:cNvPr>
@@ -4132,7 +4132,7 @@
                 <a:ea typeface="Arial"/>
                 <a:cs typeface="Arial"/>
               </a:rPr>
-              <a:t>r2z-d4c8d4cc709a · scn-e0f12f397e · prt-fd6de9d793</a:t>
+              <a:t>r2z-a7181752a17d · scn-e0f12f397e · prt-fd6de9d793</a:t>
             </a:r>
           </a:p>
         </p:txBody>
@@ -4142,7 +4142,7 @@
           <p:cNvPr id="17" name="Rectangle 16">
             <a:extLst>
               <a:ext uri="{FF2B5EF4-FFF2-40B4-BE49-F238E27FC236}">
-                <a16:creationId xmlns:a16="http://schemas.microsoft.com/office/drawing/2014/main" id="{AA32B304-3BE2-4856-8458-D3EADFB73BE3}"/>
+                <a16:creationId xmlns:a16="http://schemas.microsoft.com/office/drawing/2014/main" id="{1F8A8CE9-995F-49BD-B3FC-9E25D04604C3}"/>
               </a:ext>
             </a:extLst>
           </p:cNvPr>
@@ -4202,7 +4202,7 @@
     </p:spTree>
     <p:extLst>
       <p:ext uri="{BB962C8B-B14F-4D97-AF65-F5344CB8AC3E}">
-        <p14:creationId xmlns:p14="http://schemas.microsoft.com/office/powerpoint/2010/main" val="2113323437"/>
+        <p14:creationId xmlns:p14="http://schemas.microsoft.com/office/powerpoint/2010/main" val="1223590653"/>
       </p:ext>
     </p:extLst>
   </p:cSld>
@@ -4243,7 +4243,7 @@
             <a:hlinkClick r:id="rId3"/>
             <a:extLst>
               <a:ext uri="{FF2B5EF4-FFF2-40B4-BE49-F238E27FC236}">
-                <a16:creationId xmlns:a16="http://schemas.microsoft.com/office/drawing/2014/main" id="{8C340137-D671-469A-9981-39A32042A304}"/>
+                <a16:creationId xmlns:a16="http://schemas.microsoft.com/office/drawing/2014/main" id="{DC70EFE8-9D0A-4D7B-AE47-0BAA535B89E1}"/>
               </a:ext>
             </a:extLst>
           </p:cNvPr>
@@ -4318,7 +4318,7 @@
             <a:hlinkClick r:id="rId4"/>
             <a:extLst>
               <a:ext uri="{FF2B5EF4-FFF2-40B4-BE49-F238E27FC236}">
-                <a16:creationId xmlns:a16="http://schemas.microsoft.com/office/drawing/2014/main" id="{8AA59A3E-2E7C-4CD5-B0DE-A9EAD9E81457}"/>
+                <a16:creationId xmlns:a16="http://schemas.microsoft.com/office/drawing/2014/main" id="{1A55CE6D-EBA0-4687-88B2-982DF847BA21}"/>
               </a:ext>
             </a:extLst>
           </p:cNvPr>
@@ -4392,7 +4392,7 @@
           <p:cNvPr id="3" name="Rectangle 2">
             <a:extLst>
               <a:ext uri="{FF2B5EF4-FFF2-40B4-BE49-F238E27FC236}">
-                <a16:creationId xmlns:a16="http://schemas.microsoft.com/office/drawing/2014/main" id="{1B2992DE-E6BC-410D-89C4-7E1220A22374}"/>
+                <a16:creationId xmlns:a16="http://schemas.microsoft.com/office/drawing/2014/main" id="{6B739F6D-2CFC-4107-87F0-FBF55070B4DA}"/>
               </a:ext>
             </a:extLst>
           </p:cNvPr>
@@ -4454,7 +4454,7 @@
           <p:cNvPr id="4" name="Rectangle 3">
             <a:extLst>
               <a:ext uri="{FF2B5EF4-FFF2-40B4-BE49-F238E27FC236}">
-                <a16:creationId xmlns:a16="http://schemas.microsoft.com/office/drawing/2014/main" id="{673BA736-EA60-485E-A264-AEDDECADD309}"/>
+                <a16:creationId xmlns:a16="http://schemas.microsoft.com/office/drawing/2014/main" id="{2A8679BF-E1D9-405D-8CB7-9696881A6937}"/>
               </a:ext>
             </a:extLst>
           </p:cNvPr>
@@ -4543,7 +4543,7 @@
           <p:cNvPr id="6" name="Rectangle: Rounded Corners 5">
             <a:extLst>
               <a:ext uri="{FF2B5EF4-FFF2-40B4-BE49-F238E27FC236}">
-                <a16:creationId xmlns:a16="http://schemas.microsoft.com/office/drawing/2014/main" id="{A642C799-63A2-44FC-9C8C-FB722BE27CA2}"/>
+                <a16:creationId xmlns:a16="http://schemas.microsoft.com/office/drawing/2014/main" id="{563EDFDF-2756-4A35-9FC0-8B5980F03B45}"/>
               </a:ext>
             </a:extLst>
           </p:cNvPr>
@@ -4592,7 +4592,7 @@
           <p:cNvPr id="8" name="Rectangle: Rounded Corners 7">
             <a:extLst>
               <a:ext uri="{FF2B5EF4-FFF2-40B4-BE49-F238E27FC236}">
-                <a16:creationId xmlns:a16="http://schemas.microsoft.com/office/drawing/2014/main" id="{F0E209D2-9989-4C81-80EF-D2904E9BED73}"/>
+                <a16:creationId xmlns:a16="http://schemas.microsoft.com/office/drawing/2014/main" id="{8273D320-6AA7-4018-B138-C8A1414C5C85}"/>
               </a:ext>
             </a:extLst>
           </p:cNvPr>
@@ -4625,7 +4625,7 @@
           <p:cNvPr id="9" name="Rectangle 8">
             <a:extLst>
               <a:ext uri="{FF2B5EF4-FFF2-40B4-BE49-F238E27FC236}">
-                <a16:creationId xmlns:a16="http://schemas.microsoft.com/office/drawing/2014/main" id="{893D033F-19DE-4696-B7E7-43E9155A0A74}"/>
+                <a16:creationId xmlns:a16="http://schemas.microsoft.com/office/drawing/2014/main" id="{56226176-1778-48E6-83D4-4B2BF7D52550}"/>
               </a:ext>
             </a:extLst>
           </p:cNvPr>
@@ -4687,7 +4687,7 @@
           <p:cNvPr id="10" name="Rectangle 9">
             <a:extLst>
               <a:ext uri="{FF2B5EF4-FFF2-40B4-BE49-F238E27FC236}">
-                <a16:creationId xmlns:a16="http://schemas.microsoft.com/office/drawing/2014/main" id="{CBB8E0A8-218E-4CE3-82DD-487D734A1D35}"/>
+                <a16:creationId xmlns:a16="http://schemas.microsoft.com/office/drawing/2014/main" id="{A89F16B0-F31D-4648-AAC3-BB2E5867FC0E}"/>
               </a:ext>
             </a:extLst>
           </p:cNvPr>
@@ -4749,7 +4749,7 @@
           <p:cNvPr id="11" name="Rectangle 10">
             <a:extLst>
               <a:ext uri="{FF2B5EF4-FFF2-40B4-BE49-F238E27FC236}">
-                <a16:creationId xmlns:a16="http://schemas.microsoft.com/office/drawing/2014/main" id="{4010A92D-8FB7-4A3A-A8B5-39D865A9216E}"/>
+                <a16:creationId xmlns:a16="http://schemas.microsoft.com/office/drawing/2014/main" id="{2DD3D6B0-FB21-4528-AAF8-4CCD600D12DD}"/>
               </a:ext>
             </a:extLst>
           </p:cNvPr>
@@ -4838,7 +4838,7 @@
           <p:cNvPr id="12" name="Rectangle 11">
             <a:extLst>
               <a:ext uri="{FF2B5EF4-FFF2-40B4-BE49-F238E27FC236}">
-                <a16:creationId xmlns:a16="http://schemas.microsoft.com/office/drawing/2014/main" id="{A616C92F-2331-4E8C-BC94-3030839A0FFC}"/>
+                <a16:creationId xmlns:a16="http://schemas.microsoft.com/office/drawing/2014/main" id="{9B12E6B9-94EC-4C7E-A895-5602E4B79EC4}"/>
               </a:ext>
             </a:extLst>
           </p:cNvPr>
@@ -4869,7 +4869,7 @@
           <p:cNvPr id="13" name="Rectangle 12">
             <a:extLst>
               <a:ext uri="{FF2B5EF4-FFF2-40B4-BE49-F238E27FC236}">
-                <a16:creationId xmlns:a16="http://schemas.microsoft.com/office/drawing/2014/main" id="{B2C0D08B-8611-4188-A5AE-C4D6FCA99E0B}"/>
+                <a16:creationId xmlns:a16="http://schemas.microsoft.com/office/drawing/2014/main" id="{A42D00CE-DDB4-4D02-BEFF-BB758DDF8D7C}"/>
               </a:ext>
             </a:extLst>
           </p:cNvPr>
@@ -4921,7 +4921,7 @@
                 <a:ea typeface="Arial"/>
                 <a:cs typeface="Arial"/>
               </a:rPr>
-              <a:t>r2z-d4c8d4cc709a · scn-e0f12f397e · prt-fd6de9d793</a:t>
+              <a:t>r2z-a7181752a17d · scn-e0f12f397e · prt-fd6de9d793</a:t>
             </a:r>
           </a:p>
         </p:txBody>
@@ -4931,7 +4931,7 @@
           <p:cNvPr id="14" name="Rectangle 13">
             <a:extLst>
               <a:ext uri="{FF2B5EF4-FFF2-40B4-BE49-F238E27FC236}">
-                <a16:creationId xmlns:a16="http://schemas.microsoft.com/office/drawing/2014/main" id="{82677E67-95C8-444F-AAC6-1BC255732B6B}"/>
+                <a16:creationId xmlns:a16="http://schemas.microsoft.com/office/drawing/2014/main" id="{F81E7D19-3AB0-42C3-A254-0AA2E0DB4D36}"/>
               </a:ext>
             </a:extLst>
           </p:cNvPr>
@@ -4991,7 +4991,7 @@
     </p:spTree>
     <p:extLst>
       <p:ext uri="{BB962C8B-B14F-4D97-AF65-F5344CB8AC3E}">
-        <p14:creationId xmlns:p14="http://schemas.microsoft.com/office/powerpoint/2010/main" val="438195140"/>
+        <p14:creationId xmlns:p14="http://schemas.microsoft.com/office/powerpoint/2010/main" val="934368656"/>
       </p:ext>
     </p:extLst>
   </p:cSld>
@@ -5032,7 +5032,7 @@
             <a:hlinkClick r:id="rId3"/>
             <a:extLst>
               <a:ext uri="{FF2B5EF4-FFF2-40B4-BE49-F238E27FC236}">
-                <a16:creationId xmlns:a16="http://schemas.microsoft.com/office/drawing/2014/main" id="{4E3603E8-0C78-4202-BD79-6F1C432BB2F4}"/>
+                <a16:creationId xmlns:a16="http://schemas.microsoft.com/office/drawing/2014/main" id="{F4F1F943-2055-4E62-8EB3-E6CA8FEDDB9F}"/>
               </a:ext>
             </a:extLst>
           </p:cNvPr>
@@ -5107,7 +5107,7 @@
             <a:hlinkClick r:id="rId4"/>
             <a:extLst>
               <a:ext uri="{FF2B5EF4-FFF2-40B4-BE49-F238E27FC236}">
-                <a16:creationId xmlns:a16="http://schemas.microsoft.com/office/drawing/2014/main" id="{67476C5D-EB73-452E-99A4-DD871E55EE5A}"/>
+                <a16:creationId xmlns:a16="http://schemas.microsoft.com/office/drawing/2014/main" id="{55BA3B68-C13F-41E2-B456-6138C3A71D9E}"/>
               </a:ext>
             </a:extLst>
           </p:cNvPr>
@@ -5181,7 +5181,7 @@
           <p:cNvPr id="3" name="Rectangle 2">
             <a:extLst>
               <a:ext uri="{FF2B5EF4-FFF2-40B4-BE49-F238E27FC236}">
-                <a16:creationId xmlns:a16="http://schemas.microsoft.com/office/drawing/2014/main" id="{C244D301-B2C7-404F-8569-6CE0EA4B56B6}"/>
+                <a16:creationId xmlns:a16="http://schemas.microsoft.com/office/drawing/2014/main" id="{CEB76F83-CDA3-42A0-9F23-7ABE901CAE24}"/>
               </a:ext>
             </a:extLst>
           </p:cNvPr>
@@ -5243,7 +5243,7 @@
           <p:cNvPr id="4" name="Rectangle 3">
             <a:extLst>
               <a:ext uri="{FF2B5EF4-FFF2-40B4-BE49-F238E27FC236}">
-                <a16:creationId xmlns:a16="http://schemas.microsoft.com/office/drawing/2014/main" id="{1A5F6290-1304-4C27-BCF5-B81A89D8CB3B}"/>
+                <a16:creationId xmlns:a16="http://schemas.microsoft.com/office/drawing/2014/main" id="{580E259E-DD43-426A-BBD5-8A835E1162CC}"/>
               </a:ext>
             </a:extLst>
           </p:cNvPr>
@@ -5305,7 +5305,7 @@
           <p:cNvPr id="5" name="Rectangle 4">
             <a:extLst>
               <a:ext uri="{FF2B5EF4-FFF2-40B4-BE49-F238E27FC236}">
-                <a16:creationId xmlns:a16="http://schemas.microsoft.com/office/drawing/2014/main" id="{34C843AA-FAD1-4012-8E4C-6CB5B0589475}"/>
+                <a16:creationId xmlns:a16="http://schemas.microsoft.com/office/drawing/2014/main" id="{72C4B785-70DF-4EAB-917A-C823BDE6B7A3}"/>
               </a:ext>
             </a:extLst>
           </p:cNvPr>
@@ -5367,7 +5367,7 @@
           <p:cNvPr id="6" name="Rectangle 5">
             <a:extLst>
               <a:ext uri="{FF2B5EF4-FFF2-40B4-BE49-F238E27FC236}">
-                <a16:creationId xmlns:a16="http://schemas.microsoft.com/office/drawing/2014/main" id="{57D911D1-8C0A-404A-A52B-41104699401E}"/>
+                <a16:creationId xmlns:a16="http://schemas.microsoft.com/office/drawing/2014/main" id="{9C597EE1-2002-4FBC-AA2A-232554BC42C7}"/>
               </a:ext>
             </a:extLst>
           </p:cNvPr>
@@ -5429,7 +5429,7 @@
           <p:cNvPr id="7" name="Rectangle 6">
             <a:extLst>
               <a:ext uri="{FF2B5EF4-FFF2-40B4-BE49-F238E27FC236}">
-                <a16:creationId xmlns:a16="http://schemas.microsoft.com/office/drawing/2014/main" id="{C6489CA4-7A65-4820-88D5-38CB05C639A5}"/>
+                <a16:creationId xmlns:a16="http://schemas.microsoft.com/office/drawing/2014/main" id="{0647FA4C-966F-4F0C-BB4B-7BB521649644}"/>
               </a:ext>
             </a:extLst>
           </p:cNvPr>
@@ -5491,7 +5491,7 @@
           <p:cNvPr id="8" name="Rectangle 7">
             <a:extLst>
               <a:ext uri="{FF2B5EF4-FFF2-40B4-BE49-F238E27FC236}">
-                <a16:creationId xmlns:a16="http://schemas.microsoft.com/office/drawing/2014/main" id="{217C1F7E-A35C-415F-9FD9-D0C1E333C2FD}"/>
+                <a16:creationId xmlns:a16="http://schemas.microsoft.com/office/drawing/2014/main" id="{38EE03F8-CB02-4FC0-BF1C-E60777C8E878}"/>
               </a:ext>
             </a:extLst>
           </p:cNvPr>
@@ -5553,7 +5553,7 @@
           <p:cNvPr id="9" name="Rectangle 8">
             <a:extLst>
               <a:ext uri="{FF2B5EF4-FFF2-40B4-BE49-F238E27FC236}">
-                <a16:creationId xmlns:a16="http://schemas.microsoft.com/office/drawing/2014/main" id="{F96D99C5-D93D-4183-A5D7-8A2B46B9E620}"/>
+                <a16:creationId xmlns:a16="http://schemas.microsoft.com/office/drawing/2014/main" id="{E286C46E-33B1-496C-B05A-81463383D851}"/>
               </a:ext>
             </a:extLst>
           </p:cNvPr>
@@ -5615,7 +5615,7 @@
           <p:cNvPr id="10" name="Rectangle 9">
             <a:extLst>
               <a:ext uri="{FF2B5EF4-FFF2-40B4-BE49-F238E27FC236}">
-                <a16:creationId xmlns:a16="http://schemas.microsoft.com/office/drawing/2014/main" id="{BF62D1C4-9A9D-46EF-ADE1-12D368BFFD8D}"/>
+                <a16:creationId xmlns:a16="http://schemas.microsoft.com/office/drawing/2014/main" id="{D0583CB0-6785-49B1-8680-A36EF643C289}"/>
               </a:ext>
             </a:extLst>
           </p:cNvPr>
@@ -5677,7 +5677,7 @@
           <p:cNvPr id="11" name="Rectangle 10">
             <a:extLst>
               <a:ext uri="{FF2B5EF4-FFF2-40B4-BE49-F238E27FC236}">
-                <a16:creationId xmlns:a16="http://schemas.microsoft.com/office/drawing/2014/main" id="{213B0453-A6DE-495F-9372-795842205A66}"/>
+                <a16:creationId xmlns:a16="http://schemas.microsoft.com/office/drawing/2014/main" id="{DBF08C87-6BE3-4374-BACD-DF32E5F5D792}"/>
               </a:ext>
             </a:extLst>
           </p:cNvPr>
@@ -5739,7 +5739,7 @@
           <p:cNvPr id="12" name="Rectangle 11">
             <a:extLst>
               <a:ext uri="{FF2B5EF4-FFF2-40B4-BE49-F238E27FC236}">
-                <a16:creationId xmlns:a16="http://schemas.microsoft.com/office/drawing/2014/main" id="{F9DFC96E-DFCE-40AA-A293-0F55BACB1E9E}"/>
+                <a16:creationId xmlns:a16="http://schemas.microsoft.com/office/drawing/2014/main" id="{BA70D6CC-5484-45FF-BB02-489EBC9EAEA5}"/>
               </a:ext>
             </a:extLst>
           </p:cNvPr>
@@ -5801,7 +5801,7 @@
           <p:cNvPr id="13" name="Rectangle 12">
             <a:extLst>
               <a:ext uri="{FF2B5EF4-FFF2-40B4-BE49-F238E27FC236}">
-                <a16:creationId xmlns:a16="http://schemas.microsoft.com/office/drawing/2014/main" id="{8CC908E6-31E4-4FAE-9D8C-AFB7105621C1}"/>
+                <a16:creationId xmlns:a16="http://schemas.microsoft.com/office/drawing/2014/main" id="{3612820F-5947-4591-A2B1-BD19480CA3BF}"/>
               </a:ext>
             </a:extLst>
           </p:cNvPr>
@@ -5863,7 +5863,7 @@
           <p:cNvPr id="14" name="Rectangle 13">
             <a:extLst>
               <a:ext uri="{FF2B5EF4-FFF2-40B4-BE49-F238E27FC236}">
-                <a16:creationId xmlns:a16="http://schemas.microsoft.com/office/drawing/2014/main" id="{3A915359-BF87-4745-8EF7-828F8D916E43}"/>
+                <a16:creationId xmlns:a16="http://schemas.microsoft.com/office/drawing/2014/main" id="{508C2749-4EF3-4BD8-957D-3654DA28EA64}"/>
               </a:ext>
             </a:extLst>
           </p:cNvPr>
@@ -5925,7 +5925,7 @@
           <p:cNvPr id="15" name="Rectangle 14">
             <a:extLst>
               <a:ext uri="{FF2B5EF4-FFF2-40B4-BE49-F238E27FC236}">
-                <a16:creationId xmlns:a16="http://schemas.microsoft.com/office/drawing/2014/main" id="{A6330775-C000-41E2-AA27-CAE8E9F34874}"/>
+                <a16:creationId xmlns:a16="http://schemas.microsoft.com/office/drawing/2014/main" id="{A3CE11F1-987A-4BFE-B4AA-0FDE11CC43C0}"/>
               </a:ext>
             </a:extLst>
           </p:cNvPr>
@@ -6003,7 +6003,7 @@
           <p:cNvPr id="17" name="Rectangle: Rounded Corners 16">
             <a:extLst>
               <a:ext uri="{FF2B5EF4-FFF2-40B4-BE49-F238E27FC236}">
-                <a16:creationId xmlns:a16="http://schemas.microsoft.com/office/drawing/2014/main" id="{69CAB06A-1BDD-42DA-BFEE-647D7DFB9942}"/>
+                <a16:creationId xmlns:a16="http://schemas.microsoft.com/office/drawing/2014/main" id="{443B9727-424B-4777-8A2A-1CBB1618BD7F}"/>
               </a:ext>
             </a:extLst>
           </p:cNvPr>
@@ -6036,7 +6036,7 @@
           <p:cNvPr id="18" name="Rectangle 17">
             <a:extLst>
               <a:ext uri="{FF2B5EF4-FFF2-40B4-BE49-F238E27FC236}">
-                <a16:creationId xmlns:a16="http://schemas.microsoft.com/office/drawing/2014/main" id="{93B7BAC7-BE63-46D3-84D1-D2C52AA92D92}"/>
+                <a16:creationId xmlns:a16="http://schemas.microsoft.com/office/drawing/2014/main" id="{BA73E4BE-EBCE-4616-A042-D1D16CEE15FF}"/>
               </a:ext>
             </a:extLst>
           </p:cNvPr>
@@ -6098,7 +6098,7 @@
           <p:cNvPr id="19" name="Rectangle 18">
             <a:extLst>
               <a:ext uri="{FF2B5EF4-FFF2-40B4-BE49-F238E27FC236}">
-                <a16:creationId xmlns:a16="http://schemas.microsoft.com/office/drawing/2014/main" id="{5BD1656C-2A69-4134-979D-A738C2E6F79E}"/>
+                <a16:creationId xmlns:a16="http://schemas.microsoft.com/office/drawing/2014/main" id="{DD99EE8F-2FDB-4156-995A-F37FB9F5E338}"/>
               </a:ext>
             </a:extLst>
           </p:cNvPr>
@@ -6160,7 +6160,7 @@
           <p:cNvPr id="20" name="Rectangle 19">
             <a:extLst>
               <a:ext uri="{FF2B5EF4-FFF2-40B4-BE49-F238E27FC236}">
-                <a16:creationId xmlns:a16="http://schemas.microsoft.com/office/drawing/2014/main" id="{4CB8B45D-BA69-4743-86E5-CA0E051422C9}"/>
+                <a16:creationId xmlns:a16="http://schemas.microsoft.com/office/drawing/2014/main" id="{D3AC6FBD-36A7-4DC3-B8F9-6D8BE64B00E9}"/>
               </a:ext>
             </a:extLst>
           </p:cNvPr>
@@ -6222,7 +6222,7 @@
           <p:cNvPr id="21" name="Rectangle 20">
             <a:extLst>
               <a:ext uri="{FF2B5EF4-FFF2-40B4-BE49-F238E27FC236}">
-                <a16:creationId xmlns:a16="http://schemas.microsoft.com/office/drawing/2014/main" id="{7B4A9A34-29B0-4E4E-9A88-6FB3EAA349CA}"/>
+                <a16:creationId xmlns:a16="http://schemas.microsoft.com/office/drawing/2014/main" id="{44992C95-9D96-43BA-A211-D55E0DDD3029}"/>
               </a:ext>
             </a:extLst>
           </p:cNvPr>
@@ -6284,7 +6284,7 @@
           <p:cNvPr id="22" name="Rectangle 21">
             <a:extLst>
               <a:ext uri="{FF2B5EF4-FFF2-40B4-BE49-F238E27FC236}">
-                <a16:creationId xmlns:a16="http://schemas.microsoft.com/office/drawing/2014/main" id="{EF882C8A-6A1D-4F3E-9EDB-6CDE2021124D}"/>
+                <a16:creationId xmlns:a16="http://schemas.microsoft.com/office/drawing/2014/main" id="{2BC6F9FA-A473-4E88-88F5-5BD4B3C37737}"/>
               </a:ext>
             </a:extLst>
           </p:cNvPr>
@@ -6315,7 +6315,7 @@
           <p:cNvPr id="23" name="Rectangle 22">
             <a:extLst>
               <a:ext uri="{FF2B5EF4-FFF2-40B4-BE49-F238E27FC236}">
-                <a16:creationId xmlns:a16="http://schemas.microsoft.com/office/drawing/2014/main" id="{77448B46-98DB-4571-AC75-EBBCA7CF9F23}"/>
+                <a16:creationId xmlns:a16="http://schemas.microsoft.com/office/drawing/2014/main" id="{69E289A3-CB37-47E7-87B8-A919EE3BCF17}"/>
               </a:ext>
             </a:extLst>
           </p:cNvPr>
@@ -6367,7 +6367,7 @@
                 <a:ea typeface="Arial"/>
                 <a:cs typeface="Arial"/>
               </a:rPr>
-              <a:t>r2z-d4c8d4cc709a · scn-e0f12f397e · prt-fd6de9d793</a:t>
+              <a:t>r2z-a7181752a17d · scn-e0f12f397e · prt-fd6de9d793</a:t>
             </a:r>
           </a:p>
         </p:txBody>
@@ -6377,7 +6377,7 @@
           <p:cNvPr id="24" name="Rectangle 23">
             <a:extLst>
               <a:ext uri="{FF2B5EF4-FFF2-40B4-BE49-F238E27FC236}">
-                <a16:creationId xmlns:a16="http://schemas.microsoft.com/office/drawing/2014/main" id="{C5AE49AE-CFE5-4DBA-8DBE-F9DBFFED2DB2}"/>
+                <a16:creationId xmlns:a16="http://schemas.microsoft.com/office/drawing/2014/main" id="{E7286B72-0F2F-4180-9B0E-0EA66C0CE2D0}"/>
               </a:ext>
             </a:extLst>
           </p:cNvPr>
@@ -6437,7 +6437,7 @@
     </p:spTree>
     <p:extLst>
       <p:ext uri="{BB962C8B-B14F-4D97-AF65-F5344CB8AC3E}">
-        <p14:creationId xmlns:p14="http://schemas.microsoft.com/office/powerpoint/2010/main" val="389254417"/>
+        <p14:creationId xmlns:p14="http://schemas.microsoft.com/office/powerpoint/2010/main" val="300995051"/>
       </p:ext>
     </p:extLst>
   </p:cSld>
@@ -6478,7 +6478,7 @@
             <a:hlinkClick r:id="rId3"/>
             <a:extLst>
               <a:ext uri="{FF2B5EF4-FFF2-40B4-BE49-F238E27FC236}">
-                <a16:creationId xmlns:a16="http://schemas.microsoft.com/office/drawing/2014/main" id="{4A225B7F-7A97-4DC6-B140-5D17BEB1BB58}"/>
+                <a16:creationId xmlns:a16="http://schemas.microsoft.com/office/drawing/2014/main" id="{36AC4AE6-408E-42DB-BDC7-9B9FF9F98CF1}"/>
               </a:ext>
             </a:extLst>
           </p:cNvPr>
@@ -6553,7 +6553,7 @@
             <a:hlinkClick r:id="rId4"/>
             <a:extLst>
               <a:ext uri="{FF2B5EF4-FFF2-40B4-BE49-F238E27FC236}">
-                <a16:creationId xmlns:a16="http://schemas.microsoft.com/office/drawing/2014/main" id="{D379F63F-AC3D-46A0-98B5-C0EC486D9A34}"/>
+                <a16:creationId xmlns:a16="http://schemas.microsoft.com/office/drawing/2014/main" id="{22D23EFE-C364-4E0E-BC19-090F4F0412E7}"/>
               </a:ext>
             </a:extLst>
           </p:cNvPr>
@@ -6627,7 +6627,7 @@
           <p:cNvPr id="3" name="Rectangle 2">
             <a:extLst>
               <a:ext uri="{FF2B5EF4-FFF2-40B4-BE49-F238E27FC236}">
-                <a16:creationId xmlns:a16="http://schemas.microsoft.com/office/drawing/2014/main" id="{7545824D-A7F2-4217-B71A-95DD66B0E02D}"/>
+                <a16:creationId xmlns:a16="http://schemas.microsoft.com/office/drawing/2014/main" id="{DBC8A1BD-85E7-438B-80A0-9B27520241FF}"/>
               </a:ext>
             </a:extLst>
           </p:cNvPr>
@@ -6689,7 +6689,7 @@
           <p:cNvPr id="4" name="Rectangle 3">
             <a:extLst>
               <a:ext uri="{FF2B5EF4-FFF2-40B4-BE49-F238E27FC236}">
-                <a16:creationId xmlns:a16="http://schemas.microsoft.com/office/drawing/2014/main" id="{05574A5B-D452-467B-AE97-3D22CB32C875}"/>
+                <a16:creationId xmlns:a16="http://schemas.microsoft.com/office/drawing/2014/main" id="{5C9753CC-A838-4E11-96CE-600792D80C05}"/>
               </a:ext>
             </a:extLst>
           </p:cNvPr>
@@ -6751,7 +6751,7 @@
           <p:cNvPr id="5" name="Rectangle 4">
             <a:extLst>
               <a:ext uri="{FF2B5EF4-FFF2-40B4-BE49-F238E27FC236}">
-                <a16:creationId xmlns:a16="http://schemas.microsoft.com/office/drawing/2014/main" id="{9E7AC441-F9C1-4960-A16D-57637DBDEB20}"/>
+                <a16:creationId xmlns:a16="http://schemas.microsoft.com/office/drawing/2014/main" id="{14E008D4-B66B-4E20-B70F-D5677C453D42}"/>
               </a:ext>
             </a:extLst>
           </p:cNvPr>
@@ -6813,7 +6813,7 @@
           <p:cNvPr id="6" name="Rectangle 5">
             <a:extLst>
               <a:ext uri="{FF2B5EF4-FFF2-40B4-BE49-F238E27FC236}">
-                <a16:creationId xmlns:a16="http://schemas.microsoft.com/office/drawing/2014/main" id="{DC4572C7-DDE5-4FBE-9259-B21D6A05E432}"/>
+                <a16:creationId xmlns:a16="http://schemas.microsoft.com/office/drawing/2014/main" id="{9AAE9BEF-8414-4D95-8740-2208582E14FD}"/>
               </a:ext>
             </a:extLst>
           </p:cNvPr>
@@ -6875,7 +6875,7 @@
           <p:cNvPr id="7" name="Rectangle 6">
             <a:extLst>
               <a:ext uri="{FF2B5EF4-FFF2-40B4-BE49-F238E27FC236}">
-                <a16:creationId xmlns:a16="http://schemas.microsoft.com/office/drawing/2014/main" id="{6D219918-CA67-4939-A016-A300D8A5E8D7}"/>
+                <a16:creationId xmlns:a16="http://schemas.microsoft.com/office/drawing/2014/main" id="{44CB5994-3D1A-4BE2-AF7F-1E365D9A7F05}"/>
               </a:ext>
             </a:extLst>
           </p:cNvPr>
@@ -6937,7 +6937,7 @@
           <p:cNvPr id="8" name="Rectangle 7">
             <a:extLst>
               <a:ext uri="{FF2B5EF4-FFF2-40B4-BE49-F238E27FC236}">
-                <a16:creationId xmlns:a16="http://schemas.microsoft.com/office/drawing/2014/main" id="{148E0632-4C65-46D6-ADE9-EBEA77B01105}"/>
+                <a16:creationId xmlns:a16="http://schemas.microsoft.com/office/drawing/2014/main" id="{804378E6-99D5-4249-8ACF-F253FC39DCAF}"/>
               </a:ext>
             </a:extLst>
           </p:cNvPr>
@@ -6999,7 +6999,7 @@
           <p:cNvPr id="9" name="Rectangle 8">
             <a:extLst>
               <a:ext uri="{FF2B5EF4-FFF2-40B4-BE49-F238E27FC236}">
-                <a16:creationId xmlns:a16="http://schemas.microsoft.com/office/drawing/2014/main" id="{295A16F4-9AAB-4B11-8162-B224AE0181A8}"/>
+                <a16:creationId xmlns:a16="http://schemas.microsoft.com/office/drawing/2014/main" id="{49EA253D-5624-43E4-AE43-AAD0117457E4}"/>
               </a:ext>
             </a:extLst>
           </p:cNvPr>
@@ -7061,7 +7061,7 @@
           <p:cNvPr id="10" name="Rectangle 9">
             <a:extLst>
               <a:ext uri="{FF2B5EF4-FFF2-40B4-BE49-F238E27FC236}">
-                <a16:creationId xmlns:a16="http://schemas.microsoft.com/office/drawing/2014/main" id="{764C0DA9-235C-46FF-8B37-7EC6E4FBDB90}"/>
+                <a16:creationId xmlns:a16="http://schemas.microsoft.com/office/drawing/2014/main" id="{D380C7F2-6F8C-40AB-A3EF-003022DCCFC9}"/>
               </a:ext>
             </a:extLst>
           </p:cNvPr>
@@ -7123,7 +7123,7 @@
           <p:cNvPr id="11" name="Rectangle 10">
             <a:extLst>
               <a:ext uri="{FF2B5EF4-FFF2-40B4-BE49-F238E27FC236}">
-                <a16:creationId xmlns:a16="http://schemas.microsoft.com/office/drawing/2014/main" id="{3EE57096-8FA1-4635-94B6-1ED62D7381A4}"/>
+                <a16:creationId xmlns:a16="http://schemas.microsoft.com/office/drawing/2014/main" id="{C04A377D-ACE3-4FD1-84EE-A87288913DDC}"/>
               </a:ext>
             </a:extLst>
           </p:cNvPr>
@@ -7154,7 +7154,7 @@
           <p:cNvPr id="12" name="Rectangle 11">
             <a:extLst>
               <a:ext uri="{FF2B5EF4-FFF2-40B4-BE49-F238E27FC236}">
-                <a16:creationId xmlns:a16="http://schemas.microsoft.com/office/drawing/2014/main" id="{E05FA632-D19F-4E60-BA4E-B6D68B9D8133}"/>
+                <a16:creationId xmlns:a16="http://schemas.microsoft.com/office/drawing/2014/main" id="{7F958384-3990-4AC5-BB82-F0293F50C26C}"/>
               </a:ext>
             </a:extLst>
           </p:cNvPr>
@@ -7216,7 +7216,7 @@
           <p:cNvPr id="13" name="Rectangle 12">
             <a:extLst>
               <a:ext uri="{FF2B5EF4-FFF2-40B4-BE49-F238E27FC236}">
-                <a16:creationId xmlns:a16="http://schemas.microsoft.com/office/drawing/2014/main" id="{64DEDE8B-C17A-49B3-8473-8ECDE3972A74}"/>
+                <a16:creationId xmlns:a16="http://schemas.microsoft.com/office/drawing/2014/main" id="{F6E91B65-7234-4522-83DF-6E07990ECB10}"/>
               </a:ext>
             </a:extLst>
           </p:cNvPr>
@@ -7341,7 +7341,7 @@
           <p:cNvPr id="14" name="Rectangle 13">
             <a:extLst>
               <a:ext uri="{FF2B5EF4-FFF2-40B4-BE49-F238E27FC236}">
-                <a16:creationId xmlns:a16="http://schemas.microsoft.com/office/drawing/2014/main" id="{DDD45305-F8D6-4622-99A7-77E06B329755}"/>
+                <a16:creationId xmlns:a16="http://schemas.microsoft.com/office/drawing/2014/main" id="{DB46C1FB-20A8-44DB-AAFB-34BDD17D9DD2}"/>
               </a:ext>
             </a:extLst>
           </p:cNvPr>
@@ -7403,7 +7403,7 @@
           <p:cNvPr id="15" name="Rectangle 14">
             <a:extLst>
               <a:ext uri="{FF2B5EF4-FFF2-40B4-BE49-F238E27FC236}">
-                <a16:creationId xmlns:a16="http://schemas.microsoft.com/office/drawing/2014/main" id="{939035B7-1342-4867-AA3C-1DBBD99D547F}"/>
+                <a16:creationId xmlns:a16="http://schemas.microsoft.com/office/drawing/2014/main" id="{29373A3C-634D-4CA5-A2AD-DC8D06377822}"/>
               </a:ext>
             </a:extLst>
           </p:cNvPr>
@@ -7528,7 +7528,7 @@
           <p:cNvPr id="16" name="Rectangle: Rounded Corners 15">
             <a:extLst>
               <a:ext uri="{FF2B5EF4-FFF2-40B4-BE49-F238E27FC236}">
-                <a16:creationId xmlns:a16="http://schemas.microsoft.com/office/drawing/2014/main" id="{27262A12-82E4-4DEE-A9CB-382CB6B27E2C}"/>
+                <a16:creationId xmlns:a16="http://schemas.microsoft.com/office/drawing/2014/main" id="{B327ED4A-E8C3-4A16-A528-68B0ECD8B1FF}"/>
               </a:ext>
             </a:extLst>
           </p:cNvPr>
@@ -7561,7 +7561,7 @@
           <p:cNvPr id="17" name="Rectangle 16">
             <a:extLst>
               <a:ext uri="{FF2B5EF4-FFF2-40B4-BE49-F238E27FC236}">
-                <a16:creationId xmlns:a16="http://schemas.microsoft.com/office/drawing/2014/main" id="{F9319CED-7964-4008-ADBA-E224AE652339}"/>
+                <a16:creationId xmlns:a16="http://schemas.microsoft.com/office/drawing/2014/main" id="{A16CAD56-3B67-4C9D-97BA-FC40845DA8BC}"/>
               </a:ext>
             </a:extLst>
           </p:cNvPr>
@@ -7623,7 +7623,7 @@
           <p:cNvPr id="18" name="Rectangle 17">
             <a:extLst>
               <a:ext uri="{FF2B5EF4-FFF2-40B4-BE49-F238E27FC236}">
-                <a16:creationId xmlns:a16="http://schemas.microsoft.com/office/drawing/2014/main" id="{1A40DFD5-FD28-4DAA-8781-9FD25D8D5CE4}"/>
+                <a16:creationId xmlns:a16="http://schemas.microsoft.com/office/drawing/2014/main" id="{9504120A-E218-41FB-AB5D-AC41588C1D0F}"/>
               </a:ext>
             </a:extLst>
           </p:cNvPr>
@@ -7654,7 +7654,7 @@
           <p:cNvPr id="19" name="Rectangle 18">
             <a:extLst>
               <a:ext uri="{FF2B5EF4-FFF2-40B4-BE49-F238E27FC236}">
-                <a16:creationId xmlns:a16="http://schemas.microsoft.com/office/drawing/2014/main" id="{22AEDAAC-6C2C-4A59-A4AC-507C4FFAFB55}"/>
+                <a16:creationId xmlns:a16="http://schemas.microsoft.com/office/drawing/2014/main" id="{47D3A1F3-944C-4D66-8E27-78ABE84F1AC3}"/>
               </a:ext>
             </a:extLst>
           </p:cNvPr>
@@ -7706,7 +7706,7 @@
                 <a:ea typeface="Arial"/>
                 <a:cs typeface="Arial"/>
               </a:rPr>
-              <a:t>r2z-d4c8d4cc709a · scn-e0f12f397e · prt-fd6de9d793</a:t>
+              <a:t>r2z-a7181752a17d · scn-e0f12f397e · prt-fd6de9d793</a:t>
             </a:r>
           </a:p>
         </p:txBody>
@@ -7716,7 +7716,7 @@
           <p:cNvPr id="20" name="Rectangle 19">
             <a:extLst>
               <a:ext uri="{FF2B5EF4-FFF2-40B4-BE49-F238E27FC236}">
-                <a16:creationId xmlns:a16="http://schemas.microsoft.com/office/drawing/2014/main" id="{F89604B7-B701-48AA-851F-650E55DF9AFE}"/>
+                <a16:creationId xmlns:a16="http://schemas.microsoft.com/office/drawing/2014/main" id="{71C6497C-8380-41D8-BA0D-281FDB2C6FBB}"/>
               </a:ext>
             </a:extLst>
           </p:cNvPr>
@@ -7776,7 +7776,7 @@
     </p:spTree>
     <p:extLst>
       <p:ext uri="{BB962C8B-B14F-4D97-AF65-F5344CB8AC3E}">
-        <p14:creationId xmlns:p14="http://schemas.microsoft.com/office/powerpoint/2010/main" val="1470035380"/>
+        <p14:creationId xmlns:p14="http://schemas.microsoft.com/office/powerpoint/2010/main" val="181387353"/>
       </p:ext>
     </p:extLst>
   </p:cSld>
@@ -7817,7 +7817,7 @@
             <a:hlinkClick r:id="rId3"/>
             <a:extLst>
               <a:ext uri="{FF2B5EF4-FFF2-40B4-BE49-F238E27FC236}">
-                <a16:creationId xmlns:a16="http://schemas.microsoft.com/office/drawing/2014/main" id="{C4EF6089-B836-4C6A-8CAA-7AF565766F10}"/>
+                <a16:creationId xmlns:a16="http://schemas.microsoft.com/office/drawing/2014/main" id="{70A6CFFD-B977-44D5-9617-CA4B87865C24}"/>
               </a:ext>
             </a:extLst>
           </p:cNvPr>
@@ -7892,7 +7892,7 @@
             <a:hlinkClick r:id="rId4"/>
             <a:extLst>
               <a:ext uri="{FF2B5EF4-FFF2-40B4-BE49-F238E27FC236}">
-                <a16:creationId xmlns:a16="http://schemas.microsoft.com/office/drawing/2014/main" id="{B658AF49-86A8-4B90-99CE-D1364E5C2204}"/>
+                <a16:creationId xmlns:a16="http://schemas.microsoft.com/office/drawing/2014/main" id="{1146DC48-DF4B-48B1-9B9F-F4002DB6A584}"/>
               </a:ext>
             </a:extLst>
           </p:cNvPr>
@@ -7966,7 +7966,7 @@
           <p:cNvPr id="3" name="Rectangle 2">
             <a:extLst>
               <a:ext uri="{FF2B5EF4-FFF2-40B4-BE49-F238E27FC236}">
-                <a16:creationId xmlns:a16="http://schemas.microsoft.com/office/drawing/2014/main" id="{A00B3F0E-E3B1-4716-A53F-324CFF3FB5FB}"/>
+                <a16:creationId xmlns:a16="http://schemas.microsoft.com/office/drawing/2014/main" id="{7162EC84-A673-4521-BE16-617122379F8A}"/>
               </a:ext>
             </a:extLst>
           </p:cNvPr>
@@ -8028,7 +8028,7 @@
           <p:cNvPr id="4" name="Rectangle 3">
             <a:extLst>
               <a:ext uri="{FF2B5EF4-FFF2-40B4-BE49-F238E27FC236}">
-                <a16:creationId xmlns:a16="http://schemas.microsoft.com/office/drawing/2014/main" id="{FF322064-E689-4535-BD23-3609D042A448}"/>
+                <a16:creationId xmlns:a16="http://schemas.microsoft.com/office/drawing/2014/main" id="{81B9190E-4B4B-4CFF-A465-3A431E7A07AF}"/>
               </a:ext>
             </a:extLst>
           </p:cNvPr>
@@ -8090,7 +8090,7 @@
           <p:cNvPr id="5" name="Rectangle: Rounded Corners 4">
             <a:extLst>
               <a:ext uri="{FF2B5EF4-FFF2-40B4-BE49-F238E27FC236}">
-                <a16:creationId xmlns:a16="http://schemas.microsoft.com/office/drawing/2014/main" id="{5621A821-14DF-42F1-B240-F3EFDFBE8551}"/>
+                <a16:creationId xmlns:a16="http://schemas.microsoft.com/office/drawing/2014/main" id="{668ECF18-6BBA-4DD9-A423-554E8C2BF0FB}"/>
               </a:ext>
             </a:extLst>
           </p:cNvPr>
@@ -8123,7 +8123,7 @@
           <p:cNvPr id="6" name="Rectangle 5">
             <a:extLst>
               <a:ext uri="{FF2B5EF4-FFF2-40B4-BE49-F238E27FC236}">
-                <a16:creationId xmlns:a16="http://schemas.microsoft.com/office/drawing/2014/main" id="{3131A480-0DCF-4B26-95A3-15484EE7EB28}"/>
+                <a16:creationId xmlns:a16="http://schemas.microsoft.com/office/drawing/2014/main" id="{1B854C3B-9DBD-4BA0-8273-5B2FB2138E49}"/>
               </a:ext>
             </a:extLst>
           </p:cNvPr>
@@ -8185,7 +8185,7 @@
           <p:cNvPr id="7" name="Rectangle 6">
             <a:extLst>
               <a:ext uri="{FF2B5EF4-FFF2-40B4-BE49-F238E27FC236}">
-                <a16:creationId xmlns:a16="http://schemas.microsoft.com/office/drawing/2014/main" id="{7D66A3C0-6C10-40B2-AD2B-12E33BEFF4F7}"/>
+                <a16:creationId xmlns:a16="http://schemas.microsoft.com/office/drawing/2014/main" id="{E539AEA9-911F-4BA9-999D-572187A280E5}"/>
               </a:ext>
             </a:extLst>
           </p:cNvPr>
@@ -8247,7 +8247,7 @@
           <p:cNvPr id="8" name="Rectangle 7">
             <a:extLst>
               <a:ext uri="{FF2B5EF4-FFF2-40B4-BE49-F238E27FC236}">
-                <a16:creationId xmlns:a16="http://schemas.microsoft.com/office/drawing/2014/main" id="{D8156849-968A-457F-A64A-44DEB31FCEED}"/>
+                <a16:creationId xmlns:a16="http://schemas.microsoft.com/office/drawing/2014/main" id="{B11B0046-999B-49D4-B00E-3CC8747C8D07}"/>
               </a:ext>
             </a:extLst>
           </p:cNvPr>
@@ -8309,7 +8309,7 @@
           <p:cNvPr id="9" name="Rectangle 8">
             <a:extLst>
               <a:ext uri="{FF2B5EF4-FFF2-40B4-BE49-F238E27FC236}">
-                <a16:creationId xmlns:a16="http://schemas.microsoft.com/office/drawing/2014/main" id="{D8209A3E-562C-47D8-BEC4-DDBBF5D5F013}"/>
+                <a16:creationId xmlns:a16="http://schemas.microsoft.com/office/drawing/2014/main" id="{FC519487-E103-48A6-AAAF-4CE388F5CAAB}"/>
               </a:ext>
             </a:extLst>
           </p:cNvPr>
@@ -8371,7 +8371,7 @@
           <p:cNvPr id="10" name="Rectangle 9">
             <a:extLst>
               <a:ext uri="{FF2B5EF4-FFF2-40B4-BE49-F238E27FC236}">
-                <a16:creationId xmlns:a16="http://schemas.microsoft.com/office/drawing/2014/main" id="{876017E8-7764-420A-8024-4066233E4826}"/>
+                <a16:creationId xmlns:a16="http://schemas.microsoft.com/office/drawing/2014/main" id="{1C615A2A-6A16-43C7-9176-A585C34EAB97}"/>
               </a:ext>
             </a:extLst>
           </p:cNvPr>
@@ -8433,7 +8433,7 @@
           <p:cNvPr id="11" name="Rectangle 10">
             <a:extLst>
               <a:ext uri="{FF2B5EF4-FFF2-40B4-BE49-F238E27FC236}">
-                <a16:creationId xmlns:a16="http://schemas.microsoft.com/office/drawing/2014/main" id="{59C7C0E9-8D66-4BC8-98E2-4D19EFD9C062}"/>
+                <a16:creationId xmlns:a16="http://schemas.microsoft.com/office/drawing/2014/main" id="{9869F757-7942-41AE-8873-FA718164CDC1}"/>
               </a:ext>
             </a:extLst>
           </p:cNvPr>
@@ -8495,7 +8495,7 @@
           <p:cNvPr id="12" name="Rectangle 11">
             <a:extLst>
               <a:ext uri="{FF2B5EF4-FFF2-40B4-BE49-F238E27FC236}">
-                <a16:creationId xmlns:a16="http://schemas.microsoft.com/office/drawing/2014/main" id="{2E944B10-0B10-4EE6-9188-8AAEA9C60892}"/>
+                <a16:creationId xmlns:a16="http://schemas.microsoft.com/office/drawing/2014/main" id="{D9A77534-9358-4AEA-A52C-680B98B6D65A}"/>
               </a:ext>
             </a:extLst>
           </p:cNvPr>
@@ -8557,7 +8557,7 @@
           <p:cNvPr id="13" name="Rectangle 12">
             <a:extLst>
               <a:ext uri="{FF2B5EF4-FFF2-40B4-BE49-F238E27FC236}">
-                <a16:creationId xmlns:a16="http://schemas.microsoft.com/office/drawing/2014/main" id="{F3059AF3-92A2-48CC-A4B2-3145E168CDEB}"/>
+                <a16:creationId xmlns:a16="http://schemas.microsoft.com/office/drawing/2014/main" id="{5A187AAC-6FC3-4C99-A494-AD7B80368D42}"/>
               </a:ext>
             </a:extLst>
           </p:cNvPr>
@@ -8619,7 +8619,7 @@
           <p:cNvPr id="14" name="Rectangle 13">
             <a:extLst>
               <a:ext uri="{FF2B5EF4-FFF2-40B4-BE49-F238E27FC236}">
-                <a16:creationId xmlns:a16="http://schemas.microsoft.com/office/drawing/2014/main" id="{8DFE8C44-727E-463A-AD45-A18E9F94C329}"/>
+                <a16:creationId xmlns:a16="http://schemas.microsoft.com/office/drawing/2014/main" id="{9DECC530-A383-4B93-ABD5-D29A1D527D07}"/>
               </a:ext>
             </a:extLst>
           </p:cNvPr>
@@ -8681,7 +8681,7 @@
           <p:cNvPr id="15" name="Rectangle 14">
             <a:extLst>
               <a:ext uri="{FF2B5EF4-FFF2-40B4-BE49-F238E27FC236}">
-                <a16:creationId xmlns:a16="http://schemas.microsoft.com/office/drawing/2014/main" id="{8A6909BF-552F-4EA8-803C-9938E16B20A1}"/>
+                <a16:creationId xmlns:a16="http://schemas.microsoft.com/office/drawing/2014/main" id="{9F03ADC7-CE55-4E58-90F1-925D7AB6B4AC}"/>
               </a:ext>
             </a:extLst>
           </p:cNvPr>
@@ -8743,7 +8743,7 @@
           <p:cNvPr id="16" name="Rectangle 15">
             <a:extLst>
               <a:ext uri="{FF2B5EF4-FFF2-40B4-BE49-F238E27FC236}">
-                <a16:creationId xmlns:a16="http://schemas.microsoft.com/office/drawing/2014/main" id="{2A4FD559-5ABB-4F91-BAD7-19C6817D94A3}"/>
+                <a16:creationId xmlns:a16="http://schemas.microsoft.com/office/drawing/2014/main" id="{0CFAF3F5-BF09-44ED-A9CB-EB80BBE10401}"/>
               </a:ext>
             </a:extLst>
           </p:cNvPr>
@@ -8805,7 +8805,7 @@
           <p:cNvPr id="17" name="Rectangle: Rounded Corners 16">
             <a:extLst>
               <a:ext uri="{FF2B5EF4-FFF2-40B4-BE49-F238E27FC236}">
-                <a16:creationId xmlns:a16="http://schemas.microsoft.com/office/drawing/2014/main" id="{C9C69911-8F36-4A86-8688-C0AF37B81D90}"/>
+                <a16:creationId xmlns:a16="http://schemas.microsoft.com/office/drawing/2014/main" id="{03C92DA8-BC00-413B-9499-C15C3D219ED3}"/>
               </a:ext>
             </a:extLst>
           </p:cNvPr>
@@ -8838,7 +8838,7 @@
           <p:cNvPr id="18" name="Rectangle 17">
             <a:extLst>
               <a:ext uri="{FF2B5EF4-FFF2-40B4-BE49-F238E27FC236}">
-                <a16:creationId xmlns:a16="http://schemas.microsoft.com/office/drawing/2014/main" id="{48D98497-2307-4201-8762-871C47079F40}"/>
+                <a16:creationId xmlns:a16="http://schemas.microsoft.com/office/drawing/2014/main" id="{464B1D29-B1E3-4C44-9C12-3996B4AC080E}"/>
               </a:ext>
             </a:extLst>
           </p:cNvPr>
@@ -8900,7 +8900,7 @@
           <p:cNvPr id="19" name="Rectangle 18">
             <a:extLst>
               <a:ext uri="{FF2B5EF4-FFF2-40B4-BE49-F238E27FC236}">
-                <a16:creationId xmlns:a16="http://schemas.microsoft.com/office/drawing/2014/main" id="{67A0F926-0BF7-45E4-B1C1-A4FD838452E2}"/>
+                <a16:creationId xmlns:a16="http://schemas.microsoft.com/office/drawing/2014/main" id="{AE8C9EC9-0A0B-47FF-A1AA-09C308166E8D}"/>
               </a:ext>
             </a:extLst>
           </p:cNvPr>
@@ -8962,7 +8962,7 @@
           <p:cNvPr id="20" name="Rectangle 19">
             <a:extLst>
               <a:ext uri="{FF2B5EF4-FFF2-40B4-BE49-F238E27FC236}">
-                <a16:creationId xmlns:a16="http://schemas.microsoft.com/office/drawing/2014/main" id="{8BD7221A-BA07-4F3F-8567-1551BCDD99F8}"/>
+                <a16:creationId xmlns:a16="http://schemas.microsoft.com/office/drawing/2014/main" id="{E594D0C1-58B7-4F16-B5EC-50CBDAD5CF3F}"/>
               </a:ext>
             </a:extLst>
           </p:cNvPr>
@@ -9024,7 +9024,7 @@
           <p:cNvPr id="21" name="Rectangle 20">
             <a:extLst>
               <a:ext uri="{FF2B5EF4-FFF2-40B4-BE49-F238E27FC236}">
-                <a16:creationId xmlns:a16="http://schemas.microsoft.com/office/drawing/2014/main" id="{630FFC6C-6D0C-4337-89BB-E58245798633}"/>
+                <a16:creationId xmlns:a16="http://schemas.microsoft.com/office/drawing/2014/main" id="{DACD9F13-1BF6-4D80-B8CC-FAA17C5AABD3}"/>
               </a:ext>
             </a:extLst>
           </p:cNvPr>
@@ -9086,7 +9086,7 @@
           <p:cNvPr id="22" name="Rectangle 21">
             <a:extLst>
               <a:ext uri="{FF2B5EF4-FFF2-40B4-BE49-F238E27FC236}">
-                <a16:creationId xmlns:a16="http://schemas.microsoft.com/office/drawing/2014/main" id="{7F981B56-49A1-45E6-88F4-D6171A04070D}"/>
+                <a16:creationId xmlns:a16="http://schemas.microsoft.com/office/drawing/2014/main" id="{DEADE6B3-9B62-4A74-8659-189E8C58DA11}"/>
               </a:ext>
             </a:extLst>
           </p:cNvPr>
@@ -9148,7 +9148,7 @@
           <p:cNvPr id="23" name="Rectangle 22">
             <a:extLst>
               <a:ext uri="{FF2B5EF4-FFF2-40B4-BE49-F238E27FC236}">
-                <a16:creationId xmlns:a16="http://schemas.microsoft.com/office/drawing/2014/main" id="{7235A99F-7449-4E79-A841-C6AD99925D0C}"/>
+                <a16:creationId xmlns:a16="http://schemas.microsoft.com/office/drawing/2014/main" id="{D3D7BC91-7A79-4F52-B9BF-EE6DDFBB1CBA}"/>
               </a:ext>
             </a:extLst>
           </p:cNvPr>
@@ -9210,7 +9210,7 @@
           <p:cNvPr id="24" name="Rectangle 23">
             <a:extLst>
               <a:ext uri="{FF2B5EF4-FFF2-40B4-BE49-F238E27FC236}">
-                <a16:creationId xmlns:a16="http://schemas.microsoft.com/office/drawing/2014/main" id="{DBAEB11B-F363-4C87-96D6-03B10CDEB091}"/>
+                <a16:creationId xmlns:a16="http://schemas.microsoft.com/office/drawing/2014/main" id="{547350A9-CA26-42D2-BF82-4D9B2036E380}"/>
               </a:ext>
             </a:extLst>
           </p:cNvPr>
@@ -9272,7 +9272,7 @@
           <p:cNvPr id="25" name="Rectangle 24">
             <a:extLst>
               <a:ext uri="{FF2B5EF4-FFF2-40B4-BE49-F238E27FC236}">
-                <a16:creationId xmlns:a16="http://schemas.microsoft.com/office/drawing/2014/main" id="{D4FCC7EE-4581-410A-B655-82E05D450820}"/>
+                <a16:creationId xmlns:a16="http://schemas.microsoft.com/office/drawing/2014/main" id="{FAB66063-A5FE-471C-B81C-743982CA978F}"/>
               </a:ext>
             </a:extLst>
           </p:cNvPr>
@@ -9334,7 +9334,7 @@
           <p:cNvPr id="26" name="Rectangle 25">
             <a:extLst>
               <a:ext uri="{FF2B5EF4-FFF2-40B4-BE49-F238E27FC236}">
-                <a16:creationId xmlns:a16="http://schemas.microsoft.com/office/drawing/2014/main" id="{22C85DB7-4930-412E-A52A-8A82A7252B11}"/>
+                <a16:creationId xmlns:a16="http://schemas.microsoft.com/office/drawing/2014/main" id="{057F86B4-8F76-4CC8-96FF-9C9FC84A4F14}"/>
               </a:ext>
             </a:extLst>
           </p:cNvPr>
@@ -9396,7 +9396,7 @@
           <p:cNvPr id="27" name="Rectangle 26">
             <a:extLst>
               <a:ext uri="{FF2B5EF4-FFF2-40B4-BE49-F238E27FC236}">
-                <a16:creationId xmlns:a16="http://schemas.microsoft.com/office/drawing/2014/main" id="{42CE0FA3-9C5C-4262-9E7B-7F033347D69F}"/>
+                <a16:creationId xmlns:a16="http://schemas.microsoft.com/office/drawing/2014/main" id="{7C7825AF-4472-4B7D-8300-4775F33ABBC8}"/>
               </a:ext>
             </a:extLst>
           </p:cNvPr>
@@ -9458,7 +9458,7 @@
           <p:cNvPr id="28" name="Rectangle 27">
             <a:extLst>
               <a:ext uri="{FF2B5EF4-FFF2-40B4-BE49-F238E27FC236}">
-                <a16:creationId xmlns:a16="http://schemas.microsoft.com/office/drawing/2014/main" id="{7A36658C-A062-4A45-B214-061546CF1E01}"/>
+                <a16:creationId xmlns:a16="http://schemas.microsoft.com/office/drawing/2014/main" id="{87A4BF96-2509-4055-906A-3316977CA3F7}"/>
               </a:ext>
             </a:extLst>
           </p:cNvPr>
@@ -9520,7 +9520,7 @@
           <p:cNvPr id="29" name="Rectangle: Rounded Corners 28">
             <a:extLst>
               <a:ext uri="{FF2B5EF4-FFF2-40B4-BE49-F238E27FC236}">
-                <a16:creationId xmlns:a16="http://schemas.microsoft.com/office/drawing/2014/main" id="{A32E838D-20A7-4E61-BA59-2CBCC81B5FE1}"/>
+                <a16:creationId xmlns:a16="http://schemas.microsoft.com/office/drawing/2014/main" id="{9DB2823D-EC15-4B3B-B797-31557195E215}"/>
               </a:ext>
             </a:extLst>
           </p:cNvPr>
@@ -9553,7 +9553,7 @@
           <p:cNvPr id="30" name="Rectangle 29">
             <a:extLst>
               <a:ext uri="{FF2B5EF4-FFF2-40B4-BE49-F238E27FC236}">
-                <a16:creationId xmlns:a16="http://schemas.microsoft.com/office/drawing/2014/main" id="{A84EF773-070F-497C-96EF-21A05AFFC75B}"/>
+                <a16:creationId xmlns:a16="http://schemas.microsoft.com/office/drawing/2014/main" id="{185CC619-7C49-4AED-85DD-089D326CA7B8}"/>
               </a:ext>
             </a:extLst>
           </p:cNvPr>
@@ -9615,7 +9615,7 @@
           <p:cNvPr id="31" name="Rectangle 30">
             <a:extLst>
               <a:ext uri="{FF2B5EF4-FFF2-40B4-BE49-F238E27FC236}">
-                <a16:creationId xmlns:a16="http://schemas.microsoft.com/office/drawing/2014/main" id="{DF9A60DE-C2C2-4164-93AC-D6EE5EAD649C}"/>
+                <a16:creationId xmlns:a16="http://schemas.microsoft.com/office/drawing/2014/main" id="{C5748E5B-AD8E-4B49-88F3-C0E081CBA3A7}"/>
               </a:ext>
             </a:extLst>
           </p:cNvPr>
@@ -9646,7 +9646,7 @@
           <p:cNvPr id="32" name="Rectangle 31">
             <a:extLst>
               <a:ext uri="{FF2B5EF4-FFF2-40B4-BE49-F238E27FC236}">
-                <a16:creationId xmlns:a16="http://schemas.microsoft.com/office/drawing/2014/main" id="{154A2F07-D761-4266-AB81-ED6D9982D4DC}"/>
+                <a16:creationId xmlns:a16="http://schemas.microsoft.com/office/drawing/2014/main" id="{02845308-899A-4B22-867F-CB4FBDEB2CDB}"/>
               </a:ext>
             </a:extLst>
           </p:cNvPr>
@@ -9698,7 +9698,7 @@
                 <a:ea typeface="Arial"/>
                 <a:cs typeface="Arial"/>
               </a:rPr>
-              <a:t>r2z-d4c8d4cc709a · scn-e0f12f397e · prt-fd6de9d793</a:t>
+              <a:t>r2z-a7181752a17d · scn-e0f12f397e · prt-fd6de9d793</a:t>
             </a:r>
           </a:p>
         </p:txBody>
@@ -9708,7 +9708,7 @@
           <p:cNvPr id="33" name="Rectangle 32">
             <a:extLst>
               <a:ext uri="{FF2B5EF4-FFF2-40B4-BE49-F238E27FC236}">
-                <a16:creationId xmlns:a16="http://schemas.microsoft.com/office/drawing/2014/main" id="{618C80D8-B308-4E7A-BE46-1A5189D8391C}"/>
+                <a16:creationId xmlns:a16="http://schemas.microsoft.com/office/drawing/2014/main" id="{A7AEEE77-1466-4F4E-82AA-37A3E31D41EF}"/>
               </a:ext>
             </a:extLst>
           </p:cNvPr>
@@ -9768,7 +9768,7 @@
     </p:spTree>
     <p:extLst>
       <p:ext uri="{BB962C8B-B14F-4D97-AF65-F5344CB8AC3E}">
-        <p14:creationId xmlns:p14="http://schemas.microsoft.com/office/powerpoint/2010/main" val="710031829"/>
+        <p14:creationId xmlns:p14="http://schemas.microsoft.com/office/powerpoint/2010/main" val="1643317236"/>
       </p:ext>
     </p:extLst>
   </p:cSld>
@@ -9809,7 +9809,7 @@
             <a:hlinkClick r:id="rId3"/>
             <a:extLst>
               <a:ext uri="{FF2B5EF4-FFF2-40B4-BE49-F238E27FC236}">
-                <a16:creationId xmlns:a16="http://schemas.microsoft.com/office/drawing/2014/main" id="{D75311E7-596D-4714-A2DF-39EA651E06D5}"/>
+                <a16:creationId xmlns:a16="http://schemas.microsoft.com/office/drawing/2014/main" id="{BCF19579-A9C8-4C3A-8848-601AF17BBEF2}"/>
               </a:ext>
             </a:extLst>
           </p:cNvPr>
@@ -9884,7 +9884,7 @@
             <a:hlinkClick r:id="rId4"/>
             <a:extLst>
               <a:ext uri="{FF2B5EF4-FFF2-40B4-BE49-F238E27FC236}">
-                <a16:creationId xmlns:a16="http://schemas.microsoft.com/office/drawing/2014/main" id="{C1D8CD39-FADB-4B2D-AA77-074961EA2D1F}"/>
+                <a16:creationId xmlns:a16="http://schemas.microsoft.com/office/drawing/2014/main" id="{B2EF4DC6-0CA6-4924-80CF-27D69A1A183B}"/>
               </a:ext>
             </a:extLst>
           </p:cNvPr>
@@ -9958,7 +9958,7 @@
           <p:cNvPr id="3" name="Rectangle 2">
             <a:extLst>
               <a:ext uri="{FF2B5EF4-FFF2-40B4-BE49-F238E27FC236}">
-                <a16:creationId xmlns:a16="http://schemas.microsoft.com/office/drawing/2014/main" id="{D3A33A94-057F-4564-AB3F-259D0B46C220}"/>
+                <a16:creationId xmlns:a16="http://schemas.microsoft.com/office/drawing/2014/main" id="{C8493178-5CE3-4307-92F2-DE0132798459}"/>
               </a:ext>
             </a:extLst>
           </p:cNvPr>
@@ -10020,7 +10020,7 @@
           <p:cNvPr id="4" name="Rectangle 3">
             <a:extLst>
               <a:ext uri="{FF2B5EF4-FFF2-40B4-BE49-F238E27FC236}">
-                <a16:creationId xmlns:a16="http://schemas.microsoft.com/office/drawing/2014/main" id="{94833F52-4169-4CE1-B11D-7D7213FCE6FA}"/>
+                <a16:creationId xmlns:a16="http://schemas.microsoft.com/office/drawing/2014/main" id="{55FA302E-AB7C-46D6-B299-65C12D2053C8}"/>
               </a:ext>
             </a:extLst>
           </p:cNvPr>
@@ -10106,7 +10106,7 @@
           <p:cNvPr id="6" name="Rectangle: Rounded Corners 5">
             <a:extLst>
               <a:ext uri="{FF2B5EF4-FFF2-40B4-BE49-F238E27FC236}">
-                <a16:creationId xmlns:a16="http://schemas.microsoft.com/office/drawing/2014/main" id="{A592ADBD-0FC9-4529-B83D-011CB2925D84}"/>
+                <a16:creationId xmlns:a16="http://schemas.microsoft.com/office/drawing/2014/main" id="{717144B4-54D4-4879-AF44-72B55F3C9F99}"/>
               </a:ext>
             </a:extLst>
           </p:cNvPr>
@@ -10139,7 +10139,7 @@
           <p:cNvPr id="7" name="Rectangle 6">
             <a:extLst>
               <a:ext uri="{FF2B5EF4-FFF2-40B4-BE49-F238E27FC236}">
-                <a16:creationId xmlns:a16="http://schemas.microsoft.com/office/drawing/2014/main" id="{10C8377A-13F7-44A0-8C4F-F395332F0CD2}"/>
+                <a16:creationId xmlns:a16="http://schemas.microsoft.com/office/drawing/2014/main" id="{B906977C-D2A3-4035-A50E-5694E5E49F83}"/>
               </a:ext>
             </a:extLst>
           </p:cNvPr>
@@ -10201,7 +10201,7 @@
           <p:cNvPr id="8" name="Rectangle 7">
             <a:extLst>
               <a:ext uri="{FF2B5EF4-FFF2-40B4-BE49-F238E27FC236}">
-                <a16:creationId xmlns:a16="http://schemas.microsoft.com/office/drawing/2014/main" id="{757F8748-3038-4B4C-82FF-677E32B12795}"/>
+                <a16:creationId xmlns:a16="http://schemas.microsoft.com/office/drawing/2014/main" id="{C13B9BFC-C4EF-42E0-B8E1-83E7C2B3FD34}"/>
               </a:ext>
             </a:extLst>
           </p:cNvPr>
@@ -10263,7 +10263,7 @@
           <p:cNvPr id="9" name="Rectangle 8">
             <a:extLst>
               <a:ext uri="{FF2B5EF4-FFF2-40B4-BE49-F238E27FC236}">
-                <a16:creationId xmlns:a16="http://schemas.microsoft.com/office/drawing/2014/main" id="{6711AC03-2829-44B4-B44D-292F9FA76C73}"/>
+                <a16:creationId xmlns:a16="http://schemas.microsoft.com/office/drawing/2014/main" id="{A27AB7F1-8ABF-4C42-A7F3-D46F39EA503B}"/>
               </a:ext>
             </a:extLst>
           </p:cNvPr>
@@ -10325,7 +10325,7 @@
           <p:cNvPr id="10" name="Rectangle 9">
             <a:extLst>
               <a:ext uri="{FF2B5EF4-FFF2-40B4-BE49-F238E27FC236}">
-                <a16:creationId xmlns:a16="http://schemas.microsoft.com/office/drawing/2014/main" id="{E9D16609-F58F-4467-9CE6-E4A18B5E0F4B}"/>
+                <a16:creationId xmlns:a16="http://schemas.microsoft.com/office/drawing/2014/main" id="{4A32A571-CCB6-4039-9032-C1B4B9E3FE2B}"/>
               </a:ext>
             </a:extLst>
           </p:cNvPr>
@@ -10387,7 +10387,7 @@
           <p:cNvPr id="11" name="Rectangle 10">
             <a:extLst>
               <a:ext uri="{FF2B5EF4-FFF2-40B4-BE49-F238E27FC236}">
-                <a16:creationId xmlns:a16="http://schemas.microsoft.com/office/drawing/2014/main" id="{DA84AF4B-2C29-4088-8BD8-ADCD684BE60F}"/>
+                <a16:creationId xmlns:a16="http://schemas.microsoft.com/office/drawing/2014/main" id="{9A85C61B-057B-4479-975C-6D9BB9256049}"/>
               </a:ext>
             </a:extLst>
           </p:cNvPr>
@@ -10449,7 +10449,7 @@
           <p:cNvPr id="12" name="Rectangle 11">
             <a:extLst>
               <a:ext uri="{FF2B5EF4-FFF2-40B4-BE49-F238E27FC236}">
-                <a16:creationId xmlns:a16="http://schemas.microsoft.com/office/drawing/2014/main" id="{2A845F93-D822-44B4-A604-7E360497D836}"/>
+                <a16:creationId xmlns:a16="http://schemas.microsoft.com/office/drawing/2014/main" id="{DEDBC3E3-58A0-4165-8797-0C51691D7A8C}"/>
               </a:ext>
             </a:extLst>
           </p:cNvPr>
@@ -10511,7 +10511,7 @@
           <p:cNvPr id="13" name="Rectangle 12">
             <a:extLst>
               <a:ext uri="{FF2B5EF4-FFF2-40B4-BE49-F238E27FC236}">
-                <a16:creationId xmlns:a16="http://schemas.microsoft.com/office/drawing/2014/main" id="{B843B491-1681-43E1-83AC-CE0311E83600}"/>
+                <a16:creationId xmlns:a16="http://schemas.microsoft.com/office/drawing/2014/main" id="{260080FF-5953-439D-BC26-1DF424DA6920}"/>
               </a:ext>
             </a:extLst>
           </p:cNvPr>
@@ -10573,7 +10573,7 @@
           <p:cNvPr id="14" name="Rectangle 13">
             <a:extLst>
               <a:ext uri="{FF2B5EF4-FFF2-40B4-BE49-F238E27FC236}">
-                <a16:creationId xmlns:a16="http://schemas.microsoft.com/office/drawing/2014/main" id="{EF6C0151-B837-41A2-AC7F-14352F8499F3}"/>
+                <a16:creationId xmlns:a16="http://schemas.microsoft.com/office/drawing/2014/main" id="{95DDEF96-B674-4097-AFAE-36E1846E79C9}"/>
               </a:ext>
             </a:extLst>
           </p:cNvPr>
@@ -10635,7 +10635,7 @@
           <p:cNvPr id="15" name="Rectangle 14">
             <a:extLst>
               <a:ext uri="{FF2B5EF4-FFF2-40B4-BE49-F238E27FC236}">
-                <a16:creationId xmlns:a16="http://schemas.microsoft.com/office/drawing/2014/main" id="{171AA00F-A78B-4E06-8CAC-6E6B11913F07}"/>
+                <a16:creationId xmlns:a16="http://schemas.microsoft.com/office/drawing/2014/main" id="{EB36BD02-9970-4F31-B834-3F2516B081DB}"/>
               </a:ext>
             </a:extLst>
           </p:cNvPr>
@@ -10666,7 +10666,7 @@
           <p:cNvPr id="16" name="Rectangle 15">
             <a:extLst>
               <a:ext uri="{FF2B5EF4-FFF2-40B4-BE49-F238E27FC236}">
-                <a16:creationId xmlns:a16="http://schemas.microsoft.com/office/drawing/2014/main" id="{B3365FA0-60E1-43F1-AB48-E45562E5C647}"/>
+                <a16:creationId xmlns:a16="http://schemas.microsoft.com/office/drawing/2014/main" id="{150DDD48-FCD5-49FB-9069-9C867E71F78F}"/>
               </a:ext>
             </a:extLst>
           </p:cNvPr>
@@ -10728,7 +10728,7 @@
           <p:cNvPr id="17" name="Rectangle 16">
             <a:extLst>
               <a:ext uri="{FF2B5EF4-FFF2-40B4-BE49-F238E27FC236}">
-                <a16:creationId xmlns:a16="http://schemas.microsoft.com/office/drawing/2014/main" id="{5E03B973-0A88-4786-AA5B-704D427DD7E3}"/>
+                <a16:creationId xmlns:a16="http://schemas.microsoft.com/office/drawing/2014/main" id="{00453BE3-A1CA-47F6-9C64-6DE8E92FEB94}"/>
               </a:ext>
             </a:extLst>
           </p:cNvPr>
@@ -10790,7 +10790,7 @@
           <p:cNvPr id="18" name="Rectangle: Rounded Corners 17">
             <a:extLst>
               <a:ext uri="{FF2B5EF4-FFF2-40B4-BE49-F238E27FC236}">
-                <a16:creationId xmlns:a16="http://schemas.microsoft.com/office/drawing/2014/main" id="{06DBD26B-BDB2-410E-8F3B-4C4D21AF4277}"/>
+                <a16:creationId xmlns:a16="http://schemas.microsoft.com/office/drawing/2014/main" id="{B969757B-DCAE-46C4-9F85-6C23A2439002}"/>
               </a:ext>
             </a:extLst>
           </p:cNvPr>
@@ -10823,7 +10823,7 @@
           <p:cNvPr id="19" name="Rectangle 18">
             <a:extLst>
               <a:ext uri="{FF2B5EF4-FFF2-40B4-BE49-F238E27FC236}">
-                <a16:creationId xmlns:a16="http://schemas.microsoft.com/office/drawing/2014/main" id="{3F2689D2-1E6E-4540-AF0C-26269708D1BC}"/>
+                <a16:creationId xmlns:a16="http://schemas.microsoft.com/office/drawing/2014/main" id="{FCB054A1-E369-4C9D-8E68-A686797009FF}"/>
               </a:ext>
             </a:extLst>
           </p:cNvPr>
@@ -10885,7 +10885,7 @@
           <p:cNvPr id="20" name="Rectangle 19">
             <a:extLst>
               <a:ext uri="{FF2B5EF4-FFF2-40B4-BE49-F238E27FC236}">
-                <a16:creationId xmlns:a16="http://schemas.microsoft.com/office/drawing/2014/main" id="{6C4AD392-E1E4-49D8-A686-0FBB88024456}"/>
+                <a16:creationId xmlns:a16="http://schemas.microsoft.com/office/drawing/2014/main" id="{D8859AEF-1733-474B-8D79-43B68AE721BF}"/>
               </a:ext>
             </a:extLst>
           </p:cNvPr>
@@ -10916,7 +10916,7 @@
           <p:cNvPr id="21" name="Rectangle 20">
             <a:extLst>
               <a:ext uri="{FF2B5EF4-FFF2-40B4-BE49-F238E27FC236}">
-                <a16:creationId xmlns:a16="http://schemas.microsoft.com/office/drawing/2014/main" id="{EF901880-41F6-4FF1-93E1-E56E9A975123}"/>
+                <a16:creationId xmlns:a16="http://schemas.microsoft.com/office/drawing/2014/main" id="{CF36DE4D-D969-4AD4-98D2-B92CBDD5E326}"/>
               </a:ext>
             </a:extLst>
           </p:cNvPr>
@@ -10968,7 +10968,7 @@
                 <a:ea typeface="Arial"/>
                 <a:cs typeface="Arial"/>
               </a:rPr>
-              <a:t>r2z-d4c8d4cc709a · scn-e0f12f397e · prt-fd6de9d793</a:t>
+              <a:t>r2z-a7181752a17d · scn-e0f12f397e · prt-fd6de9d793</a:t>
             </a:r>
           </a:p>
         </p:txBody>
@@ -10978,7 +10978,7 @@
           <p:cNvPr id="22" name="Rectangle 21">
             <a:extLst>
               <a:ext uri="{FF2B5EF4-FFF2-40B4-BE49-F238E27FC236}">
-                <a16:creationId xmlns:a16="http://schemas.microsoft.com/office/drawing/2014/main" id="{21627C5B-8E85-429C-84FF-2E8DDA21B15B}"/>
+                <a16:creationId xmlns:a16="http://schemas.microsoft.com/office/drawing/2014/main" id="{16DF42B5-AE77-415B-9723-A888D9B92D91}"/>
               </a:ext>
             </a:extLst>
           </p:cNvPr>
@@ -11038,7 +11038,7 @@
     </p:spTree>
     <p:extLst>
       <p:ext uri="{BB962C8B-B14F-4D97-AF65-F5344CB8AC3E}">
-        <p14:creationId xmlns:p14="http://schemas.microsoft.com/office/powerpoint/2010/main" val="1218992746"/>
+        <p14:creationId xmlns:p14="http://schemas.microsoft.com/office/powerpoint/2010/main" val="1068102824"/>
       </p:ext>
     </p:extLst>
   </p:cSld>
@@ -11079,7 +11079,7 @@
             <a:hlinkClick r:id="rId3"/>
             <a:extLst>
               <a:ext uri="{FF2B5EF4-FFF2-40B4-BE49-F238E27FC236}">
-                <a16:creationId xmlns:a16="http://schemas.microsoft.com/office/drawing/2014/main" id="{E4A26F34-CF83-4F8C-A92B-77357492ADDB}"/>
+                <a16:creationId xmlns:a16="http://schemas.microsoft.com/office/drawing/2014/main" id="{3AD32648-A15E-4CEE-9AB3-CE3F7188D098}"/>
               </a:ext>
             </a:extLst>
           </p:cNvPr>
@@ -11154,7 +11154,7 @@
             <a:hlinkClick r:id="rId4"/>
             <a:extLst>
               <a:ext uri="{FF2B5EF4-FFF2-40B4-BE49-F238E27FC236}">
-                <a16:creationId xmlns:a16="http://schemas.microsoft.com/office/drawing/2014/main" id="{7B507C45-D309-4C23-9567-2C366B81BE3C}"/>
+                <a16:creationId xmlns:a16="http://schemas.microsoft.com/office/drawing/2014/main" id="{707E9113-DC83-49C1-92DE-94979E9105C2}"/>
               </a:ext>
             </a:extLst>
           </p:cNvPr>
@@ -11228,7 +11228,7 @@
           <p:cNvPr id="3" name="Rectangle 2">
             <a:extLst>
               <a:ext uri="{FF2B5EF4-FFF2-40B4-BE49-F238E27FC236}">
-                <a16:creationId xmlns:a16="http://schemas.microsoft.com/office/drawing/2014/main" id="{CFE924EA-F748-48DC-8A71-E97AAC5519E1}"/>
+                <a16:creationId xmlns:a16="http://schemas.microsoft.com/office/drawing/2014/main" id="{DE6229D7-1F51-4009-B640-E277E4C7FCA0}"/>
               </a:ext>
             </a:extLst>
           </p:cNvPr>
@@ -11290,7 +11290,7 @@
           <p:cNvPr id="4" name="Rectangle 3">
             <a:extLst>
               <a:ext uri="{FF2B5EF4-FFF2-40B4-BE49-F238E27FC236}">
-                <a16:creationId xmlns:a16="http://schemas.microsoft.com/office/drawing/2014/main" id="{2740D231-E6A7-41F0-9713-CBA63AA6276C}"/>
+                <a16:creationId xmlns:a16="http://schemas.microsoft.com/office/drawing/2014/main" id="{9825ADD9-3CB4-4780-9166-7EB83A8C382E}"/>
               </a:ext>
             </a:extLst>
           </p:cNvPr>
@@ -11352,7 +11352,7 @@
           <p:cNvPr id="5" name="Rectangle 4">
             <a:extLst>
               <a:ext uri="{FF2B5EF4-FFF2-40B4-BE49-F238E27FC236}">
-                <a16:creationId xmlns:a16="http://schemas.microsoft.com/office/drawing/2014/main" id="{3CCB52D2-F429-4DC1-B4E1-6FB40063D3DE}"/>
+                <a16:creationId xmlns:a16="http://schemas.microsoft.com/office/drawing/2014/main" id="{75D07E64-CA38-478D-AE37-817492E96DB6}"/>
               </a:ext>
             </a:extLst>
           </p:cNvPr>
@@ -11414,7 +11414,7 @@
           <p:cNvPr id="6" name="Rectangle: Rounded Corners 5">
             <a:extLst>
               <a:ext uri="{FF2B5EF4-FFF2-40B4-BE49-F238E27FC236}">
-                <a16:creationId xmlns:a16="http://schemas.microsoft.com/office/drawing/2014/main" id="{934E3C26-91EF-472C-BF4F-8C54D4CEF22B}"/>
+                <a16:creationId xmlns:a16="http://schemas.microsoft.com/office/drawing/2014/main" id="{9ADFC6FF-837E-49C3-9E83-5FC37ADD3CDD}"/>
               </a:ext>
             </a:extLst>
           </p:cNvPr>
@@ -11447,7 +11447,7 @@
           <p:cNvPr id="7" name="Rectangle: Rounded Corners 6">
             <a:extLst>
               <a:ext uri="{FF2B5EF4-FFF2-40B4-BE49-F238E27FC236}">
-                <a16:creationId xmlns:a16="http://schemas.microsoft.com/office/drawing/2014/main" id="{A9BE9801-3143-4892-9C4E-0EE582B18B2C}"/>
+                <a16:creationId xmlns:a16="http://schemas.microsoft.com/office/drawing/2014/main" id="{D72AAB30-A7A0-4F2E-ACB5-5143B23EDE65}"/>
               </a:ext>
             </a:extLst>
           </p:cNvPr>
@@ -11480,7 +11480,7 @@
           <p:cNvPr id="8" name="Rectangle 7">
             <a:extLst>
               <a:ext uri="{FF2B5EF4-FFF2-40B4-BE49-F238E27FC236}">
-                <a16:creationId xmlns:a16="http://schemas.microsoft.com/office/drawing/2014/main" id="{0426CFFB-2E14-40D7-BE5C-CD1CEB983F75}"/>
+                <a16:creationId xmlns:a16="http://schemas.microsoft.com/office/drawing/2014/main" id="{BF9EC7CE-314A-4A68-B1AB-AE2775DC3338}"/>
               </a:ext>
             </a:extLst>
           </p:cNvPr>
@@ -11542,7 +11542,7 @@
           <p:cNvPr id="9" name="Rectangle 8">
             <a:extLst>
               <a:ext uri="{FF2B5EF4-FFF2-40B4-BE49-F238E27FC236}">
-                <a16:creationId xmlns:a16="http://schemas.microsoft.com/office/drawing/2014/main" id="{8AE122D5-9290-49C8-8355-2D044DD74C1B}"/>
+                <a16:creationId xmlns:a16="http://schemas.microsoft.com/office/drawing/2014/main" id="{189DCE96-B1D8-4180-AEC0-B8FD97C21518}"/>
               </a:ext>
             </a:extLst>
           </p:cNvPr>
@@ -11604,7 +11604,7 @@
           <p:cNvPr id="10" name="Rectangle: Rounded Corners 9">
             <a:extLst>
               <a:ext uri="{FF2B5EF4-FFF2-40B4-BE49-F238E27FC236}">
-                <a16:creationId xmlns:a16="http://schemas.microsoft.com/office/drawing/2014/main" id="{44D792C6-7B2D-499A-99BB-FF10D6BF5D3F}"/>
+                <a16:creationId xmlns:a16="http://schemas.microsoft.com/office/drawing/2014/main" id="{8B408AEF-2A9C-4A9E-BA90-C45BAD35B8E5}"/>
               </a:ext>
             </a:extLst>
           </p:cNvPr>
@@ -11637,7 +11637,7 @@
           <p:cNvPr id="11" name="Rectangle: Rounded Corners 10">
             <a:extLst>
               <a:ext uri="{FF2B5EF4-FFF2-40B4-BE49-F238E27FC236}">
-                <a16:creationId xmlns:a16="http://schemas.microsoft.com/office/drawing/2014/main" id="{7182A5E3-E2A4-48DD-9804-A1A8F36C7A46}"/>
+                <a16:creationId xmlns:a16="http://schemas.microsoft.com/office/drawing/2014/main" id="{65B05C34-17EF-463C-9237-FCA3454F2C8D}"/>
               </a:ext>
             </a:extLst>
           </p:cNvPr>
@@ -11670,7 +11670,7 @@
           <p:cNvPr id="12" name="Rectangle 11">
             <a:extLst>
               <a:ext uri="{FF2B5EF4-FFF2-40B4-BE49-F238E27FC236}">
-                <a16:creationId xmlns:a16="http://schemas.microsoft.com/office/drawing/2014/main" id="{647907F6-7383-465D-B95F-D81801EB5681}"/>
+                <a16:creationId xmlns:a16="http://schemas.microsoft.com/office/drawing/2014/main" id="{4F1F45BC-69A6-4D26-804E-D9909A42E5C0}"/>
               </a:ext>
             </a:extLst>
           </p:cNvPr>
@@ -11732,7 +11732,7 @@
           <p:cNvPr id="13" name="Rectangle 12">
             <a:extLst>
               <a:ext uri="{FF2B5EF4-FFF2-40B4-BE49-F238E27FC236}">
-                <a16:creationId xmlns:a16="http://schemas.microsoft.com/office/drawing/2014/main" id="{F89E480A-64B1-4E8D-88E4-8E044F324888}"/>
+                <a16:creationId xmlns:a16="http://schemas.microsoft.com/office/drawing/2014/main" id="{024E2C89-8948-4BD7-BEC7-D42ABC8035D4}"/>
               </a:ext>
             </a:extLst>
           </p:cNvPr>
@@ -11794,7 +11794,7 @@
           <p:cNvPr id="14" name="Rectangle: Rounded Corners 13">
             <a:extLst>
               <a:ext uri="{FF2B5EF4-FFF2-40B4-BE49-F238E27FC236}">
-                <a16:creationId xmlns:a16="http://schemas.microsoft.com/office/drawing/2014/main" id="{AC6FB745-243A-4EF4-A5D9-3F680A8E14A1}"/>
+                <a16:creationId xmlns:a16="http://schemas.microsoft.com/office/drawing/2014/main" id="{B9A2C4A4-E8EA-4194-B310-C32ACE03D4BF}"/>
               </a:ext>
             </a:extLst>
           </p:cNvPr>
@@ -11827,7 +11827,7 @@
           <p:cNvPr id="15" name="Rectangle: Rounded Corners 14">
             <a:extLst>
               <a:ext uri="{FF2B5EF4-FFF2-40B4-BE49-F238E27FC236}">
-                <a16:creationId xmlns:a16="http://schemas.microsoft.com/office/drawing/2014/main" id="{10FEC83E-DBB5-4F64-9129-F64F1AD6A8F0}"/>
+                <a16:creationId xmlns:a16="http://schemas.microsoft.com/office/drawing/2014/main" id="{2D8431F2-B501-41E0-B8F1-48B1617440AC}"/>
               </a:ext>
             </a:extLst>
           </p:cNvPr>
@@ -11860,7 +11860,7 @@
           <p:cNvPr id="16" name="Rectangle 15">
             <a:extLst>
               <a:ext uri="{FF2B5EF4-FFF2-40B4-BE49-F238E27FC236}">
-                <a16:creationId xmlns:a16="http://schemas.microsoft.com/office/drawing/2014/main" id="{B15A6016-921E-48A6-9C8D-728B657058E7}"/>
+                <a16:creationId xmlns:a16="http://schemas.microsoft.com/office/drawing/2014/main" id="{5004812D-FE1F-4EEE-848B-CAEA6B3B0296}"/>
               </a:ext>
             </a:extLst>
           </p:cNvPr>
@@ -11922,7 +11922,7 @@
           <p:cNvPr id="17" name="Rectangle 16">
             <a:extLst>
               <a:ext uri="{FF2B5EF4-FFF2-40B4-BE49-F238E27FC236}">
-                <a16:creationId xmlns:a16="http://schemas.microsoft.com/office/drawing/2014/main" id="{D812833B-2B04-42EA-883F-EDCD297A359E}"/>
+                <a16:creationId xmlns:a16="http://schemas.microsoft.com/office/drawing/2014/main" id="{1F07C6C3-CC8C-42A8-BC39-185A31982443}"/>
               </a:ext>
             </a:extLst>
           </p:cNvPr>
@@ -11984,7 +11984,7 @@
           <p:cNvPr id="18" name="Rectangle: Rounded Corners 17">
             <a:extLst>
               <a:ext uri="{FF2B5EF4-FFF2-40B4-BE49-F238E27FC236}">
-                <a16:creationId xmlns:a16="http://schemas.microsoft.com/office/drawing/2014/main" id="{41ACFBD5-F5A7-4EFB-91B7-421CF41D077D}"/>
+                <a16:creationId xmlns:a16="http://schemas.microsoft.com/office/drawing/2014/main" id="{E4B517EB-EB63-4DF6-99FC-1F85C5F59D83}"/>
               </a:ext>
             </a:extLst>
           </p:cNvPr>
@@ -12017,7 +12017,7 @@
           <p:cNvPr id="19" name="Rectangle: Rounded Corners 18">
             <a:extLst>
               <a:ext uri="{FF2B5EF4-FFF2-40B4-BE49-F238E27FC236}">
-                <a16:creationId xmlns:a16="http://schemas.microsoft.com/office/drawing/2014/main" id="{0ABE22CB-3EF4-472D-9D86-0DF527BEC91F}"/>
+                <a16:creationId xmlns:a16="http://schemas.microsoft.com/office/drawing/2014/main" id="{7C115AEE-9487-4625-AF6B-50D17147150C}"/>
               </a:ext>
             </a:extLst>
           </p:cNvPr>
@@ -12050,7 +12050,7 @@
           <p:cNvPr id="20" name="Rectangle 19">
             <a:extLst>
               <a:ext uri="{FF2B5EF4-FFF2-40B4-BE49-F238E27FC236}">
-                <a16:creationId xmlns:a16="http://schemas.microsoft.com/office/drawing/2014/main" id="{8ED56DB0-3B36-4DF7-AF8C-2E139AD3ED4F}"/>
+                <a16:creationId xmlns:a16="http://schemas.microsoft.com/office/drawing/2014/main" id="{15DBA65E-D332-4EB8-A265-7291D26CBA69}"/>
               </a:ext>
             </a:extLst>
           </p:cNvPr>
@@ -12112,7 +12112,7 @@
           <p:cNvPr id="21" name="Rectangle: Rounded Corners 20">
             <a:extLst>
               <a:ext uri="{FF2B5EF4-FFF2-40B4-BE49-F238E27FC236}">
-                <a16:creationId xmlns:a16="http://schemas.microsoft.com/office/drawing/2014/main" id="{25D038F7-6643-4B50-897D-A6D8F5A906B9}"/>
+                <a16:creationId xmlns:a16="http://schemas.microsoft.com/office/drawing/2014/main" id="{6A80AE1D-C7F7-43E3-9CF3-96B767F70DC9}"/>
               </a:ext>
             </a:extLst>
           </p:cNvPr>
@@ -12147,7 +12147,7 @@
           <p:cNvPr id="22" name="Rectangle: Rounded Corners 21">
             <a:extLst>
               <a:ext uri="{FF2B5EF4-FFF2-40B4-BE49-F238E27FC236}">
-                <a16:creationId xmlns:a16="http://schemas.microsoft.com/office/drawing/2014/main" id="{5218405F-00EF-409D-A2FD-3EB7906AAF93}"/>
+                <a16:creationId xmlns:a16="http://schemas.microsoft.com/office/drawing/2014/main" id="{B6DB34E3-9FBE-465B-9449-1752189A74B8}"/>
               </a:ext>
             </a:extLst>
           </p:cNvPr>
@@ -12180,7 +12180,7 @@
           <p:cNvPr id="23" name="Rectangle 22">
             <a:extLst>
               <a:ext uri="{FF2B5EF4-FFF2-40B4-BE49-F238E27FC236}">
-                <a16:creationId xmlns:a16="http://schemas.microsoft.com/office/drawing/2014/main" id="{AD916CD2-3920-4D31-8051-7D5362BF682C}"/>
+                <a16:creationId xmlns:a16="http://schemas.microsoft.com/office/drawing/2014/main" id="{EAF001B7-B843-4BB6-B694-2A562130566F}"/>
               </a:ext>
             </a:extLst>
           </p:cNvPr>
@@ -12242,7 +12242,7 @@
           <p:cNvPr id="24" name="Rectangle 23">
             <a:extLst>
               <a:ext uri="{FF2B5EF4-FFF2-40B4-BE49-F238E27FC236}">
-                <a16:creationId xmlns:a16="http://schemas.microsoft.com/office/drawing/2014/main" id="{A8F829DE-0D9E-4C80-960A-0736FE503394}"/>
+                <a16:creationId xmlns:a16="http://schemas.microsoft.com/office/drawing/2014/main" id="{D9A8E197-4EAA-425B-A351-2E242AC324BF}"/>
               </a:ext>
             </a:extLst>
           </p:cNvPr>
@@ -12304,7 +12304,7 @@
           <p:cNvPr id="25" name="Rectangle 24">
             <a:extLst>
               <a:ext uri="{FF2B5EF4-FFF2-40B4-BE49-F238E27FC236}">
-                <a16:creationId xmlns:a16="http://schemas.microsoft.com/office/drawing/2014/main" id="{0AC68867-491B-40F4-819B-A8AEF170212A}"/>
+                <a16:creationId xmlns:a16="http://schemas.microsoft.com/office/drawing/2014/main" id="{FCA2C1E8-1A83-475C-B904-176965B7E57A}"/>
               </a:ext>
             </a:extLst>
           </p:cNvPr>
@@ -12366,7 +12366,7 @@
           <p:cNvPr id="26" name="Rectangle 25">
             <a:extLst>
               <a:ext uri="{FF2B5EF4-FFF2-40B4-BE49-F238E27FC236}">
-                <a16:creationId xmlns:a16="http://schemas.microsoft.com/office/drawing/2014/main" id="{8D0C621B-0F06-4872-8A33-8987F3321401}"/>
+                <a16:creationId xmlns:a16="http://schemas.microsoft.com/office/drawing/2014/main" id="{CFBDA7E2-7C38-4C16-B871-3FE3887D799D}"/>
               </a:ext>
             </a:extLst>
           </p:cNvPr>
@@ -12397,7 +12397,7 @@
           <p:cNvPr id="27" name="Rectangle 26">
             <a:extLst>
               <a:ext uri="{FF2B5EF4-FFF2-40B4-BE49-F238E27FC236}">
-                <a16:creationId xmlns:a16="http://schemas.microsoft.com/office/drawing/2014/main" id="{FA3787DE-8EFE-4D8D-B520-8F0ED1AF003C}"/>
+                <a16:creationId xmlns:a16="http://schemas.microsoft.com/office/drawing/2014/main" id="{59351091-9BB7-4ABE-A9D0-FBAB72F5B88D}"/>
               </a:ext>
             </a:extLst>
           </p:cNvPr>
@@ -12459,7 +12459,7 @@
           <p:cNvPr id="28" name="Rectangle 27">
             <a:extLst>
               <a:ext uri="{FF2B5EF4-FFF2-40B4-BE49-F238E27FC236}">
-                <a16:creationId xmlns:a16="http://schemas.microsoft.com/office/drawing/2014/main" id="{0B5CBD22-117E-41FF-A094-441233CAB167}"/>
+                <a16:creationId xmlns:a16="http://schemas.microsoft.com/office/drawing/2014/main" id="{58BDB768-9FA2-4D7D-8D8C-3CB8112AEC68}"/>
               </a:ext>
             </a:extLst>
           </p:cNvPr>
@@ -12554,7 +12554,7 @@
           <p:cNvPr id="29" name="Rectangle 28">
             <a:extLst>
               <a:ext uri="{FF2B5EF4-FFF2-40B4-BE49-F238E27FC236}">
-                <a16:creationId xmlns:a16="http://schemas.microsoft.com/office/drawing/2014/main" id="{08AB1BB1-6AFD-4CEF-84B1-39D75C0D1CDB}"/>
+                <a16:creationId xmlns:a16="http://schemas.microsoft.com/office/drawing/2014/main" id="{2073492C-3963-45A0-A092-546298B42F1D}"/>
               </a:ext>
             </a:extLst>
           </p:cNvPr>
@@ -12616,7 +12616,7 @@
           <p:cNvPr id="30" name="Rectangle 29">
             <a:extLst>
               <a:ext uri="{FF2B5EF4-FFF2-40B4-BE49-F238E27FC236}">
-                <a16:creationId xmlns:a16="http://schemas.microsoft.com/office/drawing/2014/main" id="{4C753807-30FB-4C8C-A7F5-1F5A0536BBC5}"/>
+                <a16:creationId xmlns:a16="http://schemas.microsoft.com/office/drawing/2014/main" id="{A8BC87B5-6553-4D4E-B262-CB65BCDBEFFE}"/>
               </a:ext>
             </a:extLst>
           </p:cNvPr>
@@ -12647,7 +12647,7 @@
           <p:cNvPr id="31" name="Rectangle 30">
             <a:extLst>
               <a:ext uri="{FF2B5EF4-FFF2-40B4-BE49-F238E27FC236}">
-                <a16:creationId xmlns:a16="http://schemas.microsoft.com/office/drawing/2014/main" id="{736706E7-F066-4877-953B-1DC8FC4CBAEF}"/>
+                <a16:creationId xmlns:a16="http://schemas.microsoft.com/office/drawing/2014/main" id="{784E32AE-ADC6-4854-9968-31A2C172BFE7}"/>
               </a:ext>
             </a:extLst>
           </p:cNvPr>
@@ -12699,7 +12699,7 @@
                 <a:ea typeface="Arial"/>
                 <a:cs typeface="Arial"/>
               </a:rPr>
-              <a:t>r2z-d4c8d4cc709a · scn-e0f12f397e · prt-fd6de9d793</a:t>
+              <a:t>r2z-a7181752a17d · scn-e0f12f397e · prt-fd6de9d793</a:t>
             </a:r>
           </a:p>
         </p:txBody>
@@ -12709,7 +12709,7 @@
           <p:cNvPr id="32" name="Rectangle 31">
             <a:extLst>
               <a:ext uri="{FF2B5EF4-FFF2-40B4-BE49-F238E27FC236}">
-                <a16:creationId xmlns:a16="http://schemas.microsoft.com/office/drawing/2014/main" id="{9610DCF7-8D9C-4342-9747-45ADC338C88D}"/>
+                <a16:creationId xmlns:a16="http://schemas.microsoft.com/office/drawing/2014/main" id="{78BA1171-0994-4D4E-8011-72A63AD1904B}"/>
               </a:ext>
             </a:extLst>
           </p:cNvPr>
@@ -12769,7 +12769,7 @@
     </p:spTree>
     <p:extLst>
       <p:ext uri="{BB962C8B-B14F-4D97-AF65-F5344CB8AC3E}">
-        <p14:creationId xmlns:p14="http://schemas.microsoft.com/office/powerpoint/2010/main" val="1083360324"/>
+        <p14:creationId xmlns:p14="http://schemas.microsoft.com/office/powerpoint/2010/main" val="1102118975"/>
       </p:ext>
     </p:extLst>
   </p:cSld>
@@ -12810,7 +12810,7 @@
             <a:hlinkClick r:id="rId3"/>
             <a:extLst>
               <a:ext uri="{FF2B5EF4-FFF2-40B4-BE49-F238E27FC236}">
-                <a16:creationId xmlns:a16="http://schemas.microsoft.com/office/drawing/2014/main" id="{06B36E67-8F67-42FF-90FD-15F7D99505A9}"/>
+                <a16:creationId xmlns:a16="http://schemas.microsoft.com/office/drawing/2014/main" id="{972CA83C-4615-48CE-8403-059DF557CB0E}"/>
               </a:ext>
             </a:extLst>
           </p:cNvPr>
@@ -12885,7 +12885,7 @@
             <a:hlinkClick r:id="rId4"/>
             <a:extLst>
               <a:ext uri="{FF2B5EF4-FFF2-40B4-BE49-F238E27FC236}">
-                <a16:creationId xmlns:a16="http://schemas.microsoft.com/office/drawing/2014/main" id="{6C1CEA29-1415-4D4D-BD6F-6156252E3EBE}"/>
+                <a16:creationId xmlns:a16="http://schemas.microsoft.com/office/drawing/2014/main" id="{7571A734-6F9A-4CFE-B71C-078304BE21EC}"/>
               </a:ext>
             </a:extLst>
           </p:cNvPr>
@@ -12959,7 +12959,7 @@
           <p:cNvPr id="3" name="Rectangle 2">
             <a:extLst>
               <a:ext uri="{FF2B5EF4-FFF2-40B4-BE49-F238E27FC236}">
-                <a16:creationId xmlns:a16="http://schemas.microsoft.com/office/drawing/2014/main" id="{44AB9C43-0111-46E8-8597-9F1CD43C3F43}"/>
+                <a16:creationId xmlns:a16="http://schemas.microsoft.com/office/drawing/2014/main" id="{D4E5C91A-6749-418A-A0B1-8CA133ECD8E6}"/>
               </a:ext>
             </a:extLst>
           </p:cNvPr>
@@ -13021,7 +13021,7 @@
           <p:cNvPr id="4" name="Rectangle 3">
             <a:extLst>
               <a:ext uri="{FF2B5EF4-FFF2-40B4-BE49-F238E27FC236}">
-                <a16:creationId xmlns:a16="http://schemas.microsoft.com/office/drawing/2014/main" id="{723CDEB7-5100-47EB-9C1C-E22FFCA11D53}"/>
+                <a16:creationId xmlns:a16="http://schemas.microsoft.com/office/drawing/2014/main" id="{4C57A7C7-3E1F-4F49-AACD-0C849D3F14B3}"/>
               </a:ext>
             </a:extLst>
           </p:cNvPr>
@@ -13083,7 +13083,7 @@
           <p:cNvPr id="5" name="Rectangle 4">
             <a:extLst>
               <a:ext uri="{FF2B5EF4-FFF2-40B4-BE49-F238E27FC236}">
-                <a16:creationId xmlns:a16="http://schemas.microsoft.com/office/drawing/2014/main" id="{02FF1A69-C94B-4FBF-B6EF-91E2DC618333}"/>
+                <a16:creationId xmlns:a16="http://schemas.microsoft.com/office/drawing/2014/main" id="{6521157A-31AD-4A21-B10E-F29B94E3F7C3}"/>
               </a:ext>
             </a:extLst>
           </p:cNvPr>
@@ -13145,7 +13145,7 @@
           <p:cNvPr id="6" name="Rectangle 5">
             <a:extLst>
               <a:ext uri="{FF2B5EF4-FFF2-40B4-BE49-F238E27FC236}">
-                <a16:creationId xmlns:a16="http://schemas.microsoft.com/office/drawing/2014/main" id="{F68FB4B6-28FD-4CCE-9115-141E17142C6F}"/>
+                <a16:creationId xmlns:a16="http://schemas.microsoft.com/office/drawing/2014/main" id="{B0FD0643-3DFC-48CF-B412-A831A0D3BF30}"/>
               </a:ext>
             </a:extLst>
           </p:cNvPr>
@@ -13207,7 +13207,7 @@
           <p:cNvPr id="7" name="Rectangle 6">
             <a:extLst>
               <a:ext uri="{FF2B5EF4-FFF2-40B4-BE49-F238E27FC236}">
-                <a16:creationId xmlns:a16="http://schemas.microsoft.com/office/drawing/2014/main" id="{AFA8D42F-3F8C-4521-B355-29A51D33AE15}"/>
+                <a16:creationId xmlns:a16="http://schemas.microsoft.com/office/drawing/2014/main" id="{D3DFDE88-74AD-4B8B-986F-1813BA07D46A}"/>
               </a:ext>
             </a:extLst>
           </p:cNvPr>
@@ -13269,7 +13269,7 @@
           <p:cNvPr id="8" name="Rectangle 7">
             <a:extLst>
               <a:ext uri="{FF2B5EF4-FFF2-40B4-BE49-F238E27FC236}">
-                <a16:creationId xmlns:a16="http://schemas.microsoft.com/office/drawing/2014/main" id="{F7264D39-62B3-483E-A2B6-28B9D40633A0}"/>
+                <a16:creationId xmlns:a16="http://schemas.microsoft.com/office/drawing/2014/main" id="{9E8D9025-A6D5-40F8-909A-6790DD3808E3}"/>
               </a:ext>
             </a:extLst>
           </p:cNvPr>
@@ -13331,7 +13331,7 @@
           <p:cNvPr id="9" name="Rectangle 8">
             <a:extLst>
               <a:ext uri="{FF2B5EF4-FFF2-40B4-BE49-F238E27FC236}">
-                <a16:creationId xmlns:a16="http://schemas.microsoft.com/office/drawing/2014/main" id="{72AA80C3-257F-4BBF-8C15-866691E3BAAC}"/>
+                <a16:creationId xmlns:a16="http://schemas.microsoft.com/office/drawing/2014/main" id="{3110F0FB-1D89-4ADC-96BE-E3AA0632FA2D}"/>
               </a:ext>
             </a:extLst>
           </p:cNvPr>
@@ -13362,7 +13362,7 @@
           <p:cNvPr id="10" name="Rectangle: Rounded Corners 9">
             <a:extLst>
               <a:ext uri="{FF2B5EF4-FFF2-40B4-BE49-F238E27FC236}">
-                <a16:creationId xmlns:a16="http://schemas.microsoft.com/office/drawing/2014/main" id="{191325A1-7CEE-43BE-B1A7-0D067E58C732}"/>
+                <a16:creationId xmlns:a16="http://schemas.microsoft.com/office/drawing/2014/main" id="{22DAFCB5-4044-4280-8A61-D2B2247EBEC6}"/>
               </a:ext>
             </a:extLst>
           </p:cNvPr>
@@ -13395,7 +13395,7 @@
           <p:cNvPr id="11" name="Rectangle 10">
             <a:extLst>
               <a:ext uri="{FF2B5EF4-FFF2-40B4-BE49-F238E27FC236}">
-                <a16:creationId xmlns:a16="http://schemas.microsoft.com/office/drawing/2014/main" id="{909BB0EB-47A1-41E7-995F-9CFE096F7176}"/>
+                <a16:creationId xmlns:a16="http://schemas.microsoft.com/office/drawing/2014/main" id="{E52496E7-52B6-48FE-8D92-D21CDAAF59AA}"/>
               </a:ext>
             </a:extLst>
           </p:cNvPr>
@@ -13457,7 +13457,7 @@
           <p:cNvPr id="12" name="Rectangle 11">
             <a:extLst>
               <a:ext uri="{FF2B5EF4-FFF2-40B4-BE49-F238E27FC236}">
-                <a16:creationId xmlns:a16="http://schemas.microsoft.com/office/drawing/2014/main" id="{5AD32056-93BD-4457-9DD2-83F6967B41B8}"/>
+                <a16:creationId xmlns:a16="http://schemas.microsoft.com/office/drawing/2014/main" id="{17AC5168-76EB-48B7-9F2D-0C45B75E8F53}"/>
               </a:ext>
             </a:extLst>
           </p:cNvPr>
@@ -13519,7 +13519,7 @@
           <p:cNvPr id="13" name="Rectangle: Rounded Corners 12">
             <a:extLst>
               <a:ext uri="{FF2B5EF4-FFF2-40B4-BE49-F238E27FC236}">
-                <a16:creationId xmlns:a16="http://schemas.microsoft.com/office/drawing/2014/main" id="{246E6419-D597-4B09-8CFA-10E5842C7302}"/>
+                <a16:creationId xmlns:a16="http://schemas.microsoft.com/office/drawing/2014/main" id="{4A15762A-09AF-446A-8CEA-60C1FA2DB148}"/>
               </a:ext>
             </a:extLst>
           </p:cNvPr>
@@ -13554,7 +13554,7 @@
           <p:cNvPr id="14" name="Rectangle 13">
             <a:extLst>
               <a:ext uri="{FF2B5EF4-FFF2-40B4-BE49-F238E27FC236}">
-                <a16:creationId xmlns:a16="http://schemas.microsoft.com/office/drawing/2014/main" id="{6123B933-4C27-4613-B382-860F263A343A}"/>
+                <a16:creationId xmlns:a16="http://schemas.microsoft.com/office/drawing/2014/main" id="{646D3FEA-9441-4270-BAD3-68177B928845}"/>
               </a:ext>
             </a:extLst>
           </p:cNvPr>
@@ -13616,7 +13616,7 @@
           <p:cNvPr id="15" name="Rectangle 14">
             <a:extLst>
               <a:ext uri="{FF2B5EF4-FFF2-40B4-BE49-F238E27FC236}">
-                <a16:creationId xmlns:a16="http://schemas.microsoft.com/office/drawing/2014/main" id="{9B7414B4-8D87-47DE-88ED-666E32A6F4A4}"/>
+                <a16:creationId xmlns:a16="http://schemas.microsoft.com/office/drawing/2014/main" id="{4285BC8A-CFE2-46B2-A291-C233B32785A3}"/>
               </a:ext>
             </a:extLst>
           </p:cNvPr>
@@ -13678,7 +13678,7 @@
           <p:cNvPr id="16" name="Rectangle 15">
             <a:extLst>
               <a:ext uri="{FF2B5EF4-FFF2-40B4-BE49-F238E27FC236}">
-                <a16:creationId xmlns:a16="http://schemas.microsoft.com/office/drawing/2014/main" id="{02EA7418-22CF-4340-8C15-25CDE9F13217}"/>
+                <a16:creationId xmlns:a16="http://schemas.microsoft.com/office/drawing/2014/main" id="{009CDFCA-4652-4D81-B06C-91DA40D941E6}"/>
               </a:ext>
             </a:extLst>
           </p:cNvPr>
@@ -13740,7 +13740,7 @@
           <p:cNvPr id="17" name="Rectangle 16">
             <a:extLst>
               <a:ext uri="{FF2B5EF4-FFF2-40B4-BE49-F238E27FC236}">
-                <a16:creationId xmlns:a16="http://schemas.microsoft.com/office/drawing/2014/main" id="{98B07A38-80CB-4980-8427-4B3A12277A96}"/>
+                <a16:creationId xmlns:a16="http://schemas.microsoft.com/office/drawing/2014/main" id="{19A327C1-6989-4783-9218-DB7C9B6D2BF0}"/>
               </a:ext>
             </a:extLst>
           </p:cNvPr>
@@ -13771,7 +13771,7 @@
           <p:cNvPr id="18" name="Rectangle: Rounded Corners 17">
             <a:extLst>
               <a:ext uri="{FF2B5EF4-FFF2-40B4-BE49-F238E27FC236}">
-                <a16:creationId xmlns:a16="http://schemas.microsoft.com/office/drawing/2014/main" id="{6A2C86F5-BDD5-49E3-8AE3-39234E9B4BB7}"/>
+                <a16:creationId xmlns:a16="http://schemas.microsoft.com/office/drawing/2014/main" id="{DB34C6DF-AF50-4691-B16C-0774CEA68388}"/>
               </a:ext>
             </a:extLst>
           </p:cNvPr>
@@ -13804,7 +13804,7 @@
           <p:cNvPr id="19" name="Rectangle 18">
             <a:extLst>
               <a:ext uri="{FF2B5EF4-FFF2-40B4-BE49-F238E27FC236}">
-                <a16:creationId xmlns:a16="http://schemas.microsoft.com/office/drawing/2014/main" id="{6924E1DD-DF08-431E-BE19-6D8098593B90}"/>
+                <a16:creationId xmlns:a16="http://schemas.microsoft.com/office/drawing/2014/main" id="{6270B7C2-6AAF-4C06-B42F-72F2B2034071}"/>
               </a:ext>
             </a:extLst>
           </p:cNvPr>
@@ -13866,7 +13866,7 @@
           <p:cNvPr id="20" name="Rectangle 19">
             <a:extLst>
               <a:ext uri="{FF2B5EF4-FFF2-40B4-BE49-F238E27FC236}">
-                <a16:creationId xmlns:a16="http://schemas.microsoft.com/office/drawing/2014/main" id="{F10964FA-A6A1-4CB9-89D0-C27E4039A99C}"/>
+                <a16:creationId xmlns:a16="http://schemas.microsoft.com/office/drawing/2014/main" id="{FE380369-86EE-47E1-8294-623380EC7554}"/>
               </a:ext>
             </a:extLst>
           </p:cNvPr>
@@ -13928,7 +13928,7 @@
           <p:cNvPr id="21" name="Rectangle: Rounded Corners 20">
             <a:extLst>
               <a:ext uri="{FF2B5EF4-FFF2-40B4-BE49-F238E27FC236}">
-                <a16:creationId xmlns:a16="http://schemas.microsoft.com/office/drawing/2014/main" id="{515CB0EB-34DB-42CD-8AFD-21EE13240A1D}"/>
+                <a16:creationId xmlns:a16="http://schemas.microsoft.com/office/drawing/2014/main" id="{BEB90540-B375-4522-8E77-32F284492AF0}"/>
               </a:ext>
             </a:extLst>
           </p:cNvPr>
@@ -13963,7 +13963,7 @@
           <p:cNvPr id="22" name="Rectangle 21">
             <a:extLst>
               <a:ext uri="{FF2B5EF4-FFF2-40B4-BE49-F238E27FC236}">
-                <a16:creationId xmlns:a16="http://schemas.microsoft.com/office/drawing/2014/main" id="{1EBFFD41-6F61-4686-B4AC-A93EC48E1F38}"/>
+                <a16:creationId xmlns:a16="http://schemas.microsoft.com/office/drawing/2014/main" id="{79A92DAF-64A1-4BA0-A47B-53A376C569C5}"/>
               </a:ext>
             </a:extLst>
           </p:cNvPr>
@@ -14025,7 +14025,7 @@
           <p:cNvPr id="23" name="Rectangle: Rounded Corners 22">
             <a:extLst>
               <a:ext uri="{FF2B5EF4-FFF2-40B4-BE49-F238E27FC236}">
-                <a16:creationId xmlns:a16="http://schemas.microsoft.com/office/drawing/2014/main" id="{FB3E5E4C-B835-4E75-9F69-BA5BF77E6D16}"/>
+                <a16:creationId xmlns:a16="http://schemas.microsoft.com/office/drawing/2014/main" id="{62F368BE-6DD6-428B-9499-E243E043DCE5}"/>
               </a:ext>
             </a:extLst>
           </p:cNvPr>
@@ -14058,7 +14058,7 @@
           <p:cNvPr id="24" name="Rectangle 23">
             <a:extLst>
               <a:ext uri="{FF2B5EF4-FFF2-40B4-BE49-F238E27FC236}">
-                <a16:creationId xmlns:a16="http://schemas.microsoft.com/office/drawing/2014/main" id="{5CECBC12-572B-4941-871E-0304869D834A}"/>
+                <a16:creationId xmlns:a16="http://schemas.microsoft.com/office/drawing/2014/main" id="{A6A61344-39FD-4FE3-A983-B4A61B5BEB7B}"/>
               </a:ext>
             </a:extLst>
           </p:cNvPr>
@@ -14120,7 +14120,7 @@
           <p:cNvPr id="25" name="Rectangle 24">
             <a:extLst>
               <a:ext uri="{FF2B5EF4-FFF2-40B4-BE49-F238E27FC236}">
-                <a16:creationId xmlns:a16="http://schemas.microsoft.com/office/drawing/2014/main" id="{DD3F2983-473F-43D8-9D89-063538C9623C}"/>
+                <a16:creationId xmlns:a16="http://schemas.microsoft.com/office/drawing/2014/main" id="{DDFD3369-E8EC-438D-A6D4-298CA3455B77}"/>
               </a:ext>
             </a:extLst>
           </p:cNvPr>
@@ -14151,7 +14151,7 @@
           <p:cNvPr id="26" name="Rectangle 25">
             <a:extLst>
               <a:ext uri="{FF2B5EF4-FFF2-40B4-BE49-F238E27FC236}">
-                <a16:creationId xmlns:a16="http://schemas.microsoft.com/office/drawing/2014/main" id="{BF103B7C-25F7-458F-A9DE-EEBB791EE03C}"/>
+                <a16:creationId xmlns:a16="http://schemas.microsoft.com/office/drawing/2014/main" id="{AFFDC154-CA3E-4A34-8F8E-0D1FA041625F}"/>
               </a:ext>
             </a:extLst>
           </p:cNvPr>
@@ -14203,7 +14203,7 @@
                 <a:ea typeface="Arial"/>
                 <a:cs typeface="Arial"/>
               </a:rPr>
-              <a:t>r2z-d4c8d4cc709a · scn-e0f12f397e · prt-fd6de9d793</a:t>
+              <a:t>r2z-a7181752a17d · scn-e0f12f397e · prt-fd6de9d793</a:t>
             </a:r>
           </a:p>
         </p:txBody>
@@ -14213,7 +14213,7 @@
           <p:cNvPr id="27" name="Rectangle 26">
             <a:extLst>
               <a:ext uri="{FF2B5EF4-FFF2-40B4-BE49-F238E27FC236}">
-                <a16:creationId xmlns:a16="http://schemas.microsoft.com/office/drawing/2014/main" id="{A80DB1BE-60F6-4F5B-AD4F-11A756385177}"/>
+                <a16:creationId xmlns:a16="http://schemas.microsoft.com/office/drawing/2014/main" id="{F6CF0741-ED7B-4033-B5F7-D728071E4809}"/>
               </a:ext>
             </a:extLst>
           </p:cNvPr>
@@ -14273,7 +14273,7 @@
     </p:spTree>
     <p:extLst>
       <p:ext uri="{BB962C8B-B14F-4D97-AF65-F5344CB8AC3E}">
-        <p14:creationId xmlns:p14="http://schemas.microsoft.com/office/powerpoint/2010/main" val="1736627155"/>
+        <p14:creationId xmlns:p14="http://schemas.microsoft.com/office/powerpoint/2010/main" val="2024645315"/>
       </p:ext>
     </p:extLst>
   </p:cSld>
@@ -14314,7 +14314,7 @@
             <a:hlinkClick r:id="rId3"/>
             <a:extLst>
               <a:ext uri="{FF2B5EF4-FFF2-40B4-BE49-F238E27FC236}">
-                <a16:creationId xmlns:a16="http://schemas.microsoft.com/office/drawing/2014/main" id="{8CB35D20-78BB-4E6F-A8D1-B9A7D99F2121}"/>
+                <a16:creationId xmlns:a16="http://schemas.microsoft.com/office/drawing/2014/main" id="{E3133DC1-7FE6-4F3C-B957-A2EF36D2A66E}"/>
               </a:ext>
             </a:extLst>
           </p:cNvPr>
@@ -14389,7 +14389,7 @@
             <a:hlinkClick r:id="rId4"/>
             <a:extLst>
               <a:ext uri="{FF2B5EF4-FFF2-40B4-BE49-F238E27FC236}">
-                <a16:creationId xmlns:a16="http://schemas.microsoft.com/office/drawing/2014/main" id="{73523E36-3952-4D1A-889F-318556A2C493}"/>
+                <a16:creationId xmlns:a16="http://schemas.microsoft.com/office/drawing/2014/main" id="{899FD7EF-4736-4737-9DE5-48B7EB1EE58B}"/>
               </a:ext>
             </a:extLst>
           </p:cNvPr>
@@ -14463,7 +14463,7 @@
           <p:cNvPr id="3" name="Rectangle 2">
             <a:extLst>
               <a:ext uri="{FF2B5EF4-FFF2-40B4-BE49-F238E27FC236}">
-                <a16:creationId xmlns:a16="http://schemas.microsoft.com/office/drawing/2014/main" id="{1B884355-9E0F-42B3-8707-29AA8D3D4318}"/>
+                <a16:creationId xmlns:a16="http://schemas.microsoft.com/office/drawing/2014/main" id="{2EBAF0F2-F15B-4FCE-8EC6-A91976350EB6}"/>
               </a:ext>
             </a:extLst>
           </p:cNvPr>
@@ -14525,7 +14525,7 @@
           <p:cNvPr id="4" name="Rectangle 3">
             <a:extLst>
               <a:ext uri="{FF2B5EF4-FFF2-40B4-BE49-F238E27FC236}">
-                <a16:creationId xmlns:a16="http://schemas.microsoft.com/office/drawing/2014/main" id="{E0D26DB6-94F4-46B5-903E-D79159DABBF9}"/>
+                <a16:creationId xmlns:a16="http://schemas.microsoft.com/office/drawing/2014/main" id="{D1FE31A6-937E-4156-93AA-B3B86F4D2E30}"/>
               </a:ext>
             </a:extLst>
           </p:cNvPr>
@@ -14587,7 +14587,7 @@
           <p:cNvPr id="5" name="Rectangle 4">
             <a:extLst>
               <a:ext uri="{FF2B5EF4-FFF2-40B4-BE49-F238E27FC236}">
-                <a16:creationId xmlns:a16="http://schemas.microsoft.com/office/drawing/2014/main" id="{6444A0DD-A495-45AA-BE3C-674742D668A2}"/>
+                <a16:creationId xmlns:a16="http://schemas.microsoft.com/office/drawing/2014/main" id="{53C699EE-A889-4FC6-A30B-F2CE5774E3DB}"/>
               </a:ext>
             </a:extLst>
           </p:cNvPr>
@@ -14649,7 +14649,7 @@
           <p:cNvPr id="6" name="Rectangle 5">
             <a:extLst>
               <a:ext uri="{FF2B5EF4-FFF2-40B4-BE49-F238E27FC236}">
-                <a16:creationId xmlns:a16="http://schemas.microsoft.com/office/drawing/2014/main" id="{AB2F3D45-F112-485C-9597-A132F8EBFB84}"/>
+                <a16:creationId xmlns:a16="http://schemas.microsoft.com/office/drawing/2014/main" id="{C2C6170D-C5B9-44FE-B5C1-4BF9D7513068}"/>
               </a:ext>
             </a:extLst>
           </p:cNvPr>
@@ -14711,7 +14711,7 @@
           <p:cNvPr id="7" name="Rectangle 6">
             <a:extLst>
               <a:ext uri="{FF2B5EF4-FFF2-40B4-BE49-F238E27FC236}">
-                <a16:creationId xmlns:a16="http://schemas.microsoft.com/office/drawing/2014/main" id="{55FCA727-2E67-457A-93CD-5A301619759A}"/>
+                <a16:creationId xmlns:a16="http://schemas.microsoft.com/office/drawing/2014/main" id="{B7804D2F-A640-4164-B9DB-BFA29DAA9890}"/>
               </a:ext>
             </a:extLst>
           </p:cNvPr>
@@ -14773,7 +14773,7 @@
           <p:cNvPr id="8" name="Rectangle 7">
             <a:extLst>
               <a:ext uri="{FF2B5EF4-FFF2-40B4-BE49-F238E27FC236}">
-                <a16:creationId xmlns:a16="http://schemas.microsoft.com/office/drawing/2014/main" id="{AAF51F1D-6393-446F-B74C-392B6010B879}"/>
+                <a16:creationId xmlns:a16="http://schemas.microsoft.com/office/drawing/2014/main" id="{767C5C75-25C8-4FE5-AFA7-87E452C750B8}"/>
               </a:ext>
             </a:extLst>
           </p:cNvPr>
@@ -14804,7 +14804,7 @@
           <p:cNvPr id="9" name="Rectangle 8">
             <a:extLst>
               <a:ext uri="{FF2B5EF4-FFF2-40B4-BE49-F238E27FC236}">
-                <a16:creationId xmlns:a16="http://schemas.microsoft.com/office/drawing/2014/main" id="{613788E0-B54E-491D-9CBA-277904E3D840}"/>
+                <a16:creationId xmlns:a16="http://schemas.microsoft.com/office/drawing/2014/main" id="{26B7763D-04FC-42C8-9E7F-94F29BBB0F69}"/>
               </a:ext>
             </a:extLst>
           </p:cNvPr>
@@ -14866,7 +14866,7 @@
           <p:cNvPr id="10" name="Rectangle 9">
             <a:extLst>
               <a:ext uri="{FF2B5EF4-FFF2-40B4-BE49-F238E27FC236}">
-                <a16:creationId xmlns:a16="http://schemas.microsoft.com/office/drawing/2014/main" id="{EBCDF3AB-4F09-4D09-BA2E-064B4963EBCC}"/>
+                <a16:creationId xmlns:a16="http://schemas.microsoft.com/office/drawing/2014/main" id="{81729900-2115-4D67-8D68-EA3A319B6FFA}"/>
               </a:ext>
             </a:extLst>
           </p:cNvPr>
@@ -14928,7 +14928,7 @@
           <p:cNvPr id="11" name="Rectangle 10">
             <a:extLst>
               <a:ext uri="{FF2B5EF4-FFF2-40B4-BE49-F238E27FC236}">
-                <a16:creationId xmlns:a16="http://schemas.microsoft.com/office/drawing/2014/main" id="{FAD6BBBD-9097-4B02-8CF9-2DAD566914A4}"/>
+                <a16:creationId xmlns:a16="http://schemas.microsoft.com/office/drawing/2014/main" id="{9701CADA-1F98-4E7F-BFE6-B316551BBEF4}"/>
               </a:ext>
             </a:extLst>
           </p:cNvPr>
@@ -14990,7 +14990,7 @@
           <p:cNvPr id="12" name="Rectangle 11">
             <a:extLst>
               <a:ext uri="{FF2B5EF4-FFF2-40B4-BE49-F238E27FC236}">
-                <a16:creationId xmlns:a16="http://schemas.microsoft.com/office/drawing/2014/main" id="{E364B9FC-44AF-4080-9D62-1603F20D896F}"/>
+                <a16:creationId xmlns:a16="http://schemas.microsoft.com/office/drawing/2014/main" id="{3010BB60-BD81-4F7E-9AB8-D9FB31639196}"/>
               </a:ext>
             </a:extLst>
           </p:cNvPr>
@@ -15021,7 +15021,7 @@
           <p:cNvPr id="13" name="Rectangle 12">
             <a:extLst>
               <a:ext uri="{FF2B5EF4-FFF2-40B4-BE49-F238E27FC236}">
-                <a16:creationId xmlns:a16="http://schemas.microsoft.com/office/drawing/2014/main" id="{0EA72F8C-534C-4046-BF5C-F7C7A344E8F0}"/>
+                <a16:creationId xmlns:a16="http://schemas.microsoft.com/office/drawing/2014/main" id="{39C973F0-00B1-4BD8-80D9-266F7F4FF53E}"/>
               </a:ext>
             </a:extLst>
           </p:cNvPr>
@@ -15083,7 +15083,7 @@
           <p:cNvPr id="14" name="Rectangle 13">
             <a:extLst>
               <a:ext uri="{FF2B5EF4-FFF2-40B4-BE49-F238E27FC236}">
-                <a16:creationId xmlns:a16="http://schemas.microsoft.com/office/drawing/2014/main" id="{8AB887FA-C2D6-4D8A-834A-B604649E8DF3}"/>
+                <a16:creationId xmlns:a16="http://schemas.microsoft.com/office/drawing/2014/main" id="{32E1B1E7-2C5E-4708-9D0D-1139F79C06AB}"/>
               </a:ext>
             </a:extLst>
           </p:cNvPr>
@@ -15145,7 +15145,7 @@
           <p:cNvPr id="15" name="Rectangle 14">
             <a:extLst>
               <a:ext uri="{FF2B5EF4-FFF2-40B4-BE49-F238E27FC236}">
-                <a16:creationId xmlns:a16="http://schemas.microsoft.com/office/drawing/2014/main" id="{8F9E4E15-E755-443E-8B24-E0117DFA2A58}"/>
+                <a16:creationId xmlns:a16="http://schemas.microsoft.com/office/drawing/2014/main" id="{FB75FCAC-EB95-4FAC-8263-397BCFDE0FEB}"/>
               </a:ext>
             </a:extLst>
           </p:cNvPr>
@@ -15207,7 +15207,7 @@
           <p:cNvPr id="16" name="Rectangle 15">
             <a:extLst>
               <a:ext uri="{FF2B5EF4-FFF2-40B4-BE49-F238E27FC236}">
-                <a16:creationId xmlns:a16="http://schemas.microsoft.com/office/drawing/2014/main" id="{94E13B64-419F-4D14-984F-620DD3101456}"/>
+                <a16:creationId xmlns:a16="http://schemas.microsoft.com/office/drawing/2014/main" id="{FD0F2FAC-C30B-4C21-9465-07C19EB52003}"/>
               </a:ext>
             </a:extLst>
           </p:cNvPr>
@@ -15238,7 +15238,7 @@
           <p:cNvPr id="17" name="Rectangle 16">
             <a:extLst>
               <a:ext uri="{FF2B5EF4-FFF2-40B4-BE49-F238E27FC236}">
-                <a16:creationId xmlns:a16="http://schemas.microsoft.com/office/drawing/2014/main" id="{90AD8FF9-1C4B-42A5-BA5E-7390979EA1C3}"/>
+                <a16:creationId xmlns:a16="http://schemas.microsoft.com/office/drawing/2014/main" id="{45D0A0DD-EBB6-4AE7-AC4D-EC0B61AAC42C}"/>
               </a:ext>
             </a:extLst>
           </p:cNvPr>
@@ -15300,7 +15300,7 @@
           <p:cNvPr id="18" name="Rectangle 17">
             <a:extLst>
               <a:ext uri="{FF2B5EF4-FFF2-40B4-BE49-F238E27FC236}">
-                <a16:creationId xmlns:a16="http://schemas.microsoft.com/office/drawing/2014/main" id="{A0C39B07-81C3-4D77-AECC-71EF050B60DA}"/>
+                <a16:creationId xmlns:a16="http://schemas.microsoft.com/office/drawing/2014/main" id="{1097A16F-F8C0-4D69-B19A-705D45DB7E82}"/>
               </a:ext>
             </a:extLst>
           </p:cNvPr>
@@ -15362,7 +15362,7 @@
           <p:cNvPr id="19" name="Rectangle 18">
             <a:extLst>
               <a:ext uri="{FF2B5EF4-FFF2-40B4-BE49-F238E27FC236}">
-                <a16:creationId xmlns:a16="http://schemas.microsoft.com/office/drawing/2014/main" id="{BE015EB5-F50A-456F-B7EF-D8959D675BA0}"/>
+                <a16:creationId xmlns:a16="http://schemas.microsoft.com/office/drawing/2014/main" id="{88956D9B-AAFD-48B5-84C2-C035E7AC0CD2}"/>
               </a:ext>
             </a:extLst>
           </p:cNvPr>
@@ -15424,7 +15424,7 @@
           <p:cNvPr id="20" name="Rectangle 19">
             <a:extLst>
               <a:ext uri="{FF2B5EF4-FFF2-40B4-BE49-F238E27FC236}">
-                <a16:creationId xmlns:a16="http://schemas.microsoft.com/office/drawing/2014/main" id="{426E757F-0733-4186-949C-DAFDF312C976}"/>
+                <a16:creationId xmlns:a16="http://schemas.microsoft.com/office/drawing/2014/main" id="{D06BADF7-C92E-4399-AAC6-44B8927F81A1}"/>
               </a:ext>
             </a:extLst>
           </p:cNvPr>
@@ -15455,7 +15455,7 @@
           <p:cNvPr id="21" name="Rectangle: Rounded Corners 20">
             <a:extLst>
               <a:ext uri="{FF2B5EF4-FFF2-40B4-BE49-F238E27FC236}">
-                <a16:creationId xmlns:a16="http://schemas.microsoft.com/office/drawing/2014/main" id="{C08EB3B6-E96A-486F-92F3-0879D5420BCD}"/>
+                <a16:creationId xmlns:a16="http://schemas.microsoft.com/office/drawing/2014/main" id="{3887A92D-C7B5-4934-8402-7048F208DEF0}"/>
               </a:ext>
             </a:extLst>
           </p:cNvPr>
@@ -15488,7 +15488,7 @@
           <p:cNvPr id="22" name="Rectangle 21">
             <a:extLst>
               <a:ext uri="{FF2B5EF4-FFF2-40B4-BE49-F238E27FC236}">
-                <a16:creationId xmlns:a16="http://schemas.microsoft.com/office/drawing/2014/main" id="{39216048-1F1B-4A83-A5A0-21C918CDB5B2}"/>
+                <a16:creationId xmlns:a16="http://schemas.microsoft.com/office/drawing/2014/main" id="{609E790B-BD20-4F3A-8DD5-2EEAB72BA9F6}"/>
               </a:ext>
             </a:extLst>
           </p:cNvPr>
@@ -15550,7 +15550,7 @@
           <p:cNvPr id="23" name="Rectangle 22">
             <a:extLst>
               <a:ext uri="{FF2B5EF4-FFF2-40B4-BE49-F238E27FC236}">
-                <a16:creationId xmlns:a16="http://schemas.microsoft.com/office/drawing/2014/main" id="{7F4C7CAD-2940-413D-A608-83BEB204D7FF}"/>
+                <a16:creationId xmlns:a16="http://schemas.microsoft.com/office/drawing/2014/main" id="{F5D2A027-AD1D-484C-9273-C82A8674BDEF}"/>
               </a:ext>
             </a:extLst>
           </p:cNvPr>
@@ -15581,7 +15581,7 @@
           <p:cNvPr id="24" name="Rectangle 23">
             <a:extLst>
               <a:ext uri="{FF2B5EF4-FFF2-40B4-BE49-F238E27FC236}">
-                <a16:creationId xmlns:a16="http://schemas.microsoft.com/office/drawing/2014/main" id="{E3564FC0-F55B-4DFA-997A-CD288583AC00}"/>
+                <a16:creationId xmlns:a16="http://schemas.microsoft.com/office/drawing/2014/main" id="{0E3AC773-6125-4664-AED1-24DA578F9854}"/>
               </a:ext>
             </a:extLst>
           </p:cNvPr>
@@ -15633,7 +15633,7 @@
                 <a:ea typeface="Arial"/>
                 <a:cs typeface="Arial"/>
               </a:rPr>
-              <a:t>r2z-d4c8d4cc709a · scn-e0f12f397e · prt-fd6de9d793</a:t>
+              <a:t>r2z-a7181752a17d · scn-e0f12f397e · prt-fd6de9d793</a:t>
             </a:r>
           </a:p>
         </p:txBody>
@@ -15643,7 +15643,7 @@
           <p:cNvPr id="25" name="Rectangle 24">
             <a:extLst>
               <a:ext uri="{FF2B5EF4-FFF2-40B4-BE49-F238E27FC236}">
-                <a16:creationId xmlns:a16="http://schemas.microsoft.com/office/drawing/2014/main" id="{ECEA65CE-21B1-48F4-96A9-FD9626675186}"/>
+                <a16:creationId xmlns:a16="http://schemas.microsoft.com/office/drawing/2014/main" id="{A1323603-AE79-4F2D-A8C8-E422FC969FBF}"/>
               </a:ext>
             </a:extLst>
           </p:cNvPr>
@@ -15703,7 +15703,7 @@
     </p:spTree>
     <p:extLst>
       <p:ext uri="{BB962C8B-B14F-4D97-AF65-F5344CB8AC3E}">
-        <p14:creationId xmlns:p14="http://schemas.microsoft.com/office/powerpoint/2010/main" val="1428903224"/>
+        <p14:creationId xmlns:p14="http://schemas.microsoft.com/office/powerpoint/2010/main" val="606124479"/>
       </p:ext>
     </p:extLst>
   </p:cSld>
@@ -15744,7 +15744,7 @@
             <a:hlinkClick r:id="rId3"/>
             <a:extLst>
               <a:ext uri="{FF2B5EF4-FFF2-40B4-BE49-F238E27FC236}">
-                <a16:creationId xmlns:a16="http://schemas.microsoft.com/office/drawing/2014/main" id="{5D16CB62-3FF6-4521-AB2E-D96579F5DBDD}"/>
+                <a16:creationId xmlns:a16="http://schemas.microsoft.com/office/drawing/2014/main" id="{86C79733-5B61-4FA2-A4A9-08583565F74F}"/>
               </a:ext>
             </a:extLst>
           </p:cNvPr>
@@ -15819,7 +15819,7 @@
             <a:hlinkClick r:id="rId4"/>
             <a:extLst>
               <a:ext uri="{FF2B5EF4-FFF2-40B4-BE49-F238E27FC236}">
-                <a16:creationId xmlns:a16="http://schemas.microsoft.com/office/drawing/2014/main" id="{0CBBC2ED-08ED-4494-8181-72A65A254771}"/>
+                <a16:creationId xmlns:a16="http://schemas.microsoft.com/office/drawing/2014/main" id="{069A8D77-2B51-464E-B389-A68747A9DB5D}"/>
               </a:ext>
             </a:extLst>
           </p:cNvPr>
@@ -15893,7 +15893,7 @@
           <p:cNvPr id="3" name="Rectangle 2">
             <a:extLst>
               <a:ext uri="{FF2B5EF4-FFF2-40B4-BE49-F238E27FC236}">
-                <a16:creationId xmlns:a16="http://schemas.microsoft.com/office/drawing/2014/main" id="{8EFB5922-17C7-4669-A6CB-3CE4DA068094}"/>
+                <a16:creationId xmlns:a16="http://schemas.microsoft.com/office/drawing/2014/main" id="{2C4A335C-DE76-45AB-803C-DFE50987FE61}"/>
               </a:ext>
             </a:extLst>
           </p:cNvPr>
@@ -15955,7 +15955,7 @@
           <p:cNvPr id="4" name="Rectangle 3">
             <a:extLst>
               <a:ext uri="{FF2B5EF4-FFF2-40B4-BE49-F238E27FC236}">
-                <a16:creationId xmlns:a16="http://schemas.microsoft.com/office/drawing/2014/main" id="{A1BB1494-4490-4249-B018-5A8CD0781A43}"/>
+                <a16:creationId xmlns:a16="http://schemas.microsoft.com/office/drawing/2014/main" id="{E344E912-C79E-4585-BEFD-6931640B5D0A}"/>
               </a:ext>
             </a:extLst>
           </p:cNvPr>
@@ -16017,7 +16017,7 @@
           <p:cNvPr id="5" name="Rectangle 4">
             <a:extLst>
               <a:ext uri="{FF2B5EF4-FFF2-40B4-BE49-F238E27FC236}">
-                <a16:creationId xmlns:a16="http://schemas.microsoft.com/office/drawing/2014/main" id="{0B474416-5CBC-4E08-8924-BAC77C3DC39F}"/>
+                <a16:creationId xmlns:a16="http://schemas.microsoft.com/office/drawing/2014/main" id="{24BAFFFF-B77B-4C96-9A58-B64203BFB822}"/>
               </a:ext>
             </a:extLst>
           </p:cNvPr>
@@ -16079,7 +16079,7 @@
           <p:cNvPr id="6" name="Rectangle 5">
             <a:extLst>
               <a:ext uri="{FF2B5EF4-FFF2-40B4-BE49-F238E27FC236}">
-                <a16:creationId xmlns:a16="http://schemas.microsoft.com/office/drawing/2014/main" id="{ADE00740-C669-4EC9-8B7A-B61608F0121D}"/>
+                <a16:creationId xmlns:a16="http://schemas.microsoft.com/office/drawing/2014/main" id="{21F34707-7A90-42FE-B67E-533C52E42D80}"/>
               </a:ext>
             </a:extLst>
           </p:cNvPr>
@@ -16141,7 +16141,7 @@
           <p:cNvPr id="7" name="Rectangle: Rounded Corners 6">
             <a:extLst>
               <a:ext uri="{FF2B5EF4-FFF2-40B4-BE49-F238E27FC236}">
-                <a16:creationId xmlns:a16="http://schemas.microsoft.com/office/drawing/2014/main" id="{634B507A-C0C0-4DBF-B783-17F2C66233F9}"/>
+                <a16:creationId xmlns:a16="http://schemas.microsoft.com/office/drawing/2014/main" id="{3DECA493-4737-47F6-9967-EF551A69C57A}"/>
               </a:ext>
             </a:extLst>
           </p:cNvPr>
@@ -16174,7 +16174,7 @@
           <p:cNvPr id="8" name="Rectangle 7">
             <a:extLst>
               <a:ext uri="{FF2B5EF4-FFF2-40B4-BE49-F238E27FC236}">
-                <a16:creationId xmlns:a16="http://schemas.microsoft.com/office/drawing/2014/main" id="{6CC141F3-1A4B-422D-B880-4DB7573890F7}"/>
+                <a16:creationId xmlns:a16="http://schemas.microsoft.com/office/drawing/2014/main" id="{15D8566C-118F-4E99-873B-413156385022}"/>
               </a:ext>
             </a:extLst>
           </p:cNvPr>
@@ -16236,7 +16236,7 @@
           <p:cNvPr id="9" name="Rectangle: Rounded Corners 8">
             <a:extLst>
               <a:ext uri="{FF2B5EF4-FFF2-40B4-BE49-F238E27FC236}">
-                <a16:creationId xmlns:a16="http://schemas.microsoft.com/office/drawing/2014/main" id="{2F675D6F-8827-4CE3-8857-3BF416F4B640}"/>
+                <a16:creationId xmlns:a16="http://schemas.microsoft.com/office/drawing/2014/main" id="{53733E5C-855B-4109-882B-FCC8FEBF1B9E}"/>
               </a:ext>
             </a:extLst>
           </p:cNvPr>
@@ -16269,7 +16269,7 @@
           <p:cNvPr id="10" name="Rectangle 9">
             <a:extLst>
               <a:ext uri="{FF2B5EF4-FFF2-40B4-BE49-F238E27FC236}">
-                <a16:creationId xmlns:a16="http://schemas.microsoft.com/office/drawing/2014/main" id="{C2DDF3AB-ACCB-4228-B469-6E19FA609892}"/>
+                <a16:creationId xmlns:a16="http://schemas.microsoft.com/office/drawing/2014/main" id="{75950011-1A1F-4D76-A124-D295299CA285}"/>
               </a:ext>
             </a:extLst>
           </p:cNvPr>
@@ -16331,7 +16331,7 @@
           <p:cNvPr id="11" name="Rectangle: Rounded Corners 10">
             <a:extLst>
               <a:ext uri="{FF2B5EF4-FFF2-40B4-BE49-F238E27FC236}">
-                <a16:creationId xmlns:a16="http://schemas.microsoft.com/office/drawing/2014/main" id="{778DF06D-689F-4400-8336-C5500FC5D8AC}"/>
+                <a16:creationId xmlns:a16="http://schemas.microsoft.com/office/drawing/2014/main" id="{D3384FC0-AD45-4ACB-8410-96334B043FA0}"/>
               </a:ext>
             </a:extLst>
           </p:cNvPr>
@@ -16364,7 +16364,7 @@
           <p:cNvPr id="12" name="Rectangle 11">
             <a:extLst>
               <a:ext uri="{FF2B5EF4-FFF2-40B4-BE49-F238E27FC236}">
-                <a16:creationId xmlns:a16="http://schemas.microsoft.com/office/drawing/2014/main" id="{E0F88CEE-82B5-4BB5-95B2-C874B2D5D650}"/>
+                <a16:creationId xmlns:a16="http://schemas.microsoft.com/office/drawing/2014/main" id="{F353A269-BA5B-430D-9FCB-3DDD8264BE35}"/>
               </a:ext>
             </a:extLst>
           </p:cNvPr>
@@ -16426,7 +16426,7 @@
           <p:cNvPr id="13" name="Rectangle: Rounded Corners 12">
             <a:extLst>
               <a:ext uri="{FF2B5EF4-FFF2-40B4-BE49-F238E27FC236}">
-                <a16:creationId xmlns:a16="http://schemas.microsoft.com/office/drawing/2014/main" id="{15D282FA-7FDF-4F69-A9FA-9B597F1DD765}"/>
+                <a16:creationId xmlns:a16="http://schemas.microsoft.com/office/drawing/2014/main" id="{49AE17CF-D1E0-40A5-A1E8-D43D00D26F75}"/>
               </a:ext>
             </a:extLst>
           </p:cNvPr>
@@ -16459,7 +16459,7 @@
           <p:cNvPr id="14" name="Rectangle 13">
             <a:extLst>
               <a:ext uri="{FF2B5EF4-FFF2-40B4-BE49-F238E27FC236}">
-                <a16:creationId xmlns:a16="http://schemas.microsoft.com/office/drawing/2014/main" id="{798E4F83-5A04-4DB6-8673-32B52AA40A9A}"/>
+                <a16:creationId xmlns:a16="http://schemas.microsoft.com/office/drawing/2014/main" id="{AAF68081-0562-4B7F-A496-8EDA2FF60649}"/>
               </a:ext>
             </a:extLst>
           </p:cNvPr>
@@ -16521,7 +16521,7 @@
           <p:cNvPr id="15" name="Rectangle: Rounded Corners 14">
             <a:extLst>
               <a:ext uri="{FF2B5EF4-FFF2-40B4-BE49-F238E27FC236}">
-                <a16:creationId xmlns:a16="http://schemas.microsoft.com/office/drawing/2014/main" id="{880D8CB2-5804-4C57-9DA8-7E854EF9A5D4}"/>
+                <a16:creationId xmlns:a16="http://schemas.microsoft.com/office/drawing/2014/main" id="{47B0D8DE-DE7A-4BB4-BD91-F40C5D91B90C}"/>
               </a:ext>
             </a:extLst>
           </p:cNvPr>
@@ -16554,7 +16554,7 @@
           <p:cNvPr id="16" name="Rectangle 15">
             <a:extLst>
               <a:ext uri="{FF2B5EF4-FFF2-40B4-BE49-F238E27FC236}">
-                <a16:creationId xmlns:a16="http://schemas.microsoft.com/office/drawing/2014/main" id="{8ACA40CC-ADFC-4BC2-A22B-021CC92E4D9E}"/>
+                <a16:creationId xmlns:a16="http://schemas.microsoft.com/office/drawing/2014/main" id="{D6C539F1-D531-4CEF-AD1E-9ECE15D541BA}"/>
               </a:ext>
             </a:extLst>
           </p:cNvPr>
@@ -16616,7 +16616,7 @@
           <p:cNvPr id="17" name="Rectangle: Rounded Corners 16">
             <a:extLst>
               <a:ext uri="{FF2B5EF4-FFF2-40B4-BE49-F238E27FC236}">
-                <a16:creationId xmlns:a16="http://schemas.microsoft.com/office/drawing/2014/main" id="{00FDD11A-EAEB-4ABD-A73E-D6D4404397CE}"/>
+                <a16:creationId xmlns:a16="http://schemas.microsoft.com/office/drawing/2014/main" id="{2F031881-DC3B-4B2E-A397-934BADEC5B00}"/>
               </a:ext>
             </a:extLst>
           </p:cNvPr>
@@ -16649,7 +16649,7 @@
           <p:cNvPr id="18" name="Rectangle 17">
             <a:extLst>
               <a:ext uri="{FF2B5EF4-FFF2-40B4-BE49-F238E27FC236}">
-                <a16:creationId xmlns:a16="http://schemas.microsoft.com/office/drawing/2014/main" id="{566AE97F-82E6-4886-BC99-BE4E7CDC374A}"/>
+                <a16:creationId xmlns:a16="http://schemas.microsoft.com/office/drawing/2014/main" id="{E3D01337-6B97-4BE4-967B-99DB1B85233E}"/>
               </a:ext>
             </a:extLst>
           </p:cNvPr>
@@ -16711,7 +16711,7 @@
           <p:cNvPr id="19" name="Rectangle: Rounded Corners 18">
             <a:extLst>
               <a:ext uri="{FF2B5EF4-FFF2-40B4-BE49-F238E27FC236}">
-                <a16:creationId xmlns:a16="http://schemas.microsoft.com/office/drawing/2014/main" id="{8AD86E60-63D5-40F3-B0D1-E357960F0AF9}"/>
+                <a16:creationId xmlns:a16="http://schemas.microsoft.com/office/drawing/2014/main" id="{BE919159-F7B1-4ADB-A95D-9E02166518AD}"/>
               </a:ext>
             </a:extLst>
           </p:cNvPr>
@@ -16744,7 +16744,7 @@
           <p:cNvPr id="20" name="Rectangle 19">
             <a:extLst>
               <a:ext uri="{FF2B5EF4-FFF2-40B4-BE49-F238E27FC236}">
-                <a16:creationId xmlns:a16="http://schemas.microsoft.com/office/drawing/2014/main" id="{49F40EB3-A952-40FF-B495-1B8A4B19983F}"/>
+                <a16:creationId xmlns:a16="http://schemas.microsoft.com/office/drawing/2014/main" id="{A2B73B42-D048-46ED-9598-09F9AB997823}"/>
               </a:ext>
             </a:extLst>
           </p:cNvPr>
@@ -16806,7 +16806,7 @@
           <p:cNvPr id="21" name="Rectangle: Rounded Corners 20">
             <a:extLst>
               <a:ext uri="{FF2B5EF4-FFF2-40B4-BE49-F238E27FC236}">
-                <a16:creationId xmlns:a16="http://schemas.microsoft.com/office/drawing/2014/main" id="{B7EDDF14-8290-4A6B-905A-B009B43AA30F}"/>
+                <a16:creationId xmlns:a16="http://schemas.microsoft.com/office/drawing/2014/main" id="{C9E2E89C-E360-4BE5-8D72-0EC66E0FCCC6}"/>
               </a:ext>
             </a:extLst>
           </p:cNvPr>
@@ -16839,7 +16839,7 @@
           <p:cNvPr id="22" name="Rectangle 21">
             <a:extLst>
               <a:ext uri="{FF2B5EF4-FFF2-40B4-BE49-F238E27FC236}">
-                <a16:creationId xmlns:a16="http://schemas.microsoft.com/office/drawing/2014/main" id="{4A25ED0D-D0BB-43BF-83ED-C789BE24F3BA}"/>
+                <a16:creationId xmlns:a16="http://schemas.microsoft.com/office/drawing/2014/main" id="{1FBC34D1-780B-45DD-9510-B8DD27A8D233}"/>
               </a:ext>
             </a:extLst>
           </p:cNvPr>
@@ -16901,7 +16901,7 @@
           <p:cNvPr id="23" name="Rectangle 22">
             <a:extLst>
               <a:ext uri="{FF2B5EF4-FFF2-40B4-BE49-F238E27FC236}">
-                <a16:creationId xmlns:a16="http://schemas.microsoft.com/office/drawing/2014/main" id="{21643438-9D9A-4EE2-B8E9-658F03355428}"/>
+                <a16:creationId xmlns:a16="http://schemas.microsoft.com/office/drawing/2014/main" id="{318485DC-FC8B-4C53-A489-B84984BE6D44}"/>
               </a:ext>
             </a:extLst>
           </p:cNvPr>
@@ -16963,7 +16963,7 @@
           <p:cNvPr id="24" name="Rectangle: Rounded Corners 23">
             <a:extLst>
               <a:ext uri="{FF2B5EF4-FFF2-40B4-BE49-F238E27FC236}">
-                <a16:creationId xmlns:a16="http://schemas.microsoft.com/office/drawing/2014/main" id="{1892FED2-97D8-40B5-9CFA-91AEDCCBA941}"/>
+                <a16:creationId xmlns:a16="http://schemas.microsoft.com/office/drawing/2014/main" id="{30D18910-CB5F-4B70-B56F-3CB2236461D5}"/>
               </a:ext>
             </a:extLst>
           </p:cNvPr>
@@ -16996,7 +16996,7 @@
           <p:cNvPr id="25" name="Rectangle 24">
             <a:extLst>
               <a:ext uri="{FF2B5EF4-FFF2-40B4-BE49-F238E27FC236}">
-                <a16:creationId xmlns:a16="http://schemas.microsoft.com/office/drawing/2014/main" id="{02C56699-E57B-482C-B07D-5CEBF50A7C66}"/>
+                <a16:creationId xmlns:a16="http://schemas.microsoft.com/office/drawing/2014/main" id="{58D9D83E-8AA4-419B-91B8-920DE8181599}"/>
               </a:ext>
             </a:extLst>
           </p:cNvPr>
@@ -17058,7 +17058,7 @@
           <p:cNvPr id="26" name="Rectangle: Rounded Corners 25">
             <a:extLst>
               <a:ext uri="{FF2B5EF4-FFF2-40B4-BE49-F238E27FC236}">
-                <a16:creationId xmlns:a16="http://schemas.microsoft.com/office/drawing/2014/main" id="{BBE99805-582D-4EA6-A0F8-3234985D1A3F}"/>
+                <a16:creationId xmlns:a16="http://schemas.microsoft.com/office/drawing/2014/main" id="{2BE0C9C5-664A-4F87-8192-CB5B54E778CB}"/>
               </a:ext>
             </a:extLst>
           </p:cNvPr>
@@ -17091,7 +17091,7 @@
           <p:cNvPr id="27" name="Rectangle 26">
             <a:extLst>
               <a:ext uri="{FF2B5EF4-FFF2-40B4-BE49-F238E27FC236}">
-                <a16:creationId xmlns:a16="http://schemas.microsoft.com/office/drawing/2014/main" id="{0F4DB4B7-1743-4053-A3A9-1E5B85C4294B}"/>
+                <a16:creationId xmlns:a16="http://schemas.microsoft.com/office/drawing/2014/main" id="{8B0E4451-7399-46C4-B486-1DD75493F8E7}"/>
               </a:ext>
             </a:extLst>
           </p:cNvPr>
@@ -17153,7 +17153,7 @@
           <p:cNvPr id="28" name="Rectangle: Rounded Corners 27">
             <a:extLst>
               <a:ext uri="{FF2B5EF4-FFF2-40B4-BE49-F238E27FC236}">
-                <a16:creationId xmlns:a16="http://schemas.microsoft.com/office/drawing/2014/main" id="{489B04C2-7036-4AE5-8C9E-91B7502BCC37}"/>
+                <a16:creationId xmlns:a16="http://schemas.microsoft.com/office/drawing/2014/main" id="{09C79AC3-9862-4526-A26E-707E7F8B4725}"/>
               </a:ext>
             </a:extLst>
           </p:cNvPr>
@@ -17186,7 +17186,7 @@
           <p:cNvPr id="29" name="Rectangle 28">
             <a:extLst>
               <a:ext uri="{FF2B5EF4-FFF2-40B4-BE49-F238E27FC236}">
-                <a16:creationId xmlns:a16="http://schemas.microsoft.com/office/drawing/2014/main" id="{CF4EBF6F-411C-45FB-9C1C-E250C6F5D198}"/>
+                <a16:creationId xmlns:a16="http://schemas.microsoft.com/office/drawing/2014/main" id="{AE28444F-3056-4410-9503-49EB63E02644}"/>
               </a:ext>
             </a:extLst>
           </p:cNvPr>
@@ -17248,7 +17248,7 @@
           <p:cNvPr id="30" name="Rectangle: Rounded Corners 29">
             <a:extLst>
               <a:ext uri="{FF2B5EF4-FFF2-40B4-BE49-F238E27FC236}">
-                <a16:creationId xmlns:a16="http://schemas.microsoft.com/office/drawing/2014/main" id="{C968D801-0FFD-4E13-8227-3D030EE084F2}"/>
+                <a16:creationId xmlns:a16="http://schemas.microsoft.com/office/drawing/2014/main" id="{55A6D5C0-1E42-4704-AF4F-0A535C99440F}"/>
               </a:ext>
             </a:extLst>
           </p:cNvPr>
@@ -17281,7 +17281,7 @@
           <p:cNvPr id="31" name="Rectangle 30">
             <a:extLst>
               <a:ext uri="{FF2B5EF4-FFF2-40B4-BE49-F238E27FC236}">
-                <a16:creationId xmlns:a16="http://schemas.microsoft.com/office/drawing/2014/main" id="{868704CA-D765-45AE-BE31-0E0991AA46DA}"/>
+                <a16:creationId xmlns:a16="http://schemas.microsoft.com/office/drawing/2014/main" id="{F4B64A5A-D2BB-4867-AB82-68569F1CA4C4}"/>
               </a:ext>
             </a:extLst>
           </p:cNvPr>
@@ -17343,7 +17343,7 @@
           <p:cNvPr id="32" name="Rectangle: Rounded Corners 31">
             <a:extLst>
               <a:ext uri="{FF2B5EF4-FFF2-40B4-BE49-F238E27FC236}">
-                <a16:creationId xmlns:a16="http://schemas.microsoft.com/office/drawing/2014/main" id="{4738C7B5-4517-4445-A2B5-F90DEA87C16E}"/>
+                <a16:creationId xmlns:a16="http://schemas.microsoft.com/office/drawing/2014/main" id="{92374A7A-6FEC-4193-BB63-C218C685DE1B}"/>
               </a:ext>
             </a:extLst>
           </p:cNvPr>
@@ -17376,7 +17376,7 @@
           <p:cNvPr id="33" name="Rectangle 32">
             <a:extLst>
               <a:ext uri="{FF2B5EF4-FFF2-40B4-BE49-F238E27FC236}">
-                <a16:creationId xmlns:a16="http://schemas.microsoft.com/office/drawing/2014/main" id="{4EAE0A68-55CD-4E81-800E-25045C42F82C}"/>
+                <a16:creationId xmlns:a16="http://schemas.microsoft.com/office/drawing/2014/main" id="{06749553-D86A-4668-8C8A-A0F15E5D2E47}"/>
               </a:ext>
             </a:extLst>
           </p:cNvPr>
@@ -17438,7 +17438,7 @@
           <p:cNvPr id="34" name="Rectangle: Rounded Corners 33">
             <a:extLst>
               <a:ext uri="{FF2B5EF4-FFF2-40B4-BE49-F238E27FC236}">
-                <a16:creationId xmlns:a16="http://schemas.microsoft.com/office/drawing/2014/main" id="{1CB577B9-A409-4908-8C2C-A89089EBE8DB}"/>
+                <a16:creationId xmlns:a16="http://schemas.microsoft.com/office/drawing/2014/main" id="{4F9F5DB8-7D98-4A59-B3B2-D4120AB385C6}"/>
               </a:ext>
             </a:extLst>
           </p:cNvPr>
@@ -17471,7 +17471,7 @@
           <p:cNvPr id="35" name="Rectangle 34">
             <a:extLst>
               <a:ext uri="{FF2B5EF4-FFF2-40B4-BE49-F238E27FC236}">
-                <a16:creationId xmlns:a16="http://schemas.microsoft.com/office/drawing/2014/main" id="{39F3881E-796C-4EEA-886F-45BFDFD5175C}"/>
+                <a16:creationId xmlns:a16="http://schemas.microsoft.com/office/drawing/2014/main" id="{77A30978-223B-4AD0-A990-D57CB36463E6}"/>
               </a:ext>
             </a:extLst>
           </p:cNvPr>
@@ -17533,7 +17533,7 @@
           <p:cNvPr id="36" name="Rectangle 35">
             <a:extLst>
               <a:ext uri="{FF2B5EF4-FFF2-40B4-BE49-F238E27FC236}">
-                <a16:creationId xmlns:a16="http://schemas.microsoft.com/office/drawing/2014/main" id="{FBC08741-2B51-49BC-8613-B6A32A9719B2}"/>
+                <a16:creationId xmlns:a16="http://schemas.microsoft.com/office/drawing/2014/main" id="{716C794C-2F24-4372-A662-9CB3932BAF4A}"/>
               </a:ext>
             </a:extLst>
           </p:cNvPr>
@@ -17595,7 +17595,7 @@
           <p:cNvPr id="37" name="Rectangle 36">
             <a:extLst>
               <a:ext uri="{FF2B5EF4-FFF2-40B4-BE49-F238E27FC236}">
-                <a16:creationId xmlns:a16="http://schemas.microsoft.com/office/drawing/2014/main" id="{7B1BFEB9-B738-4837-BA32-B6B51051BD59}"/>
+                <a16:creationId xmlns:a16="http://schemas.microsoft.com/office/drawing/2014/main" id="{E92D9C1F-7566-4C05-B3DA-F812B07CD5B3}"/>
               </a:ext>
             </a:extLst>
           </p:cNvPr>
@@ -17657,7 +17657,7 @@
           <p:cNvPr id="38" name="Rectangle 37">
             <a:extLst>
               <a:ext uri="{FF2B5EF4-FFF2-40B4-BE49-F238E27FC236}">
-                <a16:creationId xmlns:a16="http://schemas.microsoft.com/office/drawing/2014/main" id="{99D0995F-66F1-422A-9821-1F900B43421B}"/>
+                <a16:creationId xmlns:a16="http://schemas.microsoft.com/office/drawing/2014/main" id="{F46C43AF-DE4E-4FB2-A8C6-3FD896F6F926}"/>
               </a:ext>
             </a:extLst>
           </p:cNvPr>
@@ -17688,7 +17688,7 @@
           <p:cNvPr id="39" name="Rectangle 38">
             <a:extLst>
               <a:ext uri="{FF2B5EF4-FFF2-40B4-BE49-F238E27FC236}">
-                <a16:creationId xmlns:a16="http://schemas.microsoft.com/office/drawing/2014/main" id="{4AC7E5F7-477D-4941-BD5C-2DB207E74C53}"/>
+                <a16:creationId xmlns:a16="http://schemas.microsoft.com/office/drawing/2014/main" id="{94FBF1DD-2E2D-4925-B1D9-FDC7F77A1AB4}"/>
               </a:ext>
             </a:extLst>
           </p:cNvPr>
@@ -17740,7 +17740,7 @@
                 <a:ea typeface="Arial"/>
                 <a:cs typeface="Arial"/>
               </a:rPr>
-              <a:t>r2z-d4c8d4cc709a · scn-e0f12f397e · prt-fd6de9d793</a:t>
+              <a:t>r2z-a7181752a17d · scn-e0f12f397e · prt-fd6de9d793</a:t>
             </a:r>
           </a:p>
         </p:txBody>
@@ -17750,7 +17750,7 @@
           <p:cNvPr id="40" name="Rectangle 39">
             <a:extLst>
               <a:ext uri="{FF2B5EF4-FFF2-40B4-BE49-F238E27FC236}">
-                <a16:creationId xmlns:a16="http://schemas.microsoft.com/office/drawing/2014/main" id="{D566DC48-79F0-47D5-8A99-40E172E9D54F}"/>
+                <a16:creationId xmlns:a16="http://schemas.microsoft.com/office/drawing/2014/main" id="{9B222FAC-DC18-41BA-BCE3-9A486EA4A426}"/>
               </a:ext>
             </a:extLst>
           </p:cNvPr>
@@ -17810,7 +17810,7 @@
     </p:spTree>
     <p:extLst>
       <p:ext uri="{BB962C8B-B14F-4D97-AF65-F5344CB8AC3E}">
-        <p14:creationId xmlns:p14="http://schemas.microsoft.com/office/powerpoint/2010/main" val="493571935"/>
+        <p14:creationId xmlns:p14="http://schemas.microsoft.com/office/powerpoint/2010/main" val="690345450"/>
       </p:ext>
     </p:extLst>
   </p:cSld>
@@ -17851,7 +17851,7 @@
             <a:hlinkClick r:id="rId3"/>
             <a:extLst>
               <a:ext uri="{FF2B5EF4-FFF2-40B4-BE49-F238E27FC236}">
-                <a16:creationId xmlns:a16="http://schemas.microsoft.com/office/drawing/2014/main" id="{628E497C-08E6-44D0-B0CF-81DD197F0488}"/>
+                <a16:creationId xmlns:a16="http://schemas.microsoft.com/office/drawing/2014/main" id="{F014E50A-20F9-4198-8A32-C90679CA5895}"/>
               </a:ext>
             </a:extLst>
           </p:cNvPr>
@@ -17926,7 +17926,7 @@
             <a:hlinkClick r:id="rId4"/>
             <a:extLst>
               <a:ext uri="{FF2B5EF4-FFF2-40B4-BE49-F238E27FC236}">
-                <a16:creationId xmlns:a16="http://schemas.microsoft.com/office/drawing/2014/main" id="{D0F4B9C5-4A12-4366-950F-3C3E5D96B49A}"/>
+                <a16:creationId xmlns:a16="http://schemas.microsoft.com/office/drawing/2014/main" id="{35BB961A-11FC-46FF-B814-570104426D1D}"/>
               </a:ext>
             </a:extLst>
           </p:cNvPr>
@@ -18000,7 +18000,7 @@
           <p:cNvPr id="3" name="Rectangle 2">
             <a:extLst>
               <a:ext uri="{FF2B5EF4-FFF2-40B4-BE49-F238E27FC236}">
-                <a16:creationId xmlns:a16="http://schemas.microsoft.com/office/drawing/2014/main" id="{D363979F-D9A3-4C55-9D30-5097AF71E361}"/>
+                <a16:creationId xmlns:a16="http://schemas.microsoft.com/office/drawing/2014/main" id="{ABAB8F47-7EF7-4700-9506-DF81A9FA30C6}"/>
               </a:ext>
             </a:extLst>
           </p:cNvPr>
@@ -18062,7 +18062,7 @@
           <p:cNvPr id="4" name="Rectangle 3">
             <a:extLst>
               <a:ext uri="{FF2B5EF4-FFF2-40B4-BE49-F238E27FC236}">
-                <a16:creationId xmlns:a16="http://schemas.microsoft.com/office/drawing/2014/main" id="{67F1E537-C668-46BD-AA53-9946636E6D91}"/>
+                <a16:creationId xmlns:a16="http://schemas.microsoft.com/office/drawing/2014/main" id="{FE93B2F7-882C-4199-A7B3-808C53B76B70}"/>
               </a:ext>
             </a:extLst>
           </p:cNvPr>
@@ -18151,7 +18151,7 @@
           <p:cNvPr id="6" name="Rectangle: Rounded Corners 5">
             <a:extLst>
               <a:ext uri="{FF2B5EF4-FFF2-40B4-BE49-F238E27FC236}">
-                <a16:creationId xmlns:a16="http://schemas.microsoft.com/office/drawing/2014/main" id="{BC7FF290-72C8-474C-B8A5-2592885B3547}"/>
+                <a16:creationId xmlns:a16="http://schemas.microsoft.com/office/drawing/2014/main" id="{378B2F2E-C4A9-41B0-BC0F-BB6BCAC48AAA}"/>
               </a:ext>
             </a:extLst>
           </p:cNvPr>
@@ -18184,7 +18184,7 @@
           <p:cNvPr id="7" name="Rectangle 6">
             <a:extLst>
               <a:ext uri="{FF2B5EF4-FFF2-40B4-BE49-F238E27FC236}">
-                <a16:creationId xmlns:a16="http://schemas.microsoft.com/office/drawing/2014/main" id="{3317DA2A-981D-42A5-AF28-BB2B2417E048}"/>
+                <a16:creationId xmlns:a16="http://schemas.microsoft.com/office/drawing/2014/main" id="{F1850FE8-D3E7-42C0-97E7-305A99C92F63}"/>
               </a:ext>
             </a:extLst>
           </p:cNvPr>
@@ -18246,7 +18246,7 @@
           <p:cNvPr id="8" name="Rectangle 7">
             <a:extLst>
               <a:ext uri="{FF2B5EF4-FFF2-40B4-BE49-F238E27FC236}">
-                <a16:creationId xmlns:a16="http://schemas.microsoft.com/office/drawing/2014/main" id="{213647E5-3D4C-42A3-81F6-0B5162F0E732}"/>
+                <a16:creationId xmlns:a16="http://schemas.microsoft.com/office/drawing/2014/main" id="{A23C0D30-F0A6-49F0-A2AF-5D57A680EBF3}"/>
               </a:ext>
             </a:extLst>
           </p:cNvPr>
@@ -18308,7 +18308,7 @@
           <p:cNvPr id="9" name="Rectangle 8">
             <a:extLst>
               <a:ext uri="{FF2B5EF4-FFF2-40B4-BE49-F238E27FC236}">
-                <a16:creationId xmlns:a16="http://schemas.microsoft.com/office/drawing/2014/main" id="{784C9165-B86F-42ED-80AC-486BD02DB7EA}"/>
+                <a16:creationId xmlns:a16="http://schemas.microsoft.com/office/drawing/2014/main" id="{A8C00DC2-839D-4DAF-A9A6-5D4F01D2B094}"/>
               </a:ext>
             </a:extLst>
           </p:cNvPr>
@@ -18339,7 +18339,7 @@
           <p:cNvPr id="10" name="Rectangle 9">
             <a:extLst>
               <a:ext uri="{FF2B5EF4-FFF2-40B4-BE49-F238E27FC236}">
-                <a16:creationId xmlns:a16="http://schemas.microsoft.com/office/drawing/2014/main" id="{E77A73DE-8955-4118-B25F-AD08A03B77F9}"/>
+                <a16:creationId xmlns:a16="http://schemas.microsoft.com/office/drawing/2014/main" id="{1ECA28A3-8278-4020-AC57-6B6D152F4C5C}"/>
               </a:ext>
             </a:extLst>
           </p:cNvPr>
@@ -18401,7 +18401,7 @@
           <p:cNvPr id="11" name="Rectangle 10">
             <a:extLst>
               <a:ext uri="{FF2B5EF4-FFF2-40B4-BE49-F238E27FC236}">
-                <a16:creationId xmlns:a16="http://schemas.microsoft.com/office/drawing/2014/main" id="{B7BD4A6E-3320-4443-B28F-03EB00728155}"/>
+                <a16:creationId xmlns:a16="http://schemas.microsoft.com/office/drawing/2014/main" id="{36CB7ADD-4E24-4361-97AB-24324B6948EF}"/>
               </a:ext>
             </a:extLst>
           </p:cNvPr>
@@ -18463,7 +18463,7 @@
           <p:cNvPr id="12" name="Rectangle 11">
             <a:extLst>
               <a:ext uri="{FF2B5EF4-FFF2-40B4-BE49-F238E27FC236}">
-                <a16:creationId xmlns:a16="http://schemas.microsoft.com/office/drawing/2014/main" id="{2561E651-D908-48FC-A45F-0E4302203981}"/>
+                <a16:creationId xmlns:a16="http://schemas.microsoft.com/office/drawing/2014/main" id="{B2F0FDB0-8FB3-4780-B737-3D40DF7DDD6E}"/>
               </a:ext>
             </a:extLst>
           </p:cNvPr>
@@ -18494,7 +18494,7 @@
           <p:cNvPr id="13" name="Rectangle 12">
             <a:extLst>
               <a:ext uri="{FF2B5EF4-FFF2-40B4-BE49-F238E27FC236}">
-                <a16:creationId xmlns:a16="http://schemas.microsoft.com/office/drawing/2014/main" id="{DF1E46EF-FD15-42C8-B83F-762BBFEDD199}"/>
+                <a16:creationId xmlns:a16="http://schemas.microsoft.com/office/drawing/2014/main" id="{D4B0DC5F-623A-40C9-A444-65BB27D4FB44}"/>
               </a:ext>
             </a:extLst>
           </p:cNvPr>
@@ -18556,7 +18556,7 @@
           <p:cNvPr id="14" name="Rectangle 13">
             <a:extLst>
               <a:ext uri="{FF2B5EF4-FFF2-40B4-BE49-F238E27FC236}">
-                <a16:creationId xmlns:a16="http://schemas.microsoft.com/office/drawing/2014/main" id="{05BBFD16-BF4E-4E21-8EA1-CA3EBEC5B4BD}"/>
+                <a16:creationId xmlns:a16="http://schemas.microsoft.com/office/drawing/2014/main" id="{4165DCD2-8F1D-47E5-966B-AF1114240B55}"/>
               </a:ext>
             </a:extLst>
           </p:cNvPr>
@@ -18618,7 +18618,7 @@
           <p:cNvPr id="15" name="Rectangle 14">
             <a:extLst>
               <a:ext uri="{FF2B5EF4-FFF2-40B4-BE49-F238E27FC236}">
-                <a16:creationId xmlns:a16="http://schemas.microsoft.com/office/drawing/2014/main" id="{82245CA4-CCD5-40CC-86D4-BC692A153BF3}"/>
+                <a16:creationId xmlns:a16="http://schemas.microsoft.com/office/drawing/2014/main" id="{551CA501-0CC1-4A60-A9FD-9E1A49CE5EDA}"/>
               </a:ext>
             </a:extLst>
           </p:cNvPr>
@@ -18649,7 +18649,7 @@
           <p:cNvPr id="16" name="Rectangle 15">
             <a:extLst>
               <a:ext uri="{FF2B5EF4-FFF2-40B4-BE49-F238E27FC236}">
-                <a16:creationId xmlns:a16="http://schemas.microsoft.com/office/drawing/2014/main" id="{ED7052F4-C282-4418-B283-CC1D6D21A890}"/>
+                <a16:creationId xmlns:a16="http://schemas.microsoft.com/office/drawing/2014/main" id="{70B09E15-7180-46F8-8DFC-DA296831925B}"/>
               </a:ext>
             </a:extLst>
           </p:cNvPr>
@@ -18711,7 +18711,7 @@
           <p:cNvPr id="17" name="Rectangle 16">
             <a:extLst>
               <a:ext uri="{FF2B5EF4-FFF2-40B4-BE49-F238E27FC236}">
-                <a16:creationId xmlns:a16="http://schemas.microsoft.com/office/drawing/2014/main" id="{46FCECC0-D948-4D98-980C-B4F539A55E3F}"/>
+                <a16:creationId xmlns:a16="http://schemas.microsoft.com/office/drawing/2014/main" id="{C51FE153-5A0D-42EF-8A57-5C7E8A5A8407}"/>
               </a:ext>
             </a:extLst>
           </p:cNvPr>
@@ -18773,7 +18773,7 @@
           <p:cNvPr id="18" name="Rectangle 17">
             <a:extLst>
               <a:ext uri="{FF2B5EF4-FFF2-40B4-BE49-F238E27FC236}">
-                <a16:creationId xmlns:a16="http://schemas.microsoft.com/office/drawing/2014/main" id="{CB179DB3-A8C7-4ECC-B1C8-FD727827F13B}"/>
+                <a16:creationId xmlns:a16="http://schemas.microsoft.com/office/drawing/2014/main" id="{C71A013D-E21E-4457-A931-8EC4C5EC5BD2}"/>
               </a:ext>
             </a:extLst>
           </p:cNvPr>
@@ -18804,7 +18804,7 @@
           <p:cNvPr id="19" name="Rectangle 18">
             <a:extLst>
               <a:ext uri="{FF2B5EF4-FFF2-40B4-BE49-F238E27FC236}">
-                <a16:creationId xmlns:a16="http://schemas.microsoft.com/office/drawing/2014/main" id="{D37ED087-61DE-405D-8022-87132FB64944}"/>
+                <a16:creationId xmlns:a16="http://schemas.microsoft.com/office/drawing/2014/main" id="{42565D8E-4563-4661-B817-CC251EB0BBCF}"/>
               </a:ext>
             </a:extLst>
           </p:cNvPr>
@@ -18866,7 +18866,7 @@
           <p:cNvPr id="20" name="Rectangle 19">
             <a:extLst>
               <a:ext uri="{FF2B5EF4-FFF2-40B4-BE49-F238E27FC236}">
-                <a16:creationId xmlns:a16="http://schemas.microsoft.com/office/drawing/2014/main" id="{E39A5B11-0050-494D-A821-2C879EEC1A47}"/>
+                <a16:creationId xmlns:a16="http://schemas.microsoft.com/office/drawing/2014/main" id="{D9446BD9-837A-43BA-8109-E261A84EA297}"/>
               </a:ext>
             </a:extLst>
           </p:cNvPr>
@@ -18928,7 +18928,7 @@
           <p:cNvPr id="21" name="Rectangle 20">
             <a:extLst>
               <a:ext uri="{FF2B5EF4-FFF2-40B4-BE49-F238E27FC236}">
-                <a16:creationId xmlns:a16="http://schemas.microsoft.com/office/drawing/2014/main" id="{A02A88AD-3086-4B67-83EF-5ED3937799B1}"/>
+                <a16:creationId xmlns:a16="http://schemas.microsoft.com/office/drawing/2014/main" id="{52CEF697-7140-42C2-A1A0-3AD56CCC2DF4}"/>
               </a:ext>
             </a:extLst>
           </p:cNvPr>
@@ -18959,7 +18959,7 @@
           <p:cNvPr id="22" name="Rectangle 21">
             <a:extLst>
               <a:ext uri="{FF2B5EF4-FFF2-40B4-BE49-F238E27FC236}">
-                <a16:creationId xmlns:a16="http://schemas.microsoft.com/office/drawing/2014/main" id="{A49BF8E2-72C7-45CA-9310-834E5484867F}"/>
+                <a16:creationId xmlns:a16="http://schemas.microsoft.com/office/drawing/2014/main" id="{D07FAF66-7CA1-4A08-8AC5-EAEC21BD6429}"/>
               </a:ext>
             </a:extLst>
           </p:cNvPr>
@@ -19021,7 +19021,7 @@
           <p:cNvPr id="23" name="Rectangle 22">
             <a:extLst>
               <a:ext uri="{FF2B5EF4-FFF2-40B4-BE49-F238E27FC236}">
-                <a16:creationId xmlns:a16="http://schemas.microsoft.com/office/drawing/2014/main" id="{4AB52280-F419-46F9-8E68-AA919D20115B}"/>
+                <a16:creationId xmlns:a16="http://schemas.microsoft.com/office/drawing/2014/main" id="{88D0924A-C100-420A-B5AD-D8DF87141324}"/>
               </a:ext>
             </a:extLst>
           </p:cNvPr>
@@ -19083,7 +19083,7 @@
           <p:cNvPr id="24" name="Rectangle 23">
             <a:extLst>
               <a:ext uri="{FF2B5EF4-FFF2-40B4-BE49-F238E27FC236}">
-                <a16:creationId xmlns:a16="http://schemas.microsoft.com/office/drawing/2014/main" id="{E1FF86F5-05B6-481D-8CB8-2FDB02CA6928}"/>
+                <a16:creationId xmlns:a16="http://schemas.microsoft.com/office/drawing/2014/main" id="{1CCB2F08-8D2D-4195-981B-77C910C1F66C}"/>
               </a:ext>
             </a:extLst>
           </p:cNvPr>
@@ -19114,7 +19114,7 @@
           <p:cNvPr id="25" name="Rectangle 24">
             <a:extLst>
               <a:ext uri="{FF2B5EF4-FFF2-40B4-BE49-F238E27FC236}">
-                <a16:creationId xmlns:a16="http://schemas.microsoft.com/office/drawing/2014/main" id="{1190BCDB-8B31-4AF2-B81E-542A5B48B0A8}"/>
+                <a16:creationId xmlns:a16="http://schemas.microsoft.com/office/drawing/2014/main" id="{26BCF847-B426-499E-83B8-140BE2D60C63}"/>
               </a:ext>
             </a:extLst>
           </p:cNvPr>
@@ -19176,7 +19176,7 @@
           <p:cNvPr id="26" name="Rectangle 25">
             <a:extLst>
               <a:ext uri="{FF2B5EF4-FFF2-40B4-BE49-F238E27FC236}">
-                <a16:creationId xmlns:a16="http://schemas.microsoft.com/office/drawing/2014/main" id="{3BFC1223-19FE-44A6-B83B-3EE7C548B17C}"/>
+                <a16:creationId xmlns:a16="http://schemas.microsoft.com/office/drawing/2014/main" id="{AC10FAFB-0340-411D-84F5-CD785CA79D39}"/>
               </a:ext>
             </a:extLst>
           </p:cNvPr>
@@ -19238,7 +19238,7 @@
           <p:cNvPr id="27" name="Rectangle 26">
             <a:extLst>
               <a:ext uri="{FF2B5EF4-FFF2-40B4-BE49-F238E27FC236}">
-                <a16:creationId xmlns:a16="http://schemas.microsoft.com/office/drawing/2014/main" id="{04EBA7C9-C978-443F-96C3-57F2A12D1441}"/>
+                <a16:creationId xmlns:a16="http://schemas.microsoft.com/office/drawing/2014/main" id="{A2C1CC60-B5C4-452D-A04B-04E63BCDDB13}"/>
               </a:ext>
             </a:extLst>
           </p:cNvPr>
@@ -19269,7 +19269,7 @@
           <p:cNvPr id="28" name="Rectangle 27">
             <a:extLst>
               <a:ext uri="{FF2B5EF4-FFF2-40B4-BE49-F238E27FC236}">
-                <a16:creationId xmlns:a16="http://schemas.microsoft.com/office/drawing/2014/main" id="{A35EC02F-5E41-4646-A162-C82159F39DC0}"/>
+                <a16:creationId xmlns:a16="http://schemas.microsoft.com/office/drawing/2014/main" id="{938131D6-ABE0-4BA0-BEF2-4DE5E1B814DA}"/>
               </a:ext>
             </a:extLst>
           </p:cNvPr>
@@ -19331,7 +19331,7 @@
           <p:cNvPr id="29" name="Rectangle 28">
             <a:extLst>
               <a:ext uri="{FF2B5EF4-FFF2-40B4-BE49-F238E27FC236}">
-                <a16:creationId xmlns:a16="http://schemas.microsoft.com/office/drawing/2014/main" id="{67E57EE9-E246-44B1-81A5-6A0981878E49}"/>
+                <a16:creationId xmlns:a16="http://schemas.microsoft.com/office/drawing/2014/main" id="{07C5D0CE-E717-460D-864E-AE138B20CFD7}"/>
               </a:ext>
             </a:extLst>
           </p:cNvPr>
@@ -19393,7 +19393,7 @@
           <p:cNvPr id="30" name="Rectangle 29">
             <a:extLst>
               <a:ext uri="{FF2B5EF4-FFF2-40B4-BE49-F238E27FC236}">
-                <a16:creationId xmlns:a16="http://schemas.microsoft.com/office/drawing/2014/main" id="{710B4E80-EEB4-4975-9693-59CFC996E25E}"/>
+                <a16:creationId xmlns:a16="http://schemas.microsoft.com/office/drawing/2014/main" id="{7417086F-254F-4401-B754-AF85DD39D63C}"/>
               </a:ext>
             </a:extLst>
           </p:cNvPr>
@@ -19424,7 +19424,7 @@
           <p:cNvPr id="31" name="Rectangle: Rounded Corners 30">
             <a:extLst>
               <a:ext uri="{FF2B5EF4-FFF2-40B4-BE49-F238E27FC236}">
-                <a16:creationId xmlns:a16="http://schemas.microsoft.com/office/drawing/2014/main" id="{D1BFC7DD-91EB-461F-8180-6F2A2462545B}"/>
+                <a16:creationId xmlns:a16="http://schemas.microsoft.com/office/drawing/2014/main" id="{1C81A5A7-C326-460E-95FB-F1A169081CA4}"/>
               </a:ext>
             </a:extLst>
           </p:cNvPr>
@@ -19457,7 +19457,7 @@
           <p:cNvPr id="32" name="Rectangle 31">
             <a:extLst>
               <a:ext uri="{FF2B5EF4-FFF2-40B4-BE49-F238E27FC236}">
-                <a16:creationId xmlns:a16="http://schemas.microsoft.com/office/drawing/2014/main" id="{8AEB0C8C-2131-4DAB-9C3B-E2BF2B9A2C81}"/>
+                <a16:creationId xmlns:a16="http://schemas.microsoft.com/office/drawing/2014/main" id="{64FD811C-7D05-4443-95A5-A127E11AB11D}"/>
               </a:ext>
             </a:extLst>
           </p:cNvPr>
@@ -19519,7 +19519,7 @@
           <p:cNvPr id="33" name="Rectangle 32">
             <a:extLst>
               <a:ext uri="{FF2B5EF4-FFF2-40B4-BE49-F238E27FC236}">
-                <a16:creationId xmlns:a16="http://schemas.microsoft.com/office/drawing/2014/main" id="{91CBF904-3981-4020-8849-D3B67BBFC2AB}"/>
+                <a16:creationId xmlns:a16="http://schemas.microsoft.com/office/drawing/2014/main" id="{72CF31B1-FFC1-49B2-8F28-569724839902}"/>
               </a:ext>
             </a:extLst>
           </p:cNvPr>
@@ -19550,7 +19550,7 @@
           <p:cNvPr id="34" name="Rectangle 33">
             <a:extLst>
               <a:ext uri="{FF2B5EF4-FFF2-40B4-BE49-F238E27FC236}">
-                <a16:creationId xmlns:a16="http://schemas.microsoft.com/office/drawing/2014/main" id="{84BBF2E3-5BD6-440D-93EE-187FC8833488}"/>
+                <a16:creationId xmlns:a16="http://schemas.microsoft.com/office/drawing/2014/main" id="{ED898381-3B0B-4440-8FF9-74CD54925CFC}"/>
               </a:ext>
             </a:extLst>
           </p:cNvPr>
@@ -19602,7 +19602,7 @@
                 <a:ea typeface="Arial"/>
                 <a:cs typeface="Arial"/>
               </a:rPr>
-              <a:t>r2z-d4c8d4cc709a · scn-e0f12f397e · prt-fd6de9d793</a:t>
+              <a:t>r2z-a7181752a17d · scn-e0f12f397e · prt-fd6de9d793</a:t>
             </a:r>
           </a:p>
         </p:txBody>
@@ -19612,7 +19612,7 @@
           <p:cNvPr id="35" name="Rectangle 34">
             <a:extLst>
               <a:ext uri="{FF2B5EF4-FFF2-40B4-BE49-F238E27FC236}">
-                <a16:creationId xmlns:a16="http://schemas.microsoft.com/office/drawing/2014/main" id="{353222DE-6F65-411E-A594-65E4238D98F2}"/>
+                <a16:creationId xmlns:a16="http://schemas.microsoft.com/office/drawing/2014/main" id="{C6B29D3A-6381-4E25-9269-D98DA0F4C272}"/>
               </a:ext>
             </a:extLst>
           </p:cNvPr>
@@ -19672,7 +19672,7 @@
     </p:spTree>
     <p:extLst>
       <p:ext uri="{BB962C8B-B14F-4D97-AF65-F5344CB8AC3E}">
-        <p14:creationId xmlns:p14="http://schemas.microsoft.com/office/powerpoint/2010/main" val="1356196912"/>
+        <p14:creationId xmlns:p14="http://schemas.microsoft.com/office/powerpoint/2010/main" val="461452588"/>
       </p:ext>
     </p:extLst>
   </p:cSld>
@@ -19713,7 +19713,7 @@
             <a:hlinkClick r:id="rId3"/>
             <a:extLst>
               <a:ext uri="{FF2B5EF4-FFF2-40B4-BE49-F238E27FC236}">
-                <a16:creationId xmlns:a16="http://schemas.microsoft.com/office/drawing/2014/main" id="{90A33213-3254-4C10-9789-0166EAB82CD2}"/>
+                <a16:creationId xmlns:a16="http://schemas.microsoft.com/office/drawing/2014/main" id="{A774A7C5-4758-4F38-A714-A4E811230D9F}"/>
               </a:ext>
             </a:extLst>
           </p:cNvPr>
@@ -19788,7 +19788,7 @@
             <a:hlinkClick r:id="rId4"/>
             <a:extLst>
               <a:ext uri="{FF2B5EF4-FFF2-40B4-BE49-F238E27FC236}">
-                <a16:creationId xmlns:a16="http://schemas.microsoft.com/office/drawing/2014/main" id="{3E1BE315-5CEA-4527-B28E-FD6FC72D4381}"/>
+                <a16:creationId xmlns:a16="http://schemas.microsoft.com/office/drawing/2014/main" id="{8864E017-1CEB-40CD-B5F3-5A16B6672B62}"/>
               </a:ext>
             </a:extLst>
           </p:cNvPr>
@@ -19862,7 +19862,7 @@
           <p:cNvPr id="3" name="Rectangle 2">
             <a:extLst>
               <a:ext uri="{FF2B5EF4-FFF2-40B4-BE49-F238E27FC236}">
-                <a16:creationId xmlns:a16="http://schemas.microsoft.com/office/drawing/2014/main" id="{0F8FB860-1F1A-409A-9262-17EE1689C087}"/>
+                <a16:creationId xmlns:a16="http://schemas.microsoft.com/office/drawing/2014/main" id="{1001B190-6D45-4E7B-A0D1-02D5666F7A9F}"/>
               </a:ext>
             </a:extLst>
           </p:cNvPr>
@@ -19924,7 +19924,7 @@
           <p:cNvPr id="4" name="Rectangle 3">
             <a:extLst>
               <a:ext uri="{FF2B5EF4-FFF2-40B4-BE49-F238E27FC236}">
-                <a16:creationId xmlns:a16="http://schemas.microsoft.com/office/drawing/2014/main" id="{221222BE-1D91-44B8-A00B-2737970CE551}"/>
+                <a16:creationId xmlns:a16="http://schemas.microsoft.com/office/drawing/2014/main" id="{6A596D56-BF4F-4883-A593-6DE5D7980F0B}"/>
               </a:ext>
             </a:extLst>
           </p:cNvPr>
@@ -19986,7 +19986,7 @@
           <p:cNvPr id="5" name="Rectangle 4">
             <a:extLst>
               <a:ext uri="{FF2B5EF4-FFF2-40B4-BE49-F238E27FC236}">
-                <a16:creationId xmlns:a16="http://schemas.microsoft.com/office/drawing/2014/main" id="{9457AE88-5384-4B72-B654-35C22949FD92}"/>
+                <a16:creationId xmlns:a16="http://schemas.microsoft.com/office/drawing/2014/main" id="{62300C77-BAA4-44A1-AA45-62E49C6A0E2D}"/>
               </a:ext>
             </a:extLst>
           </p:cNvPr>
@@ -20048,7 +20048,7 @@
           <p:cNvPr id="6" name="Rectangle 5">
             <a:extLst>
               <a:ext uri="{FF2B5EF4-FFF2-40B4-BE49-F238E27FC236}">
-                <a16:creationId xmlns:a16="http://schemas.microsoft.com/office/drawing/2014/main" id="{DEE57779-DE26-4015-BB48-6673CEA75219}"/>
+                <a16:creationId xmlns:a16="http://schemas.microsoft.com/office/drawing/2014/main" id="{E6D26286-6009-4426-9816-EA84C78260F0}"/>
               </a:ext>
             </a:extLst>
           </p:cNvPr>
@@ -20110,7 +20110,7 @@
           <p:cNvPr id="7" name="Rectangle 6">
             <a:extLst>
               <a:ext uri="{FF2B5EF4-FFF2-40B4-BE49-F238E27FC236}">
-                <a16:creationId xmlns:a16="http://schemas.microsoft.com/office/drawing/2014/main" id="{A9122501-C899-4F96-A392-AF7C5A794BCC}"/>
+                <a16:creationId xmlns:a16="http://schemas.microsoft.com/office/drawing/2014/main" id="{36EDBFA2-EC70-4CDC-985E-2A2C7D6A49B8}"/>
               </a:ext>
             </a:extLst>
           </p:cNvPr>
@@ -20172,7 +20172,7 @@
           <p:cNvPr id="8" name="Rectangle 7">
             <a:extLst>
               <a:ext uri="{FF2B5EF4-FFF2-40B4-BE49-F238E27FC236}">
-                <a16:creationId xmlns:a16="http://schemas.microsoft.com/office/drawing/2014/main" id="{90D3ECA1-004F-400E-A3C6-08651EBB3D14}"/>
+                <a16:creationId xmlns:a16="http://schemas.microsoft.com/office/drawing/2014/main" id="{0F2EB2F3-4037-477F-89D1-0206A52374AC}"/>
               </a:ext>
             </a:extLst>
           </p:cNvPr>
@@ -20234,7 +20234,7 @@
           <p:cNvPr id="9" name="Rectangle 8">
             <a:extLst>
               <a:ext uri="{FF2B5EF4-FFF2-40B4-BE49-F238E27FC236}">
-                <a16:creationId xmlns:a16="http://schemas.microsoft.com/office/drawing/2014/main" id="{4F84EAC1-A725-4FD1-885A-7C72860FD090}"/>
+                <a16:creationId xmlns:a16="http://schemas.microsoft.com/office/drawing/2014/main" id="{F81398CA-A468-469B-8F95-72D529AAA686}"/>
               </a:ext>
             </a:extLst>
           </p:cNvPr>
@@ -20265,7 +20265,7 @@
           <p:cNvPr id="10" name="Rectangle: Rounded Corners 9">
             <a:extLst>
               <a:ext uri="{FF2B5EF4-FFF2-40B4-BE49-F238E27FC236}">
-                <a16:creationId xmlns:a16="http://schemas.microsoft.com/office/drawing/2014/main" id="{9522FFE4-87C3-45F8-848C-5301C3F62F43}"/>
+                <a16:creationId xmlns:a16="http://schemas.microsoft.com/office/drawing/2014/main" id="{5E1595F9-D3BF-4E84-8787-9512D0E76FA9}"/>
               </a:ext>
             </a:extLst>
           </p:cNvPr>
@@ -20298,7 +20298,7 @@
           <p:cNvPr id="11" name="Rectangle 10">
             <a:extLst>
               <a:ext uri="{FF2B5EF4-FFF2-40B4-BE49-F238E27FC236}">
-                <a16:creationId xmlns:a16="http://schemas.microsoft.com/office/drawing/2014/main" id="{02035F54-7117-4DF2-8463-10F2C3897528}"/>
+                <a16:creationId xmlns:a16="http://schemas.microsoft.com/office/drawing/2014/main" id="{FBE4B484-62FE-40A2-8091-F6FF2391B2B9}"/>
               </a:ext>
             </a:extLst>
           </p:cNvPr>
@@ -20360,7 +20360,7 @@
           <p:cNvPr id="12" name="Rectangle 11">
             <a:extLst>
               <a:ext uri="{FF2B5EF4-FFF2-40B4-BE49-F238E27FC236}">
-                <a16:creationId xmlns:a16="http://schemas.microsoft.com/office/drawing/2014/main" id="{5FA4E21F-0423-4AFD-8E88-930797B4C7CD}"/>
+                <a16:creationId xmlns:a16="http://schemas.microsoft.com/office/drawing/2014/main" id="{61CED400-6D18-4153-A3E4-E5FB565880F6}"/>
               </a:ext>
             </a:extLst>
           </p:cNvPr>
@@ -20422,7 +20422,7 @@
           <p:cNvPr id="13" name="Rectangle 12">
             <a:extLst>
               <a:ext uri="{FF2B5EF4-FFF2-40B4-BE49-F238E27FC236}">
-                <a16:creationId xmlns:a16="http://schemas.microsoft.com/office/drawing/2014/main" id="{4ACDF3E7-8B7D-4DEE-B518-02F64DC9E77F}"/>
+                <a16:creationId xmlns:a16="http://schemas.microsoft.com/office/drawing/2014/main" id="{911E591F-1CAB-439B-B9DF-6AAF0596EC93}"/>
               </a:ext>
             </a:extLst>
           </p:cNvPr>
@@ -20484,7 +20484,7 @@
           <p:cNvPr id="14" name="Rectangle 13">
             <a:extLst>
               <a:ext uri="{FF2B5EF4-FFF2-40B4-BE49-F238E27FC236}">
-                <a16:creationId xmlns:a16="http://schemas.microsoft.com/office/drawing/2014/main" id="{AE8B60F0-2FEC-4267-A579-B5DF6A6F42F2}"/>
+                <a16:creationId xmlns:a16="http://schemas.microsoft.com/office/drawing/2014/main" id="{1DF1DA0B-4562-4875-9ABC-15EE3340E60B}"/>
               </a:ext>
             </a:extLst>
           </p:cNvPr>
@@ -20546,7 +20546,7 @@
           <p:cNvPr id="15" name="Rectangle: Rounded Corners 14">
             <a:extLst>
               <a:ext uri="{FF2B5EF4-FFF2-40B4-BE49-F238E27FC236}">
-                <a16:creationId xmlns:a16="http://schemas.microsoft.com/office/drawing/2014/main" id="{BF34E236-3F71-4194-899F-2FA60D2E82E5}"/>
+                <a16:creationId xmlns:a16="http://schemas.microsoft.com/office/drawing/2014/main" id="{AC90631D-BB60-4539-B802-EBFBE864263F}"/>
               </a:ext>
             </a:extLst>
           </p:cNvPr>
@@ -20579,7 +20579,7 @@
           <p:cNvPr id="16" name="Rectangle 15">
             <a:extLst>
               <a:ext uri="{FF2B5EF4-FFF2-40B4-BE49-F238E27FC236}">
-                <a16:creationId xmlns:a16="http://schemas.microsoft.com/office/drawing/2014/main" id="{CABC084A-9D94-4EDF-AA86-2F1E7C3AB32F}"/>
+                <a16:creationId xmlns:a16="http://schemas.microsoft.com/office/drawing/2014/main" id="{DDF3666D-EE34-43AB-B8C8-3B94E1E407B9}"/>
               </a:ext>
             </a:extLst>
           </p:cNvPr>
@@ -20641,7 +20641,7 @@
           <p:cNvPr id="17" name="Rectangle 16">
             <a:extLst>
               <a:ext uri="{FF2B5EF4-FFF2-40B4-BE49-F238E27FC236}">
-                <a16:creationId xmlns:a16="http://schemas.microsoft.com/office/drawing/2014/main" id="{7D25CBA9-420B-4ACE-8A82-976DF39A4F63}"/>
+                <a16:creationId xmlns:a16="http://schemas.microsoft.com/office/drawing/2014/main" id="{01725070-2139-4694-8BAA-2E13A2DC6F85}"/>
               </a:ext>
             </a:extLst>
           </p:cNvPr>
@@ -20703,7 +20703,7 @@
           <p:cNvPr id="18" name="Rectangle 17">
             <a:extLst>
               <a:ext uri="{FF2B5EF4-FFF2-40B4-BE49-F238E27FC236}">
-                <a16:creationId xmlns:a16="http://schemas.microsoft.com/office/drawing/2014/main" id="{BE508889-A620-426F-95CF-789D8844B888}"/>
+                <a16:creationId xmlns:a16="http://schemas.microsoft.com/office/drawing/2014/main" id="{7E374194-A003-4123-9E66-9A43D1D8C3D6}"/>
               </a:ext>
             </a:extLst>
           </p:cNvPr>
@@ -20734,7 +20734,7 @@
           <p:cNvPr id="19" name="Rectangle 18">
             <a:extLst>
               <a:ext uri="{FF2B5EF4-FFF2-40B4-BE49-F238E27FC236}">
-                <a16:creationId xmlns:a16="http://schemas.microsoft.com/office/drawing/2014/main" id="{200EC274-8748-42BC-99F6-18342DA35FC7}"/>
+                <a16:creationId xmlns:a16="http://schemas.microsoft.com/office/drawing/2014/main" id="{9FDB1CFA-AF56-45CA-89DE-315CA51C9E82}"/>
               </a:ext>
             </a:extLst>
           </p:cNvPr>
@@ -20786,7 +20786,7 @@
                 <a:ea typeface="Arial"/>
                 <a:cs typeface="Arial"/>
               </a:rPr>
-              <a:t>r2z-d4c8d4cc709a · scn-e0f12f397e · prt-fd6de9d793</a:t>
+              <a:t>r2z-a7181752a17d · scn-e0f12f397e · prt-fd6de9d793</a:t>
             </a:r>
           </a:p>
         </p:txBody>
@@ -20796,7 +20796,7 @@
           <p:cNvPr id="20" name="Rectangle 19">
             <a:extLst>
               <a:ext uri="{FF2B5EF4-FFF2-40B4-BE49-F238E27FC236}">
-                <a16:creationId xmlns:a16="http://schemas.microsoft.com/office/drawing/2014/main" id="{51DA89A6-697A-4FD9-A1CD-968EF7EDB3A1}"/>
+                <a16:creationId xmlns:a16="http://schemas.microsoft.com/office/drawing/2014/main" id="{88CE4A1C-B0C7-4212-B87D-96ABB51190A6}"/>
               </a:ext>
             </a:extLst>
           </p:cNvPr>
@@ -20856,7 +20856,7 @@
     </p:spTree>
     <p:extLst>
       <p:ext uri="{BB962C8B-B14F-4D97-AF65-F5344CB8AC3E}">
-        <p14:creationId xmlns:p14="http://schemas.microsoft.com/office/powerpoint/2010/main" val="1463705238"/>
+        <p14:creationId xmlns:p14="http://schemas.microsoft.com/office/powerpoint/2010/main" val="44697485"/>
       </p:ext>
     </p:extLst>
   </p:cSld>
@@ -20897,7 +20897,7 @@
             <a:hlinkClick r:id="rId3"/>
             <a:extLst>
               <a:ext uri="{FF2B5EF4-FFF2-40B4-BE49-F238E27FC236}">
-                <a16:creationId xmlns:a16="http://schemas.microsoft.com/office/drawing/2014/main" id="{26A4F713-7FDC-4B1F-A562-01762B62BA2A}"/>
+                <a16:creationId xmlns:a16="http://schemas.microsoft.com/office/drawing/2014/main" id="{4743B709-0950-4AD2-A5F8-88C0AC6486C5}"/>
               </a:ext>
             </a:extLst>
           </p:cNvPr>
@@ -20972,7 +20972,7 @@
             <a:hlinkClick r:id="rId4"/>
             <a:extLst>
               <a:ext uri="{FF2B5EF4-FFF2-40B4-BE49-F238E27FC236}">
-                <a16:creationId xmlns:a16="http://schemas.microsoft.com/office/drawing/2014/main" id="{7B4B7A1A-E5CD-4AC9-8014-E11259E37EFF}"/>
+                <a16:creationId xmlns:a16="http://schemas.microsoft.com/office/drawing/2014/main" id="{5A68D942-058D-4262-B123-FA8E0FFCBB9B}"/>
               </a:ext>
             </a:extLst>
           </p:cNvPr>
@@ -21046,7 +21046,7 @@
           <p:cNvPr id="3" name="Rectangle 2">
             <a:extLst>
               <a:ext uri="{FF2B5EF4-FFF2-40B4-BE49-F238E27FC236}">
-                <a16:creationId xmlns:a16="http://schemas.microsoft.com/office/drawing/2014/main" id="{A128A7CE-9F72-4913-BA66-AA0FA6D1E16E}"/>
+                <a16:creationId xmlns:a16="http://schemas.microsoft.com/office/drawing/2014/main" id="{7C1A47FF-3782-4F4F-99CC-C68905D425FE}"/>
               </a:ext>
             </a:extLst>
           </p:cNvPr>
@@ -21108,7 +21108,7 @@
           <p:cNvPr id="4" name="Rectangle 3">
             <a:extLst>
               <a:ext uri="{FF2B5EF4-FFF2-40B4-BE49-F238E27FC236}">
-                <a16:creationId xmlns:a16="http://schemas.microsoft.com/office/drawing/2014/main" id="{B8012679-E98A-4252-AFB2-A31518E83D47}"/>
+                <a16:creationId xmlns:a16="http://schemas.microsoft.com/office/drawing/2014/main" id="{4A5DD1B8-2638-4080-9589-4ED1C54602BD}"/>
               </a:ext>
             </a:extLst>
           </p:cNvPr>
@@ -21170,7 +21170,7 @@
           <p:cNvPr id="5" name="Oval 4">
             <a:extLst>
               <a:ext uri="{FF2B5EF4-FFF2-40B4-BE49-F238E27FC236}">
-                <a16:creationId xmlns:a16="http://schemas.microsoft.com/office/drawing/2014/main" id="{70C9D323-FDF2-46C1-B87A-60272FF159B7}"/>
+                <a16:creationId xmlns:a16="http://schemas.microsoft.com/office/drawing/2014/main" id="{30BD6B31-0394-41D0-B9E0-942EF0B4AC0F}"/>
               </a:ext>
             </a:extLst>
           </p:cNvPr>
@@ -21201,7 +21201,7 @@
           <p:cNvPr id="6" name="Rectangle 5">
             <a:extLst>
               <a:ext uri="{FF2B5EF4-FFF2-40B4-BE49-F238E27FC236}">
-                <a16:creationId xmlns:a16="http://schemas.microsoft.com/office/drawing/2014/main" id="{2786A7A8-B905-41BB-99D9-7C40DEDCB9F5}"/>
+                <a16:creationId xmlns:a16="http://schemas.microsoft.com/office/drawing/2014/main" id="{1069B2A5-20BE-4691-BFD3-507A3BC3326E}"/>
               </a:ext>
             </a:extLst>
           </p:cNvPr>
@@ -21263,7 +21263,7 @@
           <p:cNvPr id="7" name="Rectangle 6">
             <a:extLst>
               <a:ext uri="{FF2B5EF4-FFF2-40B4-BE49-F238E27FC236}">
-                <a16:creationId xmlns:a16="http://schemas.microsoft.com/office/drawing/2014/main" id="{2FF78C03-9D22-430A-B3D1-898717EDD442}"/>
+                <a16:creationId xmlns:a16="http://schemas.microsoft.com/office/drawing/2014/main" id="{2F3A1A58-E402-4280-BB2F-8B86362F59B6}"/>
               </a:ext>
             </a:extLst>
           </p:cNvPr>
@@ -21294,7 +21294,7 @@
           <p:cNvPr id="8" name="Rectangle 7">
             <a:extLst>
               <a:ext uri="{FF2B5EF4-FFF2-40B4-BE49-F238E27FC236}">
-                <a16:creationId xmlns:a16="http://schemas.microsoft.com/office/drawing/2014/main" id="{618D65AD-A6B9-4F9E-B87E-00153E9A3EBF}"/>
+                <a16:creationId xmlns:a16="http://schemas.microsoft.com/office/drawing/2014/main" id="{ABE506C0-07C3-4CE7-8361-7DCBFFE11FFD}"/>
               </a:ext>
             </a:extLst>
           </p:cNvPr>
@@ -21356,7 +21356,7 @@
           <p:cNvPr id="9" name="Oval 8">
             <a:extLst>
               <a:ext uri="{FF2B5EF4-FFF2-40B4-BE49-F238E27FC236}">
-                <a16:creationId xmlns:a16="http://schemas.microsoft.com/office/drawing/2014/main" id="{034B9DB9-D51D-4DF8-AB34-0A1EE7389F05}"/>
+                <a16:creationId xmlns:a16="http://schemas.microsoft.com/office/drawing/2014/main" id="{547B8B07-3364-4C6F-8DB5-679E9010D003}"/>
               </a:ext>
             </a:extLst>
           </p:cNvPr>
@@ -21387,7 +21387,7 @@
           <p:cNvPr id="10" name="Rectangle 9">
             <a:extLst>
               <a:ext uri="{FF2B5EF4-FFF2-40B4-BE49-F238E27FC236}">
-                <a16:creationId xmlns:a16="http://schemas.microsoft.com/office/drawing/2014/main" id="{CAE1BA54-F3EA-45FB-A38D-1362B176BF3E}"/>
+                <a16:creationId xmlns:a16="http://schemas.microsoft.com/office/drawing/2014/main" id="{9268A8BA-DACB-4F61-B911-CE31B744E29E}"/>
               </a:ext>
             </a:extLst>
           </p:cNvPr>
@@ -21449,7 +21449,7 @@
           <p:cNvPr id="11" name="Rectangle 10">
             <a:extLst>
               <a:ext uri="{FF2B5EF4-FFF2-40B4-BE49-F238E27FC236}">
-                <a16:creationId xmlns:a16="http://schemas.microsoft.com/office/drawing/2014/main" id="{64FE429B-2DBB-40A1-BC5F-0F53BCE029F1}"/>
+                <a16:creationId xmlns:a16="http://schemas.microsoft.com/office/drawing/2014/main" id="{1D83B11F-6C43-487B-A22A-64E85969DBEE}"/>
               </a:ext>
             </a:extLst>
           </p:cNvPr>
@@ -21480,7 +21480,7 @@
           <p:cNvPr id="12" name="Rectangle 11">
             <a:extLst>
               <a:ext uri="{FF2B5EF4-FFF2-40B4-BE49-F238E27FC236}">
-                <a16:creationId xmlns:a16="http://schemas.microsoft.com/office/drawing/2014/main" id="{824A5323-74B7-466D-A798-FF0768047E0A}"/>
+                <a16:creationId xmlns:a16="http://schemas.microsoft.com/office/drawing/2014/main" id="{4E6FC7CF-2813-462A-8044-B6382E2519EA}"/>
               </a:ext>
             </a:extLst>
           </p:cNvPr>
@@ -21542,7 +21542,7 @@
           <p:cNvPr id="13" name="Oval 12">
             <a:extLst>
               <a:ext uri="{FF2B5EF4-FFF2-40B4-BE49-F238E27FC236}">
-                <a16:creationId xmlns:a16="http://schemas.microsoft.com/office/drawing/2014/main" id="{6BCB7DC1-DAD7-41A7-8934-6039BCCDD704}"/>
+                <a16:creationId xmlns:a16="http://schemas.microsoft.com/office/drawing/2014/main" id="{CD018181-BD85-4235-9698-3504A913D03F}"/>
               </a:ext>
             </a:extLst>
           </p:cNvPr>
@@ -21573,7 +21573,7 @@
           <p:cNvPr id="14" name="Rectangle 13">
             <a:extLst>
               <a:ext uri="{FF2B5EF4-FFF2-40B4-BE49-F238E27FC236}">
-                <a16:creationId xmlns:a16="http://schemas.microsoft.com/office/drawing/2014/main" id="{F4518D3E-F552-48EC-AA1C-4F79E4AB528B}"/>
+                <a16:creationId xmlns:a16="http://schemas.microsoft.com/office/drawing/2014/main" id="{4B485428-9A54-479E-AE19-4CC0A2A8CD86}"/>
               </a:ext>
             </a:extLst>
           </p:cNvPr>
@@ -21635,7 +21635,7 @@
           <p:cNvPr id="15" name="Rectangle 14">
             <a:extLst>
               <a:ext uri="{FF2B5EF4-FFF2-40B4-BE49-F238E27FC236}">
-                <a16:creationId xmlns:a16="http://schemas.microsoft.com/office/drawing/2014/main" id="{2F2A6891-BBE2-41D2-82D0-A921D27B00E5}"/>
+                <a16:creationId xmlns:a16="http://schemas.microsoft.com/office/drawing/2014/main" id="{12943C07-1B34-46D0-979A-1BDDE66FEFC8}"/>
               </a:ext>
             </a:extLst>
           </p:cNvPr>
@@ -21666,7 +21666,7 @@
           <p:cNvPr id="16" name="Rectangle 15">
             <a:extLst>
               <a:ext uri="{FF2B5EF4-FFF2-40B4-BE49-F238E27FC236}">
-                <a16:creationId xmlns:a16="http://schemas.microsoft.com/office/drawing/2014/main" id="{BBC05BC4-D6F6-43F4-A65E-70852258906C}"/>
+                <a16:creationId xmlns:a16="http://schemas.microsoft.com/office/drawing/2014/main" id="{7D40EFC5-D106-4A39-9653-76F568A687D8}"/>
               </a:ext>
             </a:extLst>
           </p:cNvPr>
@@ -21728,7 +21728,7 @@
           <p:cNvPr id="17" name="Oval 16">
             <a:extLst>
               <a:ext uri="{FF2B5EF4-FFF2-40B4-BE49-F238E27FC236}">
-                <a16:creationId xmlns:a16="http://schemas.microsoft.com/office/drawing/2014/main" id="{3D120761-346B-4D3E-8FD1-6DBA2D939BC9}"/>
+                <a16:creationId xmlns:a16="http://schemas.microsoft.com/office/drawing/2014/main" id="{F1D0DEB6-3AA6-4BF9-99BB-4521803154FD}"/>
               </a:ext>
             </a:extLst>
           </p:cNvPr>
@@ -21759,7 +21759,7 @@
           <p:cNvPr id="18" name="Rectangle 17">
             <a:extLst>
               <a:ext uri="{FF2B5EF4-FFF2-40B4-BE49-F238E27FC236}">
-                <a16:creationId xmlns:a16="http://schemas.microsoft.com/office/drawing/2014/main" id="{193A59A7-8645-4033-B11F-574695032D9E}"/>
+                <a16:creationId xmlns:a16="http://schemas.microsoft.com/office/drawing/2014/main" id="{8E0E13F6-7EBF-4B7E-8CA1-3575F649CA29}"/>
               </a:ext>
             </a:extLst>
           </p:cNvPr>
@@ -21821,7 +21821,7 @@
           <p:cNvPr id="19" name="Rectangle 18">
             <a:extLst>
               <a:ext uri="{FF2B5EF4-FFF2-40B4-BE49-F238E27FC236}">
-                <a16:creationId xmlns:a16="http://schemas.microsoft.com/office/drawing/2014/main" id="{0602C270-5681-484C-B40D-9380B51BC648}"/>
+                <a16:creationId xmlns:a16="http://schemas.microsoft.com/office/drawing/2014/main" id="{8A482973-A0DF-4B49-A47E-8F2B05CD6929}"/>
               </a:ext>
             </a:extLst>
           </p:cNvPr>
@@ -21852,7 +21852,7 @@
           <p:cNvPr id="20" name="Rectangle 19">
             <a:extLst>
               <a:ext uri="{FF2B5EF4-FFF2-40B4-BE49-F238E27FC236}">
-                <a16:creationId xmlns:a16="http://schemas.microsoft.com/office/drawing/2014/main" id="{07E2AFE1-716B-4C6D-9CBB-63E2CCA3B499}"/>
+                <a16:creationId xmlns:a16="http://schemas.microsoft.com/office/drawing/2014/main" id="{FFA96604-0B01-4D32-BAA4-CA0FD967A3BF}"/>
               </a:ext>
             </a:extLst>
           </p:cNvPr>
@@ -21914,7 +21914,7 @@
           <p:cNvPr id="21" name="Oval 20">
             <a:extLst>
               <a:ext uri="{FF2B5EF4-FFF2-40B4-BE49-F238E27FC236}">
-                <a16:creationId xmlns:a16="http://schemas.microsoft.com/office/drawing/2014/main" id="{238957F6-93EF-46D1-B3B5-3CD30C1F1F88}"/>
+                <a16:creationId xmlns:a16="http://schemas.microsoft.com/office/drawing/2014/main" id="{F9636421-783E-419C-B2E4-C771E414D373}"/>
               </a:ext>
             </a:extLst>
           </p:cNvPr>
@@ -21945,7 +21945,7 @@
           <p:cNvPr id="22" name="Rectangle 21">
             <a:extLst>
               <a:ext uri="{FF2B5EF4-FFF2-40B4-BE49-F238E27FC236}">
-                <a16:creationId xmlns:a16="http://schemas.microsoft.com/office/drawing/2014/main" id="{9F999D54-8A82-4E8D-B098-C46E54D315C7}"/>
+                <a16:creationId xmlns:a16="http://schemas.microsoft.com/office/drawing/2014/main" id="{A34D0B07-F32D-4C69-A421-A3D6D9C60992}"/>
               </a:ext>
             </a:extLst>
           </p:cNvPr>
@@ -22007,7 +22007,7 @@
           <p:cNvPr id="23" name="Rectangle 22">
             <a:extLst>
               <a:ext uri="{FF2B5EF4-FFF2-40B4-BE49-F238E27FC236}">
-                <a16:creationId xmlns:a16="http://schemas.microsoft.com/office/drawing/2014/main" id="{CE6A05E9-04A4-4B08-BE20-74064F009933}"/>
+                <a16:creationId xmlns:a16="http://schemas.microsoft.com/office/drawing/2014/main" id="{10BC8359-5268-4E02-A741-7DFB5AA01FFB}"/>
               </a:ext>
             </a:extLst>
           </p:cNvPr>
@@ -22038,7 +22038,7 @@
           <p:cNvPr id="24" name="Rectangle 23">
             <a:extLst>
               <a:ext uri="{FF2B5EF4-FFF2-40B4-BE49-F238E27FC236}">
-                <a16:creationId xmlns:a16="http://schemas.microsoft.com/office/drawing/2014/main" id="{7CA1FA99-B17D-480A-B7C6-59C4EB03DCE2}"/>
+                <a16:creationId xmlns:a16="http://schemas.microsoft.com/office/drawing/2014/main" id="{A85D804E-2837-4DB0-A2B1-7006BAB41744}"/>
               </a:ext>
             </a:extLst>
           </p:cNvPr>
@@ -22100,7 +22100,7 @@
           <p:cNvPr id="25" name="Oval 24">
             <a:extLst>
               <a:ext uri="{FF2B5EF4-FFF2-40B4-BE49-F238E27FC236}">
-                <a16:creationId xmlns:a16="http://schemas.microsoft.com/office/drawing/2014/main" id="{56AE1A38-3CDA-4CD2-B49A-33080A450964}"/>
+                <a16:creationId xmlns:a16="http://schemas.microsoft.com/office/drawing/2014/main" id="{A5E2E241-F0E8-4BFC-A8E3-221FDC1FADEC}"/>
               </a:ext>
             </a:extLst>
           </p:cNvPr>
@@ -22131,7 +22131,7 @@
           <p:cNvPr id="26" name="Rectangle 25">
             <a:extLst>
               <a:ext uri="{FF2B5EF4-FFF2-40B4-BE49-F238E27FC236}">
-                <a16:creationId xmlns:a16="http://schemas.microsoft.com/office/drawing/2014/main" id="{2DB86571-4344-4714-BCCD-9C7AA0BAE917}"/>
+                <a16:creationId xmlns:a16="http://schemas.microsoft.com/office/drawing/2014/main" id="{EE4E4FB8-6A70-48A1-BEC7-10BE4FF017ED}"/>
               </a:ext>
             </a:extLst>
           </p:cNvPr>
@@ -22193,7 +22193,7 @@
           <p:cNvPr id="27" name="Rectangle 26">
             <a:extLst>
               <a:ext uri="{FF2B5EF4-FFF2-40B4-BE49-F238E27FC236}">
-                <a16:creationId xmlns:a16="http://schemas.microsoft.com/office/drawing/2014/main" id="{7FBC8D1E-3856-4302-B279-B6CED36FEBDB}"/>
+                <a16:creationId xmlns:a16="http://schemas.microsoft.com/office/drawing/2014/main" id="{39B53196-D17E-4912-AC64-8893F8C235A2}"/>
               </a:ext>
             </a:extLst>
           </p:cNvPr>
@@ -22255,7 +22255,7 @@
           <p:cNvPr id="28" name="Rectangle 27">
             <a:extLst>
               <a:ext uri="{FF2B5EF4-FFF2-40B4-BE49-F238E27FC236}">
-                <a16:creationId xmlns:a16="http://schemas.microsoft.com/office/drawing/2014/main" id="{1F1C4E06-9F76-428C-973B-A56941595218}"/>
+                <a16:creationId xmlns:a16="http://schemas.microsoft.com/office/drawing/2014/main" id="{FC7A580D-BC05-4123-92BD-54DB81EBBE8D}"/>
               </a:ext>
             </a:extLst>
           </p:cNvPr>
@@ -22317,7 +22317,7 @@
           <p:cNvPr id="29" name="Rectangle 28">
             <a:extLst>
               <a:ext uri="{FF2B5EF4-FFF2-40B4-BE49-F238E27FC236}">
-                <a16:creationId xmlns:a16="http://schemas.microsoft.com/office/drawing/2014/main" id="{15EB4823-A177-4537-A015-FF550C5AB876}"/>
+                <a16:creationId xmlns:a16="http://schemas.microsoft.com/office/drawing/2014/main" id="{FDBDBC05-D439-4449-BA4C-BBAE21EADF69}"/>
               </a:ext>
             </a:extLst>
           </p:cNvPr>
@@ -22442,7 +22442,7 @@
           <p:cNvPr id="30" name="Rectangle 29">
             <a:extLst>
               <a:ext uri="{FF2B5EF4-FFF2-40B4-BE49-F238E27FC236}">
-                <a16:creationId xmlns:a16="http://schemas.microsoft.com/office/drawing/2014/main" id="{E7AC499A-A03D-4689-B52C-6FED25D66A22}"/>
+                <a16:creationId xmlns:a16="http://schemas.microsoft.com/office/drawing/2014/main" id="{F409D9CA-B1CB-4146-B74E-10E981961CF6}"/>
               </a:ext>
             </a:extLst>
           </p:cNvPr>
@@ -22504,7 +22504,7 @@
           <p:cNvPr id="31" name="Rectangle 30">
             <a:extLst>
               <a:ext uri="{FF2B5EF4-FFF2-40B4-BE49-F238E27FC236}">
-                <a16:creationId xmlns:a16="http://schemas.microsoft.com/office/drawing/2014/main" id="{AC84199E-B2D6-430E-BF94-896C4A3FED3D}"/>
+                <a16:creationId xmlns:a16="http://schemas.microsoft.com/office/drawing/2014/main" id="{6C68C89B-1759-47B3-863F-FE9658C2C6F2}"/>
               </a:ext>
             </a:extLst>
           </p:cNvPr>
@@ -22629,7 +22629,7 @@
           <p:cNvPr id="32" name="Rectangle 31">
             <a:extLst>
               <a:ext uri="{FF2B5EF4-FFF2-40B4-BE49-F238E27FC236}">
-                <a16:creationId xmlns:a16="http://schemas.microsoft.com/office/drawing/2014/main" id="{89708095-98D7-4B2E-B6A4-7121281D81FA}"/>
+                <a16:creationId xmlns:a16="http://schemas.microsoft.com/office/drawing/2014/main" id="{28108C0D-245F-4018-96BB-65898A17C0C9}"/>
               </a:ext>
             </a:extLst>
           </p:cNvPr>
@@ -22691,7 +22691,7 @@
           <p:cNvPr id="33" name="Rectangle 32">
             <a:extLst>
               <a:ext uri="{FF2B5EF4-FFF2-40B4-BE49-F238E27FC236}">
-                <a16:creationId xmlns:a16="http://schemas.microsoft.com/office/drawing/2014/main" id="{AD3EBBF5-5D61-4461-A718-BF4D34CC5B51}"/>
+                <a16:creationId xmlns:a16="http://schemas.microsoft.com/office/drawing/2014/main" id="{E46C477C-9F4C-4370-9DA3-DA6E74D3E187}"/>
               </a:ext>
             </a:extLst>
           </p:cNvPr>
@@ -22816,7 +22816,7 @@
           <p:cNvPr id="34" name="Rectangle 33">
             <a:extLst>
               <a:ext uri="{FF2B5EF4-FFF2-40B4-BE49-F238E27FC236}">
-                <a16:creationId xmlns:a16="http://schemas.microsoft.com/office/drawing/2014/main" id="{FD36CA88-8F5E-4E42-81D7-8F41F9DE22D4}"/>
+                <a16:creationId xmlns:a16="http://schemas.microsoft.com/office/drawing/2014/main" id="{E6D659BA-B4A3-402C-B4BB-31C73083C4ED}"/>
               </a:ext>
             </a:extLst>
           </p:cNvPr>
@@ -22847,7 +22847,7 @@
           <p:cNvPr id="35" name="Rectangle 34">
             <a:extLst>
               <a:ext uri="{FF2B5EF4-FFF2-40B4-BE49-F238E27FC236}">
-                <a16:creationId xmlns:a16="http://schemas.microsoft.com/office/drawing/2014/main" id="{64D2F9F4-18A9-4338-9D54-6F1F2B9913C5}"/>
+                <a16:creationId xmlns:a16="http://schemas.microsoft.com/office/drawing/2014/main" id="{BC29DABB-1CE9-40EB-9D0F-F0436406B86B}"/>
               </a:ext>
             </a:extLst>
           </p:cNvPr>
@@ -22909,7 +22909,7 @@
           <p:cNvPr id="36" name="Rectangle 35">
             <a:extLst>
               <a:ext uri="{FF2B5EF4-FFF2-40B4-BE49-F238E27FC236}">
-                <a16:creationId xmlns:a16="http://schemas.microsoft.com/office/drawing/2014/main" id="{736E5E6F-14F5-48F5-B77F-7CE63C932BDE}"/>
+                <a16:creationId xmlns:a16="http://schemas.microsoft.com/office/drawing/2014/main" id="{783822D9-15F3-40E6-9560-158A799354EE}"/>
               </a:ext>
             </a:extLst>
           </p:cNvPr>
@@ -22971,7 +22971,7 @@
           <p:cNvPr id="37" name="Rectangle 36">
             <a:extLst>
               <a:ext uri="{FF2B5EF4-FFF2-40B4-BE49-F238E27FC236}">
-                <a16:creationId xmlns:a16="http://schemas.microsoft.com/office/drawing/2014/main" id="{10564E0A-BAE3-4001-A21F-DB894F948AD1}"/>
+                <a16:creationId xmlns:a16="http://schemas.microsoft.com/office/drawing/2014/main" id="{8D102C70-255B-47DA-AA8C-61C4A4FCBBE3}"/>
               </a:ext>
             </a:extLst>
           </p:cNvPr>
@@ -23033,7 +23033,7 @@
           <p:cNvPr id="38" name="Rectangle: Rounded Corners 37">
             <a:extLst>
               <a:ext uri="{FF2B5EF4-FFF2-40B4-BE49-F238E27FC236}">
-                <a16:creationId xmlns:a16="http://schemas.microsoft.com/office/drawing/2014/main" id="{73B3B11A-329D-4B13-9BC2-DD81658CBAF3}"/>
+                <a16:creationId xmlns:a16="http://schemas.microsoft.com/office/drawing/2014/main" id="{6E04BBDA-D7BD-4D08-911F-BCE6041614E3}"/>
               </a:ext>
             </a:extLst>
           </p:cNvPr>
@@ -23066,7 +23066,7 @@
           <p:cNvPr id="39" name="Rectangle 38">
             <a:extLst>
               <a:ext uri="{FF2B5EF4-FFF2-40B4-BE49-F238E27FC236}">
-                <a16:creationId xmlns:a16="http://schemas.microsoft.com/office/drawing/2014/main" id="{8D508BD4-B85A-40C1-9FD9-63389B9DA88C}"/>
+                <a16:creationId xmlns:a16="http://schemas.microsoft.com/office/drawing/2014/main" id="{B27885E6-0667-4227-8EA2-57E147577EAC}"/>
               </a:ext>
             </a:extLst>
           </p:cNvPr>
@@ -23128,7 +23128,7 @@
           <p:cNvPr id="40" name="Rectangle 39">
             <a:extLst>
               <a:ext uri="{FF2B5EF4-FFF2-40B4-BE49-F238E27FC236}">
-                <a16:creationId xmlns:a16="http://schemas.microsoft.com/office/drawing/2014/main" id="{EFA2B7C0-5E8D-4DC8-818D-844F7B473332}"/>
+                <a16:creationId xmlns:a16="http://schemas.microsoft.com/office/drawing/2014/main" id="{4D1C1A62-F5A1-41A2-B183-D838C080CAA5}"/>
               </a:ext>
             </a:extLst>
           </p:cNvPr>
@@ -23159,7 +23159,7 @@
           <p:cNvPr id="41" name="Rectangle 40">
             <a:extLst>
               <a:ext uri="{FF2B5EF4-FFF2-40B4-BE49-F238E27FC236}">
-                <a16:creationId xmlns:a16="http://schemas.microsoft.com/office/drawing/2014/main" id="{0A5F140F-3BD9-4511-8DEC-7D399513EA13}"/>
+                <a16:creationId xmlns:a16="http://schemas.microsoft.com/office/drawing/2014/main" id="{632EDF7F-20F3-4856-9B50-ECDE81C72550}"/>
               </a:ext>
             </a:extLst>
           </p:cNvPr>
@@ -23211,7 +23211,7 @@
                 <a:ea typeface="Arial"/>
                 <a:cs typeface="Arial"/>
               </a:rPr>
-              <a:t>r2z-d4c8d4cc709a · scn-e0f12f397e · prt-fd6de9d793</a:t>
+              <a:t>r2z-a7181752a17d · scn-e0f12f397e · prt-fd6de9d793</a:t>
             </a:r>
           </a:p>
         </p:txBody>
@@ -23221,7 +23221,7 @@
           <p:cNvPr id="42" name="Rectangle 41">
             <a:extLst>
               <a:ext uri="{FF2B5EF4-FFF2-40B4-BE49-F238E27FC236}">
-                <a16:creationId xmlns:a16="http://schemas.microsoft.com/office/drawing/2014/main" id="{87525372-5F51-4C74-AAD9-67F05103FD37}"/>
+                <a16:creationId xmlns:a16="http://schemas.microsoft.com/office/drawing/2014/main" id="{3AD56B60-71AB-49D4-BEDE-0D37C659C6C7}"/>
               </a:ext>
             </a:extLst>
           </p:cNvPr>
@@ -23281,7 +23281,7 @@
     </p:spTree>
     <p:extLst>
       <p:ext uri="{BB962C8B-B14F-4D97-AF65-F5344CB8AC3E}">
-        <p14:creationId xmlns:p14="http://schemas.microsoft.com/office/powerpoint/2010/main" val="651072470"/>
+        <p14:creationId xmlns:p14="http://schemas.microsoft.com/office/powerpoint/2010/main" val="1722975399"/>
       </p:ext>
     </p:extLst>
   </p:cSld>
@@ -23322,7 +23322,7 @@
             <a:hlinkClick r:id="rId3"/>
             <a:extLst>
               <a:ext uri="{FF2B5EF4-FFF2-40B4-BE49-F238E27FC236}">
-                <a16:creationId xmlns:a16="http://schemas.microsoft.com/office/drawing/2014/main" id="{A7EFC16A-D27B-4968-B4BE-089DE3BB295E}"/>
+                <a16:creationId xmlns:a16="http://schemas.microsoft.com/office/drawing/2014/main" id="{8FBA938C-5BBE-4A79-B99F-A2229EE1BDB1}"/>
               </a:ext>
             </a:extLst>
           </p:cNvPr>
@@ -23397,7 +23397,7 @@
             <a:hlinkClick r:id="rId4"/>
             <a:extLst>
               <a:ext uri="{FF2B5EF4-FFF2-40B4-BE49-F238E27FC236}">
-                <a16:creationId xmlns:a16="http://schemas.microsoft.com/office/drawing/2014/main" id="{46B618E3-7042-4868-94D5-E4FA4ED04CE5}"/>
+                <a16:creationId xmlns:a16="http://schemas.microsoft.com/office/drawing/2014/main" id="{7CCE4BF8-4EA5-4849-92BF-9A7993C76907}"/>
               </a:ext>
             </a:extLst>
           </p:cNvPr>
@@ -23471,7 +23471,7 @@
           <p:cNvPr id="3" name="Rectangle 2">
             <a:extLst>
               <a:ext uri="{FF2B5EF4-FFF2-40B4-BE49-F238E27FC236}">
-                <a16:creationId xmlns:a16="http://schemas.microsoft.com/office/drawing/2014/main" id="{5C6A550F-3AE7-4E00-8188-0F9061547963}"/>
+                <a16:creationId xmlns:a16="http://schemas.microsoft.com/office/drawing/2014/main" id="{A88EB0D5-4BC7-46D2-B61D-88ADF2316C95}"/>
               </a:ext>
             </a:extLst>
           </p:cNvPr>
@@ -23533,7 +23533,7 @@
           <p:cNvPr id="4" name="Rectangle 3">
             <a:extLst>
               <a:ext uri="{FF2B5EF4-FFF2-40B4-BE49-F238E27FC236}">
-                <a16:creationId xmlns:a16="http://schemas.microsoft.com/office/drawing/2014/main" id="{D378FA88-6B5A-4C56-B79C-C7065F57288C}"/>
+                <a16:creationId xmlns:a16="http://schemas.microsoft.com/office/drawing/2014/main" id="{22CE49A3-3D1F-4102-A185-87FE9FA9FE9E}"/>
               </a:ext>
             </a:extLst>
           </p:cNvPr>
@@ -23595,7 +23595,7 @@
           <p:cNvPr id="5" name="Rectangle 4">
             <a:extLst>
               <a:ext uri="{FF2B5EF4-FFF2-40B4-BE49-F238E27FC236}">
-                <a16:creationId xmlns:a16="http://schemas.microsoft.com/office/drawing/2014/main" id="{53A8F567-5E77-411D-B07A-F39B06BBDAE3}"/>
+                <a16:creationId xmlns:a16="http://schemas.microsoft.com/office/drawing/2014/main" id="{E216B2F2-2032-44E9-A5B9-5E52607C3790}"/>
               </a:ext>
             </a:extLst>
           </p:cNvPr>
@@ -23657,7 +23657,7 @@
           <p:cNvPr id="6" name="Rectangle 5">
             <a:extLst>
               <a:ext uri="{FF2B5EF4-FFF2-40B4-BE49-F238E27FC236}">
-                <a16:creationId xmlns:a16="http://schemas.microsoft.com/office/drawing/2014/main" id="{2165483C-A8FD-4CCC-98AA-9D5E8690EE77}"/>
+                <a16:creationId xmlns:a16="http://schemas.microsoft.com/office/drawing/2014/main" id="{A99DB405-A0C3-4138-97FF-7B22F0D1A316}"/>
               </a:ext>
             </a:extLst>
           </p:cNvPr>
@@ -23719,7 +23719,7 @@
           <p:cNvPr id="7" name="Rectangle 6">
             <a:extLst>
               <a:ext uri="{FF2B5EF4-FFF2-40B4-BE49-F238E27FC236}">
-                <a16:creationId xmlns:a16="http://schemas.microsoft.com/office/drawing/2014/main" id="{0282B84E-9F4A-4856-89D8-7002ACF96F2B}"/>
+                <a16:creationId xmlns:a16="http://schemas.microsoft.com/office/drawing/2014/main" id="{BDCBB49F-405E-4949-B605-D48DD2580EFA}"/>
               </a:ext>
             </a:extLst>
           </p:cNvPr>
@@ -23750,7 +23750,7 @@
           <p:cNvPr id="8" name="Rectangle 7">
             <a:extLst>
               <a:ext uri="{FF2B5EF4-FFF2-40B4-BE49-F238E27FC236}">
-                <a16:creationId xmlns:a16="http://schemas.microsoft.com/office/drawing/2014/main" id="{B1ED8EAD-69DE-402E-BA43-1A74D96803A5}"/>
+                <a16:creationId xmlns:a16="http://schemas.microsoft.com/office/drawing/2014/main" id="{31905628-E613-49ED-8230-B2E5ABCF0AA2}"/>
               </a:ext>
             </a:extLst>
           </p:cNvPr>
@@ -23812,7 +23812,7 @@
           <p:cNvPr id="9" name="Rectangle 8">
             <a:extLst>
               <a:ext uri="{FF2B5EF4-FFF2-40B4-BE49-F238E27FC236}">
-                <a16:creationId xmlns:a16="http://schemas.microsoft.com/office/drawing/2014/main" id="{F5D541E4-CBBC-4B2A-8534-5AF47D074E8C}"/>
+                <a16:creationId xmlns:a16="http://schemas.microsoft.com/office/drawing/2014/main" id="{30D36B8E-44E8-4295-8C63-B3891D5F7CB5}"/>
               </a:ext>
             </a:extLst>
           </p:cNvPr>
@@ -23874,7 +23874,7 @@
           <p:cNvPr id="10" name="Rectangle 9">
             <a:extLst>
               <a:ext uri="{FF2B5EF4-FFF2-40B4-BE49-F238E27FC236}">
-                <a16:creationId xmlns:a16="http://schemas.microsoft.com/office/drawing/2014/main" id="{26652437-B2DE-4F7B-907C-E45E933F79D3}"/>
+                <a16:creationId xmlns:a16="http://schemas.microsoft.com/office/drawing/2014/main" id="{3FB8E1D1-E53C-4E09-A028-888E3C5CE20C}"/>
               </a:ext>
             </a:extLst>
           </p:cNvPr>
@@ -23905,7 +23905,7 @@
           <p:cNvPr id="11" name="Rectangle 10">
             <a:extLst>
               <a:ext uri="{FF2B5EF4-FFF2-40B4-BE49-F238E27FC236}">
-                <a16:creationId xmlns:a16="http://schemas.microsoft.com/office/drawing/2014/main" id="{383E18C4-7F2F-4547-8A0B-3B52E3B91281}"/>
+                <a16:creationId xmlns:a16="http://schemas.microsoft.com/office/drawing/2014/main" id="{AB2EFD7A-E6E1-403D-83E4-A5E8A4CA8150}"/>
               </a:ext>
             </a:extLst>
           </p:cNvPr>
@@ -23967,7 +23967,7 @@
           <p:cNvPr id="12" name="Rectangle 11">
             <a:extLst>
               <a:ext uri="{FF2B5EF4-FFF2-40B4-BE49-F238E27FC236}">
-                <a16:creationId xmlns:a16="http://schemas.microsoft.com/office/drawing/2014/main" id="{6CC01F70-F202-4928-9511-E1430227377A}"/>
+                <a16:creationId xmlns:a16="http://schemas.microsoft.com/office/drawing/2014/main" id="{5F1E6ECE-345A-4F1A-BA7A-F5450C90A7C7}"/>
               </a:ext>
             </a:extLst>
           </p:cNvPr>
@@ -24029,7 +24029,7 @@
           <p:cNvPr id="13" name="Rectangle 12">
             <a:extLst>
               <a:ext uri="{FF2B5EF4-FFF2-40B4-BE49-F238E27FC236}">
-                <a16:creationId xmlns:a16="http://schemas.microsoft.com/office/drawing/2014/main" id="{0F17AE13-CA57-490C-AE45-4FF45E16D4D9}"/>
+                <a16:creationId xmlns:a16="http://schemas.microsoft.com/office/drawing/2014/main" id="{99AC4D1E-3A52-4DCB-AEED-A46B85D6BA57}"/>
               </a:ext>
             </a:extLst>
           </p:cNvPr>
@@ -24060,7 +24060,7 @@
           <p:cNvPr id="14" name="Rectangle 13">
             <a:extLst>
               <a:ext uri="{FF2B5EF4-FFF2-40B4-BE49-F238E27FC236}">
-                <a16:creationId xmlns:a16="http://schemas.microsoft.com/office/drawing/2014/main" id="{F5A5FFF8-8902-4127-8680-7702E34935F6}"/>
+                <a16:creationId xmlns:a16="http://schemas.microsoft.com/office/drawing/2014/main" id="{8C504EDC-361E-410F-ABDA-8D61E77F3BA9}"/>
               </a:ext>
             </a:extLst>
           </p:cNvPr>
@@ -24122,7 +24122,7 @@
           <p:cNvPr id="15" name="Rectangle 14">
             <a:extLst>
               <a:ext uri="{FF2B5EF4-FFF2-40B4-BE49-F238E27FC236}">
-                <a16:creationId xmlns:a16="http://schemas.microsoft.com/office/drawing/2014/main" id="{F42F6820-53D1-48C6-8656-8B34004829DE}"/>
+                <a16:creationId xmlns:a16="http://schemas.microsoft.com/office/drawing/2014/main" id="{2B57C6A4-22EF-4F6E-A7B3-56A9D9C59C90}"/>
               </a:ext>
             </a:extLst>
           </p:cNvPr>
@@ -24184,7 +24184,7 @@
           <p:cNvPr id="16" name="Rectangle 15">
             <a:extLst>
               <a:ext uri="{FF2B5EF4-FFF2-40B4-BE49-F238E27FC236}">
-                <a16:creationId xmlns:a16="http://schemas.microsoft.com/office/drawing/2014/main" id="{AC06FB68-FA1C-4CED-A5AC-848C532107FC}"/>
+                <a16:creationId xmlns:a16="http://schemas.microsoft.com/office/drawing/2014/main" id="{C9C09DF9-99DE-4F82-A5ED-A68FB56B303D}"/>
               </a:ext>
             </a:extLst>
           </p:cNvPr>
@@ -24215,7 +24215,7 @@
           <p:cNvPr id="17" name="Rectangle 16">
             <a:extLst>
               <a:ext uri="{FF2B5EF4-FFF2-40B4-BE49-F238E27FC236}">
-                <a16:creationId xmlns:a16="http://schemas.microsoft.com/office/drawing/2014/main" id="{552136A1-429A-4C6C-9CFA-88C29EDFF365}"/>
+                <a16:creationId xmlns:a16="http://schemas.microsoft.com/office/drawing/2014/main" id="{D95EAF5D-98CC-4220-9F72-415620898338}"/>
               </a:ext>
             </a:extLst>
           </p:cNvPr>
@@ -24277,7 +24277,7 @@
           <p:cNvPr id="18" name="Rectangle 17">
             <a:extLst>
               <a:ext uri="{FF2B5EF4-FFF2-40B4-BE49-F238E27FC236}">
-                <a16:creationId xmlns:a16="http://schemas.microsoft.com/office/drawing/2014/main" id="{C92A39C4-17E7-43DA-9145-5D1E31877A43}"/>
+                <a16:creationId xmlns:a16="http://schemas.microsoft.com/office/drawing/2014/main" id="{9156D6B8-A996-4850-8888-468CF71851D5}"/>
               </a:ext>
             </a:extLst>
           </p:cNvPr>
@@ -24339,7 +24339,7 @@
           <p:cNvPr id="19" name="Rectangle 18">
             <a:extLst>
               <a:ext uri="{FF2B5EF4-FFF2-40B4-BE49-F238E27FC236}">
-                <a16:creationId xmlns:a16="http://schemas.microsoft.com/office/drawing/2014/main" id="{ECF66008-D03D-4358-8FC9-F6BC7EF212F5}"/>
+                <a16:creationId xmlns:a16="http://schemas.microsoft.com/office/drawing/2014/main" id="{95239D6D-AFE4-41E2-9091-E6A2C84B6547}"/>
               </a:ext>
             </a:extLst>
           </p:cNvPr>
@@ -24370,7 +24370,7 @@
           <p:cNvPr id="20" name="Rectangle 19">
             <a:extLst>
               <a:ext uri="{FF2B5EF4-FFF2-40B4-BE49-F238E27FC236}">
-                <a16:creationId xmlns:a16="http://schemas.microsoft.com/office/drawing/2014/main" id="{B148EF8E-477F-43F6-A6A2-3394BD098316}"/>
+                <a16:creationId xmlns:a16="http://schemas.microsoft.com/office/drawing/2014/main" id="{BAE52CC2-C34F-4087-A0EA-161AA52E2305}"/>
               </a:ext>
             </a:extLst>
           </p:cNvPr>
@@ -24432,7 +24432,7 @@
           <p:cNvPr id="21" name="Rectangle 20">
             <a:extLst>
               <a:ext uri="{FF2B5EF4-FFF2-40B4-BE49-F238E27FC236}">
-                <a16:creationId xmlns:a16="http://schemas.microsoft.com/office/drawing/2014/main" id="{FFDCCDCF-20FD-4B37-8BA2-924D7DCD2887}"/>
+                <a16:creationId xmlns:a16="http://schemas.microsoft.com/office/drawing/2014/main" id="{7A4576DD-0926-4901-B4A0-D8EE37BC337F}"/>
               </a:ext>
             </a:extLst>
           </p:cNvPr>
@@ -24494,7 +24494,7 @@
           <p:cNvPr id="22" name="Rectangle 21">
             <a:extLst>
               <a:ext uri="{FF2B5EF4-FFF2-40B4-BE49-F238E27FC236}">
-                <a16:creationId xmlns:a16="http://schemas.microsoft.com/office/drawing/2014/main" id="{7D95C2B0-BB1E-4F45-B1A4-8018FC2A5D20}"/>
+                <a16:creationId xmlns:a16="http://schemas.microsoft.com/office/drawing/2014/main" id="{80731A8A-6F5F-40D6-8A75-39E93F425E9C}"/>
               </a:ext>
             </a:extLst>
           </p:cNvPr>
@@ -24525,7 +24525,7 @@
           <p:cNvPr id="23" name="Rectangle: Rounded Corners 22">
             <a:extLst>
               <a:ext uri="{FF2B5EF4-FFF2-40B4-BE49-F238E27FC236}">
-                <a16:creationId xmlns:a16="http://schemas.microsoft.com/office/drawing/2014/main" id="{E920F44F-B3F3-47CC-9086-49F48ECAF37C}"/>
+                <a16:creationId xmlns:a16="http://schemas.microsoft.com/office/drawing/2014/main" id="{31AE8852-3869-4B48-B933-6E82E3D6D0F4}"/>
               </a:ext>
             </a:extLst>
           </p:cNvPr>
@@ -24558,7 +24558,7 @@
           <p:cNvPr id="24" name="Rectangle 23">
             <a:extLst>
               <a:ext uri="{FF2B5EF4-FFF2-40B4-BE49-F238E27FC236}">
-                <a16:creationId xmlns:a16="http://schemas.microsoft.com/office/drawing/2014/main" id="{F646F45F-9F1E-47D4-95EC-21B7D2E1A0DC}"/>
+                <a16:creationId xmlns:a16="http://schemas.microsoft.com/office/drawing/2014/main" id="{C216F273-F007-4B25-B058-6F11D9C2771B}"/>
               </a:ext>
             </a:extLst>
           </p:cNvPr>
@@ -24620,7 +24620,7 @@
           <p:cNvPr id="25" name="Rectangle 24">
             <a:extLst>
               <a:ext uri="{FF2B5EF4-FFF2-40B4-BE49-F238E27FC236}">
-                <a16:creationId xmlns:a16="http://schemas.microsoft.com/office/drawing/2014/main" id="{22D0DBB9-A66C-4BCC-9A64-BFCB6218C5DE}"/>
+                <a16:creationId xmlns:a16="http://schemas.microsoft.com/office/drawing/2014/main" id="{2767D426-C256-4A8C-A5EF-0CC99450CC29}"/>
               </a:ext>
             </a:extLst>
           </p:cNvPr>
@@ -24745,7 +24745,7 @@
           <p:cNvPr id="26" name="Rectangle 25">
             <a:extLst>
               <a:ext uri="{FF2B5EF4-FFF2-40B4-BE49-F238E27FC236}">
-                <a16:creationId xmlns:a16="http://schemas.microsoft.com/office/drawing/2014/main" id="{3F676BA6-3CAE-4906-88EC-B279ECE5010A}"/>
+                <a16:creationId xmlns:a16="http://schemas.microsoft.com/office/drawing/2014/main" id="{3CBFA68C-211F-4EF0-9980-2DC2E64EFA99}"/>
               </a:ext>
             </a:extLst>
           </p:cNvPr>
@@ -24807,7 +24807,7 @@
           <p:cNvPr id="27" name="Rectangle 26">
             <a:extLst>
               <a:ext uri="{FF2B5EF4-FFF2-40B4-BE49-F238E27FC236}">
-                <a16:creationId xmlns:a16="http://schemas.microsoft.com/office/drawing/2014/main" id="{ED383CDE-7E66-46A3-BAC9-89B1A293B5BB}"/>
+                <a16:creationId xmlns:a16="http://schemas.microsoft.com/office/drawing/2014/main" id="{8E30A061-03E5-438D-8DD9-EE747D205A5A}"/>
               </a:ext>
             </a:extLst>
           </p:cNvPr>
@@ -24838,7 +24838,7 @@
           <p:cNvPr id="28" name="Rectangle 27">
             <a:extLst>
               <a:ext uri="{FF2B5EF4-FFF2-40B4-BE49-F238E27FC236}">
-                <a16:creationId xmlns:a16="http://schemas.microsoft.com/office/drawing/2014/main" id="{3FF66976-DAEE-4D08-80CC-3AA2EF4C9220}"/>
+                <a16:creationId xmlns:a16="http://schemas.microsoft.com/office/drawing/2014/main" id="{1A42D6A4-4D72-44E4-8068-40BD7532D7EE}"/>
               </a:ext>
             </a:extLst>
           </p:cNvPr>
@@ -24890,7 +24890,7 @@
                 <a:ea typeface="Arial"/>
                 <a:cs typeface="Arial"/>
               </a:rPr>
-              <a:t>r2z-d4c8d4cc709a · scn-e0f12f397e · prt-fd6de9d793</a:t>
+              <a:t>r2z-a7181752a17d · scn-e0f12f397e · prt-fd6de9d793</a:t>
             </a:r>
           </a:p>
         </p:txBody>
@@ -24900,7 +24900,7 @@
           <p:cNvPr id="29" name="Rectangle 28">
             <a:extLst>
               <a:ext uri="{FF2B5EF4-FFF2-40B4-BE49-F238E27FC236}">
-                <a16:creationId xmlns:a16="http://schemas.microsoft.com/office/drawing/2014/main" id="{A0F9E39B-87F0-4853-8EDC-55C17627774A}"/>
+                <a16:creationId xmlns:a16="http://schemas.microsoft.com/office/drawing/2014/main" id="{ECDD0126-FA28-4F4D-A579-AEABFE60A376}"/>
               </a:ext>
             </a:extLst>
           </p:cNvPr>
@@ -24960,7 +24960,7 @@
     </p:spTree>
     <p:extLst>
       <p:ext uri="{BB962C8B-B14F-4D97-AF65-F5344CB8AC3E}">
-        <p14:creationId xmlns:p14="http://schemas.microsoft.com/office/powerpoint/2010/main" val="965045030"/>
+        <p14:creationId xmlns:p14="http://schemas.microsoft.com/office/powerpoint/2010/main" val="381091769"/>
       </p:ext>
     </p:extLst>
   </p:cSld>
@@ -25001,7 +25001,7 @@
             <a:hlinkClick r:id="rId3"/>
             <a:extLst>
               <a:ext uri="{FF2B5EF4-FFF2-40B4-BE49-F238E27FC236}">
-                <a16:creationId xmlns:a16="http://schemas.microsoft.com/office/drawing/2014/main" id="{23F8FA29-5DCF-4F25-8C66-42D9DEC27DB4}"/>
+                <a16:creationId xmlns:a16="http://schemas.microsoft.com/office/drawing/2014/main" id="{851AA2E1-009D-402A-98B6-CF1B24D484F5}"/>
               </a:ext>
             </a:extLst>
           </p:cNvPr>
@@ -25076,7 +25076,7 @@
             <a:hlinkClick r:id="rId4"/>
             <a:extLst>
               <a:ext uri="{FF2B5EF4-FFF2-40B4-BE49-F238E27FC236}">
-                <a16:creationId xmlns:a16="http://schemas.microsoft.com/office/drawing/2014/main" id="{2900F97A-EA1A-4677-B075-6654ECFFFDEE}"/>
+                <a16:creationId xmlns:a16="http://schemas.microsoft.com/office/drawing/2014/main" id="{59450267-80A5-48AE-8306-7E4204667D4C}"/>
               </a:ext>
             </a:extLst>
           </p:cNvPr>
@@ -25150,7 +25150,7 @@
           <p:cNvPr id="3" name="Rectangle 2">
             <a:extLst>
               <a:ext uri="{FF2B5EF4-FFF2-40B4-BE49-F238E27FC236}">
-                <a16:creationId xmlns:a16="http://schemas.microsoft.com/office/drawing/2014/main" id="{208B059B-8D8E-4572-A92E-838E13FE4EDA}"/>
+                <a16:creationId xmlns:a16="http://schemas.microsoft.com/office/drawing/2014/main" id="{63ECAD16-738A-496C-8350-1F11E3B6D25D}"/>
               </a:ext>
             </a:extLst>
           </p:cNvPr>
@@ -25212,7 +25212,7 @@
           <p:cNvPr id="4" name="Rectangle 3">
             <a:extLst>
               <a:ext uri="{FF2B5EF4-FFF2-40B4-BE49-F238E27FC236}">
-                <a16:creationId xmlns:a16="http://schemas.microsoft.com/office/drawing/2014/main" id="{E3834C64-EE77-4606-ABBE-618829591B8E}"/>
+                <a16:creationId xmlns:a16="http://schemas.microsoft.com/office/drawing/2014/main" id="{48CBBF1A-F99C-43CA-8C54-4926D48DB655}"/>
               </a:ext>
             </a:extLst>
           </p:cNvPr>
@@ -25274,7 +25274,7 @@
           <p:cNvPr id="5" name="Rectangle 4">
             <a:extLst>
               <a:ext uri="{FF2B5EF4-FFF2-40B4-BE49-F238E27FC236}">
-                <a16:creationId xmlns:a16="http://schemas.microsoft.com/office/drawing/2014/main" id="{B4CF20B4-04DD-4DD1-885F-316C00F5123D}"/>
+                <a16:creationId xmlns:a16="http://schemas.microsoft.com/office/drawing/2014/main" id="{1B08B17E-19A0-48DE-8060-20E8DB9FF6F7}"/>
               </a:ext>
             </a:extLst>
           </p:cNvPr>
@@ -25336,7 +25336,7 @@
           <p:cNvPr id="6" name="Oval 5">
             <a:extLst>
               <a:ext uri="{FF2B5EF4-FFF2-40B4-BE49-F238E27FC236}">
-                <a16:creationId xmlns:a16="http://schemas.microsoft.com/office/drawing/2014/main" id="{A939A56F-C110-46F7-B916-48241113839D}"/>
+                <a16:creationId xmlns:a16="http://schemas.microsoft.com/office/drawing/2014/main" id="{0D1043B2-0123-43B9-9364-86EA2EF36CDE}"/>
               </a:ext>
             </a:extLst>
           </p:cNvPr>
@@ -25367,7 +25367,7 @@
           <p:cNvPr id="7" name="Rectangle 6">
             <a:extLst>
               <a:ext uri="{FF2B5EF4-FFF2-40B4-BE49-F238E27FC236}">
-                <a16:creationId xmlns:a16="http://schemas.microsoft.com/office/drawing/2014/main" id="{C333E370-0F0D-408D-920F-081DD2BA93E2}"/>
+                <a16:creationId xmlns:a16="http://schemas.microsoft.com/office/drawing/2014/main" id="{046352D2-9837-41CA-88B4-C91D81908974}"/>
               </a:ext>
             </a:extLst>
           </p:cNvPr>
@@ -25429,7 +25429,7 @@
           <p:cNvPr id="8" name="Oval 7">
             <a:extLst>
               <a:ext uri="{FF2B5EF4-FFF2-40B4-BE49-F238E27FC236}">
-                <a16:creationId xmlns:a16="http://schemas.microsoft.com/office/drawing/2014/main" id="{CEFB5E78-AE73-48C2-B067-CFF501873126}"/>
+                <a16:creationId xmlns:a16="http://schemas.microsoft.com/office/drawing/2014/main" id="{9C377AE0-9821-43B7-978D-782F3B4572E7}"/>
               </a:ext>
             </a:extLst>
           </p:cNvPr>
@@ -25460,7 +25460,7 @@
           <p:cNvPr id="9" name="Rectangle 8">
             <a:extLst>
               <a:ext uri="{FF2B5EF4-FFF2-40B4-BE49-F238E27FC236}">
-                <a16:creationId xmlns:a16="http://schemas.microsoft.com/office/drawing/2014/main" id="{8A10A105-1513-429A-B50E-3D02C6D9EB5F}"/>
+                <a16:creationId xmlns:a16="http://schemas.microsoft.com/office/drawing/2014/main" id="{A939C95C-1616-4D5C-94EE-FE1D10B02A5A}"/>
               </a:ext>
             </a:extLst>
           </p:cNvPr>
@@ -25522,7 +25522,7 @@
           <p:cNvPr id="10" name="Oval 9">
             <a:extLst>
               <a:ext uri="{FF2B5EF4-FFF2-40B4-BE49-F238E27FC236}">
-                <a16:creationId xmlns:a16="http://schemas.microsoft.com/office/drawing/2014/main" id="{55CE2668-EB7C-4DB0-A347-2E87225AB9C3}"/>
+                <a16:creationId xmlns:a16="http://schemas.microsoft.com/office/drawing/2014/main" id="{4C6DDFF5-1BAC-420D-9246-5EC7BD8673D4}"/>
               </a:ext>
             </a:extLst>
           </p:cNvPr>
@@ -25553,7 +25553,7 @@
           <p:cNvPr id="11" name="Rectangle 10">
             <a:extLst>
               <a:ext uri="{FF2B5EF4-FFF2-40B4-BE49-F238E27FC236}">
-                <a16:creationId xmlns:a16="http://schemas.microsoft.com/office/drawing/2014/main" id="{FD7D0BA7-E216-4334-BBA1-1CE0DB607E9E}"/>
+                <a16:creationId xmlns:a16="http://schemas.microsoft.com/office/drawing/2014/main" id="{AD22AED4-A83D-4C0D-A954-46B7A23726B9}"/>
               </a:ext>
             </a:extLst>
           </p:cNvPr>
@@ -25615,7 +25615,7 @@
           <p:cNvPr id="12" name="Oval 11">
             <a:extLst>
               <a:ext uri="{FF2B5EF4-FFF2-40B4-BE49-F238E27FC236}">
-                <a16:creationId xmlns:a16="http://schemas.microsoft.com/office/drawing/2014/main" id="{213429CC-EF2D-42D7-9BE5-FDAC4A6B3E07}"/>
+                <a16:creationId xmlns:a16="http://schemas.microsoft.com/office/drawing/2014/main" id="{B35A8991-7190-4A55-9D9A-53FCD51BABFA}"/>
               </a:ext>
             </a:extLst>
           </p:cNvPr>
@@ -25646,7 +25646,7 @@
           <p:cNvPr id="13" name="Rectangle 12">
             <a:extLst>
               <a:ext uri="{FF2B5EF4-FFF2-40B4-BE49-F238E27FC236}">
-                <a16:creationId xmlns:a16="http://schemas.microsoft.com/office/drawing/2014/main" id="{220A74EA-A64C-4A67-AE8F-93359D4E060F}"/>
+                <a16:creationId xmlns:a16="http://schemas.microsoft.com/office/drawing/2014/main" id="{DC621629-368C-4D0F-91C9-D553179738D1}"/>
               </a:ext>
             </a:extLst>
           </p:cNvPr>
@@ -25708,7 +25708,7 @@
           <p:cNvPr id="14" name="Rectangle 13">
             <a:extLst>
               <a:ext uri="{FF2B5EF4-FFF2-40B4-BE49-F238E27FC236}">
-                <a16:creationId xmlns:a16="http://schemas.microsoft.com/office/drawing/2014/main" id="{DB10875D-7AEF-4434-8FA2-6CA22F499547}"/>
+                <a16:creationId xmlns:a16="http://schemas.microsoft.com/office/drawing/2014/main" id="{E13BAABF-9E9A-44DA-BA0C-CA0489B429CE}"/>
               </a:ext>
             </a:extLst>
           </p:cNvPr>
@@ -25770,7 +25770,7 @@
           <p:cNvPr id="15" name="Rectangle 14">
             <a:extLst>
               <a:ext uri="{FF2B5EF4-FFF2-40B4-BE49-F238E27FC236}">
-                <a16:creationId xmlns:a16="http://schemas.microsoft.com/office/drawing/2014/main" id="{C4B8C469-E320-4108-9258-36BB1FDB3023}"/>
+                <a16:creationId xmlns:a16="http://schemas.microsoft.com/office/drawing/2014/main" id="{D227B101-E524-4E5D-B635-5F86592D8094}"/>
               </a:ext>
             </a:extLst>
           </p:cNvPr>
@@ -25832,7 +25832,7 @@
           <p:cNvPr id="16" name="Rectangle 15">
             <a:extLst>
               <a:ext uri="{FF2B5EF4-FFF2-40B4-BE49-F238E27FC236}">
-                <a16:creationId xmlns:a16="http://schemas.microsoft.com/office/drawing/2014/main" id="{82DD2374-2674-494A-9617-51C6EDD198A9}"/>
+                <a16:creationId xmlns:a16="http://schemas.microsoft.com/office/drawing/2014/main" id="{8A74CC13-1D2C-47BE-99EA-398C2059DE94}"/>
               </a:ext>
             </a:extLst>
           </p:cNvPr>
@@ -25863,7 +25863,7 @@
           <p:cNvPr id="17" name="Rectangle 16">
             <a:extLst>
               <a:ext uri="{FF2B5EF4-FFF2-40B4-BE49-F238E27FC236}">
-                <a16:creationId xmlns:a16="http://schemas.microsoft.com/office/drawing/2014/main" id="{7814F908-382A-4CA4-8A95-A9BD53505B26}"/>
+                <a16:creationId xmlns:a16="http://schemas.microsoft.com/office/drawing/2014/main" id="{AC90A371-2534-40BA-9FA9-B1A249E71D68}"/>
               </a:ext>
             </a:extLst>
           </p:cNvPr>
@@ -25915,7 +25915,7 @@
                 <a:ea typeface="Arial"/>
                 <a:cs typeface="Arial"/>
               </a:rPr>
-              <a:t>r2z-d4c8d4cc709a · scn-e0f12f397e · prt-fd6de9d793</a:t>
+              <a:t>r2z-a7181752a17d · scn-e0f12f397e · prt-fd6de9d793</a:t>
             </a:r>
           </a:p>
         </p:txBody>
@@ -25925,7 +25925,7 @@
           <p:cNvPr id="18" name="Rectangle 17">
             <a:extLst>
               <a:ext uri="{FF2B5EF4-FFF2-40B4-BE49-F238E27FC236}">
-                <a16:creationId xmlns:a16="http://schemas.microsoft.com/office/drawing/2014/main" id="{5D23F643-834C-405D-802E-DFDFBAEA7B13}"/>
+                <a16:creationId xmlns:a16="http://schemas.microsoft.com/office/drawing/2014/main" id="{B13954F2-1711-4EC4-BDB0-4A1CFFA34A3E}"/>
               </a:ext>
             </a:extLst>
           </p:cNvPr>
@@ -25985,7 +25985,7 @@
     </p:spTree>
     <p:extLst>
       <p:ext uri="{BB962C8B-B14F-4D97-AF65-F5344CB8AC3E}">
-        <p14:creationId xmlns:p14="http://schemas.microsoft.com/office/powerpoint/2010/main" val="2032291886"/>
+        <p14:creationId xmlns:p14="http://schemas.microsoft.com/office/powerpoint/2010/main" val="1435003266"/>
       </p:ext>
     </p:extLst>
   </p:cSld>
@@ -26026,7 +26026,7 @@
             <a:hlinkClick r:id="rId3"/>
             <a:extLst>
               <a:ext uri="{FF2B5EF4-FFF2-40B4-BE49-F238E27FC236}">
-                <a16:creationId xmlns:a16="http://schemas.microsoft.com/office/drawing/2014/main" id="{831F4356-109C-4859-8026-1E620E943A61}"/>
+                <a16:creationId xmlns:a16="http://schemas.microsoft.com/office/drawing/2014/main" id="{05198AD6-2FE9-46E0-942B-AB8A92B11BCD}"/>
               </a:ext>
             </a:extLst>
           </p:cNvPr>
@@ -26101,7 +26101,7 @@
             <a:hlinkClick r:id="rId4"/>
             <a:extLst>
               <a:ext uri="{FF2B5EF4-FFF2-40B4-BE49-F238E27FC236}">
-                <a16:creationId xmlns:a16="http://schemas.microsoft.com/office/drawing/2014/main" id="{86B011D5-289A-4C87-807F-291B6189D178}"/>
+                <a16:creationId xmlns:a16="http://schemas.microsoft.com/office/drawing/2014/main" id="{1A610328-7C3A-4EDB-A902-066F76DCD25D}"/>
               </a:ext>
             </a:extLst>
           </p:cNvPr>
@@ -26175,7 +26175,7 @@
           <p:cNvPr id="3" name="Rectangle 2">
             <a:extLst>
               <a:ext uri="{FF2B5EF4-FFF2-40B4-BE49-F238E27FC236}">
-                <a16:creationId xmlns:a16="http://schemas.microsoft.com/office/drawing/2014/main" id="{18E749A0-71B1-4724-AAC9-509D077D049E}"/>
+                <a16:creationId xmlns:a16="http://schemas.microsoft.com/office/drawing/2014/main" id="{24CF38E1-FB3A-4217-A8FC-4D988364761F}"/>
               </a:ext>
             </a:extLst>
           </p:cNvPr>
@@ -26237,7 +26237,7 @@
           <p:cNvPr id="4" name="Rectangle 3">
             <a:extLst>
               <a:ext uri="{FF2B5EF4-FFF2-40B4-BE49-F238E27FC236}">
-                <a16:creationId xmlns:a16="http://schemas.microsoft.com/office/drawing/2014/main" id="{83391B41-A263-40A0-910D-FD722CE898B4}"/>
+                <a16:creationId xmlns:a16="http://schemas.microsoft.com/office/drawing/2014/main" id="{94D74290-834D-4B41-B2E6-5F760CECE899}"/>
               </a:ext>
             </a:extLst>
           </p:cNvPr>
@@ -26299,7 +26299,7 @@
           <p:cNvPr id="5" name="Rectangle 4">
             <a:extLst>
               <a:ext uri="{FF2B5EF4-FFF2-40B4-BE49-F238E27FC236}">
-                <a16:creationId xmlns:a16="http://schemas.microsoft.com/office/drawing/2014/main" id="{1C712519-B9F6-4969-A698-E27BF30E75F4}"/>
+                <a16:creationId xmlns:a16="http://schemas.microsoft.com/office/drawing/2014/main" id="{D6F82DB4-292C-45AF-817D-9F82E6CDCF33}"/>
               </a:ext>
             </a:extLst>
           </p:cNvPr>
@@ -26361,7 +26361,7 @@
           <p:cNvPr id="6" name="Rectangle 5">
             <a:extLst>
               <a:ext uri="{FF2B5EF4-FFF2-40B4-BE49-F238E27FC236}">
-                <a16:creationId xmlns:a16="http://schemas.microsoft.com/office/drawing/2014/main" id="{AF2AD6FF-9C0E-47C2-9AC0-26199DE53637}"/>
+                <a16:creationId xmlns:a16="http://schemas.microsoft.com/office/drawing/2014/main" id="{AB75CA35-2289-4259-962C-643A6A820748}"/>
               </a:ext>
             </a:extLst>
           </p:cNvPr>
@@ -26392,7 +26392,7 @@
           <p:cNvPr id="7" name="Rectangle 6">
             <a:extLst>
               <a:ext uri="{FF2B5EF4-FFF2-40B4-BE49-F238E27FC236}">
-                <a16:creationId xmlns:a16="http://schemas.microsoft.com/office/drawing/2014/main" id="{26A1F517-85C0-4A6E-986B-B34C955C167E}"/>
+                <a16:creationId xmlns:a16="http://schemas.microsoft.com/office/drawing/2014/main" id="{EB799C06-01D7-483B-8EE3-7B6DCACE1E70}"/>
               </a:ext>
             </a:extLst>
           </p:cNvPr>
@@ -26454,7 +26454,7 @@
           <p:cNvPr id="8" name="Rectangle 7">
             <a:extLst>
               <a:ext uri="{FF2B5EF4-FFF2-40B4-BE49-F238E27FC236}">
-                <a16:creationId xmlns:a16="http://schemas.microsoft.com/office/drawing/2014/main" id="{6E17EC75-2DE9-444D-B282-7417860F8125}"/>
+                <a16:creationId xmlns:a16="http://schemas.microsoft.com/office/drawing/2014/main" id="{997D021E-CD9E-44D3-8953-35B52D352ED8}"/>
               </a:ext>
             </a:extLst>
           </p:cNvPr>
@@ -26516,7 +26516,7 @@
           <p:cNvPr id="9" name="Rectangle 8">
             <a:extLst>
               <a:ext uri="{FF2B5EF4-FFF2-40B4-BE49-F238E27FC236}">
-                <a16:creationId xmlns:a16="http://schemas.microsoft.com/office/drawing/2014/main" id="{E1BD21EC-3915-4DE3-B225-C7BDBEE33FD6}"/>
+                <a16:creationId xmlns:a16="http://schemas.microsoft.com/office/drawing/2014/main" id="{5848C595-6870-4BE2-8743-16AFC8180145}"/>
               </a:ext>
             </a:extLst>
           </p:cNvPr>
@@ -26578,7 +26578,7 @@
           <p:cNvPr id="10" name="Rectangle 9">
             <a:extLst>
               <a:ext uri="{FF2B5EF4-FFF2-40B4-BE49-F238E27FC236}">
-                <a16:creationId xmlns:a16="http://schemas.microsoft.com/office/drawing/2014/main" id="{5C6B4889-2171-4A42-AB22-8BF691CA2997}"/>
+                <a16:creationId xmlns:a16="http://schemas.microsoft.com/office/drawing/2014/main" id="{891C9D6E-B2BE-46E2-9EC5-EE92E58B57F9}"/>
               </a:ext>
             </a:extLst>
           </p:cNvPr>
@@ -26609,7 +26609,7 @@
           <p:cNvPr id="11" name="Rectangle 10">
             <a:extLst>
               <a:ext uri="{FF2B5EF4-FFF2-40B4-BE49-F238E27FC236}">
-                <a16:creationId xmlns:a16="http://schemas.microsoft.com/office/drawing/2014/main" id="{6496EC84-E6DD-4E5C-A077-FE7955CEED57}"/>
+                <a16:creationId xmlns:a16="http://schemas.microsoft.com/office/drawing/2014/main" id="{60A3F735-E4D7-4974-985F-E96D0CC2EE9A}"/>
               </a:ext>
             </a:extLst>
           </p:cNvPr>
@@ -26671,7 +26671,7 @@
           <p:cNvPr id="12" name="Rectangle 11">
             <a:extLst>
               <a:ext uri="{FF2B5EF4-FFF2-40B4-BE49-F238E27FC236}">
-                <a16:creationId xmlns:a16="http://schemas.microsoft.com/office/drawing/2014/main" id="{46A0FC43-E0CF-48F9-BF02-1E52317AE35F}"/>
+                <a16:creationId xmlns:a16="http://schemas.microsoft.com/office/drawing/2014/main" id="{F66A42E2-CDB4-4867-9AD0-41980684E616}"/>
               </a:ext>
             </a:extLst>
           </p:cNvPr>
@@ -26733,7 +26733,7 @@
           <p:cNvPr id="13" name="Rectangle 12">
             <a:extLst>
               <a:ext uri="{FF2B5EF4-FFF2-40B4-BE49-F238E27FC236}">
-                <a16:creationId xmlns:a16="http://schemas.microsoft.com/office/drawing/2014/main" id="{9B54F815-12AE-4B1D-A3E5-32E54E4BBB4E}"/>
+                <a16:creationId xmlns:a16="http://schemas.microsoft.com/office/drawing/2014/main" id="{EBF49802-010D-4FBE-9929-DFC2CE1EB1E1}"/>
               </a:ext>
             </a:extLst>
           </p:cNvPr>
@@ -26795,7 +26795,7 @@
           <p:cNvPr id="14" name="Rectangle 13">
             <a:extLst>
               <a:ext uri="{FF2B5EF4-FFF2-40B4-BE49-F238E27FC236}">
-                <a16:creationId xmlns:a16="http://schemas.microsoft.com/office/drawing/2014/main" id="{2187FE74-05D0-47DA-907A-002E2F6B3B0A}"/>
+                <a16:creationId xmlns:a16="http://schemas.microsoft.com/office/drawing/2014/main" id="{B99B3489-8440-49D2-AEB4-D67BA3DF7EBC}"/>
               </a:ext>
             </a:extLst>
           </p:cNvPr>
@@ -26826,7 +26826,7 @@
           <p:cNvPr id="15" name="Rectangle 14">
             <a:extLst>
               <a:ext uri="{FF2B5EF4-FFF2-40B4-BE49-F238E27FC236}">
-                <a16:creationId xmlns:a16="http://schemas.microsoft.com/office/drawing/2014/main" id="{D6EAC255-2C2B-4D1E-8C0D-F459DA59D950}"/>
+                <a16:creationId xmlns:a16="http://schemas.microsoft.com/office/drawing/2014/main" id="{772E1146-8B0E-47F6-ADB7-CF531236A608}"/>
               </a:ext>
             </a:extLst>
           </p:cNvPr>
@@ -26888,7 +26888,7 @@
           <p:cNvPr id="16" name="Rectangle 15">
             <a:extLst>
               <a:ext uri="{FF2B5EF4-FFF2-40B4-BE49-F238E27FC236}">
-                <a16:creationId xmlns:a16="http://schemas.microsoft.com/office/drawing/2014/main" id="{D3C341B8-5A65-46DD-A05F-22F5DBD122C3}"/>
+                <a16:creationId xmlns:a16="http://schemas.microsoft.com/office/drawing/2014/main" id="{F50C15E5-D1F1-4CDD-82BD-7190AB11D6EC}"/>
               </a:ext>
             </a:extLst>
           </p:cNvPr>
@@ -26950,7 +26950,7 @@
           <p:cNvPr id="17" name="Rectangle 16">
             <a:extLst>
               <a:ext uri="{FF2B5EF4-FFF2-40B4-BE49-F238E27FC236}">
-                <a16:creationId xmlns:a16="http://schemas.microsoft.com/office/drawing/2014/main" id="{D4356FE2-EE53-4FB5-B8F2-3D6A4B4539E4}"/>
+                <a16:creationId xmlns:a16="http://schemas.microsoft.com/office/drawing/2014/main" id="{2DEBDA40-61CB-4A22-8387-97DCB57C09E4}"/>
               </a:ext>
             </a:extLst>
           </p:cNvPr>
@@ -27012,7 +27012,7 @@
           <p:cNvPr id="18" name="Rectangle 17">
             <a:extLst>
               <a:ext uri="{FF2B5EF4-FFF2-40B4-BE49-F238E27FC236}">
-                <a16:creationId xmlns:a16="http://schemas.microsoft.com/office/drawing/2014/main" id="{D8C44DE6-6E7B-4B56-A7A2-A4C1D611491A}"/>
+                <a16:creationId xmlns:a16="http://schemas.microsoft.com/office/drawing/2014/main" id="{02855C53-7325-4CFA-B66B-B1A4243D9296}"/>
               </a:ext>
             </a:extLst>
           </p:cNvPr>
@@ -27043,7 +27043,7 @@
           <p:cNvPr id="19" name="Rectangle 18">
             <a:extLst>
               <a:ext uri="{FF2B5EF4-FFF2-40B4-BE49-F238E27FC236}">
-                <a16:creationId xmlns:a16="http://schemas.microsoft.com/office/drawing/2014/main" id="{259F68C1-208D-4A4C-B6F8-50689F6AD1F1}"/>
+                <a16:creationId xmlns:a16="http://schemas.microsoft.com/office/drawing/2014/main" id="{5BE3D387-78CB-4341-A294-1B14C3C2BD06}"/>
               </a:ext>
             </a:extLst>
           </p:cNvPr>
@@ -27105,7 +27105,7 @@
           <p:cNvPr id="20" name="Rectangle 19">
             <a:extLst>
               <a:ext uri="{FF2B5EF4-FFF2-40B4-BE49-F238E27FC236}">
-                <a16:creationId xmlns:a16="http://schemas.microsoft.com/office/drawing/2014/main" id="{41EC2E7F-9378-4224-B26C-7E2366E60EA1}"/>
+                <a16:creationId xmlns:a16="http://schemas.microsoft.com/office/drawing/2014/main" id="{A283AE4C-7185-4A33-8460-7932252D9952}"/>
               </a:ext>
             </a:extLst>
           </p:cNvPr>
@@ -27167,7 +27167,7 @@
           <p:cNvPr id="21" name="Rectangle 20">
             <a:extLst>
               <a:ext uri="{FF2B5EF4-FFF2-40B4-BE49-F238E27FC236}">
-                <a16:creationId xmlns:a16="http://schemas.microsoft.com/office/drawing/2014/main" id="{F705D8C7-F7B1-4E58-BF07-E0BBC62843A5}"/>
+                <a16:creationId xmlns:a16="http://schemas.microsoft.com/office/drawing/2014/main" id="{780EBF85-CD54-4946-9EA2-A32B46B37D21}"/>
               </a:ext>
             </a:extLst>
           </p:cNvPr>
@@ -27229,7 +27229,7 @@
           <p:cNvPr id="22" name="Rectangle 21">
             <a:extLst>
               <a:ext uri="{FF2B5EF4-FFF2-40B4-BE49-F238E27FC236}">
-                <a16:creationId xmlns:a16="http://schemas.microsoft.com/office/drawing/2014/main" id="{38EF5898-D14C-4919-A51E-5CBFCBD0DCA3}"/>
+                <a16:creationId xmlns:a16="http://schemas.microsoft.com/office/drawing/2014/main" id="{0DF8728C-FD28-4831-9030-C577F7130C54}"/>
               </a:ext>
             </a:extLst>
           </p:cNvPr>
@@ -27260,7 +27260,7 @@
           <p:cNvPr id="23" name="Rectangle 22">
             <a:extLst>
               <a:ext uri="{FF2B5EF4-FFF2-40B4-BE49-F238E27FC236}">
-                <a16:creationId xmlns:a16="http://schemas.microsoft.com/office/drawing/2014/main" id="{FE0F5CAC-A0A2-4D51-A968-D9BF9D550D6A}"/>
+                <a16:creationId xmlns:a16="http://schemas.microsoft.com/office/drawing/2014/main" id="{E7B742AB-DE05-4514-B718-D10D1303767C}"/>
               </a:ext>
             </a:extLst>
           </p:cNvPr>
@@ -27322,7 +27322,7 @@
           <p:cNvPr id="24" name="Rectangle 23">
             <a:extLst>
               <a:ext uri="{FF2B5EF4-FFF2-40B4-BE49-F238E27FC236}">
-                <a16:creationId xmlns:a16="http://schemas.microsoft.com/office/drawing/2014/main" id="{5F6D7A31-7949-4444-821F-C2EABFA91A44}"/>
+                <a16:creationId xmlns:a16="http://schemas.microsoft.com/office/drawing/2014/main" id="{0A0B9C19-2031-441B-980C-9047C98C02B8}"/>
               </a:ext>
             </a:extLst>
           </p:cNvPr>
@@ -27384,7 +27384,7 @@
           <p:cNvPr id="25" name="Rectangle 24">
             <a:extLst>
               <a:ext uri="{FF2B5EF4-FFF2-40B4-BE49-F238E27FC236}">
-                <a16:creationId xmlns:a16="http://schemas.microsoft.com/office/drawing/2014/main" id="{60ED9004-6C7D-4711-8620-A7420904E777}"/>
+                <a16:creationId xmlns:a16="http://schemas.microsoft.com/office/drawing/2014/main" id="{581CE97B-8ED3-47C7-A2AB-C1D3C4A3D40A}"/>
               </a:ext>
             </a:extLst>
           </p:cNvPr>
@@ -27446,7 +27446,7 @@
           <p:cNvPr id="26" name="Rectangle 25">
             <a:extLst>
               <a:ext uri="{FF2B5EF4-FFF2-40B4-BE49-F238E27FC236}">
-                <a16:creationId xmlns:a16="http://schemas.microsoft.com/office/drawing/2014/main" id="{83D9830A-A6A2-4B0B-9BF5-63086023D3F8}"/>
+                <a16:creationId xmlns:a16="http://schemas.microsoft.com/office/drawing/2014/main" id="{07FCA32F-B69D-40C7-AF8F-982784DC523A}"/>
               </a:ext>
             </a:extLst>
           </p:cNvPr>
@@ -27477,7 +27477,7 @@
           <p:cNvPr id="27" name="Rectangle 26">
             <a:extLst>
               <a:ext uri="{FF2B5EF4-FFF2-40B4-BE49-F238E27FC236}">
-                <a16:creationId xmlns:a16="http://schemas.microsoft.com/office/drawing/2014/main" id="{110ED88F-4A2D-4239-946D-83CF4B309E47}"/>
+                <a16:creationId xmlns:a16="http://schemas.microsoft.com/office/drawing/2014/main" id="{CFBE88B4-95BA-4978-87AE-B83AF5E3367B}"/>
               </a:ext>
             </a:extLst>
           </p:cNvPr>
@@ -27539,7 +27539,7 @@
           <p:cNvPr id="28" name="Rectangle 27">
             <a:extLst>
               <a:ext uri="{FF2B5EF4-FFF2-40B4-BE49-F238E27FC236}">
-                <a16:creationId xmlns:a16="http://schemas.microsoft.com/office/drawing/2014/main" id="{E89C31DA-9630-4732-8F9D-4B4E778CD50F}"/>
+                <a16:creationId xmlns:a16="http://schemas.microsoft.com/office/drawing/2014/main" id="{CA169929-38F1-40CF-B013-057E15EBD275}"/>
               </a:ext>
             </a:extLst>
           </p:cNvPr>
@@ -27601,7 +27601,7 @@
           <p:cNvPr id="29" name="Rectangle 28">
             <a:extLst>
               <a:ext uri="{FF2B5EF4-FFF2-40B4-BE49-F238E27FC236}">
-                <a16:creationId xmlns:a16="http://schemas.microsoft.com/office/drawing/2014/main" id="{EC6E7BAC-7865-49BF-BBA2-315475116A1A}"/>
+                <a16:creationId xmlns:a16="http://schemas.microsoft.com/office/drawing/2014/main" id="{C83A40FD-3288-470B-AA37-DBA444ED9147}"/>
               </a:ext>
             </a:extLst>
           </p:cNvPr>
@@ -27632,7 +27632,7 @@
           <p:cNvPr id="30" name="Rectangle 29">
             <a:extLst>
               <a:ext uri="{FF2B5EF4-FFF2-40B4-BE49-F238E27FC236}">
-                <a16:creationId xmlns:a16="http://schemas.microsoft.com/office/drawing/2014/main" id="{5BE4E60E-1EC7-4A29-9D9C-0DB022072030}"/>
+                <a16:creationId xmlns:a16="http://schemas.microsoft.com/office/drawing/2014/main" id="{82271DE0-1E34-43CC-88DA-A9B6FD0FF9EC}"/>
               </a:ext>
             </a:extLst>
           </p:cNvPr>
@@ -27694,7 +27694,7 @@
           <p:cNvPr id="31" name="Rectangle 30">
             <a:extLst>
               <a:ext uri="{FF2B5EF4-FFF2-40B4-BE49-F238E27FC236}">
-                <a16:creationId xmlns:a16="http://schemas.microsoft.com/office/drawing/2014/main" id="{667F0F49-44D8-495D-82E9-88D4709EB4A5}"/>
+                <a16:creationId xmlns:a16="http://schemas.microsoft.com/office/drawing/2014/main" id="{C1E03011-0E4B-4308-90D7-2856DC505290}"/>
               </a:ext>
             </a:extLst>
           </p:cNvPr>
@@ -27756,7 +27756,7 @@
           <p:cNvPr id="32" name="Rectangle 31">
             <a:extLst>
               <a:ext uri="{FF2B5EF4-FFF2-40B4-BE49-F238E27FC236}">
-                <a16:creationId xmlns:a16="http://schemas.microsoft.com/office/drawing/2014/main" id="{C7345F4B-D373-4A15-82D0-6CD47E2C116A}"/>
+                <a16:creationId xmlns:a16="http://schemas.microsoft.com/office/drawing/2014/main" id="{F254DCD1-429C-4F7E-AB0B-A187B8DB3178}"/>
               </a:ext>
             </a:extLst>
           </p:cNvPr>
@@ -27818,7 +27818,7 @@
           <p:cNvPr id="33" name="Rectangle 32">
             <a:extLst>
               <a:ext uri="{FF2B5EF4-FFF2-40B4-BE49-F238E27FC236}">
-                <a16:creationId xmlns:a16="http://schemas.microsoft.com/office/drawing/2014/main" id="{6AFF1FED-15B2-47B1-805E-A562E80F2624}"/>
+                <a16:creationId xmlns:a16="http://schemas.microsoft.com/office/drawing/2014/main" id="{EBEA7559-BFB8-4391-ABCA-ADF88F6CB0CC}"/>
               </a:ext>
             </a:extLst>
           </p:cNvPr>
@@ -27880,7 +27880,7 @@
           <p:cNvPr id="34" name="Rectangle 33">
             <a:extLst>
               <a:ext uri="{FF2B5EF4-FFF2-40B4-BE49-F238E27FC236}">
-                <a16:creationId xmlns:a16="http://schemas.microsoft.com/office/drawing/2014/main" id="{F437DFE9-0A6F-4DB0-8C9D-3B0A1724BE93}"/>
+                <a16:creationId xmlns:a16="http://schemas.microsoft.com/office/drawing/2014/main" id="{6F75AF7F-5E3B-4E0F-91D8-0E8BBC9AE3F5}"/>
               </a:ext>
             </a:extLst>
           </p:cNvPr>
@@ -27911,7 +27911,7 @@
           <p:cNvPr id="35" name="Rectangle 34">
             <a:extLst>
               <a:ext uri="{FF2B5EF4-FFF2-40B4-BE49-F238E27FC236}">
-                <a16:creationId xmlns:a16="http://schemas.microsoft.com/office/drawing/2014/main" id="{452C4ED9-63AF-4A49-AC00-5918D39F0B17}"/>
+                <a16:creationId xmlns:a16="http://schemas.microsoft.com/office/drawing/2014/main" id="{75883C64-184B-41B9-9CAC-162B0CDFE050}"/>
               </a:ext>
             </a:extLst>
           </p:cNvPr>
@@ -27963,7 +27963,7 @@
                 <a:ea typeface="Arial"/>
                 <a:cs typeface="Arial"/>
               </a:rPr>
-              <a:t>r2z-d4c8d4cc709a · scn-e0f12f397e · prt-fd6de9d793</a:t>
+              <a:t>r2z-a7181752a17d · scn-e0f12f397e · prt-fd6de9d793</a:t>
             </a:r>
           </a:p>
         </p:txBody>
@@ -27973,7 +27973,7 @@
           <p:cNvPr id="36" name="Rectangle 35">
             <a:extLst>
               <a:ext uri="{FF2B5EF4-FFF2-40B4-BE49-F238E27FC236}">
-                <a16:creationId xmlns:a16="http://schemas.microsoft.com/office/drawing/2014/main" id="{F5CD351F-9A85-4849-9B3F-C86533A234D8}"/>
+                <a16:creationId xmlns:a16="http://schemas.microsoft.com/office/drawing/2014/main" id="{82FCAF8C-BB54-4D9C-93BF-AA818FE27825}"/>
               </a:ext>
             </a:extLst>
           </p:cNvPr>
@@ -28033,7 +28033,7 @@
     </p:spTree>
     <p:extLst>
       <p:ext uri="{BB962C8B-B14F-4D97-AF65-F5344CB8AC3E}">
-        <p14:creationId xmlns:p14="http://schemas.microsoft.com/office/powerpoint/2010/main" val="1014756345"/>
+        <p14:creationId xmlns:p14="http://schemas.microsoft.com/office/powerpoint/2010/main" val="909546217"/>
       </p:ext>
     </p:extLst>
   </p:cSld>
@@ -28074,7 +28074,7 @@
             <a:hlinkClick r:id="rId3"/>
             <a:extLst>
               <a:ext uri="{FF2B5EF4-FFF2-40B4-BE49-F238E27FC236}">
-                <a16:creationId xmlns:a16="http://schemas.microsoft.com/office/drawing/2014/main" id="{958C3635-1AF3-408C-B29B-BBBEA9B50DE9}"/>
+                <a16:creationId xmlns:a16="http://schemas.microsoft.com/office/drawing/2014/main" id="{39804515-A4B8-4FD4-A7FC-FE8B158AC762}"/>
               </a:ext>
             </a:extLst>
           </p:cNvPr>
@@ -28149,7 +28149,7 @@
             <a:hlinkClick r:id="rId4"/>
             <a:extLst>
               <a:ext uri="{FF2B5EF4-FFF2-40B4-BE49-F238E27FC236}">
-                <a16:creationId xmlns:a16="http://schemas.microsoft.com/office/drawing/2014/main" id="{84BDB20D-DBDA-4D13-9BA0-E0AC37203A9A}"/>
+                <a16:creationId xmlns:a16="http://schemas.microsoft.com/office/drawing/2014/main" id="{BFA17ADF-6D18-43F8-B751-6A127B0DEEEF}"/>
               </a:ext>
             </a:extLst>
           </p:cNvPr>
@@ -28223,7 +28223,7 @@
           <p:cNvPr id="3" name="Rectangle 2">
             <a:extLst>
               <a:ext uri="{FF2B5EF4-FFF2-40B4-BE49-F238E27FC236}">
-                <a16:creationId xmlns:a16="http://schemas.microsoft.com/office/drawing/2014/main" id="{AACA4B0D-D04A-49D1-B3C1-C98518A66883}"/>
+                <a16:creationId xmlns:a16="http://schemas.microsoft.com/office/drawing/2014/main" id="{CEA06BF1-C784-4200-96B3-9D3035B87880}"/>
               </a:ext>
             </a:extLst>
           </p:cNvPr>
@@ -28285,7 +28285,7 @@
           <p:cNvPr id="4" name="Rectangle 3">
             <a:extLst>
               <a:ext uri="{FF2B5EF4-FFF2-40B4-BE49-F238E27FC236}">
-                <a16:creationId xmlns:a16="http://schemas.microsoft.com/office/drawing/2014/main" id="{0DDECB20-0228-4BEE-9363-4CE03DCC7B91}"/>
+                <a16:creationId xmlns:a16="http://schemas.microsoft.com/office/drawing/2014/main" id="{04AB016E-8415-4448-92C2-5A01172E8C5F}"/>
               </a:ext>
             </a:extLst>
           </p:cNvPr>
@@ -28310,7 +28310,7 @@
         </p:spPr>
         <p:txBody>
           <a:bodyPr lIns="0" tIns="0" rIns="0" bIns="0" anchor="t">
-            <a:normAutofit/>
+            <a:normAutofit fontScale="99006"/>
           </a:bodyPr>
           <a:lstStyle/>
           <a:p>
@@ -28337,7 +28337,7 @@
                 <a:ea typeface="Arial"/>
                 <a:cs typeface="Arial"/>
               </a:rPr>
-              <a:t>AI has analytical work — policy authority stays human.</a:t>
+              <a:t>AI accelerates evidence triage; the city keeps decision authority.</a:t>
             </a:r>
           </a:p>
         </p:txBody>
@@ -28347,7 +28347,7 @@
           <p:cNvPr id="5" name="Rectangle 4">
             <a:extLst>
               <a:ext uri="{FF2B5EF4-FFF2-40B4-BE49-F238E27FC236}">
-                <a16:creationId xmlns:a16="http://schemas.microsoft.com/office/drawing/2014/main" id="{E4B51139-9E2A-447B-8243-60BB0EA3F414}"/>
+                <a16:creationId xmlns:a16="http://schemas.microsoft.com/office/drawing/2014/main" id="{6ADB03D6-5392-4888-9CFB-AF15ECD9C2B4}"/>
               </a:ext>
             </a:extLst>
           </p:cNvPr>
@@ -28409,7 +28409,7 @@
           <p:cNvPr id="6" name="Rectangle 5">
             <a:extLst>
               <a:ext uri="{FF2B5EF4-FFF2-40B4-BE49-F238E27FC236}">
-                <a16:creationId xmlns:a16="http://schemas.microsoft.com/office/drawing/2014/main" id="{D21C98AF-D5FC-4C6B-B16F-1983605CB579}"/>
+                <a16:creationId xmlns:a16="http://schemas.microsoft.com/office/drawing/2014/main" id="{1DD6E4DA-9FE2-4E3A-B325-25C579FA8A3F}"/>
               </a:ext>
             </a:extLst>
           </p:cNvPr>
@@ -28440,7 +28440,7 @@
           <p:cNvPr id="7" name="Rectangle 6">
             <a:extLst>
               <a:ext uri="{FF2B5EF4-FFF2-40B4-BE49-F238E27FC236}">
-                <a16:creationId xmlns:a16="http://schemas.microsoft.com/office/drawing/2014/main" id="{5A30ED82-A090-4612-9B96-AE3133C60247}"/>
+                <a16:creationId xmlns:a16="http://schemas.microsoft.com/office/drawing/2014/main" id="{0E9CA252-7564-4E51-BCFB-8AA3E04DDBBF}"/>
               </a:ext>
             </a:extLst>
           </p:cNvPr>
@@ -28495,7 +28495,7 @@
                 <a:ea typeface="Arial"/>
                 <a:cs typeface="Arial"/>
               </a:rPr>
-              <a:t>Service-intensity estimate</a:t>
+              <a:t>Historic gap completion</a:t>
             </a:r>
           </a:p>
           <a:p>
@@ -28525,7 +28525,7 @@
                 <a:ea typeface="Arial"/>
                 <a:cs typeface="Arial"/>
               </a:rPr>
-              <a:t>Anomaly flag</a:t>
+              <a:t>Residual anomaly flags</a:t>
             </a:r>
           </a:p>
           <a:p>
@@ -28555,7 +28555,7 @@
                 <a:ea typeface="Arial"/>
                 <a:cs typeface="Arial"/>
               </a:rPr>
-              <a:t>Corridor typology</a:t>
+              <a:t>Descriptive route typology</a:t>
             </a:r>
           </a:p>
         </p:txBody>
@@ -28565,7 +28565,7 @@
           <p:cNvPr id="8" name="Rectangle 7">
             <a:extLst>
               <a:ext uri="{FF2B5EF4-FFF2-40B4-BE49-F238E27FC236}">
-                <a16:creationId xmlns:a16="http://schemas.microsoft.com/office/drawing/2014/main" id="{9682F5CD-6BE0-483A-BF06-7268E43B544C}"/>
+                <a16:creationId xmlns:a16="http://schemas.microsoft.com/office/drawing/2014/main" id="{7BF29D0A-6D6E-4D24-BF2F-062BEEA9862A}"/>
               </a:ext>
             </a:extLst>
           </p:cNvPr>
@@ -28627,7 +28627,7 @@
           <p:cNvPr id="9" name="Rectangle 8">
             <a:extLst>
               <a:ext uri="{FF2B5EF4-FFF2-40B4-BE49-F238E27FC236}">
-                <a16:creationId xmlns:a16="http://schemas.microsoft.com/office/drawing/2014/main" id="{03F41AFD-0203-49DB-95A4-789C1E29D62D}"/>
+                <a16:creationId xmlns:a16="http://schemas.microsoft.com/office/drawing/2014/main" id="{BA3FB430-9A87-4826-B2CA-660E7FF3EF88}"/>
               </a:ext>
             </a:extLst>
           </p:cNvPr>
@@ -28658,7 +28658,7 @@
           <p:cNvPr id="10" name="Rectangle 9">
             <a:extLst>
               <a:ext uri="{FF2B5EF4-FFF2-40B4-BE49-F238E27FC236}">
-                <a16:creationId xmlns:a16="http://schemas.microsoft.com/office/drawing/2014/main" id="{66F5B083-6E6B-4D7C-BBAA-17D4701559F2}"/>
+                <a16:creationId xmlns:a16="http://schemas.microsoft.com/office/drawing/2014/main" id="{FC7D823E-663E-499E-9C78-859111ADA3F6}"/>
               </a:ext>
             </a:extLst>
           </p:cNvPr>
@@ -28773,7 +28773,7 @@
                 <a:ea typeface="Arial"/>
                 <a:cs typeface="Arial"/>
               </a:rPr>
-              <a:t>Sensitivity + optimization</a:t>
+              <a:t>Sensitivity + constrained selection</a:t>
             </a:r>
           </a:p>
         </p:txBody>
@@ -28783,7 +28783,7 @@
           <p:cNvPr id="11" name="Rectangle 10">
             <a:extLst>
               <a:ext uri="{FF2B5EF4-FFF2-40B4-BE49-F238E27FC236}">
-                <a16:creationId xmlns:a16="http://schemas.microsoft.com/office/drawing/2014/main" id="{B8B9B925-E605-4802-A0AE-99B850A316C0}"/>
+                <a16:creationId xmlns:a16="http://schemas.microsoft.com/office/drawing/2014/main" id="{FEC409FA-6327-4D9B-903D-D96CC0115D20}"/>
               </a:ext>
             </a:extLst>
           </p:cNvPr>
@@ -28845,7 +28845,7 @@
           <p:cNvPr id="12" name="Rectangle 11">
             <a:extLst>
               <a:ext uri="{FF2B5EF4-FFF2-40B4-BE49-F238E27FC236}">
-                <a16:creationId xmlns:a16="http://schemas.microsoft.com/office/drawing/2014/main" id="{30E5E13E-5728-4FBA-A5CD-02552EB0C8F8}"/>
+                <a16:creationId xmlns:a16="http://schemas.microsoft.com/office/drawing/2014/main" id="{AA5652E2-FD42-458F-A599-5186F9745362}"/>
               </a:ext>
             </a:extLst>
           </p:cNvPr>
@@ -28876,7 +28876,7 @@
           <p:cNvPr id="13" name="Rectangle 12">
             <a:extLst>
               <a:ext uri="{FF2B5EF4-FFF2-40B4-BE49-F238E27FC236}">
-                <a16:creationId xmlns:a16="http://schemas.microsoft.com/office/drawing/2014/main" id="{91632B2C-1389-4C8D-A944-870147D7CA34}"/>
+                <a16:creationId xmlns:a16="http://schemas.microsoft.com/office/drawing/2014/main" id="{C9C77DC7-F134-4968-92C6-8FE6D18C54A6}"/>
               </a:ext>
             </a:extLst>
           </p:cNvPr>
@@ -28931,7 +28931,7 @@
                 <a:ea typeface="Arial"/>
                 <a:cs typeface="Arial"/>
               </a:rPr>
-              <a:t>Explain evidence</a:t>
+              <a:t>Interrogate route evidence</a:t>
             </a:r>
           </a:p>
           <a:p>
@@ -28991,7 +28991,7 @@
                 <a:ea typeface="Arial"/>
                 <a:cs typeface="Arial"/>
               </a:rPr>
-              <a:t>Triage validation</a:t>
+              <a:t>Draft validation questions</a:t>
             </a:r>
           </a:p>
         </p:txBody>
@@ -29001,7 +29001,7 @@
           <p:cNvPr id="14" name="Rectangle: Rounded Corners 13">
             <a:extLst>
               <a:ext uri="{FF2B5EF4-FFF2-40B4-BE49-F238E27FC236}">
-                <a16:creationId xmlns:a16="http://schemas.microsoft.com/office/drawing/2014/main" id="{53E478E3-559A-4307-BE00-D6F6DAD79D01}"/>
+                <a16:creationId xmlns:a16="http://schemas.microsoft.com/office/drawing/2014/main" id="{4ED76F4B-DDFF-4ED9-9E51-A2B529288251}"/>
               </a:ext>
             </a:extLst>
           </p:cNvPr>
@@ -29034,7 +29034,7 @@
           <p:cNvPr id="15" name="Rectangle 14">
             <a:extLst>
               <a:ext uri="{FF2B5EF4-FFF2-40B4-BE49-F238E27FC236}">
-                <a16:creationId xmlns:a16="http://schemas.microsoft.com/office/drawing/2014/main" id="{65C621AC-6880-43F3-946E-0F2B78D8C4F9}"/>
+                <a16:creationId xmlns:a16="http://schemas.microsoft.com/office/drawing/2014/main" id="{22556706-5281-44E6-B25B-8CF24BD6E120}"/>
               </a:ext>
             </a:extLst>
           </p:cNvPr>
@@ -29059,7 +29059,7 @@
         </p:spPr>
         <p:txBody>
           <a:bodyPr lIns="0" tIns="0" rIns="0" bIns="0" anchor="ctr">
-            <a:normAutofit fontScale="92949"/>
+            <a:normAutofit fontScale="96667"/>
           </a:bodyPr>
           <a:lstStyle/>
           <a:p>
@@ -29068,7 +29068,7 @@
                 <a:spcPct val="100000"/>
               </a:lnSpc>
               <a:buNone/>
-              <a:defRPr sz="1950" b="1" i="0">
+              <a:defRPr sz="1875" b="1" i="0">
                 <a:solidFill>
                   <a:srgbClr val="FFFFFF"/>
                 </a:solidFill>
@@ -29078,7 +29078,7 @@
               </a:defRPr>
             </a:pPr>
             <a:r>
-              <a:rPr sz="1950" b="1" i="0">
+              <a:rPr sz="1875" b="1" i="0">
                 <a:solidFill>
                   <a:srgbClr val="FFFFFF"/>
                 </a:solidFill>
@@ -29086,7 +29086,7 @@
                 <a:ea typeface="Arial"/>
                 <a:cs typeface="Arial"/>
               </a:rPr>
-              <a:t>ML estimates. Deterministic models quantify. City teams control policy. The LLM explains and triages evidence.</a:t>
+              <a:t>AI compresses sparse evidence and speeds interrogation. It never writes a score, constraint, or portfolio choice.</a:t>
             </a:r>
           </a:p>
         </p:txBody>
@@ -29096,7 +29096,7 @@
           <p:cNvPr id="16" name="Rectangle 15">
             <a:extLst>
               <a:ext uri="{FF2B5EF4-FFF2-40B4-BE49-F238E27FC236}">
-                <a16:creationId xmlns:a16="http://schemas.microsoft.com/office/drawing/2014/main" id="{5A550456-1AB9-4AE2-80AC-A7E77C660CA4}"/>
+                <a16:creationId xmlns:a16="http://schemas.microsoft.com/office/drawing/2014/main" id="{352B7072-45B8-4DBC-AAA5-23E2D0CC3963}"/>
               </a:ext>
             </a:extLst>
           </p:cNvPr>
@@ -29158,7 +29158,7 @@
           <p:cNvPr id="17" name="Rectangle 16">
             <a:extLst>
               <a:ext uri="{FF2B5EF4-FFF2-40B4-BE49-F238E27FC236}">
-                <a16:creationId xmlns:a16="http://schemas.microsoft.com/office/drawing/2014/main" id="{7F0EAD70-702F-4892-8E7E-511F7898F7E0}"/>
+                <a16:creationId xmlns:a16="http://schemas.microsoft.com/office/drawing/2014/main" id="{376A1AB9-F77D-4A39-87BE-77ED5E9A9D26}"/>
               </a:ext>
             </a:extLst>
           </p:cNvPr>
@@ -29189,7 +29189,7 @@
           <p:cNvPr id="18" name="Rectangle 17">
             <a:extLst>
               <a:ext uri="{FF2B5EF4-FFF2-40B4-BE49-F238E27FC236}">
-                <a16:creationId xmlns:a16="http://schemas.microsoft.com/office/drawing/2014/main" id="{FF692724-3CF1-4C41-B9CA-A431BCC2CAD1}"/>
+                <a16:creationId xmlns:a16="http://schemas.microsoft.com/office/drawing/2014/main" id="{38676ED5-33FF-47B5-9761-702178FB9515}"/>
               </a:ext>
             </a:extLst>
           </p:cNvPr>
@@ -29241,7 +29241,7 @@
                 <a:ea typeface="Arial"/>
                 <a:cs typeface="Arial"/>
               </a:rPr>
-              <a:t>r2z-d4c8d4cc709a · scn-e0f12f397e · prt-fd6de9d793</a:t>
+              <a:t>r2z-a7181752a17d · scn-e0f12f397e · prt-fd6de9d793</a:t>
             </a:r>
           </a:p>
         </p:txBody>
@@ -29251,7 +29251,7 @@
           <p:cNvPr id="19" name="Rectangle 18">
             <a:extLst>
               <a:ext uri="{FF2B5EF4-FFF2-40B4-BE49-F238E27FC236}">
-                <a16:creationId xmlns:a16="http://schemas.microsoft.com/office/drawing/2014/main" id="{F2DB4FE8-9BFF-4FF8-924B-79E69AE8561E}"/>
+                <a16:creationId xmlns:a16="http://schemas.microsoft.com/office/drawing/2014/main" id="{131B923C-B9CA-4078-8A31-FB77CCF32336}"/>
               </a:ext>
             </a:extLst>
           </p:cNvPr>
@@ -29311,7 +29311,7 @@
     </p:spTree>
     <p:extLst>
       <p:ext uri="{BB962C8B-B14F-4D97-AF65-F5344CB8AC3E}">
-        <p14:creationId xmlns:p14="http://schemas.microsoft.com/office/powerpoint/2010/main" val="1382602797"/>
+        <p14:creationId xmlns:p14="http://schemas.microsoft.com/office/powerpoint/2010/main" val="434596084"/>
       </p:ext>
     </p:extLst>
   </p:cSld>
@@ -29352,7 +29352,7 @@
             <a:hlinkClick r:id="rId3"/>
             <a:extLst>
               <a:ext uri="{FF2B5EF4-FFF2-40B4-BE49-F238E27FC236}">
-                <a16:creationId xmlns:a16="http://schemas.microsoft.com/office/drawing/2014/main" id="{09B91755-22C7-4BF0-8256-C251C48852AC}"/>
+                <a16:creationId xmlns:a16="http://schemas.microsoft.com/office/drawing/2014/main" id="{9243D3DF-C3AE-496D-8A15-180742F54410}"/>
               </a:ext>
             </a:extLst>
           </p:cNvPr>
@@ -29427,7 +29427,7 @@
             <a:hlinkClick r:id="rId4"/>
             <a:extLst>
               <a:ext uri="{FF2B5EF4-FFF2-40B4-BE49-F238E27FC236}">
-                <a16:creationId xmlns:a16="http://schemas.microsoft.com/office/drawing/2014/main" id="{543CC279-B930-4D81-ABB3-B766095C74E7}"/>
+                <a16:creationId xmlns:a16="http://schemas.microsoft.com/office/drawing/2014/main" id="{4211D986-387E-40CA-920A-5B54E8AA2A28}"/>
               </a:ext>
             </a:extLst>
           </p:cNvPr>
@@ -29501,7 +29501,7 @@
           <p:cNvPr id="3" name="Rectangle 2">
             <a:extLst>
               <a:ext uri="{FF2B5EF4-FFF2-40B4-BE49-F238E27FC236}">
-                <a16:creationId xmlns:a16="http://schemas.microsoft.com/office/drawing/2014/main" id="{13D00D0B-5398-484A-9E02-DFA2FCCD47AC}"/>
+                <a16:creationId xmlns:a16="http://schemas.microsoft.com/office/drawing/2014/main" id="{2E2B6F56-43FA-4E8C-87E5-5BC173A6495B}"/>
               </a:ext>
             </a:extLst>
           </p:cNvPr>
@@ -29563,7 +29563,7 @@
           <p:cNvPr id="4" name="Rectangle 3">
             <a:extLst>
               <a:ext uri="{FF2B5EF4-FFF2-40B4-BE49-F238E27FC236}">
-                <a16:creationId xmlns:a16="http://schemas.microsoft.com/office/drawing/2014/main" id="{D280EC43-AD3D-4316-A2E1-44D4C396E0C2}"/>
+                <a16:creationId xmlns:a16="http://schemas.microsoft.com/office/drawing/2014/main" id="{E5B3F24F-22BA-4B10-8743-6FC003C0B09A}"/>
               </a:ext>
             </a:extLst>
           </p:cNvPr>
@@ -29625,7 +29625,7 @@
           <p:cNvPr id="5" name="Rectangle 4">
             <a:extLst>
               <a:ext uri="{FF2B5EF4-FFF2-40B4-BE49-F238E27FC236}">
-                <a16:creationId xmlns:a16="http://schemas.microsoft.com/office/drawing/2014/main" id="{7E7250E0-53AA-48EA-8BAE-401F7530F78F}"/>
+                <a16:creationId xmlns:a16="http://schemas.microsoft.com/office/drawing/2014/main" id="{5732B991-A60A-44BF-B341-CE658E6D3543}"/>
               </a:ext>
             </a:extLst>
           </p:cNvPr>
@@ -29687,7 +29687,7 @@
           <p:cNvPr id="6" name="Oval 5">
             <a:extLst>
               <a:ext uri="{FF2B5EF4-FFF2-40B4-BE49-F238E27FC236}">
-                <a16:creationId xmlns:a16="http://schemas.microsoft.com/office/drawing/2014/main" id="{BD793C2C-0A76-4C81-8EB9-9B96FACEA701}"/>
+                <a16:creationId xmlns:a16="http://schemas.microsoft.com/office/drawing/2014/main" id="{2678A839-F72E-415F-A6BB-3EF4FF89C679}"/>
               </a:ext>
             </a:extLst>
           </p:cNvPr>
@@ -29718,7 +29718,7 @@
           <p:cNvPr id="7" name="Rectangle 6">
             <a:extLst>
               <a:ext uri="{FF2B5EF4-FFF2-40B4-BE49-F238E27FC236}">
-                <a16:creationId xmlns:a16="http://schemas.microsoft.com/office/drawing/2014/main" id="{D3B962B1-FD2D-45B2-B45D-107C14D1E350}"/>
+                <a16:creationId xmlns:a16="http://schemas.microsoft.com/office/drawing/2014/main" id="{3AAE9E59-4977-4297-9B14-84CC1381C6BA}"/>
               </a:ext>
             </a:extLst>
           </p:cNvPr>
@@ -29780,7 +29780,7 @@
           <p:cNvPr id="8" name="Oval 7">
             <a:extLst>
               <a:ext uri="{FF2B5EF4-FFF2-40B4-BE49-F238E27FC236}">
-                <a16:creationId xmlns:a16="http://schemas.microsoft.com/office/drawing/2014/main" id="{699A5F36-E238-4706-AEE0-455568B04343}"/>
+                <a16:creationId xmlns:a16="http://schemas.microsoft.com/office/drawing/2014/main" id="{91D71C27-B04F-41C4-8244-82309E6F4CF6}"/>
               </a:ext>
             </a:extLst>
           </p:cNvPr>
@@ -29811,7 +29811,7 @@
           <p:cNvPr id="9" name="Rectangle 8">
             <a:extLst>
               <a:ext uri="{FF2B5EF4-FFF2-40B4-BE49-F238E27FC236}">
-                <a16:creationId xmlns:a16="http://schemas.microsoft.com/office/drawing/2014/main" id="{2C3A48AB-D7E8-4E11-A532-A9447A550CF4}"/>
+                <a16:creationId xmlns:a16="http://schemas.microsoft.com/office/drawing/2014/main" id="{4FCE7AA6-1DC6-46AE-996B-9D0ED3243E56}"/>
               </a:ext>
             </a:extLst>
           </p:cNvPr>
@@ -29873,7 +29873,7 @@
           <p:cNvPr id="10" name="Oval 9">
             <a:extLst>
               <a:ext uri="{FF2B5EF4-FFF2-40B4-BE49-F238E27FC236}">
-                <a16:creationId xmlns:a16="http://schemas.microsoft.com/office/drawing/2014/main" id="{502A8501-F4E7-41B1-BC07-EFD644FA45BF}"/>
+                <a16:creationId xmlns:a16="http://schemas.microsoft.com/office/drawing/2014/main" id="{3CC89669-A203-4004-8F9E-FFC1BABBCFEA}"/>
               </a:ext>
             </a:extLst>
           </p:cNvPr>
@@ -29904,7 +29904,7 @@
           <p:cNvPr id="11" name="Rectangle 10">
             <a:extLst>
               <a:ext uri="{FF2B5EF4-FFF2-40B4-BE49-F238E27FC236}">
-                <a16:creationId xmlns:a16="http://schemas.microsoft.com/office/drawing/2014/main" id="{30C6424C-8F7B-40B3-80BB-88F0FAE37C6F}"/>
+                <a16:creationId xmlns:a16="http://schemas.microsoft.com/office/drawing/2014/main" id="{4604EE32-801A-4424-8DB7-A1963437E1AC}"/>
               </a:ext>
             </a:extLst>
           </p:cNvPr>
@@ -29966,7 +29966,7 @@
           <p:cNvPr id="12" name="Oval 11">
             <a:extLst>
               <a:ext uri="{FF2B5EF4-FFF2-40B4-BE49-F238E27FC236}">
-                <a16:creationId xmlns:a16="http://schemas.microsoft.com/office/drawing/2014/main" id="{D27E4693-49B2-4473-9951-BC44B81266D5}"/>
+                <a16:creationId xmlns:a16="http://schemas.microsoft.com/office/drawing/2014/main" id="{379B66B0-8A0F-4FF6-B763-49E15CCBE114}"/>
               </a:ext>
             </a:extLst>
           </p:cNvPr>
@@ -29997,7 +29997,7 @@
           <p:cNvPr id="13" name="Rectangle 12">
             <a:extLst>
               <a:ext uri="{FF2B5EF4-FFF2-40B4-BE49-F238E27FC236}">
-                <a16:creationId xmlns:a16="http://schemas.microsoft.com/office/drawing/2014/main" id="{098F6D34-E4D5-4667-90F5-0A5548C975E2}"/>
+                <a16:creationId xmlns:a16="http://schemas.microsoft.com/office/drawing/2014/main" id="{5EA5A264-3173-41C1-943E-225C474FD1F3}"/>
               </a:ext>
             </a:extLst>
           </p:cNvPr>
@@ -30059,7 +30059,7 @@
           <p:cNvPr id="14" name="Oval 13">
             <a:extLst>
               <a:ext uri="{FF2B5EF4-FFF2-40B4-BE49-F238E27FC236}">
-                <a16:creationId xmlns:a16="http://schemas.microsoft.com/office/drawing/2014/main" id="{A8DB7A19-5DE4-4C98-8F7C-040FFA61A4B1}"/>
+                <a16:creationId xmlns:a16="http://schemas.microsoft.com/office/drawing/2014/main" id="{460A13B8-E552-40E4-BE9B-6CB5BB65D66C}"/>
               </a:ext>
             </a:extLst>
           </p:cNvPr>
@@ -30090,7 +30090,7 @@
           <p:cNvPr id="15" name="Rectangle 14">
             <a:extLst>
               <a:ext uri="{FF2B5EF4-FFF2-40B4-BE49-F238E27FC236}">
-                <a16:creationId xmlns:a16="http://schemas.microsoft.com/office/drawing/2014/main" id="{0C3DB567-8212-4A64-9DB4-7CA15DD57ABC}"/>
+                <a16:creationId xmlns:a16="http://schemas.microsoft.com/office/drawing/2014/main" id="{623B35D3-22D7-4386-ADFB-5814A39D78B9}"/>
               </a:ext>
             </a:extLst>
           </p:cNvPr>
@@ -30152,7 +30152,7 @@
           <p:cNvPr id="16" name="Oval 15">
             <a:extLst>
               <a:ext uri="{FF2B5EF4-FFF2-40B4-BE49-F238E27FC236}">
-                <a16:creationId xmlns:a16="http://schemas.microsoft.com/office/drawing/2014/main" id="{922E220B-E5C6-46F0-9717-5BEF6AAA75D0}"/>
+                <a16:creationId xmlns:a16="http://schemas.microsoft.com/office/drawing/2014/main" id="{D303A43E-3F0C-42EB-811B-3F15F1B572EC}"/>
               </a:ext>
             </a:extLst>
           </p:cNvPr>
@@ -30183,7 +30183,7 @@
           <p:cNvPr id="17" name="Rectangle 16">
             <a:extLst>
               <a:ext uri="{FF2B5EF4-FFF2-40B4-BE49-F238E27FC236}">
-                <a16:creationId xmlns:a16="http://schemas.microsoft.com/office/drawing/2014/main" id="{C6321DB7-FA39-44D5-9DBB-3423615E4CB2}"/>
+                <a16:creationId xmlns:a16="http://schemas.microsoft.com/office/drawing/2014/main" id="{0C68AB84-8D61-4D56-B0A7-69E75526D11D}"/>
               </a:ext>
             </a:extLst>
           </p:cNvPr>
@@ -30245,7 +30245,7 @@
           <p:cNvPr id="18" name="Oval 17">
             <a:extLst>
               <a:ext uri="{FF2B5EF4-FFF2-40B4-BE49-F238E27FC236}">
-                <a16:creationId xmlns:a16="http://schemas.microsoft.com/office/drawing/2014/main" id="{A93302DA-CE11-47A5-BCF4-7198227BF27D}"/>
+                <a16:creationId xmlns:a16="http://schemas.microsoft.com/office/drawing/2014/main" id="{856C7BA4-5CE2-41E3-96A5-6D5F33FAD715}"/>
               </a:ext>
             </a:extLst>
           </p:cNvPr>
@@ -30276,7 +30276,7 @@
           <p:cNvPr id="19" name="Rectangle 18">
             <a:extLst>
               <a:ext uri="{FF2B5EF4-FFF2-40B4-BE49-F238E27FC236}">
-                <a16:creationId xmlns:a16="http://schemas.microsoft.com/office/drawing/2014/main" id="{177B62B7-28DE-45A3-8EB7-33A41DB65DEF}"/>
+                <a16:creationId xmlns:a16="http://schemas.microsoft.com/office/drawing/2014/main" id="{2B6AAAEF-3C7B-44B7-B1CC-787BEB4A272C}"/>
               </a:ext>
             </a:extLst>
           </p:cNvPr>
@@ -30338,7 +30338,7 @@
           <p:cNvPr id="20" name="Rectangle 19">
             <a:extLst>
               <a:ext uri="{FF2B5EF4-FFF2-40B4-BE49-F238E27FC236}">
-                <a16:creationId xmlns:a16="http://schemas.microsoft.com/office/drawing/2014/main" id="{36F22C61-FC59-4FD3-BE85-3533530D5E6C}"/>
+                <a16:creationId xmlns:a16="http://schemas.microsoft.com/office/drawing/2014/main" id="{2B4DFD8B-BC0A-4AAC-9D5E-0FBBA7FEA9B8}"/>
               </a:ext>
             </a:extLst>
           </p:cNvPr>
@@ -30369,7 +30369,7 @@
           <p:cNvPr id="21" name="Rectangle 20">
             <a:extLst>
               <a:ext uri="{FF2B5EF4-FFF2-40B4-BE49-F238E27FC236}">
-                <a16:creationId xmlns:a16="http://schemas.microsoft.com/office/drawing/2014/main" id="{720F729F-E679-44F1-9C0F-9CF2CB2EC670}"/>
+                <a16:creationId xmlns:a16="http://schemas.microsoft.com/office/drawing/2014/main" id="{05B2CE36-D5E0-4193-BE01-2A9F2EDC1140}"/>
               </a:ext>
             </a:extLst>
           </p:cNvPr>
@@ -30431,7 +30431,7 @@
           <p:cNvPr id="22" name="Rectangle: Rounded Corners 21">
             <a:extLst>
               <a:ext uri="{FF2B5EF4-FFF2-40B4-BE49-F238E27FC236}">
-                <a16:creationId xmlns:a16="http://schemas.microsoft.com/office/drawing/2014/main" id="{DC663842-B354-435A-96B2-557A3A7AB31A}"/>
+                <a16:creationId xmlns:a16="http://schemas.microsoft.com/office/drawing/2014/main" id="{E641E40D-D403-4CA5-8585-45D71EBAC818}"/>
               </a:ext>
             </a:extLst>
           </p:cNvPr>
@@ -30466,7 +30466,7 @@
           <p:cNvPr id="23" name="Rectangle 22">
             <a:extLst>
               <a:ext uri="{FF2B5EF4-FFF2-40B4-BE49-F238E27FC236}">
-                <a16:creationId xmlns:a16="http://schemas.microsoft.com/office/drawing/2014/main" id="{87CBC13E-2DFB-4566-BDEC-5C265DF8D124}"/>
+                <a16:creationId xmlns:a16="http://schemas.microsoft.com/office/drawing/2014/main" id="{534A8243-8B0D-45DE-A31A-B1438F5631B1}"/>
               </a:ext>
             </a:extLst>
           </p:cNvPr>
@@ -30528,7 +30528,7 @@
           <p:cNvPr id="24" name="Rectangle: Rounded Corners 23">
             <a:extLst>
               <a:ext uri="{FF2B5EF4-FFF2-40B4-BE49-F238E27FC236}">
-                <a16:creationId xmlns:a16="http://schemas.microsoft.com/office/drawing/2014/main" id="{BF36039F-6B99-499D-9D4D-C74FB4905082}"/>
+                <a16:creationId xmlns:a16="http://schemas.microsoft.com/office/drawing/2014/main" id="{18B75556-BF25-4589-BD98-A6E7E6B81D76}"/>
               </a:ext>
             </a:extLst>
           </p:cNvPr>
@@ -30563,7 +30563,7 @@
           <p:cNvPr id="25" name="Rectangle 24">
             <a:extLst>
               <a:ext uri="{FF2B5EF4-FFF2-40B4-BE49-F238E27FC236}">
-                <a16:creationId xmlns:a16="http://schemas.microsoft.com/office/drawing/2014/main" id="{ECEF44B4-7A0F-4099-8C29-18094B2D916B}"/>
+                <a16:creationId xmlns:a16="http://schemas.microsoft.com/office/drawing/2014/main" id="{EC596334-A240-48F1-9B3C-B511FD1EA573}"/>
               </a:ext>
             </a:extLst>
           </p:cNvPr>
@@ -30625,7 +30625,7 @@
           <p:cNvPr id="26" name="Rectangle: Rounded Corners 25">
             <a:extLst>
               <a:ext uri="{FF2B5EF4-FFF2-40B4-BE49-F238E27FC236}">
-                <a16:creationId xmlns:a16="http://schemas.microsoft.com/office/drawing/2014/main" id="{40D148AE-F009-481E-BF40-A64D2C572485}"/>
+                <a16:creationId xmlns:a16="http://schemas.microsoft.com/office/drawing/2014/main" id="{A46C1102-907C-466F-97B1-248B475AA9F8}"/>
               </a:ext>
             </a:extLst>
           </p:cNvPr>
@@ -30660,7 +30660,7 @@
           <p:cNvPr id="27" name="Rectangle 26">
             <a:extLst>
               <a:ext uri="{FF2B5EF4-FFF2-40B4-BE49-F238E27FC236}">
-                <a16:creationId xmlns:a16="http://schemas.microsoft.com/office/drawing/2014/main" id="{3D28C8B9-75E2-4867-AA8D-6F6513AEE993}"/>
+                <a16:creationId xmlns:a16="http://schemas.microsoft.com/office/drawing/2014/main" id="{08C0B012-BEC9-4F1E-857E-54E8FE2F1E34}"/>
               </a:ext>
             </a:extLst>
           </p:cNvPr>
@@ -30722,7 +30722,7 @@
           <p:cNvPr id="28" name="Rectangle: Rounded Corners 27">
             <a:extLst>
               <a:ext uri="{FF2B5EF4-FFF2-40B4-BE49-F238E27FC236}">
-                <a16:creationId xmlns:a16="http://schemas.microsoft.com/office/drawing/2014/main" id="{45481709-A859-4E7F-A0DF-2CBDF923C892}"/>
+                <a16:creationId xmlns:a16="http://schemas.microsoft.com/office/drawing/2014/main" id="{7F9598D7-2766-4F33-8AA7-422747838FD2}"/>
               </a:ext>
             </a:extLst>
           </p:cNvPr>
@@ -30757,7 +30757,7 @@
           <p:cNvPr id="29" name="Rectangle 28">
             <a:extLst>
               <a:ext uri="{FF2B5EF4-FFF2-40B4-BE49-F238E27FC236}">
-                <a16:creationId xmlns:a16="http://schemas.microsoft.com/office/drawing/2014/main" id="{B747B652-4E80-4C39-8BB4-80FC7D9D90ED}"/>
+                <a16:creationId xmlns:a16="http://schemas.microsoft.com/office/drawing/2014/main" id="{8292C93F-335A-4A67-BBF2-47636786FDAD}"/>
               </a:ext>
             </a:extLst>
           </p:cNvPr>
@@ -30819,7 +30819,7 @@
           <p:cNvPr id="30" name="Rectangle: Rounded Corners 29">
             <a:extLst>
               <a:ext uri="{FF2B5EF4-FFF2-40B4-BE49-F238E27FC236}">
-                <a16:creationId xmlns:a16="http://schemas.microsoft.com/office/drawing/2014/main" id="{3E944BDD-8D15-4F26-8F74-99EF6E072C94}"/>
+                <a16:creationId xmlns:a16="http://schemas.microsoft.com/office/drawing/2014/main" id="{7D19AF07-E729-439E-8144-B4AAED9B41F3}"/>
               </a:ext>
             </a:extLst>
           </p:cNvPr>
@@ -30854,7 +30854,7 @@
           <p:cNvPr id="31" name="Rectangle 30">
             <a:extLst>
               <a:ext uri="{FF2B5EF4-FFF2-40B4-BE49-F238E27FC236}">
-                <a16:creationId xmlns:a16="http://schemas.microsoft.com/office/drawing/2014/main" id="{57BE9E01-94F1-412B-9367-9299C6803171}"/>
+                <a16:creationId xmlns:a16="http://schemas.microsoft.com/office/drawing/2014/main" id="{B8080DFC-D63C-4A30-891E-850EF70D3C6C}"/>
               </a:ext>
             </a:extLst>
           </p:cNvPr>
@@ -30916,7 +30916,7 @@
           <p:cNvPr id="32" name="Rectangle: Rounded Corners 31">
             <a:extLst>
               <a:ext uri="{FF2B5EF4-FFF2-40B4-BE49-F238E27FC236}">
-                <a16:creationId xmlns:a16="http://schemas.microsoft.com/office/drawing/2014/main" id="{28C6CB21-B709-4991-950A-15E493E70717}"/>
+                <a16:creationId xmlns:a16="http://schemas.microsoft.com/office/drawing/2014/main" id="{A69A2F93-E982-4487-9CE2-0E3EAE93A2C5}"/>
               </a:ext>
             </a:extLst>
           </p:cNvPr>
@@ -30951,7 +30951,7 @@
           <p:cNvPr id="33" name="Rectangle 32">
             <a:extLst>
               <a:ext uri="{FF2B5EF4-FFF2-40B4-BE49-F238E27FC236}">
-                <a16:creationId xmlns:a16="http://schemas.microsoft.com/office/drawing/2014/main" id="{6601FAA4-DD0C-4D93-A4D5-E4BA33E36F60}"/>
+                <a16:creationId xmlns:a16="http://schemas.microsoft.com/office/drawing/2014/main" id="{6953C1B9-5363-4214-8A22-1020BF033D97}"/>
               </a:ext>
             </a:extLst>
           </p:cNvPr>
@@ -31013,7 +31013,7 @@
           <p:cNvPr id="34" name="Rectangle: Rounded Corners 33">
             <a:extLst>
               <a:ext uri="{FF2B5EF4-FFF2-40B4-BE49-F238E27FC236}">
-                <a16:creationId xmlns:a16="http://schemas.microsoft.com/office/drawing/2014/main" id="{B66D0D45-B3A1-435C-8B47-ADCC53551EFC}"/>
+                <a16:creationId xmlns:a16="http://schemas.microsoft.com/office/drawing/2014/main" id="{915040CD-7921-44F0-A182-EA2D69FEADC5}"/>
               </a:ext>
             </a:extLst>
           </p:cNvPr>
@@ -31048,7 +31048,7 @@
           <p:cNvPr id="35" name="Rectangle 34">
             <a:extLst>
               <a:ext uri="{FF2B5EF4-FFF2-40B4-BE49-F238E27FC236}">
-                <a16:creationId xmlns:a16="http://schemas.microsoft.com/office/drawing/2014/main" id="{CE8148AA-E4E9-4B48-9EB9-5E2A2FABA970}"/>
+                <a16:creationId xmlns:a16="http://schemas.microsoft.com/office/drawing/2014/main" id="{67429ED0-3556-436F-A6B5-5B5A6CEFEAE4}"/>
               </a:ext>
             </a:extLst>
           </p:cNvPr>
@@ -31110,7 +31110,7 @@
           <p:cNvPr id="36" name="Rectangle: Rounded Corners 35">
             <a:extLst>
               <a:ext uri="{FF2B5EF4-FFF2-40B4-BE49-F238E27FC236}">
-                <a16:creationId xmlns:a16="http://schemas.microsoft.com/office/drawing/2014/main" id="{3EBEA6DD-50F3-4BD3-9891-4FCA6A021A01}"/>
+                <a16:creationId xmlns:a16="http://schemas.microsoft.com/office/drawing/2014/main" id="{44C05AA9-C545-4B52-87D7-25426F7FC927}"/>
               </a:ext>
             </a:extLst>
           </p:cNvPr>
@@ -31145,7 +31145,7 @@
           <p:cNvPr id="37" name="Rectangle 36">
             <a:extLst>
               <a:ext uri="{FF2B5EF4-FFF2-40B4-BE49-F238E27FC236}">
-                <a16:creationId xmlns:a16="http://schemas.microsoft.com/office/drawing/2014/main" id="{4A228634-9843-46B4-A871-1182E6B8B067}"/>
+                <a16:creationId xmlns:a16="http://schemas.microsoft.com/office/drawing/2014/main" id="{3A7C8A5B-8076-4FA9-A4A7-1E4D3727AD20}"/>
               </a:ext>
             </a:extLst>
           </p:cNvPr>
@@ -31207,7 +31207,7 @@
           <p:cNvPr id="38" name="Rectangle: Rounded Corners 37">
             <a:extLst>
               <a:ext uri="{FF2B5EF4-FFF2-40B4-BE49-F238E27FC236}">
-                <a16:creationId xmlns:a16="http://schemas.microsoft.com/office/drawing/2014/main" id="{8A5F0678-E7B1-4008-AD16-ABB38B04E104}"/>
+                <a16:creationId xmlns:a16="http://schemas.microsoft.com/office/drawing/2014/main" id="{267E7FA9-B331-4EA5-86EB-5FB945E530B1}"/>
               </a:ext>
             </a:extLst>
           </p:cNvPr>
@@ -31242,7 +31242,7 @@
           <p:cNvPr id="39" name="Rectangle 38">
             <a:extLst>
               <a:ext uri="{FF2B5EF4-FFF2-40B4-BE49-F238E27FC236}">
-                <a16:creationId xmlns:a16="http://schemas.microsoft.com/office/drawing/2014/main" id="{523A4797-96B6-450D-8FA7-9332453E043F}"/>
+                <a16:creationId xmlns:a16="http://schemas.microsoft.com/office/drawing/2014/main" id="{038FA412-341D-406A-92FD-400668C0D1C2}"/>
               </a:ext>
             </a:extLst>
           </p:cNvPr>
@@ -31304,7 +31304,7 @@
           <p:cNvPr id="40" name="Rectangle 39">
             <a:extLst>
               <a:ext uri="{FF2B5EF4-FFF2-40B4-BE49-F238E27FC236}">
-                <a16:creationId xmlns:a16="http://schemas.microsoft.com/office/drawing/2014/main" id="{323D1797-70EE-41F4-A60B-9A11577AB864}"/>
+                <a16:creationId xmlns:a16="http://schemas.microsoft.com/office/drawing/2014/main" id="{02838B1F-2B3D-4B57-8154-065676FC8424}"/>
               </a:ext>
             </a:extLst>
           </p:cNvPr>
@@ -31366,7 +31366,7 @@
           <p:cNvPr id="41" name="Rectangle 40">
             <a:extLst>
               <a:ext uri="{FF2B5EF4-FFF2-40B4-BE49-F238E27FC236}">
-                <a16:creationId xmlns:a16="http://schemas.microsoft.com/office/drawing/2014/main" id="{488737AC-813E-4460-B5CE-79A34FFB6C78}"/>
+                <a16:creationId xmlns:a16="http://schemas.microsoft.com/office/drawing/2014/main" id="{06AB832F-234D-43E2-9BE2-D5A32927A0DA}"/>
               </a:ext>
             </a:extLst>
           </p:cNvPr>
@@ -31428,7 +31428,7 @@
           <p:cNvPr id="42" name="Rectangle 41">
             <a:extLst>
               <a:ext uri="{FF2B5EF4-FFF2-40B4-BE49-F238E27FC236}">
-                <a16:creationId xmlns:a16="http://schemas.microsoft.com/office/drawing/2014/main" id="{E3D44947-6845-4E72-A279-90909D8F81A1}"/>
+                <a16:creationId xmlns:a16="http://schemas.microsoft.com/office/drawing/2014/main" id="{F56FEB82-73ED-432C-A2EB-48793AACC77F}"/>
               </a:ext>
             </a:extLst>
           </p:cNvPr>
@@ -31490,7 +31490,7 @@
           <p:cNvPr id="43" name="Rectangle 42">
             <a:extLst>
               <a:ext uri="{FF2B5EF4-FFF2-40B4-BE49-F238E27FC236}">
-                <a16:creationId xmlns:a16="http://schemas.microsoft.com/office/drawing/2014/main" id="{48771C3B-5694-49FD-838D-E5C033C8DB8F}"/>
+                <a16:creationId xmlns:a16="http://schemas.microsoft.com/office/drawing/2014/main" id="{4335EB24-7F5F-48F3-955C-8ABA5001C991}"/>
               </a:ext>
             </a:extLst>
           </p:cNvPr>
@@ -31552,7 +31552,7 @@
           <p:cNvPr id="44" name="Rectangle 43">
             <a:extLst>
               <a:ext uri="{FF2B5EF4-FFF2-40B4-BE49-F238E27FC236}">
-                <a16:creationId xmlns:a16="http://schemas.microsoft.com/office/drawing/2014/main" id="{0FC8017F-049B-42FD-8C0A-B47C6EE029A5}"/>
+                <a16:creationId xmlns:a16="http://schemas.microsoft.com/office/drawing/2014/main" id="{7E8D181B-1FBE-448E-8637-BD87EB1B5290}"/>
               </a:ext>
             </a:extLst>
           </p:cNvPr>
@@ -31614,7 +31614,7 @@
           <p:cNvPr id="45" name="Rectangle 44">
             <a:extLst>
               <a:ext uri="{FF2B5EF4-FFF2-40B4-BE49-F238E27FC236}">
-                <a16:creationId xmlns:a16="http://schemas.microsoft.com/office/drawing/2014/main" id="{451C0E07-D089-45F7-B7C3-98DFFB7DE3BE}"/>
+                <a16:creationId xmlns:a16="http://schemas.microsoft.com/office/drawing/2014/main" id="{DDBCB87B-48F1-49D8-99D0-6146197F1FD6}"/>
               </a:ext>
             </a:extLst>
           </p:cNvPr>
@@ -31666,7 +31666,7 @@
                 <a:ea typeface="Arial"/>
                 <a:cs typeface="Arial"/>
               </a:rPr>
-              <a:t>MIT code · OSM data © contributors, ODbL · build r2z-d4c8d4cc709a</a:t>
+              <a:t>MIT code · OSM data © contributors, ODbL · build r2z-a7181752a17d</a:t>
             </a:r>
           </a:p>
         </p:txBody>
@@ -31676,7 +31676,7 @@
           <p:cNvPr id="46" name="Rectangle 45">
             <a:extLst>
               <a:ext uri="{FF2B5EF4-FFF2-40B4-BE49-F238E27FC236}">
-                <a16:creationId xmlns:a16="http://schemas.microsoft.com/office/drawing/2014/main" id="{9D1C796F-71F8-4C00-AA95-EFB333842D04}"/>
+                <a16:creationId xmlns:a16="http://schemas.microsoft.com/office/drawing/2014/main" id="{017DACB0-BA68-43C2-841C-6209A44A92A9}"/>
               </a:ext>
             </a:extLst>
           </p:cNvPr>
@@ -31707,7 +31707,7 @@
           <p:cNvPr id="47" name="Rectangle 46">
             <a:extLst>
               <a:ext uri="{FF2B5EF4-FFF2-40B4-BE49-F238E27FC236}">
-                <a16:creationId xmlns:a16="http://schemas.microsoft.com/office/drawing/2014/main" id="{A6F65748-FB5B-4C64-94C1-6B0665512E75}"/>
+                <a16:creationId xmlns:a16="http://schemas.microsoft.com/office/drawing/2014/main" id="{CD46DFA0-87FB-4845-AA2E-1CD3425F1F5E}"/>
               </a:ext>
             </a:extLst>
           </p:cNvPr>
@@ -31759,7 +31759,7 @@
                 <a:ea typeface="Arial"/>
                 <a:cs typeface="Arial"/>
               </a:rPr>
-              <a:t>r2z-d4c8d4cc709a · scn-e0f12f397e · prt-fd6de9d793</a:t>
+              <a:t>r2z-a7181752a17d · scn-e0f12f397e · prt-fd6de9d793</a:t>
             </a:r>
           </a:p>
         </p:txBody>
@@ -31769,7 +31769,7 @@
           <p:cNvPr id="48" name="Rectangle 47">
             <a:extLst>
               <a:ext uri="{FF2B5EF4-FFF2-40B4-BE49-F238E27FC236}">
-                <a16:creationId xmlns:a16="http://schemas.microsoft.com/office/drawing/2014/main" id="{05106299-D472-41CD-940D-255CB4B1FB20}"/>
+                <a16:creationId xmlns:a16="http://schemas.microsoft.com/office/drawing/2014/main" id="{B80FFAC4-052E-4A97-A2DE-11D171B03932}"/>
               </a:ext>
             </a:extLst>
           </p:cNvPr>
@@ -31829,7 +31829,7 @@
     </p:spTree>
     <p:extLst>
       <p:ext uri="{BB962C8B-B14F-4D97-AF65-F5344CB8AC3E}">
-        <p14:creationId xmlns:p14="http://schemas.microsoft.com/office/powerpoint/2010/main" val="587572377"/>
+        <p14:creationId xmlns:p14="http://schemas.microsoft.com/office/powerpoint/2010/main" val="1472871407"/>
       </p:ext>
     </p:extLst>
   </p:cSld>
@@ -31870,7 +31870,7 @@
             <a:hlinkClick r:id="rId3"/>
             <a:extLst>
               <a:ext uri="{FF2B5EF4-FFF2-40B4-BE49-F238E27FC236}">
-                <a16:creationId xmlns:a16="http://schemas.microsoft.com/office/drawing/2014/main" id="{E0F23B77-2EA1-4818-93BE-458E1329FE9E}"/>
+                <a16:creationId xmlns:a16="http://schemas.microsoft.com/office/drawing/2014/main" id="{B5C62DEC-F3C9-4882-8900-25C3BA305394}"/>
               </a:ext>
             </a:extLst>
           </p:cNvPr>
@@ -31945,7 +31945,7 @@
             <a:hlinkClick r:id="rId4"/>
             <a:extLst>
               <a:ext uri="{FF2B5EF4-FFF2-40B4-BE49-F238E27FC236}">
-                <a16:creationId xmlns:a16="http://schemas.microsoft.com/office/drawing/2014/main" id="{22F2C826-CFF4-4019-82D1-B0DF68585C3D}"/>
+                <a16:creationId xmlns:a16="http://schemas.microsoft.com/office/drawing/2014/main" id="{E2BE5989-8012-4304-A1B7-8BE9EF1A3DE9}"/>
               </a:ext>
             </a:extLst>
           </p:cNvPr>
@@ -32019,7 +32019,7 @@
           <p:cNvPr id="3" name="Rectangle 2">
             <a:extLst>
               <a:ext uri="{FF2B5EF4-FFF2-40B4-BE49-F238E27FC236}">
-                <a16:creationId xmlns:a16="http://schemas.microsoft.com/office/drawing/2014/main" id="{2B00A8C6-62F4-4FC1-A9CF-8812E62AB923}"/>
+                <a16:creationId xmlns:a16="http://schemas.microsoft.com/office/drawing/2014/main" id="{F153CE95-A02B-4B8E-A706-A5C0C399D58B}"/>
               </a:ext>
             </a:extLst>
           </p:cNvPr>
@@ -32081,7 +32081,7 @@
           <p:cNvPr id="4" name="Rectangle 3">
             <a:extLst>
               <a:ext uri="{FF2B5EF4-FFF2-40B4-BE49-F238E27FC236}">
-                <a16:creationId xmlns:a16="http://schemas.microsoft.com/office/drawing/2014/main" id="{7BB4F3C7-6802-4BB1-B5D5-1A68B081F8A0}"/>
+                <a16:creationId xmlns:a16="http://schemas.microsoft.com/office/drawing/2014/main" id="{9BCD3FAE-3DF1-45E9-A8F0-0E1040712CE7}"/>
               </a:ext>
             </a:extLst>
           </p:cNvPr>
@@ -32170,7 +32170,7 @@
           <p:cNvPr id="6" name="Rectangle: Rounded Corners 5">
             <a:extLst>
               <a:ext uri="{FF2B5EF4-FFF2-40B4-BE49-F238E27FC236}">
-                <a16:creationId xmlns:a16="http://schemas.microsoft.com/office/drawing/2014/main" id="{6016CDBD-3121-479E-9813-3D30E0FCDFAF}"/>
+                <a16:creationId xmlns:a16="http://schemas.microsoft.com/office/drawing/2014/main" id="{70DB95B8-1F8E-4924-8A4A-10BC6B932E86}"/>
               </a:ext>
             </a:extLst>
           </p:cNvPr>
@@ -32203,7 +32203,7 @@
           <p:cNvPr id="7" name="Rectangle: Rounded Corners 6">
             <a:extLst>
               <a:ext uri="{FF2B5EF4-FFF2-40B4-BE49-F238E27FC236}">
-                <a16:creationId xmlns:a16="http://schemas.microsoft.com/office/drawing/2014/main" id="{F3F23E7C-DFAE-406F-BA0A-5FCB25D4807B}"/>
+                <a16:creationId xmlns:a16="http://schemas.microsoft.com/office/drawing/2014/main" id="{E3114428-DE36-4368-B724-587C56E89B73}"/>
               </a:ext>
             </a:extLst>
           </p:cNvPr>
@@ -32236,7 +32236,7 @@
           <p:cNvPr id="8" name="Rectangle 7">
             <a:extLst>
               <a:ext uri="{FF2B5EF4-FFF2-40B4-BE49-F238E27FC236}">
-                <a16:creationId xmlns:a16="http://schemas.microsoft.com/office/drawing/2014/main" id="{6DCA006E-1D34-42ED-A678-13CC09C406D1}"/>
+                <a16:creationId xmlns:a16="http://schemas.microsoft.com/office/drawing/2014/main" id="{40E96D3E-9702-426D-839D-CB1212700C89}"/>
               </a:ext>
             </a:extLst>
           </p:cNvPr>
@@ -32298,7 +32298,7 @@
           <p:cNvPr id="9" name="Rectangle 8">
             <a:extLst>
               <a:ext uri="{FF2B5EF4-FFF2-40B4-BE49-F238E27FC236}">
-                <a16:creationId xmlns:a16="http://schemas.microsoft.com/office/drawing/2014/main" id="{4964A935-EFE4-42E1-B30A-05A1F9D0539D}"/>
+                <a16:creationId xmlns:a16="http://schemas.microsoft.com/office/drawing/2014/main" id="{F828B1A6-5AEE-4804-849B-B3F95407F1EF}"/>
               </a:ext>
             </a:extLst>
           </p:cNvPr>
@@ -32360,7 +32360,7 @@
           <p:cNvPr id="10" name="Rectangle 9">
             <a:extLst>
               <a:ext uri="{FF2B5EF4-FFF2-40B4-BE49-F238E27FC236}">
-                <a16:creationId xmlns:a16="http://schemas.microsoft.com/office/drawing/2014/main" id="{B884CEE6-C0D7-4D5C-9A9B-E4C88A6835D3}"/>
+                <a16:creationId xmlns:a16="http://schemas.microsoft.com/office/drawing/2014/main" id="{AA910FC8-1DCE-4F0D-9CB4-A0C1468DE3CC}"/>
               </a:ext>
             </a:extLst>
           </p:cNvPr>
@@ -32422,7 +32422,7 @@
           <p:cNvPr id="11" name="Rectangle: Rounded Corners 10">
             <a:extLst>
               <a:ext uri="{FF2B5EF4-FFF2-40B4-BE49-F238E27FC236}">
-                <a16:creationId xmlns:a16="http://schemas.microsoft.com/office/drawing/2014/main" id="{7E87B19D-8CFC-42DA-8ACF-8996499AD0FF}"/>
+                <a16:creationId xmlns:a16="http://schemas.microsoft.com/office/drawing/2014/main" id="{C5B5C16C-19DB-45CB-847A-5228DD102E97}"/>
               </a:ext>
             </a:extLst>
           </p:cNvPr>
@@ -32455,7 +32455,7 @@
           <p:cNvPr id="12" name="Rectangle 11">
             <a:extLst>
               <a:ext uri="{FF2B5EF4-FFF2-40B4-BE49-F238E27FC236}">
-                <a16:creationId xmlns:a16="http://schemas.microsoft.com/office/drawing/2014/main" id="{53F3523D-DE60-4DD3-92CE-76DFB0A4FFAE}"/>
+                <a16:creationId xmlns:a16="http://schemas.microsoft.com/office/drawing/2014/main" id="{0049347E-4F4F-46EF-AC13-73D882D4BD5A}"/>
               </a:ext>
             </a:extLst>
           </p:cNvPr>
@@ -32517,7 +32517,7 @@
           <p:cNvPr id="13" name="Rectangle 12">
             <a:extLst>
               <a:ext uri="{FF2B5EF4-FFF2-40B4-BE49-F238E27FC236}">
-                <a16:creationId xmlns:a16="http://schemas.microsoft.com/office/drawing/2014/main" id="{5F9D3DE4-ECB1-4CE9-AD78-B6B680878BBE}"/>
+                <a16:creationId xmlns:a16="http://schemas.microsoft.com/office/drawing/2014/main" id="{3B1D8B1E-E7B3-431C-8866-0D3D25B2C3B3}"/>
               </a:ext>
             </a:extLst>
           </p:cNvPr>
@@ -32579,7 +32579,7 @@
           <p:cNvPr id="14" name="Rectangle 13">
             <a:extLst>
               <a:ext uri="{FF2B5EF4-FFF2-40B4-BE49-F238E27FC236}">
-                <a16:creationId xmlns:a16="http://schemas.microsoft.com/office/drawing/2014/main" id="{BD4769AD-472A-48BE-93B1-6E6C90834D07}"/>
+                <a16:creationId xmlns:a16="http://schemas.microsoft.com/office/drawing/2014/main" id="{E1AD719C-3493-48EB-AD1F-5E719D2007C7}"/>
               </a:ext>
             </a:extLst>
           </p:cNvPr>
@@ -32734,7 +32734,7 @@
           <p:cNvPr id="15" name="Rectangle 14">
             <a:extLst>
               <a:ext uri="{FF2B5EF4-FFF2-40B4-BE49-F238E27FC236}">
-                <a16:creationId xmlns:a16="http://schemas.microsoft.com/office/drawing/2014/main" id="{2BE989EF-DB68-4557-8926-CA9CFB2D9AD2}"/>
+                <a16:creationId xmlns:a16="http://schemas.microsoft.com/office/drawing/2014/main" id="{E50436BF-58B4-45EB-8BCE-27E6EF9F32EA}"/>
               </a:ext>
             </a:extLst>
           </p:cNvPr>
@@ -32796,7 +32796,7 @@
           <p:cNvPr id="16" name="Rectangle 15">
             <a:extLst>
               <a:ext uri="{FF2B5EF4-FFF2-40B4-BE49-F238E27FC236}">
-                <a16:creationId xmlns:a16="http://schemas.microsoft.com/office/drawing/2014/main" id="{08D88D9F-96F1-4DD6-BF55-CFE45BB7B54B}"/>
+                <a16:creationId xmlns:a16="http://schemas.microsoft.com/office/drawing/2014/main" id="{18571CFF-1FEB-4052-9AF1-AAD341926AB3}"/>
               </a:ext>
             </a:extLst>
           </p:cNvPr>
@@ -32827,7 +32827,7 @@
           <p:cNvPr id="17" name="Rectangle 16">
             <a:extLst>
               <a:ext uri="{FF2B5EF4-FFF2-40B4-BE49-F238E27FC236}">
-                <a16:creationId xmlns:a16="http://schemas.microsoft.com/office/drawing/2014/main" id="{5C468E52-C787-4E28-AC08-6CC834DA8E4A}"/>
+                <a16:creationId xmlns:a16="http://schemas.microsoft.com/office/drawing/2014/main" id="{D109F932-36C4-4BA9-B597-9B84C02069B4}"/>
               </a:ext>
             </a:extLst>
           </p:cNvPr>
@@ -32879,7 +32879,7 @@
                 <a:ea typeface="Arial"/>
                 <a:cs typeface="Arial"/>
               </a:rPr>
-              <a:t>r2z-d4c8d4cc709a · scn-e0f12f397e · prt-fd6de9d793</a:t>
+              <a:t>r2z-a7181752a17d · scn-e0f12f397e · prt-fd6de9d793</a:t>
             </a:r>
           </a:p>
         </p:txBody>
@@ -32889,7 +32889,7 @@
           <p:cNvPr id="18" name="Rectangle 17">
             <a:extLst>
               <a:ext uri="{FF2B5EF4-FFF2-40B4-BE49-F238E27FC236}">
-                <a16:creationId xmlns:a16="http://schemas.microsoft.com/office/drawing/2014/main" id="{E56073AE-B54C-4C2D-8E3E-5A4611A8116F}"/>
+                <a16:creationId xmlns:a16="http://schemas.microsoft.com/office/drawing/2014/main" id="{7B791543-5FB5-4906-879D-2A7C5022A094}"/>
               </a:ext>
             </a:extLst>
           </p:cNvPr>
@@ -32949,7 +32949,7 @@
     </p:spTree>
     <p:extLst>
       <p:ext uri="{BB962C8B-B14F-4D97-AF65-F5344CB8AC3E}">
-        <p14:creationId xmlns:p14="http://schemas.microsoft.com/office/powerpoint/2010/main" val="2108093208"/>
+        <p14:creationId xmlns:p14="http://schemas.microsoft.com/office/powerpoint/2010/main" val="754460357"/>
       </p:ext>
     </p:extLst>
   </p:cSld>
@@ -32990,7 +32990,7 @@
             <a:hlinkClick r:id="rId3"/>
             <a:extLst>
               <a:ext uri="{FF2B5EF4-FFF2-40B4-BE49-F238E27FC236}">
-                <a16:creationId xmlns:a16="http://schemas.microsoft.com/office/drawing/2014/main" id="{C31C082B-3CBE-4709-A8ED-15B994298E49}"/>
+                <a16:creationId xmlns:a16="http://schemas.microsoft.com/office/drawing/2014/main" id="{457FEE1B-668B-4358-9C43-D953BCE61A67}"/>
               </a:ext>
             </a:extLst>
           </p:cNvPr>
@@ -33065,7 +33065,7 @@
             <a:hlinkClick r:id="rId4"/>
             <a:extLst>
               <a:ext uri="{FF2B5EF4-FFF2-40B4-BE49-F238E27FC236}">
-                <a16:creationId xmlns:a16="http://schemas.microsoft.com/office/drawing/2014/main" id="{4CEFEE70-5477-475E-8C4C-8A99F855B6D3}"/>
+                <a16:creationId xmlns:a16="http://schemas.microsoft.com/office/drawing/2014/main" id="{22CE9A34-461F-4295-BFC2-6A8E861355E2}"/>
               </a:ext>
             </a:extLst>
           </p:cNvPr>
@@ -33139,7 +33139,7 @@
           <p:cNvPr id="3" name="Rectangle 2">
             <a:extLst>
               <a:ext uri="{FF2B5EF4-FFF2-40B4-BE49-F238E27FC236}">
-                <a16:creationId xmlns:a16="http://schemas.microsoft.com/office/drawing/2014/main" id="{FB498120-31AE-4ABF-BE13-61EABE115AE4}"/>
+                <a16:creationId xmlns:a16="http://schemas.microsoft.com/office/drawing/2014/main" id="{24DC3BFF-0911-44E7-B8DA-99ED9F2C5594}"/>
               </a:ext>
             </a:extLst>
           </p:cNvPr>
@@ -33201,7 +33201,7 @@
           <p:cNvPr id="4" name="Rectangle 3">
             <a:extLst>
               <a:ext uri="{FF2B5EF4-FFF2-40B4-BE49-F238E27FC236}">
-                <a16:creationId xmlns:a16="http://schemas.microsoft.com/office/drawing/2014/main" id="{DA465861-436C-4D6F-804F-CFA3520A9B3E}"/>
+                <a16:creationId xmlns:a16="http://schemas.microsoft.com/office/drawing/2014/main" id="{325FBCD7-1549-4BEC-A399-285B22423AE0}"/>
               </a:ext>
             </a:extLst>
           </p:cNvPr>
@@ -33279,7 +33279,7 @@
           <p:cNvPr id="6" name="Rectangle 5">
             <a:extLst>
               <a:ext uri="{FF2B5EF4-FFF2-40B4-BE49-F238E27FC236}">
-                <a16:creationId xmlns:a16="http://schemas.microsoft.com/office/drawing/2014/main" id="{85EAEB04-C203-488A-9659-F75547FF3579}"/>
+                <a16:creationId xmlns:a16="http://schemas.microsoft.com/office/drawing/2014/main" id="{672B1D2D-C5D6-497B-BB04-E66E5A4429F8}"/>
               </a:ext>
             </a:extLst>
           </p:cNvPr>
@@ -33341,7 +33341,7 @@
           <p:cNvPr id="7" name="Rectangle 6">
             <a:extLst>
               <a:ext uri="{FF2B5EF4-FFF2-40B4-BE49-F238E27FC236}">
-                <a16:creationId xmlns:a16="http://schemas.microsoft.com/office/drawing/2014/main" id="{8BE822D6-5B09-43F7-95C3-AAF8AD680A2E}"/>
+                <a16:creationId xmlns:a16="http://schemas.microsoft.com/office/drawing/2014/main" id="{0F6AA912-FF5D-4645-B3CE-A2FCAF4471DC}"/>
               </a:ext>
             </a:extLst>
           </p:cNvPr>
@@ -33403,7 +33403,7 @@
           <p:cNvPr id="8" name="Rectangle 7">
             <a:extLst>
               <a:ext uri="{FF2B5EF4-FFF2-40B4-BE49-F238E27FC236}">
-                <a16:creationId xmlns:a16="http://schemas.microsoft.com/office/drawing/2014/main" id="{F7399E0D-4E46-4233-9C5A-61EC0364E7EF}"/>
+                <a16:creationId xmlns:a16="http://schemas.microsoft.com/office/drawing/2014/main" id="{9335CACA-5174-49A8-98A5-7DA517A3BE36}"/>
               </a:ext>
             </a:extLst>
           </p:cNvPr>
@@ -33465,7 +33465,7 @@
           <p:cNvPr id="9" name="Rectangle 8">
             <a:extLst>
               <a:ext uri="{FF2B5EF4-FFF2-40B4-BE49-F238E27FC236}">
-                <a16:creationId xmlns:a16="http://schemas.microsoft.com/office/drawing/2014/main" id="{442409A1-BEBB-4BCB-98FF-7949471D1CCC}"/>
+                <a16:creationId xmlns:a16="http://schemas.microsoft.com/office/drawing/2014/main" id="{94F0DC24-5FAE-4C59-8870-2BDD2A545F58}"/>
               </a:ext>
             </a:extLst>
           </p:cNvPr>
@@ -33527,7 +33527,7 @@
           <p:cNvPr id="10" name="Rectangle 9">
             <a:extLst>
               <a:ext uri="{FF2B5EF4-FFF2-40B4-BE49-F238E27FC236}">
-                <a16:creationId xmlns:a16="http://schemas.microsoft.com/office/drawing/2014/main" id="{772D9369-597C-4DC1-9A94-A7ABD0967B62}"/>
+                <a16:creationId xmlns:a16="http://schemas.microsoft.com/office/drawing/2014/main" id="{983BFF68-F6D0-44FC-B574-10913E1728BC}"/>
               </a:ext>
             </a:extLst>
           </p:cNvPr>
@@ -33589,7 +33589,7 @@
           <p:cNvPr id="11" name="Rectangle 10">
             <a:extLst>
               <a:ext uri="{FF2B5EF4-FFF2-40B4-BE49-F238E27FC236}">
-                <a16:creationId xmlns:a16="http://schemas.microsoft.com/office/drawing/2014/main" id="{6A61E40D-84EE-4B20-9F4A-EE4A0DBE9AF5}"/>
+                <a16:creationId xmlns:a16="http://schemas.microsoft.com/office/drawing/2014/main" id="{8041BA08-293D-42E3-BB42-CDFF97D7FDAB}"/>
               </a:ext>
             </a:extLst>
           </p:cNvPr>
@@ -33651,7 +33651,7 @@
           <p:cNvPr id="12" name="Rectangle 11">
             <a:extLst>
               <a:ext uri="{FF2B5EF4-FFF2-40B4-BE49-F238E27FC236}">
-                <a16:creationId xmlns:a16="http://schemas.microsoft.com/office/drawing/2014/main" id="{1A61C8F4-250A-470B-A753-53D34FE2D049}"/>
+                <a16:creationId xmlns:a16="http://schemas.microsoft.com/office/drawing/2014/main" id="{D968FD59-D94F-4F51-91D8-D1938F8E1E70}"/>
               </a:ext>
             </a:extLst>
           </p:cNvPr>
@@ -33713,7 +33713,7 @@
           <p:cNvPr id="13" name="Rectangle 12">
             <a:extLst>
               <a:ext uri="{FF2B5EF4-FFF2-40B4-BE49-F238E27FC236}">
-                <a16:creationId xmlns:a16="http://schemas.microsoft.com/office/drawing/2014/main" id="{62978771-1E31-4778-BBE3-7E27E64F6674}"/>
+                <a16:creationId xmlns:a16="http://schemas.microsoft.com/office/drawing/2014/main" id="{A897ADF1-C822-4688-85BB-90A511B88897}"/>
               </a:ext>
             </a:extLst>
           </p:cNvPr>
@@ -33775,7 +33775,7 @@
           <p:cNvPr id="14" name="Rectangle 13">
             <a:extLst>
               <a:ext uri="{FF2B5EF4-FFF2-40B4-BE49-F238E27FC236}">
-                <a16:creationId xmlns:a16="http://schemas.microsoft.com/office/drawing/2014/main" id="{AA450062-E2A2-4A5C-BAC4-B501C2CC2B8B}"/>
+                <a16:creationId xmlns:a16="http://schemas.microsoft.com/office/drawing/2014/main" id="{D7A3EEDC-94AB-4B7E-9C6F-32F5CE6211A1}"/>
               </a:ext>
             </a:extLst>
           </p:cNvPr>
@@ -33837,7 +33837,7 @@
           <p:cNvPr id="15" name="Rectangle 14">
             <a:extLst>
               <a:ext uri="{FF2B5EF4-FFF2-40B4-BE49-F238E27FC236}">
-                <a16:creationId xmlns:a16="http://schemas.microsoft.com/office/drawing/2014/main" id="{676EAAD4-CD0A-4E3C-A58F-31E2345B923E}"/>
+                <a16:creationId xmlns:a16="http://schemas.microsoft.com/office/drawing/2014/main" id="{077196FA-639D-4C73-82BF-D3C30662DA31}"/>
               </a:ext>
             </a:extLst>
           </p:cNvPr>
@@ -33899,7 +33899,7 @@
           <p:cNvPr id="16" name="Rectangle 15">
             <a:extLst>
               <a:ext uri="{FF2B5EF4-FFF2-40B4-BE49-F238E27FC236}">
-                <a16:creationId xmlns:a16="http://schemas.microsoft.com/office/drawing/2014/main" id="{8BD64F7A-DF11-4CE7-9D19-5286FA77C353}"/>
+                <a16:creationId xmlns:a16="http://schemas.microsoft.com/office/drawing/2014/main" id="{2F2DFE46-058A-4089-8EC8-D2ED6C726AD1}"/>
               </a:ext>
             </a:extLst>
           </p:cNvPr>
@@ -33961,7 +33961,7 @@
           <p:cNvPr id="17" name="Rectangle: Rounded Corners 16">
             <a:extLst>
               <a:ext uri="{FF2B5EF4-FFF2-40B4-BE49-F238E27FC236}">
-                <a16:creationId xmlns:a16="http://schemas.microsoft.com/office/drawing/2014/main" id="{E140295C-8A89-4A6F-80AC-B45143C73BB8}"/>
+                <a16:creationId xmlns:a16="http://schemas.microsoft.com/office/drawing/2014/main" id="{4FE3CE68-5C88-45C1-8E94-1C9D837E843F}"/>
               </a:ext>
             </a:extLst>
           </p:cNvPr>
@@ -33994,7 +33994,7 @@
           <p:cNvPr id="18" name="Rectangle 17">
             <a:extLst>
               <a:ext uri="{FF2B5EF4-FFF2-40B4-BE49-F238E27FC236}">
-                <a16:creationId xmlns:a16="http://schemas.microsoft.com/office/drawing/2014/main" id="{015C69A2-A8EC-4A55-8143-2A27BCFE9734}"/>
+                <a16:creationId xmlns:a16="http://schemas.microsoft.com/office/drawing/2014/main" id="{563A59C2-D9F9-4D5D-914A-FD3FD901B4A1}"/>
               </a:ext>
             </a:extLst>
           </p:cNvPr>
@@ -34056,7 +34056,7 @@
           <p:cNvPr id="19" name="Rectangle 18">
             <a:extLst>
               <a:ext uri="{FF2B5EF4-FFF2-40B4-BE49-F238E27FC236}">
-                <a16:creationId xmlns:a16="http://schemas.microsoft.com/office/drawing/2014/main" id="{124673EE-42FF-4110-BE25-FE395386EB6E}"/>
+                <a16:creationId xmlns:a16="http://schemas.microsoft.com/office/drawing/2014/main" id="{29EBF307-3284-4E86-AB7E-7F24837A3E68}"/>
               </a:ext>
             </a:extLst>
           </p:cNvPr>
@@ -34118,7 +34118,7 @@
           <p:cNvPr id="20" name="Rectangle 19">
             <a:extLst>
               <a:ext uri="{FF2B5EF4-FFF2-40B4-BE49-F238E27FC236}">
-                <a16:creationId xmlns:a16="http://schemas.microsoft.com/office/drawing/2014/main" id="{A8FB83CA-E056-4019-9A4A-C969418DE447}"/>
+                <a16:creationId xmlns:a16="http://schemas.microsoft.com/office/drawing/2014/main" id="{919BC052-592F-43F8-B91E-36414D9644F6}"/>
               </a:ext>
             </a:extLst>
           </p:cNvPr>
@@ -34149,7 +34149,7 @@
           <p:cNvPr id="21" name="Rectangle 20">
             <a:extLst>
               <a:ext uri="{FF2B5EF4-FFF2-40B4-BE49-F238E27FC236}">
-                <a16:creationId xmlns:a16="http://schemas.microsoft.com/office/drawing/2014/main" id="{509A2499-F181-4039-8717-8168F53C7955}"/>
+                <a16:creationId xmlns:a16="http://schemas.microsoft.com/office/drawing/2014/main" id="{2878E58E-EC0B-43A0-82B3-1F7C7E376ABB}"/>
               </a:ext>
             </a:extLst>
           </p:cNvPr>
@@ -34201,7 +34201,7 @@
                 <a:ea typeface="Arial"/>
                 <a:cs typeface="Arial"/>
               </a:rPr>
-              <a:t>r2z-d4c8d4cc709a · scn-e0f12f397e · prt-fd6de9d793</a:t>
+              <a:t>r2z-a7181752a17d · scn-e0f12f397e · prt-fd6de9d793</a:t>
             </a:r>
           </a:p>
         </p:txBody>
@@ -34211,7 +34211,7 @@
           <p:cNvPr id="22" name="Rectangle 21">
             <a:extLst>
               <a:ext uri="{FF2B5EF4-FFF2-40B4-BE49-F238E27FC236}">
-                <a16:creationId xmlns:a16="http://schemas.microsoft.com/office/drawing/2014/main" id="{4107FE00-D7B0-46CC-A962-6BA1182A9354}"/>
+                <a16:creationId xmlns:a16="http://schemas.microsoft.com/office/drawing/2014/main" id="{BB0658FA-EED2-4E3E-B16A-A86E9AD76AD5}"/>
               </a:ext>
             </a:extLst>
           </p:cNvPr>
@@ -34271,7 +34271,7 @@
     </p:spTree>
     <p:extLst>
       <p:ext uri="{BB962C8B-B14F-4D97-AF65-F5344CB8AC3E}">
-        <p14:creationId xmlns:p14="http://schemas.microsoft.com/office/powerpoint/2010/main" val="98155190"/>
+        <p14:creationId xmlns:p14="http://schemas.microsoft.com/office/powerpoint/2010/main" val="1407576401"/>
       </p:ext>
     </p:extLst>
   </p:cSld>

--- a/output/submission/Route2Zero_Concept_Deck_20_Slides.pptx
+++ b/output/submission/Route2Zero_Concept_Deck_20_Slides.pptx
@@ -166,7 +166,7 @@
             </c:spPr>
             <c:extLst>
               <c:ext xmlns:c16="http://schemas.microsoft.com/office/drawing/2014/chart" uri="{C3380CC4-5D6E-409C-BE32-E72D297353CC}">
-                <c16:uniqueId val="{00000001-A636-4053-B07F-0BE91ADD95A9}"/>
+                <c16:uniqueId val="{00000001-25B6-4CC6-9C55-36DBCF351413}"/>
               </c:ext>
             </c:extLst>
           </c:dPt>
@@ -240,7 +240,7 @@
               </c14:invertSolidFillFmt>
             </c:ext>
             <c:ext xmlns:c16="http://schemas.microsoft.com/office/drawing/2014/chart" uri="{C3380CC4-5D6E-409C-BE32-E72D297353CC}">
-              <c16:uniqueId val="{00000002-A636-4053-B07F-0BE91ADD95A9}"/>
+              <c16:uniqueId val="{00000002-25B6-4CC6-9C55-36DBCF351413}"/>
             </c:ext>
           </c:extLst>
         </c:ser>
@@ -417,7 +417,7 @@
             </c:spPr>
             <c:extLst>
               <c:ext xmlns:c16="http://schemas.microsoft.com/office/drawing/2014/chart" uri="{C3380CC4-5D6E-409C-BE32-E72D297353CC}">
-                <c16:uniqueId val="{00000001-A41A-436B-80DE-F2BE44E21E00}"/>
+                <c16:uniqueId val="{00000001-89DF-403C-8AD2-5FAAE08C8BF8}"/>
               </c:ext>
             </c:extLst>
           </c:dPt>
@@ -432,7 +432,7 @@
             </c:spPr>
             <c:extLst>
               <c:ext xmlns:c16="http://schemas.microsoft.com/office/drawing/2014/chart" uri="{C3380CC4-5D6E-409C-BE32-E72D297353CC}">
-                <c16:uniqueId val="{00000003-A41A-436B-80DE-F2BE44E21E00}"/>
+                <c16:uniqueId val="{00000003-89DF-403C-8AD2-5FAAE08C8BF8}"/>
               </c:ext>
             </c:extLst>
           </c:dPt>
@@ -512,7 +512,7 @@
               </c14:invertSolidFillFmt>
             </c:ext>
             <c:ext xmlns:c16="http://schemas.microsoft.com/office/drawing/2014/chart" uri="{C3380CC4-5D6E-409C-BE32-E72D297353CC}">
-              <c16:uniqueId val="{00000004-A41A-436B-80DE-F2BE44E21E00}"/>
+              <c16:uniqueId val="{00000004-89DF-403C-8AD2-5FAAE08C8BF8}"/>
             </c:ext>
           </c:extLst>
         </c:ser>
@@ -663,7 +663,7 @@
             </c:spPr>
             <c:extLst>
               <c:ext xmlns:c16="http://schemas.microsoft.com/office/drawing/2014/chart" uri="{C3380CC4-5D6E-409C-BE32-E72D297353CC}">
-                <c16:uniqueId val="{00000001-D277-4A54-9B35-AB064B70BA2C}"/>
+                <c16:uniqueId val="{00000001-4271-43EA-AF8A-587C8F34B389}"/>
               </c:ext>
             </c:extLst>
           </c:dPt>
@@ -678,7 +678,7 @@
             </c:spPr>
             <c:extLst>
               <c:ext xmlns:c16="http://schemas.microsoft.com/office/drawing/2014/chart" uri="{C3380CC4-5D6E-409C-BE32-E72D297353CC}">
-                <c16:uniqueId val="{00000003-D277-4A54-9B35-AB064B70BA2C}"/>
+                <c16:uniqueId val="{00000003-4271-43EA-AF8A-587C8F34B389}"/>
               </c:ext>
             </c:extLst>
           </c:dPt>
@@ -749,7 +749,7 @@
           </c:val>
           <c:extLst>
             <c:ext xmlns:c16="http://schemas.microsoft.com/office/drawing/2014/chart" uri="{C3380CC4-5D6E-409C-BE32-E72D297353CC}">
-              <c16:uniqueId val="{00000004-D277-4A54-9B35-AB064B70BA2C}"/>
+              <c16:uniqueId val="{00000004-4271-43EA-AF8A-587C8F34B389}"/>
             </c:ext>
           </c:extLst>
         </c:ser>
@@ -3233,7 +3233,7 @@
           <p:cNvPr id="2" name="Rectangle 1">
             <a:extLst>
               <a:ext uri="{FF2B5EF4-FFF2-40B4-BE49-F238E27FC236}">
-                <a16:creationId xmlns:a16="http://schemas.microsoft.com/office/drawing/2014/main" id="{5E9B943E-CB6B-40C4-B9D7-F3C16C75B442}"/>
+                <a16:creationId xmlns:a16="http://schemas.microsoft.com/office/drawing/2014/main" id="{14607357-CC87-418C-B7CA-763F385C9B89}"/>
               </a:ext>
             </a:extLst>
           </p:cNvPr>
@@ -3280,7 +3280,7 @@
             <a:hlinkClick r:id="rId4"/>
             <a:extLst>
               <a:ext uri="{FF2B5EF4-FFF2-40B4-BE49-F238E27FC236}">
-                <a16:creationId xmlns:a16="http://schemas.microsoft.com/office/drawing/2014/main" id="{FE8596F9-46BA-46F1-87E0-CEF96AB58203}"/>
+                <a16:creationId xmlns:a16="http://schemas.microsoft.com/office/drawing/2014/main" id="{64E1ED09-26E9-4D57-96FD-551D684FF3D4}"/>
               </a:ext>
             </a:extLst>
           </p:cNvPr>
@@ -3355,7 +3355,7 @@
             <a:hlinkClick r:id="rId5"/>
             <a:extLst>
               <a:ext uri="{FF2B5EF4-FFF2-40B4-BE49-F238E27FC236}">
-                <a16:creationId xmlns:a16="http://schemas.microsoft.com/office/drawing/2014/main" id="{B7046D22-11DE-4483-95F9-4DE3AA06AD2D}"/>
+                <a16:creationId xmlns:a16="http://schemas.microsoft.com/office/drawing/2014/main" id="{D1CFDFDC-0B57-42BB-9D35-856F8B578B03}"/>
               </a:ext>
             </a:extLst>
           </p:cNvPr>
@@ -3429,7 +3429,7 @@
           <p:cNvPr id="5" name="Rectangle 4">
             <a:extLst>
               <a:ext uri="{FF2B5EF4-FFF2-40B4-BE49-F238E27FC236}">
-                <a16:creationId xmlns:a16="http://schemas.microsoft.com/office/drawing/2014/main" id="{D1A3F372-CE4C-4F95-9068-6F38A6F41777}"/>
+                <a16:creationId xmlns:a16="http://schemas.microsoft.com/office/drawing/2014/main" id="{EAC544FE-C0B7-4654-89A1-31DCB3149913}"/>
               </a:ext>
             </a:extLst>
           </p:cNvPr>
@@ -3491,7 +3491,7 @@
           <p:cNvPr id="6" name="Rectangle 5">
             <a:extLst>
               <a:ext uri="{FF2B5EF4-FFF2-40B4-BE49-F238E27FC236}">
-                <a16:creationId xmlns:a16="http://schemas.microsoft.com/office/drawing/2014/main" id="{295138A1-27D2-4995-927F-06C55D949493}"/>
+                <a16:creationId xmlns:a16="http://schemas.microsoft.com/office/drawing/2014/main" id="{1531B05D-F0C2-46D6-8A14-D6E0EB962255}"/>
               </a:ext>
             </a:extLst>
           </p:cNvPr>
@@ -3553,7 +3553,7 @@
           <p:cNvPr id="7" name="Rectangle 6">
             <a:extLst>
               <a:ext uri="{FF2B5EF4-FFF2-40B4-BE49-F238E27FC236}">
-                <a16:creationId xmlns:a16="http://schemas.microsoft.com/office/drawing/2014/main" id="{AE7A79EB-7C7E-4E56-9F49-A419353E3BE6}"/>
+                <a16:creationId xmlns:a16="http://schemas.microsoft.com/office/drawing/2014/main" id="{D05D5199-95AA-4D5F-80BB-3C4FA8EE73BF}"/>
               </a:ext>
             </a:extLst>
           </p:cNvPr>
@@ -3615,7 +3615,7 @@
           <p:cNvPr id="8" name="Rectangle 7">
             <a:extLst>
               <a:ext uri="{FF2B5EF4-FFF2-40B4-BE49-F238E27FC236}">
-                <a16:creationId xmlns:a16="http://schemas.microsoft.com/office/drawing/2014/main" id="{C6958C8E-A069-4189-A823-47D35E1EA3C0}"/>
+                <a16:creationId xmlns:a16="http://schemas.microsoft.com/office/drawing/2014/main" id="{D10E8A4C-6BE7-466B-ADC2-F19B889C80BA}"/>
               </a:ext>
             </a:extLst>
           </p:cNvPr>
@@ -3677,7 +3677,7 @@
           <p:cNvPr id="9" name="Rectangle 8">
             <a:extLst>
               <a:ext uri="{FF2B5EF4-FFF2-40B4-BE49-F238E27FC236}">
-                <a16:creationId xmlns:a16="http://schemas.microsoft.com/office/drawing/2014/main" id="{9EB79944-8ADC-49F2-83B0-3662B6830335}"/>
+                <a16:creationId xmlns:a16="http://schemas.microsoft.com/office/drawing/2014/main" id="{15A0D420-DE6C-435A-85A0-490E87749410}"/>
               </a:ext>
             </a:extLst>
           </p:cNvPr>
@@ -3739,7 +3739,7 @@
           <p:cNvPr id="10" name="Rectangle 9">
             <a:extLst>
               <a:ext uri="{FF2B5EF4-FFF2-40B4-BE49-F238E27FC236}">
-                <a16:creationId xmlns:a16="http://schemas.microsoft.com/office/drawing/2014/main" id="{30D65B98-A7F0-4BC7-8733-B322CB70CBEA}"/>
+                <a16:creationId xmlns:a16="http://schemas.microsoft.com/office/drawing/2014/main" id="{CAB2459F-ECDB-4EC8-B972-E66B250B6F47}"/>
               </a:ext>
             </a:extLst>
           </p:cNvPr>
@@ -3801,7 +3801,7 @@
           <p:cNvPr id="11" name="Rectangle 10">
             <a:extLst>
               <a:ext uri="{FF2B5EF4-FFF2-40B4-BE49-F238E27FC236}">
-                <a16:creationId xmlns:a16="http://schemas.microsoft.com/office/drawing/2014/main" id="{8775F58C-8ECB-4A16-9F5B-B16E69AE2C03}"/>
+                <a16:creationId xmlns:a16="http://schemas.microsoft.com/office/drawing/2014/main" id="{F1A0FB6B-DB8C-425D-91A4-A397321C2E4C}"/>
               </a:ext>
             </a:extLst>
           </p:cNvPr>
@@ -3863,7 +3863,7 @@
           <p:cNvPr id="12" name="Rectangle 11">
             <a:extLst>
               <a:ext uri="{FF2B5EF4-FFF2-40B4-BE49-F238E27FC236}">
-                <a16:creationId xmlns:a16="http://schemas.microsoft.com/office/drawing/2014/main" id="{8D759590-82EE-46C4-BCC1-7C4B4CC3C739}"/>
+                <a16:creationId xmlns:a16="http://schemas.microsoft.com/office/drawing/2014/main" id="{6F1DB8E5-096C-455C-B6BE-12217D6D2A5E}"/>
               </a:ext>
             </a:extLst>
           </p:cNvPr>
@@ -3925,7 +3925,7 @@
           <p:cNvPr id="13" name="Rectangle 12">
             <a:extLst>
               <a:ext uri="{FF2B5EF4-FFF2-40B4-BE49-F238E27FC236}">
-                <a16:creationId xmlns:a16="http://schemas.microsoft.com/office/drawing/2014/main" id="{45B23F56-047A-4E74-8C88-422B58840701}"/>
+                <a16:creationId xmlns:a16="http://schemas.microsoft.com/office/drawing/2014/main" id="{D0C8AFE9-E2F2-4458-8912-AC583413CE70}"/>
               </a:ext>
             </a:extLst>
           </p:cNvPr>
@@ -3987,7 +3987,7 @@
           <p:cNvPr id="14" name="Rectangle 13">
             <a:extLst>
               <a:ext uri="{FF2B5EF4-FFF2-40B4-BE49-F238E27FC236}">
-                <a16:creationId xmlns:a16="http://schemas.microsoft.com/office/drawing/2014/main" id="{90DE8524-9AD7-4088-B173-43CE03CBE71E}"/>
+                <a16:creationId xmlns:a16="http://schemas.microsoft.com/office/drawing/2014/main" id="{E3D656E5-6923-430A-BCB9-7E0526278454}"/>
               </a:ext>
             </a:extLst>
           </p:cNvPr>
@@ -4049,7 +4049,7 @@
           <p:cNvPr id="15" name="Rectangle 14">
             <a:extLst>
               <a:ext uri="{FF2B5EF4-FFF2-40B4-BE49-F238E27FC236}">
-                <a16:creationId xmlns:a16="http://schemas.microsoft.com/office/drawing/2014/main" id="{94930F2D-E5D9-448A-91AC-659B68940D45}"/>
+                <a16:creationId xmlns:a16="http://schemas.microsoft.com/office/drawing/2014/main" id="{E66619DB-3F34-4072-89E7-D698017A09DD}"/>
               </a:ext>
             </a:extLst>
           </p:cNvPr>
@@ -4080,7 +4080,7 @@
           <p:cNvPr id="16" name="Rectangle 15">
             <a:extLst>
               <a:ext uri="{FF2B5EF4-FFF2-40B4-BE49-F238E27FC236}">
-                <a16:creationId xmlns:a16="http://schemas.microsoft.com/office/drawing/2014/main" id="{C59DD900-96D3-4F49-9905-B5672138783A}"/>
+                <a16:creationId xmlns:a16="http://schemas.microsoft.com/office/drawing/2014/main" id="{36DEDB0A-4576-4700-A95E-82685E629383}"/>
               </a:ext>
             </a:extLst>
           </p:cNvPr>
@@ -4142,7 +4142,7 @@
           <p:cNvPr id="17" name="Rectangle 16">
             <a:extLst>
               <a:ext uri="{FF2B5EF4-FFF2-40B4-BE49-F238E27FC236}">
-                <a16:creationId xmlns:a16="http://schemas.microsoft.com/office/drawing/2014/main" id="{1F8A8CE9-995F-49BD-B3FC-9E25D04604C3}"/>
+                <a16:creationId xmlns:a16="http://schemas.microsoft.com/office/drawing/2014/main" id="{7FB36143-EFE1-4329-BA32-F178ED4A4054}"/>
               </a:ext>
             </a:extLst>
           </p:cNvPr>
@@ -4202,7 +4202,7 @@
     </p:spTree>
     <p:extLst>
       <p:ext uri="{BB962C8B-B14F-4D97-AF65-F5344CB8AC3E}">
-        <p14:creationId xmlns:p14="http://schemas.microsoft.com/office/powerpoint/2010/main" val="1223590653"/>
+        <p14:creationId xmlns:p14="http://schemas.microsoft.com/office/powerpoint/2010/main" val="1291952033"/>
       </p:ext>
     </p:extLst>
   </p:cSld>
@@ -4243,7 +4243,7 @@
             <a:hlinkClick r:id="rId3"/>
             <a:extLst>
               <a:ext uri="{FF2B5EF4-FFF2-40B4-BE49-F238E27FC236}">
-                <a16:creationId xmlns:a16="http://schemas.microsoft.com/office/drawing/2014/main" id="{DC70EFE8-9D0A-4D7B-AE47-0BAA535B89E1}"/>
+                <a16:creationId xmlns:a16="http://schemas.microsoft.com/office/drawing/2014/main" id="{9CB698EA-9CD7-498A-9035-13F4CC536699}"/>
               </a:ext>
             </a:extLst>
           </p:cNvPr>
@@ -4318,7 +4318,7 @@
             <a:hlinkClick r:id="rId4"/>
             <a:extLst>
               <a:ext uri="{FF2B5EF4-FFF2-40B4-BE49-F238E27FC236}">
-                <a16:creationId xmlns:a16="http://schemas.microsoft.com/office/drawing/2014/main" id="{1A55CE6D-EBA0-4687-88B2-982DF847BA21}"/>
+                <a16:creationId xmlns:a16="http://schemas.microsoft.com/office/drawing/2014/main" id="{F3E8E982-CD02-4AD4-95B2-7DDF456276EA}"/>
               </a:ext>
             </a:extLst>
           </p:cNvPr>
@@ -4392,7 +4392,7 @@
           <p:cNvPr id="3" name="Rectangle 2">
             <a:extLst>
               <a:ext uri="{FF2B5EF4-FFF2-40B4-BE49-F238E27FC236}">
-                <a16:creationId xmlns:a16="http://schemas.microsoft.com/office/drawing/2014/main" id="{6B739F6D-2CFC-4107-87F0-FBF55070B4DA}"/>
+                <a16:creationId xmlns:a16="http://schemas.microsoft.com/office/drawing/2014/main" id="{BBF3D136-8473-4B53-B54D-A7A7AF551026}"/>
               </a:ext>
             </a:extLst>
           </p:cNvPr>
@@ -4454,7 +4454,7 @@
           <p:cNvPr id="4" name="Rectangle 3">
             <a:extLst>
               <a:ext uri="{FF2B5EF4-FFF2-40B4-BE49-F238E27FC236}">
-                <a16:creationId xmlns:a16="http://schemas.microsoft.com/office/drawing/2014/main" id="{2A8679BF-E1D9-405D-8CB7-9696881A6937}"/>
+                <a16:creationId xmlns:a16="http://schemas.microsoft.com/office/drawing/2014/main" id="{E644FEFC-51CE-47DE-B07B-AC07014DECF8}"/>
               </a:ext>
             </a:extLst>
           </p:cNvPr>
@@ -4543,7 +4543,7 @@
           <p:cNvPr id="6" name="Rectangle: Rounded Corners 5">
             <a:extLst>
               <a:ext uri="{FF2B5EF4-FFF2-40B4-BE49-F238E27FC236}">
-                <a16:creationId xmlns:a16="http://schemas.microsoft.com/office/drawing/2014/main" id="{563EDFDF-2756-4A35-9FC0-8B5980F03B45}"/>
+                <a16:creationId xmlns:a16="http://schemas.microsoft.com/office/drawing/2014/main" id="{BF6D5E42-5A63-4B47-9D52-736B38943918}"/>
               </a:ext>
             </a:extLst>
           </p:cNvPr>
@@ -4592,7 +4592,7 @@
           <p:cNvPr id="8" name="Rectangle: Rounded Corners 7">
             <a:extLst>
               <a:ext uri="{FF2B5EF4-FFF2-40B4-BE49-F238E27FC236}">
-                <a16:creationId xmlns:a16="http://schemas.microsoft.com/office/drawing/2014/main" id="{8273D320-6AA7-4018-B138-C8A1414C5C85}"/>
+                <a16:creationId xmlns:a16="http://schemas.microsoft.com/office/drawing/2014/main" id="{1532A83F-DEF5-458F-9119-9269F9728256}"/>
               </a:ext>
             </a:extLst>
           </p:cNvPr>
@@ -4625,7 +4625,7 @@
           <p:cNvPr id="9" name="Rectangle 8">
             <a:extLst>
               <a:ext uri="{FF2B5EF4-FFF2-40B4-BE49-F238E27FC236}">
-                <a16:creationId xmlns:a16="http://schemas.microsoft.com/office/drawing/2014/main" id="{56226176-1778-48E6-83D4-4B2BF7D52550}"/>
+                <a16:creationId xmlns:a16="http://schemas.microsoft.com/office/drawing/2014/main" id="{2E33BACB-F314-4E50-A9A7-D753FE0D567B}"/>
               </a:ext>
             </a:extLst>
           </p:cNvPr>
@@ -4687,7 +4687,7 @@
           <p:cNvPr id="10" name="Rectangle 9">
             <a:extLst>
               <a:ext uri="{FF2B5EF4-FFF2-40B4-BE49-F238E27FC236}">
-                <a16:creationId xmlns:a16="http://schemas.microsoft.com/office/drawing/2014/main" id="{A89F16B0-F31D-4648-AAC3-BB2E5867FC0E}"/>
+                <a16:creationId xmlns:a16="http://schemas.microsoft.com/office/drawing/2014/main" id="{3C959923-DADA-4E61-9EFD-19170D3C4408}"/>
               </a:ext>
             </a:extLst>
           </p:cNvPr>
@@ -4749,7 +4749,7 @@
           <p:cNvPr id="11" name="Rectangle 10">
             <a:extLst>
               <a:ext uri="{FF2B5EF4-FFF2-40B4-BE49-F238E27FC236}">
-                <a16:creationId xmlns:a16="http://schemas.microsoft.com/office/drawing/2014/main" id="{2DD3D6B0-FB21-4528-AAF8-4CCD600D12DD}"/>
+                <a16:creationId xmlns:a16="http://schemas.microsoft.com/office/drawing/2014/main" id="{B662E21C-C0B2-43EF-B6B9-92CC3E84BACF}"/>
               </a:ext>
             </a:extLst>
           </p:cNvPr>
@@ -4838,7 +4838,7 @@
           <p:cNvPr id="12" name="Rectangle 11">
             <a:extLst>
               <a:ext uri="{FF2B5EF4-FFF2-40B4-BE49-F238E27FC236}">
-                <a16:creationId xmlns:a16="http://schemas.microsoft.com/office/drawing/2014/main" id="{9B12E6B9-94EC-4C7E-A895-5602E4B79EC4}"/>
+                <a16:creationId xmlns:a16="http://schemas.microsoft.com/office/drawing/2014/main" id="{537BC6DB-AF9C-4EE3-A282-AA16A252A098}"/>
               </a:ext>
             </a:extLst>
           </p:cNvPr>
@@ -4869,7 +4869,7 @@
           <p:cNvPr id="13" name="Rectangle 12">
             <a:extLst>
               <a:ext uri="{FF2B5EF4-FFF2-40B4-BE49-F238E27FC236}">
-                <a16:creationId xmlns:a16="http://schemas.microsoft.com/office/drawing/2014/main" id="{A42D00CE-DDB4-4D02-BEFF-BB758DDF8D7C}"/>
+                <a16:creationId xmlns:a16="http://schemas.microsoft.com/office/drawing/2014/main" id="{D509228C-8743-4B89-9E4E-D96F5D0A5649}"/>
               </a:ext>
             </a:extLst>
           </p:cNvPr>
@@ -4931,7 +4931,7 @@
           <p:cNvPr id="14" name="Rectangle 13">
             <a:extLst>
               <a:ext uri="{FF2B5EF4-FFF2-40B4-BE49-F238E27FC236}">
-                <a16:creationId xmlns:a16="http://schemas.microsoft.com/office/drawing/2014/main" id="{F81E7D19-3AB0-42C3-A254-0AA2E0DB4D36}"/>
+                <a16:creationId xmlns:a16="http://schemas.microsoft.com/office/drawing/2014/main" id="{8EED6BE4-A208-45EC-9E5D-6F3627CF877E}"/>
               </a:ext>
             </a:extLst>
           </p:cNvPr>
@@ -4991,7 +4991,7 @@
     </p:spTree>
     <p:extLst>
       <p:ext uri="{BB962C8B-B14F-4D97-AF65-F5344CB8AC3E}">
-        <p14:creationId xmlns:p14="http://schemas.microsoft.com/office/powerpoint/2010/main" val="934368656"/>
+        <p14:creationId xmlns:p14="http://schemas.microsoft.com/office/powerpoint/2010/main" val="120591641"/>
       </p:ext>
     </p:extLst>
   </p:cSld>
@@ -5032,7 +5032,7 @@
             <a:hlinkClick r:id="rId3"/>
             <a:extLst>
               <a:ext uri="{FF2B5EF4-FFF2-40B4-BE49-F238E27FC236}">
-                <a16:creationId xmlns:a16="http://schemas.microsoft.com/office/drawing/2014/main" id="{F4F1F943-2055-4E62-8EB3-E6CA8FEDDB9F}"/>
+                <a16:creationId xmlns:a16="http://schemas.microsoft.com/office/drawing/2014/main" id="{53D95082-510D-4B62-A10B-156155A7CCBD}"/>
               </a:ext>
             </a:extLst>
           </p:cNvPr>
@@ -5107,7 +5107,7 @@
             <a:hlinkClick r:id="rId4"/>
             <a:extLst>
               <a:ext uri="{FF2B5EF4-FFF2-40B4-BE49-F238E27FC236}">
-                <a16:creationId xmlns:a16="http://schemas.microsoft.com/office/drawing/2014/main" id="{55BA3B68-C13F-41E2-B456-6138C3A71D9E}"/>
+                <a16:creationId xmlns:a16="http://schemas.microsoft.com/office/drawing/2014/main" id="{FC9D8857-2E0A-457B-B774-93960CDD8351}"/>
               </a:ext>
             </a:extLst>
           </p:cNvPr>
@@ -5181,7 +5181,7 @@
           <p:cNvPr id="3" name="Rectangle 2">
             <a:extLst>
               <a:ext uri="{FF2B5EF4-FFF2-40B4-BE49-F238E27FC236}">
-                <a16:creationId xmlns:a16="http://schemas.microsoft.com/office/drawing/2014/main" id="{CEB76F83-CDA3-42A0-9F23-7ABE901CAE24}"/>
+                <a16:creationId xmlns:a16="http://schemas.microsoft.com/office/drawing/2014/main" id="{C97046E2-A946-41AB-9183-1E59C2378B38}"/>
               </a:ext>
             </a:extLst>
           </p:cNvPr>
@@ -5243,7 +5243,7 @@
           <p:cNvPr id="4" name="Rectangle 3">
             <a:extLst>
               <a:ext uri="{FF2B5EF4-FFF2-40B4-BE49-F238E27FC236}">
-                <a16:creationId xmlns:a16="http://schemas.microsoft.com/office/drawing/2014/main" id="{580E259E-DD43-426A-BBD5-8A835E1162CC}"/>
+                <a16:creationId xmlns:a16="http://schemas.microsoft.com/office/drawing/2014/main" id="{44031BAC-60F8-4A5A-BE1D-DD5F7F0B1759}"/>
               </a:ext>
             </a:extLst>
           </p:cNvPr>
@@ -5305,7 +5305,7 @@
           <p:cNvPr id="5" name="Rectangle 4">
             <a:extLst>
               <a:ext uri="{FF2B5EF4-FFF2-40B4-BE49-F238E27FC236}">
-                <a16:creationId xmlns:a16="http://schemas.microsoft.com/office/drawing/2014/main" id="{72C4B785-70DF-4EAB-917A-C823BDE6B7A3}"/>
+                <a16:creationId xmlns:a16="http://schemas.microsoft.com/office/drawing/2014/main" id="{259A161F-5F3A-46BE-835A-74B153C4AA93}"/>
               </a:ext>
             </a:extLst>
           </p:cNvPr>
@@ -5367,7 +5367,7 @@
           <p:cNvPr id="6" name="Rectangle 5">
             <a:extLst>
               <a:ext uri="{FF2B5EF4-FFF2-40B4-BE49-F238E27FC236}">
-                <a16:creationId xmlns:a16="http://schemas.microsoft.com/office/drawing/2014/main" id="{9C597EE1-2002-4FBC-AA2A-232554BC42C7}"/>
+                <a16:creationId xmlns:a16="http://schemas.microsoft.com/office/drawing/2014/main" id="{802BE833-BA37-42F0-9B7D-F31262F4FA35}"/>
               </a:ext>
             </a:extLst>
           </p:cNvPr>
@@ -5429,7 +5429,7 @@
           <p:cNvPr id="7" name="Rectangle 6">
             <a:extLst>
               <a:ext uri="{FF2B5EF4-FFF2-40B4-BE49-F238E27FC236}">
-                <a16:creationId xmlns:a16="http://schemas.microsoft.com/office/drawing/2014/main" id="{0647FA4C-966F-4F0C-BB4B-7BB521649644}"/>
+                <a16:creationId xmlns:a16="http://schemas.microsoft.com/office/drawing/2014/main" id="{9EDDDA24-419F-4FF0-87F7-834098EFF3E3}"/>
               </a:ext>
             </a:extLst>
           </p:cNvPr>
@@ -5491,7 +5491,7 @@
           <p:cNvPr id="8" name="Rectangle 7">
             <a:extLst>
               <a:ext uri="{FF2B5EF4-FFF2-40B4-BE49-F238E27FC236}">
-                <a16:creationId xmlns:a16="http://schemas.microsoft.com/office/drawing/2014/main" id="{38EE03F8-CB02-4FC0-BF1C-E60777C8E878}"/>
+                <a16:creationId xmlns:a16="http://schemas.microsoft.com/office/drawing/2014/main" id="{374C7C23-8ACE-4593-8E88-4B84F01E1AA8}"/>
               </a:ext>
             </a:extLst>
           </p:cNvPr>
@@ -5553,7 +5553,7 @@
           <p:cNvPr id="9" name="Rectangle 8">
             <a:extLst>
               <a:ext uri="{FF2B5EF4-FFF2-40B4-BE49-F238E27FC236}">
-                <a16:creationId xmlns:a16="http://schemas.microsoft.com/office/drawing/2014/main" id="{E286C46E-33B1-496C-B05A-81463383D851}"/>
+                <a16:creationId xmlns:a16="http://schemas.microsoft.com/office/drawing/2014/main" id="{3741104D-7D00-465B-85E7-C3DDF819D63D}"/>
               </a:ext>
             </a:extLst>
           </p:cNvPr>
@@ -5615,7 +5615,7 @@
           <p:cNvPr id="10" name="Rectangle 9">
             <a:extLst>
               <a:ext uri="{FF2B5EF4-FFF2-40B4-BE49-F238E27FC236}">
-                <a16:creationId xmlns:a16="http://schemas.microsoft.com/office/drawing/2014/main" id="{D0583CB0-6785-49B1-8680-A36EF643C289}"/>
+                <a16:creationId xmlns:a16="http://schemas.microsoft.com/office/drawing/2014/main" id="{FE288249-DA5A-4385-915D-F5DA44C3AE69}"/>
               </a:ext>
             </a:extLst>
           </p:cNvPr>
@@ -5677,7 +5677,7 @@
           <p:cNvPr id="11" name="Rectangle 10">
             <a:extLst>
               <a:ext uri="{FF2B5EF4-FFF2-40B4-BE49-F238E27FC236}">
-                <a16:creationId xmlns:a16="http://schemas.microsoft.com/office/drawing/2014/main" id="{DBF08C87-6BE3-4374-BACD-DF32E5F5D792}"/>
+                <a16:creationId xmlns:a16="http://schemas.microsoft.com/office/drawing/2014/main" id="{DAEF3C9A-2257-4FE9-9CAA-E47101C914B3}"/>
               </a:ext>
             </a:extLst>
           </p:cNvPr>
@@ -5739,7 +5739,7 @@
           <p:cNvPr id="12" name="Rectangle 11">
             <a:extLst>
               <a:ext uri="{FF2B5EF4-FFF2-40B4-BE49-F238E27FC236}">
-                <a16:creationId xmlns:a16="http://schemas.microsoft.com/office/drawing/2014/main" id="{BA70D6CC-5484-45FF-BB02-489EBC9EAEA5}"/>
+                <a16:creationId xmlns:a16="http://schemas.microsoft.com/office/drawing/2014/main" id="{428484D3-C05A-401B-BDB9-B639D8082FE3}"/>
               </a:ext>
             </a:extLst>
           </p:cNvPr>
@@ -5801,7 +5801,7 @@
           <p:cNvPr id="13" name="Rectangle 12">
             <a:extLst>
               <a:ext uri="{FF2B5EF4-FFF2-40B4-BE49-F238E27FC236}">
-                <a16:creationId xmlns:a16="http://schemas.microsoft.com/office/drawing/2014/main" id="{3612820F-5947-4591-A2B1-BD19480CA3BF}"/>
+                <a16:creationId xmlns:a16="http://schemas.microsoft.com/office/drawing/2014/main" id="{D0CCC9AF-8699-4955-AF35-2FDA70E3BAA3}"/>
               </a:ext>
             </a:extLst>
           </p:cNvPr>
@@ -5863,7 +5863,7 @@
           <p:cNvPr id="14" name="Rectangle 13">
             <a:extLst>
               <a:ext uri="{FF2B5EF4-FFF2-40B4-BE49-F238E27FC236}">
-                <a16:creationId xmlns:a16="http://schemas.microsoft.com/office/drawing/2014/main" id="{508C2749-4EF3-4BD8-957D-3654DA28EA64}"/>
+                <a16:creationId xmlns:a16="http://schemas.microsoft.com/office/drawing/2014/main" id="{4EC4A6EF-F44F-4C04-B121-BDE3FD37CAF5}"/>
               </a:ext>
             </a:extLst>
           </p:cNvPr>
@@ -5925,7 +5925,7 @@
           <p:cNvPr id="15" name="Rectangle 14">
             <a:extLst>
               <a:ext uri="{FF2B5EF4-FFF2-40B4-BE49-F238E27FC236}">
-                <a16:creationId xmlns:a16="http://schemas.microsoft.com/office/drawing/2014/main" id="{A3CE11F1-987A-4BFE-B4AA-0FDE11CC43C0}"/>
+                <a16:creationId xmlns:a16="http://schemas.microsoft.com/office/drawing/2014/main" id="{CBF04E3B-BC18-4A89-B916-F2A742761CED}"/>
               </a:ext>
             </a:extLst>
           </p:cNvPr>
@@ -6003,7 +6003,7 @@
           <p:cNvPr id="17" name="Rectangle: Rounded Corners 16">
             <a:extLst>
               <a:ext uri="{FF2B5EF4-FFF2-40B4-BE49-F238E27FC236}">
-                <a16:creationId xmlns:a16="http://schemas.microsoft.com/office/drawing/2014/main" id="{443B9727-424B-4777-8A2A-1CBB1618BD7F}"/>
+                <a16:creationId xmlns:a16="http://schemas.microsoft.com/office/drawing/2014/main" id="{69583084-FAE4-4199-B1AB-051ACD7558A3}"/>
               </a:ext>
             </a:extLst>
           </p:cNvPr>
@@ -6036,7 +6036,7 @@
           <p:cNvPr id="18" name="Rectangle 17">
             <a:extLst>
               <a:ext uri="{FF2B5EF4-FFF2-40B4-BE49-F238E27FC236}">
-                <a16:creationId xmlns:a16="http://schemas.microsoft.com/office/drawing/2014/main" id="{BA73E4BE-EBCE-4616-A042-D1D16CEE15FF}"/>
+                <a16:creationId xmlns:a16="http://schemas.microsoft.com/office/drawing/2014/main" id="{1A79ED2D-B57C-47BC-B3B2-3B7048BFC2D9}"/>
               </a:ext>
             </a:extLst>
           </p:cNvPr>
@@ -6098,7 +6098,7 @@
           <p:cNvPr id="19" name="Rectangle 18">
             <a:extLst>
               <a:ext uri="{FF2B5EF4-FFF2-40B4-BE49-F238E27FC236}">
-                <a16:creationId xmlns:a16="http://schemas.microsoft.com/office/drawing/2014/main" id="{DD99EE8F-2FDB-4156-995A-F37FB9F5E338}"/>
+                <a16:creationId xmlns:a16="http://schemas.microsoft.com/office/drawing/2014/main" id="{B20F606D-AA2C-4027-87AD-BFBFEE53EF0D}"/>
               </a:ext>
             </a:extLst>
           </p:cNvPr>
@@ -6160,7 +6160,7 @@
           <p:cNvPr id="20" name="Rectangle 19">
             <a:extLst>
               <a:ext uri="{FF2B5EF4-FFF2-40B4-BE49-F238E27FC236}">
-                <a16:creationId xmlns:a16="http://schemas.microsoft.com/office/drawing/2014/main" id="{D3AC6FBD-36A7-4DC3-B8F9-6D8BE64B00E9}"/>
+                <a16:creationId xmlns:a16="http://schemas.microsoft.com/office/drawing/2014/main" id="{C04B96A5-8274-40D4-BFDC-B0C98A5747BC}"/>
               </a:ext>
             </a:extLst>
           </p:cNvPr>
@@ -6222,7 +6222,7 @@
           <p:cNvPr id="21" name="Rectangle 20">
             <a:extLst>
               <a:ext uri="{FF2B5EF4-FFF2-40B4-BE49-F238E27FC236}">
-                <a16:creationId xmlns:a16="http://schemas.microsoft.com/office/drawing/2014/main" id="{44992C95-9D96-43BA-A211-D55E0DDD3029}"/>
+                <a16:creationId xmlns:a16="http://schemas.microsoft.com/office/drawing/2014/main" id="{8CFACACE-5830-463E-8B0D-7CE4AFFDF4E5}"/>
               </a:ext>
             </a:extLst>
           </p:cNvPr>
@@ -6284,7 +6284,7 @@
           <p:cNvPr id="22" name="Rectangle 21">
             <a:extLst>
               <a:ext uri="{FF2B5EF4-FFF2-40B4-BE49-F238E27FC236}">
-                <a16:creationId xmlns:a16="http://schemas.microsoft.com/office/drawing/2014/main" id="{2BC6F9FA-A473-4E88-88F5-5BD4B3C37737}"/>
+                <a16:creationId xmlns:a16="http://schemas.microsoft.com/office/drawing/2014/main" id="{B430C5FE-316A-4DD8-8E2A-3DC6FDF13B62}"/>
               </a:ext>
             </a:extLst>
           </p:cNvPr>
@@ -6315,7 +6315,7 @@
           <p:cNvPr id="23" name="Rectangle 22">
             <a:extLst>
               <a:ext uri="{FF2B5EF4-FFF2-40B4-BE49-F238E27FC236}">
-                <a16:creationId xmlns:a16="http://schemas.microsoft.com/office/drawing/2014/main" id="{69E289A3-CB37-47E7-87B8-A919EE3BCF17}"/>
+                <a16:creationId xmlns:a16="http://schemas.microsoft.com/office/drawing/2014/main" id="{80FB91F5-630C-48BD-9CAF-113775EE9F72}"/>
               </a:ext>
             </a:extLst>
           </p:cNvPr>
@@ -6377,7 +6377,7 @@
           <p:cNvPr id="24" name="Rectangle 23">
             <a:extLst>
               <a:ext uri="{FF2B5EF4-FFF2-40B4-BE49-F238E27FC236}">
-                <a16:creationId xmlns:a16="http://schemas.microsoft.com/office/drawing/2014/main" id="{E7286B72-0F2F-4180-9B0E-0EA66C0CE2D0}"/>
+                <a16:creationId xmlns:a16="http://schemas.microsoft.com/office/drawing/2014/main" id="{4DB04EAD-8659-45C8-BE6E-119E01C09924}"/>
               </a:ext>
             </a:extLst>
           </p:cNvPr>
@@ -6437,7 +6437,7 @@
     </p:spTree>
     <p:extLst>
       <p:ext uri="{BB962C8B-B14F-4D97-AF65-F5344CB8AC3E}">
-        <p14:creationId xmlns:p14="http://schemas.microsoft.com/office/powerpoint/2010/main" val="300995051"/>
+        <p14:creationId xmlns:p14="http://schemas.microsoft.com/office/powerpoint/2010/main" val="857754406"/>
       </p:ext>
     </p:extLst>
   </p:cSld>
@@ -6478,7 +6478,7 @@
             <a:hlinkClick r:id="rId3"/>
             <a:extLst>
               <a:ext uri="{FF2B5EF4-FFF2-40B4-BE49-F238E27FC236}">
-                <a16:creationId xmlns:a16="http://schemas.microsoft.com/office/drawing/2014/main" id="{36AC4AE6-408E-42DB-BDC7-9B9FF9F98CF1}"/>
+                <a16:creationId xmlns:a16="http://schemas.microsoft.com/office/drawing/2014/main" id="{A89FB20B-46C3-421E-9280-296DB93AABF6}"/>
               </a:ext>
             </a:extLst>
           </p:cNvPr>
@@ -6553,7 +6553,7 @@
             <a:hlinkClick r:id="rId4"/>
             <a:extLst>
               <a:ext uri="{FF2B5EF4-FFF2-40B4-BE49-F238E27FC236}">
-                <a16:creationId xmlns:a16="http://schemas.microsoft.com/office/drawing/2014/main" id="{22D23EFE-C364-4E0E-BC19-090F4F0412E7}"/>
+                <a16:creationId xmlns:a16="http://schemas.microsoft.com/office/drawing/2014/main" id="{040F4E76-B3A3-46DA-A464-84E6C2CA832C}"/>
               </a:ext>
             </a:extLst>
           </p:cNvPr>
@@ -6627,7 +6627,7 @@
           <p:cNvPr id="3" name="Rectangle 2">
             <a:extLst>
               <a:ext uri="{FF2B5EF4-FFF2-40B4-BE49-F238E27FC236}">
-                <a16:creationId xmlns:a16="http://schemas.microsoft.com/office/drawing/2014/main" id="{DBC8A1BD-85E7-438B-80A0-9B27520241FF}"/>
+                <a16:creationId xmlns:a16="http://schemas.microsoft.com/office/drawing/2014/main" id="{D2F23E77-32CE-4538-A12A-097ABE65187A}"/>
               </a:ext>
             </a:extLst>
           </p:cNvPr>
@@ -6689,7 +6689,7 @@
           <p:cNvPr id="4" name="Rectangle 3">
             <a:extLst>
               <a:ext uri="{FF2B5EF4-FFF2-40B4-BE49-F238E27FC236}">
-                <a16:creationId xmlns:a16="http://schemas.microsoft.com/office/drawing/2014/main" id="{5C9753CC-A838-4E11-96CE-600792D80C05}"/>
+                <a16:creationId xmlns:a16="http://schemas.microsoft.com/office/drawing/2014/main" id="{5BC133A5-1B37-4EEF-A93E-CC4D3FFF3135}"/>
               </a:ext>
             </a:extLst>
           </p:cNvPr>
@@ -6751,7 +6751,7 @@
           <p:cNvPr id="5" name="Rectangle 4">
             <a:extLst>
               <a:ext uri="{FF2B5EF4-FFF2-40B4-BE49-F238E27FC236}">
-                <a16:creationId xmlns:a16="http://schemas.microsoft.com/office/drawing/2014/main" id="{14E008D4-B66B-4E20-B70F-D5677C453D42}"/>
+                <a16:creationId xmlns:a16="http://schemas.microsoft.com/office/drawing/2014/main" id="{B734D670-CCA0-4A0C-A236-EC40EEAC5BEC}"/>
               </a:ext>
             </a:extLst>
           </p:cNvPr>
@@ -6813,7 +6813,7 @@
           <p:cNvPr id="6" name="Rectangle 5">
             <a:extLst>
               <a:ext uri="{FF2B5EF4-FFF2-40B4-BE49-F238E27FC236}">
-                <a16:creationId xmlns:a16="http://schemas.microsoft.com/office/drawing/2014/main" id="{9AAE9BEF-8414-4D95-8740-2208582E14FD}"/>
+                <a16:creationId xmlns:a16="http://schemas.microsoft.com/office/drawing/2014/main" id="{E0C9C615-06A9-4367-8EE3-8DFDE6FE9665}"/>
               </a:ext>
             </a:extLst>
           </p:cNvPr>
@@ -6875,7 +6875,7 @@
           <p:cNvPr id="7" name="Rectangle 6">
             <a:extLst>
               <a:ext uri="{FF2B5EF4-FFF2-40B4-BE49-F238E27FC236}">
-                <a16:creationId xmlns:a16="http://schemas.microsoft.com/office/drawing/2014/main" id="{44CB5994-3D1A-4BE2-AF7F-1E365D9A7F05}"/>
+                <a16:creationId xmlns:a16="http://schemas.microsoft.com/office/drawing/2014/main" id="{B5B65887-8569-45C7-B2E7-CB45C48791FE}"/>
               </a:ext>
             </a:extLst>
           </p:cNvPr>
@@ -6937,7 +6937,7 @@
           <p:cNvPr id="8" name="Rectangle 7">
             <a:extLst>
               <a:ext uri="{FF2B5EF4-FFF2-40B4-BE49-F238E27FC236}">
-                <a16:creationId xmlns:a16="http://schemas.microsoft.com/office/drawing/2014/main" id="{804378E6-99D5-4249-8ACF-F253FC39DCAF}"/>
+                <a16:creationId xmlns:a16="http://schemas.microsoft.com/office/drawing/2014/main" id="{E14FDAFB-8004-4FEE-8145-F8F1C70D9E1C}"/>
               </a:ext>
             </a:extLst>
           </p:cNvPr>
@@ -6999,7 +6999,7 @@
           <p:cNvPr id="9" name="Rectangle 8">
             <a:extLst>
               <a:ext uri="{FF2B5EF4-FFF2-40B4-BE49-F238E27FC236}">
-                <a16:creationId xmlns:a16="http://schemas.microsoft.com/office/drawing/2014/main" id="{49EA253D-5624-43E4-AE43-AAD0117457E4}"/>
+                <a16:creationId xmlns:a16="http://schemas.microsoft.com/office/drawing/2014/main" id="{CEFF670F-CC2A-4BCD-90D3-6D9A5B1A8264}"/>
               </a:ext>
             </a:extLst>
           </p:cNvPr>
@@ -7061,7 +7061,7 @@
           <p:cNvPr id="10" name="Rectangle 9">
             <a:extLst>
               <a:ext uri="{FF2B5EF4-FFF2-40B4-BE49-F238E27FC236}">
-                <a16:creationId xmlns:a16="http://schemas.microsoft.com/office/drawing/2014/main" id="{D380C7F2-6F8C-40AB-A3EF-003022DCCFC9}"/>
+                <a16:creationId xmlns:a16="http://schemas.microsoft.com/office/drawing/2014/main" id="{9D579DFE-DFD6-419A-9DCA-977FFF64F747}"/>
               </a:ext>
             </a:extLst>
           </p:cNvPr>
@@ -7123,7 +7123,7 @@
           <p:cNvPr id="11" name="Rectangle 10">
             <a:extLst>
               <a:ext uri="{FF2B5EF4-FFF2-40B4-BE49-F238E27FC236}">
-                <a16:creationId xmlns:a16="http://schemas.microsoft.com/office/drawing/2014/main" id="{C04A377D-ACE3-4FD1-84EE-A87288913DDC}"/>
+                <a16:creationId xmlns:a16="http://schemas.microsoft.com/office/drawing/2014/main" id="{49D9514D-7BD1-4C73-AE97-9D2CAF1937D0}"/>
               </a:ext>
             </a:extLst>
           </p:cNvPr>
@@ -7154,7 +7154,7 @@
           <p:cNvPr id="12" name="Rectangle 11">
             <a:extLst>
               <a:ext uri="{FF2B5EF4-FFF2-40B4-BE49-F238E27FC236}">
-                <a16:creationId xmlns:a16="http://schemas.microsoft.com/office/drawing/2014/main" id="{7F958384-3990-4AC5-BB82-F0293F50C26C}"/>
+                <a16:creationId xmlns:a16="http://schemas.microsoft.com/office/drawing/2014/main" id="{ACF2EC56-FA13-487C-9BC4-77E69D27D976}"/>
               </a:ext>
             </a:extLst>
           </p:cNvPr>
@@ -7216,7 +7216,7 @@
           <p:cNvPr id="13" name="Rectangle 12">
             <a:extLst>
               <a:ext uri="{FF2B5EF4-FFF2-40B4-BE49-F238E27FC236}">
-                <a16:creationId xmlns:a16="http://schemas.microsoft.com/office/drawing/2014/main" id="{F6E91B65-7234-4522-83DF-6E07990ECB10}"/>
+                <a16:creationId xmlns:a16="http://schemas.microsoft.com/office/drawing/2014/main" id="{2DBF94C8-2D13-4F73-A159-BD005CF21093}"/>
               </a:ext>
             </a:extLst>
           </p:cNvPr>
@@ -7341,7 +7341,7 @@
           <p:cNvPr id="14" name="Rectangle 13">
             <a:extLst>
               <a:ext uri="{FF2B5EF4-FFF2-40B4-BE49-F238E27FC236}">
-                <a16:creationId xmlns:a16="http://schemas.microsoft.com/office/drawing/2014/main" id="{DB46C1FB-20A8-44DB-AAFB-34BDD17D9DD2}"/>
+                <a16:creationId xmlns:a16="http://schemas.microsoft.com/office/drawing/2014/main" id="{2E94DC8F-D614-4878-9FA5-4B32BB48878D}"/>
               </a:ext>
             </a:extLst>
           </p:cNvPr>
@@ -7403,7 +7403,7 @@
           <p:cNvPr id="15" name="Rectangle 14">
             <a:extLst>
               <a:ext uri="{FF2B5EF4-FFF2-40B4-BE49-F238E27FC236}">
-                <a16:creationId xmlns:a16="http://schemas.microsoft.com/office/drawing/2014/main" id="{29373A3C-634D-4CA5-A2AD-DC8D06377822}"/>
+                <a16:creationId xmlns:a16="http://schemas.microsoft.com/office/drawing/2014/main" id="{52CC0FA6-5DF8-4A7D-9AB9-F6DE4CDF8E15}"/>
               </a:ext>
             </a:extLst>
           </p:cNvPr>
@@ -7528,7 +7528,7 @@
           <p:cNvPr id="16" name="Rectangle: Rounded Corners 15">
             <a:extLst>
               <a:ext uri="{FF2B5EF4-FFF2-40B4-BE49-F238E27FC236}">
-                <a16:creationId xmlns:a16="http://schemas.microsoft.com/office/drawing/2014/main" id="{B327ED4A-E8C3-4A16-A528-68B0ECD8B1FF}"/>
+                <a16:creationId xmlns:a16="http://schemas.microsoft.com/office/drawing/2014/main" id="{96A48B1B-B7CB-452F-9F0C-83455961458C}"/>
               </a:ext>
             </a:extLst>
           </p:cNvPr>
@@ -7561,7 +7561,7 @@
           <p:cNvPr id="17" name="Rectangle 16">
             <a:extLst>
               <a:ext uri="{FF2B5EF4-FFF2-40B4-BE49-F238E27FC236}">
-                <a16:creationId xmlns:a16="http://schemas.microsoft.com/office/drawing/2014/main" id="{A16CAD56-3B67-4C9D-97BA-FC40845DA8BC}"/>
+                <a16:creationId xmlns:a16="http://schemas.microsoft.com/office/drawing/2014/main" id="{353CE962-A969-4AA6-90FB-AB84F24AD49E}"/>
               </a:ext>
             </a:extLst>
           </p:cNvPr>
@@ -7623,7 +7623,7 @@
           <p:cNvPr id="18" name="Rectangle 17">
             <a:extLst>
               <a:ext uri="{FF2B5EF4-FFF2-40B4-BE49-F238E27FC236}">
-                <a16:creationId xmlns:a16="http://schemas.microsoft.com/office/drawing/2014/main" id="{9504120A-E218-41FB-AB5D-AC41588C1D0F}"/>
+                <a16:creationId xmlns:a16="http://schemas.microsoft.com/office/drawing/2014/main" id="{5F61757C-BDE3-4D2F-8BA7-72C09E6CB86B}"/>
               </a:ext>
             </a:extLst>
           </p:cNvPr>
@@ -7654,7 +7654,7 @@
           <p:cNvPr id="19" name="Rectangle 18">
             <a:extLst>
               <a:ext uri="{FF2B5EF4-FFF2-40B4-BE49-F238E27FC236}">
-                <a16:creationId xmlns:a16="http://schemas.microsoft.com/office/drawing/2014/main" id="{47D3A1F3-944C-4D66-8E27-78ABE84F1AC3}"/>
+                <a16:creationId xmlns:a16="http://schemas.microsoft.com/office/drawing/2014/main" id="{B0456B54-AA01-4698-AB69-5BC69068457A}"/>
               </a:ext>
             </a:extLst>
           </p:cNvPr>
@@ -7716,7 +7716,7 @@
           <p:cNvPr id="20" name="Rectangle 19">
             <a:extLst>
               <a:ext uri="{FF2B5EF4-FFF2-40B4-BE49-F238E27FC236}">
-                <a16:creationId xmlns:a16="http://schemas.microsoft.com/office/drawing/2014/main" id="{71C6497C-8380-41D8-BA0D-281FDB2C6FBB}"/>
+                <a16:creationId xmlns:a16="http://schemas.microsoft.com/office/drawing/2014/main" id="{4CC1F818-1899-46AA-A127-E9FC17B228B9}"/>
               </a:ext>
             </a:extLst>
           </p:cNvPr>
@@ -7776,7 +7776,7 @@
     </p:spTree>
     <p:extLst>
       <p:ext uri="{BB962C8B-B14F-4D97-AF65-F5344CB8AC3E}">
-        <p14:creationId xmlns:p14="http://schemas.microsoft.com/office/powerpoint/2010/main" val="181387353"/>
+        <p14:creationId xmlns:p14="http://schemas.microsoft.com/office/powerpoint/2010/main" val="585532205"/>
       </p:ext>
     </p:extLst>
   </p:cSld>
@@ -7817,7 +7817,7 @@
             <a:hlinkClick r:id="rId3"/>
             <a:extLst>
               <a:ext uri="{FF2B5EF4-FFF2-40B4-BE49-F238E27FC236}">
-                <a16:creationId xmlns:a16="http://schemas.microsoft.com/office/drawing/2014/main" id="{70A6CFFD-B977-44D5-9617-CA4B87865C24}"/>
+                <a16:creationId xmlns:a16="http://schemas.microsoft.com/office/drawing/2014/main" id="{D3E75171-47D6-4B76-9018-DA0B1230BE09}"/>
               </a:ext>
             </a:extLst>
           </p:cNvPr>
@@ -7892,7 +7892,7 @@
             <a:hlinkClick r:id="rId4"/>
             <a:extLst>
               <a:ext uri="{FF2B5EF4-FFF2-40B4-BE49-F238E27FC236}">
-                <a16:creationId xmlns:a16="http://schemas.microsoft.com/office/drawing/2014/main" id="{1146DC48-DF4B-48B1-9B9F-F4002DB6A584}"/>
+                <a16:creationId xmlns:a16="http://schemas.microsoft.com/office/drawing/2014/main" id="{1532AB16-F757-4BB5-8534-E287EA6358C3}"/>
               </a:ext>
             </a:extLst>
           </p:cNvPr>
@@ -7966,7 +7966,7 @@
           <p:cNvPr id="3" name="Rectangle 2">
             <a:extLst>
               <a:ext uri="{FF2B5EF4-FFF2-40B4-BE49-F238E27FC236}">
-                <a16:creationId xmlns:a16="http://schemas.microsoft.com/office/drawing/2014/main" id="{7162EC84-A673-4521-BE16-617122379F8A}"/>
+                <a16:creationId xmlns:a16="http://schemas.microsoft.com/office/drawing/2014/main" id="{47B8A12E-E1D6-4C10-963E-72C9743E469E}"/>
               </a:ext>
             </a:extLst>
           </p:cNvPr>
@@ -8028,7 +8028,7 @@
           <p:cNvPr id="4" name="Rectangle 3">
             <a:extLst>
               <a:ext uri="{FF2B5EF4-FFF2-40B4-BE49-F238E27FC236}">
-                <a16:creationId xmlns:a16="http://schemas.microsoft.com/office/drawing/2014/main" id="{81B9190E-4B4B-4CFF-A465-3A431E7A07AF}"/>
+                <a16:creationId xmlns:a16="http://schemas.microsoft.com/office/drawing/2014/main" id="{B1A193AB-9B7C-468B-953E-76BBE0F02C00}"/>
               </a:ext>
             </a:extLst>
           </p:cNvPr>
@@ -8090,7 +8090,7 @@
           <p:cNvPr id="5" name="Rectangle: Rounded Corners 4">
             <a:extLst>
               <a:ext uri="{FF2B5EF4-FFF2-40B4-BE49-F238E27FC236}">
-                <a16:creationId xmlns:a16="http://schemas.microsoft.com/office/drawing/2014/main" id="{668ECF18-6BBA-4DD9-A423-554E8C2BF0FB}"/>
+                <a16:creationId xmlns:a16="http://schemas.microsoft.com/office/drawing/2014/main" id="{92CDC280-8D09-44EF-AF5A-85BEE46BCBDF}"/>
               </a:ext>
             </a:extLst>
           </p:cNvPr>
@@ -8123,7 +8123,7 @@
           <p:cNvPr id="6" name="Rectangle 5">
             <a:extLst>
               <a:ext uri="{FF2B5EF4-FFF2-40B4-BE49-F238E27FC236}">
-                <a16:creationId xmlns:a16="http://schemas.microsoft.com/office/drawing/2014/main" id="{1B854C3B-9DBD-4BA0-8273-5B2FB2138E49}"/>
+                <a16:creationId xmlns:a16="http://schemas.microsoft.com/office/drawing/2014/main" id="{7191782F-6595-4B21-8AA4-300064A0820F}"/>
               </a:ext>
             </a:extLst>
           </p:cNvPr>
@@ -8185,7 +8185,7 @@
           <p:cNvPr id="7" name="Rectangle 6">
             <a:extLst>
               <a:ext uri="{FF2B5EF4-FFF2-40B4-BE49-F238E27FC236}">
-                <a16:creationId xmlns:a16="http://schemas.microsoft.com/office/drawing/2014/main" id="{E539AEA9-911F-4BA9-999D-572187A280E5}"/>
+                <a16:creationId xmlns:a16="http://schemas.microsoft.com/office/drawing/2014/main" id="{4C29827B-F596-4233-B4CB-5DCC112D6439}"/>
               </a:ext>
             </a:extLst>
           </p:cNvPr>
@@ -8247,7 +8247,7 @@
           <p:cNvPr id="8" name="Rectangle 7">
             <a:extLst>
               <a:ext uri="{FF2B5EF4-FFF2-40B4-BE49-F238E27FC236}">
-                <a16:creationId xmlns:a16="http://schemas.microsoft.com/office/drawing/2014/main" id="{B11B0046-999B-49D4-B00E-3CC8747C8D07}"/>
+                <a16:creationId xmlns:a16="http://schemas.microsoft.com/office/drawing/2014/main" id="{0B98EE00-7362-4414-8BD3-C477231AC3DC}"/>
               </a:ext>
             </a:extLst>
           </p:cNvPr>
@@ -8309,7 +8309,7 @@
           <p:cNvPr id="9" name="Rectangle 8">
             <a:extLst>
               <a:ext uri="{FF2B5EF4-FFF2-40B4-BE49-F238E27FC236}">
-                <a16:creationId xmlns:a16="http://schemas.microsoft.com/office/drawing/2014/main" id="{FC519487-E103-48A6-AAAF-4CE388F5CAAB}"/>
+                <a16:creationId xmlns:a16="http://schemas.microsoft.com/office/drawing/2014/main" id="{334F8D1A-B3E1-455D-9BB3-6FF1393CC127}"/>
               </a:ext>
             </a:extLst>
           </p:cNvPr>
@@ -8371,7 +8371,7 @@
           <p:cNvPr id="10" name="Rectangle 9">
             <a:extLst>
               <a:ext uri="{FF2B5EF4-FFF2-40B4-BE49-F238E27FC236}">
-                <a16:creationId xmlns:a16="http://schemas.microsoft.com/office/drawing/2014/main" id="{1C615A2A-6A16-43C7-9176-A585C34EAB97}"/>
+                <a16:creationId xmlns:a16="http://schemas.microsoft.com/office/drawing/2014/main" id="{A885F586-B7FB-44DB-B747-001C7841255A}"/>
               </a:ext>
             </a:extLst>
           </p:cNvPr>
@@ -8433,7 +8433,7 @@
           <p:cNvPr id="11" name="Rectangle 10">
             <a:extLst>
               <a:ext uri="{FF2B5EF4-FFF2-40B4-BE49-F238E27FC236}">
-                <a16:creationId xmlns:a16="http://schemas.microsoft.com/office/drawing/2014/main" id="{9869F757-7942-41AE-8873-FA718164CDC1}"/>
+                <a16:creationId xmlns:a16="http://schemas.microsoft.com/office/drawing/2014/main" id="{D5266BED-6E31-4227-8E05-FD144FADBE68}"/>
               </a:ext>
             </a:extLst>
           </p:cNvPr>
@@ -8495,7 +8495,7 @@
           <p:cNvPr id="12" name="Rectangle 11">
             <a:extLst>
               <a:ext uri="{FF2B5EF4-FFF2-40B4-BE49-F238E27FC236}">
-                <a16:creationId xmlns:a16="http://schemas.microsoft.com/office/drawing/2014/main" id="{D9A77534-9358-4AEA-A52C-680B98B6D65A}"/>
+                <a16:creationId xmlns:a16="http://schemas.microsoft.com/office/drawing/2014/main" id="{DDA9A928-6AB7-4F3B-A835-537DE428AC3D}"/>
               </a:ext>
             </a:extLst>
           </p:cNvPr>
@@ -8557,7 +8557,7 @@
           <p:cNvPr id="13" name="Rectangle 12">
             <a:extLst>
               <a:ext uri="{FF2B5EF4-FFF2-40B4-BE49-F238E27FC236}">
-                <a16:creationId xmlns:a16="http://schemas.microsoft.com/office/drawing/2014/main" id="{5A187AAC-6FC3-4C99-A494-AD7B80368D42}"/>
+                <a16:creationId xmlns:a16="http://schemas.microsoft.com/office/drawing/2014/main" id="{815BFEF6-DB29-4493-9689-4444D57EE185}"/>
               </a:ext>
             </a:extLst>
           </p:cNvPr>
@@ -8619,7 +8619,7 @@
           <p:cNvPr id="14" name="Rectangle 13">
             <a:extLst>
               <a:ext uri="{FF2B5EF4-FFF2-40B4-BE49-F238E27FC236}">
-                <a16:creationId xmlns:a16="http://schemas.microsoft.com/office/drawing/2014/main" id="{9DECC530-A383-4B93-ABD5-D29A1D527D07}"/>
+                <a16:creationId xmlns:a16="http://schemas.microsoft.com/office/drawing/2014/main" id="{5FF28FAC-AA63-4EA6-8183-34BD8AC4B192}"/>
               </a:ext>
             </a:extLst>
           </p:cNvPr>
@@ -8681,7 +8681,7 @@
           <p:cNvPr id="15" name="Rectangle 14">
             <a:extLst>
               <a:ext uri="{FF2B5EF4-FFF2-40B4-BE49-F238E27FC236}">
-                <a16:creationId xmlns:a16="http://schemas.microsoft.com/office/drawing/2014/main" id="{9F03ADC7-CE55-4E58-90F1-925D7AB6B4AC}"/>
+                <a16:creationId xmlns:a16="http://schemas.microsoft.com/office/drawing/2014/main" id="{BD111C6A-F7CB-4702-8B47-30E8C4FA12A6}"/>
               </a:ext>
             </a:extLst>
           </p:cNvPr>
@@ -8743,7 +8743,7 @@
           <p:cNvPr id="16" name="Rectangle 15">
             <a:extLst>
               <a:ext uri="{FF2B5EF4-FFF2-40B4-BE49-F238E27FC236}">
-                <a16:creationId xmlns:a16="http://schemas.microsoft.com/office/drawing/2014/main" id="{0CFAF3F5-BF09-44ED-A9CB-EB80BBE10401}"/>
+                <a16:creationId xmlns:a16="http://schemas.microsoft.com/office/drawing/2014/main" id="{ED1F705C-0837-4CCC-B43A-DDCBEA7ADB7E}"/>
               </a:ext>
             </a:extLst>
           </p:cNvPr>
@@ -8805,7 +8805,7 @@
           <p:cNvPr id="17" name="Rectangle: Rounded Corners 16">
             <a:extLst>
               <a:ext uri="{FF2B5EF4-FFF2-40B4-BE49-F238E27FC236}">
-                <a16:creationId xmlns:a16="http://schemas.microsoft.com/office/drawing/2014/main" id="{03C92DA8-BC00-413B-9499-C15C3D219ED3}"/>
+                <a16:creationId xmlns:a16="http://schemas.microsoft.com/office/drawing/2014/main" id="{420CEED0-6DE7-4DD5-B0B8-FBBCCE72766A}"/>
               </a:ext>
             </a:extLst>
           </p:cNvPr>
@@ -8838,7 +8838,7 @@
           <p:cNvPr id="18" name="Rectangle 17">
             <a:extLst>
               <a:ext uri="{FF2B5EF4-FFF2-40B4-BE49-F238E27FC236}">
-                <a16:creationId xmlns:a16="http://schemas.microsoft.com/office/drawing/2014/main" id="{464B1D29-B1E3-4C44-9C12-3996B4AC080E}"/>
+                <a16:creationId xmlns:a16="http://schemas.microsoft.com/office/drawing/2014/main" id="{A4953816-BBE9-4DCD-A1C7-4CE6247CC2C3}"/>
               </a:ext>
             </a:extLst>
           </p:cNvPr>
@@ -8900,7 +8900,7 @@
           <p:cNvPr id="19" name="Rectangle 18">
             <a:extLst>
               <a:ext uri="{FF2B5EF4-FFF2-40B4-BE49-F238E27FC236}">
-                <a16:creationId xmlns:a16="http://schemas.microsoft.com/office/drawing/2014/main" id="{AE8C9EC9-0A0B-47FF-A1AA-09C308166E8D}"/>
+                <a16:creationId xmlns:a16="http://schemas.microsoft.com/office/drawing/2014/main" id="{9F138A7F-3A4A-4470-9FE7-12618E143BCB}"/>
               </a:ext>
             </a:extLst>
           </p:cNvPr>
@@ -8962,7 +8962,7 @@
           <p:cNvPr id="20" name="Rectangle 19">
             <a:extLst>
               <a:ext uri="{FF2B5EF4-FFF2-40B4-BE49-F238E27FC236}">
-                <a16:creationId xmlns:a16="http://schemas.microsoft.com/office/drawing/2014/main" id="{E594D0C1-58B7-4F16-B5EC-50CBDAD5CF3F}"/>
+                <a16:creationId xmlns:a16="http://schemas.microsoft.com/office/drawing/2014/main" id="{A2C3678E-FFF5-41AF-BB49-1A0836E91A76}"/>
               </a:ext>
             </a:extLst>
           </p:cNvPr>
@@ -9024,7 +9024,7 @@
           <p:cNvPr id="21" name="Rectangle 20">
             <a:extLst>
               <a:ext uri="{FF2B5EF4-FFF2-40B4-BE49-F238E27FC236}">
-                <a16:creationId xmlns:a16="http://schemas.microsoft.com/office/drawing/2014/main" id="{DACD9F13-1BF6-4D80-B8CC-FAA17C5AABD3}"/>
+                <a16:creationId xmlns:a16="http://schemas.microsoft.com/office/drawing/2014/main" id="{326A1CB2-2EA5-4E33-B459-FE2449930D85}"/>
               </a:ext>
             </a:extLst>
           </p:cNvPr>
@@ -9086,7 +9086,7 @@
           <p:cNvPr id="22" name="Rectangle 21">
             <a:extLst>
               <a:ext uri="{FF2B5EF4-FFF2-40B4-BE49-F238E27FC236}">
-                <a16:creationId xmlns:a16="http://schemas.microsoft.com/office/drawing/2014/main" id="{DEADE6B3-9B62-4A74-8659-189E8C58DA11}"/>
+                <a16:creationId xmlns:a16="http://schemas.microsoft.com/office/drawing/2014/main" id="{60BB2822-E604-4F85-9834-A81733DDB8CE}"/>
               </a:ext>
             </a:extLst>
           </p:cNvPr>
@@ -9148,7 +9148,7 @@
           <p:cNvPr id="23" name="Rectangle 22">
             <a:extLst>
               <a:ext uri="{FF2B5EF4-FFF2-40B4-BE49-F238E27FC236}">
-                <a16:creationId xmlns:a16="http://schemas.microsoft.com/office/drawing/2014/main" id="{D3D7BC91-7A79-4F52-B9BF-EE6DDFBB1CBA}"/>
+                <a16:creationId xmlns:a16="http://schemas.microsoft.com/office/drawing/2014/main" id="{107909F8-02B3-4590-9323-B25DEA14F0E9}"/>
               </a:ext>
             </a:extLst>
           </p:cNvPr>
@@ -9210,7 +9210,7 @@
           <p:cNvPr id="24" name="Rectangle 23">
             <a:extLst>
               <a:ext uri="{FF2B5EF4-FFF2-40B4-BE49-F238E27FC236}">
-                <a16:creationId xmlns:a16="http://schemas.microsoft.com/office/drawing/2014/main" id="{547350A9-CA26-42D2-BF82-4D9B2036E380}"/>
+                <a16:creationId xmlns:a16="http://schemas.microsoft.com/office/drawing/2014/main" id="{3406AAF0-8AB7-442F-A6C7-399923A2E481}"/>
               </a:ext>
             </a:extLst>
           </p:cNvPr>
@@ -9272,7 +9272,7 @@
           <p:cNvPr id="25" name="Rectangle 24">
             <a:extLst>
               <a:ext uri="{FF2B5EF4-FFF2-40B4-BE49-F238E27FC236}">
-                <a16:creationId xmlns:a16="http://schemas.microsoft.com/office/drawing/2014/main" id="{FAB66063-A5FE-471C-B81C-743982CA978F}"/>
+                <a16:creationId xmlns:a16="http://schemas.microsoft.com/office/drawing/2014/main" id="{0A73D977-FF5B-4CD3-81B4-36F8EC91D887}"/>
               </a:ext>
             </a:extLst>
           </p:cNvPr>
@@ -9334,7 +9334,7 @@
           <p:cNvPr id="26" name="Rectangle 25">
             <a:extLst>
               <a:ext uri="{FF2B5EF4-FFF2-40B4-BE49-F238E27FC236}">
-                <a16:creationId xmlns:a16="http://schemas.microsoft.com/office/drawing/2014/main" id="{057F86B4-8F76-4CC8-96FF-9C9FC84A4F14}"/>
+                <a16:creationId xmlns:a16="http://schemas.microsoft.com/office/drawing/2014/main" id="{0643F115-8CE9-4459-8D16-CEB18BDC03ED}"/>
               </a:ext>
             </a:extLst>
           </p:cNvPr>
@@ -9396,7 +9396,7 @@
           <p:cNvPr id="27" name="Rectangle 26">
             <a:extLst>
               <a:ext uri="{FF2B5EF4-FFF2-40B4-BE49-F238E27FC236}">
-                <a16:creationId xmlns:a16="http://schemas.microsoft.com/office/drawing/2014/main" id="{7C7825AF-4472-4B7D-8300-4775F33ABBC8}"/>
+                <a16:creationId xmlns:a16="http://schemas.microsoft.com/office/drawing/2014/main" id="{73C28189-0DBA-452F-9568-359582C84B4C}"/>
               </a:ext>
             </a:extLst>
           </p:cNvPr>
@@ -9458,7 +9458,7 @@
           <p:cNvPr id="28" name="Rectangle 27">
             <a:extLst>
               <a:ext uri="{FF2B5EF4-FFF2-40B4-BE49-F238E27FC236}">
-                <a16:creationId xmlns:a16="http://schemas.microsoft.com/office/drawing/2014/main" id="{87A4BF96-2509-4055-906A-3316977CA3F7}"/>
+                <a16:creationId xmlns:a16="http://schemas.microsoft.com/office/drawing/2014/main" id="{8EFDE573-4D6E-4CD8-8B9B-8EE5E59FC51B}"/>
               </a:ext>
             </a:extLst>
           </p:cNvPr>
@@ -9520,7 +9520,7 @@
           <p:cNvPr id="29" name="Rectangle: Rounded Corners 28">
             <a:extLst>
               <a:ext uri="{FF2B5EF4-FFF2-40B4-BE49-F238E27FC236}">
-                <a16:creationId xmlns:a16="http://schemas.microsoft.com/office/drawing/2014/main" id="{9DB2823D-EC15-4B3B-B797-31557195E215}"/>
+                <a16:creationId xmlns:a16="http://schemas.microsoft.com/office/drawing/2014/main" id="{78F8EBC5-50CC-447D-8CA2-52D77CA132F6}"/>
               </a:ext>
             </a:extLst>
           </p:cNvPr>
@@ -9553,7 +9553,7 @@
           <p:cNvPr id="30" name="Rectangle 29">
             <a:extLst>
               <a:ext uri="{FF2B5EF4-FFF2-40B4-BE49-F238E27FC236}">
-                <a16:creationId xmlns:a16="http://schemas.microsoft.com/office/drawing/2014/main" id="{185CC619-7C49-4AED-85DD-089D326CA7B8}"/>
+                <a16:creationId xmlns:a16="http://schemas.microsoft.com/office/drawing/2014/main" id="{C27C6DA9-E7C9-4034-95C8-30DE0A309620}"/>
               </a:ext>
             </a:extLst>
           </p:cNvPr>
@@ -9615,7 +9615,7 @@
           <p:cNvPr id="31" name="Rectangle 30">
             <a:extLst>
               <a:ext uri="{FF2B5EF4-FFF2-40B4-BE49-F238E27FC236}">
-                <a16:creationId xmlns:a16="http://schemas.microsoft.com/office/drawing/2014/main" id="{C5748E5B-AD8E-4B49-88F3-C0E081CBA3A7}"/>
+                <a16:creationId xmlns:a16="http://schemas.microsoft.com/office/drawing/2014/main" id="{7C7585D4-1054-466B-B13D-EDC29DDD34A5}"/>
               </a:ext>
             </a:extLst>
           </p:cNvPr>
@@ -9646,7 +9646,7 @@
           <p:cNvPr id="32" name="Rectangle 31">
             <a:extLst>
               <a:ext uri="{FF2B5EF4-FFF2-40B4-BE49-F238E27FC236}">
-                <a16:creationId xmlns:a16="http://schemas.microsoft.com/office/drawing/2014/main" id="{02845308-899A-4B22-867F-CB4FBDEB2CDB}"/>
+                <a16:creationId xmlns:a16="http://schemas.microsoft.com/office/drawing/2014/main" id="{1B646095-B73D-46FE-BA59-41123059CA83}"/>
               </a:ext>
             </a:extLst>
           </p:cNvPr>
@@ -9708,7 +9708,7 @@
           <p:cNvPr id="33" name="Rectangle 32">
             <a:extLst>
               <a:ext uri="{FF2B5EF4-FFF2-40B4-BE49-F238E27FC236}">
-                <a16:creationId xmlns:a16="http://schemas.microsoft.com/office/drawing/2014/main" id="{A7AEEE77-1466-4F4E-82AA-37A3E31D41EF}"/>
+                <a16:creationId xmlns:a16="http://schemas.microsoft.com/office/drawing/2014/main" id="{73A00DD4-87BF-44AD-8215-63EF3979D0DA}"/>
               </a:ext>
             </a:extLst>
           </p:cNvPr>
@@ -9768,7 +9768,7 @@
     </p:spTree>
     <p:extLst>
       <p:ext uri="{BB962C8B-B14F-4D97-AF65-F5344CB8AC3E}">
-        <p14:creationId xmlns:p14="http://schemas.microsoft.com/office/powerpoint/2010/main" val="1643317236"/>
+        <p14:creationId xmlns:p14="http://schemas.microsoft.com/office/powerpoint/2010/main" val="1438695303"/>
       </p:ext>
     </p:extLst>
   </p:cSld>
@@ -9809,7 +9809,7 @@
             <a:hlinkClick r:id="rId3"/>
             <a:extLst>
               <a:ext uri="{FF2B5EF4-FFF2-40B4-BE49-F238E27FC236}">
-                <a16:creationId xmlns:a16="http://schemas.microsoft.com/office/drawing/2014/main" id="{BCF19579-A9C8-4C3A-8848-601AF17BBEF2}"/>
+                <a16:creationId xmlns:a16="http://schemas.microsoft.com/office/drawing/2014/main" id="{7A259E64-38E5-4474-8DE6-4B0F2E541323}"/>
               </a:ext>
             </a:extLst>
           </p:cNvPr>
@@ -9884,7 +9884,7 @@
             <a:hlinkClick r:id="rId4"/>
             <a:extLst>
               <a:ext uri="{FF2B5EF4-FFF2-40B4-BE49-F238E27FC236}">
-                <a16:creationId xmlns:a16="http://schemas.microsoft.com/office/drawing/2014/main" id="{B2EF4DC6-0CA6-4924-80CF-27D69A1A183B}"/>
+                <a16:creationId xmlns:a16="http://schemas.microsoft.com/office/drawing/2014/main" id="{4A07EC65-2E5E-473E-804B-4310EF6A9319}"/>
               </a:ext>
             </a:extLst>
           </p:cNvPr>
@@ -9958,7 +9958,7 @@
           <p:cNvPr id="3" name="Rectangle 2">
             <a:extLst>
               <a:ext uri="{FF2B5EF4-FFF2-40B4-BE49-F238E27FC236}">
-                <a16:creationId xmlns:a16="http://schemas.microsoft.com/office/drawing/2014/main" id="{C8493178-5CE3-4307-92F2-DE0132798459}"/>
+                <a16:creationId xmlns:a16="http://schemas.microsoft.com/office/drawing/2014/main" id="{5A804DCD-6FA9-4AD3-B847-3517564D4E69}"/>
               </a:ext>
             </a:extLst>
           </p:cNvPr>
@@ -10020,7 +10020,7 @@
           <p:cNvPr id="4" name="Rectangle 3">
             <a:extLst>
               <a:ext uri="{FF2B5EF4-FFF2-40B4-BE49-F238E27FC236}">
-                <a16:creationId xmlns:a16="http://schemas.microsoft.com/office/drawing/2014/main" id="{55FA302E-AB7C-46D6-B299-65C12D2053C8}"/>
+                <a16:creationId xmlns:a16="http://schemas.microsoft.com/office/drawing/2014/main" id="{65D53500-FF89-4D8D-A042-2150663B1B72}"/>
               </a:ext>
             </a:extLst>
           </p:cNvPr>
@@ -10106,7 +10106,7 @@
           <p:cNvPr id="6" name="Rectangle: Rounded Corners 5">
             <a:extLst>
               <a:ext uri="{FF2B5EF4-FFF2-40B4-BE49-F238E27FC236}">
-                <a16:creationId xmlns:a16="http://schemas.microsoft.com/office/drawing/2014/main" id="{717144B4-54D4-4879-AF44-72B55F3C9F99}"/>
+                <a16:creationId xmlns:a16="http://schemas.microsoft.com/office/drawing/2014/main" id="{D71E6FD0-8E24-48AD-82AD-76436F5DB936}"/>
               </a:ext>
             </a:extLst>
           </p:cNvPr>
@@ -10139,7 +10139,7 @@
           <p:cNvPr id="7" name="Rectangle 6">
             <a:extLst>
               <a:ext uri="{FF2B5EF4-FFF2-40B4-BE49-F238E27FC236}">
-                <a16:creationId xmlns:a16="http://schemas.microsoft.com/office/drawing/2014/main" id="{B906977C-D2A3-4035-A50E-5694E5E49F83}"/>
+                <a16:creationId xmlns:a16="http://schemas.microsoft.com/office/drawing/2014/main" id="{13BCCB50-322C-4281-8EA3-8A1F6B39123F}"/>
               </a:ext>
             </a:extLst>
           </p:cNvPr>
@@ -10201,7 +10201,7 @@
           <p:cNvPr id="8" name="Rectangle 7">
             <a:extLst>
               <a:ext uri="{FF2B5EF4-FFF2-40B4-BE49-F238E27FC236}">
-                <a16:creationId xmlns:a16="http://schemas.microsoft.com/office/drawing/2014/main" id="{C13B9BFC-C4EF-42E0-B8E1-83E7C2B3FD34}"/>
+                <a16:creationId xmlns:a16="http://schemas.microsoft.com/office/drawing/2014/main" id="{B5598FC7-FF8A-4DC1-9EE3-015FAE17C86F}"/>
               </a:ext>
             </a:extLst>
           </p:cNvPr>
@@ -10263,7 +10263,7 @@
           <p:cNvPr id="9" name="Rectangle 8">
             <a:extLst>
               <a:ext uri="{FF2B5EF4-FFF2-40B4-BE49-F238E27FC236}">
-                <a16:creationId xmlns:a16="http://schemas.microsoft.com/office/drawing/2014/main" id="{A27AB7F1-8ABF-4C42-A7F3-D46F39EA503B}"/>
+                <a16:creationId xmlns:a16="http://schemas.microsoft.com/office/drawing/2014/main" id="{1EC9C2C4-9CD7-4CF9-ACEA-0BCAD4437772}"/>
               </a:ext>
             </a:extLst>
           </p:cNvPr>
@@ -10325,7 +10325,7 @@
           <p:cNvPr id="10" name="Rectangle 9">
             <a:extLst>
               <a:ext uri="{FF2B5EF4-FFF2-40B4-BE49-F238E27FC236}">
-                <a16:creationId xmlns:a16="http://schemas.microsoft.com/office/drawing/2014/main" id="{4A32A571-CCB6-4039-9032-C1B4B9E3FE2B}"/>
+                <a16:creationId xmlns:a16="http://schemas.microsoft.com/office/drawing/2014/main" id="{1B6AAAFE-2C3F-43E4-A1CD-A90A550E7B8C}"/>
               </a:ext>
             </a:extLst>
           </p:cNvPr>
@@ -10387,7 +10387,7 @@
           <p:cNvPr id="11" name="Rectangle 10">
             <a:extLst>
               <a:ext uri="{FF2B5EF4-FFF2-40B4-BE49-F238E27FC236}">
-                <a16:creationId xmlns:a16="http://schemas.microsoft.com/office/drawing/2014/main" id="{9A85C61B-057B-4479-975C-6D9BB9256049}"/>
+                <a16:creationId xmlns:a16="http://schemas.microsoft.com/office/drawing/2014/main" id="{3AAB00FC-7F5A-49ED-94B9-FCF2DD25D6E3}"/>
               </a:ext>
             </a:extLst>
           </p:cNvPr>
@@ -10449,7 +10449,7 @@
           <p:cNvPr id="12" name="Rectangle 11">
             <a:extLst>
               <a:ext uri="{FF2B5EF4-FFF2-40B4-BE49-F238E27FC236}">
-                <a16:creationId xmlns:a16="http://schemas.microsoft.com/office/drawing/2014/main" id="{DEDBC3E3-58A0-4165-8797-0C51691D7A8C}"/>
+                <a16:creationId xmlns:a16="http://schemas.microsoft.com/office/drawing/2014/main" id="{A864253A-27E8-43D3-B04C-855D280BAE1D}"/>
               </a:ext>
             </a:extLst>
           </p:cNvPr>
@@ -10511,7 +10511,7 @@
           <p:cNvPr id="13" name="Rectangle 12">
             <a:extLst>
               <a:ext uri="{FF2B5EF4-FFF2-40B4-BE49-F238E27FC236}">
-                <a16:creationId xmlns:a16="http://schemas.microsoft.com/office/drawing/2014/main" id="{260080FF-5953-439D-BC26-1DF424DA6920}"/>
+                <a16:creationId xmlns:a16="http://schemas.microsoft.com/office/drawing/2014/main" id="{86A2723E-B440-4C6F-88BC-5A18DEB8DFC4}"/>
               </a:ext>
             </a:extLst>
           </p:cNvPr>
@@ -10573,7 +10573,7 @@
           <p:cNvPr id="14" name="Rectangle 13">
             <a:extLst>
               <a:ext uri="{FF2B5EF4-FFF2-40B4-BE49-F238E27FC236}">
-                <a16:creationId xmlns:a16="http://schemas.microsoft.com/office/drawing/2014/main" id="{95DDEF96-B674-4097-AFAE-36E1846E79C9}"/>
+                <a16:creationId xmlns:a16="http://schemas.microsoft.com/office/drawing/2014/main" id="{5DF1AF5F-1D71-4014-BEB5-D154C0501CC6}"/>
               </a:ext>
             </a:extLst>
           </p:cNvPr>
@@ -10635,7 +10635,7 @@
           <p:cNvPr id="15" name="Rectangle 14">
             <a:extLst>
               <a:ext uri="{FF2B5EF4-FFF2-40B4-BE49-F238E27FC236}">
-                <a16:creationId xmlns:a16="http://schemas.microsoft.com/office/drawing/2014/main" id="{EB36BD02-9970-4F31-B834-3F2516B081DB}"/>
+                <a16:creationId xmlns:a16="http://schemas.microsoft.com/office/drawing/2014/main" id="{ECB27DA4-E79A-4C2D-8542-DF361338716D}"/>
               </a:ext>
             </a:extLst>
           </p:cNvPr>
@@ -10666,7 +10666,7 @@
           <p:cNvPr id="16" name="Rectangle 15">
             <a:extLst>
               <a:ext uri="{FF2B5EF4-FFF2-40B4-BE49-F238E27FC236}">
-                <a16:creationId xmlns:a16="http://schemas.microsoft.com/office/drawing/2014/main" id="{150DDD48-FCD5-49FB-9069-9C867E71F78F}"/>
+                <a16:creationId xmlns:a16="http://schemas.microsoft.com/office/drawing/2014/main" id="{C0F8D7A2-7FE0-4D96-8F5E-420B015131BA}"/>
               </a:ext>
             </a:extLst>
           </p:cNvPr>
@@ -10728,7 +10728,7 @@
           <p:cNvPr id="17" name="Rectangle 16">
             <a:extLst>
               <a:ext uri="{FF2B5EF4-FFF2-40B4-BE49-F238E27FC236}">
-                <a16:creationId xmlns:a16="http://schemas.microsoft.com/office/drawing/2014/main" id="{00453BE3-A1CA-47F6-9C64-6DE8E92FEB94}"/>
+                <a16:creationId xmlns:a16="http://schemas.microsoft.com/office/drawing/2014/main" id="{B6328798-7442-4544-B0B2-7450AFB59EE8}"/>
               </a:ext>
             </a:extLst>
           </p:cNvPr>
@@ -10790,7 +10790,7 @@
           <p:cNvPr id="18" name="Rectangle: Rounded Corners 17">
             <a:extLst>
               <a:ext uri="{FF2B5EF4-FFF2-40B4-BE49-F238E27FC236}">
-                <a16:creationId xmlns:a16="http://schemas.microsoft.com/office/drawing/2014/main" id="{B969757B-DCAE-46C4-9F85-6C23A2439002}"/>
+                <a16:creationId xmlns:a16="http://schemas.microsoft.com/office/drawing/2014/main" id="{71372D6C-4559-4C89-B67B-A24138CCA6C0}"/>
               </a:ext>
             </a:extLst>
           </p:cNvPr>
@@ -10823,7 +10823,7 @@
           <p:cNvPr id="19" name="Rectangle 18">
             <a:extLst>
               <a:ext uri="{FF2B5EF4-FFF2-40B4-BE49-F238E27FC236}">
-                <a16:creationId xmlns:a16="http://schemas.microsoft.com/office/drawing/2014/main" id="{FCB054A1-E369-4C9D-8E68-A686797009FF}"/>
+                <a16:creationId xmlns:a16="http://schemas.microsoft.com/office/drawing/2014/main" id="{73B22165-D5EC-488B-8940-77AE19B9AFA6}"/>
               </a:ext>
             </a:extLst>
           </p:cNvPr>
@@ -10885,7 +10885,7 @@
           <p:cNvPr id="20" name="Rectangle 19">
             <a:extLst>
               <a:ext uri="{FF2B5EF4-FFF2-40B4-BE49-F238E27FC236}">
-                <a16:creationId xmlns:a16="http://schemas.microsoft.com/office/drawing/2014/main" id="{D8859AEF-1733-474B-8D79-43B68AE721BF}"/>
+                <a16:creationId xmlns:a16="http://schemas.microsoft.com/office/drawing/2014/main" id="{99E681DB-CE1A-48CD-AE6F-6898088A1434}"/>
               </a:ext>
             </a:extLst>
           </p:cNvPr>
@@ -10916,7 +10916,7 @@
           <p:cNvPr id="21" name="Rectangle 20">
             <a:extLst>
               <a:ext uri="{FF2B5EF4-FFF2-40B4-BE49-F238E27FC236}">
-                <a16:creationId xmlns:a16="http://schemas.microsoft.com/office/drawing/2014/main" id="{CF36DE4D-D969-4AD4-98D2-B92CBDD5E326}"/>
+                <a16:creationId xmlns:a16="http://schemas.microsoft.com/office/drawing/2014/main" id="{57D879B6-5657-483E-8C44-A923F32AA0CD}"/>
               </a:ext>
             </a:extLst>
           </p:cNvPr>
@@ -10978,7 +10978,7 @@
           <p:cNvPr id="22" name="Rectangle 21">
             <a:extLst>
               <a:ext uri="{FF2B5EF4-FFF2-40B4-BE49-F238E27FC236}">
-                <a16:creationId xmlns:a16="http://schemas.microsoft.com/office/drawing/2014/main" id="{16DF42B5-AE77-415B-9723-A888D9B92D91}"/>
+                <a16:creationId xmlns:a16="http://schemas.microsoft.com/office/drawing/2014/main" id="{B86F9D29-6444-4C96-968D-E1DCB6FA1B4D}"/>
               </a:ext>
             </a:extLst>
           </p:cNvPr>
@@ -11038,7 +11038,7 @@
     </p:spTree>
     <p:extLst>
       <p:ext uri="{BB962C8B-B14F-4D97-AF65-F5344CB8AC3E}">
-        <p14:creationId xmlns:p14="http://schemas.microsoft.com/office/powerpoint/2010/main" val="1068102824"/>
+        <p14:creationId xmlns:p14="http://schemas.microsoft.com/office/powerpoint/2010/main" val="1396981832"/>
       </p:ext>
     </p:extLst>
   </p:cSld>
@@ -11079,7 +11079,7 @@
             <a:hlinkClick r:id="rId3"/>
             <a:extLst>
               <a:ext uri="{FF2B5EF4-FFF2-40B4-BE49-F238E27FC236}">
-                <a16:creationId xmlns:a16="http://schemas.microsoft.com/office/drawing/2014/main" id="{3AD32648-A15E-4CEE-9AB3-CE3F7188D098}"/>
+                <a16:creationId xmlns:a16="http://schemas.microsoft.com/office/drawing/2014/main" id="{64F8C9AE-1FF1-44EC-9ABC-D3E90D4B13E4}"/>
               </a:ext>
             </a:extLst>
           </p:cNvPr>
@@ -11154,7 +11154,7 @@
             <a:hlinkClick r:id="rId4"/>
             <a:extLst>
               <a:ext uri="{FF2B5EF4-FFF2-40B4-BE49-F238E27FC236}">
-                <a16:creationId xmlns:a16="http://schemas.microsoft.com/office/drawing/2014/main" id="{707E9113-DC83-49C1-92DE-94979E9105C2}"/>
+                <a16:creationId xmlns:a16="http://schemas.microsoft.com/office/drawing/2014/main" id="{8B73D5BB-15CE-4837-8092-159CEECCE141}"/>
               </a:ext>
             </a:extLst>
           </p:cNvPr>
@@ -11228,7 +11228,7 @@
           <p:cNvPr id="3" name="Rectangle 2">
             <a:extLst>
               <a:ext uri="{FF2B5EF4-FFF2-40B4-BE49-F238E27FC236}">
-                <a16:creationId xmlns:a16="http://schemas.microsoft.com/office/drawing/2014/main" id="{DE6229D7-1F51-4009-B640-E277E4C7FCA0}"/>
+                <a16:creationId xmlns:a16="http://schemas.microsoft.com/office/drawing/2014/main" id="{43081923-4CDE-4D50-9F5A-710607D38CDA}"/>
               </a:ext>
             </a:extLst>
           </p:cNvPr>
@@ -11290,7 +11290,7 @@
           <p:cNvPr id="4" name="Rectangle 3">
             <a:extLst>
               <a:ext uri="{FF2B5EF4-FFF2-40B4-BE49-F238E27FC236}">
-                <a16:creationId xmlns:a16="http://schemas.microsoft.com/office/drawing/2014/main" id="{9825ADD9-3CB4-4780-9166-7EB83A8C382E}"/>
+                <a16:creationId xmlns:a16="http://schemas.microsoft.com/office/drawing/2014/main" id="{2933A008-CE3F-4DD8-8DD3-27C536EDAA26}"/>
               </a:ext>
             </a:extLst>
           </p:cNvPr>
@@ -11352,7 +11352,7 @@
           <p:cNvPr id="5" name="Rectangle 4">
             <a:extLst>
               <a:ext uri="{FF2B5EF4-FFF2-40B4-BE49-F238E27FC236}">
-                <a16:creationId xmlns:a16="http://schemas.microsoft.com/office/drawing/2014/main" id="{75D07E64-CA38-478D-AE37-817492E96DB6}"/>
+                <a16:creationId xmlns:a16="http://schemas.microsoft.com/office/drawing/2014/main" id="{718CE972-E3FD-4153-921D-BE6092FCF894}"/>
               </a:ext>
             </a:extLst>
           </p:cNvPr>
@@ -11414,7 +11414,7 @@
           <p:cNvPr id="6" name="Rectangle: Rounded Corners 5">
             <a:extLst>
               <a:ext uri="{FF2B5EF4-FFF2-40B4-BE49-F238E27FC236}">
-                <a16:creationId xmlns:a16="http://schemas.microsoft.com/office/drawing/2014/main" id="{9ADFC6FF-837E-49C3-9E83-5FC37ADD3CDD}"/>
+                <a16:creationId xmlns:a16="http://schemas.microsoft.com/office/drawing/2014/main" id="{944AE323-9996-4E9E-9C92-280EFBBC17C0}"/>
               </a:ext>
             </a:extLst>
           </p:cNvPr>
@@ -11447,7 +11447,7 @@
           <p:cNvPr id="7" name="Rectangle: Rounded Corners 6">
             <a:extLst>
               <a:ext uri="{FF2B5EF4-FFF2-40B4-BE49-F238E27FC236}">
-                <a16:creationId xmlns:a16="http://schemas.microsoft.com/office/drawing/2014/main" id="{D72AAB30-A7A0-4F2E-ACB5-5143B23EDE65}"/>
+                <a16:creationId xmlns:a16="http://schemas.microsoft.com/office/drawing/2014/main" id="{0C380211-6FE4-4401-8C55-FDDA9B1114D7}"/>
               </a:ext>
             </a:extLst>
           </p:cNvPr>
@@ -11480,7 +11480,7 @@
           <p:cNvPr id="8" name="Rectangle 7">
             <a:extLst>
               <a:ext uri="{FF2B5EF4-FFF2-40B4-BE49-F238E27FC236}">
-                <a16:creationId xmlns:a16="http://schemas.microsoft.com/office/drawing/2014/main" id="{BF9EC7CE-314A-4A68-B1AB-AE2775DC3338}"/>
+                <a16:creationId xmlns:a16="http://schemas.microsoft.com/office/drawing/2014/main" id="{EA8C2376-F467-478A-A19A-AB6BACD4E7B8}"/>
               </a:ext>
             </a:extLst>
           </p:cNvPr>
@@ -11542,7 +11542,7 @@
           <p:cNvPr id="9" name="Rectangle 8">
             <a:extLst>
               <a:ext uri="{FF2B5EF4-FFF2-40B4-BE49-F238E27FC236}">
-                <a16:creationId xmlns:a16="http://schemas.microsoft.com/office/drawing/2014/main" id="{189DCE96-B1D8-4180-AEC0-B8FD97C21518}"/>
+                <a16:creationId xmlns:a16="http://schemas.microsoft.com/office/drawing/2014/main" id="{CE040636-AE8C-4675-868D-E23D3F030E0B}"/>
               </a:ext>
             </a:extLst>
           </p:cNvPr>
@@ -11604,7 +11604,7 @@
           <p:cNvPr id="10" name="Rectangle: Rounded Corners 9">
             <a:extLst>
               <a:ext uri="{FF2B5EF4-FFF2-40B4-BE49-F238E27FC236}">
-                <a16:creationId xmlns:a16="http://schemas.microsoft.com/office/drawing/2014/main" id="{8B408AEF-2A9C-4A9E-BA90-C45BAD35B8E5}"/>
+                <a16:creationId xmlns:a16="http://schemas.microsoft.com/office/drawing/2014/main" id="{7CD2F02C-B47F-4615-AFE0-019EDC43CB40}"/>
               </a:ext>
             </a:extLst>
           </p:cNvPr>
@@ -11637,7 +11637,7 @@
           <p:cNvPr id="11" name="Rectangle: Rounded Corners 10">
             <a:extLst>
               <a:ext uri="{FF2B5EF4-FFF2-40B4-BE49-F238E27FC236}">
-                <a16:creationId xmlns:a16="http://schemas.microsoft.com/office/drawing/2014/main" id="{65B05C34-17EF-463C-9237-FCA3454F2C8D}"/>
+                <a16:creationId xmlns:a16="http://schemas.microsoft.com/office/drawing/2014/main" id="{1B12AF95-FA02-421D-B3E1-42410B52A32D}"/>
               </a:ext>
             </a:extLst>
           </p:cNvPr>
@@ -11670,7 +11670,7 @@
           <p:cNvPr id="12" name="Rectangle 11">
             <a:extLst>
               <a:ext uri="{FF2B5EF4-FFF2-40B4-BE49-F238E27FC236}">
-                <a16:creationId xmlns:a16="http://schemas.microsoft.com/office/drawing/2014/main" id="{4F1F45BC-69A6-4D26-804E-D9909A42E5C0}"/>
+                <a16:creationId xmlns:a16="http://schemas.microsoft.com/office/drawing/2014/main" id="{1D8633F8-9949-4F87-820B-518482CD6FE9}"/>
               </a:ext>
             </a:extLst>
           </p:cNvPr>
@@ -11732,7 +11732,7 @@
           <p:cNvPr id="13" name="Rectangle 12">
             <a:extLst>
               <a:ext uri="{FF2B5EF4-FFF2-40B4-BE49-F238E27FC236}">
-                <a16:creationId xmlns:a16="http://schemas.microsoft.com/office/drawing/2014/main" id="{024E2C89-8948-4BD7-BEC7-D42ABC8035D4}"/>
+                <a16:creationId xmlns:a16="http://schemas.microsoft.com/office/drawing/2014/main" id="{0BBFBFC4-F915-4287-BF78-16604112FD01}"/>
               </a:ext>
             </a:extLst>
           </p:cNvPr>
@@ -11794,7 +11794,7 @@
           <p:cNvPr id="14" name="Rectangle: Rounded Corners 13">
             <a:extLst>
               <a:ext uri="{FF2B5EF4-FFF2-40B4-BE49-F238E27FC236}">
-                <a16:creationId xmlns:a16="http://schemas.microsoft.com/office/drawing/2014/main" id="{B9A2C4A4-E8EA-4194-B310-C32ACE03D4BF}"/>
+                <a16:creationId xmlns:a16="http://schemas.microsoft.com/office/drawing/2014/main" id="{2296D515-B8E8-4243-AB40-C43C3B5EEB6E}"/>
               </a:ext>
             </a:extLst>
           </p:cNvPr>
@@ -11827,7 +11827,7 @@
           <p:cNvPr id="15" name="Rectangle: Rounded Corners 14">
             <a:extLst>
               <a:ext uri="{FF2B5EF4-FFF2-40B4-BE49-F238E27FC236}">
-                <a16:creationId xmlns:a16="http://schemas.microsoft.com/office/drawing/2014/main" id="{2D8431F2-B501-41E0-B8F1-48B1617440AC}"/>
+                <a16:creationId xmlns:a16="http://schemas.microsoft.com/office/drawing/2014/main" id="{552CF219-1AD6-4F9A-8F95-F5B0E7AEDEF8}"/>
               </a:ext>
             </a:extLst>
           </p:cNvPr>
@@ -11860,7 +11860,7 @@
           <p:cNvPr id="16" name="Rectangle 15">
             <a:extLst>
               <a:ext uri="{FF2B5EF4-FFF2-40B4-BE49-F238E27FC236}">
-                <a16:creationId xmlns:a16="http://schemas.microsoft.com/office/drawing/2014/main" id="{5004812D-FE1F-4EEE-848B-CAEA6B3B0296}"/>
+                <a16:creationId xmlns:a16="http://schemas.microsoft.com/office/drawing/2014/main" id="{A839AC48-AD63-46E1-9957-ABBCFBF526A2}"/>
               </a:ext>
             </a:extLst>
           </p:cNvPr>
@@ -11922,7 +11922,7 @@
           <p:cNvPr id="17" name="Rectangle 16">
             <a:extLst>
               <a:ext uri="{FF2B5EF4-FFF2-40B4-BE49-F238E27FC236}">
-                <a16:creationId xmlns:a16="http://schemas.microsoft.com/office/drawing/2014/main" id="{1F07C6C3-CC8C-42A8-BC39-185A31982443}"/>
+                <a16:creationId xmlns:a16="http://schemas.microsoft.com/office/drawing/2014/main" id="{5FFF3750-384A-49DF-BA76-9FC046A33CF0}"/>
               </a:ext>
             </a:extLst>
           </p:cNvPr>
@@ -11984,7 +11984,7 @@
           <p:cNvPr id="18" name="Rectangle: Rounded Corners 17">
             <a:extLst>
               <a:ext uri="{FF2B5EF4-FFF2-40B4-BE49-F238E27FC236}">
-                <a16:creationId xmlns:a16="http://schemas.microsoft.com/office/drawing/2014/main" id="{E4B517EB-EB63-4DF6-99FC-1F85C5F59D83}"/>
+                <a16:creationId xmlns:a16="http://schemas.microsoft.com/office/drawing/2014/main" id="{2E1E58E3-8E2E-47BE-AB59-E00AC46031BC}"/>
               </a:ext>
             </a:extLst>
           </p:cNvPr>
@@ -12017,7 +12017,7 @@
           <p:cNvPr id="19" name="Rectangle: Rounded Corners 18">
             <a:extLst>
               <a:ext uri="{FF2B5EF4-FFF2-40B4-BE49-F238E27FC236}">
-                <a16:creationId xmlns:a16="http://schemas.microsoft.com/office/drawing/2014/main" id="{7C115AEE-9487-4625-AF6B-50D17147150C}"/>
+                <a16:creationId xmlns:a16="http://schemas.microsoft.com/office/drawing/2014/main" id="{FC9FC8F5-65CD-4CA2-A190-F14776710CF6}"/>
               </a:ext>
             </a:extLst>
           </p:cNvPr>
@@ -12050,7 +12050,7 @@
           <p:cNvPr id="20" name="Rectangle 19">
             <a:extLst>
               <a:ext uri="{FF2B5EF4-FFF2-40B4-BE49-F238E27FC236}">
-                <a16:creationId xmlns:a16="http://schemas.microsoft.com/office/drawing/2014/main" id="{15DBA65E-D332-4EB8-A265-7291D26CBA69}"/>
+                <a16:creationId xmlns:a16="http://schemas.microsoft.com/office/drawing/2014/main" id="{1477BEE6-CADF-4728-A3F6-0B92436AC56E}"/>
               </a:ext>
             </a:extLst>
           </p:cNvPr>
@@ -12112,7 +12112,7 @@
           <p:cNvPr id="21" name="Rectangle: Rounded Corners 20">
             <a:extLst>
               <a:ext uri="{FF2B5EF4-FFF2-40B4-BE49-F238E27FC236}">
-                <a16:creationId xmlns:a16="http://schemas.microsoft.com/office/drawing/2014/main" id="{6A80AE1D-C7F7-43E3-9CF3-96B767F70DC9}"/>
+                <a16:creationId xmlns:a16="http://schemas.microsoft.com/office/drawing/2014/main" id="{899876B6-185D-464B-B850-1934DAAF031C}"/>
               </a:ext>
             </a:extLst>
           </p:cNvPr>
@@ -12147,7 +12147,7 @@
           <p:cNvPr id="22" name="Rectangle: Rounded Corners 21">
             <a:extLst>
               <a:ext uri="{FF2B5EF4-FFF2-40B4-BE49-F238E27FC236}">
-                <a16:creationId xmlns:a16="http://schemas.microsoft.com/office/drawing/2014/main" id="{B6DB34E3-9FBE-465B-9449-1752189A74B8}"/>
+                <a16:creationId xmlns:a16="http://schemas.microsoft.com/office/drawing/2014/main" id="{B84CF1C0-33AF-437E-AC33-9EC5716F76EE}"/>
               </a:ext>
             </a:extLst>
           </p:cNvPr>
@@ -12180,7 +12180,7 @@
           <p:cNvPr id="23" name="Rectangle 22">
             <a:extLst>
               <a:ext uri="{FF2B5EF4-FFF2-40B4-BE49-F238E27FC236}">
-                <a16:creationId xmlns:a16="http://schemas.microsoft.com/office/drawing/2014/main" id="{EAF001B7-B843-4BB6-B694-2A562130566F}"/>
+                <a16:creationId xmlns:a16="http://schemas.microsoft.com/office/drawing/2014/main" id="{A7317EFB-E4B4-4B73-9350-5FC5175CD030}"/>
               </a:ext>
             </a:extLst>
           </p:cNvPr>
@@ -12242,7 +12242,7 @@
           <p:cNvPr id="24" name="Rectangle 23">
             <a:extLst>
               <a:ext uri="{FF2B5EF4-FFF2-40B4-BE49-F238E27FC236}">
-                <a16:creationId xmlns:a16="http://schemas.microsoft.com/office/drawing/2014/main" id="{D9A8E197-4EAA-425B-A351-2E242AC324BF}"/>
+                <a16:creationId xmlns:a16="http://schemas.microsoft.com/office/drawing/2014/main" id="{0BE97474-8988-4FE2-9F32-47FC56F42288}"/>
               </a:ext>
             </a:extLst>
           </p:cNvPr>
@@ -12304,7 +12304,7 @@
           <p:cNvPr id="25" name="Rectangle 24">
             <a:extLst>
               <a:ext uri="{FF2B5EF4-FFF2-40B4-BE49-F238E27FC236}">
-                <a16:creationId xmlns:a16="http://schemas.microsoft.com/office/drawing/2014/main" id="{FCA2C1E8-1A83-475C-B904-176965B7E57A}"/>
+                <a16:creationId xmlns:a16="http://schemas.microsoft.com/office/drawing/2014/main" id="{1531FC22-73BE-4E25-89F1-3248664BE945}"/>
               </a:ext>
             </a:extLst>
           </p:cNvPr>
@@ -12366,7 +12366,7 @@
           <p:cNvPr id="26" name="Rectangle 25">
             <a:extLst>
               <a:ext uri="{FF2B5EF4-FFF2-40B4-BE49-F238E27FC236}">
-                <a16:creationId xmlns:a16="http://schemas.microsoft.com/office/drawing/2014/main" id="{CFBDA7E2-7C38-4C16-B871-3FE3887D799D}"/>
+                <a16:creationId xmlns:a16="http://schemas.microsoft.com/office/drawing/2014/main" id="{8896F87B-EDA9-459E-8696-CB778D0B08D2}"/>
               </a:ext>
             </a:extLst>
           </p:cNvPr>
@@ -12397,7 +12397,7 @@
           <p:cNvPr id="27" name="Rectangle 26">
             <a:extLst>
               <a:ext uri="{FF2B5EF4-FFF2-40B4-BE49-F238E27FC236}">
-                <a16:creationId xmlns:a16="http://schemas.microsoft.com/office/drawing/2014/main" id="{59351091-9BB7-4ABE-A9D0-FBAB72F5B88D}"/>
+                <a16:creationId xmlns:a16="http://schemas.microsoft.com/office/drawing/2014/main" id="{EDE936BD-0833-4508-8FE6-D858727D0D38}"/>
               </a:ext>
             </a:extLst>
           </p:cNvPr>
@@ -12459,7 +12459,7 @@
           <p:cNvPr id="28" name="Rectangle 27">
             <a:extLst>
               <a:ext uri="{FF2B5EF4-FFF2-40B4-BE49-F238E27FC236}">
-                <a16:creationId xmlns:a16="http://schemas.microsoft.com/office/drawing/2014/main" id="{58BDB768-9FA2-4D7D-8D8C-3CB8112AEC68}"/>
+                <a16:creationId xmlns:a16="http://schemas.microsoft.com/office/drawing/2014/main" id="{84315221-4018-466B-9C55-C5093597048C}"/>
               </a:ext>
             </a:extLst>
           </p:cNvPr>
@@ -12554,7 +12554,7 @@
           <p:cNvPr id="29" name="Rectangle 28">
             <a:extLst>
               <a:ext uri="{FF2B5EF4-FFF2-40B4-BE49-F238E27FC236}">
-                <a16:creationId xmlns:a16="http://schemas.microsoft.com/office/drawing/2014/main" id="{2073492C-3963-45A0-A092-546298B42F1D}"/>
+                <a16:creationId xmlns:a16="http://schemas.microsoft.com/office/drawing/2014/main" id="{2A3B448C-D087-4D31-BD17-8F932FD0EC16}"/>
               </a:ext>
             </a:extLst>
           </p:cNvPr>
@@ -12616,7 +12616,7 @@
           <p:cNvPr id="30" name="Rectangle 29">
             <a:extLst>
               <a:ext uri="{FF2B5EF4-FFF2-40B4-BE49-F238E27FC236}">
-                <a16:creationId xmlns:a16="http://schemas.microsoft.com/office/drawing/2014/main" id="{A8BC87B5-6553-4D4E-B262-CB65BCDBEFFE}"/>
+                <a16:creationId xmlns:a16="http://schemas.microsoft.com/office/drawing/2014/main" id="{5BF346B1-0549-4519-9E6E-81DD4A14F63D}"/>
               </a:ext>
             </a:extLst>
           </p:cNvPr>
@@ -12647,7 +12647,7 @@
           <p:cNvPr id="31" name="Rectangle 30">
             <a:extLst>
               <a:ext uri="{FF2B5EF4-FFF2-40B4-BE49-F238E27FC236}">
-                <a16:creationId xmlns:a16="http://schemas.microsoft.com/office/drawing/2014/main" id="{784E32AE-ADC6-4854-9968-31A2C172BFE7}"/>
+                <a16:creationId xmlns:a16="http://schemas.microsoft.com/office/drawing/2014/main" id="{B592008A-BCBF-47C4-920A-E8AE6EDF0C26}"/>
               </a:ext>
             </a:extLst>
           </p:cNvPr>
@@ -12709,7 +12709,7 @@
           <p:cNvPr id="32" name="Rectangle 31">
             <a:extLst>
               <a:ext uri="{FF2B5EF4-FFF2-40B4-BE49-F238E27FC236}">
-                <a16:creationId xmlns:a16="http://schemas.microsoft.com/office/drawing/2014/main" id="{78BA1171-0994-4D4E-8011-72A63AD1904B}"/>
+                <a16:creationId xmlns:a16="http://schemas.microsoft.com/office/drawing/2014/main" id="{A44E5E98-CE56-4885-B02A-5AAF7758ECE5}"/>
               </a:ext>
             </a:extLst>
           </p:cNvPr>
@@ -12769,7 +12769,7 @@
     </p:spTree>
     <p:extLst>
       <p:ext uri="{BB962C8B-B14F-4D97-AF65-F5344CB8AC3E}">
-        <p14:creationId xmlns:p14="http://schemas.microsoft.com/office/powerpoint/2010/main" val="1102118975"/>
+        <p14:creationId xmlns:p14="http://schemas.microsoft.com/office/powerpoint/2010/main" val="82462980"/>
       </p:ext>
     </p:extLst>
   </p:cSld>
@@ -12810,7 +12810,7 @@
             <a:hlinkClick r:id="rId3"/>
             <a:extLst>
               <a:ext uri="{FF2B5EF4-FFF2-40B4-BE49-F238E27FC236}">
-                <a16:creationId xmlns:a16="http://schemas.microsoft.com/office/drawing/2014/main" id="{972CA83C-4615-48CE-8403-059DF557CB0E}"/>
+                <a16:creationId xmlns:a16="http://schemas.microsoft.com/office/drawing/2014/main" id="{FBD998EB-9710-491C-8880-5E4ED14FA4AB}"/>
               </a:ext>
             </a:extLst>
           </p:cNvPr>
@@ -12885,7 +12885,7 @@
             <a:hlinkClick r:id="rId4"/>
             <a:extLst>
               <a:ext uri="{FF2B5EF4-FFF2-40B4-BE49-F238E27FC236}">
-                <a16:creationId xmlns:a16="http://schemas.microsoft.com/office/drawing/2014/main" id="{7571A734-6F9A-4CFE-B71C-078304BE21EC}"/>
+                <a16:creationId xmlns:a16="http://schemas.microsoft.com/office/drawing/2014/main" id="{2E9F7E18-85D7-42D5-84F5-0A274387BFC2}"/>
               </a:ext>
             </a:extLst>
           </p:cNvPr>
@@ -12959,7 +12959,7 @@
           <p:cNvPr id="3" name="Rectangle 2">
             <a:extLst>
               <a:ext uri="{FF2B5EF4-FFF2-40B4-BE49-F238E27FC236}">
-                <a16:creationId xmlns:a16="http://schemas.microsoft.com/office/drawing/2014/main" id="{D4E5C91A-6749-418A-A0B1-8CA133ECD8E6}"/>
+                <a16:creationId xmlns:a16="http://schemas.microsoft.com/office/drawing/2014/main" id="{A8953521-82FE-4A3B-8F80-EC325D96C613}"/>
               </a:ext>
             </a:extLst>
           </p:cNvPr>
@@ -13021,7 +13021,7 @@
           <p:cNvPr id="4" name="Rectangle 3">
             <a:extLst>
               <a:ext uri="{FF2B5EF4-FFF2-40B4-BE49-F238E27FC236}">
-                <a16:creationId xmlns:a16="http://schemas.microsoft.com/office/drawing/2014/main" id="{4C57A7C7-3E1F-4F49-AACD-0C849D3F14B3}"/>
+                <a16:creationId xmlns:a16="http://schemas.microsoft.com/office/drawing/2014/main" id="{67C6F599-4B40-4D34-8FB6-B42F3AEE77F7}"/>
               </a:ext>
             </a:extLst>
           </p:cNvPr>
@@ -13083,7 +13083,7 @@
           <p:cNvPr id="5" name="Rectangle 4">
             <a:extLst>
               <a:ext uri="{FF2B5EF4-FFF2-40B4-BE49-F238E27FC236}">
-                <a16:creationId xmlns:a16="http://schemas.microsoft.com/office/drawing/2014/main" id="{6521157A-31AD-4A21-B10E-F29B94E3F7C3}"/>
+                <a16:creationId xmlns:a16="http://schemas.microsoft.com/office/drawing/2014/main" id="{E2DA7826-511A-4178-995A-29D5631C3B10}"/>
               </a:ext>
             </a:extLst>
           </p:cNvPr>
@@ -13145,7 +13145,7 @@
           <p:cNvPr id="6" name="Rectangle 5">
             <a:extLst>
               <a:ext uri="{FF2B5EF4-FFF2-40B4-BE49-F238E27FC236}">
-                <a16:creationId xmlns:a16="http://schemas.microsoft.com/office/drawing/2014/main" id="{B0FD0643-3DFC-48CF-B412-A831A0D3BF30}"/>
+                <a16:creationId xmlns:a16="http://schemas.microsoft.com/office/drawing/2014/main" id="{5A61A197-F2C4-4059-A653-CB9EC7366803}"/>
               </a:ext>
             </a:extLst>
           </p:cNvPr>
@@ -13207,7 +13207,7 @@
           <p:cNvPr id="7" name="Rectangle 6">
             <a:extLst>
               <a:ext uri="{FF2B5EF4-FFF2-40B4-BE49-F238E27FC236}">
-                <a16:creationId xmlns:a16="http://schemas.microsoft.com/office/drawing/2014/main" id="{D3DFDE88-74AD-4B8B-986F-1813BA07D46A}"/>
+                <a16:creationId xmlns:a16="http://schemas.microsoft.com/office/drawing/2014/main" id="{A3565E2C-CF45-4D9C-824A-89C240BA2BB5}"/>
               </a:ext>
             </a:extLst>
           </p:cNvPr>
@@ -13269,7 +13269,7 @@
           <p:cNvPr id="8" name="Rectangle 7">
             <a:extLst>
               <a:ext uri="{FF2B5EF4-FFF2-40B4-BE49-F238E27FC236}">
-                <a16:creationId xmlns:a16="http://schemas.microsoft.com/office/drawing/2014/main" id="{9E8D9025-A6D5-40F8-909A-6790DD3808E3}"/>
+                <a16:creationId xmlns:a16="http://schemas.microsoft.com/office/drawing/2014/main" id="{13D16BC8-893D-47DF-983F-5F451FCE476C}"/>
               </a:ext>
             </a:extLst>
           </p:cNvPr>
@@ -13331,7 +13331,7 @@
           <p:cNvPr id="9" name="Rectangle 8">
             <a:extLst>
               <a:ext uri="{FF2B5EF4-FFF2-40B4-BE49-F238E27FC236}">
-                <a16:creationId xmlns:a16="http://schemas.microsoft.com/office/drawing/2014/main" id="{3110F0FB-1D89-4ADC-96BE-E3AA0632FA2D}"/>
+                <a16:creationId xmlns:a16="http://schemas.microsoft.com/office/drawing/2014/main" id="{B3EFDE64-FCA8-4381-B30F-20E23D7C8B81}"/>
               </a:ext>
             </a:extLst>
           </p:cNvPr>
@@ -13362,7 +13362,7 @@
           <p:cNvPr id="10" name="Rectangle: Rounded Corners 9">
             <a:extLst>
               <a:ext uri="{FF2B5EF4-FFF2-40B4-BE49-F238E27FC236}">
-                <a16:creationId xmlns:a16="http://schemas.microsoft.com/office/drawing/2014/main" id="{22DAFCB5-4044-4280-8A61-D2B2247EBEC6}"/>
+                <a16:creationId xmlns:a16="http://schemas.microsoft.com/office/drawing/2014/main" id="{FDA23FB4-60BB-49EA-9C21-42D6E65B062B}"/>
               </a:ext>
             </a:extLst>
           </p:cNvPr>
@@ -13395,7 +13395,7 @@
           <p:cNvPr id="11" name="Rectangle 10">
             <a:extLst>
               <a:ext uri="{FF2B5EF4-FFF2-40B4-BE49-F238E27FC236}">
-                <a16:creationId xmlns:a16="http://schemas.microsoft.com/office/drawing/2014/main" id="{E52496E7-52B6-48FE-8D92-D21CDAAF59AA}"/>
+                <a16:creationId xmlns:a16="http://schemas.microsoft.com/office/drawing/2014/main" id="{03E5F8A4-1C00-419E-9AFF-3ED8CC09A7B1}"/>
               </a:ext>
             </a:extLst>
           </p:cNvPr>
@@ -13457,7 +13457,7 @@
           <p:cNvPr id="12" name="Rectangle 11">
             <a:extLst>
               <a:ext uri="{FF2B5EF4-FFF2-40B4-BE49-F238E27FC236}">
-                <a16:creationId xmlns:a16="http://schemas.microsoft.com/office/drawing/2014/main" id="{17AC5168-76EB-48B7-9F2D-0C45B75E8F53}"/>
+                <a16:creationId xmlns:a16="http://schemas.microsoft.com/office/drawing/2014/main" id="{A93A031D-F648-478D-AAD7-7D7F5B658CCC}"/>
               </a:ext>
             </a:extLst>
           </p:cNvPr>
@@ -13519,7 +13519,7 @@
           <p:cNvPr id="13" name="Rectangle: Rounded Corners 12">
             <a:extLst>
               <a:ext uri="{FF2B5EF4-FFF2-40B4-BE49-F238E27FC236}">
-                <a16:creationId xmlns:a16="http://schemas.microsoft.com/office/drawing/2014/main" id="{4A15762A-09AF-446A-8CEA-60C1FA2DB148}"/>
+                <a16:creationId xmlns:a16="http://schemas.microsoft.com/office/drawing/2014/main" id="{0409874E-597D-40AC-9D05-E12F328AF8E6}"/>
               </a:ext>
             </a:extLst>
           </p:cNvPr>
@@ -13554,7 +13554,7 @@
           <p:cNvPr id="14" name="Rectangle 13">
             <a:extLst>
               <a:ext uri="{FF2B5EF4-FFF2-40B4-BE49-F238E27FC236}">
-                <a16:creationId xmlns:a16="http://schemas.microsoft.com/office/drawing/2014/main" id="{646D3FEA-9441-4270-BAD3-68177B928845}"/>
+                <a16:creationId xmlns:a16="http://schemas.microsoft.com/office/drawing/2014/main" id="{DF1F78BB-4B32-4604-B621-C23089E07AA3}"/>
               </a:ext>
             </a:extLst>
           </p:cNvPr>
@@ -13616,7 +13616,7 @@
           <p:cNvPr id="15" name="Rectangle 14">
             <a:extLst>
               <a:ext uri="{FF2B5EF4-FFF2-40B4-BE49-F238E27FC236}">
-                <a16:creationId xmlns:a16="http://schemas.microsoft.com/office/drawing/2014/main" id="{4285BC8A-CFE2-46B2-A291-C233B32785A3}"/>
+                <a16:creationId xmlns:a16="http://schemas.microsoft.com/office/drawing/2014/main" id="{116DD4B4-DE53-47A3-A297-6815BB0045CE}"/>
               </a:ext>
             </a:extLst>
           </p:cNvPr>
@@ -13678,7 +13678,7 @@
           <p:cNvPr id="16" name="Rectangle 15">
             <a:extLst>
               <a:ext uri="{FF2B5EF4-FFF2-40B4-BE49-F238E27FC236}">
-                <a16:creationId xmlns:a16="http://schemas.microsoft.com/office/drawing/2014/main" id="{009CDFCA-4652-4D81-B06C-91DA40D941E6}"/>
+                <a16:creationId xmlns:a16="http://schemas.microsoft.com/office/drawing/2014/main" id="{6D07B0F8-9802-4448-9917-B14E66B551CB}"/>
               </a:ext>
             </a:extLst>
           </p:cNvPr>
@@ -13740,7 +13740,7 @@
           <p:cNvPr id="17" name="Rectangle 16">
             <a:extLst>
               <a:ext uri="{FF2B5EF4-FFF2-40B4-BE49-F238E27FC236}">
-                <a16:creationId xmlns:a16="http://schemas.microsoft.com/office/drawing/2014/main" id="{19A327C1-6989-4783-9218-DB7C9B6D2BF0}"/>
+                <a16:creationId xmlns:a16="http://schemas.microsoft.com/office/drawing/2014/main" id="{55F928C2-390C-4A06-82F5-1F1CF14B07A8}"/>
               </a:ext>
             </a:extLst>
           </p:cNvPr>
@@ -13771,7 +13771,7 @@
           <p:cNvPr id="18" name="Rectangle: Rounded Corners 17">
             <a:extLst>
               <a:ext uri="{FF2B5EF4-FFF2-40B4-BE49-F238E27FC236}">
-                <a16:creationId xmlns:a16="http://schemas.microsoft.com/office/drawing/2014/main" id="{DB34C6DF-AF50-4691-B16C-0774CEA68388}"/>
+                <a16:creationId xmlns:a16="http://schemas.microsoft.com/office/drawing/2014/main" id="{ACE445A9-2BFA-4C10-9B82-2DEC12014A0A}"/>
               </a:ext>
             </a:extLst>
           </p:cNvPr>
@@ -13804,7 +13804,7 @@
           <p:cNvPr id="19" name="Rectangle 18">
             <a:extLst>
               <a:ext uri="{FF2B5EF4-FFF2-40B4-BE49-F238E27FC236}">
-                <a16:creationId xmlns:a16="http://schemas.microsoft.com/office/drawing/2014/main" id="{6270B7C2-6AAF-4C06-B42F-72F2B2034071}"/>
+                <a16:creationId xmlns:a16="http://schemas.microsoft.com/office/drawing/2014/main" id="{2B54CBC0-B147-4D34-A202-6FFC04DA271A}"/>
               </a:ext>
             </a:extLst>
           </p:cNvPr>
@@ -13866,7 +13866,7 @@
           <p:cNvPr id="20" name="Rectangle 19">
             <a:extLst>
               <a:ext uri="{FF2B5EF4-FFF2-40B4-BE49-F238E27FC236}">
-                <a16:creationId xmlns:a16="http://schemas.microsoft.com/office/drawing/2014/main" id="{FE380369-86EE-47E1-8294-623380EC7554}"/>
+                <a16:creationId xmlns:a16="http://schemas.microsoft.com/office/drawing/2014/main" id="{256996A7-0779-4996-B678-CAFB6482BB8D}"/>
               </a:ext>
             </a:extLst>
           </p:cNvPr>
@@ -13928,7 +13928,7 @@
           <p:cNvPr id="21" name="Rectangle: Rounded Corners 20">
             <a:extLst>
               <a:ext uri="{FF2B5EF4-FFF2-40B4-BE49-F238E27FC236}">
-                <a16:creationId xmlns:a16="http://schemas.microsoft.com/office/drawing/2014/main" id="{BEB90540-B375-4522-8E77-32F284492AF0}"/>
+                <a16:creationId xmlns:a16="http://schemas.microsoft.com/office/drawing/2014/main" id="{755D4A61-389D-4973-92DE-F63F5EDC85B3}"/>
               </a:ext>
             </a:extLst>
           </p:cNvPr>
@@ -13963,7 +13963,7 @@
           <p:cNvPr id="22" name="Rectangle 21">
             <a:extLst>
               <a:ext uri="{FF2B5EF4-FFF2-40B4-BE49-F238E27FC236}">
-                <a16:creationId xmlns:a16="http://schemas.microsoft.com/office/drawing/2014/main" id="{79A92DAF-64A1-4BA0-A47B-53A376C569C5}"/>
+                <a16:creationId xmlns:a16="http://schemas.microsoft.com/office/drawing/2014/main" id="{219087C9-1269-4763-8996-6429E246029D}"/>
               </a:ext>
             </a:extLst>
           </p:cNvPr>
@@ -14025,7 +14025,7 @@
           <p:cNvPr id="23" name="Rectangle: Rounded Corners 22">
             <a:extLst>
               <a:ext uri="{FF2B5EF4-FFF2-40B4-BE49-F238E27FC236}">
-                <a16:creationId xmlns:a16="http://schemas.microsoft.com/office/drawing/2014/main" id="{62F368BE-6DD6-428B-9499-E243E043DCE5}"/>
+                <a16:creationId xmlns:a16="http://schemas.microsoft.com/office/drawing/2014/main" id="{897063FA-C97C-43E7-9E2F-D2DE44125960}"/>
               </a:ext>
             </a:extLst>
           </p:cNvPr>
@@ -14058,7 +14058,7 @@
           <p:cNvPr id="24" name="Rectangle 23">
             <a:extLst>
               <a:ext uri="{FF2B5EF4-FFF2-40B4-BE49-F238E27FC236}">
-                <a16:creationId xmlns:a16="http://schemas.microsoft.com/office/drawing/2014/main" id="{A6A61344-39FD-4FE3-A983-B4A61B5BEB7B}"/>
+                <a16:creationId xmlns:a16="http://schemas.microsoft.com/office/drawing/2014/main" id="{1F38BEF9-1FAC-41A2-8757-9B65D5B0236E}"/>
               </a:ext>
             </a:extLst>
           </p:cNvPr>
@@ -14120,7 +14120,7 @@
           <p:cNvPr id="25" name="Rectangle 24">
             <a:extLst>
               <a:ext uri="{FF2B5EF4-FFF2-40B4-BE49-F238E27FC236}">
-                <a16:creationId xmlns:a16="http://schemas.microsoft.com/office/drawing/2014/main" id="{DDFD3369-E8EC-438D-A6D4-298CA3455B77}"/>
+                <a16:creationId xmlns:a16="http://schemas.microsoft.com/office/drawing/2014/main" id="{945290F2-83BE-456C-9947-F7EC44E88CA5}"/>
               </a:ext>
             </a:extLst>
           </p:cNvPr>
@@ -14151,7 +14151,7 @@
           <p:cNvPr id="26" name="Rectangle 25">
             <a:extLst>
               <a:ext uri="{FF2B5EF4-FFF2-40B4-BE49-F238E27FC236}">
-                <a16:creationId xmlns:a16="http://schemas.microsoft.com/office/drawing/2014/main" id="{AFFDC154-CA3E-4A34-8F8E-0D1FA041625F}"/>
+                <a16:creationId xmlns:a16="http://schemas.microsoft.com/office/drawing/2014/main" id="{EFA1C6E6-768A-4CA7-99F0-51F3FF26E47E}"/>
               </a:ext>
             </a:extLst>
           </p:cNvPr>
@@ -14213,7 +14213,7 @@
           <p:cNvPr id="27" name="Rectangle 26">
             <a:extLst>
               <a:ext uri="{FF2B5EF4-FFF2-40B4-BE49-F238E27FC236}">
-                <a16:creationId xmlns:a16="http://schemas.microsoft.com/office/drawing/2014/main" id="{F6CF0741-ED7B-4033-B5F7-D728071E4809}"/>
+                <a16:creationId xmlns:a16="http://schemas.microsoft.com/office/drawing/2014/main" id="{E613559B-D044-461F-81B8-FAD3819C0CAF}"/>
               </a:ext>
             </a:extLst>
           </p:cNvPr>
@@ -14273,7 +14273,7 @@
     </p:spTree>
     <p:extLst>
       <p:ext uri="{BB962C8B-B14F-4D97-AF65-F5344CB8AC3E}">
-        <p14:creationId xmlns:p14="http://schemas.microsoft.com/office/powerpoint/2010/main" val="2024645315"/>
+        <p14:creationId xmlns:p14="http://schemas.microsoft.com/office/powerpoint/2010/main" val="1846725587"/>
       </p:ext>
     </p:extLst>
   </p:cSld>
@@ -14314,7 +14314,7 @@
             <a:hlinkClick r:id="rId3"/>
             <a:extLst>
               <a:ext uri="{FF2B5EF4-FFF2-40B4-BE49-F238E27FC236}">
-                <a16:creationId xmlns:a16="http://schemas.microsoft.com/office/drawing/2014/main" id="{E3133DC1-7FE6-4F3C-B957-A2EF36D2A66E}"/>
+                <a16:creationId xmlns:a16="http://schemas.microsoft.com/office/drawing/2014/main" id="{DB95488B-2D76-40DE-A578-81A26E1BBA45}"/>
               </a:ext>
             </a:extLst>
           </p:cNvPr>
@@ -14389,7 +14389,7 @@
             <a:hlinkClick r:id="rId4"/>
             <a:extLst>
               <a:ext uri="{FF2B5EF4-FFF2-40B4-BE49-F238E27FC236}">
-                <a16:creationId xmlns:a16="http://schemas.microsoft.com/office/drawing/2014/main" id="{899FD7EF-4736-4737-9DE5-48B7EB1EE58B}"/>
+                <a16:creationId xmlns:a16="http://schemas.microsoft.com/office/drawing/2014/main" id="{8837A9CE-132E-48B4-9926-793D0BBA1026}"/>
               </a:ext>
             </a:extLst>
           </p:cNvPr>
@@ -14463,7 +14463,7 @@
           <p:cNvPr id="3" name="Rectangle 2">
             <a:extLst>
               <a:ext uri="{FF2B5EF4-FFF2-40B4-BE49-F238E27FC236}">
-                <a16:creationId xmlns:a16="http://schemas.microsoft.com/office/drawing/2014/main" id="{2EBAF0F2-F15B-4FCE-8EC6-A91976350EB6}"/>
+                <a16:creationId xmlns:a16="http://schemas.microsoft.com/office/drawing/2014/main" id="{44480472-2F6A-4B13-91EB-FB2E40FAAB5A}"/>
               </a:ext>
             </a:extLst>
           </p:cNvPr>
@@ -14525,7 +14525,7 @@
           <p:cNvPr id="4" name="Rectangle 3">
             <a:extLst>
               <a:ext uri="{FF2B5EF4-FFF2-40B4-BE49-F238E27FC236}">
-                <a16:creationId xmlns:a16="http://schemas.microsoft.com/office/drawing/2014/main" id="{D1FE31A6-937E-4156-93AA-B3B86F4D2E30}"/>
+                <a16:creationId xmlns:a16="http://schemas.microsoft.com/office/drawing/2014/main" id="{DF6531DE-7C0F-4D58-A840-11BCADAD26F1}"/>
               </a:ext>
             </a:extLst>
           </p:cNvPr>
@@ -14587,7 +14587,7 @@
           <p:cNvPr id="5" name="Rectangle 4">
             <a:extLst>
               <a:ext uri="{FF2B5EF4-FFF2-40B4-BE49-F238E27FC236}">
-                <a16:creationId xmlns:a16="http://schemas.microsoft.com/office/drawing/2014/main" id="{53C699EE-A889-4FC6-A30B-F2CE5774E3DB}"/>
+                <a16:creationId xmlns:a16="http://schemas.microsoft.com/office/drawing/2014/main" id="{B6FC91A0-546D-4A46-93BD-BEF3C8A0B6B0}"/>
               </a:ext>
             </a:extLst>
           </p:cNvPr>
@@ -14649,7 +14649,7 @@
           <p:cNvPr id="6" name="Rectangle 5">
             <a:extLst>
               <a:ext uri="{FF2B5EF4-FFF2-40B4-BE49-F238E27FC236}">
-                <a16:creationId xmlns:a16="http://schemas.microsoft.com/office/drawing/2014/main" id="{C2C6170D-C5B9-44FE-B5C1-4BF9D7513068}"/>
+                <a16:creationId xmlns:a16="http://schemas.microsoft.com/office/drawing/2014/main" id="{B3649737-E5B0-4371-B147-D22101172198}"/>
               </a:ext>
             </a:extLst>
           </p:cNvPr>
@@ -14711,7 +14711,7 @@
           <p:cNvPr id="7" name="Rectangle 6">
             <a:extLst>
               <a:ext uri="{FF2B5EF4-FFF2-40B4-BE49-F238E27FC236}">
-                <a16:creationId xmlns:a16="http://schemas.microsoft.com/office/drawing/2014/main" id="{B7804D2F-A640-4164-B9DB-BFA29DAA9890}"/>
+                <a16:creationId xmlns:a16="http://schemas.microsoft.com/office/drawing/2014/main" id="{2DEE1EDD-FB12-45EA-8B98-A25587E9D805}"/>
               </a:ext>
             </a:extLst>
           </p:cNvPr>
@@ -14773,7 +14773,7 @@
           <p:cNvPr id="8" name="Rectangle 7">
             <a:extLst>
               <a:ext uri="{FF2B5EF4-FFF2-40B4-BE49-F238E27FC236}">
-                <a16:creationId xmlns:a16="http://schemas.microsoft.com/office/drawing/2014/main" id="{767C5C75-25C8-4FE5-AFA7-87E452C750B8}"/>
+                <a16:creationId xmlns:a16="http://schemas.microsoft.com/office/drawing/2014/main" id="{82AB15AA-F217-4F67-BCA5-9E75A318BB86}"/>
               </a:ext>
             </a:extLst>
           </p:cNvPr>
@@ -14804,7 +14804,7 @@
           <p:cNvPr id="9" name="Rectangle 8">
             <a:extLst>
               <a:ext uri="{FF2B5EF4-FFF2-40B4-BE49-F238E27FC236}">
-                <a16:creationId xmlns:a16="http://schemas.microsoft.com/office/drawing/2014/main" id="{26B7763D-04FC-42C8-9E7F-94F29BBB0F69}"/>
+                <a16:creationId xmlns:a16="http://schemas.microsoft.com/office/drawing/2014/main" id="{258E1241-B8FE-4352-98F7-726E25D8C08E}"/>
               </a:ext>
             </a:extLst>
           </p:cNvPr>
@@ -14866,7 +14866,7 @@
           <p:cNvPr id="10" name="Rectangle 9">
             <a:extLst>
               <a:ext uri="{FF2B5EF4-FFF2-40B4-BE49-F238E27FC236}">
-                <a16:creationId xmlns:a16="http://schemas.microsoft.com/office/drawing/2014/main" id="{81729900-2115-4D67-8D68-EA3A319B6FFA}"/>
+                <a16:creationId xmlns:a16="http://schemas.microsoft.com/office/drawing/2014/main" id="{19ABBA3A-E0C4-4EAA-B22C-EBD6E1E3E93E}"/>
               </a:ext>
             </a:extLst>
           </p:cNvPr>
@@ -14928,7 +14928,7 @@
           <p:cNvPr id="11" name="Rectangle 10">
             <a:extLst>
               <a:ext uri="{FF2B5EF4-FFF2-40B4-BE49-F238E27FC236}">
-                <a16:creationId xmlns:a16="http://schemas.microsoft.com/office/drawing/2014/main" id="{9701CADA-1F98-4E7F-BFE6-B316551BBEF4}"/>
+                <a16:creationId xmlns:a16="http://schemas.microsoft.com/office/drawing/2014/main" id="{4DD56C88-A1F6-4D75-ABC8-E7D531EFD9A4}"/>
               </a:ext>
             </a:extLst>
           </p:cNvPr>
@@ -14990,7 +14990,7 @@
           <p:cNvPr id="12" name="Rectangle 11">
             <a:extLst>
               <a:ext uri="{FF2B5EF4-FFF2-40B4-BE49-F238E27FC236}">
-                <a16:creationId xmlns:a16="http://schemas.microsoft.com/office/drawing/2014/main" id="{3010BB60-BD81-4F7E-9AB8-D9FB31639196}"/>
+                <a16:creationId xmlns:a16="http://schemas.microsoft.com/office/drawing/2014/main" id="{82B3E1E8-999C-4148-940C-06D589DE24F9}"/>
               </a:ext>
             </a:extLst>
           </p:cNvPr>
@@ -15021,7 +15021,7 @@
           <p:cNvPr id="13" name="Rectangle 12">
             <a:extLst>
               <a:ext uri="{FF2B5EF4-FFF2-40B4-BE49-F238E27FC236}">
-                <a16:creationId xmlns:a16="http://schemas.microsoft.com/office/drawing/2014/main" id="{39C973F0-00B1-4BD8-80D9-266F7F4FF53E}"/>
+                <a16:creationId xmlns:a16="http://schemas.microsoft.com/office/drawing/2014/main" id="{A012D8F8-514D-494D-BEDD-57E7DA81BC91}"/>
               </a:ext>
             </a:extLst>
           </p:cNvPr>
@@ -15083,7 +15083,7 @@
           <p:cNvPr id="14" name="Rectangle 13">
             <a:extLst>
               <a:ext uri="{FF2B5EF4-FFF2-40B4-BE49-F238E27FC236}">
-                <a16:creationId xmlns:a16="http://schemas.microsoft.com/office/drawing/2014/main" id="{32E1B1E7-2C5E-4708-9D0D-1139F79C06AB}"/>
+                <a16:creationId xmlns:a16="http://schemas.microsoft.com/office/drawing/2014/main" id="{771FB028-8086-443F-898A-50B492DF97C9}"/>
               </a:ext>
             </a:extLst>
           </p:cNvPr>
@@ -15145,7 +15145,7 @@
           <p:cNvPr id="15" name="Rectangle 14">
             <a:extLst>
               <a:ext uri="{FF2B5EF4-FFF2-40B4-BE49-F238E27FC236}">
-                <a16:creationId xmlns:a16="http://schemas.microsoft.com/office/drawing/2014/main" id="{FB75FCAC-EB95-4FAC-8263-397BCFDE0FEB}"/>
+                <a16:creationId xmlns:a16="http://schemas.microsoft.com/office/drawing/2014/main" id="{2B4B68E4-DFC1-4959-8D25-B6546DB99F4A}"/>
               </a:ext>
             </a:extLst>
           </p:cNvPr>
@@ -15207,7 +15207,7 @@
           <p:cNvPr id="16" name="Rectangle 15">
             <a:extLst>
               <a:ext uri="{FF2B5EF4-FFF2-40B4-BE49-F238E27FC236}">
-                <a16:creationId xmlns:a16="http://schemas.microsoft.com/office/drawing/2014/main" id="{FD0F2FAC-C30B-4C21-9465-07C19EB52003}"/>
+                <a16:creationId xmlns:a16="http://schemas.microsoft.com/office/drawing/2014/main" id="{5F354B89-3557-4382-9C2C-D50A2F519AB9}"/>
               </a:ext>
             </a:extLst>
           </p:cNvPr>
@@ -15238,7 +15238,7 @@
           <p:cNvPr id="17" name="Rectangle 16">
             <a:extLst>
               <a:ext uri="{FF2B5EF4-FFF2-40B4-BE49-F238E27FC236}">
-                <a16:creationId xmlns:a16="http://schemas.microsoft.com/office/drawing/2014/main" id="{45D0A0DD-EBB6-4AE7-AC4D-EC0B61AAC42C}"/>
+                <a16:creationId xmlns:a16="http://schemas.microsoft.com/office/drawing/2014/main" id="{05B25240-6DAB-431D-93C6-1BEF7DF9BE4D}"/>
               </a:ext>
             </a:extLst>
           </p:cNvPr>
@@ -15300,7 +15300,7 @@
           <p:cNvPr id="18" name="Rectangle 17">
             <a:extLst>
               <a:ext uri="{FF2B5EF4-FFF2-40B4-BE49-F238E27FC236}">
-                <a16:creationId xmlns:a16="http://schemas.microsoft.com/office/drawing/2014/main" id="{1097A16F-F8C0-4D69-B19A-705D45DB7E82}"/>
+                <a16:creationId xmlns:a16="http://schemas.microsoft.com/office/drawing/2014/main" id="{C3E5933E-CE34-4E36-A819-25E2E54C1DA0}"/>
               </a:ext>
             </a:extLst>
           </p:cNvPr>
@@ -15362,7 +15362,7 @@
           <p:cNvPr id="19" name="Rectangle 18">
             <a:extLst>
               <a:ext uri="{FF2B5EF4-FFF2-40B4-BE49-F238E27FC236}">
-                <a16:creationId xmlns:a16="http://schemas.microsoft.com/office/drawing/2014/main" id="{88956D9B-AAFD-48B5-84C2-C035E7AC0CD2}"/>
+                <a16:creationId xmlns:a16="http://schemas.microsoft.com/office/drawing/2014/main" id="{B35CACB9-E1A0-40E4-B92C-33850F2C1381}"/>
               </a:ext>
             </a:extLst>
           </p:cNvPr>
@@ -15424,7 +15424,7 @@
           <p:cNvPr id="20" name="Rectangle 19">
             <a:extLst>
               <a:ext uri="{FF2B5EF4-FFF2-40B4-BE49-F238E27FC236}">
-                <a16:creationId xmlns:a16="http://schemas.microsoft.com/office/drawing/2014/main" id="{D06BADF7-C92E-4399-AAC6-44B8927F81A1}"/>
+                <a16:creationId xmlns:a16="http://schemas.microsoft.com/office/drawing/2014/main" id="{39051A15-26DD-48DC-B100-53EED028A45F}"/>
               </a:ext>
             </a:extLst>
           </p:cNvPr>
@@ -15455,7 +15455,7 @@
           <p:cNvPr id="21" name="Rectangle: Rounded Corners 20">
             <a:extLst>
               <a:ext uri="{FF2B5EF4-FFF2-40B4-BE49-F238E27FC236}">
-                <a16:creationId xmlns:a16="http://schemas.microsoft.com/office/drawing/2014/main" id="{3887A92D-C7B5-4934-8402-7048F208DEF0}"/>
+                <a16:creationId xmlns:a16="http://schemas.microsoft.com/office/drawing/2014/main" id="{D91272CB-6E31-494B-9044-D44DAD91E3AB}"/>
               </a:ext>
             </a:extLst>
           </p:cNvPr>
@@ -15488,7 +15488,7 @@
           <p:cNvPr id="22" name="Rectangle 21">
             <a:extLst>
               <a:ext uri="{FF2B5EF4-FFF2-40B4-BE49-F238E27FC236}">
-                <a16:creationId xmlns:a16="http://schemas.microsoft.com/office/drawing/2014/main" id="{609E790B-BD20-4F3A-8DD5-2EEAB72BA9F6}"/>
+                <a16:creationId xmlns:a16="http://schemas.microsoft.com/office/drawing/2014/main" id="{5B4913DB-7682-4C87-80EC-23CFB4411730}"/>
               </a:ext>
             </a:extLst>
           </p:cNvPr>
@@ -15550,7 +15550,7 @@
           <p:cNvPr id="23" name="Rectangle 22">
             <a:extLst>
               <a:ext uri="{FF2B5EF4-FFF2-40B4-BE49-F238E27FC236}">
-                <a16:creationId xmlns:a16="http://schemas.microsoft.com/office/drawing/2014/main" id="{F5D2A027-AD1D-484C-9273-C82A8674BDEF}"/>
+                <a16:creationId xmlns:a16="http://schemas.microsoft.com/office/drawing/2014/main" id="{6714447E-D68F-48A1-BCA3-4374CEB9C47B}"/>
               </a:ext>
             </a:extLst>
           </p:cNvPr>
@@ -15581,7 +15581,7 @@
           <p:cNvPr id="24" name="Rectangle 23">
             <a:extLst>
               <a:ext uri="{FF2B5EF4-FFF2-40B4-BE49-F238E27FC236}">
-                <a16:creationId xmlns:a16="http://schemas.microsoft.com/office/drawing/2014/main" id="{0E3AC773-6125-4664-AED1-24DA578F9854}"/>
+                <a16:creationId xmlns:a16="http://schemas.microsoft.com/office/drawing/2014/main" id="{85A64F0A-468C-43B8-B051-EC5F68FFE31A}"/>
               </a:ext>
             </a:extLst>
           </p:cNvPr>
@@ -15643,7 +15643,7 @@
           <p:cNvPr id="25" name="Rectangle 24">
             <a:extLst>
               <a:ext uri="{FF2B5EF4-FFF2-40B4-BE49-F238E27FC236}">
-                <a16:creationId xmlns:a16="http://schemas.microsoft.com/office/drawing/2014/main" id="{A1323603-AE79-4F2D-A8C8-E422FC969FBF}"/>
+                <a16:creationId xmlns:a16="http://schemas.microsoft.com/office/drawing/2014/main" id="{E1C30A6B-819C-4807-9E72-09B25025D167}"/>
               </a:ext>
             </a:extLst>
           </p:cNvPr>
@@ -15703,7 +15703,7 @@
     </p:spTree>
     <p:extLst>
       <p:ext uri="{BB962C8B-B14F-4D97-AF65-F5344CB8AC3E}">
-        <p14:creationId xmlns:p14="http://schemas.microsoft.com/office/powerpoint/2010/main" val="606124479"/>
+        <p14:creationId xmlns:p14="http://schemas.microsoft.com/office/powerpoint/2010/main" val="1241265964"/>
       </p:ext>
     </p:extLst>
   </p:cSld>
@@ -15744,7 +15744,7 @@
             <a:hlinkClick r:id="rId3"/>
             <a:extLst>
               <a:ext uri="{FF2B5EF4-FFF2-40B4-BE49-F238E27FC236}">
-                <a16:creationId xmlns:a16="http://schemas.microsoft.com/office/drawing/2014/main" id="{86C79733-5B61-4FA2-A4A9-08583565F74F}"/>
+                <a16:creationId xmlns:a16="http://schemas.microsoft.com/office/drawing/2014/main" id="{B8C1A109-BCDC-4BA6-A05C-ECFA0AEA8BB5}"/>
               </a:ext>
             </a:extLst>
           </p:cNvPr>
@@ -15819,7 +15819,7 @@
             <a:hlinkClick r:id="rId4"/>
             <a:extLst>
               <a:ext uri="{FF2B5EF4-FFF2-40B4-BE49-F238E27FC236}">
-                <a16:creationId xmlns:a16="http://schemas.microsoft.com/office/drawing/2014/main" id="{069A8D77-2B51-464E-B389-A68747A9DB5D}"/>
+                <a16:creationId xmlns:a16="http://schemas.microsoft.com/office/drawing/2014/main" id="{36EDBD7B-4306-4CB2-95B1-94780C6CD841}"/>
               </a:ext>
             </a:extLst>
           </p:cNvPr>
@@ -15893,7 +15893,7 @@
           <p:cNvPr id="3" name="Rectangle 2">
             <a:extLst>
               <a:ext uri="{FF2B5EF4-FFF2-40B4-BE49-F238E27FC236}">
-                <a16:creationId xmlns:a16="http://schemas.microsoft.com/office/drawing/2014/main" id="{2C4A335C-DE76-45AB-803C-DFE50987FE61}"/>
+                <a16:creationId xmlns:a16="http://schemas.microsoft.com/office/drawing/2014/main" id="{A094BD29-25E0-4FEC-B230-7095D5787395}"/>
               </a:ext>
             </a:extLst>
           </p:cNvPr>
@@ -15955,7 +15955,7 @@
           <p:cNvPr id="4" name="Rectangle 3">
             <a:extLst>
               <a:ext uri="{FF2B5EF4-FFF2-40B4-BE49-F238E27FC236}">
-                <a16:creationId xmlns:a16="http://schemas.microsoft.com/office/drawing/2014/main" id="{E344E912-C79E-4585-BEFD-6931640B5D0A}"/>
+                <a16:creationId xmlns:a16="http://schemas.microsoft.com/office/drawing/2014/main" id="{E60F649D-5634-4066-AA17-A329E7B4A1F0}"/>
               </a:ext>
             </a:extLst>
           </p:cNvPr>
@@ -16017,7 +16017,7 @@
           <p:cNvPr id="5" name="Rectangle 4">
             <a:extLst>
               <a:ext uri="{FF2B5EF4-FFF2-40B4-BE49-F238E27FC236}">
-                <a16:creationId xmlns:a16="http://schemas.microsoft.com/office/drawing/2014/main" id="{24BAFFFF-B77B-4C96-9A58-B64203BFB822}"/>
+                <a16:creationId xmlns:a16="http://schemas.microsoft.com/office/drawing/2014/main" id="{302E0B3C-6C68-487E-B41D-627D19E93D81}"/>
               </a:ext>
             </a:extLst>
           </p:cNvPr>
@@ -16079,7 +16079,7 @@
           <p:cNvPr id="6" name="Rectangle 5">
             <a:extLst>
               <a:ext uri="{FF2B5EF4-FFF2-40B4-BE49-F238E27FC236}">
-                <a16:creationId xmlns:a16="http://schemas.microsoft.com/office/drawing/2014/main" id="{21F34707-7A90-42FE-B67E-533C52E42D80}"/>
+                <a16:creationId xmlns:a16="http://schemas.microsoft.com/office/drawing/2014/main" id="{10A18FF7-3772-4D89-AC49-45CBE1023924}"/>
               </a:ext>
             </a:extLst>
           </p:cNvPr>
@@ -16141,7 +16141,7 @@
           <p:cNvPr id="7" name="Rectangle: Rounded Corners 6">
             <a:extLst>
               <a:ext uri="{FF2B5EF4-FFF2-40B4-BE49-F238E27FC236}">
-                <a16:creationId xmlns:a16="http://schemas.microsoft.com/office/drawing/2014/main" id="{3DECA493-4737-47F6-9967-EF551A69C57A}"/>
+                <a16:creationId xmlns:a16="http://schemas.microsoft.com/office/drawing/2014/main" id="{0B74EF87-525D-4F5A-8745-CB175DC2C7A6}"/>
               </a:ext>
             </a:extLst>
           </p:cNvPr>
@@ -16174,7 +16174,7 @@
           <p:cNvPr id="8" name="Rectangle 7">
             <a:extLst>
               <a:ext uri="{FF2B5EF4-FFF2-40B4-BE49-F238E27FC236}">
-                <a16:creationId xmlns:a16="http://schemas.microsoft.com/office/drawing/2014/main" id="{15D8566C-118F-4E99-873B-413156385022}"/>
+                <a16:creationId xmlns:a16="http://schemas.microsoft.com/office/drawing/2014/main" id="{2067D5FF-4E5C-490C-8088-FC75A323AE82}"/>
               </a:ext>
             </a:extLst>
           </p:cNvPr>
@@ -16236,7 +16236,7 @@
           <p:cNvPr id="9" name="Rectangle: Rounded Corners 8">
             <a:extLst>
               <a:ext uri="{FF2B5EF4-FFF2-40B4-BE49-F238E27FC236}">
-                <a16:creationId xmlns:a16="http://schemas.microsoft.com/office/drawing/2014/main" id="{53733E5C-855B-4109-882B-FCC8FEBF1B9E}"/>
+                <a16:creationId xmlns:a16="http://schemas.microsoft.com/office/drawing/2014/main" id="{37F349AC-10BD-4AD9-82E8-8A06C88D62FE}"/>
               </a:ext>
             </a:extLst>
           </p:cNvPr>
@@ -16269,7 +16269,7 @@
           <p:cNvPr id="10" name="Rectangle 9">
             <a:extLst>
               <a:ext uri="{FF2B5EF4-FFF2-40B4-BE49-F238E27FC236}">
-                <a16:creationId xmlns:a16="http://schemas.microsoft.com/office/drawing/2014/main" id="{75950011-1A1F-4D76-A124-D295299CA285}"/>
+                <a16:creationId xmlns:a16="http://schemas.microsoft.com/office/drawing/2014/main" id="{496A5D6D-D38B-4D49-B3EB-3F56A5A7B174}"/>
               </a:ext>
             </a:extLst>
           </p:cNvPr>
@@ -16331,7 +16331,7 @@
           <p:cNvPr id="11" name="Rectangle: Rounded Corners 10">
             <a:extLst>
               <a:ext uri="{FF2B5EF4-FFF2-40B4-BE49-F238E27FC236}">
-                <a16:creationId xmlns:a16="http://schemas.microsoft.com/office/drawing/2014/main" id="{D3384FC0-AD45-4ACB-8410-96334B043FA0}"/>
+                <a16:creationId xmlns:a16="http://schemas.microsoft.com/office/drawing/2014/main" id="{4A4631E3-211A-4669-ABD6-D82571FDD8A8}"/>
               </a:ext>
             </a:extLst>
           </p:cNvPr>
@@ -16364,7 +16364,7 @@
           <p:cNvPr id="12" name="Rectangle 11">
             <a:extLst>
               <a:ext uri="{FF2B5EF4-FFF2-40B4-BE49-F238E27FC236}">
-                <a16:creationId xmlns:a16="http://schemas.microsoft.com/office/drawing/2014/main" id="{F353A269-BA5B-430D-9FCB-3DDD8264BE35}"/>
+                <a16:creationId xmlns:a16="http://schemas.microsoft.com/office/drawing/2014/main" id="{0F396861-31C8-4CE0-A903-FC19CE196A31}"/>
               </a:ext>
             </a:extLst>
           </p:cNvPr>
@@ -16426,7 +16426,7 @@
           <p:cNvPr id="13" name="Rectangle: Rounded Corners 12">
             <a:extLst>
               <a:ext uri="{FF2B5EF4-FFF2-40B4-BE49-F238E27FC236}">
-                <a16:creationId xmlns:a16="http://schemas.microsoft.com/office/drawing/2014/main" id="{49AE17CF-D1E0-40A5-A1E8-D43D00D26F75}"/>
+                <a16:creationId xmlns:a16="http://schemas.microsoft.com/office/drawing/2014/main" id="{B728E134-C438-4EB8-ABA9-7575A556BA08}"/>
               </a:ext>
             </a:extLst>
           </p:cNvPr>
@@ -16459,7 +16459,7 @@
           <p:cNvPr id="14" name="Rectangle 13">
             <a:extLst>
               <a:ext uri="{FF2B5EF4-FFF2-40B4-BE49-F238E27FC236}">
-                <a16:creationId xmlns:a16="http://schemas.microsoft.com/office/drawing/2014/main" id="{AAF68081-0562-4B7F-A496-8EDA2FF60649}"/>
+                <a16:creationId xmlns:a16="http://schemas.microsoft.com/office/drawing/2014/main" id="{1DE97BCE-36C6-4D95-88C8-D4809B8E1BAC}"/>
               </a:ext>
             </a:extLst>
           </p:cNvPr>
@@ -16521,7 +16521,7 @@
           <p:cNvPr id="15" name="Rectangle: Rounded Corners 14">
             <a:extLst>
               <a:ext uri="{FF2B5EF4-FFF2-40B4-BE49-F238E27FC236}">
-                <a16:creationId xmlns:a16="http://schemas.microsoft.com/office/drawing/2014/main" id="{47B0D8DE-DE7A-4BB4-BD91-F40C5D91B90C}"/>
+                <a16:creationId xmlns:a16="http://schemas.microsoft.com/office/drawing/2014/main" id="{EE0B97E9-732E-47AD-A651-B42C53D7C375}"/>
               </a:ext>
             </a:extLst>
           </p:cNvPr>
@@ -16554,7 +16554,7 @@
           <p:cNvPr id="16" name="Rectangle 15">
             <a:extLst>
               <a:ext uri="{FF2B5EF4-FFF2-40B4-BE49-F238E27FC236}">
-                <a16:creationId xmlns:a16="http://schemas.microsoft.com/office/drawing/2014/main" id="{D6C539F1-D531-4CEF-AD1E-9ECE15D541BA}"/>
+                <a16:creationId xmlns:a16="http://schemas.microsoft.com/office/drawing/2014/main" id="{69589209-83E4-4FF8-BE38-2D08D973A880}"/>
               </a:ext>
             </a:extLst>
           </p:cNvPr>
@@ -16616,7 +16616,7 @@
           <p:cNvPr id="17" name="Rectangle: Rounded Corners 16">
             <a:extLst>
               <a:ext uri="{FF2B5EF4-FFF2-40B4-BE49-F238E27FC236}">
-                <a16:creationId xmlns:a16="http://schemas.microsoft.com/office/drawing/2014/main" id="{2F031881-DC3B-4B2E-A397-934BADEC5B00}"/>
+                <a16:creationId xmlns:a16="http://schemas.microsoft.com/office/drawing/2014/main" id="{FF13C3AA-9515-4413-930D-35B4251A1169}"/>
               </a:ext>
             </a:extLst>
           </p:cNvPr>
@@ -16649,7 +16649,7 @@
           <p:cNvPr id="18" name="Rectangle 17">
             <a:extLst>
               <a:ext uri="{FF2B5EF4-FFF2-40B4-BE49-F238E27FC236}">
-                <a16:creationId xmlns:a16="http://schemas.microsoft.com/office/drawing/2014/main" id="{E3D01337-6B97-4BE4-967B-99DB1B85233E}"/>
+                <a16:creationId xmlns:a16="http://schemas.microsoft.com/office/drawing/2014/main" id="{3C398094-A1CB-41F3-BF7C-FB2B2DCFB3F8}"/>
               </a:ext>
             </a:extLst>
           </p:cNvPr>
@@ -16711,7 +16711,7 @@
           <p:cNvPr id="19" name="Rectangle: Rounded Corners 18">
             <a:extLst>
               <a:ext uri="{FF2B5EF4-FFF2-40B4-BE49-F238E27FC236}">
-                <a16:creationId xmlns:a16="http://schemas.microsoft.com/office/drawing/2014/main" id="{BE919159-F7B1-4ADB-A95D-9E02166518AD}"/>
+                <a16:creationId xmlns:a16="http://schemas.microsoft.com/office/drawing/2014/main" id="{2C7A2C26-E348-4390-95DA-5836DE09AD57}"/>
               </a:ext>
             </a:extLst>
           </p:cNvPr>
@@ -16744,7 +16744,7 @@
           <p:cNvPr id="20" name="Rectangle 19">
             <a:extLst>
               <a:ext uri="{FF2B5EF4-FFF2-40B4-BE49-F238E27FC236}">
-                <a16:creationId xmlns:a16="http://schemas.microsoft.com/office/drawing/2014/main" id="{A2B73B42-D048-46ED-9598-09F9AB997823}"/>
+                <a16:creationId xmlns:a16="http://schemas.microsoft.com/office/drawing/2014/main" id="{873DDC49-C8B6-40E9-88AA-2792387B4FD5}"/>
               </a:ext>
             </a:extLst>
           </p:cNvPr>
@@ -16806,7 +16806,7 @@
           <p:cNvPr id="21" name="Rectangle: Rounded Corners 20">
             <a:extLst>
               <a:ext uri="{FF2B5EF4-FFF2-40B4-BE49-F238E27FC236}">
-                <a16:creationId xmlns:a16="http://schemas.microsoft.com/office/drawing/2014/main" id="{C9E2E89C-E360-4BE5-8D72-0EC66E0FCCC6}"/>
+                <a16:creationId xmlns:a16="http://schemas.microsoft.com/office/drawing/2014/main" id="{31C8FA20-B324-4B56-96B3-F9DFE61B8778}"/>
               </a:ext>
             </a:extLst>
           </p:cNvPr>
@@ -16839,7 +16839,7 @@
           <p:cNvPr id="22" name="Rectangle 21">
             <a:extLst>
               <a:ext uri="{FF2B5EF4-FFF2-40B4-BE49-F238E27FC236}">
-                <a16:creationId xmlns:a16="http://schemas.microsoft.com/office/drawing/2014/main" id="{1FBC34D1-780B-45DD-9510-B8DD27A8D233}"/>
+                <a16:creationId xmlns:a16="http://schemas.microsoft.com/office/drawing/2014/main" id="{75F2FCDA-2015-4DCD-B33D-E69FFE8C9DA8}"/>
               </a:ext>
             </a:extLst>
           </p:cNvPr>
@@ -16901,7 +16901,7 @@
           <p:cNvPr id="23" name="Rectangle 22">
             <a:extLst>
               <a:ext uri="{FF2B5EF4-FFF2-40B4-BE49-F238E27FC236}">
-                <a16:creationId xmlns:a16="http://schemas.microsoft.com/office/drawing/2014/main" id="{318485DC-FC8B-4C53-A489-B84984BE6D44}"/>
+                <a16:creationId xmlns:a16="http://schemas.microsoft.com/office/drawing/2014/main" id="{05ED1058-590E-40B1-B880-B969BBD75D28}"/>
               </a:ext>
             </a:extLst>
           </p:cNvPr>
@@ -16963,7 +16963,7 @@
           <p:cNvPr id="24" name="Rectangle: Rounded Corners 23">
             <a:extLst>
               <a:ext uri="{FF2B5EF4-FFF2-40B4-BE49-F238E27FC236}">
-                <a16:creationId xmlns:a16="http://schemas.microsoft.com/office/drawing/2014/main" id="{30D18910-CB5F-4B70-B56F-3CB2236461D5}"/>
+                <a16:creationId xmlns:a16="http://schemas.microsoft.com/office/drawing/2014/main" id="{C8FA73D8-5AB6-4AA9-910E-22A9203BD2CC}"/>
               </a:ext>
             </a:extLst>
           </p:cNvPr>
@@ -16996,7 +16996,7 @@
           <p:cNvPr id="25" name="Rectangle 24">
             <a:extLst>
               <a:ext uri="{FF2B5EF4-FFF2-40B4-BE49-F238E27FC236}">
-                <a16:creationId xmlns:a16="http://schemas.microsoft.com/office/drawing/2014/main" id="{58D9D83E-8AA4-419B-91B8-920DE8181599}"/>
+                <a16:creationId xmlns:a16="http://schemas.microsoft.com/office/drawing/2014/main" id="{C056FC36-B286-4F41-9F63-A8439BCDFC6F}"/>
               </a:ext>
             </a:extLst>
           </p:cNvPr>
@@ -17058,7 +17058,7 @@
           <p:cNvPr id="26" name="Rectangle: Rounded Corners 25">
             <a:extLst>
               <a:ext uri="{FF2B5EF4-FFF2-40B4-BE49-F238E27FC236}">
-                <a16:creationId xmlns:a16="http://schemas.microsoft.com/office/drawing/2014/main" id="{2BE0C9C5-664A-4F87-8192-CB5B54E778CB}"/>
+                <a16:creationId xmlns:a16="http://schemas.microsoft.com/office/drawing/2014/main" id="{28FE22F1-A837-4D79-B8AB-79ABE7E5C0B0}"/>
               </a:ext>
             </a:extLst>
           </p:cNvPr>
@@ -17091,7 +17091,7 @@
           <p:cNvPr id="27" name="Rectangle 26">
             <a:extLst>
               <a:ext uri="{FF2B5EF4-FFF2-40B4-BE49-F238E27FC236}">
-                <a16:creationId xmlns:a16="http://schemas.microsoft.com/office/drawing/2014/main" id="{8B0E4451-7399-46C4-B486-1DD75493F8E7}"/>
+                <a16:creationId xmlns:a16="http://schemas.microsoft.com/office/drawing/2014/main" id="{D8818569-7468-47B2-8D1D-B0DD27DF70C3}"/>
               </a:ext>
             </a:extLst>
           </p:cNvPr>
@@ -17153,7 +17153,7 @@
           <p:cNvPr id="28" name="Rectangle: Rounded Corners 27">
             <a:extLst>
               <a:ext uri="{FF2B5EF4-FFF2-40B4-BE49-F238E27FC236}">
-                <a16:creationId xmlns:a16="http://schemas.microsoft.com/office/drawing/2014/main" id="{09C79AC3-9862-4526-A26E-707E7F8B4725}"/>
+                <a16:creationId xmlns:a16="http://schemas.microsoft.com/office/drawing/2014/main" id="{3693C117-7763-4046-B6A3-EDB31D1DE7D1}"/>
               </a:ext>
             </a:extLst>
           </p:cNvPr>
@@ -17186,7 +17186,7 @@
           <p:cNvPr id="29" name="Rectangle 28">
             <a:extLst>
               <a:ext uri="{FF2B5EF4-FFF2-40B4-BE49-F238E27FC236}">
-                <a16:creationId xmlns:a16="http://schemas.microsoft.com/office/drawing/2014/main" id="{AE28444F-3056-4410-9503-49EB63E02644}"/>
+                <a16:creationId xmlns:a16="http://schemas.microsoft.com/office/drawing/2014/main" id="{8D7C6736-4E08-47E6-8E7A-53D43F1E425B}"/>
               </a:ext>
             </a:extLst>
           </p:cNvPr>
@@ -17248,7 +17248,7 @@
           <p:cNvPr id="30" name="Rectangle: Rounded Corners 29">
             <a:extLst>
               <a:ext uri="{FF2B5EF4-FFF2-40B4-BE49-F238E27FC236}">
-                <a16:creationId xmlns:a16="http://schemas.microsoft.com/office/drawing/2014/main" id="{55A6D5C0-1E42-4704-AF4F-0A535C99440F}"/>
+                <a16:creationId xmlns:a16="http://schemas.microsoft.com/office/drawing/2014/main" id="{A9F2AE57-E80E-438A-843E-FF10C8C339B2}"/>
               </a:ext>
             </a:extLst>
           </p:cNvPr>
@@ -17281,7 +17281,7 @@
           <p:cNvPr id="31" name="Rectangle 30">
             <a:extLst>
               <a:ext uri="{FF2B5EF4-FFF2-40B4-BE49-F238E27FC236}">
-                <a16:creationId xmlns:a16="http://schemas.microsoft.com/office/drawing/2014/main" id="{F4B64A5A-D2BB-4867-AB82-68569F1CA4C4}"/>
+                <a16:creationId xmlns:a16="http://schemas.microsoft.com/office/drawing/2014/main" id="{A9F72E18-88F4-47A6-B915-DEA3A6209B5F}"/>
               </a:ext>
             </a:extLst>
           </p:cNvPr>
@@ -17343,7 +17343,7 @@
           <p:cNvPr id="32" name="Rectangle: Rounded Corners 31">
             <a:extLst>
               <a:ext uri="{FF2B5EF4-FFF2-40B4-BE49-F238E27FC236}">
-                <a16:creationId xmlns:a16="http://schemas.microsoft.com/office/drawing/2014/main" id="{92374A7A-6FEC-4193-BB63-C218C685DE1B}"/>
+                <a16:creationId xmlns:a16="http://schemas.microsoft.com/office/drawing/2014/main" id="{B372E22A-87D4-4AFE-8207-F3BD27C59177}"/>
               </a:ext>
             </a:extLst>
           </p:cNvPr>
@@ -17376,7 +17376,7 @@
           <p:cNvPr id="33" name="Rectangle 32">
             <a:extLst>
               <a:ext uri="{FF2B5EF4-FFF2-40B4-BE49-F238E27FC236}">
-                <a16:creationId xmlns:a16="http://schemas.microsoft.com/office/drawing/2014/main" id="{06749553-D86A-4668-8C8A-A0F15E5D2E47}"/>
+                <a16:creationId xmlns:a16="http://schemas.microsoft.com/office/drawing/2014/main" id="{C2126BC7-4E13-4957-A103-17D3E11DAAF5}"/>
               </a:ext>
             </a:extLst>
           </p:cNvPr>
@@ -17438,7 +17438,7 @@
           <p:cNvPr id="34" name="Rectangle: Rounded Corners 33">
             <a:extLst>
               <a:ext uri="{FF2B5EF4-FFF2-40B4-BE49-F238E27FC236}">
-                <a16:creationId xmlns:a16="http://schemas.microsoft.com/office/drawing/2014/main" id="{4F9F5DB8-7D98-4A59-B3B2-D4120AB385C6}"/>
+                <a16:creationId xmlns:a16="http://schemas.microsoft.com/office/drawing/2014/main" id="{35321C2F-13BE-472C-A989-CB5F70602814}"/>
               </a:ext>
             </a:extLst>
           </p:cNvPr>
@@ -17471,7 +17471,7 @@
           <p:cNvPr id="35" name="Rectangle 34">
             <a:extLst>
               <a:ext uri="{FF2B5EF4-FFF2-40B4-BE49-F238E27FC236}">
-                <a16:creationId xmlns:a16="http://schemas.microsoft.com/office/drawing/2014/main" id="{77A30978-223B-4AD0-A990-D57CB36463E6}"/>
+                <a16:creationId xmlns:a16="http://schemas.microsoft.com/office/drawing/2014/main" id="{E35EF57B-2109-4658-9B92-3DEF7FBB5335}"/>
               </a:ext>
             </a:extLst>
           </p:cNvPr>
@@ -17533,7 +17533,7 @@
           <p:cNvPr id="36" name="Rectangle 35">
             <a:extLst>
               <a:ext uri="{FF2B5EF4-FFF2-40B4-BE49-F238E27FC236}">
-                <a16:creationId xmlns:a16="http://schemas.microsoft.com/office/drawing/2014/main" id="{716C794C-2F24-4372-A662-9CB3932BAF4A}"/>
+                <a16:creationId xmlns:a16="http://schemas.microsoft.com/office/drawing/2014/main" id="{89E0CC22-DE1B-44DF-8E47-987D9369C1CC}"/>
               </a:ext>
             </a:extLst>
           </p:cNvPr>
@@ -17595,7 +17595,7 @@
           <p:cNvPr id="37" name="Rectangle 36">
             <a:extLst>
               <a:ext uri="{FF2B5EF4-FFF2-40B4-BE49-F238E27FC236}">
-                <a16:creationId xmlns:a16="http://schemas.microsoft.com/office/drawing/2014/main" id="{E92D9C1F-7566-4C05-B3DA-F812B07CD5B3}"/>
+                <a16:creationId xmlns:a16="http://schemas.microsoft.com/office/drawing/2014/main" id="{E4956DD1-8019-4A8C-9A97-781513B5BF79}"/>
               </a:ext>
             </a:extLst>
           </p:cNvPr>
@@ -17657,7 +17657,7 @@
           <p:cNvPr id="38" name="Rectangle 37">
             <a:extLst>
               <a:ext uri="{FF2B5EF4-FFF2-40B4-BE49-F238E27FC236}">
-                <a16:creationId xmlns:a16="http://schemas.microsoft.com/office/drawing/2014/main" id="{F46C43AF-DE4E-4FB2-A8C6-3FD896F6F926}"/>
+                <a16:creationId xmlns:a16="http://schemas.microsoft.com/office/drawing/2014/main" id="{21087BDC-D968-42B2-AAC2-F48D2DD04598}"/>
               </a:ext>
             </a:extLst>
           </p:cNvPr>
@@ -17688,7 +17688,7 @@
           <p:cNvPr id="39" name="Rectangle 38">
             <a:extLst>
               <a:ext uri="{FF2B5EF4-FFF2-40B4-BE49-F238E27FC236}">
-                <a16:creationId xmlns:a16="http://schemas.microsoft.com/office/drawing/2014/main" id="{94FBF1DD-2E2D-4925-B1D9-FDC7F77A1AB4}"/>
+                <a16:creationId xmlns:a16="http://schemas.microsoft.com/office/drawing/2014/main" id="{46CFCB87-3117-4FD1-A679-18F942DB13F6}"/>
               </a:ext>
             </a:extLst>
           </p:cNvPr>
@@ -17750,7 +17750,7 @@
           <p:cNvPr id="40" name="Rectangle 39">
             <a:extLst>
               <a:ext uri="{FF2B5EF4-FFF2-40B4-BE49-F238E27FC236}">
-                <a16:creationId xmlns:a16="http://schemas.microsoft.com/office/drawing/2014/main" id="{9B222FAC-DC18-41BA-BCE3-9A486EA4A426}"/>
+                <a16:creationId xmlns:a16="http://schemas.microsoft.com/office/drawing/2014/main" id="{F6A797D6-2A47-43CD-85BF-9117D2E816AB}"/>
               </a:ext>
             </a:extLst>
           </p:cNvPr>
@@ -17810,7 +17810,7 @@
     </p:spTree>
     <p:extLst>
       <p:ext uri="{BB962C8B-B14F-4D97-AF65-F5344CB8AC3E}">
-        <p14:creationId xmlns:p14="http://schemas.microsoft.com/office/powerpoint/2010/main" val="690345450"/>
+        <p14:creationId xmlns:p14="http://schemas.microsoft.com/office/powerpoint/2010/main" val="859352617"/>
       </p:ext>
     </p:extLst>
   </p:cSld>
@@ -17851,7 +17851,7 @@
             <a:hlinkClick r:id="rId3"/>
             <a:extLst>
               <a:ext uri="{FF2B5EF4-FFF2-40B4-BE49-F238E27FC236}">
-                <a16:creationId xmlns:a16="http://schemas.microsoft.com/office/drawing/2014/main" id="{F014E50A-20F9-4198-8A32-C90679CA5895}"/>
+                <a16:creationId xmlns:a16="http://schemas.microsoft.com/office/drawing/2014/main" id="{41072264-2E1B-4D1D-B6CF-D2BC003F5823}"/>
               </a:ext>
             </a:extLst>
           </p:cNvPr>
@@ -17926,7 +17926,7 @@
             <a:hlinkClick r:id="rId4"/>
             <a:extLst>
               <a:ext uri="{FF2B5EF4-FFF2-40B4-BE49-F238E27FC236}">
-                <a16:creationId xmlns:a16="http://schemas.microsoft.com/office/drawing/2014/main" id="{35BB961A-11FC-46FF-B814-570104426D1D}"/>
+                <a16:creationId xmlns:a16="http://schemas.microsoft.com/office/drawing/2014/main" id="{00A93963-A072-4C45-A168-E24CF3E32C76}"/>
               </a:ext>
             </a:extLst>
           </p:cNvPr>
@@ -18000,7 +18000,7 @@
           <p:cNvPr id="3" name="Rectangle 2">
             <a:extLst>
               <a:ext uri="{FF2B5EF4-FFF2-40B4-BE49-F238E27FC236}">
-                <a16:creationId xmlns:a16="http://schemas.microsoft.com/office/drawing/2014/main" id="{ABAB8F47-7EF7-4700-9506-DF81A9FA30C6}"/>
+                <a16:creationId xmlns:a16="http://schemas.microsoft.com/office/drawing/2014/main" id="{16BDC56B-571F-4A81-AD91-5EFE4CBB4097}"/>
               </a:ext>
             </a:extLst>
           </p:cNvPr>
@@ -18062,7 +18062,7 @@
           <p:cNvPr id="4" name="Rectangle 3">
             <a:extLst>
               <a:ext uri="{FF2B5EF4-FFF2-40B4-BE49-F238E27FC236}">
-                <a16:creationId xmlns:a16="http://schemas.microsoft.com/office/drawing/2014/main" id="{FE93B2F7-882C-4199-A7B3-808C53B76B70}"/>
+                <a16:creationId xmlns:a16="http://schemas.microsoft.com/office/drawing/2014/main" id="{472B8FB0-0188-4560-93F8-5393FD79D2D7}"/>
               </a:ext>
             </a:extLst>
           </p:cNvPr>
@@ -18151,7 +18151,7 @@
           <p:cNvPr id="6" name="Rectangle: Rounded Corners 5">
             <a:extLst>
               <a:ext uri="{FF2B5EF4-FFF2-40B4-BE49-F238E27FC236}">
-                <a16:creationId xmlns:a16="http://schemas.microsoft.com/office/drawing/2014/main" id="{378B2F2E-C4A9-41B0-BC0F-BB6BCAC48AAA}"/>
+                <a16:creationId xmlns:a16="http://schemas.microsoft.com/office/drawing/2014/main" id="{BA79AEBB-162A-4464-8055-F1074179525D}"/>
               </a:ext>
             </a:extLst>
           </p:cNvPr>
@@ -18184,7 +18184,7 @@
           <p:cNvPr id="7" name="Rectangle 6">
             <a:extLst>
               <a:ext uri="{FF2B5EF4-FFF2-40B4-BE49-F238E27FC236}">
-                <a16:creationId xmlns:a16="http://schemas.microsoft.com/office/drawing/2014/main" id="{F1850FE8-D3E7-42C0-97E7-305A99C92F63}"/>
+                <a16:creationId xmlns:a16="http://schemas.microsoft.com/office/drawing/2014/main" id="{9F1DCDB7-DD4C-4502-81E7-57694C391B67}"/>
               </a:ext>
             </a:extLst>
           </p:cNvPr>
@@ -18246,7 +18246,7 @@
           <p:cNvPr id="8" name="Rectangle 7">
             <a:extLst>
               <a:ext uri="{FF2B5EF4-FFF2-40B4-BE49-F238E27FC236}">
-                <a16:creationId xmlns:a16="http://schemas.microsoft.com/office/drawing/2014/main" id="{A23C0D30-F0A6-49F0-A2AF-5D57A680EBF3}"/>
+                <a16:creationId xmlns:a16="http://schemas.microsoft.com/office/drawing/2014/main" id="{3BD657F3-3F2C-4F64-A4AA-8359C1A45253}"/>
               </a:ext>
             </a:extLst>
           </p:cNvPr>
@@ -18308,7 +18308,7 @@
           <p:cNvPr id="9" name="Rectangle 8">
             <a:extLst>
               <a:ext uri="{FF2B5EF4-FFF2-40B4-BE49-F238E27FC236}">
-                <a16:creationId xmlns:a16="http://schemas.microsoft.com/office/drawing/2014/main" id="{A8C00DC2-839D-4DAF-A9A6-5D4F01D2B094}"/>
+                <a16:creationId xmlns:a16="http://schemas.microsoft.com/office/drawing/2014/main" id="{7B31497E-094C-4F42-B857-3C9E98497F04}"/>
               </a:ext>
             </a:extLst>
           </p:cNvPr>
@@ -18339,7 +18339,7 @@
           <p:cNvPr id="10" name="Rectangle 9">
             <a:extLst>
               <a:ext uri="{FF2B5EF4-FFF2-40B4-BE49-F238E27FC236}">
-                <a16:creationId xmlns:a16="http://schemas.microsoft.com/office/drawing/2014/main" id="{1ECA28A3-8278-4020-AC57-6B6D152F4C5C}"/>
+                <a16:creationId xmlns:a16="http://schemas.microsoft.com/office/drawing/2014/main" id="{A1B48A55-4420-4E90-8269-41B933E777B5}"/>
               </a:ext>
             </a:extLst>
           </p:cNvPr>
@@ -18401,7 +18401,7 @@
           <p:cNvPr id="11" name="Rectangle 10">
             <a:extLst>
               <a:ext uri="{FF2B5EF4-FFF2-40B4-BE49-F238E27FC236}">
-                <a16:creationId xmlns:a16="http://schemas.microsoft.com/office/drawing/2014/main" id="{36CB7ADD-4E24-4361-97AB-24324B6948EF}"/>
+                <a16:creationId xmlns:a16="http://schemas.microsoft.com/office/drawing/2014/main" id="{1C579F76-00A7-4E89-9DFE-A9BC03399E77}"/>
               </a:ext>
             </a:extLst>
           </p:cNvPr>
@@ -18463,7 +18463,7 @@
           <p:cNvPr id="12" name="Rectangle 11">
             <a:extLst>
               <a:ext uri="{FF2B5EF4-FFF2-40B4-BE49-F238E27FC236}">
-                <a16:creationId xmlns:a16="http://schemas.microsoft.com/office/drawing/2014/main" id="{B2F0FDB0-8FB3-4780-B737-3D40DF7DDD6E}"/>
+                <a16:creationId xmlns:a16="http://schemas.microsoft.com/office/drawing/2014/main" id="{349DEA5F-109F-4317-93A3-9AECDD4AE86E}"/>
               </a:ext>
             </a:extLst>
           </p:cNvPr>
@@ -18494,7 +18494,7 @@
           <p:cNvPr id="13" name="Rectangle 12">
             <a:extLst>
               <a:ext uri="{FF2B5EF4-FFF2-40B4-BE49-F238E27FC236}">
-                <a16:creationId xmlns:a16="http://schemas.microsoft.com/office/drawing/2014/main" id="{D4B0DC5F-623A-40C9-A444-65BB27D4FB44}"/>
+                <a16:creationId xmlns:a16="http://schemas.microsoft.com/office/drawing/2014/main" id="{B9A4B216-8CA1-4AFF-81AA-219696333C98}"/>
               </a:ext>
             </a:extLst>
           </p:cNvPr>
@@ -18556,7 +18556,7 @@
           <p:cNvPr id="14" name="Rectangle 13">
             <a:extLst>
               <a:ext uri="{FF2B5EF4-FFF2-40B4-BE49-F238E27FC236}">
-                <a16:creationId xmlns:a16="http://schemas.microsoft.com/office/drawing/2014/main" id="{4165DCD2-8F1D-47E5-966B-AF1114240B55}"/>
+                <a16:creationId xmlns:a16="http://schemas.microsoft.com/office/drawing/2014/main" id="{E2E8B6DE-B4BA-4957-924E-F81488096861}"/>
               </a:ext>
             </a:extLst>
           </p:cNvPr>
@@ -18618,7 +18618,7 @@
           <p:cNvPr id="15" name="Rectangle 14">
             <a:extLst>
               <a:ext uri="{FF2B5EF4-FFF2-40B4-BE49-F238E27FC236}">
-                <a16:creationId xmlns:a16="http://schemas.microsoft.com/office/drawing/2014/main" id="{551CA501-0CC1-4A60-A9FD-9E1A49CE5EDA}"/>
+                <a16:creationId xmlns:a16="http://schemas.microsoft.com/office/drawing/2014/main" id="{A7566A66-7F9D-40D9-B0FE-460CD72E9951}"/>
               </a:ext>
             </a:extLst>
           </p:cNvPr>
@@ -18649,7 +18649,7 @@
           <p:cNvPr id="16" name="Rectangle 15">
             <a:extLst>
               <a:ext uri="{FF2B5EF4-FFF2-40B4-BE49-F238E27FC236}">
-                <a16:creationId xmlns:a16="http://schemas.microsoft.com/office/drawing/2014/main" id="{70B09E15-7180-46F8-8DFC-DA296831925B}"/>
+                <a16:creationId xmlns:a16="http://schemas.microsoft.com/office/drawing/2014/main" id="{5BEF860C-ABAE-433A-8A9B-2A5C90AF9525}"/>
               </a:ext>
             </a:extLst>
           </p:cNvPr>
@@ -18711,7 +18711,7 @@
           <p:cNvPr id="17" name="Rectangle 16">
             <a:extLst>
               <a:ext uri="{FF2B5EF4-FFF2-40B4-BE49-F238E27FC236}">
-                <a16:creationId xmlns:a16="http://schemas.microsoft.com/office/drawing/2014/main" id="{C51FE153-5A0D-42EF-8A57-5C7E8A5A8407}"/>
+                <a16:creationId xmlns:a16="http://schemas.microsoft.com/office/drawing/2014/main" id="{A33DB026-0395-44C5-A0EC-339D40C61528}"/>
               </a:ext>
             </a:extLst>
           </p:cNvPr>
@@ -18773,7 +18773,7 @@
           <p:cNvPr id="18" name="Rectangle 17">
             <a:extLst>
               <a:ext uri="{FF2B5EF4-FFF2-40B4-BE49-F238E27FC236}">
-                <a16:creationId xmlns:a16="http://schemas.microsoft.com/office/drawing/2014/main" id="{C71A013D-E21E-4457-A931-8EC4C5EC5BD2}"/>
+                <a16:creationId xmlns:a16="http://schemas.microsoft.com/office/drawing/2014/main" id="{BF7F49A1-01F5-40AD-8698-948FFD966B8E}"/>
               </a:ext>
             </a:extLst>
           </p:cNvPr>
@@ -18804,7 +18804,7 @@
           <p:cNvPr id="19" name="Rectangle 18">
             <a:extLst>
               <a:ext uri="{FF2B5EF4-FFF2-40B4-BE49-F238E27FC236}">
-                <a16:creationId xmlns:a16="http://schemas.microsoft.com/office/drawing/2014/main" id="{42565D8E-4563-4661-B817-CC251EB0BBCF}"/>
+                <a16:creationId xmlns:a16="http://schemas.microsoft.com/office/drawing/2014/main" id="{0C34D5C9-C921-4766-85C8-4129E8F96439}"/>
               </a:ext>
             </a:extLst>
           </p:cNvPr>
@@ -18866,7 +18866,7 @@
           <p:cNvPr id="20" name="Rectangle 19">
             <a:extLst>
               <a:ext uri="{FF2B5EF4-FFF2-40B4-BE49-F238E27FC236}">
-                <a16:creationId xmlns:a16="http://schemas.microsoft.com/office/drawing/2014/main" id="{D9446BD9-837A-43BA-8109-E261A84EA297}"/>
+                <a16:creationId xmlns:a16="http://schemas.microsoft.com/office/drawing/2014/main" id="{78C29374-9DF6-4EAE-8F47-9FB4668A4B63}"/>
               </a:ext>
             </a:extLst>
           </p:cNvPr>
@@ -18928,7 +18928,7 @@
           <p:cNvPr id="21" name="Rectangle 20">
             <a:extLst>
               <a:ext uri="{FF2B5EF4-FFF2-40B4-BE49-F238E27FC236}">
-                <a16:creationId xmlns:a16="http://schemas.microsoft.com/office/drawing/2014/main" id="{52CEF697-7140-42C2-A1A0-3AD56CCC2DF4}"/>
+                <a16:creationId xmlns:a16="http://schemas.microsoft.com/office/drawing/2014/main" id="{7F554056-C798-4024-ABC7-F26BEF1A159C}"/>
               </a:ext>
             </a:extLst>
           </p:cNvPr>
@@ -18959,7 +18959,7 @@
           <p:cNvPr id="22" name="Rectangle 21">
             <a:extLst>
               <a:ext uri="{FF2B5EF4-FFF2-40B4-BE49-F238E27FC236}">
-                <a16:creationId xmlns:a16="http://schemas.microsoft.com/office/drawing/2014/main" id="{D07FAF66-7CA1-4A08-8AC5-EAEC21BD6429}"/>
+                <a16:creationId xmlns:a16="http://schemas.microsoft.com/office/drawing/2014/main" id="{B3CC3434-ED57-4CAB-90EA-EE4943A880BF}"/>
               </a:ext>
             </a:extLst>
           </p:cNvPr>
@@ -19021,7 +19021,7 @@
           <p:cNvPr id="23" name="Rectangle 22">
             <a:extLst>
               <a:ext uri="{FF2B5EF4-FFF2-40B4-BE49-F238E27FC236}">
-                <a16:creationId xmlns:a16="http://schemas.microsoft.com/office/drawing/2014/main" id="{88D0924A-C100-420A-B5AD-D8DF87141324}"/>
+                <a16:creationId xmlns:a16="http://schemas.microsoft.com/office/drawing/2014/main" id="{907EBA57-DCAC-4087-A9E8-BF76B3EF1587}"/>
               </a:ext>
             </a:extLst>
           </p:cNvPr>
@@ -19083,7 +19083,7 @@
           <p:cNvPr id="24" name="Rectangle 23">
             <a:extLst>
               <a:ext uri="{FF2B5EF4-FFF2-40B4-BE49-F238E27FC236}">
-                <a16:creationId xmlns:a16="http://schemas.microsoft.com/office/drawing/2014/main" id="{1CCB2F08-8D2D-4195-981B-77C910C1F66C}"/>
+                <a16:creationId xmlns:a16="http://schemas.microsoft.com/office/drawing/2014/main" id="{E7C535D8-A934-4691-9B44-730E8DC01F40}"/>
               </a:ext>
             </a:extLst>
           </p:cNvPr>
@@ -19114,7 +19114,7 @@
           <p:cNvPr id="25" name="Rectangle 24">
             <a:extLst>
               <a:ext uri="{FF2B5EF4-FFF2-40B4-BE49-F238E27FC236}">
-                <a16:creationId xmlns:a16="http://schemas.microsoft.com/office/drawing/2014/main" id="{26BCF847-B426-499E-83B8-140BE2D60C63}"/>
+                <a16:creationId xmlns:a16="http://schemas.microsoft.com/office/drawing/2014/main" id="{C49A2CFC-7E8C-4E76-9B46-3F9A4AD72732}"/>
               </a:ext>
             </a:extLst>
           </p:cNvPr>
@@ -19176,7 +19176,7 @@
           <p:cNvPr id="26" name="Rectangle 25">
             <a:extLst>
               <a:ext uri="{FF2B5EF4-FFF2-40B4-BE49-F238E27FC236}">
-                <a16:creationId xmlns:a16="http://schemas.microsoft.com/office/drawing/2014/main" id="{AC10FAFB-0340-411D-84F5-CD785CA79D39}"/>
+                <a16:creationId xmlns:a16="http://schemas.microsoft.com/office/drawing/2014/main" id="{D2A94644-00FB-4D61-8007-5B4587573AB1}"/>
               </a:ext>
             </a:extLst>
           </p:cNvPr>
@@ -19238,7 +19238,7 @@
           <p:cNvPr id="27" name="Rectangle 26">
             <a:extLst>
               <a:ext uri="{FF2B5EF4-FFF2-40B4-BE49-F238E27FC236}">
-                <a16:creationId xmlns:a16="http://schemas.microsoft.com/office/drawing/2014/main" id="{A2C1CC60-B5C4-452D-A04B-04E63BCDDB13}"/>
+                <a16:creationId xmlns:a16="http://schemas.microsoft.com/office/drawing/2014/main" id="{6F098C76-1AF2-45A6-85D0-10AA8E0FC3BA}"/>
               </a:ext>
             </a:extLst>
           </p:cNvPr>
@@ -19269,7 +19269,7 @@
           <p:cNvPr id="28" name="Rectangle 27">
             <a:extLst>
               <a:ext uri="{FF2B5EF4-FFF2-40B4-BE49-F238E27FC236}">
-                <a16:creationId xmlns:a16="http://schemas.microsoft.com/office/drawing/2014/main" id="{938131D6-ABE0-4BA0-BEF2-4DE5E1B814DA}"/>
+                <a16:creationId xmlns:a16="http://schemas.microsoft.com/office/drawing/2014/main" id="{5786DFA3-8C77-4FB5-A62F-E4B8DA22118A}"/>
               </a:ext>
             </a:extLst>
           </p:cNvPr>
@@ -19331,7 +19331,7 @@
           <p:cNvPr id="29" name="Rectangle 28">
             <a:extLst>
               <a:ext uri="{FF2B5EF4-FFF2-40B4-BE49-F238E27FC236}">
-                <a16:creationId xmlns:a16="http://schemas.microsoft.com/office/drawing/2014/main" id="{07C5D0CE-E717-460D-864E-AE138B20CFD7}"/>
+                <a16:creationId xmlns:a16="http://schemas.microsoft.com/office/drawing/2014/main" id="{61DCC874-9478-4540-B935-A56F9DF0752D}"/>
               </a:ext>
             </a:extLst>
           </p:cNvPr>
@@ -19393,7 +19393,7 @@
           <p:cNvPr id="30" name="Rectangle 29">
             <a:extLst>
               <a:ext uri="{FF2B5EF4-FFF2-40B4-BE49-F238E27FC236}">
-                <a16:creationId xmlns:a16="http://schemas.microsoft.com/office/drawing/2014/main" id="{7417086F-254F-4401-B754-AF85DD39D63C}"/>
+                <a16:creationId xmlns:a16="http://schemas.microsoft.com/office/drawing/2014/main" id="{555C6147-2F85-41A2-931C-31F6FF3222AD}"/>
               </a:ext>
             </a:extLst>
           </p:cNvPr>
@@ -19424,7 +19424,7 @@
           <p:cNvPr id="31" name="Rectangle: Rounded Corners 30">
             <a:extLst>
               <a:ext uri="{FF2B5EF4-FFF2-40B4-BE49-F238E27FC236}">
-                <a16:creationId xmlns:a16="http://schemas.microsoft.com/office/drawing/2014/main" id="{1C81A5A7-C326-460E-95FB-F1A169081CA4}"/>
+                <a16:creationId xmlns:a16="http://schemas.microsoft.com/office/drawing/2014/main" id="{D99D82BF-1CEC-4CE7-80E9-0EEFF9BBB161}"/>
               </a:ext>
             </a:extLst>
           </p:cNvPr>
@@ -19457,7 +19457,7 @@
           <p:cNvPr id="32" name="Rectangle 31">
             <a:extLst>
               <a:ext uri="{FF2B5EF4-FFF2-40B4-BE49-F238E27FC236}">
-                <a16:creationId xmlns:a16="http://schemas.microsoft.com/office/drawing/2014/main" id="{64FD811C-7D05-4443-95A5-A127E11AB11D}"/>
+                <a16:creationId xmlns:a16="http://schemas.microsoft.com/office/drawing/2014/main" id="{BEF42A1C-3A46-4424-A990-C937FCEDF94B}"/>
               </a:ext>
             </a:extLst>
           </p:cNvPr>
@@ -19519,7 +19519,7 @@
           <p:cNvPr id="33" name="Rectangle 32">
             <a:extLst>
               <a:ext uri="{FF2B5EF4-FFF2-40B4-BE49-F238E27FC236}">
-                <a16:creationId xmlns:a16="http://schemas.microsoft.com/office/drawing/2014/main" id="{72CF31B1-FFC1-49B2-8F28-569724839902}"/>
+                <a16:creationId xmlns:a16="http://schemas.microsoft.com/office/drawing/2014/main" id="{83B4CE25-B327-43BA-B45B-32D9059BA0FD}"/>
               </a:ext>
             </a:extLst>
           </p:cNvPr>
@@ -19550,7 +19550,7 @@
           <p:cNvPr id="34" name="Rectangle 33">
             <a:extLst>
               <a:ext uri="{FF2B5EF4-FFF2-40B4-BE49-F238E27FC236}">
-                <a16:creationId xmlns:a16="http://schemas.microsoft.com/office/drawing/2014/main" id="{ED898381-3B0B-4440-8FF9-74CD54925CFC}"/>
+                <a16:creationId xmlns:a16="http://schemas.microsoft.com/office/drawing/2014/main" id="{1D5ADCBF-2D38-4D15-8442-28719E267A7D}"/>
               </a:ext>
             </a:extLst>
           </p:cNvPr>
@@ -19612,7 +19612,7 @@
           <p:cNvPr id="35" name="Rectangle 34">
             <a:extLst>
               <a:ext uri="{FF2B5EF4-FFF2-40B4-BE49-F238E27FC236}">
-                <a16:creationId xmlns:a16="http://schemas.microsoft.com/office/drawing/2014/main" id="{C6B29D3A-6381-4E25-9269-D98DA0F4C272}"/>
+                <a16:creationId xmlns:a16="http://schemas.microsoft.com/office/drawing/2014/main" id="{BC907D5A-F320-4AFD-BF40-2F33CF5B44D8}"/>
               </a:ext>
             </a:extLst>
           </p:cNvPr>
@@ -19672,7 +19672,7 @@
     </p:spTree>
     <p:extLst>
       <p:ext uri="{BB962C8B-B14F-4D97-AF65-F5344CB8AC3E}">
-        <p14:creationId xmlns:p14="http://schemas.microsoft.com/office/powerpoint/2010/main" val="461452588"/>
+        <p14:creationId xmlns:p14="http://schemas.microsoft.com/office/powerpoint/2010/main" val="900752286"/>
       </p:ext>
     </p:extLst>
   </p:cSld>
@@ -19713,7 +19713,7 @@
             <a:hlinkClick r:id="rId3"/>
             <a:extLst>
               <a:ext uri="{FF2B5EF4-FFF2-40B4-BE49-F238E27FC236}">
-                <a16:creationId xmlns:a16="http://schemas.microsoft.com/office/drawing/2014/main" id="{A774A7C5-4758-4F38-A714-A4E811230D9F}"/>
+                <a16:creationId xmlns:a16="http://schemas.microsoft.com/office/drawing/2014/main" id="{F7067C1A-C07E-4F71-A311-D24B86128548}"/>
               </a:ext>
             </a:extLst>
           </p:cNvPr>
@@ -19788,7 +19788,7 @@
             <a:hlinkClick r:id="rId4"/>
             <a:extLst>
               <a:ext uri="{FF2B5EF4-FFF2-40B4-BE49-F238E27FC236}">
-                <a16:creationId xmlns:a16="http://schemas.microsoft.com/office/drawing/2014/main" id="{8864E017-1CEB-40CD-B5F3-5A16B6672B62}"/>
+                <a16:creationId xmlns:a16="http://schemas.microsoft.com/office/drawing/2014/main" id="{81EEC7A1-B5E9-4E78-8B2E-31DECBD5A159}"/>
               </a:ext>
             </a:extLst>
           </p:cNvPr>
@@ -19862,7 +19862,7 @@
           <p:cNvPr id="3" name="Rectangle 2">
             <a:extLst>
               <a:ext uri="{FF2B5EF4-FFF2-40B4-BE49-F238E27FC236}">
-                <a16:creationId xmlns:a16="http://schemas.microsoft.com/office/drawing/2014/main" id="{1001B190-6D45-4E7B-A0D1-02D5666F7A9F}"/>
+                <a16:creationId xmlns:a16="http://schemas.microsoft.com/office/drawing/2014/main" id="{A6BFCE21-52E4-44EC-8398-806FEAE5D59D}"/>
               </a:ext>
             </a:extLst>
           </p:cNvPr>
@@ -19924,7 +19924,7 @@
           <p:cNvPr id="4" name="Rectangle 3">
             <a:extLst>
               <a:ext uri="{FF2B5EF4-FFF2-40B4-BE49-F238E27FC236}">
-                <a16:creationId xmlns:a16="http://schemas.microsoft.com/office/drawing/2014/main" id="{6A596D56-BF4F-4883-A593-6DE5D7980F0B}"/>
+                <a16:creationId xmlns:a16="http://schemas.microsoft.com/office/drawing/2014/main" id="{F8946BEF-AA40-40B8-98D1-E22B79F84887}"/>
               </a:ext>
             </a:extLst>
           </p:cNvPr>
@@ -19986,7 +19986,7 @@
           <p:cNvPr id="5" name="Rectangle 4">
             <a:extLst>
               <a:ext uri="{FF2B5EF4-FFF2-40B4-BE49-F238E27FC236}">
-                <a16:creationId xmlns:a16="http://schemas.microsoft.com/office/drawing/2014/main" id="{62300C77-BAA4-44A1-AA45-62E49C6A0E2D}"/>
+                <a16:creationId xmlns:a16="http://schemas.microsoft.com/office/drawing/2014/main" id="{84995D1B-EEBB-45D8-98EB-32414C9E97D8}"/>
               </a:ext>
             </a:extLst>
           </p:cNvPr>
@@ -20048,7 +20048,7 @@
           <p:cNvPr id="6" name="Rectangle 5">
             <a:extLst>
               <a:ext uri="{FF2B5EF4-FFF2-40B4-BE49-F238E27FC236}">
-                <a16:creationId xmlns:a16="http://schemas.microsoft.com/office/drawing/2014/main" id="{E6D26286-6009-4426-9816-EA84C78260F0}"/>
+                <a16:creationId xmlns:a16="http://schemas.microsoft.com/office/drawing/2014/main" id="{92CD3066-00F4-488E-A259-EE7538A83A5C}"/>
               </a:ext>
             </a:extLst>
           </p:cNvPr>
@@ -20110,7 +20110,7 @@
           <p:cNvPr id="7" name="Rectangle 6">
             <a:extLst>
               <a:ext uri="{FF2B5EF4-FFF2-40B4-BE49-F238E27FC236}">
-                <a16:creationId xmlns:a16="http://schemas.microsoft.com/office/drawing/2014/main" id="{36EDBFA2-EC70-4CDC-985E-2A2C7D6A49B8}"/>
+                <a16:creationId xmlns:a16="http://schemas.microsoft.com/office/drawing/2014/main" id="{4090AA23-F436-44DF-9180-0E7AFD159B33}"/>
               </a:ext>
             </a:extLst>
           </p:cNvPr>
@@ -20172,7 +20172,7 @@
           <p:cNvPr id="8" name="Rectangle 7">
             <a:extLst>
               <a:ext uri="{FF2B5EF4-FFF2-40B4-BE49-F238E27FC236}">
-                <a16:creationId xmlns:a16="http://schemas.microsoft.com/office/drawing/2014/main" id="{0F2EB2F3-4037-477F-89D1-0206A52374AC}"/>
+                <a16:creationId xmlns:a16="http://schemas.microsoft.com/office/drawing/2014/main" id="{045CDB6C-06DC-4E0B-AC86-51B007A93CE3}"/>
               </a:ext>
             </a:extLst>
           </p:cNvPr>
@@ -20234,7 +20234,7 @@
           <p:cNvPr id="9" name="Rectangle 8">
             <a:extLst>
               <a:ext uri="{FF2B5EF4-FFF2-40B4-BE49-F238E27FC236}">
-                <a16:creationId xmlns:a16="http://schemas.microsoft.com/office/drawing/2014/main" id="{F81398CA-A468-469B-8F95-72D529AAA686}"/>
+                <a16:creationId xmlns:a16="http://schemas.microsoft.com/office/drawing/2014/main" id="{FE9B20E2-8F81-4180-BC5E-0AD0C44996A1}"/>
               </a:ext>
             </a:extLst>
           </p:cNvPr>
@@ -20265,7 +20265,7 @@
           <p:cNvPr id="10" name="Rectangle: Rounded Corners 9">
             <a:extLst>
               <a:ext uri="{FF2B5EF4-FFF2-40B4-BE49-F238E27FC236}">
-                <a16:creationId xmlns:a16="http://schemas.microsoft.com/office/drawing/2014/main" id="{5E1595F9-D3BF-4E84-8787-9512D0E76FA9}"/>
+                <a16:creationId xmlns:a16="http://schemas.microsoft.com/office/drawing/2014/main" id="{12C13C99-6C49-4B8E-A464-1635AFEAF82A}"/>
               </a:ext>
             </a:extLst>
           </p:cNvPr>
@@ -20298,7 +20298,7 @@
           <p:cNvPr id="11" name="Rectangle 10">
             <a:extLst>
               <a:ext uri="{FF2B5EF4-FFF2-40B4-BE49-F238E27FC236}">
-                <a16:creationId xmlns:a16="http://schemas.microsoft.com/office/drawing/2014/main" id="{FBE4B484-62FE-40A2-8091-F6FF2391B2B9}"/>
+                <a16:creationId xmlns:a16="http://schemas.microsoft.com/office/drawing/2014/main" id="{7F6E2548-E73C-4A2A-98E6-F40FE2AB602B}"/>
               </a:ext>
             </a:extLst>
           </p:cNvPr>
@@ -20360,7 +20360,7 @@
           <p:cNvPr id="12" name="Rectangle 11">
             <a:extLst>
               <a:ext uri="{FF2B5EF4-FFF2-40B4-BE49-F238E27FC236}">
-                <a16:creationId xmlns:a16="http://schemas.microsoft.com/office/drawing/2014/main" id="{61CED400-6D18-4153-A3E4-E5FB565880F6}"/>
+                <a16:creationId xmlns:a16="http://schemas.microsoft.com/office/drawing/2014/main" id="{A0C0418D-726E-4A1D-A817-F4D1650CE845}"/>
               </a:ext>
             </a:extLst>
           </p:cNvPr>
@@ -20422,7 +20422,7 @@
           <p:cNvPr id="13" name="Rectangle 12">
             <a:extLst>
               <a:ext uri="{FF2B5EF4-FFF2-40B4-BE49-F238E27FC236}">
-                <a16:creationId xmlns:a16="http://schemas.microsoft.com/office/drawing/2014/main" id="{911E591F-1CAB-439B-B9DF-6AAF0596EC93}"/>
+                <a16:creationId xmlns:a16="http://schemas.microsoft.com/office/drawing/2014/main" id="{316EA1AC-2D63-4626-B7E2-A930E6D144B5}"/>
               </a:ext>
             </a:extLst>
           </p:cNvPr>
@@ -20484,7 +20484,7 @@
           <p:cNvPr id="14" name="Rectangle 13">
             <a:extLst>
               <a:ext uri="{FF2B5EF4-FFF2-40B4-BE49-F238E27FC236}">
-                <a16:creationId xmlns:a16="http://schemas.microsoft.com/office/drawing/2014/main" id="{1DF1DA0B-4562-4875-9ABC-15EE3340E60B}"/>
+                <a16:creationId xmlns:a16="http://schemas.microsoft.com/office/drawing/2014/main" id="{4AFC8A1E-4E44-42E8-AF56-FE8D64F293BE}"/>
               </a:ext>
             </a:extLst>
           </p:cNvPr>
@@ -20546,7 +20546,7 @@
           <p:cNvPr id="15" name="Rectangle: Rounded Corners 14">
             <a:extLst>
               <a:ext uri="{FF2B5EF4-FFF2-40B4-BE49-F238E27FC236}">
-                <a16:creationId xmlns:a16="http://schemas.microsoft.com/office/drawing/2014/main" id="{AC90631D-BB60-4539-B802-EBFBE864263F}"/>
+                <a16:creationId xmlns:a16="http://schemas.microsoft.com/office/drawing/2014/main" id="{B13FEEA8-6D94-4883-9961-73A6AA1DAFBC}"/>
               </a:ext>
             </a:extLst>
           </p:cNvPr>
@@ -20579,7 +20579,7 @@
           <p:cNvPr id="16" name="Rectangle 15">
             <a:extLst>
               <a:ext uri="{FF2B5EF4-FFF2-40B4-BE49-F238E27FC236}">
-                <a16:creationId xmlns:a16="http://schemas.microsoft.com/office/drawing/2014/main" id="{DDF3666D-EE34-43AB-B8C8-3B94E1E407B9}"/>
+                <a16:creationId xmlns:a16="http://schemas.microsoft.com/office/drawing/2014/main" id="{6746CF6E-B2F7-4909-A584-9E377AEB79F2}"/>
               </a:ext>
             </a:extLst>
           </p:cNvPr>
@@ -20641,7 +20641,7 @@
           <p:cNvPr id="17" name="Rectangle 16">
             <a:extLst>
               <a:ext uri="{FF2B5EF4-FFF2-40B4-BE49-F238E27FC236}">
-                <a16:creationId xmlns:a16="http://schemas.microsoft.com/office/drawing/2014/main" id="{01725070-2139-4694-8BAA-2E13A2DC6F85}"/>
+                <a16:creationId xmlns:a16="http://schemas.microsoft.com/office/drawing/2014/main" id="{0B23E8CF-A977-4039-B560-01D02A8366CC}"/>
               </a:ext>
             </a:extLst>
           </p:cNvPr>
@@ -20703,7 +20703,7 @@
           <p:cNvPr id="18" name="Rectangle 17">
             <a:extLst>
               <a:ext uri="{FF2B5EF4-FFF2-40B4-BE49-F238E27FC236}">
-                <a16:creationId xmlns:a16="http://schemas.microsoft.com/office/drawing/2014/main" id="{7E374194-A003-4123-9E66-9A43D1D8C3D6}"/>
+                <a16:creationId xmlns:a16="http://schemas.microsoft.com/office/drawing/2014/main" id="{DACC81BB-63D7-4A02-86B7-5B82265D8227}"/>
               </a:ext>
             </a:extLst>
           </p:cNvPr>
@@ -20734,7 +20734,7 @@
           <p:cNvPr id="19" name="Rectangle 18">
             <a:extLst>
               <a:ext uri="{FF2B5EF4-FFF2-40B4-BE49-F238E27FC236}">
-                <a16:creationId xmlns:a16="http://schemas.microsoft.com/office/drawing/2014/main" id="{9FDB1CFA-AF56-45CA-89DE-315CA51C9E82}"/>
+                <a16:creationId xmlns:a16="http://schemas.microsoft.com/office/drawing/2014/main" id="{1FD7A45B-379C-4780-A689-93BD9B252574}"/>
               </a:ext>
             </a:extLst>
           </p:cNvPr>
@@ -20796,7 +20796,7 @@
           <p:cNvPr id="20" name="Rectangle 19">
             <a:extLst>
               <a:ext uri="{FF2B5EF4-FFF2-40B4-BE49-F238E27FC236}">
-                <a16:creationId xmlns:a16="http://schemas.microsoft.com/office/drawing/2014/main" id="{88CE4A1C-B0C7-4212-B87D-96ABB51190A6}"/>
+                <a16:creationId xmlns:a16="http://schemas.microsoft.com/office/drawing/2014/main" id="{60C3B237-43ED-4E62-9210-C42E660E3D5F}"/>
               </a:ext>
             </a:extLst>
           </p:cNvPr>
@@ -20856,7 +20856,7 @@
     </p:spTree>
     <p:extLst>
       <p:ext uri="{BB962C8B-B14F-4D97-AF65-F5344CB8AC3E}">
-        <p14:creationId xmlns:p14="http://schemas.microsoft.com/office/powerpoint/2010/main" val="44697485"/>
+        <p14:creationId xmlns:p14="http://schemas.microsoft.com/office/powerpoint/2010/main" val="1296367854"/>
       </p:ext>
     </p:extLst>
   </p:cSld>
@@ -20897,7 +20897,7 @@
             <a:hlinkClick r:id="rId3"/>
             <a:extLst>
               <a:ext uri="{FF2B5EF4-FFF2-40B4-BE49-F238E27FC236}">
-                <a16:creationId xmlns:a16="http://schemas.microsoft.com/office/drawing/2014/main" id="{4743B709-0950-4AD2-A5F8-88C0AC6486C5}"/>
+                <a16:creationId xmlns:a16="http://schemas.microsoft.com/office/drawing/2014/main" id="{5CEA50AC-05DD-4954-8DD6-D5D0CEC9D3AB}"/>
               </a:ext>
             </a:extLst>
           </p:cNvPr>
@@ -20972,7 +20972,7 @@
             <a:hlinkClick r:id="rId4"/>
             <a:extLst>
               <a:ext uri="{FF2B5EF4-FFF2-40B4-BE49-F238E27FC236}">
-                <a16:creationId xmlns:a16="http://schemas.microsoft.com/office/drawing/2014/main" id="{5A68D942-058D-4262-B123-FA8E0FFCBB9B}"/>
+                <a16:creationId xmlns:a16="http://schemas.microsoft.com/office/drawing/2014/main" id="{993B1F98-2BD7-4BB1-B434-CF7ADEC1D44D}"/>
               </a:ext>
             </a:extLst>
           </p:cNvPr>
@@ -21046,7 +21046,7 @@
           <p:cNvPr id="3" name="Rectangle 2">
             <a:extLst>
               <a:ext uri="{FF2B5EF4-FFF2-40B4-BE49-F238E27FC236}">
-                <a16:creationId xmlns:a16="http://schemas.microsoft.com/office/drawing/2014/main" id="{7C1A47FF-3782-4F4F-99CC-C68905D425FE}"/>
+                <a16:creationId xmlns:a16="http://schemas.microsoft.com/office/drawing/2014/main" id="{9006A56D-92C1-4D66-A0F7-09FC5ED2B181}"/>
               </a:ext>
             </a:extLst>
           </p:cNvPr>
@@ -21108,7 +21108,7 @@
           <p:cNvPr id="4" name="Rectangle 3">
             <a:extLst>
               <a:ext uri="{FF2B5EF4-FFF2-40B4-BE49-F238E27FC236}">
-                <a16:creationId xmlns:a16="http://schemas.microsoft.com/office/drawing/2014/main" id="{4A5DD1B8-2638-4080-9589-4ED1C54602BD}"/>
+                <a16:creationId xmlns:a16="http://schemas.microsoft.com/office/drawing/2014/main" id="{E8131E70-6068-43AD-97EE-661BC9EBE283}"/>
               </a:ext>
             </a:extLst>
           </p:cNvPr>
@@ -21170,7 +21170,7 @@
           <p:cNvPr id="5" name="Oval 4">
             <a:extLst>
               <a:ext uri="{FF2B5EF4-FFF2-40B4-BE49-F238E27FC236}">
-                <a16:creationId xmlns:a16="http://schemas.microsoft.com/office/drawing/2014/main" id="{30BD6B31-0394-41D0-B9E0-942EF0B4AC0F}"/>
+                <a16:creationId xmlns:a16="http://schemas.microsoft.com/office/drawing/2014/main" id="{B7DD68E1-D09F-4327-8A57-2EA7CAB0B5D6}"/>
               </a:ext>
             </a:extLst>
           </p:cNvPr>
@@ -21201,7 +21201,7 @@
           <p:cNvPr id="6" name="Rectangle 5">
             <a:extLst>
               <a:ext uri="{FF2B5EF4-FFF2-40B4-BE49-F238E27FC236}">
-                <a16:creationId xmlns:a16="http://schemas.microsoft.com/office/drawing/2014/main" id="{1069B2A5-20BE-4691-BFD3-507A3BC3326E}"/>
+                <a16:creationId xmlns:a16="http://schemas.microsoft.com/office/drawing/2014/main" id="{591CDE8E-72CB-459A-A4B0-848055D2F33D}"/>
               </a:ext>
             </a:extLst>
           </p:cNvPr>
@@ -21263,7 +21263,7 @@
           <p:cNvPr id="7" name="Rectangle 6">
             <a:extLst>
               <a:ext uri="{FF2B5EF4-FFF2-40B4-BE49-F238E27FC236}">
-                <a16:creationId xmlns:a16="http://schemas.microsoft.com/office/drawing/2014/main" id="{2F3A1A58-E402-4280-BB2F-8B86362F59B6}"/>
+                <a16:creationId xmlns:a16="http://schemas.microsoft.com/office/drawing/2014/main" id="{A87023B9-688D-40AB-9BCA-ECE2A935A2F6}"/>
               </a:ext>
             </a:extLst>
           </p:cNvPr>
@@ -21294,7 +21294,7 @@
           <p:cNvPr id="8" name="Rectangle 7">
             <a:extLst>
               <a:ext uri="{FF2B5EF4-FFF2-40B4-BE49-F238E27FC236}">
-                <a16:creationId xmlns:a16="http://schemas.microsoft.com/office/drawing/2014/main" id="{ABE506C0-07C3-4CE7-8361-7DCBFFE11FFD}"/>
+                <a16:creationId xmlns:a16="http://schemas.microsoft.com/office/drawing/2014/main" id="{23DF6263-AE58-4016-82E3-104900297C50}"/>
               </a:ext>
             </a:extLst>
           </p:cNvPr>
@@ -21356,7 +21356,7 @@
           <p:cNvPr id="9" name="Oval 8">
             <a:extLst>
               <a:ext uri="{FF2B5EF4-FFF2-40B4-BE49-F238E27FC236}">
-                <a16:creationId xmlns:a16="http://schemas.microsoft.com/office/drawing/2014/main" id="{547B8B07-3364-4C6F-8DB5-679E9010D003}"/>
+                <a16:creationId xmlns:a16="http://schemas.microsoft.com/office/drawing/2014/main" id="{07483BAF-52F8-4CCB-AA3C-1F8DA8EDC40C}"/>
               </a:ext>
             </a:extLst>
           </p:cNvPr>
@@ -21387,7 +21387,7 @@
           <p:cNvPr id="10" name="Rectangle 9">
             <a:extLst>
               <a:ext uri="{FF2B5EF4-FFF2-40B4-BE49-F238E27FC236}">
-                <a16:creationId xmlns:a16="http://schemas.microsoft.com/office/drawing/2014/main" id="{9268A8BA-DACB-4F61-B911-CE31B744E29E}"/>
+                <a16:creationId xmlns:a16="http://schemas.microsoft.com/office/drawing/2014/main" id="{A51B570F-5A08-44A1-BE54-9FE0031403D3}"/>
               </a:ext>
             </a:extLst>
           </p:cNvPr>
@@ -21449,7 +21449,7 @@
           <p:cNvPr id="11" name="Rectangle 10">
             <a:extLst>
               <a:ext uri="{FF2B5EF4-FFF2-40B4-BE49-F238E27FC236}">
-                <a16:creationId xmlns:a16="http://schemas.microsoft.com/office/drawing/2014/main" id="{1D83B11F-6C43-487B-A22A-64E85969DBEE}"/>
+                <a16:creationId xmlns:a16="http://schemas.microsoft.com/office/drawing/2014/main" id="{BBA1A301-AB62-478D-A29F-E8B7BFB6F878}"/>
               </a:ext>
             </a:extLst>
           </p:cNvPr>
@@ -21480,7 +21480,7 @@
           <p:cNvPr id="12" name="Rectangle 11">
             <a:extLst>
               <a:ext uri="{FF2B5EF4-FFF2-40B4-BE49-F238E27FC236}">
-                <a16:creationId xmlns:a16="http://schemas.microsoft.com/office/drawing/2014/main" id="{4E6FC7CF-2813-462A-8044-B6382E2519EA}"/>
+                <a16:creationId xmlns:a16="http://schemas.microsoft.com/office/drawing/2014/main" id="{CE848698-C4BB-481C-A2FB-03879361C0DF}"/>
               </a:ext>
             </a:extLst>
           </p:cNvPr>
@@ -21542,7 +21542,7 @@
           <p:cNvPr id="13" name="Oval 12">
             <a:extLst>
               <a:ext uri="{FF2B5EF4-FFF2-40B4-BE49-F238E27FC236}">
-                <a16:creationId xmlns:a16="http://schemas.microsoft.com/office/drawing/2014/main" id="{CD018181-BD85-4235-9698-3504A913D03F}"/>
+                <a16:creationId xmlns:a16="http://schemas.microsoft.com/office/drawing/2014/main" id="{9BF6AF72-2E12-446A-98CF-3E3DC15D05D8}"/>
               </a:ext>
             </a:extLst>
           </p:cNvPr>
@@ -21573,7 +21573,7 @@
           <p:cNvPr id="14" name="Rectangle 13">
             <a:extLst>
               <a:ext uri="{FF2B5EF4-FFF2-40B4-BE49-F238E27FC236}">
-                <a16:creationId xmlns:a16="http://schemas.microsoft.com/office/drawing/2014/main" id="{4B485428-9A54-479E-AE19-4CC0A2A8CD86}"/>
+                <a16:creationId xmlns:a16="http://schemas.microsoft.com/office/drawing/2014/main" id="{368EF04E-976A-43D7-AF07-9AE32AD81CAD}"/>
               </a:ext>
             </a:extLst>
           </p:cNvPr>
@@ -21635,7 +21635,7 @@
           <p:cNvPr id="15" name="Rectangle 14">
             <a:extLst>
               <a:ext uri="{FF2B5EF4-FFF2-40B4-BE49-F238E27FC236}">
-                <a16:creationId xmlns:a16="http://schemas.microsoft.com/office/drawing/2014/main" id="{12943C07-1B34-46D0-979A-1BDDE66FEFC8}"/>
+                <a16:creationId xmlns:a16="http://schemas.microsoft.com/office/drawing/2014/main" id="{EFB835BA-37BC-426B-BFA7-306FC2E53764}"/>
               </a:ext>
             </a:extLst>
           </p:cNvPr>
@@ -21666,7 +21666,7 @@
           <p:cNvPr id="16" name="Rectangle 15">
             <a:extLst>
               <a:ext uri="{FF2B5EF4-FFF2-40B4-BE49-F238E27FC236}">
-                <a16:creationId xmlns:a16="http://schemas.microsoft.com/office/drawing/2014/main" id="{7D40EFC5-D106-4A39-9653-76F568A687D8}"/>
+                <a16:creationId xmlns:a16="http://schemas.microsoft.com/office/drawing/2014/main" id="{7337F2F0-17B7-48FE-A0C1-0AF52C967EE7}"/>
               </a:ext>
             </a:extLst>
           </p:cNvPr>
@@ -21728,7 +21728,7 @@
           <p:cNvPr id="17" name="Oval 16">
             <a:extLst>
               <a:ext uri="{FF2B5EF4-FFF2-40B4-BE49-F238E27FC236}">
-                <a16:creationId xmlns:a16="http://schemas.microsoft.com/office/drawing/2014/main" id="{F1D0DEB6-3AA6-4BF9-99BB-4521803154FD}"/>
+                <a16:creationId xmlns:a16="http://schemas.microsoft.com/office/drawing/2014/main" id="{A4F2B3D3-F7D0-422D-A848-AF298A66E189}"/>
               </a:ext>
             </a:extLst>
           </p:cNvPr>
@@ -21759,7 +21759,7 @@
           <p:cNvPr id="18" name="Rectangle 17">
             <a:extLst>
               <a:ext uri="{FF2B5EF4-FFF2-40B4-BE49-F238E27FC236}">
-                <a16:creationId xmlns:a16="http://schemas.microsoft.com/office/drawing/2014/main" id="{8E0E13F6-7EBF-4B7E-8CA1-3575F649CA29}"/>
+                <a16:creationId xmlns:a16="http://schemas.microsoft.com/office/drawing/2014/main" id="{167EE086-AD0C-4DE5-9721-B3B47E2E21D5}"/>
               </a:ext>
             </a:extLst>
           </p:cNvPr>
@@ -21821,7 +21821,7 @@
           <p:cNvPr id="19" name="Rectangle 18">
             <a:extLst>
               <a:ext uri="{FF2B5EF4-FFF2-40B4-BE49-F238E27FC236}">
-                <a16:creationId xmlns:a16="http://schemas.microsoft.com/office/drawing/2014/main" id="{8A482973-A0DF-4B49-A47E-8F2B05CD6929}"/>
+                <a16:creationId xmlns:a16="http://schemas.microsoft.com/office/drawing/2014/main" id="{AA13BC14-0A3D-44EC-A47E-BF8A9301EEBA}"/>
               </a:ext>
             </a:extLst>
           </p:cNvPr>
@@ -21852,7 +21852,7 @@
           <p:cNvPr id="20" name="Rectangle 19">
             <a:extLst>
               <a:ext uri="{FF2B5EF4-FFF2-40B4-BE49-F238E27FC236}">
-                <a16:creationId xmlns:a16="http://schemas.microsoft.com/office/drawing/2014/main" id="{FFA96604-0B01-4D32-BAA4-CA0FD967A3BF}"/>
+                <a16:creationId xmlns:a16="http://schemas.microsoft.com/office/drawing/2014/main" id="{58A6FBD5-DD0E-445A-9166-B47687C166F3}"/>
               </a:ext>
             </a:extLst>
           </p:cNvPr>
@@ -21914,7 +21914,7 @@
           <p:cNvPr id="21" name="Oval 20">
             <a:extLst>
               <a:ext uri="{FF2B5EF4-FFF2-40B4-BE49-F238E27FC236}">
-                <a16:creationId xmlns:a16="http://schemas.microsoft.com/office/drawing/2014/main" id="{F9636421-783E-419C-B2E4-C771E414D373}"/>
+                <a16:creationId xmlns:a16="http://schemas.microsoft.com/office/drawing/2014/main" id="{FC9990A5-0320-49AF-8FE0-FD73E78E66DA}"/>
               </a:ext>
             </a:extLst>
           </p:cNvPr>
@@ -21945,7 +21945,7 @@
           <p:cNvPr id="22" name="Rectangle 21">
             <a:extLst>
               <a:ext uri="{FF2B5EF4-FFF2-40B4-BE49-F238E27FC236}">
-                <a16:creationId xmlns:a16="http://schemas.microsoft.com/office/drawing/2014/main" id="{A34D0B07-F32D-4C69-A421-A3D6D9C60992}"/>
+                <a16:creationId xmlns:a16="http://schemas.microsoft.com/office/drawing/2014/main" id="{D438BB9A-BD34-4107-AC6F-5AE0448C34A0}"/>
               </a:ext>
             </a:extLst>
           </p:cNvPr>
@@ -22007,7 +22007,7 @@
           <p:cNvPr id="23" name="Rectangle 22">
             <a:extLst>
               <a:ext uri="{FF2B5EF4-FFF2-40B4-BE49-F238E27FC236}">
-                <a16:creationId xmlns:a16="http://schemas.microsoft.com/office/drawing/2014/main" id="{10BC8359-5268-4E02-A741-7DFB5AA01FFB}"/>
+                <a16:creationId xmlns:a16="http://schemas.microsoft.com/office/drawing/2014/main" id="{6A3761A7-D6B9-46D5-BBF0-C4EB492082A2}"/>
               </a:ext>
             </a:extLst>
           </p:cNvPr>
@@ -22038,7 +22038,7 @@
           <p:cNvPr id="24" name="Rectangle 23">
             <a:extLst>
               <a:ext uri="{FF2B5EF4-FFF2-40B4-BE49-F238E27FC236}">
-                <a16:creationId xmlns:a16="http://schemas.microsoft.com/office/drawing/2014/main" id="{A85D804E-2837-4DB0-A2B1-7006BAB41744}"/>
+                <a16:creationId xmlns:a16="http://schemas.microsoft.com/office/drawing/2014/main" id="{7A82D578-1A28-479E-9124-15884789C0D9}"/>
               </a:ext>
             </a:extLst>
           </p:cNvPr>
@@ -22100,7 +22100,7 @@
           <p:cNvPr id="25" name="Oval 24">
             <a:extLst>
               <a:ext uri="{FF2B5EF4-FFF2-40B4-BE49-F238E27FC236}">
-                <a16:creationId xmlns:a16="http://schemas.microsoft.com/office/drawing/2014/main" id="{A5E2E241-F0E8-4BFC-A8E3-221FDC1FADEC}"/>
+                <a16:creationId xmlns:a16="http://schemas.microsoft.com/office/drawing/2014/main" id="{766E2096-396E-4D8F-A6D4-F02DF05F27FA}"/>
               </a:ext>
             </a:extLst>
           </p:cNvPr>
@@ -22131,7 +22131,7 @@
           <p:cNvPr id="26" name="Rectangle 25">
             <a:extLst>
               <a:ext uri="{FF2B5EF4-FFF2-40B4-BE49-F238E27FC236}">
-                <a16:creationId xmlns:a16="http://schemas.microsoft.com/office/drawing/2014/main" id="{EE4E4FB8-6A70-48A1-BEC7-10BE4FF017ED}"/>
+                <a16:creationId xmlns:a16="http://schemas.microsoft.com/office/drawing/2014/main" id="{64BB86B7-CA35-4F8A-8949-BEDDB8D04DCA}"/>
               </a:ext>
             </a:extLst>
           </p:cNvPr>
@@ -22193,7 +22193,7 @@
           <p:cNvPr id="27" name="Rectangle 26">
             <a:extLst>
               <a:ext uri="{FF2B5EF4-FFF2-40B4-BE49-F238E27FC236}">
-                <a16:creationId xmlns:a16="http://schemas.microsoft.com/office/drawing/2014/main" id="{39B53196-D17E-4912-AC64-8893F8C235A2}"/>
+                <a16:creationId xmlns:a16="http://schemas.microsoft.com/office/drawing/2014/main" id="{749B9BDD-BCA2-4513-86C9-9156232E5B14}"/>
               </a:ext>
             </a:extLst>
           </p:cNvPr>
@@ -22255,7 +22255,7 @@
           <p:cNvPr id="28" name="Rectangle 27">
             <a:extLst>
               <a:ext uri="{FF2B5EF4-FFF2-40B4-BE49-F238E27FC236}">
-                <a16:creationId xmlns:a16="http://schemas.microsoft.com/office/drawing/2014/main" id="{FC7A580D-BC05-4123-92BD-54DB81EBBE8D}"/>
+                <a16:creationId xmlns:a16="http://schemas.microsoft.com/office/drawing/2014/main" id="{FF982FB7-C5B6-4CE7-8B90-7F4767627D4D}"/>
               </a:ext>
             </a:extLst>
           </p:cNvPr>
@@ -22317,7 +22317,7 @@
           <p:cNvPr id="29" name="Rectangle 28">
             <a:extLst>
               <a:ext uri="{FF2B5EF4-FFF2-40B4-BE49-F238E27FC236}">
-                <a16:creationId xmlns:a16="http://schemas.microsoft.com/office/drawing/2014/main" id="{FDBDBC05-D439-4449-BA4C-BBAE21EADF69}"/>
+                <a16:creationId xmlns:a16="http://schemas.microsoft.com/office/drawing/2014/main" id="{2FC2009C-57EA-4A43-91D6-E9189CE1B88B}"/>
               </a:ext>
             </a:extLst>
           </p:cNvPr>
@@ -22442,7 +22442,7 @@
           <p:cNvPr id="30" name="Rectangle 29">
             <a:extLst>
               <a:ext uri="{FF2B5EF4-FFF2-40B4-BE49-F238E27FC236}">
-                <a16:creationId xmlns:a16="http://schemas.microsoft.com/office/drawing/2014/main" id="{F409D9CA-B1CB-4146-B74E-10E981961CF6}"/>
+                <a16:creationId xmlns:a16="http://schemas.microsoft.com/office/drawing/2014/main" id="{5D0281B2-F8C9-4E3A-AB78-F8052E23FDA7}"/>
               </a:ext>
             </a:extLst>
           </p:cNvPr>
@@ -22504,7 +22504,7 @@
           <p:cNvPr id="31" name="Rectangle 30">
             <a:extLst>
               <a:ext uri="{FF2B5EF4-FFF2-40B4-BE49-F238E27FC236}">
-                <a16:creationId xmlns:a16="http://schemas.microsoft.com/office/drawing/2014/main" id="{6C68C89B-1759-47B3-863F-FE9658C2C6F2}"/>
+                <a16:creationId xmlns:a16="http://schemas.microsoft.com/office/drawing/2014/main" id="{C00744C4-E5F5-42D9-BF22-6C83C32F5D4F}"/>
               </a:ext>
             </a:extLst>
           </p:cNvPr>
@@ -22629,7 +22629,7 @@
           <p:cNvPr id="32" name="Rectangle 31">
             <a:extLst>
               <a:ext uri="{FF2B5EF4-FFF2-40B4-BE49-F238E27FC236}">
-                <a16:creationId xmlns:a16="http://schemas.microsoft.com/office/drawing/2014/main" id="{28108C0D-245F-4018-96BB-65898A17C0C9}"/>
+                <a16:creationId xmlns:a16="http://schemas.microsoft.com/office/drawing/2014/main" id="{EB29025A-086F-42EF-8E59-921250E69DB5}"/>
               </a:ext>
             </a:extLst>
           </p:cNvPr>
@@ -22691,7 +22691,7 @@
           <p:cNvPr id="33" name="Rectangle 32">
             <a:extLst>
               <a:ext uri="{FF2B5EF4-FFF2-40B4-BE49-F238E27FC236}">
-                <a16:creationId xmlns:a16="http://schemas.microsoft.com/office/drawing/2014/main" id="{E46C477C-9F4C-4370-9DA3-DA6E74D3E187}"/>
+                <a16:creationId xmlns:a16="http://schemas.microsoft.com/office/drawing/2014/main" id="{23F2010A-4381-43CA-98B1-BF62E46EC24F}"/>
               </a:ext>
             </a:extLst>
           </p:cNvPr>
@@ -22816,7 +22816,7 @@
           <p:cNvPr id="34" name="Rectangle 33">
             <a:extLst>
               <a:ext uri="{FF2B5EF4-FFF2-40B4-BE49-F238E27FC236}">
-                <a16:creationId xmlns:a16="http://schemas.microsoft.com/office/drawing/2014/main" id="{E6D659BA-B4A3-402C-B4BB-31C73083C4ED}"/>
+                <a16:creationId xmlns:a16="http://schemas.microsoft.com/office/drawing/2014/main" id="{078A41E4-ABE6-442D-89A6-C8BEEB2758E9}"/>
               </a:ext>
             </a:extLst>
           </p:cNvPr>
@@ -22847,7 +22847,7 @@
           <p:cNvPr id="35" name="Rectangle 34">
             <a:extLst>
               <a:ext uri="{FF2B5EF4-FFF2-40B4-BE49-F238E27FC236}">
-                <a16:creationId xmlns:a16="http://schemas.microsoft.com/office/drawing/2014/main" id="{BC29DABB-1CE9-40EB-9D0F-F0436406B86B}"/>
+                <a16:creationId xmlns:a16="http://schemas.microsoft.com/office/drawing/2014/main" id="{8C12A5C1-1DBE-4881-8D0F-B78A480FA9A1}"/>
               </a:ext>
             </a:extLst>
           </p:cNvPr>
@@ -22909,7 +22909,7 @@
           <p:cNvPr id="36" name="Rectangle 35">
             <a:extLst>
               <a:ext uri="{FF2B5EF4-FFF2-40B4-BE49-F238E27FC236}">
-                <a16:creationId xmlns:a16="http://schemas.microsoft.com/office/drawing/2014/main" id="{783822D9-15F3-40E6-9560-158A799354EE}"/>
+                <a16:creationId xmlns:a16="http://schemas.microsoft.com/office/drawing/2014/main" id="{AF4A793F-78F6-43BA-ADBC-E7F72DE8C572}"/>
               </a:ext>
             </a:extLst>
           </p:cNvPr>
@@ -22971,7 +22971,7 @@
           <p:cNvPr id="37" name="Rectangle 36">
             <a:extLst>
               <a:ext uri="{FF2B5EF4-FFF2-40B4-BE49-F238E27FC236}">
-                <a16:creationId xmlns:a16="http://schemas.microsoft.com/office/drawing/2014/main" id="{8D102C70-255B-47DA-AA8C-61C4A4FCBBE3}"/>
+                <a16:creationId xmlns:a16="http://schemas.microsoft.com/office/drawing/2014/main" id="{EFAAAB77-EAD8-416F-B37B-BE82B4F36106}"/>
               </a:ext>
             </a:extLst>
           </p:cNvPr>
@@ -23033,7 +23033,7 @@
           <p:cNvPr id="38" name="Rectangle: Rounded Corners 37">
             <a:extLst>
               <a:ext uri="{FF2B5EF4-FFF2-40B4-BE49-F238E27FC236}">
-                <a16:creationId xmlns:a16="http://schemas.microsoft.com/office/drawing/2014/main" id="{6E04BBDA-D7BD-4D08-911F-BCE6041614E3}"/>
+                <a16:creationId xmlns:a16="http://schemas.microsoft.com/office/drawing/2014/main" id="{12D0B1D3-D85B-4F83-8074-BC93B7412E96}"/>
               </a:ext>
             </a:extLst>
           </p:cNvPr>
@@ -23066,7 +23066,7 @@
           <p:cNvPr id="39" name="Rectangle 38">
             <a:extLst>
               <a:ext uri="{FF2B5EF4-FFF2-40B4-BE49-F238E27FC236}">
-                <a16:creationId xmlns:a16="http://schemas.microsoft.com/office/drawing/2014/main" id="{B27885E6-0667-4227-8EA2-57E147577EAC}"/>
+                <a16:creationId xmlns:a16="http://schemas.microsoft.com/office/drawing/2014/main" id="{07B71E9C-C6F8-42D1-AC09-1134A1BEE704}"/>
               </a:ext>
             </a:extLst>
           </p:cNvPr>
@@ -23128,7 +23128,7 @@
           <p:cNvPr id="40" name="Rectangle 39">
             <a:extLst>
               <a:ext uri="{FF2B5EF4-FFF2-40B4-BE49-F238E27FC236}">
-                <a16:creationId xmlns:a16="http://schemas.microsoft.com/office/drawing/2014/main" id="{4D1C1A62-F5A1-41A2-B183-D838C080CAA5}"/>
+                <a16:creationId xmlns:a16="http://schemas.microsoft.com/office/drawing/2014/main" id="{2FC0E378-84EA-4A3C-BB9C-B38B34D50BD3}"/>
               </a:ext>
             </a:extLst>
           </p:cNvPr>
@@ -23159,7 +23159,7 @@
           <p:cNvPr id="41" name="Rectangle 40">
             <a:extLst>
               <a:ext uri="{FF2B5EF4-FFF2-40B4-BE49-F238E27FC236}">
-                <a16:creationId xmlns:a16="http://schemas.microsoft.com/office/drawing/2014/main" id="{632EDF7F-20F3-4856-9B50-ECDE81C72550}"/>
+                <a16:creationId xmlns:a16="http://schemas.microsoft.com/office/drawing/2014/main" id="{34D76F65-578E-4119-93CE-446962AFAA85}"/>
               </a:ext>
             </a:extLst>
           </p:cNvPr>
@@ -23221,7 +23221,7 @@
           <p:cNvPr id="42" name="Rectangle 41">
             <a:extLst>
               <a:ext uri="{FF2B5EF4-FFF2-40B4-BE49-F238E27FC236}">
-                <a16:creationId xmlns:a16="http://schemas.microsoft.com/office/drawing/2014/main" id="{3AD56B60-71AB-49D4-BEDE-0D37C659C6C7}"/>
+                <a16:creationId xmlns:a16="http://schemas.microsoft.com/office/drawing/2014/main" id="{A886AAF6-D0F0-45F0-83FE-12E02AD896B2}"/>
               </a:ext>
             </a:extLst>
           </p:cNvPr>
@@ -23281,7 +23281,7 @@
     </p:spTree>
     <p:extLst>
       <p:ext uri="{BB962C8B-B14F-4D97-AF65-F5344CB8AC3E}">
-        <p14:creationId xmlns:p14="http://schemas.microsoft.com/office/powerpoint/2010/main" val="1722975399"/>
+        <p14:creationId xmlns:p14="http://schemas.microsoft.com/office/powerpoint/2010/main" val="1763531742"/>
       </p:ext>
     </p:extLst>
   </p:cSld>
@@ -23322,7 +23322,7 @@
             <a:hlinkClick r:id="rId3"/>
             <a:extLst>
               <a:ext uri="{FF2B5EF4-FFF2-40B4-BE49-F238E27FC236}">
-                <a16:creationId xmlns:a16="http://schemas.microsoft.com/office/drawing/2014/main" id="{8FBA938C-5BBE-4A79-B99F-A2229EE1BDB1}"/>
+                <a16:creationId xmlns:a16="http://schemas.microsoft.com/office/drawing/2014/main" id="{5F1951D7-579B-45F1-82FD-24F4D84415EA}"/>
               </a:ext>
             </a:extLst>
           </p:cNvPr>
@@ -23397,7 +23397,7 @@
             <a:hlinkClick r:id="rId4"/>
             <a:extLst>
               <a:ext uri="{FF2B5EF4-FFF2-40B4-BE49-F238E27FC236}">
-                <a16:creationId xmlns:a16="http://schemas.microsoft.com/office/drawing/2014/main" id="{7CCE4BF8-4EA5-4849-92BF-9A7993C76907}"/>
+                <a16:creationId xmlns:a16="http://schemas.microsoft.com/office/drawing/2014/main" id="{93E56FFF-1BC3-4C18-83C7-3FE779D8FB56}"/>
               </a:ext>
             </a:extLst>
           </p:cNvPr>
@@ -23471,7 +23471,7 @@
           <p:cNvPr id="3" name="Rectangle 2">
             <a:extLst>
               <a:ext uri="{FF2B5EF4-FFF2-40B4-BE49-F238E27FC236}">
-                <a16:creationId xmlns:a16="http://schemas.microsoft.com/office/drawing/2014/main" id="{A88EB0D5-4BC7-46D2-B61D-88ADF2316C95}"/>
+                <a16:creationId xmlns:a16="http://schemas.microsoft.com/office/drawing/2014/main" id="{3E90EE86-ABBD-401C-AD12-B5A07D6EA86D}"/>
               </a:ext>
             </a:extLst>
           </p:cNvPr>
@@ -23533,7 +23533,7 @@
           <p:cNvPr id="4" name="Rectangle 3">
             <a:extLst>
               <a:ext uri="{FF2B5EF4-FFF2-40B4-BE49-F238E27FC236}">
-                <a16:creationId xmlns:a16="http://schemas.microsoft.com/office/drawing/2014/main" id="{22CE49A3-3D1F-4102-A185-87FE9FA9FE9E}"/>
+                <a16:creationId xmlns:a16="http://schemas.microsoft.com/office/drawing/2014/main" id="{FDA4E8A3-DB84-409F-9656-3B00BFA3A550}"/>
               </a:ext>
             </a:extLst>
           </p:cNvPr>
@@ -23595,7 +23595,7 @@
           <p:cNvPr id="5" name="Rectangle 4">
             <a:extLst>
               <a:ext uri="{FF2B5EF4-FFF2-40B4-BE49-F238E27FC236}">
-                <a16:creationId xmlns:a16="http://schemas.microsoft.com/office/drawing/2014/main" id="{E216B2F2-2032-44E9-A5B9-5E52607C3790}"/>
+                <a16:creationId xmlns:a16="http://schemas.microsoft.com/office/drawing/2014/main" id="{A6D1D775-37CC-44B5-896F-F5FE740A3D6C}"/>
               </a:ext>
             </a:extLst>
           </p:cNvPr>
@@ -23657,7 +23657,7 @@
           <p:cNvPr id="6" name="Rectangle 5">
             <a:extLst>
               <a:ext uri="{FF2B5EF4-FFF2-40B4-BE49-F238E27FC236}">
-                <a16:creationId xmlns:a16="http://schemas.microsoft.com/office/drawing/2014/main" id="{A99DB405-A0C3-4138-97FF-7B22F0D1A316}"/>
+                <a16:creationId xmlns:a16="http://schemas.microsoft.com/office/drawing/2014/main" id="{998E579A-AD84-4BF0-A216-4DCC5B470AFF}"/>
               </a:ext>
             </a:extLst>
           </p:cNvPr>
@@ -23719,7 +23719,7 @@
           <p:cNvPr id="7" name="Rectangle 6">
             <a:extLst>
               <a:ext uri="{FF2B5EF4-FFF2-40B4-BE49-F238E27FC236}">
-                <a16:creationId xmlns:a16="http://schemas.microsoft.com/office/drawing/2014/main" id="{BDCBB49F-405E-4949-B605-D48DD2580EFA}"/>
+                <a16:creationId xmlns:a16="http://schemas.microsoft.com/office/drawing/2014/main" id="{C1555393-E4D4-4CEC-80B9-FAE5A42B8D48}"/>
               </a:ext>
             </a:extLst>
           </p:cNvPr>
@@ -23750,7 +23750,7 @@
           <p:cNvPr id="8" name="Rectangle 7">
             <a:extLst>
               <a:ext uri="{FF2B5EF4-FFF2-40B4-BE49-F238E27FC236}">
-                <a16:creationId xmlns:a16="http://schemas.microsoft.com/office/drawing/2014/main" id="{31905628-E613-49ED-8230-B2E5ABCF0AA2}"/>
+                <a16:creationId xmlns:a16="http://schemas.microsoft.com/office/drawing/2014/main" id="{A9362822-67A1-49C0-B5CC-1781C8856EBC}"/>
               </a:ext>
             </a:extLst>
           </p:cNvPr>
@@ -23812,7 +23812,7 @@
           <p:cNvPr id="9" name="Rectangle 8">
             <a:extLst>
               <a:ext uri="{FF2B5EF4-FFF2-40B4-BE49-F238E27FC236}">
-                <a16:creationId xmlns:a16="http://schemas.microsoft.com/office/drawing/2014/main" id="{30D36B8E-44E8-4295-8C63-B3891D5F7CB5}"/>
+                <a16:creationId xmlns:a16="http://schemas.microsoft.com/office/drawing/2014/main" id="{1365A861-1D8D-4B79-A9CE-EBD585AE9582}"/>
               </a:ext>
             </a:extLst>
           </p:cNvPr>
@@ -23874,7 +23874,7 @@
           <p:cNvPr id="10" name="Rectangle 9">
             <a:extLst>
               <a:ext uri="{FF2B5EF4-FFF2-40B4-BE49-F238E27FC236}">
-                <a16:creationId xmlns:a16="http://schemas.microsoft.com/office/drawing/2014/main" id="{3FB8E1D1-E53C-4E09-A028-888E3C5CE20C}"/>
+                <a16:creationId xmlns:a16="http://schemas.microsoft.com/office/drawing/2014/main" id="{86A1D2DA-F61D-4CE4-BDB6-7B6CC642E102}"/>
               </a:ext>
             </a:extLst>
           </p:cNvPr>
@@ -23905,7 +23905,7 @@
           <p:cNvPr id="11" name="Rectangle 10">
             <a:extLst>
               <a:ext uri="{FF2B5EF4-FFF2-40B4-BE49-F238E27FC236}">
-                <a16:creationId xmlns:a16="http://schemas.microsoft.com/office/drawing/2014/main" id="{AB2EFD7A-E6E1-403D-83E4-A5E8A4CA8150}"/>
+                <a16:creationId xmlns:a16="http://schemas.microsoft.com/office/drawing/2014/main" id="{7540AD28-8ECB-4841-89E7-7459DFF10675}"/>
               </a:ext>
             </a:extLst>
           </p:cNvPr>
@@ -23967,7 +23967,7 @@
           <p:cNvPr id="12" name="Rectangle 11">
             <a:extLst>
               <a:ext uri="{FF2B5EF4-FFF2-40B4-BE49-F238E27FC236}">
-                <a16:creationId xmlns:a16="http://schemas.microsoft.com/office/drawing/2014/main" id="{5F1E6ECE-345A-4F1A-BA7A-F5450C90A7C7}"/>
+                <a16:creationId xmlns:a16="http://schemas.microsoft.com/office/drawing/2014/main" id="{9D56E1D0-28A5-4536-8F55-92807FB312E7}"/>
               </a:ext>
             </a:extLst>
           </p:cNvPr>
@@ -24029,7 +24029,7 @@
           <p:cNvPr id="13" name="Rectangle 12">
             <a:extLst>
               <a:ext uri="{FF2B5EF4-FFF2-40B4-BE49-F238E27FC236}">
-                <a16:creationId xmlns:a16="http://schemas.microsoft.com/office/drawing/2014/main" id="{99AC4D1E-3A52-4DCB-AEED-A46B85D6BA57}"/>
+                <a16:creationId xmlns:a16="http://schemas.microsoft.com/office/drawing/2014/main" id="{F4167528-B750-4AB9-AB25-F7CFA5026783}"/>
               </a:ext>
             </a:extLst>
           </p:cNvPr>
@@ -24060,7 +24060,7 @@
           <p:cNvPr id="14" name="Rectangle 13">
             <a:extLst>
               <a:ext uri="{FF2B5EF4-FFF2-40B4-BE49-F238E27FC236}">
-                <a16:creationId xmlns:a16="http://schemas.microsoft.com/office/drawing/2014/main" id="{8C504EDC-361E-410F-ABDA-8D61E77F3BA9}"/>
+                <a16:creationId xmlns:a16="http://schemas.microsoft.com/office/drawing/2014/main" id="{A8B26062-3E03-47AB-A093-52E25C9403E4}"/>
               </a:ext>
             </a:extLst>
           </p:cNvPr>
@@ -24122,7 +24122,7 @@
           <p:cNvPr id="15" name="Rectangle 14">
             <a:extLst>
               <a:ext uri="{FF2B5EF4-FFF2-40B4-BE49-F238E27FC236}">
-                <a16:creationId xmlns:a16="http://schemas.microsoft.com/office/drawing/2014/main" id="{2B57C6A4-22EF-4F6E-A7B3-56A9D9C59C90}"/>
+                <a16:creationId xmlns:a16="http://schemas.microsoft.com/office/drawing/2014/main" id="{D7AFFCFA-BF12-4B5E-BA50-4524502D9DC1}"/>
               </a:ext>
             </a:extLst>
           </p:cNvPr>
@@ -24184,7 +24184,7 @@
           <p:cNvPr id="16" name="Rectangle 15">
             <a:extLst>
               <a:ext uri="{FF2B5EF4-FFF2-40B4-BE49-F238E27FC236}">
-                <a16:creationId xmlns:a16="http://schemas.microsoft.com/office/drawing/2014/main" id="{C9C09DF9-99DE-4F82-A5ED-A68FB56B303D}"/>
+                <a16:creationId xmlns:a16="http://schemas.microsoft.com/office/drawing/2014/main" id="{A9FC607F-CD53-498D-863B-7F67AF2AFCCF}"/>
               </a:ext>
             </a:extLst>
           </p:cNvPr>
@@ -24215,7 +24215,7 @@
           <p:cNvPr id="17" name="Rectangle 16">
             <a:extLst>
               <a:ext uri="{FF2B5EF4-FFF2-40B4-BE49-F238E27FC236}">
-                <a16:creationId xmlns:a16="http://schemas.microsoft.com/office/drawing/2014/main" id="{D95EAF5D-98CC-4220-9F72-415620898338}"/>
+                <a16:creationId xmlns:a16="http://schemas.microsoft.com/office/drawing/2014/main" id="{6E3FA089-F499-48BF-A769-E24A69FEE549}"/>
               </a:ext>
             </a:extLst>
           </p:cNvPr>
@@ -24277,7 +24277,7 @@
           <p:cNvPr id="18" name="Rectangle 17">
             <a:extLst>
               <a:ext uri="{FF2B5EF4-FFF2-40B4-BE49-F238E27FC236}">
-                <a16:creationId xmlns:a16="http://schemas.microsoft.com/office/drawing/2014/main" id="{9156D6B8-A996-4850-8888-468CF71851D5}"/>
+                <a16:creationId xmlns:a16="http://schemas.microsoft.com/office/drawing/2014/main" id="{57B066C1-6526-48C2-BA60-8F9CBC8CD54D}"/>
               </a:ext>
             </a:extLst>
           </p:cNvPr>
@@ -24339,7 +24339,7 @@
           <p:cNvPr id="19" name="Rectangle 18">
             <a:extLst>
               <a:ext uri="{FF2B5EF4-FFF2-40B4-BE49-F238E27FC236}">
-                <a16:creationId xmlns:a16="http://schemas.microsoft.com/office/drawing/2014/main" id="{95239D6D-AFE4-41E2-9091-E6A2C84B6547}"/>
+                <a16:creationId xmlns:a16="http://schemas.microsoft.com/office/drawing/2014/main" id="{5A6D990D-2A4E-4273-B1CE-3F84785615B6}"/>
               </a:ext>
             </a:extLst>
           </p:cNvPr>
@@ -24370,7 +24370,7 @@
           <p:cNvPr id="20" name="Rectangle 19">
             <a:extLst>
               <a:ext uri="{FF2B5EF4-FFF2-40B4-BE49-F238E27FC236}">
-                <a16:creationId xmlns:a16="http://schemas.microsoft.com/office/drawing/2014/main" id="{BAE52CC2-C34F-4087-A0EA-161AA52E2305}"/>
+                <a16:creationId xmlns:a16="http://schemas.microsoft.com/office/drawing/2014/main" id="{BDF1A83D-7305-4BB9-9F07-8F5875F90A5E}"/>
               </a:ext>
             </a:extLst>
           </p:cNvPr>
@@ -24432,7 +24432,7 @@
           <p:cNvPr id="21" name="Rectangle 20">
             <a:extLst>
               <a:ext uri="{FF2B5EF4-FFF2-40B4-BE49-F238E27FC236}">
-                <a16:creationId xmlns:a16="http://schemas.microsoft.com/office/drawing/2014/main" id="{7A4576DD-0926-4901-B4A0-D8EE37BC337F}"/>
+                <a16:creationId xmlns:a16="http://schemas.microsoft.com/office/drawing/2014/main" id="{1E44BD34-7A02-4E34-A29D-973BC705936A}"/>
               </a:ext>
             </a:extLst>
           </p:cNvPr>
@@ -24494,7 +24494,7 @@
           <p:cNvPr id="22" name="Rectangle 21">
             <a:extLst>
               <a:ext uri="{FF2B5EF4-FFF2-40B4-BE49-F238E27FC236}">
-                <a16:creationId xmlns:a16="http://schemas.microsoft.com/office/drawing/2014/main" id="{80731A8A-6F5F-40D6-8A75-39E93F425E9C}"/>
+                <a16:creationId xmlns:a16="http://schemas.microsoft.com/office/drawing/2014/main" id="{062C9B0D-3F97-426C-A2C5-6964C5B76DFA}"/>
               </a:ext>
             </a:extLst>
           </p:cNvPr>
@@ -24525,7 +24525,7 @@
           <p:cNvPr id="23" name="Rectangle: Rounded Corners 22">
             <a:extLst>
               <a:ext uri="{FF2B5EF4-FFF2-40B4-BE49-F238E27FC236}">
-                <a16:creationId xmlns:a16="http://schemas.microsoft.com/office/drawing/2014/main" id="{31AE8852-3869-4B48-B933-6E82E3D6D0F4}"/>
+                <a16:creationId xmlns:a16="http://schemas.microsoft.com/office/drawing/2014/main" id="{7B335F75-F6F2-4F5A-A6F0-62C4F7D6B8E4}"/>
               </a:ext>
             </a:extLst>
           </p:cNvPr>
@@ -24558,7 +24558,7 @@
           <p:cNvPr id="24" name="Rectangle 23">
             <a:extLst>
               <a:ext uri="{FF2B5EF4-FFF2-40B4-BE49-F238E27FC236}">
-                <a16:creationId xmlns:a16="http://schemas.microsoft.com/office/drawing/2014/main" id="{C216F273-F007-4B25-B058-6F11D9C2771B}"/>
+                <a16:creationId xmlns:a16="http://schemas.microsoft.com/office/drawing/2014/main" id="{3CEE32B5-CD03-4923-A5A6-14700FB6A1EE}"/>
               </a:ext>
             </a:extLst>
           </p:cNvPr>
@@ -24620,7 +24620,7 @@
           <p:cNvPr id="25" name="Rectangle 24">
             <a:extLst>
               <a:ext uri="{FF2B5EF4-FFF2-40B4-BE49-F238E27FC236}">
-                <a16:creationId xmlns:a16="http://schemas.microsoft.com/office/drawing/2014/main" id="{2767D426-C256-4A8C-A5EF-0CC99450CC29}"/>
+                <a16:creationId xmlns:a16="http://schemas.microsoft.com/office/drawing/2014/main" id="{3C989A27-4FE0-4C48-94AF-1F3B68F40F3E}"/>
               </a:ext>
             </a:extLst>
           </p:cNvPr>
@@ -24745,7 +24745,7 @@
           <p:cNvPr id="26" name="Rectangle 25">
             <a:extLst>
               <a:ext uri="{FF2B5EF4-FFF2-40B4-BE49-F238E27FC236}">
-                <a16:creationId xmlns:a16="http://schemas.microsoft.com/office/drawing/2014/main" id="{3CBFA68C-211F-4EF0-9980-2DC2E64EFA99}"/>
+                <a16:creationId xmlns:a16="http://schemas.microsoft.com/office/drawing/2014/main" id="{430D61C1-2B59-4A5C-918D-F3658AF81AC3}"/>
               </a:ext>
             </a:extLst>
           </p:cNvPr>
@@ -24807,7 +24807,7 @@
           <p:cNvPr id="27" name="Rectangle 26">
             <a:extLst>
               <a:ext uri="{FF2B5EF4-FFF2-40B4-BE49-F238E27FC236}">
-                <a16:creationId xmlns:a16="http://schemas.microsoft.com/office/drawing/2014/main" id="{8E30A061-03E5-438D-8DD9-EE747D205A5A}"/>
+                <a16:creationId xmlns:a16="http://schemas.microsoft.com/office/drawing/2014/main" id="{7F04CD2C-19C5-4437-B98D-149D8CF015F0}"/>
               </a:ext>
             </a:extLst>
           </p:cNvPr>
@@ -24838,7 +24838,7 @@
           <p:cNvPr id="28" name="Rectangle 27">
             <a:extLst>
               <a:ext uri="{FF2B5EF4-FFF2-40B4-BE49-F238E27FC236}">
-                <a16:creationId xmlns:a16="http://schemas.microsoft.com/office/drawing/2014/main" id="{1A42D6A4-4D72-44E4-8068-40BD7532D7EE}"/>
+                <a16:creationId xmlns:a16="http://schemas.microsoft.com/office/drawing/2014/main" id="{94015DF6-5F09-46B4-B20D-92F14569CE1E}"/>
               </a:ext>
             </a:extLst>
           </p:cNvPr>
@@ -24900,7 +24900,7 @@
           <p:cNvPr id="29" name="Rectangle 28">
             <a:extLst>
               <a:ext uri="{FF2B5EF4-FFF2-40B4-BE49-F238E27FC236}">
-                <a16:creationId xmlns:a16="http://schemas.microsoft.com/office/drawing/2014/main" id="{ECDD0126-FA28-4F4D-A579-AEABFE60A376}"/>
+                <a16:creationId xmlns:a16="http://schemas.microsoft.com/office/drawing/2014/main" id="{7CEB3E0F-DF71-4588-97BD-089DA07E95D2}"/>
               </a:ext>
             </a:extLst>
           </p:cNvPr>
@@ -24960,7 +24960,7 @@
     </p:spTree>
     <p:extLst>
       <p:ext uri="{BB962C8B-B14F-4D97-AF65-F5344CB8AC3E}">
-        <p14:creationId xmlns:p14="http://schemas.microsoft.com/office/powerpoint/2010/main" val="381091769"/>
+        <p14:creationId xmlns:p14="http://schemas.microsoft.com/office/powerpoint/2010/main" val="449234228"/>
       </p:ext>
     </p:extLst>
   </p:cSld>
@@ -25001,7 +25001,7 @@
             <a:hlinkClick r:id="rId3"/>
             <a:extLst>
               <a:ext uri="{FF2B5EF4-FFF2-40B4-BE49-F238E27FC236}">
-                <a16:creationId xmlns:a16="http://schemas.microsoft.com/office/drawing/2014/main" id="{851AA2E1-009D-402A-98B6-CF1B24D484F5}"/>
+                <a16:creationId xmlns:a16="http://schemas.microsoft.com/office/drawing/2014/main" id="{F58C2266-94E6-499B-9C87-B981D0DFE1FC}"/>
               </a:ext>
             </a:extLst>
           </p:cNvPr>
@@ -25076,7 +25076,7 @@
             <a:hlinkClick r:id="rId4"/>
             <a:extLst>
               <a:ext uri="{FF2B5EF4-FFF2-40B4-BE49-F238E27FC236}">
-                <a16:creationId xmlns:a16="http://schemas.microsoft.com/office/drawing/2014/main" id="{59450267-80A5-48AE-8306-7E4204667D4C}"/>
+                <a16:creationId xmlns:a16="http://schemas.microsoft.com/office/drawing/2014/main" id="{FDB05E65-FC19-4772-B874-764FC977B89C}"/>
               </a:ext>
             </a:extLst>
           </p:cNvPr>
@@ -25150,7 +25150,7 @@
           <p:cNvPr id="3" name="Rectangle 2">
             <a:extLst>
               <a:ext uri="{FF2B5EF4-FFF2-40B4-BE49-F238E27FC236}">
-                <a16:creationId xmlns:a16="http://schemas.microsoft.com/office/drawing/2014/main" id="{63ECAD16-738A-496C-8350-1F11E3B6D25D}"/>
+                <a16:creationId xmlns:a16="http://schemas.microsoft.com/office/drawing/2014/main" id="{E7C1A0AD-6ADA-4A1F-A28D-44F78C227BA7}"/>
               </a:ext>
             </a:extLst>
           </p:cNvPr>
@@ -25212,7 +25212,7 @@
           <p:cNvPr id="4" name="Rectangle 3">
             <a:extLst>
               <a:ext uri="{FF2B5EF4-FFF2-40B4-BE49-F238E27FC236}">
-                <a16:creationId xmlns:a16="http://schemas.microsoft.com/office/drawing/2014/main" id="{48CBBF1A-F99C-43CA-8C54-4926D48DB655}"/>
+                <a16:creationId xmlns:a16="http://schemas.microsoft.com/office/drawing/2014/main" id="{0117E546-19E9-4994-AC1B-BA01266A091A}"/>
               </a:ext>
             </a:extLst>
           </p:cNvPr>
@@ -25274,7 +25274,7 @@
           <p:cNvPr id="5" name="Rectangle 4">
             <a:extLst>
               <a:ext uri="{FF2B5EF4-FFF2-40B4-BE49-F238E27FC236}">
-                <a16:creationId xmlns:a16="http://schemas.microsoft.com/office/drawing/2014/main" id="{1B08B17E-19A0-48DE-8060-20E8DB9FF6F7}"/>
+                <a16:creationId xmlns:a16="http://schemas.microsoft.com/office/drawing/2014/main" id="{0DC70801-ED58-487E-ACB6-B9E58F76DCC1}"/>
               </a:ext>
             </a:extLst>
           </p:cNvPr>
@@ -25336,7 +25336,7 @@
           <p:cNvPr id="6" name="Oval 5">
             <a:extLst>
               <a:ext uri="{FF2B5EF4-FFF2-40B4-BE49-F238E27FC236}">
-                <a16:creationId xmlns:a16="http://schemas.microsoft.com/office/drawing/2014/main" id="{0D1043B2-0123-43B9-9364-86EA2EF36CDE}"/>
+                <a16:creationId xmlns:a16="http://schemas.microsoft.com/office/drawing/2014/main" id="{DE71AB12-4D18-493A-936B-FF2F48BDB3A3}"/>
               </a:ext>
             </a:extLst>
           </p:cNvPr>
@@ -25367,7 +25367,7 @@
           <p:cNvPr id="7" name="Rectangle 6">
             <a:extLst>
               <a:ext uri="{FF2B5EF4-FFF2-40B4-BE49-F238E27FC236}">
-                <a16:creationId xmlns:a16="http://schemas.microsoft.com/office/drawing/2014/main" id="{046352D2-9837-41CA-88B4-C91D81908974}"/>
+                <a16:creationId xmlns:a16="http://schemas.microsoft.com/office/drawing/2014/main" id="{4AEB1E06-BF72-42A7-B783-C498CF4863CC}"/>
               </a:ext>
             </a:extLst>
           </p:cNvPr>
@@ -25429,7 +25429,7 @@
           <p:cNvPr id="8" name="Oval 7">
             <a:extLst>
               <a:ext uri="{FF2B5EF4-FFF2-40B4-BE49-F238E27FC236}">
-                <a16:creationId xmlns:a16="http://schemas.microsoft.com/office/drawing/2014/main" id="{9C377AE0-9821-43B7-978D-782F3B4572E7}"/>
+                <a16:creationId xmlns:a16="http://schemas.microsoft.com/office/drawing/2014/main" id="{43206F6C-31F7-47E7-BC76-330719503E06}"/>
               </a:ext>
             </a:extLst>
           </p:cNvPr>
@@ -25460,7 +25460,7 @@
           <p:cNvPr id="9" name="Rectangle 8">
             <a:extLst>
               <a:ext uri="{FF2B5EF4-FFF2-40B4-BE49-F238E27FC236}">
-                <a16:creationId xmlns:a16="http://schemas.microsoft.com/office/drawing/2014/main" id="{A939C95C-1616-4D5C-94EE-FE1D10B02A5A}"/>
+                <a16:creationId xmlns:a16="http://schemas.microsoft.com/office/drawing/2014/main" id="{AF494639-8926-463B-81D8-5037561E44D4}"/>
               </a:ext>
             </a:extLst>
           </p:cNvPr>
@@ -25522,7 +25522,7 @@
           <p:cNvPr id="10" name="Oval 9">
             <a:extLst>
               <a:ext uri="{FF2B5EF4-FFF2-40B4-BE49-F238E27FC236}">
-                <a16:creationId xmlns:a16="http://schemas.microsoft.com/office/drawing/2014/main" id="{4C6DDFF5-1BAC-420D-9246-5EC7BD8673D4}"/>
+                <a16:creationId xmlns:a16="http://schemas.microsoft.com/office/drawing/2014/main" id="{E25F091E-C513-4EBA-989E-545ADE80CBB5}"/>
               </a:ext>
             </a:extLst>
           </p:cNvPr>
@@ -25553,7 +25553,7 @@
           <p:cNvPr id="11" name="Rectangle 10">
             <a:extLst>
               <a:ext uri="{FF2B5EF4-FFF2-40B4-BE49-F238E27FC236}">
-                <a16:creationId xmlns:a16="http://schemas.microsoft.com/office/drawing/2014/main" id="{AD22AED4-A83D-4C0D-A954-46B7A23726B9}"/>
+                <a16:creationId xmlns:a16="http://schemas.microsoft.com/office/drawing/2014/main" id="{5FF3F622-3251-46C0-ABF6-2D359142FEB8}"/>
               </a:ext>
             </a:extLst>
           </p:cNvPr>
@@ -25615,7 +25615,7 @@
           <p:cNvPr id="12" name="Oval 11">
             <a:extLst>
               <a:ext uri="{FF2B5EF4-FFF2-40B4-BE49-F238E27FC236}">
-                <a16:creationId xmlns:a16="http://schemas.microsoft.com/office/drawing/2014/main" id="{B35A8991-7190-4A55-9D9A-53FCD51BABFA}"/>
+                <a16:creationId xmlns:a16="http://schemas.microsoft.com/office/drawing/2014/main" id="{99F4C882-B22A-4DC0-A90A-FA3DF5E996DA}"/>
               </a:ext>
             </a:extLst>
           </p:cNvPr>
@@ -25646,7 +25646,7 @@
           <p:cNvPr id="13" name="Rectangle 12">
             <a:extLst>
               <a:ext uri="{FF2B5EF4-FFF2-40B4-BE49-F238E27FC236}">
-                <a16:creationId xmlns:a16="http://schemas.microsoft.com/office/drawing/2014/main" id="{DC621629-368C-4D0F-91C9-D553179738D1}"/>
+                <a16:creationId xmlns:a16="http://schemas.microsoft.com/office/drawing/2014/main" id="{DC224D5A-D8BF-4CC5-8FA4-4A1F84AE3E9C}"/>
               </a:ext>
             </a:extLst>
           </p:cNvPr>
@@ -25708,7 +25708,7 @@
           <p:cNvPr id="14" name="Rectangle 13">
             <a:extLst>
               <a:ext uri="{FF2B5EF4-FFF2-40B4-BE49-F238E27FC236}">
-                <a16:creationId xmlns:a16="http://schemas.microsoft.com/office/drawing/2014/main" id="{E13BAABF-9E9A-44DA-BA0C-CA0489B429CE}"/>
+                <a16:creationId xmlns:a16="http://schemas.microsoft.com/office/drawing/2014/main" id="{64DF0902-DC22-48EE-A961-7C4864E6E0ED}"/>
               </a:ext>
             </a:extLst>
           </p:cNvPr>
@@ -25770,7 +25770,7 @@
           <p:cNvPr id="15" name="Rectangle 14">
             <a:extLst>
               <a:ext uri="{FF2B5EF4-FFF2-40B4-BE49-F238E27FC236}">
-                <a16:creationId xmlns:a16="http://schemas.microsoft.com/office/drawing/2014/main" id="{D227B101-E524-4E5D-B635-5F86592D8094}"/>
+                <a16:creationId xmlns:a16="http://schemas.microsoft.com/office/drawing/2014/main" id="{B813D133-21EA-43B4-A1FD-61ED7A2EE046}"/>
               </a:ext>
             </a:extLst>
           </p:cNvPr>
@@ -25832,7 +25832,7 @@
           <p:cNvPr id="16" name="Rectangle 15">
             <a:extLst>
               <a:ext uri="{FF2B5EF4-FFF2-40B4-BE49-F238E27FC236}">
-                <a16:creationId xmlns:a16="http://schemas.microsoft.com/office/drawing/2014/main" id="{8A74CC13-1D2C-47BE-99EA-398C2059DE94}"/>
+                <a16:creationId xmlns:a16="http://schemas.microsoft.com/office/drawing/2014/main" id="{CB7FA7CE-127C-4543-850F-9EDC04AA34D9}"/>
               </a:ext>
             </a:extLst>
           </p:cNvPr>
@@ -25863,7 +25863,7 @@
           <p:cNvPr id="17" name="Rectangle 16">
             <a:extLst>
               <a:ext uri="{FF2B5EF4-FFF2-40B4-BE49-F238E27FC236}">
-                <a16:creationId xmlns:a16="http://schemas.microsoft.com/office/drawing/2014/main" id="{AC90A371-2534-40BA-9FA9-B1A249E71D68}"/>
+                <a16:creationId xmlns:a16="http://schemas.microsoft.com/office/drawing/2014/main" id="{C3F0A043-88E9-44FE-9F52-0D6941C35E59}"/>
               </a:ext>
             </a:extLst>
           </p:cNvPr>
@@ -25925,7 +25925,7 @@
           <p:cNvPr id="18" name="Rectangle 17">
             <a:extLst>
               <a:ext uri="{FF2B5EF4-FFF2-40B4-BE49-F238E27FC236}">
-                <a16:creationId xmlns:a16="http://schemas.microsoft.com/office/drawing/2014/main" id="{B13954F2-1711-4EC4-BDB0-4A1CFFA34A3E}"/>
+                <a16:creationId xmlns:a16="http://schemas.microsoft.com/office/drawing/2014/main" id="{08D9E52A-7EAF-4710-8C38-E31F8222A118}"/>
               </a:ext>
             </a:extLst>
           </p:cNvPr>
@@ -25985,7 +25985,7 @@
     </p:spTree>
     <p:extLst>
       <p:ext uri="{BB962C8B-B14F-4D97-AF65-F5344CB8AC3E}">
-        <p14:creationId xmlns:p14="http://schemas.microsoft.com/office/powerpoint/2010/main" val="1435003266"/>
+        <p14:creationId xmlns:p14="http://schemas.microsoft.com/office/powerpoint/2010/main" val="2132768848"/>
       </p:ext>
     </p:extLst>
   </p:cSld>
@@ -26026,7 +26026,7 @@
             <a:hlinkClick r:id="rId3"/>
             <a:extLst>
               <a:ext uri="{FF2B5EF4-FFF2-40B4-BE49-F238E27FC236}">
-                <a16:creationId xmlns:a16="http://schemas.microsoft.com/office/drawing/2014/main" id="{05198AD6-2FE9-46E0-942B-AB8A92B11BCD}"/>
+                <a16:creationId xmlns:a16="http://schemas.microsoft.com/office/drawing/2014/main" id="{4C8CFF85-177D-4C74-9C48-A34EAE5B5BC4}"/>
               </a:ext>
             </a:extLst>
           </p:cNvPr>
@@ -26101,7 +26101,7 @@
             <a:hlinkClick r:id="rId4"/>
             <a:extLst>
               <a:ext uri="{FF2B5EF4-FFF2-40B4-BE49-F238E27FC236}">
-                <a16:creationId xmlns:a16="http://schemas.microsoft.com/office/drawing/2014/main" id="{1A610328-7C3A-4EDB-A902-066F76DCD25D}"/>
+                <a16:creationId xmlns:a16="http://schemas.microsoft.com/office/drawing/2014/main" id="{98BB6833-3B72-4DF3-A02C-C6E51F56011B}"/>
               </a:ext>
             </a:extLst>
           </p:cNvPr>
@@ -26175,7 +26175,7 @@
           <p:cNvPr id="3" name="Rectangle 2">
             <a:extLst>
               <a:ext uri="{FF2B5EF4-FFF2-40B4-BE49-F238E27FC236}">
-                <a16:creationId xmlns:a16="http://schemas.microsoft.com/office/drawing/2014/main" id="{24CF38E1-FB3A-4217-A8FC-4D988364761F}"/>
+                <a16:creationId xmlns:a16="http://schemas.microsoft.com/office/drawing/2014/main" id="{1F3BD59A-1053-4AB8-971E-A3354BFBDBFB}"/>
               </a:ext>
             </a:extLst>
           </p:cNvPr>
@@ -26237,7 +26237,7 @@
           <p:cNvPr id="4" name="Rectangle 3">
             <a:extLst>
               <a:ext uri="{FF2B5EF4-FFF2-40B4-BE49-F238E27FC236}">
-                <a16:creationId xmlns:a16="http://schemas.microsoft.com/office/drawing/2014/main" id="{94D74290-834D-4B41-B2E6-5F760CECE899}"/>
+                <a16:creationId xmlns:a16="http://schemas.microsoft.com/office/drawing/2014/main" id="{A9B4C52E-363B-405F-B006-FAFBC716F3FC}"/>
               </a:ext>
             </a:extLst>
           </p:cNvPr>
@@ -26299,7 +26299,7 @@
           <p:cNvPr id="5" name="Rectangle 4">
             <a:extLst>
               <a:ext uri="{FF2B5EF4-FFF2-40B4-BE49-F238E27FC236}">
-                <a16:creationId xmlns:a16="http://schemas.microsoft.com/office/drawing/2014/main" id="{D6F82DB4-292C-45AF-817D-9F82E6CDCF33}"/>
+                <a16:creationId xmlns:a16="http://schemas.microsoft.com/office/drawing/2014/main" id="{EA556052-4D33-43C5-A327-D109B18B4B20}"/>
               </a:ext>
             </a:extLst>
           </p:cNvPr>
@@ -26361,7 +26361,7 @@
           <p:cNvPr id="6" name="Rectangle 5">
             <a:extLst>
               <a:ext uri="{FF2B5EF4-FFF2-40B4-BE49-F238E27FC236}">
-                <a16:creationId xmlns:a16="http://schemas.microsoft.com/office/drawing/2014/main" id="{AB75CA35-2289-4259-962C-643A6A820748}"/>
+                <a16:creationId xmlns:a16="http://schemas.microsoft.com/office/drawing/2014/main" id="{62140BD6-A109-4D09-85D1-ACFA20F8D683}"/>
               </a:ext>
             </a:extLst>
           </p:cNvPr>
@@ -26392,7 +26392,7 @@
           <p:cNvPr id="7" name="Rectangle 6">
             <a:extLst>
               <a:ext uri="{FF2B5EF4-FFF2-40B4-BE49-F238E27FC236}">
-                <a16:creationId xmlns:a16="http://schemas.microsoft.com/office/drawing/2014/main" id="{EB799C06-01D7-483B-8EE3-7B6DCACE1E70}"/>
+                <a16:creationId xmlns:a16="http://schemas.microsoft.com/office/drawing/2014/main" id="{617EBC8A-DC13-47FF-B064-18070177C944}"/>
               </a:ext>
             </a:extLst>
           </p:cNvPr>
@@ -26454,7 +26454,7 @@
           <p:cNvPr id="8" name="Rectangle 7">
             <a:extLst>
               <a:ext uri="{FF2B5EF4-FFF2-40B4-BE49-F238E27FC236}">
-                <a16:creationId xmlns:a16="http://schemas.microsoft.com/office/drawing/2014/main" id="{997D021E-CD9E-44D3-8953-35B52D352ED8}"/>
+                <a16:creationId xmlns:a16="http://schemas.microsoft.com/office/drawing/2014/main" id="{6D91C326-3247-4502-BD5A-7514CB148A02}"/>
               </a:ext>
             </a:extLst>
           </p:cNvPr>
@@ -26516,7 +26516,7 @@
           <p:cNvPr id="9" name="Rectangle 8">
             <a:extLst>
               <a:ext uri="{FF2B5EF4-FFF2-40B4-BE49-F238E27FC236}">
-                <a16:creationId xmlns:a16="http://schemas.microsoft.com/office/drawing/2014/main" id="{5848C595-6870-4BE2-8743-16AFC8180145}"/>
+                <a16:creationId xmlns:a16="http://schemas.microsoft.com/office/drawing/2014/main" id="{95AEE141-FF78-44EE-AA65-6E6CA819D88D}"/>
               </a:ext>
             </a:extLst>
           </p:cNvPr>
@@ -26578,7 +26578,7 @@
           <p:cNvPr id="10" name="Rectangle 9">
             <a:extLst>
               <a:ext uri="{FF2B5EF4-FFF2-40B4-BE49-F238E27FC236}">
-                <a16:creationId xmlns:a16="http://schemas.microsoft.com/office/drawing/2014/main" id="{891C9D6E-B2BE-46E2-9EC5-EE92E58B57F9}"/>
+                <a16:creationId xmlns:a16="http://schemas.microsoft.com/office/drawing/2014/main" id="{70EAAB6D-F548-4AB8-9D03-96F4E12C083F}"/>
               </a:ext>
             </a:extLst>
           </p:cNvPr>
@@ -26609,7 +26609,7 @@
           <p:cNvPr id="11" name="Rectangle 10">
             <a:extLst>
               <a:ext uri="{FF2B5EF4-FFF2-40B4-BE49-F238E27FC236}">
-                <a16:creationId xmlns:a16="http://schemas.microsoft.com/office/drawing/2014/main" id="{60A3F735-E4D7-4974-985F-E96D0CC2EE9A}"/>
+                <a16:creationId xmlns:a16="http://schemas.microsoft.com/office/drawing/2014/main" id="{EEC5FA36-D0D3-4751-939B-9675BE622638}"/>
               </a:ext>
             </a:extLst>
           </p:cNvPr>
@@ -26671,7 +26671,7 @@
           <p:cNvPr id="12" name="Rectangle 11">
             <a:extLst>
               <a:ext uri="{FF2B5EF4-FFF2-40B4-BE49-F238E27FC236}">
-                <a16:creationId xmlns:a16="http://schemas.microsoft.com/office/drawing/2014/main" id="{F66A42E2-CDB4-4867-9AD0-41980684E616}"/>
+                <a16:creationId xmlns:a16="http://schemas.microsoft.com/office/drawing/2014/main" id="{B9A69C43-FBF2-442C-9E13-A633755A22AA}"/>
               </a:ext>
             </a:extLst>
           </p:cNvPr>
@@ -26733,7 +26733,7 @@
           <p:cNvPr id="13" name="Rectangle 12">
             <a:extLst>
               <a:ext uri="{FF2B5EF4-FFF2-40B4-BE49-F238E27FC236}">
-                <a16:creationId xmlns:a16="http://schemas.microsoft.com/office/drawing/2014/main" id="{EBF49802-010D-4FBE-9929-DFC2CE1EB1E1}"/>
+                <a16:creationId xmlns:a16="http://schemas.microsoft.com/office/drawing/2014/main" id="{9F9C217E-7179-4C56-9961-9967A059C352}"/>
               </a:ext>
             </a:extLst>
           </p:cNvPr>
@@ -26795,7 +26795,7 @@
           <p:cNvPr id="14" name="Rectangle 13">
             <a:extLst>
               <a:ext uri="{FF2B5EF4-FFF2-40B4-BE49-F238E27FC236}">
-                <a16:creationId xmlns:a16="http://schemas.microsoft.com/office/drawing/2014/main" id="{B99B3489-8440-49D2-AEB4-D67BA3DF7EBC}"/>
+                <a16:creationId xmlns:a16="http://schemas.microsoft.com/office/drawing/2014/main" id="{DFC39E2B-13C5-463A-B832-C94081916C2A}"/>
               </a:ext>
             </a:extLst>
           </p:cNvPr>
@@ -26826,7 +26826,7 @@
           <p:cNvPr id="15" name="Rectangle 14">
             <a:extLst>
               <a:ext uri="{FF2B5EF4-FFF2-40B4-BE49-F238E27FC236}">
-                <a16:creationId xmlns:a16="http://schemas.microsoft.com/office/drawing/2014/main" id="{772E1146-8B0E-47F6-ADB7-CF531236A608}"/>
+                <a16:creationId xmlns:a16="http://schemas.microsoft.com/office/drawing/2014/main" id="{B4A56665-D8E8-41C9-B0BD-D2BB9F90BB49}"/>
               </a:ext>
             </a:extLst>
           </p:cNvPr>
@@ -26888,7 +26888,7 @@
           <p:cNvPr id="16" name="Rectangle 15">
             <a:extLst>
               <a:ext uri="{FF2B5EF4-FFF2-40B4-BE49-F238E27FC236}">
-                <a16:creationId xmlns:a16="http://schemas.microsoft.com/office/drawing/2014/main" id="{F50C15E5-D1F1-4CDD-82BD-7190AB11D6EC}"/>
+                <a16:creationId xmlns:a16="http://schemas.microsoft.com/office/drawing/2014/main" id="{A957629E-BEF9-4D9A-8E37-99206580A861}"/>
               </a:ext>
             </a:extLst>
           </p:cNvPr>
@@ -26950,7 +26950,7 @@
           <p:cNvPr id="17" name="Rectangle 16">
             <a:extLst>
               <a:ext uri="{FF2B5EF4-FFF2-40B4-BE49-F238E27FC236}">
-                <a16:creationId xmlns:a16="http://schemas.microsoft.com/office/drawing/2014/main" id="{2DEBDA40-61CB-4A22-8387-97DCB57C09E4}"/>
+                <a16:creationId xmlns:a16="http://schemas.microsoft.com/office/drawing/2014/main" id="{7E80AC7A-CA47-4236-A2E3-53A1350B2CBC}"/>
               </a:ext>
             </a:extLst>
           </p:cNvPr>
@@ -27012,7 +27012,7 @@
           <p:cNvPr id="18" name="Rectangle 17">
             <a:extLst>
               <a:ext uri="{FF2B5EF4-FFF2-40B4-BE49-F238E27FC236}">
-                <a16:creationId xmlns:a16="http://schemas.microsoft.com/office/drawing/2014/main" id="{02855C53-7325-4CFA-B66B-B1A4243D9296}"/>
+                <a16:creationId xmlns:a16="http://schemas.microsoft.com/office/drawing/2014/main" id="{DDB40B44-AD33-4F80-9EC1-1EF3044CEE48}"/>
               </a:ext>
             </a:extLst>
           </p:cNvPr>
@@ -27043,7 +27043,7 @@
           <p:cNvPr id="19" name="Rectangle 18">
             <a:extLst>
               <a:ext uri="{FF2B5EF4-FFF2-40B4-BE49-F238E27FC236}">
-                <a16:creationId xmlns:a16="http://schemas.microsoft.com/office/drawing/2014/main" id="{5BE3D387-78CB-4341-A294-1B14C3C2BD06}"/>
+                <a16:creationId xmlns:a16="http://schemas.microsoft.com/office/drawing/2014/main" id="{DC0E59C1-7B50-47AC-A6EC-ADEEB345122F}"/>
               </a:ext>
             </a:extLst>
           </p:cNvPr>
@@ -27105,7 +27105,7 @@
           <p:cNvPr id="20" name="Rectangle 19">
             <a:extLst>
               <a:ext uri="{FF2B5EF4-FFF2-40B4-BE49-F238E27FC236}">
-                <a16:creationId xmlns:a16="http://schemas.microsoft.com/office/drawing/2014/main" id="{A283AE4C-7185-4A33-8460-7932252D9952}"/>
+                <a16:creationId xmlns:a16="http://schemas.microsoft.com/office/drawing/2014/main" id="{A21E5265-C321-470B-A758-AEEDB334A9C5}"/>
               </a:ext>
             </a:extLst>
           </p:cNvPr>
@@ -27167,7 +27167,7 @@
           <p:cNvPr id="21" name="Rectangle 20">
             <a:extLst>
               <a:ext uri="{FF2B5EF4-FFF2-40B4-BE49-F238E27FC236}">
-                <a16:creationId xmlns:a16="http://schemas.microsoft.com/office/drawing/2014/main" id="{780EBF85-CD54-4946-9EA2-A32B46B37D21}"/>
+                <a16:creationId xmlns:a16="http://schemas.microsoft.com/office/drawing/2014/main" id="{ED506CA8-62BB-40D5-8AFE-9FBBA41816CC}"/>
               </a:ext>
             </a:extLst>
           </p:cNvPr>
@@ -27229,7 +27229,7 @@
           <p:cNvPr id="22" name="Rectangle 21">
             <a:extLst>
               <a:ext uri="{FF2B5EF4-FFF2-40B4-BE49-F238E27FC236}">
-                <a16:creationId xmlns:a16="http://schemas.microsoft.com/office/drawing/2014/main" id="{0DF8728C-FD28-4831-9030-C577F7130C54}"/>
+                <a16:creationId xmlns:a16="http://schemas.microsoft.com/office/drawing/2014/main" id="{1F34355B-C96C-4EDD-8B66-38AAC9380D9C}"/>
               </a:ext>
             </a:extLst>
           </p:cNvPr>
@@ -27260,7 +27260,7 @@
           <p:cNvPr id="23" name="Rectangle 22">
             <a:extLst>
               <a:ext uri="{FF2B5EF4-FFF2-40B4-BE49-F238E27FC236}">
-                <a16:creationId xmlns:a16="http://schemas.microsoft.com/office/drawing/2014/main" id="{E7B742AB-DE05-4514-B718-D10D1303767C}"/>
+                <a16:creationId xmlns:a16="http://schemas.microsoft.com/office/drawing/2014/main" id="{67267559-459B-4196-B9B8-67498C37FD86}"/>
               </a:ext>
             </a:extLst>
           </p:cNvPr>
@@ -27322,7 +27322,7 @@
           <p:cNvPr id="24" name="Rectangle 23">
             <a:extLst>
               <a:ext uri="{FF2B5EF4-FFF2-40B4-BE49-F238E27FC236}">
-                <a16:creationId xmlns:a16="http://schemas.microsoft.com/office/drawing/2014/main" id="{0A0B9C19-2031-441B-980C-9047C98C02B8}"/>
+                <a16:creationId xmlns:a16="http://schemas.microsoft.com/office/drawing/2014/main" id="{7C875915-8BF8-4864-AB88-E12550153F94}"/>
               </a:ext>
             </a:extLst>
           </p:cNvPr>
@@ -27384,7 +27384,7 @@
           <p:cNvPr id="25" name="Rectangle 24">
             <a:extLst>
               <a:ext uri="{FF2B5EF4-FFF2-40B4-BE49-F238E27FC236}">
-                <a16:creationId xmlns:a16="http://schemas.microsoft.com/office/drawing/2014/main" id="{581CE97B-8ED3-47C7-A2AB-C1D3C4A3D40A}"/>
+                <a16:creationId xmlns:a16="http://schemas.microsoft.com/office/drawing/2014/main" id="{475C4558-12FA-4239-A055-B9A36AC68D27}"/>
               </a:ext>
             </a:extLst>
           </p:cNvPr>
@@ -27446,7 +27446,7 @@
           <p:cNvPr id="26" name="Rectangle 25">
             <a:extLst>
               <a:ext uri="{FF2B5EF4-FFF2-40B4-BE49-F238E27FC236}">
-                <a16:creationId xmlns:a16="http://schemas.microsoft.com/office/drawing/2014/main" id="{07FCA32F-B69D-40C7-AF8F-982784DC523A}"/>
+                <a16:creationId xmlns:a16="http://schemas.microsoft.com/office/drawing/2014/main" id="{64EE71EB-7F48-44A9-BA2F-87E1CD08AB79}"/>
               </a:ext>
             </a:extLst>
           </p:cNvPr>
@@ -27477,7 +27477,7 @@
           <p:cNvPr id="27" name="Rectangle 26">
             <a:extLst>
               <a:ext uri="{FF2B5EF4-FFF2-40B4-BE49-F238E27FC236}">
-                <a16:creationId xmlns:a16="http://schemas.microsoft.com/office/drawing/2014/main" id="{CFBE88B4-95BA-4978-87AE-B83AF5E3367B}"/>
+                <a16:creationId xmlns:a16="http://schemas.microsoft.com/office/drawing/2014/main" id="{39260CD7-3A34-45E8-B43C-5CC4DE5BDE69}"/>
               </a:ext>
             </a:extLst>
           </p:cNvPr>
@@ -27539,7 +27539,7 @@
           <p:cNvPr id="28" name="Rectangle 27">
             <a:extLst>
               <a:ext uri="{FF2B5EF4-FFF2-40B4-BE49-F238E27FC236}">
-                <a16:creationId xmlns:a16="http://schemas.microsoft.com/office/drawing/2014/main" id="{CA169929-38F1-40CF-B013-057E15EBD275}"/>
+                <a16:creationId xmlns:a16="http://schemas.microsoft.com/office/drawing/2014/main" id="{EA7BA39F-066B-47DC-9E2C-CC90F68FF35F}"/>
               </a:ext>
             </a:extLst>
           </p:cNvPr>
@@ -27601,7 +27601,7 @@
           <p:cNvPr id="29" name="Rectangle 28">
             <a:extLst>
               <a:ext uri="{FF2B5EF4-FFF2-40B4-BE49-F238E27FC236}">
-                <a16:creationId xmlns:a16="http://schemas.microsoft.com/office/drawing/2014/main" id="{C83A40FD-3288-470B-AA37-DBA444ED9147}"/>
+                <a16:creationId xmlns:a16="http://schemas.microsoft.com/office/drawing/2014/main" id="{9425CD66-DD47-4D7C-94F1-413F4DD3A212}"/>
               </a:ext>
             </a:extLst>
           </p:cNvPr>
@@ -27632,7 +27632,7 @@
           <p:cNvPr id="30" name="Rectangle 29">
             <a:extLst>
               <a:ext uri="{FF2B5EF4-FFF2-40B4-BE49-F238E27FC236}">
-                <a16:creationId xmlns:a16="http://schemas.microsoft.com/office/drawing/2014/main" id="{82271DE0-1E34-43CC-88DA-A9B6FD0FF9EC}"/>
+                <a16:creationId xmlns:a16="http://schemas.microsoft.com/office/drawing/2014/main" id="{C4B8628D-FE2A-4615-88FE-93085736EE0C}"/>
               </a:ext>
             </a:extLst>
           </p:cNvPr>
@@ -27694,7 +27694,7 @@
           <p:cNvPr id="31" name="Rectangle 30">
             <a:extLst>
               <a:ext uri="{FF2B5EF4-FFF2-40B4-BE49-F238E27FC236}">
-                <a16:creationId xmlns:a16="http://schemas.microsoft.com/office/drawing/2014/main" id="{C1E03011-0E4B-4308-90D7-2856DC505290}"/>
+                <a16:creationId xmlns:a16="http://schemas.microsoft.com/office/drawing/2014/main" id="{10AE8A3D-A900-4DA8-BFC9-1851DEC8F424}"/>
               </a:ext>
             </a:extLst>
           </p:cNvPr>
@@ -27756,7 +27756,7 @@
           <p:cNvPr id="32" name="Rectangle 31">
             <a:extLst>
               <a:ext uri="{FF2B5EF4-FFF2-40B4-BE49-F238E27FC236}">
-                <a16:creationId xmlns:a16="http://schemas.microsoft.com/office/drawing/2014/main" id="{F254DCD1-429C-4F7E-AB0B-A187B8DB3178}"/>
+                <a16:creationId xmlns:a16="http://schemas.microsoft.com/office/drawing/2014/main" id="{A9C7D967-1D19-4266-8EFD-8AA9C68B804F}"/>
               </a:ext>
             </a:extLst>
           </p:cNvPr>
@@ -27818,7 +27818,7 @@
           <p:cNvPr id="33" name="Rectangle 32">
             <a:extLst>
               <a:ext uri="{FF2B5EF4-FFF2-40B4-BE49-F238E27FC236}">
-                <a16:creationId xmlns:a16="http://schemas.microsoft.com/office/drawing/2014/main" id="{EBEA7559-BFB8-4391-ABCA-ADF88F6CB0CC}"/>
+                <a16:creationId xmlns:a16="http://schemas.microsoft.com/office/drawing/2014/main" id="{141BF5B5-5EBB-49A7-B1AC-2F4DBD0BC560}"/>
               </a:ext>
             </a:extLst>
           </p:cNvPr>
@@ -27880,7 +27880,7 @@
           <p:cNvPr id="34" name="Rectangle 33">
             <a:extLst>
               <a:ext uri="{FF2B5EF4-FFF2-40B4-BE49-F238E27FC236}">
-                <a16:creationId xmlns:a16="http://schemas.microsoft.com/office/drawing/2014/main" id="{6F75AF7F-5E3B-4E0F-91D8-0E8BBC9AE3F5}"/>
+                <a16:creationId xmlns:a16="http://schemas.microsoft.com/office/drawing/2014/main" id="{5CADE11C-CBAF-4FD8-B2F0-0E30601D0FA8}"/>
               </a:ext>
             </a:extLst>
           </p:cNvPr>
@@ -27911,7 +27911,7 @@
           <p:cNvPr id="35" name="Rectangle 34">
             <a:extLst>
               <a:ext uri="{FF2B5EF4-FFF2-40B4-BE49-F238E27FC236}">
-                <a16:creationId xmlns:a16="http://schemas.microsoft.com/office/drawing/2014/main" id="{75883C64-184B-41B9-9CAC-162B0CDFE050}"/>
+                <a16:creationId xmlns:a16="http://schemas.microsoft.com/office/drawing/2014/main" id="{8553B362-979D-4E43-B866-D15F55C9A62A}"/>
               </a:ext>
             </a:extLst>
           </p:cNvPr>
@@ -27973,7 +27973,7 @@
           <p:cNvPr id="36" name="Rectangle 35">
             <a:extLst>
               <a:ext uri="{FF2B5EF4-FFF2-40B4-BE49-F238E27FC236}">
-                <a16:creationId xmlns:a16="http://schemas.microsoft.com/office/drawing/2014/main" id="{82FCAF8C-BB54-4D9C-93BF-AA818FE27825}"/>
+                <a16:creationId xmlns:a16="http://schemas.microsoft.com/office/drawing/2014/main" id="{35900EDE-85CE-4FB8-936C-5FE84AB01E21}"/>
               </a:ext>
             </a:extLst>
           </p:cNvPr>
@@ -28033,7 +28033,7 @@
     </p:spTree>
     <p:extLst>
       <p:ext uri="{BB962C8B-B14F-4D97-AF65-F5344CB8AC3E}">
-        <p14:creationId xmlns:p14="http://schemas.microsoft.com/office/powerpoint/2010/main" val="909546217"/>
+        <p14:creationId xmlns:p14="http://schemas.microsoft.com/office/powerpoint/2010/main" val="1310673238"/>
       </p:ext>
     </p:extLst>
   </p:cSld>
@@ -28074,7 +28074,7 @@
             <a:hlinkClick r:id="rId3"/>
             <a:extLst>
               <a:ext uri="{FF2B5EF4-FFF2-40B4-BE49-F238E27FC236}">
-                <a16:creationId xmlns:a16="http://schemas.microsoft.com/office/drawing/2014/main" id="{39804515-A4B8-4FD4-A7FC-FE8B158AC762}"/>
+                <a16:creationId xmlns:a16="http://schemas.microsoft.com/office/drawing/2014/main" id="{0422C43A-D21A-444F-AD5A-9087C8E009C6}"/>
               </a:ext>
             </a:extLst>
           </p:cNvPr>
@@ -28149,7 +28149,7 @@
             <a:hlinkClick r:id="rId4"/>
             <a:extLst>
               <a:ext uri="{FF2B5EF4-FFF2-40B4-BE49-F238E27FC236}">
-                <a16:creationId xmlns:a16="http://schemas.microsoft.com/office/drawing/2014/main" id="{BFA17ADF-6D18-43F8-B751-6A127B0DEEEF}"/>
+                <a16:creationId xmlns:a16="http://schemas.microsoft.com/office/drawing/2014/main" id="{C80C6BDB-CFAA-4834-9325-4A40A39D4E15}"/>
               </a:ext>
             </a:extLst>
           </p:cNvPr>
@@ -28223,7 +28223,7 @@
           <p:cNvPr id="3" name="Rectangle 2">
             <a:extLst>
               <a:ext uri="{FF2B5EF4-FFF2-40B4-BE49-F238E27FC236}">
-                <a16:creationId xmlns:a16="http://schemas.microsoft.com/office/drawing/2014/main" id="{CEA06BF1-C784-4200-96B3-9D3035B87880}"/>
+                <a16:creationId xmlns:a16="http://schemas.microsoft.com/office/drawing/2014/main" id="{0577B64C-0E98-49A1-8719-4B56F4282F8C}"/>
               </a:ext>
             </a:extLst>
           </p:cNvPr>
@@ -28285,7 +28285,7 @@
           <p:cNvPr id="4" name="Rectangle 3">
             <a:extLst>
               <a:ext uri="{FF2B5EF4-FFF2-40B4-BE49-F238E27FC236}">
-                <a16:creationId xmlns:a16="http://schemas.microsoft.com/office/drawing/2014/main" id="{04AB016E-8415-4448-92C2-5A01172E8C5F}"/>
+                <a16:creationId xmlns:a16="http://schemas.microsoft.com/office/drawing/2014/main" id="{20815291-F205-4218-B83E-1ABAE8985CB0}"/>
               </a:ext>
             </a:extLst>
           </p:cNvPr>
@@ -28347,7 +28347,7 @@
           <p:cNvPr id="5" name="Rectangle 4">
             <a:extLst>
               <a:ext uri="{FF2B5EF4-FFF2-40B4-BE49-F238E27FC236}">
-                <a16:creationId xmlns:a16="http://schemas.microsoft.com/office/drawing/2014/main" id="{6ADB03D6-5392-4888-9CFB-AF15ECD9C2B4}"/>
+                <a16:creationId xmlns:a16="http://schemas.microsoft.com/office/drawing/2014/main" id="{90950FB8-7329-483E-8B4B-7DD70307474D}"/>
               </a:ext>
             </a:extLst>
           </p:cNvPr>
@@ -28409,7 +28409,7 @@
           <p:cNvPr id="6" name="Rectangle 5">
             <a:extLst>
               <a:ext uri="{FF2B5EF4-FFF2-40B4-BE49-F238E27FC236}">
-                <a16:creationId xmlns:a16="http://schemas.microsoft.com/office/drawing/2014/main" id="{1DD6E4DA-9FE2-4E3A-B325-25C579FA8A3F}"/>
+                <a16:creationId xmlns:a16="http://schemas.microsoft.com/office/drawing/2014/main" id="{112239B6-1F6B-4210-9157-FCC69A013127}"/>
               </a:ext>
             </a:extLst>
           </p:cNvPr>
@@ -28440,7 +28440,7 @@
           <p:cNvPr id="7" name="Rectangle 6">
             <a:extLst>
               <a:ext uri="{FF2B5EF4-FFF2-40B4-BE49-F238E27FC236}">
-                <a16:creationId xmlns:a16="http://schemas.microsoft.com/office/drawing/2014/main" id="{0E9CA252-7564-4E51-BCFB-8AA3E04DDBBF}"/>
+                <a16:creationId xmlns:a16="http://schemas.microsoft.com/office/drawing/2014/main" id="{17E0FEDB-3F44-4718-9DC0-0BC585FAAACF}"/>
               </a:ext>
             </a:extLst>
           </p:cNvPr>
@@ -28565,7 +28565,7 @@
           <p:cNvPr id="8" name="Rectangle 7">
             <a:extLst>
               <a:ext uri="{FF2B5EF4-FFF2-40B4-BE49-F238E27FC236}">
-                <a16:creationId xmlns:a16="http://schemas.microsoft.com/office/drawing/2014/main" id="{7BF29D0A-6D6E-4D24-BF2F-062BEEA9862A}"/>
+                <a16:creationId xmlns:a16="http://schemas.microsoft.com/office/drawing/2014/main" id="{35EC0577-0632-4254-98F7-B2C3A6A3F245}"/>
               </a:ext>
             </a:extLst>
           </p:cNvPr>
@@ -28627,7 +28627,7 @@
           <p:cNvPr id="9" name="Rectangle 8">
             <a:extLst>
               <a:ext uri="{FF2B5EF4-FFF2-40B4-BE49-F238E27FC236}">
-                <a16:creationId xmlns:a16="http://schemas.microsoft.com/office/drawing/2014/main" id="{BA3FB430-9A87-4826-B2CA-660E7FF3EF88}"/>
+                <a16:creationId xmlns:a16="http://schemas.microsoft.com/office/drawing/2014/main" id="{4BEA146E-9DE0-4BEB-9EA6-79F0ED9797EB}"/>
               </a:ext>
             </a:extLst>
           </p:cNvPr>
@@ -28658,7 +28658,7 @@
           <p:cNvPr id="10" name="Rectangle 9">
             <a:extLst>
               <a:ext uri="{FF2B5EF4-FFF2-40B4-BE49-F238E27FC236}">
-                <a16:creationId xmlns:a16="http://schemas.microsoft.com/office/drawing/2014/main" id="{FC7D823E-663E-499E-9C78-859111ADA3F6}"/>
+                <a16:creationId xmlns:a16="http://schemas.microsoft.com/office/drawing/2014/main" id="{1B8B1745-2B9D-4FA9-A370-19A6F73E81E9}"/>
               </a:ext>
             </a:extLst>
           </p:cNvPr>
@@ -28783,7 +28783,7 @@
           <p:cNvPr id="11" name="Rectangle 10">
             <a:extLst>
               <a:ext uri="{FF2B5EF4-FFF2-40B4-BE49-F238E27FC236}">
-                <a16:creationId xmlns:a16="http://schemas.microsoft.com/office/drawing/2014/main" id="{FEC409FA-6327-4D9B-903D-D96CC0115D20}"/>
+                <a16:creationId xmlns:a16="http://schemas.microsoft.com/office/drawing/2014/main" id="{E6ACB4A4-A356-4C54-926F-6D00E76C1ADD}"/>
               </a:ext>
             </a:extLst>
           </p:cNvPr>
@@ -28845,7 +28845,7 @@
           <p:cNvPr id="12" name="Rectangle 11">
             <a:extLst>
               <a:ext uri="{FF2B5EF4-FFF2-40B4-BE49-F238E27FC236}">
-                <a16:creationId xmlns:a16="http://schemas.microsoft.com/office/drawing/2014/main" id="{AA5652E2-FD42-458F-A599-5186F9745362}"/>
+                <a16:creationId xmlns:a16="http://schemas.microsoft.com/office/drawing/2014/main" id="{AB3C4882-1E07-42D6-8D1F-905EB284D67C}"/>
               </a:ext>
             </a:extLst>
           </p:cNvPr>
@@ -28876,7 +28876,7 @@
           <p:cNvPr id="13" name="Rectangle 12">
             <a:extLst>
               <a:ext uri="{FF2B5EF4-FFF2-40B4-BE49-F238E27FC236}">
-                <a16:creationId xmlns:a16="http://schemas.microsoft.com/office/drawing/2014/main" id="{C9C77DC7-F134-4968-92C6-8FE6D18C54A6}"/>
+                <a16:creationId xmlns:a16="http://schemas.microsoft.com/office/drawing/2014/main" id="{ED5861EE-C655-457C-AAE0-7B5AEEA74FEA}"/>
               </a:ext>
             </a:extLst>
           </p:cNvPr>
@@ -29001,7 +29001,7 @@
           <p:cNvPr id="14" name="Rectangle: Rounded Corners 13">
             <a:extLst>
               <a:ext uri="{FF2B5EF4-FFF2-40B4-BE49-F238E27FC236}">
-                <a16:creationId xmlns:a16="http://schemas.microsoft.com/office/drawing/2014/main" id="{4ED76F4B-DDFF-4ED9-9E51-A2B529288251}"/>
+                <a16:creationId xmlns:a16="http://schemas.microsoft.com/office/drawing/2014/main" id="{F56FBC4F-BED4-4BBE-BACC-49EA9E4EF8BF}"/>
               </a:ext>
             </a:extLst>
           </p:cNvPr>
@@ -29034,7 +29034,7 @@
           <p:cNvPr id="15" name="Rectangle 14">
             <a:extLst>
               <a:ext uri="{FF2B5EF4-FFF2-40B4-BE49-F238E27FC236}">
-                <a16:creationId xmlns:a16="http://schemas.microsoft.com/office/drawing/2014/main" id="{22556706-5281-44E6-B25B-8CF24BD6E120}"/>
+                <a16:creationId xmlns:a16="http://schemas.microsoft.com/office/drawing/2014/main" id="{87DE6F29-A658-4949-BE5F-C3E8120A4532}"/>
               </a:ext>
             </a:extLst>
           </p:cNvPr>
@@ -29096,7 +29096,7 @@
           <p:cNvPr id="16" name="Rectangle 15">
             <a:extLst>
               <a:ext uri="{FF2B5EF4-FFF2-40B4-BE49-F238E27FC236}">
-                <a16:creationId xmlns:a16="http://schemas.microsoft.com/office/drawing/2014/main" id="{352B7072-45B8-4DBC-AAA5-23E2D0CC3963}"/>
+                <a16:creationId xmlns:a16="http://schemas.microsoft.com/office/drawing/2014/main" id="{25243DFD-63B2-4785-B14E-F9AD1BDCBA15}"/>
               </a:ext>
             </a:extLst>
           </p:cNvPr>
@@ -29158,7 +29158,7 @@
           <p:cNvPr id="17" name="Rectangle 16">
             <a:extLst>
               <a:ext uri="{FF2B5EF4-FFF2-40B4-BE49-F238E27FC236}">
-                <a16:creationId xmlns:a16="http://schemas.microsoft.com/office/drawing/2014/main" id="{376A1AB9-F77D-4A39-87BE-77ED5E9A9D26}"/>
+                <a16:creationId xmlns:a16="http://schemas.microsoft.com/office/drawing/2014/main" id="{9DA9CBD8-FEC3-4F28-9D31-D20978314C7E}"/>
               </a:ext>
             </a:extLst>
           </p:cNvPr>
@@ -29189,7 +29189,7 @@
           <p:cNvPr id="18" name="Rectangle 17">
             <a:extLst>
               <a:ext uri="{FF2B5EF4-FFF2-40B4-BE49-F238E27FC236}">
-                <a16:creationId xmlns:a16="http://schemas.microsoft.com/office/drawing/2014/main" id="{38676ED5-33FF-47B5-9761-702178FB9515}"/>
+                <a16:creationId xmlns:a16="http://schemas.microsoft.com/office/drawing/2014/main" id="{1AB73867-93AB-4575-8038-C8C6DDE50814}"/>
               </a:ext>
             </a:extLst>
           </p:cNvPr>
@@ -29251,7 +29251,7 @@
           <p:cNvPr id="19" name="Rectangle 18">
             <a:extLst>
               <a:ext uri="{FF2B5EF4-FFF2-40B4-BE49-F238E27FC236}">
-                <a16:creationId xmlns:a16="http://schemas.microsoft.com/office/drawing/2014/main" id="{131B923C-B9CA-4078-8A31-FB77CCF32336}"/>
+                <a16:creationId xmlns:a16="http://schemas.microsoft.com/office/drawing/2014/main" id="{351A2B1D-6D0A-411A-A34C-9E426870640A}"/>
               </a:ext>
             </a:extLst>
           </p:cNvPr>
@@ -29311,7 +29311,7 @@
     </p:spTree>
     <p:extLst>
       <p:ext uri="{BB962C8B-B14F-4D97-AF65-F5344CB8AC3E}">
-        <p14:creationId xmlns:p14="http://schemas.microsoft.com/office/powerpoint/2010/main" val="434596084"/>
+        <p14:creationId xmlns:p14="http://schemas.microsoft.com/office/powerpoint/2010/main" val="208803194"/>
       </p:ext>
     </p:extLst>
   </p:cSld>
@@ -29352,7 +29352,7 @@
             <a:hlinkClick r:id="rId3"/>
             <a:extLst>
               <a:ext uri="{FF2B5EF4-FFF2-40B4-BE49-F238E27FC236}">
-                <a16:creationId xmlns:a16="http://schemas.microsoft.com/office/drawing/2014/main" id="{9243D3DF-C3AE-496D-8A15-180742F54410}"/>
+                <a16:creationId xmlns:a16="http://schemas.microsoft.com/office/drawing/2014/main" id="{F115B1C6-79D5-4BF3-8AD4-913AC6DFB1B8}"/>
               </a:ext>
             </a:extLst>
           </p:cNvPr>
@@ -29427,7 +29427,7 @@
             <a:hlinkClick r:id="rId4"/>
             <a:extLst>
               <a:ext uri="{FF2B5EF4-FFF2-40B4-BE49-F238E27FC236}">
-                <a16:creationId xmlns:a16="http://schemas.microsoft.com/office/drawing/2014/main" id="{4211D986-387E-40CA-920A-5B54E8AA2A28}"/>
+                <a16:creationId xmlns:a16="http://schemas.microsoft.com/office/drawing/2014/main" id="{D6A80BE3-1770-4ADA-80BB-35E504B168A9}"/>
               </a:ext>
             </a:extLst>
           </p:cNvPr>
@@ -29501,7 +29501,7 @@
           <p:cNvPr id="3" name="Rectangle 2">
             <a:extLst>
               <a:ext uri="{FF2B5EF4-FFF2-40B4-BE49-F238E27FC236}">
-                <a16:creationId xmlns:a16="http://schemas.microsoft.com/office/drawing/2014/main" id="{2E2B6F56-43FA-4E8C-87E5-5BC173A6495B}"/>
+                <a16:creationId xmlns:a16="http://schemas.microsoft.com/office/drawing/2014/main" id="{51737F5F-B726-4CA8-9D8C-FDCBC64293A4}"/>
               </a:ext>
             </a:extLst>
           </p:cNvPr>
@@ -29563,7 +29563,7 @@
           <p:cNvPr id="4" name="Rectangle 3">
             <a:extLst>
               <a:ext uri="{FF2B5EF4-FFF2-40B4-BE49-F238E27FC236}">
-                <a16:creationId xmlns:a16="http://schemas.microsoft.com/office/drawing/2014/main" id="{E5B3F24F-22BA-4B10-8743-6FC003C0B09A}"/>
+                <a16:creationId xmlns:a16="http://schemas.microsoft.com/office/drawing/2014/main" id="{36092E57-80AC-42CA-BB5D-9C9198A50714}"/>
               </a:ext>
             </a:extLst>
           </p:cNvPr>
@@ -29625,7 +29625,7 @@
           <p:cNvPr id="5" name="Rectangle 4">
             <a:extLst>
               <a:ext uri="{FF2B5EF4-FFF2-40B4-BE49-F238E27FC236}">
-                <a16:creationId xmlns:a16="http://schemas.microsoft.com/office/drawing/2014/main" id="{5732B991-A60A-44BF-B341-CE658E6D3543}"/>
+                <a16:creationId xmlns:a16="http://schemas.microsoft.com/office/drawing/2014/main" id="{FE67322E-D163-4F88-A008-6314A735BE09}"/>
               </a:ext>
             </a:extLst>
           </p:cNvPr>
@@ -29687,7 +29687,7 @@
           <p:cNvPr id="6" name="Oval 5">
             <a:extLst>
               <a:ext uri="{FF2B5EF4-FFF2-40B4-BE49-F238E27FC236}">
-                <a16:creationId xmlns:a16="http://schemas.microsoft.com/office/drawing/2014/main" id="{2678A839-F72E-415F-A6BB-3EF4FF89C679}"/>
+                <a16:creationId xmlns:a16="http://schemas.microsoft.com/office/drawing/2014/main" id="{9620C702-3C63-4B89-B3AE-D4AF5BEB2919}"/>
               </a:ext>
             </a:extLst>
           </p:cNvPr>
@@ -29718,7 +29718,7 @@
           <p:cNvPr id="7" name="Rectangle 6">
             <a:extLst>
               <a:ext uri="{FF2B5EF4-FFF2-40B4-BE49-F238E27FC236}">
-                <a16:creationId xmlns:a16="http://schemas.microsoft.com/office/drawing/2014/main" id="{3AAE9E59-4977-4297-9B14-84CC1381C6BA}"/>
+                <a16:creationId xmlns:a16="http://schemas.microsoft.com/office/drawing/2014/main" id="{E8FCCC28-6377-475E-9F6D-458B1586D4F5}"/>
               </a:ext>
             </a:extLst>
           </p:cNvPr>
@@ -29780,7 +29780,7 @@
           <p:cNvPr id="8" name="Oval 7">
             <a:extLst>
               <a:ext uri="{FF2B5EF4-FFF2-40B4-BE49-F238E27FC236}">
-                <a16:creationId xmlns:a16="http://schemas.microsoft.com/office/drawing/2014/main" id="{91D71C27-B04F-41C4-8244-82309E6F4CF6}"/>
+                <a16:creationId xmlns:a16="http://schemas.microsoft.com/office/drawing/2014/main" id="{3086A9BE-A870-4BBC-8801-233F2951DC34}"/>
               </a:ext>
             </a:extLst>
           </p:cNvPr>
@@ -29811,7 +29811,7 @@
           <p:cNvPr id="9" name="Rectangle 8">
             <a:extLst>
               <a:ext uri="{FF2B5EF4-FFF2-40B4-BE49-F238E27FC236}">
-                <a16:creationId xmlns:a16="http://schemas.microsoft.com/office/drawing/2014/main" id="{4FCE7AA6-1DC6-46AE-996B-9D0ED3243E56}"/>
+                <a16:creationId xmlns:a16="http://schemas.microsoft.com/office/drawing/2014/main" id="{304A35A9-0D0A-4D04-ADCF-20F41440A57E}"/>
               </a:ext>
             </a:extLst>
           </p:cNvPr>
@@ -29873,7 +29873,7 @@
           <p:cNvPr id="10" name="Oval 9">
             <a:extLst>
               <a:ext uri="{FF2B5EF4-FFF2-40B4-BE49-F238E27FC236}">
-                <a16:creationId xmlns:a16="http://schemas.microsoft.com/office/drawing/2014/main" id="{3CC89669-A203-4004-8F9E-FFC1BABBCFEA}"/>
+                <a16:creationId xmlns:a16="http://schemas.microsoft.com/office/drawing/2014/main" id="{A1AEA24C-ADC8-43BC-BAAE-12E4B927EF4B}"/>
               </a:ext>
             </a:extLst>
           </p:cNvPr>
@@ -29904,7 +29904,7 @@
           <p:cNvPr id="11" name="Rectangle 10">
             <a:extLst>
               <a:ext uri="{FF2B5EF4-FFF2-40B4-BE49-F238E27FC236}">
-                <a16:creationId xmlns:a16="http://schemas.microsoft.com/office/drawing/2014/main" id="{4604EE32-801A-4424-8DB7-A1963437E1AC}"/>
+                <a16:creationId xmlns:a16="http://schemas.microsoft.com/office/drawing/2014/main" id="{FF7D7010-9D74-47F4-84A8-983D22EF6F34}"/>
               </a:ext>
             </a:extLst>
           </p:cNvPr>
@@ -29966,7 +29966,7 @@
           <p:cNvPr id="12" name="Oval 11">
             <a:extLst>
               <a:ext uri="{FF2B5EF4-FFF2-40B4-BE49-F238E27FC236}">
-                <a16:creationId xmlns:a16="http://schemas.microsoft.com/office/drawing/2014/main" id="{379B66B0-8A0F-4FF6-B763-49E15CCBE114}"/>
+                <a16:creationId xmlns:a16="http://schemas.microsoft.com/office/drawing/2014/main" id="{1B86ADA9-FD43-4C5F-BC94-76F156E312EE}"/>
               </a:ext>
             </a:extLst>
           </p:cNvPr>
@@ -29997,7 +29997,7 @@
           <p:cNvPr id="13" name="Rectangle 12">
             <a:extLst>
               <a:ext uri="{FF2B5EF4-FFF2-40B4-BE49-F238E27FC236}">
-                <a16:creationId xmlns:a16="http://schemas.microsoft.com/office/drawing/2014/main" id="{5EA5A264-3173-41C1-943E-225C474FD1F3}"/>
+                <a16:creationId xmlns:a16="http://schemas.microsoft.com/office/drawing/2014/main" id="{17DC2052-B211-4305-96C2-1F3657B9F214}"/>
               </a:ext>
             </a:extLst>
           </p:cNvPr>
@@ -30059,7 +30059,7 @@
           <p:cNvPr id="14" name="Oval 13">
             <a:extLst>
               <a:ext uri="{FF2B5EF4-FFF2-40B4-BE49-F238E27FC236}">
-                <a16:creationId xmlns:a16="http://schemas.microsoft.com/office/drawing/2014/main" id="{460A13B8-E552-40E4-BE9B-6CB5BB65D66C}"/>
+                <a16:creationId xmlns:a16="http://schemas.microsoft.com/office/drawing/2014/main" id="{88C63F2C-1EE9-4353-B533-602051737BD1}"/>
               </a:ext>
             </a:extLst>
           </p:cNvPr>
@@ -30090,7 +30090,7 @@
           <p:cNvPr id="15" name="Rectangle 14">
             <a:extLst>
               <a:ext uri="{FF2B5EF4-FFF2-40B4-BE49-F238E27FC236}">
-                <a16:creationId xmlns:a16="http://schemas.microsoft.com/office/drawing/2014/main" id="{623B35D3-22D7-4386-ADFB-5814A39D78B9}"/>
+                <a16:creationId xmlns:a16="http://schemas.microsoft.com/office/drawing/2014/main" id="{36DD056F-AD87-423A-BE9A-F56F5C22E3BA}"/>
               </a:ext>
             </a:extLst>
           </p:cNvPr>
@@ -30152,7 +30152,7 @@
           <p:cNvPr id="16" name="Oval 15">
             <a:extLst>
               <a:ext uri="{FF2B5EF4-FFF2-40B4-BE49-F238E27FC236}">
-                <a16:creationId xmlns:a16="http://schemas.microsoft.com/office/drawing/2014/main" id="{D303A43E-3F0C-42EB-811B-3F15F1B572EC}"/>
+                <a16:creationId xmlns:a16="http://schemas.microsoft.com/office/drawing/2014/main" id="{E382A86F-2C3D-455F-A53E-A8B9E237E1E2}"/>
               </a:ext>
             </a:extLst>
           </p:cNvPr>
@@ -30183,7 +30183,7 @@
           <p:cNvPr id="17" name="Rectangle 16">
             <a:extLst>
               <a:ext uri="{FF2B5EF4-FFF2-40B4-BE49-F238E27FC236}">
-                <a16:creationId xmlns:a16="http://schemas.microsoft.com/office/drawing/2014/main" id="{0C68AB84-8D61-4D56-B0A7-69E75526D11D}"/>
+                <a16:creationId xmlns:a16="http://schemas.microsoft.com/office/drawing/2014/main" id="{88DD7137-BCD5-468C-B72E-F00626714E2E}"/>
               </a:ext>
             </a:extLst>
           </p:cNvPr>
@@ -30245,7 +30245,7 @@
           <p:cNvPr id="18" name="Oval 17">
             <a:extLst>
               <a:ext uri="{FF2B5EF4-FFF2-40B4-BE49-F238E27FC236}">
-                <a16:creationId xmlns:a16="http://schemas.microsoft.com/office/drawing/2014/main" id="{856C7BA4-5CE2-41E3-96A5-6D5F33FAD715}"/>
+                <a16:creationId xmlns:a16="http://schemas.microsoft.com/office/drawing/2014/main" id="{3DDA96FE-4D28-40C7-8DC9-5D63C8CFAB2B}"/>
               </a:ext>
             </a:extLst>
           </p:cNvPr>
@@ -30276,7 +30276,7 @@
           <p:cNvPr id="19" name="Rectangle 18">
             <a:extLst>
               <a:ext uri="{FF2B5EF4-FFF2-40B4-BE49-F238E27FC236}">
-                <a16:creationId xmlns:a16="http://schemas.microsoft.com/office/drawing/2014/main" id="{2B6AAAEF-3C7B-44B7-B1CC-787BEB4A272C}"/>
+                <a16:creationId xmlns:a16="http://schemas.microsoft.com/office/drawing/2014/main" id="{EBED0BF2-7D7A-4537-815C-FD7E5A157948}"/>
               </a:ext>
             </a:extLst>
           </p:cNvPr>
@@ -30338,7 +30338,7 @@
           <p:cNvPr id="20" name="Rectangle 19">
             <a:extLst>
               <a:ext uri="{FF2B5EF4-FFF2-40B4-BE49-F238E27FC236}">
-                <a16:creationId xmlns:a16="http://schemas.microsoft.com/office/drawing/2014/main" id="{2B4DFD8B-BC0A-4AAC-9D5E-0FBBA7FEA9B8}"/>
+                <a16:creationId xmlns:a16="http://schemas.microsoft.com/office/drawing/2014/main" id="{56D35F40-4C84-4DBF-9245-6054D874D32E}"/>
               </a:ext>
             </a:extLst>
           </p:cNvPr>
@@ -30369,7 +30369,7 @@
           <p:cNvPr id="21" name="Rectangle 20">
             <a:extLst>
               <a:ext uri="{FF2B5EF4-FFF2-40B4-BE49-F238E27FC236}">
-                <a16:creationId xmlns:a16="http://schemas.microsoft.com/office/drawing/2014/main" id="{05B2CE36-D5E0-4193-BE01-2A9F2EDC1140}"/>
+                <a16:creationId xmlns:a16="http://schemas.microsoft.com/office/drawing/2014/main" id="{3B1D58FE-FFA1-442B-A2D6-BB61B18D357B}"/>
               </a:ext>
             </a:extLst>
           </p:cNvPr>
@@ -30431,7 +30431,7 @@
           <p:cNvPr id="22" name="Rectangle: Rounded Corners 21">
             <a:extLst>
               <a:ext uri="{FF2B5EF4-FFF2-40B4-BE49-F238E27FC236}">
-                <a16:creationId xmlns:a16="http://schemas.microsoft.com/office/drawing/2014/main" id="{E641E40D-D403-4CA5-8585-45D71EBAC818}"/>
+                <a16:creationId xmlns:a16="http://schemas.microsoft.com/office/drawing/2014/main" id="{45733CB9-F1F9-4763-BE35-3B99E2C451B5}"/>
               </a:ext>
             </a:extLst>
           </p:cNvPr>
@@ -30466,7 +30466,7 @@
           <p:cNvPr id="23" name="Rectangle 22">
             <a:extLst>
               <a:ext uri="{FF2B5EF4-FFF2-40B4-BE49-F238E27FC236}">
-                <a16:creationId xmlns:a16="http://schemas.microsoft.com/office/drawing/2014/main" id="{534A8243-8B0D-45DE-A31A-B1438F5631B1}"/>
+                <a16:creationId xmlns:a16="http://schemas.microsoft.com/office/drawing/2014/main" id="{32667627-E352-4706-AA39-BEABFC0F2A78}"/>
               </a:ext>
             </a:extLst>
           </p:cNvPr>
@@ -30528,7 +30528,7 @@
           <p:cNvPr id="24" name="Rectangle: Rounded Corners 23">
             <a:extLst>
               <a:ext uri="{FF2B5EF4-FFF2-40B4-BE49-F238E27FC236}">
-                <a16:creationId xmlns:a16="http://schemas.microsoft.com/office/drawing/2014/main" id="{18B75556-BF25-4589-BD98-A6E7E6B81D76}"/>
+                <a16:creationId xmlns:a16="http://schemas.microsoft.com/office/drawing/2014/main" id="{F84B4CDC-608F-44F8-8EE5-CCAC5133A625}"/>
               </a:ext>
             </a:extLst>
           </p:cNvPr>
@@ -30563,7 +30563,7 @@
           <p:cNvPr id="25" name="Rectangle 24">
             <a:extLst>
               <a:ext uri="{FF2B5EF4-FFF2-40B4-BE49-F238E27FC236}">
-                <a16:creationId xmlns:a16="http://schemas.microsoft.com/office/drawing/2014/main" id="{EC596334-A240-48F1-9B3C-B511FD1EA573}"/>
+                <a16:creationId xmlns:a16="http://schemas.microsoft.com/office/drawing/2014/main" id="{02AADE12-7940-43A3-91D6-A0DFEF015270}"/>
               </a:ext>
             </a:extLst>
           </p:cNvPr>
@@ -30625,7 +30625,7 @@
           <p:cNvPr id="26" name="Rectangle: Rounded Corners 25">
             <a:extLst>
               <a:ext uri="{FF2B5EF4-FFF2-40B4-BE49-F238E27FC236}">
-                <a16:creationId xmlns:a16="http://schemas.microsoft.com/office/drawing/2014/main" id="{A46C1102-907C-466F-97B1-248B475AA9F8}"/>
+                <a16:creationId xmlns:a16="http://schemas.microsoft.com/office/drawing/2014/main" id="{9D055811-A7F7-4A94-895C-640B108CB4D9}"/>
               </a:ext>
             </a:extLst>
           </p:cNvPr>
@@ -30660,7 +30660,7 @@
           <p:cNvPr id="27" name="Rectangle 26">
             <a:extLst>
               <a:ext uri="{FF2B5EF4-FFF2-40B4-BE49-F238E27FC236}">
-                <a16:creationId xmlns:a16="http://schemas.microsoft.com/office/drawing/2014/main" id="{08C0B012-BEC9-4F1E-857E-54E8FE2F1E34}"/>
+                <a16:creationId xmlns:a16="http://schemas.microsoft.com/office/drawing/2014/main" id="{1C4B7E2C-E689-40B8-8AB2-C5DA0C3C5643}"/>
               </a:ext>
             </a:extLst>
           </p:cNvPr>
@@ -30722,7 +30722,7 @@
           <p:cNvPr id="28" name="Rectangle: Rounded Corners 27">
             <a:extLst>
               <a:ext uri="{FF2B5EF4-FFF2-40B4-BE49-F238E27FC236}">
-                <a16:creationId xmlns:a16="http://schemas.microsoft.com/office/drawing/2014/main" id="{7F9598D7-2766-4F33-8AA7-422747838FD2}"/>
+                <a16:creationId xmlns:a16="http://schemas.microsoft.com/office/drawing/2014/main" id="{9C990364-2520-4501-BEC2-80C29ECF187B}"/>
               </a:ext>
             </a:extLst>
           </p:cNvPr>
@@ -30757,7 +30757,7 @@
           <p:cNvPr id="29" name="Rectangle 28">
             <a:extLst>
               <a:ext uri="{FF2B5EF4-FFF2-40B4-BE49-F238E27FC236}">
-                <a16:creationId xmlns:a16="http://schemas.microsoft.com/office/drawing/2014/main" id="{8292C93F-335A-4A67-BBF2-47636786FDAD}"/>
+                <a16:creationId xmlns:a16="http://schemas.microsoft.com/office/drawing/2014/main" id="{A65FE071-1463-46CC-984F-CCBA6374EF59}"/>
               </a:ext>
             </a:extLst>
           </p:cNvPr>
@@ -30819,7 +30819,7 @@
           <p:cNvPr id="30" name="Rectangle: Rounded Corners 29">
             <a:extLst>
               <a:ext uri="{FF2B5EF4-FFF2-40B4-BE49-F238E27FC236}">
-                <a16:creationId xmlns:a16="http://schemas.microsoft.com/office/drawing/2014/main" id="{7D19AF07-E729-439E-8144-B4AAED9B41F3}"/>
+                <a16:creationId xmlns:a16="http://schemas.microsoft.com/office/drawing/2014/main" id="{EB4FD09D-32F7-462D-99EF-E796C0594F15}"/>
               </a:ext>
             </a:extLst>
           </p:cNvPr>
@@ -30854,7 +30854,7 @@
           <p:cNvPr id="31" name="Rectangle 30">
             <a:extLst>
               <a:ext uri="{FF2B5EF4-FFF2-40B4-BE49-F238E27FC236}">
-                <a16:creationId xmlns:a16="http://schemas.microsoft.com/office/drawing/2014/main" id="{B8080DFC-D63C-4A30-891E-850EF70D3C6C}"/>
+                <a16:creationId xmlns:a16="http://schemas.microsoft.com/office/drawing/2014/main" id="{DF39AF02-C07D-4F46-ABA7-8908F59379BD}"/>
               </a:ext>
             </a:extLst>
           </p:cNvPr>
@@ -30916,7 +30916,7 @@
           <p:cNvPr id="32" name="Rectangle: Rounded Corners 31">
             <a:extLst>
               <a:ext uri="{FF2B5EF4-FFF2-40B4-BE49-F238E27FC236}">
-                <a16:creationId xmlns:a16="http://schemas.microsoft.com/office/drawing/2014/main" id="{A69A2F93-E982-4487-9CE2-0E3EAE93A2C5}"/>
+                <a16:creationId xmlns:a16="http://schemas.microsoft.com/office/drawing/2014/main" id="{1D7DE84B-CE14-4BE3-8CDB-49E3B632B34B}"/>
               </a:ext>
             </a:extLst>
           </p:cNvPr>
@@ -30951,7 +30951,7 @@
           <p:cNvPr id="33" name="Rectangle 32">
             <a:extLst>
               <a:ext uri="{FF2B5EF4-FFF2-40B4-BE49-F238E27FC236}">
-                <a16:creationId xmlns:a16="http://schemas.microsoft.com/office/drawing/2014/main" id="{6953C1B9-5363-4214-8A22-1020BF033D97}"/>
+                <a16:creationId xmlns:a16="http://schemas.microsoft.com/office/drawing/2014/main" id="{641EC256-E81C-4CCB-A7B2-914B17B1B9A2}"/>
               </a:ext>
             </a:extLst>
           </p:cNvPr>
@@ -31013,7 +31013,7 @@
           <p:cNvPr id="34" name="Rectangle: Rounded Corners 33">
             <a:extLst>
               <a:ext uri="{FF2B5EF4-FFF2-40B4-BE49-F238E27FC236}">
-                <a16:creationId xmlns:a16="http://schemas.microsoft.com/office/drawing/2014/main" id="{915040CD-7921-44F0-A182-EA2D69FEADC5}"/>
+                <a16:creationId xmlns:a16="http://schemas.microsoft.com/office/drawing/2014/main" id="{C42D0BE0-2474-4F86-AA38-0AD09B427921}"/>
               </a:ext>
             </a:extLst>
           </p:cNvPr>
@@ -31048,7 +31048,7 @@
           <p:cNvPr id="35" name="Rectangle 34">
             <a:extLst>
               <a:ext uri="{FF2B5EF4-FFF2-40B4-BE49-F238E27FC236}">
-                <a16:creationId xmlns:a16="http://schemas.microsoft.com/office/drawing/2014/main" id="{67429ED0-3556-436F-A6B5-5B5A6CEFEAE4}"/>
+                <a16:creationId xmlns:a16="http://schemas.microsoft.com/office/drawing/2014/main" id="{2F427015-3348-4C22-A568-D2B2673685D2}"/>
               </a:ext>
             </a:extLst>
           </p:cNvPr>
@@ -31110,7 +31110,7 @@
           <p:cNvPr id="36" name="Rectangle: Rounded Corners 35">
             <a:extLst>
               <a:ext uri="{FF2B5EF4-FFF2-40B4-BE49-F238E27FC236}">
-                <a16:creationId xmlns:a16="http://schemas.microsoft.com/office/drawing/2014/main" id="{44C05AA9-C545-4B52-87D7-25426F7FC927}"/>
+                <a16:creationId xmlns:a16="http://schemas.microsoft.com/office/drawing/2014/main" id="{1787CC8F-5C00-4665-AEAB-127F320ED360}"/>
               </a:ext>
             </a:extLst>
           </p:cNvPr>
@@ -31145,7 +31145,7 @@
           <p:cNvPr id="37" name="Rectangle 36">
             <a:extLst>
               <a:ext uri="{FF2B5EF4-FFF2-40B4-BE49-F238E27FC236}">
-                <a16:creationId xmlns:a16="http://schemas.microsoft.com/office/drawing/2014/main" id="{3A7C8A5B-8076-4FA9-A4A7-1E4D3727AD20}"/>
+                <a16:creationId xmlns:a16="http://schemas.microsoft.com/office/drawing/2014/main" id="{448D8479-8547-4C8D-8CC4-F36BC479A1A4}"/>
               </a:ext>
             </a:extLst>
           </p:cNvPr>
@@ -31207,7 +31207,7 @@
           <p:cNvPr id="38" name="Rectangle: Rounded Corners 37">
             <a:extLst>
               <a:ext uri="{FF2B5EF4-FFF2-40B4-BE49-F238E27FC236}">
-                <a16:creationId xmlns:a16="http://schemas.microsoft.com/office/drawing/2014/main" id="{267E7FA9-B331-4EA5-86EB-5FB945E530B1}"/>
+                <a16:creationId xmlns:a16="http://schemas.microsoft.com/office/drawing/2014/main" id="{674F699A-F46F-4A45-A2AA-9A8699F8F8FD}"/>
               </a:ext>
             </a:extLst>
           </p:cNvPr>
@@ -31242,7 +31242,7 @@
           <p:cNvPr id="39" name="Rectangle 38">
             <a:extLst>
               <a:ext uri="{FF2B5EF4-FFF2-40B4-BE49-F238E27FC236}">
-                <a16:creationId xmlns:a16="http://schemas.microsoft.com/office/drawing/2014/main" id="{038FA412-341D-406A-92FD-400668C0D1C2}"/>
+                <a16:creationId xmlns:a16="http://schemas.microsoft.com/office/drawing/2014/main" id="{D1ABD0D8-09E4-43DF-A828-A43F5B4C22BF}"/>
               </a:ext>
             </a:extLst>
           </p:cNvPr>
@@ -31304,7 +31304,7 @@
           <p:cNvPr id="40" name="Rectangle 39">
             <a:extLst>
               <a:ext uri="{FF2B5EF4-FFF2-40B4-BE49-F238E27FC236}">
-                <a16:creationId xmlns:a16="http://schemas.microsoft.com/office/drawing/2014/main" id="{02838B1F-2B3D-4B57-8154-065676FC8424}"/>
+                <a16:creationId xmlns:a16="http://schemas.microsoft.com/office/drawing/2014/main" id="{B556D1FB-0053-4B07-86C0-2E7CD9F05261}"/>
               </a:ext>
             </a:extLst>
           </p:cNvPr>
@@ -31366,7 +31366,7 @@
           <p:cNvPr id="41" name="Rectangle 40">
             <a:extLst>
               <a:ext uri="{FF2B5EF4-FFF2-40B4-BE49-F238E27FC236}">
-                <a16:creationId xmlns:a16="http://schemas.microsoft.com/office/drawing/2014/main" id="{06AB832F-234D-43E2-9BE2-D5A32927A0DA}"/>
+                <a16:creationId xmlns:a16="http://schemas.microsoft.com/office/drawing/2014/main" id="{41278455-6A9C-4D15-9AA3-2D21D3471F61}"/>
               </a:ext>
             </a:extLst>
           </p:cNvPr>
@@ -31428,7 +31428,7 @@
           <p:cNvPr id="42" name="Rectangle 41">
             <a:extLst>
               <a:ext uri="{FF2B5EF4-FFF2-40B4-BE49-F238E27FC236}">
-                <a16:creationId xmlns:a16="http://schemas.microsoft.com/office/drawing/2014/main" id="{F56FEB82-73ED-432C-A2EB-48793AACC77F}"/>
+                <a16:creationId xmlns:a16="http://schemas.microsoft.com/office/drawing/2014/main" id="{0CB5439E-3424-41FF-BA92-F7CFB228A058}"/>
               </a:ext>
             </a:extLst>
           </p:cNvPr>
@@ -31490,7 +31490,7 @@
           <p:cNvPr id="43" name="Rectangle 42">
             <a:extLst>
               <a:ext uri="{FF2B5EF4-FFF2-40B4-BE49-F238E27FC236}">
-                <a16:creationId xmlns:a16="http://schemas.microsoft.com/office/drawing/2014/main" id="{4335EB24-7F5F-48F3-955C-8ABA5001C991}"/>
+                <a16:creationId xmlns:a16="http://schemas.microsoft.com/office/drawing/2014/main" id="{948106F3-ADF3-43CC-ADF8-A11A15163C64}"/>
               </a:ext>
             </a:extLst>
           </p:cNvPr>
@@ -31552,7 +31552,7 @@
           <p:cNvPr id="44" name="Rectangle 43">
             <a:extLst>
               <a:ext uri="{FF2B5EF4-FFF2-40B4-BE49-F238E27FC236}">
-                <a16:creationId xmlns:a16="http://schemas.microsoft.com/office/drawing/2014/main" id="{7E8D181B-1FBE-448E-8637-BD87EB1B5290}"/>
+                <a16:creationId xmlns:a16="http://schemas.microsoft.com/office/drawing/2014/main" id="{92AFA003-C4DA-4401-8752-3E54EBFAFBC5}"/>
               </a:ext>
             </a:extLst>
           </p:cNvPr>
@@ -31614,7 +31614,7 @@
           <p:cNvPr id="45" name="Rectangle 44">
             <a:extLst>
               <a:ext uri="{FF2B5EF4-FFF2-40B4-BE49-F238E27FC236}">
-                <a16:creationId xmlns:a16="http://schemas.microsoft.com/office/drawing/2014/main" id="{DDBCB87B-48F1-49D8-99D0-6146197F1FD6}"/>
+                <a16:creationId xmlns:a16="http://schemas.microsoft.com/office/drawing/2014/main" id="{1EAFC443-1890-44D0-A420-AF0F8B10E525}"/>
               </a:ext>
             </a:extLst>
           </p:cNvPr>
@@ -31676,7 +31676,7 @@
           <p:cNvPr id="46" name="Rectangle 45">
             <a:extLst>
               <a:ext uri="{FF2B5EF4-FFF2-40B4-BE49-F238E27FC236}">
-                <a16:creationId xmlns:a16="http://schemas.microsoft.com/office/drawing/2014/main" id="{017DACB0-BA68-43C2-841C-6209A44A92A9}"/>
+                <a16:creationId xmlns:a16="http://schemas.microsoft.com/office/drawing/2014/main" id="{3F8BB1E4-9ECE-4672-9E0C-E3D736FA2F6A}"/>
               </a:ext>
             </a:extLst>
           </p:cNvPr>
@@ -31707,7 +31707,7 @@
           <p:cNvPr id="47" name="Rectangle 46">
             <a:extLst>
               <a:ext uri="{FF2B5EF4-FFF2-40B4-BE49-F238E27FC236}">
-                <a16:creationId xmlns:a16="http://schemas.microsoft.com/office/drawing/2014/main" id="{CD46DFA0-87FB-4845-AA2E-1CD3425F1F5E}"/>
+                <a16:creationId xmlns:a16="http://schemas.microsoft.com/office/drawing/2014/main" id="{57531D4F-DA27-4A27-BF45-909190D5D2E2}"/>
               </a:ext>
             </a:extLst>
           </p:cNvPr>
@@ -31769,7 +31769,7 @@
           <p:cNvPr id="48" name="Rectangle 47">
             <a:extLst>
               <a:ext uri="{FF2B5EF4-FFF2-40B4-BE49-F238E27FC236}">
-                <a16:creationId xmlns:a16="http://schemas.microsoft.com/office/drawing/2014/main" id="{B80FFAC4-052E-4A97-A2DE-11D171B03932}"/>
+                <a16:creationId xmlns:a16="http://schemas.microsoft.com/office/drawing/2014/main" id="{246D3361-59AE-470E-9022-C5BAFAB4E86F}"/>
               </a:ext>
             </a:extLst>
           </p:cNvPr>
@@ -31829,7 +31829,7 @@
     </p:spTree>
     <p:extLst>
       <p:ext uri="{BB962C8B-B14F-4D97-AF65-F5344CB8AC3E}">
-        <p14:creationId xmlns:p14="http://schemas.microsoft.com/office/powerpoint/2010/main" val="1472871407"/>
+        <p14:creationId xmlns:p14="http://schemas.microsoft.com/office/powerpoint/2010/main" val="392201129"/>
       </p:ext>
     </p:extLst>
   </p:cSld>
@@ -31870,7 +31870,7 @@
             <a:hlinkClick r:id="rId3"/>
             <a:extLst>
               <a:ext uri="{FF2B5EF4-FFF2-40B4-BE49-F238E27FC236}">
-                <a16:creationId xmlns:a16="http://schemas.microsoft.com/office/drawing/2014/main" id="{B5C62DEC-F3C9-4882-8900-25C3BA305394}"/>
+                <a16:creationId xmlns:a16="http://schemas.microsoft.com/office/drawing/2014/main" id="{E1A5B611-3570-45F8-9056-D4EDB4C34970}"/>
               </a:ext>
             </a:extLst>
           </p:cNvPr>
@@ -31945,7 +31945,7 @@
             <a:hlinkClick r:id="rId4"/>
             <a:extLst>
               <a:ext uri="{FF2B5EF4-FFF2-40B4-BE49-F238E27FC236}">
-                <a16:creationId xmlns:a16="http://schemas.microsoft.com/office/drawing/2014/main" id="{E2BE5989-8012-4304-A1B7-8BE9EF1A3DE9}"/>
+                <a16:creationId xmlns:a16="http://schemas.microsoft.com/office/drawing/2014/main" id="{1697D531-98CD-481C-AA5C-6610E68FB9DF}"/>
               </a:ext>
             </a:extLst>
           </p:cNvPr>
@@ -32019,7 +32019,7 @@
           <p:cNvPr id="3" name="Rectangle 2">
             <a:extLst>
               <a:ext uri="{FF2B5EF4-FFF2-40B4-BE49-F238E27FC236}">
-                <a16:creationId xmlns:a16="http://schemas.microsoft.com/office/drawing/2014/main" id="{F153CE95-A02B-4B8E-A706-A5C0C399D58B}"/>
+                <a16:creationId xmlns:a16="http://schemas.microsoft.com/office/drawing/2014/main" id="{E58B05D9-13C7-43F0-95A9-25950FFADA6F}"/>
               </a:ext>
             </a:extLst>
           </p:cNvPr>
@@ -32081,7 +32081,7 @@
           <p:cNvPr id="4" name="Rectangle 3">
             <a:extLst>
               <a:ext uri="{FF2B5EF4-FFF2-40B4-BE49-F238E27FC236}">
-                <a16:creationId xmlns:a16="http://schemas.microsoft.com/office/drawing/2014/main" id="{9BCD3FAE-3DF1-45E9-A8F0-0E1040712CE7}"/>
+                <a16:creationId xmlns:a16="http://schemas.microsoft.com/office/drawing/2014/main" id="{0D30BD90-1B21-47BF-91EC-687ADCB0129E}"/>
               </a:ext>
             </a:extLst>
           </p:cNvPr>
@@ -32170,7 +32170,7 @@
           <p:cNvPr id="6" name="Rectangle: Rounded Corners 5">
             <a:extLst>
               <a:ext uri="{FF2B5EF4-FFF2-40B4-BE49-F238E27FC236}">
-                <a16:creationId xmlns:a16="http://schemas.microsoft.com/office/drawing/2014/main" id="{70DB95B8-1F8E-4924-8A4A-10BC6B932E86}"/>
+                <a16:creationId xmlns:a16="http://schemas.microsoft.com/office/drawing/2014/main" id="{AE9435F6-65E3-4668-B00F-9B46AA362D54}"/>
               </a:ext>
             </a:extLst>
           </p:cNvPr>
@@ -32203,7 +32203,7 @@
           <p:cNvPr id="7" name="Rectangle: Rounded Corners 6">
             <a:extLst>
               <a:ext uri="{FF2B5EF4-FFF2-40B4-BE49-F238E27FC236}">
-                <a16:creationId xmlns:a16="http://schemas.microsoft.com/office/drawing/2014/main" id="{E3114428-DE36-4368-B724-587C56E89B73}"/>
+                <a16:creationId xmlns:a16="http://schemas.microsoft.com/office/drawing/2014/main" id="{D3670788-12E8-4151-A772-817FFCAAD6EC}"/>
               </a:ext>
             </a:extLst>
           </p:cNvPr>
@@ -32236,7 +32236,7 @@
           <p:cNvPr id="8" name="Rectangle 7">
             <a:extLst>
               <a:ext uri="{FF2B5EF4-FFF2-40B4-BE49-F238E27FC236}">
-                <a16:creationId xmlns:a16="http://schemas.microsoft.com/office/drawing/2014/main" id="{40E96D3E-9702-426D-839D-CB1212700C89}"/>
+                <a16:creationId xmlns:a16="http://schemas.microsoft.com/office/drawing/2014/main" id="{E8013A81-5ACF-43DC-A240-9383FF5F92BA}"/>
               </a:ext>
             </a:extLst>
           </p:cNvPr>
@@ -32298,7 +32298,7 @@
           <p:cNvPr id="9" name="Rectangle 8">
             <a:extLst>
               <a:ext uri="{FF2B5EF4-FFF2-40B4-BE49-F238E27FC236}">
-                <a16:creationId xmlns:a16="http://schemas.microsoft.com/office/drawing/2014/main" id="{F828B1A6-5AEE-4804-849B-B3F95407F1EF}"/>
+                <a16:creationId xmlns:a16="http://schemas.microsoft.com/office/drawing/2014/main" id="{3A8AF652-6E7C-44A3-9502-A8A18F2FEA30}"/>
               </a:ext>
             </a:extLst>
           </p:cNvPr>
@@ -32360,7 +32360,7 @@
           <p:cNvPr id="10" name="Rectangle 9">
             <a:extLst>
               <a:ext uri="{FF2B5EF4-FFF2-40B4-BE49-F238E27FC236}">
-                <a16:creationId xmlns:a16="http://schemas.microsoft.com/office/drawing/2014/main" id="{AA910FC8-1DCE-4F0D-9CB4-A0C1468DE3CC}"/>
+                <a16:creationId xmlns:a16="http://schemas.microsoft.com/office/drawing/2014/main" id="{6EBE4E76-E696-49A5-95CE-1D1870F5A44C}"/>
               </a:ext>
             </a:extLst>
           </p:cNvPr>
@@ -32422,7 +32422,7 @@
           <p:cNvPr id="11" name="Rectangle: Rounded Corners 10">
             <a:extLst>
               <a:ext uri="{FF2B5EF4-FFF2-40B4-BE49-F238E27FC236}">
-                <a16:creationId xmlns:a16="http://schemas.microsoft.com/office/drawing/2014/main" id="{C5B5C16C-19DB-45CB-847A-5228DD102E97}"/>
+                <a16:creationId xmlns:a16="http://schemas.microsoft.com/office/drawing/2014/main" id="{837828B0-53B3-483E-8F04-4DF46C4BA1C0}"/>
               </a:ext>
             </a:extLst>
           </p:cNvPr>
@@ -32455,7 +32455,7 @@
           <p:cNvPr id="12" name="Rectangle 11">
             <a:extLst>
               <a:ext uri="{FF2B5EF4-FFF2-40B4-BE49-F238E27FC236}">
-                <a16:creationId xmlns:a16="http://schemas.microsoft.com/office/drawing/2014/main" id="{0049347E-4F4F-46EF-AC13-73D882D4BD5A}"/>
+                <a16:creationId xmlns:a16="http://schemas.microsoft.com/office/drawing/2014/main" id="{4E336EE2-48D0-4FBD-A1C3-204750558ADB}"/>
               </a:ext>
             </a:extLst>
           </p:cNvPr>
@@ -32517,7 +32517,7 @@
           <p:cNvPr id="13" name="Rectangle 12">
             <a:extLst>
               <a:ext uri="{FF2B5EF4-FFF2-40B4-BE49-F238E27FC236}">
-                <a16:creationId xmlns:a16="http://schemas.microsoft.com/office/drawing/2014/main" id="{3B1D8B1E-E7B3-431C-8866-0D3D25B2C3B3}"/>
+                <a16:creationId xmlns:a16="http://schemas.microsoft.com/office/drawing/2014/main" id="{11DA2B0A-1B52-424A-BD54-F33F40B0FB39}"/>
               </a:ext>
             </a:extLst>
           </p:cNvPr>
@@ -32579,7 +32579,7 @@
           <p:cNvPr id="14" name="Rectangle 13">
             <a:extLst>
               <a:ext uri="{FF2B5EF4-FFF2-40B4-BE49-F238E27FC236}">
-                <a16:creationId xmlns:a16="http://schemas.microsoft.com/office/drawing/2014/main" id="{E1AD719C-3493-48EB-AD1F-5E719D2007C7}"/>
+                <a16:creationId xmlns:a16="http://schemas.microsoft.com/office/drawing/2014/main" id="{3EED3DBE-38CA-44F5-A258-1E8AE1C6D32E}"/>
               </a:ext>
             </a:extLst>
           </p:cNvPr>
@@ -32734,7 +32734,7 @@
           <p:cNvPr id="15" name="Rectangle 14">
             <a:extLst>
               <a:ext uri="{FF2B5EF4-FFF2-40B4-BE49-F238E27FC236}">
-                <a16:creationId xmlns:a16="http://schemas.microsoft.com/office/drawing/2014/main" id="{E50436BF-58B4-45EB-8BCE-27E6EF9F32EA}"/>
+                <a16:creationId xmlns:a16="http://schemas.microsoft.com/office/drawing/2014/main" id="{C65C1CE1-BDC5-49F2-8506-77E3A8B9E5DC}"/>
               </a:ext>
             </a:extLst>
           </p:cNvPr>
@@ -32796,7 +32796,7 @@
           <p:cNvPr id="16" name="Rectangle 15">
             <a:extLst>
               <a:ext uri="{FF2B5EF4-FFF2-40B4-BE49-F238E27FC236}">
-                <a16:creationId xmlns:a16="http://schemas.microsoft.com/office/drawing/2014/main" id="{18571CFF-1FEB-4052-9AF1-AAD341926AB3}"/>
+                <a16:creationId xmlns:a16="http://schemas.microsoft.com/office/drawing/2014/main" id="{862FDDB4-39F1-4207-8AF4-E487CFF642B9}"/>
               </a:ext>
             </a:extLst>
           </p:cNvPr>
@@ -32827,7 +32827,7 @@
           <p:cNvPr id="17" name="Rectangle 16">
             <a:extLst>
               <a:ext uri="{FF2B5EF4-FFF2-40B4-BE49-F238E27FC236}">
-                <a16:creationId xmlns:a16="http://schemas.microsoft.com/office/drawing/2014/main" id="{D109F932-36C4-4BA9-B597-9B84C02069B4}"/>
+                <a16:creationId xmlns:a16="http://schemas.microsoft.com/office/drawing/2014/main" id="{745D38EA-7BEE-4438-875F-AEB1A7160E2F}"/>
               </a:ext>
             </a:extLst>
           </p:cNvPr>
@@ -32889,7 +32889,7 @@
           <p:cNvPr id="18" name="Rectangle 17">
             <a:extLst>
               <a:ext uri="{FF2B5EF4-FFF2-40B4-BE49-F238E27FC236}">
-                <a16:creationId xmlns:a16="http://schemas.microsoft.com/office/drawing/2014/main" id="{7B791543-5FB5-4906-879D-2A7C5022A094}"/>
+                <a16:creationId xmlns:a16="http://schemas.microsoft.com/office/drawing/2014/main" id="{A2A85365-992E-4841-8575-475BBD0BF15C}"/>
               </a:ext>
             </a:extLst>
           </p:cNvPr>
@@ -32949,7 +32949,7 @@
     </p:spTree>
     <p:extLst>
       <p:ext uri="{BB962C8B-B14F-4D97-AF65-F5344CB8AC3E}">
-        <p14:creationId xmlns:p14="http://schemas.microsoft.com/office/powerpoint/2010/main" val="754460357"/>
+        <p14:creationId xmlns:p14="http://schemas.microsoft.com/office/powerpoint/2010/main" val="743349870"/>
       </p:ext>
     </p:extLst>
   </p:cSld>
@@ -32990,7 +32990,7 @@
             <a:hlinkClick r:id="rId3"/>
             <a:extLst>
               <a:ext uri="{FF2B5EF4-FFF2-40B4-BE49-F238E27FC236}">
-                <a16:creationId xmlns:a16="http://schemas.microsoft.com/office/drawing/2014/main" id="{457FEE1B-668B-4358-9C43-D953BCE61A67}"/>
+                <a16:creationId xmlns:a16="http://schemas.microsoft.com/office/drawing/2014/main" id="{EF066520-D666-4455-B5AB-C54B0744BB4E}"/>
               </a:ext>
             </a:extLst>
           </p:cNvPr>
@@ -33065,7 +33065,7 @@
             <a:hlinkClick r:id="rId4"/>
             <a:extLst>
               <a:ext uri="{FF2B5EF4-FFF2-40B4-BE49-F238E27FC236}">
-                <a16:creationId xmlns:a16="http://schemas.microsoft.com/office/drawing/2014/main" id="{22CE9A34-461F-4295-BFC2-6A8E861355E2}"/>
+                <a16:creationId xmlns:a16="http://schemas.microsoft.com/office/drawing/2014/main" id="{5785AD20-147D-4AAB-A353-9805E5BEA0DC}"/>
               </a:ext>
             </a:extLst>
           </p:cNvPr>
@@ -33139,7 +33139,7 @@
           <p:cNvPr id="3" name="Rectangle 2">
             <a:extLst>
               <a:ext uri="{FF2B5EF4-FFF2-40B4-BE49-F238E27FC236}">
-                <a16:creationId xmlns:a16="http://schemas.microsoft.com/office/drawing/2014/main" id="{24DC3BFF-0911-44E7-B8DA-99ED9F2C5594}"/>
+                <a16:creationId xmlns:a16="http://schemas.microsoft.com/office/drawing/2014/main" id="{70276D0F-8CF5-4043-A3B2-EC2FDE9C63E6}"/>
               </a:ext>
             </a:extLst>
           </p:cNvPr>
@@ -33201,7 +33201,7 @@
           <p:cNvPr id="4" name="Rectangle 3">
             <a:extLst>
               <a:ext uri="{FF2B5EF4-FFF2-40B4-BE49-F238E27FC236}">
-                <a16:creationId xmlns:a16="http://schemas.microsoft.com/office/drawing/2014/main" id="{325FBCD7-1549-4BEC-A399-285B22423AE0}"/>
+                <a16:creationId xmlns:a16="http://schemas.microsoft.com/office/drawing/2014/main" id="{6F152987-F7DD-4F31-BD19-591BA07E6556}"/>
               </a:ext>
             </a:extLst>
           </p:cNvPr>
@@ -33279,7 +33279,7 @@
           <p:cNvPr id="6" name="Rectangle 5">
             <a:extLst>
               <a:ext uri="{FF2B5EF4-FFF2-40B4-BE49-F238E27FC236}">
-                <a16:creationId xmlns:a16="http://schemas.microsoft.com/office/drawing/2014/main" id="{672B1D2D-C5D6-497B-BB04-E66E5A4429F8}"/>
+                <a16:creationId xmlns:a16="http://schemas.microsoft.com/office/drawing/2014/main" id="{00C0C578-C5A5-49C3-A27C-72047428CF87}"/>
               </a:ext>
             </a:extLst>
           </p:cNvPr>
@@ -33341,7 +33341,7 @@
           <p:cNvPr id="7" name="Rectangle 6">
             <a:extLst>
               <a:ext uri="{FF2B5EF4-FFF2-40B4-BE49-F238E27FC236}">
-                <a16:creationId xmlns:a16="http://schemas.microsoft.com/office/drawing/2014/main" id="{0F6AA912-FF5D-4645-B3CE-A2FCAF4471DC}"/>
+                <a16:creationId xmlns:a16="http://schemas.microsoft.com/office/drawing/2014/main" id="{3F782792-4054-481F-9769-5B1E2CC094A5}"/>
               </a:ext>
             </a:extLst>
           </p:cNvPr>
@@ -33403,7 +33403,7 @@
           <p:cNvPr id="8" name="Rectangle 7">
             <a:extLst>
               <a:ext uri="{FF2B5EF4-FFF2-40B4-BE49-F238E27FC236}">
-                <a16:creationId xmlns:a16="http://schemas.microsoft.com/office/drawing/2014/main" id="{9335CACA-5174-49A8-98A5-7DA517A3BE36}"/>
+                <a16:creationId xmlns:a16="http://schemas.microsoft.com/office/drawing/2014/main" id="{13154E73-48AD-4045-841B-334A14523161}"/>
               </a:ext>
             </a:extLst>
           </p:cNvPr>
@@ -33465,7 +33465,7 @@
           <p:cNvPr id="9" name="Rectangle 8">
             <a:extLst>
               <a:ext uri="{FF2B5EF4-FFF2-40B4-BE49-F238E27FC236}">
-                <a16:creationId xmlns:a16="http://schemas.microsoft.com/office/drawing/2014/main" id="{94F0DC24-5FAE-4C59-8870-2BDD2A545F58}"/>
+                <a16:creationId xmlns:a16="http://schemas.microsoft.com/office/drawing/2014/main" id="{5CC0C2C1-DA15-4A6A-9D16-D268AFA586FE}"/>
               </a:ext>
             </a:extLst>
           </p:cNvPr>
@@ -33527,7 +33527,7 @@
           <p:cNvPr id="10" name="Rectangle 9">
             <a:extLst>
               <a:ext uri="{FF2B5EF4-FFF2-40B4-BE49-F238E27FC236}">
-                <a16:creationId xmlns:a16="http://schemas.microsoft.com/office/drawing/2014/main" id="{983BFF68-F6D0-44FC-B574-10913E1728BC}"/>
+                <a16:creationId xmlns:a16="http://schemas.microsoft.com/office/drawing/2014/main" id="{A1625F9B-D192-4BC7-99E7-9F0B851D49B3}"/>
               </a:ext>
             </a:extLst>
           </p:cNvPr>
@@ -33589,7 +33589,7 @@
           <p:cNvPr id="11" name="Rectangle 10">
             <a:extLst>
               <a:ext uri="{FF2B5EF4-FFF2-40B4-BE49-F238E27FC236}">
-                <a16:creationId xmlns:a16="http://schemas.microsoft.com/office/drawing/2014/main" id="{8041BA08-293D-42E3-BB42-CDFF97D7FDAB}"/>
+                <a16:creationId xmlns:a16="http://schemas.microsoft.com/office/drawing/2014/main" id="{9EA5CAE8-1814-4444-98B1-E96C34E9A715}"/>
               </a:ext>
             </a:extLst>
           </p:cNvPr>
@@ -33651,7 +33651,7 @@
           <p:cNvPr id="12" name="Rectangle 11">
             <a:extLst>
               <a:ext uri="{FF2B5EF4-FFF2-40B4-BE49-F238E27FC236}">
-                <a16:creationId xmlns:a16="http://schemas.microsoft.com/office/drawing/2014/main" id="{D968FD59-D94F-4F51-91D8-D1938F8E1E70}"/>
+                <a16:creationId xmlns:a16="http://schemas.microsoft.com/office/drawing/2014/main" id="{23F2031D-F1D6-4D16-9731-30915B882608}"/>
               </a:ext>
             </a:extLst>
           </p:cNvPr>
@@ -33713,7 +33713,7 @@
           <p:cNvPr id="13" name="Rectangle 12">
             <a:extLst>
               <a:ext uri="{FF2B5EF4-FFF2-40B4-BE49-F238E27FC236}">
-                <a16:creationId xmlns:a16="http://schemas.microsoft.com/office/drawing/2014/main" id="{A897ADF1-C822-4688-85BB-90A511B88897}"/>
+                <a16:creationId xmlns:a16="http://schemas.microsoft.com/office/drawing/2014/main" id="{B274168F-7E9C-4715-A07A-C128F43ADE63}"/>
               </a:ext>
             </a:extLst>
           </p:cNvPr>
@@ -33775,7 +33775,7 @@
           <p:cNvPr id="14" name="Rectangle 13">
             <a:extLst>
               <a:ext uri="{FF2B5EF4-FFF2-40B4-BE49-F238E27FC236}">
-                <a16:creationId xmlns:a16="http://schemas.microsoft.com/office/drawing/2014/main" id="{D7A3EEDC-94AB-4B7E-9C6F-32F5CE6211A1}"/>
+                <a16:creationId xmlns:a16="http://schemas.microsoft.com/office/drawing/2014/main" id="{1B2039F0-20F2-4170-B7C7-257CC06361B8}"/>
               </a:ext>
             </a:extLst>
           </p:cNvPr>
@@ -33837,7 +33837,7 @@
           <p:cNvPr id="15" name="Rectangle 14">
             <a:extLst>
               <a:ext uri="{FF2B5EF4-FFF2-40B4-BE49-F238E27FC236}">
-                <a16:creationId xmlns:a16="http://schemas.microsoft.com/office/drawing/2014/main" id="{077196FA-639D-4C73-82BF-D3C30662DA31}"/>
+                <a16:creationId xmlns:a16="http://schemas.microsoft.com/office/drawing/2014/main" id="{863B730A-02F3-4280-8F08-862324175332}"/>
               </a:ext>
             </a:extLst>
           </p:cNvPr>
@@ -33899,7 +33899,7 @@
           <p:cNvPr id="16" name="Rectangle 15">
             <a:extLst>
               <a:ext uri="{FF2B5EF4-FFF2-40B4-BE49-F238E27FC236}">
-                <a16:creationId xmlns:a16="http://schemas.microsoft.com/office/drawing/2014/main" id="{2F2DFE46-058A-4089-8EC8-D2ED6C726AD1}"/>
+                <a16:creationId xmlns:a16="http://schemas.microsoft.com/office/drawing/2014/main" id="{15D477EB-D72F-4AA7-9760-A73D251B631D}"/>
               </a:ext>
             </a:extLst>
           </p:cNvPr>
@@ -33961,7 +33961,7 @@
           <p:cNvPr id="17" name="Rectangle: Rounded Corners 16">
             <a:extLst>
               <a:ext uri="{FF2B5EF4-FFF2-40B4-BE49-F238E27FC236}">
-                <a16:creationId xmlns:a16="http://schemas.microsoft.com/office/drawing/2014/main" id="{4FE3CE68-5C88-45C1-8E94-1C9D837E843F}"/>
+                <a16:creationId xmlns:a16="http://schemas.microsoft.com/office/drawing/2014/main" id="{30857DB1-500B-4BC6-977F-FA09DE6B460C}"/>
               </a:ext>
             </a:extLst>
           </p:cNvPr>
@@ -33994,7 +33994,7 @@
           <p:cNvPr id="18" name="Rectangle 17">
             <a:extLst>
               <a:ext uri="{FF2B5EF4-FFF2-40B4-BE49-F238E27FC236}">
-                <a16:creationId xmlns:a16="http://schemas.microsoft.com/office/drawing/2014/main" id="{563A59C2-D9F9-4D5D-914A-FD3FD901B4A1}"/>
+                <a16:creationId xmlns:a16="http://schemas.microsoft.com/office/drawing/2014/main" id="{EFF39A01-ACF9-48E9-98AE-C36F3F803559}"/>
               </a:ext>
             </a:extLst>
           </p:cNvPr>
@@ -34056,7 +34056,7 @@
           <p:cNvPr id="19" name="Rectangle 18">
             <a:extLst>
               <a:ext uri="{FF2B5EF4-FFF2-40B4-BE49-F238E27FC236}">
-                <a16:creationId xmlns:a16="http://schemas.microsoft.com/office/drawing/2014/main" id="{29EBF307-3284-4E86-AB7E-7F24837A3E68}"/>
+                <a16:creationId xmlns:a16="http://schemas.microsoft.com/office/drawing/2014/main" id="{BED18168-5AF0-4E2F-AA00-E4B1B6F03610}"/>
               </a:ext>
             </a:extLst>
           </p:cNvPr>
@@ -34118,7 +34118,7 @@
           <p:cNvPr id="20" name="Rectangle 19">
             <a:extLst>
               <a:ext uri="{FF2B5EF4-FFF2-40B4-BE49-F238E27FC236}">
-                <a16:creationId xmlns:a16="http://schemas.microsoft.com/office/drawing/2014/main" id="{919BC052-592F-43F8-B91E-36414D9644F6}"/>
+                <a16:creationId xmlns:a16="http://schemas.microsoft.com/office/drawing/2014/main" id="{89A5EE1F-68EE-4376-B406-8BF6411F4B3E}"/>
               </a:ext>
             </a:extLst>
           </p:cNvPr>
@@ -34149,7 +34149,7 @@
           <p:cNvPr id="21" name="Rectangle 20">
             <a:extLst>
               <a:ext uri="{FF2B5EF4-FFF2-40B4-BE49-F238E27FC236}">
-                <a16:creationId xmlns:a16="http://schemas.microsoft.com/office/drawing/2014/main" id="{2878E58E-EC0B-43A0-82B3-1F7C7E376ABB}"/>
+                <a16:creationId xmlns:a16="http://schemas.microsoft.com/office/drawing/2014/main" id="{2A6B953B-0D13-45AC-A196-ACC31A0D2F03}"/>
               </a:ext>
             </a:extLst>
           </p:cNvPr>
@@ -34211,7 +34211,7 @@
           <p:cNvPr id="22" name="Rectangle 21">
             <a:extLst>
               <a:ext uri="{FF2B5EF4-FFF2-40B4-BE49-F238E27FC236}">
-                <a16:creationId xmlns:a16="http://schemas.microsoft.com/office/drawing/2014/main" id="{BB0658FA-EED2-4E3E-B16A-A86E9AD76AD5}"/>
+                <a16:creationId xmlns:a16="http://schemas.microsoft.com/office/drawing/2014/main" id="{6B39B055-FAA3-4F60-B9C9-3F349DC76C82}"/>
               </a:ext>
             </a:extLst>
           </p:cNvPr>
@@ -34271,7 +34271,7 @@
     </p:spTree>
     <p:extLst>
       <p:ext uri="{BB962C8B-B14F-4D97-AF65-F5344CB8AC3E}">
-        <p14:creationId xmlns:p14="http://schemas.microsoft.com/office/powerpoint/2010/main" val="1407576401"/>
+        <p14:creationId xmlns:p14="http://schemas.microsoft.com/office/powerpoint/2010/main" val="663961145"/>
       </p:ext>
     </p:extLst>
   </p:cSld>
